--- a/model_building_lesson_1/1-dars(Model Building).pptx
+++ b/model_building_lesson_1/1-dars(Model Building).pptx
@@ -7,18 +7,24 @@
   <p:sldIdLst>
     <p:sldId id="256" r:id="rId2"/>
     <p:sldId id="257" r:id="rId3"/>
-    <p:sldId id="258" r:id="rId4"/>
-    <p:sldId id="260" r:id="rId5"/>
-    <p:sldId id="261" r:id="rId6"/>
-    <p:sldId id="259" r:id="rId7"/>
-    <p:sldId id="263" r:id="rId8"/>
-    <p:sldId id="262" r:id="rId9"/>
-    <p:sldId id="265" r:id="rId10"/>
-    <p:sldId id="264" r:id="rId11"/>
-    <p:sldId id="266" r:id="rId12"/>
-    <p:sldId id="268" r:id="rId13"/>
-    <p:sldId id="267" r:id="rId14"/>
-    <p:sldId id="269" r:id="rId15"/>
+    <p:sldId id="259" r:id="rId4"/>
+    <p:sldId id="291" r:id="rId5"/>
+    <p:sldId id="297" r:id="rId6"/>
+    <p:sldId id="298" r:id="rId7"/>
+    <p:sldId id="304" r:id="rId8"/>
+    <p:sldId id="258" r:id="rId9"/>
+    <p:sldId id="260" r:id="rId10"/>
+    <p:sldId id="262" r:id="rId11"/>
+    <p:sldId id="265" r:id="rId12"/>
+    <p:sldId id="300" r:id="rId13"/>
+    <p:sldId id="305" r:id="rId14"/>
+    <p:sldId id="301" r:id="rId15"/>
+    <p:sldId id="302" r:id="rId16"/>
+    <p:sldId id="303" r:id="rId17"/>
+    <p:sldId id="299" r:id="rId18"/>
+    <p:sldId id="264" r:id="rId19"/>
+    <p:sldId id="266" r:id="rId20"/>
+    <p:sldId id="267" r:id="rId21"/>
   </p:sldIdLst>
   <p:sldSz cx="12192000" cy="6858000"/>
   <p:notesSz cx="6858000" cy="9144000"/>
@@ -173,7 +179,7 @@
           <inkml:channelProperty channel="T" name="resolution" value="1" units="1/dev"/>
         </inkml:channelProperties>
       </inkml:inkSource>
-      <inkml:timestamp xml:id="ts0" timeString="2025-07-17T10:05:56.720"/>
+      <inkml:timestamp xml:id="ts0" timeString="2025-11-03T10:57:18.223"/>
     </inkml:context>
     <inkml:brush xml:id="br0">
       <inkml:brushProperty name="width" value="0.05292" units="cm"/>
@@ -181,33 +187,329 @@
       <inkml:brushProperty name="color" value="#FF0000"/>
     </inkml:brush>
   </inkml:definitions>
-  <inkml:trace contextRef="#ctx0" brushRef="#br0">12518 5491 526 0,'-11'-1'69'0,"0"1"-41"0,-3 1-26 15,3 0-11-15,1 1-10 0,0 1-7 0,1-2-8 0,-1 2-2 16,0-2 2-16,1 0 5 0,1 1 10 0,-2-2 5 0,0 0 5 0,0 0 8 15,0-1 2-15,0 0 10 0,3-1 8 0,0 0 9 0,0-1 8 0,1-1 2 16,2 0 0-16,-1-1-3 0,1 0 0 0,2 1 3 0,0-1-1 16,0 1 0-16,1-1-4 0,0 0-2 0,1 0 0 0,0-1-2 0,2 1-2 15,0 0-4-15,2-1-3 0,2 0 0 0,1-1-7 0,2 1-2 0,2-1 0 16,2 0-2-16,4-1 0 0,1 0 2 0,1 1-2 0,2 0 4 16,1 0 1-16,0 1 2 0,2 1 2 0,1 1 1 0,0-1 2 0,1 1-5 15,-2 1-3-15,3 0 0 0,0 0 2 0,0 1-3 0,1 0 0 16,-2 0 0-16,0 0-4 0,-1 1 2 0,3-1-2 0,-3 1-5 0,1 1 6 15,-1 1-5-15,-4 1 0 0,1 1 1 0,-1 0-2 0,-2 2 3 0,0 1 2 16,1 0 0-16,-3 1-1 0,0 3 1 0,-2 1 0 0,-1 1 0 16,-2 1 0-16,0 0 3 0,-1 3 7 0,-2 2-5 0,-2 0 0 0,-1 2-2 15,-1 3-7-15,-4 2 3 0,0 0-4 0,-1 2-1 0,-1 0-2 0,-2 1 0 16,-1-1-6-16,-2 2 3 0,-2-3 5 0,-1 1 2 0,-1 0 5 16,-2-2-4-16,0 2-4 0,-3-3-1 0,-2-1 0 0,-1-1 3 0,-1-2 3 15,-2 0 3-15,-1-1 2 0,1-2-2 0,-3 0-2 0,1-2 5 16,-5 0-1-16,-1-3 1 0,-1-2 6 0,0-1 1 0,1-2 1 0,-2-2 4 15,1-1-6-15,0-2-1 0,1-2 2 0,0-1-5 0,2-2 5 0,0-1-1 16,3-2-1-16,0-1 1 0,1-3-5 0,2-1-2 0,0-1 0 16,2-2-4-16,2-2 0 0,-1-1-2 0,3 0-5 0,0-2 5 0,3 0-2 15,1 1-8-15,1-2 1 0,1-1-8 0,2 0-1 0,2-2-2 0,0 0-8 16,2 2-14-16,1-2-2 0,1 1-5 0,0 1-7 0,3-3-6 16,-1 3-11-16,2-4-20 0,1 1-23 0,1 0-26 0,2-1-29 0,1 0-33 15,1-2-47-15,1-1-125 0</inkml:trace>
-  <inkml:trace contextRef="#ctx0" brushRef="#br0" timeOffset="29318.49">11202 7531 473 0,'-1'0'46'0,"0"2"-23"16,1 1-15-16,2 1-4 0,1-1-3 0,2 3-2 0,2 0 0 15,1 0 3-15,1 1-1 0,1-2-4 0,0 1 0 0,2-1-1 0,2 0 0 16,1 1 3-16,1 1-1 0,0 0 0 0,1 1 1 0,1-2 1 0,0 0-1 15,2 0 2-15,0 0 0 0,0 1-1 0,1 1 0 0,0-1-2 16,0 0 1-16,2 0-1 0,3 0 0 0,-1 1 1 0,1 0-2 0,0 1 2 16,1-1 0-16,0 0-1 0,2 1 1 0,0-1-1 0,3-1-1 15,-1-1 3-15,1-1 1 0,-1 0 2 0,1-2 2 0,-1-2 4 0,1-1 4 16,0-2 10-16,1-3 8 0,-2-2 12 0,0-3 18 0,-2-1 12 0,2-2 10 16,-1-2-3-16,1-2-8 0,-1 0-13 0,-1 0-8 0,-1-2-8 15,2 0-3-15,-2 0-1 0,1-1-5 0,0 0-4 0,0 0-8 0,-2-2-9 16,-1 0-7-16,0 2-1 0,-3-1 2 0,0 0-1 0,-2 2 3 0,-3-1 5 15,0 2 1-15,-2 0 0 0,-2 0 1 0,1 0-1 0,-3-1-2 16,0 0-1-16,-2-2 2 0,0 0-4 0,-3 1-2 0,0 0-1 0,0 0-3 16,0 2-3-16,-2-1 0 0,0-1-3 0,-2 2 3 0,0-2-2 15,-2 0-1-15,-1 1 1 0,-2-1-5 0,0 1 0 0,-3-1-1 0,-1 1 8 16,-1-1 3-16,-2 0 0 0,-1 0 3 0,-2-2-6 0,-2 2 1 0,-4-1 3 16,0 1-2-16,-1 1-3 0,-3-1-2 0,0 2 1 0,-3 0-4 15,-2 2 3-15,-1 1-2 0,-4 0 0 0,-1 1 6 0,-3 3-1 0,0-1 12 16,-1 1 0-16,0 1 5 0,-1 0 5 0,0 2 0 0,-2 1 3 0,1 0 2 15,0 1-4-15,2 1-1 0,2 2-4 0,0 1-4 0,1 1-6 16,1 1-1-16,2 1-7 0,-1 2 5 0,3 1-5 0,-1 1-2 0,2 1-1 16,0 2-4-16,1 0 5 0,1 1-1 0,2 1-2 0,0-2 3 15,0 1-6-15,2 1 1 0,-2-2-1 0,1 2 0 0,2 0-1 0,-1 0 3 16,0 0 1-16,2-1-1 0,0 1 2 0,-1-2-3 0,0 2 1 0,-1 0 1 16,0 1-4-16,0 0 3 0,0 1-1 0,1-2-3 0,-2 1 6 15,2-1 6-15,1 0-2 0,0-1 4 0,1-1-5 0,2 0 0 0,1 1-2 16,2 1 0-16,1-1 2 0,1 2-4 0,2 0-1 0,0-1-3 0,1 1-8 15,1 1 3-15,1 2-2 0,1-1 1 0,2 2 8 0,1 0-5 16,1 1-4-16,1 0-5 0,2 0-12 0,0 2-9 0,2 0-16 0,2-1-27 16,2 0-26-16,2-1-21 0,2 0-11 0,2-2-14 0,1 1-21 15,4-1-245-15</inkml:trace>
-  <inkml:trace contextRef="#ctx0" brushRef="#br0" timeOffset="30034.83">13460 6824 121 0,'-11'0'74'0,"1"1"-58"0,-4 2-9 0,2 0-9 0,1 1-1 0,2 1-3 15,2 0-1-15,0 0 2 0,1-1 0 0,-1 0 5 0,2-1 6 16,0 0 1-16,0-1 9 0,2 0 6 0,0-1 18 0,1-1 15 0,0 0 12 16,2 0 8-16,0 0-11 0,1-1-5 0,0 0-6 0,0 0-6 15,0-1 2-15,2 0-2 0,-1 0 4 0,2 0 4 0,0-1 1 0,0 1 1 16,0-1-3-16,1 0-2 0,1 0-1 0,1-1-5 0,0 0-4 0,2-1-5 16,1 1-6-16,1-1-3 0,0 1-1 0,1-1-4 0,0 0 0 15,2 1-6-15,1-1 0 0,1 1 2 0,-2-1-3 0,2 1-1 0,-1-1 0 16,1 1-2-16,-1 0-1 0,1 1 0 0,-1 0-4 0,2 1 0 0,0 0-3 15,0 1 0-15,0 0-1 0,-2 1 0 0,1 0-3 0,0 0 2 16,0 1-2-16,-2 1-2 0,2-1 1 0,-1 1-4 0,-1 0 3 0,1 1-3 16,-1 1 0-16,0 0 3 0,0 1-5 0,0-1 3 0,-1 2-1 0,0 0-4 15,0 1 2-15,0-1-3 0,0 2 2 0,-1 0 4 0,0 1-3 16,-2 1 1-16,0 1-2 0,-1 0-2 0,-1 2 1 0,-1 1-1 0,0 1 2 16,-1 1-3-16,-1-1 4 0,-1 2 2 0,-1 0 6 0,-1 0 2 15,-1 1 3-15,-1 0-4 0,-2 0-1 0,0-1 0 0,-2 1 0 0,0-1 3 16,-2-2 0-16,-1 0 0 0,0-1-1 0,-1-1-2 0,-3 0 2 0,-1-2-1 15,-2-1-1-15,-1 0 7 0,-2-3 0 0,-1-1 7 0,0-2 4 16,-1-2 2-16,-1-1 5 0,-1-2-1 0,0-2 5 0,-1-1 1 0,0-1 3 16,1-2 1-16,-1 0-3 0,1-1-6 0,1-1-3 0,-2 1-8 0,2-1-10 15,0 1 0-15,1 1-4 0,-1 0-5 0,1 2 3 0,-2 0-5 16,-1 1 0-16,1-1 3 0,-2 1 0 0,1 0 4 0,0-1 0 0,1-1 0 16,2-1 3-16,0 0-1 0,0-1 0 0,1 0 1 0,1 0-3 15,0-2 4-15,2 2-3 0,0-2 2 0,3-1-4 0,0-1-2 0,1-1-9 16,1 1-9-16,2-2-9 0,1 0-26 0,3-1-42 0,1-1-67 15,3-3-88-15,3-3-115 0,2-3-286 0</inkml:trace>
-  <inkml:trace contextRef="#ctx0" brushRef="#br0" timeOffset="44951.92">7520 8474 762 0,'-12'1'26'0,"0"0"-3"0,-2 2-3 0,5 2 1 0,3-2-3 16,1 0 1-16,2 0-3 0,-1-1-5 0,1 1-7 0,1-1-4 0,0 0 0 15,1 0-1-15,-1 0 0 0,1 0 1 0,0 0 1 0,0 0 2 0,0-1 1 16,-1 1 1-16,0-1 0 0,0 0 0 0,-1 0 1 0,0-1 0 16,1-1 2-16,-1 1 0 0,0-1 5 0,0 0 9 0,1 0 5 0,0 0 9 15,0-2 2-15,1 1 0 0,0 0-5 0,1-1-6 0,0-1-6 16,2 1-3-16,0-1 0 0,2 0-1 0,1 0 4 0,1 0-1 0,1-1 0 15,2 1 3-15,0 0-6 0,2-1 3 0,1 0-3 0,2 1 4 0,2-1 1 16,0 0-4-16,1 1 0 0,2-1-6 0,2 0-3 0,1 1-3 16,2 0-1-16,0 0-3 0,0 0 1 0,1 0-1 0,1 1 1 0,1-1 0 15,-1 0-2-15,2 1 2 0,-1 0-3 0,-1 1-1 0,0-1-1 0,-1 1 0 16,1 1 1-16,-2 1 1 0,0 0 0 0,0 1 0 0,-3 1 0 16,0 0 0-16,-1 1-1 0,-3 0-1 0,1 1 0 0,-1 1-2 0,0 3 2 15,-2 0 1-15,-1 1-2 0,0 3 2 0,-2 0 0 0,-1 1-3 0,-1 3 3 16,0 2-3-16,0 1 2 0,-3 3-1 0,-1 1 0 0,-3 1 1 15,-2 1-2-15,-1 1 1 0,-3 0-3 0,-2 1 1 0,-2 0-1 0,-2 0-2 16,-2 0 1-16,0-1-5 0,-1-2-5 0,-3-1-4 0,-1-1 2 16,-3-2-2-16,-1 1 5 0,-3-2 4 0,-2-2-3 0,-2 0 6 0,-3-1 1 15,0-1 4-15,-1-1 6 0,-1-1 3 0,0-1 2 0,-1-1 2 0,1-1 0 16,-4-1 3-16,3 0 6 0,-2-1 2 0,2 0 7 0,1-2 0 16,2-1-1-16,0-2 3 0,3 0 0 0,0-2 1 0,3-1-3 0,0-1 0 15,1-1-3-15,2-3 0 0,0 0-2 0,1-2-6 0,3-1 0 0,0-1-7 16,1 0-1-16,2-2-1 0,1-1-3 0,0-1 1 0,1-1-4 15,1-1 2-15,2-2-4 0,3 0-3 0,0 0 4 0,1-1-3 0,2 1-6 16,1-2-2-16,2 3 0 0,1-2 2 0,1 1 0 0,1 0-10 16,2-2-37-16,2 0-54 0,0-1-55 0,3 0-56 0,3-1-63 0,2-1-290 15</inkml:trace>
-  <inkml:trace contextRef="#ctx0" brushRef="#br0" timeOffset="77903.8">10572 9607 608 0,'-14'-5'82'0,"0"1"-47"0,-2-1-3 0,7 3-1 0,2 0-2 16,3 1-9-16,0 0-8 0,0-1 0 0,2 1-4 0,1 1-4 0,0 0-4 15,1-1-1-15,1 1 0 0,-1 0-4 0,1-1 3 0,0 1 1 0,0 0-1 16,-1 0 2-16,1 0 3 0,-1 0 1 0,-1 0 1 0,1 1 3 15,-1-1-2-15,-1 0 0 0,2 0 4 0,-1 0 0 0,0 0 3 0,0 0 1 16,1 0 1-16,-1 1-2 0,2-1-7 0,0 0 0 0,1-1-2 0,1 0 4 16,0-1 6-16,2 1 3 0,1-2 3 0,1-1 0 0,2-1 7 15,2-1-3-15,1 1-4 0,2-3 1 0,0-1-4 0,3 1 6 0,0-1 5 16,2 0-1-16,-2 0 0 0,2 0-4 0,0 2-2 0,0-1 0 16,1 0 1-16,0 0-3 0,-1 1-2 0,-1 1 3 0,0 0-6 0,0 0-1 15,-1 2 2-15,0 0-7 0,1 1-1 0,-1-1 1 0,1 1-6 0,-1 0 0 16,-1 1-3-16,-1 1 4 0,0 0-2 0,1 1 1 0,-2 1 1 15,0 1-5-15,0 0 6 0,0 1-3 0,0 1-1 0,-1 0 0 0,1 0-1 16,-1 3 1-16,0 0 4 0,-1 3-2 0,0-1-3 0,0 2 0 0,-1 0-7 16,0 1 5-16,0 1-3 0,-2 2 2 0,-1 0 4 0,-2 0-5 15,0 3 5-15,-1 0-1 0,-1 1 1 0,-1-1 1 0,-1 2-1 0,-2 1 5 16,-1-1-1-16,-2 0 3 0,-1 0 1 0,1-2 3 0,-3 1 6 16,0 1-2-16,-2-2 1 0,-1 2-5 0,-2-1-2 0,-1-2 1 0,-1 0-4 15,-2-1 4-15,0 0-1 0,-3-2-2 0,-1 0 1 0,0-1-2 0,-2 0-1 16,-1-1-2-16,0-1 1 0,-2 1-3 0,0 0 3 0,-2-1-5 15,-1-1-1-15,-1-1 2 0,0 0-2 0,1-1 6 0,0 0 1 0,0 0 0 16,0-2 0-16,1-2 1 0,0 1 1 0,1-3 0 0,1 0 4 0,0-1 5 16,1-2-1-16,2-1 6 0,-1 0 0 0,1-2-2 0,0-1 7 15,1 0-2-15,1-2 0 0,0 0 4 0,1-1 1 0,1-2 3 0,2 0-1 16,1-2-1-16,1-1-6 0,1 0-2 0,2-1-5 0,1 1-5 0,0-1-2 16,1-2-4-16,1 0 2 0,1 0-4 0,0-2-4 0,2 1-2 15,0 1-6-15,2-3-2 0,1 2-8 0,1 0-8 0,2 1-5 0,-1 1-14 16,2 1-28-16,2-1-51 0,0 2-80 0,4-1-91 0,2-1-83 15,3 0-266-15</inkml:trace>
-  <inkml:trace contextRef="#ctx0" brushRef="#br0" timeOffset="78803.78">6994 11323 519 0,'-12'-2'55'0,"-1"-2"-57"0,-2 0 8 0,6 0 1 16,3 1-1-16,1 0-4 0,2 0 0 0,0 1-2 0,2-1-2 0,1 0-2 16,-1 0-1-16,2-1 0 0,-1 0 4 0,1 1 0 0,-1-1 1 0,0 1-1 15,0 1 2-15,0 0 3 0,-1 1 5 0,0 0 9 0,-1 1 1 16,0 0 6-16,1-1 5 0,-1 0 2 0,0 0 8 0,0 0 2 0,1 0-1 16,0 0 1-16,0 0-7 0,1 0-4 0,-1-1 0 0,2 0-6 0,0 0 2 15,2-1 4-15,0 0 0 0,0 0 4 0,1-1 3 0,2 0 0 16,1-1 3-16,1 0 0 0,0-1 0 0,1 0-1 0,0 1-5 0,1 0 0 15,-1-1-2-15,3 0-3 0,0 1-2 0,2-1-1 0,0 0 2 16,0 1-3-16,1 0 1 0,1 0-7 0,0 0-5 0,-1 0-2 0,1 1 0 16,0 2-5-16,-1-1-2 0,0 2-4 0,1 1 3 0,-1 0-5 0,-1 1 5 15,2 1 3-15,1 0-7 0,0 2 3 0,0 1-4 0,0 0-3 16,0 1 7-16,0 0-1 0,0 1-5 0,1 1 1 0,-1 1-4 0,-1 1-3 16,0-1 2-16,0 3-1 0,-1 0 3 0,0 2 7 0,0 2 3 0,-1 2-6 15,-1 2 0-15,-1 2-2 0,-2 0-5 0,0 2 6 0,-2 0-5 16,1 2 8-16,-2 1 3 0,-1 1-1 0,-2 1 5 0,-1-1-9 0,-2 0 4 15,0-2 0-15,-1 1 1 0,-1-3 4 0,-2 1-5 0,-1-1 0 16,0-3 1-16,-3 0 2 0,1-3 4 0,-2-3 7 0,0-1-1 0,0-3-1 16,0-2 3-16,-2-1-2 0,-1-2 2 0,0-2 2 0,-2-1-1 0,0 0-2 15,0-2 3-15,-2 0-2 0,0-2 5 0,-3-1 0 0,1-1-3 0,-2-1 1 16,-2-2-4-16,1-2-3 0,-2 0 5 0,-1-2-1 0,0-1-3 16,-1-2 4-16,1-1-1 0,-1-2-2 0,0-2 3 0,1 1 1 0,-2-2-5 15,0 0-2-15,-1 0-1 0,1 2-1 0,2 0 3 0,0 1-1 16,2 1-4-16,-1-1-5 0,0 2-1 0,1-1-2 0,1 1-7 0,1 2-2 15,1-1-4-15,2 1-8 0,1 0-23 0,2 1-18 0,1 2-30 0,3 0-23 16,2 3-45-16,2 0-77 0,2 1-95 0,2 0-87 0,4-1-208 16</inkml:trace>
-  <inkml:trace contextRef="#ctx0" brushRef="#br0" timeOffset="109388.9">9585 12616 1023 0,'-11'-7'132'0,"0"2"-60"0,-2-3-39 0,6 1-2 15,2 1-7-15,1 0-6 0,1 1-3 0,2 1-11 0,0 0-1 0,0-1-1 16,1 0-4-16,0 0 0 0,1 0-13 0,0 0-3 0,2-2-12 16,-1 0 2-16,2 0 11 0,0-1 3 0,-1-1 12 0,1 1 0 0,-1 0 5 15,0-1 1-15,1 0-1 0,-1 0 5 0,1 1-1 0,-1-1 10 16,1-1 6-16,0 1 6 0,1-1 3 0,0 1-1 0,0-1 0 0,1 0 1 15,0 1 0-15,1-1-1 0,1 2-5 0,0-3-3 0,1 2-2 0,0-1-5 16,0 1 3-16,0 0-4 0,-1 2-1 0,2-1-3 0,1 1-2 16,0 0-2-16,0 1-3 0,1 0-1 0,-1 0 1 0,2 1-1 0,1 0 2 15,0 2-6-15,0 0 2 0,1 1 4 0,1 1-5 0,-1 1 3 0,0 0-2 16,1 0-5-16,1 1 5 0,-1 0-1 0,-2 2 0 0,2 1-4 16,-2 0 3-16,1 2-4 0,-3 0 2 0,1 1 6 0,1 0-4 0,-2 1 5 15,1 2-2-15,-3 0 6 0,1 3 4 0,-2-1 2 0,0 2-3 0,-1 0 0 16,1-2-1-16,0 2-3 0,-2-1 5 0,0 1-7 0,0-1 0 15,-2 2-2-15,0 0-2 0,0 1 3 0,-1-1 3 0,-1 1 0 0,0 0-1 16,0 1 2-16,-1-2-2 0,-1 1 4 0,1 0-6 0,-1-2 2 16,-1-1-1-16,1 0-1 0,0-1-1 0,-1-2-3 0,1 1 2 0,-2-2 1 15,1-2 5-15,-1 2 0 0,-1-1 9 0,0-1 3 0,0-1 8 0,-1-1 8 16,0 0 0-16,-1-1 3 0,-1-1 7 0,-1 1 3 0,-3-2-4 16,0 1 2-16,0-1-6 0,-2 0-5 0,0 0-5 0,-2 0-5 0,0-1-6 15,-1 1-8-15,-2 0-1 0,-2-1-2 0,0 2 4 0,0-2 10 0,-2 0-8 16,0-1 4-16,0 0-6 0,0 1-1 0,1-2 9 0,1 1 4 15,0-2 12-15,1 1-10 0,1-2-6 0,2 0 6 0,-1 0-9 0,2-2 8 16,0 1 0-16,1-2-4 0,0 0-1 0,0-1-3 0,1-1-3 16,1 1-8-16,1-2-1 0,1 1-1 0,-1-1 5 0,1 0 9 0,0 0-7 15,0-1-2-15,2-1 0 0,-1 0-14 0,2 0 4 0,1-1 0 0,0 0-6 16,0-1 2-16,-1 0 1 0,1 1-5 0,0 0 3 0,0 1-7 16,0 0-5-16,1 0 2 0,1 1-6 0,-1 2-6 0,0-1-17 0,0 2-29 15,1 2-36-15,-1-1-64 0,2 2-71 0,0-1-98 0,1 1-129 0,0 0-412 16</inkml:trace>
-  <inkml:trace contextRef="#ctx0" brushRef="#br0" timeOffset="121007.3">4810 13725 1040 0,'-24'-2'155'0,"-1"-2"-65"0,-5-1-25 16,8 1-23-16,3 0-7 0,1-1-6 0,0-2-6 0,1 0-3 0,0 0-8 15,1 0-3-15,-1-1-4 0,-1 0-2 0,0 0 2 0,2 1-5 16,0 0-5-16,-1 0 0 0,0 2-1 0,1-1 5 0,-2 2-1 0,-2 0-2 16,0 2 0-16,-3 0-1 0,-1 1 3 0,1 1 3 0,-2 1 0 15,1 1 2-15,-3 3 2 0,-1 1 1 0,-1 1 4 0,-2 2 1 0,1-2 1 16,-1 1-1-16,0 2-1 0,-1-1-3 0,-1 3 4 0,-1-1 2 0,-2 2-3 15,0-2 5-15,-1 1 0 0,1-1 12 0,1-1 11 0,0 1 8 16,0-2 9-16,1 0 3 0,3 0-4 0,-2-1 4 0,3-1-9 0,-2 0-9 16,1 1 2-16,-1 0-4 0,2 0-2 0,0 1-1 0,1 1-7 0,0 1-7 15,1 1-1-15,-3 2 1 0,1 0-5 0,-1 2-11 0,2 1-1 16,0 0-2-16,2 3 2 0,-1 2 7 0,1-1-10 0,0 3 2 0,-1-1-1 16,3 0 1-16,0 1-2 0,1 1 4 0,-1 0-2 0,2 3-5 0,-2 1 4 15,2 1-4-15,2-1 2 0,-1 2 2 0,2-2-4 0,2 1-4 16,0-1 2-16,1 0-1 0,1 1-2 0,2 1-2 0,1-1-6 0,0 2 4 15,3-2 8-15,1 2-3 0,2 0 6 0,1 2 0 0,1-2-3 16,1 1 5-16,2-1-5 0,1 0-5 0,2-1 7 0,2 0-2 0,0-1 6 16,2 0-5-16,1-4-2 0,0 0 1 0,4-2-2 0,2 0 10 0,1 0-1 15,2-2-5-15,0 1-5 0,3-3 1 0,3 0 2 0,0 0 0 16,4-2-3-16,1-3 5 0,1 1-4 0,4 0 5 0,0-1 9 0,3 0-15 16,-1-1 2-16,4-1 1 0,3 1 4 0,0-3 5 0,3 1-3 0,3 0-1 15,-1-2-5-15,3 0-3 0,1 0 6 0,0-3-6 0,2 0 0 16,0 0 9-16,1 0-13 0,2-1 10 0,1 0 0 0,0-2-5 0,1-1 1 15,2-1-8-15,-1-2 9 0,1-1-1 0,1-2 4 0,-1 0 4 16,-1-3-7-16,1 0 6 0,0-2 3 0,0-2-5 0,-2 0 1 0,0 0 1 16,0-2-2-16,-1-1 8 0,-1-1 3 0,0 1-3 0,-1-4 7 0,-2 0 2 15,-1-2-3-15,0 0-12 0,0 1 3 0,-1-2 0 0,-1 1 2 16,-2-2 14-16,0-3-8 0,0 1 1 0,0-3 0 0,-1 1-1 0,-2-2 1 16,-2-2 4-16,0 1-4 0,-2-2-4 0,1-1 6 0,-3-3 5 0,-2 0 5 15,-1 0 14-15,-3-1-5 0,0 0 0 0,-3-1 4 0,-1-1-9 16,-3-1-5-16,-2-2 3 0,-3 0 4 0,-1 0 2 0,-1-1 2 0,-4 2-10 15,-1-1-4-15,-2 1-4 0,-2 1 0 0,-3-2-4 0,-2 1-5 16,-4 0 6-16,-3 1-4 0,-1 3-6 0,-4 1 3 0,-1 2 5 0,-3 1-4 16,-5 2-8-16,0 1 6 0,-4 3-8 0,-2 1 2 0,-3 2 10 0,-5 1-13 15,-2 3-1-15,-3 1-5 0,-5 4-5 0,-4 1 5 0,-4 3-15 16,-2 3-13-16,-5 3-4 0,-5 3-20 0,-2 5 4 0,-4 3-10 0,-3 3-3 16,0 5-7-16,-4 1-9 0,1 4-3 0,-2 3-16 0,1-1-14 0,1 3 0 15,3-1-5-15,3 2-19 0,2 0-35 0,5 0-73 0,3 1-41 16,2-2-21-16,5 0-271 0</inkml:trace>
-  <inkml:trace contextRef="#ctx0" brushRef="#br0" timeOffset="191473.95">13725 5419 2969 0,'-12'-5'75'16,"1"2"-87"-16,-1 2-32 0,3 3-19 0,3 2-10 0,2 1-8 0,0-1 0 15,1 0 3-15,-1 0 10 0,0 0 16 0,0 1 26 0,-1 0 9 0,2 0 11 16,-1 1 6-16,1-1 4 0,0 0 7 0,1 1 5 0,1 1 13 16,2 1 12-16,1 1 15 0,0 2 4 0,1 3 5 0,1 1-4 0,1 5-6 15,0 2 5-15,1 2-11 0,0 2 1 0,0-1-21 0,2 4-5 16,0-2 12-16,1 1 1 0,3-1 10 0,1-4 10 0,2-1-15 0,1-5 9 16,4-5 7-16,3-4-2 0,2-5 11 0,5-7-1 0,3-6 0 0,4-7-3 15,3-9-21-15,6-7-8 0,5-11 6 0,3-8-3 0,5-8 10 0,4-6-4 16,3-5-16-16,4-3 7 0,2-5-6 0,2-3-16 0,-1-1 8 15,2-7-8-15,-1-2-2 0,0-6 0 0,0-3-10 0,-2-2 0 16,0-3 0-16,-1 2-28 0,-1 2-22 0,0 3-43 0,-1 3-41 0,-4 4-78 16,0 3-138-16,-3 3-211 0,-2 5-296 0,-2 1-323 0</inkml:trace>
-  <inkml:trace contextRef="#ctx0" brushRef="#br0" timeOffset="192890.65">14389 6744 2659 0,'-17'5'93'0,"2"5"-42"15,-3 2-13-15,8 3-23 0,5-1-10 0,3 0-7 0,1 1-1 0,2 0 1 16,1 1 0-16,0-2 4 0,0 2 0 0,0-1 4 0,0 3 6 0,0-2 0 16,0 3 25-16,-1 1 10 0,2-2 31 0,-1 3 17 0,1 1-6 15,0-1 5-15,1 2-12 0,2 1-10 0,1 0-4 0,3 3-2 0,3-1-10 16,2 5 5-16,4 0-4 0,2 2-8 0,3-1-1 0,4-1-5 15,4-4-7-15,2-2-3 0,5-4-3 0,3-4-8 0,3-3 2 0,6-4-6 16,3-8-14-16,4-5-4 0,5-7 0 0,5-8 0 0,5-5 0 0,6-9 0 16,5-7 0-16,6-7 0 0,6-8 0 0,6-8-6 0,4-6-90 15,4-9-53-15,6-7-83 0,2-9-125 0,4-9-184 0,3-11-325 0,2-9-357 16</inkml:trace>
-  <inkml:trace contextRef="#ctx0" brushRef="#br0" timeOffset="193807.65">8497 8624 2760 0,'-23'-15'195'0,"-1"-1"-111"0,-1-3-42 0,7 4-23 15,8 4-2-15,3 3-6 0,3 3-1 0,3 2-3 0,0 3-5 16,2 1-4-16,4 3-3 0,1 3 1 0,2 3-3 0,1 3 4 0,1 3 3 15,0 4 2-15,1 3-1 0,-1 4 1 0,2 4-2 0,-2 2 0 0,0 3 11 16,-1 1-4-16,-1-1 0 0,0 2 19 0,1-2-1 0,1 1 7 16,0-3 12-16,2-2-10 0,1-3 6 0,0-3 2 0,4-5 5 0,2-3 3 15,2-5 4-15,5-4 2 0,4-4 2 0,6-5-1 0,3-5-5 16,7-5-8-16,4-6-15 0,4-3 2 0,6-4-1 0,3-8 5 0,6-6-4 16,4-6-29-16,5-6 12 0,4-4-8 0,2-5-8 0,4-2 26 0,3-3-26 15,0-2 2-15,1 0-4 0,1-2-10 0,3-2-15 0,1-2-23 16,3-5-21-16,3-3-49 0,1-5-58 0,4-9-105 0,5-7-216 0,3-8-378 15,4-11-371-15</inkml:trace>
-  <inkml:trace contextRef="#ctx0" brushRef="#br0" timeOffset="195824.64">11639 9589 2606 0,'-7'-3'157'0,"2"0"-96"0,-1-2-51 16,3 1-17-16,3 1-4 0,1-1-11 0,1 2-1 0,3 0 4 0,0-1 4 16,2 0 7-16,1 2 1 0,0-1 4 0,-1 2 1 0,0 0-1 15,1 2 0-15,-2 1 1 0,2 3 2 0,-1 2 7 0,2 3 4 0,0 2 7 16,1 3 7-16,-1 4-2 0,-1 4 1 0,2 5 1 0,-1 4 7 15,1 5 9-15,-1 5 9 0,0 3 2 0,-1 0 5 0,-1 0 11 0,1-2-2 16,1-3 9-16,0-4 5 0,0-5-17 0,1-5 2 0,2-4 0 0,-1-4-7 16,4-3 19-16,2-2 3 0,2-4-5 0,2-5-5 0,3-3-3 15,3-6-15-15,6-5-4 0,3-5-36 0,7-5-12 0,7-8 0 0,6-5 0 16,8-9 0-16,7-6 0 0,5-7 0 0,6-5 0 0,4-7 0 16,3-2 0-16,1-5 0 0,1-3 0 0,1-2-46 0,-2-7-24 0,1-1-22 15,-2-4-12-15,1-1-32 0,-2-3-20 0,0 0-36 0,-2 0-47 0,-1 1-84 16,-1 1-111-16,-1 2-175 0,0-3-7 0,2-2-183 0</inkml:trace>
-  <inkml:trace contextRef="#ctx0" brushRef="#br0" timeOffset="209958.64">8199 11156 2550 0,'-5'-14'185'15,"-1"-1"-127"-15,-2-4-48 0,3 3-14 0,2 5 3 0,1 1 1 0,2 3-9 16,0 0-4-16,1 4-16 0,0 0-11 0,0 4-3 0,2 2-7 15,0 2 5-15,1 5 14 0,2 2 10 0,0 6 12 0,-1 2 9 0,2 3 3 16,0 1 5-16,0 2 3 0,1 0 0 0,-2 2 2 0,0 0 6 0,0 2 3 16,1-2 10-16,1 0 8 0,0-2-4 0,2-2 11 0,1-3 20 15,2-2 5-15,3 0 21 0,0-4 7 0,5-3-12 0,1-2-2 0,2-6 4 16,2-1-4-16,1-2-7 0,3-3-6 0,2-3-10 0,5-3-2 0,2-5-9 16,2-3-20-16,5-3-18 0,2-3 5 0,3-4-5 0,1-1 9 15,3-4 0-15,4-2-19 0,0-3-4 0,3-1 2 0,2-2-17 0,1-3-20 16,1-2-23-16,-1-1-45 0,1-1-57 0,-3-1-86 0,-1-1-132 15,1-4-262-15,0-4-166 0,0-4-222 0</inkml:trace>
-  <inkml:trace contextRef="#ctx0" brushRef="#br0" timeOffset="210758.64">9777 11620 1 0,'1'28'400'0,"-5"-3"763"0,-4 1 740 0,-1-12-1824 0,-1-9-30 0,6-1-44 16,5-1-20-16,6 1 8 0,4 0-1 0,6 1-1 0,5-1 9 15,5-1-13-15,5-1 2 0,3-1 7 0,3-1-14 0,1-1-5 0,2-1-4 16,2 0-12-16,-1-1 10 0,2-1 2 0,-2 0 5 0,-1-1 4 15,1-1 5-15,-2-1 4 0,-1 0 2 0,-3-1 0 0,0 0 9 0,-1-2-4 16,-1 1 4-16,-1 0 0 0,1 0-20 0,-3 0 14 0,0 0-7 0,-1 1 2 16,-2-1 15-16,1-1-10 0,-3 1 2 0,1 0-6 0,-1-1-33 15,-1 0-35-15,-2 1-37 0,0-2-44 0,1-1-52 0,0 0-68 0,0 0-91 16,-2 0-106-16,1-1-34 0,-1-1-229 0</inkml:trace>
-  <inkml:trace contextRef="#ctx0" brushRef="#br0" timeOffset="211025.64">10119 11925 3718 0,'-9'0'130'0,"4"0"-52"0,-1-1-56 0,7 0-14 0,3 0-10 15,4-1-2-15,5 1 4 0,6-2-10 0,3 0-2 0,5 0 8 0,2-1-11 16,3 0 9-16,0 0 6 0,1 0-12 0,-1 0 8 0,0 1-4 0,-1-1-13 16,0 1 0-16,-1-1-16 0,0 2-7 0,-2-1-2 0,0-1-3 15,-3 1-10-15,1-1-4 0,-1 0-4 0,-3 0-2 0,1-2-8 0,-2 1-17 16,0-2-30-16,-1 0-32 0,0-2-53 0,0 0-71 0,-2-3-84 16,1-4-125-16,-1-2-37 0,2-3-125 0</inkml:trace>
-  <inkml:trace contextRef="#ctx0" brushRef="#br0" timeOffset="211291.64">11081 11159 3379 0,'-11'9'115'0,"4"-1"-14"0,-1 2-62 0,6 0-10 0,6-1-9 0,3 1-16 15,5 3-8-15,5 1 4 0,5 0-2 0,4-2 2 0,2 0 0 0,2-1-15 16,2-1 2-16,0-1 0 0,2-1-2 0,-1-1 9 0,1-1-1 15,-3 1 1-15,0-1-3 0,-3 2-6 0,-2 0 2 0,-1 0 3 0,-1-1-8 16,-2 1 3-16,-3-3-2 0,-2 2 4 0,-3 0 15 0,-2 0-2 16,-2-1 18-16,-1 0-8 0,-2 0 3 0,-2-1-2 0,-1 1-11 0,-2 0 4 15,-2-1-2-15,-2 1-1 0,-3 0-1 0,-2 1 2 0,-3 2-5 0,-1 0-5 16,-5 2-18-16,-4 0-9 0,-2 1-9 0,-5 2-13 0,0 0-4 0,-1 0-16 16,-1-3-21-16,1 1-11 0,-1-1-17 0,3-2-23 0,0-1-27 15,3-3-63-15,4-1-102 0,2-3-138 0,3-4-33 0,6-3 108 0,4-5-91 16</inkml:trace>
-  <inkml:trace contextRef="#ctx0" brushRef="#br0" timeOffset="211776">12501 10765 3041 0,'2'-2'235'0,"2"0"-129"0,3 0-43 15,3 1-17-15,1 1-13 0,2-1-1 0,1 0-12 0,-1 0-3 0,0 0 4 16,-4 1-14-16,-2-1-11 0,-2 1 1 0,-3 0-14 0,-2 0 0 15,-3 1 7-15,-2 0-18 0,-3 0 8 0,-3 0-2 0,-5 1 9 0,-5 1 11 16,-2 2 17-16,-5 3-2 0,-1 0 3 0,-3 4 7 0,0 0-12 0,-2 2 15 16,1 0-9-16,1 1 0 0,1 2 4 0,-1 1-1 0,2 2-4 15,0 0-1-15,2 2-10 0,1 0-6 0,5 3 4 0,1 2-3 0,3 2 2 16,2 1 0-16,3-2-2 0,2 1-6 0,3-3-1 0,2-1 3 0,5-3 0 16,1-2-1-16,4 0-3 0,1-4-7 0,4 0-2 0,1-2 9 15,0-1 1-15,3-3 1 0,2-2 8 0,0-1-2 0,1-1 4 0,1-3 3 16,0-2-3-16,1-1 4 0,0-2 9 0,0-1-4 0,1-1-2 15,-3-1 10-15,0 0-9 0,0-1 1 0,0 0 6 0,-2 0-19 0,1 0 13 16,0 0 1-16,0 2-18 0,-1 0 8 0,0 1-8 0,2 0 0 0,-2 2 12 16,1 0-6-16,0 3-6 0,2 0 6 0,0 2-14 0,-1 0-3 15,1 2 6-15,1 3-3 0,0 0 8 0,0 1 0 0,1 0 4 0,1 0-5 16,-2 1-1-16,2 0 0 0,0-1-11 0,0-2 8 0,1-2-1 16,0-1 6-16,-1-1 3 0,2-2 4 0,2-2-3 0,-2 0 4 0,1-4 2 15,-2-2 11-15,0 0 8 0,-1-2-1 0,-1-2 3 0,-3-3-8 0,1-1 3 16,-2-2-1-16,-1-2 2 0,0-1-7 0,-2-2-1 0,-1 1-1 15,-2-1-4-15,-3-1-3 0,-1-1-3 0,-3 0 2 0,-2-2 0 0,-2-2-4 16,-1-1 0-16,-3 0-10 0,-1 0 4 0,-1 4 2 0,-1 0-4 0,-1 5 1 16,-2 0-5-16,1 3 6 0,-1 3-6 0,-1 4 4 0,-1 1 2 15,-1 3-3-15,-2 2-5 0,-2 3-17 0,-2 4-17 0,-1 3-8 0,-4 2-9 16,2 3-10-16,-2 3-5 0,2 1-22 0,1 1-19 0,1 3-41 0,2 1-67 16,1 1-79-16,2 0-113 0,4-1-136 0,4-2-27 0,5-1 18 15,4-4 139-15</inkml:trace>
-  <inkml:trace contextRef="#ctx0" brushRef="#br0" timeOffset="212092">13327 10880 3242 0,'0'1'146'0,"3"1"-64"0,2 1-39 0,3 2-10 0,1 2-7 0,3 1-7 16,1 3-4-16,1 2-13 0,0 1-2 0,0 1-4 0,-1 1 6 15,-1 2 7-15,-1 2-3 0,1 1-6 0,0 3 0 0,-1 0-2 0,0-2 2 16,-3 0-2-16,2-2 0 0,0 0 1 0,0-2-5 0,0-1 4 15,1-3 6-15,-1 1-6 0,2-2 8 0,0-2-6 0,1-1-2 0,1-3 9 16,0-1 3-16,1-3 3 0,0-1-8 0,1-1 9 0,-1-3 1 0,0-1 0 16,0-3 17-16,0-1-7 0,-2-1 2 0,-1-3 2 0,1-4-14 15,-1-1 1-15,-1-1-10 0,0-2-3 0,-2-2 7 0,-1-1 0 0,-2-3-6 16,-2-2-4-16,-2-1 0 0,-2-2-6 0,-3-1-6 0,-3 1 8 0,-3 0-11 16,-1-1 5-16,-2 2 12 0,-1-1 6 0,-2 3 7 0,-1 1-20 15,1 4 14-15,-3 3-11 0,0 3 0 0,1 5 12 0,-2 2-18 0,0 3-1 16,-2 2-9-16,1 3 9 0,-2 3-11 0,1 3-3 0,-2 3-4 15,-1 2-24-15,1 4-10 0,-1 1 1 0,0 3-25 0,2 1-16 0,-1 3-44 16,3-1-82-16,0 2-97 0,1-2-145 0,0-1-187 0,3-2 55 0,0-3-141 16</inkml:trace>
-  <inkml:trace contextRef="#ctx0" brushRef="#br0" timeOffset="212759">13747 9932 3533 0,'-2'-1'109'16,"2"0"-35"-16,0 1-49 0,4 3-12 0,1 3-2 0,3 4-7 0,2 5-2 16,1 4 0-16,0 6 0 0,0 3-4 0,-2 2-8 0,1 5-3 15,-2 3 19-15,-2 2-4 0,0 5 11 0,-2 2 3 0,-2 1-20 0,-1 3 0 16,-1 1-6-16,-2 0-1 0,0 0 7 0,-1-1 4 0,0-1-8 0,1-1-5 16,0-2 3-16,1-1-3 0,0-3 7 0,2-2 6 0,2-1-9 15,1-4 1-15,2-2 6 0,1 0-2 0,2-1-1 0,0-2 5 0,1-4 0 16,3-2-2-16,0-6 4 0,2-5 2 0,-2-2-6 0,3-3 9 0,0-3 1 15,2-2-1-15,0-2 9 0,4-3-9 0,1-3-5 0,2-2 2 16,2-4 2-16,1-4 1 0,1-2 7 0,0-5-8 0,1-2-6 0,-1-2 3 16,1-2 3-16,-1-1-4 0,0-1 2 0,-2 1-6 0,0-3 4 15,-2 2 6-15,-4-2-5 0,1 1 9 0,-3-1-18 0,-3 1 14 0,-1-1-4 16,-2 0-2-16,-2-2 17 0,-2 0-15 0,-4-1-4 0,1 3-2 0,-4-1-14 16,-1 3 1-16,-2 0-4 0,-3 1-2 0,0 1 13 0,-1 3 6 15,-2 2 4-15,-2 4 6 0,-1 4-4 0,-1 2-4 0,0 2 5 0,0 3 1 16,-1 2-6-16,-1 3 8 0,1 2-2 0,0 3-8 0,1 3 4 15,0 2-10-15,-1 4 6 0,1 3 0 0,1 6-4 0,0 4-1 0,2 2 3 16,-1 3-4-16,2 0-1 0,1 3 3 0,0 0-2 0,3 3 6 0,1 1-3 16,1 1 1-16,3 0-15 0,1-1 7 0,2-1 7 0,2-3-7 0,0-2 8 15,2-2-5-15,1-2 1 0,3-3 5 0,1-1 1 0,1-3-2 16,0-1 0-16,2-3-1 0,1-1 6 0,0-4-2 0,0-1 2 16,1-2-1-16,1-2 2 0,-1-2 4 0,1-4-4 0,0-3 2 0,-2-3-4 15,2-4 2-15,1-2 3 0,-1-1 5 0,2-4-5 0,0-2 1 0,-1-1 3 16,0-3-3-16,-1-2 11 0,-1 0-3 0,-1-2-5 0,-2 1 3 0,0 0-12 15,-2 1 17-15,1 3-10 0,1 2-1 0,0 4 2 0,-2 5-16 16,1 2 1-16,0 3 5 0,-1 4-2 0,-1 3 6 0,0 2 3 0,0 5 1 16,-1 2 8-16,0 4-20 0,-3 3 2 0,2 4 8 0,-1 3-6 15,1 4 19-15,-2 2 1 0,1 2-13 0,-2-1 1 0,1 2-2 0,-1-2 2 16,1 2 0-16,-1-2 1 0,0 0-3 0,0-3-2 0,0-2 2 0,2-6 6 16,0-3-6-16,1-3 11 0,-1-4-5 0,1-2-2 0,-1-2 15 15,1-3-13-15,1-2 18 0,0-3-1 0,2-1-11 16,0-3 14-16,2-2-14 0,2-4 4 0,1-2 0 0,1-2-16 0,2-3-4 0,0-3 0 0,1-2 0 15,0-2 0-15,-2-3 0 0,2 0 0 0,0 0 0 0,0-2 0 16,1-2 0-16,0-1 0 0,1-2 0 0,1 1 0 0,0 2 0 0,1 0-42 16,-3 5-16-16,1 1-9 0,-1 4 1 0,-3 1-17 0,0 2-7 0,-1 2-19 15,-4 2-28-15,-2 2-23 0,-2 3-62 0,-2 0-71 0,-2 1-109 16,-3 0-156-16,0 0-56 0,-2 0 149 0,-2 1-116 0</inkml:trace>
-  <inkml:trace contextRef="#ctx0" brushRef="#br0" timeOffset="213192">15616 10403 2550 0,'-6'1'174'0,"1"1"-85"16,-1 2-46-16,1 0-13 0,1 4-10 0,-1 3-11 0,1 4-1 0,-1 3-6 15,-1 1 10-15,0 3 25 0,-2 1 16 0,0 1 27 0,0 4 7 16,0 0-14-16,0 4-8 0,1 2-18 0,0 2-23 0,0 1 8 0,1 2-11 16,2 2-7-16,1 0 10 0,1-1-24 0,1 2 8 0,2-2-5 15,1-1-3-15,1 0 4 0,2-4-2 0,1-2-6 0,3-4 4 0,0-1-7 16,4-3 1-16,0-1 3 0,2-2-3 0,1-2 4 0,0-2-1 15,2-2 4-15,2-5 5 0,-3-1 3 0,3-2 8 0,-1-4 3 0,-2-2 8 16,3-3 2-16,-2-3 4 0,2-2-4 0,-2-3 0 0,1-1 6 0,2-4-5 16,-3-2-4-16,3-2 0 0,-1 0-16 15,0 0-1-15,1-2-6 0,1 2-6 0,1-3 6 0,0 2 0 0,0 0-4 0,-1 4-4 0,-2 1 2 16,-2 3-14-16,0 2 16 0,-2 2-2 0,-1 2-3 0,-2 3 9 0,1 0-16 16,-1 2 6-16,-1 1-1 0,-1 1-1 0,-1 0 2 0,0 1-4 15,1 1 10-15,0 1-1 0,1-1 1 0,1 0 3 0,-1-1-10 0,2-1 12 16,0-1-1-16,2-2-6 0,0-1 12 0,1-3-14 0,0-1 12 0,-1-2 1 15,1 0 1-15,-1-5 2 0,0 0-3 0,-2-2-1 0,1-1 0 16,-2 1 7-16,-1-3-5 0,-2 0 0 0,-1 0-3 0,-3-2 1 0,-1-1-2 16,-1 1 2-16,-3-3-2 0,-2-1-6 0,-2 1-4 0,-4-3-6 0,0 1 8 15,-3-2-11-15,-1 1-3 0,-1 4 8 0,0 0-9 0,-1 5 9 16,1 3-4-16,0 4-3 0,-1 2-4 0,0 2 5 0,1 3-1 0,-2 2-8 16,0 3-6-16,-1 1-10 0,1 3-8 0,1 1-10 0,-2 2-13 0,0 1-7 15,-1 0-16-15,1 3-12 0,0-1-18 0,1 1-35 0,0-1-57 16,3-1-81-16,0 0-105 0,2-2-103 0,1 0-22 0,3-1 130 0,1-1-86 15</inkml:trace>
-  <inkml:trace contextRef="#ctx0" brushRef="#br0" timeOffset="213642">16542 10790 2461 0,'2'6'240'0,"2"2"-166"0,1 3-43 16,2 2-11-16,2-1 0 0,0 2-9 0,2 2-9 0,2 2 0 0,0 1-4 15,-1 1 2-15,2 0 3 0,-2 0-6 0,-1 0 3 0,1 2 2 0,0 0 1 16,0 0-1-16,2 0-7 0,-1-2-2 0,1-1 0 0,1-1 4 16,1-3 0-16,1-1 3 0,-1-1 1 0,1-3 1 0,0 0 5 0,-2-2-2 15,0-2 0-15,0 0 3 0,0-3-3 0,-2 0-22 0,-2-3-1 0,1 0-8 16,-2-2-4-16,-1-2 2 0,2-2-5 0,-1-1-3 0,0-3 1 16,1-1 4-16,-1-2 1 0,1-1-6 0,1-1-2 0,0-3-1 0,-2 0 8 15,2-1 14-15,0 0 15 0,1 0 8 0,-2-1 4 0,0 2 4 16,-1 1 0-16,0 0 4 0,0 3 6 0,-1 0-6 0,1 3-5 0,-2 0 3 15,-1 3-2-15,1 3-6 0,-1 1-6 0,-1 3-2 0,0 2-8 0,0 2 3 16,-1 2 2-16,1 2 3 0,1 1 1 0,-1 3 1 0,2 2-2 16,0 1 2-16,0 2 2 0,1 0-1 0,-1 2 2 0,-1-1 3 0,-1 1 3 15,-1 0 9-15,0-3 5 0,-2-1-1 0,-1 0 6 0,-2-3 2 0,-1-1 3 16,-1-2-2-16,0-2-7 0,-2-2 4 0,1 0-8 0,-2-3 3 16,0-2-3-16,-1-1-5 0,-1-2 5 0,1-2 0 0,-1 0 6 0,0-1-1 15,2-3 1-15,0 0-2 0,2-2 2 0,1-2-2 0,0-1-1 16,2-2-2-16,1-2-7 0,0 1 7 0,2-1-2 0,1-1 2 0,1 1 2 15,2-1-10-15,0-2-4 0,1 2-10 0,1-1-6 0,1 1-4 0,-1 3-7 16,2 2-2-16,0 1 2 0,0 0 7 0,1 3 2 0,-1 1-8 16,-2 0-2-16,2 2-6 0,-1 1 1 0,1 1-6 0,1 0-7 0,-1 2-22 15,1-1-27-15,-1 2-31 0,0-1-27 0,-1 0-48 0,0 1-73 0,0-2-87 16,1 0-113-16,2-1-36 0,-1-1 79 0,2-3-25 0</inkml:trace>
-  <inkml:trace contextRef="#ctx0" brushRef="#br0" timeOffset="214009">18377 10368 2724 0,'1'-1'626'0,"1"0"-531"16,0 1-77-16,0-1-33 0,-1 0-23 0,-1 0-33 0,-1-1-19 16,-2 0-2-16,-3 1 22 0,-1-1 43 0,-3-1 28 0,-4 0 20 0,-3 1-2 15,-2-1 1-15,-6 1-8 0,-2 1-5 0,-4-1-2 0,-2 1-12 0,-3 1 2 16,0 0-4-16,0 1 2 0,2 1 5 0,5 1 2 0,2 0 4 16,4 1-1-16,6 1 1 0,2 2-1 0,3-1-3 0,3 1-14 0,2 1-17 15,2 0-11-15,2 0-11 0,2 1 1 0,3 2 9 0,1 1 11 16,2 1 19-16,2 1 16 0,3 0 11 0,1 2 6 0,3 1 2 0,1 2-4 15,2 0 4-15,3 1-1 0,0 3-2 0,1-2 1 0,1 3 2 0,-2-1 3 16,1 1-3-16,-1 1 6 0,-2-2-5 0,-2 1 3 0,-2-1 5 16,-3-1-4-16,-2 1 5 0,-3-2-11 0,-4 2-5 0,-2 0-8 0,-2-1-3 15,-3 1-10-15,-3 0-15 0,-3-3-9 0,-3 2-33 0,-4 0-34 0,-3-2-48 16,-4 0-67-16,-3-3-92 0,-3-3-138 0,-2-2-152 0,-5-3 58 16,-1-3-132-16</inkml:trace>
-  <inkml:trace contextRef="#ctx0" brushRef="#br0" timeOffset="-205820.33">9434 12987 810 0,'-4'0'154'0,"0"0"-76"0,0 0-42 0,1 1-9 0,0-2-7 16,2 2-8-16,0 0-11 0,0-1-1 0,1 1-2 0,0-1 1 15,0 0 0-15,1 1-5 0,0-1 3 0,1 0-6 0,0 1-4 0,1 0 0 16,-1-1-2-16,1 1 6 0,0-1 6 0,0-1 0 0,0 0 2 0,0 1 2 15,0-1 4-15,0 0 1 0,0-1 3 0,0 0 4 0,0 0 5 16,1 0 10-16,1-1 11 0,0 0 9 0,0 1 5 0,1-1 4 16,0 0 0-16,2-2 5 0,1 0 3 0,1 0-3 0,-1-1 0 0,1 1-6 0,0 0-10 15,-2 0-3-15,3 0-7 0,0 0-5 0,0 0-4 0,2 1-8 16,-1-1 1-16,1-1 4 0,1 1-1 0,0 0 2 0,0-1 0 0,0 0-1 16,-1 0 8-16,0 1 0 0,-1-1 3 0,0 2 0 0,-1-1 0 15,2 1 2-15,-1 0-3 0,-1 0 2 0,1 0-4 0,0 1-5 0,1-2 2 16,1 1-6-16,-1 0 2 0,0-1-5 0,1 0-3 0,1-1-1 0,0 0-4 15,0 0 1-15,-1 2 0 0,2-1-1 0,0 1-5 0,-1-1 2 16,1 0-6-16,0-1-1 0,1 1 1 0,-1-1-3 0,1 1 3 0,-1 1-1 16,-1-1 4-16,0 1-3 0,1 0 1 0,-1 1-4 0,-1-1 1 0,-1 1-1 15,0 0-3-15,-1 1 3 0,0 0-3 0,-2 0 0 0,1 0 3 16,-2 1-2-16,0-1 0 0,-1 1 4 0,-1 0-5 0,-1 1-4 0,0-1-2 16,-2 0-2-16,-1 1-11 0,-1-2-7 0,1 1-13 0,-2 0-16 0,-1-1-14 15,0 0-25-15,-1-1-27 0,0-1-35 0,-1-2-48 0,0 0-51 16,-1-1-30-16,-1-1-12 0,1-1 44 0,0-2 77 0,0-3-183 0</inkml:trace>
-  <inkml:trace contextRef="#ctx0" brushRef="#br0" timeOffset="-205437.33">10265 12432 2107 0,'-3'-1'663'0,"-1"0"-496"15,0-1-91-15,3 0-33 0,0 0-15 0,2 0-9 0,0 0-10 16,2 1-16-16,2 0 0 0,3 0 0 0,2 0-2 0,5 0 6 0,1 0-1 16,3-1-3-16,1 1 4 0,2 0-1 0,1 0 1 0,0 1 1 0,2 0-6 15,-1 0 8-15,2 1-4 0,0 0 4 0,-1 0 5 0,0 1-18 16,-1 1 2-16,-1 0-1 0,1 0 2 0,-3 0 12 15,1 1-2-15,-2 0 1 0,1 0-2 0,-1 1-1 0,-1-1 2 0,-3 1 3 0,-1-1-4 16,-2 1-1-16,-1 1 4 0,-3-1-6 0,-1 1 1 0,-1 0 3 0,-2 0-5 16,-1 1 0-16,-2 0 10 0,-2 2-5 0,0-1 7 0,-3 2-2 0,-2 1 0 15,-2 0 2-15,-2 4-7 0,-2 1 7 0,-5 2 3 0,-1-1-12 16,-5 3 2-16,-2 2 2 0,-3-1-4 0,-1 3 18 0,-2 0-4 0,1-1 7 16,-2 1-7-16,2-4-2 0,-1 0 4 0,2-2-15 0,0-2-6 0,3-4-19 15,0 1-30-15,2-3-29 0,2-1-33 0,0-2-34 0,1-1-46 16,3-3-65-16,-2-1-117 0,1-2-108 0,1-2 28 0,-2-3-201 0</inkml:trace>
-  <inkml:trace contextRef="#ctx0" brushRef="#br0" timeOffset="-194553.06">5903 14588 258 0,'-1'-6'211'16,"-1"0"-121"-16,0 0-5 0,1 0-12 0,-1 2-4 0,0-2 8 0,1-1 0 16,0 0 7-16,-1 0-2 0,1-1-10 0,0 1-10 0,-1-1-10 15,2 0-12-15,-1 2-7 0,0-1-7 0,0 0-7 0,-1 0 1 0,1 1 0 16,0 0 5-16,0 0-3 0,-1 0 3 0,1 0 3 0,-2 1 7 0,2 0 9 16,-1-1 2-16,0 1 5 0,0-1 4 0,-2 2 8 0,2-1 8 15,-1 1 10-15,1 1 2 0,0 0-3 0,-1 1 7 0,1 0-8 0,0 1-9 16,2 1-4-16,0 0-14 0,0 1-10 0,1 0-5 0,0 2-1 15,3 1 8-15,1 2 19 0,1 2 13 0,2 0 11 0,2 1 6 0,2 0-7 16,5 2-9-16,1-1-12 0,2 0-19 0,3 0-4 0,1-1-10 0,3-1-3 16,2-1-4-16,2-2-1 0,4 0 4 0,0-3-1 0,3-2 1 15,1-2 1-15,0-2 5 0,2-3 0 0,0 0 1 0,1-3-6 0,2-2 1 16,3-2 0-16,0-1-1 0,0-2-4 0,-1-2-12 0,3-2 5 0,0 0-5 16,1-3 1-16,0-1-3 0,-1 1-3 0,1-2 0 0,-3 1-10 15,-1 0 0-15,1 1-10 0,-1 2-3 0,-1 1-4 0,0 0-18 0,1-2-9 16,2-1-22-16,3-1-26 0,-2-2-47 0,2 0-69 0,1-2-67 15,3-1-97-15,4-4-196 0,5-3-106 0,5-8-249 0</inkml:trace>
-  <inkml:trace contextRef="#ctx0" brushRef="#br0" timeOffset="-175068.67">3152 7888 1987 0,'-18'1'296'0,"1"1"-218"0,0 1-6 0,9 2-27 0,6 1-7 16,3 1 3-16,2 2 8 0,2 4 2 0,2 4-12 0,1 1-10 0,2 5-12 15,-1 2-11-15,1 1-1 0,1 4-5 0,1 2 0 0,0 2 0 16,-1 3 0-16,-1 0-6 0,-2 3 2 0,0 0-2 0,0 1 1 0,-1 0 10 15,-1-1-5-15,-2 1 0 0,0-1 5 0,-3-2-2 0,0 1 7 0,0-4 13 16,-2-3 12-16,-1-1 18 0,-1-1 11 0,0-2 2 0,0 0-9 16,1-2-2-16,-1-1-11 0,1-3-9 0,-2 1-5 0,0-2-14 0,-1-2-3 15,2 1 5-15,0-2-2 0,0 1 5 0,1-1 3 0,1-1-19 0,0-1 0 16,1-2-1-16,1 0-2 0,2-2 1 0,1 0 3 0,0-1-6 16,1-2 0-16,1 0 2 0,1 0-2 0,2-1 0 0,0 0 1 0,2 0 3 15,-2-1 0-15,4-1-2 0,1 0-2 0,2-1 0 0,1-1 1 16,2-1 3-16,2-1-2 0,0-2 9 0,2-1-2 0,2 0 2 0,1-2-2 15,4 0-7-15,2-1 1 0,4-1 1 0,0 1 0 0,3-1 1 0,2-1 1 16,2 1-3-16,2 0-1 0,2 1-2 0,3 0 4 0,1 1-4 16,3 0 3-16,2 0-3 0,1 1-3 0,2 0 5 0,1 0-4 0,2 1-2 15,2 0 6-15,0 1 7 0,2-2 4 0,0 0 7 0,2 0-1 0,1 0-1 16,0-1 12-16,2 1-4 0,0-1 0 0,2 0 1 0,-1-1-5 16,1-1 7-16,2 0-3 0,-1 0-3 0,1-2-2 0,1 1-4 0,-2-1-7 15,2 0 0-15,-2-1-7 0,-1 1 9 0,1-1 3 0,-2 0 1 16,0-1 9-16,0 0-7 0,0 1 3 0,-1-1-3 0,0 0-7 0,-2 0-9 15,-1-1-6-15,1 1 0 0,-1-1 12 0,0 0 18 0,-2 1-5 0,-3-1 3 16,-1-1-20-16,-2 0-4 0,0 1 0 0,-3 0 0 0,-3 1 2 16,-1 1 4-16,-2 0 0 0,-1 1-4 0,-1 0 6 0,-4 1-8 0,-2 1 2 15,-2 1 2-15,-3 0-6 0,-1 1 4 0,-2 0-10 0,-4 0-4 0,-1 0 6 16,-4 3-2-16,0-1 8 0,-3 1 0 0,-3 0-4 0,-2 1-6 16,-2-1-4-16,-5 1-7 0,-1 0-13 0,-4 0-20 0,-2 0-31 0,-2 0-16 15,-2-1-36-15,-1-1-36 0,-3-1-60 0,-4 0-104 0,-4-3-156 16,-2-1-124-16,-6-4 12 0,-3-4-189 0</inkml:trace>
-  <inkml:trace contextRef="#ctx0" brushRef="#br0" timeOffset="-174551.64">3582 7748 2279 0,'-43'-7'878'0,"6"0"-828"16,-7-2-4-16,18 2-25 0,10-1-15 0,3-2-1 0,5 0-3 0,3 0-20 15,3 0-7-15,5 0-5 0,3 1 12 0,5-1 16 0,2 0 2 0,4 0 6 16,3 0-15-16,4 0 3 0,2 0 3 0,5 0-4 0,1 1 2 15,3 0 3-15,1 1 2 0,4 1 2 0,2 0-2 0,2 1-2 0,2 0-2 16,3 1 8-16,3 0 1 0,2 1 2 0,3 0 4 0,4-1-2 16,1 1 5-16,4 0-5 0,2-1 0 0,2 1-6 0,-2-1-3 0,4 0 4 15,2 0-6-15,1 0 9 0,2 0-2 0,-2 1 4 0,2-1 7 0,2 0 8 16,-1 0 3-16,0 0 12 0,0 0 3 0,0 0 2 0,-1-1-2 16,2 1-8-16,-2 1-12 0,1-1-7 0,-4 0 0 0,1 0 4 0,1 0 1 15,-3 1 5-15,1 0-3 0,-2 2 1 0,1 0-10 0,-2 0-3 0,-1 0 1 16,-3 1-5-16,-3-1 6 0,1 2 3 0,-3 0-6 0,-1 1 1 15,-3 1 4-15,-2-1-7 0,-2 1-5 0,-1 1 4 0,-3 1 0 0,-2 0-1 16,-1 2 13-16,-4 1-10 0,-2 1-1 0,-1 0 1 0,-1 3 0 0,-3 1 4 16,-2 3 5-16,-4 1-3 0,-3 2-1 0,-3 3-1 0,-2 1 2 15,-1 2 4-15,-4 3 1 0,-1 0-13 0,-3 3 18 0,-2 2 0 0,-1 3-6 16,-1 2 18-16,-1 1-30 0,0 2-6 0,-1 3 0 0,-1 2 0 16,-1 4 0-16,-2 0 0 0,-1 0 0 0,0 1 0 0,-1 1 0 0,-2 0 0 15,0 2 0-15,-1-2 0 0,-2-1-28 0,1-2-56 0,0-1-31 16,-1 0-33-16,1-1-50 0,-1-2-76 0,0-1-143 0,0-1-307 0,1-1-61 15,-1 4-178-15</inkml:trace>
+  <inkml:trace contextRef="#ctx0" brushRef="#br0">3000 5424 1258 0,'2'11'378'0,"1"2"-186"0,0 3 29 0,1-2-11 0,1 1-20 0,0 0-31 16,3 0-40-16,-1 0-22 0,0 1-8 0,1 3-6 0,-2-2-4 15,1 2-9-15,0 1-5 0,-1-1-6 0,0 0 0 0,2 1-14 0,0-1-3 16,-1-1-1-16,0 0-6 0,-1 0 15 0,-1 0-9 0,1-1 0 15,-1-1 0-15,0 1-20 0,-1-2-2 0,-1 0-2 0,1-1-9 0,-1-1 2 16,0-2 3-16,-1 0-5 0,-1 0-3 0,0-1-3 0,0-1-2 0,-1 0 2 16,0-2-13-16,-1 1-16 0,1-2-32 0,-1 0-41 0,0-1-35 15,-1-1-37-15,0 0-52 0,-1-2-69 0,0-1-55 0,-1-1-137 0,2-2-358 16,-1-2 66-16</inkml:trace>
+  <inkml:trace contextRef="#ctx0" brushRef="#br0" timeOffset="500.84">2790 5524 1721 0,'-6'-3'468'0,"1"0"-199"0,-1-2-15 0,0 0-19 0,2 1-19 15,1-1-36-15,1 0-43 0,1 0-30 0,0-2-11 0,0 0-12 0,1-1-3 16,1 1-14-16,0-2-13 0,1 0 0 0,1 0-14 0,1 0-8 15,1-1-32-15,0 0 0 0,2 2 0 0,1-2 0 0,1 0 0 0,1 1 0 16,2-1 0-16,-1 1 0 0,0 1 0 0,3-1 0 0,0 1 0 0,2 0 0 16,1 1 0-16,0 0 0 0,2 1 0 0,-1 0 0 0,4-1 0 15,1 2 0-15,-1 0 0 0,2 0 0 0,0 1 0 0,0 1 0 0,2 0 0 16,0 1 0-16,2 2 0 0,-1 0 0 0,1 1 0 0,0 1 0 0,0 1 0 16,2 1 0-16,1 1 0 0,-1 3 0 0,0-2 0 0,-1 3 0 15,-1 1 0-15,1 1 0 0,-1 3 0 0,-1 1 0 0,0 3 0 0,-1 2 0 16,-1 2 0-16,-3 1 0 0,-1 4 0 0,-3-1 0 0,-1 0 0 15,-1 0 0-15,-1 1 0 0,-2 1 0 0,-2 0 0 0,-1 2 0 0,-3 0 0 16,-1 0 0-16,-3-1 0 0,-1 0 0 0,-2-2 0 0,-3 1 0 0,-1-3 0 16,-1 2 0-16,-4-3 0 0,-1 0 0 0,-2 0 0 0,-4-3 0 15,-2 0 0-15,-2-1 0 0,-3-1 0 0,-4-1 0 0,-2-2 0 0,-3-3 0 16,-1-3 0-16,-1-2 0 0,-1-3 0 0,0-2 0 0,-2-4 0 0,0-2 0 16,0-3 0-16,1-2 0 0,1-2 0 0,3-4 0 0,-1-3 0 15,-1-2 0-15,2-2 0 0,-3-4 0 0,3 1 0 0,0-4 0 0,1 1 0 16,2-1 0-16,3 0 0 0,2 4 0 0,3 1 0 0,3 2 0 15,1 1 0-15,2 2 0 0,0 1 0 0,3 1 0 0,0 0 0 0,1 1 0 16,2 1 0-16,1 2 0 0,2 0 0 0,2 0 0 0,0 0 0 0,1 2 0 16,2 0 0-16,1-1 0 0,1 1 0 0,0 0 0 0,1 0 0 15,2 0 0-15,0 0 0 0,3 0-173 0,1-1-180 0,3 0-167 0,2 1-399 16,0-1-440-16</inkml:trace>
+  <inkml:trace contextRef="#ctx0" brushRef="#br0" timeOffset="1951.44">4342 5452 2243 0,'-4'6'249'0,"0"1"-58"0,0 5 2 0,1 0-4 0,4-2-8 0,1 1-43 15,0 1-28-15,2 1-28 0,-1 3-12 0,1 2 0 0,1 0-19 16,0 2-3-16,0 2-11 0,0 0-8 0,1 3-11 0,0-1-8 0,1 2-6 16,1 1 9-16,1 2 13 0,-1 1-1 0,2 1-7 0,0 1-8 0,-1-1-2 15,2 2 6-15,0-2 4 0,-1 4-4 0,1-3 4 0,-3 0-6 16,1-2-8-16,0-1-2 0,1-1-2 0,-1 0 0 0,-1-1 0 0,1 0 0 16,-3-1 0-16,2 0 0 0,-1-1 0 0,-1-2-4 0,1 1-10 0,-2-3 14 15,0 1 10-15,0-3-2 0,-2-1-12 0,0-3-44 0,-1-1-14 16,-1-2-20-16,1-2-19 0,-2-2-12 0,2-4-24 0,-3-1-23 0,0-2-21 15,0-3-23-15,-1-2-23 0,-1-3-19 0,-1-4-28 0,0-3-42 16,-1-4-79-16,0-1-88 0,-1-3-253 0</inkml:trace>
+  <inkml:trace contextRef="#ctx0" brushRef="#br0" timeOffset="2250.41">4328 5682 997 0,'-10'-22'382'15,"0"-1"-136"-15,-1-7-39 0,1 5-20 0,3 0-19 0,1 2-13 16,2 1-22-16,2 0-12 0,2 0-5 0,1 1-11 0,1 0 1 0,2-1-7 15,1 3-4-15,2-1-4 0,3 1-5 0,-1 4-8 0,2-1-7 0,2 3-5 16,0 1-5-16,1 3 1 0,1 2-5 0,1 2-5 0,1 1-3 16,0 3-6-16,2 1-8 0,1 2-2 0,0 3-6 0,-1 1-1 0,1 1-3 15,0 3-1-15,0 1-6 0,3 2-6 0,-1-1 4 0,1 1-8 16,0 1 2-16,-3 1-2 0,1 1-4 0,-1 0 0 0,-1-1 4 0,-2 0-6 16,0 1 4-16,-1-1 6 0,-3 1-10 0,1 1 6 0,-2 0-6 0,-1 1-2 15,-2 0 8-15,-2 2-6 0,-2-2 2 0,-1 2-4 0,-2 0-2 16,-2-1 8-16,-1 0-22 0,-2 0 2 0,-2-1 0 0,0-1 2 0,-4 1 22 15,0-1-2-15,-3 0-4 0,-1-2-10 0,-1 1-18 0,-2-2-2 0,0-1 3 16,-1-2-7-16,3-2 1 0,0-2 0 16,1-2-6-16,3-3-7 0,1-1-21 0,3-2-21 0,1-1-30 0,2-2-28 0,2-1-30 0,1-1-19 15,2-2-19-15,0-1-21 0,4-1-35 0,1-3-45 0,4-1-119 16,1-1-542-16</inkml:trace>
+  <inkml:trace contextRef="#ctx0" brushRef="#br0" timeOffset="2550.61">5235 5378 1531 0,'5'16'433'0,"1"1"-227"0,2 7-18 0,-1-2-19 0,0-2-27 0,-2 0-28 15,0 2-26-15,0-1-16 0,0 1-5 0,0 0-3 0,-2-1-12 16,0 0-8-16,0 0-7 0,0-1-11 0,-2-1 6 0,1-1 2 0,-1-2 4 16,-1-1 18-16,0-1-4 0,-1-1 3 0,0-4-3 0,0 0-11 0,-1-2-2 15,0-2-7-15,-2-2-1 0,1-2-5 0,-2-2-5 0,1-2 4 16,-2-3-13-16,0-3-3 0,-2-2-10 0,-1-3-11 0,1-4 2 0,0-1 14 15,1-3 8-15,1-3-1 0,1-2 7 0,0-4-20 0,1 0 0 0,1-3 4 16,0 1-6-16,1-1 8 0,1 1 0 0,3-1-3 0,1 2-1 16,1 3 0-16,0 2 8 0,1 3-8 0,1 3 4 0,0 1 0 0,1 3-4 15,-1 0 4-15,2 3 0 0,-1 2-4 0,0 1 4 0,-1 2-1 16,0 0-4-16,0 2 1 0,-1 1 0 0,2 1-4 0,-1 0 4 0,1 1-2 16,-1 1-4-16,2 1-2 0,0 1-7 0,-1 0-24 0,3 1-37 0,0 1-47 15,0 0-52-15,1 1-56 0,0 0-44 0,0 1-51 0,1 1-76 16,1 0-138-16,0 0-500 0</inkml:trace>
+  <inkml:trace contextRef="#ctx0" brushRef="#br0" timeOffset="2917.72">5612 5463 1881 0,'-4'1'381'0,"0"0"-186"0,-1 0 0 0,3-1-3 16,1 0-33-16,2-1-33 0,0 0-43 0,0-2-14 0,2 0-4 15,0-1-7-15,0-1 8 0,1 0-12 0,1-1-8 0,-1-1-10 0,2 1-4 16,0-2-4-16,0 0-7 0,1-1 2 0,1-2-10 0,-1-1 3 16,0-1-3-16,0 0 0 0,1 1-1 0,-1-1 1 0,-1-1-1 0,0 1-1 15,1-1-1-15,0 2-2 0,-2-1 0 0,0 0 1 0,-1 1-5 0,-2 0 0 16,0 3 0-16,-2-1-2 0,-2 1 0 0,0 0 2 0,-2 2-4 16,-1 2 0-16,-1 1 2 0,-3 2-2 0,-1 2-2 0,-1 1 0 0,-1 2 2 15,-1 3-2-15,-1 1 6 0,1 3-4 0,-2 1 4 0,0 1 3 0,1 1 5 16,1 3 8-16,1 0-1 0,0 2 7 0,1 0-7 0,2 2-5 15,2 2 4-15,1 1-8 0,2 1 2 0,1-2 4 0,2 1-4 0,3-2 0 16,1 0-2-16,1-1-6 0,3 0 4 0,2-2-4 0,1 0-4 16,1-2 0-16,1-1 0 0,2-3 0 0,2 0 0 0,0-3 0 0,2 1 0 15,-2-2 0-15,2-2 0 0,0-1 0 0,-1-1 0 0,1-3 0 0,0-1-4 16,-2-1-10-16,0-1-12 0,0-2-16 0,-1-2-23 0,1-1-23 16,-3-1-37-16,4-2-34 0,-1 0-25 0,0-2-31 0,-2 1-23 0,1-2-32 15,-2-2-43-15,0-1-59 0,-1 1-128 0,0-1-460 0</inkml:trace>
+  <inkml:trace contextRef="#ctx0" brushRef="#br0" timeOffset="3334.56">6202 5393 1433 0,'0'3'496'0,"0"-1"-229"16,1 1-45-16,2-2-15 0,-1-1-21 0,2-2-37 0,-1 1-28 16,1-2-9-16,-1-1-4 0,-1 0-6 0,1-3-13 0,1 0-18 0,-1 0-13 15,0-1-15-15,-3 1-10 0,0-1-5 0,-1 2-7 0,-1-1-7 16,0 1-3-16,-1-1 1 0,-2 2-7 0,1-1 3 0,-2 1 2 0,1 2-3 15,-1 0 5-15,-1 1-2 0,0 1-6 0,-1 2-4 0,0 2 4 0,0 0-1 16,0 1 1-16,1 1 8 0,-1 1-6 0,2 2-2 0,-1 1 0 0,0 1-3 16,0 2-1-16,1 2 4 0,2 2 2 0,0 0 2 0,1-1-2 15,1 1 0-15,3 0 0 0,1 0-8 0,1-1 9 0,3 0-1 0,1-1-4 16,2-1 6-16,1-1-10 0,2 0 0 0,2-1 10 0,0 0-10 16,0-2 0-16,1-2-2 0,2-2-8 0,1 1 1 0,-2 0 7 0,1-1 2 15,0-1-4-15,-1-1 4 0,0-3 0 0,0-1-2 0,0-2 2 0,-1-2 2 16,-2 1-4-16,0-3 4 0,-1 1 4 0,-1-2 0 0,-1-1 4 15,-2 0-6-15,1-1-2 0,0-1 2 0,-2 2 0 0,-2 0 0 0,1-1 13 16,-2 1-7-16,1 0 6 0,-1 1 0 0,-1 1-2 0,0 0 9 16,-1 2-3-16,0 1 10 0,0 1-4 0,-2 1 8 0,1 1-28 0,0 0-4 15,0 3 0-15,0 0 0 0,0 1 0 0,1 0 0 0,-1 0 0 0,2 2 0 16,0 1 0-16,1 0 0 0,0 0 0 0,0 1 0 0,0 1 0 16,1-1 0-16,0 2 0 0,0-2 0 0,2 2 0 0,-2 1 0 0,0-2 0 15,2 1 0-15,0 0 0 0,1-1 0 0,0-1 0 0,-1 0 0 0,1 0 0 16,-2-1 0-16,0-1 0 0,-1 0 0 0,0-2 0 0,0 1 0 15,-1-1-78-15,-1-1-40 0,2 1-52 0,-2-1-41 0,0-2-42 0,-1 0-57 16,-1-1-76-16,2-3-148 0,0-1-301 0,-1-1-35 0</inkml:trace>
+  <inkml:trace contextRef="#ctx0" brushRef="#br0" timeOffset="3484.56">6536 5204 2458 0,'-6'-3'253'16,"-1"1"-44"-16,0-1-10 0,1 2-31 0,0 0-36 0,2 1-44 15,-1 1-30-15,2 0-13 0,-1 1-4 0,-1 0-9 0,2-1-13 0,0 0-7 16,0 0-12-16,2 0-6 0,-1-1-2 0,1 0-26 0,1 0-33 0,-1-1-41 16,1 1-67-16,0 0-55 0,1-1-60 0,2 0-82 0,0 0-102 15,1 0-372-15,3-1 36 0</inkml:trace>
+  <inkml:trace contextRef="#ctx0" brushRef="#br0" timeOffset="3934.4">6813 5210 2325 0,'-2'4'305'0,"-1"0"-122"15,1 1-8-15,-1 1-13 0,1 0-29 0,1 1-41 0,-1-1-24 0,0 2-15 16,1-1 1-16,0 0-5 0,1 1-8 0,-1-2-5 0,2 1-12 16,-1 1-4-16,1 0-1 0,0 1-8 0,1 0 2 0,0-1-1 0,0 1-8 15,1-2 5-15,1 1-5 0,1 0 0 0,1 0-2 0,0 1-2 0,2 0 8 16,0 1-6-16,1-1 0 0,-1 1 1 0,0 0-6 0,2-1 3 15,0 0 2-15,0-1-6 0,0 1 6 0,-2-1-2 0,-1 1-2 0,-1 1 2 16,1-1 0-16,-1 0-2 0,-1 1 2 0,-1 0-4 0,-2 1-8 0,-1 1 3 16,-1 1-9-16,-2-2-3 0,-1-1-3 0,0-1-9 0,0 0-8 15,-1-1-1-15,-1-2-4 0,0 1-6 0,-1-2 9 0,1-1-1 0,0 0 6 16,-2-2 11-16,0 0-4 0,1-1 11 0,-1-2 11 0,1-1-2 16,0-1 10-16,0-1 1 0,2-2-4 0,0-1 6 0,0-2 1 0,1 0 3 15,-2-2-3-15,2 0 8 0,1-2 0 0,0 0-4 0,3 0 6 0,0 0 1 16,2 2-3-16,0-2 7 0,3 0-3 0,0 1-4 0,0 1 3 15,3 1-1-15,0-1 2 0,2 2 3 0,-1 0-5 0,2 1 0 0,-2 1 2 16,2-1-1-16,1 4 1 0,0-1 4 0,1 2 3 0,-3 2-7 0,1 1 6 16,1 1 0-16,-1 1-8 0,1 1 8 0,-1 1-8 0,0 1 6 15,-1 1-4-15,0 1-4 0,0 0 1 0,0 0-6 0,1 1 1 0,-1 0-3 16,-1 0 2-16,0 0-2 0,-1 0 1 0,-2 2-1 0,1-1-4 16,0 0 4-16,0 1-8 0,-1-1 0 0,-1-2 1 0,0 1-3 0,0 0-4 15,-1-2-5-15,0 1-10 0,-2-1-20 0,2 0-31 0,-1-1-31 0,0-1-39 16,-1 0-55-16,0-2-37 0,0-1-52 0,-1 0-79 0,1-2-143 15,-1 0-566-15</inkml:trace>
+  <inkml:trace contextRef="#ctx0" brushRef="#br0" timeOffset="4101.39">7205 5207 1781 0,'-7'0'514'0,"2"-1"-357"0,-3 1-14 0,1 0 2 0,2 0-14 16,-1 1-33-16,2-1-37 0,0 2-30 0,1-2-10 0,-1 1-7 15,1-1-9-15,0 0 1 0,2 1-6 0,0-1-11 0,1 0-8 0,1 1-14 16,1 0-15-16,1 0-27 0,1 1-25 0,0 0-33 0,0 0-36 0,1-1-32 16,1 2-54-16,2 0-55 0,1 0-89 0,0 0-139 0,2 1-72 15</inkml:trace>
+  <inkml:trace contextRef="#ctx0" brushRef="#br0" timeOffset="4434.59">7453 5446 1638 0,'3'8'358'0,"2"2"-154"0,0 1-4 0,1 0 0 0,1-2-19 0,-1 0-27 16,2-2-31-16,-2 1-24 0,1-1-16 0,0-2-6 0,0 0-6 0,1 0-13 16,-2 0-4-16,2-2-8 0,1 1-8 0,-1-2 1 0,1 0-9 0,1-1 0 15,-1-1-5-15,0 0 0 0,1-1-6 0,0-1 0 0,-1 0 2 16,0-2-1-16,-1 0-5 0,1-1-3 0,-2 0 1 0,2-2 5 0,0 0-3 16,-1-1 3-16,-1-1-3 0,1-1-5 0,-1-1 6 0,-1-1 0 15,0 0-1-15,0-1 3 0,-1 0-4 0,0-1 0 0,-1-1 0 0,-1 0 0 16,-1 0 0-16,-1 1-4 0,-1 1 0 0,-2 3-4 0,-1-3 0 0,-1 1-6 15,-2 1 0-15,-1 1 0 0,-1 1 0 0,-1 2 0 0,-1 0 0 16,-1 1 0-16,-2 1 0 0,1 0 0 0,0 2 0 0,0 2 0 0,0-1 0 16,-1 3 0-16,1 0 0 0,0 0 0 0,-1 1 0 0,2 1 0 15,0 1 0-15,2 0 0 0,-1 0 0 0,3 1 0 0,-1 1 0 0,2 0 0 16,1 1 0-16,0 2-2 0,1 0-6 0,2 1-2 0,1 1 0 0,1-1 0 16,1 1-8-16,1 2-2 0,0 1-12 0,2 1-3 0,0-2-16 15,2 1-11-15,1-2-13 0,1-1-19 0,0 0-28 0,2-2-27 0,0-1-32 16,1 0-39-16,1-2-21 0,2 0-28 0,0-2-53 0,0 0-81 0,1-3-154 15,-1 0-279-15</inkml:trace>
+  <inkml:trace contextRef="#ctx0" brushRef="#br0" timeOffset="4883.99">7915 5278 1241 0,'-1'-4'442'0,"1"0"-189"0,-1-1-48 0,1 1-15 0,1 0-18 16,-1 1-24-16,1 0-15 0,1 2-13 0,-2-1-7 0,1 1-8 0,1 0-11 15,-2 0-16-15,1 0-9 0,0 2-11 0,1 0-14 0,0 1-5 16,0 1-8-16,1 0 1 0,-1 2 1 0,0 1-1 0,1 1-5 0,0 1-3 16,0 0-8-16,-1 1 5 0,0 1 0 0,0 1-4 0,0-1-2 15,0 1-3-15,0-1-9 0,0 3 7 0,0-1-4 0,0 0 0 0,1 0 3 16,-1-3-7-16,1 1 0 0,0-2 4 0,0 1-10 0,1-2 8 0,-2 1 2 16,1-2 0-16,0 0-3 0,0-2 3 0,1 0 2 0,-1 0-2 15,1-1 4-15,0-2 3 0,0 0-3 0,0 0 8 0,1-2-1 0,-2 0-7 16,1-2 4-16,1-1-4 0,0 1-3 0,0-2 5 0,1-1-2 0,-1 0 0 15,1-2 0-15,0 0 4 0,0-1-6 0,0 0-2 0,-1 1 4 16,1 1-6-16,0-1 2 0,0 1 8 0,-1 0-4 0,0 1-2 0,0 1-8 16,-1 1 0-16,1 2 0 0,-1-1 0 0,0 2 0 0,0 0 0 15,-1 2 0-15,0 1 0 0,0 0 0 0,1 1 0 0,-1 1 0 0,1 2 0 16,-1 0 0-16,0 0 0 0,0 1 0 0,-1 0 0 16,1-1 0-16,0 1 0 0,0 1 0 0,0 1 0 0,0 0 0 0,0 0 0 0,0 0 0 15,0-1 0-15,0 2 0 0,0-1 0 0,0 1 0 0,-1-1 0 0,0 0 0 16,0 1 0-16,1-2 0 0,0 0 0 0,0 1 0 0,0-1 0 15,-1-2 0-15,1 1 0 0,0-1 0 0,-1-1 0 0,1 0 0 0,0-2 0 16,-1 0 0-16,0 1 0 0,0-2 0 0,0 0 0 0,1 0 0 0,-1 0 0 16,1-1 0-16,0 0 0 0,0 0-58 0,0-1-23 15,1 1-17-15,-1-1-23 0,1-1-40 0,0 0-36 0,1 0-39 0,1-2-50 0,-1 1-62 16,2-1-108-16,-1-1-212 0,1 0-286 0</inkml:trace>
+  <inkml:trace contextRef="#ctx0" brushRef="#br0" timeOffset="5267">8649 5497 1621 0,'-1'-1'414'0,"0"0"-173"16,0 0-23-16,2 0-6 0,-1-1-7 0,2 1-22 0,0 0-28 0,0 0-16 15,1 0-16-15,0 1-17 0,0 0-5 0,2 0-15 0,0 1-9 16,1-1-6-16,0 1-6 0,0 0-3 0,2 0-46 0,0 1-16 0,0 0 0 16,0 0 0-16,0 0 0 0,0 1 0 0,-1 0 0 0,0 0 0 15,2 1 0-15,0-1 0 0,0 0 0 0,-1 1 0 0,2-1 0 0,-1 0 0 16,-1 1 0-16,1-1 0 0,0 0 0 0,-1 0 0 0,0 0 0 0,2 0 0 15,-1-1 0-15,0 0 0 0,0 1 0 0,1-1 0 0,0 0 0 16,0 0 0-16,-1 0 0 0,1 0 0 0,-2 0 0 0,0-1 0 0,1-1 0 16,-1 0 0-16,0 1 0 0,1-1 0 0,-1 0 0 0,-2 0 0 0,2 0-44 15,-1-1-55-15,0 1-18 0,-2-1-25 0,1 0-31 0,-1 0-28 16,0-1-32-16,1 1-24 0,-2 0-28 0,1 0-65 0,-3 1-124 0,1-1-248 16,-2 2-23-16</inkml:trace>
+  <inkml:trace contextRef="#ctx0" brushRef="#br0" timeOffset="5567.03">8870 5738 1971 0,'-1'2'368'0,"1"0"-142"0,1 2-21 0,1-1-1 0,-1-1-10 16,2 0-36-16,0 0-23 0,1 0-20 0,0 0-15 0,0-1-7 0,1 1-4 15,0-1-15-15,1-1-13 0,0 0-9 0,1 0-14 0,1 0-26 16,-1 0-12-16,1 0 0 0,-1 0 0 0,-2 0 0 0,2 0 0 0,-2 1 0 15,3-1 0-15,-1 1 0 0,1 0 0 0,0-1 0 0,-1 1 0 16,0 0 0-16,-1-1 0 0,0 1 0 0,0-1 0 0,1 1 0 0,0 0 0 16,0-1 0-16,-1 1 0 0,1-1 0 0,0 1 0 0,-1 0 0 0,1 0 0 15,-1-1 0-15,1 1 0 0,0 0 0 0,-1 0 0 0,1 0 0 16,-2-1 0-16,3 1 0 0,-1 0 0 0,-1 0 0 0,0 0 0 0,-1-1 0 16,1 1 0-16,-2 0 0 0,1 0 0 0,0 0 0 0,-1 0 0 0,2 1 0 15,-2-2 0-15,0 1 0 0,0 1 0 0,0-2 0 0,-1 1 0 16,0-1 0-16,0 1 0 0,-1-1-151 0,0 0-94 0,0-1-108 0,0 1-139 15,0-1-333-15,0-2-499 0</inkml:trace>
+  <inkml:trace contextRef="#ctx0" brushRef="#br0" timeOffset="10151.56">10563 4528 2060 0,'0'-1'273'15,"2"1"-93"-15,0-1-13 0,-1 2-8 0,2 0-5 0,-1 0-9 0,0 1-9 16,2 1-13-16,-2 0-13 0,1 1-11 0,0 1-8 0,0 0-17 16,1 1-6-16,-1 1-6 0,1 2-11 0,-1 0-14 0,1 2-7 0,-1 0-6 15,1-1-2-15,0 2 4 0,0 0-22 0,2 1-4 0,-1 1 0 0,0 0 0 16,0 1 0-16,0 1 0 0,1 0 0 0,-2 0 0 0,1 1 0 15,0 0 0-15,-1 0 0 0,0-2 0 0,0 2 0 0,0-1 0 0,0 0 0 16,-1 0 0-16,-1-1 0 0,0 0 0 0,-1-1 0 0,0-1 0 0,0 0 0 16,-1-2 0-16,1-1 0 0,-1-1 0 0,0-2 0 0,0-1 0 15,0-1 0-15,0 0 0 0,0-3 0 0,0 1 0 0,-1-2-40 0,1-1-65 16,0 0-32-16,-1-2-38 0,1-2-46 0,-2 0-70 0,1-2-59 0,-1-2-68 16,0 1-154-16,0-2-580 0</inkml:trace>
+  <inkml:trace contextRef="#ctx0" brushRef="#br0" timeOffset="10401.56">10141 4482 1735 0,'-11'-3'398'0,"0"0"-157"0,-3-2-11 0,3 2-15 0,4 1-12 0,1 1-24 16,2 0-21-16,1 0-12 0,2 1-13 0,1-1-19 0,0 1-8 15,1-1-16-15,1 0-17 0,2 0-9 0,1-1-54 0,2 0-10 0,1 0 0 16,4 0 0-16,1 0 0 0,2 0 0 0,-1 0 0 0,2 0 0 15,1-1 0-15,0 0 0 0,0 0 0 0,3 0 0 0,0 0 0 0,-1 1 0 16,3-1 0-16,-1 0 0 0,-1-1 0 0,0 1 0 0,1-1 0 0,-2 0 0 16,1 0 0-16,1 0 0 0,-1-1 0 0,1 1 0 0,1 0 0 15,-3 0 0-15,2 1 0 0,-1-1 0 0,-2 0 0 0,0 1 0 0,0 0 0 16,-2-1 0-16,-2 2 0 0,1 0 0 0,-2 0 0 0,0 0-112 16,-2 1-77-16,-2 0-64 0,0 0-95 0,-1 2-113 0,1-1-132 0,1 1-700 15</inkml:trace>
+  <inkml:trace contextRef="#ctx0" brushRef="#br0" timeOffset="10667.56">11218 4442 1467 0,'0'7'1016'0,"-1"1"-754"0,0 3-47 0,1-1-16 0,1-1-23 16,2 0-22-16,0 2-33 0,2 0-23 0,-1 0-12 0,2 1-10 0,-1 0-14 15,1 2-9-15,-1 2-3 0,3 1-18 0,0 0-4 0,2 2-28 16,0 1 0-16,1 0 0 0,1 2 0 0,-2 3 0 0,2-2 0 0,0 3 0 16,1 0 0-16,1-1 0 0,1-1 0 0,1 0 0 0,0 0 0 15,-2-1 0-15,1 0 0 0,-1 0 0 0,0-4 0 0,0 0 0 0,-2-1 0 16,0-1 0-16,1-1 0 0,-2-2 0 0,-1-1 0 0,-3-3 0 0,-1-2-38 16,-2 0-30-16,-1-2-18 0,-1-2-11 0,-1-2-45 0,-2-1-35 15,0-3-62-15,-1-2-57 0,-1-2-31 0,-1-3-58 0,0-1-133 0,0-3-91 16,-3-2-198-16</inkml:trace>
+  <inkml:trace contextRef="#ctx0" brushRef="#br0" timeOffset="10967.56">11191 4530 1650 0,'-5'-8'330'0,"-2"0"-76"16,-1-2-30-16,3 2-15 0,0 2-19 0,4 1-23 0,0-2-16 0,2 1-16 15,2 0-8-15,1 0-10 0,2 0-14 0,0 0-8 0,3 0-3 0,1 1-16 16,3 0-5-16,1 0-5 0,2 0-28 0,1 0-38 0,3-1 0 0,0 2 0 15,1 0 0-15,1 0 0 0,1 2 0 0,-1 1 0 0,1 2 0 16,1 1 0-16,-3 2 0 0,2 1 0 0,-1 0 0 0,1 1 0 0,2 1 0 16,-2 0 0-16,1 2 0 0,-1 1 0 0,-2 2 0 0,-1-1 0 0,-1 0 0 15,-2-1 0-15,0 1 0 0,-2 0 0 0,-1 0 0 0,-2 0 0 16,-2-1 0-16,-2 2 0 0,-4-1 0 0,0 0 0 0,-4 1 0 0,-1-1 0 16,-4-1 0-16,-1 0 0 0,-3 1 0 0,-4-1 0 0,0 1 0 15,-4-1 0-15,-2-1 0 0,0 1 0 0,-3-2 0 0,0 1 0 0,-1-2-16 16,-2-1-16-16,-2-1-10 0,1-3-3 0,0-1-2 0,2 0-8 0,0-2-7 15,3-1-3-15,1-2-22 0,0 0-15 0,2-2-14 0,4 0-36 16,0 1-29-16,2-1-36 0,2 1-34 0,0 0-32 0,3 0-102 0,1 1-231 16,1 1-302-16</inkml:trace>
+  <inkml:trace contextRef="#ctx0" brushRef="#br0" timeOffset="11384.72">10221 5339 1862 0,'0'1'283'0,"2"2"-91"0,0-2-23 0,2 2-3 16,2 0-4-16,2-1-14 0,4 0-18 0,2-1-7 0,2 0-6 0,4-1-13 16,1-1-3-16,1-1-16 0,4-1-13 0,1 0-5 0,5-1-11 0,2-1-10 15,4-1 3-15,2 1-6 0,2-1-13 0,3 0 6 0,1 0-10 16,2 0 0-16,2-1-24 0,1 1-2 0,5 0 0 0,0 0 0 0,1-1 0 16,3 1 0-16,0 0 0 0,0 1 0 0,2-1 0 0,1 0 0 0,-2 0 0 15,0 0 0-15,1 0 0 0,-1 2 0 0,0-3 0 0,-1 2 0 16,1-1 0-16,0 1 0 0,0 1 0 0,0-2 0 0,-1 2 0 0,0-1 0 15,-2 0 0-15,-2 1 0 0,-1 1 0 0,-3 0 0 0,-2 1 0 16,-3 0 0-16,-1 1 0 0,-3 1 0 0,-4 1 0 0,-3-1 0 0,-3 1 0 16,-4 1 0-16,-4 1 0 0,-4 0 0 0,-3 1 0 0,-5 1 0 0,-5 0-40 15,-2 1-89-15,-4 0-20 0,-3 0-41 0,-3 2-53 0,-2 1-69 16,-3-1-82-16,-4 1-134 0,-3 0-228 0,-4 1-199 0</inkml:trace>
+  <inkml:trace contextRef="#ctx0" brushRef="#br0" timeOffset="11701.71">10809 6039 2129 0,'-3'8'426'0,"-1"0"-213"0,1 3-38 0,-1-2-11 16,2 1-6-16,1 0-26 0,0 0-27 0,1 0-20 0,1 1-8 15,0-1-10-15,-1-1-8 0,1 1-14 0,-1 1-12 0,1 0-10 0,0 1-3 16,0-1-5-16,1 2-3 0,0 0-2 0,0 0 2 0,1 0-3 0,1-1 1 16,-1 2-8-16,2 1-4 0,-1-1-11 0,0-1 3 0,2 1 0 15,-1-1 0-15,1-1 12 0,-1-1 12 0,0-1-2 0,0-3-8 0,-1 0-10 16,0-2-26-16,0 0-13 0,0-1-15 0,0-1-13 0,0-2-16 0,-2 0-28 15,0-2-21-15,-1-1-31 0,-1 0-48 0,0-2-40 0,0-2-41 16,-1-1-69-16,0-1-131 0,-2-1-259 0,1-3 93 0</inkml:trace>
+  <inkml:trace contextRef="#ctx0" brushRef="#br0" timeOffset="11967.71">10548 6040 1261 0,'-11'1'679'0,"0"1"-426"0,-2 0-22 0,2 2-11 0,2-1-23 0,2 0-33 15,1 1-22-15,1-1-15 0,1 1-4 0,0 0 0 0,1-1-11 16,1-1-11-16,0 1-17 0,1 0-8 0,2 0-9 0,0-1 0 0,2 0 1 16,1-1-68-16,0 1 0 0,1-2 0 0,1 1 0 0,1-1 0 15,1 0 0-15,2-1 0 0,1-2 0 0,-1 1 0 0,3-1 0 0,-1-1 0 16,0 0 0-16,1 0 0 0,-1-1 0 0,0-1 0 0,1 0 0 0,-1 0 0 16,1 0 0-16,-1 0 0 0,0 0 0 0,1 0 0 0,-1 1 0 15,0 0 0-15,0 2 0 0,0-2 0 0,0 2 0 0,0 0 0 0,-1 0 0 16,-1 1 0-16,0 0 0 0,0 0 0 0,-1 0 0 0,1 0 0 0,0 1 0 15,0-1 0-15,0 1 0 0,0 0-52 0,0 0-78 0,0 0-39 16,1 0-46-16,-2-1-77 0,2 2-93 0,-1-1-104 0,-1 1-259 0,-1 1-348 16</inkml:trace>
+  <inkml:trace contextRef="#ctx0" brushRef="#br0" timeOffset="12217.71">11024 6134 2202 0,'0'8'546'0,"1"3"-310"0,0 3-43 0,0 0-26 0,1-1-15 0,3 0-33 16,-1 2-30-16,2 0-16 0,0 1-11 0,-1 0-4 0,1 0-13 0,0 2-8 16,-2-2-23-16,2 1-10 0,1 1-4 0,-1 1 14 0,1-1 12 15,0 1-2-15,1-1 0 0,-1-1-26 0,1 0-4 0,-1 0 6 0,1-1 2 16,1-2-2-16,1-1 0 0,0-1-4 0,0-2-2 0,0 0-12 0,-1-2-24 15,0-1-9-15,0-1-12 0,-2-1-11 0,-2-2-20 0,1-1-34 16,-2-1-48-16,-1-2-53 0,0-1-66 0,-2-2-79 0,-2-2-168 0,0-1-324 16,-2-2 26-16</inkml:trace>
+  <inkml:trace contextRef="#ctx0" brushRef="#br0" timeOffset="12485.71">10948 6147 1620 0,'-6'-4'515'0,"-1"0"-269"15,-1-1-35-15,3 1-5 0,1-1-18 0,1 1-31 0,2-1-17 16,1 0-19-16,3 1-3 0,1-1-6 0,2 0-7 0,1-1-9 0,1 1-13 16,2-1-14-16,2 1-9 0,1 1-12 0,1 0-48 0,2 0 0 0,-2 0 0 15,2 2 0-15,1 0 0 0,-2 2 0 0,2 1 0 0,-1 0 0 16,-1 1 0-16,0 1 0 0,0 1 0 0,2 0 0 0,-2 1 0 0,0 1 0 16,-1 0 0-16,0 1 0 0,0 0 0 0,-1 1 0 0,-2 0 0 0,0-1 0 15,-2 1 0-15,0-1 0 0,-1 1 0 0,-1 1 0 0,-2 0 0 16,-1 0 0-16,-3 0 0 0,-1 0 0 0,-1-1 0 0,-1 1 0 0,-3 1-10 15,-1-1-34-15,-2-1 2 0,0-1-1 0,0 1-2 0,-2-2 0 16,0-1-6-16,0 0 5 0,-1-2-3 0,-1 0-16 0,0 0-12 0,0-1-16 16,1-1-10-16,-1 0 1 0,2 0-7 0,1-1-9 0,3-1-19 0,1 0-39 15,3-2-37-15,2 0-49 0,2-1-77 0,1-1-134 0,2-1-490 16</inkml:trace>
+  <inkml:trace contextRef="#ctx0" brushRef="#br0" timeOffset="12717.71">11460 6222 2093 0,'-1'4'340'0,"1"0"-121"0,-1 2-22 0,1-2-12 0,2 0-16 15,0-1-28-15,2 0-20 0,0 0-17 0,0-1-7 0,1 0-3 16,0-1-15-16,1-1-15 0,0-1-11 0,2 0-10 0,2-1-5 0,0 0-6 16,0 0-8-16,2-2-22 0,-2 1-2 0,1-1 0 0,0 0 0 0,-1 1 0 15,1-1 0-15,-1 0 0 0,-1 1 0 0,2 0 0 0,-1-1 0 16,-1 1 0-16,1-1 0 0,-1 1 0 0,0 1 0 0,-1 0 0 0,0 0 0 15,0 1 0-15,1-1 0 0,-1 0-24 0,0 1-16 0,1-1-12 16,-3 1-20-16,2-1-22 0,0 1-22 0,0 0-40 0,0-1-57 0,-1 1-81 16,-1-2-99-16,0 1-133 0,-1-1-272 0,-1 0-149 0</inkml:trace>
+  <inkml:trace contextRef="#ctx0" brushRef="#br0" timeOffset="12952.71">11682 5928 1903 0,'-3'0'518'0,"1"0"-269"0,-2 1-31 0,1 0-20 16,1 1-19-16,0 1-29 0,1 1-23 0,-1 1-14 0,1 2-12 0,0-1-7 15,1 1-8-15,1 2-23 0,0 2-7 0,0 1-16 0,1 2-40 16,1-1 0-16,0 3 0 0,1-1 0 0,-1 2 0 0,2-1 0 0,0 2 0 16,0 1 0-16,1 0 0 0,0 1 0 0,1 1 0 0,1-1 0 0,0 1 0 15,0 1 0-15,-1-3 0 0,1 1 0 0,1-1 0 0,0-2 0 16,0-1 0-16,0-1 0 0,0-2 0 0,-2 0-28 0,1-4-56 0,1 0-47 15,-1-1-43-15,-1-1-78 0,0-2-74 0,0 0-114 0,-1-3-158 0,0-1-345 16,0-1 90-16</inkml:trace>
+  <inkml:trace contextRef="#ctx0" brushRef="#br0" timeOffset="13251.71">12173 5978 2450 0,'-2'9'292'15,"0"2"-74"-15,1 2-24 0,1-1-5 0,0 0-28 0,2 0-31 16,0 1-23-16,0 0-17 0,1 0-10 0,-1 1-8 0,2 0-10 0,0 0-16 16,0 0-42-16,1 2-4 0,0 0 0 0,0 2 0 0,0 0 0 0,1 1 0 15,-1 2 0-15,1-1 0 0,1 3 0 0,0 0 0 0,1-2 0 0,0 2 0 16,1-1 0-16,0 0 0 0,1-1 0 0,-2-1 0 0,2-1 0 15,-2-1 0-15,-1-1 0 0,1-3 0 0,-1-1 0 0,1-1 0 0,-1-1 0 16,-1-2 0-16,0-2 0 0,0 0 0 0,-1-2 0 0,-2-1 0 16,1-2 0-16,-2-2-38 0,0-1-61 0,0-1-22 0,0-3-35 0,0-2-34 15,-1-2-30-15,-1-4-39 0,0-1-44 0,-1-2-52 0,1-3-78 0,-1-2-92 16,0-2-425-16</inkml:trace>
+  <inkml:trace contextRef="#ctx0" brushRef="#br0" timeOffset="13468.71">12153 5981 1294 0,'-7'-3'546'0,"0"-2"-279"0,-2 0-2 16,3 1-7-16,2 0-24 0,1 1-33 0,1 1-33 0,2 0-22 0,0 2-10 15,2-1-9-15,0-1-11 0,2 0-16 0,1 0-18 0,1 0-19 0,2-1-7 16,1 1-20-16,2 0-36 0,0 0 0 0,2 1 0 0,0 0 0 16,0 0 0-16,0 0 0 0,-2 0 0 0,1 0 0 0,1 1 0 0,-1-1 0 15,1 1 0-15,-3 0 0 0,1 1 0 0,0-1 0 0,-1 1 0 16,1-1 0-16,-1 1 0 0,-1 0 0 0,1 0 0 0,0-1 0 0,-1 1 0 15,0 0 0-15,0 0 0 0,-1 0 0 0,0 0-94 0,1 1-24 0,-1 0-30 16,-1 1-45-16,-1 1-62 0,0 0-89 0,-2 0-86 0,-1 1-143 16,0 2-322-16,-3 0 98 0</inkml:trace>
+  <inkml:trace contextRef="#ctx0" brushRef="#br0" timeOffset="13651.71">12224 6192 1611 0,'-1'5'654'0,"0"1"-395"0,0 1-38 15,3-3-16-15,2-1-12 0,0 0-26 0,2-1-29 0,2 0-23 0,1 0-10 16,2-1-6-16,1-1-10 0,0-1-13 0,1 0-15 0,1-1-17 16,0 0-14-16,2-1-4 0,-2 0-24 0,2-1-2 0,0 0 0 0,-1-1 0 15,-1 0 0-15,1 0 0 0,-2-1 0 0,1 0 0 0,-3 0 0 0,1 0 0 16,-2 0 0-16,-1-1 0 0,0 0-40 0,-1 0-40 0,0 1-39 16,0-2-42-16,1 0-66 0,0-1-110 0,1 0-104 0,-1 0-170 0,0-1-458 15</inkml:trace>
+  <inkml:trace contextRef="#ctx0" brushRef="#br0" timeOffset="13901.71">12815 5975 2112 0,'-2'8'385'0,"1"2"-152"0,-1 3-45 0,2-3-13 0,1 1-20 0,1 1-39 16,2-2-24-16,-1 1-17 0,1 0-7 0,1 0-1 0,-1 2-4 15,0 2-9-15,1 0-6 0,1 0-5 0,1 3 1 0,0 2-2 0,0 2-3 16,2 3-3-16,-1 1-4 0,2 0-4 0,0 1-28 0,0 0 0 0,2 3 0 16,-1-3 0-16,1 2 0 0,0-2 0 0,1 1 0 0,0-1 0 15,-1-2 0-15,-1-1 0 0,-2-3 0 0,1 0 0 0,0-2 0 0,-1-2-12 16,0-1-32-16,-1 0-8 0,-1-3-9 0,-1-4-21 0,-3-2-23 16,1-1-32-16,-2-1-30 0,0-3-56 0,0-1-61 0,-1-2-41 0,0-3-39 15,-1-2-65-15,1-1-100 0,-2-3-361 0</inkml:trace>
+  <inkml:trace contextRef="#ctx0" brushRef="#br0" timeOffset="14251.71">12867 6132 1825 0,'-8'-9'290'0,"1"-1"-48"0,-2-3 1 0,3 2-14 0,2 1-31 16,1 2-38-16,1 0-21 0,1 1-11 0,0-1-13 0,2 1-8 15,2-1-14-15,0 1-8 0,1-1-11 0,0 2-7 0,2-2-7 0,2 1-20 16,0 1-40-16,1 1 0 0,0 0 0 0,2 1 0 0,0 1 0 15,1 0 0-15,1 1 0 0,0 1 0 0,1 0 0 0,-1 1 0 0,3 1 0 16,-1 2 0-16,0 1 0 0,0 2 0 0,-1 0 0 0,1 2 0 0,0 1 0 16,-1 1 0-16,0 0 0 0,0 1 0 0,-1 0 0 0,0-1 0 15,-2 2 0-15,0-2 0 0,-1 1 0 0,0 1 0 0,-1-1 0 0,-1-1 0 16,-3 1 0-16,0-1 0 0,-1 1 0 0,-1 0 0 0,-1 0 0 16,-2 0 0-16,-2-1 0 0,-1-1 0 0,-2 1 0 0,-1-2 0 0,0 1 0 15,-3-2 0-15,0 0 0 0,-2 0 0 0,0-3 0 0,-1 1 0 0,1-1 0 16,-2-1 0-16,0-1 0 0,-1-1 0 0,1-2 0 0,-1 0 0 15,-1-1 0-15,0-1-6 0,1 0 2 0,1-2 12 0,0 2-10 0,1-2-4 16,1-1 2-16,1 1-8 0,3 0 4 0,-1 0-8 0,3 0-10 0,0 1-12 16,0 0-11-16,2 0-6 0,0 0-16 0,1-1-12 0,2 1-10 15,-1 1-24-15,1-2-39 0,1 0-52 0,0-1-77 0,1 0-80 0,1-1-144 16,0-1-240-16,1-1-147 0</inkml:trace>
+  <inkml:trace contextRef="#ctx0" brushRef="#br0" timeOffset="14617.71">13255 4840 2724 0,'-6'4'253'0,"2"-1"-36"16,0 1-29-16,3-1-14 0,2-1-30 0,2 1-19 0,2-1-24 15,0 0-14-15,2 0-11 0,0 0-70 0,1-1-6 0,1 0 0 0,1 1 0 16,-1-1 0-16,2 0 0 0,-1 1 0 0,1-2 0 0,1 1 0 0,1-1 0 16,0 0 0-16,-1 0 0 0,1 0 0 0,2-1 0 0,0-1 0 15,1 0 0-15,-1 0 0 0,1-1 0 0,-1 0 0 0,0 0 0 0,-2-1 0 16,2 1 0-16,0 0 0 0,-1-1 0 0,-1 0 0 0,2 1 0 0,-1 1 0 15,1 0 0-15,-2 0 0 0,1 1 0 0,0 1 0 0,-1 0 0 16,0 0 0-16,-2 0 0 0,0 1 0 0,0-1 0 0,-1 1-26 0,-2-1-66 16,0 1-27-16,-2 1-27 0,0-1-35 0,-2 1-45 0,-1-1-62 15,0 1-73-15,-1 1-80 0,-2 0-188 0,0 1-423 0</inkml:trace>
+  <inkml:trace contextRef="#ctx0" brushRef="#br0" timeOffset="14801.71">13472 5170 1781 0,'1'8'686'0,"0"2"-408"16,2 1-41-16,3-1-14 0,1-2-13 0,3-1-28 0,0 0-31 15,2-1-23-15,2-1-15 0,1-2-9 0,0 0-102 0,0-1-2 0,1-1 0 16,1-1 0-16,-1 0 0 0,1-1 0 0,-1 1 0 0,0-1 0 0,-3 1 0 16,2-1 0-16,-1 1 0 0,-1-2 0 0,0 0 0 0,-2-1 0 15,-1 0 0-15,0 0 0 0,-1-1 0 0,-1-1 0 0,1-1 0 0,0 2 0 16,-1-3-129-16,1 0-182 0,-1-1-199 0,0 0-332 0,0 0-642 0</inkml:trace>
+  <inkml:trace contextRef="#ctx0" brushRef="#br0" timeOffset="20118.68">22241 3214 1040 0,'-5'-2'384'0,"0"1"-163"0,0-1-12 0,1 0 0 0,1 2 4 16,0 0-6-16,0 0-21 0,0 0-28 0,1 1-11 0,1 0-14 0,1 0-7 15,0 0-11-15,1 0-18 0,-1 1-5 0,2 0-12 0,0 0 0 16,2 1-12-16,1 0-12 0,2-1-3 0,0 1-9 0,2-1-4 0,2 0 1 16,0 0-5-16,3 0-10 0,0 0 4 0,2 0-26 0,1 0-4 0,1 0 0 15,1-1 0-15,1 0 0 0,2-1 0 0,-1 0 0 0,2 0 0 16,0-1 0-16,0-1 0 0,2 0 0 0,-1-1 0 0,1 0 0 0,-1 1 0 15,0-1 0-15,-1 0 0 0,0 1 0 0,-1-2 0 0,-2 0 0 16,-1-1 0-16,-2 0 0 0,0 2 0 0,0-3-62 0,-3 0-103 0,-1 0-69 16,-1-1-101-16,-1 0-130 0,-1-1-257 0,-1-1-604 0</inkml:trace>
+  <inkml:trace contextRef="#ctx0" brushRef="#br0" timeOffset="23202.5">23413 2703 1161 0,'-8'3'120'0,"-2"1"-19"0,0 2 22 0,0-1 18 0,3 0 2 0,0 1-11 16,0 0-20-16,0 1-17 0,1 0-2 0,0 1 4 0,0-2 1 0,2 1-3 16,-2-2-13-16,1 0-6 0,1 1-8 0,0 0-4 0,2 0-4 0,0-2-1 15,0 0-7-15,1 0-9 0,0-1-9 0,1 1-2 0,0-1-8 16,0 0 2-16,0 0 2 0,0 0-5 0,1-1-7 0,0 0-4 0,-1 0-3 16,1-1 4-16,0 0 4 0,0 0 1 0,0 0 7 0,-1 0 2 0,1-1 2 15,-1 1 2-15,1-1 0 0,0 0 2 0,-1-1 4 0,0 1-1 16,1 0 0-16,-2-1-3 0,0 2 3 0,1-1-4 0,-1 0-2 0,0 0-3 15,0 0 2-15,-1 0-1 0,0 1-1 0,-1 1 4 0,1-1-6 16,0 1-5-16,-1 1 3 0,0-1-1 0,1 0-1 0,-1 1 3 0,0 0-7 16,2 0-5-16,-2 0 0 0,2 1-4 0,0 0 0 0,-1 1 2 0,1 1-6 15,1 1 0-15,-1 0-2 0,1 2-2 0,1 1 4 0,0 2 0 16,0 1-4-16,1 1 0 0,0 1-2 0,1 1-2 0,0 2 4 0,1-2-2 16,1 1 0-16,-1 1 2 0,1 0-2 0,-1-1 2 0,1 0 4 15,-1-2-8-15,0 0 8 0,0-3-4 0,-1 1 0 0,1-1 0 0,-2-1-4 16,0-1 4-16,-1-3-14 0,1-1 4 0,-1-1 0 0,0-1-4 0,0-1 18 15,-1-1 0-15,0 0 2 0,-1-1 2 0,0 0-2 0,0-1 0 16,-1-1 6-16,0 0-2 0,-1-2-4 0,0-1 12 0,0 0 2 0,-1-1-10 16,0-1-10-16,0-2 0 0,1-1 0 0,0-1 0 0,1-1 0 0,-1-1 0 15,1 0 0-15,-1 0 0 0,2-1 0 0,-1 0 0 0,0 1 0 16,0 0 0-16,0 0-14 0,1 0-24 0,-2 1-10 0,1 0-15 0,-1 1-13 16,1 1-5-16,-1-2-24 0,1 0-11 0,0 0-28 0,1 0-34 15,-1 1-24-15,1 1-30 0,0 0-17 0,0 0-11 0,0-1-11 0,1 0 3 16,0 0-1-16,0 0 19 0,0-1 41 0,0 2 53 0,0-1 62 0,-1 1 57 15,0 0 49-15,-1 0 46 0,0 2 40 0,0-2 44 0,0 0 32 16,0 0 15-16,0 1 0 0,1 0-15 0,-1 0-20 0,1 1-9 0,1 0-12 16,0 0 0-16,1 0-6 0,1 1-6 0,0 0-6 0,1 1-10 0,1-1-8 15,1 1-12-15,1 0-6 0,1 2-6 0,1-2-4 0,2 2-5 16,1-1-1-16,1 0-4 0,3 1-2 0,-2 0-5 0,2 0-8 0,0 0-6 16,1 0-8-16,0 1-4 0,0-1-5 0,1 0-8 0,-2 0-4 0,0 1-1 15,1-1 0-15,-2 0-5 0,0 1 1 0,-4-1-4 0,0 1-6 16,-2 1-1-16,0 0-22 0,-2 1-31 0,1 0-33 0,-1 1-39 0,0 1-39 15,-2 0-41-15,1 2-52 0,0 0-65 0,-1 0-144 0,1 1-488 16,-1-1 228-16</inkml:trace>
+  <inkml:trace contextRef="#ctx0" brushRef="#br0" timeOffset="23503.03">23683 2865 1760 0,'2'7'240'16,"2"0"-43"-16,1 2 18 0,2-3-5 0,2-1-18 0,1-2-36 0,2 1-39 15,0-1-24-15,0-2-20 0,2 0-10 0,1-2-7 0,0-3-18 16,-1 0 2-16,1-1-12 0,1-2-4 0,0-2-2 0,0-3-7 0,-1 0 0 16,-1-2-8-16,-1 2 1 0,-1-2-3 0,-2-1-1 0,0 1 2 0,-2 0-5 15,-1 0-1-15,-2 0 0 0,-1 0-3 0,-2 0 1 0,-2 0 0 16,-1 0-2-16,-3 0 6 0,-1 1-4 0,-2 2 0 0,-2 1 0 0,-1 1-1 16,2 2-1-16,-3 2-2 0,0 3 5 0,-1 2-5 0,0 3 2 0,0 2 4 15,-1 3 2-15,1 1 0 0,-1 2-2 0,1 2 2 0,1 1 0 16,1 4-2-16,1 0 5 0,0 2-3 0,3 1-2 0,1-1 2 0,3 2 0 15,1 1 3-15,2-1-5 0,2 0 2 0,2 0-2 0,2-4 0 16,2 0 4-16,1-3-6 0,1-1 4 0,2-3 2 0,2 0 0 0,1-1-1 16,0-1-8-16,1 0-1 0,0-1-7 0,0-1-8 0,-1-4-14 0,1-1-29 15,1-2-26-15,-1-2-31 0,0-1-43 0,0-2-35 0,0-2-37 16,-1-1-36-16,2-3-37 0,1 0-68 0,-1-2-76 0,1 0-289 0</inkml:trace>
+  <inkml:trace contextRef="#ctx0" brushRef="#br0" timeOffset="23652.03">24297 2795 1032 0,'6'-7'332'16,"1"1"-70"-16,1 0-30 0,-3 2-15 0,-1 4-6 0,-1 2 2 0,-1 2-13 15,-1 2-13-15,-1 2-29 0,-1 2-24 0,0 3-20 0,0 2-22 16,0 1-13-16,-1 3-5 0,2 2-12 0,-1-1-8 0,0 2-1 0,2 1-13 16,-1 0-3-16,0 1-5 0,3 1-6 0,-1 3-1 0,2 1-6 15,0 0-3-15,1 2-1 0,1 0-16 0,0 1 2 0,0 0 1 0,0 0-7 16,0 0 14-16,0-2-9 0,1-1-2 0,0-2-3 0,-1-4-17 0,1-2-21 16,-2-1-40-16,-1-2-46 0,0-1-57 0,-2 0-91 15,0-4-110-15,-2 0-185 0,0-2-548 0</inkml:trace>
+  <inkml:trace contextRef="#ctx0" brushRef="#br0" timeOffset="23886.03">24422 2812 1951 0,'5'-8'182'0,"4"-1"27"0,2-1 18 16,2 2 0-16,1 0-32 0,1 1-46 0,3 1-34 0,-1 1-24 15,1 0-13-15,-2 2-10 0,2 1-10 0,1 0-13 0,-2 2-10 0,1 1-4 16,-1 1-7-16,1 1-1 0,-3 1-2 0,1 1-2 0,-1 0-4 0,-2 0-1 15,-3 1-12-15,0 0 6 0,-1 1-5 0,-2 0-1 0,-1 1 0 16,-3 1-9-16,-4 0-5 0,-2 2-11 0,-2 0-8 0,-1 0-10 0,-1 1-18 16,-2 0-12-16,0 1-16 0,-1-1-13 0,-2-1-5 0,-2 1-4 0,2-1-4 15,-1 0 5-15,-1-1-1 0,1-1 2 0,-1 1-4 0,0 1-9 16,1-1-19-16,-1 0-23 0,2 0-29 0,1-2-30 0,2-2-40 0,2 1-41 16,5-3-50-16,0 0-243 0</inkml:trace>
+  <inkml:trace contextRef="#ctx0" brushRef="#br0" timeOffset="24168.55">24994 2869 1102 0,'15'-4'390'0,"1"1"-138"0,2 0-5 16,-2 1-2-16,-4 3-15 0,-1 1-26 0,0 1-22 0,-4 2-21 0,0 0-25 15,-1 2-21-15,0-1-24 0,-1 1-25 0,0 0-17 0,0-2-14 16,0 2-18-16,1-1-2 0,1 0-10 0,0-2 1 0,2 1 2 0,-1-2-8 16,2 0 5-16,-2 1-5 0,2-2 0 0,0 0 2 0,-1-1-8 0,2 0 1 15,-1-1 3-15,1-1-4 0,-2 0 6 0,1-2 2 0,-2-1 0 16,1-2 2-16,1 0 1 0,-1-2 8 0,1 0 1 0,-1-1 2 0,-1 0 1 15,-1-2 2-15,-1 0 2 0,0-1 0 0,-1 1 3 0,-1 0-3 16,-1 0 0-16,-1 0 0 0,-2 0-3 0,-1 0-5 0,-2-1-1 0,-1 1-8 16,-3-2 3-16,-1 1-1 0,0 0-6 0,-3-1 2 0,0 1-6 0,-2-1-2 15,1 1 2-15,0 2-3 0,0 2 3 0,-1 3-8 0,-1 2-7 16,-1 2 2-16,2 3-8 0,0 1 8 0,-1 4-6 0,1 1-2 0,1 2-9 16,1 2-5-16,1 0-17 0,2 0-11 0,2 1-17 0,3-1-35 0,1-1-29 15,2-1-43-15,2 0-47 0,3-1-52 0,2 1-82 0,2-3-154 16,3-1-444-16</inkml:trace>
+  <inkml:trace contextRef="#ctx0" brushRef="#br0" timeOffset="24418.55">25573 2801 1256 0,'10'4'355'0,"0"3"-210"0,3 2-3 16,-2-1 0-16,-2 2-1 0,1-2-18 0,-2 2-29 0,1-1-15 0,-1 1-17 16,0-1-16-16,0 0-4 0,0-1-10 0,0-1-6 0,-1 1 11 0,-1-1-3 15,1 0 4-15,0 0-1 0,0-1-14 0,-2 0-3 0,-1-1-3 16,-1 1 0-16,-2-2 1 0,0-1-1 0,-2 0 4 0,-1-1-4 0,0-2 3 15,-3 1 3-15,0-1-10 0,-2-1 1 0,-2 0-14 0,1-2-5 16,-3-1 1-16,-1 0-1 0,-2-1 10 0,0-1 1 0,2-1-1 0,-1-1 0 16,2-1 0-16,1-1 6 0,1-1 1 0,2-1 2 0,1-2 1 0,2-2-2 15,0 0-5-15,1 1 6 0,2-2 0 0,1 2 4 0,3 0 0 16,2 2-8-16,-1 0-6 0,4 2-4 0,1 0-4 0,1 1-1 0,1 1 0 16,1 2-6-16,-1 0-5 0,3 0-10 0,2 1-20 0,-1 0-25 0,0 0-41 15,-1 0-46-15,2 0-55 0,1-2-57 0,0 1-68 0,1-2-124 16,0 0-469-16</inkml:trace>
+  <inkml:trace contextRef="#ctx0" brushRef="#br0" timeOffset="24618.54">26260 2292 1480 0,'-1'-7'821'0,"1"-1"-561"0,0 0 6 0,-1 1-9 0,1 2-18 0,0 2-40 16,0 0-36-16,0 1-36 0,0 2-19 0,0 2-19 0,-2 0-17 0,1 2-58 15,0 3-14-15,1 1 0 0,-2 2 0 0,1 2 0 0,0 2 0 16,1 1 0-16,-1 3 0 0,1-1 0 0,1 3 0 0,0 2 0 0,2 2 0 15,-2 1 0-15,2 1 0 0,0 2 0 0,1 0 0 0,0 0 0 16,1 0 0-16,1-3 0 0,0 0 0 0,0-2 0 0,0 0 0 0,0-1 0 16,1-3 0-16,-3-1 0 0,1-3-64 0,-1 0-80 0,-1-3-58 0,-1 0-75 15,-1-1-102-15,-2-2-197 0,-2 1-433 0,-2-2-5 0</inkml:trace>
+  <inkml:trace contextRef="#ctx0" brushRef="#br0" timeOffset="24751.54">26092 2699 2366 0,'-2'-6'216'0,"0"-1"6"0,1-1-14 0,3 3-13 0,3 0-29 0,2 2-24 16,3 0-36-16,1 1-17 0,0 0-11 0,3 1-16 0,1 0-15 16,2-1-16-16,1 0-9 0,2 0-8 0,2 1-3 0,0-1-3 0,1-1-8 15,1 0-2-15,-1 0-2 0,1-2-13 0,-2 0-36 0,2-2-52 16,1-1-91-16,-1-1-120 0,1-1-132 0,0-2-299 0,1-1-569 0</inkml:trace>
+  <inkml:trace contextRef="#ctx0" brushRef="#br0" timeOffset="38252.55">14442 3905 1269 0,'-6'4'306'0,"-1"2"-134"15,0 1-9-15,0-1 10 0,1 0 6 0,1-2-6 0,1 1-31 0,0-1-18 16,0-1-17-16,1 0-12 0,0-1 0 0,0 0-7 0,1-1 6 0,2 0-9 16,-1-2-6-16,2 1-2 0,0-1-11 0,0 0-3 0,1-1-5 15,1 0 0-15,0-1 1 0,2 0-1 0,1 0-6 0,1-2-6 0,2 1-1 16,0-2-9-16,2 1 1 0,2 0-3 0,1 0-8 0,1 0 8 0,-1 0-32 16,3 0-2-16,0 2 0 0,1 0 0 0,0 0 0 0,0 1 0 15,0 1 0-15,-1 0 0 0,2 0 0 0,0 1 0 0,-1-1 0 0,2 1 0 16,-1 1 0-16,-1 1 0 0,0 0 0 0,-2 2 0 0,-1 0 0 0,-2 1 0 15,-1 0 0-15,-1 2 0 0,-2 2 0 0,-2 0 0 0,-1 1 0 16,-1 2 0-16,-3 1 0 0,-1 3 0 0,-2 0 0 0,-1 0 0 0,-2 3 0 16,-3 1 0-16,-1 1 0 0,-2 3 0 0,-1-1 0 0,-1 2 0 15,1-1 0-15,-1-2 0 0,0 2 0 0,1-2 0 0,1 0 0 0,2 1 0 16,0-1 0-16,1-2 0 0,1 0 0 0,1-1 0 0,3-2 0 0,1 0 0 16,3-1 0-16,2-2 0 0,2-1 0 0,2-2 0 0,2 0 0 15,1-2 0-15,3 0 0 0,2-2 0 0,2-2 0 0,1-1 0 0,2-1 0 16,2-1 0-16,1-1 0 0,3-1 0 0,0-1 0 0,3 0 0 0,-1-1 0 15,3 0 0-15,-1 1 0 0,1-2 0 0,-1 1 0 0,2 0 0 16,-1 1 0-16,0-1 0 0,-2 0 0 0,1 0 0 0,0 2 0 0,0-1 0 16,-3-1 0-16,0 2 0 0,-4-1 0 0,0 0 0 0,-2 1 0 15,-1-1 0-15,-1 1 0 0,-1 0-4 0,-2 0-131 0,-2 1-38 0,0 0-43 16,-3 0-71-16,-2 1-78 0,-1-1-73 0,-1 1-93 0,-2-1-325 0,-2 1 52 16</inkml:trace>
+  <inkml:trace contextRef="#ctx0" brushRef="#br0" timeOffset="38619.55">14198 5206 1836 0,'-1'1'394'0,"1"0"-169"0,2 0-26 0,2-2 13 0,1 0 3 15,3-1-16-15,3-2-29 0,3 0-25 0,5-2-19 0,4-1-22 16,2-1-7-16,5-2-18 0,3 1-5 0,4-3-54 0,2-1-20 0,3 0 0 16,4-1 0-16,1 1 0 0,2-2 0 0,2 0 0 0,2 0 0 0,1 1 0 15,0-2 0-15,0 2 0 0,0 0 0 0,1 2 0 0,0 2 0 16,-3 1 0-16,-1 0 0 0,1 1 0 0,-3 0 0 0,0 1 0 0,1-1 0 16,-2 2 0-16,0-1 0 0,-1 0 0 0,-1 1 0 0,0 1 0 15,0 1 0-15,0 1 0 0,-1 1 0 0,-1 0 0 0,0 1 0 0,-3 1 0 16,-1 1 0-16,1 0 0 0,-2 2 0 0,-3 0 0 0,-1 0 0 0,-5 1 0 15,-1 1 0-15,-2 1 0 0,-2 1 0 0,-1 0 0 0,-5 1 0 16,-1 0 0-16,-3 1 0 0,-5-1 0 0,-1 1 0 0,-4-1 0 0,-3 2 0 16,-3-1-102-16,-2 2-56 0,-3 0-28 0,-2 1-51 0,-3 0-53 15,-3 0-57-15,-2 0-83 0,-3 0-162 0,-4-1-539 0</inkml:trace>
+  <inkml:trace contextRef="#ctx0" brushRef="#br0" timeOffset="39052.54">14578 5744 1844 0,'2'-1'459'0,"1"0"-231"0,2-1-21 15,1-2-7-15,2-1 0 0,2-1-28 0,1 0-26 0,2 0-39 16,2 0-9-16,0-1-9 0,0 0-12 0,1-1-15 0,1-1-21 0,-2 0-11 16,1 0-11-16,-1 0 1 0,-1 2-2 0,0 0-6 0,-3 1 0 0,0 1-8 15,-1 2 2-15,-1 0 0 0,0 0 2 0,-2 2-4 0,-2 1-6 16,0 2 4-16,0 1-6 0,-2 2 4 0,-1 1-4 0,-1 3 0 0,-1 0-4 16,-2 3 2-16,-1 3 2 0,-2-1-22 0,-1 1 6 0,1 1-4 0,-3 1 5 15,0 2 11-15,-1-1 2 0,-1 2 4 0,1 0-4 0,1-1 4 16,2 2 2-16,-1-3-4 0,2 1 4 0,1-3-4 0,1 1 2 0,1 0 4 15,2-2-4-15,2 0 4 0,0-1-4 0,2-1 2 0,2 0 0 16,1-3-3-16,1 0 12 0,2-3-7 0,1-1 0 0,2-2 4 0,1-1-2 16,1-2 2-16,3-1 2 0,1-1-4 0,0-1-4 0,1-1 4 0,1-1 0 15,0-1 2-15,-1-1-1 0,2-1 1 0,-2-1-2 0,0 1 0 16,2-3-2-16,-3 1 0 0,1 0 2 0,-1 0 0 0,-2 1-6 0,-1 0 4 16,0 1-4-16,-2-2 2 0,0 1 4 0,-3 0-10 0,0 1-12 0,0 0-15 15,-1 0-22-15,-1 1-26 0,-2 1-30 0,-1-1-44 0,-1 1-57 16,1-2-70-16,-1 1-72 0,0 0-82 0,-1-1-155 0,0 0-507 0</inkml:trace>
+  <inkml:trace contextRef="#ctx0" brushRef="#br0" timeOffset="39236.54">15320 5845 1229 0,'3'3'569'0,"0"-1"-346"0,3 0-38 0,1-1 13 15,1-1 9-15,2 0-17 0,0-2-38 0,1-1-38 0,2 0-24 16,-2-2-3-16,3 0-15 0,-1 0-13 0,1-2-13 0,0 0-11 0,-1-1-17 15,0 1-1-15,1-1-4 0,-1 1-8 0,-1-1 4 0,0-1-1 16,-1 1-10-16,-1-1-4 0,0-1-14 0,-2 1-22 0,1-1-17 0,-3 1-24 16,1 0-37-16,-1-1-50 0,0 0-63 0,-1-1-69 0,-1-1-75 0,1 0-170 15,-2 1-486-15</inkml:trace>
+  <inkml:trace contextRef="#ctx0" brushRef="#br0" timeOffset="39404.54">15460 5531 1648 0,'-7'5'697'0,"-2"0"-454"0,0 2-27 0,1-1-15 0,3 1 1 16,1 1-17-16,0 1-18 0,1 0-22 0,2 0-26 0,0 2-14 0,1 0-16 16,1 2-11-16,2 1-78 0,1-1 0 0,0 2 0 0,2 1 0 0,0 1 0 15,1-1 0-15,0 2 0 0,0 1 0 0,0-3 0 0,-1 2 0 16,0-1 0-16,0-2 0 0,-1-2 0 0,0-1 0 0,0-2 0 0,1-2 0 16,-1-2 0-16,1-3 0 0,1-2-30 0,-1-1-130 0,3-2-71 0,1-2-100 15,1-1-134-15,1-1-186 0,1-2-762 0</inkml:trace>
+  <inkml:trace contextRef="#ctx0" brushRef="#br0" timeOffset="39736.54">15822 5614 2271 0,'-5'11'281'0,"1"3"-55"16,-1 3-4-16,3 0 8 0,2-1-36 0,0 0-34 0,1-1-34 0,1 3-28 15,2 0-3-15,1-2-9 0,1 1-12 0,0-1-42 0,1 0-32 16,2-2 0-16,0 1 0 0,2-2 0 0,1-2 0 0,-1-1 0 0,3-2 0 15,1 0 0-15,0-1 0 0,1-1 0 0,2-2 0 0,-1-1 0 16,2-3 0-16,-2-3 0 0,2 0 0 0,1-3 0 0,-2 0 0 0,0-1 0 16,-1-1 0-16,1-3 0 0,-2-2 0 0,0-2 0 15,1-1 0-15,-3 1 0 0,1-2 0 0,-1-1 0 0,-1 1 0 0,-1-4 0 0,-2 2 0 16,0 0 0-16,-1 0 0 0,-2 0 0 0,-1 0 0 0,-3 1 0 0,-1 0 0 16,-2 0 0-16,-2 3 0 0,-2-1 0 0,-3 1 0 0,-2 0 0 0,-3 3 0 15,-2-1 0-15,-4 1 0 0,-1 0 0 0,-1 2 0 0,-3 1 0 16,-1 2 0-16,1 0 0 0,-2 1 0 0,0 2 0 0,0 1 0 0,-2 4 0 15,1 1 0-15,-1 3 0 0,1 1 0 0,0 1 0 0,4 0 0 16,4 1 0-16,3 1-42 0,3 0-38 0,2 0-25 0,4-1-32 0,2 0-42 16,2 0-56-16,2-3-94 0,3 1-85 0,1-2-121 0,5-2-291 0,3-3-55 15</inkml:trace>
+  <inkml:trace contextRef="#ctx0" brushRef="#br0" timeOffset="39969.54">16769 4840 2611 0,'-7'5'275'0,"-1"-1"-46"0,-1 1-36 16,3-2-5-16,3 1-20 0,0-2-28 0,3 1-22 0,0-2-25 0,0 0-13 16,2-1-80-16,0 0 0 0,1-1 0 0,1 0 0 0,2-2 0 0,2 0 0 15,0-1 0-15,2 0 0 0,0-1 0 0,1-1 0 0,-1-2 0 16,1 0 0-16,1-1 0 0,0 0 0 0,0 1 0 0,0 0 0 0,0-1 0 15,0 0 0-15,-1 1 0 0,-1-1 0 0,0 0 0 0,-2 2 0 16,1 0 0-16,-2 2-112 0,0 1-88 0,-2 2-78 0,0 0-106 0,-1 3-97 16,-1 2-165-16,-2 2-629 0</inkml:trace>
+  <inkml:trace contextRef="#ctx0" brushRef="#br0" timeOffset="40102.55">16851 4979 1333 0,'-3'14'839'0,"0"1"-596"0,0 3-46 0,3-5-18 0,1-3-22 16,2 0-23-16,1-3-43 0,2-2-29 0,0-1-16 0,1-1-10 0,2-2-10 15,2-2-6-15,1-2-6 0,0-1-10 0,0-1 7 0,3-2-4 16,-1-2-13-16,1-2-17 0,0-2-51 0,0 0-56 0,-1-2-69 0,0-1-88 16,-1 1-95-16,0-2-238 0,1-1-479 0</inkml:trace>
+  <inkml:trace contextRef="#ctx0" brushRef="#br0" timeOffset="40486.54">17411 4025 2363 0,'-4'-2'443'0,"-1"1"-277"16,0-1 5-16,2 0-16 0,1 1-3 0,2 0-9 0,1 0-32 0,1-1-17 16,1 1-18-16,0-1-12 0,2 1-13 0,0-2-5 0,2 0-4 0,2 1-24 15,1-1-18-15,1-1 0 0,2 1 0 0,-1-1 0 0,1 1 0 16,1 0 0-16,0 0 0 0,1 1 0 0,-1 0 0 0,1 1 0 0,-1 1 0 15,1 1 0-15,-2 0 0 0,1 1 0 0,0 2 0 0,-2 0 0 16,1 2 0-16,-4 1 0 0,0 0 0 0,-1 3 0 0,-2 1-30 0,-1 1-24 16,-1 0 7-16,-1 0-2 0,-1 1 6 0,-2 2 14 0,-2 0-2 0,-1-1 17 15,-3 0 1-15,0 1 1 0,-4 0 8 0,0 1-7 0,-1-2 7 16,-1 1 4-16,0 0-2 0,1-1 4 0,1-1 9 0,1 0-1 0,4 1 3 16,0-2 14-16,2 0 2 0,1-3 4 0,2 0 8 0,2-2-11 0,3 0 3 15,0-1-1-15,3 0-6 0,2-2 2 0,1-1-8 0,3 0-12 16,1-2-8-16,-1-1 0 0,3-1 0 0,1 0 0 0,0-1 0 0,1 0 0 15,-1 0 0-15,0-1 0 0,-1-1 0 0,1 0 0 0,-1 0 0 16,0 0 0-16,1 0 0 0,0-1 0 0,-1 1 0 0,-3 0 0 0,0-1 0 16,-2 2 0-16,-1-1-46 0,-2 0-34 0,-2 2-33 0,0-1-50 0,-2 1-65 15,-1 0-85-15,-2 1-91 0,0 1-92 0,-2 1-242 0,0 1-290 16</inkml:trace>
+  <inkml:trace contextRef="#ctx0" brushRef="#br0" timeOffset="40702.54">17561 4832 1950 0,'9'12'615'0,"2"-1"-433"0,4 3 11 15,3-2 0-15,1-4 27 0,3 0-8 0,2-1-36 0,2-3-40 16,0-2-28-16,3-2-18 0,0 0-70 0,2-2-20 0,3-1 0 0,1 0 0 16,1-2 0-16,-1-1 0 0,0 1 0 0,-1-1 0 0,0 0 0 0,-1 0 0 15,0 0 0-15,-2 1 0 0,0 0 0 0,-2 0 0 0,1 0 0 16,-3 0 0-16,0 1 0 0,-2-1 0 0,1 2 0 0,-3 0 0 0,-2 0 0 15,0 1 0-15,-2 1 0 0,-1 0 0 0,-1 1-20 0,-1 0-156 0,-2 1-64 16,-1 1-100-16,-2 1-138 0,-1 0-161 0,-2 1-590 0</inkml:trace>
+  <inkml:trace contextRef="#ctx0" brushRef="#br0" timeOffset="41019.54">18250 5331 1994 0,'16'-7'277'0,"6"-1"-74"0,4-3 13 0,-1 0 14 16,-1 1-1-16,-1 2-43 0,-2-1-51 0,0 0-33 0,-1 0-21 0,-2 2-11 15,-1 1-8-15,-1 1-6 0,-2 0-14 0,-1 2-3 0,-3 1-9 16,-2 1-7-16,-3 1-5 0,-3 2-12 0,-2 0-2 0,-2 1-4 0,-1 2-6 16,-3 1 2-16,-1 1-8 0,-3 2-3 0,-1 2-3 0,-1 1-6 0,-1-1 3 15,0 3-5-15,-1 1 3 0,0 1 0 0,0 0 7 0,1 1 9 16,1 0 7-16,3-1 0 0,1-2 2 0,4 1 0 0,1 0-1 0,3-1 9 15,2-2 8-15,1 0 1 0,4-1 4 0,2 1 1 0,2-2-3 0,4-1 5 16,2-2-11-16,1 0 1 0,4-3-8 0,2 0-2 0,1-2 6 16,2-1-6-16,-1-1 0 0,1-2 0 0,0-1-8 0,2-2 2 0,-1 0 2 15,2-1 0-15,-1-1-6 0,1 0-10 0,-3-2-26 0,1-1-20 0,-2 0-18 16,-2-1-30-16,0 0-20 0,-2-2-43 0,1-2-59 0,-2-1-80 16,-2 1-103-16,-1-3-197 0,0-2-600 0</inkml:trace>
+  <inkml:trace contextRef="#ctx0" brushRef="#br0" timeOffset="41236.21">19208 4650 2072 0,'0'5'606'15,"2"0"-375"-15,2 1-21 0,1-2-24 0,1-2 0 0,2 0-16 16,0-1-44-16,1-1-36 0,1-2-29 0,2 0-18 0,0-2-9 0,1-1-12 15,0-1-2-15,1-1-6 0,0 0-2 0,-1 0-2 0,-1-1-8 0,-1 0-2 16,1 0 0-16,-1 2 0 0,-1-2 0 0,0 0 0 0,-2 0-20 16,1 1-20-16,-1 1-22 0,-1-1-34 0,-1 1-27 0,-1 1-59 0,0 2-67 15,-1 0-105-15,-1 0-127 0,-1 2-226 0,-1 0-475 0</inkml:trace>
+  <inkml:trace contextRef="#ctx0" brushRef="#br0" timeOffset="41403.21">19258 4871 1720 0,'0'14'737'16,"3"-1"-550"-16,1 3-2 0,2-4 4 0,2-2 10 0,0-2-15 16,2-1-50-16,1-2-37 0,1-2-25 0,2-2-18 0,1-2-8 0,0-2-7 15,2-1-6-15,0-1-4 0,1-2-10 0,-1-1-15 0,-1-1-6 0,1-1 2 16,-2-1-10-16,0-2-3 0,-1 0-24 0,0 1-48 0,-1-1-39 16,-1-1-53-16,0-1-79 0,0-2-87 0,0 2-97 0,1-3-208 0,0 0-526 15</inkml:trace>
+  <inkml:trace contextRef="#ctx0" brushRef="#br0" timeOffset="41886.64">20087 4590 1708 0,'1'2'556'0,"0"-1"-317"0,1 0-23 16,0-2 3-16,0-1-5 0,2 0-27 0,0-2-35 0,0-1-52 15,1-2-27-15,0-2-19 0,0-1-9 0,1-1 2 0,0-2-13 0,0-1-1 16,1-1-5-16,0-1-18 0,-1-3-3 0,0 1 7 0,1-1 0 0,-2 1 7 16,0-2-3-16,0 0-6 0,-1 2-8 0,-1-1 8 0,-1 2 2 15,0 1-2-15,-1 1 6 0,-1 2 0 0,-1 1-2 0,-1 1-16 0,-1 3 0 16,-1 1 0-16,0 2 0 0,-1 1 0 0,0 1 0 0,0 2 0 0,0 0 0 16,1 2 0-16,0 1 0 0,1 1 0 0,-1 2 0 0,1 1 0 15,0 0 0-15,1 1 0 0,0 3 0 0,2 1 0 0,0 1 0 0,1 0 0 16,2 1 0-16,-1 1 0 0,2 1 0 0,0 1 0 0,1-1 0 15,2 1 0-15,-1 1 0 0,1-1 0 0,1-1 0 0,0 0 0 0,0 1 0 16,1 0 0-16,-1-2 0 0,2 2 0 0,0-2 0 0,0 1 0 0,-1-2 0 16,0 0 0-16,-1 0 0 0,2-1 0 0,-1-2 0 0,0 0 0 15,0-1 0-15,0 0 0 0,-2 0 0 0,0 0 0 0,-2-2 0 0,1 0 0 16,0 0 0-16,0-3 0 0,-2 2 0 0,-1-2 0 0,-1 0 0 16,-1 0 0-16,-1-1 0 0,-1-1 0 0,0 1 0 0,-1-1 0 0,-1-1 0 15,-1 0 0-15,-1 0 0 0,0 0 0 0,-2-1 0 0,0 0 0 0,-1 0 0 16,-2-1 0-16,0 1 0 0,0-1 0 0,0 0 0 0,0 1 0 15,1 0 0-15,0 0 0 0,-1 1 0 0,1 0 0 0,1 0 0 0,0 1 0 16,1 0 0-16,3 1 0 0,0 1 0 0,1-1 0 0,2 1 0 16,1-1 0-16,2 1 0 0,1-1 0 0,1 0 0 0,1 0 0 0,4 0 0 15,1-1 0-15,1-1 0 0,1-1 0 0,1-2 0 0,0-2 0 0,2-1 0 16,1-1 0-16,1-3 0 0,-1-1 0 0,4-2-122 0,-1-1-275 0,0-1-296 16,0-2-380-16,1 0-198 0</inkml:trace>
+  <inkml:trace contextRef="#ctx0" brushRef="#br0" timeOffset="42852.64">20872 3939 953 0,'-3'2'748'0,"-1"1"-593"0,-1 1-13 0,1 0-2 16,0 2 20-16,0 1 19 0,1 0-15 0,-1 3-24 0,1-1-27 0,-1 2-14 15,2 1-13-15,-1 2-6 0,1 2 0 0,1 2-3 0,1 3-3 16,1 5 4-16,0 1-15 0,3 5-3 0,0 2-2 0,1 5-8 0,1 2-3 16,0 5 1-16,2 4-1 0,2 4-7 0,1 3 1 0,2 3-11 15,2-1-9-15,2 1-3 0,1-1-2 0,1-2-8 16,4-3-2-16,-1-4 0 0,1-4-6 0,0-4 6 0,0-2-4 0,3-5-20 0,1-3-10 0,0-4 7 15,2-2-7-15,1-4 10 0,1-3-23 0,0-4 3 0,1-2-7 16,-1-5-5-16,-1-2-5 0,0-4-53 0,1-2-45 0,-3-2-47 0,1-2-36 16,-2-4-41-16,0-1-33 0,-1-1-74 0,2-3-129 0,0-1-490 0</inkml:trace>
+  <inkml:trace contextRef="#ctx0" brushRef="#br0" timeOffset="43236.34">21507 4291 2042 0,'-1'0'222'0,"1"1"11"16,0 0-19-16,-1 1-14 0,2 1 1 0,-1 1-19 0,2 0-26 0,0 4-22 15,1 1-23-15,1 2-19 0,1 2-13 0,2 2-11 0,0 2-13 16,0 4-9-16,1 2-28 0,-1 2-6 0,-1 3 4 0,2 0-6 0,-1 4-6 15,0 0-4-15,2 1 0 0,0-1 0 0,1 0 0 0,0-4 0 0,0-1 0 16,0-3 0-16,-1-2 0 0,0-3-8 0,0-5-62 0,0-3-27 16,-1-2-36-16,1-3-55 0,-1-3-85 0,0-3-125 0,0-3-161 0,1-2-463 15,0-4 40-15</inkml:trace>
+  <inkml:trace contextRef="#ctx0" brushRef="#br0" timeOffset="43536.34">22022 4252 2122 0,'-5'7'314'16,"-1"3"-107"-16,-1 1-1 0,0 2-11 0,2 0-2 0,-1 1-20 16,3 3-41-16,0 0-30 0,1 0-21 0,0 2-4 0,2 0-11 0,1-1-19 15,1 1-12-15,1-1-12 0,1 0 9 0,1-2 10 0,1 0-6 16,2-1-24-16,0-1-12 0,1-4 0 0,1 1 0 0,1-2 0 0,0-1 0 16,2-2 0-16,2-2 0 0,1-3 0 0,-1-2 0 0,1-2 0 0,1-2 0 15,-1-1 0-15,0-2 0 0,0-2 0 0,-1 0 0 0,0-2 0 16,-2-1 0-16,0-1 0 0,-1-3 0 0,-1 1 0 0,-1-2 0 0,-3 0 0 15,0 1 0-15,-2-2 0 0,-1 0 0 0,-1-1 0 0,-3 2 0 0,-1-1 0 16,-2 0 0-16,-4 2 0 0,-1 0 0 0,-3 0 0 0,-3 2-2 16,-3 2-12-16,-1 1-4 0,0 1 2 0,-1 1-8 0,0 2 0 0,3 3 6 15,-2 2-7-15,-1 4-3 0,2 2 1 0,-2 4-16 0,2 2-3 16,0 2-1-16,2 2-12 0,1 1-7 0,1 0-15 0,3 1-22 0,2 1-17 16,2-1-20-16,4 0-30 0,2 0-32 0,2 0-36 0,4-1-43 0,3-3-53 15,3 1-98-15,3-2-446 0</inkml:trace>
+  <inkml:trace contextRef="#ctx0" brushRef="#br0" timeOffset="43802.85">22931 4150 1802 0,'9'5'331'0,"0"2"-139"0,2 3-6 0,-3 0-6 16,0-1-17-16,0 2-40 0,0 0-47 0,0-2-28 0,-2 1-11 0,1 0-11 15,-1-2 1-15,-1 1-4 0,2-1-7 0,-1 0 3 0,-1 0-3 0,0 0 2 16,0-2-7-16,-1 0-4 0,2-2 4 0,-1 0 0 0,1-2 0 15,0 0-2-15,-1-2 5 0,1-1 6 0,-1-2 9 0,1-2 13 0,0 0-3 16,0-3 0-16,1-1-2 0,-1-1 4 0,-1 0-1 0,0-1-3 0,-1 0 0 16,-1 0-7-16,-2 0-1 0,-1 0-4 0,-1-1-2 0,-2 0-5 15,-1 1-5-15,-3-1-1 0,-1 0-4 0,-2 1-3 0,-3-1 1 0,0 2-10 16,-2-1 2-16,-1 0 2 0,-1 2-4 0,2 1 6 0,-2 1-5 16,-1 2 1-16,1 2-2 0,1 1-4 0,-1 3-8 0,0 3-3 0,1 2-2 15,1 3-2-15,1 2-8 0,2 3-9 0,2 1-21 0,0 1-20 0,3 0-24 16,1 1-35-16,2-1-59 0,3 0-83 0,1 0-91 0,4-1-148 15,2-3-568-15</inkml:trace>
+  <inkml:trace contextRef="#ctx0" brushRef="#br0" timeOffset="44019.85">24023 4334 2228 0,'-7'14'300'0,"0"0"-124"0,-2 2 3 0,-1 1-2 16,0-3-18-16,-2 1-46 0,0-2-37 0,0 1-27 0,-1 0-6 0,-2 0 5 16,-1-2-11-16,0 2-8 0,0-1-20 0,-1 0-7 0,0 0 2 15,1-1-4-15,0 0 3 0,1 1-3 0,0-1-3 0,0-1-11 0,2-3-8 16,0-1-12-16,1-1-18 0,1-1-16 0,1-2-32 0,2-1-34 16,1-2-47-16,-1-4-52 0,2-1-69 0,-1-3-98 0,2-3-121 0,0-4-512 15</inkml:trace>
+  <inkml:trace contextRef="#ctx0" brushRef="#br0" timeOffset="44153.85">23506 3890 1797 0,'-6'-4'146'0,"0"-1"-19"0,0 1 12 0,0 2-8 0,2 1-18 16,-1 3-25-16,1 0-39 0,0 3-25 0,0-1-11 0,1 1-8 16,0 0-5-16,1 0-23 0,1 1-55 0,0 0-95 0,1 3-112 0,2-1-184 15,0 0-562-15</inkml:trace>
+  <inkml:trace contextRef="#ctx0" brushRef="#br0" timeOffset="44436.5">24057 4577 1095 0,'5'6'396'0,"2"0"-246"0,0 1-7 0,0-2 13 16,-1-2 6-16,0 0-34 0,1-1-31 0,-1-2-24 0,-1 0-10 15,1-1-7-15,-2-1-1 0,2-2-7 0,-1 0-3 0,0-2 8 0,0 0 3 16,-1-1 7-16,1-1 1 0,-1 0-5 0,0-1-3 0,-1 1-2 0,-1-2 2 16,1 0-9-16,-2 0-3 0,1 0-8 0,-1-1-4 15,-2 1-2-15,-1-1-10 0,-2 1 4 0,-1-1-3 0,-1 2 5 0,0 0-2 0,-3 1-11 16,0 1-2-16,-1-1-11 0,0 0-2 0,-2 1 2 0,0 1-6 0,0 1 3 16,0 1-5-16,1 2-1 0,0 2 0 0,0 1-4 0,0 2-3 15,0 1-8-15,0 1-21 0,2 1-30 0,-1 1-40 0,2 0-46 0,1 0-51 16,2-1-66-16,1-2-54 0,3 0-113 0,2-2-223 0,2-1-87 15</inkml:trace>
+  <inkml:trace contextRef="#ctx0" brushRef="#br0" timeOffset="44670.49">24040 3561 2328 0,'-11'-1'334'0,"1"1"-160"0,-2 1 36 0,2 1 4 0,5 2-22 0,1 1-19 16,1 1-23-16,4 2-22 0,1 0-8 0,3 3-48 0,2 1-72 16,4 2 0-16,3 2 0 0,4 4 0 0,2 1 0 0,5 2 0 0,3 4 0 15,3 0 0-15,2 5 0 0,2 1 0 0,2 4 0 0,1 4 0 0,2 3 0 16,2 3 0-16,3 3 0 0,-2 2 0 0,-1 0 0 0,-1 3 0 16,-4-1 0-16,-5 0 0 0,-3 2 0 0,-5 0 0 0,-5 1 0 0,-4-2 0 15,-3-2 0-15,-2-3 0 0,-2 0 0 0,-2-4 0 0,-1-2-100 0,-3-4-195 16,-1-5-127-16,-3-2-194 0,-3-6-258 0,-2-1-345 0</inkml:trace>
+  <inkml:trace contextRef="#ctx0" brushRef="#br0" timeOffset="49219.7">3202 9423 1734 0,'-4'2'190'0,"0"0"-34"15,-2 0 10-15,2 0 20 0,1 0 6 0,1 0-23 0,-1 1-29 0,0-1-24 16,0 1-2-16,0 0-10 0,1-1-3 0,1 0-4 0,0 0-8 0,1-1-13 16,1 1-13-16,0-2-4 0,1 1-7 0,0-1-2 0,1-1 7 15,1 1-10-15,1-2-6 0,1 0-3 0,1-1-6 0,0 0-8 0,0 0-22 16,1-2-2-16,0 1 0 0,2 0 0 0,0-2 0 0,1 1 0 0,-1 0 0 15,1-1 0-15,0 1 0 0,0 1 0 0,0 0 0 0,0 0 0 16,0 2 0-16,0 0 0 0,0 1 0 0,-2 1 0 0,-1 0 0 0,0 1 0 16,-1 1 0-16,-1 0 0 0,-1 1 0 0,1 1 0 0,-1 1 0 15,-1 0 0-15,0 1 0 0,-2 2 0 0,0 1 0 0,-1-1 0 0,-2 2 0 16,0 1 0-16,-1 1 0 0,-3 1 0 0,0 0 0 0,-3 2 0 0,-1 1 0 16,0 1 0-16,-2-1 0 0,-2 1 0 0,0 0 0 0,0 0 0 15,1-1 0-15,0 1 0 0,1 0 0 0,0-1 0 0,1-2 0 0,1 0 0 16,1 0 0-16,0 0 0 0,1-2 0 0,0 1 0 0,2-1 0 0,1 0 0 15,1-1 0-15,0-2 0 0,2-1 0 0,-1 0 0 0,3-1 0 16,-1-1 0-16,1-2 0 0,0 0 0 0,1-1 0 0,2 1 0 0,0-1 0 16,0 0 0-16,2-1 0 0,-1-1 0 0,2 0 0 0,1 0 0 15,-1 0 0-15,2-1 0 0,-1 0 0 0,1 1 0 0,2-2 0 0,-1 1 0 16,1-1 0-16,1 0 0 0,0 0 0 0,0 0 0 0,-2-1 0 0,1 1 0 16,-1 0 0-16,1-1 0 0,0 2 0 0,0-1 0 0,0 0 0 15,-1 1 0-15,1-1 0 0,-1 0 0 0,1 1 0 0,0-1 0 0,0 1 0 16,-1-1 0-16,1-1 0 0,-1 1 0 0,-1 0 0 0,0-1 0 0,0 0 0 15,-1-1 0-15,0-1 0 0,0 0 0 0,-1-1 0 0,0-2 0 16,-1 0-18-16,-1 0-180 0,0-2-56 0,-1-2-88 0,-1 0-104 0,-2-3-167 16,0 1-165-16,-1-1-232 0</inkml:trace>
+  <inkml:trace contextRef="#ctx0" brushRef="#br0" timeOffset="49702.99">2886 9301 2280 0,'-6'-1'387'0,"-1"0"-166"0,1-1-13 0,1 0-6 15,2 1-6-15,2 0-22 0,0-1-29 0,0 1-30 0,1-1-18 0,0 0-27 16,1 0-70-16,0 0 0 0,1-1 0 0,2 0 0 0,0 0 0 0,2-2 0 16,2 1 0-16,0 0 0 0,0-1 0 0,1 1 0 0,1 2 0 15,3-1 0-15,-1 0 0 0,2 1 0 0,-1-1 0 0,3 1 0 0,1 0 0 16,0-1 0-16,0 2 0 0,2 0 0 0,0-1 0 0,1 2 0 0,0 0 0 15,0 0 0-15,2 2 0 0,1-1 0 0,0 1 0 0,1 0 0 16,0-1 0-16,2 2 0 0,1 0 0 0,1 0 0 0,1 0 0 0,-1 0 0 16,1 2 0-16,-1 1 0 0,1 0 0 0,1 1 0 0,0 1 0 15,1 1 0-15,0 2 0 0,-1-1 0 0,-1 3 0 0,0 1 0 0,-2 2 0 16,0 2 0-16,-2 1 0 0,1 3 0 0,-3 0 0 0,-3 1 0 0,0 2 0 16,-3-1 0-16,-1 2 0 0,-1 0 0 0,-1 2 0 0,-2 1 0 15,-4-1 0-15,1 2 0 0,-3-1 0 0,-1 0 0 0,-3 1 0 0,-2 2 0 16,-2-1 0-16,-1 0 0 0,-2-1 0 0,-3-1 0 0,0-1 0 0,-3 0 0 15,-3-1 0-15,-1 1 0 0,-1-2 0 0,-1 0 0 0,-3-1 0 16,-4-4 0-16,0 0 0 0,-2-1 0 0,-1-3 0 0,-1-1 0 0,-1-2 0 16,-2-4 0-16,1-3 0 0,-1-2 0 0,0-3 0 0,-1-2 0 15,3-2 0-15,-1-4 0 0,1-1 0 0,-1-4 0 0,-1-3 0 0,-1-3 0 16,1 0 0-16,-2-4 0 0,3-2 0 0,-1-3 0 0,0-3 0 0,1-2 0 16,0-2 0-16,1 3 0 0,4-1 0 0,1 4 0 0,3 2 0 0,3 2 0 15,2 1 0-15,1 1 0 0,2 1 0 0,2 2 0 0,0 1 0 16,0 2 0-16,3 2 0 0,-1-1 0 0,2 1 0 0,1 1 0 0,0 0 0 15,2 2 0-15,-1-1 0 0,1-1 0 0,1-1-112 0,1 1-329 0,1 0-259 16,3 0-353-16,0-3-186 0</inkml:trace>
+  <inkml:trace contextRef="#ctx0" brushRef="#br0" timeOffset="52503.56">4946 8761 2378 0,'-2'5'182'0,"0"3"-51"0,-2 3 7 0,2 0 17 0,-1 0-1 16,3 1-21-16,0 0-22 0,0 3-19 0,0 0-16 0,0 2-5 15,1 0-1-15,0 4 4 0,1 1 4 0,0 1-8 0,1 2-8 0,0 1-16 16,3 2-8-16,0 1-2 0,0 1-36 0,1 1 0 0,-2 3 0 0,3-2 0 16,0 3 0-16,2-2 0 0,1 2 0 0,-1 1 0 0,2 1 0 15,-1-1 0-15,1-2 0 0,0-1 0 0,-1-2 0 0,0 1 0 0,-1-3 0 16,-1 0 0-16,0-3 0 0,-1-2 0 0,-1-2 0 0,-1-3 0 0,0-1 0 15,-3-1 0-15,0-2 0 0,-2-3 0 0,-1-1-16 0,0-2-50 16,0-2-27-16,-1-3-19 0,-1-1-24 0,-1-3-14 0,0-3-15 0,-2-3-10 16,0-2-2-16,0-4 1 0,-2-2 17 0,1-2 20 0,-1-3 20 15,0-2 20-15,-1-1 22 0,2-2 21 0,-2 0 24 0,-1-3 4 0,-1-1 11 16,-1 2 17-16,0-3 6 0,0 1 24 0,-1-1 17 0,-1 0 7 0,-1-2 19 16,0 2 15-16,2 1 3 0,-2 1 5 0,1-1-4 0,1 3 3 15,0 1-4-15,2-2 2 0,-1 5-3 0,0-1-4 0,1 2 3 0,1 5 1 16,0-2-1-16,3 2-7 0,0 0-10 0,0 1-4 0,1 1-6 0,2-1-7 15,2 1-3-15,1-1-7 0,1 2-1 0,1 0-3 0,2 0-3 16,2 0-3-16,2 0-5 0,0 3-16 0,2-1 0 0,0 1-8 0,1 2-2 16,3-1 12-16,-2 3-6 0,2 2-8 0,1 0 0 0,0 3-2 15,0 1 0-15,2 3 0 0,0 0 0 0,1 2 0 0,-1 2 0 0,1 0 0 16,1 1 0-16,-2 2 0 0,1-2 0 0,-1 2 0 0,0 2 0 0,-2 0 0 16,0 1 0-16,-1 0 0 0,0 0 0 0,-2 1 0 0,0 0 0 15,-2 0 0-15,-1 1 0 0,-2 0 0 0,-3 1 0 0,-1 0 0 0,-3 2 0 16,-1 0-6-16,-3 0-30 0,-2 1-4 0,-2-2-11 0,-2-1-6 0,-1-1-5 15,0 0-12-15,-2 0 5 0,0-1-4 0,0-1-10 0,0 0 6 16,0-2-17-16,-2-1 4 0,0-2 12 0,0-1 23 0,2 0 31 0,-3-3 15 16,2-1 13-16,0-1 3 0,3-3-2 0,1-1 11 0,-1-1-1 0,2-2 3 15,0-1 1-15,0 0 4 0,3 0 6 0,1-1-4 0,3 0 11 16,0 0 2-16,1 1 9 0,2-1 10 0,0 1 0 0,1 1-1 0,2 0 0 16,1 1 0-16,1 1-4 0,1-1 0 0,0 2-2 0,0 0 0 15,1 0-3-15,1 1 0 0,-1 1-9 0,3 0 0 0,-1 2-2 0,-1-1-32 16,2 0-4-16,0 1 0 0,-1 1 0 0,0-1 0 0,1 1 0 0,-2 0 0 15,2 1 0-15,1-1 0 0,-2 0 0 0,2 0 0 0,-2-1 0 16,1 1 0-16,1 0 0 0,0-1 0 0,-1 0 0 0,-1 0 0 0,1 0 0 16,-1 0 0-16,-1-1 0 0,-1 0 0 0,0-1 0 0,-1 0-24 0,2 0-93 15,-1 0-47-15,0 0-52 0,-1-1-73 0,-1 1-100 0,1-1-84 16,-2 1-156-16,1 0-482 0</inkml:trace>
+  <inkml:trace contextRef="#ctx0" brushRef="#br0" timeOffset="52820.56">5458 9407 1492 0,'1'-3'614'0,"2"-1"-383"0,1 0-57 0,0 0-8 0,1-1-9 15,1 0-14-15,-1-1-24 0,1 2-19 0,1-1-13 0,-2-1-6 16,1 1-8-16,0-1-5 0,-2 0-10 0,1 0-13 0,1 0-17 0,1-1-9 16,-1 0-6-16,0 1 2 0,0 0-7 0,0 0 3 0,0-1-7 15,-1-1-4-15,1 0 4 0,-2-1-6 0,2 0 4 0,0 0 4 0,0 0-2 16,0-2-1-16,-2 1 3 0,-1 1-2 0,0 0 2 0,-1 0-6 0,0 2-2 15,-2-1 6-15,-1 0-3 0,-1 1 3 0,-1 0 6 0,-1 2-1 16,-2 2 5-16,0 1 1 0,-1 1-1 0,-1 2-1 0,2 2 9 0,-2 3 5 16,0 0-2-16,0 2-2 0,0 0 1 0,0 1-4 0,0-1 1 0,2 3 13 15,0 0-12-15,1 1 6 0,1 0-6 0,0 0-16 0,2 0-6 16,0 1 0-16,2 0 0 0,1 1 0 0,1-1 0 0,2 0 0 0,0 0 0 16,1-1 0-16,0-2 0 0,2 0 0 0,1-2 0 0,1 1 0 0,0-2 0 15,1-1 0-15,0-1 0 0,-1 0 0 0,2-2 0 0,1 0 0 16,-1-1 0-16,0 0-36 0,1-2-52 0,-2 0-31 0,0-2-50 0,0-1-73 15,0 0-96-15,0-1-96 0,0-2-106 0,0-1-190 0,0-1-249 16</inkml:trace>
+  <inkml:trace contextRef="#ctx0" brushRef="#br0" timeOffset="53437.56">6022 9103 1566 0,'2'2'295'15,"1"1"-71"-15,0 1-35 0,0-1-13 0,1 0-18 0,-1 0-31 16,-1 0-10-16,0 0-14 0,0-2 5 0,-1 1-5 0,2-1-9 0,-2-1-2 15,0 0-18-15,0-1-9 0,-1-1-8 0,1 1-16 0,-1-3-5 16,-1 0-6-16,0-1-11 0,-2 0-2 0,0 0-9 0,-1 0-7 0,-1 0 1 16,-1 0-2-16,1 0 2 0,-1 0-4 0,-1 2 4 0,1 0-2 0,-2 2-2 15,0 2 2-15,0 1-7 0,-1 1 7 0,-1 2 5 0,1 1-6 16,0 2 4-16,2 2-3 0,0 1-2 0,0 1 6 0,2 3 0 0,3 1 0 16,1 0 5-16,2 0 9 0,1 3-1 0,0-1 4 0,3 2 8 15,0-1-4-15,2 0 0 0,1 1 0 0,1-2-7 0,1 0 1 0,1-1-9 16,2-3-4-16,0 1-4 0,0-2 0 0,0-1 2 0,0-2-6 0,3-2 2 15,-1-4-4-15,3 0-2 0,-1-3 4 0,1 0-6 0,0-2-3 16,-1-1 5-16,0-2 4 0,-3-1-8 0,1-2 2 0,0-2-1 0,-1 0-1 16,1-2 10-16,-1 0-2 0,-1-1 4 0,-1 2 2 0,-3-1 0 0,1-1 7 15,-2 1 1-15,0 0 4 0,-1 1 5 0,0-1 1 0,0 1-3 16,-1 1 3-16,0 0 2 0,0 3-4 0,-1 0 4 0,-1 2 6 0,1 2-28 16,0 1-2-16,-1 0 0 0,1 2 0 0,-1 0 0 0,1 1 0 0,0 2 0 15,1 0 0-15,1 0 0 0,-1 1 0 0,1-1 0 0,-1 1 0 16,3 0 0-16,0 0 0 0,0 0 0 0,0-1 0 0,0 0 0 0,2-1 0 15,-1 0 0-15,1 0 0 0,1-1 0 0,-2 1 0 0,0-1 0 16,-1-1 0-16,2-1 0 0,0-2 0 0,1 0 0 0,-1-1 0 0,1-1 0 16,-2 0 0-16,1-1 0 0,-1 0 0 0,0 0 0 0,-1-2 0 0,1 1 0 15,-2-2 0-15,0 0 0 0,1 0 0 0,-1-1 0 0,0 0 0 16,-1 0 0-16,-1-1 0 0,0 1 0 0,-2 1 0 0,-1 0 0 0,-1 0 0 16,0 1 0-16,-2 0 0 0,-1 0 0 0,-2 1 0 0,-1 0 0 0,-2 2 0 15,-2 0 0-15,0 0 0 0,-2 2 0 0,0 0 0 0,-2 2 0 16,1 2 0-16,-1 1 0 0,0 2 0 0,-1 2 0 0,0 1 0 0,0 2 0 15,1 1 0-15,-1 0 0 0,2 1 0 0,3 0 0 0,2 1 0 16,4-1 0-16,1-1 0 0,2 0 0 0,2 0 0 0,2-1 0 0,2 0 0 16,2-1 0-16,2 0 0 0,1-2 0 0,2 1 0 0,0-1 0 0,2-2 0 15,1 1 0-15,0-2 0 0,2-1 0 0,0 0 0 0,1 0 0 16,-2-2 0-16,3 0 0 0,-1-1 0 0,-3-1 0 0,3-1 0 0,-1 0 0 16,-2-1 0-16,2 0 0 0,-1-1 0 0,-2-2 0 0,0 1 0 0,-1-1 0 15,1 0-28-15,-3-1-22 0,2 1-23 0,-1 0-28 0,-3-1-40 16,0 0-56-16,-2 0-69 0,-2-1-90 0,1 0-98 0,-2 0-166 0,1-1-321 15,-1-2 238-15</inkml:trace>
+  <inkml:trace contextRef="#ctx0" brushRef="#br0" timeOffset="53638.56">7142 8598 2230 0,'-2'2'418'0,"0"0"-209"0,1 2-11 15,1 2-5-15,2 1-2 0,1 2-18 0,0 3-35 0,0-1-20 16,3 3-22-16,1 0-7 0,-1 2-47 0,2 0-42 0,0 3 0 0,1 0 0 16,-1 0 0-16,1 2 0 0,-1 0 0 0,2 1 0 0,-2 1 0 0,2 1 0 15,0-2 0-15,-1 2 0 0,1-3 0 0,0 0 0 0,-2 0 0 16,1-3 0-16,0-1 0 0,-1-2-44 0,1-2-94 0,1 0-48 0,-2-4-80 16,0 1-102-16,-1-3-159 0,1 0-202 0,-1-1-501 0</inkml:trace>
+  <inkml:trace contextRef="#ctx0" brushRef="#br0" timeOffset="53854.56">7495 8501 1740 0,'-3'-5'1144'0,"1"0"-925"0,-1 1-19 0,0 3-25 0,2 2-19 16,-1 2-25-16,1 2-28 0,0 3-15 0,-1 3-9 0,0 2-19 0,1 4-60 15,-1 0 0-15,2 1 0 0,0 2 0 0,2 1 0 0,0 0 0 16,1 3 0-16,1 1 0 0,0 0 0 0,1 3 0 0,2 0 0 0,0 2 0 15,2 1 0-15,0 2 0 0,2 0 0 0,1 1 0 0,1-1 0 16,2 0 0-16,-1-3 0 0,2 0 0 0,1-4 0 0,0-1 0 0,0-1 0 16,-1-3 0-16,0-1 0 0,0-3-60 0,0-2-144 0,3-2-77 0,0-1-127 15,0-2-161-15,3-3-215 0,-1-4-439 0</inkml:trace>
+  <inkml:trace contextRef="#ctx0" brushRef="#br0" timeOffset="54087.55">8543 8885 2322 0,'0'7'334'0,"1"2"-116"15,0 2-25-15,2 0-7 0,0-2-5 0,0 1-33 0,1-2-20 0,-1 0-13 16,1 1-16-16,0-1-2 0,1-1-23 0,2-1-74 0,0-1 0 16,2-1 0-16,0-1 0 0,0 0 0 0,1-2 0 0,-1 0 0 0,2-1 0 15,1-1 0-15,0-1 0 0,1 0 0 0,-2 1 0 0,3-2 0 16,-1 0 0-16,0 0 0 0,0-1 0 0,0 0 0 0,0 0 0 0,1 0 0 15,-1 0 0-15,0-1-58 0,-1 1-49 0,1 1-23 0,-1 0-40 16,1 1-34-16,-2 0-58 0,2 1-83 0,0 0-67 0,-1 1-93 0,-1 1-159 16,-2 0-226-16</inkml:trace>
+  <inkml:trace contextRef="#ctx0" brushRef="#br0" timeOffset="54287.55">8772 9391 2079 0,'6'10'682'0,"2"0"-500"0,4 1-50 0,0-4 3 16,-1-3 10-16,2 0-2 0,2-1-27 0,0-2-16 0,1 1-18 16,0-2-6-16,0 0-8 0,0-2-21 0,-1-1-1 0,1-2-14 0,1 1-2 15,-1-1-30-15,-1-1 0 0,2-1 0 0,0 0 0 0,-1 0 0 0,0 0 0 16,0 0 0-16,-1 0 0 0,-2 2 0 0,-1-2 0 0,0 1 0 16,-2-1 0-16,-1 1-28 0,0 0-77 0,-1 0-65 0,-2 0-96 0,0 0-150 15,0 1-223-15,-1 0-472 0,-2 0 85 0</inkml:trace>
+  <inkml:trace contextRef="#ctx0" brushRef="#br0" timeOffset="56919.94">10305 7779 2004 0,'-3'9'248'0,"-1"4"-128"0,0 4-6 0,0 0 17 16,1-2 28-16,2 1 3 0,-1 2-28 0,2-1-28 0,2-1-19 0,-1-1-6 15,4-1-4-15,-1 0-8 0,2-2-11 0,1 1-11 0,-1 0-12 16,2-1-8-16,-1 0-1 0,1-1-9 0,1 1 1 0,1 1-1 0,0-1-6 16,0 1 3-16,0-2-5 0,0 0-3 0,0 0 2 0,-1 0-6 15,2-1 1-15,-1 0 1 0,-1-2-4 0,1 2 0 0,-1-1 4 0,0 0-2 16,0-1 0-16,-1 1-2 0,0-1-6 0,-1-2-11 0,-2 0-4 0,0 0-4 16,-1 0-17-16,-2 0-17 0,1 0-36 0,-3-1-41 0,1 0-60 15,-3-2-61-15,1 0-69 0,-2-2-93 0,0-1-184 0,-1-2-473 0</inkml:trace>
+  <inkml:trace contextRef="#ctx0" brushRef="#br0" timeOffset="57120.94">9996 7933 1143 0,'-5'-3'728'0,"0"0"-454"0,-1 0-64 0,2 0-16 15,2 0-14-15,1 0-20 0,2 0-31 0,2 0-28 0,1-1-4 0,3 0-8 16,1-2-1-16,3 1-7 0,2-1-11 0,1 0-12 0,2 1-5 0,2 0-8 15,1-1-8-15,-1 1-9 0,3 0-5 0,1-1-9 0,-1 3-1 16,0-1-5-16,0 0-4 0,-2 1 0 0,1-1-6 0,0 0 4 0,0 0-2 16,0 1-6-16,-1 0-2 0,0 1-19 0,-2 0-17 0,0 1-30 0,-1 0-35 15,-1 0-39-15,-1 1-57 0,1 0-63 0,-2 1-74 0,0 1-75 16,1 0-118-16,-1 0-546 0</inkml:trace>
+  <inkml:trace contextRef="#ctx0" brushRef="#br0" timeOffset="57420.77">10795 7788 1871 0,'0'3'465'0,"1"2"-247"0,0 2-42 0,1 0-15 15,1 2-6-15,0 0-14 0,0 1-29 0,2 0-10 0,0 2-12 0,0 1-9 16,0 2-4-16,1 1-10 0,0 0-16 0,1 3-6 0,2 0-16 16,0 2-4-16,2 2-2 0,0 3-5 0,1 0 5 0,0 3-3 0,3 0-8 15,0 2 1-15,0-1-20 0,2 1-3 0,-2-1 12 0,0 0-4 16,0-1 13-16,-1-1-1 0,0-3-10 0,-1-1 0 0,-3-2-6 0,0-3-5 16,-1-2-17-16,-1-1-19 0,-1-3-17 0,-1-1-22 0,-1-1-24 0,-2-3-30 15,-1-1-48-15,-2-3-50 0,-2-2-58 0,0-3-82 0,-1-2-156 16,-1-4-156-16,-2-3-167 0</inkml:trace>
+  <inkml:trace contextRef="#ctx0" brushRef="#br0" timeOffset="57654.77">10904 7942 1246 0,'-5'-8'552'16,"0"-1"-328"-16,-1-2-22 0,2 3-6 0,1-1-4 0,1 1-10 0,1 1-29 16,2 1-32-16,0 0-19 0,2 1-23 0,0 0-5 0,4 0-11 0,0 1 1 15,3 0-3-15,0 2 0 0,4-1-8 0,-1 1-4 0,3 0-7 16,0 2-6-16,0 1-1 0,-1 1-14 0,1 2 0 0,1-2-6 0,0 3-5 15,-2 2 4-15,2 0-8 0,-1 1-3 0,0 2 1 0,-1 0-4 0,-1 1-2 16,0-1 2-16,-2 0 4 0,-2 2-6 0,-2 0 2 16,-1 1-2-16,-1-1-5 0,-3 2 5 0,-2 0-2 0,-2 0-4 0,-2 0 0 15,-2 2-11-15,-2 0 1 0,-2 0-12 0,-3-1 1 0,-2 1-5 0,-1-1-6 16,-2 0 4-16,0-1-11 0,-1-1 0 0,0-1-5 0,2-2-22 0,-1-2-16 16,1-1-20-16,1-3-28 0,2-1-25 0,0-1-46 0,2-2-62 0,0 0-107 15,1 0-212-15,1-1-414 0</inkml:trace>
+  <inkml:trace contextRef="#ctx0" brushRef="#br0" timeOffset="57954.28">10126 9145 2171 0,'4'11'622'0,"0"-2"-477"0,4 1-34 0,2-5-6 0,1-2 21 16,5-2 9-16,4-2-21 0,3-1-14 0,5-3-21 0,4-2-10 0,3-2-9 15,2-2-12-15,3-1-11 0,0 0-13 0,3-3-8 0,2 1-5 0,3-2-9 16,2 2 12-16,1-1-6 0,1 0-6 0,0 0 8 0,1 0 2 16,3-2 0-16,-2-1 4 0,1 1-6 0,-1 2-6 0,-2-2-18 0,1 0-2 15,-2 0-8-15,-1 1 18 0,-1 1 18 0,-4 0 0 0,-2 2 6 16,-1 1-22-16,-3-1 6 0,-3 1-4 0,0 1-8 0,-4 1 0 0,-2 2-18 15,-5 2-9-15,-1 0-22 0,-4 2-30 0,-4 2-41 0,-3 1-65 0,-3 2-76 16,-4 1-102-16,-3 3-106 0,-4 0-242 0,-4 2-403 0</inkml:trace>
+  <inkml:trace contextRef="#ctx0" brushRef="#br0" timeOffset="58221.28">10722 9595 2517 0,'2'4'213'15,"1"1"-55"-15,1 0-28 0,0 2 16 0,1-1 6 0,0 2-11 0,1 2-26 16,0 0-26-16,1 1-2 0,-2-1-6 0,0 1-9 0,0 1 0 16,0 3-16-16,0 0-10 0,0 0-26 0,0 2-20 0,-1 1 0 0,1 1 0 15,0 0 0-15,1 1 0 0,0 0 0 0,-2-1 0 0,3 2 0 16,-2-1 0-16,2-1 0 0,0 1 0 0,-1-3 0 0,1-1 0 0,-1-1 0 15,0-1 0-15,-1-1 0 0,-1-3 0 0,1-2 0 0,-1-2 0 0,-1-1 0 16,0-2-20-16,-1-3-60 0,-1-1-26 0,-1-1-44 0,0-3-56 16,-2-2-67-16,-1-4-72 0,-1-3-104 0,-1-2-152 0,-2-2-570 0</inkml:trace>
+  <inkml:trace contextRef="#ctx0" brushRef="#br0" timeOffset="58420.28">10499 9559 1900 0,'-7'2'297'0,"1"1"-74"0,-3-1-29 0,5 1-12 0,1-1-11 0,1 0-21 16,3-1-28-16,2 0-15 0,1 0-8 0,1-1-3 0,3 0 1 16,1-2 0-16,2 0-13 0,2-2-10 0,3-1-15 0,0-1-20 0,2-1-1 15,-1-1-22-15,1 1-24 0,1-1-6 0,-2-1-6 0,1 1 10 0,0 0 14 16,-1 0 0-16,-2 2 0 0,1 0 0 0,0-1 0 0,-1 0-2 16,-1 1-18-16,0 0-27 0,-1 0-16 0,0 0-32 0,0 2-30 0,-1 0-33 15,1 1-54-15,1 1-62 0,0 1-80 0,-1 0-109 0,2 1-176 16,-2 2-460-16</inkml:trace>
+  <inkml:trace contextRef="#ctx0" brushRef="#br0" timeOffset="58655.28">11037 9690 2172 0,'-4'9'532'0,"-1"1"-305"0,-2 2-64 0,2-1-22 15,1-1 3-15,2 1-16 0,0 1-21 0,2 2-15 0,0 0-11 0,0 1-10 16,0 1-3-16,1 1-11 0,2 1-9 0,0 0-8 0,1 1-16 16,1 2-24-16,1-1 0 0,1 1 0 0,0 1 0 0,1-1 0 0,0 0 0 15,1 0 0-15,-1-1 0 0,1 0 0 0,1-1 0 0,0-3 0 0,0 0 0 16,0-1 0-16,-1-3 0 0,2-2 0 0,-2-1 0 0,1-2-50 16,-2-1-31-16,0-2-15 0,0-1-35 0,-3-3-41 0,0-1-52 0,-2-1-71 15,-1-3-57-15,-1-1-93 0,-2-1-150 0,-1-3-503 0</inkml:trace>
+  <inkml:trace contextRef="#ctx0" brushRef="#br0" timeOffset="58871.49">11024 9781 1848 0,'-6'-10'187'15,"-1"-1"-31"-15,-1-3-20 0,1 4 3 0,2 1 12 0,1 1-12 0,1-1 4 16,1 1-12-16,2 0-14 0,1-2-6 0,1 1-21 0,2-2-17 16,2 0-14-16,1-1-11 0,1 0 2 0,2 1 4 0,1 1-5 0,1 0 7 15,0 2-8-15,1 1-4 0,0 2-1 0,2 0-2 0,0 1-10 16,-1 2-7-16,0 0-1 0,0 2-9 0,0 2-2 0,0 0-6 0,-1 1 0 15,0 1-2-15,-1 1 2 0,-1 1-6 0,-2 1-8 0,0 2 0 0,-3 0-2 16,1 1 2-16,-1 1 0 0,-1 1-4 0,-2 1-13 0,-1 0-9 16,-1-1-7-16,-1 2-23 0,-3 0-18 0,0 1-17 0,-2-1-37 0,-2 1-13 15,1 0-12-15,-1 0-27 0,0-1-4 0,0-2-26 0,0-2-36 0,1-1-42 16,0-2-96-16,0-2-143 0,2 0-270 0</inkml:trace>
+  <inkml:trace contextRef="#ctx0" brushRef="#br0" timeOffset="59070.92">11449 9684 1646 0,'5'1'794'15,"0"0"-554"-15,2 1-69 0,0-1-21 0,-1-1-2 0,1 0-19 0,0 0-23 16,-1 0-18-16,2-1-12 0,0 0 1 0,-1 0-17 0,1-1-10 16,0-1-18-16,0 0-16 0,1 0-1 0,-1 0-5 0,1-2-8 0,0 1 1 15,-1-1-4-15,1 0-5 0,-1 0-2 0,0 0-9 0,-2-1-16 0,2 0-22 16,0 0-34-16,0 0-32 0,0 0-48 0,-2-1-64 0,1-1-64 15,-1 0-74-15,-1 0-133 0,-2-1-214 0,1 0-156 0</inkml:trace>
+  <inkml:trace contextRef="#ctx0" brushRef="#br0" timeOffset="59253.96">11557 9420 2199 0,'-6'4'279'0,"1"1"-88"0,-1 1-24 0,2 1 0 0,1 0 3 16,2 2-27-16,-1 0-20 0,2 1-18 0,1 1-11 0,0 0 24 15,2 2-16-15,0 3-16 0,2-2-5 0,1 0-31 0,2 1-30 0,1 0-20 16,0 1 0-16,2-1 0 0,-2 2 0 0,0-1 0 0,1 0 0 0,-2-2 0 16,2 1 0-16,0-2 0 0,-1 0 0 0,1-3 0 0,0-2 0 15,-3-1 0-15,2-1-26 0,0-2-64 0,-1-1-37 0,1-3-57 0,0-2-83 16,1-3-124-16,-1-1-138 0,2-1-235 0,0-1-420 0</inkml:trace>
+  <inkml:trace contextRef="#ctx0" brushRef="#br0" timeOffset="59473.12">11962 9320 2288 0,'-2'6'283'0,"0"3"-79"0,0 1-26 0,0 1 0 0,1 0-6 0,1 0-32 16,-1 1-18-16,2 1-15 0,-1 0-10 0,2 1-2 0,0-1-15 16,1 1-23-16,0 0-15 0,2 1-12 0,-1-2-8 0,1 4-22 0,0 0 0 15,0-1 0-15,1 0 0 0,0 1 0 0,0 1 0 0,0-1 0 0,2-2 0 16,-1 1 0-16,1-1 0 0,1-2 0 0,-2-1 0 0,0 0 0 15,1-1 0-15,-1-2 0 0,-1 0 0 0,1-3 0 0,0-1 0 0,0 1 0 16,-1-3-74-16,-1 0-23 0,0-1-15 0,-1-2-39 0,0-1-43 16,-1-2-57-16,0-1-66 0,-2-2-73 0,0 0-130 0,-2-2-100 0,-1-1-352 15</inkml:trace>
+  <inkml:trace contextRef="#ctx0" brushRef="#br0" timeOffset="59671.12">11915 9383 1624 0,'-6'-3'438'0,"1"-2"-227"15,-1 2-31-15,2-1 8 0,2 1-10 0,1 1-8 0,1-1-28 0,0 1-34 16,0 1-8-16,2-1-13 0,1 1-6 0,1-2-1 0,1 1-6 16,1-1-15-16,2 0-10 0,-1 0-8 0,4-1-5 0,-1 0-8 0,2 0-1 15,0-1 0-15,0 0-11 0,1 0-2 0,0 0-4 0,1 0-12 0,-1 0 7 16,0 0 1-16,-1 1-8 0,-1 0 4 0,0 0-6 0,-1 1-1 16,-1 1-5-16,-1 0-14 0,1 1-11 0,0 0-14 0,-2 0-13 0,1 1-20 15,0 0-29-15,-1 1-36 0,-1 1-53 0,0 0-60 0,-1 1-68 0,0 0-71 16,0 1-140-16,-1 0-461 0</inkml:trace>
+  <inkml:trace contextRef="#ctx0" brushRef="#br0" timeOffset="59837.33">12038 9465 1387 0,'-1'6'829'0,"-1"0"-592"16,1 0-65-16,2 0-16 0,1-2 1 0,1-1-14 0,1 1-28 0,0-1-24 15,3 0 6-15,-1-1-3 0,2 0-2 0,0-1-9 0,0-1-26 0,1 0-19 16,2-1-28-16,-2-1-8 0,2-1-10 0,0-1 4 0,0 0 12 15,0 0-6-15,-2-1-2 0,1-1-10 0,0 0 3 0,-1 0-13 0,0 0-23 16,0-1-38-16,-1 0-46 0,-2-2-74 0,1 0-70 0,1-1-78 16,-1 0-103-16,1-1-181 0,0 0-440 0</inkml:trace>
+  <inkml:trace contextRef="#ctx0" brushRef="#br0" timeOffset="60070.31">12505 9232 2073 0,'-1'2'278'0,"-1"1"-75"0,2 1-15 0,0 1 1 0,1-1-13 0,0 1-32 16,0 1-20-16,0 1-12 0,1 0-10 0,0 1-6 0,0 1-21 15,0 0-20-15,0 1-10 0,1 0-14 0,0 2-6 0,-1 0-3 0,0 1-16 16,1 0 4-16,-1-1 0 0,0 1-10 0,1 0 9 0,-1-1-5 0,1 0-8 16,0-3 4-16,-1 0-17 0,1-1-9 0,-1-1-3 0,0-2-16 15,0 0-3-15,-1-1-25 0,0-1-26 0,0-1-30 0,-1-1-41 0,0-1-27 16,0-1-40-16,0-2-22 0,0 0-21 0,-1-1-8 0,-1 0-29 15,0-1-73-15,-1-1-42 0,1 0-144 0</inkml:trace>
+  <inkml:trace contextRef="#ctx0" brushRef="#br0" timeOffset="60337.58">12509 9350 723 0,'-3'-9'411'0,"0"-1"-168"15,-1-3-35-15,1 1-13 0,0 1-4 0,0-1-19 0,2 1-17 0,-1 2-17 16,3 0-16-16,-1 4 3 0,2 0-7 0,1 2-6 0,0 1-8 0,0 1-23 16,0 2-9-16,1 0-7 0,0 2-4 0,2 1-4 0,-1 0 5 15,1 3-10-15,0 1-4 0,1 1-4 0,2 1-8 0,-1 1 1 0,2 0-6 16,0 1 1-16,1 1-4 0,-2 1-5 0,1-1 6 0,0 0-8 15,-1 0-4-15,1 0-1 0,0 0-8 0,-1 0-6 0,1-3 5 0,0 1-3 16,0-1-17-16,-1-1 7 0,0 0-4 0,-1-3 2 0,-1 0 14 0,1-2 0 16,0-1-2-16,-2-1 0 0,0-2 4 0,-1-2-1 0,0-2 3 15,-1-1 6-15,0-1 13 0,0-3 4 0,-1-1-3 0,-1-1-5 0,0-3-13 16,-1 1 0-16,0-3-4 0,0-2 0 0,0 1-2 0,1-3 4 0,-1 0 0 16,0 0-2-16,0-1 4 0,-1 0-10 0,2-1 2 0,-1-2 6 15,0 0-8-15,0-1-2 0,0-1 0 0,1 2 0 0,0 1 0 0,0 3 0 16,1 3 0-16,0 2-6 0,1 2-8 0,-1 3-12 0,0 1-6 0,0 3-10 15,0 1-26-15,1 0-12 0,-1 2-26 0,0 0-46 0,-1 1-47 16,1 0-70-16,0 0-84 0,-2 1-88 0,2-1-218 0,0 1-465 0</inkml:trace>
+  <inkml:trace contextRef="#ctx0" brushRef="#br0" timeOffset="60854.58">11618 8706 1606 0,'-2'-3'322'16,"1"1"-95"-16,-2-2-21 0,1 2-10 0,0 1-13 0,0 0-22 15,0 1-35-15,0 0-17 0,0 0-8 0,1 1-3 0,0 0 4 0,1-1-13 16,0 1-3-16,0 0-13 0,0 0-2 0,1 0-6 0,0 0-5 0,2 0-3 15,1 2-2-15,0-1-9 0,3 1 8 0,0-1-52 0,2 1-2 16,3-1 0-16,1-1 0 0,1 0 0 0,2-1 0 0,2-1 0 0,3-1 0 16,1 0 0-16,4-2 0 0,-1 0 0 0,4 0 0 0,0-3 0 0,0 1 0 15,2 0 0-15,-2-1 0 0,1 1 0 0,-1-1 0 0,0 2 0 16,-1-1 0-16,0 0 0 0,-1 1 0 0,0 1 0 0,-1-1 0 0,-1 0 0 16,-1-1 0-16,-2 1 0 0,-2 0 0 0,-1 0 0 0,-2 1 0 15,-2-1 0-15,0 1 0 0,-1 0 0 0,-2 0 0 0,1 1 0 0,-2 1 0 16,-1 0 0-16,-1 0 0 0,-2 1 0 0,-1-1 0 0,-1 2 0 15,-1 0 0-15,0 0 0 0,-2 0 0 0,-1 0 0 0,0 0 0 0,-1 0 0 16,0-1 0-16,-1 1 0 0,-1-1 0 0,0 0-42 0,-1 0-87 0,0 0-37 16,0-1-57-16,0-1-73 0,2 0-94 0,0-1-87 0,1-1-223 0,1-1-434 15</inkml:trace>
+  <inkml:trace contextRef="#ctx0" brushRef="#br0" timeOffset="61154.58">12922 8395 1753 0,'2'0'463'0,"2"-1"-216"16,1-1-41-16,-1 0-19 0,1 0-16 0,0 1-23 0,0-1-24 0,0 1-13 15,0-1-14-15,0 1-4 0,1 0-10 0,1 0-8 0,0-1-18 16,-1 0-14-16,1 0-10 0,0 0-8 0,0 1-3 0,0-1-2 0,1 0-5 16,0 1-9-16,0-2 4 0,0 1-6 0,1 0-6 0,0-1 10 0,0 0-6 15,-1 0 0-15,2 0-2 0,-1 0-4 0,0 0 4 0,1-1-8 16,-1 1-2-16,-1-2-7 0,2 1-15 0,-1-1-7 0,1 1-23 0,0 0-21 16,0 0-36-16,0-1-36 0,-2 1-54 0,1 0-68 0,0 0-83 15,-1 0-94-15,-1 0-214 0,0 0-376 0</inkml:trace>
+  <inkml:trace contextRef="#ctx0" brushRef="#br0" timeOffset="61338.01">13120 8624 1961 0,'3'9'399'0,"1"-2"-196"16,1 4-31-16,3-4-4 0,-1-1-10 0,4-1-18 0,1-1-20 15,2-1-15-15,0-1-7 0,0-2-8 0,1-2-13 0,1-1-12 0,0-1-21 16,-1-1-13-16,1-1-6 0,0 0-13 0,-1 0 3 0,-2 0-7 0,0 0-8 15,-1-1 4-15,-1 0-12 0,-1 1-11 0,-2-1-43 0,0 0-55 16,-1 0-104-16,-1-1-160 0,0 1-204 0,-1-2-511 0,0-1 45 0</inkml:trace>
+  <inkml:trace contextRef="#ctx0" brushRef="#br0" timeOffset="63604.54">13923 7168 1266 0,'1'4'255'15,"1"0"-182"-15,1 2-9 0,0 0 13 0,0 0 30 0,0 0 23 0,1 0 5 16,1 0 1-16,-1 0-21 0,1-1-12 0,1 0-15 0,-1-1-15 0,2 0-9 16,1 0-3-16,1 0-2 0,0-1-9 0,2 0 0 0,2 1-6 0,2-1-3 15,1 1-3-15,2-2-7 0,1 0-9 0,2 0-4 0,-2 0-4 16,3 0 1-16,1 0-4 0,0 0 5 0,1 0 5 0,-1-1-7 0,2 2 2 15,-1 0-7-15,-1 1-6 0,1 0-3 0,0 0 2 0,0 0 5 16,0 2-7-16,-2 0 2 0,1 2-6 0,-1 0-1 0,-2 2 5 0,0 1-2 16,-2-1 0-16,-4 2-3 0,0 0-2 0,-3 0-2 0,-1 1 0 0,-2 1 2 15,-2 1-2-15,-2 2 2 0,-2 0-1 0,-4-1-5 0,-1 2 1 16,-3 0-5-16,-3 0 4 0,0 0 1 0,-1 1-7 0,-1-2 4 0,0-2-4 16,0 1 1-16,0-1 10 0,-1 0-1 0,1-2 4 0,1 0 3 15,1-3-1-15,3 0 1 0,1-2-1 0,1 0-1 0,1-2-2 0,2-2-11 16,0-1-5-16,3 0-17 0,0 0-8 0,2-2-5 0,0-1-2 0,2-1 5 15,0-1-1-15,4-1-4 0,1-1-14 0,1 0-12 0,2-1-15 16,-1-2-7-16,2 1 6 0,0-1 5 0,2 0 11 0,-2 0 2 0,1 0-3 16,2 1-19-16,0 0-22 0,0 2-74 0,2 0-57 0,0 0 26 0,-2 0 22 15,0-1 18-15,0-2-152 0</inkml:trace>
+  <inkml:trace contextRef="#ctx0" brushRef="#br0" timeOffset="64371.53">13964 8315 1756 0,'0'-1'159'0,"0"-1"-28"0,1 0 0 0,1-2 19 0,0 0 17 0,2 0-4 16,0 0-12-16,2-1-21 0,1 1-19 0,0 0 1 0,2 1-17 0,1-1-12 15,2 2-5-15,3-2-8 0,2-2-9 0,4 0-3 0,2-1-5 16,0-1-10-16,3 0 3 0,0 1 8 0,2-2-6 0,2 1-3 0,2-3-2 16,1-2-19-16,2-2-9 0,2-1 1 0,2 1-12 0,0-2 0 0,3-1 4 15,2-1 0-15,0-1-2 0,4-2 2 0,0 2-2 0,2-2-4 16,1 2-2-16,-1 0 4 0,-1 0-4 0,0 0 2 0,-1 1 4 0,0-1-4 15,-4 1 2-15,-1 2-4 0,-2 3 4 0,-3 0 2 0,-3 1-12 16,-2 2 8-16,-2 2-2 0,0 1-2 0,-5 2 8 0,0 0-8 0,-5 2-2 16,-3 1-2-16,-3 2-8 0,-2 1-8 0,-4 1-18 0,-3 1-26 0,-2 1-20 15,-5 1-20-15,-1 2-22 0,-4 1-30 0,-4 1-38 0,-2 1-42 16,-4 2-54-16,-1 0-81 0,-4 1-199 0,-2 0-585 0</inkml:trace>
+  <inkml:trace contextRef="#ctx0" brushRef="#br0" timeOffset="64739.01">14159 8706 2330 0,'5'-2'179'16,"3"0"-34"-16,1 1-16 0,3-2 14 0,0-1 1 0,1 0-6 0,2-1-25 15,-1-1-22-15,1 0-11 0,0 1-11 0,-1-2-11 0,0 1-11 16,0 0-14-16,0 1-11 0,-1 1-6 0,0 1-9 0,-2 0 3 0,0 0-6 16,-1 1 3-16,-1 2-1 0,-2 1-8 0,0 1 6 0,-1 1-4 0,-3 2-6 15,0 0 1-15,-1 4-9 0,-2 1 1 0,0 3-2 0,-2 2-1 0,-1 0-1 16,0 3-4-16,-3-1 1 0,0 1 1 0,0 0 0 0,-1 0 8 16,1 2-1-16,-1-3-8 0,2 1 7 0,0-1-4 0,1-1 17 0,1-1 9 15,1-1-3-15,2 0 0 0,2-2-5 0,0-2 3 0,2 0 0 0,2-2 3 16,0-1-7-16,1-2 6 0,1-1-4 0,2-1 2 0,1-2-1 15,0-2-5-15,2-1 6 0,0-1-4 0,2-2-2 0,-2-1 2 0,2 0 2 16,0-2-2-16,0 0 2 0,1 1-6 0,-2-3-1 0,0-1-10 0,0 1-21 16,-1-1-19-16,0 0-24 0,0 2-31 0,-2-2-18 0,1 1-25 15,-2 1-42-15,-1-1-48 0,1 0-58 0,0 0-101 0,-1-1-173 0,0 0-332 16</inkml:trace>
+  <inkml:trace contextRef="#ctx0" brushRef="#br0" timeOffset="64957.01">14683 8710 1936 0,'7'-3'196'16,"1"0"-45"-16,5 0-5 0,0-1 10 0,-1 0-3 0,1 0-22 16,0-1-30-16,0 1-22 0,-1-1-11 0,0 1-10 0,0-1-12 0,0 1-7 15,-2-1-10-15,0 1-15 0,-1-1-3 0,2 1-6 0,-2 0-3 0,1 0-2 16,0-1-2-16,-2 0-7 0,0 0-2 0,-1 0-8 0,0 1-26 15,0-1-6-15,-1 0-25 0,-1-1-31 0,0 0-25 0,0-1-43 0,-1 1-31 16,0-1-23-16,1 1-53 0,-2 0-90 0,-2 0-147 0,-1 1-267 0</inkml:trace>
+  <inkml:trace contextRef="#ctx0" brushRef="#br0" timeOffset="65104.01">14866 8507 864 0,'-7'1'588'0,"-1"0"-364"0,0 0-24 0,0 2-11 15,1 0-11-15,1 0-9 0,-1 2-8 0,1 1-9 0,1 1 4 0,0 0-13 16,2 1-11-16,0 0-12 0,1 0-23 0,2 2-11 0,0-1-21 15,1 3-11-15,2 0-11 0,0 0-13 0,1 2 0 0,2-1-12 0,0 1-5 16,2 2-4-16,-1-1-7 0,0-1-4 0,0 1-9 0,0-2-31 0,-2 0-63 16,1-2-90-16,0-1-136 0,1-1-220 0,1-1-478 0,1-1-40 15</inkml:trace>
+  <inkml:trace contextRef="#ctx0" brushRef="#br0" timeOffset="69554.45">15055 8323 729 0,'-3'4'397'0,"-1"0"-288"0,0 0-59 0,0 0-14 15,1-2 7-15,1 0 25 0,0 0 28 0,2-1 17 0,0 0-4 0,0-1-25 16,-1 1-20-16,1-1-19 0,0 0-15 0,-1 0 1 0,1 0-2 16,1 0 1-16,-1 0 2 0,1 0-8 0,-1-1-4 0,1 1-5 0,1 0-7 15,0 0 0-15,0 0-7 0,-1 1 0 0,0 0 5 0,1 0-3 0,-1 0-1 16,0 0-1-16,0 1-1 0,0-1-1 0,0 1 2 0,0-1 1 16,0 0 2-16,0 0-3 0,-1 0 1 0,1 0-1 0,-1-1 1 0,1 1 1 15,-1-1 0-15,1 0 1 0,-1 1 1 0,0-1-3 0,0 1 0 0,-1-1 2 16,1 1 4-16,0-1 4 0,0 0 2 0,0 0 3 0,0 1 2 15,0-1-1-15,0 0 0 0,0 1-1 0,0-1 1 0,0 1 3 0,1-1-4 16,-1 0 1-16,0 1 4 0,1-1-7 0,0 0 7 0,0 0 2 0,0 0-9 16,1 0 7-16,0 0-1 0,1-1 6 0,0 0 0 0,2 1-2 15,-1-1 1-15,2 0-2 0,0 1 4 0,-1-1-2 0,2 1-3 0,1-1 3 16,0 1-6-16,2 0 3 0,2 0 1 0,-1 0-1 0,1 0 4 16,2 0-7-16,-1-1-1 0,2 1-2 0,-2 0-3 0,2 1 1 0,0 1-3 15,0 0-7-15,0 1 0 0,-1 1 0 0,0 0-1 0,-1 0 6 16,-2 0-3-16,-2 1-2 0,-2 0-1 0,0 1-1 0,-2 2 1 0,-3 0-3 15,0 1 4-15,-3 0-3 0,0 1 3 0,-2-1 4 0,-2 2-2 0,0 0 2 16,-1 1-8-16,0-1 3 0,-4 0-4 0,0 0 2 0,-1 1-4 0,0-1 2 16,1 0 2-16,2-1-1 0,-1-1 1 0,1-3 0 0,1 1-4 15,-1-1 6-15,2 0-4 0,0-2 3 0,2 0-3 0,1 0-5 0,1-2 10 16,1 1-5-16,0-1 0 0,2 0 0 0,0 0 0 0,1-1 2 16,2 0-2-16,0-1 5 0,3 1-3 0,0-1-2 0,2-1 3 0,2 1-3 15,0-1 6-15,1 1-5 0,3-1 1 0,0 0-4 0,2 1 2 0,-1 0-1 16,1 0 2-16,0 0 5 0,-1 0-5 0,2 0 1 0,-1 0 2 15,0 1-4-15,-1 2-2 0,0 1 0 0,0 2 2 0,-2-2 2 0,-1 2 3 16,0 0 0-16,-1 1 6 0,-1 0-4 0,-2 2 5 0,-1 1-3 0,-3 1-2 16,0-1 0-16,-3 1-5 0,0 1 5 0,-3 0-2 0,-1 0 4 15,-1-1 2-15,-3 1 0 0,1 1-10 0,-3 0 6 0,-2 1-8 0,0-1-1 16,-1 2 5-16,1-3-17 0,1-1 4 0,-1-1-3 0,0-4-1 16,1 1 12-16,1-1 0 0,1-3 1 0,1-1-3 0,1-3-10 0,2-1-18 15,0-2-22-15,3-2-29 0,-1-1-26 0,0-2-43 0,0-4-58 0,2-3-62 16,1-5-113-16,0-2-191 0,3-3-338 0</inkml:trace>
+  <inkml:trace contextRef="#ctx0" brushRef="#br0" timeOffset="69754.45">15639 7815 2123 0,'-8'0'192'0,"0"0"-111"0,-2 0 14 0,3 1 20 16,3-1 12-16,1 1 9 0,1-2-11 0,1 1-14 0,2-1-18 0,1 0-20 15,2-2-18-15,1 0-11 0,1-1-8 0,3-1-5 0,1-1-5 16,1-2-8-16,3 1-3 0,0-1-7 0,1-1 1 0,0 0-4 0,-1 0-5 16,2-1 6-16,-1 1-6 0,1 2 2 0,-2-1-8 0,0 2-9 15,-1-1-18-15,-1 2-22 0,-2 0-28 0,0 1-43 0,0 2-45 0,0 1-58 16,-1 2-80-16,-1 1-93 0,-2 3-209 0,0 1-400 0</inkml:trace>
+  <inkml:trace contextRef="#ctx0" brushRef="#br0" timeOffset="69871.45">15751 7892 1624 0,'1'4'177'0,"1"-1"-80"0,2 1-27 0,2-2-10 16,0-1-2-16,3-1-8 0,2-2-18 0,0 0-11 0,1-2-10 15,1-2-5-15,0 0-10 0,2-3-31 0,1 0-50 0,1 0-83 0,1-2-77 16,2 1-155-16,0-2-459 0</inkml:trace>
+  <inkml:trace contextRef="#ctx0" brushRef="#br0" timeOffset="70221.95">16203 6806 450 0,'-3'0'93'0,"-1"0"-41"16,0 0-3-16,2 0 1 0,0-1 4 0,0 1-7 0,1 0-9 15,0-1-12-15,1 0-10 0,-1 0-10 0,1 0-9 0,1 0-12 0,-1 0-17 16,0 1-12-16,1 0-17 0,0 0-19 0,1 0-19 0,-1 1-36 0,1 0-55 16,-1 2-6-16</inkml:trace>
+  <inkml:trace contextRef="#ctx0" brushRef="#br0" timeOffset="70454.95">16243 6838 162 0,'-1'0'184'0,"1"-1"-55"15,-1 1-19-15,1 0-14 0,0-1-7 0,0 1 3 0,1-1-1 0,-1 1-9 16,1-1-3-16,-1 1-13 0,1 0-16 0,0 0-8 0,0 0-7 0,1 0 0 16,-2 0 2-16,2 0-3 0,-2 1-3 0,1-1-1 0,0 0-5 15,-1 0-1-15,1 1-5 0,-1-1-7 0,0 1-2 0,-1-1-3 0,2 0 4 16,-2 1-2-16,1-1-6 0,0 1-3 0,0-1 0 0,-1 1-3 0,0-1 7 16,1 1-4-16,0 0-8 0,0-1-3 0,-1 1-9 0,1 0-2 15,0 0-3-15,0 0-9 0,0 1-2 0,0-1-7 0,1 1-1 0,-1 0 0 16,0-1-2-16,1 1 0 0,-1 0-6 0,0-1-6 0,1 1-4 15,-1 0-10-15,0-1-5 0,2 0-8 0,-1 0-5 0,-1 1-6 0,1-1-9 16,0-1-13-16,0 0-99 0</inkml:trace>
+  <inkml:trace contextRef="#ctx0" brushRef="#br0" timeOffset="75921.59">15963 6791 1733 0,'-4'-2'242'0,"0"0"-108"16,-3 0-2-16,1 0 13 0,0 0 4 0,0 0 1 0,0 1-18 0,1-1-23 15,0 0-11-15,-1 1-21 0,1-1-5 0,-1 1-8 0,2-1-9 0,0 0-3 16,1 0-3-16,0-1-3 0,1 1-4 0,0-2-3 0,1 1 6 16,1-1-11-16,-1 0 1 0,2-2-1 0,0 0-5 0,1-1-5 0,1-1 1 15,1-1-4-15,1 0-3 0,2 0 3 0,1 0-8 0,2-1 1 0,1-1-3 16,1 0 5-16,0 0-2 0,1 1-3 0,0 3-3 0,1-1-4 15,1 1-2-15,-1 0-4 0,2 2-2 0,-1 0 4 0,1 2 0 0,-1 1 0 16,1 1 0-16,1 2-2 0,-1 0 2 0,1 1-2 0,-1 1 4 16,0 2-4-16,-1-1 4 0,1 2 0 0,-2 1-4 0,-1 0 2 0,-1 1-2 15,-2 2 4-15,0 3-2 0,-1 1-2 0,-2 1 0 0,-1 1 2 0,-2-1-2 16,-2 1-2-16,-2 1-5 0,-1 0 3 0,-1 1 0 0,-2 1-4 16,-1 1 4-16,-3 1-5 0,-1 1 1 0,-1-1-5 0,0 1-1 0,-2 0-1 15,0 0-6-15,-1 0 6 0,0 0 2 0,2 0 7 0,-1-1 8 16,1-1 8-16,1-1 1 0,1 0-11 0,1-2 4 0,1-1 0 0,4-2-4 15,0-2 6-15,1-1-2 0,3-3 0 0,0-2 0 0,2 0-2 16,2-2 3-16,1-1-1 0,2-2 4 0,1-2 2 0,3-1-3 0,1-2 3 16,1-1 0-16,3-1 1 0,1-2-3 0,0-2 2 0,1-1-4 0,1-2 0 15,2-1-2-15,0 2-1 0,0-2 1 0,0 1-4 0,1 0 1 0,0 1-11 16,-1 0 6-16,1 0 0 0,-1 1-1 0,0 1 7 0,1 1-4 16,-1 2 17-16,-1 0-3 0,0 0-6 0,-3 2-12 0,-2 0-36 0,-1 0-23 15,-1 2-33-15,-1 1-44 0,-4 0-49 0,1 1-83 0,-2 1-90 0,-2 1-112 16,-1 1-250-16,-2 2-251 0</inkml:trace>
+  <inkml:trace contextRef="#ctx0" brushRef="#br0" timeOffset="76138.59">16304 7541 2241 0,'9'0'242'0,"2"-1"-160"0,7-3-17 0,0-2 14 16,4-2 25-16,4-2 23 0,1-1 5 0,4-3-22 0,-1 1-14 15,3-3-17-15,-1-1-10 0,2 0-12 0,-2 1-11 0,1 1-6 0,-2 1-10 16,0 1 0-16,-1 2-10 0,0 0-3 0,-3 0 2 0,1 1-4 16,-3 1-1-16,-2 1-7 0,-1 1-8 0,-3 1-1 0,1 1 0 0,-3 0-8 15,-1 1-9-15,-4 2-15 0,1 0-26 0,-2 1-35 0,-2 1-53 0,-1 1-74 16,-2 0-89-16,-2 3-96 0,-1 0-115 0,-1 2-415 0,-2 0 193 16</inkml:trace>
+  <inkml:trace contextRef="#ctx0" brushRef="#br0" timeOffset="76388.59">16737 7763 2099 0,'6'5'379'16,"2"1"-277"-16,4 0-31 0,1-1 10 0,1 0 23 0,0-1 19 16,3 1 4-16,1-1-15 0,0-1-23 0,-1-1-17 0,-1 0-16 0,1 1-15 15,-2 0-8-15,0 2-6 0,-1 0-4 0,0 0 5 0,-1-1-4 0,-2 0-9 16,1 1-6-16,-2-1-9 0,-1 3 2 0,-1 2 0 0,-1 0 2 15,-2 0 0-15,0 0 1 0,-1 0-3 0,0-1-6 0,0 0 3 0,-1 0-1 16,-1 0 4-16,-1 0 1 0,-1 0-1 0,-1 1-2 0,-1 0-2 16,-1 0 2-16,-1 0 0 0,-1 0 0 0,0-1 0 0,-1 0-11 0,0-1-6 15,-1 0-7-15,-1 0-19 0,0 0-11 0,-1-1-21 0,0 0-25 0,0-1-23 16,-2-1-23-16,0-1-26 0,0-1-36 0,-1-1-47 0,-1-3-97 16,2-2-167-16,-1-2-263 0,-1-2 165 0</inkml:trace>
+  <inkml:trace contextRef="#ctx0" brushRef="#br0" timeOffset="76538.58">16733 7615 1972 0,'1'-12'298'0,"1"-1"-170"0,1-4-15 0,1 1-2 15,2 0-4-15,1 2 0 0,1 0-1 0,1-1-14 0,1 2-18 0,-1 0-19 16,0 0-20-16,1 2-17 0,-1-1-10 0,0 2-8 0,0 2-19 16,-1 2-36-16,-1 0-42 0,1 1-63 0,-2 1-66 0,0 0-81 0,0 0-99 15,1 1-233-15,-1 1-282 0</inkml:trace>
+  <inkml:trace contextRef="#ctx0" brushRef="#br0" timeOffset="76889.58">17183 7279 2374 0,'-3'-6'298'0,"0"0"-182"0,-1-1-10 0,0-1 3 15,2 1 7-15,2 0 0 0,-1 1-7 0,1-2-19 0,1-2-24 0,-1-1-14 16,2 0-9-16,1 0-13 0,2 1-6 0,0 1-7 0,1 1-3 0,1 1 3 16,0 1-6-16,1 0 2 0,-1 2-3 0,1 1-4 0,-3 1-6 15,2 1 4-15,-1 1-4 0,0 1-2 0,0 1 2 0,0 1-10 0,0 1 4 16,0 1 4-16,0-1-1 0,0 2 3 0,0-1-6 0,0 0-7 0,1 0-6 16,1 0-10-16,-1-1-7 0,1-2-3 0,-1 0 0 0,1 0-6 15,-1-1 5-15,0-2 1 0,0-1-2 0,0-1 6 0,1 0 8 0,-1-2 11 16,0-1 5-16,-1 0 0 0,0-1 8 0,0-2-6 0,-2 1 11 15,1-1 1-15,-1 0 1 0,1 2 3 0,-1-2-3 0,-1 1-1 0,0 0 1 16,0 0-1-16,-1 1 6 0,0 0-5 0,1 1 3 0,-1 1-1 16,0 0-8-16,0 0 5 0,0 1 6 0,0 1-9 0,1 1-1 0,-1 1 2 15,0 1-2-15,0 0 4 0,0 2-3 0,0 1-2 0,-1 0-3 0,1 1 1 16,0 1-1-16,0 0-27 0,0-1-36 0,-1 1-51 0,1 0-59 0,-1 0-54 16,-1 1-51-16,1 0-71 0,-1 0-137 0,0 1-537 0</inkml:trace>
+  <inkml:trace contextRef="#ctx0" brushRef="#br0" timeOffset="77088.3">17411 7397 2001 0,'4'-2'205'0,"3"-2"-98"0,3 0 1 0,0-2 18 15,1 1 23-15,2-2-6 0,-2 1-29 0,1 0-30 0,-1-1-25 0,0-1-17 16,-1 0-12-16,0 0-11 0,-1 1-10 0,0 0-9 0,-1 2 0 15,-1 0-16-15,0 2-28 0,-2 1-32 0,-1 1-47 0,0 1-35 0,0-1-37 16,1 0-50-16,-2 0-58 0,2 0-112 0,0 0-167 0,0-1-177 0</inkml:trace>
+  <inkml:trace contextRef="#ctx0" brushRef="#br0" timeOffset="77489.3">17932 7064 1813 0,'-2'3'263'0,"-1"1"-89"0,0 2-15 0,0 2-7 0,2 0 4 0,1 1-17 16,1 1-13-16,0 0-19 0,1 1-14 0,1 0-15 0,0 0-10 15,1 0-12-15,0 0-12 0,2 0-11 0,0 0-9 0,1-1-2 0,0-1-7 16,2-2 2-16,-1 0-10 0,1-2 3 0,1-1-5 0,1-1 1 0,0-1 1 16,2-2-5-16,0-1 4 0,0-2-1 0,0-1-1 0,0 0 0 15,1-3-2-15,-1 1 0 0,0-2-4 0,0 1 2 0,-3-2 0 0,-1 0-6 16,0-1 4-16,0 0-3 0,0-1-1 0,0 0 10 0,0-2 3 0,-4 1 3 16,1 0 6-16,-2-2 3 0,-2 1 2 0,-1 0 4 0,-2 0-1 15,-1 2 9-15,-2-2-3 0,-2 0-10 0,-2 0-3 0,-3 0-8 0,-3 2 1 16,-1-1 21-16,-3 3-2 0,-2 1-5 0,-2 2 3 0,0 2-19 15,-2 1-6-15,0 2 4 0,3 2-6 0,-1 2-4 0,0 2 0 0,3 2-10 16,0 2-1-16,0 2 7 0,2 1 8 0,1 1 15 0,1 1-1 0,2 0-6 16,3 1-2-16,1-2-28 0,2 1-23 0,3-1-28 0,3-1-38 15,1 0-44-15,4-2-57 0,2 0-70 0,5-2-91 0,1-2-106 0,6-2-218 16,3-1-337-16</inkml:trace>
+  <inkml:trace contextRef="#ctx0" brushRef="#br0" timeOffset="77655.28">18367 7139 2360 0,'-3'10'272'0,"0"2"-133"0,1 2-16 0,0 1-9 15,1 0-19-15,1 1-2 0,0 0-22 0,0 2-24 0,-1-1-18 16,2-2-19-16,-1-1-4 0,2-1-2 0,0-2-4 0,0 1-2 0,1-2-6 16,0-2-17-16,0-2-39 0,1 0-53 0,0-3-77 0,1 0-86 15,-1-2-105-15,1-1-178 0,1-3-574 0</inkml:trace>
+  <inkml:trace contextRef="#ctx0" brushRef="#br0" timeOffset="77955.28">18610 6643 1636 0,'-7'9'842'15,"1"2"-712"-15,-1 5-9 0,1-2 14 0,3 2 14 0,0 3 2 0,2 0-7 16,2 2-31-16,0 2-36 0,2-1-14 0,0 1-10 0,1 0-8 0,1-2-4 15,0 2-4-15,2-2-26 0,1-2-7 0,0 1 0 0,1-3 2 16,-1-2 9-16,1-1 0 0,2-3 1 0,0-2-12 0,1-2 3 0,0-3-5 16,1-2-4-16,1-3 4 0,2-3-8 0,-1-3 4 0,1-3-5 0,0-1-11 15,-1-3-8-15,0 0-1 0,0-2 19 0,0-1 12 0,0 0 11 16,-1 1 2-16,-1-2-13 0,-1 1 2 0,-2 1 6 0,-1 1 5 0,-1 1 4 16,-2 3-3-16,-1 3 1 0,-3 3 0 0,0 3-5 0,-2 2 6 15,0 3-5-15,-1 2 1 0,-1 3 2 0,0 4-1 0,-2 3-5 0,-1 3-6 16,-1 3-4-16,-1 2-16 0,-2 2-7 0,0 2 13 0,-1 1-26 15,0 3-20-15,-1-1-52 0,2 1-114 0,0-2-166 0,3-1-164 0,2-2-355 16,2-5-283-16</inkml:trace>
+  <inkml:trace contextRef="#ctx0" brushRef="#br0" timeOffset="78522.28">17251 7117 891 0,'-8'-3'279'0,"0"1"-117"0,-3-3 6 0,-1 1 9 15,0 1 0-15,0 1-3 0,0 0-18 0,2 1-21 0,-2 1-13 16,1 0-16-16,0 0-5 0,1-1-11 0,1 1-6 0,1 0-5 0,1 0-6 16,0 0 4-16,2 0 3 0,2 0 1 0,1-1 1 0,1 0 3 0,1 0-7 15,1-1 6-15,3-1-11 0,1-1-4 0,3 0-2 0,1-2-4 16,4 2-2-16,3-2-11 0,1 0 1 0,2 0-9 0,4-1-12 0,0 1-14 15,1-1-10-15,0 1-6 0,-1-1 2 0,0 1 4 0,1-1-6 16,-2 0 6-16,1 1-8 0,-1 0 4 0,-1-1 4 0,-1 2 0 0,0 0-6 16,-3 1 0-16,0 0 0 0,-1 1 0 0,-1 0-10 0,-2 1-34 0,0 1-29 15,0 0-25-15,-2 0-28 0,0 2-36 0,-2 0-48 0,0 2-64 16,-2 1-77-16,0 1-86 0,-2 0-148 0,-2 2-545 0</inkml:trace>
+  <inkml:trace contextRef="#ctx0" brushRef="#br0" timeOffset="78656.28">17330 7319 2200 0,'-2'7'255'16,"1"0"-106"-16,1 1-18 0,2 0 3 0,3-2 9 0,2-1 8 0,2 1-16 15,3-1-20-15,3-2-19 0,2-2-14 0,0 0-16 0,3-3-11 16,1 0-19-16,0-1-9 0,1-1-14 0,0 0-9 0,-2 0 0 0,0 1-4 16,-1-1-6-16,-1 0-17 0,-2-1-30 0,0-1-44 0,-2 1-59 0,1-2-89 15,-1 0-134-15,1-2-178 0,0 1-488 0,0-3 114 0</inkml:trace>
+  <inkml:trace contextRef="#ctx0" brushRef="#br0" timeOffset="98572.65">3735 13177 1961 0,'-26'3'750'0,"1"0"-662"0,-3 2-65 0,8-2-16 16,8 0-5-16,2 0 11 0,2-2 5 0,2 0-2 0,2 0 0 0,1-1-9 15,2 0-5-15,1-1-6 0,1 1-2 0,1-2-3 0,0 1-1 16,3-1 7-16,1-1-1 0,1-1 1 0,3-1 0 0,-1-1 1 0,3 0 4 16,1-1-2-16,2 2 6 0,1-3-2 15,1 1-4-15,2 0 5 0,1-1-2 0,0 2 4 0,2 0 0 0,1 1-4 0,-2 1 0 0,1 1-3 16,-1 1 4-16,2 3-3 0,0 1 1 0,0 2 0 0,-1 3-6 0,0 1 6 15,-4 2 0-15,0 3-6 0,-3 1 3 0,-1 3-4 0,-4 1-2 16,-1 2 5-16,-2 1-3 0,-4 3 0 0,-2-1-7 0,-3 2 11 0,-1 1 2 16,-1-2-2-16,-4 4 6 0,-1-2-7 0,0 0 4 0,-4-2-1 0,-1-1 10 15,0-1-3-15,-1-2 4 0,-1 0 3 0,0-1 0 0,-1-2 7 16,2-2 7-16,0 0 0 0,2-2 7 0,2-2-3 0,1-2 0 0,4-2 4 16,0-2-4-16,3-2-2 0,1-1-10 0,3-2-3 0,1 0-11 15,1-2 3-15,3 1 1 0,2-1-4 0,3 0 10 0,4-1-7 0,3-2-2 16,1 1 4-16,3-1-5 0,2 0 1 0,-1 1 3 0,3 0-11 0,-1 1 5 15,2 1 0-15,-1 2 4 0,2 3-1 0,-1 0 3 0,-1 2-2 16,2 2-7-16,-3-1 7 0,2 3-11 0,-2 1 2 0,0 0-2 0,0 2-3 16,-2 1 8-16,0 0 1 0,-2 1 1 0,-1 0-1 0,-2 2-2 0,-3-1 9 15,-3 1-6-15,0 2 6 0,-2-2 0 0,-4 0-11 0,-1 0 15 16,-3 1 0-16,-3 0 2 0,0-2 1 0,-4 1-16 0,-1-1 11 0,-2 0 8 16,-2-2-5-16,1 2 13 0,-4-1-13 0,1 0-8 0,-2-2-2 15,-2 1 5-15,1-2-2 0,-2-2-9 0,0 0-5 0,1-2-5 0,0-1-10 16,1-2-5-16,-1 0-23 0,0-2-43 0,0-1-28 0,-1-2-38 0,1-1-36 15,-1-2-45-15,-2-2-84 0,0-4-128 0,-1-3-151 0,-2-2-353 16</inkml:trace>
+  <inkml:trace contextRef="#ctx0" brushRef="#br0" timeOffset="99006.64">3021 13452 2688 0,'-31'-18'183'0,"1"0"-99"0,-5-3-36 0,9 1-9 0,8 1 5 15,3 1 13-15,1-1 3 0,3 0-7 0,4-1-13 0,2-2-19 16,3-2-15-16,2 1-1 0,2-2 2 0,2 0-3 0,2 2 5 16,3-1-4-16,3 1 1 0,2-1 3 0,3-1-4 0,2-1 3 0,4 0-7 0,3 0 3 15,3-2-8-15,2 2 4 0,0-1 0 0,3-1-3 0,3 1 6 16,2 0 8-16,1 1-1 0,2-1-1 0,3 3-13 0,2 0 8 0,3 4 5 16,0 3-4-16,0 2 12 0,2 1-17 0,2 2-2 0,0 2 6 15,1 2-4-15,-1 0 1 0,2 2-2 0,0 2-3 0,1 2 0 0,0 1 4 16,0 2 2-16,-1 3-2 0,2 3-2 0,-1 4-1 0,1 1 6 0,0 5-3 15,-3 3-7-15,0 3-4 0,-1 5-5 0,0 4 6 0,2 8 12 16,0 7 0-16,-1 4-13 0,-1 5 2 0,-4-2 0 0,-2-1-7 0,-2 0 16 16,-4-3-11-16,-1 1 7 0,-3 0-7 0,-5-1 6 0,-2 1 12 0,-7 1-16 15,-2-1 16-15,-4-1-3 0,-3 1-13 0,-4 1 7 0,-5 2 0 16,-4 1-7-16,-4 1 9 0,-6-1 0 0,-3-2 2 0,-4 0-2 0,-6 0-2 16,-5-1-3-16,-5 0 0 0,-6-1 1 0,-3 1 2 0,-6-4-1 15,-4-2 6-15,-5-2-3 0,-5-1 2 0,-2-4 5 0,-4-2 0 0,-4 0 8 16,-1-4-13-16,-2-2 19 0,-2-4 5 0,-2 0-3 0,-4-3 23 0,-2-3-6 15,-2-2 16-15,0-2 11 0,-1-3 10 0,3-2 7 0,1-2-10 16,3-2-6-16,0-4 2 0,4-2-8 0,1-2-6 0,5-3-56 0,5-3 0 16,3-3 0-16,4-3 0 0,5-4 0 0,4-1 0 0,3-5 0 0,3-2 0 15,5-3 0-15,6-3 0 0,3-2 0 0,4-3 0 0,7-9-64 16,3-3-51-16,7-7-47 0,6-8-68 0,5-6-91 0,8-7-116 0,6-7-234 16,9-8-653-16</inkml:trace>
+  <inkml:trace contextRef="#ctx0" brushRef="#br0" timeOffset="101789.56">5932 12395 1644 0,'-4'0'280'0,"-1"1"-85"0,-1 1-17 0,1-1 3 0,2 0 10 15,0 1-13-15,1 0-8 0,-1 0-28 0,-1 0-12 0,1 1-11 16,0 0-9-16,-1 0 2 0,1 2-21 0,-2-1-14 0,1 0-7 0,0 2-16 16,1 0-5-16,0 2 5 0,0 0-14 0,2 2-10 0,0 0-30 0,0 1 0 15,2 3 0-15,0 1 0 0,2 2 0 0,0 1 0 0,2 2 0 16,-1 2 0-16,2-1 0 0,0 4 0 0,2 0 0 0,2 1 0 0,0 3 0 15,1-1 0-15,0 4 0 0,0-1 0 0,1 2 0 0,1-1 0 16,0 2 0-16,0 1 0 0,2-1 0 0,0 2 0 0,1-2 0 0,-1 0 0 16,-1-2 0-16,0 0 0 0,0-4 0 0,0 0 0 0,-1-3 0 0,0-2 0 15,0 0 0-15,0-5 0 0,-1 0 0 0,-1-2 0 0,-1-2 0 16,-3-2 0-16,0-2-38 0,-2-3-22 0,0-2-21 0,-1-3-22 0,-2-1-21 16,-3-2-36-16,1-3-44 0,-1-4-35 0,-3-2-58 0,-1-4-40 15,-2-2-86-15,-1-2-125 0,-1-3-394 0</inkml:trace>
+  <inkml:trace contextRef="#ctx0" brushRef="#br0" timeOffset="101972.56">5936 12787 1118 0,'-13'-15'379'0,"0"-1"-163"16,-2-4-42-16,2 5-30 0,3 2-10 0,-1 1-7 0,1 1-9 0,1 2 11 15,0 2-16-15,2 3 8 0,1 0 5 0,2 1-12 0,0-1 8 16,1 1-15-16,1 1-8 0,2-1-14 0,0-1-11 0,2 1-11 0,1-1-16 16,3-1-2-16,1-1 4 0,3 1-11 0,2-2 1 0,2 2 1 0,1-2-15 15,-1 1-1-15,3 1-7 0,1 0-11 0,1-1 0 0,0 1-4 16,0 1 2-16,0-1-4 0,2 1 0 0,-1 0 0 0,2 0 0 0,-1 0-2 15,-1 1 6-15,2-2-8 0,-2 1-12 0,1 0-11 0,0 0-29 16,-3 1-17-16,1 0-29 0,-2 1-33 0,-1 0-40 0,1 1-50 0,-1 0-71 16,-1 2-73-16,-3 1-131 0,1 1-317 0,-3 1-3 0</inkml:trace>
+  <inkml:trace contextRef="#ctx0" brushRef="#br0" timeOffset="102157.28">6102 12919 2339 0,'-7'10'286'15,"0"0"-100"-15,1 1-45 0,4-3-16 0,3-5-2 0,2 0-11 16,0-1-12-16,2-2-10 0,1 0-10 0,0-3-11 0,2 0-2 0,1-2-10 16,1-2-13-16,2 0-3 0,1-1-12 0,0-1-5 0,2-1-13 0,0 0-5 15,1-1 0-15,-1 2-6 0,0-1 4 0,0 1 0 0,1 0-8 16,0 2-2-16,-1-1 0 0,-1-1-15 0,1 1-20 0,-1 0-29 0,1 0-37 16,-1 0-23-16,0 1-32 0,2 0-46 0,1-1-48 0,-1-1-69 0,3 1-113 15,0-1-241-15,0-2-336 0</inkml:trace>
+  <inkml:trace contextRef="#ctx0" brushRef="#br0" timeOffset="102356.25">6771 12309 2358 0,'-12'2'520'0,"-1"1"-319"16,0 2-6-16,1 1-10 0,4 1-10 0,2 2-15 0,0 1-30 0,0 3-21 15,2 0-47-15,1 0-62 0,0 2 0 0,0 1 0 0,3 0 0 16,0 2 0-16,2 1 0 0,2-1 0 0,0 3 0 0,2 1 0 0,-1-1 0 15,2 3 0-15,1-1 0 0,1-1 0 0,1 0 0 0,0-2 0 0,2-2 0 16,1-1 0-16,1-1 0 0,-1-2 0 0,2 0 0 0,0-2 0 16,2-1 0-16,0-2-102 0,1-1-104 0,2-2-87 0,1 0-112 0,-1-1-138 15,1-1-307-15,0-1-308 0</inkml:trace>
+  <inkml:trace contextRef="#ctx0" brushRef="#br0" timeOffset="102823.25">7324 12743 1824 0,'-7'1'387'0,"-1"0"-171"16,-1-1-24-16,2 0-17 0,3-1 5 0,2-1-4 0,1 1-9 0,0-2-23 15,1 1-29-15,2-1-21 0,-1 0-12 16,1-1-5-16,1-1 1 0,1-1-10 0,2-1-12 0,1 0 6 0,1 0-60 0,1 0-2 0,2-1 0 16,0 0 0-16,-1 0 0 0,1 0 0 0,0-1 0 0,0 1 0 0,1 0 0 15,-1 1 0-15,0 0 0 0,0 0 0 0,0 1 0 0,-1 1 0 16,1-1 0-16,-2 1 0 0,0 1 0 0,1 0 0 0,-1 1 0 0,-1 0-62 15,1 1-56-15,-1 0-49 0,-1 1-57 0,2 0-95 0,0 1-97 0,1 0-145 16,0 1-338-16,0-1-59 0</inkml:trace>
+  <inkml:trace contextRef="#ctx0" brushRef="#br0" timeOffset="103190.25">7835 12298 1212 0,'-9'-3'864'0,"-1"-2"-667"0,-3 0-57 0,1 0-17 16,0 2-3-16,1 0-3 0,-2 2-7 0,-1 1-17 0,1 0-6 0,-2 2-5 15,0 1-6-15,0 1-7 0,-1 1-4 0,1 1-1 0,0 0-16 0,0 1-2 16,1 1-3-16,1 1-4 0,0 2 2 0,0 0-3 0,2 0 0 16,1 0-4-16,2 0-5 0,1 0 4 0,3 0-6 0,0-1-6 0,3 1 0 15,1-1-5-15,3 0-6 0,1 0 3 0,1-1-7 0,5 0-4 16,3 0 4-16,1-1-8 0,4-1 2 0,0 0 2 0,2 1-6 0,3-2 8 15,0 0 2-15,2-2-8 0,1 0-4 0,0-1 6 0,0 0-2 0,-1-1 4 16,-1 0 0-16,-3 0 0 0,-1 0-4 0,-1 0-2 0,-2 1 6 16,-2 0-4-16,-1 0-2 0,-4 1 2 0,-3 1 0 0,-1-1-1 0,-4 1 6 15,0 1 1-15,-3 0-2 0,0 1 0 0,-3 0 0 0,-2 1 0 0,-1-1-4 16,-4 2 2-16,-2-1-6 0,-2 1-1 0,0-1 1 0,-3 0-22 16,0 0-3-16,0-1-4 0,-2-1-1 0,1 1 9 0,1-1 8 0,2-1-4 15,-1-1-7-15,3 0 9 0,2-1-13 0,3-1-13 0,1-1-20 16,2 1-36-16,2-2-31 0,1 1-26 0,3-1-28 0,0 0-37 0,2 0-24 15,2 0-45-15,3-1-72 0,2-1-168 0,2-1-333 0</inkml:trace>
+  <inkml:trace contextRef="#ctx0" brushRef="#br0" timeOffset="103689.81">8242 12431 1729 0,'1'-4'566'15,"0"0"-342"-15,0-3-57 0,-1 1-11 0,-1 0-5 0,0 1-8 16,-2 1-21-16,0-1-28 0,-2 2-11 0,-2 0-13 0,-1-1-3 0,-1 1 1 15,0 1-9-15,-1 0 0 0,-1 0-15 0,1 2-3 0,-1 0-5 0,0 1-14 16,0 1 9-16,-1 0-11 0,0 2-12 0,-1-1 5 0,0 2-7 16,2 2 14-16,0 1 6 0,0 0-8 0,1 1-4 0,1 0 2 0,1 2 0 15,2 0-10-15,1 2-6 0,2-1 0 0,1 0 0 0,2 2 0 0,2 0 0 16,0 2 0-16,3-1 0 0,1-2 0 0,2 2 0 0,2-2 0 16,1-1 0-16,0-1 0 0,3-1 0 0,-2-1 0 0,3-1 0 0,1-2 0 15,-1 0 0-15,1-2 0 0,0-1 0 0,1 0 0 0,-1-1 0 0,0-1-20 16,0 0 14-16,-2-1-2 0,0-2 6 0,-2 0 6 0,1 0-10 15,0-1 12-15,-2 1 0 0,-1-2-4 0,-2 0 0 0,0 0 0 0,1-2-4 16,-1 1 2-16,0-1-2 0,-1 0 2 0,1 1 2 0,-1 0-2 0,-2 0 4 16,2 0-4-16,-1 1 0 0,0 0 8 0,0 2-8 0,0 0 6 15,-1 1-4-15,1 0 0 0,-1 1-2 0,1 0 0 0,-1 2 0 0,0-1 0 16,1 1 0-16,-1 0 0 0,1 0 0 0,-1-1 0 0,1 0 0 16,0 0 0-16,0 0 0 0,0-1 0 0,-1-1 0 0,0-1 0 0,0 0 0 15,-1-2 0-15,1 1 0 0,0-2 0 0,0 0 0 0,1-1 0 0,-2-1 0 16,-1-2 0-16,0 0 0 0,0-1 0 0,-1 0 0 0,-2 0 0 15,-1 0 0-15,-1 1 0 0,-1 0 0 0,-1 2 0 0,-1 0 0 0,-1 0 0 16,0 0 0-16,-2 0 0 0,-1 0 0 0,1 0 0 0,-2 1 0 0,-1 1 0 16,0 1 0-16,-1-1 0 0,2 1 0 0,-1 1 0 0,0 1 0 15,1 1 0-15,1 2 0 0,0 1 0 0,1 1 0 0,0 0 0 0,0 2 0 16,0 0 0-16,1 1 0 0,1 1 0 0,1 0 0 0,1 0 0 16,1-1 0-16,1 1 0 0,1-1 0 0,2-1 0 0,1 1-40 0,1-1-69 15,3 1-8-15,0 0-19 0,4 0-26 0,1-1-34 0,-1-1-29 0,4-1-28 16,1-1-17-16,1-1-20 0,0-2-39 0,3 0-73 0,0-1-67 15,1 0-306-15</inkml:trace>
+  <inkml:trace contextRef="#ctx0" brushRef="#br0" timeOffset="103939.81">8739 12485 463 0,'9'1'347'0,"1"2"-38"0,2 1-52 15,-2 1-34-15,-3-1-21 0,0 2-24 0,-1 0-12 0,0 1-13 0,-1 0-19 16,-1-1-22-16,0 1-18 0,0-1-15 0,0 0-23 0,0 0-10 0,-1 1-9 16,2 0-15-16,-2-1-4 0,1 1-8 0,0-1-3 0,-1 0 0 15,0 0 1-15,-1-1 4 0,1 0-5 0,-2 1-4 0,1 0 0 0,-2-1-4 16,0-1 6-16,-1-1 3 0,-1 0-1 0,0 0 5 0,-2-1 2 15,-1-1 6-15,-1 0 15 0,0-2 12 0,-1 0 9 0,1-2 4 0,-1-2 11 16,1 0-1-16,-1-2 1 0,0 0-3 0,-1-2-10 0,2 0-2 0,-1-1-3 16,1-2-2-16,0 0 2 0,1-2-3 0,-1 1-7 0,2-2-4 15,0-1-8-15,0 1 5 0,2 0-11 0,0 1-9 0,1 0-2 0,1 1-4 16,1 0-4-16,1 3 6 0,0 1-6 0,1 0-8 0,1 2 2 16,-1 0-4-16,1 1-2 0,2 1 2 0,0 0 2 0,0 2-10 0,1-1-6 15,0 1-18-15,1 0-19 0,0 1-17 0,0 0-22 0,2 0-24 0,1 0-10 16,2 0-28-16,1 0-19 0,-1 0-26 0,0-1-28 0,1 1-22 15,2 0-19-15,-1 0-43 0,1 1-89 0,2 0-133 0,1-1-180 0</inkml:trace>
+  <inkml:trace contextRef="#ctx0" brushRef="#br0" timeOffset="104605.87">9194 12438 1087 0,'-7'5'527'0,"1"-1"-285"15,-1 2-55-15,0-2-22 0,2-1-2 0,1 1-17 0,0-1-22 0,1-1-17 16,0 1-16-16,0 0 0 0,0 0-4 0,1 0-3 0,1-1 0 0,-1 0-14 16,2-1-11-16,1-1 2 0,-1 1-8 0,2 0 2 0,0 0-9 15,1 0-6-15,1-1-5 0,1-1-7 0,1 0 1 0,1-1-9 0,0 1-6 16,0-1-3-16,1-1 1 0,0-1-7 0,0 0 7 0,0-1-8 0,1 0-10 16,-2 0 10-16,2-2-2 0,-1 0 3 0,0-1 1 0,0-1-6 15,0 1 0-15,0-2-2 0,-1 1 6 0,0-1 2 0,-1 0-8 0,-2 0 0 16,1 1-2-16,-1-2 4 0,-1 0 8 0,-1 0-8 0,-1 1 0 15,0 0-6-15,-2 3 4 0,0-1 0 0,-2 1 2 0,0 0-4 0,-1 1-9 16,-1 1 2-16,-1 0-1 0,-1 2 4 0,-1 0 8 0,-1 2-3 0,-1 0 1 16,0 1-2-16,0 1 2 0,0 0 2 0,0 2 2 0,0 0-2 15,1 1 2-15,0 2 2 0,0 0-2 0,3 2 1 0,-2 0 1 0,1 1 4 16,1 1 1-16,-1 3 5 0,3 0-3 0,-1 2-1 0,2-2-5 0,2 1 7 16,0 1-2-16,3 0-1 0,0-1 7 0,1 1-5 0,2 1-3 15,1-1 7-15,1 0-9 0,1-2 0 0,1 0 8 0,0 0-12 0,2-2 5 16,1 0-9-16,0-2 1 0,2-2 1 0,0 0-2 0,1-2 4 15,1-2-6-15,0-1 0 0,-1-1-2 0,2-1-6 0,0-1-7 0,-1-1-12 16,0-2-17-16,0-1-17 0,0-1-25 0,-3-1-33 0,2 0-30 0,0-1-39 16,0-1-44-16,0-1-54 0,-1-1-83 0,1 0-141 0,-1-1-264 15,0 0 50-15</inkml:trace>
+  <inkml:trace contextRef="#ctx0" brushRef="#br0" timeOffset="104823.87">9788 12344 2141 0,'-4'3'337'0,"1"0"-108"0,0 2-30 0,0-1-19 16,3-1-11-16,0-1-21 0,1 1-23 0,0 1-9 0,0-1-14 15,0 0-13-15,1 0-13 0,0-1-19 0,1 1-6 0,-1-1-3 0,3 0-20 16,0 0-28-16,1 0 0 0,0-1 0 0,0 1 0 0,1-1 0 0,0 0 0 16,0-2 0-16,0 0 0 0,-1 0 0 0,3-1 0 0,-1-1 0 15,1 1 0-15,1-1 0 0,-1 0 0 0,1 0 0 0,0 0 0 0,1-1 0 16,0 1-48-16,1 1-20 0,0-1-12 0,-1 1-9 0,1-1-13 15,0 1-24-15,1 0-24 0,-1 0-34 0,-1 1-35 0,0 1-35 0,-1 0-55 16,-1 0-92-16,-1 0-190 0,0 1-414 0</inkml:trace>
+  <inkml:trace contextRef="#ctx0" brushRef="#br0" timeOffset="105072.99">9939 12615 2282 0,'-1'4'287'0,"2"0"-78"16,1 1-32-16,1-2-24 0,2-2-13 0,0 0-20 0,1-1-21 0,1 0-5 16,-1-1-6-16,2 0-12 0,-1-1-7 0,1 0-11 0,0-1-9 15,0 1-18-15,1-1-1 0,0 0-11 0,-2 1-1 0,1-1 0 0,0 0-2 16,-1 2-4-16,1-3-2 0,-1 1-8 0,1 0 2 0,0 0-2 16,-2 0 2-16,1 0-4 0,-1 0 0 0,0 0 4 0,0 0-8 0,-1 0 8 15,0 1-18-15,0-2 0 0,-1 1-12 0,1 0-22 0,-1-1-5 0,0 0-30 16,1 1-9-16,-1-1-32 0,0 1-43 0,0-1-44 0,0-1-66 15,-1 0-69-15,0 1-92 0,-1-1-187 0,0 1-429 0</inkml:trace>
+  <inkml:trace contextRef="#ctx0" brushRef="#br0" timeOffset="115907.67">10467 11173 890 0,'-1'1'413'0,"-1"0"-200"0,1 1-52 0,-1 1-24 0,1 0-10 0,0 0-11 16,1-1-14-16,-1 1-12 0,0 0-12 0,0 1-7 0,-1-1-3 15,1 0-4-15,1 0-2 0,-1 0-8 0,1 1-4 0,0 0-13 0,-1 0-2 16,1 1-9-16,1-1-4 0,-2 0 4 0,1 1 1 0,0 0 3 0,-1 0 4 15,1 0 2-15,0 0 1 0,-1 0 10 0,1-2 1 0,-1 2 0 16,0 0-3-16,0-1-7 0,0 1 4 0,1-1-4 0,-2 0-2 0,2 0 0 16,-1 0-8-16,-2 0-3 0,2 0-3 0,0 0-3 0,-1 0-5 0,1 0 7 15,-1-1-5-15,1-1 3 0,-1 0 0 0,1 0-8 0,-1 0 6 16,1-1-4-16,0 0 4 0,0 0 5 0,0 0-1 0,-2 0-4 0,1 0-3 16,-1 0 5-16,-1 0-2 0,1 0 2 0,0-1 4 0,0 0-6 0,0 1 2 15,1-1 5-15,-1 1-1 0,0-2-2 0,-1 1 7 0,2-1-3 16,-1-1 3-16,1 0-5 0,0 0 1 0,-1-1-2 0,1 0-4 0,0 0-2 15,1 0 2-15,0 0-6 0,1-1-12 0,0 0 0 0,1 0 0 0,0 0 0 16,1-1 0-16,1 0 0 0,0 0 0 0,2-1 0 0,1 0 0 16,0-1 0-16,0 0 0 0,2 1 0 0,1-1 0 0,1 0 0 0,0 0 0 15,2 0 0-15,-2 0 0 0,2 1 0 0,1 0 0 0,0 0 0 16,1 3 0-16,-1-1 0 0,1 1 0 0,1 1 0 0,0 0 0 0,-2 2 0 16,2 1 0-16,-1 1 0 0,2 0 0 0,-1 2 0 0,0-1 0 0,0 1 0 15,-1 1 0-15,0 0 0 0,0 1 0 0,0 1 0 0,-2 1 0 16,-1 0 0-16,-1 1 0 0,-3 0 0 0,0-1 0 0,-1 2 0 0,-2 1 0 15,-1 0 0-15,-2 1 0 0,-1-1 0 0,-2 2 0 0,-2 0 0 0,-1 2-4 16,-1 0-16-16,-2 0-18 0,-2 0 10 0,-1 1 24 0,-3 1-2 16,-1-1 18-16,0 2 2 0,-1-1-14 0,0-2 8 0,-1 2-6 0,1 0 4 15,-1 0-8-15,1-2 10 0,1 0 12 0,2-3-8 0,2-1 6 16,2-1-16-16,2-3-2 0,3 0 0 0,1-2 0 0,2 0 0 0,1-1 0 16,3-1 0-16,1-1 0 0,2-1 0 0,2 0 0 0,2-1 0 15,1-1 0-15,1 0 0 0,2-1 0 0,2-2 0 0,2 0 0 0,0 0 0 16,2-1 0-16,1 0 0 0,-2 0 0 0,1 1 0 0,0 0 0 0,-1-1 0 15,1 1 0-15,0 0 0 0,-1-1 0 0,0 1 0 0,1 1 0 0,-1-1 0 16,0 1 0-16,-2 0 0 0,0 0 0 0,-3 1 0 0,1 0 0 16,-2-1 0-16,0 2 0 0,-3-1 0 0,1 1 0 0,-1 0 0 0,-1 0 0 15,0 1 0-15,-1-1 0 0,0 1 0 0,-2-1 0 0,0 1 0 16,0-1 0-16,-1 1 0 0,-1 0 0 0,-1-1 0 0,0 1 0 0,0-2 0 16,0 1-14-16,0-1-139 0,-1 0-48 0,1-1-46 0,0-1-81 0,0-1-95 15,1-1-107-15,2-1-194 0,0-2-306 0</inkml:trace>
+  <inkml:trace contextRef="#ctx0" brushRef="#br0" timeOffset="119990.48">11485 11040 1405 0,'1'15'545'0,"1"4"-382"0,1 5-9 15,1 1-8-15,0-1 1 0,3 2-14 0,3 1-18 0,0 2-19 0,2 3-9 16,-1 0-3-16,-2 3-9 0,3 0-24 0,2 0-17 0,0-1-5 15,2-1-19-15,-2 0 8 0,1-1 0 0,1 1-14 0,1-3-1 0,-1 0-4 16,0-4-1-16,0 0-4 0,-2-2 1 0,-1-1 0 0,-1-3-6 0,0-2-2 16,-2-4-6-16,0-1-24 0,-3-3-31 0,0-1-30 0,-1-2-32 15,-2-2-25-15,-1-2-38 0,-1-1-57 0,-1-2-57 0,-1-3-120 0,-2-1-287 16,-1-1 74-16</inkml:trace>
+  <inkml:trace contextRef="#ctx0" brushRef="#br0" timeOffset="120240.48">11536 11256 1399 0,'-8'-9'529'16,"0"0"-341"-16,-2-2-4 0,2 2-15 0,3 2-13 0,4 0-11 0,0 0-17 16,2 0-14-16,1 1-9 0,3-1-1 0,2 0-8 0,1 1-12 15,1-1-11-15,2 1-10 0,-1 1-9 0,1 2-1 0,1 0-2 0,2 1-13 16,0 1-2-16,0 1-3 0,0 1-4 0,0 1 2 0,1 1-12 0,-1-1-1 16,-1 3-2-16,1 0-5 0,0 1 5 0,-1 1-4 0,-1 2-14 15,-1-1 2-15,1 2-2 0,-1-1 0 0,-1 1 10 0,0 2-8 0,-2 0-6 16,-1 1 4-16,-1 1-2 0,-1-1-4 0,-2 2-6 0,-1 1-13 0,-2 0-14 15,-1-2-7-15,-2 1-8 0,-1 0-18 0,-2-1-17 0,0-2-27 16,0-1-15-16,-1-1-5 0,0-2-9 0,1-1 16 0,-1-2-4 0,0-1 0 16,2-2-8-16,0-3-11 0,2-2-8 0,1-2-15 0,2-2-2 15,1-1-9-15,3-3-24 0,1-1-33 0,2-2-44 0,2-4-87 0,1 0-51 16</inkml:trace>
+  <inkml:trace contextRef="#ctx0" brushRef="#br0" timeOffset="120473.99">11972 11124 878 0,'8'-1'408'16,"1"2"-130"-16,3 1-42 0,-1 2-21 0,-3 1-19 0,1 1-26 15,-1 0-27-15,-1 3-19 0,1 0-9 0,0 1-14 0,-1 1-6 0,-1-1-13 16,0 0-16-16,-1 0-2 0,-1 1-9 0,0 0-7 0,-2 1-5 0,0-1-10 16,-1 0-6-16,-2-1 2 0,0 0 2 0,-2-2-5 0,0 0 0 0,-2-1-6 15,0-1-9-15,-1-1 2 0,-2-2-4 0,0-1-5 0,0-1 2 16,0-2-4-16,-1-1-2 0,0-2 7 0,0-2-1 0,1-2-1 0,0-2-3 16,1-2-2-16,0-2 4 0,3-1 0 0,0-2 5 0,0-1-5 15,2-3 3-15,0 1-3 0,1-2 2 0,1 0-3 0,1-2-3 0,1 0 4 16,3 2-6-16,1 1 8 0,0 3-2 0,3 4-6 0,0 0-4 15,1 3-5-15,1 1-8 0,0 0-7 0,0 3-11 0,2 2-17 0,-1 0-17 16,1 1-25-16,1 1-24 0,-2 1-29 0,2 0-41 0,1 2-39 0,0 1-40 16,-2 1-40-16,0 1-23 0,-1 0-79 0,0 1-98 0,-1 1-100 15</inkml:trace>
+  <inkml:trace contextRef="#ctx0" brushRef="#br0" timeOffset="121090.99">12308 11121 1605 0,'-1'9'367'15,"2"-1"-69"-15,0 1-40 0,0-1-33 0,1-2-31 0,0-1-43 0,1-2-26 16,1-1-20-16,1-1-10 0,0-2-13 0,0-1-9 0,1-1-5 15,1-3-17-15,-1 0-4 0,1-3-6 0,0 1-7 0,1-4-7 0,-1-1-7 16,1-2-1-16,0 0-13 0,0-2 6 0,-3 1 0 0,1 0-5 0,-1 2-1 16,0-2 6-16,-1 1-8 0,-1 0 4 0,-2 1 2 0,0 0-8 15,-2 0-6-15,0 1 4 0,-2 1 2 0,-1 3-4 0,-1-1 11 0,0 2-12 16,-2 2-1-16,1 2 10 0,-2 2-5 0,0 2 3 0,-1 1-6 0,0 2-3 16,0 2-3-16,0 2 2 0,1 2 8 0,-1 2 0 0,1 2 0 15,2 2 2-15,1 1-6 0,2 0 8 0,1 0-1 0,2 1-1 0,2 1 2 16,1-1-12-16,1 3 8 0,2 0 2 0,2-1-8 0,1 0 6 15,0 0-8-15,3-3 2 0,1 0 3 0,2-1-7 0,0-1-2 0,1-1 2 16,1-4-2-16,-1 0-9 0,0-3-5 0,0-1-5 0,1-1-18 0,0-1-8 16,-1-2-18-16,0-1-17 0,-1-3 0 0,1-2-11 0,-2-1-9 15,2-1-13-15,-2-3-12 0,1-2-8 0,-3-2 3 0,2-3 15 0,0 0 28 16,0 0 32-16,0-3 31 0,-2-1 23 0,0 0 16 0,0 0 15 0,-1 0 20 16,0 1 13-16,-2 0 14 0,-1 1 4 0,-1 1-5 0,0 0 2 15,0 3-8-15,-1 1 2 0,0 5-1 0,-2 2-2 0,1 1 10 0,-1 3-9 16,-2 1 7-16,-1 2-13 0,0 2-5 0,0 1 2 0,-1 0-11 0,0 2-3 15,1 0-8-15,-1 0-9 0,0-1-1 0,1 0-6 0,0-1-4 16,0-1-1-16,0 0-8 0,1-1 7 0,-1 0 5 0,0-1-5 0,0-1 3 16,0 0-3-16,0 0-1 0,-1 0 1 0,-1-1-1 0,0 0-2 15,-1-1-8-15,-1 0 4 0,-1 0 4 0,0 2-4 0,-2-1 0 0,0 0-8 16,-1 1-3-16,-1 1 9 0,0 2-2 0,0 0 2 0,-1 1 0 0,0 3 1 16,1 1 1-16,-1 2 0 0,1 2 1 0,0 0-1 0,1 2-3 15,2-1 1-15,1 1 4 0,2 0 0 0,2 0-2 0,2 0 7 0,2-1-11 16,2 0 2-16,2 0 6 0,1-2-6 0,3-1 8 0,0-1-4 0,3-1-2 15,0 0 2-15,0-1-8 0,1-2 6 0,1 0-4 0,2-1-1 16,-1-2 8-16,0-1-8 0,1-1-1 0,-1-1-1 0,0-1 5 0,0 0-4 16,-1-1 4-16,-1-1 2 0,-1-1-5 0,-1 0 8 0,0 1-1 15,-1-1 0-15,-3 0-4 0,0-1-1 0,-1 1 1 0,-1-1-2 0,0 1 10 16,-1 1-1-16,0 0 1 0,-1 0-2 0,-1 1-6 0,0 1 7 0,0 0 5 16,0 1-5-16,0 0 7 0,-1 2-5 0,0 0 3 0,0 1 5 15,-1 0-4-15,0 2-7 0,1-1 5 0,0 2-3 0,-1 0 3 0,1 1-1 16,0 0-4-16,-1 1 0 0,2 0-2 0,-1 0 1 0,0 0-3 0,1 0-3 15,0 1-5-15,0-1 2 0,0 1-7 0,0-1-12 0,0 0-18 16,-1-2-38-16,0-2-44 0,0 0-62 0,0-2-95 0,-2-1-119 0,2 0-149 16,-2-3-219-16,1-2-145 0</inkml:trace>
+  <inkml:trace contextRef="#ctx0" brushRef="#br0" timeOffset="121223.99">13254 10817 1959 0,'-3'0'374'0,"0"0"-150"0,-1 1-26 0,1 2-27 0,1-1-37 0,0 1-42 15,1 1-32-15,0-1-10 0,1 0-9 0,-1 0-9 0,0-1-8 16,1 0-11-16,0 0-19 0,2-1-16 0,-1-1-28 0,2 0-37 0,0-1-39 16,1-2-59-16,0 0-67 0,3 0-79 0,0-2-78 0,2 0-138 0,1-2-405 15</inkml:trace>
+  <inkml:trace contextRef="#ctx0" brushRef="#br0" timeOffset="121624.56">13522 10660 1740 0,'-8'7'260'0,"0"0"-38"0,-3 3-6 0,2-1-14 0,1 0-36 16,2 0-35-16,1 0-19 0,1 1-9 0,1-1-13 0,1 0-9 0,2-1-20 15,2-2-28-15,1 1-2 0,2-1-14 0,0-1-6 0,2 1 9 16,2 1-3-16,0 0 12 0,0 0 1 0,1-1-5 0,1 0-7 0,1 1-8 16,-1 0-3-16,0-1 5 0,0 1-10 0,2 0 1 0,0 0-5 0,0 0 2 15,0-1 2-15,-2 1-2 0,1 0 0 0,-1-1 0 0,0 0 0 16,-2 0-3-16,-1 2-5 0,-3-1 0 0,0 0-5 0,-2 1-11 0,-2 0-8 15,-2-1-11-15,-2-1-12 0,-1 0-11 0,0 1-5 0,-3 0-6 16,0-1 1-16,-2 0 1 0,-2 0 4 0,1-2 14 0,0 0 20 0,1-1 17 16,0-2 11-16,0-2 9 0,1-1 12 0,1-2 17 0,0 0 10 0,2-1 18 15,1-1-2-15,0-2-1 0,3 0-6 0,0 0-14 0,2 0 1 16,1-1-8-16,1-1-7 0,2 0-4 0,1 0-11 0,1 1 8 0,1 0 0 16,1 0-6-16,0 0 4 0,0 1-4 0,1 1 0 0,0 0 4 0,1 0-3 15,1 2-7-15,0 0 3 0,-2 2-2 0,2 0 0 0,0 1 0 16,-1 1-2-16,0 1 0 0,0 1-2 0,-1 0 0 0,1 1 7 0,-1 1 3 15,1 0 8-15,0 1 4 0,-2 0 3 0,1 1-7 0,-1-1 3 16,0 0-3-16,0 0-4 0,-1-1-3 0,0 1 0 0,-1-1-5 0,1-1-2 16,-1 0 4-16,0 0-5 0,0-1-6 0,-2-1-12 0,0 0-11 0,-1-1-18 15,0-1-24-15,-1-1-28 0,-1 0-50 0,0 0-80 0,0-2-95 16,-2-1-127-16,0-1-200 0,-1-1-414 0</inkml:trace>
+  <inkml:trace contextRef="#ctx0" brushRef="#br0" timeOffset="121774.56">13821 10537 2052 0,'-5'3'352'0,"1"1"-126"0,-2 2-34 0,0 0-25 16,1 0-39-16,1 1-26 0,0 1-22 0,2 0-15 0,-1 0 1 0,2-1-13 15,0 1-12-15,1-1-17 0,0-1-3 0,1-1-12 0,0-1-7 16,1-1-6-16,2 0-26 0,-1-1-20 0,2-1-38 0,1 0-33 0,0-2-40 16,0-1-62-16,2 0-60 0,0-1-73 0,2 0-71 0,1-1-106 15,2-1-385-15</inkml:trace>
+  <inkml:trace contextRef="#ctx0" brushRef="#br0" timeOffset="122040.56">14192 10670 1840 0,'3'8'290'0,"1"-1"-65"0,2 3-23 0,1-2-24 0,0-3-46 16,1 1-25-16,2-2-13 0,-2 1-12 0,2-1 0 0,-1-2-7 0,1 0-14 16,0-1-5-16,1-1-8 0,-2-1-5 0,2 0-2 0,0-2-4 0,-1 0-3 15,0-2-8-15,-1 1 2 0,-1-2-5 0,0 0 2 0,-1-1-2 16,0-1 2-16,-2 0-10 0,0-1 5 0,-1 0-3 0,-1 1-5 0,0-2 9 15,-2 0-6-15,-1 0-5 0,-1 0 0 0,-2 0-2 0,0 2-8 16,-2 0 2-16,-1 2 2 0,-1-1-8 0,-1 2 4 0,-2 0 0 0,1 0-6 16,-3 0 0-16,0 2-2 0,-1-1 6 0,0 2 2 0,0 1 0 0,0 0-4 15,0 1-7-15,1 1-5 0,0 2-7 0,2 1 7 0,0 0 3 16,1 3-12-16,3 0-4 0,1 1-13 0,1 2-15 0,2 0-7 0,1 2-23 16,1 0-25-16,1-1-23 0,2 0-22 0,2-1-31 0,1-2-35 0,3 1-44 15,2-2-47-15,1-1-44 0,3-2-81 0,2-1-194 0,1-2 78 16</inkml:trace>
+  <inkml:trace contextRef="#ctx0" brushRef="#br0" timeOffset="122325.55">14571 10553 1538 0,'0'-1'427'0,"2"1"-177"0,-1 0-49 16,1-1-24-16,-1 2-23 0,1 0-44 0,-1 0-20 0,1 2-19 0,-1 0-7 16,1 1-1-16,1 0-7 0,-1 0-4 0,1 0-16 0,0-1-9 0,0 1-13 15,1 0-5-15,-1 0-2 0,0-1-1 0,1 2-5 0,0 0 1 16,0-1-2-16,0 1-3 0,0 1 4 0,-1-1-6 0,0 1-2 0,0 0-2 15,-1-1-4-15,1 0-1 0,-1-1-4 0,1-1 0 0,0 0 0 16,0-1 7-16,0 0-1 0,0 0 1 0,0-1 1 0,0 0 8 0,-2-1-2 16,2-1 3-16,1-1 1 0,-1 0 0 0,2-1 5 0,-1 0 2 0,1-1 0 15,1-1-5-15,-1 1 3 0,1-1 2 0,-1-1-3 0,1 1-1 16,1-1 3-16,-3 0 1 0,2 1 4 0,1 1-3 0,-1 0 0 0,0 1 1 16,1 1 3-16,0 1 4 0,0 1-1 0,0 1 3 0,-1 1-2 0,1 1-5 15,0 1 2-15,0 1-6 0,0 0-5 0,-1 0 2 0,0 1 1 16,1 1-3-16,0-1 3 0,0 0-3 0,-1 0-6 0,1-1-8 0,-1-1-25 15,0 0-19-15,-2-1-36 0,1-1-52 0,-1-1-50 0,-1 0-78 16,0-1-79-16,-1-1-135 0,0-2-293 0,-2 0 8 0</inkml:trace>
+  <inkml:trace contextRef="#ctx0" brushRef="#br0" timeOffset="122974.29">11240 11273 1565 0,'-3'-2'393'0,"-1"1"-121"0,-1 0-59 15,1 1-23-15,1-1-9 0,1 1-19 0,0-1-7 0,-1 1-21 0,1 0-7 16,-1 1-12-16,1 0-23 0,1 0-6 0,0 0-6 0,0 0-12 16,1 1-8-16,-2 0-3 0,1 1-8 0,1 0-5 0,-2 0 0 0,2 2-36 15,-2 0-8-15,2 0 0 0,0 1 0 0,-1 0 0 0,2-1 0 0,-2 0 0 16,0-1 0-16,1 1 0 0,-1 0 0 0,1 0 0 0,0-1 0 16,-1 1 0-16,1-2 0 0,0 1 0 0,0 0 0 0,0-1 0 0,0 0 0 15,0 0 0-15,-1 0 0 0,1-1 0 0,-1 0 0 0,2 0 0 16,-1-1 0-16,1 0 0 0,0 0 0 0,-1-1 0 0,1 0 0 0,-1 0 0 15,0-1 0-15,1 0-62 0,0-1-140 0,0 0-100 0,2-1-166 0,0-1-250 16,2 0-543-16</inkml:trace>
+  <inkml:trace contextRef="#ctx0" brushRef="#br0" timeOffset="123507.3">15259 10367 2524 0,'0'4'407'0,"-1"0"-249"0,1 1-21 0,-1-2-11 0,2 0-11 16,1 0-10-16,2 2-24 0,0-1-24 0,1 2-7 0,-1-1-2 0,-2-2-8 15,1 0 1-15,0-1-14 0,-2 0-17 0,1-1 2 0,-1-1-6 0,0 1-2 16,1-2 2-16,-1 1-4 0,0 0 0 0,0-2 0 0,0 1-12 16,1-2 0-16,0 0-19 0,0 1-18 0,1-3-19 0,-1 0-22 0,0-1-22 15,1-1-38-15,0 0-46 0,-1-1-63 0,1 0-80 0,0 0-68 0,1 0-151 16,0 0-548-16</inkml:trace>
+  <inkml:trace contextRef="#ctx0" brushRef="#br0" timeOffset="124157.29">15539 10081 1515 0,'-6'-5'379'0,"-1"0"-194"15,0-2-17-15,1 1-11 0,0 1-1 0,1 1-18 0,0 1-17 16,1 3-7-16,1 0-13 0,0 1-4 0,-1 1-5 0,1 1-8 0,0 2-7 15,0 0-18-15,0 2-4 0,2 3-11 0,1 1-8 0,1 4 7 0,2 0-15 16,0 2-5-16,3 3-2 0,0 1 13 0,1 3 8 0,1 1-3 16,1 0-3-16,0 2-22 0,1-2-8 0,1 2-4 0,1-2 0 0,-1 0-6 15,1-1 4-15,-2-2 2 0,2 0-6 0,0-2 4 0,-1-3-4 0,0-1 0 16,-2-3 0-16,2-1-2 0,-2-3 5 0,0 0-7 0,0-1-4 16,0-2-7-16,-2-1-14 0,0-2 10 0,-2 0-4 0,0-1 6 0,-1-1-5 15,-1-2-6-15,-1 1-10 0,-1-2-16 0,-2-1 3 0,0-2-19 16,-1-1 11-16,0-1 0 0,-1-3 0 0,-1 1 16 0,-1-3-2 0,-1-1 8 15,-1-1 10-15,-2-2 5 0,0-1 13 0,-1-2 9 0,0 0 4 16,-2-1 4-16,1 0 6 0,-2-1 5 0,-1 0 8 0,-1-1 1 0,1-1 6 16,-2 1 3-16,1-1-1 0,0 2 8 0,1-1-22 0,0 0-2 0,1 4 18 15,1-1-5-15,2 1 14 0,1 3 1 0,1 1-18 0,2 0 5 0,2 2 4 16,1 1-2-16,1 1-1 0,1 2 3 0,1 1-3 0,1 0 4 16,0 1 0-16,1 1-5 0,0 0 1 0,2 0-5 0,1 0-4 0,1 2 3 15,1-1-1-15,2 2-12 0,0 1 11 0,1 1-14 0,1 1 7 16,1 0 5-16,0 1-12 0,1 1 5 0,0 2-11 0,1 0-4 0,-1 1 4 15,0 0-4-15,0 1 6 0,-1 1 0 0,-1-1-2 0,-1 2 6 0,0 0-14 16,-1 0 0-16,-1 1 0 0,0 0-6 0,-2 2-2 0,-1-2-5 16,-1 3-13-16,-1 0-26 0,-2-1-10 0,-1 2-11 0,-1-2 10 0,-2 1 3 15,-1-1-12-15,-1 0-7 0,-2-1-3 0,-1-1 12 0,-1 0 21 0,-1-1 21 16,1 0 7-16,-2 0 15 0,0-1 10 0,0 0 1 0,0 1 3 16,0-1 8-16,0 1-7 0,1-1 4 0,0 0 11 0,1 0-10 0,1-1 21 15,3-2 3-15,2 1-4 0,3-2 14 0,1 0-10 0,2 0 6 16,2-1 3-16,2 0-8 0,2 0 11 0,1 0-3 0,2-1-3 0,0-1 1 15,3-1-8-15,0 1-9 0,2-2 3 0,-2 0-15 0,2-1 5 0,0 0-2 16,0 0-7-16,-1-1 10 0,0 0-9 0,0 1 11 0,-1 0 1 16,-1-1-9-16,0 1 3 0,-3-1-9 0,0 1-12 0,-2-1 3 0,-1 1 3 15,-1 0-10-15,0 1-8 0,-1-1-13 0,0 0-25 0,0-1-17 0,-1 1-20 16,1-1-21-16,-1 0-32 0,0 0-42 0,0-1-63 0,0 1-65 16,0 0-54-16,1 0-61 0,-1 0-77 0,0 0-315 15</inkml:trace>
+  <inkml:trace contextRef="#ctx0" brushRef="#br0" timeOffset="124441.29">15982 10299 1364 0,'1'4'327'0,"1"0"-71"16,0 2-25-16,0-1-22 0,1 0-23 0,0-1-27 0,1-1-27 16,-1 0-17-16,2 0-15 0,-2 0-11 0,2-2-2 0,1 0-14 0,0-2-8 15,1 0-6-15,1-2-7 0,0-2 3 0,1 0-8 0,0-2-2 0,-2-1-1 16,2-1-18-16,-1-2-3 0,-1 0-5 0,1-3-7 0,-1 1-5 16,0-1 0-16,-1 0 7 0,-2 0-7 0,0-1 5 0,0-1-22 0,-2 2-12 15,-2 0-4-15,0 0 14 0,-3 1 16 0,0 0-5 0,-2 2 6 16,0-2-19-16,-2 1-4 0,-3 2 6 0,0 0-5 0,-1 2 1 0,0 3 6 15,1 1 0-15,-2 2 5 0,0 2 2 0,1 1 6 0,1 3 2 0,1 0 2 16,1 3-4-16,1 2 1 0,0 2-3 0,2 1 6 0,1 1 7 16,2 0-13-16,1 1 6 0,1 2 5 0,3 2-3 0,2 0 17 0,2 3-6 15,2-1-12-15,0 0 1 0,2 2-10 0,2-1 4 0,1-2 2 0,1 1 2 16,-1-2-5-16,2-2-1 0,0 0 2 0,1-1-5 0,-1-1 3 16,1-3-2-16,0-1 0 0,-1 0-6 0,1-3-9 0,0-1 0 0,-1-1-16 15,-2-4-8-15,1-1-19 0,-1-2-31 0,-1-2-18 0,1-3-33 16,-2-2-31-16,1-2-45 0,-1 0-46 0,-1-2-29 0,0-3-9 0,-3-1-25 15,2 1-20-15,1-2-28 0,-2-1-313 0</inkml:trace>
+  <inkml:trace contextRef="#ctx0" brushRef="#br0" timeOffset="125007.29">16487 10097 1063 0,'5'-15'334'0,"1"1"-78"0,2-2-18 15,0 7-10-15,-3 3-16 0,0 3-26 0,-1 2-13 0,-2 1-26 0,0 2-10 16,-1 0-18-16,1 2-18 0,0-1-17 0,0 1-18 0,0 1-9 16,1 0-17-16,1-1-5 0,-1 1 4 0,1-1-10 0,-1-1 9 0,2 0 7 15,1-2-13-15,0 0 13 0,-1 0-10 0,0-2-14 0,0 1 6 16,-2-1-18-16,0-1 3 0,-2 2-5 0,-1-2-3 0,-1 1 2 0,-2-1-10 15,0 0 8-15,-3-1 0 0,-1 1-14 0,-2 0 6 0,-2 0-5 0,1 1-9 16,-2 0 15-16,0 1-5 0,-1 1 6 0,1 1-2 0,1 1 2 16,0 1 6-16,1 2-6 0,-1 0 2 0,1 2 4 0,0 2-6 0,2 0 8 15,-1 2 0-15,2 0-14 0,2 1-9 0,2 1 20 0,2-1 3 0,2 3 2 16,2 0 13-16,2 0-23 0,1-1-2 0,3 0 10 0,0-1-6 16,0 0 2-16,2-3 0 0,1 1-2 0,2-2-2 0,1-1 2 0,1-2 2 15,2-2-2-15,1 0-2 0,1-2 6 0,1-1-12 0,-1 0 4 0,-1-2-1 16,0-2-5-16,0 0 4 0,-1-2 6 0,-1-1 8 0,-1-1-6 15,0-1-4-15,-2-1-2 0,1-1 2 0,-1 0 0 0,-1 0 10 0,-2-1-6 16,0 1-6-16,0-1 12 0,-1 1-3 0,-1 1 7 0,-1-1-8 16,0 2 5-16,-1-1 1 0,-1 1 0 0,0 1 5 0,0 1-17 0,-1 1 12 15,0 0-4-15,-1 2-2 0,0 0 11 0,0 2-3 0,2 0-10 0,-1 1 0 16,1 0-4-16,0 1-4 0,2 1 14 0,-1 0-2 0,1 0-6 16,1 0 4-16,0 1-10 0,-1-1 12 0,1-1-2 0,1 1-4 0,-1-2 3 15,1 0-10-15,1 0 3 0,-1-1 2 0,0-1 0 0,0-1 4 0,-2 1 2 16,1-2-2-16,-2 1 0 0,1-1-2 0,-2-1 2 0,0 1-6 15,0 0 4-15,-3-1 4 0,0 0-2 0,-1-1 1 0,-2 1-3 0,0 0-23 16,0 0-2-16,-2 1-4 0,-2-2-4 0,0 1 13 0,-2-1-6 16,-2 1 20-16,-1 0-6 0,0 0 1 0,-1 0 5 0,-2-1-9 0,1 0-4 15,-1 1 6-15,0 1-1 0,1 1-1 0,0 1 6 0,1 2-4 0,-1 0 3 16,0 3 1-16,2 1 7 0,1 1-9 0,1 1-1 0,3 1 11 16,2 0-5-16,2 1 32 0,3-1-1 0,1 1 3 0,1 0 2 0,2 0-7 15,2 0 4-15,1-1-10 0,2 0 8 0,1-2-2 0,1 0-2 0,2 0-3 16,2-2-1-16,-2 1-1 0,2-2-7 0,0 0 9 0,0-1-14 15,0-1-6-15,1-1 12 0,-1-1 1 0,2-1 3 0,0 0 2 0,0-2-10 16,-3 1-4-16,0-2-6 0,0 0 4 0,-2-2 2 0,0 0-4 16,-1-2 2-16,-1-1-18 0,0 0-4 0,-2-1-38 0,1-1-21 0,0 1-5 15,-1-1-29-15,-1-1-5 0,0-1-44 0,1-2-72 0,-1 0-72 0,1-2-71 16,-1-1-95-16,-1 0-134 0,0-1-312 0</inkml:trace>
+  <inkml:trace contextRef="#ctx0" brushRef="#br0" timeOffset="125191.29">17573 9559 2139 0,'-3'0'261'0,"-1"1"-34"0,-1 2-23 0,2 2-34 16,-1 3-24-16,0 2-21 0,0 3-13 0,0 2-13 0,1 3-10 0,0 2-12 15,1 1-18-15,1 1-9 0,1 2-12 0,2-1-11 0,1 6-6 0,1 0-3 16,2 0-6-16,0 1-1 0,0-2-1 0,1 1 0 0,0-1-10 0,-1 1 2 16,1-3-2-16,-1 0-4 0,-1-3 4 0,1-1-4 0,0-3-8 15,0-3-15-15,0-3-10 0,0-2-13 0,1-1 4 0,-1-2-9 0,0-2-28 16,1-2-32-16,-2-1-49 0,1-3-45 0,1-1-61 0,0-2-70 15,1-3-65-15,0-1-132 0,1-2-348 0</inkml:trace>
+  <inkml:trace contextRef="#ctx0" brushRef="#br0" timeOffset="125376.29">17948 9221 1364 0,'-3'-3'966'0,"0"1"-733"0,-1 1-15 16,0 4-37-16,1 1-31 0,-1 4-18 0,0 3-23 0,0 2-12 15,-1 5-5-15,2 3-5 0,0 3-8 0,0 4-8 0,3 1-19 0,0 4-15 16,1 1-4-16,2 1-27 0,0 2 13 0,1 2-7 0,0 1-2 0,1 0 17 16,1 1-25-16,0-2 0 0,1-1 0 0,0 1-4 0,1-3-2 15,-1-3-3-15,2-3-17 0,0-4-19 0,-1-4-33 0,1 0-33 0,1-2-59 16,-1-3-70-16,0-1-107 0,1-2-146 0,-1-2-194 0,-1-1-528 0</inkml:trace>
+  <inkml:trace contextRef="#ctx0" brushRef="#br0" timeOffset="127759.48">12159 12096 1832 0,'2'-3'203'0,"3"-1"-115"0,3-4-28 0,7-2-10 0,4-2-10 16,4-2-3-16,6-2-20 0,5-1-13 0,6 0 7 0,3-4-5 15,3 0-5-15,5-2 4 0,5-2 1 0,2-1-2 0,4-1 13 0,6-2 2 16,4 0 2-16,5-2-1 0,6-2-1 0,2-2 4 0,6 1-4 16,4 0 4-16,6 0-1 0,2 1 2 0,4-2 8 0,7 0 3 0,3-1-9 15,6 1 14-15,4-1 3 0,4 0-6 0,5 1 8 0,4-3-12 0,5 1-6 16,5-1-1-16,5-1-3 0,6 0-6 0,2 0-2 0,4-3-1 15,4 1-9-15,3 1 6 0,3-2 4 0,0 3 14 0,0-2-1 0,1 1 21 16,0 2 5-16,-1 0 3 0,1 3 14 0,-3 1-17 0,1 0-16 0,-1 4 1 16,2-1-8-16,-4 4-5 0,-1 0 5 0,-3 0-9 0,-3 4-7 15,-3-1-4-15,-5 3-3 0,-4 1-8 0,-6 1 0 0,-5 3-4 0,-7 3-20 16,-6 1-17-16,-7 1-34 0,-7 0-56 0,-11 1-86 0,-9 0-109 16,-6-1-178-16,-10-1-363 0,-6-3-150 0</inkml:trace>
+  <inkml:trace contextRef="#ctx0" brushRef="#br0" timeOffset="128774.56">11498 12076 392 0,'-2'-2'209'0,"0"-1"-70"15,-2 1 10-15,0 0 9 0,-1 2-17 0,0 0-29 0,-1 1-19 16,-1 1-15-16,-2 1-5 0,0 0-5 0,-1 2-4 0,-1 0-4 0,0 0-6 16,-1 2-4-16,0-1-1 0,-1 1-1 0,1 0-3 0,-1-1-8 15,-1 1-10-15,0 0-8 0,1 1-1 0,0-1-2 0,1 0-8 0,-1 1 2 16,1-1-7-16,-1-1-1 0,-1 2 2 0,1-2 9 0,-1 1-3 0,0 0-3 15,3-1 4-15,-3 1-13 0,1-1-4 0,1 1 3 0,0 0-11 16,0 0-3-16,-1 2 1 0,0 0-1 0,1 1-2 0,1 1 2 0,-2 0 0 16,0 0 2-16,0 2 8 0,1-1 2 0,2 2 1 0,-2 0 6 0,2-3-5 15,0 1 0-15,2-2 6 0,1-1-2 0,1 0 1 0,0-2 3 16,3-1 12-16,0-1 4 0,1 0 15 0,1-1 4 0,1-1 6 0,1-1 9 16,0 0 6-16,2-1 11 0,1 0 8 0,2-1 8 0,2-1 9 15,3-1-1-15,2-2 1 0,2-1-7 0,3-2 2 0,4 0-9 0,3-4-6 16,3-1-3-16,4-2-4 0,1-3-13 0,5-1 2 0,3-3-10 0,2-3-12 15,4 1 4-15,2-3-15 0,6-1 0 0,1-1-1 0,3 0-1 16,3-2-18-16,1 0-14 0,2 1 8 0,2 1 2 0,1-1 11 0,1 1 1 16,2 0-16-16,1 0 2 0,0 2-4 0,1 0 0 0,2 1 6 0,0 1-9 15,0 0-5-15,1 2 3 0,-3-1-10 0,2 0-9 0,1 0-13 16,-1 0-30-16,-1 1-22 0,0 1-14 0,-2 1-19 0,0 2-25 0,-2 0-31 16,-2 0-34-16,-1 1-58 0,-2 2-64 0,-2 0-160 0,-2 2-516 15</inkml:trace>
+  <inkml:trace contextRef="#ctx0" brushRef="#br0" timeOffset="129174.56">12570 12614 1337 0,'1'9'370'0,"-1"1"-179"15,0 2 21-15,-1-3-31 0,-1-2-32 0,0 1-20 0,1 4-13 0,-1 1 7 16,-1 3-3-16,0 0 5 0,-1-1-8 0,0 1-11 0,1 1-1 16,0 0-14-16,2 1-4 0,1 3-19 0,2 1 2 0,0 2-13 0,2 2-1 15,0 2-8-15,0 3-11 0,1-1-2 0,1 2-7 0,0-2-3 0,0 1-7 16,1 1-6-16,0 1 2 0,1 1-8 0,0 0 2 0,0-2-16 16,-1-1-12-16,0 0 22 0,0-3 4 0,0-4 8 0,-1-1-2 0,0-5-18 15,0-1-14-15,1-3-8 0,-1-3-19 0,0-3-23 0,0-3-48 16,-1-2-51-16,1-3-70 0,-1-3-120 0,0-2-126 0,-2-2-224 0,0-4-511 15</inkml:trace>
+  <inkml:trace contextRef="#ctx0" brushRef="#br0" timeOffset="129408.27">12540 12608 2077 0,'-5'-9'196'0,"2"-2"3"0,-2-2-11 0,3 1-29 0,2 2-23 0,2 1-14 15,1 1-10-15,2-1-9 0,1 2-5 0,2 0-10 0,1 1-10 0,0 0-15 16,2 1-8-16,1 2-8 0,0 0-14 0,3 2-6 0,0 1 0 15,-1 2-10-15,-1 1-1 0,1 1-3 0,0 2-5 0,-2 1-2 16,-1 1-4-16,-2 2-2 0,-1 2-6 0,-1 1-2 0,-2 2-2 0,-1 3-13 16,-3 1-8-16,-1 1-17 0,-1 1-26 0,-3 1-3 0,0 0-24 0,-2 0-19 15,-2 0-10-15,1 0-28 0,-3 0-6 0,0-3 5 0,-1 2 17 0,2-3 20 16,1-2 11-16,1 0-1 0,2-3-7 0,0-1-19 0,1-2-27 16,2-3-28-16,3-3-19 0,2-2-36 0,2-2-38 0,1-3-57 0,4-2-114 15</inkml:trace>
+  <inkml:trace contextRef="#ctx0" brushRef="#br0" timeOffset="129641.26">12999 12704 1202 0,'12'0'304'0,"1"3"-42"0,4 0-27 0,-4 2-36 16,-1 2-21-16,-1 1-27 0,-3 0-15 0,2 3-10 0,-3 0-21 0,-2 2-17 15,0 0-13-15,-1-1-14 0,-2 1-8 0,0 0-9 0,0-1-14 0,-2-1-7 16,0-1-6-16,-1 0-12 0,-3-1 2 0,0 0-7 0,-1-1 0 16,-1-1-3-16,0-2-17 0,-2-2-16 0,0-2-17 0,-3-2-14 0,-2-1-7 15,-2-3-7-15,-1-2 2 0,1-3 10 0,-1 0 20 0,1-3 27 16,2 0 24-16,2-2 18 0,1-3 18 0,2-1 11 0,2 0 14 0,1-2 13 15,1-1-14-15,1-1-1 0,1 1 5 0,2 1-11 0,1 1 1 0,1 2-13 16,4 1-23-16,1 4-6 0,1 1-3 0,3 3 4 0,-2 3-2 16,2 0 1-16,1 2 1 0,0 2-8 0,0-1 4 0,0 2 2 0,1 1-9 15,1 0 3-15,-1 1-7 0,0 0-9 0,0 2 9 0,0-1-6 0,0 2-8 16,0-1-10-16,0 1-25 0,0-1-31 0,0 1-30 0,0 0-56 16,-1 0-68-16,-2 1-102 0,1-1-105 0,1 0-196 0,2-1-341 0</inkml:trace>
+  <inkml:trace contextRef="#ctx0" brushRef="#br0" timeOffset="130291.32">13500 12704 2120 0,'5'2'306'0,"-2"0"-62"0,4-1-33 0,-1-1-34 0,0-3-44 0,1 0-21 16,0-1-29-16,0-2-13 0,0 0-11 0,-1-2-9 0,1 0 17 16,-2 1-2-16,0-3-10 0,1 0-7 0,-2-2-25 0,0 0-3 0,-2 0 1 15,-1 1-13-15,0 0 1 0,-3-1-1 0,-1 2 2 0,-1-2-2 0,-1 3 0 16,-2-1-5-16,1 0-5 0,-3 2-5 0,0 1 3 0,-1 1 2 15,-1 2-14-15,-1 2 1 0,0 2-5 0,-1 1-5 0,-1 3 8 0,1 1 1 16,0 3 5-16,3 2 5 0,-1 0 2 0,1 2 0 0,1-1-2 16,1 2 1-16,2 2 1 0,2 1-2 0,3-1 0 0,2 2 6 0,1-2-21 15,3 1 8-15,2-2 7 0,2 1-11 0,2-2 21 0,2 0-17 0,1-2-17 16,2-2-4-16,2 0-4 0,0-2-3 0,0-2 0 0,2-1-16 16,0-1-23-16,-1-2-11 0,2 0-21 0,-1-1-11 0,0-2-13 0,0-1-17 15,0 0-18-15,-2-2-15 0,0 0-1 0,-1-2-1 0,-1 0 17 0,0 0 23 16,-1 2 22-16,0-2 31 0,-3 0 32 0,1-1 25 0,-1 0 27 15,0-1 23-15,-1 1 23 0,1 0 29 0,-2 0 28 0,0-1 27 0,-1-2 17 16,-1 1 7-16,-2 0 0 0,2 1-6 0,-1 2-5 0,-1 0-2 16,2 2 1-16,-1 1-6 0,0 2-11 0,0 2-13 0,-1 0-8 0,0 1-9 15,-2 1-7-15,0 0-9 0,0 0-8 0,0 1-17 0,-2-1-8 16,1 0 2-16,0-1-13 0,0 0-4 0,-1-1 2 0,0 0-16 0,-1 0 3 16,0-1 6-16,-1-1-8 0,0-1-1 0,0 0-8 0,0-1 0 0,-1 0-5 15,-1-1-4-15,-1 0-10 0,-1 1-12 0,-1-1-15 0,0 0-1 0,-2 1-2 16,0-1-5-16,-3 2 13 0,1 1 4 0,-1 0 7 0,0 3 14 15,2 2-3-15,-2 1 11 0,0 2-6 0,0 1 11 0,-1 2 1 0,1 2-1 16,2 1 10-16,1 1 2 0,4 3 4 0,1-1-8 0,2 0-1 16,3 0 5-16,2 0-2 0,2 2 8 0,1-1-1 0,3-1-12 0,-1-2 2 15,3-1-2-15,0-1 1 0,1-2 3 0,2-2-4 0,2-1 0 0,0-1-5 16,1-2-1-16,1-1-1 0,1-1 0 0,-2-2-1 0,0-1 2 16,0-1 5-16,-2-1 2 0,0-1 5 0,-1 0 2 0,0-2 3 0,-3 0 1 15,1-1 6-15,-2 0-1 0,-1-1 5 0,-2 1-4 0,-1-1 1 0,0 0-1 16,-1-1 4-16,-1 1-10 0,-1 0 3 0,-1 1-5 0,0 1 14 15,0 1 12-15,0 2 5 0,0 0-8 0,-1 1-4 0,0 0 5 0,0 0-8 16,-1 2 9-16,0 2-8 0,1 0-3 0,0 1-5 0,1 1-6 0,0 0-7 16,0 0-10-16,1-1 0 0,0 1-3 0,0 1 3 0,1 0 10 15,-1 1 7-15,1-1 6 0,-1 1-8 0,-1 0-11 0,1 1-1 0,1-1-13 16,0 0-1-16,-1 0-6 0,1 0-15 0,-2 0-7 0,0-1-7 16,0 1-24-16,-2-1-30 0,0 0-36 0,-1-1-54 0,0 1-56 0,-2-1-55 15,0-2-92-15,-1 0-154 0,-2-3-238 0,0-1 171 0</inkml:trace>
+  <inkml:trace contextRef="#ctx0" brushRef="#br0" timeOffset="130411.32">14316 12451 2029 0,'0'-4'295'0,"0"0"-32"0,2-1-34 0,0 1-56 0,1 1-45 16,-1 0-29-16,0 2-21 0,0 1-13 0,-1 0-21 0,1 1-15 0,-2 0-16 16,1 0-10-16,0 1-1 0,0-1-24 0,0 1-27 0,0-1-38 15,0 0-55-15,2-1-65 0,-1 0-100 0,1 0-130 0,0-1-233 0,1-1-400 16</inkml:trace>
+  <inkml:trace contextRef="#ctx0" brushRef="#br0" timeOffset="130774.32">14750 12351 1727 0,'-7'9'273'0,"0"1"-46"0,-1 4-28 0,-1-1-32 15,2-2-49-15,0 0-33 0,1-1-10 0,-1 0-18 0,2 0-3 0,1 1-7 16,1-1-13-16,2-1 1 0,1 0-2 0,3 0-5 0,1 0-5 0,0 0-2 16,2 0-5-16,1 0 7 0,0-1 4 0,1-2-9 0,1 1 0 15,-1-2-7-15,2 1-2 0,1 0 1 0,0-1-4 0,1 1-6 0,-1-1 0 16,0 0-2-16,0 0 6 0,-1 0-3 0,0 0-2 0,-1-2-5 0,-1 3-14 16,-3-1-1-16,-1 0-17 0,-1 1-17 0,-2-1-31 0,-1 1-26 15,-2-1-21-15,-2 0-19 0,-1 0 8 0,-1-1 6 0,-2 0 15 0,1-1 35 16,-1 0 25-16,1-1 34 0,0-3 36 0,0 0 34 0,1-2 44 15,0-1 39-15,2-1 39 0,0-1 19 0,1-2-10 0,3 0-26 0,0-3-35 16,1 2-22-16,2-1-18 0,1 1 2 0,0 0-13 0,2 1-12 0,0 1 1 16,1 0-16-16,1 2 3 0,0 1-8 0,0 0-5 0,2 1-6 15,-1 1 0-15,1 0-9 0,0 2-6 0,0 0 1 0,1 1-6 0,0 0 3 16,-1 0-12-16,0 1-3 0,0 1 0 0,0-1-16 0,0 0-8 0,-1-1-34 16,-1-1-52-16,-2-1-69 0,-1-2-111 0,0 0-129 0,-1-2-190 15,-1-1-616-15</inkml:trace>
+  <inkml:trace contextRef="#ctx0" brushRef="#br0" timeOffset="130925.32">14988 12257 2632 0,'-3'4'261'15,"-1"0"-40"-15,-1 3-34 0,1 1-36 0,0 1-55 0,0 0-30 0,0-1-19 16,1 2-11-16,1 1 4 0,0 0-15 0,0-1-8 0,1 0-8 0,1-3-12 16,1 0-1-16,0-1-12 0,2-1-24 0,1 0-24 0,1-1-36 15,1-2-38-15,1 0-48 0,1-2-58 0,1 1-74 0,0-2-69 0,2-1-43 16,1-1-43-16,0 0-9 0,2 0-201 0</inkml:trace>
+  <inkml:trace contextRef="#ctx0" brushRef="#br0" timeOffset="131174.31">15239 12384 1104 0,'4'5'672'0,"2"0"-358"0,1 2-64 0,-2-1-29 0,0 0-37 0,2-1-48 16,-2 0-26-16,2-1-14 0,0 0-3 0,0 0-2 0,2-1-9 0,1 0-11 16,-1-1-4-16,1 0-12 0,-2-1-2 0,0-1-6 0,1 0-13 15,-1-1-2-15,0-1 0 0,1 0-3 0,-2-1 0 0,-1 0-6 0,1-1-7 16,-2-1-1-16,0 0 3 0,-1-2 5 0,-1 0-4 0,0-1-5 0,-1 0 2 15,0 0-2-15,0-2 5 0,-2 1-3 0,0-2-8 0,-1 0 0 16,-1-1-14-16,-1 1 18 0,-1 1-8 0,-1 1-2 0,-2-1 4 0,-1 1-16 16,-1 1 2-16,-1 1-2 0,-2 0-4 0,0 1 0 0,-1 1 9 15,0 1-3-15,-2 2 2 0,1 1-4 0,-1 1-8 0,2 0 1 0,0 2-7 16,1 2-3-16,-1 1-6 0,0 2-5 0,3 2 7 0,1 1-15 0,2 1 4 16,2 1-5-16,3-2-13 0,3 2-9 0,1-1-13 0,4 0-25 15,1-1-23-15,0-1-26 0,3-2-39 0,2 0-31 0,0-1-36 0,3-1-20 16,-1-1-19-16,4-1-18 0,0-1-12 0,1 0-14 0,-1-1-229 0</inkml:trace>
+  <inkml:trace contextRef="#ctx0" brushRef="#br0" timeOffset="131807.31">15541 12366 917 0,'9'-2'420'0,"0"0"-53"0,2-1-39 0,-3 1-35 0,-2 0-45 15,1 0-42-15,-2 1-35 0,1 2-28 0,-1 0-17 0,0 2-13 0,-1-1-24 16,1 1-10-16,0-1-18 0,0 2-16 0,-1-1 2 0,0 0-17 0,-1 0-9 16,1 0 6-16,1 0-12 0,-1 0 1 0,1-1-3 0,-1 0-11 15,0 0 4-15,0-1-4 0,0-1-2 0,-1 1 2 0,1-1-6 0,-1 0 4 16,-1 0-6-16,1-1 0 0,-1 0 0 0,-1-1 1 0,1 1 1 0,-1 0 6 15,0 1 0-15,-1-1 3 0,1 0-1 0,0-1-6 0,-1 1-2 16,0 0-7-16,0 1 3 0,0-1 1 0,0 1-9 0,1 0 11 0,0 0-7 16,0 0-5-16,0 0 8 0,-1 0-5 0,1 0-1 0,0 0-2 0,0 0-1 15,1 0 3-15,0 1-10 0,0-1 3 0,1 0 1 0,-1 0-5 16,0-1 8-16,0 1-10 0,0-1-12 0,0 1-7 0,-1 0-9 0,1-1-7 16,-1 1 8-16,0-1-10 0,0 1 0 0,0-1 3 0,1 0-6 0,-1 0 8 15,0 0-4-15,1 0 5 0,-1 0 3 0,1 0 9 0,1-1 11 16,-1 1 10-16,0 0 7 0,1 1 11 0,0-1 6 0,0 0 4 0,-1 0 4 15,1 1-4-15,-1 0 4 0,2-1 9 0,-1 1 4 0,1-1 10 16,-1 1-2-16,0-1 0 0,1 0 8 0,-1 1-3 0,1 0 11 0,-2-1-8 16,1 0 0-16,0 1 4 0,-1-1-2 0,0 1 13 0,-1 0-4 0,1 0 1 15,-1 0-4-15,1 0-2 0,-1 0 5 0,-1 0-4 0,1 0-4 16,-1-1-4-16,0 1-8 0,1 0 1 0,-1-1-4 0,0 0-1 0,0 1-7 16,0-1-6-16,-1 1 0 0,0-1-5 0,0 0 4 0,0 0-8 15,-1 0 1-15,1 0-4 0,-1 1 5 0,0-1-4 0,-1 0 4 0,1 1 5 16,-1 0-14-16,1 0 8 0,-1 1-1 0,-1 0-5 0,1 1 7 0,-1 0-6 15,1 1 4-15,0 0 6 0,1 0 1 0,0 0 2 0,0 1 0 16,1 1-1-16,1 1 3 0,0-1 0 0,0 2-2 0,1 0 4 0,1 0 4 16,0 1-4-16,1 1-1 0,1-1-5 0,0 2-1 0,1-1-1 0,0-1 7 15,1 0-7-15,0 0 3 0,0-1-3 0,0-1-1 0,0 0 8 16,-1 0-11-16,2-1 1 0,1-2 0 0,1 0 2 0,0-1 5 0,0-1-1 16,1-1 5-16,-1-2-11 0,1 0 6 0,0-1 0 0,0-1-1 0,0-1 8 15,-1-1-3-15,1 1 5 0,-1-1-1 0,0-2-1 0,0 1 10 16,-2-2-8-16,-1 1 3 0,0-1-1 0,-1 0 1 0,-1 1 13 0,-1-2-1 15,0 1 1-15,-1 0-3 0,0-1-2 0,0 2-2 0,0 0-16 16,-1 2-10-16,0-1 0 0,0 3 0 0,-1 1 0 0,0 1 0 0,0 2 0 16,0 1 0-16,0 1 0 0,1 1 0 0,-1 1 0 0,0 0 0 15,1 1 0-15,0 1 0 0,1 1 0 0,0 1 0 0,1 1 0 0,1 0 0 16,1 0 0-16,0 1 0 0,0-2 0 0,1 2 0 0,0 0 0 0,1-1 0 16,0 1 0-16,1-1 0 0,1-1 0 0,0 1 0 0,0 1 0 15,0-1 0-15,0 1 0 0,-1-1 0 0,0-1 0 0,-1-1-14 0,0-1-68 16,-1 1-36-16,0-3-55 0,-1 1-79 0,-1-2-125 0,0 0-141 0,1 0-190 15,-1-1-205-15,2-2 148 0</inkml:trace>
+  <inkml:trace contextRef="#ctx0" brushRef="#br0" timeOffset="132024.31">16480 12351 1842 0,'2'7'339'0,"0"-1"-79"15,1 2-21-15,0-2-35 0,-1-1-42 0,2-1-31 0,-1 0-32 0,3 0-9 16,0-2-10-16,1 0 2 0,1-1-6 0,0-1-12 0,1-1-12 16,1-2-20-16,1 0-5 0,1-2-6 0,0 0-8 0,0-1-1 0,0-1-6 15,-2 0-6-15,0-3-8 0,0 0-11 0,0-2-18 0,-2 1-22 16,1 0-30-16,-2-1-36 0,-1 0-39 0,-1-1-51 0,1-1-76 0,-1 1-81 16,0 0-122-16,0-1-232 0,0-1-182 0</inkml:trace>
+  <inkml:trace contextRef="#ctx0" brushRef="#br0" timeOffset="132177.31">16651 12031 2360 0,'-4'4'297'0,"0"1"-36"0,0 2-23 0,0 2-55 0,1-1-31 15,0 4-22-15,2 2-35 0,0 1-11 0,1 2-5 0,0 1-12 16,2 2-4-16,0 0-15 0,2-1-14 0,1 1-30 0,1 2-4 0,3 0 0 16,1 2 0-16,2 3 0 0,1 2 0 0,2 0 0 0,0-1 0 0,2-3 0 15,-2-3 0-15,1-4 0 0,-2-5-18 0,-1-5-62 0,-1-2-41 16,0-4-60-16,1-3-82 0,0-4-142 0,0-2-181 0,1-5-291 0,1-5-249 15</inkml:trace>
+  <inkml:trace contextRef="#ctx0" brushRef="#br0" timeOffset="132974.31">17416 11503 2703 0,'0'2'225'0,"-1"1"-25"0,0 0-14 15,0 5-17-15,0 3-46 0,0 4-27 0,0 4-19 0,-1 3-13 16,-1 4 2-16,0 2-4 0,0 6-16 0,0 0-14 0,0 3 0 0,1 0-18 15,1-1-14-15,1 3 0 0,0-2 0 0,2 3 0 0,1 0 0 0,0 0 0 16,1 0 0-16,0-2 0 0,1-2 0 0,-1-2 0 0,2-3 0 16,-2-2 0-16,1-5 0 0,-1-2 0 0,1-4 0 0,0-3 0 0,0-5 0 15,0-2 0-15,0-3-40 0,-1-3-34 0,-1-4-8 0,0-1-17 16,0-4-14-16,-1-4-18 0,-1-1-33 0,0-5-44 0,0-4-63 0,-2-3-49 16,-1-4-36-16,0-2-17 0,1-4 12 0,-2 1 46 0,1-1 75 0,1 1 91 15,-1-2 91-15,0 3 82 0,0-1 83 0,-2 1 69 0,-1 3 49 16,-1-1 30-16,-1 0-6 0,-1 1-16 0,0-2-4 0,-1 0-7 0,1 0-16 15,0 1-9-15,1 2-20 0,1 3-25 0,2 0-20 0,1 4-33 0,1 2-18 16,2 4-19-16,1 2-14 0,2 4 1 0,1 3-14 0,0 1-7 16,1 1 3-16,0 0-12 0,3 2 6 0,-1 0-4 0,3 2-5 0,1 1-5 15,1 0 1-15,2 2-6 0,0 1 3 0,0 1 3 0,2 1-4 16,0-1-8-16,-1 3 4 0,2 2 0 0,0 0-2 0,1 0 9 0,-3 2-9 16,0-2 0-16,-1 1 0 0,-1 0-2 0,-1 0 0 0,-1-1 2 0,-1 1-4 15,-1-2 4-15,-1 3-8 0,-3-1-21 0,-2 1-6 0,-1 0-14 16,-2 0-8-16,-1 1-10 0,-2 1-13 0,-2 0-15 0,-2 0-8 0,-1-2-3 15,-1 0-8-15,-1 0 8 0,1 0 6 0,-2-1 23 0,0 0 31 0,1 0 19 16,0 0 20-16,0 0 5 0,3-1 5 0,-2 1 12 0,2 0 11 16,1 1 13-16,0 0 7 0,2 1 3 0,2-1 5 0,1-1 1 0,2 2 2 15,1-1-6-15,2 1-5 0,2-1-13 0,0-1-1 0,2 0-1 16,2-2-20-16,0 0 5 0,2-1-1 0,0 0 7 16,1-1 16-16,0-1-4 0,0-1-8 0,2-1-17 0,-1-2 0 0,1 0-3 0,-2-2 7 0,2 0-9 15,0-2-3-15,0-1 7 0,-1-1-8 0,1-1-14 0,0 1-10 16,0-3-12-16,-1 1 6 0,-1-1 5 0,0-1-10 0,-2 0-24 0,0 0-40 15,-1-1-12-15,-1 1-16 0,0 0-2 0,1 0 2 0,-1 1-4 0,0 0 11 16,-1 0 10-16,-1 1 12 0,1 0 21 0,-1 2 15 0,0 0 14 16,0 2 20-16,0 0 15 0,1 1 22 0,-1 1 12 0,0 1 22 0,-1 1 21 15,0 0 15-15,1 1 24 0,0 1 2 0,0 0 3 0,1 1 6 16,0 1-8-16,0 0 2 0,-1 0-10 0,3 0-11 0,-1 0-12 0,0 0-15 16,1-1-4-16,0-1-13 0,0-1-6 0,0 0-2 0,1-2-9 0,1-1 12 15,1-1-4-15,1-2-2 0,0-1-9 0,1-1-17 0,0-2 13 16,0-1-4-16,-1 0 4 0,1-1-3 0,-1-1-16 0,0-1 9 0,-3 1-9 15,0-3 2-15,-2 0-6 0,-1 0-17 0,-1-1-1 0,0 1-3 0,-1 0-2 16,-2 0-5-16,0 0-10 0,-2 1-4 0,-2 0-3 0,-1-1 0 16,-2 1 6-16,-3 0-3 0,0 1 4 0,-1 1 10 0,-1 0 12 0,0 2 13 15,-1 1 1-15,0 1-1 0,0 3-1 0,-2 1-5 0,1 3 8 16,0 2-1-16,0 3 8 0,0 2 5 0,2 2 5 0,-1 2 6 0,1-1-3 16,1 2 8-16,1 3-1 0,1 0 4 0,2 1 7 0,1 2-17 0,2 1 5 15,1 0-3-15,2 1-10 0,1 1 1 0,1 0-3 0,2 1-8 16,0 0 1-16,2-2-10 0,0 0 15 0,2-1 1 0,1-3-3 0,1 1 11 15,1-3-21-15,-1-2-7 0,1-4-7 0,0-2-20 0,0-1-17 0,1-3-24 16,-1-2-21-16,0-2-28 0,0-2-27 0,1-3-36 0,-1-2-42 16,0-1-29-16,1-4-40 0,-1-1-41 0,-2-2-56 0,2 0-62 0,0-2-175 15</inkml:trace>
+  <inkml:trace contextRef="#ctx0" brushRef="#br0" timeOffset="133491.31">18724 11793 1486 0,'5'-12'417'0,"0"1"-108"0,1-2-41 15,-1 4-41-15,-1 2-46 0,0 2-37 0,-3 2-20 0,2 1-15 16,-2 2-17-16,-1 1-8 0,1 0-12 0,-1 1-11 0,-1 0-8 0,1 1-16 15,-1 1-8-15,-1 0-12 0,0-1-2 0,1 1-5 0,-2 1-8 0,0 0 2 16,-1 0-6-16,0-1-2 0,0 0 8 0,-2 0-6 0,1 0 2 16,-1 0-4-16,1 2-4 0,-1-1 4 0,0 0 1 0,0 2-11 0,0-2 5 15,0 2-1-15,-1 0 6 0,1 1 6 0,0-1 0 0,1 1-6 16,0 0-5-16,2 1 5 0,1 0-3 0,1 2 5 0,2-1 2 0,1 2-12 16,2-2 9-16,2 1-3 0,1-1 0 0,3 0 6 0,0 0-5 0,1-2-10 15,3-1 3-15,1 0 3 0,1-2 3 0,0-1 1 0,2-2-5 16,1 0-1-16,-1-1-6 0,1-1 3 0,1 0 2 0,-1-2 1 0,0 0 2 15,-1-1 0-15,0 0 7 0,-1-1 8 0,1-1-10 0,-1 1 11 0,-1 0-10 16,-2-1 3-16,0 1 9 0,0-1-9 0,0 1 2 0,-3 0-2 16,1 1 0-16,0 0 11 0,-2 0-4 0,1 0 6 0,0 1 2 0,-1 1 4 15,0 0 1-15,0 1 3 0,-1 0-4 0,0 1-4 0,-1 0 5 16,0 2 1-16,2 0-2 0,-1 0-2 0,1 1-7 0,0 1 0 0,0 0-1 16,-1 0 3-16,-1 0-5 0,2-1 7 0,0 0-9 0,0-1-8 0,2 0 6 15,-1 0 1-15,-2-2-6 0,2 0 4 0,-1-2 2 0,0 0-6 16,-1 0 8-16,0-2-2 0,-2 0 0 0,1-1 3 0,-2-1-1 0,0 0 4 15,-2-1-6-15,-1-1-2 0,-1 0-6 0,-2-1-2 0,0 1-9 0,-3-1-14 16,-1-1-8-16,-2 1-20 0,-1-2-3 0,-3 2-6 0,1-1 1 16,-3 1 1-16,0 0 0 0,-1 1 8 0,0 0 7 0,0 1 8 0,-1 0-1 15,0 2-14-15,1 1 2 0,1 1-1 0,-1 3 7 0,1 1 10 16,0 1 13-16,1 2 18 0,2 1 17 0,3 2 16 0,2 1 8 0,0 1 3 16,3 0 5-16,1 1 3 0,1 0 5 0,2 1-2 0,1-2 3 0,1 0-3 15,2-2-8-15,2 1-2 0,1-1-2 0,0 1-6 0,1-2-5 16,0 0-3-16,1-2-1 0,1 0-1 0,2-2-7 0,1 1-6 0,-1-2-3 15,1 0 2-15,0-1 3 0,0-1-1 0,-1-1-5 0,1-1-1 0,-1 0 0 16,-1-1 0-16,-1 0-2 0,-1-2-15 0,0-1-17 0,-1 0-10 16,-1-1-26-16,-1-2-14 0,0 0-25 0,1-2-32 0,-2 1-36 0,0-2-47 15,0 0-38-15,-1-2-44 0,-1-1-44 0,0 1-67 0,0-2-74 16,-1 0-183-16</inkml:trace>
+  <inkml:trace contextRef="#ctx0" brushRef="#br0" timeOffset="133675.31">19589 11573 1569 0,'-2'-3'576'0,"-1"-2"-241"0,-1 0-39 0,1 2-26 15,0 1-44-15,0 2-52 0,0 2-33 0,-1 0-24 0,1 2-15 0,0 2-19 16,0 0-6-16,1 2-10 0,-1 3-15 0,2 1-42 0,0 2-10 16,1 1 0-16,1 2 0 0,1 3 0 0,1 0 0 0,1 3 0 0,1 0 0 15,0 1 0-15,2 0 0 0,1 0 0 0,0-1 0 0,2 2 0 0,-3-1 0 16,3 0 0-16,-1 0 0 0,1-2 0 0,-2-2 0 0,1-1 0 16,0-5 0-16,-2-1 0 0,1-3 0 0,-2-4-58 0,1-2-66 0,-2-2-22 15,0-2-37-15,0-1-44 0,0-2-51 0,-1-2-110 0,1-2-133 16,0-3-224-16,1-3-284 0</inkml:trace>
+  <inkml:trace contextRef="#ctx0" brushRef="#br0" timeOffset="133875.31">19895 11245 2603 0,'0'0'248'0,"-2"2"-24"0,0 1-46 0,0 4-32 0,0 1-23 0,-2 3-22 15,1 3-18-15,-1 4-8 0,0 2-8 0,0 5-6 0,2 3-4 16,0 1-8-16,2 4-7 0,2 0-6 0,0 3-34 0,1 2-2 0,1-2 0 15,1 3 0-15,0 0 0 0,0 1 0 0,1-1 0 0,0-2 0 0,2-3 0 16,-2-3 0-16,3-1 0 0,-1-4 0 0,0-2 0 0,2-4 0 16,-2-3-4-16,2-4-56 0,-1-2-21 0,1-4-21 0,1-3-25 0,0-3-50 15,0-2-71-15,0-4-123 0,-2-4-159 0,2-4-279 0,-1-6-316 0</inkml:trace>
+  <inkml:trace contextRef="#ctx0" brushRef="#br0" timeOffset="134126.31">20692 9783 2138 0,'-4'1'312'0,"1"0"-145"16,-1 0-28-16,1 1-6 0,2 1 8 0,-2 3 4 0,1 0-6 0,1 4-8 15,-1 1-7-15,2 0-8 0,0 0-7 0,2-1-16 0,2-1-16 16,2-1-12-16,1 1-13 0,1-1-38 0,2-1-14 0,2-1 0 0,2-1 0 15,1-1 0-15,2-1 0 0,0-1 0 0,1-2 0 0,2-1 0 0,-1-1 0 16,1-2 0-16,0-1 0 0,-2-1 0 0,1-2 0 0,1-1 0 16,-3-1 0-16,2 0 0 0,-1 2 0 0,0-2 0 0,-2 0 0 0,-1 0 0 15,-3 1-20-15,-1 1-87 0,-3 2-30 0,-1 2-54 16,-1 0-65-16,-1 2-106 0,-1 1-122 0,-2 2-213 0,-2 1-543 0</inkml:trace>
+  <inkml:trace contextRef="#ctx0" brushRef="#br0" timeOffset="134258.31">20872 10166 1784 0,'4'19'694'0,"1"1"-478"16,1 2-51-16,3-5-35 0,1-3-23 0,3-2-30 0,1 0-17 0,1-3-15 15,4 0-13-15,2-3-1 0,0-3-6 0,2-2-5 0,1-3-7 0,-1-2-17 16,1-3-16-16,0-2-36 0,-1-2-65 0,1-4-100 0,-1-1-156 16,2-3-215-16,-1 0-726 0</inkml:trace>
+  <inkml:trace contextRef="#ctx0" brushRef="#br0" timeOffset="136808.38">21446 8225 472 0,'-1'-1'171'0,"0"0"-73"0,1 0-6 0,0-1 15 0,0 0 14 0,0 0-7 16,1-1-10-16,-1 2-14 0,0-1-25 0,0 0-6 0,0 0-10 15,0-1-11-15,0 0-4 0,0 0-3 0,-1 0 0 0,1 1-4 0,0 0 0 16,-1 0-1-16,1 1 0 0,-1-1 0 0,1 0 0 0,0-1-2 0,0 0-3 15,1 1 4-15,-1 0 1 0,-1 0 1 0,1 0 0 0,-1 0-7 16,0 1-2-16,0-1-5 0,0 1-2 0,-1 1-1 0,1-1-6 0,-1 0 3 16,1 1-4-16,-1 0 0 0,0 1 0 0,-1 0-6 0,1 0 3 15,-1 0 0-15,0 1 0 0,0 0 3 0,0 0-3 0,0 0-3 0,1 0 3 16,-1-1-1-16,2 1-1 0,-1 0 1 0,1-1-2 0,0 1 2 0,0 0-1 16,1-1 1-16,0 0-4 0,0 0 1 0,0-1 0 0,0 1 4 15,0 0 0-15,1-1 0 0,-2 0 0 0,1 0-4 0,-1 0 1 0,1 1 4 16,0-1-4-16,-1 0 3 0,1 0-1 0,0-1 1 0,-1 2 0 0,0-1 1 15,0 0-1-15,0 0-1 0,0 0 2 0,0 1 2 0,0-1 0 16,1-1-1-16,-1 1-1 0,0 0-1 0,0 0-1 0,0 0-1 0,0 0 4 16,1 0-5-16,-1 0 7 0,1 0 0 0,-1 0-2 0,0 0 5 0,1 0-7 15,0 1 1-15,-1 1-1 0,1-1 3 0,-1 1-2 0,1-1 1 16,1 0 5-16,0 1-6 0,-1-1 5 0,0 1-4 0,0 0-2 0,1 0 1 16,-1-1-4-16,2 1 10 0,-1-1-10 0,0 0 3 0,0 1 3 15,1 0-4-15,-1 0 4 0,1 1 4 0,0 0 3 0,-1 0-2 0,1 0 7 16,0 0 4-16,1 0 1 0,-1-1 6 0,0 2 1 0,0-1-1 0,0 1 3 15,-1-1-4-15,1-1 7 0,-1 1-8 0,1-1 0 0,-2 0-1 16,1 0 0-16,0 0 2 0,-1-1 0 0,0 0 0 0,0 0 3 0,0-1 2 16,0 1 3-16,1-1 3 0,-1-1-3 0,-1 1-5 0,1-1-1 15,-1 0-2-15,1 0 1 0,-1-1-3 0,1 0 0 0,-2 0-3 0,1 0 0 16,0 0 1-16,0-1-5 0,1 1 3 0,-1-1-7 0,0 0 0 0,0 0 3 16,1 1-3-16,0 0 0 0,-1-1 0 0,1 1-4 0,0 0 1 15,0 0-1-15,1 0-1 0,-1 0 0 0,0-1 0 0,-1 1 1 0,2-1-1 16,0 1 0-16,1 0 7 0,0 0 0 0,0-1 0 0,1 1 2 0,1-1-11 15,0 1 2-15,0 0-4 0,1 0 1 0,0 1 1 0,3 0-3 16,1 0 1-16,1 1-1 0,1 0-4 0,0 0 2 0,0 1 2 0,1 0-4 16,1 0 2-16,0 0 0 0,1 0-1 0,0 1 1 0,1-1 0 15,0 2-2-15,1-1-7 0,0 0-3 0,0-1 0 0,1 1 3 0,-1-1 7 16,-3 2 2-16,1 0 2 0,0 1-4 0,-1 1 4 0,-2 1-2 0,0 0-4 16,-3 0 3-16,-1 1-1 0,-1 0 2 0,0 0 7 0,-2 0 2 15,0 2-4-15,-1 0 0 0,-1 1-7 0,-2 2-3 0,0 0-2 0,-2 1 2 16,-2 1 1-16,-1 0-1 0,-1 0 9 0,-2-1-4 0,-1-1 0 0,0 2 5 15,1 0-7-15,-1 1 2 0,0-2 4 0,0 2-4 0,1-1 5 16,0 0 4-16,2-1 3 0,0 0 4 0,2-2 6 0,2-1 3 0,1-2-4 16,2 0 6-16,-1-1-6 0,3-1 2 0,1 0 4 0,1 0-3 0,0 0-1 15,1-2-1-15,2 1 0 16,0-1 3-16,1-1 3 0,1 0 0 0,0-1-6 0,1 0-6 0,0-1-1 0,-1 0-9 0,2-2 1 0,-2 1-5 16,3-1-2-16,0-1 4 0,0 1-4 0,-1 1-2 0,-1 0-2 15,0-1-3-15,0 1-8 0,0 0-11 0,-2 0-16 0,1 0-30 0,-1-1-38 16,0-1-47-16,1 0-44 0,-1-1-43 0,0 1-48 0,0-2-59 0,2 0-123 15,-1 0-306-15,2-2 153 0</inkml:trace>
+  <inkml:trace contextRef="#ctx0" brushRef="#br0" timeOffset="136991.38">22284 8403 2239 0,'0'-1'214'0,"-1"1"-125"0,1 0-11 0,1 1 13 0,0-1 4 16,2 2-15-16,-1-1-24 0,1 1-29 0,-1 0-17 0,0 0-5 0,0-1-3 16,-1 0-4-16,0 0-6 0,1-1-15 0,0 0-12 0,0-1-31 0,1 0-43 15,2-2-57-15,0 0-84 0,1-2-120 0,0 1-219 0,1 0-362 16</inkml:trace>
+  <inkml:trace contextRef="#ctx0" brushRef="#br0" timeOffset="137208.9">22599 7713 2316 0,'-4'0'105'0,"-1"1"18"0,-2 2 18 0,2 2 11 0,1 2-8 16,1 3-25-16,1 2-19 0,0 3-20 0,0 2-17 0,1 0-7 15,0 4-5-15,1 2-7 0,1 1-5 0,0 2-9 0,0-1-6 0,0 2-11 16,2-2 1-16,0 1-11 0,1 0-5 0,1 0 4 0,0 0-5 0,1-1-7 15,0-1 5-15,2-1-10 0,0-3-21 0,3 0-18 0,0-1-37 16,2-4-41-16,0 0-36 0,2-2-51 0,2-2-92 0,1-2-119 0,0-3-255 16,1 1-332-16</inkml:trace>
+  <inkml:trace contextRef="#ctx0" brushRef="#br0" timeOffset="137374.9">23102 8127 2563 0,'-8'1'151'0,"2"2"-31"0,-2-1 15 16,2 3 6-16,2-1-12 0,0 1-36 0,2 0-35 0,-1 2-31 0,1 1-10 16,0-1-12-16,1-1 1 0,-1 0-8 0,1 0-11 0,1-2-22 0,1-1-25 15,1-1-27-15,1-2-39 0,1 0-27 0,3-1-68 0,0-2-77 16,2 1-110-16,1-2-217 0,1 0-355 0</inkml:trace>
+  <inkml:trace contextRef="#ctx0" brushRef="#br0" timeOffset="137741.9">23657 7405 1743 0,'0'-3'253'0,"-1"1"-170"16,2-1 15-16,0 0 13 0,3 2 2 0,1-1-14 0,2 2-9 0,2-1-21 15,1 1-12-15,3 1-3 0,2-1-5 0,1 0 1 0,0 1-3 16,0-1-4-16,0 1-9 0,1-1 0 0,-2 0-12 0,3 1 1 0,-1-1-11 16,-1 0-5-16,0 2 0 0,-1 0-7 0,-1 3 2 0,0 0-4 0,-4 2 0 15,0 0 0-15,-2 3-5 0,-1 1-1 0,-3 2-4 0,-2 2-4 16,-2 2 1-16,-2 3 1 0,-2 1-14 0,-3-1-6 0,0 3-3 0,-2-1 2 16,1-1 18-16,-1 0 8 0,1-2 6 0,-1-3 8 0,1-1-5 15,1 0 7-15,0-2 11 0,1-2 4 0,2-1 9 0,1-1 6 0,1-1 1 16,1-3 1-16,2 0 6 0,2-1 4 0,1-1-6 0,0 0-4 0,4-1-9 15,1-2-11-15,3-1-1 0,2 0-9 0,2-2-5 0,2 0-4 16,1 0-5-16,2-1-6 0,-1 1-2 0,2-1-6 0,0 0-8 0,1 0-12 16,0-1-12-16,-1 1-17 0,2-1-18 0,1 1-11 0,-2 1-29 0,0-1-48 15,-3 2-48-15,-1 0-47 0,-1 1-56 0,-1 1-87 0,-3 0-279 16,0 0 140-16</inkml:trace>
+  <inkml:trace contextRef="#ctx0" brushRef="#br0" timeOffset="137958.51">23993 8190 1894 0,'10'4'144'16,"3"-1"-79"-16,4 1 18 0,1-2 14 0,-1 0 9 0,4 0-9 0,1-1-25 15,2 0-24-15,2-1-21 0,-1-2-6 0,1 0-6 0,0 0-1 16,-2-1-4-16,0 0 3 0,-2 0 1 0,1-1-4 0,1 0 3 0,-2-1-9 15,0-1-6-15,0-1-11 0,-3 0-12 0,0 1-33 0,0 1-52 16,-2-1-58-16,0 0-62 0,-1 0-89 0,1 0-162 0,-1 0-425 0</inkml:trace>
+  <inkml:trace contextRef="#ctx0" brushRef="#br0" timeOffset="138158.51">24587 8331 1543 0,'8'12'130'0,"3"3"-52"0,1 3 8 0,1-1 13 16,0-3 0-16,-1 4-24 0,0 0-23 0,-1 0-2 0,-2 2-1 0,-1-1 11 15,0-1 5-15,-1-1-8 0,1-2-3 0,-1 0-5 16,0 0-13-16,-1 0-10 0,0-1-12 0,-3 0-4 0,-2-2-6 0,0-2-4 0,-2 1-1 16,0-1-6-16,-2-2-4 0,-2 1-2 0,-1-2-18 0,0 0-26 0,-2-1-35 15,-1-2-58-15,-2-1-71 0,0-1-105 0,-2 0-166 0,0-3-369 16</inkml:trace>
+  <inkml:trace contextRef="#ctx0" brushRef="#br0" timeOffset="138324.51">24577 8205 1453 0,'12'-10'349'0,"1"1"-263"16,3-3 17-16,0 3 31 0,0 3 12 0,0 1-17 0,0 2-34 0,0 0-29 16,1 0-19-16,-1 1-17 0,0 0-6 0,1 0-1 0,-1 1-5 0,0-1-5 15,1 2-7-15,-1-1-3 0,-1 1 1 0,-2-1-3 0,0 1-6 16,-2-1-6-16,0 1-18 0,-2 1-18 0,-2-1-25 0,-1 1-31 0,-1 1-44 15,-1 1-41-15,0 0-53 0,-2 2-57 0,-1 0-85 0,-2 3-130 16,-1 0-33-16</inkml:trace>
+  <inkml:trace contextRef="#ctx0" brushRef="#br0" timeOffset="138675.34">21923 10136 2126 0,'25'-7'87'0,"9"-4"-14"0,12-4 16 0,5-3 14 0,4-1 11 15,8-2 11-15,6-1-11 0,7-1-2 0,6 0 0 0,7-3-8 16,6-1-1-16,8-1-12 0,5-2-14 0,6 0-7 0,6-4-28 0,5-1-6 15,3 0 3-15,3 0-5 0,2 2 14 0,1-1-8 0,3 2-8 0,-1-1 1 16,0 1-18-16,0-2 7 0,-1 3 5 0,-1 0-12 0,2 2 13 16,-4 0-15-16,-2 2-5 0,-1 0 10 0,-3 1-6 0,-1 0-3 0,-3 3 1 15,-2-1-10-15,-3 2 14 0,-4 1-4 0,-2 0-2 0,-6 0 2 16,-4 3-12-16,-3 0 4 0,-6 3 6 0,-5 1-8 0,-6 3-8 0,-6 0-10 16,-6 1-25-16,-5 1-26 0,-7 2-22 0,-6 0-28 0,-6 1-33 0,-6 1-22 15,-7 2-34-15,-5 1-35 0,-5 1-31 0,-7 0-49 0,-3 2-90 16,-5 1-174-16,-4 1-323 0</inkml:trace>
+  <inkml:trace contextRef="#ctx0" brushRef="#br0" timeOffset="141925.2">23150 10822 210 0,'-1'-1'105'0,"1"-2"-8"0,-1 0-2 0,1-1 2 16,-1 1-4-16,0 1-6 0,1 0-11 0,-1 0-1 0,1 0-3 0,-1 0-4 15,1 0 4-15,0 1 3 0,0-1 8 0,0 1 9 0,0-1 5 16,0 1-1-16,-1 1-8 0,0-1 2 0,1 1-4 0,-1-1 4 0,-1 1 5 15,2-1-2-15,-1 0-6 0,0 0 1 0,-1 1-8 0,1 0 0 0,-1 0-1 16,0 0-8-16,0-1 0 0,-1 1-1 0,0 0-2 0,-1 0-3 16,1 1-3-16,-1-1 0 0,1 0 4 0,-1-1 2 0,0 2-14 0,0-1 1 15,1 0-12-15,0 0-7 0,0-1 4 0,2 0-14 0,1-1-5 0,0 0 5 16,1 1-4-16,0-2 6 0,1-1 0 0,0 0-8 0,3-1-1 16,0 1-1-16,2-2 3 0,2 0-6 0,2 1 10 0,1-1-12 0,1 1 4 15,0 0 4-15,1 1-14 0,-1 0-7 0,-2 3-9 0,1-2 5 16,0 2-6-16,-1 1 14 0,-1 1-4 0,0 1-4 0,0 0 3 0,0 3 1 15,-1 0-12-15,0 3 1 0,-2 0 1 0,0 3-5 0,-2 2 27 0,0 0-5 16,-2 4 1-16,-1 0 5 0,-1 1-13 0,-1 0 4 0,-1 2-8 16,0 0-5-16,-1 0 5 0,-1 0 0 0,0 1 2 0,0 0 6 0,-1 1-8 15,1 0 0-15,0 0 4 0,1 0-2 0,0 0 2 0,-1-1-3 0,1-1 1 16,1-2-4-16,0-2 2 0,2-1-3 0,1-1-6 0,0-1-8 16,0-2 0-16,1-1-10 0,1-2-10 0,1-1-3 0,-1-1-20 0,2-2-9 15,-2 0-21-15,1-3-24 0,0-1-34 0,0-1-35 0,-1-2-48 16,-1-1-65-16,0-2-117 0,-1-1-162 0,-1-2-303 0</inkml:trace>
+  <inkml:trace contextRef="#ctx0" brushRef="#br0" timeOffset="142092.22">23065 11016 1659 0,'-6'4'177'0,"1"-2"-51"0,0 3-11 16,3-1 4-16,2-1-5 0,1 3-17 0,2-2-23 0,1 1-16 0,2 0-12 15,3-3-9-15,1-1-5 0,1 0-3 0,3-2-5 0,1 0-6 16,1-1-3-16,1-2-5 0,2-2-2 0,1 0-5 0,0 0-11 0,1 0 0 15,0 1-12-15,-2-2-17 0,0 1-24 0,-1 1-57 0,-2 1-49 0,-2 1-49 16,0 0-62-16,-1 2-99 0,-2 2-157 0,-1 1-168 0</inkml:trace>
+  <inkml:trace contextRef="#ctx0" brushRef="#br0" timeOffset="142275.22">23049 11628 1252 0,'1'7'897'0,"2"0"-755"16,1 1-27-16,4-4 4 0,2-2 18 0,2-2-15 0,5 0-17 16,2 0-24-16,2-2-21 0,2-2-8 0,1-1-17 0,0 0 0 0,2-1-5 15,1 2-7-15,2-2 2 0,-1 0-18 0,0 0 7 0,1 0-5 0,-2 0-4 16,0 1-5-16,-2 0-7 0,2 0-5 0,-3 0-15 0,-1 0-28 16,-1 0-34-16,-3 0-53 0,1 0-41 0,-1-2-40 0,-1 1-63 0,0-1-110 15,0 2-255-15,-2-1-213 0</inkml:trace>
+  <inkml:trace contextRef="#ctx0" brushRef="#br0" timeOffset="142442.4">23604 11888 1432 0,'5'17'362'0,"2"2"-284"0,1 4-36 0,1-2-6 0,0-4-2 15,1-2 3-15,1 0-5 0,0-1 12 0,-1 0-3 0,0-2-12 16,0-2-7-16,-1 0-21 0,-1-1-8 0,-2-2-20 0,-1 0-44 0,-2-1-60 15,-1-1-75-15,-2 0-87 0,-2-2-103 0,-1 0-337 0</inkml:trace>
+  <inkml:trace contextRef="#ctx0" brushRef="#br0" timeOffset="142578.4">23473 11632 1994 0,'13'-6'158'16,"2"-2"-34"-16,4 0-7 0,0 1-4 0,-1 1-10 0,-1 1-21 0,2 0-31 15,0 1-20-15,-1 0-15 0,0 0-14 0,1 0-18 0,-1-1-37 0,-2-2-60 16,1-2-83-16,-2-1-114 0,1-2-216 0,1-2-529 0</inkml:trace>
+  <inkml:trace contextRef="#ctx0" brushRef="#br0" timeOffset="142978.91">27040 8773 1689 0,'-2'1'335'0,"0"0"-233"0,0 1 16 0,3-1 6 0,1 0 3 0,3-1-6 15,0 1-21-15,3-2-23 0,3 0-23 0,1 0-17 0,2-1-10 16,1-1-7-16,1 0-3 0,2 0-1 0,2-1-6 0,0 1 0 0,0-2-5 15,1 1 2-15,0-2-5 0,0 1 5 0,1 0-6 0,-1-2-1 0,1 2 7 16,-1-1-12-16,-2 1-5 0,-1 0-9 0,-2 0-15 0,-2 0-28 0,0 1-40 16,-1 0-38-16,-1 1-54 0,0 1-38 0,-4 2-51 0,0 0-85 15,-1 3-126-15,-2 2-264 0</inkml:trace>
+  <inkml:trace contextRef="#ctx0" brushRef="#br0" timeOffset="143110.51">27260 8954 1983 0,'-12'12'245'0,"2"0"-124"0,0 2 5 15,3-1-5-15,5-3-13 0,1 0-18 0,2 0-28 0,3-1-25 0,2 0-12 16,2-3-17-16,2 0-1 0,2-3-3 0,2-1-1 0,3-2-6 0,2-1-3 16,3-1-10-16,0-1-25 0,2-2-32 0,0 0-48 0,-1-2-42 15,2 0-45-15,0 1-51 0,1-2-70 0,-1 1-136 0,0-1-393 0</inkml:trace>
+  <inkml:trace contextRef="#ctx0" brushRef="#br0" timeOffset="143908.51">28078 7339 1033 0,'4'-3'285'0,"0"0"-146"0,3-1 20 16,-2 0 9-16,-1 2 5 0,1 0 3 0,1 1-8 0,0 0-12 15,0 1-33-15,-1 1-23 0,-1 0-7 0,1 2-10 0,-1 1-2 0,-1 3-10 16,3 1-9-16,0 2-4 0,0 1-8 0,2 3-2 0,0 4-7 0,0 1-5 16,1 2-13-16,-1 1-8 0,2 0-13 0,1-1-4 0,0 0 0 15,0-2-12-15,1 0 6 0,-2-3 1 0,3 0 0 0,1-4 18 0,0 0-6 16,2-2-1-16,-1-2-1 0,1 0-6 0,1-2-4 0,-1-2-2 0,3-2 1 16,-1-1-6-16,-1-2 1 0,-1-2-6 0,-1-2-6 0,0-2 2 15,0-1-9-15,-2-2 2 0,2-1 11 0,-2 0 5 0,-1-2 11 0,0 2 13 16,-1-1 1-16,-1 0 3 0,-1 0 1 0,-2-1-6 0,-2 1 5 0,-1 0 7 15,-1 1 1-15,-1 1 4 0,-1 1-1 0,0 0 0 0,-1 1 4 16,0 2 7-16,-1-1 3 0,0 2 1 0,-1 2-2 0,1 1-10 0,0 2-8 16,0 2-5-16,0 2-2 0,-1 2-7 0,0 2 1 0,-1 1-1 15,0 2-6-15,0 0 2 0,0 3 0 0,0 3-4 0,-1 1 2 0,-1 0-15 16,2 2-2-16,-1 1-9 0,1 0 10 0,2 2-1 0,0 1-7 0,1-2-13 16,0 2-30-16,2-3-16 0,2 1-27 0,0-1-27 0,2-1-35 15,-1 0-55-15,1 0-67 0,-1 0-120 0,1 1-237 0,0-1-236 0</inkml:trace>
+  <inkml:trace contextRef="#ctx0" brushRef="#br0" timeOffset="144092.01">28272 8398 2213 0,'3'6'106'0,"3"0"-42"15,3 1 13-15,6 0 18 0,3-1 19 0,2 1-12 0,6 0-24 0,1 0-26 16,3-2-23-16,1 2 5 0,3 0-4 0,0-1 10 0,3 1-13 15,0-1-7-15,-1-1-8 0,0 0-9 0,-3-2 1 0,1-1-4 0,-2 0-9 16,0-2-7-16,-2 0-27 0,0-1-47 0,-3-1-61 0,0 1-71 0,-2-1-67 16,-1 1-91-16,0-1-153 0,-2 0-393 0</inkml:trace>
+  <inkml:trace contextRef="#ctx0" brushRef="#br0" timeOffset="144308.01">28813 8792 1703 0,'1'17'103'0,"2"1"-41"0,3 6 18 0,2-3 20 15,2-3 11-15,1 0-12 0,2 1-35 0,-2-1-26 0,1 0-18 0,-1 1-5 16,-1-2 3-16,-1-2 4 0,0 0-7 0,0 0-5 0,-2-2-7 0,-1-1-3 16,1 0-2-16,-2-1 2 0,-1-1 2 0,0-1-7 0,-2-1 0 15,-1 0-10-15,-3-3-8 0,-1 0-11 0,0 0-19 0,-2-2-19 0,-1 1-25 16,-1-2-37-16,-2-2-83 0,-1-1-147 0,-1-1-202 0,-1-2-99 15</inkml:trace>
+  <inkml:trace contextRef="#ctx0" brushRef="#br0" timeOffset="144442.01">28850 8672 1070 0,'11'-6'786'0,"2"1"-663"0,2 0 0 0,0 1 12 0,-1 1-15 0,0 1-14 15,0 0-22-15,1 0-30 0,1 1-19 0,0-1-20 0,-2 2-10 0,1-2-10 16,-1 0-32-16,-1-1-66 0,-3 0-102 0,0-2-175 0,-1 0-336 0,0-1-151 15</inkml:trace>
+  <inkml:trace contextRef="#ctx0" brushRef="#br0" timeOffset="144575.01">29602 8253 1898 0,'-9'6'19'0,"0"1"-57"0,-3 2-28 0,0 2-57 16,1-2-117-16,2 0-266 0,-1 0-177 0</inkml:trace>
+  <inkml:trace contextRef="#ctx0" brushRef="#br0" timeOffset="144876.01">30272 7472 1853 0,'-1'0'130'0,"0"0"-24"16,0 1 24-16,0 1 6 0,0 3-8 16,-1 0-11-16,2 4-26 0,-1 0-12 0,1 1-13 0,0 2-9 0,0 0-3 0,1 0-19 0,0 2-12 15,0 1-8-15,3 1-3 0,0 0 4 0,-1 1 1 0,0 1 0 0,1 0-8 16,0 0-2-16,1 2-4 0,-1 0-3 0,0-2 2 0,0 1-5 0,0-1 1 15,-1-2 2-15,1 0 2 0,1 0-4 0,0-1 4 0,0-2-4 16,0 1 0-16,0-2 2 0,0-1-3 0,-1-2-3 0,-1-2 1 0,0-1-5 16,-2-1-2-16,0-1-9 0,0-1-6 0,-3-2-18 0,0 0-23 0,-2-2-38 15,-2-1-49-15,0-2-48 0,-3-2-42 0,0-1-43 0,-2-3-65 16,0-2-100-16,0-1-305 0</inkml:trace>
+  <inkml:trace contextRef="#ctx0" brushRef="#br0" timeOffset="145025.01">30184 7542 1097 0,'-5'-16'297'0,"2"-3"-75"15,-1-4 28-15,3 4-44 0,4 3-60 0,2 2-46 0,3 2-60 16,2 4-12-16,0 1 1 0,0 3-1 0,-1 2 3 0,2 3-3 0,1 2-3 16,0 1 0-16,2 1 0 0,0 0-4 0,2 2-8 0,4 0-2 15,-2 0-8-15,4 1 2 0,1 0 1 0,-1 0-6 0,0 0-3 0,1 0-13 16,-2 1-9-16,0 0-6 0,-3 0-19 0,-3 0-20 0,-2 0-23 0,-2 1-28 16,-1-1-30-16,-3 0-36 0,-1 2-24 0,-2 0-31 0,-1 2-59 15,-3 1-188-15,-1 2-10 0</inkml:trace>
+  <inkml:trace contextRef="#ctx0" brushRef="#br0" timeOffset="145243.01">30088 8456 1543 0,'11'0'359'0,"6"0"-279"0,4 0 20 0,2-2 12 0,2 0 3 0,3-2-18 16,3 0-23-16,3-1-27 0,-1 0-17 0,0-1-5 0,2 3-1 0,-2-1 2 15,2 2 7-15,-2 1 14 0,2-1 2 0,-4 2-4 0,-1 0-9 16,-2-1-11-16,-1 1-6 0,-1 0-7 0,0 0-7 0,-2-1-4 16,0 1-2-16,-1 1-6 0,-4 1 9 0,0 0-14 0,-1 0-15 0,-2 1-13 0,-1 0-32 15,-2 0-31-15,-2 2-30 0,-1 1-53 0,-1-1-89 0,-4 2-140 16,-2-1-255-16,-2 3-50 0</inkml:trace>
+  <inkml:trace contextRef="#ctx0" brushRef="#br0" timeOffset="145974.79">30281 8871 1384 0,'3'4'458'0,"2"-1"-371"16,3 1 9-16,3-2 17 0,2-1 10 0,0 1 2 0,2-1-17 0,1 0-25 16,3 0-22-16,0-1-13 0,1 0 4 0,2 0-4 0,-3 0 5 0,0 0 4 15,-1 0-6-15,-3 1-2 0,-1 0-1 0,0 0-6 0,-1 2-4 16,-1 0-3-16,-1 0-5 0,-2 1-3 0,0 0-4 0,-1 0-9 0,-1 1 2 15,0-1 4-15,-1 1-8 0,-1-1 4 0,-1 0-3 0,1 0-2 16,-2 0-4-16,-1-1 2 0,0 1-2 0,-2-1-5 0,2 0 2 0,-1 0-1 16,-1 0-3-16,0-1 8 0,0-1-10 0,-1 1 2 0,1-1 2 0,-3 0-6 15,2-1 6-15,0 0 1 0,-1 0-4 0,1 0 2 0,-1 0 3 16,1-1-9-16,-1 0 5 0,0 0-2 0,1 0-4 0,0 0 3 0,-1 0 3 16,0 0-2-16,0 0-3 0,1-1-3 0,0 0-4 0,0 0-1 15,0 0 6-15,0 0 1 0,1 1-3 0,-1 0 0 0,1 0-7 0,-1 1 5 16,0 0 3-16,1 0-3 0,0 0-3 0,-1 1-4 0,1 0 0 0,0 0 4 15,0 0 0-15,0 0 0 0,0 0 0 0,-1 0-4 0,1 1 4 16,-1-1 4-16,1 0 1 0,-1-1 0 0,0 0 3 0,0 0 0 0,0 0 3 16,-1-1-2-16,1 1-1 0,0-1-2 0,-1 0-3 0,0 0 3 0,0 0 1 15,2 0-2-15,-2 0 1 0,0 0 1 0,1 0 4 0,-1-1-3 16,0 1 1-16,1 0-3 0,0 1-4 0,-1 0-2 0,1-1-6 0,-1 1 0 16,1 0-7-16,0 0 1 0,0 0 5 0,0 1-1 0,0-1 2 0,0 1-1 15,0-1 3-15,0 1 3 0,0-1-1 0,0 1 1 0,1 0 0 16,0 0 2-16,-1 0 5 0,0 0 2 0,0 0 1 0,0 1-2 0,0-1 3 15,1 1 0-15,0 0 3 0,-1 0-1 0,0-1 1 0,0 0-1 0,0 0 4 16,1 0-4-16,-1 0-1 0,0 0-2 0,0 1-1 0,0-2-1 16,0 1-6-16,0 0-9 0,0 0-14 0,0-1-12 0,0 0 0 0,0 0-3 15,0 0 4-15,-1 0 5 0,1 0 7 0,0 0 5 0,0 0 5 16,-1 0 13-16,1 0 2 0,0-1 6 0,1 1 4 0,-2-1-3 0,1 1 4 16,0-1 2-16,-1 1-3 0,1-1 5 0,0 1-1 0,0 0 0 0,1 0 5 15,-1 0 2-15,0 0-3 0,0 0 3 0,0 0-2 0,1 0-2 16,-1 0 4-16,-1 0-4 0,2 0-1 0,-2 0 0 0,0 0-1 0,1 0-2 15,-1 0 1-15,2-1 1 0,-1 1 2 0,0 0 2 0,0-1 5 0,0 1 4 16,1-1 2-16,-1 1 4 0,1-1 4 0,0 1 3 0,0-1 5 16,0 1 6-16,1 0 6 0,1 0 3 0,0 0 6 0,-1 1 3 0,2 0-1 15,1 1 2-15,0 1-2 0,1 1-3 0,-1 0-5 0,0 1-2 16,2 0-9-16,0 2-7 0,-1 0-3 0,1 1-12 0,-2 1-4 0,1 2-1 16,-1 0-4-16,-1 1 0 0,0 0-1 0,0 1-2 0,0 1-1 0,1 1-1 15,-3 1-2-15,1-1 1 0,-1 1 1 0,-1 0-6 0,0 0 2 16,0 1 0-16,-1-1 0 0,-1 0 2 0,1-1-8 0,-1 0 5 0,2 1-5 15,0 1-1-15,-1-2 3 0,0 1-3 0,0 0 0 0,0-1-7 0,-1-2-4 16,0 0-14-16,-1-1-15 0,1-2-25 0,1-2-36 0,-1 0-48 16,-1-2-76-16,-2-1-117 0,0-2-237 0,-1-1-500 0</inkml:trace>
+  <inkml:trace contextRef="#ctx0" brushRef="#br0" timeOffset="146126.79">30391 9161 2361 0,'-1'0'148'0,"2"0"-78"0,1 0 2 0,2-1 6 0,0 1 2 16,2 0 2-16,1 0-21 0,1 0-25 0,4 1-14 0,0-2-12 16,3-1-1-16,2-1-9 0,1-4-2 0,1 0-13 0,-3-2-35 0,1 0-46 15,0-1-74-15,-2 0-91 0,-1-2-134 0,1-1-234 0,0 0-338 16</inkml:trace>
+  <inkml:trace contextRef="#ctx0" brushRef="#br0" timeOffset="146358.79">30293 7667 1387 0,'-36'23'303'0,"-3"4"-294"0,-9 7-4 0,5 0 3 0,4 1 1 16,-3 1 3-16,2 4 2 0,-2 0-4 0,-1 0-4 0,-1 1-5 0,0 0 2 15,-2 0-3-15,0 2-11 0,1-1 3 0,0 1-4 0,1 2-3 16,1 0 1-16,3-1-4 0,2 1-8 0,3 3-2 0,3-1-13 0,1 1-20 16,4-1-27-16,2 0-34 0,4 1-39 0,3 0-41 0,3 0-45 0,2-2-265 15</inkml:trace>
+  <inkml:trace contextRef="#ctx0" brushRef="#br0" timeOffset="146608.79">31320 8460 1542 0,'14'-8'244'0,"1"-2"-181"0,3-1 21 0,-4 3 25 0,-2 1 10 0,-2 1-6 16,1 2-16-16,0 0-22 0,-2 2-13 0,0 0-7 0,-1 0-9 0,0 1-1 15,1 1-6-15,-1-1-7 0,-1 0-1 0,0 0-11 0,0 0 5 0,2 0-10 16,1 1 0-16,0-1-2 0,1 1-6 0,-2 0-1 0,2-1-1 15,-1 1-1-15,0 1-3 0,0-1-1 0,-2-1-6 0,-1 0-1 0,-1 0-15 16,-1 0-16-16,1 1-21 0,-4 0-48 0,0 0-57 0,0 0-53 16,-3 0-65-16,0 1-49 0,-2 0-42 0,0 1-32 0,0 1-210 0</inkml:trace>
+  <inkml:trace contextRef="#ctx0" brushRef="#br0" timeOffset="146692.79">31433 8510 943 0,'-5'4'349'0,"-1"0"-227"0,0 1-2 0,3 0 3 0,2-1-28 0,2-1-19 16,2 1-23-16,1-1-25 0,2 0-22 0,2 0-34 0,0-2-45 15,5 0-49-15,0-1-67 0,2-2-117 0,0-1-299 0</inkml:trace>
+  <inkml:trace contextRef="#ctx0" brushRef="#br0" timeOffset="147058.14">32115 7737 1663 0,'0'-4'237'0,"-2"2"-212"0,0 0 26 0,-1 0 22 0,-5 1-17 0,-2 4 3 0,-1 5-8 16,1 1-14-16,0 4 15 0,-2 2-4 0,3 3-7 0,-1 3-1 15,0 4-2-15,1 0-9 0,1 3-4 0,-1-1-4 0,3-1-4 0,2-2-1 16,-3 0-5-16,1 0-5 0,1-4-1 0,2 0-3 0,2-3-5 16,3-2-1-16,0-3-4 0,1-1-1 0,4-1-1 0,0-2-2 0,1-3 5 15,2-1 3-15,2-2 4 0,1-2 3 0,-1-2 0 0,0-2 6 0,-5 1-1 16,1-1 37-16,1-2 0 0,1-1 2 0,1-1 7 0,2-1-38 15,-2 0 2-15,4-2 2 0,-1 0-3 0,0-1 4 0,-1 1-2 0,0 1 4 16,-1 0 3-16,0 0 1 0,-1 1 2 0,-2 0 0 0,1 1 2 16,-2 1-2-16,1 0 2 0,-2 2-10 0,0 1-5 0,-1 1-2 0,-2 0-11 15,1 3 1-15,-2 1-2 0,-1 2-2 0,-1 2 3 0,0 1-3 16,-1 2 5-16,-1 2-1 0,1 2-2 0,-1 2-2 0,-2 0-6 0,0 3-2 16,-2 1-5-16,1 3 3 0,-1 0-8 0,0 3 3 0,0 0 6 0,0 2-12 15,2 1-1-15,-1-1-14 0,2 2-26 0,-1-2-41 0,1 0-45 0,0-2-37 16,1 0-50-16,-1 0-67 0,0-2-91 0,0 0-172 0,0-1-165 15</inkml:trace>
+  <inkml:trace contextRef="#ctx0" brushRef="#br0" timeOffset="147244.14">31838 8651 1236 0,'12'5'648'0,"2"-1"-595"0,7 2-1 0,1-2 12 0,2 0 12 15,3 0 6-15,2 0-14 0,3 0-19 0,-17-2 12 0,5 1-18 0,1-1-6 16,5 0-6-16,-1-1-32 0,5 0-3 0,-1 0-2 0,5-1 2 16,0 0-3-16,-1-1-4 0,0-1-4 0,0 0-8 0,-3 0-10 0,1-1-33 15,-1 0-34-15,-1 1-35 0,-2 0-34 0,-2 1-26 0,-3 1-43 0,-1 0-86 16,-2 0-126-16,-3 2-96 0</inkml:trace>
+  <inkml:trace contextRef="#ctx0" brushRef="#br0" timeOffset="147642.14">32087 9002 1848 0,'4'-2'145'16,"0"1"-48"-16,1-2 2 0,1 1-3 0,1-1 3 0,1 0-19 16,1 0-19-16,1 1-21 0,-1 1-15 0,0 0-3 0,0 1-1 0,0 0 6 15,0 1-4-15,-1 0-2 0,2 0-1 0,-1 1-2 0,0 0-4 0,0 0-2 16,-2 0-2-16,2 1-5 0,-1 0 0 0,1 0-5 0,-1 1 1 16,0-1 3-16,-1 1-3 0,0 1 1 0,0 1 0 0,0-1-4 0,-1 1 0 15,1 0 1-15,-2 1 1 0,0 0 0 0,-1 0 5 0,0 0-2 0,-1 2 2 16,0 0 3-16,-1 1-3 0,-1 1 2 0,-1 0-6 0,-2 0 1 15,1 1 1-15,-2 0 1 0,0 1-1 0,-1 0-6 0,-1-2 1 0,0 2-3 16,-1 0 3-16,0 1 2 0,-2 0-5 0,1-1 5 0,0 1-6 16,-2 0-1-16,1 0 4 0,-1-1-10 0,1 0-1 0,1 0-5 0,0 0-9 15,1 0-1-15,0-2-12 0,2 0-15 0,0 0-19 0,1-1-12 0,0 0-26 16,0-1-13-16,2-2-26 0,0-1-32 0,0-1-52 0,1 0-87 16,0-2-116-16,0-1-194 0</inkml:trace>
+  <inkml:trace contextRef="#ctx0" brushRef="#br0" timeOffset="147792.14">32051 9232 1856 0,'2'2'97'0,"3"0"-36"0,-2-1 0 0,2 0 22 0,1 0 2 16,2 0-12-16,2 0-18 0,2 0-42 0,1 0-17 0,3-1-15 0,0 0-14 15,3 0-25-15,-1-2-38 0,1 1-56 0,0-2-101 0,-1-1-123 0,1 0-168 16,-1-1-94-16</inkml:trace>
+  <inkml:trace contextRef="#ctx0" brushRef="#br0" timeOffset="155910.2">4802 16882 183 0,'-8'1'128'0,"0"0"0"0,-1 1-8 0,1-2-19 0,2 1-14 0,0 0-6 16,0-1-3-16,1 0-9 0,0 0-7 0,1-1-6 0,-1 0-10 0,2 0-6 16,0 0-4-16,2 1-10 0,-2 0-8 0,1 0-2 0,1-1-4 0,-1 1-3 15,1-1-6-15,0 1-3 0,0 1 0 0,0-1 2 0,0-1 4 16,0 1 2-16,-1 1 5 0,1-1 8 0,0 1 10 0,0-1 9 0,-1 0 2 16,1 1 5-16,-1 0-1 0,-1 0 0 0,0 0 11 0,1 0-11 0,-1 1 1 15,-1 0-5-15,1 0-5 0,-1 0 9 0,2 1-9 0,-1 0 0 16,1 2-7-16,1 2-9 0,0 1 7 0,3 3-1 0,1 2 2 0,2 4 5 15,2 3 6-15,1 1 4 0,2 2 0 0,2 2-15 0,-6-12-8 16,2 2-5-16,1 2-10 0,3 3 11 0,2-1-5 0,2 5-6 0,0-1 0 16,4 1-9-16,-1 1 4 0,0-3-1 0,2 0 0 0,0-2 2 0,-2-3-2 15,1-1-2-15,0-1 5 0,-1-3-1 0,0-1-7 0,1-3 4 16,-2-2-4-16,2 0 8 0,-2-2 0 0,0-2-1 0,-2-2 1 0,0-1 0 16,-1-1 3-16,-2-1-3 0,-2-2 3 0,0-1 0 0,-1 0-4 0,-1-3 4 15,0-1-1-15,-2-1-2 0,-1-2 7 0,-2-1-10 0,1 0 7 16,-2-1 5-16,0-2-3 0,-3 1 2 0,0 0-6 0,-2-2 2 0,0 1 3 15,-1 1 5-15,-5-17-9 0,-1 7-4 0,-1 6 10 0,3 5 3 16,1 5 8-16,0 1 3 0,1 3-6 0,1 1-1 0,-1 1 9 0,3 1-1 16,-1 2-6-16,1 1 5 0,1 0-8 0,-1 1-5 0,1 1 3 0,0 0-6 15,-1 0-2-15,1 3 4 0,-1-1-19 0,2 1 14 0,1 3-5 16,1-1-7-16,0 2 15 0,0-5-4 0,0 2 16 0,-1 1 4 0,2 0-2 16,0 0-7-16,2 3 5 0,0-1 0 0,1 2 3 0,1 1-6 15,1 0-7-15,0-1 1 0,1 1-1 0,0 1 7 0,1-1 0 0,0 2 6 16,0-1-5-16,1 1-7 0,0 1 8 0,-2 2-7 0,2-2 1 0,0 3-2 15,1 1-19-15,-1 0 10 0,0 0-1 0,-1 1 4 0,0-1 4 16,0 1-4-16,0-1-5 0,-1 0 0 0,0-1-8 0,-2 1 3 0,1-1 5 16,-1-1 1-16,-1 0 8 0,0-1-13 0,-1 0-9 0,0-1 10 0,-1-1-5 15,0-1-1-15,-1-1 25 0,0-1-9 0,0 0 9 0,-1-1-6 16,0-2-24-16,0-1-4 0,-2 0 0 0,1-1-16 0,0-2-8 0,0 0-20 16,-1-1-20-16,0-2-10 0,0 0-29 0,0-1-11 0,0-2-28 0,-1-1-27 15,0-3-42-15,0-2-87 0,1-3-52 0,0-5-92 0,0-3-223 16</inkml:trace>
+  <inkml:trace contextRef="#ctx0" brushRef="#br0" timeOffset="156593.22">4370 17302 2375 0,'-23'4'58'0,"2"0"22"0,-4 0-13 0,-1 2-9 16,-4 0-5-16,0 0 1 0,2 1-6 0,7-1-5 0,1-2-17 0,4-1-4 15,2-1-5-15,4-1-7 0,1 0-6 0,2-1-11 0,1 0 2 0,3-1 0 16,1-1-5-16,1 0-7 0,2-1 7 0,0-1-4 0,3-2 11 16,0 0 5-16,2-3-7 0,1 0 5 0,1 0-2 0,1-3 2 15,2-2 3-15,0-1 4 0,2 0 5 0,0-1-9 0,0-2-10 0,3 0 14 16,15-19-7-16,-4 5 7 0,-1 6 3 0,-6 3-3 0,-2 4 6 0,1 0 1 15,-1-1-6-15,0 3-1 0,1-1 1 0,0 0 2 0,-1 2 2 0,1 2-3 16,-1 0-1-16,0 1 8 0,1 1-9 0,1 0 3 0,1 3-3 16,-1 0 1-16,3 2 1 0,-2-1-4 0,3 1 5 0,-2 1-1 0,0 0 3 15,2 1 2-15,2 1-9 0,-1 0 0 0,4 1 8 0,0 0-6 16,2 0-4-16,0 1 1 0,3 1-6 0,0 0 2 0,0 1 3 0,1 0-10 16,0 0 7-16,1 1 0 0,0 0 0 0,3 2 0 0,0 1-10 0,2 1 12 15,0 1-9-15,-2 2 7 0,0 0 7 0,1 2-18 0,1 2 11 16,-3 1-3-16,0 0-8 0,-2 2 13 0,-4 1-4 0,-1 1 1 0,-1-1-5 15,-1 2-2-15,-1 0 11 0,-2 1-3 0,0 2-3 0,-1 0 6 0,1 0-17 16,-13-10 21-16,1 4 4 0,2 0-20 0,3 3 21 0,0 0-17 16,1 5 7-16,1-1 3 0,3 5-17 0,-1-1 10 0,1 2-5 0,-1 0 4 15,0 1 6-15,-1 1-19 0,-1-1 6 0,0 1-4 0,-2 0-3 0,-1 1 12 16,-1 0-5-16,-2-1 0 0,-1-1 1 0,-2 1 1 0,-1-3 21 16,-3 2-1-16,-1-3 2 0,-4-12 5 0,-1 1-16 0,0 0 13 0,-1 1-4 15,-2 1-7-15,0 2 5 0,-1-2-13 0,-2 3 3 0,0 0-4 16,-3 1-1-16,-1 2 2 0,-1 0-3 0,-2 0 3 0,-2 2-4 0,-3 0 7 15,-1 1 0-15,-2-1 0 0,-4-1-7 0,-1 0 18 0,-2-2 18 0,-2-1 25 16,-2 0 7-16,-2-1-9 0,-1-2-22 0,-3-1-16 0,-1 0 11 16,0-3-7-16,-3 0 0 0,0-2 13 0,-2-1-9 0,-1-1-2 0,0-1 13 15,-1-3-8-15,-1-1 9 0,-1-1 1 0,0 0 4 0,-1-2-30 0,0-3 27 16,-2-1-45-16,0-1-18 0,0-2 24 0,-1-1-25 0,0-2 43 16,-1-2-4-16,0-1-4 0,1-2-3 0,-1-3 2 0,1 1-3 0,1-3 3 15,1-1-2-15,1 0 5 0,2-1 1 0,2-1-7 0,0 2-3 16,3-2-3-16,3-1 1 0,1 3 2 0,4-2-12 0,2 1 5 0,4 0-12 15,1 1-1-15,4 1-10 0,4 1-9 0,2 1 2 0,-7-15-25 0,10 4-7 16,11 2-33-16,8 2-34 0,8 2-60 0,8 1-62 0,7-3-63 16,7-1-98-16,8-5-195 0,7-5-277 0</inkml:trace>
+  <inkml:trace contextRef="#ctx0" brushRef="#br0" timeOffset="168011.43">7400 16638 1399 0,'-5'2'585'0,"-1"1"-405"0,-3 1-35 16,2-2-22-16,0 0-5 0,2 0-3 0,2-1-9 0,1 1-16 15,0 0-4-15,-1 0-6 0,1 1-6 0,1 1 2 0,-1 0-14 0,0 1 2 16,1 0-1-16,0 1-10 0,1 1-2 0,2 0-10 0,-1 3-11 0,1-1 11 16,0 2-4-16,1 2-9 0,1 1 5 0,1 1-16 0,-1 3 4 15,1 1-2-15,1 0-12 0,0 0 3 0,0 0-4 0,0 0 3 0,-1 2 3 16,0 0-16-16,0 1 12 0,0 1-5 0,1 1-4 0,0 0 14 0,0 1-13 16,-1 0-4-16,-3-13 2 0,0 3-7 0,1 1 12 0,-1 1 9 15,0 1-2-15,1 2-16 0,-1-1-11 0,1 2-3 0,-1-1 5 0,0-2 4 16,0-1-10-16,-1-2 3 0,1-1 1 0,-1-2-2 0,0-2-1 0,0-1-14 15,-1-2-6-15,1-2 1 0,-1-2-9 0,0-2-13 0,0-2-15 16,-2-3-7-16,1-2-9 0,-2-2 0 0,1-3-5 0,-1-1-16 0,-1-3 3 16,0-3-8-16,0-1 17 0,0-3 22 0,-6-23 14 0,2 3 30 15,0 6 11-15,2 5 19 0,-1 5 17 0,-1-2 0 0,1 0 7 0,0 0 0 16,-1 0 11-16,0 0 11 0,1 2 8 0,1 0 9 0,2 1 3 0,0 1-8 16,3 0-1-16,0 3-3 0,1 1-12 0,1 4 6 0,0 1-1 15,1 3-5-15,1 2 6 0,1 1-2 0,0 2 11 0,2 1-3 0,0 2 2 16,-1 0 4-16,1 2-9 0,0-1 3 0,0 2-4 0,0 0-11 15,1 1-2-15,0 2-5 0,1-1-10 0,2 2-1 0,0 2-8 0,-1 0 1 16,1 2 0-16,0 1-5 0,-1 0 2 0,1 0-3 0,0 0 7 0,-1 0-3 16,1 1-7-16,-1 0 2 0,0-2-2 0,1 0 6 0,0-1 1 15,-1-1-14-15,-1 1 7 0,-1-3-17 0,0 0-6 0,-1-1-2 0,0-1-25 16,0 0-29-16,-1-1-40 0,1-1-43 0,0-2-66 0,0-1-65 0,1 0-67 16,-1-3-80-16,1-1-147 0,0-1-247 0</inkml:trace>
+  <inkml:trace contextRef="#ctx0" brushRef="#br0" timeOffset="168193.45">7740 16485 1141 0,'-3'-3'324'16,"-2"0"-66"-16,-2 1-37 0,0 1-19 0,1 2-20 0,-2 0-11 0,2 2-27 15,-1 1-12-15,0 1-11 0,1 3-11 0,0 1 3 0,0 1-11 16,0 3-7-16,1 0-16 0,2 2-11 0,-2 1-13 0,1 1-14 0,-1 3-13 16,2-1 6-16,0 2-8 0,1 2-7 0,1 1-9 0,0 1-5 15,1 3 11-15,0-1-9 0,0 2-7 0,1-1-4 0,0-2-9 0,0-2 6 16,0 1-10-16,0-3-27 0,1-3-19 0,1 0-34 0,1-2-25 0,-1-1-40 15,1-3-54-15,0-3-74 0,-2-2-69 0,3-2-44 0,1-2-76 16,-1-2-451-16</inkml:trace>
+  <inkml:trace contextRef="#ctx0" brushRef="#br0" timeOffset="168377.45">7731 16731 1112 0,'-8'-16'449'0,"0"0"-161"16,-3-4-52-16,1 2-39 0,2 3-13 0,1 3-26 0,0 1-14 0,2 1-8 15,1 4-20-15,0 2 0 0,1 2-3 0,1 3-12 0,1 0-5 16,0 2-26-16,0 2-10 0,1 1-6 0,0 3-16 0,1 1 2 0,1 1 2 15,0 3-7-15,2 2 5 0,1 2-9 0,2 1-8 0,2 3 7 16,0 2-11-16,2 2-1 0,0-1-2 0,0 0-9 0,2-1 5 0,0 0-8 16,0 0-4-16,0-1 8 0,-1 0-18 0,2 0-13 0,0 0-30 0,0-1-69 15,-1-2-46-15,2 1-72 0,-1-3-137 0,-6-9-149 0,2 2-225 16,-1-2-422-16</inkml:trace>
+  <inkml:trace contextRef="#ctx0" brushRef="#br0" timeOffset="168777.44">8141 16750 2024 0,'-4'10'333'0,"1"1"-103"0,-1 4-49 0,2 0-31 16,2-3-12-16,0 0-24 0,1 2-8 0,1 1-9 0,1 1-7 0,0-1-5 16,1 2-14-16,1-1-9 0,0 0-10 0,2-1-10 0,2-2-13 0,0 2 0 15,1-3-18-15,1-2-1 0,-2-1 2 0,3-2-6 0,-1 1 3 16,1-5-9-16,1-2-5 0,-2-2-1 0,3-4 10 0,0 0-2 0,0-1-6 15,0 0 4-15,0-5 11 0,0 0-9 0,-2-1 0 0,0-1 0 16,-3 0-6-16,-2-1 12 0,0-1 4 0,0-2-12 0,-3 1-4 0,1-3 2 16,-2 1 10-16,-2-1-2 0,-1 1-1 0,-2-1 7 0,-1 0-16 0,-2 2 4 15,-2-1 0-15,-1 2-2 0,0 1 4 0,-3 2-6 0,-2 1-3 16,-1 1-9-16,0 3 0 0,0 2-1 0,0 2-8 0,1 2 3 0,1 2-1 16,1 2 10-16,2 3-12 0,-1 3-4 0,1 1 6 0,0 3-3 0,2 0 16 15,1 2-5-15,2 2 4 0,1 1 9 0,3 0-2 0,1-1 4 16,2 1 0-16,2-1-11 0,2-3 1 0,1 0 5 0,2-1 1 0,2 0 2 15,-1-2-2-15,2-3 2 0,2-1-11 0,0-3 6 0,1 0 7 16,2-1-2-16,0-2 0 0,-1-1-5 0,-1-1 7 0,1-1 5 0,0 0-1 16,0-2-4-16,-2 1-4 0,0-1 0 0,0-1 8 0,0 1 11 0,-1 0-11 15,0 0 5-15,0 1-5 0,-1 1-4 0,-2 0 8 0,2 1-8 16,-2 1 11-16,0 0-6 0,-1 0-3 0,-1 1 6 0,-1 0-16 0,0 0 10 16,-2 1-26-16,0 0-57 0,-2 0-76 0,0 1-134 0,-1-2-141 0,1 1-162 15,-1 0-626-15</inkml:trace>
+  <inkml:trace contextRef="#ctx0" brushRef="#br0" timeOffset="169076.45">8995 16428 1879 0,'-3'-1'428'0,"-2"2"-170"0,-1-1-65 0,-1-1-47 16,0 2-32-16,1-1-17 0,0 0-34 0,-1 1-1 0,-2 0-3 0,1 1-8 15,-2 1-9-15,0 1-6 0,-2 1-8 0,1 0-16 0,1 0 5 16,1 0-15-16,1 1 7 0,-1 1 8 0,1 2 7 0,-1 2 6 0,0 0-12 16,1 1 7-16,2-1-21 0,1 2 3 0,0 1 2 0,3 1 1 0,1-1 3 15,3 2-3-15,2 1 5 0,0-1 7 0,3-1 1 0,1 0 10 16,2 0-2-16,1-2 5 0,-1-1-7 0,2-1-5 0,0-2-5 0,3-1-19 16,2-2 10-16,0 0 0 0,-1-3-5 0,3-1-1 0,-1-1 4 0,1-1-2 15,0 0-6-15,-1 0 2 0,-1 0-8 0,-1-2 6 0,-1-1-8 16,0-1-5-16,-1-1 1 0,-2 0-4 0,0 0-7 0,-2 0-20 0,-1 0-32 15,-1-1-14-15,-1 0-38 0,-1 1-44 0,-2-2-48 0,1 1-88 16,0 0-78-16,-1 0-124 0,-1 1-271 0,0-2-76 0</inkml:trace>
+  <inkml:trace contextRef="#ctx0" brushRef="#br0" timeOffset="169827.39">9364 16451 1334 0,'-2'1'278'16,"1"2"-46"-16,-2-1-38 0,2 1-32 0,1 2-14 0,1 1-22 0,0 1 1 16,1 2-8-16,2-1-7 0,1 3-6 0,0 0-12 0,1 1-2 0,-1 0-13 15,0 0-1-15,0 0-18 0,0-1-4 0,0 0-7 0,0 0-8 16,0-1 1-16,0 0-4 0,-2 0-8 0,0-3 5 0,0-2-8 0,-2 0 1 15,-1-1 5-15,0 0-16 0,-2-2 13 0,0 0-7 0,-2-2-13 0,0 0 5 16,-4-2-11-16,0-1-2 0,-3-1 8 0,-1-1-16 0,-2-1-6 16,2-3 9-16,-2-1-7 0,0-1 16 0,2 0-2 0,1-1-10 0,2 0 10 15,0-2 0-15,-1-1 7 0,2-2 5 0,1 0-14 0,1-3 5 16,2 1 5-16,1-1 7 0,2-1 15 0,2 0-13 0,1 2-13 0,2 0-16 16,1 3 6-16,1 1 10 0,0 3-10 0,2 0 8 0,0 1-22 0,1 2 6 15,-1 1 10-15,1 2-5 0,1 2-3 0,1 0-2 0,0 2 6 16,2 1-2-16,-2 0-13 0,3 1-22 0,0 1-22 0,0 0-25 0,0 0-12 15,2-1-20-15,-1 1-45 0,1-1-31 0,-1 1-71 0,-1 0-71 0,1 1-63 16,0-1-115-16,0 0-529 0</inkml:trace>
+  <inkml:trace contextRef="#ctx0" brushRef="#br0" timeOffset="170193.37">9724 16229 1353 0,'-7'8'406'0,"-2"-1"-158"0,0 3-31 0,0-1-26 0,2-1-13 0,0 1-21 15,1 2-19-15,2 1-13 0,1 0-16 0,-1 0-7 0,1 0-9 16,1 1-9-16,2 0 0 0,1 2-15 0,1-2-24 0,1-1 7 0,1 2-20 16,-1-2-16-16,2 0 5 0,2-1-31 0,0-2 14 0,2 1 19 0,0-1-6 15,1-1 23-15,0-1-13 0,0-2-15 16,2-2 3-16,-1 0-32 0,2-3 27 0,0-2-3 0,-1-1-11 0,2-2 18 0,-2 0-18 0,1-1 2 15,0 0-9-15,-2-1-17 0,0-1 11 0,0-1 19 0,-2 1 17 0,0-3 7 16,-1-2-7-16,-3-1-13 0,2 0 3 0,-2 0 1 0,0 0 6 16,-1-1-26-16,-2 0 4 0,0 1-5 0,-2 0-3 0,-1 0 37 0,-1 1-3 15,-2 1-7-15,-1 1-1 0,-3 0-8 0,0 0 2 0,-3 0 12 16,-2 2-10-16,-1 1-18 0,-3 0 4 0,0 1 6 0,-1 0 4 0,-1 2-4 16,1 2-4-16,-1 1-4 0,0 3 4 0,3 1 6 0,-1 1-8 0,0 3-10 15,1 0 1-15,1 3-11 0,-1 0 1 0,1 2-15 0,0 1-14 16,2 1-11-16,0 1-31 0,3 1-25 0,2 1-36 0,2 1-61 0,2 0-57 15,2-1-88-15,2 1-82 0,1-1-196 0,3-1-323 0</inkml:trace>
+  <inkml:trace contextRef="#ctx0" brushRef="#br0" timeOffset="170909.99">10209 15832 1162 0,'-6'-2'1003'0,"1"0"-811"0,-2 0 17 0,0 2-25 16,2 0-41-16,1 0-40 0,2 1-24 0,1 2-16 0,1 0 0 15,1 3 1-15,2 2-3 0,-1 4 6 0,3 4-4 0,0 1-10 0,1 1-6 16,2 3-18-16,0 2 0 0,2 0 1 0,1 1-6 0,2 1-11 16,-1-1 3-16,1 1-13 0,-1 0 1 0,1 2 6 0,0-1-18 0,0-1 18 15,-1-1-8-15,-1-4-6 0,1-1 10 0,-2-2-12 0,-1-3 13 0,0 1-8 16,-1-2-7-16,-1 0 6 0,-2-3-9 0,0-1-5 0,-1-4 1 15,-2 1-7-15,0-2-14 0,-3-1 0 0,0-1-18 0,-1-2-3 0,-3-1-7 16,0 0-3-16,-2-2 2 0,0-1-4 0,-3-2 11 0,1-1 16 0,-2-3 18 16,-1-2 15-16,1-1 4 0,-2 1 3 0,0-1 9 0,0 0 10 15,-1-1 15-15,2-2 10 0,-4 0 3 0,0 0 16 0,-1-2-6 0,1-2 9 16,0-2 1-16,0-1-20 0,0-1 6 0,2-2-9 0,-1 2 3 16,1 0-2-16,0 0-13 0,3 1-5 0,1 2 0 0,2 2-6 0,2 3 10 15,4 4-14-15,1 1-7 0,2 2 6 0,2 2-7 0,2 2-3 0,1 0-2 16,1 2-2-16,2 0 2 0,-1 3 4 0,3 1 0 0,1 1-2 15,2 2 11-15,2 1-3 0,0 2-10 0,2 2 10 0,1 2-5 0,0 1 11 16,1 2-10-16,1 0-6 0,-3 2 8 0,1 0-10 0,0 2 10 0,-1 1-12 16,0-1 0-16,0-1 0 0,0 3 10 0,-1-1-3 0,0 0-18 15,0 1 9-15,-2 0-8 0,1 0 2 0,-1 0 2 0,-1-2-9 0,-2-2-5 16,-2 1-17-16,0-1-11 0,-1-1-4 0,-4-2-22 0,0-2-16 16,-3-1-26-16,-1 1-48 0,-2-3-19 0,-1 1-78 0,-2-2-66 0,0-3-105 15,-3-1-196-15,-2-3-367 0</inkml:trace>
+  <inkml:trace contextRef="#ctx0" brushRef="#br0" timeOffset="171076.99">10249 16212 1813 0,'-2'6'290'0,"1"1"-50"0,1 0-45 0,2-1-29 0,1-2-21 16,2-1-17-16,0 1-19 0,2-1-1 0,1-1-12 0,-1 1-4 16,3-2-2-16,0-2-20 0,1-1-6 0,2 0-19 0,-2-2 1 0,1-1-14 15,0-2-5-15,0-1-6 0,0 0-21 0,0-1 13 0,-2 0 1 0,0-1-28 16,1 0-26-16,-2-1-36 0,0 1-44 0,0-2-30 0,-2 3-56 15,3-2-72-15,1-1-82 0,1 1-87 0,2-1-157 0,-1 2-428 0</inkml:trace>
+  <inkml:trace contextRef="#ctx0" brushRef="#br0" timeOffset="171593.51">10657 15975 1137 0,'-2'-2'480'0,"-1"2"-209"0,0-1-26 16,0 0-24-16,1 0-29 0,1 1-39 0,0 0-20 0,1 2-25 15,1 1-7-15,0 0-4 0,1 2-21 0,2 1-1 0,0 2-23 0,2 1 8 16,0 0-7-16,2 1-7 0,2 1-2 0,-1 0-19 0,1 2 8 0,2-1-1 16,-1-2 2-16,2-1-3 0,-2 0-14 0,1-1-4 0,-1 0 8 15,1-3-9-15,0-1-1 0,-2-2 6 0,-1-2-15 0,-1-1 8 0,-2-2 7 16,0-2-23-16,-2 0 26 0,-2-3-12 0,0 0-8 0,-2-2 11 16,0-3-26-16,-2-2 17 0,1-1-8 0,-2 1-12 0,0-2 15 0,0 0-13 15,0-1 8-15,0 0 1 0,0 1 1 0,0 0 4 0,-1 1 0 0,1 1-4 16,-1-1 8-16,0 0-15 0,-1 2 3 0,1 1 18 0,0 1-12 15,-1 0 12-15,2 1-14 0,0 3-21 0,1 1-11 0,1 4-30 0,0 1-12 16,0 2-27-16,0 1-22 0,1 2-32 0,1 2-59 0,0 3-78 0,0 3-88 16,0 0-91-16,0 2-165 0,1 1-182 0</inkml:trace>
+  <inkml:trace contextRef="#ctx0" brushRef="#br0" timeOffset="172093.07">10970 16060 1727 0,'2'0'386'0,"0"1"-109"15,1-1-45-15,0 0-46 0,0-2-51 0,1 0-23 0,-1-1-25 0,1 0 3 16,-1-1-8-16,1-1-15 0,-2-1-3 0,1 0-26 0,-1 1 1 16,-1-2 2-16,2 0-17 0,-1-2 3 0,-1 0-12 0,1 0-14 0,-1-2 15 15,1 1-11-15,-1-1 7 0,0-1-9 0,0 0-1 0,0 1 2 0,-1-1-2 16,-1 0 0-16,1 0-10 0,-1-1 14 0,-1 1-17 0,1 0 11 16,-2 2 7-16,1 0-7 0,-2 1 19 0,1 2-4 0,-1 0-15 0,-1 1 0 15,-1 2 2-15,0 1-4 0,-1 1 6 0,0 3-2 0,0 2-8 0,0 1 2 16,-1 2 1-16,2 2-3 0,-2 1-5 0,1 0-3 0,1 3 11 15,0 0 1-15,1 2 9 0,1 2 16 0,2-1-10 0,1-1-11 0,1 1 10 16,2-2-9-16,2 1 9 0,1-1 9 0,2-1-13 0,1-1-16 0,2 0 0 16,0-2-1-16,2-1 5 0,1-1 10 0,-1-2-12 0,1-2 6 15,0 0-10-15,1-2 10 0,1 0 4 0,0-2-15 0,-1-1 3 0,1 0-20 16,-1-1 5-16,0-2 8 0,-1-1-2 0,-1 0 9 0,1-2-16 16,-1-1 15-16,0 1-6 0,-3-1 0 0,-1 0 7 0,1 0-10 0,-2 0 18 15,0 1 9-15,0 1-7 0,-1 1 1 0,0 0 3 0,0 3-10 0,0 0 12 16,-2 1-3-16,2 0-16 0,0 2 21 0,-1 1-12 0,1 2-8 15,-1 0 18-15,0 1-21 0,0 1 13 0,0-1-2 0,-1 3-9 0,-1 0 5 16,0-1-1-16,-1 0-14 0,-1-1 9 0,0 0-9 0,-1 1-6 16,-1-2 14-16,-1 0-13 0,-1-1 14 0,-1 0 1 0,0 0 9 0,-1-2 13 15,0 0-4-15,0-3 10 0,0 0 12 0,0-1 2 0,0 0 19 0,0-1-9 16,1 0 2-16,0-2 7 0,1 0-12 0,-1-1 14 0,1-1-12 16,1 0-4-16,0-1-5 0,0-1 1 0,1 0 8 0,-1-1-12 0,1-2-6 15,-1 0-15-15,2 0-24 0,-1 1 17 0,0 2 10 0,2 0-8 0,-1 1 17 16,3 1-25-16,0 2-2 0,0 0 1 0,1 2-11 0,0 1-6 15,2-1-9-15,-2 3-14 0,2-2-16 0,0 1-14 0,0 1-34 0,-1-1-30 16,2 1-44-16,-1-1-46 0,1 1-75 0,0-2-69 0,0 2-80 0,-1-1-112 16,2 1-368-16</inkml:trace>
+  <inkml:trace contextRef="#ctx0" brushRef="#br0" timeOffset="173093.76">11539 15800 1896 0,'1'4'381'0,"2"2"-81"0,0 0-61 0,0 0-54 0,0-1-41 15,1 0-33-15,0 1-8 0,1 0-5 0,0-2-5 0,-1 2-13 0,1-2-11 16,0 1-24-16,0-2-10 0,1 0-4 0,0-1-20 0,1 0 14 0,-1-2-13 16,-1 0 6-16,1-2-9 0,0 1-9 0,0-1 10 0,0-2 0 15,-1 1 1-15,0-2-5 0,0 0-6 0,0-1-21 0,0 1 5 0,-1-1 7 16,-1-2 5-16,0 0 23 0,-2-1 5 0,1-2-9 0,0 0-9 0,0 0-2 16,-1-1-10-16,-1 2 6 0,0-1 6 0,-2 2-16 0,0 0 6 15,-2 2-2-15,1 0-11 0,-3 1-5 0,-1 2-3 0,-1 0-10 0,-1 1 4 16,-1 1 3-16,-1 1 5 0,1 1 9 0,-2 0 3 0,1 3-4 15,1-1-1-15,0 3 3 0,0 1-2 0,2 1 0 0,0 1-8 0,2 1 3 16,1 3 5-16,1 0 7 0,2 0 4 0,2 0 1 0,3-2 1 0,1 1-6 16,2-1-8-16,1-1-1 0,1 0-5 0,1-2 29 0,1-1 0 15,2 0 1-15,0-2 10 0,2-1-32 0,-1-1 12 0,2-1-4 0,-1-1-3 16,0-1 11-16,0-1-2 0,1-1-2 0,-1 0-4 0,0 0 5 0,-1 0-7 16,-1-1 4-16,1 0-3 0,-2-1 9 0,0 2 18 0,-1-2 1 15,-1 1 8-15,0-1-12 0,0-1-9 0,0 2 5 0,-2-1-6 0,0 1-1 16,-1 0 0-16,1 1 3 0,-2 0 8 0,1 1-2 0,1 1-2 15,-2-1 8-15,2 0-2 0,-1 2-9 0,1 0 5 0,-1 0-2 0,1 1-11 16,0 0 10-16,0 0-9 0,0 0-3 0,1 2 6 0,-1-1 0 0,2 0-8 16,0 0-4-16,0 0 1 0,0 1 5 0,1-1 0 0,1 0 3 15,0 0-5-15,-1-1-3 0,0 0-3 0,0 0 6 0,1-2-4 0,1 0 5 16,0-1 10-16,0-1-13 0,-1-1 10 0,0 1-4 0,1-3-2 16,0 2 0-16,0-2-6 0,-1-1 6 0,-1 1 8 0,-1-1-4 0,0 1 1 15,0-1-3-15,-1 0-6 0,0 0 10 0,-1 1 0 0,-1 0 2 0,0-1 3 16,-1 1-7-16,-1-1 11 0,-1 0 1 0,0 1-6 0,-2 0 5 0,0 1-3 15,-1 2-4-15,-2-1 7 0,0 0-1 0,-1 1 1 0,-1-1-5 16,-1 2-10-16,0-1 2 0,-1 1-4 0,2 1 0 0,-2-1-4 0,0 1 4 16,0 1 0-16,-1 0 1 0,1 0 1 0,-2 1-8 0,1 0 4 15,-1 1-4-15,0 1-2 0,-2 1-1 0,1 1-3 0,-1-1 8 0,2 3 4 16,0-1 0-16,0 1-9 0,2 0 5 0,1 2-2 0,2-1 6 16,2 1 4-16,1-1-10 0,3-2 1 0,0 3 3 0,3 0-8 0,-1 1 14 15,4-1 2-15,1 2-14 0,2-2 10 0,2 2-3 0,-1-1 1 0,2 0-2 16,0 0-19-16,2 0 7 0,-1-1 9 0,2 2 13 0,1 0 13 15,0 1-23-15,-1 1-4 0,2 0 1 0,0-1 1 0,-1 2 4 0,1 1-10 16,-2 0-7-16,-1-1 2 0,-1 2-2 0,-1-2 2 0,-3 0-2 0,-2-2-16 16,-1 1-12-16,-2 1-21 0,-1 0-15 0,-3-1 2 0,-2 0-18 15,-3 1-6-15,-1-1-30 0,-3 0-15 0,-1-1 1 0,-2-2-2 0,-1 0 13 16,-3-1 8-16,-3-1 20 0,0-2 26 0,-1-1 27 0,0-2 24 0,0-1 27 16,0 0 23-16,-1-2 26 0,1-1 17 0,1-2 13 0,2-1 26 15,0-2-3-15,1-1 18 0,0-3 19 0,2-2-8 0,2 0 17 0,2-2-24 16,1-1-20-16,2 0-12 0,2 0-26 0,2 2-3 0,1-1-10 0,2 0-7 15,2 1 2-15,2 1-5 0,0 0-13 0,2 0 3 0,1 0 1 16,1 0-2-16,0 0 6 0,0 0-13 0,0-2-8 0,1 1-4 0,1 0 3 16,1 1 1-16,1-2-15 0,-1-1 14 0,1 0-12 0,0 2-6 0,1 0 24 15,-1 0-3-15,1-1 0 0,0 0 4 0,0 1-11 0,-1-2 2 16,1 0 14-16,-1 0-2 0,0 2 6 0,-1-1-6 0,-1 1 1 0,-1-2 10 16,-1 1-10-16,-1 2-3 0,-2-2-6 0,0 2-3 0,-2 0 11 0,-1-1-4 15,-1 3-6-15,-1-2 1 0,-2 1-9 0,0 2 4 0,-2-2 4 16,-1 3 2-16,-1-1-2 0,-2 2-2 0,0 1 4 0,-3 0 2 0,0 1-4 15,-2 1-4-15,0 1-4 0,-2 3-8 0,1 1 10 0,-2 2 2 16,2 2-4-16,-1 1-2 0,-2 3-10 0,0 1 16 0,0 1 2 0,0 3 4 16,2-1-8-16,-1 2-4 0,3-1 0 0,0 2 0 0,4-1 0 0,0 1 0 15,3-1 0-15,2 1 0 0,2 0 0 0,2-1 0 0,2-2 0 16,1-1 0-16,3 2 0 0,1-1 0 0,3-2 0 0,1 0 0 0,0-3 0 16,3-1 0-16,1-1 0 0,2-1 0 0,-2 0 0 0,3-3 0 15,-1 0 0-15,0-2 0 0,2-1 0 0,-1-1 0 0,-1-1 0 0,1 0 0 16,-1 0 0-16,-2-1 0 0,1-1 0 0,0 0 0 0,-1-2 0 0,-1 1 0 15,-2-2 0-15,-1-1 0 0,-3-2 0 0,1 1-42 0,0-1-61 16,-3 2-30-16,0-2-27 0,-1-1-63 0,-2 0-80 0,-1 0-93 0,0 0-105 16,0 0-151-16,0 1-193 0,1-1 225 0</inkml:trace>
+  <inkml:trace contextRef="#ctx0" brushRef="#br0" timeOffset="173310.77">13141 15539 2149 0,'0'6'384'16,"1"0"-93"-16,0 2-41 0,2-1-48 0,1-3-39 0,1 0-39 0,1-1-26 16,0-1-5-16,1 0-16 0,1-1-5 0,-1 0-9 0,0 0-20 15,0-2 1-15,1 0-10 0,0 1-26 0,0-2-8 0,0 1 0 0,0-2 0 16,0-1 0-16,0 0 0 0,-1 0 0 0,0 0 0 0,1 0 0 0,0 0 0 16,-1 0 0-16,-1-1 0 0,0 1 0 0,-1-1 0 0,1 0-14 15,0 1-24-15,-2 0-10 0,2-2-9 0,-2 2-5 0,1 1-12 0,-1-1-10 16,0 2-26-16,-1-1-26 0,0 1-53 0,0-1-72 0,-1 3-83 0,-1-1-90 15,-1 1-116-15,0 2-193 0,0 1 1 0</inkml:trace>
+  <inkml:trace contextRef="#ctx0" brushRef="#br0" timeOffset="173527.28">13163 15885 2165 0,'5'10'422'0,"0"0"-133"0,3 2-57 0,1-3-42 0,1-3-29 0,0-2-38 16,3-1-16-16,0-2-17 0,2 0-19 0,0-2 5 0,0-1-5 0,1 0-17 15,-1-2-10-15,-1 0-44 0,2 0 0 0,-1-1 0 0,0 0 0 0,-1 0 0 16,1 1 0-16,0 0 0 0,-1-1 0 0,0 1 0 0,-3 0 0 16,-1-1 0-16,0 1 0 0,-1-1 0 0,-1 1 0 0,-1-2 0 0,0 1 0 15,-2 1 0-15,1-1 0 0,-1-1 0 0,0 1 0 0,-1-1 0 16,0 0 0-16,0 1-40 0,0-1-75 0,0 0-31 0,0 0-42 0,-1 0-120 16,0-1-144-16,-1 0-233 0,-1 2-348 0,1-2 143 0</inkml:trace>
+  <inkml:trace contextRef="#ctx0" brushRef="#br0" timeOffset="174828.73">13125 15603 1060 0,'-1'3'257'0,"0"2"-43"0,1-1-22 15,0-1-20-15,1-1-21 0,0-2-27 0,0 1-14 0,0 0-7 0,-1 0-3 16,1 1-3-16,0-2-5 0,0 0-3 0,0 1-4 0,-1-1 0 16,0 1-3-16,1-1-8 0,-1 0-4 0,0-1-6 0,1 1 0 0,-2 0-1 15,1 0-7-15,0 0 3 0,-2 1-6 0,1-2-4 0,-2 1 3 16,1 0-14-16,-1-1-4 0,-1 1-5 0,0 1-6 0,-1-2 5 0,-1 1-5 16,1 0-3-16,0 0-5 0,0 1 4 0,0 1-3 0,2-1 3 0,-2 1-3 15,0-1-6-15,1 1 7 0,0-1-1 0,1 1 2 0,1 0-5 16,0-1-1-16,1 1 2 0,0-1 2 0,1 1 2 0,1 0 0 0,2-1-4 15,-1 1-2-15,2 0-8 0,1 0 8 0,2-2-8 0,0 0-4 0,1-2 0 16,3 1 0-16,1 0 0 0,1-2 0 0,1 0 0 0,-1-1 0 16,1 0 0-16,1 0 0 0,-1-1 0 0,-1 1 0 0,2-2 0 0,-1-1 0 15,0 1 0-15,-1 0 0 0,-1 1 0 0,0 0 0 0,0 0 0 16,0 2 0-16,-1-1 0 0,-2 1 0 0,1 1 0 0,-1 0 0 0,1 1 0 16,-1 1 0-16,-1 0 0 0,0 0 0 0,-2 0 0 0,1 1 0 0,-1 1 0 15,0-2 0-15,-2 1 0 0,0 0 0 0,-1 0 0 0,0 1 0 16,-1 0-24-16,0 0-30 0,0-2-17 0,-1 2-13 0,0 0-30 0,-1 0-9 15,1 0-28-15,-1-1-25 0,0-1-22 0,0 1-41 0,0 1-38 16,0-1-46-16,1 0-57 0,-2 0-82 0,1 0-293 0</inkml:trace>
+  <inkml:trace contextRef="#ctx0" brushRef="#br0" timeOffset="175093.73">13290 15857 1639 0,'2'1'447'0,"0"0"-153"0,1 1-39 16,-1-1-38-16,0-1-25 0,1 1-51 0,2-2-19 0,0-1-21 0,0 1-4 15,0-1 4-15,0 1-18 0,0 1-5 0,0 0-28 0,0 0-3 16,0 0 0-16,0 0-6 0,1 1-8 0,0-2-7 0,-1 2-14 0,0-1 2 16,1 1 8-16,-2 1-24 0,2-1 18 0,1 0-10 0,0 0-4 0,0-1 12 15,0 1-14-15,-1-2 0 0,1 0 0 0,-1 1-2 0,1-2 4 16,-2 0-2-16,2-1 0 0,0 0 0 0,0 0-4 0,1 0-12 0,-1 0-8 15,-1-1-8-15,1-1-6 0,-1-1-32 0,0 1 13 0,0 0-35 0,1-1-34 16,-1 0-62-16,-1-1-136 0,-1 1-165 0,-1-2-310 0,-1 2-457 16</inkml:trace>
+  <inkml:trace contextRef="#ctx0" brushRef="#br0" timeOffset="177093.46">13615 14559 2011 0,'-1'1'259'0,"-1"0"-18"16,-1 0-38-16,1 2-33 0,0-1-34 0,1 1-20 0,1 2-22 0,-1 1-7 16,1 1 6-16,0 1-9 0,1 2-2 0,1 2 3 0,0 1-25 0,1 1 2 15,0 1-16-15,2 1-11 0,-1 0-2 0,1 2-12 0,0 0 7 16,2 1-8-16,2 2-5 0,-1 1-1 0,2 2 6 0,1 2-6 0,1 1-4 16,-1 0 2-16,2 0-12 0,-1-1 0 0,0 0 0 0,-1-1-6 0,0 0 4 15,1 1 4-15,0-2-2 0,-1 0 8 0,1 1-10 0,-3-2-8 16,1-1-12-16,-1-1-2 0,-1-2 14 0,0-2-2 0,-2-2-1 0,0-1-25 15,-1-2-41-15,-2-2-23 0,0-3-29 0,-2-3-42 0,0-2-52 16,0-2-74-16,-1-3-79 0,0-2-94 0,-2-4-150 0,1-3-385 0</inkml:trace>
+  <inkml:trace contextRef="#ctx0" brushRef="#br0" timeOffset="177344.46">13568 14714 1560 0,'-7'-10'325'0,"-1"-1"-40"0,-1-2-42 15,3-1-47-15,2 2-26 0,1-1-29 0,2-1-25 0,1 0-23 0,2-1-12 16,2 0-11-16,0 2 5 0,2 0 7 0,1 0-8 0,1 1-3 16,1 0-23-16,3 1-8 0,0 2-11 0,1 1-1 0,1 1-1 0,0 3-8 15,1 1 0-15,1 2-7 0,-1 2 3 0,-1 2 3 0,2 2-12 0,-2 1-8 16,1 1-2-16,-1 0 2 0,-1 2 4 0,1 2 2 0,-2-1-12 16,0 1-8-16,-3 0 5 0,0-2-1 0,0 3 22 0,-3 1 5 0,1 0-3 15,-3 1 0-15,0 0-18 0,-2 1-12 0,-1 1-9 0,-2-1-19 16,-1 1-13-16,-2-1-1 0,0 0-8 0,0 0-8 0,-1-2-4 0,0-1-13 15,0 1-12-15,0-2-13 0,0-1-12 0,2-2-24 0,-2-1-11 0,2-1-13 16,0-2-20-16,2-1-8 0,1-3-36 0,1 0-41 0,2-3-49 16,1-2-80-16,1-1-188 0</inkml:trace>
+  <inkml:trace contextRef="#ctx0" brushRef="#br0" timeOffset="177610.46">14062 14577 873 0,'5'6'574'0,"0"1"-266"16,2 3-41-16,-1-1-42 0,-1-1-40 0,1 1-29 0,0 1-20 15,-1 0-18-15,0 1-13 0,0-2-13 0,-2 2-12 0,2-2-8 0,-2 1-10 16,0 1-7-16,-1-1-8 0,-1 0-1 0,-1-1-6 0,0-1 2 16,-2-2-9-16,0 1-5 0,-2-1-2 0,0 0-3 0,0-1-1 0,-1-1-5 15,-1-1 0-15,1-2-7 0,-2-1-8 0,1-1 9 0,-1-2-5 16,-1-2 1-16,2-1 5 0,0-1-5 0,1-2-1 0,2 0 4 0,0-2-3 16,1-3-1-16,1-1 5 0,0-3-1 0,1 1 7 0,1-3-9 0,-1 0 5 15,2 0-13-15,0-2 6 0,2 2 8 0,0 2-13 0,2 1 17 0,1 2-16 16,1 1-2-16,1 2 4 0,0 1-4 0,1 3-2 0,-1 1-2 15,0 0-2-15,1 2 6 0,0 1-2 0,0 0-4 0,-1 2 1 0,1 1-15 16,-2 0 1-16,2 1-21 0,-1 0-21 0,0 1-24 0,0-1-34 16,0 1-41-16,-1-1-59 0,0 1-71 0,0-1-85 0,1 0-108 0,0 0-186 15,0-1-253-15</inkml:trace>
+  <inkml:trace contextRef="#ctx0" brushRef="#br0" timeOffset="177893.45">14452 14575 1798 0,'3'4'367'0,"1"0"-89"0,2-1-35 16,0-1-50-16,0-1-52 0,0-2-42 0,-1 0-13 0,2-2-15 16,-1 0-10-16,0 0-10 0,1-2-9 0,0 0 4 0,-1-1 4 0,0 1 0 15,-1-2-11-15,-1-1-1 0,-1-2-15 0,1-1-4 0,-1 0-2 0,1 1-4 16,-1-2-7-16,-1-1-4 0,-1 1 4 0,0 0-10 0,-2 1 8 16,0 0-2-16,0 0-10 0,-2-1 8 0,-1 3-8 0,-1-1 1 0,1 3 5 15,-3 1-8-15,-2 0 3 0,-1 1-3 0,0 1-3 0,-1 2 1 0,-1 2-3 16,3 0 8-16,-1 2 1 0,1 2 0 0,1 1 6 0,0 2-5 15,1 2 5-15,-1 2 2 0,2 1 0 0,0 2 3 0,1 0 3 0,2 1-4 16,1 2-4-16,2 0-4 0,1 0 4 0,2 1 0 0,0 0-12 16,1 0 5-16,2-1 13 0,-1-2-8 0,3 2 13 0,0-3 0 0,2-1-16 15,1-2 3-15,1-2-2 0,0-3-19 0,2-2-7 0,0-1-18 0,0-1-30 16,1-3-28-16,-2 0-31 0,1-2-43 0,0-1-27 0,1-2-24 16,-3-2-30-16,1-1-24 0,0-1-38 0,1-1-80 0,-1-3-77 0,0 0-168 15</inkml:trace>
+  <inkml:trace contextRef="#ctx0" brushRef="#br0" timeOffset="178227.45">14812 14364 620 0,'1'-8'537'0,"1"2"-238"16,0-2-46-16,0 2-23 0,-2 2-34 0,0 0-18 0,0 2-19 0,-1-1-9 16,0 2-2-16,0 0-20 0,-1 0-14 0,1 0-16 0,-1 1-23 15,-1-1-11-15,1 1-21 0,0 0-10 0,-1-1-6 0,-1 0-7 0,0 0 0 16,0 0-2-16,0 0-4 0,-2 2-3 0,0-2-3 0,0 2-5 16,0 0 3-16,-1 0-4 0,1 1 7 0,0 1-9 0,-1 2 4 0,1 1 1 15,1 1 1-15,-1 1 1 0,0 2-3 0,0 2 1 0,0 0 1 0,1 3 1 16,1 1 2-16,1-1 1 0,1 0 6 0,2 2 5 0,1-1 9 15,2 0 0-15,1-1 0 0,3-1-2 0,0-1-22 0,2-2 0 0,1-2-10 16,0-2 6-16,3-2 2 0,1-1 11 0,1-2-2 0,0 0-3 0,2-1-1 16,-1-2-10-16,0-1-19 0,-1-2-2 0,2-1 3 0,0-1 11 15,0-1 8-15,-1 0 13 0,-1 0-11 0,-1-1-11 0,0 0 5 0,-3-1-2 16,0 1 4-16,-1 1 4 0,0-1 0 0,-2 1-2 0,-1 0 4 16,0 1-2-16,-2 1-2 0,0 0 0 0,-1 1 2 0,0 1 1 0,0 0 1 15,-1 2-2-15,0 1-4 0,1 1 4 0,-2 2 6 0,1 0 3 0,0 1 3 16,0 2-11-16,0 1-1 0,0 0 2 0,0 2-6 0,0 1 8 15,-1-1 0-15,1 2-10 0,-1 0 2 0,0-2-19 0,0 1 0 0,0-1-4 16,0-1 16-16,1 2-1 0,0-1-18 0,0 0-11 0,1-2-49 16,-1 0-25-16,0-2-36 0,-1-1-66 0,1-1-86 0,-1-2-122 0,-1 0-222 15,1-3-484-15</inkml:trace>
+  <inkml:trace contextRef="#ctx0" brushRef="#br0" timeOffset="178377.45">15040 14261 1953 0,'-4'0'437'0,"0"1"-165"0,-2 1-14 0,0 0-52 16,1 1-63-16,0 0-46 0,1-1-35 0,0 1-18 0,0 0-9 0,0-1-11 16,0 1-5-16,1-1-10 0,1-1-12 0,0-1-11 0,1 1-21 15,0-3-40-15,2 0-50 0,0-2-79 0,1-1-78 0,1-1-93 0,2 0-139 16,0-1-244-16,3-2-119 0</inkml:trace>
+  <inkml:trace contextRef="#ctx0" brushRef="#br0" timeOffset="178727.45">15142 14226 1309 0,'-3'12'784'0,"1"0"-481"15,1 1-35-15,2-2-39 0,2-3-66 0,3 1-58 0,0 0-34 0,1-1-11 16,3 0-2-16,0-2-7 0,1 1-9 0,1 1-15 0,1-1-5 0,-1 0-1 16,1 1-6-16,1-2-2 0,1 1-12 0,0 0 1 0,0-2 0 15,1 3 0-15,-1-1-4 0,-2 1-2 0,-1 0-12 0,-2 1-16 0,-1 0-3 16,-1-1-14-16,-2 2-20 0,-2 0-19 0,-1 0-22 0,-2 0 1 0,-2 1 12 15,-2-2 6-15,0 0 3 0,-2-1 5 0,0-1 11 0,0-1 13 16,-1-2 17-16,0 0 7 0,0-2 11 0,-1-1 16 0,1-1 16 0,1-2 10 16,0-1 16-16,1-1 12 0,1-2 13 0,1-2 14 0,0-1 19 15,1-1 7-15,0-2 6 0,2 0-4 0,2-2-7 0,0 0-5 0,2 1-16 16,1-1-15-16,0 1-14 0,1 0-13 0,1 2 4 0,0 2-3 0,0 1-1 16,1 1-1-16,0 1-3 0,-1 1-3 0,1 1 1 0,0 1-3 15,0 2-8-15,0 1-1 0,-1 0 0 0,1 1-5 0,-1 1 0 0,2 0 7 16,0 0-8-16,1 1 3 0,-1 1 2 0,0 0-3 0,0-1-7 15,1 0 0-15,0 1-2 0,0-1-2 0,1 0 2 0,-2 0-8 0,0-2-9 16,-1 0-21-16,0 0-23 0,0 0-35 0,-1-1-43 0,-1 0-65 0,-1-2-77 16,0 1-95-16,-2-1-171 0,1-1-255 0,0-1-115 0</inkml:trace>
+  <inkml:trace contextRef="#ctx0" brushRef="#br0" timeOffset="178878.45">15529 14082 2400 0,'-6'0'217'0,"1"-1"25"0,-2 1-15 15,1 2-65-15,2 0-47 0,0 1-41 0,-2 1-26 0,2 0-4 16,-1 0-8-16,1 0-10 0,0-1-9 0,1-1-6 0,1 0-11 0,0 0-5 16,1-1-3-16,0 0-16 0,2 0-19 0,-1-1-26 0,2 0-35 0,0 1-55 15,1-2-71-15,0 1-74 0,2-1-98 0,0 0-131 0,3 0-248 16,1 0 26-16</inkml:trace>
+  <inkml:trace contextRef="#ctx0" brushRef="#br0" timeOffset="179128.26">15776 14220 1660 0,'4'8'510'0,"3"-1"-277"0,1 2-12 0,1-3-29 15,-1-2-53-15,1-1-58 0,-1-2-28 0,2 1-7 0,-1 0-8 0,0-1-3 16,1-1-4-16,-1 0-6 0,1-1-8 0,-2 0 1 0,1-2 2 0,0 1-2 16,0-3 6-16,1-1-8 0,-1-1-1 0,-2-1-3 0,1-1 7 15,-1 0-1-15,-1-1 0 0,0 2 6 0,-1-2-15 0,-1 1 4 0,-1 0-3 16,-1 0 1-16,0 0 2 0,-1 0 2 0,-1 2-4 0,-1 0 0 15,-1 0-2-15,-2 0-7 0,-1 1 10 0,-2 0 3 0,-1 1-2 0,-3-1 4 16,-2 0-12-16,-2 1-7 0,-2 0 1 0,0 1-3 0,0-1-2 0,-1 1 0 16,0 0-5-16,1 0-8 0,-1 2-12 0,0 0-27 0,1 4-29 0,2 1-29 15,1 2-35-15,2 3-41 0,2 1-53 0,2 2-63 0,3 0-64 16,3 1-88-16,1-1-120 0,4 1-174 0</inkml:trace>
+  <inkml:trace contextRef="#ctx0" brushRef="#br0" timeOffset="179427.26">16167 14027 2364 0,'2'4'264'0,"2"2"-41"15,0 1-25-15,0 0-53 0,1 0-56 0,-1 2-33 0,0-1-16 0,1 2-13 16,-1 1 2-16,-1-1-7 0,0 1-9 0,0 1-7 0,-1-2-2 0,2 2-4 16,0-2 0-16,1 1-2 0,0-2 0 0,1 0-2 0,1-1 8 15,-1 1-2-15,0-1-10 0,2 0 3 0,-2-1 3 0,2 0 0 0,-1-2 2 16,1-2-4-16,0-1-10 0,0-1 8 0,-1 0-1 0,1-2-4 0,0-1 5 15,0-1-6-15,-1-2-1 0,1-1 4 0,-1 0-2 0,1-3 7 16,-1 0 6-16,0-1 0 0,2 0 7 0,-1 0 2 0,0 0 2 0,0-1 7 16,-1 0 2-16,1 1 5 0,-1 0 19 0,0 1 1 0,1 0 4 15,-2 3-1-15,2 0-15 0,-1 3 8 0,0 1 5 0,1 2-5 0,-2 2-2 16,1 2-6-16,1 1-6 0,0 3-1 0,-1 0-1 0,1 2-15 0,-1 1-4 16,1 2-8-16,-1 0-6 0,-1 2 14 0,1-1-14 0,0 1-10 0,1 2-17 15,-1 0-16-15,-1-1-25 0,1 0-32 0,-2 0-49 0,0-2-78 16,-2-1-114-16,0-3-163 0,1 1-278 0,-1-2-400 0</inkml:trace>
+  <inkml:trace contextRef="#ctx0" brushRef="#br0" timeOffset="184696.49">4622 6674 442 0,'1'-2'-31'0,"2"-1"58"0,2 1 11 15,2-1-1-15,2 1-5 0,-1 0-4 0,1 0-6 0,0 0-4 16,2 0-4-16,2 1-1 0,1 1-6 0,1 0-2 0,1 0 1 0,1 0-4 15,3 0-1-15,1 1 3 0,3-1-2 0,1 1-1 0,2-1 3 16,2 1-1-16,-1-2-1 0,2 1 2 0,1-1-4 0,2 0 5 0,0 0 3 16,1 1 1-16,3 0 7 0,-2 0-5 0,3 1 5 0,0 1 3 0,2-2-2 15,2 1 3-15,-1 1-1 0,0-1 0 0,3 2-2 0,0-1 1 16,0 1-1-16,1 1-2 0,1-1 3 0,-1 0 2 16,1 0 2-16,0-1-2 0,2-1-1 0,-1 1-2 0,2-1 2 0,0-1 4 0,0 1 3 0,2-2 4 15,1-1 2-15,1-1-7 0,3 0 2 0,0-2-7 0,1-1-2 16,2-1 5-16,2-1-7 0,1-2 3 0,-1 0-3 0,1-1-1 0,0-1 1 15,0-1-8-15,2 0 1 0,-1 0-7 0,1 1-2 0,-1-3 4 0,2 0 1 16,-1-2-2-16,-2 1-2 0,1-3 3 0,-2-1-5 0,-1 1 0 16,-1-1-3-16,-2-1-2 0,0 0-1 0,-2-1 7 0,-2-2 2 0,2 1-1 15,-4 0 3-15,1-2-1 0,-2-2-5 0,-3 0 1 0,-1 1 5 16,-1-1-5-16,-3 1 3 0,-2-2-1 0,-1 2-2 0,-5-4 4 0,-1 1-3 16,-1-1 4-16,-5 0-1 0,0 1-3 0,-2 0 3 0,-3 1 0 0,-1-2 0 15,-2 1 0-15,-3 0-3 0,0 0 0 0,-2 1 5 0,-3 1 1 16,-3-2 5-16,-3 2 0 0,0-1 0 0,-3 0-5 0,-2 1-2 0,-4 1 2 15,-2 1-2-15,-3 1 2 0,-4 0-2 0,-2 0 0 0,-4 0-4 0,-1 1 0 16,-3-1-1-16,-1 2 0 0,-4-1 0 0,-3 3-4 0,-1 1 4 16,-2 1-3-16,-2-1 2 0,0-1 4 0,-3 2-4 0,1-1 1 0,-2 0-3 15,-1 2 2-15,1-1 0 0,-2 0 0 0,-2 2 4 0,0-1 2 16,-2 2 4-16,-1 0 2 0,-2 2-3 0,0-1-2 0,-1 1-3 0,-3 1 0 16,1 1 1-16,-2 2 2 0,-1 0-4 0,-1 2 3 0,-4 0 1 0,0 3-5 15,-2 0 5-15,-2 2-3 0,0 1 2 0,-2 2-1 0,-3 1 0 16,0 2 0-16,-3 2-4 0,-2 1 0 0,-1 2 1 0,-4 0-1 0,-2 4 2 15,1 1 0-15,-1 3 2 0,-1-1-8 0,1 2-1 0,0 1 2 0,-1 2 0 16,0 2 7-16,-1 2 3 0,1 0-2 0,2 2 0 0,2-1 1 16,3 2-7-16,2 0 1 0,3 0-3 0,3 2 0 0,2-1 6 0,4 2-1 15,4-1 4-15,2 0-3 0,5 0-1 0,4 1 1 0,3 0-6 16,3 2 1-16,3 1 0 0,3 0-5 0,4 2-1 0,0 0 4 0,3 1 2 16,1 2 7-16,4-1 1 0,2 1-4 0,3 0-3 0,4 0-1 0,2 2 2 15,2-1-3-15,2 1 3 0,1 0-2 0,3-1-3 0,1 0-3 16,3-3-6-16,2-1-8 0,4-1-2 0,3-4 2 0,2-1 6 0,4-4 0 15,4-1-19-15,5-4-34 0,2-3-44 0,4-2-24 0,2-3-20 16,1-3-8-16,0-4-39 0,4-3-145 0</inkml:trace>
+  <inkml:trace contextRef="#ctx0" brushRef="#br0" timeOffset="196195.3">16833 14186 1609 0,'-3'1'275'16,"2"0"-63"-16,-2 0-5 0,1 1-21 0,0 0-39 0,0 0-17 16,1 1-24-16,0 0-2 0,0 2 1 0,0 1-18 0,1 0 3 0,1 1-14 15,0-1-9-15,0 2-9 0,1-1-19 0,0 1 2 0,1 0-15 0,0 0 4 16,2 1-2-16,0 0-2 0,1 1 1 0,1 0-1 0,0 0-7 16,0-1 2-16,0-1 0 0,-1-1-3 0,1 0 1 0,-1-3-11 0,0 0-3 15,2-1-1-15,-1-1-8 0,0-1 8 0,0-1-2 0,1 0-2 0,0-1 0 16,-1-1-2-16,0-1 4 0,0 0-6 0,-1-1 2 0,0-1-3 15,-1-1-3-15,-1 0 4 0,2-1 0 0,-2-1 4 0,0 2-9 0,0-2 3 16,-2 0 2-16,0 1-7 0,-1 0 9 0,-1 0-4 0,-2 0-7 16,0 1 1-16,-1 1-1 0,-2-2 1 0,-1 0 10 0,0 1 0 0,-2 0-3 15,-1 1 1-15,-1 0 0 0,-1 1 0 0,0 0 1 0,-1 2-5 0,-1 1 2 16,1-1 6-16,2 3-2 0,-1-1 6 0,1 2-2 0,2 1-4 16,-2 1 4-16,2 0 0 0,-1 2-6 0,0 1 2 0,1 0-3 0,1 3 5 15,0 0-6-15,0 0 0 0,1 2 1 0,1 0-7 0,0-1 3 0,2 0 3 16,0 1-5-16,1-1-11 0,1-1-16 0,0-2-25 0,2-1-25 15,1 0-36-15,0-2-49 0,1-3-71 0,1-1-71 0,1-2-88 0,1 0-185 16,2-4-469-16</inkml:trace>
+  <inkml:trace contextRef="#ctx0" brushRef="#br0" timeOffset="196428.3">17119 14175 1876 0,'-1'2'371'0,"1"1"-66"0,0-1-30 0,1-1-51 16,1 0-52-16,1-1-34 0,3 0-31 0,-1-1-14 0,1-1-22 0,1 0-18 16,0-1-7-16,1 0-10 0,-1-1-5 0,1 0-10 0,0-1-11 15,2 0-2-15,0 0-1 0,0 0-3 0,0-1-2 0,-2 1 2 0,2 0-2 16,-1-1 6-16,0 0-4 0,1 1-10 0,0-1 0 0,-1 0-9 16,2 0-3-16,-1 0 1 0,1-1-10 0,-1 1-13 0,0 0-14 0,-1-1-14 15,1 0-25-15,0-1-27 0,0 1-31 0,0-1-49 0,-2 0-49 16,0 1-66-16,-1 0-94 0,-1-2-165 0,0-1-463 0</inkml:trace>
+  <inkml:trace contextRef="#ctx0" brushRef="#br0" timeOffset="196611.48">17318 13842 1331 0,'-6'-1'732'0,"-2"0"-397"0,-1 0-16 0,2 1-47 16,0 1-63-16,1 1-46 0,1 2-41 0,0 0-18 0,1 2-8 15,1 1-17-15,0 2-2 0,0 0-11 0,1 1-7 0,1 2-24 0,0 1-7 16,2 1 10-16,2 1-10 0,1 1-26 0,1 2-2 0,0 0 0 15,2 1 0-15,0 1 0 0,1 0 0 0,0-1 0 0,1 0 0 0,0-2 0 16,0-1 0-16,-1-3 0 0,0 0 0 0,1-1-12 0,-1-2-72 0,1-1-43 16,0-3-41-16,1 0-55 0,0-4-106 0,0-1-135 0,1-1-214 15,2-3-651-15</inkml:trace>
+  <inkml:trace contextRef="#ctx0" brushRef="#br0" timeOffset="196845.48">17722 13638 1868 0,'-6'8'578'15,"1"0"-272"-15,-2 4-22 0,2-1-40 0,1-1-54 0,1 2-43 0,2 0-25 16,1 2-22-16,1 2-7 0,1 1-12 0,2 0-15 0,0 2-50 0,0 2-16 16,1-1 0-16,0 2 0 0,2 1 0 0,0-1 0 0,1 1 0 15,0 0 0-15,2 0 0 0,1 0 0 0,-1-1 0 0,3 0 0 0,0-1 0 16,1-2 0-16,0-1 0 0,-1-2 0 0,1-1 0 0,0-3 0 15,-1 0 0-15,0-2 0 0,-2 0 0 0,1-2-30 0,-2-1-28 0,0-2-15 16,-2-1-11-16,-2-2-27 0,-1-2-33 0,-2 0-47 0,-1-2-49 0,-1-1-53 16,-2-2-54-16,-1-3-64 0,-1-1-93 0,0-3-122 0,-2-2-124 15</inkml:trace>
+  <inkml:trace contextRef="#ctx0" brushRef="#br0" timeOffset="197094.47">17776 13657 2228 0,'2'-10'100'0,"2"0"47"15,2-3 35-15,1 1 0 0,0 2-30 0,0 1-28 0,0 2-22 16,1 1-5-16,1 0-8 0,-1 0-7 0,1 1-8 0,0 1-10 0,0 1-7 16,0 1-2-16,0 1-9 0,0 1-10 0,-1 0-1 0,1 2-15 0,0 0-7 15,-1 2 7-15,1 1-10 0,-2 0 9 0,1 2-7 0,-2 0-10 16,-1 2 8-16,0 0-14 0,0 2 10 0,-1 0-2 0,0-1-8 0,-2 0 2 16,1 0-14-16,-2 2-2 0,0 0-1 0,-1 1-12 0,-2 0-2 15,-1-1-20-15,-1 1-4 0,0 1-6 0,-1-1-12 0,0-1-7 0,0 1-5 16,0-1-3-16,0-1 4 0,0-1-1 0,-1-2-6 0,1-1 1 0,0 0-1 15,1-2-2-15,0-1-5 0,2-2-14 0,1-2-14 0,1-1-30 16,1-2-15-16,1-1-18 0,1-1-22 0,1-1-28 0,0-3-45 0,2-1-35 16,0-1-163-16</inkml:trace>
+  <inkml:trace contextRef="#ctx0" brushRef="#br0" timeOffset="197361.46">18096 13601 641 0,'5'2'361'15,"1"1"-102"-15,2 1-17 0,-2 1-18 0,0 0-21 0,-1 2-13 0,0 0-16 16,0 2-11-16,-2-1-20 0,1 1-10 0,-1 1-15 0,0-1-16 0,-1 2-7 15,1-1-15-15,0-1-7 0,-1 1-9 0,0-1-1 0,-1 0-18 16,-1 0-3-16,0-1-11 0,0 0-5 0,-2-2 2 0,1-1-2 0,-1 0-6 16,1-1-5-16,-1 0 4 0,0-2-4 0,0-1 2 0,0-1 0 15,0-2-6-15,1-1-5 0,-1-2 1 0,1-2-5 0,-1-1-2 0,1-2-2 16,0-2-7-16,1-1 9 0,1 0-2 0,0-1 2 0,1-1 4 0,-1-2-8 16,1 0 8-16,0 0-1 0,0-1 3 0,1 0 5 0,1 3-1 15,1 0 1-15,0 3 2 0,1 2 3 0,0 2-11 0,0 1 5 0,0 2-2 16,1 1-8-16,-1 2 2 0,0 0 3 0,1 1 3 0,0 1-8 0,0 0 6 15,-1 1-6-15,0 0-2 0,-1 1 2 0,0 0-8 0,1 1 2 16,-2 0-5-16,0 0-14 0,0-1-17 0,-1 0-31 0,0-1-29 0,0 0-41 16,0 0-48-16,1 0-62 0,0-2-74 0,0 0-92 0,1 0-144 0,1-1-523 15</inkml:trace>
+  <inkml:trace contextRef="#ctx0" brushRef="#br0" timeOffset="198395.16">18419 13604 924 0,'1'1'499'0,"2"0"-224"0,0-1-23 0,0 0-19 0,0-3-48 16,1-1-40-16,0 0-31 0,0-2-3 0,0 0 2 0,-1-2-9 0,0-2-10 16,1 0-19-16,-1-1-15 0,0-1-12 0,0 1-11 0,-2-2-8 0,-1 0-11 15,-1 1-8-15,-2 1 3 0,-1-1-9 0,0 1-3 0,-1 0 8 16,0 0-9-16,-1 2 13 0,-1 1-2 0,-2 1-9 0,0 3 5 0,-2-1-7 16,-1 1-2-16,1 2 8 0,-2 2-10 0,1 2-3 0,0 2 3 0,1 2 1 15,1 1 3-15,-1 3-4 0,0 1 0 0,1 2-1 0,2 0 3 16,1-1 8-16,2 2-1 0,2 1 0 0,3 2-8 0,1-2 8 0,2 3 2 15,3-1 3-15,2 1 4 0,2-2-3 0,2 1-2 0,1-3-3 16,0-2-1-16,1-2-3 0,2-2 0 0,1 1 3 0,1-3-6 0,1-1-3 16,2-1 0-16,-2-2-5 0,2-1-4 0,-1 0 4 0,-4-2-2 0,1 1 0 15,-1-2-1-15,-2 0-3 0,-1-2 4 0,-1 0-1 0,-1-1-3 16,0 0 4-16,-1-1 2 0,0-1 2 0,-1 0 5 0,0-1 2 0,-1 0 2 16,0-2-2-16,-2 1 4 0,0-1-1 0,0 0-3 0,-1 1 9 0,-1-1 0 15,0-1-1-15,-1 2 6 0,0-1-1 0,1 0 1 0,-2 2 1 16,0-2-3-16,0 1-1 0,-1 0 8 0,-1 0-1 0,0 2-2 15,-1-1 5-15,-2 1-1 0,0 0-3 0,-1-1-3 0,0 2 3 0,0 0-9 16,-2-1 10-16,0 1-5 0,-2 0 1 0,1 1-3 0,-1 0-2 0,0 1 2 16,-1 1-5-16,1-1 2 0,0 2-1 0,0 0 5 0,0 1 1 15,0 0 0-15,1 1 2 0,-1 2-1 0,1-1-5 0,0 1 5 0,2 0-13 16,-2 0 5-16,1 1 0 0,0-1-6 0,1 0 6 0,1 1-4 0,2 0-2 16,0-1 5-16,2-1-3 0,1 2 2 0,0-1-2 0,2 0-2 0,-1 0 0 15,2 0 2-15,-1 0-2 0,1 0 10 0,0 0-5 0,0-1-3 16,0 1 4-16,1 0-6 0,-2 0 0 0,1 0 2 0,0-1 4 0,0-1-1 15,-1 2-3-15,0-2 2 0,0 1-2 0,-1 0-2 0,0-2 4 16,0 1-2-16,-1 0-4 0,0 0 2 0,-1 0 0 0,1 1 6 0,-1-1-4 16,1 0 0-16,-1 0 0 0,0 0 0 0,0 0 5 0,-1 1 5 0,1-2-12 15,0 0 10-15,-1 0-4 0,2 0-10 0,-1 0 8 0,0 0-2 16,0-1-8-16,0 0 6 0,0 0-2 0,0 0 8 0,1 0-6 0,-1 0 0 16,1 0 0-16,-1 0-6 0,1 0 10 0,0 1 0 0,0 0-3 0,-1-1-2 15,1 1-1-15,-1 1-8 0,1-1 12 0,-1 0-2 0,0 1-4 16,0-1 8-16,1 1-6 0,-1 0-6 0,1 0 6 0,0 0-2 0,-1 1 4 15,0-1-2-15,0 0-3 0,0 0 6 0,0 1-6 0,-1-1 5 16,1 1-2-16,1 0 2 0,-1-1 0 0,0 2 2 0,0-1-2 0,-1 0-8 16,2 1 10-16,-1-2 2 0,0 1-2 0,0 0 3 0,1 0-12 0,0 0 1 15,-1 1 6-15,1-1 0 0,0 0 0 0,0 0 0 0,0 0-2 16,0 0 4-16,0 1 0 0,0-1 4 0,0 0-6 0,0 0-6 0,-1 0 8 16,2-1-4-16,-1 0 2 0,0 0 0 0,0 0-6 0,0 1 6 0,0-1-2 15,0 0 0-15,0 0 6 0,0-1-8 0,1 0 10 0,0 0 4 16,0 1-8-16,0-1 3 0,-1-1-5 0,0 1-2 0,0-1 4 0,0 0-2 15,1 0 2-15,-1 1-4 0,1 0 4 0,-1 0-7 0,0 0 6 16,-1 0 3-16,1 1 0 0,0-1 8 0,-1 1-16 0,1-2 8 0,-1 2-2 16,0 0-2-16,0 0 4 0,0 1-4 0,-1-1-2 0,1 0 6 0,0 0-2 15,-1 0 3-15,0 1-1 0,0 0-10 0,0-1 12 0,-1 2-2 16,1-1-4-16,-1 1 8 0,1 0-6 0,0 0 4 0,0 1 0 0,0 0 0 16,1 0 3-16,0 1-3 0,1 0 4 0,1 1-2 0,0 0 6 0,1-1-8 15,1 1-1-15,0-1-3 0,2 0-8 0,1 1 10 0,0 0-8 16,2-1 4-16,-1 1-1 0,3 0 2 0,0-1-2 0,0 1-1 0,2 0 2 15,-1 0-4-15,-1-1-6 0,2 0 4 0,-1 1-12 0,0 0 1 16,-1 0 11-16,-1 1-4 0,1-1-2 0,-1 1-1 0,-2 0-3 0,0 0 5 16,-2 0 7-16,-2 0-2 0,-1 1-2 0,-1 1 0 0,-2 0-1 0,-2 0-5 15,-1-1 3-15,-1 0-5 0,-2 0-10 0,-1-1-11 0,-2-1-6 16,-1 1-4-16,0 0-6 0,-2-1-1 0,1 1 8 0,-1-1 0 0,-1-1 19 16,1-1 16-16,0 1 0 0,1-2 11 0,1 1 0 0,2-2 7 0,1-1 2 15,2 0 6-15,1-2 3 0,2 0-1 0,2-1-3 0,2-1-1 16,2 0-2-16,1-2-7 0,2 0 11 0,3 0-15 0,1-2 5 0,1 1 5 15,1-1-14-15,1-1 11 0,0 1-3 0,1-1-4 0,0-1 5 0,0 0-5 16,0 2 4-16,-2 1-2 0,-1 1 0 0,0 0-4 0,-1 2 2 16,-1 0-6-16,0 1 3 0,0 2 5 0,-2-1 1 0,0 2-3 0,0-1 0 15,-2 2 2-15,0 0-11 0,0 1 7 0,-1 0 2 0,0 1-4 16,-2 1-1-16,0-1-8 0,-1 0-13 0,-2 1-27 0,1-2-43 0,-1 0-85 16,-1-2-103-16,0-1-128 0,0 0-209 0,0-3-196 0,0-1 29 0</inkml:trace>
+  <inkml:trace contextRef="#ctx0" brushRef="#br0" timeOffset="198528.15">18991 13334 1098 0,'-4'3'968'0,"0"0"-701"0,-2 1 8 0,1 1-22 0,1 1-53 0,-2 0-54 15,1 1-45-15,0 0-21 0,0 0-14 0,1-1-20 0,-1 0-11 16,3-1-13-16,-1-2-5 0,1-1-15 0,0-1-19 0,2-1-31 0,1-2-42 16,0 0-59-16,1-1-94 0,1-2-105 0,2-1-127 0,2-1-200 0,2-1-395 15</inkml:trace>
+  <inkml:trace contextRef="#ctx0" brushRef="#br0" timeOffset="198847.15">19177 13413 1137 0,'0'-1'171'16,"1"0"-39"-16,1 0-1 0,-2-1-11 0,1 0-25 0,0 1-25 0,1-1 0 15,0 1 16-15,-1-1 17 0,2 0 9 0,-2-1-9 0,1 1-13 16,0-1-2-16,0 0-9 0,0 0-2 0,0 1-3 0,0-1-6 0,1 1 2 15,-1 0 6-15,1 1-6 0,0 0-1 0,0 2-11 0,0 0-7 16,0 0-2-16,0 2-9 0,-1 1-6 0,2 0-5 0,-1 2-11 0,1 0-2 16,-2 1 1-16,1 2-10 0,0-1 0 0,-1 2-3 0,1-1-6 0,-1 0 0 15,1 0 4-15,0-2-6 0,-1 1-1 0,1-1-6 0,-1 0-7 16,0 0 0-16,0-1-1 0,0 0-2 0,-1-1 3 0,1 0 0 0,0-1 7 16,0-2 4-16,1-1 0 0,-1 0 5 0,0 0 0 0,-1-2 6 0,1 0-4 15,0 0 2-15,0-1 3 0,0 0 0 0,-1-1 4 0,0 0 2 16,0 1-2-16,0-1-2 0,-1 0 2 0,0 0-2 0,1 0 2 0,-1 0 0 15,0 1-7-15,0 0 5 0,-1 0-3 0,1 0-6 0,0 1 2 0,0-1-3 16,0 2-6-16,-1-1 1 0,0 1-11 0,1 0-28 0,-1-1-49 16,0 0-62-16,1 0-63 0,-2-1-71 0,1 0-93 0,0 0-158 0,1 0-528 15</inkml:trace>
+  <inkml:trace contextRef="#ctx0" brushRef="#br0" timeOffset="199095.15">19141 13179 2048 0,'-5'2'367'0,"-1"1"-112"15,-1 0-16-15,2 1-33 0,0 0-40 0,0-1-57 0,0 2-40 16,0-2-23-16,1 1-12 0,0 0-10 0,1-1-9 0,0-1-4 0,1 0-9 15,0 0-6-15,1 0 2 0,1-1-1 0,0 0-3 0,1 1-5 0,0-1-13 16,0 0-21-16,2-1-27 0,0 0-27 0,1 0-55 0,2-1-60 16,0 1-74-16,2-1-90 0,-1 1-124 0,3 0-173 0,0 0-157 0</inkml:trace>
+  <inkml:trace contextRef="#ctx0" brushRef="#br0" timeOffset="199394.67">19381 13394 1881 0,'1'7'467'16,"1"0"-215"-16,1 2-28 0,0-1-31 0,1-2-44 0,0 0-48 0,1 0-42 15,1-1-17-15,1-1-4 0,-1 0-9 0,-1 0 4 0,2-2-5 0,-1-1-6 16,2-1-9-16,-1 0-3 0,1 0-5 0,-1-2-1 0,1 0 7 16,-2-2 2-16,2-1-2 0,-1 0 3 0,-1 0-1 0,1-2 4 0,-1 0 0 15,-1 0 0-15,-1 0 0 0,0-1 2 0,-2 3 3 0,0-3 1 0,-1 0-2 16,-1 0-9-16,-1 0-1 0,0-1-1 0,-2 1-2 0,0 0 3 15,-2 2 3-15,-2-1-2 0,-2 0-5 0,-2 0-1 0,-1 1 0 0,0 0-27 16,-3 1 5-16,1 0 4 0,-1 0-1 0,1 2 25 0,-1 0-7 16,1 2-7-16,1 1-1 0,2 1-5 0,0 1 0 0,2 2 0 0,2 2 10 15,1 1-5-15,2 2 3 0,1 1 1 0,1-1-20 0,2 1-9 16,1-2-22-16,1 1-22 0,2-2-27 0,3-1-42 0,2-1-65 0,1-2-86 16,3-2-109-16,0-2-144 0,3-1-180 0,1-2-175 0</inkml:trace>
+  <inkml:trace contextRef="#ctx0" brushRef="#br0" timeOffset="199661.67">19658 13254 2145 0,'-1'3'341'0,"1"1"-75"0,0 1-32 0,1-1-45 0,0 0-52 15,1 2-39-15,0-1-4 0,-1 3 6 0,2 1-2 0,-2 1-2 0,1-1-28 16,1 1-8-16,-1-1-13 0,1-1-7 0,0-1-14 0,0 0-2 16,2-2-4-16,-1 0-14 0,0-1-4 0,2-1 0 0,-1 0 0 0,1-1-2 15,0-1 0-15,1-1-4 0,-1-1-4 0,1 0 4 0,1-1-10 16,0-1-4-16,-1 0 2 0,1-1-4 0,-1-2 6 0,-1 0 2 0,0-2 2 15,1 0 3-15,-1 1-3 0,0-2 4 0,-1 1 6 0,1 0-8 16,-1 0 14-16,0 1-18 0,-1 2-4 0,0-1 16 0,-1 2-7 0,1 3 16 16,-1-1 7-16,-1 2-8 0,1 1 10 0,-1 0-3 0,1 3 15 0,0 2 0 15,0 0 0-15,0 3-6 0,0 0-24 0,0 1 0 0,0 2 0 16,0-1 0-16,0 0 0 0,0 0 0 0,1-1-16 0,0 0-20 0,0-1-20 16,1-2-34-16,0 1-40 0,-1-1-52 0,3-1-93 0,0-1-137 0,1-1-167 15,1-2-266-15,1-1-223 0</inkml:trace>
+  <inkml:trace contextRef="#ctx0" brushRef="#br0" timeOffset="200028.66">20294 13357 1671 0,'2'-10'284'0,"0"0"-109"16,-1-4-11-16,0 1-17 0,-1-1-23 0,-2 1-32 0,1 0-27 15,-1-2 2-15,-1 1 1 0,-1-1-2 0,-1 1 2 0,0 0-8 0,0 0 3 16,0 1-6-16,0 2 7 0,0 2 9 0,0 0 0 0,0 2-8 0,-1 1-2 16,0 3-3-16,0 0 3 0,1 3-6 0,-1 1-11 0,3 1-10 15,0 1-13-15,1 3 0 0,1 1 1 0,2 1-11 0,0 1 3 0,3 1-3 16,1 1 1-16,2 3 7 0,2 0-11 0,1 0 2 0,2 2-2 16,1 0-24-16,0 1 0 0,2-2 18 0,1 1-10 0,0 1 24 0,0-1 0 15,2-2-32-15,-1 0 6 0,-1-1-15 0,1 0-16 0,-2-1 8 0,0-1-2 16,-1 1-2-16,-3 0 8 0,0-1 1 0,-1-1 8 0,-1-1 15 15,-2 0 8-15,-1 0-1 0,-3 0-2 0,0 0 4 0,-2-2-1 0,-1-1 9 16,-1-1-5-16,-1-1 3 0,-1 0 1 0,0-1-7 0,-1-2 7 16,-1-1 3-16,1-2-12 0,0-1 3 0,-1-1-12 0,0-2-5 0,2-2 2 15,-1-2 1-15,2 1-11 0,0-1-5 0,0 2 2 0,2 0-7 0,1 2 3 16,0-1-7-16,2 2-9 0,-1-1-10 0,2 2-14 0,0 0-17 16,-1 1-30-16,1 1-44 0,-1 0-50 0,0 2-57 0,-1 0-77 0,-1 1-101 15,-1 0-159-15,0 1-317 0</inkml:trace>
+  <inkml:trace contextRef="#ctx0" brushRef="#br0" timeOffset="200478.66">14488 15818 2230 0,'17'-8'3'0,"8"-5"-2"0,6-3 2 0,9-6 0 0,-7 6-7 0,3-1-1 16,6 2 4-16,6-1 26 0,5-2 33 0,9-1 24 0,8-4 28 0,5-5-7 15,4-2-15-15,6-5-11 0,3-1-9 0,3-2-1 0,5-2 7 16,2 1 12-16,4-1 9 0,8-4 9 0,5-1-10 0,6 0 2 0,5-2-11 16,5 0-13-16,5 0-5 0,4 0-15 0,2-1-10 0,7-2-17 0,2 1 12 15,2-1-4-15,3 0-8 0,1 2 8 0,1 0 3 0,2 0-13 16,-1 0 19-16,1 2-2 0,1 2-14 0,-2-1-26 0,1 4 0 0,-3 1 0 16,-1-1 0-16,-1 3 0 0,-4 1 0 0,-1 0 0 0,-4 3 0 15,-4 2 0-15,-4 4 0 0,-5 2 0 0,-3 1 0 0,-7 1 0 0,-5 2 0 16,-6 4 0-16,-6 0 0 0,-4 2 0 0,-9 3 0 0,-8 2 0 0,-9 3 0 15,-7 2 0-15,-10 0 0 0,-7 2 0 0,-6 1 0 0,-12 0 0 16,-5 1 0-16,-8 1 0 0,-6 1 0 0,-6 1-137 0,-6 0-96 0,-7 2-44 16,-6 1-77-16,-6 1-62 0,-4 1-29 0,-8 1-99 0,-4 2-191 15,-7 4-2-15</inkml:trace>
+  <inkml:trace contextRef="#ctx0" brushRef="#br0" timeOffset="200811.97">19230 15056 2771 0,'9'-3'157'0,"-1"0"8"15,6-2 4-15,0-2-18 0,1 0-33 0,0-2-37 0,4-1-30 0,2 0-4 16,0-2-1-16,3 2-4 0,-1-2 4 0,-1-1-9 0,0 1-13 16,-1 0 3-16,-2 2-5 0,0 0-5 0,-1 1 3 0,-3 0-14 0,0 1 0 15,-2 0-2-15,-1 2-4 0,-1 1 10 0,-4 1-10 0,0 2 0 0,-3 1 0 16,-1 2-10-16,-3 3-8 0,0 0-7 0,-2 3-11 0,-2 1-3 15,-2 1 0-15,-1 2-3 0,-3 1-3 0,-2 2-2 0,-1 0 5 0,-1 2 0 16,-1 2 9-16,-2-1 6 0,-1 3 5 0,-1 1 9 0,1 1 5 16,1 3 10-16,2 0 2 0,3 0 18 0,2 1 16 0,3-1 7 0,3 0 12 15,3 0 4-15,4-2 0 0,3 0 7 0,3-4 7 0,1-1-2 0,4-2-13 16,4-3-60-16,2-2 0 0,3-5 0 0,5-1 0 0,1-3 0 0,4-1 0 16,0-2 0-16,3-3 0 0,0-2 0 0,1 0 0 0,3-2 0 15,-1-2 0-15,1 0 0 0,2 0 0 0,0-1 0 0,2 0 0 0,-1-3 0 16,-1-2 0-16,-2-2 0 0,-1-2 0 0,0 0 0 0,-3-3-141 15,2 0-436-15,-2-4-490 0,2-2-483 0</inkml:trace>
+  <inkml:trace contextRef="#ctx0" brushRef="#br0" timeOffset="209645.61">12098 18073 748 0,'-4'0'88'16,"1"0"29"-16,-1 0 14 0,-1 0-8 0,0 0-29 0,-1 0-27 0,0 0-16 15,-1 0-9-15,0 0-4 0,0 0-1 0,0 1-4 0,-1-1-2 16,0 1-1-16,-1-1-8 0,1 1-6 0,1 0 2 0,0 0-3 0,1 0 0 16,1 1-1-16,0-1 6 0,0 0-1 0,1 1 4 0,0-1-2 0,1 0-4 15,0 1 6-15,1-1 3 0,0 0 1 0,0 1 6 0,1-1-8 16,1 0-2-16,0 0 1 0,1 0-9 0,0 1 8 0,1-1-9 0,1 1-1 15,0 0 7-15,1 0-1 0,1 1 7 0,0 0-5 0,1 0-2 0,0 1 0 16,2 0 5-16,0 1 2 0,1-1 4 0,0 1-7 0,1 0 2 16,1 1-1-16,-1 0-4 0,1 0 4 0,0-1-7 0,0 0 5 0,1 1-2 15,-1-1-4-15,0 1 1 0,0-2 12 0,0 2-8 0,-1-2 15 0,0 1-17 16,-2-1 21-16,1 0 18 0,-1 1-27 0,-1-1 18 0,0-1-32 16,0-1-12-16,-2 2 19 0,0-1-12 0,-1 1-2 0,0 0 20 0,-1 0-27 15,-1 0 11-15,-1 0-6 0,0 0-24 0,-1 1 31 0,0 0-19 16,-1 1 3-16,0 0 9 0,1-1-21 0,-3 1 18 0,0 0-15 0,0 1-2 15,-1 0 17-15,0 0-9 0,-1 0 8 0,0 0-8 0,-1 0 3 0,0 1 6 16,0-2 0-16,0 2-9 0,0-1-2 0,1 0-9 0,-2-1 10 16,1 0 5-16,0 0-14 0,0 0 14 0,0 0 9 0,1-2-4 0,0 1 5 15,0 0-9-15,0-2-4 0,1 1-5 0,0-1-2 0,1 0 0 0,-1-1 0 16,1-1-15-16,0 0-34 0,-1 0-56 0,2-1-50 0,-1-2-57 16,1 1-75-16,-1-2-105 0,2-1-139 0,0-2-180 0</inkml:trace>
+  <inkml:trace contextRef="#ctx0" brushRef="#br0" timeOffset="209845.68">12165 17754 2073 0,'-18'-3'336'0,"3"2"-220"16,-3 0 23-16,-1 0-2 0,-3 0-35 0,0-1-21 0,4 1-31 0,4 2-21 15,3-1-8-15,3-1-21 0,3 1-2 0,2 0 2 0,3 0-5 0,1 1 2 16,1 0-8-16,3 0-22 0,1 1 16 0,3 0-12 0,2 0-13 15,2 1-12-15,0-2-21 0,5 0 0 0,0 0-17 0,0-1-16 16,3 0-29-16,1-1-36 0,-1 0-33 0,3-1-40 0,1-1-55 0,-2 1-73 0,3-2-190 16,-2-1 118-16</inkml:trace>
+  <inkml:trace contextRef="#ctx0" brushRef="#br0" timeOffset="210378.68">11603 17749 2410 0,'-19'-4'71'0,"3"1"72"0,-2-2-11 0,-2 2-39 16,-3-2-7-16,1-2-62 0,4 2-9 0,3 0 11 0,3-1-32 16,4-1 18-16,2 0-12 0,3-1-6 0,3-1 9 0,1-2 2 0,3-1-3 15,3-2-7-15,4-1-2 0,2-1-5 0,3-2 5 0,3 0 5 0,1 0-1 16,3-1-4-16,1 0 2 0,2 1 0 0,2 1-7 0,1 0 2 15,2 1 1-15,0 1-9 0,3 0 4 0,0 1-1 0,0 2 2 0,2 0 4 16,-1 2-6-16,0 1 19 0,0 2-1 0,-1 1 0 0,2 1 1 0,-2 1-8 16,2 0-1-16,-2 2 9 0,2 2-3 0,-1 0-2 0,1 1 1 15,1 1-5-15,0 1 3 0,1 1-1 0,0 2-7 0,0 1 10 0,3 0-5 16,-2 1 10-16,1 2-4 0,1 3-6 0,0 0 7 0,0 2-9 0,0 1-2 16,-1 1-1-16,-2 2 0 0,1 0-2 0,-2 1-6 0,0 2 0 15,-3 0-5-15,-2 3-1 0,0 2-12 0,-3 0 20 0,-1 3-8 0,-15-15-6 16,1 3-1-16,-3 0-44 0,2 3-10 0,-2-1 3 0,0 4 21 15,-2 0 22-15,0 3 16 0,-4-1 20 0,1 3-4 0,-4 0 7 0,-1 1 7 16,-4 0 0-16,0 2 33 0,-4 0-9 0,-3 1-4 0,-3 0 3 0,-4 0-24 16,-2-2 14-16,-3 1 0 0,-5-2-10 0,-2-1 7 0,-3-1 0 15,-2-1 6-15,-4 0 2 0,-1-2-11 0,-1-1 11 0,-4 0-19 0,0 0 25 16,-1-2 19-16,-1-2-12 0,-2-1 26 0,-1 0-26 0,1-3-5 0,-1 0 6 16,0-2-4-16,0-1-5 0,1-1-8 0,0-2-10 0,1-1 5 15,0-1 15-15,0-1 0 0,1-2 4 0,1-1-3 0,1-2-4 0,-1-1-10 16,2 0-6-16,0-3 1 0,1-1 1 0,0-2 10 0,0-1 5 15,0-2-9-15,2-1 2 0,-1-3 0 0,1 0-5 0,1-3 0 0,0-2-3 16,1 0-21-16,3-1 30 0,1-2-6 0,1-1-4 0,3-1 24 0,1-2-70 16,3 1-8-16,3-2-7 0,2-1-24 0,4 0 28 0,5 0 0 15,2 0-36-15,4-2-1 0,4 1-23 0,5-3-30 0,4 2-13 0,4-2-60 16,4 0-37-16,6-2-82 0,31-29-106 0,11 3-485 0</inkml:trace>
+  <inkml:trace contextRef="#ctx0" brushRef="#br0" timeOffset="211162.79">13677 17513 1979 0,'-20'-7'0'15,"3"0"93"-15,-2 0-10 0,-4-2-17 0,-2-2-28 0,-1-1-17 0,2 1 0 16,4 0-7-16,3 1-2 0,1-1-5 0,3 1 2 0,3 1 8 16,1 0-6-16,1 1-5 0,2 1-3 0,2 3 0 0,0 0 1 0,3 1-4 15,1 1 3-15,3 2-6 0,4 1 0 0,2 4 0 0,4 2-3 16,3 4 2-16,7 4 4 0,2 4-7 0,6 2 9 0,3 5-2 0,5 3 0 16,1 2 8-16,2 0-8 0,2 3 12 0,-1-1 17 0,0 0-1 0,-20-16 10 15,1 0-16-15,0-1-9 0,2 2 10 0,-2-2 1 0,2 0 27 16,-1-1 13-16,1 0 14 0,-2-3 5 0,0 1 3 0,0-2 9 0,-2 0 0 15,-1-2-12-15,1-1-1 0,-3-3-25 0,1-1-6 0,-3-2-2 16,-2-3-16-16,7-7-11 0,-5-6-5 0,-5-6-13 0,-4-2-30 0,-3-5-2 16,-2-3 4-16,-2-1 8 0,-2-2 14 0,-2 1-7 0,-1-3-4 0,-1-2-3 15,-2-2 7-15,0-2 2 0,-2-2-22 0,0 0 5 0,1 1-12 16,0-1 2-16,4 3-3 0,1 3-14 0,3-29-5 0,7 17-13 0,4 16-1 16,2 9 9-16,1 9-8 0,2 0-10 0,-1 4-13 0,2 2-26 15,2 3-11-15,1 3-27 0,2 2-32 0,2 3-49 0,0 4-79 0,3 3-106 16,0 3-351-16</inkml:trace>
+  <inkml:trace contextRef="#ctx0" brushRef="#br0" timeOffset="211913.03">14173 17062 2486 0,'-28'4'58'16,"1"-1"73"-16,-2 2-13 0,8 1-12 0,10 0-38 0,2-1-35 0,4 3-21 15,5-4-6-15,0 3 8 0,2 1 3 0,2 2-11 0,3 3-12 16,1 3 10-16,5 1-1 0,3 3 1 0,4 3-11 0,1 1-5 0,5-1-2 16,2 2-7-16,3-2 16 0,0 1-10 0,3 0 5 0,-2-2 1 0,2-2-3 15,-1 0 10-15,0-4 1 0,-1 0-1 0,-1-2-1 0,-1-2 1 16,-1-2 7-16,0-2-2 0,-2 0 1 0,-2-1-9 0,0-2-4 0,-3-1 13 16,-2 0 6-16,-1-2-7 0,-2 2 4 0,-3-3 3 0,0 1-3 15,-3-2 15-15,0 1-8 0,-3-1-10 0,1-1 4 0,-3 0-8 0,1-1 9 16,0 0-1-16,-1-1-1 0,0-1-3 0,1 0-15 0,0-2 15 0,0 0-11 15,0-2 2-15,0 0 0 0,1-3-19 0,0 0 10 0,1-2-5 16,1-2-8-16,0 2 3 0,0-1-16 0,1-2 3 0,2 1 7 0,-1 0-7 16,1 0 3-16,-1 0 6 0,0 1-3 0,0 1 9 0,0 2 4 0,-1-1-1 15,-1 1 14-15,-2 1-5 0,0 0 7 0,-1 2 8 0,-2-1-5 16,0 1 3-16,-1 1 3 0,-2 0 7 0,1 1 8 0,-2 0 2 0,0 1-4 16,-1 0-9-16,-1 0 8 0,1 0 5 0,-1-1-2 0,-1 1-1 15,0-1-8-15,0 1-1 0,0-1 9 0,-1 1 2 0,1 1-12 0,-1 0 5 16,0 0-12-16,0 0-1 0,0 0 6 0,0 0-16 0,-2-2-4 0,1-1-5 15,3 0-3-15,0 1 20 0,0-1 9 0,1 0 1 0,0-1-5 16,0 0-12-16,1 0 9 0,-1-2-1 0,-1 1 6 0,0 0-12 0,-1 0 2 16,0 1-1-16,-2 0 9 0,1 1-3 0,-1 2-10 0,0 0 6 0,-1 1-1 15,-1 2 8-15,0 1 0 0,-2 1 0 0,0 0-5 0,0 2 0 16,-2-1 5-16,0 2-4 0,-2 3 8 0,0-1-9 0,-1 2-7 0,3 2 2 16,-1 0 2-16,0 2 4 0,2 0-2 0,0 0-4 0,1-1 6 0,1 2-9 15,0-1 1-15,4-5 11 0,0 2-8 0,1 1 16 0,0 1 5 16,2 1-12-16,0 3-7 0,2 0 4 0,1 1-7 0,2 1 8 0,2 1 1 15,1 0-13-15,3-1 14 0,1 1-10 0,3 0 2 0,0-1 15 16,1-1-9-16,2 0 0 0,0 0 2 0,1-2-8 0,2 0 5 0,0-2 3 16,0 0 0-16,2-1-7 0,1-1-1 0,0-2 4 0,1 0-2 0,-1-2 1 15,1-2 0-15,0-2 3 0,-2-1 4 0,0 0-7 0,-3-2 0 16,0-2-7-16,-2-1 5 0,-1-1 9 0,-4-1-7 0,0-1-2 0,-1-1 2 16,-2-1-1-16,-1-1-1 0,-1 0 10 0,-3-2-2 0,1-1 0 0,-2-1-1 15,-1 0-5-15,-2-3 7 0,0-1 5 0,-1 1-10 0,0-1-4 16,-1-1-1-16,0 1 3 0,0 2 3 0,1 1 0 0,0 2-21 0,2-6 3 15,0 7 6-15,1 8-1 0,-1 4 8 0,0 1-4 0,1 1 6 0,-1 1 10 16,1 0 8-16,0 2 1 0,1 2-4 0,0 2-13 0,2 2-6 16,0 3 6-16,0 2 0 0,2 1 3 0,-1 1-3 0,1 2-16 0,0 0 11 15,1-2 3-15,1 1 0 0,-1 0 0 0,2-2-14 0,1-2 4 0,0 1 1 16,0-2 3-16,0-1-6 0,0-1-3 0,-1-3-7 0,-1 0-1 16,-1 0-12-16,-1-2-24 0,-2 0-16 0,-1-1-32 0,-2-2-24 0,0 0-28 15,-1-1-31-15,-1-1-45 0,-1-3-77 0,-1-1-95 0,0-3-383 16</inkml:trace>
+  <inkml:trace contextRef="#ctx0" brushRef="#br0" timeOffset="212065.03">15434 16878 2100 0,'-13'1'113'16,"1"1"8"-16,-1 0 12 0,3 2-5 0,4-1-38 0,1 0-40 0,1 0-32 15,3 0-13-15,1 0 2 0,3 0-9 0,0 2-1 0,2 0-7 16,3 2-8-16,2-1-7 0,1 1-28 0,4 1-36 0,1-2-49 0,3 2-64 15,0 0-61-15,2-2-63 0,1 1-88 0,1-2-158 0,2 0 39 0</inkml:trace>
+  <inkml:trace contextRef="#ctx0" brushRef="#br0" timeOffset="212797.02">15931 16975 1776 0,'-7'-1'235'0,"3"2"-113"0,0 0 34 0,2 0-2 0,1-1-17 16,1 0-55-16,0 0-43 0,0 0-13 0,2-1-6 0,1-2 3 15,0-1-2-15,2-1-8 0,0-1-9 0,1 0-4 0,1-1 1 0,-1-1-2 16,1-1-8-16,1 0-14 0,-2 0-6 0,-1 1-7 0,0 0-8 16,-2 1 4-16,-1 1-3 0,-1 0 13 0,-3 0-2 0,-1 1 5 0,-2 0 3 15,-1 1 2-15,-3 0 13 0,-1 1 4 0,-2 1 2 0,-4 2 4 0,-2 1 6 16,-1 2-3-16,1 3 12 0,0 1-1 0,-1 2 4 0,3 1 7 16,-1-1-4-16,2 3-3 0,0 0 10 0,4 1-8 0,0 0 0 15,4 1-9-15,2 1-4 0,3-1 4 0,3 2-4 0,3-1-2 0,3 2-4 0,3 1-7 16,2-2-1-16,4-1-4 0,-8-8 13 0,4 3 5 0,1 0-3 15,2 1 8-15,2-1-15 0,4 4-7 0,0-2 12 0,4 2-5 0,1 1-4 16,-1-2 7-16,1 2-2 0,-1 1 4 0,0-1-5 0,-1-1-6 16,-2 3 8-16,1 0-6 0,-3 0 7 0,1-1-1 0,-3 1-8 0,-1 1 8 15,-4-1-3-15,-1 1-2 0,-3 0 4 0,-3-1-4 0,-2-1 0 0,-4 0-8 16,-2 0-14-16,-3-2 2 0,-3-2-2 0,-3 2 3 0,-2-1 9 16,-2-2-1-16,-2 0 10 0,-3-4 6 0,0 0 8 0,-2-1 7 0,-1-2-1 15,1-5 11-15,-1-2-2 0,0-2-11 0,-1-2 11 0,1 0-12 0,2-3-2 16,0-2-4-16,2-2-16 0,1 1 3 0,2-1-10 0,2-3-9 15,3-2-3-15,3-3-9 0,2 0-3 0,3-3-12 0,2 0-15 0,4-4-19 16,2-1-13-16,3-2-12 0,3-1-3 0,7-6-13 0,14-27-1 0,2 7 18 16,-4 8 17-16,-8 14 39 0,-1 0 27 0,-1 3 25 0,-1 1 22 15,-2 1 22-15,-2 1 31 0,0-1 22 0,-2 3 21 0,-2-1 10 0,-1 3-5 16,-2 3 3-16,0 2-10 0,-1 3-12 0,1 1-9 0,-1 2-13 16,0 0-12-16,0 5-5 0,-1 2-10 0,-1 1-3 0,-2 3-1 0,2 1-9 15,-1 2-4-15,0 2-6 0,0 1-8 0,1 1 7 0,2 4-7 0,1 2-2 16,1 4 8-16,1 2-8 0,0 4 1 0,2 3-9 0,1 1 7 15,0 3-7-15,-1 1 1 0,-2 5-3 0,1 0-3 0,-1 1 6 0,-1-2 1 16,1-2-4-16,-2-1-2 0,1-2-6 0,-1 0 3 0,2-1 2 16,0-1-1-16,-1-1-1 0,0-2-5 0,-1-3 11 0,-2-1 0 0,1-4-4 15,-1-3-5-15,-1-1-10 0,-1-3-4 0,-1-1 14 0,0-2 10 0,-2 0 6 16,0-2 8-16,0-1-1 0,0-1 12 0,0 0 6 0,0-1 1 16,0-2-6-16,0-4-20 0,-1-1-1 0,0-4-5 0,0-3 5 0,-1-2-2 15,0-2-8-15,-1-2 0 0,0-1 1 0,0-1-1 16,1 2-1-16,2 1-2 0,1 2-6 0,2 2 0 0,1 3-1 0,1 1 0 0,2 3 5 15,0 2 0-15,-1 2-6 0,1 1 10 0,1 1-1 0,0 3-4 0,2 1 6 16,0 3 0-16,1 3-1 0,1 1 2 0,2 3-3 0,1 2-10 0,0 1 7 16,2 1 0-16,0 3 4 0,1 1-3 0,-1 1-10 0,1 0 9 15,1 1-9-15,-3-1 6 0,1 0 1 0,0 2-11 0,-2-2 6 0,0 0-13 16,-1-3-5-16,-1 1-4 0,-1-2-24 0,0 0-13 0,-2-1-28 16,0-1-26-16,-7-7 13 0,2 2-15 0,-2-2-16 0,0 2-22 0,-2-1-23 15,1 0-7-15,-2-2-1 0,0 0-15 0,-2-1-16 0,0-3 21 0,-2-2 5 16,-2-6-2-16,-2-9 8 0,-1-9-76 0,2-3-51 0</inkml:trace>
+  <inkml:trace contextRef="#ctx0" brushRef="#br0" timeOffset="213479.02">16881 16696 664 0,'-8'-34'273'0,"1"-3"-83"0,0-9-18 16,2 7-24-16,3 8-47 0,1 3-24 0,3 3-20 0,2 4-14 15,0 3 3-15,2 2-8 0,0 4 5 0,2 2 9 0,-1 2 12 0,1 2-7 16,-1 3-2-16,1 2-9 0,0 2-4 0,-1 2 6 0,3 2 0 16,0 4-5-16,0 2-1 0,1 2-8 0,1 4-4 0,-2 2 0 0,3 3 8 15,-1 2 3-15,2 3-8 0,0 2 4 0,-1 1-17 0,1 0-2 0,-1 0-2 16,1 1-2-16,-3 1-2 0,1-1-1 0,0 2-6 0,0-3-8 15,0 1 1-15,0-5-8 0,-1 0 2 0,1-2-19 0,0 1-18 0,0-1-15 16,-1 1-46-16,-4-1-26 0,0-2-28 0,-3-1-24 0,-1-1 7 0,-3-5-1 16,-2-2 3-16,-1-8-102 0,-1 3 22 0,-3-2 96 0,-1 0 60 15,-2-2 118-15,-1 0 49 0,-2-1-6 0,-3-2 24 0,-13-4 38 0,5-4 24 16,4 0 11-16,4-1-10 0,2 1 2 0,1 1 9 0,2-2-6 16,1 0-5-16,1-1-20 0,2-2-38 0,1 0-17 0,3 1-18 0,0-1-16 15,3 1-5-15,1 1-18 0,0 0 1 0,2-1-5 0,2 1-4 0,1-1 12 16,3-1-10-16,2 1-3 0,1-1-2 0,2-1-7 0,2 0 9 15,2-1-5-15,2 0 0 0,3-2-3 0,2-1-5 0,2 0 1 0,1 0-3 16,-1-2-2-16,1-1-6 0,-2 1 0 0,1-2 2 0,-1 3 5 0,0-1-1 16,-1 3 7-16,-2-1 1 0,-1 1 2 0,-2 1 5 0,0 0-2 15,-3 0 3-15,-2 0 0 0,-2 0-4 0,-2 1 13 0,0 0-8 0,-2 2 1 16,-2-1-1-16,-1 1-11 0,-2 1 8 0,-1 1-1 0,-2 0 0 16,-2 1-6-16,-2 0-12 0,0 1-7 0,-3 0 5 0,0 2 2 0,-1 1 13 15,-1 1 1-15,0 2 1 0,-1 1-4 0,1 0-5 0,-1 3 0 0,0 0 2 16,1 2-3-16,-1 1 17 0,1 2-1 0,0 1 1 0,1 1 3 15,1 1-16-15,1 1 5 0,1 1-4 0,0 1 2 0,3 0-1 0,1 0-5 16,0 2 14-16,1-1-1 0,1 0-3 0,2-1-2 0,0-1-8 0,1 1 8 16,2-1 3-16,1 0 0 0,1 0-3 0,0 0 0 0,0-1 5 15,0 0-2-15,0 0 3 0,-1-2-6 0,1 1 0 0,1-2 2 0,-1-2-2 16,0-1 5-16,0-1-1 0,-2-1-4 0,0-2-6 0,-1-2-2 16,0 0 5-16,1 0-2 0,-1-1 2 0,0-1-11 0,0-2 0 0,0 1 3 15,1-2 5-15,-1 0 0 0,2 1-5 0,0-3 6 0,-1 1 2 0,2-2 3 16,0 2 2-16,-1 1-7 0,1 0 4 0,-2 1-1 0,2 0 7 15,-1 1 1-15,1 0-5 0,0 0 9 0,0 2-7 0,0 0 0 0,0 1 5 16,2 0-8-16,1 0 1 0,1 1 1 0,1-1 6 0,0 0 1 0,1 0 5 16,-1-1-11-16,0 0-1 0,-1-1 4 0,1-1 0 0,1-1 7 15,-1 0-13-15,-1-1 11 0,-2 0-10 0,0 0 12 0,0-2 1 0,-2 0-11 16,-1 0 17-16,-1 0-12 0,-2-1 8 0,-2 0 4 0,1 0-10 16,-1 0 6-16,-1 1-3 0,-1-2-11 0,-1 0 9 0,-1-1 0 0,-2 0-1 15,0-1 5-15,-2 1-4 0,1-1 1 0,-3 0-6 0,-1 0-2 0,-1 0-3 16,-1 1 1-16,0 0 6 0,-1 1-13 0,0 0-6 0,-1 2-20 15,-1 1-5-15,0 3 7 0,0 1-2 0,2 1 12 0,-2 3 5 0,0 1-9 16,-1 3-7-16,0 3-1 0,0 0-21 0,0 2-11 0,2 0-25 0,1 1-42 16,2 1-46-16,0 0-89 0,1 0-123 0,1-1-149 0,2 0-99 15</inkml:trace>
+  <inkml:trace contextRef="#ctx0" brushRef="#br0" timeOffset="213646.02">17966 16179 2955 0,'-3'6'122'0,"2"2"-12"0,-1 2 6 0,2 2 7 0,1 2-40 15,3 5-51-15,4 5-23 0,2 5-9 0,4 5 0 0,2 3 4 0,1 1-29 16,2 1 14-16,1 0-16 0,0-1-40 0,1 2-38 0,0-4-90 16,0 0-80-16,2-1-80 0,1 0-138 0,1 3-218 0,3-1-224 0</inkml:trace>
+  <inkml:trace contextRef="#ctx0" brushRef="#br0" timeOffset="213929.02">18218 16711 2948 0,'-4'0'117'0,"2"0"12"0,-1-1 9 0,2 1-11 16,2-2-49-16,0 1-46 0,1-1-34 0,2-1 4 0,2 0-17 15,2-1 5-15,3-1 1 0,2 0-4 0,0 0 13 0,3-1-11 0,1 1-4 16,1-1-9-16,-1 0-18 0,2 1 2 0,1-1-2 0,-2 1 1 16,2 1-1-16,0 0-6 0,-2-1 8 0,0 1-6 0,-1 0-4 0,-1 0-6 15,-4 1-17-15,0 1-8 0,-2-1-9 0,0 2-21 0,-2-1-10 0,0 0-18 16,0 0-32-16,-2 1-47 0,0 0-73 0,1 0-84 0,1 0-77 15,0-1-219-15</inkml:trace>
+  <inkml:trace contextRef="#ctx0" brushRef="#br0" timeOffset="214348.02">18709 16276 2752 0,'-5'4'272'0,"-2"0"-154"15,0 1 5-15,0 1 2 0,2 0-19 0,1 2-48 0,1 1-42 0,1 3-29 16,2 2 4-16,1 4-10 0,2 3 3 0,2 3 8 0,2 2-21 0,-1 2 21 16,1 2-12-16,1 0-18 0,2 3 12 0,0-1-28 0,1 1-11 15,1-1 5-15,0 1-14 0,1-2 8 0,0 1 7 0,0-3 5 0,1-1 8 16,-2-3 2-16,1-4 9 0,0-1 4 0,-1-4 0 0,-1-1 8 16,-3-2 3-16,0-1 10 0,-3-3 10 0,-2-2-3 0,-1-3-2 0,-2-2-1 15,0-1-7-15,-2-2 1 0,0-1-4 0,-3-2 0 0,0-5 10 0,-3-3-15 16,1-2 16-16,-2-2 0 0,-1 1-7 0,1-4 10 0,-1-2-8 15,-1-1 14-15,2-5 12 0,-2 0 1 0,0-2 4 0,-1-1-3 0,0 1-5 16,-1-3 4-16,1-1-4 0,0-1-3 0,-1-2 3 0,3 1-13 0,0 0 2 16,3 3-7-16,1 1-3 0,2 2 14 0,2 3 2 0,1 4 2 15,2 1 11-15,0 3-1 0,2 2 3 0,0 4 5 0,0 0 4 0,0 3 2 16,2 1-2-16,0 1-5 0,0 0-15 0,0 3 0 0,2 1-2 0,1 1 4 16,2 2-4-16,1 2-8 0,0 1-1 0,4 4 3 0,2 2 1 15,1 3-3-15,0 3-4 0,2 1 2 0,0 0 0 0,0 4 5 0,1 1-10 16,-1 1 5-16,-1 2-5 0,1 1-6 0,-1 1 11 0,-1 1 4 15,-1 0-1-15,0 1-3 0,0-1-3 0,-2 1-7 0,1-2-2 0,0 0-11 16,-1-3-7-16,-2 0-21 0,0-2-17 0,-3-2-11 0,-1 2-38 0,-1-1-50 16,-3-2-46-16,-3-1-65 0,-1-2-63 0,-3-2-87 0,-2-1-166 15,-3-5 95-15</inkml:trace>
+  <inkml:trace contextRef="#ctx0" brushRef="#br0" timeOffset="214530.02">18707 16541 2600 0,'-2'-1'147'16,"2"0"-43"-16,0 1 12 0,1-1 4 0,1-1-14 0,1 0-67 15,3 0-36-15,2-1-15 0,3-1-3 0,2 2 1 0,2 0-17 0,2 1-8 16,1 1-15-16,1 0-4 0,0 0-24 0,2 2-26 0,-1 0-16 0,2 1-30 16,2-1-21-16,-1 1-16 0,1 0-16 0,1-1-7 0,-1 1-5 15,1-1-22-15,0 0-29 0,1-1-39 0,1 0-201 0</inkml:trace>
+  <inkml:trace contextRef="#ctx0" brushRef="#br0" timeOffset="214746.02">19556 16439 1154 0,'-1'0'10'0,"0"0"-38"15,1 0-41-15,0 0-114 0,0-2-406 0</inkml:trace>
+  <inkml:trace contextRef="#ctx0" brushRef="#br0" timeOffset="-214500.72">19579 16381 2062 0,'-2'-1'1013'0,"2"2"-899"0,-1-1-4 0,2 0 10 0,0-1 2 16,1 1-53-16,0-1-54 0,1 1-38 0,3-1-7 0,0-1 6 15,3 1 0-15,0 1-2 0,1 0-22 0,1 0-9 0,2 0-4 0,0 1-13 16,1-1 0-16,2 0-3 0,0 0 0 0,3 0 14 0,-1 0 16 0,1 0 30 15,0-1 12-15,-3 0 3 0,0 0 2 0,0-1 3 0,-1 1 7 16,-1 0 9-16,-1 0 0 0,1-1-9 0,0 0 0 0,-1 0-1 0,1 1 8 16,0 0-9-16,-1 1-11 0,1-1 3 0,-1 2-9 0,0-1-1 0,0 1-10 15,-1 0-45-15,0 0-41 0,-3 1-66 0,0 0-69 0,-1 1-65 16,-3 0-113-16,-1 1-124 0,-2 3-257 0</inkml:trace>
+  <inkml:trace contextRef="#ctx0" brushRef="#br0" timeOffset="-214317.72">19760 16731 3051 0,'1'1'184'0,"0"0"-20"15,2 1-2-15,0-2 0 0,1 0-62 0,0 0-63 0,3-1-21 16,0 1-13-16,3-2 1 0,2 1-2 0,2 0-10 0,2 0-19 0,0 0-10 16,2 0-5-16,1 0-21 0,-1-1-15 0,3 1-34 0,0-1-43 15,0-1-19-15,0 0-33 0,1 0-27 0,-2-1-25 0,0 1-21 0,0-1-26 16,-2 1-47-16,0-2-90 0,2-1-336 0</inkml:trace>
+  <inkml:trace contextRef="#ctx0" brushRef="#br0" timeOffset="-211650.54">20749 15269 547 0,'-2'-1'323'16,"-1"0"-110"-16,0 1-19 0,1 0-12 0,-1-1-20 0,0 2-28 0,1-1-17 15,-1 1-14-15,1 0-6 0,1 1-1 0,0 1-11 0,0-1-2 16,0 1-12-16,1-1-4 0,0 2 6 0,1 0 2 0,-1 0 4 0,1 0-5 15,0 1-5-15,0 1-2 0,1 2-6 0,0 0 6 0,1 1 1 0,0 1-9 16,0 0 1-16,0 1-12 0,1 2-5 0,-1 1 4 0,1 1-16 16,1 1 2-16,-1 2-7 0,0 3 0 0,0 0-1 0,1 1-8 0,0 1 2 15,1-1-10-15,-1 2 10 0,0 0-6 0,1-1 0 0,-1 0-9 0,1-3-3 16,-1 0 1-16,-1-1 2 0,0-2 0 0,-2-3-10 0,1 1 1 16,-1-2-12-16,0 0-13 0,0-4-7 0,-1-1-32 0,0-1-9 0,-2-2-14 15,0-2-14-15,0-2-1 0,-1-2 1 0,-2-2 1 0,1-2 6 16,-2-2 6-16,1-1 1 0,-1-3 1 0,1-1 0 0,0 0 8 0,1-1 8 15,0 1 19-15,2 1 14 0,0-1 11 0,1 0 11 0,0-1 7 0,0 1-1 16,-1 1 7-16,1-1-2 0,-1 0 1 0,0-1 5 0,0 1 2 16,0 1 3-16,0-2 3 0,0 0-1 0,-1 0 1 0,0 0-6 0,-1 2 4 15,0-2 4-15,0-1 4 0,-1 0 14 0,0 1 5 0,0-1 14 16,0 0 10-16,-1 2 3 0,1 1 3 0,-1 1-1 0,2 1 7 0,-1 0 6 16,0 0-3-16,1 3-1 0,-1 0 0 0,1 2-1 0,1 0 1 0,0 1 5 15,1 0-7-15,1 0-4 0,0 1-2 0,0 1-6 0,0-1 1 16,1-1-7-16,0 1-1 0,1-1-15 0,1 0-4 0,0 0 4 0,1 0-8 15,0-1-2-15,0 0-7 0,1 1-8 0,1 1 3 0,0-1 1 0,-1 1-4 16,1 1 1-16,0 0-5 0,0 0-3 0,1 2 10 0,-1 1-10 16,2 0 5-16,-1 1 3 0,1 1-5 0,-1 0-1 0,1 1 2 15,0 0 9-15,1 0-9 0,-1 1 1 0,1-1-1 0,0 1-6 0,1 1 0 0,-1 0 4 16,2 1-2-16,0 2 2 0,1-1 0 0,0 1 0 0,0-1-2 16,2 1-6-16,-1 1 6 0,1-1-7 0,-1 1-1 0,-3-1 6 0,1-2-9 15,-1 1 11-15,-1-1 0 0,0-1-3 0,-2 0 4 0,-1 0-2 16,1 0 2-16,-2-1 3 0,0-1-6 0,-1-1 6 0,-1 0-6 0,0-1 2 15,0 0 4-15,-1-1 0 0,0 0-1 0,0-1 3 0,-1 0-4 0,0-1 3 16,0 0 9-16,0 0-5 0,-1-1-3 0,1-1 7 0,-1 0-8 16,1 0 5-16,-1-1 3 0,1 0-5 0,-1-1-3 0,0 1 7 0,1-2-3 15,-1 1-3-15,1-2 5 0,0 0-3 0,0 0-4 0,-1-1 7 0,1-1 2 16,0-1-5-16,1-1 2 0,-1-1-5 0,0 0 5 0,1-1 5 16,-1-1-5-16,0-1 3 0,-1 1-3 0,1-2 0 0,-1 0 1 0,-1-1 1 15,1 2-2-15,-1-3-8 0,1 1 4 0,-1 0 3 0,0 0-3 16,0 1 8-16,0 0 1 0,0 1-13 0,0 2 6 0,1 1-21 0,-1 1-3 15,1 0 26-15,0 2-3 0,-1 0 19 0,1 3 0 0,0-2-21 0,-1 2 3 16,1-1 2-16,-1 2 0 0,0 1 2 0,0 0-4 0,-1 1-4 16,2 1 6-16,-1-1 8 0,1 1-2 0,0 0 0 0,-1 1-14 0,2 0 0 15,-1 0 4-15,0 0-6 0,0 0 0 0,1-1 0 0,-1 2 0 0,1-1 0 16,0 0 0-16,1 1 0 0,-1-1 0 0,1 1 0 0,0 0 0 16,0 0 0-16,0 1 0 0,0-1 0 0,0 0 0 0,0 1 0 0,-1-1 0 15,1 1 0-15,0 0 0 0,0-1 0 0,-1 1 0 0,1-1 0 16,-2 1 0-16,1 0 0 0,0-1 0 0,0 1 0 0,-1 0 0 0,1 0 0 15,-1 1 0-15,1 0-8 0,-2-2-32 0,0 2-8 0,0 0-17 0,0 0 1 16,-1-1-25-16,0 2-29 0,0-1-38 0,0 1-48 0,0 1-43 16,1-1-66-16,-1 2-85 0,1 0-146 0,0 1-146 0,0 1-133 0</inkml:trace>
+  <inkml:trace contextRef="#ctx0" brushRef="#br0" timeOffset="-210681.55">21301 15512 318 0,'-1'0'227'0,"0"1"-48"16,1-1-18-16,-1 0-10 0,1 0-4 0,-1 0-8 0,0 1-12 16,-1 0-12-16,0 0-1 0,1 0-6 0,-1 0 6 0,2-1 0 0,-1 1-11 15,0 0 1-15,1 0-9 0,-2-1-10 0,2-1-5 0,-2 3-3 0,2-2-3 16,-1 0-2-16,1 1-5 0,0-1 1 0,-1 1-4 0,1 2 5 15,0-2 0-15,-1 0-10 0,1 1 7 0,-1-2-8 0,1 2-8 0,0 1 2 16,0-1-8-16,-1-1-2 0,0 0 2 0,0 1-8 0,0 0 3 16,1 0-3-16,0 1-6 0,-1-1 2 0,1 1-6 0,0 0-3 0,0 0-1 15,0 1-4-15,0-1-5 0,1 1 12 0,-1 0-8 0,2 0-5 0,-1 1-1 16,0-1-5-16,2 0 2 0,-1 1 1 0,1-1 1 0,0 0-2 16,0 1 5-16,1 0 5 0,-1 0 3 0,0 0-3 0,0-2-7 0,2 0-7 15,-2 0-6-15,2 0 0 0,0 0 2 0,-1-1 8 0,2 1-10 0,-1-1 4 16,-1-1 8-16,1 2-6 0,-1-1 10 0,0-1-4 0,1 1-6 15,-1-1 5-15,-1 2 1 0,0-2 2 0,0 1-4 0,-2-1-6 0,1-1 8 16,0 0-4-16,0 1 14 0,0-1 2 0,1 0-8 0,-2-1-2 16,1 1-10-16,0-1-2 0,0-1 0 0,0 1 0 0,0-1 0 0,1 0 0 15,-1 0 0-15,0 0 0 0,0-2 0 0,0 1 0 0,0-1 0 0,-1 0 0 16,1 1 0-16,0-1 0 0,0 1 0 0,0-1 0 0,-1 0 0 16,0 1 0-16,0-1 0 0,0 1 0 0,1-1 0 0,-1-1 0 0,-1 3 0 15,1-2 0-15,-2 0 0 0,1 0 0 0,0-1 0 0,0 1 0 0,0-1 0 16,0 0 0-16,0 0 0 0,0 0 0 0,0 0 0 0,0 1 0 15,0 0 0-15,-1 0 0 0,0 0 0 0,0-1 0 0,0 1 0 0,-1-1 0 16,0 2 0-16,0-1 0 0,-1 0 0 0,1 1 0 0,0-1 0 16,-1 0 0-16,0 0 0 0,0 0 0 0,0 0 0 0,-1 1 0 0,1-2 0 15,-1 3 0-15,0-2 0 0,-1 1 0 0,1 0 0 0,-1-1 0 0,1 0 0 16,-1 1 0-16,-1 0 0 0,1 1 0 0,0-1 0 0,-1-1 0 16,0 1 0-16,1 0 0 0,-1 0 0 0,0 1 0 0,1-1 0 0,-1 0 0 15,1 0 0-15,0 0 0 0,-1 1 0 0,0 0 0 0,0 1 0 16,0-1 0-16,1 1 0 0,0 2 0 0,0 0 0 0,2 0 0 0,-1 0 0 15,1 0 0-15,0 2 0 0,-1 1 0 0,0-1 0 0,1 2 0 0,-1 0 0 16,1-1 0-16,-1 2 0 0,1-1 0 0,0 1 0 0,0 0 0 16,1 1 0-16,0-1 0 0,0 0 0 0,0 1 0 0,2-2 0 0,-1 0 0 15,2 1 0-15,0-2 0 0,0 0 0 0,2-1 0 0,-1 1 0 0,1 0 0 16,0-1 0-16,0 0 0 0,1 0 0 0,1-1 0 0,-1-1 0 16,0 2 0-16,0-1-22 0,1 0-14 0,-1-1-6 0,1 0-13 0,-1 1-13 15,1-1-12-15,0 1-23 0,0-1-4 0,1 0-12 0,-1 0-12 0,1 0-10 16,-1 1-8-16,-1-1-2 0,1 0-7 0,0 0-4 0,0 0-17 15,-1-1-13-15,1-1-22 0,-1 1-56 0,0-2-82 0,0 0-93 0,0 0-231 16</inkml:trace>
+  <inkml:trace contextRef="#ctx0" brushRef="#br0" timeOffset="-209766.55">21639 15359 601 0,'0'0'242'0,"1"1"-41"16,-1 0-23-16,1 0-28 0,-1 0-28 0,1 0-22 0,-1-1-21 15,1 0-13-15,0 0-3 0,-1 0-1 0,1 0-11 0,-1-1 3 0,0 1-5 16,1 1 2-16,-1-1 5 0,1 1-3 0,-1-1 8 0,0-1-3 0,1 1-3 16,0 0 3-16,-1 0-2 0,1-1-2 0,-1 1 3 0,0 0-4 15,0 0-2-15,0 0-2 0,0 0 0 0,0 0-1 0,-1 0-4 0,1 1 0 16,0-2-9-16,-1 2-9 0,0-2 1 0,1 1-5 0,0 1 2 16,-1-1-1-16,1 0-9 0,-1 1-2 0,1-2-5 0,-1 1 0 0,0 0 3 15,0 0 3-15,1 0-8 0,0 0 4 0,1 0-6 0,-1 0 2 0,1 0 4 16,-1 0-2-16,0 0 2 0,0 0-4 0,1 0 1 0,0-1 6 0,0 1-1 15,0 0-4-15,0 0 2 0,0 0 1 0,0 0 3 0,1-1 1 16,-1 2-2-16,1-2-1 0,-1 2 2 0,0-1 1 0,0 0 2 0,0 0-5 16,0 1 0-16,1-1-2 0,0 1 0 0,-1-1 4 0,0 1-11 15,0-1 9-15,-1 1-8 0,0 0 3 0,1 0 5 0,-1 0-8 0,0-1 7 16,0 0-9-16,1 0 1 0,-1 1 2 0,0-1 0 0,1 0-1 0,-1-1 5 16,0 1-5-16,0 0 1 0,-1 0 5 0,1 0-7 0,-1 0 7 15,1 0 6-15,0 0-2 0,-1-1 4 0,1 0-6 0,-1 1-2 0,0-1 8 16,1 1 5-16,-2-1 3 0,1 1-8 0,0-1 3 0,-1 1-6 0,0-1-7 15,-1 1 6-15,1-1-7 0,-1 0 0 0,1 1-1 0,-1-1 1 16,1 0 0-16,0 0 2 0,-1 0 3 0,2 1-11 0,-1-1 4 0,0 1 2 16,0-1-3-16,1 0 3 0,-1 0 0 0,2 0-4 15,-1 2 0-15,0-2 5 0,0 2-5 0,0-1-6 0,1 0 4 0,-1 1 0 0,1 0 6 16,1 0-2-16,-3 0-4 0,3 1-6 0,-2 0-3 0,1 0 5 0,2 0 6 16,-2 0-2-16,1 0 0 0,-1 0 2 0,0 0-6 0,1-1 8 15,-1 1 1-15,2-2-8 0,-2 1 1 0,1-1 4 0,0 0-1 0,-1 0 5 16,1 0 0-16,0 0-6 0,0 0-4 0,0 0 10 0,0-1-8 0,0 1 2 15,0-1 10-15,0 0-8 0,0 0 7 0,0 0-3 0,0-1-6 16,0 0 8-16,0 0-8 0,0 1 2 0,0 0 3 0,0 0 1 0,0-1 0 16,0 0-4-16,0 1-2 0,-1 0 0 0,0 0 2 0,0 0-4 0,0 1 2 15,0 0 6-15,0 0 0 0,-1 0 11 0,1 1-9 0,-1-1 5 16,2 0 3-16,-1 1-4 0,0 0 5 0,1 0-9 0,-1 0 2 0,0 1 6 16,0 0 3-16,0 0-1 0,0 0-10 0,1 0 2 0,-2 0-4 15,1 0 6-15,0 0 0 0,1 0-4 0,0 0-6 0,-1 0 4 0,0-1 0 16,0 0 2-16,0 0 2 0,1-1-8 0,-1 1-2 0,1 0 2 0,0 0-10 15,-1-1 10-15,0 0-6 0,0-1-6 0,0 1 6 0,0 0-6 16,-1-1-10-16,0 1-12 0,0-2-25 0,-1 0-21 0,1 1-28 0,0 0-31 16,0-1-45-16,0 0-45 0,0 0-56 0,1 0-63 0,-1 0-100 0,1 0-196 15,0 0-384-15</inkml:trace>
+  <inkml:trace contextRef="#ctx0" brushRef="#br0" timeOffset="-198582.47">23049 14679 1522 0,'-3'0'717'0,"0"0"-495"0,0 1-21 0,0 1-4 0,0 0-7 0,1 4-27 16,-1 0-34-16,-1 0-29 0,2 1-6 0,0-1-12 0,0 1-14 15,0-1-12-15,0-1-16 0,2 1-17 0,-1-2-2 0,1-2-7 0,0 0-3 16,0-1-1-16,1-1-10 0,0-1-10 0,0-1-25 0,1-1-30 0,-1-2-43 16,0-1-62-16,1-1-58 0,0-1-54 0,1-1-77 0,0 0-127 15,1-2-204-15,0 1-309 0</inkml:trace>
+  <inkml:trace contextRef="#ctx0" brushRef="#br0" timeOffset="-196633.31">21874 14822 2714 0,'2'2'253'0,"1"1"-40"0,1 1-29 0,-1 2-19 0,2-1-26 0,0 3-30 16,3 0-24-16,1 1 7 0,0 1-11 0,0 0-21 16,2 2-60-16,0 0 0 0,0 2 0 0,1-1 0 0,1 3 0 0,0 0 0 0,0 0 0 15,0 1 0-15,0 2 0 0,1 3 0 0,1-1 0 0,2 3 0 0,-1 0 0 16,-1 2 0-16,1 1 0 0,0 0 0 0,1 0 0 0,-1-1 0 0,0-1 0 15,-2-1 0-15,1 0 0 0,-2-2 0 0,-1-2 0 0,-3 0 0 16,-1-1 0-16,-3-2 0 0,-1-2 0 0,0-1-74 0,-1-3-29 0,-2 0-25 16,0-2-26-16,-1-2-32 0,0-1-31 0,-1-1-44 0,-1-3-39 15,-1-3-38-15,-1-3-45 0,-1-1 1 0,-2-3-61 0,-1 0-346 0</inkml:trace>
+  <inkml:trace contextRef="#ctx0" brushRef="#br0" timeOffset="-196133.31">22176 15249 1175 0,'-7'-15'377'0,"1"-3"-92"0,-4-4-69 0,3 4-19 0,3 3-24 16,0-1-19-16,0 1-17 0,2-1-22 0,0 2-9 0,1 0-5 0,1 0 1 15,-1 1-8-15,1 1-5 0,0-1 2 0,2 0-16 0,0-1-1 16,1 1-8-16,0 1-10 0,1-1 2 0,1 1-22 0,2-1-1 0,-1 1-8 16,2 2-12-16,0-1 8 0,1 1 1 0,2 1-5 0,-1 2 3 15,1 1-8-15,-1 1-4 0,-1 1-7 0,1 3 7 0,1 0-2 0,1 3-8 16,-1 1 12-16,0 1-8 0,-1 1 4 0,0 1 0 0,-1 2-10 0,-1 0 4 16,-1 1-2-16,0 1 6 0,-2-1 2 0,-1 1-12 0,-1 1-2 15,0 2-2-15,-1-1-6 0,-1 1 0 0,-1 1 0 0,-1 1-11 0,-1 0 3 16,0 0 1-16,-1 1-3 0,0-2 7 0,-2 1-12 0,0-1 0 0,0-2-2 15,0 0-7-15,-1-1-12 0,-1 0-10 0,0-3-10 0,0 0-2 16,0-3 2-16,2-1 3 0,1-2-1 0,1-1-12 0,2-3-17 0,2 0-15 16,0-3-17-16,2 0 0 0,0-2 13 0,2-2-7 0,0-1-7 15,2-1-16-15,0-1-12 0,2 0 0 0,0-2 7 0,1 0 11 0,-1 0 18 16,2 0 32-16,0 2 25 0,0-1 30 0,0 1 19 0,0 1 13 0,-1 0 13 16,1 3 7-16,0 0 15 0,0 1 19 0,-1 2 16 0,1 0 24 15,-3 2 15-15,1 1 12 0,-1 1 12 0,0 2 4 0,-1 1 8 0,0 0-4 16,-1 1-10-16,0 2-6 0,-1 0-18 0,0 2-13 0,-1 0-13 15,1 0-16-15,-2 2-4 0,0 1-12 0,-1 0-7 0,-2 0-4 0,1 1-6 16,-1-2-1-16,0 1 2 0,0 1 2 0,-2-1 3 0,1 0 1 0,-3 1-4 16,0-3-7-16,0 0 2 0,-1 0 4 0,2-3-5 0,-3 0-2 15,2-2-10-15,-1-2-1 0,1-1 6 0,1-3-1 0,0-1 0 0,1-2 7 16,0-2-7-16,0-1-3 0,0-2 2 0,1-4 2 0,1 0-4 0,1-3-4 16,0 0 8-16,1-2 0 0,0-2 7 0,0 0 7 0,0-2-3 15,0 1-3-15,2-3-5 0,0 0-3 0,1 2-7 0,1 1-5 0,0 3-5 16,2 3 0-16,0 2 0 0,-1 2-2 0,1 3 0 0,0 2-4 0,-1 1 6 15,-1 2 0-15,1 1 6 0,-1 1-4 0,0 3-4 0,1 0-10 16,-2 0 0-16,1 1-5 0,0 1-6 0,-1 0-14 0,0 1-28 0,-1 0-15 16,1-1-53-16,0 1-40 0,-1 0-65 0,0-1-104 0,1-1-159 15,-1 0-256-15,0 0-297 0</inkml:trace>
+  <inkml:trace contextRef="#ctx0" brushRef="#br0" timeOffset="-195449.69">23132 14702 1547 0,'2'-1'426'0,"0"-2"-199"15,0 0-35-15,0-1-16 0,-1-2-22 0,0 1-35 0,-1-2-34 16,-1-1-17-16,0-1-1 0,-2-1 3 0,-1 0-7 0,-1 0-6 0,-1 0-16 16,-1-2-8-16,-2 0-6 0,0-1 2 0,-2 1-2 0,-1 0-25 15,-2 0-8-15,0 1-3 0,-2 1 9 0,2 2 15 0,-2 1-1 0,-1 1-10 16,0 1-6-16,0 2-1 0,-1 2-1 0,0 2 6 0,2 2-6 0,0 2 6 15,3 0-11-15,1 2 3 0,1 3 5 0,4 2 24 0,1 1 25 16,3 1 6-16,2 1 0 0,3 1-22 0,2 1 1 0,3 0-4 0,3 1 1 16,2 1 1-16,2-1-16 0,3-1 6 0,0-1-9 0,3 0 1 0,1-2 2 15,0-1-13-15,1-1-4 0,1-1-1 0,0-2-5 0,2 0 4 16,-1-2 0-16,2 0-9 0,-2-1-5 0,-2-2-4 0,1 0-15 0,-3-2 1 16,0 0-9-16,-2-2 13 0,0-1 15 0,-4-2 10 0,2 0 7 15,-2-1-4-15,-1-1 8 0,-1 0 1 0,-1 0 7 0,-2-1-3 0,1-1-3 16,-2 0 1-16,0-2-5 0,-1 0 5 0,-2-1 1 0,0-1 1 0,-1 1-3 15,-1-2 5-15,0 0-1 0,-2-1-5 0,0-1 5 0,-1 1 1 16,0-2-5-16,0 0 5 0,0 0-3 0,-1 1-2 0,-1 0-4 0,0 1-2 16,-1 0 3-16,0 2-14 0,-1-1 0 0,1 2 3 0,-2 1 6 15,1 1 15-15,-1 1 5 0,1 1-1 0,0 1-12 0,0 1 3 0,0-1-8 16,2 2 6-16,-1 0 1 0,1 1 9 0,0 1 3 0,-1 0-5 0,0 1-9 16,0 1 7-16,1 0-6 0,1 0 2 0,-1 1-3 0,1 0-3 15,0 0 0-15,0 1 2 0,0 0 6 0,1-2-12 0,0 2 6 0,0-1-6 16,0 0 4-16,1 0-8 0,-1 0-6 0,0 0 3 0,-1-1-7 0,1 0 12 15,0 1-2-15,1 0 8 0,-1 0-6 0,1 0 6 0,-1-1-4 16,1 0-3-16,1-1 12 0,-2 1-5 0,0-1-6 0,1 0 8 0,-2 0-4 16,1-1-4-16,1 1 6 0,-1 0-5 0,1-1-1 0,0 0 6 0,1 1 0 15,1-2 3-15,-2 1-1 0,1 0 0 0,-1 0 0 0,-1 0-12 16,1 1 2-16,0-1 4 0,0 0 2 0,0 0 2 0,1 1 6 0,-1-1 12 16,1 0-3-16,-1 0 2 0,0 0-9 0,-1-1-8 0,1 1 0 15,0-1-6-15,0 0 8 0,-1 0-6 0,1 0 6 0,0-1 0 0,-1 0-2 16,1 1-2-16,0-2 0 0,-1 1 0 0,1 0 0 0,-2 0 2 15,2 0-2-15,-2 0-2 0,1 0 0 0,0-1 6 0,1 1-12 0,-1-1 8 16,0 1 4-16,0 0-14 0,1 1 22 0,-1 0-10 0,0 0 2 0,1 0 0 16,-1 0-16-16,0 1 12 0,2 1-2 0,-1-1 0 0,-1 1 4 0,1 0-6 15,0 0 6-15,0-1-8 0,1 1 6 0,-1 0-12 0,1 0-7 16,-1 1 5-16,0-1-13 0,1 0 4 0,0 0-17 0,0 0-10 0,-1 0-3 16,1 0-11-16,-1 0-5 0,1 0-6 0,0 0-18 0,1 0-11 15,-1 0-4-15,0 0 2 0,1 0-8 0,-1 0-15 0,0 0-25 0,0 0-49 16,0 1-88-16,0-2-146 0,-1 0-177 0,-1 1-185 0</inkml:trace>
+  <inkml:trace contextRef="#ctx0" brushRef="#br0" timeOffset="-194582.69">23593 14348 1443 0,'1'2'251'0,"1"0"-50"0,0 2-27 0,1-1-4 0,0 0-14 0,1-1-29 15,1 1-17-15,0-1-20 0,0 0-9 0,0-1 0 0,-1-1-8 16,1 1-12-16,1-1 0 0,-2 0-12 0,1-1-4 0,0-2 8 0,-1 0-8 16,1 0 0-16,-2-1-4 0,1 0-5 0,-1-1-1 0,0-1 2 0,0 1-6 15,-1-1-1-15,0-1 0 0,-1 1-2 0,-2 1 2 0,-1-1-10 16,-1 1 1-16,-1-1-6 0,-2 2 0 0,-1-1-1 0,-1 2-1 0,-2 0-7 15,-1 0-3-15,-1 2-1 0,-2 1-2 0,-1 2-2 0,0 1 2 0,0 3-7 16,-2 0 7-16,0 2-2 0,1 1 0 0,1 1 4 0,1 2-6 16,0 2 6-16,2 2-6 0,1 1 6 0,3 3 0 0,2 1-6 0,2 0 6 15,4 2 2-15,3 0-14 0,2-1 3 0,3 0 9 0,1 0 1 16,3-2 15-16,3-1 1 0,1-1-17 0,1-2-6 0,3-3-4 0,1-1 2 16,0-2 1-16,2-3 3 0,0-1-4 0,-1-2 0 0,1-1-1 0,0-3-8 15,0 0 1-15,-1 0-3 0,-1-2-2 0,-1-2 3 0,-2-1-3 16,-1-1 9-16,-3 0 1 0,-1-1 0 0,-1 0 7 0,-2 0 7 0,-1 0-1 15,-2 0 7-15,0 2-1 0,-2-2-5 0,-1 2 18 0,-1-1-8 0,-1 1 11 16,0 0 1-16,-1 1 3 0,-1 1 11 0,0 0-5 0,0 3 7 16,-1 0-7-16,0 1 5 0,1 2-3 0,-1 0-13 0,1 3-1 0,-1 1-6 15,1 1-6-15,1 1 2 0,-1 0-10 0,1 0 0 0,-1 2-2 16,1 1-4-16,0-1 0 0,1 1 2 0,0-2-14 0,-1 0-8 0,1-1-22 16,0-1-34-16,0-3-13 0,1-1-43 0,0-1-44 0,0-3-77 0,0-2-127 15,0-3-199-15,1-1-259 0,0-3-189 0</inkml:trace>
+  <inkml:trace contextRef="#ctx0" brushRef="#br0" timeOffset="-194466.69">23955 14318 2206 0,'-6'-2'430'0,"-1"0"-214"0,1 0-43 0,0 3-34 0,1 2-16 0,0 1-33 16,1 3-26-16,-1 1-24 0,1 0-21 0,-1 0-12 0,1 0-9 16,2-1-18-16,0-2-28 0,2-1-54 0,1-1-69 0,2-2-70 0,1-1-87 15,1 0-141-15,3-1-214 0,1-2-322 0</inkml:trace>
+  <inkml:trace contextRef="#ctx0" brushRef="#br0" timeOffset="-194116.69">24031 14360 1898 0,'-2'8'320'0,"1"1"-77"0,0 1-52 0,2 0-21 0,2-2-32 0,0 0-40 0,0 0-23 15,2 1-17-15,1 0-7 0,0-1-6 0,1 1-4 0,1-1-10 16,0-1-6-16,1 1-3 0,0-1-5 0,0-1-5 0,0 2-6 0,-1-2-4 15,0 0-15-15,0 1 6 0,-1-2-8 0,0 1-3 0,-1 0 12 0,0 1-8 16,-1-1 21-16,-1 1 0 0,-1-1-3 0,-2 1 0 0,-1 0-19 16,-3 1 4-16,0 1 2 0,-3-2 2 0,0 0 5 0,-1-1 0 0,0 0 0 15,0-2 10-15,1-1-8 0,-1 1 5 0,2-2 8 0,0-1 1 0,1-2 5 16,2 0 4-16,1-3 5 0,0 0-1 0,2-1 3 0,0-2 5 16,1-3-1-16,1-1-6 0,1-1 13 0,0-2-24 0,2 2-2 0,1-1 14 15,1 0-16-15,1 2 20 0,1 2-8 0,-1 1-23 0,1 0 7 0,-1 2-5 16,0 1 0-16,-1 2-2 0,0 0-4 0,0 1 2 0,-2 1 2 15,2 1 4-15,-3 1-2 0,1 1-1 0,1-1 1 0,-1 2-6 0,0 0 4 16,0 1-8-16,-1 1 8 0,1-1 2 0,-1 1-6 0,1-2 2 16,0 2-2-16,-2-1 2 0,1 0-13 0,0-2-10 0,0 1-15 0,-1-2-20 15,0 0-17-15,-1-1-41 0,0-1-48 0,0 0-75 0,0-2-85 0,1-1-156 16,0-3-219-16,0 1-387 0</inkml:trace>
+  <inkml:trace contextRef="#ctx0" brushRef="#br0" timeOffset="-193966.69">24364 14203 1739 0,'-5'-6'978'0,"-3"2"-707"16,-1-2-27-16,2 3-52 0,1 3-23 0,0 1-35 0,1 3-42 0,-1 1-24 16,0-1-11-16,2 2-22 0,0 0 3 0,0 0-14 0,0-1-6 15,1 0-2-15,1-1-4 0,0-1-4 0,2 0-10 0,0-1-12 0,0-1-10 16,2-1-18-16,0-1-17 0,2 0-29 0,1-1-32 0,0 0-33 16,1-1-37-16,2-1-33 0,1-1-36 0,2 1-32 0,0-1-69 0,1-1-133 15,-2 1-143-15,1 1-197 0</inkml:trace>
+  <inkml:trace contextRef="#ctx0" brushRef="#br0" timeOffset="-193649.69">24480 14317 1456 0,'0'5'780'0,"0"2"-455"0,0 2-49 0,1-1-32 0,0 0-20 16,0 1-35-16,1 0-34 0,-1-1-29 0,2-1-27 0,0 0-23 16,1-2-17-16,0 0-11 0,2-2-10 0,0 0-38 0,0 0 0 0,2-1 0 15,-1-1 0-15,0 0 0 0,0-1 0 0,1-1 0 0,1 0 0 16,-1-2 0-16,0 0 0 0,0-2 0 0,0 0 0 0,1-1 0 0,-3 0 0 15,1 0 0-15,0 0 0 0,-1-2 0 0,-1 0 0 0,1-2 0 0,-2 1 0 16,0-2 0-16,0 1 0 0,-1 0 0 0,-1-2 0 0,0 0 0 16,-2 0 0-16,0 1 0 0,-1 0 0 0,1-1 0 0,-1 2 0 0,0-1 0 15,-1 0 0-15,-2 1 0 0,0 1 0 0,-1 0 0 0,-1 0 0 0,-2 0 0 16,0 1 0-16,-2 0 0 0,2 0 0 0,-1 2 0 0,-1 0 0 16,0 0 0-16,1 1 0 0,-2 0 0 0,0 1 0 0,-1 1 0 0,-1 0 0 15,0 1 0-15,1 1 0 0,2 2 0 0,0 0 0 0,3 3 0 0,0 0 0 16,1 2 0-16,2 1-12 0,1 0-34 0,2 2-10 0,1 0-10 15,2 1-5-15,-1-1-15 0,3 2-2 0,1 0-12 0,1 0-18 0,3-1-20 16,0 1-26-16,0-1-24 0,2-2-39 0,3-1-37 0,0-1-59 0,2-1-86 16,-1-1-102-16,1-2-343 0</inkml:trace>
+  <inkml:trace contextRef="#ctx0" brushRef="#br0" timeOffset="-193349.69">24752 14257 1304 0,'1'0'447'0,"-1"0"-105"0,2 0-49 0,-1 0-35 0,0 0-31 0,0-1-42 16,1 0-38-16,-1 0-24 0,1 1-12 0,1-1-19 0,0 1-7 15,1-1-12-15,-1 1-10 0,0 0-9 0,1 2-8 0,0-1-3 0,-1 1-6 16,1-1 4-16,0 1-11 0,2 1-4 0,-1-1-8 0,0 1-8 0,1 0-2 16,-2 0-6-16,0 0 2 0,1 0 2 0,0-1-6 0,-1 0 6 15,1-1-4-15,-1-1 0 0,-1 0 0 0,2 0-4 0,0-2 4 0,0 1-6 16,0-1 4-16,-1 0-4 0,0-1 0 0,0 0 4 0,0-1-2 16,0 0 0-16,0-1-2 0,-1 0-4 0,0-1 4 0,0 0 4 0,0 0-2 15,0-1 2-15,1 1-6 0,-1-1 6 0,0 1 4 0,0 0-4 0,0 0 6 16,1 1-4-16,-1-1-8 0,1 2 14 0,-1 1-2 0,1 2 0 15,0 0 4-15,0 2-12 0,1 1 6 0,-1 1 6 0,0 1-10 0,1 2 0 16,-1 1 0-16,2 1 0 0,-1 0 0 0,-1 0 0 0,2 1 0 0,-1 0 0 16,1 0 0-16,0-1 0 0,0 1 0 0,0 0 0 0,1-1 0 15,-1 1 0-15,0-1 0 0,0-2 0 0,0 0 0 0,0-3-16 0,-1 0-46 16,1 0-19-16,-1-2-16 0,-1 0-34 0,1-2-42 0,-1-1-52 16,-2-1-67-16,1 0-86 0,-1-1-101 0,1-2-119 0,1-1-347 0</inkml:trace>
+  <inkml:trace contextRef="#ctx0" brushRef="#br0" timeOffset="-192998.69">25420 14344 2202 0,'3'-1'309'0,"0"0"-59"0,0 1-27 0,1 1-6 0,-2 1-25 16,1 0-31-16,-1 1-34 0,-1 1-16 0,1 1-20 0,0 0-14 15,-1 1-6-15,0-1-13 0,1 0-52 0,0 1-6 0,1-1 0 0,0 1 0 16,1-2 0-16,-1 1 0 0,2-1 0 0,0 0 0 0,1-1 0 0,0 0 0 16,0 0 0-16,2 0 0 0,-1-2 0 0,1 1 0 0,-1-2 0 15,1 0 0-15,0-1 0 0,0-1 0 0,1-2 0 0,0 0 0 0,-1-2 0 16,1 1 0-16,-1-2 0 0,1-1 0 0,0 0 0 0,-1 0 0 16,-1-1 0-16,0-2 0 0,-1 1 0 0,-1-1 0 0,0 1 0 0,-1 0 0 15,0-1 0-15,-2 0 0 0,-1 1 0 0,0 0 0 0,-2 0 0 0,-1 2 0 16,-1-1 0-16,-2 0 0 0,-1 0 0 0,-1-1 0 0,-2 0 0 15,-1 0 0-15,-1 2 0 0,-1-1 0 0,1 2 0 0,-1 1 0 0,1 0 0 16,-3 2 0-16,0 2 0 0,0 2 0 0,-2 1 0 0,0 2 0 0,-2 2 0 16,0 1 0-16,-1 1 0 0,-1 4 0 0,1-1 0 0,0 3 0 15,1 1-40-15,1-2-71 0,1 1-45 0,1-1-47 0,1 1-79 0,2 0-95 16,3-1-120-16,1 0-202 0,4-2-330 0</inkml:trace>
+  <inkml:trace contextRef="#ctx0" brushRef="#br0" timeOffset="-192649.69">25932 13898 1973 0,'4'4'700'0,"1"1"-447"0,0 0-41 0,0 0-25 0,1 1-5 0,2-2-9 16,3 1-28-16,2-2-38 0,0 0-16 0,2-2-19 0,2 0-72 16,2-1 0-16,0-1 0 0,2 0 0 0,-1-1 0 0,-1-1 0 0,-1 0 0 15,0-1 0-15,0-1 0 0,-2-1 0 0,1-1 0 0,-1 0 0 0,0 0 0 16,-1 1 0-16,-2-3 0 0,1 1 0 0,-2-2 0 0,-1 0 0 15,0-1 0-15,0 1 0 0,-1 0 0 0,-1-1 0 0,0 0 0 0,-2 1-36 16,-1 0-48-16,0 0-19 0,0 1-27 0,-2-2-34 0,0 1-48 0,-1 0-54 16,-2 0-64-16,0 1-97 0,-1 1-111 0,-1 0-143 0,-1-1-146 15</inkml:trace>
+  <inkml:trace contextRef="#ctx0" brushRef="#br0" timeOffset="-192449.69">26122 13675 1980 0,'-2'2'655'0,"-1"0"-389"0,0 2-43 0,0-1-28 0,1 0-7 0,1 1-32 16,0 1-29-16,1 0-26 0,1 0-17 0,0 3-6 0,1 0-36 15,1 2-42-15,-1 1 0 0,1 1 0 0,1 0 0 0,-1 2 0 0,0 0 0 16,0 1 0-16,1 1 0 0,1 0 0 0,-1 1 0 0,0 0 0 16,0-2 0-16,1 2 0 0,-2 0 0 0,0-1 0 0,0-3 0 0,-1-1 0 15,0-2 0-15,0-1-210 0,0-2-114 0,2-2-170 0,-1 0-321 0,2-3-608 16</inkml:trace>
+  <inkml:trace contextRef="#ctx0" brushRef="#br0" timeOffset="-191715.69">26915 13067 721 0,'-3'1'155'0,"1"1"-3"0,-1 0 9 0,0 0 0 0,1 0-11 15,-1 1-14-15,1-1 0 0,-1 2 6 0,2-1 3 0,-1 1 1 0,2-1 0 16,-1 0-3-16,1 2-7 0,0-1 5 0,0 2-14 0,1 0-7 0,-1 2-7 16,1 1-25-16,1 1-8 0,2 2-15 0,0 2-8 0,1 4 7 15,2 2-7-15,-1 0-19 0,2 3-4 0,1 3 13 0,0-1 2 0,0 3 16 16,0 1-3-16,-1 0-29 0,0-2-6 0,-1 2-4 0,-1-3 5 15,-1 1-3-15,-1-2-5 0,-1 1-2 0,-1-2-10 0,-2-3-6 0,2-2-2 16,-1-3 2-16,-2-2-4 0,2-3 2 0,-3 0 8 0,1-3-14 0,-1-1 2 16,0-3-20-16,-1-2-2 0,0 0-3 0,1-3-10 0,-1-1-2 15,-1-2-17-15,1-4-9 0,-2-1-13 0,0-3-6 16,-1-1-11-16,1-4-7 0,-1-2 1 0,1-2 8 0,-1-2 9 0,2-1 14 0,-1 0 10 16,2-1 15-16,0 0 13 0,-1-3 12 0,1-1 19 0,2 0 3 0,-1-3-12 15,-1 1 4-15,0-2 10 0,1-3 9 0,0 1 23 0,1-1 6 0,-1 1-3 16,1 1 8-16,-1 3 10 0,1 2 9 0,0 3-3 0,0 2 3 15,1 3-2-15,1 2 2 0,1 3-1 0,1 5-8 0,0 2 1 0,1 5-8 16,-1 2-4-16,2 3-1 0,-2 1-13 0,2 4-1 0,1 3-8 0,-1 2-4 16,2 2 6-16,-2 3-7 0,3 0 7 0,0 2 2 0,-1 2 2 15,2-1-1-15,-3 3 3 0,2 1-3 0,-1 0 1 0,0 1 1 0,1-1-10 16,0 1-4-16,1-1-6 0,-1-2-10 0,2 0-2 0,0-3 2 16,0-2 28-16,1-1-8 0,-1-2-18 0,0-1 0 0,0-4 0 0,0-3 0 15,2-1 0-15,-3-4 0 0,1 0 0 0,0-3 0 0,0-4 0 0,-1-1 0 16,1-2 0-16,-1-4 0 0,2 0 0 0,0-1 0 0,0-2 0 15,1-1 0-15,0-1 0 0,0-3 0 0,0-1 0 0,1 0 0 0,-1-3 0 16,0 2 0-16,-1-3 0 0,-2 1 0 0,-1-1 0 0,0-2 0 0,0 0 0 16,-2-1 0-16,1 1 0 0,0 1 0 0,0 4 0 0,0 1 0 15,-1 5 0-15,0 4 0 0,-1 4 0 0,1 3 0 0,-1 2 0 0,-1 3 0 16,-1 3 0-16,0 1 0 0,-1 3 0 0,0 2-66 0,0 1-31 0,-2 1-22 16,1 2-37-16,-1 2-36 0,0-1-52 0,0 1-81 0,-2 0-96 15,0 2-196-15,1 1-116 0,-1 1-106 0</inkml:trace>
+  <inkml:trace contextRef="#ctx0" brushRef="#br0" timeOffset="-191116.7">27534 13329 1808 0,'0'3'325'0,"-2"0"-89"0,1 1-51 0,-1-2-7 15,2 0-2-15,0 0-16 0,1 0-21 0,0 0-30 0,0 1-17 0,1-2-17 16,-1 1 3-16,1-1-1 0,1 0-9 0,-1-1-3 0,2-1-13 0,0 0-5 15,1-1-2-15,1-1-12 0,-1-1-2 0,1-1-7 0,0-1-2 16,1-2-2-16,-1 0-8 0,-1-1-26 0,0-1-10 0,1-1-4 0,-1 1 6 16,1-1 40-16,-2 0-4 0,0 0 2 0,-2 1 4 0,1 0-16 0,-2 2 10 15,0 0-12-15,-1 0 2 0,0 2-8 0,-1 0 12 0,-2 2 2 16,1 2 4-16,-2 1-8 0,-1 0-6 0,0 2 0 0,0 1 0 0,0 1 0 16,-1 1 0-16,1 2 0 0,-1 1 0 0,-1 0 0 0,1 0 0 15,1 3 0-15,0-1 0 0,1 1 0 0,0 0 0 0,2 0 0 0,1 1 0 16,1 0 0-16,1 1 0 0,2 1 0 0,0 0 0 0,2 0 0 0,0-2 0 15,0-1 0-15,2 1 0 0,0-1 0 0,1 0 0 0,-1-1 0 16,1-1 0-16,1-1 0 0,0 0 0 0,0 0 0 0,-1-2 0 0,1 1 0 16,-2-2 0-16,1 0 0 0,0 0 0 0,0 0 0 0,-1 0 0 0,-1-1 0 15,0 0 0-15,-1-1 0 0,0-1 0 0,-2 1 0 0,0 0 0 16,0-1 0-16,-2 1 0 0,-1-1 0 0,-1 1 0 0,-1-1 0 0,0 0 0 16,-1 1 0-16,-1 0 0 0,-1 1 0 0,-1-1 0 0,-1 0 0 15,-1 0 0-15,-1 0 0 0,0 0 0 0,0 1 0 0,-1-1 0 0,1 1 0 16,-1 1 0-16,1-1 0 0,1 0 0 0,-1 1 0 0,2-1 0 0,1 1 0 15,1 0 0-15,1 0 0 0,1 1 0 0,1 0 0 0,1 0 0 16,2 0 0-16,-1-1 0 0,2-1 0 0,0 0 0 0,1-1 0 0,1 1 0 16,1-3 0-16,-1 0 0 0,3-2 0 0,-1-1 0 0,1-1 0 0,0-1 0 15,0-1 0-15,0-2-14 0,1-1-176 0,-1-1-72 0,1 1-93 16,0-3-159-16,1-1-252 0,0 0-237 0,1-2 208 0</inkml:trace>
+  <inkml:trace contextRef="#ctx0" brushRef="#br0" timeOffset="-189982.7">28124 12927 3404 0,'0'0'166'16,"-1"3"-62"-16,-1 0-58 0,0 0-27 0,1 1-12 0,3 0-3 0,-1 1-4 16,2 1-6-16,0 0-7 0,-1 0-8 0,0 0-23 0,0 0-29 15,-1 0-33-15,-2 0-38 0,-2-1-35 0,-2-1-45 0,0 0-70 0,-1-2-119 16,1 0-236-16,-2-2-418 0</inkml:trace>
+  <inkml:trace contextRef="#ctx0" brushRef="#br0" timeOffset="-189232.7">28309 12581 1703 0,'-4'4'259'0,"0"0"-67"0,0 2-19 0,0-1 13 0,2-1-6 0,1 0-12 16,1 0-26-16,2 0-26 0,-1 0-9 0,1 1-14 0,1-1-4 0,0 2-6 16,0-1-4-16,1 1-13 0,-1 1-13 0,1-1-26 0,1 1-10 15,1 0-6-15,-1 2 3 0,1 2 28 0,2 3-13 0,0 0-2 0,0 2 0 16,1 3-23-16,0 0 2 0,-1 2-6 0,-1 3 0 0,1 1-6 15,0 1 6-15,1 3 2 0,0 0-6 0,0 2 0 0,2 0-7 0,-3 1 5 16,0-3 2-16,0 1-4 0,-2-2-5 0,1 1-11 0,-1-2-6 0,0 1 3 16,-2-3-6-16,0-2-12 0,0-1-16 0,-2-5-36 0,0-1-17 15,0-3-13-15,-1-2 0 0,0-1-3 0,0-3-11 0,-2-2-31 0,0-3-48 16,0-2-44-16,-1-3-99 0,0-1-109 0,1-4-115 0,-2-3-38 16</inkml:trace>
+  <inkml:trace contextRef="#ctx0" brushRef="#br0" timeOffset="-188716.7">28426 12865 1591 0,'-7'-23'431'0,"-1"-3"-240"0,-1-4-33 0,1 2-32 16,2 5-12-16,0 3-21 0,1 0-4 0,0 3-3 0,2 4 4 0,0 1 11 16,1 1 2-16,0 1-4 0,2 1-7 0,0 1-6 0,1 1-5 15,1 0-8-15,1 1-9 0,2 1-11 0,0 0-9 0,2 1-13 0,-1 1-2 16,3 1-6-16,1 0-3 0,0 1 3 0,2 1-9 0,1 0 1 16,-1 2-11-16,2-1-2 0,1 1 6 0,0 1-2 0,0 1-4 0,1 0-2 15,0 2-2-15,-2 0 2 0,-2 1 8 0,0 1-4 0,0 1-4 0,-2-1 0 16,0 0-20-16,-2 1 10 0,-2-1-7 0,-2 1 5 0,0 0 8 15,-2 0 20-15,-1 1 3 0,0 1-5 0,-3-1 6 0,0 1-28 0,-2-1-4 16,0 0 0-16,-2 0-11 0,-2 0 1 0,-2 0-5 0,0 0-6 0,-1-2 6 16,0 0-5-16,1-1-5 0,-1-1-3 0,0-1-1 0,0-1-3 15,1-1 3-15,1-2-13 0,2 0-12 0,1-2-18 0,2-1-15 0,1-1-7 16,3-1-8-16,1-2-9 0,2 0-9 0,1-2-11 0,2 0-6 0,1 1 6 16,2-3 16-16,2 1 21 0,2 0 24 0,0 0 22 0,-1 0 11 15,2 0 11-15,-2 2 11 0,1-1 7 0,0 1 11 0,-1 1-1 0,1-1 10 16,0 1 12-16,1 1 16 0,0 1 31 0,-1 1 10 0,1 1 11 15,-1 1 9-15,0 1 5 0,-2-1 9 0,2 2 8 0,0 1-6 0,0 0-3 16,0 2 1-16,-1 0 5 0,0 1 4 0,-1 0-7 0,0 1-7 0,-1 2-16 16,0-1-12-16,-1 1-3 0,1 0-14 0,0 0-8 0,0 0-8 15,-1 1-9-15,0-1-2 0,-2 0 0 0,0 0-10 0,-1 0-3 0,0-2-4 16,-1 1-5-16,0 0 2 0,-2-1-3 0,-1-1-3 0,-1 0-1 0,-1-1 2 16,-1-1 3-16,-1 0 0 0,-1-2-6 0,-1 0 6 0,0-1-2 15,-2-1 0-15,0-1 7 0,-2-2-11 0,0-2 2 0,-2 0 0 0,-1-1 2 16,2-2 4-16,-1 0-8 0,2 0 6 0,1-2 4 0,0 0 1 15,1-2 8-15,1 0 4 0,2 0 2 0,0-2-13 0,1-2 3 0,1 0 13 16,0 1-1-16,2-2 10 0,0 2-10 0,1 0-13 0,2 3-6 0,0 1-2 16,2 2 0-16,0 2-4 0,0 1 0 0,1 1 4 0,1 1-6 15,1 2-8-15,0 0-6 0,0 1-1 0,1 1-9 0,-2 1-11 0,1 0-17 16,1 0-38-16,0 0-26 0,2 0-30 0,0 1-42 0,-1-1-27 0,2 1-47 16,-1 0-28-16,1 0-28 0,-1 0-60 0,-1 0-88 0,1 1-409 15</inkml:trace>
+  <inkml:trace contextRef="#ctx0" brushRef="#br0" timeOffset="-187232.72">29172 12684 1854 0,'-1'5'410'0,"0"0"-171"0,1 0-56 0,1-1-12 0,2-2-8 0,1 0-8 16,2-1-27-16,1-1-32 0,1 0-15 0,1-1-17 0,1 0-9 0,0-2 1 16,0 0-1-16,0 0-15 0,2-1-5 0,-1-1-10 0,1 0-23 15,-1-1-2-15,-1-1 0 0,0 1-10 0,1-1 20 0,-1 0 9 0,1 0 0 16,0 0 1-16,-3-2-5 0,2 0-13 0,-1-1-2 0,-1 2 8 0,0-2-6 15,-1 1-2-15,-1-1-2 0,-1 0 4 0,-2 0 0 0,-1 2-2 16,-1-1 2-16,-2-1-6 0,-1 1-6 0,-2 0-3 0,0 0 5 0,-1 1 0 16,-2 3-4-16,1-1 1 0,-1 3-3 0,0 0 5 0,-1 2 7 0,0 1-2 15,1 2 0-15,0 0-4 0,-1 2 2 0,0 2 6 0,1 0-1 16,-1 2-7-16,1 2 6 0,1 2-2 0,1 2 0 0,-1 0 6 0,3 2-6 16,0 2 2-16,2 0-1 0,1-2 3 0,2 1-8 0,1 0-4 15,2-1 20-15,0-1-6 0,2 0 17 0,1 0 2 0,3-2-19 0,0-3-2 16,2 0 0-16,-1-1-2 0,3-2 4 0,0 0 4 0,0-1-6 0,0-2 6 15,2-1-12-15,0-2 2 0,0-1 0 0,-2 0-9 0,2-1 7 16,-2-2-5-16,2-1 3 0,-1-2 2 0,0-2-3 0,1 0-1 0,0-1 4 16,-3-1-1-16,2 1 3 0,-2-3 6 0,0 0-10 0,-3-1-18 0,1 0-7 15,0 2 0-15,0 0 14 0,-1 0 21 0,-2 0 5 0,1 1-3 16,0 0-10-16,0 2 3 0,-2-1-1 0,0 1 0 0,-1 0 4 0,-1 2-2 16,-1 2-2-16,-1 0 3 0,0 2 2 0,0 0 1 0,-1 0 4 15,-2 2-6-15,1 0-6 0,-1 0 3 0,0 1-3 0,-1 0 0 0,1 0 4 16,-1 1-1-16,2-1-3 0,-1 0 8 0,1 0-4 0,-2 0 2 0,2 0 4 15,-1-1-6-15,0-1 0 0,1 1 4 0,-1-1-4 0,1 0 6 16,-1-1-4-16,0 0 0 0,1 0 0 0,0 0 0 0,0 0 0 0,0 1 0 16,-1-1 2-16,0 1-4 0,0 0 2 0,-1-1 2 0,-1 2 3 0,1-1-3 15,0 0 2-15,0-1-6 0,0 1 0 0,-1 0 4 0,-1 0 0 16,2 0 0-16,-2 0-6 0,1 0 8 0,2-1-4 0,-2 0 2 0,1 0 0 16,-1-1-4-16,0 1 0 0,1-1 2 0,0 1 0 0,0-2-6 15,0 2 6-15,1-2-4 0,-1 1 4 0,1 1 0 0,0-1-3 0,0 1 1 16,1 0 0-16,-1-1 0 0,1 1 4 0,0 0-4 0,0 1 2 0,0 0-2 15,-1 0-1-15,0 1 3 0,0-1-4 0,1 2 2 0,-1-1 2 16,0 1-2-16,0 0 4 0,0 0-4 0,0 0-4 0,1 0 1 0,-2 1-1 16,2 0 4-16,0 0 4 0,-1 0-2 0,1-1-3 0,0 0 4 0,-1-1-1 15,1 1 0-15,0-1-1 0,1 0-3 0,0 0 0 0,0 0 4 16,0-1 0-16,-1 1 2 0,1-1-4 0,0 0 0 0,0 0 2 0,-1 0-2 16,1-1 4-16,-2 1-4 0,1 0-1 0,0 0 5 0,-1 0-2 0,0 0 3 15,-1 1 1-15,1-1-6 0,0 1 2 0,-1-1 2 0,2 0-4 16,-1-1 4-16,0 1-4 0,0 0 0 0,0-1 4 0,-1 0 0 15,0-1-4-15,1 1 2 0,0-1-2 0,1 0-3 0,-1-1 7 0,-1 0-1 16,0 1-1-16,1-1 4 0,-2 0 0 0,1-1 0 16,-1 1-4-16,0-1 0 0,0 0 0 0,-1 0 0 0,1 2 5 0,0-1 1 0,-2 0 1 0,0 1-5 15,0 0 4-15,-1 1-6 0,0 0-2 0,1 0 6 0,-1 0-14 16,-1 1 14-16,1 0-2 0,-2 1-6 0,1 1 13 0,-1 1-10 0,-1-1-1 16,0 1 2-16,0 0 0 0,-1 0-2 0,-1 0 2 0,-1 1-8 0,0 0 8 15,0 1 0-15,2-2 0 0,0 0 8 0,1 1-10 0,1 0 2 16,0-1 2-16,1 0 5 0,1 0 1 0,2 0-1 0,0 0-1 0,2-1-1 15,0 0 7-15,1 0 1 0,0 0-6 0,1 0-3 0,1-1 2 16,0 0 1-16,0 0 1 0,1 0-1 0,0 0-5 0,0 0-4 0,1 0 2 16,0 0 4-16,0 0-2 0,1-1-4 0,0 1 4 0,2-1-8 0,-2 1 4 15,1 0 8-15,-1 0-10 0,0 1 4 0,1-1 0 0,-1 0-5 16,-1 0 16-16,1 0-9 0,-1 1-4 0,0-1 4 0,1 0-12 0,-1 0 10 16,0 0 2-16,-1 0-7 0,1 1 7 0,-2-1-14 0,0 0 10 15,1 0 4-15,-2 0-4 0,1 0 4 0,-1 0-7 0,-1 0-1 0,-1 0 4 16,1-1-4-16,0 1 6 0,0 0-5 0,0-1-3 0,0 1 8 0,0 0-2 15,0-1 1-15,-1 1-1 0,1-1-4 0,0 1 0 0,0-1 8 16,-1 1-7-16,1-1 5 0,0 0-2 0,0 1 0 0,-1-1 2 0,1 1 0 16,0-1 7-16,-1 1-5 0,1-1-2 0,0 0 6 0,-1 0-6 0,1 0 4 15,-1-1-2-15,0 1-4 0,1 0-2 0,0 0 2 0,-1 0 2 16,1 0-2-16,-2 0 6 0,1 0-4 0,1 1 0 0,-1-1 2 0,0 1-4 16,0 0 6-16,-1-1-1 0,0 1-3 0,0 0 0 0,2 0-1 0,-1 0 4 15,0-1 3-15,0 1-2 0,0 0-1 0,0 0-8 0,2-1 3 16,0 1-2-16,-1 0 6 0,1-1 6 0,0 1-8 0,0 0-4 0,1-1 4 15,-1 0-2-15,2 1 6 0,-2-1-2 0,1 1-6 0,0-1 0 16,0 0-2-16,0 0 10 0,0 1 0 0,-1-1-8 0,0 0 6 0,-1 1-6 16,1 0 2-16,-1 0 6 0,0 0-8 0,1-1 3 0,-1 1 1 0,0 0-2 15,-1 0 0-15,1-1 2 0,-1 1 0 0,1 0-4 0,-1 0 8 16,0-1-2-16,0 1 0 0,1 0 1 0,-1 0 1 0,-1 0-4 0,2 0 6 16,-1-1-6-16,0 1-4 0,1-1 4 0,-1 0-4 0,1 0 6 0,1 1 6 15,-2-1-8-15,1 1 3 0,-1-1-1 0,1 0-6 0,-1 0 10 16,1 0-2-16,-1 0 3 0,1 0-7 0,0 0 4 0,-1 0 2 0,0-1-8 15,-1 1 9-15,1 0-5 0,-3 0-2 0,2 0 2 0,-1-1-2 16,0 0-4-16,0 1 8 0,-2 0-2 16,1 0 0-16,0 0 6 0,0 0-12 0,-1 1 4 0,0-1 5 0,-1 2-3 0,1-1 0 0,0 1-2 0,-1 0 0 15,1 1 0-15,0-1 2 0,-1 0 6 0,0 1-5 0,1 0-1 16,1 1 4-16,-2 0-4 0,1 1 4 0,-1 0-1 0,-2 2-3 0,1 0 6 16,-1 0 0-16,1 2-1 0,-1 0 1 0,0 1-8 0,0 0 0 0,1 2 0 15,-1 1 0-15,0 1 4 0,1 1-2 0,2 0-2 0,0 0 0 16,2-2 0-16,2 1 3 0,1-1 1 0,2 0 2 0,2 0-8 0,-1-2-4 15,3 0 8-15,1 0-13 0,-1-1 3 0,3-1-3 0,2 0-8 0,1-1 17 16,2 0 2-16,-2-2 21 0,4-1 0 0,-1-1-4 0,2-1 0 16,1-3-19-16,1-1-27 0,0-1 3 0,-1-1-5 0,0 0 7 0,0-1 18 15,-2-1 2-15,-1 0 8 0,0 0-6 0,-2-1 0 0,-1 0-5 0,1-1-5 16,-3 0 1-16,1 1 0 0,-3-1 9 0,-1-1-9 0,-2 1 11 16,-1 0 3-16,-1-1 1 0,0 0 4 0,-2 0-6 0,0 2-2 15,-1 0 9-15,-2 0-3 0,1 1-1 0,-2 1 8 0,0 1-7 0,0 1 4 16,-1 3-5-16,1 0-1 0,-1 1 7 0,0 1-3 0,-1 2 5 0,1 1-3 15,-1 1-1-15,1 1 5 0,0 0-5 0,1 0 3 0,-1 0-12 16,2 2 0-16,1 0-4 0,1 2 6 0,0-1-2 0,1 1 0 0,1 0-2 16,1 0-17-16,-1 0 5 0,0 0-1 0,0-1 0 0,1 0 32 0,2-1-5 15,0-1-11-15,0-1-4 0,1 0-49 0,-2-1-47 0,0-1-40 0,2 0-43 16,-1-3-49-16,0-1-54 0,0-2-94 0,-1-2-191 0,1-3-113 16,0-2-124-16</inkml:trace>
+  <inkml:trace contextRef="#ctx0" brushRef="#br0" timeOffset="-186749.72">30284 12291 2076 0,'-7'-5'382'16,"0"-1"-199"-16,-2 1-18 0,1 2-31 0,2 3-21 0,0 1-14 0,-2 3-11 15,1 1-21-15,-1 1-19 0,1 1-10 0,-1 1-12 0,2-1 0 0,0 2-6 16,0-2-13-16,2 0-5 0,0-1-2 0,1 0-9 0,1-1-8 16,2-1-21-16,0-1-37 0,1-1-27 0,2 0-28 0,1-1-25 0,2-1-23 15,1 0-32-15,3-2-11 0,1 0-16 0,1-1-9 0,1-1 12 16,2 1 11-16,2-1 28 0,-2 1 38 0,1 0 40 0,-1 0 39 0,-1 0 28 15,-1 1 15-15,-1 1 3 0,2-1-16 0,0-1-18 0,-1 1-11 0,0-1 4 16,-2 1 24-16,0-1 35 0,-1 1 37 0,-3 0 33 0,-1 1 24 16,-1 1 21-16,-3 1 10 0,-2 1 6 0,-1 1 5 0,-3 1-5 0,0 1-2 15,-1 2 5-15,-1 0 1 0,1 1 7 0,0 1 9 0,0 0 2 0,1 3-5 16,0 0-4-16,1 1-9 0,1 1-11 0,1-1-3 0,2 1-14 16,0 0-6-16,3 1-8 0,0 0-8 0,3 1-10 0,0 1-12 0,2-1-12 15,2-1 1-15,0 2-2 0,2 0-10 0,1 1 0 0,0-3-18 0,0 2-1 16,-1-1 16-16,0 1-11 0,0 0 13 0,-1 0-7 0,-3-1-18 15,-1-2 3-15,0-1-6 0,0-2-1 0,0 0 0 0,-2-1 3 0,-1-1 2 16,-2-2-1-16,-2-2-1 0,0-1 2 0,-2-1-4 0,0-1 5 16,-1-1-4-16,-3-1-3 0,2-1-4 0,-2-2 4 0,0-1 5 0,0 0-4 15,-3 0 4-15,2-3 4 0,0 0-3 0,-1-1 13 0,1-1 6 0,0 0 3 16,3 1 14-16,1-2 4 0,1 1 12 0,1-1 7 0,1-1 0 16,1-1-12-16,2 0-31 0,1 1-12 0,1 0-5 0,1 2 10 0,1 0 12 15,4 3-1-15,0 0-1 0,1 0-10 0,2 2 1 0,-2 0 2 0,2 0-7 16,1 3 0-16,0-1 1 0,0 2 3 0,-2 1 1 0,2 0 2 15,-1 0 3-15,-1 1-3 0,1 0-2 0,-1 1 1 0,-1-1-10 0,2 0 0 16,-1 1-8-16,0-1 6 0,2 0 2 0,-4-1-4 0,2 0-2 0,0-1-19 16,-2 0-15-16,0-2-34 0,-3-1-34 0,1 0-42 0,0-1-56 15,-2-1-62-15,2 0-100 0,0-3-202 0,-2-1-271 0,-1-1 2 0</inkml:trace>
+  <inkml:trace contextRef="#ctx0" brushRef="#br0" timeOffset="-186599.72">31057 12219 2261 0,'-5'1'225'0,"0"-1"-44"0,-2 2-42 0,1 2-29 0,0 1-20 0,-2 3-9 0,0 0-25 16,2 1-22-16,-1 0-13 0,1 0-11 0,0 0-1 0,0 0-9 15,1-2-16-15,1 0-17 0,0 0-30 0,1 0-25 0,1 0-26 0,-1-2-41 16,2 0-35-16,0 0-37 0,0 0-42 0,2 0-40 0,0 0-32 16,2 0 2-16,0-1 25 0,3 1 21 0,0 1-74 0</inkml:trace>
+  <inkml:trace contextRef="#ctx0" brushRef="#br0" timeOffset="-186348.72">31167 12453 1258 0,'5'0'289'0,"1"1"-84"0,2 0-50 0,0 1-20 16,0 0-16-16,1 0-9 0,2 0-12 0,0 0-20 0,2 1-9 15,-1-2-6-15,2 1-2 0,0 0-3 0,1-2-6 0,-1 1-9 0,-1-1-4 16,2 0 0-16,-2-1-11 0,1-2 1 0,0 0-5 0,1-1 18 16,-2 1 10-16,1-1 0 0,0 0-1 0,0 0-9 0,1-2 0 0,-1 0 8 15,-1-1 2-15,-2 1-1 0,0-3-3 0,-1 0-6 0,-1-2-5 0,-1 0-6 16,-2-1-3-16,1 0-7 0,-2-1-4 0,0-2-4 0,-3 0-2 15,-2 0 4-15,-1-1-7 0,1 0-1 0,-3 0-7 0,2 1 4 0,-3 0-4 16,-1 1-7-16,1 1-5 0,-2 2-5 0,0 2 4 0,0 1 4 0,-2 2-10 16,1 2-11-16,-3 2-9 0,-1 3-2 0,0 2-3 0,-4 2 2 15,1 2-5-15,-3 2-5 0,1 0-16 0,0 2-11 0,-1 0-5 0,1 1-9 16,4 0 4-16,-2 0-15 0,4 0-18 0,3 1-36 0,3-1-59 16,4 0-85-16,2-1-98 0,1 0-73 0,1 0-301 0</inkml:trace>
+  <inkml:trace contextRef="#ctx0" brushRef="#br0" timeOffset="-186099.72">31602 12334 833 0,'15'-5'492'16,"-2"-2"-281"-16,4-2-49 0,-2 0-34 0,-2 2-18 0,0 0-3 0,0 1-12 16,-2 0-12-16,-2 1-15 0,0 1-21 0,-1 1-6 0,-3 3-5 15,0-1-3-15,-2 1 2 0,-3 1-7 0,2 1-6 0,-3 0 2 0,2 2-11 16,-2 0 3-16,-2 1-4 0,2 2-8 0,-1 2 2 0,0 0-9 16,0 1 3-16,-1 0 1 0,-1 1-4 0,3-2 3 0,0 1-5 0,1-2 2 15,-1 0 2-15,1 0-15 0,1-1 1 0,1-1 1 0,3 0-5 0,-1-2 11 16,3 0 2-16,1-2-5 0,-1-1 10 0,3-1 7 0,1-1 10 15,-2-1 9-15,1-1 10 0,1 0 19 0,1-1 19 0,0 1 24 0,0 0 4 16,0-1-7-16,-1 2-11 0,1-1-24 0,-2 1-6 0,-1 1 7 0,0 0-11 16,-1 2-4-16,-1 1-9 0,0 2-11 0,-1 1-3 0,-1 1-1 15,2 0-7-15,-2 2-4 0,0 0-14 0,0 0-4 0,-2 2-4 0,1 0-20 16,-2 1-20-16,0 0-37 0,0 0-56 0,-2 0-68 0,0 0-79 16,-1 0-136-16,0-1-222 0,-1 1-396 0</inkml:trace>
+  <inkml:trace contextRef="#ctx0" brushRef="#br0" timeOffset="-185631.72">22798 16179 2146 0,'24'-6'309'0,"2"-4"-245"0,10-5 15 16,-2-2 16-16,3-2-4 0,4-1-13 0,8-1-25 0,6-4-21 15,7-1-12-15,5-4-6 0,5-2 1 0,6-5 6 0,5-2-13 0,7-2 8 16,8-4-2-16,8-2-9 0,10-3 10 0,9-2-8 0,7-1 4 16,9-3-4-16,7-1-6 0,8 1 3 0,7 1-4 0,10 4 0 0,9 0-16 15,7 2 4-15,12 0 2 0,8 2-6 0,7 2 18 0,8 4 3 0,3 0-7 16,4 4 7-16,0-1 8 0,2 0-8 0,-1 0 5 0,-6-1-5 15,-3 1-10-15,-4-1 12 0,-11 0 0 0,-4 0 11 0,-9 1 1 0,-7-2 5 16,-5 1 15-16,-7 0 18 0,-5-1 17 0,-7 2 0 0,-6 0-15 0,-6 1-19 16,-6-1-10-16,-8-1-10 0,-6 0-5 0,-9-1-22 0,-7 2-30 15,-6 1-41-15,-10 0-49 0,-10 1-65 0,-8-1-107 0,-10 1-138 0,-10 3-303 16,-9-1-374-16</inkml:trace>
+  <inkml:trace contextRef="#ctx0" brushRef="#br0" timeOffset="-185149.2">25727 15732 2433 0,'-1'0'152'0,"0"0"-34"15,0 0 0-15,0 0-30 0,2 0-3 0,0 2-16 0,1 1-17 16,2 2-27-16,1 3-2 0,3 1-6 0,0 4-3 0,2 1 9 0,-1 1-16 16,3 2 13-16,0 1-6 0,1 2-5 0,-1 3 16 0,-1 1-19 15,2 0-6-15,-2 1 3 0,-1 0-1 0,0 2-2 0,-3-2-2 0,-1 2-12 16,0-2-9-16,-1-1-9 0,-1 1-11 0,-2-3-15 0,-1-1-32 0,0-4-28 15,0-3-26-15,-1-4-43 0,-1 0-56 0,-1-3-99 0,-2-4-162 16,0-2-150-16,-1-2-9 0</inkml:trace>
+  <inkml:trace contextRef="#ctx0" brushRef="#br0" timeOffset="-184899.62">25774 15788 2011 0,'-5'-24'225'0,"2"-5"-58"0,-2-5-34 0,4 5-33 0,1 7-14 15,3 3-20-15,0 2-12 0,3 4-5 0,0 3 8 0,2 1 13 0,1 5 13 16,-1 1 1-16,2 3-7 0,1 3-5 0,0 2-24 0,2 3-4 0,2 1 4 15,-1 3-7-15,0 1 1 0,2 2 3 0,0 0-7 0,1 1-4 16,-1 1 6-16,1 0-17 0,0-1 5 0,-1-3-5 0,0 1-13 0,-1-4 11 16,-1-1-9-16,-1-1-8 0,-1-1 2 0,-1-2-12 0,-1-2 10 0,0-3 1 15,-3-1 1-15,-1-2-4 0,-2 0 2 0,-1-2-2 0,0-3-4 16,-2-1 2-16,0-3-4 0,-1-1 4 0,-1-1-2 0,-1-1-2 0,-1-2-11 16,0 0-1-16,-1-1 7 0,0 1 3 0,0-2 4 0,-1 1-2 15,0 0 2-15,2-2-3 0,0 0 6 0,0 0-1 0,1-3 0 0,0 1-1 16,2 0 2-16,0 3-8 0,2 3 5 0,1 2-6 0,2 3-22 15,0 3-7-15,0 3-21 0,0 4-14 0,0 1-10 0,0 3-18 0,0 3-23 16,0 4-17-16,1 3-29 0,-1 2-30 0,1 3-51 0,-1 1-53 0,0 0-92 16,1 4-138-16,1-1-347 0</inkml:trace>
+  <inkml:trace contextRef="#ctx0" brushRef="#br0" timeOffset="-184632.75">26320 16030 1944 0,'2'4'317'0,"0"-1"-107"15,1 1-49-15,-1-1-9 0,0-1 7 0,0 3-16 0,1-2-10 16,1 0-33-16,1-1-18 0,0 0-9 0,0 0-14 0,0-1 10 0,1-1-8 16,0 0-16-16,-1-2 5 0,1-1-14 0,1 0 1 0,1-3-4 15,0 0-21-15,-1 0 3 0,0-2 1 0,0 2-5 0,-2-1 11 0,0-1-8 16,0-2 5-16,0 0-1 0,-1-2-4 0,0 0 10 0,-1 0-12 0,-2-2 8 16,0 2-16-16,-1 0-8 0,-1 1 8 0,-1-3 2 0,0 2-2 15,-1-1-10-15,-1 1-8 0,-1 3 4 0,-1-2 4 0,0 2-8 0,-2 2-8 16,-2-1-6-16,1 3-1 0,-1-1 9 0,-2 2 5 0,3 0-7 0,-2 2 1 15,-1 2-4-15,2 0-8 0,1 2-4 0,-1 1-3 0,2 1-8 16,-1 2-5-16,0 2-22 0,2 0-12 0,0 0-2 0,1 2-12 0,1 0-9 16,1 1 7-16,2 1-19 0,2-2-20 0,0 0-18 15,2 0-36-15,0-2-12 0,2 0-17 0,1-1-24 0,1-1-22 0,2-1-36 0,0-1-33 16,1 0-268-16</inkml:trace>
+  <inkml:trace contextRef="#ctx0" brushRef="#br0" timeOffset="-184432.58">26441 15947 1056 0,'11'-1'425'0,"1"-1"-130"0,3-1-49 0,-2 1-29 16,-2 0-20-16,0 0-21 0,0-1-15 0,-1 0-13 0,0 0-1 15,1 0-1-15,0 1-25 0,1-2-2 0,1 2-16 0,1-1-16 0,0-1-2 16,0 1-24-16,2-1-3 0,2-1-9 0,-1 0-6 0,-1-1 2 0,1 0-25 16,0 0 10-16,-2 0-20 0,2 0-4 0,-1 0 10 0,1 0-8 0,-2 1-6 15,0 1-6-15,0 0-4 0,-2-1-12 0,0 2 12 0,0-1-6 16,0 0 16-16,-2 0 8 0,1 0-6 0,-2-1 20 0,0 1-28 0,-1 0-2 16,0 0-6-16,-2-1-2 0,1-1-4 0,-1 1-12 0,-1-1-11 15,1-1-27-15,-1 1-17 0,-1-1-19 0,0 0-21 0,0-1-25 0,-2 0-39 16,1 0-44-16,-3 1-55 0,0-1-69 0,-2-2-102 0,0 1-117 0,-1-1-327 15</inkml:trace>
+  <inkml:trace contextRef="#ctx0" brushRef="#br0" timeOffset="-184249.19">26730 15583 2283 0,'-3'2'307'0,"1"-1"-91"0,0 0-34 0,2-1-39 15,1 0-12-15,0 1-18 0,1 1-18 0,1 2-13 0,1 1-17 0,1 1-1 16,0 3-8-16,2 0-3 0,1 3 0 0,1 2-13 0,2 0-1 0,1 3-7 15,0 1-17-15,0 1-3 0,1-1 0 0,1 1-10 0,0 2 8 16,-1-1-26-16,0 0 12 0,0-1 10 0,-2 0-10 0,-1 0 14 0,-1 0-55 16,-3-3-35-16,0-1-25 0,-1 1-32 0,-1-3-19 0,-1-1-33 0,0-2-36 15,0-2-52-15,0 0-77 0,0-1-135 0,0-2-203 0,-1-2-201 16</inkml:trace>
+  <inkml:trace contextRef="#ctx0" brushRef="#br0" timeOffset="-183799.31">27217 15522 1621 0,'4'1'683'16,"1"0"-468"-16,-1 0-57 0,-1 0-51 0,-1 2 3 0,1 1 1 0,1 3-6 15,-1 3-5-15,0 3-12 0,-1 2-11 0,1 3 0 0,-2-1-7 16,2 4 1-16,-1 1-7 0,0-1-9 0,-1 3-9 0,1-2-10 0,0 2-13 16,-1 0-5-16,0-2-20 0,-1 0 8 0,0-1-1 0,0 0 7 15,-1-1 11-15,1 0-30 0,-2-2-3 0,0-2-2 0,0-1-9 0,0-3-4 16,-1-3-38-16,0 0-19 0,-1-2-18 0,0-2-31 0,0-1 19 0,0-3-15 15,-1-3 3-15,1-2 23 0,-2-1-9 0,0-3 12 0,0 0 12 16,0-3 4-16,0-2 21 0,0-1 6 0,1-1 23 0,0 0 19 0,0-3 12 16,1-1 24-16,0 1-6 0,1-2 16 0,1 1 15 0,-1-2 11 0,0 0 20 15,1-1 9-15,0 0 3 0,1-2 7 0,1 1-2 0,1 1-5 16,0-1-5-16,1 1-11 0,0 2-13 0,2 0-13 0,0 1-16 0,1 3-6 16,2-1-8-16,1 3-4 0,2 1-2 0,0 4-2 0,1 2 7 0,0 2 3 15,0 2 1-15,1 3 8 0,2 0 8 0,1 3-15 0,-1 2 9 16,2 0-1-16,0 2-8 0,1 1 6 0,-1 2-4 0,1 1 6 0,1 1 2 15,-1 1 12-15,2-2-6 0,-1 3-5 0,0-2 2 0,-1 0-10 16,-1 0-6-16,0-2-20 0,-1-1 0 0,-3-1 0 0,1-1 0 0,-3-2 0 16,-1-1 0-16,-2-2 0 0,-1-1 0 0,-1-1 0 0,-2-3 0 0,0 0 0 15,0-3 0-15,-2-2 0 0,1 0 0 0,0-3 0 0,0 0 0 16,0-2 0-16,0-3 0 0,0 0-6 0,0-1-2 0,0 0 2 0,0-1 10 16,1 0 2-16,-1-1-8 0,2-1 2 0,-1 2-16 0,2 2-14 15,1-1-14-15,0 1-19 0,0 1-17 0,2 1-18 0,0 2-14 0,0 1-24 16,-1 2-24-16,0 2-27 0,0 2-17 0,-1 3-29 0,0 2-32 15,-1 3-64-15,0 2-124 0,-1 2-129 0,0 2-203 0</inkml:trace>
+  <inkml:trace contextRef="#ctx0" brushRef="#br0" timeOffset="-183549.31">27830 15786 1729 0,'4'9'321'16,"1"1"-125"-16,0 1-46 0,1-1-33 0,1-2-6 0,-2 0-6 0,3 0-30 15,1 0-5-15,-1 0-18 0,3 0-2 0,-1-2-4 0,1-1 4 0,2-1 7 16,-2-1 7-16,1-1-2 0,-3-2-1 0,2-1-7 0,0-2 8 16,-1-1 11-16,0 0-11 0,-1-3 3 0,-2-1-4 0,0-1-10 0,0-2 5 15,0 1-15-15,-1-2-8 0,-1-2-8 0,-1 0-9 0,1-1-3 16,-2-3-1-16,-1-1-6 0,-1 0-2 0,-2-1-2 0,-1 1-6 0,-1-1 0 16,-3 2 2-16,-1 1-10 0,-2 1 0 0,-1 1-1 0,0 3 5 0,-2 1-4 15,-1 3-5-15,0 1-14 0,-2 3-14 0,1 2-6 0,-3 1-18 16,-1 2-12-16,0 2-23 0,1 2-39 0,0 3-37 0,1-1-61 0,2 1-90 15,1 0-149-15,2-1-242 0,2 2-249 0</inkml:trace>
+  <inkml:trace contextRef="#ctx0" brushRef="#br0" timeOffset="-172014.81">22208 17928 2612 0,'-3'6'99'0,"-1"-1"-40"0,1 2-5 16,-1 1-14-16,0 1 7 0,-1 3-20 0,2 0-30 0,-1 2-1 16,1 3-1-16,1 1 5 0,0 2 11 0,0 1 26 0,2 1-13 0,0 2 3 15,2 0-23-15,1-1-33 0,2 1 3 0,1 0-8 0,1-1 3 0,2 0 0 16,1 0-6-16,0-2 12 0,-1 1 10 0,2-2 5 0,0 1 2 16,0-1 9-16,-1-1 3 0,1 1-13 0,-2 0 14 0,1 0-18 0,-1-2 3 15,0 2 15-15,-1 1-21 0,-1-2 6 0,-1 2 8 0,-1 0-11 16,-1 0 2-16,0 1 0 0,-2-1-11 0,0 1 71 15,-1 0 10-15,-1-1-19 0,-1 1 5 0,0-1-67 0,-1-1-3 0,-1 0 4 0,1 0-37 0,-1-2 27 16,0 0-19-16,-1-3-19 0,1 0-13 0,0-2-56 0,0-1-12 16,0-2 4-16,1-2-29 0,1-2-7 0,-1-2-22 0,2-4-71 0,0-4-87 15,0-2-259-15</inkml:trace>
+  <inkml:trace contextRef="#ctx0" brushRef="#br0" timeOffset="-171448.81">22332 17714 1692 0,'-6'0'146'16,"1"0"-18"-16,-2 1-12 0,0-1 15 0,-1 1-17 0,1 0-31 16,2 0-40-16,1-1-25 0,0 0-15 0,3 0-8 0,1 0 7 0,2-1-1 15,3 1-13-15,0-1 13 0,3 0-7 0,3 0-2 0,3-2 16 0,1 0-5 16,3-1-3-16,4-1 5 0,2-2-4 0,2 0 6 0,4-2 5 15,1-1-9-15,3 0-4 0,3 0 10 0,1-1-9 0,3-1 6 0,1 1-6 16,2-2-8-16,2 0 19 0,2 0-3 0,1 0 8 0,2 0-8 16,1-2-5-16,2 0 6 0,2 0-2 0,1 1-3 0,0-3 3 0,2-1 1 15,2-1 3-15,2 1 1 0,1-3 1 0,2 0 0 0,2-1-5 0,2-1-8 16,3 0-2-16,3-2 9 0,1-1-4 0,2 1 2 0,3-2-2 16,13-3-5-16,67-20 7 0,-18 6 0 0,-21 9-3 0,-31 11 1 0,0 1 0 15,0-1 4-15,4 3-1 0,2 0-4 0,0 0 2 0,0 1-2 0,1 1 1 16,-1-1 2-16,1 0-6 0,3 2 10 0,-2-2-5 0,2 0 7 15,-1 1 13-15,0-1-4 0,2 2 13 0,0 1 3 0,-2 1-2 0,2 0 8 16,1 1-10-16,-1 1-12 0,2 0-3 0,2 0-5 0,-1 0 9 16,1 1-2-16,0 0-6 0,2 0-8 0,0 0-3 0,3-1 12 0,0 0-4 15,2-1 1-15,1-2-15 0,1 1 6 0,1-1 2 0,1-2 8 16,1 0 7-16,1-1-9 0,2-2 1 0,1 0-2 0,0 1 10 0,0-2 0 16,2-1 2-16,0 1 4 0,2 0-5 0,1 1 12 0,1 0 7 0,1-1-8 15,-2 1 7-15,1 0-11 0,-2 2 5 0,-2 2 12 0,-1-1-9 16,-2 2-5-16,1-1 15 0,-1 3-4 0,1 0 4 0,0 1 1 0,-1 0-25 15,0 1 6-15,1 0 0 0,-4 2-4 0,1 0-8 0,0 0-3 0,0 0-4 16,-60 6 17-16,15-2 12 0,-3 0-5 0,16-1-11 0,0 0-31 0,12 0-29 16,-50 3 90-16,6 1 3 0,7-1-16 0,7 0-16 0,1 0-66 15,5-1 64-15,0 0 2 0,7-1-20 0,-2 1-2 0,7-1 0 0,-1 1 0 16,5-1 0-16,-6 0 0 0,-1 2 0 0,-7-1 0 0,1 0 0 0,-7 0 0 0,-7 1 0 0,-7 1 0 0,-6 0 0 16,-9 1 0-16,-5-1 0 0,-8 2 0 0,-5 0 0 0,-25 1 0 0,0 1 0 0,0-1 0 0,0 1 0 0</inkml:trace>
+  <inkml:trace contextRef="#ctx0" brushRef="#br0" timeOffset="-170064.82">7831 5637 1 0,'-2'4'0'0,"-2"0"0"0,1 1 0 0,-1-1 0 0,2-2 0 16,0 1 0-16,-1-1 0 0,2 2 0 0,-1-1 0 0,0 1 0 0,1 0 0 16,0 0 0-16,1 0 0 0,2-1 0 0,-1 1 0 0,1-1 0 15,1 1 0-15,0-1 0 0,0 1 0 0,1-1 0 0,1 0 0 0,0 0 0 16,0 0 0-16,2 1 0 0,-1 0 0 0,1 1 0 0,0-1 0 0,0 0 0 16,2 0 0-16,-1 0 0 0,0 0 0 0,-1 1 0 0,1 1 0 15,0 0 0-15,-1 1 0 0,1 3 0 0,-1 1 0 0,-1 2 0 0,1 0 0 16,-3 1 0-16</inkml:trace>
+  <inkml:trace contextRef="#ctx0" brushRef="#br0" timeOffset="-169798.02">7146 9633 1 0,'4'20'0'0</inkml:trace>
+  <inkml:trace contextRef="#ctx0" brushRef="#br0" timeOffset="-169414.51">7153 9678 1 0,'2'23'0'0,"0"6"0"0,-6-20 0 0,1-2 0 0,1-4 0 16,1-2 0-16,1 0 0 0,0-1 1 0,0 0-1 0,1-1 0 15,-1 1 0-15,1-1 1 0,-1 1-1 0,1-1 0 0,-1 0 0 0,1 1 1 16,-1 0-1-16,0-1 0 0,-1 1 0 0,1-1 0 0,-1 0 1 0,0 2-1 16,-1-2 0-16,0 2 0 0,0-1 0 0,0 1 1 0,-1 0-1 15,-1 1 0-15,1 1 0 0,-1 1 0 0,1 0 0 0,0 1 0 0,0 0 0 16,-1 0 0-16,2-1 0 0,-1 1 0 0,0-1 0 0,2 0-1 0,-2 0 2 15,1 0-1-15,0-2 0 0,0 1 0 0,1-1 0 0,-1 0-1 16,1 0 1-16,0-1 0 0,1 1 0 0,-1 0 1 0,0 0-1 0,0-1-1 16,1 1 1-16,0-1 0 0,0 0 0 0,1 0 0 0,-1 0 0 0,1-1 0 15,0 1 0-15,-1 0 0 0,2-1 0 0,-1 1 0 0,0-1 0 16,1 0 0-16,-1 0 0 0,1 1 0 0,0-1 0 0,-1 0 0 0,1-1 0 16,-1 0 0-16,1 1 0 0,1-1 0 0,-1 1 0 0,0-1 0 15,1 0 0-15,0 0 0 0,0-1 0 0,1 0 0 0,-1-1-1 0,2 0 1 16,0 0 0-16,0-1 0 0,0 0 0 0,1 0 0 0,0-1 0 0,-2 1 0 15,2-2 0-15,1 0 0 0,-1 1 0 0,1-1-1 0,-1 1 1 16,1 0 0-16,-1 1 0 0,0 0 0 0,1 0 0 0,-3 0 0 0,3 1 0 16,-2-1 0-16,1 1 0 0,0-1 0 0,-1 1 0 0,0 0 0 0,-1 1-1 15,1 1 1-15,0 2 0 0,0 1 0 0,-1-1 0 0,0 0-1 16,1-3 1-16,1 0 0 0,0 0 0 0,-1 1 0 0,0-1 0 0,1 1 0 16,-1-1 0-16,1 1 0 0,-1 0 0 0,0 0 0 0,0 1 0 0,-1-1 0 15,1-1 0-15,0 1 0 0,0 0 0 0,0 0 0 0,0 1 0 16,0 0 0-16,1-1 0 0,-1 2 0 0,1-1 0 0,0-1 0 0,-1 1 0 15,0 0 0-15,1 0 0 0,1-1 0 0,1 1 0 0,0-2 0 0,0 1 0 16,1-1 0-16,-1-1 0 0,1 0 0 0,2 0 0 0</inkml:trace>
+  <inkml:trace contextRef="#ctx0" brushRef="#br0" timeOffset="-168714.52">8224 14172 18 0,'-23'26'0'0,"-3"6"1"16,-1 2-1-16,0 2 0 0,20-25 0 0,1-4 0 0,0 0 0 0,0 0 1 15,2-1 0-15,-2-1 0 0,1-3-1 0,2-1-1 0,-1 0 0 16,2-1 1-16,1 4-1 0,-1-1 2 0,1-1 0 0,0 0-2 0,1 0 2 15,0 0-1-15,0 0-1 0,0 1 1 0,0-1 0 0,1 1-1 0,0 1 2 16,-1-1-2-16,1 1 2 0,-1 1-2 0,0-1 1 0,0 1 1 16,0 0-2-16,0 0 0 0,0 0 0 0,0 0 1 0,1-1 0 0,-1-1 0 15,0 0 0-15,-1 0 0 0,0-1 0 0,0 1-1 0,0-1 1 0,0-2 0 16,0 1-1-16,1-1 0 0,0 1 1 0,1-1 0 0,-1 0 0 16,1 0 0-16,-1-2-1 0,1 1 2 0,0-1-1 0,-1-1 0 0,1 2 0 15,0-2 0-15,-1 1 0 0,1 1 0 0,-1-1 0 0,0 1 0 16,1 0 0-16,0 0 0 0,0 1 1 0,0-1-1 0,0 0 1 0,-1 1-2 15,1-1 1-15,0 1-1 0,0 0 1 0,0 0 0 0,-1 0 0 0,2 1 0 16,0 0 0-16,-2 1 0 0,2-2 0 0,-1 1-1 0,0-1 1 16,1 0 0-16,-1 1 0 0,0-1 0 0,0 0 0 0,1 0 0 0,0-1 0 15,-1 1 0-15,1 0-1 0,0 0 1 0,0 1 0 0,-1 1 0 0,1-1 1 16,0 1-1-16,0 0 1 0,0 0-1 0,-1 2 0 0,0-1 0 16,0 1 0-16,0 0 0 0,0 1 0 0,-1 1 1 0,-1-1-1 0,1 1 0 15,0 0 0-15,-1 0 0 0,1 0 0 0,-1 0 0 0,-1 0 0 16,1-1 1-16,-1 0-1 0,1 1 0 0,-1-2 0 0,1 1 0 0,0-1 0 15,0-2 0-15,1 1 0 0,-1-2-1 0,1 1 1 0,0-2 0 0,1 0 0 16,0 0 0-16,1-1 0 0,-1-1 0 0,1 1 0 0,0-1 0 16,1 0 1-16,1-1-1 0,0 1 0 0,1-1 0 0,0 0 0 0,1-1 0 15,-2 1-1-15,3-1 2 0,0 0-2 0,1 1 2 0,1-2-1 0,0 1-1 16,1-2 0-16,-2 0 1 0,1 0 0 0,1-2 0 0,0 0-1 16,1 0 1-16,0 0-1 0,0-1 1 0,1-1 0 0,1-1-1 0,0-2-1 15,1-1-1-15,-2 3-1 0</inkml:trace>
+  <inkml:trace contextRef="#ctx0" brushRef="#br0" timeOffset="-168288.96">10132 17656 1 0,'2'-1'0'16</inkml:trace>
+  <inkml:trace contextRef="#ctx0" brushRef="#br0" timeOffset="-168233.96">10135 17660 1 0,'1'1'0'0</inkml:trace>
+  <inkml:trace contextRef="#ctx0" brushRef="#br0" timeOffset="-168062.96">10119 17709 1 0,'0'1'0'0,"0"0"0"0,0 0 0 16,0 1 1-16,1 0-1 0,-1 0 0 0,1 1 0 0,0-1 0 0,1 1 0 15,-1 1 0-15,1-1 1 0,0 0-2 0,0 0 1 0,1 0 1 0,-1 1-1 16,1-1 0-16,-1 0 0 0,1-1 0 0,0 1 0 0,0-1 0 15,-1-1 0-15,0 0 0 0,0-1 0 0,0 0 0 0,-1 0 0 0,1-1 1 16,-1-1-1-16,0 1 0 0,0-2 0 0,0 0 0 0,0 0 0 16,0 0 0-16,0 0 0 0,0 0 0 0,-1 1-1 0,1 0 1 0,0-1 0 15,1 1 0-15,-1 0 1 0,0 0 0 0,1 1-1 0,0 0 0 0,0 1 1 16,1 1-2-16,-1 1 2 0,1 0-1 0,0 1 0 0,-1 0 1 16,1-1-1-16,0 1 0 0,0 1 0 0,-1-1 0 0,1 1 0 0,-1-1 0 15,0 1-1-15,0-1 2 0,-1-1-1 0,0 1 0 0,0-1 0 16,0-1 0-16,0-1 0 0,0 0 0 0,0 0-1 0,1-2 1 0,-1-1-1 15,0-1 0-15,1-2-1 0,0-2 1 0</inkml:trace>
+  <inkml:trace contextRef="#ctx0" brushRef="#br0" timeOffset="-165977.66">10084 4255 1 0,'-49'15'0'0</inkml:trace>
+  <inkml:trace contextRef="#ctx0" brushRef="#br0" timeOffset="-165564.65">9878 4267 654 0,'-93'-18'55'0,"37"11"-42"0,7 1 4 0,11 5 4 0,6 1-2 16,4 2-1-16,4-1-3 0,5 1-5 0,3 0-3 0,3-1 0 15,3 0 0-15,3-1-1 0,3 0-3 0,2 0-5 0,2 0-1 0,3 0-1 16,1-1 3-16,2 0 5 0,3-2 1 0,2-2-2 0,3-2 0 0,3-4-3 16,5-1-1-16,4-3 3 0,5-2 4 0,3-3 0 0,2-2 3 15,2 0-1-15,3-1 0 0,1 2 2 0,3 1 4 0,3 1-5 0,3 0 3 16,2 2-3-16,1 0-1 0,2 2 5 0,3 1 0 0,3 0 3 16,3 0 1-16,5-2 3 0,3 0 1 0,3 3 3 0,5-1-2 0,3 1-1 15,1 2 0-15,2 2-2 0,1 2-2 0,3 4 0 0,-2 2-9 0,-1 5 1 16,-1 3-2-16,-1 3-5 0,1 2 2 0,-2 2 5 0,2 3-3 15,-2 1 8-15,1 3-2 0,0 2-3 0,-4 1-1 0,2 3 0 0,-3 1-2 16,-4 1 0-16,0 1 0 0,-3 4 5 0,-4 2-2 0,-2 1 3 0,-4 2 5 16,-4 0-6-16,-3 3 7 0,-2 2-3 0,-5 4-1 0,-2 2-2 15,-5 3 1-15,-2 2-2 0,-4 2-1 0,-2 2 4 0,-3 4-7 16,-2-2 1-16,-4 1 1 0,-2 1-5 0,-4-2 3 0,-4 1-9 0,-3 1 2 16,-5 2 2-16,-6-1-1 0,-4 3 7 0,-5 1-4 0,-6 2 1 0,-5 0-4 15,-6 0 2-15,-7-1-8 0,-3-2 7 0,-6 0 5 0,-3 0 1 0,-4-2 8 16,-6 2-5-16,-4-2-4 0,-5 0-2 0,-7 0-2 0,-5 0-2 15,-8 0-5-15,-7-1 11 0,-7 1-4 0,-8-1 2 0,-5-1-1 0,-6 0-4 16,-6-3 1-16,-2-3 2 0,-4-5 4 0,1-5 4 0,2-7 1 0,1-3 7 16,5-7-5-16,0-4-1 0,5-5-3 0,4-3-6 0,1-1 9 15,8-4-1-15,5-4 5 0,7-6 5 0,7-5-5 0,10-4 3 0,6-6-11 16,7-3-5-16,8-2 8 0,9 0-5 0,6-1-4 0,6-1 1 0,7 1-15 16,7 2-4-16,6 1-11 0,6 2-16 0,6 1-9 0,8 1-13 15,6 0-2-15,9 1-11 0,5-1-17 0,10 0-12 0,5 2-10 0,5 3-15 16,8 1-5-16,1 5 1 0,4 4 3 0,1 3 3 0,-1 7-57 15,2 4-75-15</inkml:trace>
+  <inkml:trace contextRef="#ctx0" brushRef="#br0" timeOffset="-164997.78">10392 8266 778 0,'-56'-13'-75'0,"-4"-1"131"0,-13-3 23 0,10 5 5 0,11-1-15 0,1 0-21 16,3 0-12-16,4-2-4 0,3 2 1 0,3-3-5 0,3-1-3 16,4 0-4-16,4-1-3 0,3-1 1 0,3 0-4 0,5-2-4 0,2-1-5 15,3-2 0-15,3 1-3 0,4-2 1 0,4 2-3 0,3-3-2 0,5 1-1 16,3 1 0-16,4-2 0 0,3 0 3 0,7-3-1 0,4 0-3 15,5-2 0-15,6 2 5 0,5-2 1 0,3 2 7 0,4 1 2 0,4 0-7 16,4 0 2-16,6 2-5 0,3 1 2 0,1 1-1 0,3 2-2 0,0 1 2 16,3 0-3-16,2 1 2 0,1 1 3 0,2 0 3 0,1 1 4 15,0 1-3-15,2 2 4 0,-2 2-8 0,0 4 1 0,1 3-4 0,0 3 2 16,0 2 0-16,-1 4-1 0,-2 2 1 0,-1 4 0 0,-3 4-3 0,1 4-1 16,-1 1-1-16,-2 5-2 0,0 4 6 0,-1 0-2 0,-3 4 1 15,-1 2-2-15,-2 4-1 0,-2 1 2 0,-2 2-8 0,-1 3 0 0,-3 0 4 16,-2 2-3-16,-2 0 5 0,-1 2 3 0,-1-1-5 0,-2 1 1 0,-1 1 0 15,-2 1 2-15,-3 0-1 0,-2-1 0 0,-3 1-2 0,-2 0-6 16,-3 3 2-16,-4-1 1 0,-3-1 1 0,-3 0 8 0,-5 0-2 0,-3 0 2 16,-5 1 0-16,-2 0 0 0,-4-1 2 0,-3 1 3 0,-4-1-1 15,-3 1-1-15,-4 2-4 0,-4 0 4 0,-4 0 1 0,-3 1 5 0,-6 1 6 16,-3 1-4-16,-5 0-1 0,-3 0 4 0,-4-3 1 0,-1-1 5 0,-3-4-2 16,-2-2-1-16,-4 0-9 0,-1 0 3 0,-2-2 3 0,-3-1-3 15,-3-3 8-15,-1-2-4 0,-3-3-2 0,-2-4 3 0,-1-3 0 0,-3-2 3 16,-2-4-4-16,-2-1 0 0,-1-4 2 0,-2-3-2 0,-1-4 0 0,2-2 5 15,-2-3-4-15,0-1-4 0,1-3-4 0,3-2-17 0,3-2-5 16,5 0-10-16,4 0-9 0,8 1-2 0,6 0-2 0,8 1 1 0,7 1 5 16,6 0-7-16,4 2-17 0,6 1-31 0,4 2-39 0,6 2-26 15,5 4-19-15,5 4 0 0,7 3 4 0,3 7-8 0,8 4-39 0,5 4-108 16</inkml:trace>
+  <inkml:trace contextRef="#ctx0" brushRef="#br0" timeOffset="-164331.75">12090 11490 1317 0,'-26'-20'329'0,"1"-1"-369"0,-4-3 50 0,7 0-10 0,9 3 1 0,2-3-12 16,4-3-9-16,3 0 2 0,4-5-1 0,5 0 4 0,4-3-2 0,6-4-1 16,3-2 0-16,8-4 4 0,5-1 2 0,7 0 0 0,5 0 5 15,4 2-3-15,5-2-3 0,3 5 1 0,6 1-2 0,5 2-1 0,6 2 8 16,6-2 4-16,6 1-2 0,5 0 3 0,6-2 0 0,7 1-3 0,2 0-3 15,6 0 4-15,5 1-7 0,4 3 3 0,5 0 3 0,3 1-1 16,3 1 1-16,5-1-1 0,3 2 1 0,2 1 4 0,3 1 0 0,0-1 5 16,-1 3 5-16,0-1-4 0,-3 2 3 0,-1 1-2 0,-3 2-1 0,-1 0 3 15,-2 2 6-15,-4 1 3 0,-6 2-1 0,-4 0 3 0,-6 1-3 16,-6 3 5-16,-4 1 6 0,-9 1 9 0,-1 1 9 0,-7 3 8 0,-1 2-4 16,-3-1-4-16,-5 2-6 0,2 1-10 0,-4 0-7 0,0 2-2 15,-1 1-4-15,0 2-3 0,-1 2 2 0,-1 2-4 0,0 3-2 0,-1 2 1 16,0 4-2-16,0 4 3 0,0 2-3 0,-1 2 0 0,-3 4-3 0,-1 0-3 15,-1 5 3-15,-1 3 1 0,-3 5-1 0,-1 2-2 0,-4 3-2 16,-1 3-2-16,-1 1-3 0,-2 2 0 0,0 3-2 0,-3 2 4 0,-2 3-1 16,-2 2 3-16,0 0-2 0,-3-1-3 0,-3 0-1 0,1 0-6 0,-5 0-1 15,-3 0-2-15,-1 0-1 0,-3 1 2 0,-2 1-2 0,-1-1-1 16,-5 0-3-16,-2-3-1 0,-2-2-5 0,-4 0-5 0,-2 0-9 0,-2 0-3 16,-5 0-3-16,0 1 1 0,-2 0 8 0,-2 2 0 0,-1 0 5 15,-5 1 6-15,-3 1-6 0,-3-1 3 0,-4 3-9 0,-2 1 6 0,-5-1 4 16,-4 2 12-16,-4-2 17 0,-3 0 7 0,-5-2 9 0,-2-3 4 0,-3-3-1 15,0-3-4-15,-2-4 1 0,-1-1-10 0,-3-1 1 0,-6 0-5 16,-5 1-9-16,-6 1 3 0,-8 1-11 0,-6 3 1 0,-5-1-2 0,-5-2-1 16,-4-2 8-16,0-2 2 0,-2-4 7 0,-1-4 15 0,5-4 12 0,5-6 23 15,7-2 18-15,7-5 11 0,3-6 6 0,7-1-10 0,5-2-20 16,3-2-2-16,3-2-18 0,-2-2-11 0,1 0 2 0,0-2-18 0,-1 0-1 16,0-2 2-16,-3-3-5 0,-2 0-1 0,-2-2-8 0,1-1-11 0,-1 0-12 15,-2-2-27-15,-1-1-110 0,-7-3-288 0,-11-1-381 0</inkml:trace>
+  <inkml:trace contextRef="#ctx0" brushRef="#br0" timeOffset="-163815.15">15729 13285 546 0,'8'-7'-61'0,"4"-2"19"0,5-2 38 16,6-1 16-16,3-1-2 0,2 1-4 0,5 0-2 0,3 0 4 16,5 1 1-16,2 0 0 0,2 1 3 0,3 2-6 0,3 1-1 0,6 0-4 15,5 2-2-15,6 1 0 0,5 0-3 0,9 3-2 0,5 0-3 0,9 2-5 16,8 2-7-16,6 2-27 0,12 2-40 0,6 0-162 0</inkml:trace>
+  <inkml:trace contextRef="#ctx0" brushRef="#br0" timeOffset="-155698.71">8330 5863 6 0,'-5'-2'3'0,"1"1"-1"0,-3 0-4 0,-2 2-2 0,2-1 0 16</inkml:trace>
+  <inkml:trace contextRef="#ctx0" brushRef="#br0" timeOffset="-143633.83">12366 4570 12 0,'16'-34'11'0,"1"-4"0"0,1-10 1 0,-4 3-1 0,-5 5-2 15,-3-3-7-15,-3 3-5 0,-3 0-5 0,-4 1-2 0,-4 2 1 0,-4 1-16 16</inkml:trace>
+  <inkml:trace contextRef="#ctx0" brushRef="#br0" timeOffset="-145363.51">10470 4363 1 0,'-14'-29'175'0,"-1"0"468"0,2 6 458 0,0-3-1097 0,5 11 23 0,3 3-16 16,2 5-9-16,2 0-7 0,1 2 3 0,1-1-9 0,2 0-2 0,0 0-7 15,1 0-16-15,1 2-9 0,0-2-6 0,0 0 8 0,0 1 10 16,-1 0 18-16,-1 1 11 0,0-1 7 0,0-2 11 0,-1-1 6 0,0-1 10 16,0 0 11-16,0 0 1 0,-1-1-1 0,0 0-1 0,1-1-6 0,0 0-2 15,0 1-4-15,0-1-4 0,2 0 0 0,0 0-7 0,2 1-3 16,1-1-1-16,1 0-7 0,2-1 0 0,1 1-4 0,0-1 1 0,4 0 0 16,2 2-1-16,2 0-4 0,1 0-4 0,3 0 1 0,3 0 0 15,2 0 1-15,5 0 4 0,2-2 0 0,2 1 0 0,6-1 12 0,4 0 3 16,3 0 0-16,5 1-1 0,2-1-2 0,1 1-9 0,2 0 1 0,2 3-2 15,2 1-4-15,0 2 2 0,0 1 2 0,1 2-2 0,1 0 4 16,-2 2-2-16,2 0-2 0,-1 3 1 0,0 1 2 0,0 1 0 0,0 2 4 16,-2 2 1-16,-1 2-1 0,-2 2-1 0,-2 2-9 0,-1 0 1 0,-3 4 2 15,-2 1-3-15,-4 2 8 0,-2 5-2 0,-2 0 0 0,-5 2 3 16,-5 1-3-16,-4 0 3 0,-4 2-5 0,-6 2-4 0,-3 2 6 0,-5 1-9 16,-4-1 0-16,-5 1-1 0,-5-2-3 0,-5 2-1 0,-6 2 8 0,-5-1-4 15,-4-1-3-15,-6 0 4 0,-2-1 0 0,-7-1 8 0,-1 0 6 16,-4-2 3-16,-1-1-1 0,-1-1-1 0,-3-1 2 0,-3 1 0 0,-2-1 3 15,-3 0-3-15,-3-2-1 0,-1-3-1 0,-1-2-1 0,-1-2 1 16,1-3-2-16,-1-3-1 0,2-1 0 0,1-3 2 0,-2-1-2 0,3-2-2 16,-1-2 5-16,3-3 0 0,1-2 8 0,2-3 6 0,1-2-2 0,2-2 7 15,2-2-3-15,2-1-8 0,1-3 3 0,3-1-6 0,3-1-6 16,-1-1 1-16,3-3-6 0,2 0-3 0,3-1-4 0,6-3-15 0,2 0-23 16,4-1-32-16,3-1-44 0,3 1-74 0,3 0-113 0,3-1-271 15,2-1-259-15</inkml:trace>
+  <inkml:trace contextRef="#ctx0" brushRef="#br0" timeOffset="-144829.51">14636 4276 2089 0,'-9'-54'-312'0,"-10"-18"210"0,-10-18 4 0,-11-15 26 0,-3 41 310 0,2 13-155 16,4 9 12-16,4 7-13 0,6 8-26 0,6 4-32 0,4 7-8 15,6 8-15-15,5 3-14 0,5 6-9 0,4 4-24 0,5 4-37 0,7 4-48 16,7 3-77-16,5 3-82 0,9 0-122 0,3 3-206 0</inkml:trace>
+  <inkml:trace contextRef="#ctx0" brushRef="#br0" timeOffset="-144580.51">15470 6134 1100 0,'-12'-27'248'0,"0"1"-313"0,0 0 209 0,5 11-107 0,4 10-9 16,3 3-33-16,1 2-35 0,3 2-31 0,4 2-33 0,4 0-39 0,5 2-43 15,4-1-50-15,6 0-234 0</inkml:trace>
+  <inkml:trace contextRef="#ctx0" brushRef="#br0" timeOffset="-144363.51">17467 5327 957 0,'-8'-19'129'15,"0"2"-159"-15,-1-1 147 0,2 6-75 0,3 7-7 0,0 0-12 0,1 2-20 16,-1 0-18-16,1 1-17 0,0 2-24 0,1 0-36 0,1 0-49 0,-2 0-46 16,-1 0-51-16,-1-1-148 0</inkml:trace>
+  <inkml:trace contextRef="#ctx0" brushRef="#br0" timeOffset="-143946.51">15880 6434 1918 0,'-32'-28'-129'0,"-2"2"141"0,-8-2 28 0,10 12-29 0,9 10-2 0,8 5-5 16,4 3-9-16,4 3-23 0,3 1-15 0,2 3-15 0,3 0-29 0,4 1-23 15,2 0-13-15,4 1-18 0,1 0-7 0,4-1-6 0,1-1-17 16,1-2-12-16,1-1-63 0,2-3-54 0</inkml:trace>
+  <inkml:trace contextRef="#ctx0" brushRef="#br0" timeOffset="-140229.83">14304 5696 590 0,'-16'-4'75'0,"-1"1"-6"0,-2-2-25 0,7 3-31 0,6 1-4 0,1-2-7 16,2 1-3-16,2-1-8 0,1-1 1 0,2-2-1 0,2-1 4 0,2-1 5 16,0-3 0-16,4-2 2 0,1 0 5 0,1-1 6 0,1 0 7 15,0-2 9-15,2 0 2 0,1-1 4 0,1 0 4 0,0 0 7 0,2 0 10 16,0 1 3-16,-1 1 3 0,0-1-5 0,0 1-7 0,1 2-2 0,-2 2 5 15,2 0 0-15,1 0 0 0,-1 0 3 0,1 1-4 0,2 0-4 16,-1 3-9-16,2 1-4 0,3 0-8 0,1 2-3 0,3 0-7 0,0 3-4 16,3 2-5-16,-1 1 2 0,2 3-2 0,3 1-3 0,2 0 0 0,2 2-1 15,0 0 0-15,1 2-1 0,-1 0 1 0,0 0-1 0,-2 0-2 16,0 0 0-16,-4-1-2 0,-2 1 1 0,-2 2-1 0,-2 1 1 0,-2 2 4 16,-3 1 0-16,-5 2 2 0,-2 2-2 0,-3 2 1 0,-2 4 0 15,-5 3-1-15,-3 2 1 0,-4 1-6 0,-2 4-2 0,-3-1 1 0,-5 4-5 16,-2 0 8-16,-4-1 1 0,-3 3-2 0,-3-2 1 0,-5 1-2 0,-1 0-2 15,-2-2 0-15,0-3 2 0,-2-5 1 0,-2-3 1 0,-1-3-4 16,-2-2 2-16,-1-3-3 0,-4-3 1 0,0-1 3 0,-4-2 2 0,-2-2-1 16,0-3 2-16,-1-3 4 0,1-1 3 0,-1-4 5 0,2-1 6 0,0-3-3 15,4-2 4-15,4-1-6 0,1-2 0 0,5-2-1 0,3 1-8 16,5-3 0-16,1 2-6 0,4-2-5 0,3-1-3 0,2 0-15 0,3-1-9 16,3 1-10-16,3-3-21 0,4-1-14 0,4-1-24 0,3-1-26 15,4 0-28-15,3-1-28 0,2 0-29 0,3 1-32 0,2 2-166 0</inkml:trace>
+  <inkml:trace contextRef="#ctx0" brushRef="#br0" timeOffset="-139863.53">15795 5383 616 0,'-21'-16'265'0,"3"1"-199"0,-4-1 11 16,8 4-35-16,6 5-27 0,4 2-12 0,3 2-18 0,2 1-7 15,3 2-7-15,3-1 0 0,4 1 7 0,4 0 4 0,2 1 6 0,3-1-4 16,5 2-2-16,1 0-13 0,5 0-14 0,1 2-19 0,5 0-23 0,1-1-18 16,3 1-19-16,3-1-42 0,-2 2-62 0</inkml:trace>
+  <inkml:trace contextRef="#ctx0" brushRef="#br0" timeOffset="-139763.06">16494 5916 712 0,'-28'4'271'0,"-3"1"-49"0,-12 1-66 0,1 1-77 0,-1 2-42 15,-5 2-32-15,-4 6-48 0,-4 4-96 0,-3 1-133 0,-5 3-414 16</inkml:trace>
+  <inkml:trace contextRef="#ctx0" brushRef="#br0" timeOffset="-135746.51">8091 5996 44 0,'-1'2'27'0,"-1"2"-9"0,0-1-3 0,0 1 1 0,0-1-2 0,0-1-1 16,2 1-2-16,-2 0-1 0,1-1 0 0,-1 0 3 0,1 0 4 0,-1 0-1 15,1 0 1-15,0 0-5 0,0-1-4 0,0 1-1 0,1 0-3 16,-1-1-1-16,1 1 1 0,0-1 2 0,1 0 3 0,-1 0 3 0,1 0 2 15,-1 0-1-15,0 1 1 0,1-1 0 0,-1 1 1 0,1-2 1 0,-1 2 1 16,2 0 3-16,-1 1-3 0,0-1-2 0,0 0-10 0,0 0-2 16,0 0-5-16,0 0-6 0,0-1-6 0,-1 1-12 0,2-1-9 0,-1 2-3 15,0-2 8-15,1 0-2 0,-2 0-3 0,1 0-5 0,-1 1-20 16,0 0-6-16,0-1-5 0</inkml:trace>
+  <inkml:trace contextRef="#ctx0" brushRef="#br0" timeOffset="-134913">8210 5948 184 0,'-1'-2'132'0,"1"0"-24"0,-1-2-20 0,-1 2-12 0,-1-1-21 0,0 1 4 16,-2 1-6-16,0-1-2 0,0 1 2 0,-1-1-3 0,0 0 8 16,1 1 11-16,-1 0 0 0,0 1 1 0,0-1 0 0,0 0-12 0,1 1-5 15,-1-2-4-15,1 2-9 0,1-1-3 0,0 0-1 0,1 1-5 16,0 0-4-16,1-1-2 0,0 1-6 0,0-1-1 0,1 1 11 0,0 0 0 16,1 0 4-16,0 0 1 0,1-1-8 0,0 1 3 0,-1 0 5 0,1-1-2 15,0 1 5-15,1 0-5 0,-1 1 1 0,1-1 3 0,0 0 1 16,-1 1 10-16,1-1-4 0,-1 2 1 0,1-1 3 0,1 1-2 0,-1-1 3 15,1 0 3-15,0 1-5 0,0 0-4 0,-1 1-3 0,0-1-4 16,0 1-1-16,1-1 11 0,0 1-3 0,-1-1-3 0,1 1-5 0,-1-1-11 16,1 0 0-16,-1 1 2 0,1-1-4 0,0-1 1 0,0 1-2 0,1-1-3 15,0 1 0-15,-1 0-5 0,1 0-4 0,0 0 2 0,-1 0 4 0,2 0-7 16,-2-1-1-16,1 1-4 0,1-1 1 0,0-1 8 0,0 1-4 16,0-1-2-16,1 0 2 0,0 0-4 0,0-1-1 0,0 0 8 0,1 0-3 15,0-2 1-15,-2 0 4 0,3 0-5 0,-1-1-1 0,1-1 4 16,-1 1-3-16,1-1 0 0,-2 0 3 0,1 0 2 0,-2-1 2 0,-1 1 6 15,0 0-1-15,-1 0-2 0,-1 0-1 0,-1 0 2 0,0 1-6 0,-1-1 4 16,0 2 2-16,-1 0 2 0,0 0 3 0,0 0-3 0,-1 1 0 16,0 0-11-16,-1 1 5 0,0 0-3 0,1 1-2 0,0 1 6 0,-1 0-4 15,0 2-1-15,1 0-2 0,0 2-1 0,-1-1 2 0,2 1-5 16,-1 1 11-16,1 1-8 0,1 0 2 0,0 2 0 0,0 1-7 0,1 1 11 16,-1 0-4-16,1 1 2 0,1 2 4 0,-1 0-5 0,2 1 1 0,-1 1-6 15,0 0 1-15,2 1 1 0,0-4 3 0,1 1-1 0,1-1 2 16,0 1 3-16,1-1-13 0,0-1 11 0,1 0-12 0,1 1-2 0,0-1 9 15,-1 0-7-15,1-1 0 0,-1 1 10 0,-1 0-10 0,-1 0 4 0,0-1-1 16,-2-1-5-16,0 2 2 0,0-2 0 0,-1 1 4 0,-2-1-2 16,0 0-2-16,-1-2 6 0,-1 1-4 0,-1 0-10 0,-2-1 1 0,0 1-5 15,-1-2 5-15,-1 2 10 0,-1-1 1 0,-1-1 9 0,1 0 1 0,0 0-3 16,0-1 2-16,0 0-11 0,0-1 0 0,0 0 2 0,0-2 7 16,1 0 1-16,0 0-3 0,1-2 10 0,-1 1-1 0,1-1 3 0,1 0 11 15,0-1-8-15,1 0 1 0,0 0 4 0,0-1-9 0,2 0 3 0,0 0-3 16,1 0-5-16,0 0-7 0,1 0 4 0,0 0 0 0,1 0-4 15,1 0-4-15,0-1 0 0,2 0-6 0,-1-1 0 0,2 1 2 0,1-1-6 16,1 0 0-16,0 1 0 0,0-1-12 0,1-1-13 0,-1 1-30 16,-1 0-51-16,-1-2-61 0,0 1-90 0,0-2-99 0,0 0-162 0,0-1-363 15,1-1-196-15</inkml:trace>
+  <inkml:trace contextRef="#ctx0" brushRef="#br0" timeOffset="-134146">7838 9332 1127 0,'4'-7'540'0,"0"-3"-407"0,3-1-33 0,0-2 4 0,-1 2 9 16,2 0-2-16,-2-1-12 0,1 1-25 0,-2-2-11 0,-1-1-11 0,-1 0-8 15,1 1-1-15,-1 1-5 0,-1 0 2 0,1-1-2 0,-3 1-4 16,1 1 1-16,0 2 1 0,-1-1 1 0,1 2-4 0,0 2-2 0,-1 1 3 16,-1 1-2-16,0 2 1 0,-1 0 4 0,0 2 0 15,0 1-2-15,-1 1 0 0,2 2-5 0,-1 0 4 0,0 2-1 0,1 2 1 0,1 2-3 16,0 0-6-16,0 3-1 0,2 0 0 0,0 2-1 0,0 2-4 0,1 0 1 15,1 3-5-15,0 0-1 0,1-1-1 0,1 0-9 0,1 0 1 0,1-1-3 16,0 1 4-16,1-1-6 0,0 0 5 0,2 1-3 16,1-1-7-16,-1-1 3 0,2-1-4 0,-2 0 6 0,1 1-2 0,0-1-1 0,-2 0-1 15,-1 0-9-15,1-1 0 0,-3-1-2 0,0 0 19 0,-1 1 4 16,-2 0 3-16,-1 0 5 0,0-1-23 0,-3 1 1 0,-1-1-5 0,-2 1-7 16,-1-3-4-16,0 0-6 0,-2-1-1 0,-1-1-11 0,0-2-3 0,-2-2 9 15,1-2 11-15,-1-1 16 0,0-2 5 0,0 0 5 0,-1-1 1 16,2-1-6-16,-1-1 13 0,1-1 5 0,0 0 2 0,0-2 18 0,0-1 0 15,1 0 8-15,0-2 3 0,1 2-5 0,0-1-6 0,1 2-5 0,2 0-5 16,1 2-5-16,1 0-4 0,0 2-4 0,1 0-3 0,1-1-7 16,0 2 1-16,1 1-4 0,1 0-2 0,1 0 0 0,1 0-3 0,1-1-16 15,0 1-24-15,1 0-44 0,1-1-74 0,2 0-93 0,0-2-111 16,1 0-181-16,1-1-748 0</inkml:trace>
+  <inkml:trace contextRef="#ctx0" brushRef="#br0" timeOffset="-132646.49">9367 12945 1035 0,'4'-1'273'0,"1"1"-110"0,1-1-25 0,0-1-9 15,0-1-13-15,0-1-13 0,1-1-25 0,0 0-11 0,0-1-10 16,-2 0-8-16,2-2 1 0,-2-1-4 0,3-1-5 0,-1 0 0 0,1 1-4 15,0-2-3-15,-1 1 4 0,-1-3-8 0,-1 0 2 0,0 0 3 0,0-1-3 16,-2 3 6-16,1-1 1 0,-2 0 5 0,0 0 4 0,0 1 1 16,-1 4 0-16,-1-1-2 0,-1 2-4 0,-1 1-2 0,-1 1 2 0,-1 1-8 15,0 1 10-15,0 1-8 0,0 1 4 0,-1 1 0 0,1 2 2 16,-2 1 7-16,1 0-3 0,-1 2-6 0,0 0-8 0,0 2-6 0,1-1-4 16,1 1 5-16,1 2-12 0,1-1-4 0,1 1-1 0,1 0-7 15,0 0-1-15,0 1 5 0,1 1-6 0,1 1 3 0,0 1-1 0,1-1-4 16,2 0 0-16,0 1-4 0,1 0 4 0,1 1-3 0,-1-1-1 0,2 1 8 15,-2 1-4-15,2 0 5 0,0-2-7 0,0 2 2 0,1-1 2 16,1-1-2-16,-1-2 4 0,0 2-10 0,0 0 1 0,0 1-8 0,-1-2 7 16,1 1-5-16,1-2 7 0,0 0-4 0,-1-2-1 0,1-1 4 0,0-1 1 15,0 0 4-15,-2 0 4 0,-1 0-4 0,-1-1 9 0,-3-1-4 16,2 0 3-16,-2-2 3 0,0 0-11 0,-2-1 8 0,0 0 1 0,0 0 6 16,-2-1-4-16,-2 0 1 0,0-1-3 0,-2 0-1 0,-1-1 5 15,-2 1 4-15,-2-1-6 0,-3 0 5 0,-2-1-9 0,0 1 16 0,-1 0 8 16,0 0-2-16,1 0 13 0,2 1-9 0,-1 1 4 0,2 0 5 0,0-1-7 15,1 0-7-15,2-1-6 0,0-1-14 0,2 0 0 0,-1-1 2 16,2-1-10-16,0-1 2 0,1-1-6 0,2 1-12 0,2-2-6 0,1-1-30 16,2-1-32-16,1-2-50 0,2-1-66 0,2-2-83 0,2 1-108 0,2-2-189 15,1-1-472-15,5-1 111 0</inkml:trace>
+  <inkml:trace contextRef="#ctx0" brushRef="#br0" timeOffset="-131660.47">12915 15940 2053 0,'-5'8'359'15,"-1"-1"-257"-15,0 1 8 0,2-4 8 0,2-2-26 0,1-2-30 0,1-1-32 16,2 0-14-16,1 0-6 0,-1-2-3 0,1-1-7 0,-1-1-6 0,0-1 5 15,0-1-8-15,0-2-1 0,0 1-15 0,-1-2-12 0,1 0 12 16,-1-2 0-16,0 0 8 0,0-1 6 0,0-1-7 0,-1 1 18 0,0-1 0 16,1-1 1-16,-1 0 6 0,0 0-7 0,0-1 1 0,0 2 4 0,1 0 4 15,0 1 9-15,0 4 2 0,-1-1 1 0,1 2 3 0,1 1 3 16,-1 2 2-16,1 2-1 0,-1 0 0 0,1 2-4 0,-1 1 7 0,1 1 0 16,0 2-2-16,0 2-6 0,1 2-4 0,1 3-1 0,-1 1-4 0,2 2 2 15,0 2-7-15,-1 3 3 0,1 3 1 0,-1-1-5 0,-1 1 17 16,0 0-3-16,-1 2 3 0,2 1 7 0,-1-1-1 0,0 1 15 0,0 0 1 15,-1-2 11-15,0 1-19 0,-2-1-4 0,0 0 7 0,-1 1-10 16,-1-1-9-16,-1 1-4 0,-1 1-12 0,-2-3-1 0,0 1-4 0,-1-1-12 16,0-3-12-16,0 2-45 0,-1-2-41 0,1-2-77 0,1 1-103 0,2-1-104 15,3 1-250-15,2-3-663 0</inkml:trace>
+  <inkml:trace contextRef="#ctx0" brushRef="#br0" timeOffset="-130412.47">19008 17454 1043 0,'4'1'162'16,"-1"0"-59"-16,1 1-12 0,0-1-11 0,2 1-22 0,0-1-30 15,1 0-23-15,-1 1-14 0,0-1 0 0,-2-1-6 0,2 0-8 0,-1 0-4 16,0 0-8-16,-1 0-2 0,-1 0 7 0,1-1 8 0,-1 0 4 0,1 0 15 16,-1 0 8-16,0-2 20 0,0 2 18 0,1-1 9 0,0 0 12 15,0 0 10-15,0 0 20 0,-1 0 12 0,2 0 14 0,0 0-3 0,0-1-1 16,0 1 0-16,0-1-4 0,2 0 4 0,-1 2-1 0,0-2-10 16,0 2-10-16,1-2-9 0,-2 1-5 0,2 0-10 0,0 0-5 0,-1 0-10 15,1 0-19-15,-1 0 9 0,0 1-12 0,0-1-7 0,-1 2-9 0,0 0-2 16,-1 0 2-16,0 0-7 0,0 1 4 0,-1 1-17 0,1 0 8 15,-2 0 1-15,1 0-2 0,-1 1 6 0,0 0 0 0,-1 0 9 0,0 1-14 16,0-2 14-16,-2 2 1 0,1 0-7 0,-1 0 10 0,-1 0-12 0,0 0 3 16,0 0 11-16,-1 0-7 0,-1 0-1 0,1 0-8 0,-1-2-3 15,-1 2 12-15,1-1-11 0,-1-1-1 0,0 0 5 0,-1-1-8 0,0 0 9 16,0-1 4-16,0 1-13 0,-1-2 19 0,1-1-16 0,0 1 3 0,1-2-2 16,-1 1-4-16,1-2 17 0,0 0-14 0,0 0 11 0,1 0-18 15,1-1 0-15,-1 0 0 0,2-1-6 0,-1-1 2 0,1 0 4 0,-1 0-4 16,2-1-3-16,-1-1 3 0,1 0 6 0,0 0 5 0,1-2-1 15,0 2-14-15,1-2-5 0,0-2 7 0,0 0 6 0,1-1 14 0,1 0-16 16,0-1 2-16,0-1 7 0,1-1-8 0,1 2 18 0,-1-2-17 0,1 0 2 16,1-1-2-16,0 1-14 0,3-16 9 0,2 6 6 0,-2 5-2 15,-2 4 4-15,0 5 5 0,-1-1-6 0,0 2 6 0,-1 1-4 0,0 2 0 16,-2 3-2-16,1 2 3 0,0 2 3 0,-1 2 0 0,1 1-14 0,-2 2-2 16,1 3 8-16,0 5 0 0,0 3 14 0,0 5-8 0,-2-8 5 15,1 4-9-15,-1 2 2 0,1 6 14 0,0 2-10 0,0 6 15 0,1 1-19 16,-1 7 10-16,0 4 7 0,0 1-5 0,0 1 0 0,-1 4 0 15,0 0-6-15,1 2 6 0,-1-1 10 0,-1-25-6 0,1 3-20 0,-1-1 0 16,1 2-40-16,-1 1-77 0,1 0-48 0,-1 0-90 0,0 1-163 0,1-1-281 16,0 0-482-16,1-2 232 0</inkml:trace>
+  <inkml:trace contextRef="#ctx0" brushRef="#br0" timeOffset="-127029.18">12073 4885 1144 0,'-3'-4'112'0,"3"0"-39"16,-1 0-42-16,3 2-14 0,0-1-4 0,1-1-3 0,0 1-3 0,0-1-9 16,0 1-4-16,0 1-4 0,-2 0-1 0,0 0 4 0,0-1-1 15,-1-1 2-15,-2 0 3 0,1-2 2 0,-2 0 3 0,2-1 4 0,-3 0 4 16,1-1 4-16,0 0 7 0,-1 0 4 0,1 1 7 0,0-1 6 0,0 2 5 16,2-1 5-16,-1 1 0 0,1 0 1 0,-1 1-9 0,1 2-2 15,1 1-13-15,0 1-12 0,2 1-8 0,-1 2-11 0,2 0-1 0,-1 2 0 16,1 2 2-16,1 1 0 0,1 2-1 0,0 1 1 0,2 0 3 15,-1 0-1-15,2 2 3 0,-1 0-3 0,2 0 5 0,0-1-1 0,0 0-2 16,0 1 3-16,-1-1-3 0,1 1 1 0,-2-1 0 0,1 1 4 0,-1-3 5 16,1 2-1-16,-1-1 5 0,0-1 1 0,1 1 2 0,-2-1 6 15,0-2 1-15,-1 1 2 0,2 1-5 0,-1-1-1 0,0 0 1 0,-1-1-5 16,0-1 2-16,-1 0-2 0,1-1-7 0,0 0-1 0,-2-1 0 16,1-1 2-16,-2 1-4 0,-1-2 4 0,0 1-2 0,-1-1-1 0,0 1 4 15,-1-2-9-15,-1 1 9 0,1-1-3 0,-1 0 5 0,-1-1-1 0,0 1 1 16,0-1-4-16,-1 0 4 0,0-1 1 0,0-1 0 0,0 1 6 15,0-2-7-15,1 1-1 0,1 0-5 0,-1-1-1 0,1 0-5 0,1 0-5 16,0-1-2-16,1 0-5 0,0 1-4 0,2-3-1 0,0 1-9 0,1-1-9 16,2 1-12-16,0-1-26 0,2 0-40 0,2 0-73 0,0 0-116 15,3 0-252-15,1-1-68 0</inkml:trace>
+  <inkml:trace contextRef="#ctx0" brushRef="#br0" timeOffset="-126395.63">13290 6249 1792 0,'-7'-7'125'0,"2"2"-98"0,0-1-41 0,6 4-16 0,4 1 9 0,0 0 7 15,3 0 3-15,0 0-3 0,0 0-13 0,0 1-8 0,0 0 1 0,-1-1 10 16,0 0 8-16,-1 0 13 0,1-1 5 0,0-2 4 0,-1 0-1 15,1-1 7-15,-1-2 4 0,0 2-1 0,-2-3 8 0,2 0 1 0,-2 0-2 16,0-1 6-16,0 1-3 0,-1-1-2 0,1 1 0 0,-2-1-2 0,0 1 2 16,-1 0 1-16,1 1-3 0,-1 1 0 0,-1 1-4 0,1 0 0 15,-1 0 0-15,0 2-10 0,0 0-1 0,0 1-8 0,0 2 2 0,0 0 0 16,0 0 3-16,0 0 0 0,0 0 1 0,0 1 4 0,-1 1 5 0,1 0 2 16,0 2 0-16,0 2 2 0,0 0-6 0,1 3 2 0,0 1-1 15,-1 1-4-15,1 1 3 0,0 2-2 0,1 1-4 0,-1 2 3 0,1 0 2 16,0 3-5-16,0 1 2 0,0 1-2 0,1 1-2 0,0 1 0 0,-1 0-3 15,1 1 6-15,-1-1 1 0,0 2-1 0,0 1 3 0,1-1-9 16,-1 0-4-16,1 0 1 0,0 0-3 0,0-1-9 0,0 0-9 0,0 0-15 16,-1-2-32-16,1 0-28 0,-2-2-33 0,0-4-42 0,-2 0-36 15,0-3-55-15,-2-1-80 0,-1-4-309 0</inkml:trace>
+  <inkml:trace contextRef="#ctx0" brushRef="#br0" timeOffset="-125862.58">11352 6563 928 0,'-4'-2'221'0,"1"1"-122"0,0 0-47 0,3 1-18 0,0 1 1 0,1-1 1 15,0 0-4-15,1 1-8 0,0 0-10 0,0 0-10 0,0 0-1 16,0 1 2-16,0 0-4 0,0 0 2 0,-1 1 3 0,1-1-4 0,0 0 2 16,1-1 2-16,0 0 0 0,0 0 7 0,-1-2 8 0,0 1 1 15,2-1 6-15,0-2 1 0,0 0 1 0,1-1 2 0,-1 0-5 0,0-2-1 16,0 0-9-16,0-2 0 0,0 0 0 0,1 0-1 0,-1 0-2 0,0-1-6 16,1 0-3-16,-2-2 2 0,-1 0 2 0,1 0 3 0,-1 1 0 15,-1-1 2-15,1 2 4 0,-1 0 3 0,0 0 0 0,-2 1 7 0,2 1-3 16,-2 1 3-16,1 0-1 0,1 1-6 0,-1 2 1 0,1 1-7 15,-1 1-7-15,0 1-4 0,0 1-1 0,0 1 4 0,0 0 5 0,1 3-1 16,0 0-1-16,1 3 2 0,-1 2-6 0,0 1 3 0,0 3 4 0,0 0-9 16,0 3 4-16,1 0 1 0,0-2-6 0,0 2 1 0,0 1 0 15,-1 0-1-15,0 0 0 0,0 2 2 0,-1-1-4 0,2 0-1 0,-1 1 3 16,-1-1-3-16,1 0 2 0,-2 0-4 0,1 0-1 0,-1-1-1 0,0-1-7 16,0 2-14-16,0 1-37 0,0-1-57 0,-1 2-72 0,0 0-103 15,0 0-167-15,-1 0-302 0</inkml:trace>
+  <inkml:trace contextRef="#ctx0" brushRef="#br0" timeOffset="-124729.38">12069 4844 435 0,'-1'-2'76'16,"1"-1"-30"-16,0-1-18 0,1 3-12 0,0-1-11 0,0 1 0 15,1-1-4-15,-1 1-2 0,1-1 1 0,0 0 0 0,-1 1 0 0,0-1 0 16,0 1 1-16,0 0 2 0,-1 0 7 0,-1 0 5 0,1 1 7 16,-1-1 10-16,1 1 5 0,-1 0 4 0,0 0-1 0,0 1-6 15,-1 1-1-15,0 0 3 0,0 2 5 0,0 1 3 0,-2 0 1 0,1 2-2 0,-1 1-5 16,0 0-8-16,-1 2-5 0,0 2-4 0,1 1-3 0,0 2 0 15,0-1-4-15,0 4 0 0,1-1-5 0,1 1-3 0,2 1 2 0,0 1-1 16,1 1 2-16,1-3-4 0,1 1 6 0,1-1 1 0,2-2 12 0,-1 1 6 16,3 0 4-16,2-1 8 0,1-1-7 0,2 0 9 0,0-1-1 15,1-1-3-15,3-3 2 0,0-1-2 0,2-1-5 0,-1-1 0 0,1-2-6 16,0 0 1-16,-2-2-1 0,0 0-6 0,-1-1 6 0,0-2-3 16,-3 1 2-16,0-3 9 0,1-1-3 0,-1 0 3 0,0-1 0 0,1-1-2 15,-1 0-2-15,-1-1-5 0,0-1-3 0,-1-2-4 0,-1-1 1 0,-1 0 1 16,-1-2 1-16,-1 1-2 0,-2-1 0 0,1 0 2 0,-3-2-3 15,0 0-8-15,-3-2 1 0,0 1-4 0,-3-1 9 0,-1-1 8 0,-1-1-2 16,-3 1-2-16,0-2-9 0,-2 1-1 0,-3 1 0 0,0-1 1 0,-2 0 5 16,-3 1 5-16,-1 2 4 0,1 1-2 0,-1 1 0 0,0 2-5 15,2 2-5-15,-3 2-1 0,2 0-7 0,-1 2-3 0,-2 2-3 0,0 0-4 16,1 3-1-16,0 1-2 0,0 2-5 0,3 2-1 0,0 2-11 16,0 0-4-16,0 3-6 0,2 2-15 0,-1 3-13 0,2 2-33 0,2 1-33 15,1 3-28-15,1 1-38 0,1 1-52 0,1 4-59 0,0 0-122 0,1 1-301 16</inkml:trace>
+  <inkml:trace contextRef="#ctx0" brushRef="#br0" timeOffset="-124095.35">11299 6810 1662 0,'-12'-7'63'15,"0"0"-14"-15,0 0-25 0,6 3-13 0,4 3-8 0,2 0-13 0,0 1-8 16,1 0-5-16,1 0-5 0,1 2 2 0,1 0 8 0,2 1 5 16,1 1 0-16,1-1 5 0,1 0 3 0,2 0 0 0,1 0 4 0,1-1 0 15,3-2-1-15,1 2 2 0,0-2 3 0,2 0-2 0,2 0 3 0,-1-1 2 16,1 1-2-16,1-1 4 0,0 0-2 0,2-2 2 0,-2-1 3 16,0-2 8-16,0 0 3 0,-2-2 4 0,-1 0 4 0,0-2-2 0,-1-1 5 15,-1 0 0-15,-1-2 1 0,0-3 0 0,-1 1-2 0,-4-1-4 0,0-2-4 16,-1 0-6-16,-2-1-2 0,-1 0-2 0,-2 2-2 0,-2 0-4 15,-3 1 2-15,-2 0-6 0,-1 1 2 0,-4 0 1 0,-1 0-2 0,-2 0-1 16,-3 0-2-16,-1 1-2 0,-3 3 1 0,-1-1 5 0,-1 2 1 16,-1-1 0-16,-1 2 3 0,-1 0-7 0,0 2 3 0,-2 2 3 0,2 1-9 15,-1 2 6-15,2 2-8 0,3 2 7 0,-1 2-1 0,2 2-2 0,0 4-7 16,-1 2-6-16,0 2-1 0,0 2 5 0,2 1 1 0,-1 4-6 16,2 2-5-16,0 1-3 0,3 1-8 0,1 1 0 0,0 2-5 0,2 1-9 15,2 0-10-15,1 0-27 0,4-1-48 0,2-1-49 0,3-1-58 0,3 1-73 16,4-3-274-16</inkml:trace>
+  <inkml:trace contextRef="#ctx0" brushRef="#br0" timeOffset="-123628.35">13424 6460 1860 0,'-7'-5'285'15,"1"2"-234"-15,0 0-48 0,4 4-35 0,2 2 3 0,0 2-2 0,1 2 17 16,0 3 1-16,-1 1 2 0,0 2 4 0,-2 0 1 0,0 3 6 16,-2 0 7-16,-1 2 3 0,0 1 2 0,1 1-4 0,-2 3 5 0,0 0 1 15,1 1 4-15,1 0 6 0,3 0 0 0,0-1 1 0,3-2 1 0,3-1-2 16,3 0-3-16,2-2-6 0,2-1 0 0,3 0-5 0,3-3 7 16,2-3-4-16,2-2 1 0,0-3 12 0,-1-3 3 0,1-4 17 0,0-3 12 15,0-5 2-15,0-3 11 0,0-2 2 0,-1-6-6 0,1-2-2 0,-2-2-11 16,-1-3-17-16,0-2-5 0,-2-4-3 0,-1-2-8 0,-2-3 1 15,-1-1-3-15,-3 0-7 0,-3-2 2 0,-3 1 4 0,-3 0-6 0,-6-1-8 16,-3 3 11-16,-5-1-2 0,-5 0-1 0,-4 3 13 0,-6-1-9 0,-3 5 0 16,-5 2 1-16,1 6-13 0,-3 3-8 0,0 6-12 0,-2 6-5 15,-3 6-7-15,0 7-7 0,-2 7-11 0,-1 10-18 0,-1 8-28 16,-1 10-51-16,0 9-79 0,1 9-101 0,-1 9-160 0,-1 10-661 0</inkml:trace>
 </inkml:ink>
 </file>
 
@@ -229,7 +531,7 @@
           <inkml:channelProperty channel="T" name="resolution" value="1" units="1/dev"/>
         </inkml:channelProperties>
       </inkml:inkSource>
-      <inkml:timestamp xml:id="ts0" timeString="2025-07-17T10:08:29.978"/>
+      <inkml:timestamp xml:id="ts0" timeString="2025-11-03T11:02:45.658"/>
     </inkml:context>
     <inkml:brush xml:id="br0">
       <inkml:brushProperty name="width" value="0.05292" units="cm"/>
@@ -237,561 +539,108 @@
       <inkml:brushProperty name="color" value="#FF0000"/>
     </inkml:brush>
   </inkml:definitions>
-  <inkml:trace contextRef="#ctx0" brushRef="#br0">9949 10571 1300 0,'0'1'238'0,"1"2"-145"0,0 1-56 0,1 3-25 0,2 0-3 0,0 2-6 16,1 2 1-16,-1 2 3 0,-1 0-3 0,1 1-3 0,-1-1-2 16,-1 2-2-16,1 1 0 0,-1 0-9 0,0-1 1 0,-1 0-8 0,0 1 0 15,1-2 12-15,-1 0-6 0,0-1 7 0,0 0-7 0,-1-1-6 16,1 0-9-16,0-2-8 0,1 0-15 0,-1 1-10 0,-1-1 3 0,1-1-1 16,-1 0 12-16,1-2 4 0,-1-1-8 0,1 0-3 0,0-3-14 0,1-1-9 15,0-2-3-15,0-1-10 0,1 0-12 0,0-2-24 0,1-2-31 16,0-2-151-16</inkml:trace>
-  <inkml:trace contextRef="#ctx0" brushRef="#br0" timeOffset="133">10126 10617 1283 0,'-3'3'415'16,"1"1"-300"-16,0 3-78 0,3 1-26 0,1 2-6 0,2 1-2 0,0 1-3 15,1 3-4-15,1 0-12 0,0-1-15 0,1 1-23 0,1 0-55 16,0 0-57-16,2-1-45 0,-1-2-42 0,2 1-25 0,1 0-255 0</inkml:trace>
-  <inkml:trace contextRef="#ctx0" brushRef="#br0" timeOffset="683.99">19480 8975 1453 0,'4'-1'878'16,"1"-1"-793"-16,2 1-44 0,-1 1-35 0,1 1-17 0,-1 1-21 0,1 1-25 16,-1 3-21-16,-1 0-13 0,0 1 3 0,-1 0 13 0,-2-2 15 0,0 2 7 15,-2 0 11-15,0 0 3 0,0 0 3 0,-1 0 3 0,0 1 0 16,-2-1-1-16,1 0-1 0,0 0-2 0,-1 0-10 0,1-1-7 0,0 1-10 15,0 0-4-15,0-1-6 0,0 2-1 0,0-2-6 0,1 0-8 0,-1-2-9 16,2 0-10-16,-1-1-12 0,1-1-11 0,-1-2-8 0,2 0-41 16,0-2-75-16</inkml:trace>
-  <inkml:trace contextRef="#ctx0" brushRef="#br0" timeOffset="849.99">19685 8762 1936 0,'8'4'89'16,"1"2"-78"-16,4 4-88 0,-1 1-119 0,1 1-117 0,4 1-93 0,1-2-332 16</inkml:trace>
-</inkml:ink>
-</file>
-
-<file path=ppt/ink/ink4.xml><?xml version="1.0" encoding="utf-8"?>
-<inkml:ink xmlns:inkml="http://www.w3.org/2003/InkML">
-  <inkml:definitions>
-    <inkml:context xml:id="ctx0">
-      <inkml:inkSource xml:id="inkSrc0">
-        <inkml:traceFormat>
-          <inkml:channel name="X" type="integer" max="34422" units="cm"/>
-          <inkml:channel name="Y" type="integer" max="19362" units="cm"/>
-          <inkml:channel name="F" type="integer" max="4095" units="dev"/>
-          <inkml:channel name="T" type="integer" max="2.14748E9" units="dev"/>
-        </inkml:traceFormat>
-        <inkml:channelProperties>
-          <inkml:channelProperty channel="X" name="resolution" value="1000.05811" units="1/cm"/>
-          <inkml:channelProperty channel="Y" name="resolution" value="1000.10333" units="1/cm"/>
-          <inkml:channelProperty channel="F" name="resolution" value="0" units="1/dev"/>
-          <inkml:channelProperty channel="T" name="resolution" value="1" units="1/dev"/>
-        </inkml:channelProperties>
-      </inkml:inkSource>
-      <inkml:timestamp xml:id="ts0" timeString="2025-07-17T10:08:55.046"/>
-    </inkml:context>
-    <inkml:brush xml:id="br0">
-      <inkml:brushProperty name="width" value="0.05292" units="cm"/>
-      <inkml:brushProperty name="height" value="0.05292" units="cm"/>
-      <inkml:brushProperty name="color" value="#FF0000"/>
-    </inkml:brush>
-  </inkml:definitions>
-  <inkml:trace contextRef="#ctx0" brushRef="#br0">2926 4874 1587 0,'-9'-2'47'0,"2"1"-41"0,-1-1-6 16,5 2-1-16,2 1-2 0,1 0 2 0,0 2-4 0,0 0 1 0,2 2 2 16,0 2-5-16,1 2-3 0,1 3-11 0,1 1-4 0,0 2 0 15,0 2 5-15,-1 0 7 0,0 0 3 0,-1 1 6 0,0 0 2 0,-2-1 0 16,1 2-7-16,-1-1 0 0,-2 1 1 0,0-1 4 0,0 2 4 0,0 2 0 16,0-1 2-16,0 1-1 0,0-2 3 0,2 1-2 0,0-2-4 15,0 0-1-15,2-4 1 0,0 0 1 0,0-2-4 0,1-1-16 0,1-2-26 16,0-1-28-16,1-1-15 0,0-2-8 0,-1-1 6 0,0-2 13 15,0-1 8-15,-1-2 12 0,-1-2 2 0,1-1-4 0,-1-3-11 0,1-1-12 16,1-3-21-16,-2-1-200 0</inkml:trace>
-  <inkml:trace contextRef="#ctx0" brushRef="#br0" timeOffset="168.22">3433 4720 1911 0,'1'0'24'0,"3"2"-34"0,2 1 2 0,0 1 6 0,3-1 2 0,0 3-2 16,0 1-2-16,1 1-6 0,1 2-17 0,0 0-24 0,2 3-45 0,0 0-64 16,0 1-36-16,1 1-15 0,-3 0 9 0,2-2 30 0,-1 1 17 15,0-1 26-15,1-1-5 0,-2-1-114 0</inkml:trace>
-  <inkml:trace contextRef="#ctx0" brushRef="#br0" timeOffset="667.5">10257 5135 1755 0,'-1'-3'87'0,"1"1"-81"15,1 0-17-15,3 4-2 0,3 3 5 0,0 0 6 0,1 2 0 0,2 0-2 16,0 0 0-16,-1 2-4 0,0 2-11 0,0 0-6 0,-2 1-14 16,0-1-10-16,-1 1-6 0,0 0-5 0,-1-1 5 0,-1-1 1 0,0-1 5 15,-1 0 2-15,0-3-10 0,-1 1-8 0,0-1-15 0,0-1-20 16,-1-1-8-16,0 0-6 0,0 0-3 0,1-2-4 0,-2-1-1 0,1-2-65 16,-1-1-39-16</inkml:trace>
-  <inkml:trace contextRef="#ctx0" brushRef="#br0" timeOffset="835.5">10574 4954 1471 0,'4'5'149'0,"2"4"-125"0,4 4-28 0,5 6-8 0,1 2-20 15,1 2-30-15,0 2-48 0,2 1-74 0,0 1-55 0,-1 4-63 0,2-1-206 16</inkml:trace>
-  <inkml:trace contextRef="#ctx0" brushRef="#br0" timeOffset="5384.41">17424 10575 956 0,'-3'0'419'0,"0"0"-324"16,0 1-58-16,2 0-10 0,1 1-7 0,1 1-11 0,0 0-2 0,0 2-4 16,0-1 4-16,0 0 12 0,0 2 11 0,-2-2 10 0,1 2 8 15,-2 0-4-15,0-1 3 0,0 1-2 0,0-1 2 0,0 1 6 0,1-1 4 16,-1 2 0-16,0-2 6 0,1 2-2 0,-1 1 4 0,-1 0-6 15,1 2 1-15,1 1-5 0,-1 2-5 0,2-1-2 0,-1 3-16 0,0 3 0 16,1 1-4-16,-1 4 1 0,1 3 5 0,1 3-8 0,-1 4-5 16,1 1-3-16,0 5-5 0,0 5-1 0,2 3-2 0,1 5-2 0,-1 4-3 15,1 3-2-15,-1 5-3 0,1 4-1 0,1 4-4 0,-1 1 3 0,1 0-1 16,0 2 1-16,-1-1 0 0,1-2 1 0,0-3 4 0,1-4-10 0,-1-5 12 16,1-2 2-16,1-5-4 0,-2-3 14 0,2-4-4 0,-1-3-6 15,0-3 4-15,0-4 1 0,0-2-2 0,-1-4 4 0,-1-4-4 0,-1-4-5 16,-1-4-9-16,-1-3 1 0,-1-4-5 0,-1-2-9 0,-1-3-17 15,0-4-30-15,0-2-32 0,-1-5-22 0,-2-3-13 0,-1-4-2 0,-2-6-11 16,1-7-17-16,-1-9-17 0,1-5-14 0,1-5 6 0,-1-4 19 0,2-3 32 16,1-2 46-16,-1-3 34 0,2-3 28 0,1-4 16 0,2-3 5 15,0-3 5-15,1-2 6 0,1 0 0 0,1 3 2 0,0 1 10 0,0 4 12 16,0 5 43-16,-1 3 39 0,-1 3 33 0,-1 3 22 0,0 3-6 0,-1 3-13 16,-2 1-14-16,0 2-9 0,-1 1-16 0,1 2-17 0,-1 3-16 15,0 3-16-15,2 4-12 0,0-1 0 0,1 3-11 0,2 1-10 0,1 2-7 16,0 2-7-16,3-1-6 0,0 2 3 0,1 2-1 0,1 0 5 0,1 1-2 15,0 0-1-15,2 3 4 0,0 0 2 0,1 2 12 0,1 1 3 16,1 3 10-16,1 1-3 0,0 2 10 0,1 2 2 0,1 1-6 0,-1 2 4 16,1 1-14-16,1 4-3 0,0 2-2 0,0 2-10 0,2 3 8 0,0 2-6 15,-2 2-4-15,0 4-12 0,0 2 1 0,-1 1-1 0,0 3 2 16,2 1 11-16,-2 4-9 0,-1-1-8 0,0 4 3 0,-1 2 3 0,-2 3-3 16,-1 2-3-16,-2 1 1 0,1 1-2 0,-1 2 7 0,0-1 0 15,-1 2 4-15,-1 2-13 0,-1 1-3 0,-1 0 5 0,-2 0 0 0,2-2 9 16,-1-1-6-16,0 1-6 0,0-2 5 0,0-2-4 0,-1-2 0 0,1-2 2 15,-1-4-12-15,0 1-3 0,1-1-1 0,-1 0-8 0,0-3-13 16,1-5 12-16,-2-2-10 0,1-5-1 0,-1-2 8 0,-1-3-20 0,-1-4-6 16,-1-3-32-16,-2-3-46 0,0-3-50 0,-2-3-33 0,0 0-33 0,-2-3-22 15,-1-3-10-15,0-3-21 0,-1-5 6 0,-1-2 26 0,-1-4 22 16,-2-2-88-16</inkml:trace>
-  <inkml:trace contextRef="#ctx0" brushRef="#br0" timeOffset="5568.41">17558 11685 1365 0,'-19'-1'244'0,"-1"1"-68"15,-5-1-22-15,3 2-28 0,7-1-14 0,0 1-25 0,4 0-12 16,2-1 1-16,3 1-3 0,2-1-1 0,3 0-12 0,1 0-13 0,0 0-11 16,2 0-6-16,2 0 7 0,3 1 14 0,2-1 9 0,3 0 6 0,2-1-1 15,2 0-21-15,2-1-9 0,3-1-14 0,0-1-5 0,4-1-4 16,1 0-2-16,0-1-3 0,3 0-5 0,0 0 7 0,0 0-7 0,0-1-1 16,0 2-4-16,-1-1-9 0,2 1-4 0,-2-1-14 0,0 1-19 15,-1-1-21-15,-3 0-18 0,1 0-26 0,-1-2-24 0,0-1-25 16,-1 0-51-16,0-2-41 0,1-2-56 0,-1-1-53 0,0-2-30 0,0-1 4 0,-1-1-63 15</inkml:trace>
-  <inkml:trace contextRef="#ctx0" brushRef="#br0" timeOffset="5833.98">18454 10509 1982 0,'-4'-14'248'0,"1"-3"-104"0,-1-2-15 0,2 3-15 0,2 4-22 0,-1 2-17 16,2 2-20-16,-1 3-1 0,0 2-5 0,1 1 19 0,-2 1 6 0,0 2 5 15,-1 0-9-15,0 1-14 0,-1 1-8 0,0 0-4 0,0 4-4 16,-2 3 0-16,0 4 1 0,-1 4 3 0,0 2-5 0,-1 4-10 0,-1 3 3 16,1 3-14-16,-1 4-6 0,1 4-3 0,-1 4-1 0,0 4-14 15,0 4 14-15,1 2-6 0,-1 4 0 0,2 3 7 0,-1 3-5 0,0 1 2 16,2 1-14-16,2 2 4 0,0-1-13 0,3 2-32 0,1-1 6 0,1-1-25 16,4-2-2-16,2-3 19 0,1-5-14 0,1-1 5 0,2-5-6 15,2-4-2-15,0-6-4 0,1-4-19 0,1-5-21 0,1-3-25 0,1-3-35 16,-2-3-21-16,1-3-14 0,-2-2-25 0,-1-2-52 0,-3-1-9 0,1-4 9 15,-1-1 15-15,-2-4 36 0,-1-3-143 0</inkml:trace>
-  <inkml:trace contextRef="#ctx0" brushRef="#br0" timeOffset="6217.37">18678 11210 3005 0,'-7'5'318'0,"-1"0"-259"0,1 3-46 0,2 1-13 16,4 0-5-16,3 3-3 0,2 1-1 0,3 4-1 0,0 1-1 15,1 0 11-15,-2-1 0 0,-1 0 7 0,-1 2-2 0,-1-2-17 0,1 1 17 16,-1 0-3-16,1 0-2 0,1 1 14 0,0-1-14 0,1 0-1 0,2-3 1 16,0 0-4-16,1-2-5 0,1 0 5 0,1-2 1 0,3 0-6 15,1-2 3-15,1-1 3 0,2-2 1 0,2-2 2 0,0-1-6 0,-1-2-1 16,2-1 7-16,0-1 2 0,-2-2 7 0,1-1 0 0,0-2 2 0,-2-2 0 15,0-2 1-15,1 0 3 0,-1-3 1 0,1 0 1 0,-1-2-6 16,-1-1-4-16,-1 0 2 0,0-1 6 0,-1-2-2 0,-1 1-4 0,-1-1 11 16,-1-2 1-16,-2 1 9 0,-2-3 11 0,-2-1-23 0,-2 0 3 15,-2-3-8-15,-2 0-7 0,-3-2 2 0,-2 0-1 0,-2 0-3 0,-3 1-4 16,-3-1 7-16,-2 3-5 0,-2 1 10 0,-4 1 1 0,-1 4-9 0,0 1 7 16,-3 2-13-16,0 2 2 0,-1 3-1 0,1 0-9 0,1 3 8 15,-1 2-2-15,1 2-7 0,0 3-2 0,0 2-8 0,1 1-4 0,0 3 5 16,1 1-16-16,0 3-14 0,1 1-19 0,2 1-27 0,-1 0-32 0,0 2-37 15,2 0-48-15,0 2-51 0,2 0-61 0,1-2-67 0,2 0-80 0,1-2-30 16,2 0-175-16</inkml:trace>
-  <inkml:trace contextRef="#ctx0" brushRef="#br0" timeOffset="6800.71">18918 11169 1816 0,'-4'11'926'0,"1"3"-887"0,0 4-44 0,5 4-10 16,3 1-1-16,5 1-9 0,1 5-7 0,4 0-10 0,0 3-17 0,-1 1 11 15,1 1 9-15,-2 1-8 0,1 2 10 0,0 3-22 0,0 3-12 16,0 0 9-16,1 3 8 0,2-2 14 0,0-1 25 0,-2-1 6 0,2 0 6 16,-1 0 13-16,1 1-6 0,-2 1-2 0,1-3 9 0,0-1-6 15,-1 0 8-15,-1-2 4 0,0-1-7 0,-2-2 4 0,-2-3-3 0,-2-1 2 16,-3-1 4-16,-2-1 2 0,-1-1 5 0,-2-2 6 0,-2-2 1 0,-2-3-1 15,-2-2-2-15,-2-2-4 0,-2-2 1 0,-1-2 5 0,-2 1 1 16,0-3 6-16,-2-2 4 0,0-2-2 0,-1-2-6 0,0-3-7 0,-1-2-5 16,-1-1-1-16,1-2-7 0,2-1 2 0,-2-2-4 0,2-2-3 15,0-1 1-15,3-2-11 0,1-2 7 0,1 0-4 0,2-4 4 0,1-2 4 16,0-2-6-16,2-5 9 0,2-2-1 0,1-2 1 0,2-4-1 0,2 2-7 16,0-2-1-16,1-2-1 0,3-1-6 0,0-2 8 0,2 3-13 15,1-1 3-15,2 1-3 0,1 2-2 0,2 1 6 0,0 2 5 0,1 1 2 16,1 2 2-16,-2 0 8 0,2 2-2 0,0-1 0 0,0 2-5 0,0 1-5 15,1 2 7-15,1 3 3 0,-1 2 3 0,1 1 1 0,0 3-1 16,-1 1 2-16,-2 3 1 0,1 0 1 0,1 2-4 0,-2 2 1 0,0 1 0 16,1 0-1-16,-1 2-2 0,-1 1-1 0,0 0-2 0,2 3-4 0,-1 0-1 15,0 2 1-15,1 0-4 0,0 0 2 0,1 0-6 0,0 1 4 16,1 0 4-16,0 1-3 0,0-2 3 0,-1-1-6 0,2 0-5 0,1 0 7 16,-1-2 0-16,3 0 2 0,0-2 3 0,-1-1 0 0,0-1-1 15,-1-1 10-15,-1-2 3 0,0-1 4 0,-2-1 3 0,-2-2 3 0,1-1-1 16,-2 0-1-16,-1-1 2 0,-2-1 3 0,-3 0 2 0,-1 0 4 0,-2-1 2 15,-2 2 1-15,-2-3 1 0,-2 0 1 0,-3-2-1 0,-1 2-21 16,-3 0 11-16,0 0-4 0,-3 1-3 0,-3 1 16 0,0 0-18 0,-2 0 0 16,1 1-3-16,-3 2-5 0,-1 3-7 0,1 1 1 0,-2 0-5 0,-2 3-2 15,1 0 2-15,-1 2-6 0,0 1 12 0,2 2-6 0,-1 0-2 16,1 2 0-16,1 0-23 0,-1 2-2 0,0-1-5 0,1 2-10 0,0 1-11 16,1 1-13-16,2 0-23 0,1 0-29 0,1 0-29 0,1-2-55 15,3 1-66-15,3-2-58 0,1-2-81 0,2 0-69 0,2-2-30 0,1-1-242 16</inkml:trace>
-  <inkml:trace contextRef="#ctx0" brushRef="#br0" timeOffset="7083.71">20187 11343 2369 0,'9'10'88'0,"1"2"-40"0,1 2 1 15,1 0 0-15,0-2-6 0,0 0-4 0,1 0-10 0,-2-1-6 16,-1-2 8-16,-1 0-1 0,-2-1 1 0,-3-2-3 0,-2-1 1 0,0-2-6 15,-2-2-7-15,0 0 6 0,-2-2-9 0,-2-2 6 0,-2-3-7 0,-2-2-15 16,-4-2 1-16,1-1-24 0,-3-2 23 0,1-3 10 0,-1-1-1 16,2 1 22-16,-1-4-13 0,1 0 13 0,1 1 5 0,1-3-4 0,1-1-3 15,2 0-13-15,1-3-3 0,1 0 2 0,2-2-10 0,2-3-4 16,1 2-13-16,1 2-10 0,3 2 8 0,0 4 1 0,2 2 2 0,-1 4 4 16,2 2-2-16,1 1-7 0,0 1-2 0,1 2-8 0,1 1-12 0,1 1-5 15,0 0-12-15,0 1-12 0,2 1-11 0,0 2-35 0,2 1-31 16,-1 1-24-16,1 2-23 0,2 1-16 0,0 0-13 0,1 2-24 0,0 1-24 15,0 0-17-15,-2 0-8 0,1 1-122 0</inkml:trace>
-  <inkml:trace contextRef="#ctx0" brushRef="#br0" timeOffset="7300.71">20803 11172 2898 0,'-1'2'91'0,"1"2"-63"0,1 0-30 0,1 1-10 16,3 2 3-16,2 1-4 0,2 0-1 0,-2 1 11 0,1 1-1 16,-2 0 8-16,-3 1-1 0,0 0-1 0,-1 1 3 0,-1 1 0 0,0 0-3 15,0 2-7-15,0-1-4 0,0 2 1 0,-1 0-9 0,2 0-12 16,-1 0-42-16,0-2-18 0,0 1-28 0,0-1-25 0,1-1-10 0,-1 0-36 16,1 0-27-16,0-2-24 0,-1-1-28 0,1-2-19 0,-1-3-4 0,0-2 0 15,1-1-151-15</inkml:trace>
-  <inkml:trace contextRef="#ctx0" brushRef="#br0" timeOffset="7467.71">20907 10767 2608 0,'-5'-1'481'0,"0"-1"-406"0,0-1-68 0,1 0-29 0,3 2-12 0,2 0-11 15,1 1-1-15,0 0 1 0,1 0 11 0,-1 0 10 0,-1 1 2 16,0 0-10-16,-2 0-22 0,1 0-53 0,-1 0-60 0,1 1-57 0,-1 0-59 15,1 0-37-15,-1 0-43 0,1-1-21 0,-1 1-66 0,1-1 22 0</inkml:trace>
-  <inkml:trace contextRef="#ctx0" brushRef="#br0" timeOffset="7984.71">21569 10244 2701 0,'-3'0'151'16,"1"0"-112"-16,0 0-37 0,3 2-23 0,0 1 5 0,3 2 1 16,0 4-2-16,0 1 9 0,0 3 9 0,-1 0 11 0,-2 3 10 0,-1 2 11 15,-2 0-4-15,0 4-4 0,0 4-6 0,-3 4-7 0,0 5 5 0,0 2-3 16,0 1-8-16,-1 3 0 0,0 1-6 0,-1 3 1 0,1 1-13 16,0 1 11-16,1 1-10 0,0-1 1 0,2 1 7 0,1-2-14 0,1-2-7 15,1-1-8-15,2-3-2 0,2-5-1 0,1-3 2 0,2-3-2 0,1-4 2 16,1-2-17-16,1-1 5 0,-1 0 10 0,2-2 5 0,1-2 17 15,-1-2-12-15,0-4-25 0,-1-1-31 0,1-2-17 0,-2-2-27 0,-2-3-18 16,-2-2-27-16,-2-2-40 0,-1-3-61 0,-1-2-55 0,-2-4-31 16,-2-3-181-16</inkml:trace>
-  <inkml:trace contextRef="#ctx0" brushRef="#br0" timeOffset="8150.71">21170 10838 2699 0,'1'-1'95'0,"1"0"-91"0,2 1-34 0,4 0-9 0,3 1 17 0,6 0 8 16,4 0-1-16,1 0 9 0,2 0 1 0,0 1 8 0,-3 0 4 0,3-1-9 16,-1 0 4-16,-2 1-6 0,4 0 0 0,-1 0 2 0,1-1-6 15,2 0-11-15,-2-2-31 0,1 0-45 0,-1-1-58 0,3-2-66 0,-3-1-64 16,0 0-65-16,0-3-55 0,-3-2-16 0,0-2-106 0</inkml:trace>
-  <inkml:trace contextRef="#ctx0" brushRef="#br0" timeOffset="8801.73">22189 10266 3159 0,'-7'3'242'0,"0"2"-189"0,0 3-48 0,4 1-19 0,1 4-8 16,2 3-6-16,1 3 5 0,2 2 8 0,-2 3 10 0,1 1 5 0,-2 1 5 16,0 2 8-16,-1-1-2 0,0 2 1 0,0-3-2 0,-2 2-5 15,2 0 4-15,-1 1-7 0,2 0 0 0,-1 2-2 0,2-2 0 0,0 0-15 16,2-2 17-16,1-3 0 0,2 1-2 0,1-4 9 0,2 1-11 0,0-3-3 16,1-3 3-16,1 0 5 0,0-3-1 0,2-1 4 0,-1-2 1 15,0-3 8-15,0-1-2 0,-2-2 7 0,1-1 4 0,0-2-11 0,-1-1 9 16,1 0-15-16,-1-1-3 0,-2-2 13 0,1-1-11 0,0 0 5 15,1-1-2-15,0-1 1 0,0-2-1 0,1 0 4 0,-2-1-2 0,2-1-7 16,-2 1 6-16,2 1-7 0,-2-1-6 0,1 2 14 0,-1 1-7 0,-1 2 1 16,1 1 7-16,-2 2-12 0,-1 1 3 0,0 1 3 0,-1 0 6 15,-2 3-7-15,0 1-1 0,0 2-8 0,-1 1 0 0,0 1-5 0,-2 3-1 16,1 1 9-16,-1 0-7 0,0 1 10 0,0 0-6 0,0 0-2 16,2 1-1-16,0-1-6 0,1-2-1 0,0 1-2 0,2-1-1 0,1-2 11 15,0-1-9-15,1-1-2 0,0-2 6 0,0 0-2 0,1-1 9 0,-1-1 10 16,1-2-4-16,1-1-8 0,-1-1 4 0,1-1 0 0,0-1 1 0,0-2 1 15,-1 0-2-15,2-2 7 0,-2 1-3 0,1-1 6 0,-1-1-8 16,0-1 1-16,-1 0 3 0,1-1-6 0,-2 0 14 0,0-1-9 0,0 2-3 16,0-1 2-16,-2 1-6 0,1 0 6 0,-1 1-2 0,-1 1 0 15,0 2 0-15,0 1-9 0,-1 1-8 0,0 1 4 0,-1 1-2 0,0 0 4 16,0 1 17-16,0 1-14 0,-1 1 8 0,1 0-7 0,0 1-15 0,0 1 4 16,0 2-10-16,-1 0 12 0,1 0 1 0,0 1-3 0,0-1 2 15,1-1-6-15,0 1 6 0,1-2-8 0,1 0-4 0,-1-1-2 0,1-1-1 16,1-2 8-16,1 1 2 0,0-2 9 0,0 0-2 0,0 0 4 0,1-2 3 15,-1 0 3-15,1-1 2 0,1-1 6 0,0-1 1 0,2-1-3 16,0-1 1-16,1 1 1 0,0-1-1 0,0 0-1 0,0 0 5 0,1 2-3 16,-1 0 1-16,0 1 5 0,-1 1 6 0,0 1 9 0,0 2 3 15,0 2-3-15,0 2 2 0,1 1-6 0,-1 3-3 0,1 2 2 0,0 2-7 16,0 1 1-16,-1 4-5 0,0 2-7 0,-1 1 4 0,0 2-12 0,0 1 4 16,1-3-10-16,-2 1-17 0,1-1-16 0,-1-2-26 0,-2 0-38 15,1-1-131-15,-1-1-72 0,-1-1-89 0,-1 0-85 0,0-2-5 0,-1-1-337 16</inkml:trace>
-  <inkml:trace contextRef="#ctx0" brushRef="#br0" timeOffset="37186.36">20151 9812 1735 0,'-26'-3'532'0,"-2"0"-435"0,-6-3-81 0,5 1-18 0,6-2-7 15,1 1 0-15,3 1-2 0,1 0 4 0,2 1-5 0,0 1 9 0,1-1-3 16,-1 1 0-16,0 0 3 0,0-1-8 0,1 2 7 0,-1-2-4 16,0 1 4-16,0 0 7 0,0-1 0 0,-3-1 4 0,-1-1-2 0,-1 1-1 15,-1-1-4-15,-1 1-6 0,0-1-3 0,0-1-7 0,-1 1 2 16,-3-2 7-16,0 1 2 0,-1-2 5 0,-2 0 3 0,1 0-3 0,-3-1 2 15,0 1 2-15,-2-1 1 0,1 0-2 0,-3-1 3 0,0 0-5 0,-1 0 4 16,-1 1 1-16,-2 0-3 0,-1-1 7 0,-2 1-2 0,-1-1 2 16,-1 2 7-16,-1 0-5 0,-3 1 3 0,1 1-1 0,-1 0-1 0,-1 1 1 15,0 2-3-15,-1 2-8 0,-1 1-2 0,-1 1-2 0,-1 3-7 0,-1 1-4 16,-2 3-6-16,1 2-5 0,-1 0-9 0,-3 5 1 0,1 3 1 16,-3 2 0-16,1 3 12 0,-1 3-1 0,-2 1-1 0,0 4-2 0,-2 0-2 15,0 3-2-15,2 1 6 0,-2 3 4 0,2 0 0 0,1 0 8 16,1 2-1-16,1-2-2 0,0 2 7 0,2 0 1 0,1 1-2 0,1 2-2 15,2 1 4-15,2 2 1 0,0 2 7 0,2 3 2 0,0 0-5 0,3 3-3 16,2-1-5-16,1 2 5 0,0 0-5 0,2-1 5 0,1 2-3 16,2 1-7-16,2 2 0 0,2 0 5 0,2 0-2 0,2 0 8 0,3 1-3 15,3-2-5-15,2-1 3 0,2-1-3 0,5-3 1 0,0-1 3 16,4 1 2-16,2-1-3 0,4-1 3 0,2-1-1 0,2-1-3 0,3-2 4 16,3-1-4-16,1-2 5 0,2 0 1 0,2 0 0 0,2-2 4 0,1-2-4 15,3 1-1-15,1 0 6 0,0 0-9 0,2 1 3 0,2-1 3 16,1 1 4-16,2 0 5 0,1 1 7 0,2-1-3 0,2 1-3 0,0-2 3 15,4-1-6-15,-2 0 1 0,5-2-5 0,1-1-1 0,2-4 1 0,0 0-4 16,2 0 2-16,2-2 1 0,1 1 4 0,2-2-9 0,2-1-2 16,1-1 5-16,2-1-2 0,1 0 7 0,1 0 2 0,1-1-1 0,5 0-4 15,-1-4 0-15,2 0-1 0,0-2-2 0,1-3 5 0,1 0 1 16,2-2 2-16,0 0-1 0,1-3-6 0,1-1 2 0,1-2 2 0,1 0-6 16,0-2-2-16,1-2 1 0,2 1 1 0,1 0 1 0,1-3 2 0,1 0-4 15,0-1-5-15,3-2 2 0,1 2-3 0,0-1 4 0,1 0-2 16,0 1 1-16,1-1-3 0,1 0 1 0,0-1 1 0,2-1 3 0,0 2 4 15,-1-1-5-15,3 1 1 0,-1-1-2 0,1 0 0 0,1-1-5 0,0-1 4 16,1 0-1-16,1-1 5 0,0-1 1 0,1 0-4 0,0-1 4 16,0-1 1-16,1 0 2 0,-1-2 0 0,2 0 5 0,-2-3-5 0,2 0 10 15,-2-2-6-15,0 0 1 0,-1 0 9 0,-1-3-8 0,0-2 12 16,-2 1-1-16,1-4 4 0,-2 0 13 0,-2 1 0 0,2-3-7 0,-2 0-9 16,-1 0-14-16,0-1-4 0,-1 0 2 0,0-2 5 0,-3-1 4 0,2-1-4 15,-3 0 2-15,-2 1-4 0,1-3-4 0,-4 0 1 0,0-2-1 16,-1-1 4-16,-2-1-3 0,-2 0-4 0,0 0 2 0,-2-1-1 0,-2-1-4 15,-2-1 4-15,0 0-2 0,-3-1-5 0,-2-1 10 0,-1 1-5 0,-2 0 6 16,-3-1 1-16,0 2-4 0,-3 1 2 0,-1-2-3 0,-3 2 4 16,-3-1 1-16,0 2 3 0,-4 2 5 0,-1-1 7 0,-4 3-2 0,-3-2 6 15,-2 1 0-15,-2 1-11 0,-2 1 17 0,-2 0 5 0,-5 2 9 0,0-2 5 16,-5 0-2-16,-3-1-1 0,-2 1-7 0,-3-1 3 0,-3 0-12 16,-3-2-10-16,-3-1-4 0,-1-2-7 0,-4 0 1 0,-2 0-4 0,-3 1-6 15,0-2 0-15,-3-1-2 0,-2-1-9 0,-2 2 14 0,-3-1-5 16,-3-1 2-16,-1 0 10 0,-4 1-10 0,0 0 3 0,-3 1 5 0,-1 0-5 15,-2-1 0-15,-1 1 4 0,-2 0 1 0,-1 2-4 0,-3 1-1 0,-1-1-7 16,-2 1-5-16,-1-1 9 0,-2 0-7 0,-3 0 6 0,-1 0 1 16,-2 1-7-16,-2 0 0 0,-2 0-7 0,-2 2-4 0,-2 1 4 0,-1 1 4 15,-1 2 4-15,-1 1-6 0,-1 1 3 0,-1 1-7 0,1 3 6 0,-2 0-6 16,0 3-8-16,-2 3-1 0,-1 1-19 0,3 3-13 0,-2 1-9 16,2 2-3-16,2 2 3 0,1 2 0 0,0 1-26 0,1 1-61 0,0 2-56 15,3 1-44-15,1 2-79 0,0 0-99 0,-2 3-332 0</inkml:trace>
-  <inkml:trace contextRef="#ctx0" brushRef="#br0" timeOffset="52852.74">12519 6344 1112 0,'-6'-7'167'0,"0"0"-124"0,1 0-42 0,3 3-14 15,3 2 1-15,1 0-4 0,2 1 3 0,0-1 5 0,2 1 0 16,-1 0 3-16,2 0 2 0,-2 0-3 0,2 1-1 0,0 0 1 0,1 0 0 16,-1 1 2-16,1 0 3 0,0 0 0 0,-1 0 1 0,0 0-1 0,2 0 2 15,0-1 1-15,2 0-2 0,1-1 2 0,2 0 3 0,-1-1-3 0,4-1 3 16,-1 0 2-16,3 0-4 0,0-1 2 0,4-1 2 0,1 0-2 16,3 0 4-16,2-1 2 0,1 0-5 0,1-1 8 0,2 2-3 0,1-3 2 15,4 0 4-15,2 1 0 0,1-2 4 0,4 0-7 0,0 0-3 0,2-1 0 16,2 3-2-16,3-2-2 0,1 1-3 0,0 0-3 0,0 0 0 15,0 0 4-15,0 0 0 0,-1 1-5 0,0-2 7 0,0 0-6 16,-3 0-2-16,1 0 7 0,-1-1-6 0,-1-1 5 0,1 0 1 0,-1-3-4 16,0-2 4-16,0-2-1 0,0 2-3 0,-2-2 4 0,-1-1-3 0,0 2-4 15,0-2 5-15,-2 0-1 0,-2 0-1 0,-1 0 4 0,-1 0-5 0,-2 0 3 16,-1 1-1-16,-3 0-3 0,0 0 4 0,-2 1 3 0,0-2 0 16,-5 3 5-16,0-1-1 0,-4 2 3 0,-2-2-3 0,-1 0-1 0,-2 1-1 15,-2-1 1-15,-1 1 1 0,-3 0 0 0,-3 1 1 0,-1-1-1 0,-4-1-2 16,-2 1 4-16,-2-1 1 0,-1-1 0 0,-5-2-6 0,-3 0-7 15,-2-4-9-15,-2-2-3 0,-2-1 0 0,-4-2 5 0,-1 1 4 0,-2-1 7 16,-3 0 1-16,-3-2 6 0,-2 1-2 0,-3-2-5 0,-3 1-5 16,0 1-2-16,-2 1 0 0,-1-2 2 0,-3 2 0 0,-3-2-10 0,-1 1-6 15,-2 1 4-15,-3 3 4 0,-2-1 8 0,-1 3 4 0,-2 2 6 0,-1-1 2 16,0 2-1-16,-2-2 1 0,0 2-7 0,1 3-4 0,-2 1-1 16,1 2-2-16,0 2 3 0,1 1 3 0,0 2-4 0,-1 0 2 0,1 1-2 15,1 0-2-15,0 1 2 0,3 1-1 0,-1 0-1 0,2 3 0 0,0 0-1 16,1 2 2-16,0 1 0 0,0 1 3 0,1 3-2 0,-1 0 0 15,0 2 0-15,1 2-5 0,-1 2 2 0,0 1 1 0,-1 3-5 0,0 0 5 16,0 1-1-16,0 2 1 0,1 2 3 0,1 2-1 0,0 1 0 16,0 3-1-16,0-1 2 0,1 1 1 0,3 0-3 0,0-1 1 0,2 2-4 15,0 0-3-15,3 1 5 0,2 1 0 0,1-1-2 0,4 1 1 0,3-1-7 16,1 1 0-16,4-1 6 0,-1 2 3 0,2-1 3 0,3 1 2 16,-1 2-5-16,5-2-2 0,0 2 2 0,2-1 0 0,1 1-2 0,2 0 0 15,0 1-4-15,1-1 2 0,0-1 0 0,4-3-5 0,0 0-7 0,3-3-6 16,1 1-4-16,1-1 4 0,1-2 6 0,2 1-8 0,2 0-4 15,1-2-15-15,1 2-21 0,2-2-25 0,1-2-30 0,2 2-22 0,1 1-31 16,2-1-38-16,0 2-223 0</inkml:trace>
-  <inkml:trace contextRef="#ctx0" brushRef="#br0" timeOffset="79387.77">5050 6342 1677 0,'-12'-2'10'0,"0"1"-98"0,-3 1-1 15,4 2 40-15,2 0 43 0,-1 1 20 0,1-1 2 0,-1 1-24 16,0-1-48-16,0 0-32 0,0-1-23 0,0 0 12 0,0 1 32 0,-1-1 23 15,-1 0 34-15,-1-1 10 0,-1-1 17 0,-1-1 15 0,-3-2 6 16,-1 1 17-16,-2-3 8 0,1 1 10 0,-1 0 7 0,-3 0 5 0,0 0 1 16,-1 1-8-16,-1 0-7 0,-2-1-15 0,0 0-8 0,-1-1-12 0,2 0-8 15,-2 1-7-15,-1 0-7 0,-2 1-5 0,-1 0-2 0,-2 1-8 16,-1 1 2-16,-1 1 6 0,-2 2 1 0,0 0 11 0,-2 0 12 0,1 2 1 16,0 0 12-16,0 2 1 0,0 0-7 0,-1 1-3 0,1 1-9 0,0 2-7 15,1 0-4-15,0 2-11 0,-1 2-7 0,0 1 0 0,1 2 3 16,1 0 3-16,-1 4 2 0,3 3-4 0,-1 0-7 0,0 3-1 0,3 1-3 15,-1 1-1-15,4 2-2 0,-1 1 0 0,0 3-1 0,1 1 2 0,2-1-1 16,0 2 4-16,3-2 4 0,0 2-4 0,-1 2 5 0,1 2-2 16,-1 3-8-16,1 2 11 0,0 2 3 0,2 2 1 0,1 1 7 0,3 0-8 15,1-1-2-15,2-1 2 0,1-1 2 0,4 1-2 0,0 0-2 0,1-3-1 16,3 1-4-16,2-2 1 0,1 2-1 0,2-3 0 0,1 0 6 16,2 1-9-16,1-1 3 0,2 0-3 0,0 1-1 0,1 0 4 0,2 0-4 15,1-1 4-15,2-1 2 0,0-1 3 0,2-3-4 0,3 1 1 16,1-3 2-16,2-3-10 0,2-1 9 0,1-2 3 15,3-2-1-15,2 1 13 0,2-3-1 0,2 1 0 0,4-3 0 0,1-1 2 0,4-1-2 0,2-2-3 16,3 2 4-16,4-1-4 0,1-1 5 0,1 1-3 0,2-1 0 16,2-4-2-16,2 0-4 0,0-1 0 0,2-2-3 0,1-1 1 0,0-1 2 15,2-2 1-15,0-1-1 0,-1-1-3 0,2 0 2 0,-2-2 1 16,0-2 2-16,1 0 1 0,-1-3 0 0,-1 0-3 0,-1 0-1 0,-1-2 3 16,1-2 2-16,-2-2 2 0,-2-1 1 0,0-1 3 0,-3-2-2 0,-1-2 1 15,-1 0-5-15,-2-2 1 0,-2-2 2 0,-2-3 2 0,-1 0 7 16,-2-2 0-16,-2 0 4 0,-2 1 2 0,1-2-2 0,-3 1 2 0,0 1 3 15,-2-2-2-15,-2 0 3 0,-2 0-1 0,-1 0-3 0,-2 0-3 0,0 3-2 16,-1-1-11-16,-2 1 6 0,-1 2-3 0,-1-1 4 0,-4 1 7 16,0 1-11-16,-1 0 0 0,-2-1-6 0,-1 1 5 0,-3 1 2 0,-2-1-2 15,-1-1-1-15,-1-1-5 0,-3 1 0 0,-1-3-4 0,-1-1-2 16,-3-1-6-16,-2-3-1 0,-1-2-1 0,-2-3 0 0,-1-1 5 0,-2-2-1 16,-3 1 0-16,-1-3 0 0,-2 1 0 0,-2-2 4 0,-1 1-1 0,0 0 7 15,-2 0 0-15,-2-1-2 0,-2-2-5 0,-3-1-2 0,-2 2-4 16,-2-1 3-16,-3 3 11 0,2 2 7 0,-2 1 1 0,1 1 4 0,-2 3 2 15,-1 2-11-15,-1 4-4 0,-1 1-1 0,-1 2-3 0,-1 1 4 0,0 1 5 16,-2 1-5-16,1 0-9 0,1 3-2 0,-3 3-7 0,0 3-7 16,-1 2-7-16,-2 3-4 0,2 4-9 0,-3 4-9 0,1 3-15 0,-2 4-16 15,-1 4-25-15,0 3-35 0,-1 2-47 0,0 2-77 0,-1 2-58 0,-1 3-78 16,-1 7-283-16</inkml:trace>
-  <inkml:trace contextRef="#ctx0" brushRef="#br0" timeOffset="179478.25">3321 9839 824 0,'-13'-11'34'0,"-1"-1"7"0,0-1 3 0,0 0 2 0,11 8-35 16,2 1-2-16,-1 1 10 0,0 1 12 0,0 0 7 0,1-1-1 0,-1 1-13 0,1 0-17 15,0-1-11-15,1 1-10 0,1 0-9 0,-1-1-1 0,1 1-1 0,0 0 6 16,0 0 7-16,1 1 4 0,1 0 3 0,0 0 2 0,0 0-2 16,0-1 5-16,0 0 3 0,1 1 4 0,-1-1 6 0,2 1 4 0,0-1 4 15,1-1 3-15,3 0 3 0,-1-1 0 0,1 0 3 0,2 0 2 0,2-1 1 16,2 0 2-16,-1-1 2 0,0-1 1 0,3 1 3 0,1-2 3 15,2 1 1-15,0-3 2 0,2 0-5 0,2-3 2 0,3 0 2 16,3 0 1-16,0-2 3 0,3-2 2 0,1-2-19 0,1 0 0 0,4-2 1 16,2-2-9-16,0 1 7 0,4-3-3 0,0-1-7 0,2-2 4 0,1 0-3 15,2 0-2-15,0-2 2 0,1 0-1 0,1-2 7 0,1-1-3 16,1-2 8-16,1-1 3 0,-1 0 2 0,2 0 19 0,2 0 1 0,-1 1 5 16,1-2-6-16,0 1-6 0,-2 1 1 0,1 0-4 0,0 0-8 0,-1 1-5 15,1-1-11-15,-1 1-9 0,-1 1 6 0,2-1-9 0,-2 3-6 16,0-3-1-16,-1 2-6 0,-2 0 0 0,-1 1-1 0,-1 2-14 0,-1 2-10 15,0 0-22-15,-4 2-30 0,-1-1-27 0,-3 1-35 0,-1 2-45 0,-2-1-36 16,-1 2-54-16,0-1-75 0,-2 0-63 0,0 1-291 0</inkml:trace>
-  <inkml:trace contextRef="#ctx0" brushRef="#br0" timeOffset="182111.09">3990 8824 1 0,'-31'-24'163'0,"0"-7"572"0,-9-6 585 16,11 3-776-16,-2 6-565 0,7 5 42 0,5 5-13 0,6 1-8 0,5 3 7 15,2 1-2-15,3 1-4 0,1 0-2 0,1 2-17 0,2 2-17 0,1 3-25 16,3 1-20-16,1 3-10 0,2 2 3 0,3 1 20 0,0 3 16 16,1 3 12-16,-1 3 13 0,0 2 5 0,-1 1 8 0,-1 4 6 0,1 1 2 15,-1 1 4-15,0 3 7 0,0 2 8 0,1 3 5 0,0 2 6 16,0 4 8-16,2 3 3 0,0 2 0 0,2 2 12 0,1 3-2 0,0 2-1 15,-1 1-1-15,2 2-13 0,1 2 4 0,1 3-8 0,1 3 7 0,2 1 2 16,0 4-9-16,1 0-4 0,2 3 4 0,0 4-1 0,1-1 2 16,2 5 9-16,-2 3-7 0,3 3-3 0,0 2 0 0,-1 5-8 0,0 3 12 15,1 5 1-15,-1 5 4 0,-1 4 3 0,-1 5-15 0,-1 0-15 0,-3 1 1 16,1 2 3-16,-2 1-6 0,0 3 12 0,0 1-5 0,-3 2-7 16,0-1 2-16,-2-1-5 0,-2-3-4 0,-1-3 3 0,-2-1 3 0,0-2-3 15,-1-5 2-15,-1-3-1 0,0-5-2 0,-1-6 1 0,-3-5-1 0,2-5 5 16,-1-6-12-16,0-5 0 0,0-4-6 0,-1-5-3 0,1-3 8 15,-1-6-10-15,-1-5-15 0,0-3-24 0,-1-6-38 0,-2-5-51 0,2-5-75 16,-4-4-91-16,2-5-84 0,-2-2-38 0,-2-4-3 0,1-4-71 16,-2-3 48-16</inkml:trace>
-  <inkml:trace contextRef="#ctx0" brushRef="#br0" timeOffset="182361.09">4131 12488 978 0,'-21'-8'583'0,"-1"-2"-476"0,-5-1 7 15,9 2-21-15,4 2 7 0,4 0 4 0,3 0-5 0,2 3-16 0,3-1-23 16,1 1-24-16,2 2-15 0,2 0-9 0,3 2 2 0,5 0 9 16,3 3 14-16,4 2 16 0,4 3 4 0,3 4 7 0,2 4-4 0,4 2-3 15,2 4 14-15,2 4-6 0,1 5-1 0,1 5-6 0,2 3-20 0,1 5-7 16,0 5-6-16,2 3-10 0,-1 5-6 0,2 3-2 0,1 5-2 16,-3 1 1-16,-1-1-6 0,-3-2-4 0,-2-5 2 0,-2-6 2 0,-5-6 9 15,0-7 9-15,-6-7 15 0,0-5 17 0,-1-3 14 0,-3-3 16 0,2-4-5 16,0-2-1-16,-2-3-10 0,2-3-13 0,1-2-12 0,0-3-6 15,3-2-6-15,1-3-10 0,2-2-11 0,2-2-4 0,5-3-8 0,4-4-4 16,4-5-18-16,6-4-35 0,4-9-54 0,7-6-76 0,6-5-143 16,6-9-197-16,2-4-266 0,5-7-344 0</inkml:trace>
-  <inkml:trace contextRef="#ctx0" brushRef="#br0" timeOffset="183044.09">6977 12286 3030 0,'-25'-9'44'0,"2"3"13"0,-1 0-25 0,8 7-6 0,9 2-15 0,2 4-10 15,0 3-8-15,4 7-3 0,0 6-8 0,1 9-8 0,3 5-6 0,0 5-32 16,1 6-23-16,2 5-33 0,1 4-48 0,2 5-15 0,0 5-14 15,0 3-17-15,0 7-13 0,2 4-6 0,-2 3 15 0,1 7 43 0,-2 5 55 16,-2 5 36-16,-1 2 28 0,-2 1 17 0,-1 2 12 0,1-4 12 16,-2-4 23-16,-2-4 36 0,0-8 59 0,-1-5 73 0,-1-3 55 0,-1-5 34 15,0-4-12-15,0-2-27 0,1-2-21 0,1-4-28 0,-1 0-13 0,1-2-25 16,0-2-11-16,2 0-21 0,-1-2-16 0,1-3-9 0,2-2-19 16,-1-3-7-16,2-3-10 0,1-1-8 0,1-3-12 0,1-1-9 0,1-1-17 15,1-3 7-15,3-2 2 0,2-3-7 0,2 0 11 0,1-2-18 0,4 0-5 16,4-2 3-16,1-2-2 0,6 0 5 0,-1-2-9 0,4 0 0 15,2-1 2-15,3-2-13 0,3 0 11 0,2-2-3 0,3-2 3 0,4 0 4 16,2-2 7-16,3 0 0 0,3-2 0 0,3-1 4 0,1-2-5 16,4 0 8-16,2-1-10 0,3-2-1 0,4 0 8 0,3 0-9 0,1-2 8 15,6 0-2-15,2-1-3 0,4-2 2 0,5 1-5 0,-2-1 1 0,4-1-4 16,2-1 0-16,2-1 9 0,3 0-1 0,4-1 0 0,4-2 6 16,-1 0-8-16,2-1 4 0,3-1 9 0,1 0-7 0,4 1 14 0,1-1-3 15,3 1 5-15,2 0 13 0,0 1 0 0,3 0 10 0,1 2 4 0,2 2-2 16,2 1 9-16,0 2-14 0,0 1-2 0,0 0 3 0,1 1-5 15,0 1 3-15,1 2-4 0,-2 0-12 0,-1 1-1 0,-2-1-1 0,-2-1-7 16,1 3-8-16,-2 1-2 0,0 1 8 0,-3 0-4 0,-2 0-2 16,-2 0-8-16,-6-1 2 0,-2 2 2 0,-5-1 0 0,-4-1 6 0,-2 0-8 15,-5-1-4-15,-6 0 10 0,-1-2-16 0,-6 0 2 0,-3-2 2 0,-5 1-27 16,-5-1-14-16,-6-3-28 0,-4-1-35 0,-5-2-25 0,-5-1-44 16,-5-2-44-16,-6-3-43 0,-4-2-59 0,-4-4-95 0,-7-4-98 0,-3-6-69 15,-7-7-152-15</inkml:trace>
-  <inkml:trace contextRef="#ctx0" brushRef="#br0" timeOffset="183527.09">7455 12235 3608 0,'-58'-33'24'15,"8"3"20"-15,-5-8-27 0,21 8-25 0,19 3 4 0,6 1-7 0,8-2 0 16,7 0 15-16,5-2-12 0,9 0-5 0,7-1-8 0,10 2-1 16,8-1-8-16,10 1-2 0,9 0-11 0,8-1-14 0,12 0-3 0,6 0-12 15,7 1 0-15,9 0 2 0,2 2-7 0,5 0 1 0,5 2-6 0,4-1-4 16,6 1 5-16,5 0-2 0,4-1-5 0,3 3 15 0,4 0 16 15,0 1 13-15,1 1 24 0,3 1 5 0,-1-1 9 0,2 3-1 0,0-1 10 16,1 0 6-16,0 1 3 0,-2 1 11 0,1 0 9 0,0 1 16 16,-1 1 12-16,-3-1-1 0,2 3 0 0,-5 0 1 0,-1 2 0 0,-1 2 3 15,-2 0-13-15,-2 3-6 0,-3 2-15 0,-4 3-2 0,-2 2 8 0,-4 3-11 16,-5 3 0-16,-3 1-3 0,-4 4-5 0,-4 3 8 0,-5 4 1 16,-3 4 1-16,-7 1-3 0,-3 6-3 0,-7 1 5 0,-3 6-4 0,-5 1-12 15,-6 3 15-15,-4 6-4 0,-6 2 7 0,-6 5 15 0,-5 4-19 0,-5 4 1 16,-4 4 2-16,-5 5 2 0,-2 2 11 0,-5 6-6 0,-2 4 1 15,-4 4-6-15,-1 8-7 0,-2 4 10 0,-2 5-7 0,-2 5 3 0,-1 5 0 16,-3 6-6-16,0 6-6 0,-3 2 1 0,-1 2-6 0,-1 3-5 16,-3 3 5-16,0 1 2 0,-3 2-4 0,-1-2-12 0,-1-2 0 0,-1 0-14 15,-1-4-5-15,1-2-12 0,-1-5-22 0,0-5-32 0,-2-3-44 0,0-5-53 16,-2-5-90-16,-1-2-145 0,-2-3-272 0,-4 3-566 0</inkml:trace>
-  <inkml:trace contextRef="#ctx0" brushRef="#br0" timeOffset="183861.09">8546 13255 2122 0,'-27'-14'-6'15,"1"0"-28"-15,-5-2 1 0,12 3-55 0,5 2-39 0,5 0-52 0,2 0-55 16,2 1-32-16,2-2-29 0,-1 2-290 0</inkml:trace>
-  <inkml:trace contextRef="#ctx0" brushRef="#br0" timeOffset="184494.08">8055 12875 3135 0,'-9'-5'116'0,"3"3"-6"0,1 1-12 0,6 2-37 0,6 2-18 0,3 2-9 16,5 2-6-16,2 3 0 0,5 3-7 0,1 2-6 0,0 4 2 16,2 4-3-16,-1 0-13 0,1 6 5 0,-1 0-6 0,-3 4 4 0,0 3 6 15,-1 6-1-15,-3 3-3 0,0 2 23 0,-2 1 15 0,-1 2 3 16,-4 2 5-16,1 1-12 0,-3 1-5 0,-2 0 1 0,-1-2 6 0,-3-3-28 16,-2-2-14-16,-1-3 0 0,-1-4 0 0,-1 0 0 0,-1-5 0 0,-1-1 0 15,0-3 0-15,1-3 0 0,0-3 0 0,2-2 0 0,0-6 0 0,1-1 0 16,-1-2 0-16,1-4-2 0,-1-1-62 0,1-5-17 0,-1 0-23 15,0-2-19-15,0-2-39 0,-1-3-78 0,-1-2-93 16,-3-6-101-16,0-6-99 0,-2-6-73 0,-1-9-348 0</inkml:trace>
-  <inkml:trace contextRef="#ctx0" brushRef="#br0" timeOffset="184645.08">8092 13113 2429 0,'-13'-7'243'0,"0"1"-49"0,-2 0-24 0,6 3-43 15,5 0-9-15,1 1-24 0,3 0-19 0,2 1-16 0,1 2-14 0,3 0-6 16,1 1 0-16,5 1-3 0,2 1-5 0,3 1-10 0,5 4-6 15,1 0-9-15,4 2-1 0,3 0 1 0,1 1-4 0,3-1 6 0,1 0-3 16,3 0-9-16,2-1 1 0,0 0-13 0,0 0-7 0,1-2-9 16,-1 1-15-16,0 0-13 0,3-1-20 0,-4 0-12 0,0-1-13 0,1 0-23 15,-5-1-29-15,3-2-41 0,-3 0-58 0,1 0-39 0,0-2-40 0,-1 0-30 16,2-2-20-16,-3-1 8 0,-1-2-208 0</inkml:trace>
-  <inkml:trace contextRef="#ctx0" brushRef="#br0" timeOffset="184816.08">9338 13150 869 0,'7'-16'430'0,"1"-2"-170"0,0-3-33 16,-3 2-10-16,-2 2-5 0,-2 0-9 0,-2 2-28 0,-2 0-26 15,0-1-34-15,-1 0-19 0,-3 3-10 0,-1 1-18 0,1 2-12 0,-1 3-3 16,2 2-9-16,0 3 3 0,1 3-4 0,0 2-7 0,-2 3 1 16,2 2-1-16,-3 4 5 0,0 3 1 0,-1 5-8 0,0 3-2 0,-1 3-2 15,0 3-9-15,0 3-8 0,0 6-2 0,-1 4-7 0,-1 5-15 0,1 6 16 16,-1 3 3-16,-2 4-12 0,0 0 16 0,-1-3-24 0,1-1-22 16,2-5-11-16,1-3-41 0,1-3-30 0,3-3-40 0,3-5-46 0,3-5-56 15,4-4-59-15,1-6-37 0,3-8-13 16,1-5-11-16,0-8 30 0,4-6 38 0,-1-7-167 0</inkml:trace>
-  <inkml:trace contextRef="#ctx0" brushRef="#br0" timeOffset="184961.08">9249 13483 792 0,'7'-45'470'0,"1"-6"-106"0,1-15-58 0,-3 2-48 0,-1 4-44 16,-2-4-28-16,1-1-43 0,-2 1-35 0,5 2-24 0,0 4-25 0,3 7-9 15,5 8-3-15,-1 7-6 0,2 7-11 0,-1 7-7 0,0 7 18 0,-2 6-6 16,-2 4 17-16,1 5 9 0,-1 2-19 0,2 6 17 0,1 4-6 16,0 6-14-16,1 5-11 0,-1 7-7 0,1 4-10 0,0 5 1 0,-1 3-5 15,0 4-3-15,-1 4 0 0,1 3 3 0,-1 1-1 0,0-1-2 0,1 2-10 16,-3-1-5-16,0 0-19 0,-1 0-30 0,-3-2-40 15,1 0-60-15,1-4-86 0,0 0-99 0,1-2-117 0,0-1-97 0,0 0-336 0</inkml:trace>
-  <inkml:trace contextRef="#ctx0" brushRef="#br0" timeOffset="185246.08">9916 13510 1085 0,'0'-10'680'0,"2"0"-524"0,1-3 0 0,2 4-24 15,1 4 2-15,1 0-19 0,0 4-34 0,2 2-17 0,0 2-13 0,0 2 9 16,2 3-1-16,1 3-15 0,0 2-12 0,0 2-14 0,-1 1-7 15,-1 4-3-15,2 0-1 0,0 1-11 0,3 2 1 0,-1-1-5 0,1 0-1 16,0-1 2-16,-1-1-1 0,2-3 0 0,0 0 6 0,2-2 2 16,1-4 2-16,1-1-7 0,3-3-5 0,-1-2 6 0,0-1 1 0,-1-3 8 15,1-2 8-15,-1-1-8 0,0-3 15 0,-1 0 2 0,1-1 2 0,-2-2 6 16,0-1 1-16,-3-1 8 0,0 0-3 0,-1-2 6 0,-1 1-7 16,-2-3-4-16,0-1 5 0,-1-2-13 0,-1-1-2 0,-2-2-2 0,-2-1-3 15,-2 1 8-15,-2 0-3 0,-1 0 8 0,-2 2-2 0,-2-1 1 0,-2 2 6 16,-2-1-8-16,-3 2 4 0,-3 0-6 0,-2 0-11 0,0 4-6 15,-2 2 6-15,-2 1-5 0,1 4-5 0,-1 2-5 0,-2 4-13 0,0 3 8 16,0 2-13-16,-1 2-4 0,1 2-17 0,0 2-23 0,-1 4-15 16,3 2-28-16,-1 0-38 0,1 3-63 0,2 2-85 0,4 0-120 0,1 4-108 15,3 1-60-15,1 1-179 0</inkml:trace>
-  <inkml:trace contextRef="#ctx0" brushRef="#br0" timeOffset="185527.08">11010 13628 3332 0,'7'5'71'0,"2"3"-24"0,6 0-17 0,5 2-6 15,1-3 5-15,4 0-6 0,0 0-12 0,2-1 2 0,-2-1-19 0,-1 0-1 16,-1-2 5-16,-2-2-6 0,1 0 18 0,-2-3-3 0,-2 0-11 16,-2 0 6-16,-1-2-4 0,-1 0 4 0,-2 0 8 0,-2 0-7 0,-3 0 3 15,-1-2 2-15,-1-1-10 0,-2 0 4 0,-1-2-10 0,-2-1-3 0,-2-2-4 16,-2-2-13-16,-3-2-4 0,-3 0-1 0,-2-1 2 0,-3-1 16 15,-3 2 6-15,0 0 7 0,-1 0 6 0,-1-1-2 0,-3 1 0 0,2 0 10 16,-1 0 5-16,0 2 3 0,1 2-1 0,-1 3-10 0,2 0 0 16,1 2-2-16,0 3 1 0,2 2-6 0,1 2-4 0,0 3-9 0,2 1-6 15,0 1-12-15,2 2-21 0,0 2-32 0,0 1-59 0,2 4-76 0,0 2-122 16,2 3-161-16,0 0-140 0,0 5-387 0</inkml:trace>
-  <inkml:trace contextRef="#ctx0" brushRef="#br0" timeOffset="185695.08">11165 12568 2915 0,'-6'1'929'0,"2"3"-866"0,2 1-12 16,4 3-30-16,4 2-21 0,5 4 8 0,3 6-8 0,2 6-16 0,3 5-7 15,0 4-9-15,0 4-3 0,0 3-5 0,-1 3-24 0,-2 2-30 0,-2 4-48 16,1 0-55-16,-1 2-63 0,0 1-117 0,-2 1-178 0,-1 2-135 15,-3-1-329-15</inkml:trace>
-  <inkml:trace contextRef="#ctx0" brushRef="#br0" timeOffset="186044.08">11639 13724 2348 0,'0'-1'771'0,"1"1"-720"0,3 0-27 0,5-2-10 15,3-1 2-15,3-3 4 0,5-1-8 0,2-3-10 0,1-1-2 0,1 0-3 16,0-2-3-16,-2 0-8 0,1-1 0 0,-2-1-11 0,0 0-7 16,-1 0 6-16,-2 1-2 0,-1-1-3 0,-1 1 7 0,-2-1 1 0,-1 3 8 15,-2-1 1-15,-1 3 11 0,-2 0 4 0,-1 0 3 0,-2 1 4 0,-2 2-3 16,-2 1 9-16,-1 1 5 0,-2 1 7 0,-1 1 5 0,-2 0 1 16,0 2 3-16,-2 0 2 0,-1 2 0 0,0 1-3 0,1 1 0 0,-2 1-10 15,0 1-6-15,0 0 0 0,-1 2-9 0,-1 1 0 0,1 1 2 0,-3 3-13 16,1 0 6-16,0 2-2 0,0 2-2 0,2 1 9 0,1 1 0 15,1 0 9-15,1 2-7 0,2 2 2 0,1-1-7 0,2 2-2 0,4-1 5 16,1-2 6-16,3 2-14 0,1 0-1 0,3-1-7 0,0 1-2 16,3 1 16-16,2-2 1 0,1 0 3 0,1 0-2 0,1-2-7 0,2-1 5 15,0 0-9-15,2-4 6 0,1 1-15 0,-1-2-17 0,2-2-14 0,1-2-30 16,0-1-23-16,1-4-35 0,0-2-53 0,1-2-69 0,-1-4-46 16,-1-4-56-16,2-3-62 0,-2-5-51 0,2-4-341 0</inkml:trace>
-  <inkml:trace contextRef="#ctx0" brushRef="#br0" timeOffset="186194.08">12532 12792 2372 0,'-12'18'1679'0,"1"5"-1635"0,-1 10-44 0,6 7 0 0,7 5 0 0,4 7 0 15,5 8 0-15,4 7 0 0,2 7 0 0,1 4 0 0,1 4 0 0,-1-1-36 16,-3-1-101-16,2-1-107 0,-2-2-245 0,1 3-472 0,-1 4-508 15</inkml:trace>
-  <inkml:trace contextRef="#ctx0" brushRef="#br0" timeOffset="198561.74">17446 7279 1692 0,'-20'9'269'0,"-2"1"-261"0,-6 8-31 0,2 3-29 16,4 0-5-16,-1 4 9 0,0 2 7 0,-4 3 10 0,-3 3 5 0,-3 3 11 15,-2 3 6-15,-2 3 4 0,-1 1 2 0,-3 4 2 0,-4 1 3 16,-1 4 7-16,-2 1 5 0,-1 3 7 0,-2 2 6 0,-1 0 10 0,0 2 7 16,-4 1 6-16,-1 2-1 0,-2 2 4 0,-2 2 2 0,0-1 6 15,-2 2 8-15,-1-1 0 0,-2 1 4 0,0 2-3 0,-1-1-2 0,-2 0-3 16,1 1-9-16,-4 1 2 0,0-2 6 0,1 3 9 0,0-2 4 0,2-2-1 15,3-2-5-15,2 0-10 0,0-2-12 0,2-1 3 0,2 0-6 16,2-3-4-16,2-2 1 0,4-1-9 0,1-1-11 0,1-2 6 0,3-3-9 16,2-3-13-16,1-2 2 0,5-4-12 0,0-3 3 0,5-1-20 0,2-5 3 15,0 0-4-15,4-4-13 0,2-2 0 0,2-3-43 0,5-2-43 16,1-2-42-16,0-4-61 0,2-2-90 0,0-4-94 0,1-2-107 0,3-4-109 16,-1-4-15-16</inkml:trace>
-  <inkml:trace contextRef="#ctx0" brushRef="#br0" timeOffset="198778.73">13820 10638 3269 0,'-32'31'277'0,"1"3"-249"0,-3 6-26 15,11-5-22-15,10-6-10 0,5-3-29 0,5-2-13 0,4-1 2 0,4-2-6 16,1-2 25-16,2-1 19 0,2-2 8 0,1-4 1 0,2-2-17 16,1-3-10-16,4-1-12 0,4-4 1 0,4-2 9 0,3-3 2 0,4-4 9 15,2-3 0-15,4-3-1 0,6-5-19 0,1-4-45 0,4-2-52 16,3-4-51-16,3-3-75 0,3-5-87 0,4-2-43 0,2-4-259 0</inkml:trace>
-  <inkml:trace contextRef="#ctx0" brushRef="#br0" timeOffset="199310.73">18297 6423 2413 0,'-5'-1'1004'0,"2"1"-975"0,1 2-40 16,4 3-34-16,3 3 8 0,4 3 3 0,2 5 25 0,1 4 4 15,1 4 1-15,-2 3 11 0,-1 3-1 0,-2 5 1 0,0 3 0 0,0 5-5 16,-2 0-7-16,1 2-1 0,1-1 3 0,-2 1-10 0,1-1 9 16,0 0-24-16,0-1 10 0,1-2-3 0,0-3-8 0,-1 1-4 0,2-5-29 15,0-3-26-15,0-2-43 0,-1-4-46 0,-1-3-89 0,-2-2-95 0,-1-3-62 16,-1-3-27-16,-2-2-7 0,-1-5-111 0</inkml:trace>
-  <inkml:trace contextRef="#ctx0" brushRef="#br0" timeOffset="199477.74">18114 6216 3848 0,'-4'-5'14'0,"4"1"-70"0,4-2-25 0,10 2-2 16,5 1 15-16,8-1 33 0,3-1 22 0,2 1-2 0,0 0 4 0,2-1 5 15,-2 0-16-15,3 0-11 0,-2-1-16 0,4-1-33 0,0-1-9 0,-1 1 3 16,1-2 12-16,-4 0 23 0,1-1 6 0,-2 0 5 0,0-1-8 15,-1 1-25-15,-1-1-21 0,-2 0-34 0,0 1-30 0,-3 0-37 0,-1 3-59 16,-2 2-74-16,-3 2-45 0,-1 2-26 0,-3 3-207 0</inkml:trace>
-  <inkml:trace contextRef="#ctx0" brushRef="#br0" timeOffset="199661.73">18186 7484 3207 0,'0'-2'137'0,"3"1"-173"0,5 0-35 0,8 1-17 16,7-3 9-16,7-2 27 0,6-1 18 0,1-2 10 0,3-2 4 15,1 0 0-15,0-2-6 0,2-1-22 0,-1-3-53 0,0-1-57 0,0-4-58 16,-1-2-49-16,1-3-63 0,-2-3-31 0,-1-3-8 0,-3-1-6 0,-1-4-136 16</inkml:trace>
-  <inkml:trace contextRef="#ctx0" brushRef="#br0" timeOffset="199977.73">19361 6415 3408 0,'-11'2'72'0,"3"2"-71"0,-1 2-54 0,5 3-7 0,5 1 13 0,1 3 18 16,2 3 22-16,1 1 3 0,0 2 10 0,1 2 3 0,0 1 0 15,0 1 0-15,1 1-7 0,1 2-6 0,1 2 0 0,1 0-5 0,1 0-7 16,-1 0 7-16,0-3 0 0,1-1-3 0,0-2 8 0,0-2-6 0,-1 0-6 15,1-2 0-15,-2-4-7 0,1 0-7 0,-1-3-2 0,1-2-1 16,-1-1 2-16,2-3 2 0,-2-2-2 0,2-1 7 0,1-2 2 0,0-3 7 16,0 0 8-16,-2-3 5 0,2-2-1 0,0-2-2 0,1-1 0 15,1-3-4-15,-1 1 7 0,0-2 4 0,0-1 5 0,1 0 6 0,-1 1 4 16,-1 0 0-16,1 0 4 0,-2 1-8 0,0 1 1 0,-1 3 3 16,-1-1-3-16,2 2-2 0,0 0 4 0,0 3 1 0,0 0-3 0,0 3 0 15,-1 2-5-15,0 1-4 0,1 2 0 0,-1 1 4 0,0 3-9 0,0 1-5 16,-1 2-4-16,1 1-5 0,0 3-5 0,0 1-4 0,1 3-11 0,0 2-13 15,-2 0-9-15,2 2-38 0,-2 1-38 0,1 0-92 0,-1 0-129 16,0 0-99-16,0-3-50 0,0 1-279 0</inkml:trace>
-  <inkml:trace contextRef="#ctx0" brushRef="#br0" timeOffset="200178.15">20375 6612 3710 0,'-1'10'31'0,"2"4"-100"16,2 10-44-16,5 4-7 0,5 7 25 0,2 1 49 0,2 2 26 15,1 1 22-15,-3 0 10 0,0 2-3 0,0-1-2 0,-1 0-5 0,0 1-11 16,1-3-5-16,0-1-13 0,-1-4-39 0,0-2-39 0,-2-1-41 0,0-5-37 16,-1-3-36-16,-2-3-51 0,0-3-54 0,-3-4-7 0,-1-2 12 15,-1-3 24-15,-2-4-6 0,-1-1-210 0</inkml:trace>
-  <inkml:trace contextRef="#ctx0" brushRef="#br0" timeOffset="200412.15">20565 6310 1838 0,'-2'-6'1213'0,"1"-1"-1154"16,0-3-87-16,2 1-37 0,4-2-2 0,2 2 11 0,3-2 31 0,3 2 10 15,1 1 10-15,0 1 17 0,0 2-4 0,0 2 2 0,-1 2-1 0,0 1-6 16,0 2-3-16,-1 1 5 0,1 2 2 0,0 1-4 0,-1 2 9 15,-1 3 3-15,-1-1 2 0,-2 3 3 0,-1 2-1 0,-2 1-7 0,-1 2-1 16,-1 2-11-16,-3 0-14 0,-1 1-5 0,-2 3-5 0,-1 1-11 0,-3-1 3 16,-2 2-12-16,-1 0-2 0,-2 1 0 0,-2-1 3 0,0-1 6 15,1-1 6-15,-2-2 4 0,1 0-3 0,0 0-7 0,0-3-24 0,2 0-25 16,-1-3-37-16,1-2-49 0,1-3-34 0,2 0-15 0,2-2-4 0,0-2 9 16,2-2-2-16,1-3-13 0,1-2-7 0,1-3-175 0</inkml:trace>
-  <inkml:trace contextRef="#ctx0" brushRef="#br0" timeOffset="200728.15">20853 6487 702 0,'9'-1'493'0,"2"0"-325"0,3 1-92 16,-2 2-38-16,2 0 1 0,-1 3 14 0,3 0 7 0,-2 0 11 15,1 4-3-15,2 1-6 0,-1 1-8 0,-1 1 1 0,0 0 0 0,0-2-9 16,0 2 9-16,0 1-20 0,-1-2-4 0,1 2 5 0,0-3-12 0,-2 1 1 16,3-1-3-16,-1-1-10 0,1-1-1 0,-3 0-2 0,1-3 0 15,0 0-6-15,-2-2-8 0,1-3-1 0,-1 2-9 0,0-3 5 0,0 0-5 16,-1-1-5-16,-2-3 0 0,0 0-12 0,0-2-6 0,1-1-10 15,0-1-2-15,0 0 4 0,0-2 7 0,0 0 12 0,0-1 11 0,0-1 6 16,1-1 9-16,0 1-2 0,-1 1 7 0,1-1-2 0,-1 0 5 0,1 0 5 16,0 2 9-16,0 1 4 0,-1 0 11 0,-2 2 5 0,-1 0 6 15,1 2 6-15,-1 1 3 0,1 1-1 0,-2 2-6 0,0 1 4 0,1 0-2 16,-1 2 3-16,-1 1 0 0,0 1-11 0,0 0-6 0,1 2-12 16,0 0-9-16,0 1-1 0,0 2-12 0,1 1 4 0,0 1-1 0,0-1-6 15,0 3 7-15,0-1-6 0,-1 1-2 0,1 0-4 0,-1 0 1 0,-1 1-7 16,1 0-2-16,0 1-6 0,0-1-18 0,-1-2-28 0,1 0-36 15,-1-1-45-15,1-3-47 0,1-1-30 0,0-3-22 0,0-2-12 0,2-3 7 16,1-3 24-16,1-5 16 0,1-5 13 0,3-5-172 0</inkml:trace>
-  <inkml:trace contextRef="#ctx0" brushRef="#br0" timeOffset="200928.15">22389 5276 3265 0,'-1'2'70'0,"1"1"-129"0,1 4-44 0,1 3 9 0,3 3 40 0,0 3 54 16,1 2 28-16,-1 3 3 0,-1 5 11 0,1 1-4 0,-1 6-8 0,2 3-8 16,0 2-8-16,-1 5-5 0,2 1 1 0,-2 4-4 0,1 2 1 0,-1 4-5 15,0 0-2-15,1-1 12 0,0-2-10 0,0-2 0 0,1 0-4 16,0-2-12-16,0-2-8 0,2-4-8 0,0-2-19 0,-1-5-16 0,2-2-30 16,2-3-34-16,-1-4-31 0,0-4-26 0,2-5-27 0,-3-1-191 15,2-1 3-15,0-2 31 0,-1 1 30 0,1-2 130 0,-1-5-219 0</inkml:trace>
-  <inkml:trace contextRef="#ctx0" brushRef="#br0" timeOffset="201078.9">22317 5867 3561 0,'6'0'32'0,"4"-1"-75"0,7 0-42 0,6-1-10 0,9 0 14 15,5 0 29-15,5-1 16 0,3-1-9 0,-2 0-27 0,1 0-38 0,0-2-45 16,2-1-61-16,-1-1-51 0,1-4-64 0,1-3-82 0,2-2-29 0,-1-2-293 15</inkml:trace>
-  <inkml:trace contextRef="#ctx0" brushRef="#br0" timeOffset="201811.59">14622 16266 3161 0,'-4'0'108'0,"1"0"-9"0,1 0 7 0,1 0-36 15,2 0-17-15,2-1-33 0,3 0-16 0,4 0 7 0,5 1-3 16,4-1 5-16,2 0-3 0,5 1-9 0,2-2 5 0,4 0 7 0,4 0-9 16,5-2-6-16,5 0-3 0,3-1-1 0,5-2 13 0,3 1-5 15,2-2-4-15,4-2-1 0,5 0-3 0,2-2 10 0,7-2 1 0,4-2-12 16,6-2 14-16,5-2-8 0,5-1-3 0,6-1 21 0,3-1-17 0,7-1 11 15,5 0-3-15,2-2 1 0,5 0 16 0,3-3-4 0,4 2 2 16,5-1-17-16,1 2 13 0,2 2 3 0,4-2 7 0,1 2 4 0,1 0-8 16,4 0-3-16,0 2 3 0,2-1 7 0,0 2-16 0,1 1 12 0,-3 2-12 15,0 1-2-15,-1 3 4 0,-4 1-18 0,-2 1 0 0,-2 1 0 16,-5 0 0-16,-5 0 0 0,-2-2 0 0,-5 2 0 0,-4-1 0 0,-5 1 0 16,-8 2 0-16,-6-2-8 0,-8-1-96 0,-5-1-54 0,-8-3-65 15,-3 0-89-15,-4-4-116 0,-4-4-197 0,-2-3-191 0,-4-8-192 0</inkml:trace>
-  <inkml:trace contextRef="#ctx0" brushRef="#br0" timeOffset="202095.53">21001 14685 4095 0,'0'0'0'16,"1"0"0"-16,2 1 0 0,2-1 0 0,5-1 0 0,6 2 0 0,6-2 0 15,6 1 0-15,5 0-2 0,1 0-8 0,3 1-2 0,-2 1 8 16,-1 0 10-16,0 2-18 0,-1 0-14 0,1 0-4 0,-2 1-19 0,1 0 2 16,-2 1 10-16,-1 1 13 0,-3-1 11 0,-1 1 3 0,-2 0 10 0,0 0-6 15,-1 1 8-15,-3 1 2 0,-1 2-2 0,-1 1 2 0,-3 1-2 16,-1 0 4-16,-2 2 1 0,-2 3-5 0,-2 1 4 0,-2 3 6 0,-3 2 3 16,-1 0 3-16,-3 3-1 0,-2 1-1 0,-3 3 0 0,-2 2-2 15,-3 4-1-15,-2 0-13 0,-2 3 12 0,-3 0 2 0,-1 0-12 0,-1 2 20 16,0 0-18-16,-3 1-8 0,1-2 6 0,0 2-4 0,1-1-6 0,1-3-2 15,-1 0-22-15,2-5-34 0,0-2-26 0,3-3-62 0,0-3-75 16,3-3-121-16,1-1-185 0,2-5-168 0,2-2-515 0</inkml:trace>
-  <inkml:trace contextRef="#ctx0" brushRef="#br0" timeOffset="202444.53">22264 14932 4095 0,'0'12'0'0,"2"1"0"0,1 5 0 0,1-1 0 0,4 1 0 16,1 4 0-16,1 2 0 0,4 5 0 0,1 1 0 0,2 2 0 0,-1 2 0 15,1 0 0-15,1-2 0 0,-1-1 0 0,1-3 0 0,1-2 0 16,-1-2 0-16,0-5 0 0,2-1 0 0,1-3 0 0,-1-4 0 0,0-1 0 16,2-4 0-16,-2-1 0 0,2-5 0 0,0 0 0 0,-1-1 0 0,2-5 0 15,-1-2 0-15,0-3-6 0,0-4-12 0,-2 0 2 0,-1-4 14 16,1-2 4-16,-2-5-6 0,1-2 8 0,-1-3-4 0,-2-1-4 0,-2-3 4 15,-2-1-10-15,-1-2-4 0,-3-1 2 0,-2 2-6 0,-3-1 2 16,-2 1 1-16,-4-1 1 0,-3 1-6 0,-3 2 12 0,-3-1 2 0,-5 5 1 16,-1 2 7-16,-5 4-6 0,-1 1 8 0,-2 4 1 0,-2 3 7 0,-3 4-4 15,-4 3 14-15,0 3 1 0,-4 4 3 0,0 2 2 0,-2 3-16 16,-1 3 0-16,0 3-6 0,0 4-6 0,3 2 6 0,0 2-8 0,1 4-6 16,1 2-2-16,-2 2-22 0,2 2-8 0,1 2-11 0,4 5-15 15,0 0-13-15,3 2-25 0,1-1-25 0,4-1-46 0,0-1-62 0,5-1-94 16,2-2-149-16,3-2-105 0,5-2-94 0,3-2-115 0</inkml:trace>
-  <inkml:trace contextRef="#ctx0" brushRef="#br0" timeOffset="202778.53">23221 14437 3556 0,'1'5'261'0,"0"2"-162"16,1 3-26-16,1 1-37 0,1 1-14 0,2 0-6 0,1 3-8 0,1 2 8 15,0 4-10-15,-1 1-4 0,2 4-2 0,1 3 0 0,-1 1 0 0,0 1 0 16,-1 0-6-16,0-2 0 0,-1 0-8 0,2-1 2 0,-1-1 0 16,1 1-4-16,-1-3 2 0,1-1-4 0,-1-3 0 0,0-4-1 0,0-1-9 15,1-3 1-15,0-2-2 0,1-4-3 0,1-1 13 0,0-2-6 16,-1-1 12-16,2-3-1 0,-1-1 3 0,0-2 9 0,1-2-2 0,1 0 2 16,1-3 0-16,0-2 6 0,-1-1 2 0,0-2 1 0,-2-2 1 0,2 1-12 15,-1-2 0-15,1-1 6 0,0 0-2 0,-3 0 6 0,1 0-2 16,-1 1 0-16,0 1 9 0,-1 1-1 0,-1 2-5 0,-1 1 7 0,0 2-6 15,0 2 9-15,-1 3 6 0,-2 2 1 0,0 1 1 0,-1 2-5 0,0-1-2 16,-1 2-1-16,-1 1-5 0,1 0-6 0,-1 2-2 0,0 0-8 16,1 3-4-16,-1 2 4 0,-1 2-8 0,1 1-7 0,-1 3-3 0,1 3-5 15,-1 1-10-15,-1 0-4 0,0 2-19 0,0-2-20 0,1-3-14 16,1 0-33-16,1-2-42 0,1-1-64 0,0-3-115 0,2-2-116 0,0-3-97 16,4-1-58-16,2-4-161 0</inkml:trace>
-  <inkml:trace contextRef="#ctx0" brushRef="#br0" timeOffset="202994.53">24490 13796 3372 0,'-1'7'401'0,"0"1"-300"0,1 2-29 0,0 1-52 16,2 2-5-16,1 3 5 0,2 4-4 0,2 2-24 0,1 6 18 0,1 4-2 15,1 4-2-15,0 4 20 0,-1 3-26 0,1 4 0 0,-1 2 2 16,-1 2-8-16,1 2 6 0,-2 3-4 0,1-1-4 0,-2 2 8 0,1-1-6 15,0 0 0-15,0-2-6 0,0-4-18 0,0-3-21 0,1-4-25 0,1-3-32 16,-1-4-36-16,0-2-42 0,1-5-49 0,0-2-61 0,2-5-91 16,-1-4-130-16,0-1-270 0,-1-1-85 0</inkml:trace>
-  <inkml:trace contextRef="#ctx0" brushRef="#br0" timeOffset="203162.05">24204 14534 3630 0,'-10'6'145'0,"0"0"-33"0,1-1-61 0,3-1-16 16,5-4-9-16,2 0-30 0,2-1-8 0,1 1-9 0,0 0-11 16,1 0 15-16,4 0-7 0,2 0 1 0,3-1 1 0,2-2-28 0,2-1-34 15,3-2-33-15,1-1-33 0,3-1-10 0,1-3-13 0,3 0-16 16,1-2-13-16,1-2-28 0,0-1-56 0,0-2-64 0,1-1-72 0,0-4-43 16,2-2-227-16</inkml:trace>
-  <inkml:trace contextRef="#ctx0" brushRef="#br0" timeOffset="203295.06">25234 14344 2916 0,'3'22'199'0,"-1"4"-93"16,2 10-58-16,1 1-10 0,1-1-2 0,1 3-6 0,1 4-2 0,0 2-17 15,0 5 0-15,1 4 0 0,0 1-4 0,0 6 11 0,0 2-7 0,1 2-5 16,-1 3-6-16,2 0-15 0,-1 2-9 0,1 1-16 0,0-2-20 16,-1-1-70-16,-2 0-65 0,0-3-46 0,0-1-92 0,0-3-154 0,1-2-183 15,-1-3-234-15</inkml:trace>
-  <inkml:trace contextRef="#ctx0" brushRef="#br0" timeOffset="203545.05">25288 14263 3419 0,'1'-1'146'0,"2"0"-64"0,2-1-48 0,3-2-16 16,4 0-20-16,4-1-4 0,4 1 12 0,4 1-14 0,3 1 10 15,2 2 2-15,0 2-6 0,1 3 2 0,-2 2 0 0,-1-1-2 0,1 3 0 16,-2 0 4-16,-1 2-6 0,-3 0 6 0,-2 1 4 0,-3 1-6 16,-3 1 9-16,-3 2-11 0,-3 0-1 0,-4 1 12 0,-3 2-17 0,-4 2-3 15,-2 0-8-15,-4 4-15 0,-1-1-3 0,-5 2-10 0,-2 0-7 0,-3 0-23 16,-2 1-18-16,-2-3-17 0,-1 4-21 0,-2-1-8 0,1-3-5 16,-2 2-12-16,0-4-26 0,2 0-63 0,-1-1-92 0,3-1-96 0,1-1-77 15,1 0-165-15</inkml:trace>
-  <inkml:trace contextRef="#ctx0" brushRef="#br0" timeOffset="203862.05">25956 14548 3515 0,'2'5'142'0,"2"0"-70"0,0-1-47 0,2 1-16 0,1 0-1 15,2 2 11-15,1 2-19 0,1 4-3 0,0 2-5 0,1 2 6 0,0 2 8 16,1 1-8-16,0 0-6 0,-2 2-9 0,0-1-14 0,-1-2 1 15,-1 1-12-15,-1-1-7 0,0-2 4 0,-1 1 10 0,0-1 13 0,1 0 9 16,0-2 0-16,-1-1-6 0,0-2 1 0,0-1-9 0,0-3 5 16,1-2 2-16,-2-3 2 0,3 0 5 0,0-2 4 0,0-1 4 0,1-2 8 15,-1-2 3-15,0 1-3 0,2-1-1 0,0-2 3 0,0-1 8 0,1-1 0 16,-1-2 1-16,1 0 1 0,0 0-4 0,0 0 3 0,0 0 7 16,-1 0-3-16,-1 0 10 0,1 0-1 0,-1 1 1 0,0 1-9 0,0-1 0 15,0 1-1-15,-2 1-6 0,1 1 6 0,0 2-6 0,0 0-3 0,0 2-1 16,-1 0-10-16,-1 2 6 0,1 1-1 0,-3 0-3 0,2 3-5 15,-1 0-9-15,1 2-4 0,-1 1-9 0,0 1 1 0,1 2-21 0,-1-1-15 16,0 2-23-16,-1 2-41 0,0-1-27 0,1 2-72 0,0-1-92 16,1 0-114-16,0 0-102 0,1-3-40 0,3-2-175 0</inkml:trace>
-  <inkml:trace contextRef="#ctx0" brushRef="#br0" timeOffset="204078.05">27211 13720 3866 0,'0'3'123'0,"1"0"-31"16,0 0-78-16,0-1-14 0,1 2 0 0,1 1 0 0,2 3 0 0,1 3 0 15,-1 3 0-15,3 5 0 0,0 4 0 0,1 4 0 0,1 5 0 0,0 4 0 16,0 6 0-16,0 4 0 0,1 6 0 0,1 5 0 0,-1 7 0 16,0 4 0-16,-2 3 0 0,0 1 0 0,-1 2 0 0,0-1 0 0,-1-1 0 15,-1-4 0-15,0-4 0 0,1-5-90 0,-1-4-65 0,-1-4-63 0,1-6-68 16,0-4-101-16,1-5-166 0,0-5-118 0,1-1-436 0</inkml:trace>
-  <inkml:trace contextRef="#ctx0" brushRef="#br0" timeOffset="204245.05">26825 14322 3668 0,'-5'10'167'0,"1"-1"-54"0,-1 2-62 0,3-3-31 16,4-2-8-16,2-3-20 0,3 1 0 0,3-1-8 0,2 0-2 15,5 2 3-15,4-1-7 0,7 0-6 0,4-3-22 0,6-2-22 0,3-3-29 16,3-3-36-16,2-2-40 0,3-4-41 0,0-4-47 0,1-2-62 0,1-3-75 16,1-6-98-16,2-3-72 0,0-7-214 0</inkml:trace>
-  <inkml:trace contextRef="#ctx0" brushRef="#br0" timeOffset="204795.05">25156 12582 3087 0,'-122'18'212'0,"-9"3"-134"0,-40 9-42 0,7 5-43 16,14 6-18-16,-2 8-12 0,5 7-13 0,6 7 20 0,4 6 17 0,5 2 20 15,7 4 13-15,3 4 7 0,2 3 12 0,4 4-10 0,4 3 4 0,2 2-11 16,5 5-13-16,4 1 6 0,3 6-22 0,5 4 10 0,7 2 3 15,4 6-3-15,5 2 7 0,4 2-3 0,6 2 0 0,4 0 4 0,7 2 1 16,7-2-1-16,8 0-4 0,8-1-1 0,8-5 1 0,9-3 0 0,9-5-3 16,9-7 9-16,8-1 4 0,9-5-4 0,9-4-3 0,9-2-12 15,9-3 5-15,9-3-10 0,10-1-1 0,8-1 5 0,10-3-10 0,6-3 20 16,6 0 4-16,7-4 4 0,5-3 6 0,5 0-10 0,5-4-9 16,4-2 9-16,5-3-1 0,3-4 7 0,1-3 6 0,-63-28-23 0,18 4 9 15,1-1 3-15,19 3 5 0,4-3 8 0,18 2-20 0,1-3 1 0,22 1-2 16,1-5 4-16,2-4 13 0,0-5-13 0,2-5 3 0,-1-6-3 15,1-5-8-15,-1-6 29 0,1-7-15 0,-2-6-18 0,18-12 23 0,115-34-15 16,-41-6 2-16,-42 4 29 0,-60 11-41 0,-2-3 10 0,-5-3 0 0,-3-3-2 16,-3-4 18-16,-3-1-26 0,-3-5 10 0,-5-3-4 0,-4-1-6 15,-6-1 16-15,-8 1-6 0,-7 0-2 0,-5 0 5 0,-5-3-9 0,-5-3 4 16,-5-3 4-16,-4-4-8 0,-5-3 2 0,-6 1-15 0,-5-3-5 16,-7 1 2-16,-7-2-7 0,-4-2 3 0,-7 1-1 0,-5 1 2 0,-7 0-2 15,-9 1 1-15,-6 2 1 0,-9-1-5 0,-8 2 14 0,-7 1 3 0,-8 0-1 16,-8 5 6-16,-5 1-2 0,-10 4 8 0,-6 2 6 0,-10 1 7 15,-8 3 8-15,-7 0-9 0,-11 3-5 0,-7 4-5 0,-9 2 4 0,-9 3 5 16,-8 6-1-16,-9 3 7 0,-7 4-11 0,-5 5 7 0,-8 3-1 0,-5 6-14 16,-4 5 10-16,-6 3-8 0,-5 8-6 0,-5 6 15 0,-6 8-13 15,-6 9 0-15,-3 8 6 0,-2 10-10 0,2 7 5 0,2 5-5 0,2 6 6 16,3 2 0-16,2 5-12 0,3 5-15 0,2 2-35 0,4 0-52 0,3-1-78 16,5 0-138-16,2-3-267 0,0-2-337 0,1-6-193 0</inkml:trace>
-  <inkml:trace contextRef="#ctx0" brushRef="#br0" timeOffset="205162.05">17849 4825 1 0,'138'-50'175'0,"-38"7"690"16,17-7 687-16,-49 18-763 0,-4 3-895 0,17 4-37 0,13 0-23 15,17 3 10-15,12-1 41 0,8 0 39 0,10 0 30 0,5 1 26 0,4 0 12 16,5 3 0-16,2 1-2 0,4 2-10 0,1 3 1 0,4 5 7 0,1 0 2 16,6 4 4-16,3 2 6 0,1 3-11 0,1 3-6 0,0 4-20 15,0 3-26-15,1 6-29 0,2 6-20 0,-2 6-12 0,1 8-15 0,-3 6-9 16,-2 6-10-16,-3 7-30 0,-5 8-21 0,-4 5-9 0,-4 7-6 16,-6 4 16-16,-5 4-172 0</inkml:trace>
-  <inkml:trace contextRef="#ctx0" brushRef="#br0" timeOffset="205313.05">24373 5701 508 0,'62'66'167'16,"2"8"-24"-16,12 21 4 0,-20-9-7 0,-18-5 12 0,-7 0 12 15,-10-2 1-15,-9 2 1 0,-8-1 12 0,-9 0 4 0,-8 3 9 0,-11-2-8 16,-9 1-26-16,-11 1-35 0,-10-2-16 0,-10-2-7 0,-9-1-13 0,-9 0 3 16,-11 0-18-16,-9-2-15 0,-10 1-7 0,-11-1-4 0,-10-3-12 15,-10 0-11-15,-8-4 0 0,-11-1-2 0,-9 0 4 0,-8-1 0 0,-6-1-2 16,-4-2-9-16,-7 0 2 0,-4-4-17 0,-4 1 15 0,-3-2 8 0,-3-1-14 16,0-1 8-16,-2-2-26 0,0-2-11 0,2-1-3 0,-3-1-12 15,3-4-16-15,2-4-21 0,2-3-23 0,2-4-19 0,4-7-16 0,3-5-42 16,9-8-51-16,5-7-121 0,4-9-228 0,3-7-553 0</inkml:trace>
-  <inkml:trace contextRef="#ctx0" brushRef="#br0" timeOffset="-201931.17">2984 5600 1487 0,'-33'-11'213'0,"1"0"-196"0,-2-1-8 15,11 1 1-15,8 5-7 0,2-1 4 0,-1 0-10 0,1 0-22 0,0 1-24 16,0 0-36-16,1 0-24 0,-1 1-24 0,0 1-6 0,-1 2 14 0,0 2 27 15,0 1 37-15,-1 2 27 0,-1 1 24 0,-1 0 22 0,0 2 26 16,-3 0 27-16,-1 0 20 0,-2 5 4 0,-2 1-2 0,-1 2-10 0,-1 2-12 16,0 1-8-16,-3 4-9 0,0 3-8 0,-3 1-10 0,0 3-8 0,-1 2 3 15,0 3-9-15,0 2 3 0,0 3-3 0,-2 3-10 0,0 2 0 16,-3 4-2-16,0 3 0 0,2 2-1 0,1 3-5 0,-1-1 5 0,3 2-2 16,16-28-1-16,-4 9 4 0,2-1 12 0,-6 9-1 0,3 0-1 15,-3 9-1-15,-2 1-11 0,-2 10 0 0,0 2 1 0,2 2-6 0,0 1 15 16,1 2-1-16,-1 3 2 0,2 3 7 0,0 1-16 0,0 2 7 0,1 3-3 15,0 1 6-15,2 3 1 0,0 1 4 0,1 2 6 0,1 3 2 16,1 2 6-16,1 2-2 0,3 4 1 0,-1 2 2 0,0 2 3 0,1 4 5 16,2 3-6-16,-2 0 27 0,1 1 2 0,1 3 1 0,0 1 8 0,0 2-34 15,0 1 63-15,8-59-10 0,0 8-61 0,-1 1 59 0,1 9-77 16,1 0 10-16,-1 11 70 0,1 0-69 0,0 10 4 0,1 0-8 0,0 9-2 16,3 2 2-16,-1 16-73 0,4 113-4 0,2 0-2 0,4-9 6 15,5-17 67-15,0-19 4 0,5-22-4 0,3-20 12 0,-2-30 0 0,1 0 14 16,1-3 12-16,1 0-6 0,2-1 3 0,2-1-17 0,-1 0-3 0,4 0-3 15,-1-2-4-15,4-2-11 0,-1-2 1 0,3-3 3 0,0-2-3 16,3-1 14-16,1-3-6 0,0-1-57 0,39 86 15 0,-6-27-1 0,-7-27 1 16,-10-26 44-16,-5-12-11 0,1-1-3 0,3 0-3 0,2-2 3 0,0 1-2 15,0-2-3-15,-1 1 3 0,2-3-22 0,1 2 6 0,1-3 6 16,2 0-4-16,-1-2 14 0,3-1-4 0,1-2-3 0,0-1 4 0,0-3-8 16,3-4-12-16,-1-4 13 0,1-2-1 0,1-5 8 0,-1-2 6 0,1-2-15 15,2-5 9-15,-1-2-13 0,0-5 7 0,0-4 5 0,0-4-15 16,0-4 21-16,0 0-11 0,1-5-14 0,-1-2 27 0,2-1-11 0,1-2 12 15,-2-2 3-15,1 0-21 0,-1-4 15 0,-2-1-7 0,0-2 9 16,1-3 9-16,-2 0-2 0,0-1 11 0,1-1 5 0,-1-2-6 0,-1 0 1 16,1-2 3-16,-1-1-10 0,0-1-6 0,-2 0-8 0,0-1-4 0,0-3 1 15,-1 0-5-15,-1-1 6 0,0 1-1 0,-2 0-1 0,-1-1 0 16,0 1-15-16,-2-2 9 0,0-1 2 0,-2 0-9 0,-2-2-1 0,0-1-29 16,-4-2-18-16,1 0-25 0,-3-2-37 0,-1 2-29 0,-1-2-28 15,-1-2-24-15,-4-2-36 0,0-1-60 0,0-4-47 0,-3 0-44 0,1-2-19 16,-3-5-284-16</inkml:trace>
-  <inkml:trace contextRef="#ctx0" brushRef="#br0" timeOffset="-201597.17">6022 16064 3326 0,'-23'15'139'16,"4"-1"-39"-16,-3 3-31 0,10-4-39 0,6-3-20 0,3-2-12 0,3 1-11 15,2-3-8-15,4 1 12 0,1 1-10 0,8-2 0 0,2 1-3 16,4-1-1-16,3-1 8 0,3 0-12 0,4 0-1 0,1-1-5 0,2 1 5 16,0 1 10-16,-1 2 7 0,-1 1-2 0,1 0 10 0,-3 2-8 0,1 2 4 15,-1 0 10-15,1 3-1 0,0 2 2 0,1 1-6 0,-1 1 7 16,0 2-1-16,-3-1-6 0,0 2 4 0,-1 0-2 0,-2 0 7 0,1 2 15 15,-3 3-7-15,0 3-3 0,-2 0-2 0,-3 1 2 0,-3-1 14 16,-3 2-9-16,-1 1-10 0,-4 3 2 0,0 2-5 0,1 3 3 0,-4 2 3 16,2 1-12-16,-2 4 7 0,-2-24-5 0,0 7-11 0,0 3 4 0,0 8-17 15,-1 1-31-15,0 11-42 0,-2 4-72 0,1 10-128 0,-2 5-198 16,0-35-201-16,1 8-410 0</inkml:trace>
-  <inkml:trace contextRef="#ctx0" brushRef="#br0" timeOffset="-149214.12">8222 16489 1125 0,'-1'-1'98'0,"-2"1"49"0,1-1 68 0,0-1 14 15,1 0-32-15,1 0-49 0,-1 0-13 0,1 0-5 0,0 1-16 0,0-1-14 16,0 2-16-16,1-1-22 0,0 2 0 0,0 0 1 0,1 0 7 0,0 2-1 16,1 1-7-16,2 3 3 0,1 1-14 0,0 3-3 0,0 2 1 15,1 3-15-15,1 4 19 0,-1 2-13 0,2 4-7 0,0 3 2 0,0 1-22 16,-1 4 12-16,1 5 8 0,0 2-7 0,-1 1 1 0,0 1-3 0,0 0-7 15,-1 0 10-15,0 2 0 0,-3-22-6 0,1 7 0 0,-1-1-2 16,2 7-9-16,-1-2-8 0,0 7-2 0,0 0 5 0,2 5-8 0,-1-1-1 16,-1-1 11-16,1-3-10 0,-1-2 4 0,0-1-10 0,-1-4-3 15,1-1-13-15,-1-6-5 0,0-2-35 0,-1-3-46 0,1-1-26 0,0-4-34 16,0-3-72-16,-1-3-84 0,0-3-132 0,0-1-156 0,-1-4 47 0,1-4-188 16</inkml:trace>
-  <inkml:trace contextRef="#ctx0" brushRef="#br0" timeOffset="-148448.12">8423 16419 2250 0,'-6'-2'1062'0,"1"0"-922"0,0-1-22 0,2 0-7 16,2-1-55-16,2 1-22 0,1-2-15 0,1 2-17 0,3-3 4 16,2-1 0-16,1 1 0 0,3-1-4 0,0 1 3 0,2 1-14 0,1 0 11 15,0 1 0-15,0 1-1 0,2 1 9 0,2 1-16 0,-2 0 10 0,3 2-10 16,-2 2-5-16,2 0 17 0,-2 1-10 0,1 3 2 0,1 1-2 0,-1 3-15 15,3 1 17-15,-1 1 6 0,-2 3-10 0,1 0-8 0,-3 1 7 16,-2 1 9-16,-1 2-4 0,-2 3 13 0,-1 0-7 0,-2 3-10 0,-3 1 10 16,-4 3-6-16,-2 1-7 0,-4 2 7 0,-2 1-6 0,-3 3 4 0,-4-1-1 15,-1 1-13-15,-1 2 9 0,-3-1-1 0,-3 2-7 0,-1 0 8 16,-2-1 7-16,11-19 6 0,-3 3-1 0,1 0 3 0,-4 4 0 0,0-3-6 16,-2 4 2-16,0-3-10 0,-3 3 2 0,2-2 8 0,0-4 2 15,1-1 4-15,2-4-4 0,1-3-6 0,1-2 9 0,2-3-3 0,0-2-6 16,2-3 2-16,1-2 0 0,1-2 10 0,3-2 11 0,0-3-14 0,1 0 5 15,1-3-1-15,1 0-20 0,1-3 18 0,2 1-3 0,2-2 6 16,1-2 13-16,3 0-33 0,1-1 21 0,2 1-3 0,2-3 0 0,0 2 9 16,4-1-17-16,1 2 10 0,2 0-6 0,0 1 3 0,1 2-5 15,2 1-4-15,3 3 8 0,0 2-2 0,2 3 6 0,1 3-16 0,2 3 10 16,1 3-6-16,1 2 3 0,1 5 1 0,-1 3-2 0,1 3 16 0,-2 0-16 16,-3 0-2-16,2 5-281 0,0 3 79 0,-2 2-43 0,1 0 27 15,-1 0 288-15,-3 1-101 0,-1 1 52 0,3 4-7 0,-3-5-37 0,-1 0 56 16,-1-1-15-16,-1 0-39 0,-1-1 84 0,-1 0-81 0,-7-15 30 0,-1 1 8 15,0-2-69-15,1 1 61 0,0 1-31 0,-1-1-6 0,1-2-6 16,-1 1-29-16,-1-1-6 0,2-1 20 0,-1-1-50 0,0-1 19 0,-1-1-30 16,1 0-4-16,-1-3 1 0,1 0-22 0,-3-3 25 0,1-2-4 0,3-7 19 15,-2-6 15-15,-1-3-14 0,-2-7 13 0,-1-4 34 0,-1-1-19 16,-1-3 36-16,0 2-5 0,0 0 3 0,0-1 20 0,0 0-25 0,0 1 25 16,1 2-20-16,-1 0 9 0,1 1 20 0,0 3-12 0,0 2 2 15,0 2 30-15,-1 1-22 0,1 4 37 0,0 1 4 0,0 3-1 0,0 2 41 16,0 2-25-16,0 1 19 0,0 2 8 0,0 2-29 0,0 0 17 0,0 3-11 15,0 0-26-15,2 2 40 0,-1 1-31 0,0 0-41 0,0-1 0 16,3 6 233-16,1 0 85 0,1 2-6 0,-1 1 44 0,2 1-220 0,0 1-81 16,2 2-19-16,2 1-4 0,-2-2-1 0,0 0-10 0,1 0 0 0,2-2-14 15,0 1-5-15,0-1 10 0,1 0-5 0,0-1-7 0,2 0-4 16,0-2 10-16,0 0-2 0,2-3-8 0,1-1 0 0,-1-3-13 0,3-2 10 16,0-1 16-16,-2-2-5 0,2-1-8 0,-1-1 6 0,-1-3-8 15,1-1 8-15,-2-1 0 0,-1-2-2 0,0-2-2 0,-2 0-11 0,-2 0 7 16,0-2 1-16,-2 0 12 0,-2-1 7 0,0 1-14 0,-3-1-6 0,-1 0 10 15,-2 0 5-15,-1 0 1 0,-3 1-7 0,-1-1-3 0,-3 0 10 16,0 1-1-16,-4 2 9 0,-2 0-15 0,-1 0 5 0,-3 2 15 0,-1 1-15 16,-1 2-3-16,-3 1-3 0,-1 0-9 0,0 2-1 0,-3 0 4 0,0 3 0 15,-1 0-3-15,-2 2 3 0,1 1-13 0,-1 0-6 0,0 2 0 16,-2 1 2-16,1-1-13 0,1 1-16 0,0-1-2 0,3 1-15 0,-1 1-8 16,2 0-24-16,2-1-47 0,2 1-61 0,3 1-86 0,2 0-158 15,2-1-179-15,1 0 68 0,4 0-170 0</inkml:trace>
-  <inkml:trace contextRef="#ctx0" brushRef="#br0" timeOffset="-147797.12">10117 16572 2893 0,'3'16'3'0,"2"3"114"16,3 2 41-16,1-2-31 0,2-2-4 0,-2 0-28 0,2 1-24 15,0 1-16-15,0 4-23 0,1 0-6 0,-1 3-3 0,1 1-11 0,-2-1-6 16,0 0-5-16,-1 2 5 0,0 0 4 0,-1 2-14 0,-3 4 4 0,0 0-2 15,-4-16-8-15,1 5 12 0,-2-1-9 0,0 5 5 0,-1 0-6 16,0 4-3-16,-2-2 7 0,0 5-11 0,-1-1 3 0,1-1-1 0,-2-3 0 16,1 0 15-16,-1-4-6 0,0 0 6 0,1-2-4 0,0-4-6 0,1-2 22 15,1-2-9-15,0-2-12 0,0-2-1 0,1-2-7 0,1-2 24 16,0-1-10-16,0-2-7 0,1-1-1 0,0-1-18 0,2-1 10 0,0-1 1 16,1-2 10-16,1 0 6 0,1-2 4 0,2-1-10 0,0-1 6 15,3-1 0-15,1-1-4 0,1-1 1 0,1 1-10 0,1-3 5 0,1 0 10 16,2 0 4-16,0-1-5 0,0 3 1 0,2-2-2 0,0 1 6 0,0 1 0 15,1 1-16-15,-1 1 5 0,0 1-3 0,0 0 3 0,-1 2 10 16,-2 1-9-16,1 1 21 0,-2 1-13 0,-1 1 2 0,-2 0 10 0,-1 2-4 16,-2 0 6-16,-2 1-3 0,-3 1 6 0,-1 1-8 0,-2-1 4 0,-2 3-5 15,-2 1 1-15,-2 1-4 0,-2 1 9 0,-2 0-5 0,-2 1-21 16,-2 1 6-16,0 1 0 0,-2 0 16 0,0 0 1 0,-1-1-13 0,0 1 4 16,0-1-14-16,1 0 6 0,-1-1-2 0,2-2-19 0,0 1-5 15,1-2-19-15,0 0-15 0,0-2 4 0,2-1-27 0,1-1-21 0,-1-2-21 16,2-2-57-16,0 0-51 0,0-3-82 0,2-1-113 0,0-2-92 0,0-3-6 15,1-1-190-15</inkml:trace>
-  <inkml:trace contextRef="#ctx0" brushRef="#br0" timeOffset="-147481.12">10784 17111 3674 0,'1'13'86'0,"0"-3"4"0,2 4-6 16,0 2-39-16,3 2-25 0,1 1-16 0,1 0-4 0,3-1 2 0,-1-3-20 16,3-1 6-16,1-2-13 0,1-1-10 0,-2-2 11 0,1-1-11 0,0-4-6 15,-1 0 9-15,0-2-16 0,-2-2 13 0,1-1 13 0,-1-2 8 16,1-1-1-16,-2-4-9 0,0-1 16 0,0-2-1 0,-1-2 0 0,-1-3 9 16,0 0-6-16,-1-4 15 0,0-2 3 0,-1 0-18 0,3-24 2 15,-1 4-5-15,-3 6 1 0,-2 6 21 0,-1 5-9 0,-1 1-8 0,-1-1 12 16,0 5-12-16,-2-2 10 0,-1 3 1 0,0 3-3 0,-2-1-4 0,0 2-7 15,0 1 1-15,-2 3-3 0,0 2 7 0,-1 2-13 0,0 4-11 16,-1 2 5-16,0 4-9 0,0 2-5 0,0 2-1 0,-3 4-8 0,0 1-11 16,-1 3-4-16,1 4-24 0,1 1-31 0,0 1-23 0,1 2-44 0,0 0-44 15,1 2-70-15,0-1-106 0,1-1-91 0,2-3 33 0,3-11-192 16</inkml:trace>
-  <inkml:trace contextRef="#ctx0" brushRef="#br0" timeOffset="-147213.12">11694 16121 2779 0,'0'-2'149'15,"0"0"-19"-15,-1 0 5 0,2 1-18 0,-1 1-21 0,0 1-17 0,1 1-29 16,-1 1-5-16,0 4 0 0,-1 2-9 0,1 5-6 0,-1 0-7 0,-1 5-17 15,0 3 1-15,1 1 3 0,-1 4-18 0,1 3 8 0,-1 4-13 16,1 4-3-16,0 3 5 0,1 3-10 0,1 3 8 0,0 2-13 0,0 2-3 16,0 0 11-16,1 0-3 0,1-1 4 0,0-2-7 0,1-2-5 0,2-3-12 15,0-4-19-15,1-4-14 0,0-1-32 0,0-4-29 0,2-3-31 16,-6-15-52-16,2 2-60 0,1-2-99 0,1 3-80 0,0-3-27 0,1 1 91 16,0-4-141-16</inkml:trace>
-  <inkml:trace contextRef="#ctx0" brushRef="#br0" timeOffset="-147047.12">11501 16626 2617 0,'6'7'281'0,"3"-2"-128"0,6 3-6 0,2-3-44 0,2-4-31 0,4-1-28 16,4-4-26-16,3-1-1 0,3-3-19 0,3-4-11 0,1-4 2 0,1-3-42 15,1-2-1-15,-1-5-33 0,1 0-52 0,1-4-34 0,-2 0-80 16,2-2-86-16,-3-1-91 0,0-3-69 0,-1 1 20 0,-4-1-196 0</inkml:trace>
-  <inkml:trace contextRef="#ctx0" brushRef="#br0" timeOffset="-146514.12">10248 15379 2280 0,'-93'24'141'0,"-10"3"-16"16,-27 8-17-16,12 0-27 0,11-2-13 0,2 1-22 0,0 1 4 0,0 5 11 15,2 2-4-15,1 2-2 0,0 4 4 0,3 1-26 0,1 2 10 16,4 4-4-16,3 4-7 0,4 4 4 0,4 3-15 0,3 2 10 0,5 4-4 16,3 2 1-16,4 4 12 0,4 5-12 0,4 1 5 0,4 3-3 15,3 4-13-15,5-1-2 0,3 4-6 0,26-48-22 0,-4 13 11 0,2 0 0 16,-1 12 4-16,2 1 7 0,-1 11-16 0,4 1 14 0,8-37 3 0,0 5 5 15,3 0 5-15,0 4-23 0,3-1-3 0,2 6-5 0,2-1 18 0,3 2-29 16,3-2-19-16,3 2 0 0,4-1-33 0,3 2 14 0,5-2-11 16,3 3 5-16,5-4-7 0,4 3 9 0,5-3 13 0,4-3-5 0,5-2 15 15,6-5-5-15,3-3 2 0,6-3 58 0,3-3-1 0,4-5 11 16,4-2-14-16,6-3-15 0,3-3 0 0,3-4 33 0,5-3 20 0,3-5-19 16,4-2 30-16,4-5-14 0,2-4 3 0,4-4-2 0,3-3 3 15,2-5 23-15,2-5 1 0,2-2-23 0,3-5-25 0,2-4-10 0,1-2 7 16,1-4 23-16,2-3-26 0,0-4 0 0,0-2-1 0,0-3-83 0,0-5-2 15,-2-1-18-15,-1-3-7 0,-1-3 69 0,-1-3 6 0,-1-1 14 16,-4-3 1-16,4-7-9 0,96-59 10 0,-21 3-5 0,-24 3-6 0,-19 3 28 16,-22 6-16-16,-16 9-2 0,-20 8 9 0,-14 1 0 0,46-59 2 0,-29 22-9 15,-24 20 2-15,-31 29-7 0,-4 0 12 0,-6 1-4 0,-5-1-1 16,-6 1-2-16,-5 1-5 0,-6-1 5 0,-6 0-13 0,-7-2 1 0,-5 1 1 16,-8 0 2-16,-6-1 7 0,-7 4-6 0,-8-1-7 0,-5 4 5 0,-7 4-6 15,-8 2 3-15,-6 4 10 0,-7 5-15 0,-7 6 10 0,-9 6-10 16,-7 8 1-16,-8 6 8 0,-5 8-12 0,-8 8 2 0,-5 9-2 0,-6 8-6 15,-6 9 1-15,-3 8-10 0,-5 9-21 0,-3 7-17 0,-2 9-13 0,-3 9-20 16,1 10-51-16,-3 8-44 0,1 9-44 0,-2 12-61 0,4 7-77 16,0 10-15-16,2 10-189 0</inkml:trace>
-  <inkml:trace contextRef="#ctx0" brushRef="#br0" timeOffset="-122962.02">22600 4640 1844 0,'-12'-30'44'0,"-6"-7"7"0,-5-5-10 0,-4-8-30 0,7 26-87 0,0 3-27 0,1 3 7 0,0 1 28 16,-1 2 39-16,1 1 10 0,-2 2-17 0,-1 1-29 0,-1 1-19 15,-3 2 0-15,0 0 20 0,-3 2 28 0,2 0 23 0,-2 0 19 0,1 0 9 16,0-1 11-16,0-1 8 0,2-1 9 0,0-1 2 0,2 0 2 0,-1 1 2 16,1 1-16-16,2 0-1 0,-2 1-10 0,1 2-3 0,-3 0-1 15,-3 1-3-15,-1 1-4 0,-3 1-8 0,-3 1 2 0,-1 1-2 0,-6 0 1 16,-2 1-2-16,-1-1 2 0,-3 1-4 0,-2-1 3 0,-2 0-1 15,-2 0-1-15,-2 0-1 0,-3 0 0 0,-2 0-2 0,-2 1 2 0,-4-1 4 16,-1 2 0-16,-3-1 2 0,-3 1 3 0,0-1 0 0,-1 0 4 0,0 1-4 16,-1 0 5-16,-2 1-5 0,0-1 0 0,0 2-2 0,-3 0-3 15,0 1 9-15,1 0 0 0,-2 0 4 0,0 4 2 0,-4 0-3 0,0 2 4 16,-1 3 2-16,-3 1 9 0,2 2-2 0,-2 3 4 0,2 3 0 0,-2 1-10 16,0 4 2-16,-1 0-4 0,1 4 2 0,0 3 3 0,1 3-6 15,0 2-1-15,0 3-9 0,0 4-3 0,0 5 2 0,-1-1 4 0,4 4 2 16,-1-1-2-16,3 2-4 0,1 1-15 0,3 0 8 0,1 2-5 15,4 0 3-15,3 1 17 0,3 2-6 0,4-1 1 0,4-1 0 0,5 1-12 16,2-1-3-16,2 0-6 0,3 2 0 0,1 0 1 0,3 0 2 0,3 0 6 16,2 1-3-16,1-2 3 0,6-2 0 0,0-1 6 0,5-3 5 15,3-1-4-15,4-1-2 0,4-1-1 0,3-2-2 0,4-1 7 0,3-1 7 16,4 1 1-16,3-1-2 0,3 1 1 0,2 0-5 0,3 0-2 0,3 2 6 16,1-1-7-16,4 1 1 0,0 1-6 0,3-1-1 0,4 2 1 15,0-1-2-15,6 1 10 0,-1 1-3 0,5-1-4 0,2 0 3 0,4 0-4 16,3 0-5-16,3-1 4 0,5 1-2 0,3-1-11 0,2-2 0 0,5-1 0 15,4-3 5-15,4-2 14 0,6-4 9 0,3-4 6 0,7-2 2 16,5-3 3-16,3-2-2 0,4-2-2 0,3-1-8 0,3-3-3 0,3 0-4 16,4 0-1-16,-1-1-1 0,2 2-4 0,1 1-3 0,2-2 0 15,1 2 3-15,-1 0-13 0,-1-1 2 0,0 1-3 0,0-2 2 0,1 1 7 16,1-2-1-16,-2 0 3 0,0-2-3 0,1-3 1 0,-2-2 1 0,2-1-4 16,0-2 3-16,-1-1-1 0,-1-3 0 0,1-2-2 0,-1 0 4 15,2-2 1-15,-2-2 0 0,0-2 4 0,-1-1 12 0,0-3-2 0,0-1 2 16,-2-2-1-16,-1 0-9 0,-2-4 7 0,0-1 5 0,-2-3 3 0,-1-2 4 15,1-2 8-15,-2-3 1 0,-1 0 8 0,-3-2-14 0,-2-1 3 16,1-1-2-16,-3-1-4 0,1 0 6 0,-2-3-14 0,-1 0 0 0,0-1-4 16,-1 1-2-16,-2-2 2 0,-1 2 1 0,-2-3-2 0,-3 0 5 0,-2-2-1 15,-3 0 7-15,-3-1 3 0,-3 0-3 0,-1-2-2 0,-3-4 0 16,-3-3 9-16,-3-2 0 0,-2-4-1 0,-5-3-6 0,-3-4-7 0,-4-3-1 16,-6-5 3-16,-1-3-7 0,-6-4-2 0,-2-4-9 0,-5-2 0 15,-4-6 5-15,-6-1-3 0,-3-2 9 0,-6-2-13 0,-4 0 4 0,-5-2-6 16,-5 2 8-16,-5-1 12 0,-4 2-5 0,-6 0 7 0,-5 3-7 0,-4 1-11 15,-4 1 0-15,-7 5 10 0,-3 1-9 0,-6 2 10 0,-7 2 1 16,-5 4-7-16,-5 3 2 0,-5 3-7 0,-6 6 0 0,-5 3-5 0,-8 7-8 16,-7 6 2-16,-7 6-6 0,-9 7 6 0,-8 7 6 0,-6 9-4 15,-7 4 3-15,-4 6-6 0,-4 4-16 0,-4 6-8 0,-1 2-29 0,0 5-22 16,1 5-18-16,3 5-25 0,2 6-8 0,2 5-24 0,4 5-30 0,1 2-47 16,5 6-94-16,2 4-201 0,3 7-5 0,-1 4-78 0</inkml:trace>
-  <inkml:trace contextRef="#ctx0" brushRef="#br0" timeOffset="-119978.98">13499 8246 1206 0,'-43'-5'74'0,"-2"0"-23"0,-10 1-12 0,8 4-17 0,7 1-7 0,4 1-9 16,-1 1-6-16,1 1-1 0,2 0-3 0,-1 2 0 0,1 1 3 15,-1 1-2-15,2-1 2 0,0 1-1 0,0 0 1 0,1 1 1 0,0 0 2 16,-1 0-1-16,1 0 3 0,1 0-2 0,2 0 3 0,2 2 8 0,1 0-4 16,-1 1 4-16,0 1 3 0,1 0-2 0,1 2 5 0,0 2 5 15,2 1 0-15,-2 2 4 0,1 3 1 0,2 1-3 0,-1 5 2 0,-1 0 0 16,3 3-1-16,-2 0-1 0,2 3 4 0,0 2-1 0,1 2 3 0,3 2 1 16,0 0 3-16,1 3 0 0,1-1-1 0,3 2 1 0,1 1-4 15,3 2-6-15,2 1-8 0,2-1-5 0,3 0-3 0,2 0-4 0,3-1 0 16,3 0-5-16,2-3-1 0,3-1-4 0,5 0-2 0,2-3 10 15,3 0 11-15,3 0 8 0,5-4 4 0,2 0-3 0,4-3-8 0,4-2-3 16,1 0-4-16,3-1 4 0,4-3-2 0,1-1 1 0,2-2 3 0,3-1-9 16,2 0 3-16,0-2 3 0,0 1-11 0,0-2 4 0,0-1-2 15,0 1-3-15,0-2 1 0,-1-1 1 0,0 1-2 0,-1-2 3 0,0-1-12 16,0-3 1-16,0 1-1 0,-1-2 8 0,1 0 11 0,-2-1 4 0,0-4-2 16,0-1-2-16,-1-3 1 0,0-2 3 0,0-3 2 0,-3-3-3 15,-1-2 3-15,-1-5 9 0,-2-1 12 0,-1-3 16 0,-4-3 8 0,-2-4 4 16,-3-4-3-16,0-3-2 0,0-2 0 0,-2-3-6 0,-1-1 0 15,-3-3-7-15,-1 0 0 0,-3-1 3 0,-3-2-6 0,-3 0 3 0,-2 0-10 16,-5-1-1-16,0-2-17 0,-3-1-1 0,-2 0 2 0,-3 0-7 0,-2-2 6 16,-2 0-11-16,-3-1 1 0,-1-3-2 0,-3 0 2 0,-1-2-4 15,-1 0-3-15,-3 2 0 0,-1 1-7 0,-3 1 10 0,-2 2-1 0,-2 1-2 16,-1 2 3-16,-1 0-3 0,-3 4-2 0,-1 2-4 0,-2 0 1 0,0 2-3 16,-2 0-1-16,-1 2-2 0,-1 4 3 0,-2 1-6 0,-3 3-6 15,0 0 1-15,-2 1-2 0,-2 2-8 0,0 2 4 0,-3 4-6 0,-4 2 24 16,-2 2 10-16,-3 4 2 0,-3 3 2 0,-1 3-16 0,-2 3 0 0,-3 3 2 15,-1 1 5-15,-1 5-15 0,0 2 7 0,2 4-5 0,0 4 3 16,2 1 11-16,2 3-4 0,5 1 1 0,4 1-1 0,4 2-3 0,2 1-1 16,1 1-3-16,3 1-4 0,2 2-14 0,6 3-26 0,3 0-30 15,2 1-39-15,3 1-41 0,5-1-38 0,4 3-64 0,3 0-83 0,5 2-93 16,4-1-2-16,6-1-192 0</inkml:trace>
-  <inkml:trace contextRef="#ctx0" brushRef="#br0" timeOffset="-119744.98">13174 8887 2255 0,'-14'-3'66'0,"3"2"-18"0,-1 0-28 0,5 2-9 16,5 0-15-16,2 0-3 0,2 2 2 0,2 2-4 0,1 0 0 0,1 2 4 15,2-1-5-15,2 1-7 0,-1-1-16 0,2 1-28 0,0-1-31 16,0-1-28-16,2-2-28 0,1 0-10 0,3-1 2 0,1-2-4 0,1-1-5 16,3-2-17-16,-1-1-13 0,2-4 7 0,4-1 41 0,2-3-102 15,2-3 10-15</inkml:trace>
-  <inkml:trace contextRef="#ctx0" brushRef="#br0" timeOffset="-119212.9">17320 7320 1023 0,'5'-14'37'0,"2"0"-16"0,3-5-16 0,-1 1-1 15,1 4-2-15,0 0-1 0,0 2 5 0,-1 1 3 0,-1 0 10 0,-2 1 12 16,-3 0 17-16,-1-1 15 0,-3 0 17 0,-2 1 15 0,-2 0-1 16,-2-1-3-16,-2 1-4 0,-2-2-6 0,-2 1 2 0,-1 1 1 0,-3 0-6 15,-3 2-8-15,-1 1-12 0,-5 3-6 0,-2 1-7 0,-2 2-3 16,-2 1-6-16,-1 3-3 0,-2 2 4 0,-4 2-6 0,-2 3 0 0,-3 2-5 15,-5 4-2-15,-1 0 1 0,-4 3 7 0,-2 4 3 0,-3 0 2 0,-4 4 13 16,-1 3-3-16,-4 1 9 0,-3 3 11 0,-1 2-6 0,-1-1 0 16,-2 4-8-16,-1 1-10 0,-3 3-6 0,1 2-16 0,-1 1 2 0,0-1-2 15,3 0-7-15,0 1 6 0,2-2-11 0,2 1-2 0,2-1-4 0,1 1 1 16,2-2 1-16,-1-1-3 0,2-1 2 0,4-2-4 0,2-2-4 16,3 1 2-16,4-3-14 0,2-1 6 0,5-2 8 0,2-1-4 0,2-2 15 15,0-1-2-15,3-2-8 0,1-1 1 0,3-3 1 0,2 0-2 16,1-1 1-16,3-2 0 0,0-1-4 0,2 0 2 0,1-1-3 0,3-3-4 15,2 0-3-15,1-2-8 0,2-1-3 0,1-1-1 0,1-2-1 0,1 1-1 16,1-1 5-16,1-2 2 0,-1 0 0 0,2-1-3 0,1-2-7 16,1 0-10-16,2-1-5 0,1-1-3 0,1 0-13 0,2-1-15 0,1 0-28 15,1-1-23-15,3 0-20 0,0-2-29 0,2 0-25 0,1-2-28 0,4-2-9 16,2-1 4-16,5-4 12 0,5-1 25 0,1-4 28 0,5-3 37 16,0 0 42-16,1-3 35 0,2-1 8 0,1 0-79 0,1 0-71 0</inkml:trace>
-  <inkml:trace contextRef="#ctx0" brushRef="#br0" timeOffset="-118912.92">14755 8224 278 0,'4'-4'113'0,"1"1"-11"0,0-1 30 0,-1 3 24 16,-3 0 8-16,0 1-3 0,-1 0-17 0,-1 1-19 0,1-1-20 16,0 1-16-16,-1 0-18 0,1 0-19 0,-1 1 3 0,-1 0-14 0,1 2 1 15,-1 1-6-15,1 1 0 0,-1 0-1 0,0 1 0 0,-2 0-2 0,0 1 1 16,-1-1-3-16,-1 0 2 0,-1 1-3 0,-1 1-2 0,-2 1-6 16,-1 0-5-16,-3 1-2 0,0-1-5 0,-1 2 2 0,-2 1-3 0,-1-1 0 15,-2 0-5-15,0 0 2 0,-4-1 0 0,1 2-3 0,-2-2 3 0,-1 2-3 16,2-1 0-16,0-1 2 0,0 1-2 0,-1 0 1 0,1 0-4 15,1 0 0-15,1-1 6 0,2 2-4 0,2-2 1 0,1 0 1 0,2 0-4 16,3-2 0-16,3 1 3 0,2 0-4 0,2-1-1 0,3 0 2 16,1-2-6-16,4-1 0 0,1 0 3 0,4-1 2 0,3 0 2 0,3-1 2 15,5 1 3-15,2-1 5 0,3-2 2 0,6 0 2 0,0-1-1 16,5-1-6-16,-2-1-7 0,1 0 4 0,3-1-2 0,-2 0 1 0,0 0-2 16,-1-1-1-16,-1 0-1 0,0 1 3 0,-2-1 2 0,-2 2 1 0,-1 0-1 15,-4 1-5-15,-1-1 0 0,0 0-3 0,-3 1-1 0,1 0-2 16,-1 0-21-16,-2 1-60 0,0-1-72 0,-1 0-93 0,0 0-121 0,1 0-53 15,-2 1 68-15,0-2-181 0</inkml:trace>
-  <inkml:trace contextRef="#ctx0" brushRef="#br0" timeOffset="-118628.92">13270 9159 271 0,'-1'-3'77'0,"0"-1"-75"0,1-1-7 0,2 2-1 0,2 0-1 0,0 0 0 16,2 0-3-16,0 0-1 0,-1 0-19 0,1 1-107 0</inkml:trace>
-  <inkml:trace contextRef="#ctx0" brushRef="#br0" timeOffset="-118095.92">13353 9060 214 0,'-1'-6'89'0,"0"1"-25"0,0-2-3 0,0 0 5 0,-1 0 1 15,0 1 0-15,0-1-2 0,0 1-2 0,-1 2-7 0,0-1-5 0,-1 1-9 16,2 0-7-16,-1 1-6 0,1 1-8 0,-1 0-7 0,0 1-2 15,0 2-3-15,0-1-1 0,0 1-1 0,1 0-2 0,-1 1-5 0,1 0-4 16,0 1-4-16,0 0-4 0,0 1-4 0,1 0-2 0,1-1 2 0,0 1 3 16,0 1 6-16,0-1 2 0,-1 0 4 0,1-1 5 0,0 0 2 15,0-2 6-15,1 0 1 0,-2-1 10 0,1 0 5 0,0 0 10 0,-1-1 8 16,0 1 2-16,0 0-1 0,0-1-8 0,0 0-8 0,1 1-11 16,0-1-4-16,0 0-6 0,0 1-3 0,0-1-1 0,-1 0-6 0,1 1 0 15,1-1-1-15,-1 0-1 0,1 0 2 0,0 0 0 0,0 0-2 0,0 0 2 16,0 0 3-16,1 0 2 0,0 0 2 0,1 0 12 0,1-1 6 15,0 1 2-15,3-2 2 0,1 0-5 0,1 1-4 0,5-1-1 0,1 0 0 16,2-1-7-16,3 0 0 0,2 1-7 0,3-1-1 0,-1 2 1 0,3 0-4 16,-1 1 3-16,2 0-3 0,0 1-2 0,1 1 2 0,-1 0-2 15,0 0-3-15,-2 1 7 0,-1 1-8 0,-2 0 3 0,-3 0 7 0,-1 1-3 16,-2 0 7-16,-1 0 4 0,-4-1 3 0,-2 1 9 0,-3 0 2 0,-2 0 4 16,-2 0 2-16,-3 0-3 0,0 1 5 0,-3 0-2 0,-3 1 4 15,-2 0 0-15,-5 0-6 0,-2 2-4 0,-5-1-5 0,-5 3 7 0,-1-1 2 16,-5 1 5-16,0-1 1 0,-3-1-7 0,0 1 2 0,0-2-1 15,0 2-5-15,2-1-1 0,-1 0-2 0,2 0-11 0,0-1 0 0,4 0 0 16,3-2-2-16,2-1 5 0,5-3-1 0,0 0-5 0,3-1 0 0,1-1-4 16,3-1-1-16,2-1-2 0,2-1-1 0,2-2-1 0,3-1-4 15,1 0-1-15,2-2-6 0,2-1-1 0,3 0 3 0,1 0 8 0,4-1 2 16,0-1 2-16,2 0 3 0,0 1-6 0,0 1 2 0,3 1-1 0,1 0-4 16,-1 2 12-16,2 1-4 0,1 2 0 0,0 1 2 0,-2 1-5 15,1 1 4-15,-1 2 3 0,-1 0 0 0,-1 1-1 0,1 0-2 0,-1 2-3 16,-2-1 0-16,1 1 6 0,-1-1 1 0,0-1-1 0,-3 1 5 15,-1-1-2-15,-2 0 5 0,-1 1 7 0,-2-1-5 0,-1 0 0 0,-2 0 1 16,-1 0-4-16,-1-1 2 0,-1 1 1 0,-1-1 0 0,-3 1-3 0,-1 0-4 16,-1 1-4-16,-2 0-5 0,-1-1-8 0,-2 0-5 0,-1 0-6 15,0-1-11-15,0 1-8 0,3-2-29 0,-1 0-21 0,0-1-39 0,2-2-47 16,0 1-50-16,2-3-92 0,0 0-70 0,1-1 20 0,0-4 65 0,-1-4-145 16</inkml:trace>
-  <inkml:trace contextRef="#ctx0" brushRef="#br0" timeOffset="-117295.92">13033 8837 1070 0,'-25'-12'29'0,"-1"2"34"0,-3-3 9 0,6 3-2 0,6 2-19 16,2 1-13-16,4 0-6 0,-1 1-13 0,3 0-6 0,0 0-3 15,1 0-8-15,3 1-3 0,1-1-2 0,1 0-3 0,3 0 0 0,-1 1-2 16,2-1 0-16,-1 0 1 0,1 1 0 0,2 1 2 0,-1-1 4 15,0 0-1-15,2 1 10 0,-1 0 6 0,0 0 10 0,-1 2 8 0,1 1 4 16,-1 1 4-16,0 1 3 0,1 1 7 0,-1 1 1 0,1 2 5 16,-1 1-1-16,1 2 0 0,0 2-4 0,0 4-2 0,1 1-3 0,0 4-9 15,0 0-3-15,-1 3-8 0,1 2-5 0,0-1-5 0,-1 2-4 0,0 0 4 16,-1 1-1-16,0 0 1 0,0-1 3 0,-1 0-6 0,-1-2-7 0,1 1 2 16,-2-2-4-16,1-3 1 0,-2 1 2 0,1-2 1 0,-2-2 1 15,1-1 1-15,-1 1 2 0,0-2 2 0,0-2 7 0,0 0-4 0,0-1 2 16,-2-2 4-16,1 0-4 0,0 0 7 0,-1-3 4 0,1 1-2 15,0-1 0-15,0-1 1 0,1-1-4 0,1-1 1 0,0-1-6 0,2 0-5 16,0-1-2-16,0 0-4 0,2-1-2 0,-1 0 1 0,2 0-3 0,1-1 3 16,0 0 3-16,1 0 1 0,1-2-1 0,0 1 1 0,0-1-7 15,0 0 0-15,2-2 0 0,1 1-4 0,2-1 4 0,0 1-2 0,1-1-1 16,1 0 0-16,2-1-7 0,1 0 5 0,-1 1-7 0,1-1-6 0,1 1 0 16,1-2-12-16,0 0-4 0,0-1-11 0,2 1-18 0,0-1-18 15,-1 1-18-15,1-1-25 0,0-1-30 0,1 1-47 0,2 0-47 0,-1 1-49 16,2-1-34-16,-1 0 23 0,-1-1 73 0,0 1-197 0</inkml:trace>
-  <inkml:trace contextRef="#ctx0" brushRef="#br0" timeOffset="-116895.41">12922 8745 601 0,'-28'-11'503'0,"-2"-1"-423"0,-5-2 40 0,7 3 8 0,6 0-7 0,4 0-21 0,2 0-15 16,2 1-3-16,3-1-10 0,4 2-14 0,0 0-10 0,3-1-8 16,2 1-8-16,2 1-9 0,3 0-4 0,1 0-8 0,3 0-2 0,0-1 4 15,4-2-3-15,2 0 7 0,4 0 0 0,2 0 0 0,3 3-2 16,2-2-5-16,1 1 2 0,3 1-5 0,3 1 4 0,4 0-1 0,1 1-4 16,4 1 2-16,1 2-4 0,0 1-1 0,1 0 2 0,1 1-5 0,0 2 1 15,-1 1-2-15,0 0-1 0,-1 1 1 0,0 0 1 0,-1 1-3 16,-2-1 3-16,-3 1 0 0,0-1 1 0,-4 0 4 0,0-1-5 0,-3-1 1 15,-1 0 4-15,-1 0-2 0,-4 1 0 0,0-1-3 0,-3 1 0 0,-3 0 3 16,-2 0 0-16,-1 1 4 0,-2 0-1 0,-2 0-1 0,-1 2 4 16,-1 0 1-16,-2 1 6 0,-1 2 2 0,-1 2 2 0,-1 1 1 0,-1 2 2 15,-3 2 2-15,0 1-1 0,-1 3-4 0,0 2 0 0,-1 1-4 16,0 3-5-16,0 0-6 0,0 3-2 0,1 1-4 0,1 0-4 0,2 1-5 16,1 0-2-16,1 1 2 0,1-2 4 0,1 0 4 0,-1-3 7 0,0-1-5 15,-1-5 3-15,-1-1 2 0,-1-2-2 0,-2-2 0 0,-1-1 0 16,-3 0 4-16,-2 0-1 0,-2 0 0 0,-3 0-7 0,-4 0-10 0,-1 3-16 15,-3 0-18-15,-3-3-20 0,-1 0-27 0,-2-1-36 0,-1-3-27 0,0 0-46 16,-1-1-53-16,0-3-55 0,0 1-33 0,0-1 54 0,-5 0-204 16</inkml:trace>
-  <inkml:trace contextRef="#ctx0" brushRef="#br0" timeOffset="-116262.41">10003 13609 1814 0,'-15'4'108'16,"-1"1"6"-16,1 1-43 0,4-1-6 0,3-3-12 0,4 0-26 0,1-1-23 15,0 0-4-15,3 0-4 0,0-2-7 0,1 0 7 0,2 0 0 0,0-1-1 16,1-1-2-16,0 0-3 0,1-2 11 0,1-1 2 0,-1-1 15 16,3-2 10-16,-2-1-6 0,1 0 19 0,0-3 3 0,0-1 1 0,0-2 11 15,0 0-9-15,1-3-2 0,0-3 2 0,-1 0-1 0,-2-4 6 16,1-2-6-16,1-6-19 0,0-1 8 0,2-6-10 0,1-3-5 0,1-3 9 16,0-7-18-16,2-4-2 0,1-5-4 0,2-5-5 0,1-6 2 0,3-4-14 15,2-3 10-15,4-6-3 0,3-2-2 0,3 0 11 0,3 1-9 16,-1 2-2-16,1 3 2 0,-1 4-2 0,1 3 7 0,0 1-2 0,-3 2-8 15,2 0 2-15,-3 2-2 0,0 3 3 0,0-1 4 0,0 1-5 0,-1 1 6 16,2 0 2-16,-2 1 2 0,3 0 9 0,1-1-16 0,3-3-1 16,1 1-2-16,0-2-4 0,1-1 4 0,0 3-1 0,2-3-4 0,5-2-3 15,1 0-12-15,1-2-14 0,0-1-5 0,3 0-4 0,1 1 2 16,2 1 6-16,1 3 12 0,-2 2 11 0,-2 3 12 0,-3 5 7 0,-1 4 2 16,-6 4 4-16,-2 4 1 0,-4 4-1 0,-5 4 1 0,-2 6 0 0,-5 3 2 15,-1 4 8-15,-3 2-2 0,-3 4-3 0,-2 3-5 0,-2 2-1 16,-2 6 2-16,-2 2 4 0,-2 2 1 0,-2 2 0 0,-3 2-7 0,-1 1-5 15,0 1-10-15,0 2-10 0,0 0-21 0,0 1-10 0,0 0-12 0,-1 2-25 16,0 0-23-16,0 2-40 0,0-1-41 0,2 1-47 0,1 1-44 16,0-1-31-16,2-1 30 0,3-3-163 0</inkml:trace>
-  <inkml:trace contextRef="#ctx0" brushRef="#br0" timeOffset="-115679.41">12433 9179 2381 0,'-1'-4'39'0,"2"0"-16"0,4 0-11 0,7 3 8 16,5 0 8-16,3-1 5 0,6 1-4 0,1 0-12 0,6 1-6 0,0 0-4 15,4 2-3-15,0-1-2 0,3 2 1 0,5 0-4 0,1 0 2 16,2 0 1-16,1-1-1 0,-1-1-2 0,0 0-4 0,-1 0 0 0,0-1-4 15,-2 1 4-15,-3 0-2 0,-3 0 0 0,-4 0 3 0,-2 1 4 0,-3-1 2 16,-4 0-2-16,-2 1 0 0,-5 1-8 0,-2 1-8 0,-3 0 4 16,-4 1-14-16,-4 0 3 0,-4 0 8 0,-2 0-6 0,-3 1 11 0,-4 0 2 15,-5 0-3-15,-4 4 2 0,-4 0-2 0,-5 3-6 0,-4 2 1 16,-4 1-1-16,-5-1 0 0,-3 3 2 0,-2 0 11 0,-2 0 5 0,-2 1-1 16,-3 1 3-16,0 1-3 0,0 1-3 0,3-1-6 0,-1-1 2 0,2 1 1 15,3 0 3-15,3-1 10 0,4 0-4 0,4-2 3 0,3 0-15 16,4-2-4-16,2 0-13 0,5-1-14 0,4-2-1 0,3-2-7 0,1-1 1 15,2-2 2-15,2 0-11 0,1-2 4 0,3-1-5 0,0-1-3 0,2-1 2 16,1 0-5-16,2-1 9 0,1 0 3 0,0-2 11 0,1 1 10 16,2-1 7-16,0-1 8 0,1 1 5 0,-1-2-3 0,3 0 7 0,0 0-3 15,1-1-2-15,0 0 5 0,2 0-3 0,-1-1 5 0,1 0 3 16,2-1-3-16,-1 1 1 0,-1-1 1 0,-1 0 4 0,0-1-1 0,0 1 0 16,1 0-1-16,-1-2-2 0,0 1 2 0,1-1 0 0,-2 0 0 0,1 2 2 15,0-2 1-15,-2 1-3 0,0 1 4 0,0-1-1 0,-2 1 3 16,0 1 3-16,1-1-6 0,-2 1 4 0,0 0-2 0,0-1 2 0,0 2 2 15,0-1-6-15,0 0 4 0,0 0 1 0,-1 0-1 0,-1 1 5 0,1-1-6 16,-2 0 0-16,2 2 0 0,-1-2-4 0,0 2 3 0,0 0-3 16,-1-1-4-16,0 1 2 0,0 0-5 0,-1 0 3 0,0 1 2 0,0 1 4 15,-1-2 1-15,1 1 4 0,-2 1-1 0,0-1 2 16,-1 0 3-16,-1 0-2 0,1 1-1 0,0 0-1 0,0 0-2 0,-1 0-3 0,1 0 1 16,-1 0-5-16,1 0-5 0,1 0-4 0,-2-1-4 0,2 2-15 0,-1-1-41 15,2 0-63-15,0 1-68 0,3 0-48 0,0-1 11 0,3 0 44 16,3-2-174-16</inkml:trace>
-  <inkml:trace contextRef="#ctx0" brushRef="#br0" timeOffset="-114928.41">13842 9765 1994 0,'-20'-6'24'0,"-1"0"6"15,-5 0-9-15,5 2-13 0,7 3-16 0,2 2-13 0,2 1-16 16,2 1-9-16,3 1-2 0,0 1 3 0,1 0 2 0,0 1 3 0,2 0 2 15,0 1 1-15,1-1 5 0,1 1 4 0,0 0 4 0,1 0 4 0,0 0 5 16,0-1 11-16,0-2 3 0,-1 1 1 0,2 0 2 0,-1 0 0 16,1 0-4-16,0 0 4 0,1 0 1 0,-1 0 5 0,1 1 2 0,0 1 0 15,1 0 1-15,0 1-1 0,0 1 3 0,0 0 4 0,1 0-3 16,1-1-1-16,0 1-4 0,0 1-7 0,-1 1 1 0,1 0 3 0,1 1-2 16,0 0 4-16,1 0-4 0,0 2-1 0,0 0 1 0,2 1-2 0,-3-1 2 15,2 3 0-15,1 0 1 0,0-1-3 0,0 2-1 0,1 0 12 16,-1 2 8-16,2 2 3 0,1 1 0 0,1-1-14 0,-1 3-8 0,-2-2 4 15,0 0-2-15,0 1-1 0,0 0 1 0,-1 3-2 0,1 4 1 0,-1 0 1 16,1 2-1-16,0 1-1 0,0-1 1 0,-1 4 0 0,2 0-4 16,-2 4-1-16,2 1-6 0,-1 3 0 0,0 3 3 0,-1 2-1 0,0 4 9 15,1 3 0-15,0 2-6 0,1 1 6 0,-1 0 13 0,-2-1 12 0,0-2 23 16,-1-1 11-16,0-2-1 0,0-1-5 0,-1-3-7 0,2-1-10 16,0-2-10-16,0 0-2 0,2 0-12 0,1 0-4 0,2 3-4 15,1-2-4-15,0-1 2 0,3 1-1 0,1 2-1 0,-1-2-4 0,2 1 1 16,1-1 1-16,-2 0-2 0,3 0 4 0,-2-3-2 0,0 2 2 0,0-1 2 15,1 0-4-15,0-2 4 0,1-2-5 0,1 0-3 0,-2 1 7 0,2 1-2 16,2-2 2-16,-1 2 3 0,2-2-7 0,-2 0 3 0,0 1 1 16,-1-2 1-16,-1-1 1 0,0 1-2 0,0-2 1 0,-2-1 6 0,1-1-1 15,-1-3 4-15,-1-1 0 0,0-2 2 0,0 0 4 0,-3-3 6 0,2 2 12 16,-2-4 3-16,0 1 6 0,-1-3-6 0,0 1 3 0,0-1 2 16,-1-1-8-16,-1 1 0 0,-1-1-8 0,1 1-5 0,1 1 9 0,-1-1-2 15,1 1-4-15,0 1-3 0,-1 2-6 0,0 0-5 0,-3 2 3 16,2 0-6-16,0-1-3 0,-1 0 4 0,0 1-10 0,0 0 3 0,-2 1-3 15,2 1-11-15,-1-1 11 0,0 1-4 0,1 0-3 0,-1 0 5 0,-1 2 0 16,-1-1 0-16,0 2-3 0,0-1 1 0,-1 1-5 0,1-1 5 16,0 3 6-16,-1 1-8 0,2-1-1 0,-1 0-2 0,0-2-8 0,0-1-8 15,0 1-1-15,0-1-7 0,0 0-4 0,0-3-1 0,2 2-4 0,0-3-8 16,1 0 2-16,0-1-10 0,1-1-12 0,-1-3-21 0,2 0-17 16,0-3-13-16,2-3-15 0,-1-2-17 0,2-1-26 0,2-2-7 0,1-4 0 15,2-1 5-15,2-2 26 0,1-4 7 0,4-4-1 0,1-3 7 0,2-3 10 16,0-2 21-16,2-3 31 0,-1-3 27 0,4-2 2 0,1-2-194 15</inkml:trace>
-</inkml:ink>
-</file>
-
-<file path=ppt/ink/ink5.xml><?xml version="1.0" encoding="utf-8"?>
-<inkml:ink xmlns:inkml="http://www.w3.org/2003/InkML">
-  <inkml:definitions>
-    <inkml:context xml:id="ctx0">
-      <inkml:inkSource xml:id="inkSrc0">
-        <inkml:traceFormat>
-          <inkml:channel name="X" type="integer" max="34422" units="cm"/>
-          <inkml:channel name="Y" type="integer" max="19362" units="cm"/>
-          <inkml:channel name="F" type="integer" max="4095" units="dev"/>
-          <inkml:channel name="T" type="integer" max="2.14748E9" units="dev"/>
-        </inkml:traceFormat>
-        <inkml:channelProperties>
-          <inkml:channelProperty channel="X" name="resolution" value="1000.05811" units="1/cm"/>
-          <inkml:channelProperty channel="Y" name="resolution" value="1000.10333" units="1/cm"/>
-          <inkml:channelProperty channel="F" name="resolution" value="0" units="1/dev"/>
-          <inkml:channelProperty channel="T" name="resolution" value="1" units="1/dev"/>
-        </inkml:channelProperties>
-      </inkml:inkSource>
-      <inkml:timestamp xml:id="ts0" timeString="2025-07-17T10:22:36.592"/>
-    </inkml:context>
-    <inkml:brush xml:id="br0">
-      <inkml:brushProperty name="width" value="0.05292" units="cm"/>
-      <inkml:brushProperty name="height" value="0.05292" units="cm"/>
-      <inkml:brushProperty name="color" value="#FF0000"/>
-    </inkml:brush>
-  </inkml:definitions>
-  <inkml:trace contextRef="#ctx0" brushRef="#br0">11797 6092 1549 0,'-7'-7'56'16,"-2"1"-27"-16,0 0-23 0,3 2-7 0,3 3-5 0,1 1-3 0,2 1-6 16,1 1 2-16,2 1-4 0,1-1-6 0,2 3 6 0,2 1-5 15,2 0 5-15,-1 1 8 0,4-1-5 0,1 0 6 0,2 1-2 0,0-1 1 16,1 0 5-16,1-1-2 0,0 1 5 0,1 0 1 0,1 0 1 15,0 0 5-15,1 0 4 0,1 0 2 0,1 0-4 0,0 1 2 0,0 0-4 16,0-1 5-16,1 2 1 0,2 0 0 0,0 1 1 0,0 0 2 0,-2 0-1 16,1 1-4-16,-1-1-2 0,-1 1-1 0,1 2-4 0,0 0 6 15,0 0-3-15,1-1-6 0,-1 0 4 0,0 0-5 0,0 0 2 0,2 0 3 16,0-1 4-16,0 0 4 0,1-1 0 0,-1-1 2 0,3 0-2 0,-2-1-7 16,2-1 2-16,0-1-1 0,0 0 1 0,1-2-3 0,3 0 1 15,-2-1-6-15,2-2 1 0,-2 1 2 0,0-2-1 0,0 0 2 0,1-1 1 16,-1-1-2-16,1 0 0 0,-3-2 0 0,0 0 2 0,-1-1-4 0,0 0 4 15,-2-1 0-15,0-1-1 0,0 0 1 0,-2-1-3 0,2-2 0 16,-3-1 1-16,1 1 5 0,-1-1 0 0,-1 1 2 0,3 0-2 0,-1-3-2 16,-1 1 0-16,-1 0-2 0,-2 1 0 0,-1 0-1 0,0 0 1 15,-2 0-2-15,-2 0 2 0,1 1 1 0,-2-1 4 0,-1 1 1 0,-2-1 2 16,-2 2-2-16,-2-1 6 0,-1 1 9 0,-2-2 2 0,-1 0 6 0,-2 0 4 16,-2-2-3-16,-1 2 5 0,-2-2-1 0,-2-1-2 0,-2-1-6 15,-2 0-5-15,-1-2-3 0,-2 0-2 0,-2 0 0 0,-2-1-3 0,0 0 5 16,-2 0-4-16,0 1 2 0,-2-1 2 0,-2 0-6 0,-2 1 2 0,0-1 1 15,-1 1-6-15,1 1-6 0,0-1 4 0,0 0-6 0,0 2 9 16,-1 0 8-16,1 0-4 0,-2 0 3 0,2-1-12 0,-1 2 0 0,-1-1-5 16,0 0-4-16,-1 1 7 0,1 2-5 0,-1 0 4 0,1-1 3 15,0 1-7-15,1 1 3 0,-1-2-1 0,1 0-2 0,0 0 1 0,-2-1 1 16,1 1-3-16,-2-2 0 0,2 0 2 0,-1 0-1 0,2 0 4 0,-1-1-7 16,-1 0 2-16,0 0-1 0,-2 0-7 0,1 0 11 0,0 1-3 15,0 2 5-15,1-1 1 0,1 0-8 0,-1 0 7 0,2 2-3 0,-2-1 1 16,1 2 3-16,2 2-6 0,-2 0 5 0,3 1-3 0,-2 3-4 0,0-2 0 15,-2 2-12-15,0 0 3 0,1 1-1 0,0 2 5 0,0-1 1 16,-2 2 3-16,1 0 3 0,-1 2-5 0,0 0 7 0,-1 2-1 0,0 0-4 16,-1 1 2-16,1 3 5 0,-1-1-1 0,2 3 5 0,0-1-3 0,2 1-10 15,0-1-1-15,2 1-3 0,3 1-1 0,1-1-7 0,3 0-6 16,2 0-14-16,2 1-21 0,0-1-16 0,1 1-23 0,3 1-20 0,-1-2-26 16,3 0-26-16,2 1-44 0,1 0-65 0,2-1-75 0,1 1-272 15</inkml:trace>
-  <inkml:trace contextRef="#ctx0" brushRef="#br0" timeOffset="19701.22">13003 7648 765 0,'-4'-1'60'0,"1"0"-51"0,1 1-14 0,2-1-4 0,1 0 1 15,2 0 2-15,0 0 0 0,0 0 3 0,1 0 4 0,1 0-3 0,0 0 6 16,-1 0-3-16,0 0-2 0,-1 1 1 0,1 0-1 0,0 1 0 0,0-1-2 16,-2 1 7-16,1 0 1 0,-1 1 7 0,-1 1 3 0,1 0 3 15,0 1 0-15,-1-1-3 0,1 1 1 0,0 0-2 0,0-1-3 0,0 1 2 16,1-1-2-16,0 0-1 0,1 0 0 0,1-2-2 0,1 1 2 16,1-1 0-16,1 0 3 0,2-1 7 0,2 0 3 0,2 0 4 0,1 0 8 15,1 0 1-15,3 0 8 0,0 0 6 0,3 1 6 0,3 0 2 16,1 0 2-16,2 0-1 0,0 1-3 0,5 0-8 0,1 0-7 0,3 1-5 15,0 0-10-15,0 2-1 0,3 0-6 0,1-1-4 0,2 2-5 0,3-1-6 16,1 0-1-16,1 1-2 0,2-1 0 0,2 0 5 0,1-1-2 16,3 0-3-16,-1-1-1 0,2 0-1 0,1-1-1 0,-1-1-2 0,1 0-1 15,2-1-2-15,0-1 2 0,1-1 0 0,0 0 4 0,1-1-1 0,1-1 2 16,-1 0-1-16,0-1 1 0,0 0-1 0,0-2-2 0,0 1 2 16,-2-2 0-16,0-2 1 0,-1 0 1 0,-1 0 0 0,0-1 0 0,-2 0 3 15,-3 1 6-15,0-1 3 0,-2-1 1 0,-2 0 1 0,0-2 3 16,-1 1 4-16,-2-1-1 0,0 0 3 0,-2-1-6 0,-1 2 1 0,0-2 3 15,-2 0 0-15,-1 1-1 0,0 1-2 0,-3 0-3 0,-2 1-4 0,-1 0 5 16,-2 0-1-16,1 0 0 0,-3 0 2 0,-1-1-6 0,-2 2 2 16,-1-1 3-16,-1 0 3 0,-1 1 2 0,-1-2-6 0,-3 0-2 0,0-1-3 15,-2 2 1-15,-2-1-3 0,0 1 3 0,-2-1-8 0,-1-1-1 0,-3 1 2 16,-4-2-1-16,-1-1 1 0,-2-1-4 0,-2-1 4 0,-2-2-2 16,-3-2 1-16,-2 0 4 0,-4-2-5 0,-2-1 1 0,-4-2 10 0,-3 0 2 15,0 0 11-15,-4-2 4 0,-1 2-2 0,-3-2 6 0,-2 2 0 0,-1 1 4 16,-1 0 5-16,0 1-4 0,-1 0 5 0,0 2-5 0,1-2-6 15,-1 2-9-15,1 0-9 0,-3 1-6 0,-1 2-12 0,-1 1 1 0,0 2-6 16,-1 0-1-16,-3 2-5 0,0-1 3 0,-2 1 3 0,-2-1-2 16,-2 3 2-16,-3-1 1 0,0 1-4 0,-3 1 3 0,-1 1 3 0,-2 2-8 15,-3 0 9-15,-2 0-5 0,-1 3-3 0,-1-1 6 0,-1 2-8 0,-1 1 8 16,0 0 5-16,1 2-1 0,-1 1-1 0,0 1 5 0,1 1-4 16,1 2 2-16,-1 0-1 0,1 2-3 0,0-1 6 0,-1 1-6 0,1 1 3 15,2 0-3-15,0 1 0 0,0 0 1 0,0 2-1 0,1-2 1 0,-1 3 1 16,1 0 1-16,1 0-2 0,-1 1 0 0,1 1-1 0,0 0 2 15,2 2 1-15,1 1-4 0,-1 1 1 0,1 0-3 0,0 3 1 0,1 2-5 16,1 1-9-16,-1 4-1 0,2 1-15 0,1 2-4 0,1 1-10 16,2 1-18-16,2-1-19 0,2 2-25 0,4 2-31 0,2 1-42 0,0 3-65 15,2 2-104-15,-1 2-452 0</inkml:trace>
-  <inkml:trace contextRef="#ctx0" brushRef="#br0" timeOffset="56486.42">16162 9067 1290 0,'1'-3'160'0,"0"0"-101"0,2-1-40 0,1 0-5 0,1 1-7 15,2 0 3-15,1 0-4 0,1 1-3 0,2 0-2 0,2-1-2 0,2 1 3 16,-1 0 1-16,3-1-1 0,1 1 2 0,0 0 2 0,1 0 1 0,2-1 6 16,0 1 2-16,1-1 8 0,1 0 1 0,1 0 1 0,2 0 3 15,0 1-5-15,1 0 2 0,1 0 4 0,2 0-2 0,2 0 1 0,0 0-3 16,1-1-4-16,-3 0 6 0,2 0-2 0,0-1 1 0,2 0-2 0,-1-1-2 16,1 0-1-16,-1-1 1 0,0-1 0 0,1 1 1 0,-2 0 2 15,2-3-2-15,-1 0-4 0,1 0-9 0,-1-1-1 0,1 0-9 0,-1-1 0 16,1 1 4-16,1 0 2 0,0-1 6 0,-2 1 0 0,0-1-1 0,1 0-6 15,-3-1-2-15,2-1 3 0,-3 0 1 0,0 0 1 0,-1 1 2 16,0-2-1-16,-2 1 2 0,-1-1 1 0,-2 1-3 0,0 0-3 0,-1 1 1 16,-2 0 1-16,1 1-2 0,-3-1 0 0,-2 0 1 0,0 0-2 15,0 0 3-15,-1 0 2 0,-2 1-2 0,1 0 1 0,-2 0 2 0,-1-1-3 16,-3 0 1-16,-1 0 5 0,-1 0-4 0,-2 0 4 0,-1 0-1 0,-1 0-7 16,-1-1 0-16,-2 2-1 0,-1-3-2 0,-3-1-1 0,-1 0-2 15,-3-3-11-15,-3-1-5 0,-2-3-2 0,-6 0-4 0,-2-1 2 0,-4-2 5 16,-2 1 4-16,-3-1 14 0,-5-1 5 0,-1-1 2 0,-3 0 1 0,-5 0-8 15,0 0 2-15,-2 2-1 0,-3 0 3 0,-2 1-1 0,0 1 1 16,-4 1 1-16,-1 2-3 0,-3 0 0 0,-4 1-2 0,0 1 1 0,-2 1 6 16,0 0 2-16,-1 4 1 0,0 2-1 0,1 1 1 0,-3 2-1 15,3 3-1-15,0 2 1 0,-2 3-5 0,2 2 5 0,-1 3-6 0,1 2 0 16,0 3 6-16,3 2-4 0,0 3 4 0,0 4 0 0,1 1-1 0,-1 3-1 16,1 2-1-16,1 0 6 0,1 1-5 0,1 0 4 0,3 3 1 15,1-1-2-15,4 4 2 0,2-1-7 0,3 2-16 0,4 1-2 0,0 2-3 16,3 0 0-16,4 4 11 0,3 0-4 0,2-1 2 0,4 0-2 0,2-2 6 15,4-1 0-15,3 0 5 0,3-3-2 0,2-2 2 0,4-2 3 16,1 0 2-16,3 0 3 0,2 1-2 0,3 1 1 0,2-1-4 0,1-3-11 16,3-1 1-16,3-2 2 0,1-1-3 0,1 1 9 0,2-3-7 0,0 2-1 15,2-2-3-15,2-1-1 0,-1 1-7 0,2-2-9 0,0-2-9 16,1 0-17-16,2 0-26 0,3 0-36 0,0-2-54 0,3 1-67 0,1-1-93 16,3-1-138-16,3-2-417 0</inkml:trace>
-  <inkml:trace contextRef="#ctx0" brushRef="#br0" timeOffset="98538.54">18240 8692 300 0,'-9'9'112'0,"-1"2"-60"0,-2 2-24 0,3-2-13 15,0-2 1-15,1-2 8 0,1 0 5 0,0-1 11 0,0-1 6 0,1 1 5 16,0-2 6-16,1 0-6 0,2-1-2 0,0-1-5 0,0 0-8 16,2-1-4-16,0-1-11 0,1 1-10 0,1-1-5 0,2 1-4 0,0 0 6 15,0 0-1-15,3 0-1 0,0 1 0 0,1 0-4 0,1 1 0 0,1 1 1 16,2 0-3-16,0 2-2 0,1 0-1 0,1 1-10 0,2 2-6 15,2 1-20-15,0 0-30 0,2-1-56 0,0 0-73 0,-1-1-237 0</inkml:trace>
-  <inkml:trace contextRef="#ctx0" brushRef="#br0" timeOffset="104738.63">11488 13014 989 0,'-24'5'59'16,"1"1"-41"-16,-3 2 25 0,8-2-2 0,6 0-3 0,1 0-8 0,3-1-7 15,1 0 8-15,1 0-3 0,1-1 1 0,1 0-5 0,2 0-10 0,0-1-3 16,1-1-3-16,3 1-7 0,-1-1 4 0,3 1-1 0,2 0-1 0,0-1 8 15,1-1-4-15,2 1 2 0,0-1 1 0,2 0-2 0,3 0 0 16,1-1-3-16,1-1 0 0,3 0 0 0,3-2-5 0,0 0 2 0,3-2-1 16,0-1-2-16,0-1 1 0,2 1-4 0,0-2 6 0,2 0-2 15,-1-1-2-15,1 0 0 0,1-1-5 0,1-2 0 0,-1 1-2 0,1-2 0 16,0 0-1-16,0 0 6 0,1-1-1 0,1-1 3 0,-2 0-5 0,2 1-3 16,-3-2 3-16,3 0 0 0,-1 0 7 0,1-1 3 0,-2 0-6 15,-1 0 3-15,-1 1-4 0,1-2-1 0,-2 0 7 0,1 0-3 0,-3 0-2 16,-1 1 0-16,-1 0 0 0,-4 1-1 0,0-2 9 0,-1-2-6 0,-3-1 7 15,2 1 1-15,-2-1-3 0,-2 0 10 0,0 2-8 0,-2-2 8 16,-1 2-1-16,-1-1-1 0,-2 0 8 0,-3-1-5 0,0 0 3 0,-2-2 3 16,0 1-5-16,-3-1 3 0,-1-1-5 0,-2 2-2 0,-1-1-4 0,0 0 0 15,-3 1 3-15,0-1-2 0,-2 0-3 0,-1-1-2 0,0-1-1 16,-2 2-4-16,0-1 4 0,-3 1-8 0,-1 2-8 0,-2 0 4 0,-2 1 1 16,-3-1 1-16,-2 2 6 0,-3 0-7 0,-3 2-2 0,0-1 6 15,-3 1-1-15,-2 2 1 0,-2-1 3 0,-3 3 2 0,0 1 5 0,-3 2 9 16,0 3 1-16,-3 1 1 0,2 3 3 0,0 2-1 0,-1 2 9 0,1 3 0 15,0 1-4-15,2 2 5 0,0 4-12 0,3 1 0 0,2 3 1 16,1 2-9-16,1 2 0 0,1 5-2 0,0 1-6 0,3 4 7 0,0 2-6 16,3 0-9-16,1 0 7 0,2 3-3 0,2-1 2 0,4 3 1 15,4-2-19-15,4 0-6 0,4-2-20 0,6 1-19 0,2-1-22 0,6-1-27 16,5-1-24-16,4-1-14 0,7-3-16 0,6-3-19 0,6-2-14 0,4-2-260 16</inkml:trace>
-  <inkml:trace contextRef="#ctx0" brushRef="#br0" timeOffset="105205.62">14069 12511 1177 0,'-8'0'65'0,"2"2"-16"16,-2-1 7-16,3 1-3 0,3 0-6 0,1-1-15 0,1 1-8 0,1 0-7 15,1 1-6-15,2 1 2 0,1-1-3 0,1 2 1 0,4 0-2 16,2-1-4-16,3 1 2 0,2 0-3 0,2-1-3 0,3 0-3 0,3 0-5 16,3-2 4-16,1-1-3 0,2-1-1 0,2-1-4 0,0-2-6 15,1-1 0-15,-1 0-1 0,0-2 1 0,0 0 4 0,-1-1-7 0,0-3 11 16,-2-1-1-16,1-2 1 0,-2 0 8 0,1 0-11 0,-4-1-1 0,-1 0 5 15,-2-2 2-15,-4 2 8 0,1-2 4 0,-2-1 0 0,-2-1 1 16,1 2 0-16,-2-1 7 0,-2 1 2 0,-2 1 0 0,-1 1 2 0,-2-1 3 16,-2 1 2-16,0 1 5 0,-2 2 5 0,-1-2 2 0,-1 0 2 0,-2 0-4 15,-2-2 1-15,0 0-7 0,-2-1 1 0,-2-2-8 0,-1 0 0 16,-2-1 0-16,-1-1-14 0,-5 2 10 0,-1-1-2 0,-3 0-6 0,0-1 7 16,-3 0-8-16,-3-2-10 0,-3 0-8 0,-5 2-2 0,-1-2-1 15,-3 1-3-15,-3 2 2 0,-1-2 0 0,-1 0 1 0,-4 3 2 16,0 0 10-16,-2 3-6 0,-1 3 11 0,-1 3 5 0,2 1 0 0,2 2 8 0,2 2-5 15,1 4-11-15,2 1-12 0,4 3-8 0,1 2-8 0,6 1 0 16,1 2-5-16,3 2-11 0,0 3-11 0,5 3-11 0,0 2 1 0,2 4-8 16,3 1-10-16,2 2-15 0,3 3-17 0,1 1-20 0,3 3-17 0,2 0-27 15,3 1-156-15</inkml:trace>
-  <inkml:trace contextRef="#ctx0" brushRef="#br0" timeOffset="105738.62">16284 12702 917 0,'-8'6'636'0,"2"-1"-583"0,-1 2-5 16,5-1-12-16,0-2-26 0,3-1-16 0,1 2-12 0,3 0-4 0,2 1 8 16,2 0 13-16,1 0 5 0,1 1 5 0,1 1-7 0,2 0-4 0,2 0-4 15,2-1 0-15,1 0-3 0,3 0 3 0,0 1-2 0,0-2-3 16,2 0 1-16,0-1-6 0,4-1-1 0,2-1-1 0,0 0-4 0,2-2 0 16,0-2 1-16,1-2 2 0,2-1-3 0,1 0 4 0,1-2 5 15,0-1-2-15,0-1 9 0,1-1-2 0,-1 0 0 0,1 0 4 0,-3 0-1 16,0 0 8-16,1-2 2 0,0 0 1 0,1-1-2 0,-1 1-5 0,0-1-2 15,-1-1-3-15,-1 1-4 0,2-2 5 0,0 1 3 0,3-1-2 16,-1-1 4-16,0-1-3 0,1 1 4 0,-1-1 1 0,-1 1 3 0,2-1 1 16,-2 2-2-16,0-1-1 0,-1 0 3 0,-1 2-3 0,1 1-1 0,-1-1-1 15,-2 0-2-15,-1 0 1 0,1 0 1 0,-1 1 0 0,1-1-1 16,-2 0 3-16,0-2-2 0,-3 1 0 0,1 0 5 0,-3-1-3 0,0 2 3 16,-2 0 1-16,-1 1-3 0,-1-1 5 0,-3 0 1 0,1 0-1 15,-3 0 2-15,-3 2 0 0,-1-2 2 0,-3 0 6 0,-1 0 8 0,-2 0 1 16,-3 0 4-16,-1 1 3 0,-2-1 4 0,-3 0 10 0,-3 0 9 0,-3 1 7 15,-2-2-4-15,-3 1 0 0,-4 0-6 0,-5 0-20 0,-5-1 2 16,-4-1-19-16,-4-1-4 0,-5-1 1 0,-6-1-7 0,-3-2-2 0,-3 1-6 16,-5-1-3-16,-4-1-7 0,-4 1 0 0,-1-2 0 0,-2 0-3 0,-1 1-1 15,-1-1-12-15,-3-2-27 0,-3 1-30 0,-2-4-29 0,-4 1-23 16,0-1-23-16,1 2-26 0,-1 3-25 0,1 5-28 0,3 4-145 0,1 7-26 16</inkml:trace>
-  <inkml:trace contextRef="#ctx0" brushRef="#br0" timeOffset="116939.38">13787 14003 360 0,'27'7'103'0,"6"0"-6"16,8 4-13-16,0-2-22 0,-3 0-15 0,3-1-6 0,2 0-3 0,0 0-6 15,1-2-5-15,-2 2-5 0,3-2-8 0,-1 1-5 0,1-2-2 16,1-1 2-16,-1 0-1 0,0-1 1 0,2 0 0 0,0-2-1 0,0 0 4 15,2-2-6-15,0-1 0 0,1 0-1 0,1-1-6 0,-1 0 1 0,0-1-5 16,0 0 1-16,1-1 0 0,-2-1 2 0,2 0 0 0,-2-1-5 16,-3 0 0-16,0-1-5 0,0-1 5 0,-2 0 5 0,-1 0-4 0,-3-1 10 15,-3 1 2-15,-4 0 7 0,-1-2 22 0,-4 0 17 0,-1-1 19 16,-2-2 18-16,-1 1 14 0,-2-1 11 0,-1-1 2 0,-1-1-9 0,0 1-22 16,-2-3-18-16,0-2-16 0,-1 1-5 0,-1-2-6 0,0-1-9 0,-1 0 0 15,0 0-8-15,-4-1 4 0,-2 2-2 0,-1-2-5 0,-1-1 0 16,-3 0-7-16,-1-2 9 0,-4 0-9 0,-3-1-7 0,-3 1-11 0,-3 0-14 15,-4-2 0-15,-5 2 2 0,-5-1-2 0,-3 1 4 0,-5-1 3 0,-3 0-19 16,-3 0 14-16,-6 1-1 0,-3 3-6 0,-3-1 16 0,-3 2-8 16,-4 0 1-16,-3 1 1 0,-1 4 2 0,-3-1 1 0,-1 3 3 0,-1 2 0 15,-4 2 2-15,-1 0-2 0,0-1 3 0,0 2 3 0,0 0 0 16,1 3 2-16,-2 0-4 0,1 4-5 0,-2 0 0 0,-1 2-4 0,0 2-2 16,-1 0 3-16,-1 3-3 0,-1 1 6 0,1 3 1 0,-2 2 5 0,2 0 11 15,2 0 2-15,3 2 7 0,1-2 0 0,0 3-1 0,0 2 4 16,3 2 1-16,-1 1 1 0,3 2-1 0,3 0 3 0,2 1-2 0,5 3-14 15,1-1-9-15,4 1 1 0,2 2-17 0,3 0-10 0,1 4-21 0,3 0-34 16,1 2-20-16,1 1-24 0,3 3-34 0,2 0-56 0,2 3-84 16,1 1-339-16</inkml:trace>
-  <inkml:trace contextRef="#ctx0" brushRef="#br0" timeOffset="127273.35">24497 13690 1514 0,'0'4'403'0,"2"1"-336"0,0 1-41 0,2-3-26 0,2 0 0 0,0 0-3 16,1 0-1-16,0 0-1 0,1 0 0 0,-1-1-4 0,0 0-6 0,0-1-15 16,1 0-22-16,0 0-21 0,-1 0-7 0,-1 0-4 0,0-1 15 15,-1 1 19-15,0 0 17 0,-3 0 18 0,0 0 3 0,0 1-3 0,-2-1-14 16,0-1-15-16,0 1-10 0,-2 0-3 0,1-1 11 0,-1 2 14 0,-1-1 17 15,-1 1 14-15,-1 0 11 0,1-1 8 0,-2 1 3 0,0-1 8 16,0-1 2-16,-1 1 0 0,0 0 9 0,-1 0 1 0,1 0 5 0,-1 0 3 16,-1 0-4-16,0 1-2 0,1-1 1 0,0 1 1 0,0 0-2 15,0 0 3-15,1 0-8 0,-1 0-11 0,2 1-7 0,0 0-7 0,2 0 4 16,0 1-4-16,1-1-3 0,0 1 1 0,0 0-3 0,1 0-1 0,0 0 1 16,1 0-7-16,2 0 3 0,1 1 2 0,2 0-3 0,1 0 4 15,3 0-6-15,1 2-2 0,2-1 2 0,2 2-8 0,3-1 1 0,2 1 5 16,2-1-4-16,1 0 2 0,4-1-5 0,-1-1 1 0,3 1 5 15,1-1-3-15,0 0 8 0,3-1-1 0,1 0-3 0,0 2 2 0,3-2-6 16,-2 0 4-16,2 0 6 0,1 0 2 0,2 0 7 0,2-1-3 0,1 2-4 16,1-3-1-16,1-1-4 0,1 0-1 0,1-1 3 0,2-1-5 0,0 0 5 15,1-1 0-15,1-2-6 0,2 2-3 0,1-1 11 0,0 0-6 16,2 2 11-16,2-1 0 0,0-1-7 0,1 0 6 0,-1-1-6 0,-1-1 8 16,1 1-7-16,0-2 2 0,0 0-5 0,-2 0-1 0,0-1 5 15,-1 0-2-15,1-2 0 0,1-1 0 0,-2 0-4 0,0-2 2 0,-1 1 2 16,0-1 2-16,0-2-8 0,-2-1 4 0,0-1-2 0,-1 2 0 0,-1-1 6 15,-3 0-4-15,-1-1 1 0,-1 2 3 0,0-2-2 0,-2 0 6 16,-1 0-1-16,-1-2-3 0,-2 1-2 0,0-2 2 0,-3 2-2 0,-1-1 0 16,2-1 1-16,-2 0-4 0,-1 2 5 0,-4-2-3 0,0 1-2 0,-2 0 4 15,-1-2-7-15,-2 0 2 0,-2 1 0 0,-2 0-3 0,-3-1 0 16,-3 1 2-16,-1 0-3 0,-2 0 4 0,-3 0 4 0,-3 1 2 0,-1-2 13 16,-4 0 0-16,-1 1 3 0,-2-1 0 0,-3-1-5 0,-3 2 1 15,-3-3-4-15,0 2-1 0,-4 1 5 0,-3-2-4 0,-1 0 1 0,-4 0 0 16,-1-2-4-16,-3 2 1 0,0-1-5 0,-3 1-1 0,-2 2 2 0,-1-1 3 15,-1-1 3-15,-1 1 3 0,0-2-3 0,-2 0-5 0,-2 1 0 16,0-2-6-16,-3-1-1 0,-3 2-11 0,0-1 2 0,-1 1 6 0,0 0-2 16,-5 0 15-16,0 1-9 0,-2-1 0 0,-1 2 4 0,1 1-4 0,-2 1 3 15,0 0-5-15,-2 2-2 0,-1 2 2 0,0 0 6 0,-1 2 5 16,1 0 1-16,-2 1-5 0,1 2-7 0,-1 0 2 0,0 1-3 0,0 1 0 16,-1 1-3-16,-1 2-3 0,1 0-2 0,0 2-1 0,0 3 2 0,0 1 3 15,2 2 1-15,-1 2 1 0,2 1-4 0,1 3 1 0,0 2 11 16,1 1-7-16,0 2 4 0,2 2-2 0,1-1-8 0,1 3 4 0,0 3-4 15,2 0 0-15,-1 3-6 0,4 2 2 0,0 1 4 0,1 2 8 16,2-1 5-16,1 2 2 0,4-3-5 0,6 1-12 0,0-2-7 0,7 0-7 16,2-2-1-16,3 2-5 0,5-1-1 0,3 0 1 0,2 1-2 0,4 1 3 15,2 0 1-15,2-1 1 0,3 1 4 0,2-3 4 0,1 2 4 16,0-1 1-16,2-1 3 0,2 0 6 0,0-1 1 0,0 0 0 0,1-2-3 16,0-3 9-16,0 1 6 0,1-2 1 0,-1-2 0 0,1 1-10 15,-1-1-10-15,1-2-3 0,0-2-13 0,0-3-32 0,0 0-24 0,1-3-20 16,-1 0-32-16,1-3-30 0,0 0-48 0,-1-3-42 0,2-2-46 0,0-1-258 15</inkml:trace>
-  <inkml:trace contextRef="#ctx0" brushRef="#br0" timeOffset="128573.35">5078 14491 1475 0,'-9'-3'132'0,"0"0"-47"0,-1 0-39 0,2 1-17 16,3 1 0-16,1 0-9 0,0 0 1 0,1 0-9 0,-1 1-4 0,1-1 1 15,0 1-9-15,-1 0 0 0,2-1-1 0,0 1-6 0,0 0 3 16,0-1-4-16,0 1-2 0,1-1-1 0,1 1 0 0,-1 0 3 0,0-1 0 15,0 0-2-15,1-1-11 0,0-2-4 0,1 0-3 0,1-1 0 0,1-1 5 16,3-1 1-16,0-1 1 0,3-1 5 0,0-3-2 0,4 1 7 16,0-1 1-16,1 1 4 0,2-1 2 0,-1 0 2 0,4-1 8 0,0 0-2 15,2 0 10-15,3-1 0 0,1 0 5 0,1 1 6 0,2-1-1 16,-1 0 6-16,3 0-5 0,1 0-1 0,2 0-2 0,3 2 3 0,1 0-2 16,2 1-3-16,1 0-2 0,1 0-4 0,2 1-3 0,1 0-3 0,3 1-3 15,1 0-2-15,1 1 1 0,1 1-4 0,0 0-2 0,2 0-3 16,-2 1 0-16,3 2 2 0,-1 1-8 0,-1 0-2 0,0 2-1 0,-1 2 1 15,-1 1 5-15,-2 3 4 0,-2 0-4 0,-3 3 1 0,-2 2-1 0,-2 2 3 16,-3 2 4-16,-4 2-2 0,-2 4-1 0,-3 3 0 0,-2 2-2 16,-4 3 4-16,-2 0 1 0,-4 3 2 0,-3-1 7 0,-1 3 3 0,-4-1 6 15,-2 3 6-15,-4-1 2 0,-3 1 6 0,-3-3 6 0,-3 0 12 16,-2-1 7-16,-3-1 2 0,-2-2 8 0,-4 1-4 0,-1-3-8 0,-4 0 3 16,-1-1-8-16,-4 1-11 0,-1 1 2 0,-6-1-9 0,-2 1-2 0,-2-2 0 15,-3 2-6-15,-1-2-5 0,-2 1-2 0,-1-1-4 0,-4-2 1 16,-1 0 3-16,0-1-8 0,-2-1-1 0,1-2-11 0,-1 0 8 0,0-4-3 15,3 0 2-15,0-3 5 0,5-3-1 0,3-3-5 0,1-1-2 0,1-5-7 16,3 0-3-16,0-3-4 0,3-3-28 0,2-2-24 0,1-5-41 16,4-4-36-16,2-2-57 0,3-6-68 0,3-4-131 0,2-6-512 0</inkml:trace>
-  <inkml:trace contextRef="#ctx0" brushRef="#br0" timeOffset="189364.61">18901 13971 852 0,'-7'4'138'0,"-3"-1"-84"0,1 0-26 0,-1 0-12 0,3-1-9 0,0 1-12 15,0 0-8-15,2-1 5 0,-1 1-3 0,1-1 7 0,0-1 3 0,0 2-6 16,1-1-2-16,-1 0-8 0,1 0-4 0,-1-1 3 0,0 0 4 15,0 0 8-15,1 0 5 0,-1 1 7 0,2-1 2 0,0-1-4 0,-1 0 2 16,2 0-6-16,-1 0-3 0,1 0-4 0,1 0-7 0,0 0-12 16,1-1-6-16,0 1-3 0,1-1-4 0,1 1 3 0,1 0-4 0,0 0-1 15,2 1 0-15,0 0-4 0,2 1 5 0,1 1-1 0,1 1-3 0,0 0 1 16,3-1-5-16,1 1 1 0,2 0-3 0,1 0-2 0,1 1-84 16</inkml:trace>
-  <inkml:trace contextRef="#ctx0" brushRef="#br0" timeOffset="201450.31">17732 15688 2463 0,'-5'4'116'0,"0"1"1"16,-1 1-30-16,4 1-21 0,0 0-24 0,2 0-20 0,2 4-15 0,0 3-4 16,4 3-1-16,2 2 3 0,1 1-14 0,1 3 8 0,0-1 1 15,0 2-9-15,-1 3 19 0,2 1-3 0,1 3-12 0,-1-1 0 0,1 2 0 16,0 1-2-16,-2 2 16 0,-1 2-8 0,0-1-1 0,-2 1-1 0,0-2-3 16,-1 1 9-16,0 0 2 0,-1-1 0 0,-1 2 6 0,-1-2 3 15,-1-1 6-15,0-1 7 0,-1-1-2 0,-1-1-8 0,0 1-8 0,0-3 11 16,0-1-6-16,-2 0 0 0,0-2-1 0,0 0-16 0,0 0 8 15,-1-1 3-15,0 1-8 0,0-2-4 0,1-4-1 0,0 0 1 0,-1-3-7 16,1-1-10-16,-1-1-26 0,-1 0-28 0,1-2-27 0,1-1-35 0,-1-1-36 16,0-1-44-16,-1 0-56 0,1-2-73 0,1-1-104 0,1-1-438 15</inkml:trace>
-  <inkml:trace contextRef="#ctx0" brushRef="#br0" timeOffset="202065.31">20154 15448 2595 0,'-7'-1'155'16,"1"1"-39"-16,-1-1-29 0,4 0-28 0,1 0-27 0,1 0-28 15,0 0-20-15,2 1-10 0,2-1 2 0,1 1 9 0,2-1 3 0,3 1 5 16,2-1-4-16,2 0-1 0,2 1 3 0,2 0-1 0,-1 1-2 15,3-1 4-15,0 0-2 0,1 0 5 0,2 0-4 0,1 0 4 0,0 1 0 16,1-1-6-16,1 1 7 0,-2-1-1 0,2 1-1 0,-1 0 4 0,-1 1-9 16,-1 1 7-16,-2 0 1 0,1 1-2 0,-2 0-2 0,-2 1-8 15,0 0-1-15,-2 2-4 0,-2-1-1 0,-2 4 11 0,-2-1 1 0,-2 1 0 16,0 1 8-16,-2 0-7 0,0 0 1 0,-2 0 4 0,-1 2 1 0,-2 2 4 16,-2-1 0-16,0-2 2 0,-2 1 6 0,0-1-8 0,-1 0 6 15,0 1 7-15,-1-2 4 0,-3 1 9 0,0-1 2 0,-2 1 1 0,-1-1-4 16,-1-1 1-16,-1 3-4 0,0-1-4 0,-1 1-1 0,-1 0-2 15,0-1 1-15,0 1-13 0,-1-1 4 0,0 1 18 0,0 0 1 0,1-1 12 16,0 2-9-16,0-1-10 0,2 0 2 0,2-1 3 0,2-1 4 0,2-1 1 16,3-2-8-16,1 2-14 0,3-2-11 0,1 0 2 0,2-1-7 15,2 1-2-15,2 1 0 0,2 0-11 0,4 0 13 0,1 0 7 0,4 1-5 16,2 0 0-16,1 1-1 0,1 0 4 0,2-1 8 0,1 0-3 16,3 0-3-16,0-1 6 0,1 1-1 0,0-1 11 0,-1 0-4 0,1 0-1 15,-2-1 2-15,0 1-12 0,-1-3 8 0,0 0 0 0,0 0-3 0,-2-1 1 16,0 1-9-16,-2-2-3 0,-1 0-1 0,0-1 10 0,-1-1-8 15,-2 0-8-15,1 0 1 0,-2-1-16 0,-2 0-14 0,0-2-20 0,-1 0-31 16,-2-2-37-16,1 0-31 0,-2-2-54 0,0-1-58 0,-1-1-51 0,-1-4-79 16,-1-3-64-16,-1-8-295 0</inkml:trace>
-  <inkml:trace contextRef="#ctx0" brushRef="#br0" timeOffset="202547.97">19607 15296 1997 0,'1'-1'141'0,"2"-3"-24"0,2-1-12 16,2-1-8-16,3-1-12 0,2 0-21 0,5-2-16 0,2 1-1 15,4-2 4-15,2 1 5 0,3-1-12 0,1 1-5 0,1 0-4 0,4 0-8 16,4 1 8-16,3 0-13 0,1 1-7 0,1 1-6 0,1 0-1 15,0 2-1-15,3 1-7 0,-1 1-1 0,1 1-3 0,2 2 1 0,0 1-2 16,2 2 6-16,-1 2-4 0,0 2 1 0,2-1 0 0,-2 1-11 0,1 1 16 16,0 1 1-16,-2 1 1 0,-2 3-2 0,-1 1-11 0,1 2-1 15,-3 1-1-15,-1 0-1 0,-1 3-7 0,-2 2 6 0,-3 0-2 0,0 3 1 16,-3 1 2-16,-1 0-9 0,0 4 7 0,-3 1 4 0,-1 2-3 0,-3 3-1 16,-2 0-5-16,0 3-10 0,-3 2 3 0,-2 3-8 0,-2 2-2 15,-3 2-2-15,-4 0-24 0,-1-1-3 0,-5 1-3 0,-3-1 11 0,-4 0 31 16,-5-2 16-16,-3-2 18 0,-4-2 16 0,-2-3 21 0,-3-3 14 0,-2 0-1 15,-5-3 3-15,-2 1-8 0,-5-1 1 0,-2 0 3 0,-4 1-8 16,-3-1-8-16,-3 1-11 0,-4-2-9 0,-3-1-3 0,-3-2 6 0,-2 0 12 16,0-2 1-16,0-2 2 0,0 1 5 0,1-3 1 0,1-2 8 15,2-1-2-15,1-6-12 0,4-1 2 0,1-4-4 0,1-1-8 0,4-4-6 16,1-3-8-16,3-1-10 0,3-4-1 0,2-2-7 0,0-2-5 0,2-3 0 16,1 0-10-16,1-2-1 0,0-5-6 0,1-3-13 0,0-1 15 15,1-2-5-15,2 0-9 0,2 0 1 0,4-1-15 0,0-1-6 0,2-2-18 16,1 1-28-16,1-5-24 0,2 0-38 0,2-3-54 0,1 0-61 0,2-4-98 15,0-2-116-15,1-4-416 0</inkml:trace>
-  <inkml:trace contextRef="#ctx0" brushRef="#br0" timeOffset="203081.97">17134 15940 1777 0,'-23'0'953'0,"-2"0"-875"0,-5-1 2 0,6-1-6 15,4-3 0-15,5 1-19 0,2-2-25 0,6 1-30 0,1-1-7 0,3 0 8 16,2-2 6-16,1-1 6 0,1-1-12 0,2-1-6 0,1-2-7 0,4 1 0 15,2-2 12-15,3-1 0 0,3-1 8 0,2 0-2 0,1-2-10 16,4 1 2-16,0 1-5 0,3-1-3 0,4 0 3 0,1 0-7 0,4 0 5 16,1 2 6-16,3 1-11 0,4 0 4 0,4 1-11 0,3 2-5 0,4 0-8 15,2 1-17-15,3 2-14 0,2 2-4 0,2 3-7 0,3 1 4 16,1 2-6-16,1 1-5 0,0 3 1 0,0 4-4 0,2 2 12 0,-1 3 8 16,1 3 10-16,1 3 17 0,-2 3-2 0,-4 3 8 0,-2 2 5 15,-6 0 10-15,-3 3 12 0,-3-1-1 0,-4 3 20 0,-3 1 5 0,-5 0 5 16,-3 0 21-16,-4 1-6 0,-4-2 12 0,-4 1 6 0,-3-1 3 0,-5 0 2 15,-2 0 8-15,-1 1 0 0,-4-1 15 0,-3 0-6 0,-3-3-6 16,-5 1 14-16,-3-2-10 0,-4 2 4 0,-5-2 7 0,-2 0-27 0,-5-1 8 16,-4 0-12-16,-3-1-14 0,-4 1 8 0,-3 0-14 0,-4 0 0 15,-2 1 0-15,-3-1-14 0,-2 0 9 0,-5-1-7 0,0 2-15 0,-3-2 15 16,-4 3-9-16,-1-2 1 0,-3 2 3 0,-1 0-21 0,1-4 8 0,0 0-8 16,0-1 5-16,1 0 7 0,0 0-23 0,0 0 13 0,0 0-4 0,1-2-2 15,0-2 16-15,1-2-18 0,32-9 19 0,-8-1-12 0,3 0-3 16,-7 1 15-16,3-2-26 0,-5 0 2 0,2-2-7 0,-2-1-10 0,3-2 14 15,5-2 7-15,3-3-12 0,4 0-19 0,-13-8 8 0,12 1-13 16,10-2 9-16,7 3-5 0,4-1-44 0,3-4-26 0,2-2-39 0,4-1-49 16,2-4-66-16,4-3-88 0,4-3-104 0,4-6-120 0,3-6-172 0</inkml:trace>
-  <inkml:trace contextRef="#ctx0" brushRef="#br0" timeOffset="203764.96">18504 16466 1364 0,'-14'14'307'0,"-2"2"-174"0,-4 2 7 0,5-4-11 16,1-2-18-16,1 0-37 0,1-3-16 0,2 0-13 0,2-1-6 0,0-1 7 15,0 1-14-15,0 0-1 0,1-2-1 0,2 0-14 0,0-1 0 16,1 0 3-16,0-1-13 0,1-1-4 0,1-1 0 0,1-1-6 0,0 1 9 16,1-1-6-16,0 0-4 0,0 0-2 0,0-1-4 0,0 1 10 15,1 0-10-15,0-1-7 0,1 1 6 0,0-1-12 0,1 0 8 0,1 1 1 16,1-1-16-16,0 0-2 0,0 0-25 0,0 0-15 0,2-1-23 0,-1-1-30 16,2 0-16-16,-1-1-32 0,2-3-26 0,1-2-25 0,2-1-39 15,1-4-20-15,2-2-270 0</inkml:trace>
-  <inkml:trace contextRef="#ctx0" brushRef="#br0" timeOffset="123600.2">12484 7699 1096 0,'4'5'451'0,"1"0"-423"0,5 1-61 16,2 0-5-16,3-2 10 0,1 3 9 0,1 0 7 0,1 0-1 0,0 0-1 15,3-1-3-15,1 0 2 0,-1 0-3 0,3 0-3 0,-1 0-1 0,2-1-3 16,3-1 1-16,1-1 4 0,2 0 3 0,-1-1 5 0,1-1 7 16,0 0 3-16,3-1 5 0,0 0 0 0,3-1 3 0,0 0 1 0,0 0-1 15,3-1 6-15,-1 0 0 0,1 0 6 0,3 0 7 0,-1 0-1 16,1 0 4-16,2 0-2 0,2-1-3 0,0 1 0 0,1-2-3 0,1 0-2 15,2 1-1-15,0-1-3 0,3 0 3 0,1 1 3 0,2-1-1 0,2-1 7 16,2 0-4-16,2 0-2 0,0-1-8 0,2-1-3 0,-1 1-5 16,0-3-5-16,1 0 2 0,-1-1-5 0,1 0-1 0,-1 1 4 0,0-1 3 15,0 1 6-15,-3 0 6 0,1 0 4 0,-2 0-1 0,-1 0-6 0,0-1 0 16,-2 1-2-16,0-1 1 0,-3-1-2 0,0 1-1 0,-1 0-2 16,-1-1 0-16,-2 2 6 0,0-2 2 0,-3 0-4 0,-2-1-3 0,-3 0 0 15,0 0 6-15,-3 1 3 0,-2-2 9 0,-1 1 3 0,-2-1 1 16,-1-1 3-16,-2-1-3 0,-2-1 1 0,-3-2 2 0,0 1-4 0,-2-3 2 15,1-1-5-15,-2-1-2 0,-3-3-4 0,-1 0 1 0,-2 1-1 0,-2-3-5 16,-4 2-6-16,1-3-4 0,-3 0 0 0,-1-2-1 0,-3 0 4 16,-2 0 4-16,-3 0-3 0,-3-1 1 0,-2-1-5 0,-4-2 3 0,-4 1-3 15,-3-1-2-15,-4 1 1 0,-5-2-8 0,-5 0 4 0,-4 0 4 0,-3-1 8 16,-4 3 11-16,-4 1 6 0,-4 1 5 0,-3 1-8 0,-3 0-2 16,-2-1-7-16,-3 2-6 0,-1 2 8 0,-2 2-3 0,-2 1-5 0,-2 0 5 15,0 2-12-15,-3 0-1 0,-2 2-4 0,1 2-3 0,-2 0 6 16,1 3-1-16,-2 2 4 0,0 4 0 0,1 3-2 0,-1 2 1 0,2 5-2 15,-1 3-6-15,2 3 1 0,0 6-6 0,2 4-4 0,0 4-13 0,2 3-18 16,-1 5-28-16,0 1-63 0,2 5-88 0,-1 4-135 0,-1 6-107 16,-1 9 24-16,-3 8-79 0</inkml:trace>
-  <inkml:trace contextRef="#ctx0" brushRef="#br0" timeOffset="149384.81">17260 13776 1518 0,'-4'2'200'0,"-1"0"-150"0,1-1-28 0,1-1-11 0,1 0-38 0,2 1-39 16,2-1-37-16,1 1-19 0,2 0 4 0,1-1 5 0,0 1 2 16,-1-2-9-16,0 0-21 0,0 0-28 0,-2 0 1 0,0-1 27 0,-1-1-180 15</inkml:trace>
-  <inkml:trace contextRef="#ctx0" brushRef="#br0" timeOffset="150551.81">13003 13962 404 0,'11'-2'82'0,"1"0"-34"0,6-1-9 0,0 0-6 16,1 1-1-16,-1 0-10 0,3 0-8 0,1 2-8 0,1 1-5 0,1 0 2 16,-1 0-2-16,3 0 1 0,0 1-2 0,0-1 3 0,1 2-2 0,0-1 0 15,2 0 1-15,2 1 1 0,2 0 4 0,-2 1 4 0,2-1 8 16,-1 1 4-16,3 0 0 0,1 1 3 0,2-1 1 0,3 1 0 0,0 0 6 15,2 0 2-15,3 1-2 0,1-2-5 0,0 2-6 0,3 1-5 0,3 0-5 16,2 1-5-16,-1 0-7 0,3 1-6 0,-2 0-1 0,2 0-1 16,2 1 1-16,-1-1 4 0,2-1 1 0,0-1 1 0,-1-2 4 0,2-3 4 15,-1-3 6-15,-1-3 12 0,1-2 21 0,0-3 20 0,-1-2 19 16,0-3 10-16,-1-1-2 0,0-2-3 0,-2-2-6 0,-1 1-9 0,0-2-15 16,-1-2-18-16,0 1-10 0,-2-1-4 0,-2-2-4 0,0 2-1 0,0-4-1 15,-2 0-7-15,-1-1 2 0,-1 0 2 0,-2-2 0 0,0-1-3 16,-3 0 0-16,-1 1-1 0,-1-1 1 0,-3 0-5 0,-1 0 4 0,-3 0-1 15,-3 2-3-15,0-1 9 0,-3 1-1 0,0-2 0 0,-3 1 0 0,-2-2-9 16,-1 2 6-16,-2-1 4 0,-4 0 2 0,-1-2 8 0,-3 0 1 16,-3 0-1-16,-1 1 2 0,-4-1 2 0,-4 1-6 0,-3-2 3 0,-4 0-7 15,-6-2-3-15,-5 0-10 0,-6 1-16 0,-4 1-1 0,-5 2-2 16,-4-2 6-16,-3 2 12 0,-6-2 2 0,-3 1-9 0,-3 2 4 0,-3 1-1 16,-1 0-1-16,-3 3 11 0,-2-1-2 0,-1 1-6 0,-2 0 1 0,-1 1-4 15,-2 3 2-15,-1 1-7 0,0 1 0 0,-2 3 4 0,0 0-2 16,0 1 3-16,-4 2-5 0,2 2 0 0,-3 0 1 0,-2 1 4 0,0 2 2 15,-2 2-3-15,0 2 1 0,-2 3-5 0,1 1 5 0,0 2 5 0,-1 1 3 16,1 2 4-16,-1 3 8 0,2 1 2 0,-1 3 18 0,1 2 3 16,1 1 0-16,1 3-1 0,2 2-13 0,1 1 0 0,4 3-1 0,0 4-5 15,2 1 1-15,3 2-8 0,2 3-2 0,3 3-1 16,4 1-13-16,3 2 7 0,3 3-1 0,4 1-10 0,0 2 8 0,5 3-11 0,4 3-5 16,2 1-10-16,5 1-27 0,4 1-22 0,3 0-25 0,4 2-16 0,3 3-22 15,5 2-20-15,4 2-38 0,5-1-119 0,4 3-111 0,5 3-82 16,5 3 74-16,2 4-142 0</inkml:trace>
-  <inkml:trace contextRef="#ctx0" brushRef="#br0" timeOffset="152444.81">18032 16725 3219 0,'-15'14'66'16,"0"0"-41"-16,-5 1 0 0,4-5-3 0,3-3-49 0,1-4-66 0,2-3-105 15,2-2-96-15,3-1-99 0,1 0-138 0,2-2-92 0,1-1-238 0</inkml:trace>
-</inkml:ink>
-</file>
-
-<file path=ppt/ink/ink6.xml><?xml version="1.0" encoding="utf-8"?>
-<inkml:ink xmlns:inkml="http://www.w3.org/2003/InkML">
-  <inkml:definitions>
-    <inkml:context xml:id="ctx0">
-      <inkml:inkSource xml:id="inkSrc0">
-        <inkml:traceFormat>
-          <inkml:channel name="X" type="integer" max="34422" units="cm"/>
-          <inkml:channel name="Y" type="integer" max="19362" units="cm"/>
-          <inkml:channel name="F" type="integer" max="4095" units="dev"/>
-          <inkml:channel name="T" type="integer" max="2.14748E9" units="dev"/>
-        </inkml:traceFormat>
-        <inkml:channelProperties>
-          <inkml:channelProperty channel="X" name="resolution" value="1000.05811" units="1/cm"/>
-          <inkml:channelProperty channel="Y" name="resolution" value="1000.10333" units="1/cm"/>
-          <inkml:channelProperty channel="F" name="resolution" value="0" units="1/dev"/>
-          <inkml:channelProperty channel="T" name="resolution" value="1" units="1/dev"/>
-        </inkml:channelProperties>
-      </inkml:inkSource>
-      <inkml:timestamp xml:id="ts0" timeString="2025-07-17T10:26:54.257"/>
-    </inkml:context>
-    <inkml:brush xml:id="br0">
-      <inkml:brushProperty name="width" value="0.05292" units="cm"/>
-      <inkml:brushProperty name="height" value="0.05292" units="cm"/>
-      <inkml:brushProperty name="color" value="#FF0000"/>
-    </inkml:brush>
-  </inkml:definitions>
-  <inkml:trace contextRef="#ctx0" brushRef="#br0">3314 6722 1556 0,'-8'-2'46'0,"1"-1"-26"0,0 1 6 0,5 0 17 0,1 1 1 16,2-1-7-16,1 1-11 0,0-1-19 0,2 0-3 0,0 0-3 15,3 0-2-15,1 0 1 0,0 1 3 0,4 0-5 0,-1 0 1 0,1 1 1 16,0 0-3-16,0 2-1 0,1 0 4 0,0 1-2 0,0 0-2 16,1 2 2-16,-2-1 0 0,3 1-1 0,0 1 0 0,1 0 3 0,0 0 3 15,0 1 0-15,1-1 3 0,1 0-2 0,-1 1-2 0,3 0 2 0,2-1-2 16,-2 2 5-16,3 0 1 0,1-1 1 0,-1 0 6 0,4-1-7 15,0 0-1-15,2 0 2 0,1 0-2 0,1-1 8 0,1 1 10 0,4-1 2 16,1-1 2-16,2 0 2 0,2 0-2 0,-1-1 1 0,3 0 4 16,2 0 4-16,1 0-4 0,2-1 7 0,0 2 2 0,3-1-4 0,0 0-6 15,0 0 2-15,4 0-3 0,-1 2-4 0,1-1-2 0,2 0-6 0,-1-1-1 16,1 1-2-16,3 0-9 0,-1 0-4 0,2 0-2 0,0 0 1 16,-1-1 8-16,3 0-5 0,0-1-3 0,-2 1-4 0,3-1 4 0,-2 1-1 15,0-1-4-15,1 0 2 0,0 0-2 0,-1-2 1 0,-1 0 2 0,0-1 1 16,1 0-2-16,-2-1 3 0,2 0 0 0,-2-1 2 0,0 0-5 15,1-1-1-15,-1 1 1 0,0-1-2 0,-1-1 11 0,-1-1 1 0,1-1 3 16,-1 0-2-16,0-1-3 0,-1 0-2 0,-2-1 4 0,-1 0-2 0,-2-1-3 16,-1-1 4-16,0-1 4 0,-1 1 0 0,-1-1 0 0,-2 1-3 15,0-2-6-15,-2-1 3 0,-1 0-4 0,-2 2 0 0,-4-2 2 0,2 0-1 16,-3-2 2-16,-1 1 1 0,-1-2-3 0,-3 0 6 0,-1 1 0 16,-3 0-2-16,0 1 6 0,-5-1-5 0,0-1 3 0,-2 2 9 0,-3-3 1 15,-2-2-5-15,-1 1 5 0,-2-2-9 0,-2 0 0 0,-3 0 6 0,-1-2-9 16,-3 1 9-16,-1 1-2 0,-4-2 0 0,-1 0 5 0,-3 0-13 15,-2-1 1-15,-1 0-7 0,-5-1 1 0,0 0 10 0,-4 1-4 0,-2-1 2 16,-2 3 0-16,-4-2-1 0,0 0 1 0,-4 0-2 0,-1-1 3 16,-4 1-1-16,0 1-2 0,-3 0 4 0,-1 2-1 0,-2-2-6 0,-3 0 0 15,-1 1-2-15,-1-1 4 0,-3 1-7 0,-1 0 1 0,-3-1-12 0,0 1 9 16,-2 0 9-16,-3 1 0 0,0 0 11 0,-2-1-11 0,-2 0-6 0,-1 2 1 16,-4 0-3-16,-1 0-2 0,-2 3 2 0,-2 0-1 0,-1 0 4 15,-3 2-2-15,-2 0-2 0,-1 0 0 0,0 1 2 0,-1 1 3 0,-1 2 4 16,-1-1 0-16,0-1 2 0,-1 1-8 0,0 2-5 0,-1-1 2 15,-4 3 0-15,1 0-1 0,-3 0-1 0,0 2 5 0,-1 2 3 0,1 1 3 16,1 1-2-16,0 2-3 0,-1 1-4 0,2 2-2 0,1 0 13 16,0 3-4-16,2 1-4 0,-2 3 3 0,0 2-8 0,3 3 2 0,-1 4 4 15,2 3-4-15,-1 1-4 0,0 5-1 0,3 2 5 0,-1 3-6 0,1 1 4 16,3 2 4-16,2 2-16 0,2-2 3 0,5 2 15 0,3-2-3 0,2 1 12 16,3 1 1-16,4-2-17 0,4 1 1 0,4-2 0 0,1 0 0 15,5-1 1-15,4-1-12 0,5 0 0 0,6-4 3 0,2 0-17 0,6-3-2 16,5-1-20-16,4 1-32 0,6-3-19 0,5 1-31 0,4 0-28 15,6 0-33-15,5 2-35 0,6-2-64 0,7 2-106 0,5-3-585 0</inkml:trace>
-  <inkml:trace contextRef="#ctx0" brushRef="#br0" timeOffset="1099.99">17619 6667 1751 0,'6'0'294'0,"3"4"-321"0,7 0-14 0,5 2 7 15,4 1 12-15,0 0 8 0,1 0-2 0,-1 0 0 0,1 0 5 16,3 0 0-16,-1 0 7 0,1-1 4 0,-1 1-1 0,-1-2 1 0,1 2 4 16,1 0-6-16,0 0 2 0,2-1-1 0,-1-1 0 0,1 1 7 0,0 0-2 15,1-1 3-15,0 1 1 0,2-1-4 0,1 0 3 0,1 0 1 16,2 0 2-16,1 0 1 0,3 0-6 0,1-1-2 0,0 0 2 0,2-1-7 16,0 0 2-16,0 0 5 0,3-1-2 0,0 0 1 0,2-1-1 0,1-1-2 15,0 1-1-15,1 0 10 0,0 0-1 0,2 1 1 0,0 0 3 16,0-1-2-16,1 0 0 0,-1 1 10 0,1-1-6 0,1 1 2 0,0-1 3 15,2 1-8-15,0-1 4 0,0 0-1 0,1-1-5 0,1 1-2 16,-1-1-3-16,0 1 0 0,0 0 6 0,0-1 2 0,1 0-8 0,0 0 8 16,0 0 0-16,0-1-4 0,-2 0 7 0,0 0-4 0,-2-1 3 0,1-1 10 15,-1 1 1-15,-1-3-4 0,0 0-8 0,0 0-10 0,-2-1 1 16,0-1 1-16,0 1 3 0,-4 0 2 0,-1-1-4 0,-1 0-1 0,-1 1 4 16,-1-2-1-16,-4 0 0 0,-1 0 2 0,-2-1 1 0,-2-1 0 0,-2 0 6 15,-4 0 3-15,0-2 7 0,-3-1-6 0,0-1 4 0,-3-1-7 16,-2-1-5-16,-1-1 10 0,-5-1-3 0,0 2 2 0,-2-2-1 0,-2-1-4 15,-3-1 2-15,-3 1-2 0,0-3 1 0,-2-1-2 0,0-3-4 16,-2-2 0-16,0 1-16 0,-1-2 14 0,-2 0-4 0,0-1-4 0,-2 1 14 16,0-2-14-16,-1 2 1 0,-1-2 4 0,-1 1-3 0,0 0-2 0,-3 0 2 15,-1 0-3-15,-2-1 0 0,-1 0-2 0,0 1 2 0,-4-1-2 16,-1 4 1-16,-2-1 3 0,0 2-6 0,-4-1-5 0,0 1 4 0,-5 0-7 16,-1 0-9-16,-3 1 11 0,-1-1-4 0,-2 1 7 0,-2 0 4 0,-3-1-2 15,-3 2-2-15,-2-1-2 0,-2 1 2 0,-2 0 0 0,-3 0-2 16,-1 2 2-16,-2-2 1 0,-2 1-1 0,-3 1-4 0,1-2-2 0,-2 2 6 15,-2-1 2-15,0 2 4 0,-4 2 4 0,1-1-3 0,0 3 4 0,-2 1 1 16,1 2-5-16,-1 1 6 0,-1 1-5 0,0 2 2 0,-3 1 5 16,1 3-2-16,-3 1 1 0,0 2 4 0,-1 2-7 0,-1 2 4 0,-1 1-3 15,-1 3-2-15,-1 0 5 0,0 3-3 0,-2 2 1 0,-1 2 9 16,0 2-4-16,-2 0 3 0,1 4-1 0,-2 2-15 0,-2 4 7 0,-2 4-2 16,-1 3 0-16,1 0 3 0,-1 2-8 0,0 1-3 0,-3 2-17 0,1 3-41 15,-3 3-62-15,-4 5-99 0,-4 6-151 0,-5 9-412 0,-9 11-159 16</inkml:trace>
-  <inkml:trace contextRef="#ctx0" brushRef="#br0" timeOffset="28651.35">2133 2019 1935 0,'-19'-16'-21'0,"4"2"50"16,-4-1 3-16,-3-3-2 0,-1-3-6 0,-3 0-4 0,3 1-3 0,4 2-3 16,1 4-1-16,3 1-9 0,2 2-6 0,3 3-11 0,0 2-9 0,2 2-10 15,3 4 2-15,0 2 8 0,1 3 4 0,1 3 13 0,1 2-2 16,-1 5-6-16,1 2-5 0,0 5 3 0,-5 28 3 0,3 4 5 0,-4 2 6 16,2-2 0-16,-1 0 2 0,1 4 0 0,1 4 2 0,-2 2 1 15,1-1-8-15,0 0 4 0,2 2-9 0,2 1 11 0,1-32 2 0,0 15-4 16,1 36 6-16,1 0-18 0,-1-1-5 0,1-20 7 0,0-3-4 0,1-3 5 15,1-3-6-15,2-2 23 0,-2-1 3 0,2-3 0 0,-1 1 7 16,-2-2-19-16,0 0-3 0,0 0 5 0,1-2 1 0,0 0-2 0,1-3 0 16,0 1 4-16,1 0 1 0,0-1-5 0,0 1 6 0,0-1-6 0,2 2 1 15,0 2 3-15,2 0-4 0,0 1 1 0,1 2-5 0,1-2 4 16,0 0-2-16,3 1-7 0,0-2 0 0,2 0-3 0,0-1-1 0,3-2-7 16,3-1-2-16,0 0 0 0,5-3 2 0,-1-2 3 0,0-1-7 0,2-4-3 15,0-3-4-15,4-2 6 0,2-1 11 0,3-2 7 0,2-1 4 16,1-2 1-16,2-2 3 0,1-1 1 0,2-1 6 0,2-2-3 0,2-3 4 15,4 0 2-15,1-2 5 0,3 0 7 0,2-1 4 0,3-2-1 16,4-2 0-16,3 0-6 0,3-3-2 0,4 0 2 0,3-2 2 0,4-1 4 16,0 0-5-16,4-1-5 0,0 1-5 0,2-1-4 0,1 0 5 0,3 0 3 15,1 0 2-15,4-1-5 0,1 0 2 0,0-1-3 0,3 0 2 16,2 0 5-16,0-1-4 0,3 1 1 0,2-3-2 0,0 0-1 0,3-1 3 16,1-1-3-16,2 0 6 0,4-2-2 0,-1-1-3 0,0-1 0 15,1-2-3-15,0 0 1 0,3-1 2 0,1 2-4 0,-2-2-2 0,2-1 3 16,-1 0-5-16,2 1-1 0,1-2 5 0,0 1-8 0,0 1 2 0,1 0-3 15,2 1-1-15,1 0-1 0,1 2 1 0,0 0 2 0,-1 2-1 16,2-1 3-16,-1 2 0 0,-1-1-4 0,2 3-1 0,-1 0 4 0,-2 1-4 16,0 3 5-16,-1 0 2 0,1 1-5 0,0 0 3 0,-1 2-2 0,0 0-4 15,-3 0-3-15,0 2-1 0,0-1 1 0,0 1 5 0,1 0-8 16,-1-1-2-16,2 0 1 0,0 0 1 0,1 0 9 0,1-1-5 0,-2-2-3 16,1 1-5-16,-2 0 0 0,2-2 10 0,-2 2 0 0,-2-1-1 15,-1 1 4-15,-3 0 0 0,-2 1 1 0,-1 1 1 0,-2 0-1 0,-4 2-1 16,-1 0-3-16,-2-1 5 0,-5 3-4 0,1-1 8 0,-3 1-2 0,-4 1 1 15,0 0 1-15,-3 0-3 0,-2 0-3 0,-2 0 0 0,-3-1 4 16,-3 1-4-16,-2-1 0 0,-3-2 3 0,-3 1-3 0,-2-1-5 0,-2 0 7 16,-3-1-2-16,-5-1 0 0,-3-1 9 0,-4-1-2 0,-4 1 2 0,-4-2-2 15,-3 0-5-15,-5-1 1 0,-4 0-1 0,-2-2-2 0,-2 1 5 16,-2-4-5-16,-3-1 4 0,-2-1 4 0,-3-2-7 0,-4 0 4 0,-2 0-2 16,-2-2-8-16,-3-1 2 0,-2-3-1 0,-2 0-10 0,-1-2 4 0,-2-3 0 15,-2 0 1-15,-1-3 0 0,-2-3-1 0,-3-2 1 0,-1-1 2 16,-3-2 4-16,-1 0 3 0,-2-2-1 0,-2-1 2 0,-2-1-2 0,-1-1 1 15,-4 0 4-15,-1 0-2 0,-2-1 2 0,-4 0-3 0,-1-1-1 16,-2-1 0-16,0 1 2 0,-2 0 4 0,-1-3-3 0,-5 1-9 0,-1 0 0 16,-3-1-4-16,-1 0 0 0,-1-1 5 0,-2 0-3 0,-2-1 5 0,0 0 0 15,-2 1-7-15,0 0 4 0,1-1 3 0,-2 2-1 0,-1-1 7 16,0-1-2-16,-1-1-6 0,-2 1 3 0,0-1-1 0,-2 1 1 0,-2-3 0 16,0 1 1-16,-3-2 1 0,-1 1 0 0,-2 1 7 0,-1 0 7 0,-1 0-7 15,-4 0 5-15,-1 0-4 0,-2 0-5 0,-3 1 9 0,-1 1-1 16,-1 0-2-16,-1-2-2 0,-3-1-1 0,1 2 2 0,-4 1-3 0,-1 0-3 15,42 23 14-15,-10-6 0 0,-1 2 0 0,-12-6 4 0,-3 1-13 0,-10-4 8 16,-1 1-4-16,-13-5-1 0,0 2-4 0,-1 1-6 0,-3 1-1 16,1 1 1-16,-3 2 1 0,-1 0 2 0,-2 3 3 0,-3 0-3 0,-3 3 8 15,-2 0-5-15,-2 3 0 0,0 2 4 0,-3 0-4 0,0 3 5 16,-2 1 3-16,-1 0-4 0,0 2-3 0,-2 2-10 0,-1 0 12 0,-3 2-3 16,-2 1 5-16,-4 2 3 0,-3 4-10 0,-4 1 4 0,-3 4 7 0,-3 3-4 15,-1 1 0-15,-3 5-3 0,-1 2-6 0,0 3 1 0,-2 2 1 16,2 1-1-16,-1 2 5 0,-1 3-3 0,-2 2-10 0,0 3 4 0,-2 3-7 15,1 3 5-15,2 2 1 0,-1 4-2 0,4 2-7 0,1 2-6 0,4 3-19 16,5 3-28-16,-115 50-37 0,43-5-52 0,38-4-55 0,35-4-101 16,18-2-145-16,-1 9-309 0</inkml:trace>
-  <inkml:trace contextRef="#ctx0" brushRef="#br0" timeOffset="37868.51">4450 7879 443 0,'-9'-6'142'0,"2"2"-54"0,-2-2 4 0,5 3 7 0,0 0-17 16,1 1-11-16,1 1-15 0,-1 0-15 0,1 1-10 0,0 0-8 0,0 2-12 15,0 0-1-15,0 3-6 0,0 0 0 0,1 2-2 0,-2 2 1 0,0 1 0 16,-1 1-2-16,1-1 1 0,0 2 2 0,0-2-2 0,0-1 0 16,0 0-2-16,1-2 1 0,-1 1 0 0,0 0 0 0,1-1 6 0,0 1-2 15,0-2 1-15,0 0-3 0,2 0 0 0,0-2 2 0,1 0 5 0,1 0 2 16,0-2 8-16,0 1 3 0,2-2 0 0,0 0 4 0,2-1-1 15,0 1 3-15,2-2-2 0,0 1 3 0,1-1 1 0,0-1-3 0,1-1 2 16,3 1-4-16,1-1-4 0,0-1 0 0,0 1-2 0,-1-1-2 16,3-1-7-16,-1 2 0 0,2 0-4 0,-1 0 0 0,2 0-2 0,1 0 2 15,0 0-7-15,0 0 7 0,2 0-5 0,-2 1-1 0,1-1 4 0,2 0-9 16,0 1 7-16,1 0-3 0,1-1 0 0,-1 1 5 0,3 0-6 16,-1 0-1-16,1 0 1 0,0 0-12 0,1 0 5 0,-1 0 2 0,0 1-3 15,1-1 13-15,1 1-4 0,1 0-2 0,1 0-1 0,2 0 3 16,-3 0-2-16,4-1 5 0,-1 0-2 0,2 0-2 0,-2-2-2 0,0 1-1 15,-1 1 6-15,1-1-2 0,-1-1 2 0,3 0 1 0,0-1-2 0,-1 2-5 16,0 2 2-16,-2-1-2 0,-1 1 1 0,-2 1 6 0,2 1 1 16,-2 1 1-16,-1 1 1 0,1 1 5 0,-3 2 0 0,2 2 0 0,-1-2 1 15,2 3-3-15,-2-1 3 0,0 1 1 0,-1 0 1 0,-1 0-2 0,1 1-1 16,0 1 0-16,0-1-1 0,1 0 1 0,0 0 1 0,1-2 0 16,0 1-5-16,2 1-7 0,-3-1-1 0,3 1-3 0,-1-1 4 0,1-1 5 15,-1 1-1-15,1-2-1 0,0 1-2 0,-1 0-1 0,1-2 2 0,-2 1-4 16,3-1 5-16,-2 0 0 0,-1-1-1 0,0 1 5 0,-2-1 3 15,-1 0-3-15,1 0 1 0,-1 0 4 0,-1-1 2 0,2 1 4 0,-1-1 4 16,-1 0 2-16,1 0 0 0,-1 1-5 0,1 0-1 0,2 0-5 16,-3 0-4-16,2-1 1 0,0 0-9 0,0 1 0 0,1 1 4 0,-2 0-1 15,1 0 0-15,-1 0 2 0,3 0-4 0,1-1 6 0,1 0 2 0,1-2-2 16,-1 1 0-16,0 0-5 0,0-2-1 0,1 0 1 0,-1-1-5 16,2-1-1-16,0 0 3 0,-1 0-7 0,1 0 3 0,-1-1-1 0,-1-1 1 15,1 0 7-15,-2-1-3 0,3 0 0 0,-4 0 1 0,2 1-4 0,-2 0 5 16,0 0-4-16,0 0 1 0,3 0 2 0,-3-1 4 0,2 2-4 15,-3-1 1-15,-2 2-1 0,2 0 1 0,-3 0-1 0,3 0 1 0,0 0-1 16,1 0-1-16,1 2 3 0,-2-1-7 0,0 0-2 0,0 1 0 16,0-1 2-16,0 0 1 0,0-1 10 0,2 0-6 0,-2 0-1 0,2 0 2 15,-1-1-9-15,-1-1 7 0,-1-1-2 0,2 0 1 0,0-1 1 0,0 1-2 16,-1-2 1-16,-2-1-2 0,0 1 13 0,0 0-4 0,1-1 3 16,-1-1-1-16,-1 1-11 0,0-1 2 0,0 1-1 0,-2 0 1 0,1 1-3 15,-3-1-1-15,1 0-6 0,0 1-7 0,-1-1-12 0,-2 1-37 16,1 0-48-16,-1 0-68 0,-1 1-99 0,2 1-132 0,0 0-313 0</inkml:trace>
-  <inkml:trace contextRef="#ctx0" brushRef="#br0" timeOffset="39185.07">10569 8314 1214 0,'-15'1'861'0,"3"1"-849"0,1-1-36 16,6-1-1-16,5-1-3 0,2 1 5 0,2 2 7 0,2-1 3 0,2 0 5 15,3 1-1-15,2 0-6 0,0-1-1 0,3 1-2 0,1-2-1 16,2 0 6-16,0 1 1 0,3-1 4 0,1 1 4 0,0 1 2 0,1 0 1 16,0 0 1-16,2 1 0 0,1 0 3 0,2 1 1 0,2 0 1 15,1 1 3-15,2 0 0 0,1 0 6 0,2 1-2 0,4-1 1 0,1 1 2 16,2 0-6-16,2 1 2 0,3-2 1 0,0 3 6 0,2 0 0 0,0 1-4 15,3 1 3-15,0 0-5 0,2 1 4 0,2 1 1 0,0 1-3 16,2 1 2-16,1 1-2 0,1-1-1 0,1 2-1 0,-1-2-4 0,0 1 4 16,2-1-2-16,-1-1-3 0,1 0 0 0,0-2 1 0,-1 0-1 15,2-2 2-15,-1-1 3 0,-1 0-1 0,0-1 0 0,-2 0 5 0,2 0-1 16,-1-1 3-16,-1 0 1 0,1 0-1 0,-2 0 2 0,1-1-10 0,-1 2 5 16,1-1-1-16,-2 0-3 0,-2 0 3 0,1-1-5 0,-2 1-2 15,-1 0-2-15,0 0 1 0,-2 0-1 0,-1-2 3 0,0 2-5 0,-2 0-3 16,0 0 0-16,-1 0 1 0,0 0 1 0,-4 1 2 0,-1 0-2 0,-1 0-1 15,-2-1 1-15,-1 0 0 0,0 1-2 0,-3-1-4 0,-2 1 3 16,1-1 2-16,-3-1-2 0,0-1 2 0,-2 0-5 0,0-1-9 0,-1-2-7 16,-2-1-21-16,-2-2-15 0,-1-1-16 0,-2-3-19 0,-3-2-17 0,-2-3-16 15,-2-3-24-15,-4-2-19 0,-3-5-12 0,-2-6-22 0,-4-3-7 16,-4-8 7-16,-5-6-15 0,-2-5-230 0</inkml:trace>
-  <inkml:trace contextRef="#ctx0" brushRef="#br0" timeOffset="39668.07">4451 9431 1872 0,'-1'0'27'0,"4"0"-4"0,2 1 6 16,6-1 20-16,3 0 17 0,4-1 11 0,3 0 8 0,4-3-13 0,4-2-6 16,4-1-5-16,4-1-10 0,-1 0-12 0,6 0 1 0,2 1-17 15,3 1-5-15,4 1-2 0,0 1-10 0,4 0-2 0,1 1-1 0,0 0 0 16,3 2-1-16,-1 0 1 0,0 0-2 0,2 1 1 0,-2-1-2 0,3 0-6 15,-1 0-4-15,1 1 2 0,1-1 0 0,0 0 3 0,1-1 0 16,1 0-7-16,-1 1-6 0,1 0-4 0,-1 1-22 0,0 1-36 0,1 1-48 16,-1 1-78-16,0 2-113 0,0 0-173 0,3 2-366 0</inkml:trace>
-  <inkml:trace contextRef="#ctx0" brushRef="#br0" timeOffset="89254.27">18067 8396 1666 0,'-11'9'128'0,"1"0"-81"16,-1 2-35-16,4-3-5 0,4-2-7 0,3-2-8 0,2 0-6 15,3 0-2-15,2-1-2 0,2-1 3 0,1 0-3 0,2-1-6 0,1-1-10 16,2-1-15-16,1-1-10 0,1 1-2 0,0-3 3 0,2-1 11 0,1-1 15 16,0-1 10-16,1-2 8 0,1 1 8 0,0-2 2 0,2 1 1 0,-1 1 2 15,-2-2-3-15,1 0 1 0,0 1 6 0,1 0-3 0,1 0 2 16,-2 1 1-16,1 2-6 0,-2 0 2 0,-1 0 1 0,1 1 0 0,0 0 1 16,-1 0 1-16,0 1-2 0,1 1 0 0,0 0 1 0,0 0 2 15,0 1-2-15,0 0 1 0,0 1-3 0,-1 0-1 0,-1 1 3 0,-1-1-1 16,1 1 0-16,-3 0 2 0,1 0-5 0,0 0-8 0,-2 1-41 15,0-1-49-15,1 1-54 0,-1-1-75 0,-1-1-325 0</inkml:trace>
-  <inkml:trace contextRef="#ctx0" brushRef="#br0" timeOffset="103406.47">15910 11449 1 0,'17'-32'72'0,"3"-8"531"0,0-6 612 0,3-6-653 0,-17 29-499 0,2-5-63 0,1-3 1 0,6-7-2 0,3-3-9 0,3-4-7 16,3-4-1-16,4-1-3 0,-1-1 9 0,0 0 0 0,-1-1 15 16,-2-1-2-16,-1 1 4 0,-3-1 0 0,1 0-16 0,-2 1 6 15,-1-2-4-15,0 0 4 0,-2 1 7 0,-1 1-2 0,-2 1 6 0,-1 2-6 16,-1 2 8-16,-1 1 7 0,0 0-3 0,-2 2 16 0,-1 0-4 0,0 1-2 16,-1-1 1-16,-1 0-2 0,0-2-4 0,0 0 1 0,-2-2 0 15,0 0-1-15,-1-1 1 0,-1 0-5 0,-1-2 1 0,-1-3-1 0,-1 1 2 16,0-1 3-16,-2-1 2 0,1-1-2 0,-2-2-2 0,0-1-1 0,-1-2 0 15,-1-3-2-15,0-1 4 0,1-1 3 0,-2 1-7 0,0 2 6 0,1-2-13 16,0 0 3-16,0-1 1 0,-1 0-2 0,1-1 1 0,0 0-4 16,1 2 12-16,-2-1 0 0,1 2 0 0,0 2 2 0,-2 0-14 0,1-1 2 15,-1 1 0-15,0-2-2 0,-2 1 0 0,0 1-7 0,0 2 11 16,-1 2 5-16,0 3-4 0,0 0 9 0,-3 1-8 0,0 1-6 0,-1-2 4 16,1 1-6-16,-1 1 1 0,-1 2 1 0,0 2-1 0,1 1-4 15,-2 0 17-15,1 2-8 0,2 2 1 0,-3 1 1 0,1 0-13 0,-1 2 9 16,0 2 2-16,-2 0 3 0,-1 1-4 0,1-1-7 0,-2 0 3 0,-1 1 1 15,1 0 2-15,0 2 2 0,-1 1 0 0,-1 0 5 0,0 4-15 16,-1 1 18-16,-2 2-8 0,0 0 6 0,-2 1 1 0,0 0-18 0,-3 1 2 16,1 2-7-16,-5 0 11 0,1 3-6 0,-3 1 4 0,0 1-6 0,-2 2 0 15,-3 0 8-15,-1 1-4 0,-2 1 0 0,-2 0 0 0,-1 3-5 16,-2 0 1-16,-3 2-5 0,-1 2-2 0,-3 1-1 0,0 2 5 0,-1 1 1 16,-3 2 1-16,-1 1 0 0,-1 0 1 0,-2 1-1 0,-1 1 1 0,0 2 2 15,-2 0-1-15,1 1 3 0,-2-1 0 0,-1 2-4 0,0-1-5 0,0 0 11 16,1 0-4-16,2-2 8 0,1 0-1 0,-1 0-7 0,0-1 2 15,0 2-5-15,1-1 5 0,0 0 0 0,3 0 0 0,0 0 5 0,1 0-3 16,2 0 2-16,1-1-1 0,2 1 2 0,0-1 1 0,2 0-3 16,2 1 4-16,-1 0 1 0,0 0-8 0,-1 2 1 0,-1 1-2 0,3 0-1 15,1 1 0-15,3 0 6 0,1-1-3 0,2 1 3 0,2-1 1 0,4-1-3 16,2 1 0-16,3-1-2 0,2 0-4 0,2 0 4 0,1 1-2 16,0 0-1-16,2-1 6 0,2 0-6 0,3 0 3 0,1-1 5 0,3 1-3 15,0-1-4-15,2-1 0 0,0 1-3 0,1 0-2 0,1 0 7 0,0-1 0 16,0 1-5-16,3 0 5 0,-1-1-6 0,0 1 6 0,2-2-1 15,1 1-5-15,-1 0-1 0,0 0-11 0,-1-1-10 0,-1 0-26 0,3 0-28 16,-2 0-29-16,1-2-28 0,1 0-18 0,1-1-18 0,0 0-13 16,2-2-8-16,0-1-6 0,0-3-24 0,2-3-32 0,1-3-28 0,2-5-22 15,3-3-264-15</inkml:trace>
-  <inkml:trace contextRef="#ctx0" brushRef="#br0" timeOffset="103822.47">12101 5192 1830 0,'-1'-4'87'16,"2"0"-80"-16,1-1-16 0,0 4 7 0,0 0-2 0,0 1-1 16,-2 2 0-16,-2 1-5 0,0 1 6 0,-4 2 4 0,-1 0 0 0,-3 3 4 15,-3 1-1-15,-3 0-1 0,-1 3 7 0,-5 0-3 0,0 0 0 0,-3 2 1 16,-2-2 1-16,-1 3 5 0,-4 1 2 0,0 0 3 0,-3 2 3 16,-1 2-3-16,-1 0 5 0,-3 2-5 0,1 1-4 0,-2-2 2 0,-1 2-7 15,0 0-1-15,-2-1-2 0,-2 2-5 0,2-1 2 0,0 3-3 0,-1-1 2 16,1-1 2-16,-1 1-6 0,0-2 5 0,-1 1 12 0,2-2 2 15,2 1 17-15,1-2 2 0,0-3-3 0,1 2 3 0,0-2 0 0,1-2-5 16,3 3 1-16,-1-3-2 0,3 2 3 0,0-2-3 0,2 2 3 16,2 0-2-16,1-1-4 0,2 1 0 0,2-2-9 0,1 0-4 0,3-1 2 15,1 2-5-15,2 0 4 0,3-2-7 0,4 0-5 0,2-2-1 0,2 1-4 16,4-2-1-16,2 2-5 0,3-1 2 0,3 1-3 0,2-1 9 16,3 0 2-16,1 2 0 0,4-1-1 0,1-1 1 0,3-1-4 0,2 0 4 15,3 0 11-15,1 0 1 0,2 0 12 0,1 1-1 0,3-2-5 0,1 1-4 16,1-1-6-16,0-2 5 0,1 1-2 0,-1-2 2 0,2 2 5 15,-2-1-7-15,1 0 1 0,-2-1 1 0,-1-1-2 0,-3 1 4 0,1-1 9 16,-3-1 1-16,0 0-3 0,-2 0 3 0,0 0-9 0,-1 0-6 16,-2-1 0-16,-1 2-2 0,-1 1-1 0,-2 0 5 0,0 0-12 0,-2 1 3 15,1 1-2-15,-3 0-8 0,0 2 9 0,-1 1-10 0,-2 0-9 0,-1 0-18 16,-1 1-34-16,-2 0-37 0,-2 2-50 0,0 0-50 0,-1 3-42 16,-2 1-59-16,0 1-73 0,-1 2-96 0,1 1-308 0</inkml:trace>
-  <inkml:trace contextRef="#ctx0" brushRef="#br0" timeOffset="104622.46">15905 6992 1836 0,'-7'-5'306'0,"1"-1"-303"0,0 0-61 15,2 1-8-15,2 1 10 0,0 0 31 0,1-1 3 0,-1 0 7 0,-1-2 4 16,0-1 6-16,-2-1 14 0,1-1 12 0,-2-2-2 0,0 0 3 0,0-2-5 15,0-1-1-15,-2-1 5 0,1-3 5 0,-2 1 9 0,-1 1-1 16,1-3 0-16,-1 0-3 0,-1-1-12 0,1-2 6 0,-1-2 3 0,-1-1-7 16,1-1 5-16,-2-1-5 0,2-1-6 0,0 1 9 0,-1-4-9 0,2 0-10 15,0-3 2-15,0 0-14 0,1 1 13 0,-1-1 6 0,0 1-5 16,1-1 10-16,-1-2-9 0,0 0 1 0,1 0 1 0,1 0 2 0,0 0 13 16,0 1 4-16,1-1 9 0,-1 0 2 0,0 1-4 0,0-1 3 15,1 2-4-15,1-2-5 0,-2 1 1 0,1 1-10 0,0 1 6 0,1 1 2 16,0-1-7-16,0 2 0 0,1-2-7 0,1 3-8 0,-1 0-1 0,3 2-2 15,-1-1-3-15,2 2 1 0,1-1 5 0,1 1-4 0,0-1 4 16,1 3 0-16,1 0-4 0,2 2-3 0,1 3-1 0,1-2 4 0,1 1-3 16,2 1-2-16,1-1 6 0,0 2-6 0,2-1 4 0,1 1 3 15,0 1 7-15,2 3-1 0,-2-1 3 0,3 2 2 0,0-1-11 0,-1 1 8 16,2 1-2-16,1 0-8 0,1 2 2 0,1 0-3 0,3 1 1 0,0-1 3 16,3 2-3-16,1 0-3 0,1 1 0 0,2 3 0 0,0-1 2 15,2 0 0-15,3 2-1 0,-2-1 1 0,3 2 1 0,-2 0 3 0,2 2 1 16,-1 0 1-16,1 0 4 0,2 2 6 0,-1-1 1 0,0 0 0 0,2 2-5 15,-2 0 0-15,1 1 1 0,-2 0-3 0,0 0-1 0,0 1 1 16,0 0-1-16,0 1-1 0,-1 0 8 0,-3 0-4 0,0-1-1 0,-3 2 5 16,1-2-2-16,-2 1 6 0,0 1-4 0,-2-1-4 0,-1 1-6 15,-1 0 1-15,-2 0-5 0,-2 0-3 0,0 0 3 0,-3 0 0 0,-1 0 1 16,-2 0-1-16,-2 0 5 0,-1-1-4 0,-1 1-3 0,-1-2 0 0,-1 0 0 16,-1 1-4-16,-3 0 4 0,0 0-9 0,-2-1-6 0,0 0-2 0,-1 0-12 15,0-1-8-15,-1 0-13 0,-1 0-11 0,0-1-10 0,0 0-10 16,-2 0-16-16,0-2-20 0,-1 0-26 0,0-1-29 0,-2-2-23 0,-2-1-21 15,0-3-12-15,-1-1-11 0,0-3 7 0,-1-4-63 0,1-4-419 16</inkml:trace>
-  <inkml:trace contextRef="#ctx0" brushRef="#br0" timeOffset="104955.48">16875 4154 2423 0,'-4'-5'90'0,"0"2"-115"0,1 0-28 0,4 3-8 0,1 2 18 16,2 1 25-16,2 1 17 0,0 1 7 0,2-1 3 0,1 0 15 0,1 1 0 16,0 0 10-16,1 1-2 0,3 0-6 0,0 1 7 0,2 1-2 0,1 0 9 15,1 0-2-15,2 0 5 0,0 1-2 0,3-1-5 0,0 0-7 16,0 1-6-16,1 0-3 0,0 1 0 0,3 0-2 0,2 0 0 0,0 0 1 16,2 0-2-16,-1 0-1 0,0 1 0 0,1 0-3 0,2-1 4 0,-1 0 4 15,1 0 1-15,-1 0 0 0,0 1-8 0,3-1 5 0,-2 1-12 16,1-1 0-16,-1 1 13 0,1 2-4 0,-3 0 16 0,1 2-4 0,-3-1-2 15,1 2 2-15,-1 1-5 0,-1 0 2 0,-3 1 0 0,-1 1-7 16,-4 1 0-16,-2-1-1 0,-1 2-5 0,-3 1 1 0,-2 1 3 0,-4 2-3 16,-2 0-2-16,-2 2 0 0,-4 0-2 0,-4-1-5 0,-3 2 1 15,-3 1 1-15,-5 1-6 0,-4 2-2 0,-4 3-5 0,-5 1-24 0,-5 2-9 16,-4 3-13-16,-2 0-29 0,-1 2-17 0,-3 2-39 0,-2 1-55 0,-3 5-75 16,-5 2-110-16,-5 7-165 0,-5 7-501 0</inkml:trace>
-  <inkml:trace contextRef="#ctx0" brushRef="#br0" timeOffset="108505.33">17699 7354 254 0,'8'9'111'0,"-2"3"-51"0,2 5-7 0,-2 0-9 15,-2-2-11-15,1 3-8 0,-1 2-8 0,0-2-6 0,-1 4-1 16,-1 1-6-16,0-1-3 0,-1 3 1 0,0 0 1 0,0 0-3 0,0 2 5 15,0 0-2-15,-1 1 1 0,1 0 4 0,-1 1 0 0,-1 0 3 0,1 3 3 16,-2 1 0-16,0 3 0 0,1-2-4 0,-1 1-2 0,2-1 2 16,0 1-1-16,1-1-1 0,0 2 0 0,1 1-4 0,2-1-1 0,2 0 5 15,1 0-1-15,1-1 2 0,4 1 1 0,1-3-5 0,3 0 1 16,2-1-3-16,3 0 2 0,4 0 5 0,1 1 7 0,3-2 2 0,-1 0-1 16,5-3-4-16,1 0-4 0,4-2 3 0,2 1 1 0,3 0 6 0,5 0 6 15,3-1 4-15,3-1 0 0,3-2-12 0,4-1-9 0,4 1-5 16,3-2-1-16,5 0 6 0,4-1 0 0,6 0-3 0,4-2-1 0,6-1-2 15,5 0-6-15,6-2-1 0,5-3-4 0,5 0-5 0,7-2-2 16,7-2-7-16,6-2-17 0,4 0-25 0,3-1-15 0,2 0 0 0,1-2 11 16,4 0 26-16,2 0 13 0,-2 0 11 0,2 0 5 0,-1 0 4 0,-1 1 10 15,0 1 11-15,-1-1 13 0,0 2 17 0,-2 0 15 0,0 1 9 16,-2 1 5-16,-1 0 1 0,0 2-8 0,0 0-4 0,-1 1-7 0,2-1-7 16,0 0-5-16,1-2-7 0,4 2-4 0,-1 0-8 0,2 1-8 0,1 0-4 15,0 0-3-15,0-1-1 0,1 1-3 0,-3-1 1 0,2-1-1 16,-3 2 2-16,-2-2-4 0,-1-1 1 0,-1 0 4 0,-4-1-7 0,0-1 3 15,-2-1-1-15,-3-2 3 0,-3-3 1 0,-4 0-2 0,0-4 0 0,-3 0-4 16,-2-3 7-16,-3-1 1 0,-6-1 1 0,-1-2 1 0,-5-2-3 16,-2-1 0-16,-4-2 6 0,-1 0-3 0,-5-3-2 0,-2-2 1 0,-2-1-2 15,-4-3 2-15,-2-1 3 0,-3-3 1 0,-6 1 1 0,-2 1-1 16,-6-2 5-16,-3-1 3 0,-4-3-5 0,-3 2 3 0,-3-3 1 0,-6 1 8 16,-3 0 3-16,-5-3-2 0,-3 0 3 0,-4-1-6 0,-3 0 0 0,-4 0-3 15,-5 0-2-15,-4-1-2 0,-4-2-1 0,-5 1-5 0,-4-1-4 16,-4 1-1-16,-5 0-4 0,-3 0-5 0,-5-2-7 0,-4 2 5 0,-5-1-3 15,-7 1 3-15,-2 0 7 0,-6 0-7 0,-4 1 1 0,-5 0 2 0,-5 0-5 16,-5 3 0-16,-4-3-1 0,-5 0 2 0,-5 2-2 0,-4 1 3 16,-5 2-1-16,-3 0 3 0,-6 1 2 0,-1 0-4 0,-5 0 3 0,-4 3 2 15,-2-1-5-15,-4 0 6 0,-4 4-1 0,-2-2-5 0,-2 3 3 0,-2 0-6 16,-3 3 0-16,-3-1-1 0,-3 3 2 0,-2 1 7 0,-1 0-5 16,-3 2 3-16,-3 1 0 0,-1 1-5 0,-5-1 8 0,-1 0-8 0,-5 2 1 15,-2 2 3-15,-3 2-2 0,-3 0 6 0,-2 1 2 0,-2 1-2 16,-5 1-5-16,-2 2-1 0,-2 1-1 0,-3 2-11 0,-1 2-6 0,-2 0-15 15,-2 0-25-15,-2 2-18 0,-3 3-16 0,-5 2-28 0,-1 2-20 0,-5 4-28 16,-3 2-42-16,-5 3-293 0</inkml:trace>
-  <inkml:trace contextRef="#ctx0" brushRef="#br0" timeOffset="147924.14">3902 12575 1959 0,'-10'-1'213'0,"0"1"-78"0,1 0-53 0,3 2-10 0,4-2 0 15,0 1-12-15,1 0-13 0,0 0-17 0,0 1-12 0,0 2-5 16,-1 2 3-16,2 1-16 0,0 3 0 0,2 1 3 0,-1 2-9 0,1 2 6 16,1 2 10-16,0 1 1 0,0 4 4 0,-1 1 10 0,2 1-11 0,-1 3 0 15,1 0 5-15,0 3-4 0,0 1 5 0,0 2 7 0,0 0-2 16,0 3 3-16,0-1-6 0,0 0 5 0,0 1 5 0,-1 0-1 0,1-1 2 16,0 2-1-16,-1-1-13 0,-1-1 14 0,0 1 8 0,-1 0-9 0,0 0 3 15,-1 1-8-15,0-1 0 0,-1 1 6 0,-1 0 5 0,0 0 0 16,0 0-7-16,-1-1-5 0,1 0 0 0,0-2-11 0,1-1-2 0,-1 0-5 15,0-1 1-15,0 0-2 0,1-3-1 0,0 0-12 0,2-2 8 16,0 0 6-16,1-2-3 0,1-1 14 0,1-1-15 0,0-2-4 0,1 1 5 16,1-2 1-16,1-2 0 0,1 0-1 0,3-1-3 0,1-1 6 0,3-1 1 15,0 0 6-15,2 0-7 0,2-1 3 0,0 0-7 0,2-1 6 16,3 0 5-16,1-2-8 0,2-2 1 0,3-2 0 0,2-1-8 0,2-1 9 16,3-1 3-16,2-1-10 0,1-2 0 0,4 0 1 0,0-1 1 0,4-2 2 15,4 0 0-15,1-2-8 0,3-1 0 0,2 0 4 0,3 0 0 16,0-2 0-16,3 0 0 0,3-1 0 0,1 0-2 0,2-1 3 0,4 1 3 15,1 0-4-15,3 0 2 0,4 1 4 0,2-1-1 0,2 0 9 0,4 2 9 16,2-1-4-16,2 0 9 0,1 0-1 0,4 0-5 0,0 2 13 16,2 0-5-16,5 0-2 0,-2 2 4 0,0-1-34 0,1 0 0 0,2 0 0 15,-1 0 0-15,2-1 0 0,-3 2 0 0,0 1 0 0,-1 0 0 16,-2 1 0-16,1 1 0 0,-1 0 0 0,-1 0 0 0,-1 1 0 0,-2-1 0 16,-3 1 0-16,-2 0 0 0,-2 0 0 0,-2 0 0 0,-2 1 0 15,-3-1 0-15,-2 1 0 0,-3-1 0 0,-6 0 0 0,-2 1 0 0,-3 0 0 16,-5 0 0-16,-3-1 0 0,-5 0 0 0,-3-1 0 0,-4 0 0 0,-5 0 0 15,-5 0 0-15,-1 1 0 0,-6-1 0 0,-2 0 0 0,-4-1 0 16,-4 0 0-16,-3 0 0 0,-4-1 0 0,-2 0 0 0,-3-1 0 0,-3-1-76 16,-3-1-75-16,-3-2-26 0,-3-2-38 0,-3-3-56 0,-4-4-103 0,-4-3-112 15,-4-4-216-15,-9-5-396 0</inkml:trace>
-  <inkml:trace contextRef="#ctx0" brushRef="#br0" timeOffset="148407.13">4169 12094 2952 0,'-33'-14'703'0,"8"1"-642"0,-1 0-25 0,15 2-36 16,10 3 15-16,7 0-1 0,4 0-10 0,5 1-1 0,4 0-14 16,5 3-6-16,6 1 3 0,6 1-5 0,4 3-2 0,7-1 0 0,6 2-11 15,6 2-7-15,4 1-3 0,5-1-4 0,4 0 0 0,4 0 14 16,4 0 3-16,1-2 7 0,3 0 6 0,1 0 1 0,2 0 8 0,3 0 11 16,1-1 5-16,4 0 0 0,1-1 5 0,4-2 4 0,3 0 19 0,4-2 4 15,3 0-3-15,2-2 7 0,3 0-17 0,0-1-9 0,1 0 6 16,-1 1-7-16,0 0-1 0,1 0 12 0,0 1-2 0,-1-1-4 0,2 0 13 15,-2 0-1-15,2 0-6 0,-2 2-2 0,-4 0-11 0,-2 2-4 0,-3 1-1 16,-1 0 1-16,-3 0 0 0,-4 2-6 0,-1 0 0 0,-5 2 0 16,-2 1-6-16,-5 1 3 0,-3 2-1 0,-3 1 2 0,-5 1 4 0,-4 1 4 15,-4 1-6-15,-5 0-6 0,-5 2-12 0,-4 3-8 0,-6 0 26 0,-3 2-4 16,-4 3 16-16,-3 1 2 0,-6 2-20 0,-4 3 2 0,-3 0 4 16,-5 4-2-16,-2 2 4 0,-2 5-4 0,-5 4 0 0,-2 3 4 0,-1 3 0 15,-2 4 8-15,-3 4 0 0,-2 4-14 0,-3 6-2 0,-2 3 0 0,-1 4 0 16,-3 5 0-16,-2 3 0 0,-2 2 0 0,-2 3 0 0,1-1 0 15,-3-1 0-15,0 0-18 0,-1-2-22 0,-2-2-22 0,-1-4-28 0,-2-4-32 16,-3-4-44-16,-1-4-65 0,-1-1-68 0,0-2-90 0,-4-1-146 16,-2-3-228-16,-6-1-204 0</inkml:trace>
-  <inkml:trace contextRef="#ctx0" brushRef="#br0" timeOffset="149691.44">5104 12925 3437 0,'-28'-2'481'0,"3"1"-340"0,0 1-105 0,6 3-36 0,9 0 0 0,2 1 0 16,1 2 0-16,2 2 0 0,0 4 0 0,2 4 0 0,-2 4 0 15,1 6 0-15,-1 2 0 0,-1 5 0 0,1 1 0 0,0 5 0 0,1 2-24 16,0 2-32-16,1 1 14 0,1 3-1 0,0-1 14 0,0 0 17 16,-1 0-27-16,1 0-1 0,0-1-12 0,1-2-7 0,1-3-2 0,-1-4-10 15,1-3-11-15,2-3-22 0,1-3-22 0,2-3-35 0,1-3-40 0,2-3-27 16,0-3-45-16,1-2-53 0,1-4-53 0,-2-4-89 0,3-3-358 16</inkml:trace>
-  <inkml:trace contextRef="#ctx0" brushRef="#br0" timeOffset="149974.44">5111 13000 3303 0,'-10'-17'188'0,"2"2"-52"16,2-5-66-16,5 2-21 0,5 2 5 0,2-1-6 0,3 0-15 16,1 1-9-16,2 2-16 0,0 1-6 0,1 1-4 0,0 1-2 0,1 2 2 15,0 1 0-15,2 3-8 0,-2 1-6 0,2 0-5 0,0 3 2 0,-1 1 1 16,-1 1-5-16,-1 3 4 0,0 0-2 0,-2 2 4 0,0 2 7 15,-2 2 2-15,0 0-5 0,-2 1 5 0,0 1 1 0,-2-1 1 0,-2 2 4 16,-1 1 0-16,-2 1-5 0,-1 0 1 0,-1 1 6 0,-2 2-4 16,-2 1 2-16,-1-1-5 0,-3 1-3 0,0-1 5 0,-3 0-1 0,-1-1-2 15,-2 1 5-15,-1-2 3 0,-3 0-4 0,-3 0 4 0,2 1-4 0,-3-2-1 16,1 1 5-16,1-1-4 0,1-1-7 0,-1 1-10 0,1-2-16 16,1 1-8-16,1-1-14 0,3-1-21 0,1-1-17 0,0-1-23 0,2-1-15 15,2 1-16-15,1-1-30 0,1 1-23 0,2-2-49 0,2-1-65 0,2-1-80 16,2-2-71-16,2-1-256 0</inkml:trace>
-  <inkml:trace contextRef="#ctx0" brushRef="#br0" timeOffset="150258.44">5538 13033 2869 0,'-4'7'180'0,"2"2"-80"0,1 4-67 15,3 1-3-15,3 1 9 0,1-2-3 0,0 3-6 0,1 2-12 0,0 1-16 16,-1 1 4-16,1 2-6 0,-3-2-4 0,1 3 2 0,-1 0-7 15,0-2-23-15,-1 1 10 0,-2-1-3 0,0-3 6 0,-3 2 13 0,0-3-6 16,-2-1 7-16,0-3-2 0,0-2 15 0,-1-2-2 0,-2-2 1 16,0-1 9-16,1-3 3 0,-2-1 10 0,0-2 11 0,0-3 1 0,-3-3 3 15,2-2 0-15,-2-1-4 0,-1-1 7 0,1-2-12 0,1-1 8 0,-1-3-9 16,2-2-2-16,0 0-11 0,1-2 2 0,0-1-6 0,1-1-5 16,3-2 3-16,0 1-11 0,2 1 0 0,2 0-16 0,1 2 5 0,3 3-13 15,-1 0-1-15,3 3 2 0,0 2-17 0,1 2-1 0,2-1-8 0,-1 3-10 16,1 0-4-16,1 1-19 0,0 1-24 0,1 1-18 0,-1 2-20 15,2 1-23-15,-3 2-19 0,3-1-29 0,1 1-26 0,0-1-39 0,1 1-39 16,-1 0-59-16,1 0-59 0,0-2-175 0</inkml:trace>
-  <inkml:trace contextRef="#ctx0" brushRef="#br0" timeOffset="150891.44">5742 13263 2657 0,'-4'1'313'0,"2"-1"-169"16,2 1-90-16,3 1-12 0,1-2 19 0,2 0 7 0,1 0 1 0,0-1-18 15,3 0-16-15,1 0-9 0,0 0-2 0,0-1-5 0,1 0-4 0,1-1 0 16,0 0-9-16,1-2-1 0,1 0-1 0,-3-2-10 0,1 0 3 16,-1 0 1-16,-2 0-4 0,-1 0 4 0,0-1-5 0,-2-2-3 0,-2 1-3 15,0-2 0-15,-2 0-2 0,0-1 4 0,-3-1 2 0,-2 0-8 0,0 1 12 16,-2 0-4-16,-1-1-1 0,0 0 8 0,-2 1-7 0,-1 0 6 15,-1 1 4-15,0 2 7 0,0 0-5 0,-1 1 1 0,0 1 4 0,-1 2-3 16,0 1 1-16,2 1-1 0,0 1-3 0,0 2-6 0,1 0 1 16,-1 1-3-16,2 2-3 0,-2 2 7 0,2 1-7 0,-1 2 1 0,1 2 1 15,1 1-6-15,0 2 6 0,2 3 0 0,-1 2-4 0,1 0 3 0,0 2 5 16,2 2-3-16,1 0 8 0,0 2-4 0,1 0 0 0,0-1 2 16,0 1-5-16,3-1-4 0,-1-1 14 0,2-1-5 0,0-1 2 0,1 0 5 15,0-2-16-15,1-1 6 0,1-4 3 0,1 0-4 0,-1-2-3 0,1-1 1 16,0-1-3-16,0-1 6 0,-2-4 1 0,2-1-2 0,-1-2 1 15,0-1-5-15,3-1 3 0,-2-2 5 0,-1 0 4 0,2-3 1 0,-2-2 2 16,1 0-1-16,1-2-3 0,-2 0 3 0,0-2-3 0,1 1 8 16,0-2 2-16,2 0-4 0,-1-1-2 0,0 0 1 0,0 1-19 0,-1 0 2 15,0 2 14-15,1 1-3 0,0 2 16 0,-1 0-5 0,2 3-9 0,-1 0 3 16,1 0 2-16,0 3 6 0,0 1 0 0,0 1-4 0,0 2-4 16,2 0 4-16,0 2 2 0,1 1-9 0,0-1-4 0,1 0-2 0,1 1-11 15,-1-1-2-15,0 1 0 0,2-1-5 0,-1 0 7 0,1-1 8 0,-1 0 10 16,-2 2-10-16,0-1-8 0,0 1 6 0,-1-1-6 0,-1-2 20 15,1 0 0-15,-1-1-3 0,-1 0 5 0,-1-1-3 0,-2-1 5 0,0 0 7 16,-2-1-5-16,1 0 2 0,0 0-4 0,0-1 2 0,-1 0 7 16,0-1-16-16,-1-1 2 0,1 1 10 0,-1-1 5 0,0-1 9 0,-1 1 4 15,-2-2-23-15,1 1-1 0,-1-1 5 0,-1-1-4 0,-2 2 1 0,-2-2-14 16,0 1 4-16,-2-1-2 0,0 0 0 0,-2 2 4 0,-1 0-6 16,0 1-2-16,-2 0-6 0,-1 0 5 0,-2 1 1 0,-2 1 4 0,1 1-6 15,-2 0-5-15,1 1-2 0,0 0-1 0,0 0 5 0,-1 2-10 0,3 1-7 16,0 1-8-16,3 1 2 0,2 1 3 0,0 2-8 0,1 1-14 15,1 0-20-15,1 3-14 0,2 2-17 0,0 0-28 0,2 1-40 0,-1-2-59 16,2 1-51-16,1-1-93 0,1-1-101 0,3 0-99 0,1-2-111 0</inkml:trace>
-  <inkml:trace contextRef="#ctx0" brushRef="#br0" timeOffset="151258.44">6413 12817 3450 0,'-13'8'230'0,"2"2"-120"0,-1 0-81 0,6-1-15 16,4 0 3-16,0 0-7 0,4 3 7 0,1 4-3 0,0 2-8 15,1 6-4-15,0 3-6 0,1 1-4 0,-1 3 2 0,0 0-7 0,-1 1-3 16,1 0-3-16,0 2-8 0,1 0-2 0,0 2-2 0,0-1-20 0,0-1 7 16,1-2-8-16,-3-2-6 0,2 0 11 0,0-3-13 0,-1-1 1 15,2-3 3-15,-1-1-1 0,1-3 2 0,0-2-2 0,1-3 0 0,0-2 1 16,0-2 7-16,-1-4 14 0,-1-1 19 0,0-4 21 0,-1-1 17 15,1-2 10-15,0-3 9 0,0 0 3 0,0-3-1 0,2-2-4 0,-1-1-2 16,2-1-11-16,-2-2-4 0,1 0-6 0,1-1-6 0,1 1 6 0,-1-2-7 16,0 1 0-16,-1 2 0 0,2 1-7 0,-2 1 7 0,0 2-7 15,1 0-4-15,0 3 4 0,0 2-4 0,0 2 6 0,1 3 3 0,-3 1-2 16,1 1 3-16,0 3-1 0,0 0-5 0,0 3 0 0,0 0 3 0,2 1-1 16,-1 3 1-16,0 2-9 0,0 1 1 0,0-2-3 0,0 2 5 15,0 0 1-15,0 1-11 0,-1-1-2 0,1 1-3 0,-1-1-6 0,-1 0 2 16,1-1-19-16,-1 0-2 0,0-1-20 0,2-2-21 0,-2-2-14 15,0 0-20-15,0-3-11 0,0 0-10 0,-1-1-22 0,0-4-36 0,0 0-60 16,-1-2-77-16,-1-1-89 0,-1-2-396 0</inkml:trace>
-  <inkml:trace contextRef="#ctx0" brushRef="#br0" timeOffset="151407.44">6691 13247 3010 0,'-13'4'514'0,"1"0"-436"0,-1 1-55 0,7-1-36 0,6-3-10 16,2-1-7-16,1-1-27 0,2 1-55 0,1 0-61 0,2-1-65 0,1 1-48 16,1 0-71-16,0 0-110 0,0-2-137 0,3 0-275 0</inkml:trace>
-  <inkml:trace contextRef="#ctx0" brushRef="#br0" timeOffset="151674.44">7114 13215 3025 0,'-8'0'173'0,"0"1"-90"0,-1 0-50 0,2-1-3 0,0 0-2 0,3 1-3 15,-2-1-19-15,2 1-12 0,0-1-1 0,-2 0-2 0,1 2-13 16,0 1 4-16,-1 1-7 0,-1-1-2 0,0 2 5 0,0 1 3 0,-1 2 6 16,1 0 6-16,-1 2 9 0,1 0 1 0,1 1-1 0,0 3 25 15,0 1-6-15,0 1 10 0,1 1 12 0,1 1-23 0,2 1 6 0,1-1-8 16,2 1-5-16,0-1-4 0,3 0 0 0,1-2-5 0,1 1-3 0,2-2 3 15,0-1-6-15,-1-1 0 0,2 0-9 0,0-1-1 0,1-1-7 16,1-2-8-16,1-2-17 0,-2 0-17 0,2-1-21 0,0-1-18 0,0-1-8 16,0-2-29-16,0-2-25 0,1-1-27 0,0-4-36 0,1-1-30 0,-2-2-28 15,0-2-32-15,0-4-21 0,0-3-7 0,0-3-202 0</inkml:trace>
-  <inkml:trace contextRef="#ctx0" brushRef="#br0" timeOffset="151874.71">7416 12938 1993 0,'-1'-4'325'15,"-1"0"-101"-15,1-1-59 0,-1 2-15 0,2 1-18 0,-1 0-32 16,1 2-30-16,0 0-28 0,0 2-8 0,0 0-4 0,0 1-3 0,1 1-2 16,0 1-7-16,0 2-5 0,1 1 2 0,-1 3-5 0,1 4-10 0,0 0 8 15,2 5-7-15,-1 1 3 0,2 1 5 0,-1 3-9 0,1-1 0 16,1 4-5-16,-1 1-1 0,5 3-1 0,0 2 7 0,2 2-18 0,4-3 7 16,1 1 0-16,-1-2-12 0,1 0 3 0,2-2-21 0,0 0-19 15,1-4-18-15,1 0-22 0,0-3-27 0,0-1-24 0,1 0-26 0,1-3-12 16,2-1-21-16,0-3-27 0,-1-2-41 0,1-3-37 0,-2-4-28 0,0-1-72 15,-1-5-35-15</inkml:trace>
-  <inkml:trace contextRef="#ctx0" brushRef="#br0" timeOffset="152007.72">7382 13458 2948 0,'-11'4'291'0,"1"-1"-131"15,-2 1-76-15,5-2-25 0,2-1 1 0,3-1-7 0,0-1-23 16,3-1-22-16,0 0-18 0,1-1-20 0,4-1-13 0,0-1-19 0,4-3-40 15,4-2-59-15,4-2-90 0,2-3-103 0,6-3-140 0,6-4-123 0,5-5-429 16</inkml:trace>
-  <inkml:trace contextRef="#ctx0" brushRef="#br0" timeOffset="152891.7">1952 15556 2967 0,'-27'0'141'0,"3"0"-10"0,-3 1-31 16,11-1-27-16,5 0-11 0,2 0-1 0,2-2-18 0,1 1-6 0,3 0-8 15,2-1-18-15,1 2 0 0,0-2-5 0,0 0-14 0,4-1 7 16,0-1-3-16,2 0-2 0,3-3 6 0,2-2 2 0,4-1-6 0,3-3-1 16,2-2 3-16,0 0-2 0,4-4 8 0,3-1-1 0,4-1-4 0,1-3-1 15,0 0 5-15,2-2-4 0,-1-1-1 0,2 0 2 0,1-2-23 16,1 0 27-16,2-2-2 0,3 1-21 0,1-2 19 0,1-1-15 0,2-1 0 16,-1-1 21-16,0 0-8 0,-1 0-2 0,2-2-4 0,-1 0-29 15,-3 1-35-15,1-1-50 0,-4 4-63 0,-2 1-54 0,2 1-57 0,-2 1-71 16,0-1-84-16,-1 2-65 0,-2-1-346 0</inkml:trace>
-  <inkml:trace contextRef="#ctx0" brushRef="#br0" timeOffset="153124.7">3124 14187 3699 0,'-7'0'89'0,"3"1"-5"0,3 1-57 0,9-2-2 0,5 2-1 0,4-1 9 16,5 0 3-16,3 0 4 0,2 0-16 0,4 0-10 0,4 1-14 16,1 0 0-16,1 1 0 0,-2 0 0 0,0 1 0 0,-1 0 0 0,2 1 0 15,0 1 0-15,-1 1 0 0,0 1 0 0,-4 1 0 0,-1 0 0 16,-4 3 0-16,-3 0 0 0,-3 2 0 0,-5 1 0 0,-2 0 0 0,-3 5-10 16,-3 1 4-16,-2 2-14 0,-3 5-2 0,-5 3-6 0,-4 5-4 0,-5 2-3 15,-2 2-8-15,-3 5-8 0,-5 0-5 0,-1 1-3 0,-1-1-4 16,-2 1-18-16,2-2-19 0,-1-3-26 0,1-1-43 0,1-5-27 0,2-3-42 15,2-4-47-15,3-2-70 0,1-2-158 0,0-1-514 0</inkml:trace>
-  <inkml:trace contextRef="#ctx0" brushRef="#br0" timeOffset="153857.7">8531 14079 3790 0,'-3'-3'168'0,"1"2"-59"0,2 0-81 0,3 1-28 0,2 1 0 0,5 2 0 16,5 3 0-16,5 2 0 0,8 4 0 0,1 5 0 0,5 2 0 0,0 5 0 16,2 4 0-16,-2 1 0 0,3 3 0 0,0 1 0 0,0 1 0 15,4 3 0-15,0 1 0 0,0 3 0 0,2 0-10 0,-2 0 12 0,-2 2 4 16,2 0-8-16,-2 0 6 0,2 1-4 0,0 1-6 0,0-1 12 0,-2 0-6 15,0-1 0-15,-1-2 0 0,-2-1 0 0,0-1 0 0,-1-1 0 16,1-1 0-16,-1 3 0 0,1-4 0 0,-1-1 0 0,-3 0 0 0,0-3 0 16,-2 3 0-16,0-4 0 0,-3 0 0 0,0-2 0 0,-1-2 0 0,-3-2 0 15,-2-1 0-15,0 1 0 0,-3-1 0 0,1-2 0 0,-2 0 0 16,-2-3 0-16,0 0 0 0,0 0 0 0,-2-4 0 0,-2 0 0 0,-2-2 0 16,0-3 0-16,-1 1 0 0,-2-3-88 0,0 0-49 0,-2-2-8 15,0 0-28-15,-1-1-18 0,-1-1-37 0,0-2-38 0,0 1-33 0,-2-2-45 16,1 0-40-16,-2-1-50 0,-1-1-32 0,0-1-215 0</inkml:trace>
-  <inkml:trace contextRef="#ctx0" brushRef="#br0" timeOffset="154141.63">9509 16037 3175 0,'-11'5'200'0,"0"0"-57"0,-1 1-51 0,1-3 0 16,3-2-13-16,2-1-21 0,1 0-33 0,2-1-13 0,0 0 3 0,0-1-1 15,1 0 15-15,1 0-11 0,0 0 3 0,1 1 1 0,-1 0-10 16,2 1-4-16,-2-1-8 0,1 1 4 0,1 1-2 0,-1 0 4 0,2 2-14 16,1 1 6-16,1 4-8 0,2 2-2 0,1 4 8 0,2 3-14 0,2 4 9 15,0 3-11-15,2 0-4 0,1 0 19 0,-1 0 5 0,0-1 5 16,-2-2 1-16,2-2-12 0,-1-2 18 0,-1-2 8 0,0-3 1 0,-2-4 15 16,0-1 0-16,1-3 14 0,0-2-50 0,0-3 0 0,1-2 0 0,0 0 0 15,-2-1 0-15,1-1 0 0,-1-2 0 0,0-3 0 0,2-3 0 16,1-2 0-16,1-1 0 0,1-5 0 0,1-3 0 0,1-1 0 0,0-6 0 15,3-1 0-15,1-5 0 0,1 0 0 0,3-2 0 0,1-2 0 16,1-1-122-16,3-2-137 0,4-1-129 0,4-2-208 0,8-4-293 0,8-4-360 16</inkml:trace>
-  <inkml:trace contextRef="#ctx0" brushRef="#br0" timeOffset="157207.63">10599 14083 2225 0,'-13'2'661'0,"1"2"-480"0,-3 2-18 0,7 0-65 15,5 0-22-15,4 0-19 0,3 2-16 0,3 1-19 0,4 3-13 0,3 3 10 16,5 3 7-16,3 1 6 0,1-1 15 0,4 2-11 0,2 0-8 0,3-3-12 15,2 1-9-15,2 0-3 0,1-2 0 0,2 0-2 0,0 1-2 16,-2-3-2-16,0 0-2 0,-2 0 2 0,1 0 0 0,-1 0-7 0,0 0 3 16,-1-2-13-16,-2 0 6 0,1-1 1 0,-3-1-9 0,0 0 10 0,-1-2-4 15,-2-1-6-15,-2 0-11 0,0-1-7 0,-3-1-3 0,-2-1-25 16,1-1-13-16,-2 0-17 0,-1-3-46 0,0 0-41 0,-2-2-50 0,-1-1-70 16,-4-2-81-16,-1-3-107 0,0-3-413 0</inkml:trace>
-  <inkml:trace contextRef="#ctx0" brushRef="#br0" timeOffset="157425.14">11593 13734 3107 0,'-9'2'256'0,"0"2"-145"0,0 2-29 0,2 2-23 0,5 2-17 16,1 1-12-16,1 5-17 0,2 4-9 0,1 4 2 0,2 5-2 15,0 3 0-15,0 5-4 0,0 3 9 0,0 5 1 16,1 5-3-16,1 4 3 0,2 6-6 0,0 2 1 0,1 4 3 0,0 3 0 0,1 0-20 0,-1 2 12 15,-1 2-2-15,1-1 0 0,-3 1 2 0,0-1-21 0,-1-1-11 16,-2 0-27-16,-1-1-25 0,-1-3-49 0,-3 0-36 0,-1-1-52 0,-1-4-45 16,-3-2-20-16,0-3-19 0,-1-5 24 0,1-6 29 0,-1-6 18 15,-2-10 4-15,0-8-17 0,-1-8-22 0,-1-5-231 0</inkml:trace>
-  <inkml:trace contextRef="#ctx0" brushRef="#br0" timeOffset="157808.14">11761 14673 2280 0,'-3'0'955'0,"1"1"-800"0,1-1-29 0,2 1-40 0,1-1-1 15,1 1-24-15,3 0-26 0,1 1-18 0,3 0-7 0,1 0-8 16,1-1-1-16,1 2-4 0,0-1-1 0,1 1 2 0,0-1-4 0,-1 1 2 16,3-1 0-16,0-1-1 0,0 0 3 0,-1-2 2 0,1 0-2 15,0 0 0-15,-1-3-6 0,2-1-9 0,-1 0-2 0,-1-4-6 0,-2-1-5 16,1-2-3-16,1-3 3 0,-1-1-3 0,0-3 3 0,0-1 13 0,0-1-2 15,0-2 6-15,0-2 13 0,-2 0-13 0,-1-1 8 0,-1 0 1 16,-1 0 1-16,-2 0 6 0,-1 2-3 0,-1-1 4 0,-1 3 0 0,-2-1-4 16,0 1 3-16,-2 3-1 0,-1 0-2 0,-1 2 4 0,-2 4 0 0,-2 2-1 15,0 2 8-15,-2 3-3 0,-1 1-8 0,-1 2 0 0,-2 1-15 16,-1 2 4-16,-1 3 2 0,-2 2-1 0,1 2 3 0,0 2 3 0,1 0 2 16,-1 4 14-16,2 3 2 0,2 3-1 0,-1 1 2 0,1 2-4 15,2 1 10-15,0 0 3 0,1 3 4 0,2 1-2 0,2 1 1 0,2-1-1 16,2 2 5-16,1-1 1 0,0-1-20 0,3 1 13 0,2-3-8 0,2 0-4 15,2-1 9-15,2 0-22 0,1 0 0 0,2-3 0 0,1-1 6 16,2-2-1-16,2-4-5 0,1-1 0 0,1-2 0 0,0 0 0 0,1-3 4 16,-1-1-4-16,-1-2-9 0,0-3-7 0,-1 0-13 0,0-2-17 0,-1-2-25 15,0 0-38-15,-1-4-50 0,1-2-56 0,-1-1-80 0,0-2-77 16,-1-2-87-16,1-2-101 0,1-7-457 0</inkml:trace>
-  <inkml:trace contextRef="#ctx0" brushRef="#br0" timeOffset="158142.14">12907 14295 2846 0,'0'-4'273'0,"1"1"-148"0,0-4-19 0,2 1-6 0,-1-2-21 16,1-1-24-16,-1 1-48 0,-1-2-24 0,0 1-1 0,0 1-5 0,-2 2-1 16,-1 0 0-16,-2 2-2 0,-1 1-3 0,-2 0 3 0,0 1-5 0,-3 0-3 15,-2 1-4-15,-2 1 4 0,-2 0 13 0,0 2 7 0,-4 2 10 16,0 1 4-16,1 2 5 0,0 1-3 0,1 1 7 0,1 1 2 0,1 0-4 15,1-2 0-15,3-1-4 0,0 0-1 0,4-1 0 0,-1 0-7 16,3 0 1-16,2-2 6 0,1 1 0 0,1-1 7 0,3 1-6 0,-1 0 4 16,3-1-1-16,2 3-8 0,2 0 9 0,2 2-5 0,0 0 7 0,3 2-2 15,1 0 0-15,1 0 4 0,0 3 5 0,1 1 10 0,0 2 3 16,0-1 2-16,-1 2 11 0,-2 1 12 0,-1 2 4 0,-1 1-2 0,-1 2 1 16,-3 0 0-16,-1 3-7 0,-3 1 1 0,-2 3-18 0,-2 0-10 0,-2 2-7 15,-4 0-4-15,-1 2-8 0,-3 0-8 0,-1 1-2 0,-1-2-12 16,-1-1-17-16,-2-3-13 0,1-1-16 0,0-3-24 0,0 1-8 0,0-4-25 15,-1 0-30-15,0 0-27 0,-1-4-42 0,1 1-43 0,3-2-51 0,-1-3-75 16,0 1-142-16,0 1-395 0</inkml:trace>
-  <inkml:trace contextRef="#ctx0" brushRef="#br0" timeOffset="159542.14">11216 16340 2289 0,'-7'0'166'0,"1"1"-12"0,-1 0-31 15,1 0-14-15,1 0-32 0,1 1-28 0,1 0-27 0,1 1-20 0,0-1-4 16,0 2-3-16,1 0 5 0,0 2 7 0,0 2-14 0,1 2 0 16,0 1-5-16,1 4 4 0,2 2-9 0,1 4 8 0,3 2 3 0,0 5-4 15,3 4 4-15,3 6 3 0,1 3-7 0,1 4 2 0,1 3 8 0,1 3-2 16,-1 1 7-16,1-1 0 0,-3-2 2 0,2-2-7 0,0 0 0 16,-9-26 10-16,1 6-3 0,-1-3-7 0,3 5-5 0,-2-4-9 0,2 5 12 15,-2-5 9-15,1 2-4 0,0-3 6 0,-2-4-16 0,-1-2-1 0,0-3 8 16,-1-3-9-16,-2-3 3 0,0-3-16 0,-2-2-22 0,0-3 1 15,-2-2-7-15,-1-3-2 0,-1-2 15 0,-1-4-2 0,-1-4 20 0,-1-3 8 16,-1-2 5-16,0-4 6 0,-2-8-5 0,-8-23 30 0,1 2 22 16,2 7 22-16,3 9 21 0,0 1 0 0,0-1 1 0,-1-1 2 0,1-1-4 15,1-1-8-15,-1-1-4 0,2 0-21 0,0 1-12 0,2 4-10 0,2 2 3 16,3 3-9-16,2 4-8 0,1 4 8 0,2 3-13 0,1 3 6 16,2 3-8-16,0 4-9 0,1 2 13 0,0 3-4 0,1 2-2 0,0 2-3 15,2 2-14-15,1 2 8 0,2 3 2 0,2 5-6 0,0 2-6 0,2 5 1 16,0 4-1-16,0 1 1 0,-1 5 8 0,2 2 1 0,1 3-4 15,-1 3-7-15,2 1-4 0,-1 2 0 0,-2 0 11 0,-2 0 0 0,1 1-4 16,0 0-10-16,-2 1 10 0,-8-23 4 0,2 7-11 0,0-3-19 16,1 5-17-16,0-2-36 0,1 3-33 0,0-1-48 0,0 0-80 0,1-1-51 15,0-4-64-15,-1-3-106 0,0-2-122 0,-1-5-223 0</inkml:trace>
-  <inkml:trace contextRef="#ctx0" brushRef="#br0" timeOffset="159708.14">11490 16886 3205 0,'-5'2'230'0,"2"1"-74"16,-1 1-39-16,4-3-12 0,0 1-23 0,2-3-31 0,2 0-33 15,0 0-22-15,3-2 0 0,0 1-8 0,3-2 14 0,2 0-20 0,0 0-19 16,2-3-13-16,-2 0-54 0,2 0-29 0,0-3-45 0,2 0-63 0,-1-1-41 16,0 1-53-16,-1-1-74 0,1-1-73 0,-2-2-78 0,2-3-237 15</inkml:trace>
-  <inkml:trace contextRef="#ctx0" brushRef="#br0" timeOffset="159959.14">12155 16598 2852 0,'-8'1'325'0,"1"1"-179"0,-2-1-12 0,1 0-13 0,1-1-14 15,0-1-36-15,1 0-48 0,-3-1-8 0,1 0-15 0,-1 1-9 0,-1 0 1 16,-2 1-4-16,1 1-18 0,-3 1-1 0,0 2 5 0,-1 1-14 0,-1 1 12 15,0 2-10-15,-1 1-5 0,1 0 19 0,1 3 15 0,0 1 7 16,0 2 0-16,2 1-3 0,1 0-4 0,3 3 11 0,0 1 7 0,3 0-4 16,1 0 1-16,3 0 1 0,2-2-7 0,1 1 8 0,4-2-8 15,1 1 3-15,2-3 3 0,2 0-10 0,2 0 10 0,1-1-6 0,1-1-13 16,2-1-2-16,0-1-16 0,2-2-13 0,2-2-20 0,-1-2-33 0,2 0-39 16,-1-4-43-16,0 0-46 0,0-2-47 0,0-1-59 0,0-2-71 15,2-3-36-15,0-3-144 0,-1-4 29 0</inkml:trace>
-  <inkml:trace contextRef="#ctx0" brushRef="#br0" timeOffset="161191.14">12599 16575 1966 0,'-1'1'613'16,"0"0"-424"-16,-1-1-26 0,2 0-13 0,0-2-15 0,-1 1-37 0,0-1-48 15,1 0-21-15,-3 0-27 0,0 0-11 0,0-1 7 0,-2 2-10 16,-1-2 8-16,-1 0-21 0,-2 2-20 0,-2-1-4 0,-1 2-9 0,0-1 10 16,-1 2-2-16,-1 1 6 0,0 0 15 0,0 2 7 0,0 1 6 15,-1 0 3-15,1 1 4 0,1 2 16 0,1 1 7 0,-1 1-6 0,2 2 11 16,0-1 3-16,2 1-3 0,1 2 14 0,1 0-14 0,2 3 4 0,1-1 3 16,3 2-17-16,1 1 10 0,1 1-10 0,2-1 0 0,2 1 7 15,3 0-18-15,0-1 8 0,2-2 1 0,3 0-6 0,1-4 7 0,1 0-10 16,1-1 5-16,2-2 3 0,0 0-8 0,0-1-5 0,2-3 1 0,0-2-2 15,1-2 4-15,-1 1 6 0,1-2-15 0,-2 0 12 0,0-2-3 16,-1-2 1-16,-1-1-3 0,-4 1 1 0,1-3 0 0,-4 0-2 0,1-1 3 16,-2-1-1-16,-1 1 3 0,0-2 0 0,0 0 2 0,-1 1 4 15,0-3-1-15,-1 1 3 0,-2-2-6 0,0-1 1 0,-2 0 6 0,0-1 13 16,-2-1 3-16,0-3-4 0,-1 2-4 0,-2 0-1 0,-1-1-3 0,0 0-1 16,0 2-8-16,1 1-2 0,-1 1 6 0,2 3-1 0,0 1 13 15,0 4-11-15,1 2 4 0,1 2-2 0,-2 3-5 0,1 1 7 0,0 1-11 16,-2 0-2-16,2 1 0 0,-2 1-2 0,1 2 2 0,0 3 2 0,2 3-14 15,0 0-4-15,3 2-5 0,0 1 3 0,1 1 7 0,2 2-4 16,0-2 2-16,1-2-2 0,2-2-1 0,-1 0 4 0,2-1-9 0,0-3-3 16,0-1 3-16,1-1-3 0,0-2 10 0,0 0 4 0,-1-1 3 15,1-2 1-15,1 0-4 0,0-2 8 0,0-1-4 0,0-2-4 0,0-1-2 16,0 0-7-16,1-1 4 0,-1-1 6 0,0-1-11 0,-1 0-2 0,1 0 0 16,-1-2-1-16,1-1 17 0,0 0-5 0,-2-1 0 0,1-1 9 15,-1 3-4-15,0-2 8 0,-1 1 5 0,0 1-10 0,-3 0 12 0,2 1-11 16,-2 0 6-16,0 2 14 0,0 1 3 0,-1 3 16 0,1 0-2 0,-1 2 5 15,0 0 9-15,0 1-5 0,0 2-10 0,0 0-9 0,1 1-11 16,0 0 0-16,1 1-1 0,0 1-13 0,0 0 2 0,-1 0 0 0,1 0 2 16,-1 0 3-16,-1 2-10 0,0-1-4 0,2 0 6 0,-1 0-20 15,-1-1 2-15,0 0-7 0,-1 1-9 0,-1-2-1 0,0 2-11 0,-1-2-2 16,0 0-7-16,-1 0-1 0,-1-1-5 0,-2 1 0 0,0-2 2 0,-1 0-7 16,-1-1-1-16,0-1-11 0,-1-1-3 0,0-1 5 0,-1-1 12 15,1-3 7-15,0 0 6 0,1-2 11 0,-1-1 0 0,1 0 4 0,0-1 6 16,-1-2 11-16,0 0 16 0,1-3 16 0,1-1 15 0,1-1 7 0,1 0 15 15,0-2 6-15,0-1-1 0,1 0 2 0,1 2-7 0,1-1-5 16,1 0 1-16,0 3-8 0,3 1 3 0,-2 1 8 0,1 1 3 0,0 0-2 16,-1 2-5-16,0 1-3 0,0 0-9 0,1 0-3 0,1 1-13 15,0 0-8-15,0 2-7 0,-1 0-2 0,1 0-4 0,1 1-16 0,-1 0 2 16,1 2-15-16,-2 0-6 0,1 1 3 0,0 1-19 0,0 0 4 0,1 0-17 16,-1 1-19-16,0 0-11 0,1 2-21 0,-1 0-10 0,0 0-22 15,0 2-6-15,2-2 1 0,0 2 4 0,0 0 23 0,2-1 23 0,-1 2 30 16,0-1 30-16,-1 0 23 0,1 1 14 0,-1-2 13 0,1 1 18 0,-1-1 20 15,0 0 22-15,-2 0 14 0,1 1 12 0,-2-2 4 0,1 1 5 16,-1-1-3-16,1-1-11 0,0 1-6 0,-2-3-13 0,1 1-9 0,0 1-6 16,0-2-11-16,0 0-8 0,0 0-7 0,1-1-2 0,-2 1 1 15,1-1-6-15,0 0 4 0,-1 0 0 0,1 0-1 0,-2 0 8 0,1-1 5 16,0 1-2-16,-1-1 9 0,1 0 14 0,-1 0 7 0,-1-1 17 0,2 0-6 16,-1 0 0-16,-1-1-4 0,1 0-11 0,-2-1 1 0,0 1-11 15,-1-2-7-15,-1 0-5 0,0-2-15 0,-2 0 4 0,-1 0-11 0,0-1-9 16,-2 0 1-16,0 1-17 0,-2-2 10 0,-1 0 4 0,-1 1-3 0,0 0 5 15,-1 2-12-15,0 0 4 0,-1 1 3 0,1 3-4 0,1 0 2 16,-1 0 9-16,1 2 0 0,-1 2 4 0,2 2 5 0,0 0-8 0,1 0 9 16,2 3-10-16,-1 0-4 0,1 1 8 0,0 2-16 0,2 0 8 15,0 2-5-15,1 0-8 0,1 1 11 0,1 2 2 0,2-1-11 0,1 0 0 16,0-2-5-16,2-1 2 0,1 0 6 0,1 0-13 0,2-1 6 0,0 0 0 16,2-2 6-16,2-3 8 0,1 1-9 0,1-2-4 0,-2 0 8 15,1-1-2-15,0 0 5 0,0-1 0 0,1 1-2 0,-1-1 5 0,0 0-6 16,1-2 12-16,-2 0-3 0,1 0 1 0,-1-1 2 0,-1 0-2 0,1-1 12 15,-2 1 3-15,-1 0-5 0,0 0-3 0,-2-1-3 0,2 2 4 16,0-1-2-16,-1 0 1 0,0 0-5 0,0 0-3 0,0 1 4 0,-1-1-6 16,1 0 1-16,1 0-5 0,-1 1-2 0,0 0 0 0,0 1-4 15,0 2-10-15,-2 0 4 0,0 1-7 0,-1 0-4 0,1 1 6 0,-1 0-3 16,0 0 6-16,-1 2 4 0,0 0-4 0,0 0 7 0,-1 1 1 0,1 0 1 16,-2 0 0-16,-1 1-1 0,0 0 6 0,-1-2 5 0,0 1-4 15,-1 0-1-15,-1 0 5 0,-1 0 2 0,0-1 10 0,-2 0 6 0,1-2-10 16,-1 0 10-16,0 1-4 0,1-3 2 0,-2-1 12 0,1 0-4 0,0 0 4 15,0-1 3-15,0 0 1 0,0-2 6 0,0 0 0 0,0-3-11 16,1-1-6-16,0-1-10 0,0 0-2 0,-1 1-6 0,1-2-11 0,0-2-4 16,0-1-8-16,0-4-2 0,2 1-17 0,-1-1-33 0,1 0-39 15,2 1-36-15,1-2-26 0,2 2-20 0,0 2-22 0,3 1-16 0,0 1-6 16,2 1-6-16,1 0 7 0,0 1-6 0,2 2-205 0</inkml:trace>
-  <inkml:trace contextRef="#ctx0" brushRef="#br0" timeOffset="161525.14">14045 16700 2368 0,'-3'0'241'0,"-1"-1"-89"0,0 0 5 0,1-2-19 0,-1-2-26 16,1 0-50-16,-1 1-53 0,0-2 3 0,0 2-14 0,-1-1-7 0,0 1 8 15,0-1-12-15,0 1 8 0,-1 0-2 0,0 0-18 0,-1 1 0 16,0 0-1-16,0 2 0 0,0 0 5 0,-1 0 2 0,-1 1 0 0,1-1-2 16,-1 2 2-16,0 0 9 0,0 0-5 0,0 0 3 0,0 1 0 15,1 0-5-15,1 1 7 0,0 0 10 0,1 1-9 0,0 0-1 0,1 0 3 16,1 1-1-16,2 2 8 0,1 0-10 0,1 1 0 0,2 1-1 0,0-1 6 16,2 4 14-16,2 1-7 0,1 1-6 0,2 1 1 0,1 0-2 15,3 1 11-15,1 2-6 0,3-4 0 0,-2 0 6 0,2 1-17 0,1-3 18 16,-1 1-10-16,1-3-12 0,1 1 1 0,1-2-17 0,-1-2 1 0,2-1 4 15,-1-1-17-15,-1-1-5 0,0-1-12 0,-1-2-9 0,-2 0-8 16,-1-1-18-16,0-1-27 0,0-1-24 0,0-1-42 0,-1-2-32 0,0 0-33 16,0-2-31-16,0 0-18 0,-1-2-179 0</inkml:trace>
-  <inkml:trace contextRef="#ctx0" brushRef="#br0" timeOffset="162009.13">14423 16570 933 0,'-1'0'232'0,"1"1"-52"0,0 0-11 15,0-2-15-15,-1 0-21 0,0-1-28 0,-1 0-27 0,1 0-5 0,-1 0-17 16,1-1 1-16,0 0-2 0,-1 0-12 0,0-1-8 0,0 1-14 0,-2-2-3 16,2 1 0-16,-1 1 0 0,0 0 2 0,2-1 0 0,-1 1 5 15,0-1 6-15,0 0-2 0,0 0-5 0,0-1 1 0,1 2 0 0,-1-1 7 16,0 2 2-16,0 0-5 0,1 1 11 0,0 1-5 0,0 2 6 0,0 0 7 15,0 0-15-15,-1 1 1 0,1 1-16 0,1 0-9 0,-1 2 4 16,1 3-4-16,1 1-1 0,1 3-3 0,2 2-3 0,1 2 5 0,1 2-2 16,2 3-3-16,0-1-4 0,3 3-3 0,0-1 7 0,2 1-1 15,1 1-1-15,1 0 4 0,0 2-4 0,-2-2-4 0,1-2 9 0,-2 0-13 16,1-2 6-16,-2 0 6 0,0 0-15 0,-1-3 18 0,0 2-3 0,-2-1 4 16,-1 0 2-16,-2-1-13 0,-2-1 10 0,-1 0 1 0,-1-2 1 15,-1-8 0-15,-1 2 1 0,0-1 4 0,-1 1 6 0,-1 0 1 0,-1 1-9 16,-2-2-3-16,-1 3-7 0,-2-1 1 0,-1-1-3 0,-2 1-5 0,-1-2 3 15,-1-1 4-15,-2-1-7 0,1 1 5 0,0-2-7 0,-1 0 7 16,1-1-2-16,1 0 7 0,2 0 8 0,-1 1-6 0,1-1 5 0,1 0-14 16,0 0 14-16,3-1 4 0,-2 1 5 0,2-2 4 0,0 1-6 15,2-2 6-15,0-1 4 0,1 0-8 0,1 0-3 0,1-3-12 0,1 0-3 16,0-1-1-16,1-1-9 0,0 0 0 0,1-1 3 0,-1-1 4 0,1-1 0 16,0 0-7-16,0-2-6 0,0 0 6 0,-1-2-11 0,2-2-14 15,0-2 15-15,1-12-14 0,0 1 3 0,2 3 11 0,0 6-27 0,1-1-10 16,1 2-14-16,0 2-27 0,1 0-16 0,1 0-35 0,0 2-29 0,-1 3-44 15,3-1-66-15,0 2-74 0,2-2-83 0,2 0-355 0</inkml:trace>
-  <inkml:trace contextRef="#ctx0" brushRef="#br0" timeOffset="162725.13">14673 16791 3366 0,'-6'6'191'0,"2"0"-53"16,-2 1-2-16,1 0-39 0,2-3-30 0,1-2-35 0,2-1-24 0,1 0 2 15,0-1-14-15,2 1 2 0,0 0-16 0,1 0-8 0,2 0 10 16,-1 0-1-16,4-1-7 0,0 1-13 0,2-1-2 0,1-1-15 0,0 0 4 16,1-1 2-16,1 0 1 0,0-1-1 0,0 1-4 0,0 0-7 0,1-2-4 15,1 1 12-15,0-1-7 0,-1-1-3 0,2 1-14 0,-1-2-9 0,0 0-16 16,-1 1-26-16,1-2-30 0,0 0-24 0,-1-1-12 0,0-2-12 16,1 1-22-16,2 0-38 0,0-1-43 0,0-2-27 0,3 1-53 0,0-4-108 15</inkml:trace>
-  <inkml:trace contextRef="#ctx0" brushRef="#br0" timeOffset="163009.13">15345 16427 2117 0,'-4'0'329'0,"-1"2"-132"0,-3 0-1 16,0 0-29-16,0 0-38 0,1 0-52 0,-1 1-50 0,0-1-15 16,0 2-10-16,1-1-13 0,-1 1-1 0,-1-1-15 0,0 1 22 0,-1 3 7 15,1 1 1-15,0 0 2 0,1 1-24 0,1 0-6 0,1 1 1 16,1-1 6-16,1 1 8 0,0 0-6 0,2-2 13 0,1 0-9 0,1 1-4 15,2-1 16-15,0 0-12 0,1 0 10 0,3 1-1 0,0 1-11 0,3-1 12 16,0 1 7-16,3-1-3 0,1-1 5 0,1 1-2 0,1 1-3 16,0-1 3-16,3 3 0 0,-1-2 0 0,0 0 4 0,0 2 0 0,0-1 5 15,-1 0-4-15,-2 1-10 0,1-1 11 0,-2 2-15 0,0-1 9 0,-2 1-3 16,-2-1-4-16,-1-1 8 0,-2 2-8 0,-1-1 9 0,-3 1-9 16,0 0-5-16,-3-1-7 0,-1 3-22 0,-2-1 3 0,-2 1-15 0,-1-1-2 15,-1-1 1-15,0 0-14 0,-2-1 23 0,-1-1-3 0,-1-1 4 16,0-1 10-16,1-1-13 0,-1-2 2 0,1-2-3 0,-1 0-17 0,2-2-20 15,0-2-22-15,0-2-37 0,1-3-28 0,1 0-36 0,0-2-38 0,3-2-26 16,1 1-37-16,3-4-26 0,1-2-174 0</inkml:trace>
-  <inkml:trace contextRef="#ctx0" brushRef="#br0" timeOffset="163475.13">15631 16760 2010 0,'2'-1'263'0,"0"1"-34"0,1-1-12 0,0 0-18 16,-2-1-50-16,1 0-52 0,-1 0-44 0,-1 0-28 0,1 0-2 0,-1 1-3 15,-1-1-2-15,-1 2-11 0,1-1-12 0,-2 0-11 0,-2 1-4 0,1 0-5 16,-2 2-7-16,-1-2-2 0,0 2-2 0,-1 1 1 0,1-1 10 16,-1 2 1-16,0 1 7 0,0-1 8 0,0 3-10 0,0 1 18 0,1 0-6 15,0 2 0-15,1-1 9 0,1 3-16 0,0-3 19 0,3 2-2 0,0 1-9 16,2-3 6-16,0 2-14 0,0-1 2 0,2-3 5 0,2 2-6 16,0-1-9-16,2-1 1 0,1 0-6 0,1-1 2 0,1-1 2 0,1 0-8 15,1-2 6-15,0 0-8 0,1-3 7 0,1 1 11 0,-1-1 7 0,0-1 12 16,1 1-1-16,0-1-6 0,-1 0 7 0,-2 1 5 0,-1-1 8 15,0-1 10-15,1-1-1 0,1-2 5 0,0 2-1 0,0 0 2 16,0 0 6-16,-1 1-4 0,1 0-2 0,0 0-4 0,0 1-13 0,0 0 4 16,-1 0-9-16,2 2-3 0,0 0 5 0,1 1-10 0,0 1 3 0,-1 0-6 15,1 1-10-15,0 1 3 0,0 0-4 0,1 2 3 0,-2-2-1 0,1 1-2 16,-1 0 1-16,-2 0 5 0,-1-2 4 0,1 2 0 0,-2-1 2 16,1-2 4-16,-1 0 1 0,1-2 5 0,-2-2 2 0,1-2 7 0,-1-1 5 15,-1-1-5-15,0 0-12 0,-1 2-5 0,-2 0-1 0,1-1-2 0,-1-2 15 16,0-1-2-16,1 0 2 0,-2-1-2 0,1 0-12 0,-1-1 7 15,0 0-3-15,-1 0 6 0,-1-3-5 0,-1 1-1 0,-1-2 1 0,-1-1 0 16,-2 0-1-16,-1 0-2 0,-2-3-6 0,-1 0 2 0,0 0 6 16,-3 2-6-16,-2 1 4 0,0 0-9 0,-1 2-4 0,1 1 3 0,-1 3-19 15,-1 1-4-15,1 3 3 0,1 2-6 0,-1 1-1 0,2 2 1 0,1 2-13 16,1 1 3-16,-1 1-8 0,1 2-7 0,-1-1-5 0,2 2-17 16,1 1-14-16,1 0-17 0,0 0-22 0,0-1-35 0,1 0-37 0,1-2-46 15,0 1-44-15,2 0-32 0,1-1-4 0,2 0-193 0</inkml:trace>
-  <inkml:trace contextRef="#ctx0" brushRef="#br0" timeOffset="163725.13">15980 16818 822 0,'9'8'330'0,"1"1"-136"0,2 3-14 0,1 0-28 15,0-1-20-15,-1 1-31 0,1-1-33 0,-2 1-23 0,1 1-6 0,1-2-7 16,1 0 3-16,-1-1-4 0,0-1-3 0,-2 1 7 0,0 1-3 16,-1-2 15-16,-2 0 10 0,0-3 10 0,-3 1 11 0,-1-1 4 0,0 0 12 15,-2 0-10-15,0-1-5 0,-2-1-3 0,0 0-20 0,-1-2 10 0,-1 0 0 16,0 0-11-16,-1-1-2 0,0-1-9 0,-1-2-5 0,0-2-1 15,0-1-20-15,-1 0-9 0,2-1-5 0,-1 1-9 0,-1-2 5 0,0 0 0 16,0-2-10-16,1-2 7 0,-1-2-8 0,0-2-5 0,2 1 5 0,0 2 4 16,0-3-6-16,3 1-7 0,-1-1 4 0,1 0-7 0,0 0-2 15,1-1-6-15,1 1-6 0,1 1 2 0,2-1 4 0,0 2-1 0,0 1-7 16,1 1-14-16,0 3 1 0,0 0 0 0,1 1-6 0,-1 2 0 16,0 2-12-16,0 0-10 0,0 3 0 0,0-1-8 0,0 2-8 0,0 1-8 15,-1-1-23-15,0 3-29 0,-1-1-42 0,0 0-56 0,0 1-76 0,0-1-65 16,-1 0-173-16</inkml:trace>
-  <inkml:trace contextRef="#ctx0" brushRef="#br0" timeOffset="164042.13">16412 16936 1943 0,'4'1'342'0,"1"1"-147"0,1-2 19 16,1 0-5-16,-1-1-57 0,1-2-51 0,1 0-57 0,0-2-14 15,-1 0-5-15,2 0-16 0,-1-2 7 0,0 1-13 0,-1-1-6 0,-2 0 3 16,0 0-15-16,0 1 3 0,0-3-2 0,1 0-13 0,-1-2 18 15,-1-1 6-15,0-1-3 0,-1 0 13 0,0-1-8 0,-1-1 1 0,-1 2 7 16,0 2-13-16,-2-3 5 0,1 2 4 0,-2-2-1 0,0 2 9 0,-1 2-11 16,-1-1 7-16,1 1-2 0,-2 1-1 0,1 0 3 0,-2 2-9 15,0-1 11-15,0 3-4 0,0 0-1 0,1 0 3 0,-1 2-11 0,0 2 8 16,-1 0-4-16,1 4-4 0,0 0 13 0,0 2-9 0,1 1 0 0,1 0-3 16,0 2-13-16,1 0 10 0,1 3-4 0,1 0-1 0,0 0 2 15,1 1 4-15,2 2-1 0,1 2 10 0,0 0-4 0,3 1-4 0,1 2 10 16,0 1-6-16,2-2 9 0,0 1-9 0,0-3 0 0,3 1 0 15,0-3-4-15,0 1 6 0,1-2-9 0,-1 0 8 0,-1-3-11 0,1-3-13 16,-1 2 2-16,1-3-19 0,-1-2-13 0,-2 0-19 0,2-3-36 0,-2-1-26 16,0-1-34-16,-1 0-27 0,-1-3-30 0,1-1-45 0,-2-1-33 15,2-3-55-15,0-1-48 0,0-5-203 0</inkml:trace>
-  <inkml:trace contextRef="#ctx0" brushRef="#br0" timeOffset="164226.13">16834 16705 1589 0,'3'2'946'16,"2"0"-756"-16,1 1-14 0,1-2 5 0,0-1-17 0,0 0-58 15,1-1-55-15,0 0-37 0,1 0-5 0,0-1 2 0,0 1-9 0,0 0-6 16,-2-1-1-16,2 0-4 0,-2 1-11 0,1-1-24 0,0 2-19 0,0-2-19 16,-1 1-18-16,0-2 6 0,-1 0-13 0,0 1-15 0,0-2-16 15,0 1-41-15,0 0-22 0,-2-1-30 0,0 1-25 0,0-1-35 0,-1-2-45 16,1 0-26-16,-1-1-227 0</inkml:trace>
-  <inkml:trace contextRef="#ctx0" brushRef="#br0" timeOffset="164393.13">16973 16947 2330 0,'4'11'220'16,"2"4"-18"-16,1 2-4 0,1-3-20 0,0-1-44 0,1-3-61 15,1 0-36-15,0 0-8 0,0 0-24 0,0-1 4 0,2-1-7 0,-1 1-6 16,0-3 3-16,0-1-29 0,-1-2-17 0,0-1-16 0,0 0-24 15,0 0-16-15,0 0-15 0,0-1-27 0,-2-2-15 0,2 0-16 0,-1-1-15 16,0-1-12-16,0 0-13 0,1-1-26 0,0-1-26 0,-1 0-47 0,1-3-23 16,1 0-195-16</inkml:trace>
-  <inkml:trace contextRef="#ctx0" brushRef="#br0" timeOffset="164842.13">17605 16851 2152 0,'3'0'497'0,"0"0"-330"0,1-1 5 0,0 0-8 0,0-2-26 15,-1-1-46-15,1 1-61 0,0-3-16 0,0 1-9 0,0-1 3 0,-1 0-2 16,1-2-14-16,-1-2 5 0,-2 1-18 0,0-1-6 0,-2 0 4 0,-1 0-12 16,-2-3 2-16,-2 1 1 0,-2-1 1 0,-1 1 3 0,-2 0 9 15,-1 0-5-15,0 0 2 0,-1 0 6 0,-1 1-1 0,0 1 11 0,-1 2-6 16,1 0 1-16,-2 0-3 0,0 3 0 0,0 0 7 0,0 2-6 0,-1 2-2 15,-1 0 8-15,1 2-3 0,-2 0 11 0,2 3 3 0,0 0-3 16,0 2 1-16,1 2-10 0,0-1 12 0,3 1 0 0,-1 1-5 0,2 0 4 16,0 2-16-16,2-2 7 0,1 2 5 0,3-1-11 0,0 0 6 15,2 2-3-15,2-1 4 0,1-1 16 0,2 0 0 0,0-2 0 0,2 1-1 16,1 0-3-16,1-1-3 0,1 1 6 0,2 0-8 0,1-1 9 0,1-1-1 16,1-2-2-16,0 0 13 0,0 0-4 0,0-2-2 0,2 0-4 15,-1 0-2-15,1-2 3 0,-2 1 3 0,1 0-4 0,1-1-5 0,0 2 9 16,0 0-7-16,-1 1 2 0,1 0-9 0,-1 1-8 0,0-1 10 0,0 1 5 15,-2 1 5-15,0 0-1 0,1 1-4 0,-2 1-2 0,0 0 2 16,-1 0-13-16,-1 1-1 0,-2-1 0 0,0 1-13 0,-1 0 3 0,-1 3-13 16,-1-1-6-16,-2 1-5 0,0 1-14 0,-2-2 6 0,0 3-1 15,-1 0 2-15,-1 1-4 0,1-1 0 0,-2 3-6 0,3-10 17 0,-1 2-2 16,0 1-2-16,-1 1-2 0,1 1-11 0,-1 1 5 0,1 1-7 0,-1 1-23 16,1-2-27-16,0-1-46 0,1 0-76 0,0-2-75 0,1-3-110 15,-1-1-157-15,2-4 58 0</inkml:trace>
-  <inkml:trace contextRef="#ctx0" brushRef="#br0" timeOffset="165125.13">17768 16932 1959 0,'5'8'750'0,"2"2"-581"0,3 3 1 16,1-1-4-16,0 1-17 0,2-1-47 0,0 0-54 0,1 1-19 15,2-1-4-15,0-1-7 0,-1-1 1 0,0 0 0 0,0 0-2 0,-1 0-13 16,-1-1-1-16,0-3-6 0,-1 0-11 0,0-4 1 0,-6-1-11 0,2-1 22 15,5 1 2-15,-1-2 2 0,1 0 11 0,-4-2-20 0,-1-2 18 16,0 1-2-16,-1-1-14 0,-2 0-10 0,-2-1-8 0,-1 2 10 0,0-2 6 16,-1-1-3-16,0 0 1 0,0-4-2 0,-2 0-2 0,0 0 13 15,-1-1 0-15,-1-1-6 0,0-2 12 0,0 0-8 0,-2 1 7 0,-1 1 1 16,0 0 0-16,-2-1-3 0,-1 1-5 0,-1-1 15 0,-1 2-1 0,1-2 3 16,-3 2-4-16,0 1-13 0,-1 0-4 0,-1 2 8 0,-1 0-6 15,0 2-9-15,-1 1-2 0,1 4-16 0,-2 1-2 0,1 3-8 0,1 3-10 16,1 2-5-16,1 2-28 0,0-1-13 0,0 4-30 0,0 2-28 0,0 2-18 15,0 2-36-15,-1 3-36 0,2 3-62 0,-1 3-119 0,1 4-134 16,2 3-147-16</inkml:trace>
-  <inkml:trace contextRef="#ctx0" brushRef="#br0" timeOffset="165425.13">18475 16709 2724 0,'1'1'157'0,"0"-1"13"0,0 1-7 16,-1-1-18-16,1 0-36 0,-2 1-57 0,0 1-26 0,-2 1-7 0,-1 1-21 16,0-1 4-16,-1 3-21 0,-1 1-12 0,-1 2 14 0,-1 3-7 15,-3 1 11-15,-2 4 2 0,-1 4-15 0,-1 0 15 0,0 5 4 0,-1 0-2 16,-1 3 7-16,0 1 6 0,0 2-4 0,-1 4 7 0,1 4-10 0,10-21 3 15,-4 7 9-15,1 0-6 0,-2 4 3 0,0 0-10 0,-1 3 0 16,1-1-3-16,-2 2 5 0,1-1-5 0,1-2-22 0,1-3-2 0,1-2-34 16,0-3-25-16,0-4-18 0,1-1-38 0,1-4-47 0,0-3-73 15,0-4-68-15,0-5-80 0,-1-4-99 0,-1-7-324 0</inkml:trace>
-  <inkml:trace contextRef="#ctx0" brushRef="#br0" timeOffset="165708.13">17800 16573 2861 0,'-1'4'197'0,"1"-1"-34"15,-1 1-21-15,1-1-11 0,1-2-32 0,-1-1-52 0,1 0-30 0,-1-1-15 16,1 0-8-16,0 1 4 0,0 0-5 0,0-1 1 0,0-1-2 0,0 0-5 16,0-1 8-16,0 1-14 0,0-1 13 0,0-1-1 0,0 0-10 15,-1 1 15-15,1-1 2 0,-2 1-4 0,1-2 14 0,-1 0-16 0,1 0 2 16,-1 0 4-16,-1 0 0 0,1 0 2 0,-1 0-7 0,0 0 1 0,0-1-15 15,-1 0 10-15,1 1-9 0,0 0 10 0,0 0-5 0,-1 1-9 16,0-1 6-16,0 1-6 0,0 1 2 0,0-1-10 0,-1 2-4 0,-1-2-13 16,1 1-3-16,0 1 2 0,0 0-18 0,0-1-11 0,0 1 2 15,1 0-7-15,1 0 9 0,0 1-3 0,0 0-2 0,1 0 6 0,0 0-6 16,1 2 2-16,1 0-2 0,0 1-23 0,0 0 0 0,1 1-27 0,-1-2-18 16,2 1-30-16,0 0-61 0,1 1-73 0,0 2-82 0,2 1-189 15</inkml:trace>
-  <inkml:trace contextRef="#ctx0" brushRef="#br0" timeOffset="165925.14">18778 17208 2622 0,'6'7'579'0,"-1"-2"-454"0,1 1 38 0,1 0-8 0,1 2-49 0,0-2-44 15,1-2-41-15,-1 0 4 0,-1-1-17 0,-1-2-24 0,0-1 1 16,-2 0-24-16,0-2 1 0,-1 1-2 0,-2 0-12 0,0-2-4 0,-2 0-23 16,-1-2-13-16,-1 0-3 0,-3-3-14 0,-2-2-11 0,-2 0-16 15,-3-2-14-15,-2 1-14 0,-4-3-35 0,-4 1-56 0,-3-1-91 0,-10-4-127 16,-31-10-464-16</inkml:trace>
-  <inkml:trace contextRef="#ctx0" brushRef="#br0" timeOffset="168675.15">10700 14371 1428 0,'-5'-8'471'0,"0"-1"-394"15,0-1-41-15,1 3-20 0,1 2-5 0,0 2-18 0,1 1-17 16,1 1-11-16,0 1-9 0,0 1 2 0,-1 0 9 0,0 1 11 0,0 1 2 15,-1 2 1-15,-1 0 0 0,0 3 2 0,-2 0 6 0,1 0 1 16,-1 0 9-16,1-2 12 0,-1 1 2 0,0-1 4 0,1-2 0 0,-2-1-8 16,1-1 6-16,-2-2-2 0,1 0 9 0,0-1-1 0,-1-1 5 0,1-1 0 15,-1-2-8-15,0-2 8 0,0-2-1 0,1-2 3 0,0-2 3 0,1-1-4 16,1-1 0-16,-1-1 4 0,2-3-5 0,-1-2-1 0,3-1-6 16,0-4-8-16,2-1 1 0,1-3-4 0,2 0-3 0,1-2 4 0,3 0-4 15,1-1-2-15,1-1 6 0,3-2-17 0,3 1 16 0,4-1 2 16,1 0-13-16,5-1 15 0,2-2-12 0,4 0 0 0,4 1 8 0,4-2-7 15,2 1 2-15,4-2-4 0,4 0-2 0,4 1 1 0,1 0-1 0,2 3 2 16,1 2 1-16,1-1-6 0,3 3-14 0,-1 2 2 0,1 3 4 0,-1 1 5 16,-1 2 10-16,1 0 2 0,0 2-1 0,0 4-2 0,1 0 4 15,-1 2-7-15,1 4-4 0,1 1 1 0,2 3 0 0,-3 3-1 0,1 2 5 16,1 3-1-16,-3 3 2 0,1 2-1 0,0 4 1 0,-1 3-2 16,1 3-9-16,2 4 3 0,0 4-2 0,0 2 1 0,-2 5 5 0,0 1-11 15,-3 5 11-15,1 1-4 0,0 5 0 0,-2 3 14 0,0 2-15 0,-1 5-2 16,-2 4 2-16,-1 4-4 0,0 3 8 0,-5 1-4 0,-4 2-5 15,-2 3 8-15,-3 0-7 0,-4-1 10 0,-2 0 8 0,-5-3-7 0,-3-2 4 16,-3-2-6-16,-3-3 2 0,-2-3-4 0,-3-1 3 0,-5-2-6 16,-2-2 2-16,-4 0 6 0,-3-2 0 0,-4-1 14 0,-3 0-4 0,-3 0 2 15,-4-2 0-15,-3 1-7 0,-4-1-7 0,-2-1-9 0,-7 0 0 0,-4-1-5 16,-5 2 5-16,-4-3-4 0,-2-2 6 0,0-1 10 0,-3-4-1 16,-2-2 17-16,0-2-4 0,-2-3-2 0,0-4 6 0,0-2-7 0,-1-4 2 15,-3-3 5-15,0 0-5 0,-2-2 4 0,-1-2 6 0,2-3 3 0,1-3 10 16,3-3 11-16,1-3 4 0,3-2 8 0,2-3 1 0,2-1-7 15,1-2-3-15,2-3-11 0,0 1 1 0,1-4-4 0,2-2-4 0,-1-2 6 16,4-1-6-16,1-2-8 0,1 0 0 0,2-2-13 0,0-1 1 16,4 0 14-16,0-1 3 0,2 1 8 0,3-1-1 0,1 1-13 0,1-2-4 15,4 1-4-15,-1 0-4 0,2-1-3 0,2 1 2 0,0-1 1 0,1 1 1 16,3-1 4-16,1 2 1 0,0 1-6 0,3 1 9 0,0 4 0 16,1 1-2-16,1 0 4 0,-1 3-2 0,2-1-7 0,0 1 4 0,1 2 0 15,0 2-6-15,0 1-3 0,1 1 6 0,0 0-8 0,0 1 1 0,0 0-1 16,1 1-17-16,0-2 2 0,0 1 4 0,1 0-1 0,-1 0 11 15,1 1 11-15,1 1-6 0,-1-1 5 0,1 2 2 16,-1-1-14-16,-1-1 7 0,1 1-10 0,0 0 1 0,0 1 2 0,-1 0-12 0,0 1 3 0,0 1-11 16,0 0-18-16,0 2-10 0,-1 0-26 0,1 0-34 0,-1 1-44 15,0 1-51-15,0 0-69 0,0 2-110 0,0 2-152 0,0 5-312 0</inkml:trace>
-  <inkml:trace contextRef="#ctx0" brushRef="#br0" timeOffset="169459.15">17939 17790 1996 0,'1'0'240'0,"1"0"-41"0,0 1-2 16,0-1 3-16,1 1-60 0,1-1-52 0,0 1-54 0,0-1-11 15,1 1 9-15,2 0-6 0,1-1 2 0,0 0 6 0,2 0-22 0,1 1-1 16,0-1 3-16,2 0-12 0,1 0 11 0,1 0-13 0,1 0 1 0,0-1-6 16,2 1 0-16,2 0 6 0,-1 0-8 0,2 0-7 0,1-1 19 15,0 1-12-15,2 0-3 0,0 0 11 0,1 0-33 0,1-1-1 0,0 1 8 16,2-2-17-16,0 1-7 0,1-2 3 0,27-4-7 0,-2 0 0 0,-1-2 9 16,-4-3 19-16,-1-1-24 0,-5 0-1 0,-4-2 1 0,-3-2 1 15,-3 0 29-15,0-1 7 0,-1-3 1 0,0-2 5 0,-1-1 6 0,-1-2 5 16,-1-1 14-16,1-1-6 0,-3-1 1 0,0-3 9 0,-3 1-9 15,0-2 17-15,-1 0-1 0,-3-3-1 0,0 1 3 0,-3-1-19 0,9-33 13 16,-6 9-6-16,-6 8 1 0,-7 10 6 0,-3 4-16 0,0-1 6 0,-4 2 5 16,-1 1-4-16,-2-2-8 0,-3 1-3 0,0-1-12 0,-4-2-6 15,-1 1-1-15,-1 0-22 0,-1 0-5 0,-2 1-4 0,-1-2-10 0,-3 4-15 16,-1 1-20-16,0-2 2 0,-3 2-3 0,0-1 12 0,-2 2 19 0,-1 1 2 16,0 2 20-16,-4 0 7 0,0 1 8 0,-2-1 8 0,-1 1 1 15,-1 1 1-15,-1 1-4 0,-3 1-5 0,-3 2-3 0,-2-1-3 0,-1 2-14 16,-3 2-10-16,-3 2-5 0,-1 2-1 0,0 4 5 0,-2 2 1 15,0 2 1-15,1 3 7 0,-3 1 5 0,-2 3 6 0,0 2 3 0,-1 3 2 16,2 2 8-16,3 2 7 0,2 4 19 0,2 0 7 0,2 3 10 0,1-1 10 16,4 4 6-16,2 0 8 0,1 3 5 0,5 0-3 0,1 3 0 15,3 3 4-15,2 3 4 0,2 5 1 0,1 4-7 0,3 4-7 0,3 4-4 16,2 3-6-16,2 5 4 0,4 6-2 0,0 5-14 0,3 5-6 0,2 4-12 16,2 7-6-16,4 4-8 0,2 3-25 0,2 5-49 0,-1-46-88 15,2 15-124-15,0 4-278 0,2 17-263 0</inkml:trace>
-  <inkml:trace contextRef="#ctx0" brushRef="#br0" timeOffset="187176.41">4391 7514 911 0,'-37'-8'301'0,"-5"3"-261"0,-7-1-4 0,6 4-11 0,6 3-5 0,1 0 1 16,1 1-6-16,-1 2-1 0,0 1-8 0,-2 2-1 0,1 1-8 0,-1 2-8 15,0 2-7-15,1 3-13 0,-2 1-9 0,0 0-12 0,-2 0-7 16,1 1-2-16,-2 0 14 0,-1 3 18 0,-1-2 14 0,-1 3 10 0,1-1 1 16,0 1 2-16,-2 1 3 0,-1 1 2 0,0 1 5 0,-1 2 0 0,2 1 3 15,-1 3 6-15,1 0 3 0,1 3 9 0,0 0 3 0,-1 1 2 16,0 3-1-16,2 1-5 0,0 5-3 0,0-1-10 0,2 4 1 0,-1 1-5 16,1 4 4-16,3 0 7 0,0 2 1 0,1 3 3 0,4 1 4 0,-1 1 4 15,4 3 3-15,3 0 10 0,3 1-7 0,2 2 0 0,4 1-5 16,4 0-9-16,1 2 4 0,3 2-7 0,4 0 0 0,3 0-2 0,3 1-3 15,5 0-2-15,2 0 8 0,3 1 0 0,2-1 2 0,4-4-1 16,2 1-9-16,5-2-9 0,3-2-3 0,3-1 0 0,2-3 5 0,3-1 2 16,2-3-3-16,5-1 4 0,1-4-2 0,5-1 10 0,4-1 6 15,2-2 0-15,3-2 5 0,1-1 1 0,3-3 1 0,4 0 1 0,2-4 1 0,3-2-7 16,2-2 1-16,4-2-4 0,3-1 2 0,2-2 4 0,2-3-2 16,2-1-11-16,5-2-7 0,2-3 6 0,4-1-5 0,1 0 10 0,2-2 0 15,3-4-8-15,0-1 0 0,4-2-3 0,2-1 2 0,1-3-2 16,1-1-3-16,2-2-1 0,3-3 1 0,0-3-4 0,3-1-3 0,-1-3 2 15,1-2 9-15,0-1-12 0,-1-3 0 0,3-1 0 0,-2-1 4 0,2-1 24 16,1-4-4-16,0 0 0 0,0-2-9 0,0-1-2 0,0 0 6 16,1-2-4-16,2 0-4 0,-4-1-4 0,1-1-4 0,-1 0 4 0,0-2 3 15,2 0-2-15,-2 0-5 0,2 1-1 0,-1 1-2 0,-1 2-3 0,-1 0 6 16,-3 1-1-16,0 0-6 0,-3 1 4 0,-3 2-20 0,-1 0-1 16,0 2 13-16,-3 0-2 0,-3 0 20 0,-3 1 1 0,-2 0-17 0,-4-1 1 15,-1 3-2-15,-4 0 4 0,-2 1 3 0,-6 0 2 0,-1 2-1 16,-5-1-1-16,-4 1 0 0,-2 0 2 0,-4 2-4 0,-3-1-4 0,-3 0 1 15,-3 2-5-15,-5-1 2 0,-3 2 1 0,-4 0-7 0,-4-1-4 0,-2-1-6 16,-3 1-10-16,-1 0-12 0,-5 0-14 0,-2 1-16 0,-3-1-17 16,-5 0-13-16,-2 1-14 0,-3-2-14 0,-1 0-10 0,-4-1-4 0,-2-1-11 15,-2-2-16-15,-3-2-16 0,-1 0-14 0,-2-2 1 0,-3-1 21 0,-1-1 32 16,-3 0 17-16,0-1-38 0</inkml:trace>
-  <inkml:trace contextRef="#ctx0" brushRef="#br0" timeOffset="187426.43">9990 9160 280 0,'-14'2'118'0,"0"2"-47"16,-5 2-23-16,4 0-8 0,3 0 1 0,3-1-4 0,1 0-2 16,2 0 9-16,1 0 8 0,2-1 18 0,3 0 9 0,2 0 6 0,2-1 1 15,2 0-14-15,3-1-5 0,2 1-3 0,4 0-3 0,3-1 2 0,1 0-1 16,2 0-5-16,3 0-5 0,2 1-2 0,2-1-3 0,3 2-1 16,2-1-1-16,1 1 0 0,4 1 3 0,1-1-4 0,1 1-6 0,5 1-5 15,-1-1-8-15,2 1-2 0,2 0-3 0,2 0 4 0,0 0-1 16,0-1-1-16,0 1 6 0,-1 1 4 0,0 0-1 0,0 1 5 0,-3 1 3 15,-1-1-1-15,-3 2 2 0,-3-1 0 0,-4 3 2 0,-2 1-10 0,-4 1 4 16,-2 2-5-16,-4 0 0 0,-2 3 4 0,-4 2-11 0,-3 2 1 16,-5 6-5-16,-3 0-14 0,-4 4-6 0,-3 1-31 0,-4 2-44 0,-2 1-81 15,-7 4-101-15,-5 4-136 0,-6 5-222 0,-12 8-215 0</inkml:trace>
-  <inkml:trace contextRef="#ctx0" brushRef="#br0" timeOffset="190660.57">3681 8982 688 0,'-26'-2'176'0,"0"1"-162"0,-4-1 50 15,7 1-19-15,7 0 10 0,1-2-11 0,1 1-11 0,0-2-4 0,1 1-7 16,1 0-5-16,1 0-3 0,0 0-2 0,2 0-6 0,1 2-6 0,1-1-4 15,0 2 6-15,0 0-3 0,0-1 8 0,1 1-3 0,0 0-12 16,1 1 6-16,-1-1-2 0,0 1-5 0,0 0 6 0,1 1-6 0,1 0 3 16,-1-1 5-16,0 1 0 0,-1 0 0 0,1-1 1 0,0-1-2 15,0-1 1-15,1 0 1 0,0-2 3 0,1 1-8 0,0-3-3 0,0 1 2 16,1-3-4-16,0-3 8 0,3-1 2 0,-1-2-3 0,2 0 8 0,0 0-2 16,0-1 3-16,1-2 0 0,-1-2 0 0,1 1-1 0,0-1 5 15,0-1 6-15,1 2 4 0,0-2 5 0,2 1 7 0,-1 0 1 0,1 1 4 16,1 1-3-16,0-2-4 0,1 3-3 0,2-2-2 0,1 0-3 0,2 0-6 15,1 0-5-15,-1-1-1 0,3 0-2 0,3 2-1 0,-1-1-1 16,3 2-3-16,2-1-5 0,0 2 0 0,3 0-1 0,1-1 0 0,2 0-1 16,1 1 5-16,-1 1-3 0,4-1 1 0,1 2-2 0,0 1 1 0,3 0 0 15,-1 3-1-15,4 0 0 0,0 0-2 0,1 2 2 0,0 0 0 16,2 0 3-16,0 1-2 0,2 1-1 0,1 1-1 0,1 0-4 0,-2 0 4 16,2 1 0-16,2 1 3 0,-2 1 3 0,3-1-2 0,0 2 4 15,0-1-2-15,2 2-2 0,0 1 3 0,-2 0-5 0,1 2 5 0,-1 0-4 16,0 1 2-16,-1 0 5 0,2 1 7 0,-2 1 8 0,-1-1 1 0,1 2 2 15,-2-2-2-15,1 1 3 0,-3 1 1 0,-2-1 3 0,0 2-3 16,-2-1 2-16,-1 1 6 0,-2 2-7 0,-4 0-2 0,-3 0-3 0,-5 1-8 16,-2-1 13-16,-5 2-2 0,-1 1 2 0,-3 1 1 0,-4 0-8 0,-3 1 1 15,-5 1-2-15,-3 1-6 0,-1-1 2 0,-7 1-2 0,-4 0-7 16,-6 0 3-16,-4 4-4 0,-6 0-6 0,-5 2 9 0,-7 2-5 0,-4 1-4 16,-6 2-1-16,-3-1-9 0,-6 1-9 0,-5 0-1 0,-3 2 7 15,-6-2-6-15,-3 2 10 0,-1-1 5 0,-3-2-8 0,0-2 6 0,-1-2 0 16,-2-2-8-16,1-2-9 0,-3 0-7 0,2-1-8 0,-1-1 4 0,2-1 7 15,3-4 5-15,3-2 12 0,3-3 4 0,6-1 4 0,4-2 2 16,3-2-7-16,7-1-6 0,5-1-16 0,3-1-16 0,4-1-37 0,5-1-47 16,4-1-72-16,4 1-114 0,3 0-298 0</inkml:trace>
-  <inkml:trace contextRef="#ctx0" brushRef="#br0" timeOffset="205478.45">14139 13768 1 0,'-7'28'161'0,"0"-2"559"0,-1 0 570 0,3-12-1155 16,-3-7-94-16,0 0-6 0,1 0 5 0,0 0-3 0,2-2-9 0,1 1-21 15,0 1-5-15,1 0 3 0,-1-1-1 0,0 2 7 0,0 0 3 16,-3 2-4-16,0 0 12 0,-1 2-6 0,0 2-2 0,-1 0-3 0,1 2-11 15,-2 0 13-15,1 4 3 0,-2 1 10 0,-2 2 3 0,0 4-5 0,-1 2-4 16,1 4-5-16,-2 5-1 0,-1 3-5 0,-1 4-3 0,1 3-3 16,-1 2 2-16,-1 5-1 0,1 3-4 0,-2 4-2 0,-1 3 2 0,1 2-2 15,-1 2 4-15,1 1 3 0,-1 0 0 0,2-1-2 0,0-4 1 0,1 0-3 16,2-2 3-16,2-2-4 0,1-3-2 0,0-2-1 0,3 0-4 16,1-5 4-16,2 0-4 0,0-5-4 0,1-3-3 0,0-2-15 0,1-4-15 15,0-2-25-15,-1-5-33 0,2-2-49 0,-2-6-38 16,1-4-59-16,1-4-86 0,-1-6-90 0,2-2-389 0</inkml:trace>
-  <inkml:trace contextRef="#ctx0" brushRef="#br0" timeOffset="205744.45">14238 14519 2733 0,'0'13'136'0,"0"0"-74"16,1 4-11-16,0 0 1 0,1 1-11 0,1 1-20 0,1 1-14 16,2 3-5-16,0 2 0 0,0 1-2 0,-1 3-6 0,-2 0 6 0,-1 2 2 15,-1 1-5-15,-1 3 1 0,0 0-12 0,-2 1-5 0,0 1 5 0,0-1-5 16,-2 2-1-16,-1 0 2 0,0 1 0 0,-2-1-5 0,0 0 3 16,1-2-14-16,-2-2-11 0,1-2-15 0,0-1-18 0,0-5-13 0,-1-2-10 15,1-3-23-15,0-5-15 0,2-1-19 0,0-3-19 0,1-4-23 0,0-2-21 16,-1-5-21-16,2-3 1 0,-1-4 3 0,2-5 6 0,-1-3-190 15</inkml:trace>
-  <inkml:trace contextRef="#ctx0" brushRef="#br0" timeOffset="206028.45">14220 14748 839 0,'3'-20'244'0,"0"-3"-26"0,1-5-10 16,-2 5-35-16,1 4-19 0,0 2-22 0,-1 2-24 0,0 1-10 16,1 2-16-16,0 3-1 0,0 3 2 0,0-1-11 0,-1 2 7 0,2 1-9 15,0 2-20-15,1 1-1 0,0 1-3 0,1 2-8 0,1 2 5 0,1 1-21 16,-1 2 9-16,2 1-9 0,1 3-9 0,0 4 14 0,-1 3-13 15,1 3-2-15,-1 3 7 0,0 2-12 0,1 3 0 0,0 2-4 0,0-1-1 16,0 2 1-16,0 3-1 0,-1-1 0 0,1 1 1 0,0-3 1 16,1-3-3-16,0-4 3 0,2-1-4 0,-2-4 0 0,2-3 3 0,0-3 3 15,-1-3 6-15,0-3 2 0,-2-3 1 0,2-3 1 0,1-1 2 0,-1-2-4 16,1-2 1-16,-1-2-2 0,2-2-1 0,1-3 4 0,0-2 0 16,0-1 2-16,0-3 0 0,-1-2-11 0,0 0 0 0,-1-1 0 0,1-1-3 15,0-2 3-15,-2-1 2 0,0-1-9 0,-2 0 5 0,1-1 1 0,0 0-8 16,-1 1 0-16,1-1-3 0,-1 1-6 0,0-1 2 0,1 1-2 15,0 2-12-15,0-1-14 0,0 2-11 0,0 1-15 0,-1 1-27 0,0 2 1 16,-1 1-22-16,0 0-25 0,-1 1-25 0,0 0-60 0,0 4-48 16,-3 0-48-16,1 2-44 0,-1 2-43 0,0 1-286 0</inkml:trace>
-  <inkml:trace contextRef="#ctx0" brushRef="#br0" timeOffset="206331.45">15246 14765 1900 0,'-2'17'321'0,"0"4"-241"0,0 4 0 0,2 0 14 16,3-4-8-16,1 1-27 0,3-1-33 0,3-2-10 0,0-1-3 0,1-1 5 15,2-2 6-15,-1-3-4 0,1-1-1 0,0-3-2 0,0-1-1 0,1-3-1 16,0-1-5-16,0-3 0 0,-1-1 0 0,1-2-2 0,-2-2 4 16,2-1 0-16,-2-1 1 0,-1-3-1 0,1 0 6 0,-2-2-4 0,1-3 8 15,-2-1-2-15,0-1-1 0,-2-1 14 0,0-3-8 0,-1-1 8 0,-2 0-5 16,-3-2-3-16,0 7-25 0,-2 4 0 0,-4-12-306 0,-2 1 114 15,-2-10-6-15,-2-4 0 0,0 11 294 0,-1-1-104 0,-2 3 20 0,0-3-7 16,-3 3-1-16,0 1-1 0,0 2-3 0,0 3-9 0,0 2 0 16,-2 2-1-16,1 6-7 0,-2-1-1 0,-1 4-9 0,0 4 1 0,-2 1-21 15,1 5 0-15,0 2-14 0,1 1-4 0,-2 3-16 0,1-1-12 0,-1 3-32 16,0 1-39-16,2 0-44 0,-1 2-64 0,1 0-88 0,-1 2-193 16</inkml:trace>
-  <inkml:trace contextRef="#ctx0" brushRef="#br0" timeOffset="206760.45">14182 13891 2142 0,'-3'0'319'0,"3"-1"-236"16,-1 0-31-16,2 0-13 0,2-1-17 0,3 2-14 0,4-1-13 15,4 1 2-15,2 0 0 0,1 0 11 0,4 2-1 0,1 0-6 0,2 0 1 16,3 2-1-16,0 0 3 0,4 0-3 0,1 1-4 0,4-1-2 16,0 1 2-16,3 0-2 0,0-1-8 0,3 0 0 0,2 0-3 0,1 1 4 15,-2 0 12-15,1 1-7 0,2-1-10 0,1 0-12 0,1 0-7 0,2 1 0 16,0-2 10-16,2 1 2 0,-1-1 4 0,0 1 7 0,1 0 6 16,-1 2 4-16,0 1 2 0,0 1-5 0,-5 2-5 0,0 2 5 0,-1 2-8 15,-1 3-2-15,-3 3-22 0,-2 3-17 0,-1 3-16 0,-2 4-14 0,-1 4-6 16,-1 7-14-16,-3 1-9 0,-1 5-15 0,-3 4-12 0,0 3 9 15,-3 2 10-15,-5 3 34 0,-3 0 45 0,-6-2 40 0,-5-1 58 0,-3-3 44 16,-4-3 28-16,-3-2 16 0,-2-2-9 0,-3-2-13 0,-2-1-4 16,-1-2 0-16,-5 0-3 0,-1-2 4 0,-1-3-2 0,-4-1-5 0,-2-3-1 15,-3-1-13-15,-5-2-1 0,-1-3-11 0,-6-1-9 0,-2-1 6 0,-3-3-16 16,-3-1 4-16,-1-1-10 0,-3-2-12 0,-3-1-3 0,-1-2-12 16,-3-3-6-16,-2-3-9 0,-2-3-10 0,1-2-3 0,-3-3-12 0,-2-3-8 15,1-4 4-15,0-2-10 0,1-5-1 0,0-3 0 0,1-1-8 0,1-2 1 16,3-3-3-16,4 0 4 0,2 0-2 0,4-2-11 0,5 0-13 15,2-2-18-15,8 1-22 0,3 0-26 0,6-2-29 0,3 3-58 0,4-3-52 16,1-2-62-16,4-4-104 0,0-6-436 0</inkml:trace>
-  <inkml:trace contextRef="#ctx0" brushRef="#br0" timeOffset="209944.61">17934 18058 1902 0,'1'6'53'0,"-1"-2"30"0,2 1 11 16,-1 0 7-16,1 1-39 0,1 1-32 0,1 0-18 0,1-1-6 0,2 2 11 15,-1 1-6-15,3-1 8 0,1 1 7 0,2 1 1 0,1 0-4 0,1-3-8 16,2 1 1-16,1-1-7 0,3 0 23 0,0 0 3 0,3-2-10 15,1 1 13-15,1-1-14 0,3 0-7 0,0-1-1 0,3-1-21 0,0-1-10 16,3-1 7-16,1-1-6 0,1 0 7 0,3-2 6 0,1-2 2 16,2-1-18-16,2-1 9 0,0-2-2 0,1-1-12 0,2-1 19 0,2-2-21 15,-1 0-11-15,1-2-21 0,1-1-32 0,0-1-35 0,2 1-70 0,-1-1-52 16,0-1-72-16,0-1-115 0,0 1-313 0</inkml:trace>
-  <inkml:trace contextRef="#ctx0" brushRef="#br0" timeOffset="-206895.22">11842 7981 681 0,'5'14'-445'0</inkml:trace>
-  <inkml:trace contextRef="#ctx0" brushRef="#br0" timeOffset="-187534.6">15971 10567 2407 0,'-16'4'65'0,"-2"2"13"0,-6 2 4 0,-4 1-3 0,10-2-74 0,1 1-28 0,3-1-30 0,3 0-26 16,0 1-29-16,2 2 1 0,0 0 23 0,2 0 28 0,-1 2 30 0,1-1 20 15,0 2 7-15,1 0 4 0,-1 0-1 0,0 1-4 0,0 2-3 0,0 1-10 16,2-1 3-16,1 3 0 0,0 0 3 0,2 2 8 0,1 1-1 0,2 3 4 16,1-1 2-16,2 2 1 0,2-2 9 0,1 2-2 0,3-1 3 15,2-1 5-15,1 2-4 0,5-1 0 0,1-1-3 0,1 0-3 0,5-2 4 16,1-1-1-16,5 0-1 0,3-1 2 0,2 1-7 0,1-1 4 15,2 0-3-15,0 1-4 0,2-1 4 0,5 2-9 0,1 0 5 0,0 0-10 16,1 1 10-16,1 1 3 0,1-1 0 0,0 3 17 0,2-1-8 0,2 3 2 16,0-1 3-16,2 1-4 0,1 1 0 0,1 1-2 0,2 2-2 15,2 1-1-15,2 2-4 0,0 1-7 0,2 0 0 0,0 3-1 0,1 0 2 16,2 2 4-16,1 5 4 0,3 0 2 0,-1 1-3 0,1 2-3 0,-4-1-9 16,0 2-2-16,1 1 6 0,-2 1 2 0,2 2-2 0,-2 2 0 15,1 1-1-15,1 2-2 0,-1 0 13 0,-3 2-5 0,0 2-2 0,0 1-2 16,-1 3-6-16,1 5 4 0,0 0 9 0,-2 4 2 0,-1 0-6 0,-2-2-1 15,-2 2-1-15,-1 0 2 0,-3 1 7 0,1 3 8 0,-2 2-9 16,-1 1 4-16,-1 2-9 0,-2 0 10 0,-1-2 6 0,1 0-4 0,-3 3 10 16,0-1-9-16,-2 1 1 0,0-1 0 0,-4-2-5 0,-1-1-3 15,0 1-5-15,-3-1 4 0,0-1 3 0,-1 0 3 0,-4 1-2 0,-2-1-3 16,-3 0 2-16,-1 0 0 0,-2-1 0 0,-3 0-4 0,0 2-2 0,-3 0 5 16,-2 0 6-16,-2 1-2 0,-1-1 5 0,-3 3-5 0,-2 1-3 15,-2 1-3-15,-4 1-6 0,0 1-7 0,-3 2 7 0,-2-2 8 0,0 2-1 16,-2-2 4-16,-3 3-9 0,0-2 1 0,-1 1-14 0,4-45 11 0,-2 11 2 15,1 0-3-15,-2 10 5 0,1 2-22 0,-2 11 0 0,0-1 15 16,-2 12 21-16,6-46-3 0,-1 6-5 0,0 1-14 0,0 5-16 0,1 1-3 16,-1 6 34-16,0 1 12 0,-2 4-14 0,2 2 16 0,-2 5-69 15,1 2-15-15,-1 6-6 0,0 1-45 0,1 7-30 0,-2 5-140 0,1 1 273 16,0-5 0-16,1-6 0 0,0-6 0 0,1-5 0 0,1-8 0 0,0-5 0 0,1-20 0 0,0-43 0 0,1 0 0 0,0 0 0 0,1 0 0 0,0 0 0 0,1 0 0 0,1 0 0 0,0 0 0 0</inkml:trace>
-  <inkml:trace contextRef="#ctx0" brushRef="#br0" timeOffset="-182467.25">17882 7342 1700 0,'-14'-9'82'16,"0"0"-52"-16,-2 1-2 0,4 3-27 0,3 3-14 0,1 1-22 0,2 1-23 15,1 2-20-15,1-1-30 0,1 1-30 0,1 0-20 0,1 1-23 16,0-1-10-16,1 1-5 0,0 1-5 0,1-2-168 0</inkml:trace>
-  <inkml:trace contextRef="#ctx0" brushRef="#br0" timeOffset="-181867.31">17980 7336 1505 0,'-10'-12'452'0,"0"0"-356"0,-2-2-14 0,3 6-46 0,3 1-21 15,1 2-17-15,3-1-7 0,-1 1-2 0,2-2-7 0,1 0-5 16,0 0-10-16,1 0-9 0,0 1-9 0,0-1-5 0,1 0-1 0,1 1 5 16,0-1 0-16,1 2 7 0,1 0 8 0,0 0 8 0,1 0 13 0,1 0 7 15,1-1 5-15,2 2 2 0,0-3 7 0,3 1 1 0,3-1 4 16,1 0 8-16,3 1-3 0,2-1 7 0,1 0 0 0,2 0-2 0,1 0-3 15,3 1 0-15,0-1 6 0,2 0 1 0,0 0 7 0,4 1-4 0,-1 1 0 16,1 1-6-16,0 0-7 0,2 1-2 0,1 1 2 0,-1 1-6 16,2 1-1-16,-3 2-1 0,0 1-3 0,0 1 5 0,-1 0-2 0,1 3 1 15,-3 1-3-15,2 1-3 0,-2 1 1 0,0 1-1 0,0 1 6 16,0 3 2-16,-1-1 4 0,-1 3-1 0,0 0 1 0,-2 1 2 0,1 4-3 16,-2 1 4-16,2 0 2 0,-3 2 1 0,-2-1 2 0,-1 1 0 0,-2 0-6 15,-1 3-3-15,0 1-8 0,0 4 0 0,-1 3-7 0,0 1-5 16,-4 1-4-16,0 1 0 0,-1 4 2 0,-2 1 8 0,-2 0-2 0,-3 2-1 15,-1 2 8-15,-3 0-1 0,-2 0 4 0,-3-1 3 0,-2 1-7 0,-3 0 7 16,-3-2-4-16,0-4-7 0,-4-2 5 0,-1-4-1 0,-1-2-1 16,-1 0 2-16,-2-3 2 0,-1-2-5 0,-1-3 1 0,-2-1 5 0,-2-3 0 15,0-4 6-15,-2 0 6 0,-2-5 6 0,-3-1 4 0,-2-3 10 16,-3-4 2-16,-1-2 6 0,-5-5 5 0,-2-2 3 0,-5-5 7 0,-3-3-7 16,-2-2 1-16,-4-2-4 0,0-3-1 0,-4-2-3 0,-2-4-3 0,-1-1 1 15,-3-3-2-15,-1-3-5 0,1-3-12 0,-1 0 0 0,1-2-7 16,2-2-1-16,4 2-6 0,0-3-24 0,3 4-27 0,4 1-44 0,4 1-59 15,5 4-83-15,6 1-90 0,2 2-97 0,5 2-155 0,3 0-360 0</inkml:trace>
-  <inkml:trace contextRef="#ctx0" brushRef="#br0" timeOffset="-76508.81">20224 8000 469 0,'0'-1'101'0,"0"2"-35"16,0-1-20-16,0 1-17 0,0 0-15 0,0 0-1 0,0 1-5 16,1 0 0-16,0 0 1 0,0 1-4 0,-1 1 1 0,1-1-3 0,0 1-2 15,0 0 0-15,0-1 0 0,1 2 0 0,-1 0 1 0,0 0 0 16,-1 0 0-16,1 1 5 0,0-1 6 0,0 0 11 0,0 1 10 0,1 0 10 15,-1 0 7-15,1 0 1 0,0 1 1 0,0 1-2 0,1 1-2 0,0 2-3 16,-1 1-2-16,0 2-2 0,0 1-6 0,0 0-9 0,0 2-10 0,0 0-2 16,0 2-2-16,1 1 3 0,-1 1 2 0,-1 2-1 0,1 2-6 15,-1-1-1-15,-1 1 4 0,1 0-2 0,0 0 3 0,0-1 4 0,0-1-6 16,0 0 0-16,-1-1-3 0,1-2-4 0,-1-2 1 0,0-1-1 16,0-2-2-16,0 0 0 0,0-2-7 0,0-1-4 0,1-2-13 0,-1-3-21 15,0-1-21-15,1-1-28 0,-1-3-12 0,0 0-21 0,-1-3-26 16,0-1-35-16,0-3-76 0,0-2-164 0</inkml:trace>
-  <inkml:trace contextRef="#ctx0" brushRef="#br0" timeOffset="-76260.81">20243 8503 548 0,'5'5'159'0,"2"1"-34"0,1 1-27 0,-1 3-22 16,-2-1-25-16,0 1-20 0,0 2-10 0,0 1-7 0,1-2-4 0,-2 3-4 16,1 0-1-16,0-1 5 0,0-1 2 0,0 0 3 0,0 0 5 15,1-1 1-15,0 1 6 0,-1-2 4 0,1-2 6 0,2 1-1 0,0-2-4 16,1 0-4-16,1-2-7 0,1 1-2 0,-1-1-8 0,2-1 1 0,0 1-7 16,0-2-1-16,-1 0-1 0,-1 0-2 0,2-2-1 0,0 0-3 15,1-2-6-15,0-1 0 0,1-2-8 0,3-2-11 0,3-2-16 0,0-2-23 16,4-1-29-16,1-3-27 0,1-2-57 0,3-3-97 0,2-4-195 15</inkml:trace>
-  <inkml:trace contextRef="#ctx0" brushRef="#br0" timeOffset="-52959.56">21133 7235 660 0,'-2'-5'156'0,"2"1"-82"0,-1-1-13 0,1 4-37 0,1 1-14 0,-1 0-7 16,1 1 2-16,0 0-1 0,0 0 0 0,0 1-5 0,-1 1-3 15,-1-1-4-15,0 1-7 0,0-1 3 0,0 1-7 0,0-1-1 0,-1 0-4 16,0-2-6-16,0 1-1 0,0 0-3 0,0-1 3 0,1 1 6 0,0-2 6 16,-1-1 6-16,0 0 7 0,-1-2 4 0,1 1 5 0,0-1 1 15,0 0 4-15,0-1 5 0,0 1 7 0,-1-1 3 0,1-1-1 0,1 1-3 16,-1 0-7-16,1 1-3 0,-1-1-6 0,0 0-3 0,0-1-5 0,1 2-5 15,0 0-8-15,-1 0-10 0,0 1-7 0,0-1-16 0,-1 1-12 16,0-1-6-16,-1 0-9 0,-1 1-13 0,1-1-34 0,-1-1-93 0</inkml:trace>
-  <inkml:trace contextRef="#ctx0" brushRef="#br0" timeOffset="-52392.56">20821 7166 553 0,'-1'4'141'0,"-1"0"-39"15,0 3-35-15,2-1-18 0,2 0-7 0,-1-1-9 0,1 1-9 0,1 1-2 16,-1 0-5-16,1 1-1 0,0 0-1 0,0-2 1 0,-1 3 0 0,1-1 1 16,-1 1 2-16,0 0-2 0,0-1 3 0,-1 1-3 0,1-1 0 15,0 1-2-15,-1 2-4 0,1 1 3 0,-2 0-1 0,1 1 3 0,-1 0-1 16,0 1-2-16,1 2-4 0,-1-1-2 0,1 1-1 0,-1 2-4 0,0 0 3 15,0-1-7-15,1 2 2 0,-1 0-2 0,2 0 0 0,0-2-1 16,0 1-4-16,1 1 2 0,0-2 1 0,1 3 3 0,0 0 3 0,0-1-1 16,0 1 2-16,-2 0 2 0,1-2-2 0,-1 0 3 0,0-2-1 0,-1 0 8 15,-1-2 7-15,0 1 0 0,-2-1 3 0,1 0-1 0,-2-2-4 16,0 3 0-16,0-2-2 0,-1 0 3 0,-1-2 1 0,-1-2 0 0,-1-1 0 16,1 0-3-16,-1-1-2 0,1-1-4 0,-1 0-3 0,2 0-2 15,0 0-2-15,1-1-3 0,0 1 2 0,-1-2-2 0,1 1 0 0,0-1 2 16,0 1-3-16,1-1 0 0,1-1 1 0,0 1-2 0,1 0 0 0,0 1 1 15,0-1-3-15,0 0 1 0,1 1 2 0,1-1 1 0,-1 1-1 16,1-2 0-16,1 2-3 0,0 0 1 0,0 0-1 0,2 1 3 0,-1-2-1 16,0 1 0-16,2-1 2 0,-1 0-1 0,1 0 3 0,0-1 0 0,1 0 2 15,1 0 3-15,0 0 5 0,1-1 2 0,1-1 4 0,-1 0 6 16,2-1-2-16,-1-1 4 0,0 0 2 0,1 0-1 0,0-2 1 0,1 1-3 16,0-1-2-16,0-1-5 0,1 0-1 0,1 1-1 0,0-1-5 15,0 2 1-15,0-1-2 0,0 0 2 0,1 0-1 0,-1 0-1 0,0 0 2 16,0 1 3-16,0-1-5 0,0 0-2 0,0 1-1 0,-1-1-8 0,1 1 3 15,0 1 0-15,0-1-2 0,0 0 4 0,0 0-4 0,0 0-1 16,-1 0 4-16,2 0-1 0,-2 0 3 0,-1 0-2 0,1-1 5 0,-1 1-2 16,0 0 2-16,0 0 0 0,-2 0-1 0,1 1 1 0,-2 0-3 0,1 0 3 15,-2-1-8-15,0 1 2 0,-1 0 0 0,0 1 1 0,0 0-2 16,-2 0 1-16,0 0 0 0,0-1-6 0,-1 1 6 0,0 0-2 0,0 1-4 16,-1 0 2-16,0-1-10 0,-2 1-6 0,0 0-14 0,0 0-17 15,-1 1-15-15,0-1-15 0,0 0-20 0,-2-1-16 0,0 1-33 0,-1-1-31 16,-1-1-44-16,-1 0-48 0,0-1-180 0,-2-2 62 0</inkml:trace>
-  <inkml:trace contextRef="#ctx0" brushRef="#br0" timeOffset="-51976.04">21003 7152 1439 0,'-2'-3'106'0,"1"3"-3"0,0-1-44 0,2 1-26 0,1 1-18 15,2 1-1-15,0 1-1 0,1 0-1 0,2 1 2 0,1-1-8 16,0 1 1-16,1 1-4 0,0-1-2 0,-1 2 3 0,1-1-5 0,1 0 2 16,1-1 0-16,1 0-1 0,1 0 6 0,-1-1-8 0,1 1 4 0,0-2-2 15,1 1 0-15,-1-1 5 0,0-1 2 0,0-1-2 0,-1 0 2 16,0-2-2-16,-1 2 5 0,-3-1 4 0,1 0 8 0,0-1 0 0,-2 1-2 15,0 0-1-15,0 0-1 0,-2 2-1 0,1-1-2 0,-1 1-4 0,0 1-2 16,-1-1-1-16,1 2-3 0,-1 0-1 0,1 1-1 0,-2 2-2 16,1-2 5-16,-1 5 0 0,0 0-1 0,0 3 4 0,-1 0-3 0,1 1-4 15,-2-1 3-15,1 3-4 0,-1 2 2 0,0 2 1 0,-1-1-4 16,1 4 0-16,-1 0-3 0,0 0 1 0,1 3 0 0,0-1 4 0,-1 2-4 16,2-2-4-16,-1 0-4 0,1 0 6 0,0-2 4 0,1 2 6 0,0-3 0 15,-1-2-2-15,0 1-4 0,0 0-2 0,1-3 5 0,0 1-4 16,-1-1 2-16,0-1-1 0,-1-1 0 0,-1 0 2 0,-1 1-1 0,-2-2-1 15,0 0-1-15,-1 0-11 0,0-1-8 0,-1 0-5 0,0-1-16 0,-1-2-17 16,1-1-20-16,-1 0-27 0,1-1-39 0,0 1-42 0,2-1-45 16,1 0-38-16,2-2-161 0,2 1 27 0</inkml:trace>
-  <inkml:trace contextRef="#ctx0" brushRef="#br0" timeOffset="-51140.69">23321 7104 1418 0,'-13'-12'146'0,"-1"1"-119"0,-2-1 21 0,4 5-33 0,3 4-14 16,3 2-2-16,0 1-7 0,2 3-4 0,-1 0-8 0,1 3-15 0,-1 2-1 16,0 0-3-16,0 2 5 0,-1 0 4 0,1 1 0 0,1 1 2 15,-2 0-1-15,1 2 7 0,0 0 1 0,0-1 2 0,0 3-4 0,0 2-5 16,0 1-1-16,-1 1 2 0,1 0 5 0,-1 1 5 0,0 0 8 16,0 0 1-16,-2 1 5 0,-1 1 2 0,1 1 1 0,-2 2 2 0,-1 1 3 15,2 2 8-15,-1 0 1 0,0 1 4 0,1 1 5 0,0-1-2 16,-1 3 6-16,2-1-5 0,2 2-5 0,0-2-3 0,0 0 0 0,2-1 2 15,1 1 1-15,0-1 0 0,2-1-2 0,0-3 0 0,1-3 3 0,0-3 2 16,0-2 5-16,0-2 6 0,1-2 4 0,-1-1 10 0,-1-2 3 16,1-1-1-16,-1 0 2 0,0-3-2 0,1 0-6 0,0-1-4 0,-1-3-3 15,0 1-6-15,0-1-5 0,1-1 1 0,-1 0-11 0,0-1-3 0,2-1-2 16,-1 1-2-16,1-1-5 0,0 1 4 0,0 0-10 0,1 0-2 16,0 0 1-16,2 1-6 0,1 0 3 0,-1 1 2 0,3 1 0 0,-1 0 1 15,3 0 5-15,1 0-2 0,1 1 3 0,2 2-1 0,3-1 2 16,0-1-6-16,2 1 1 0,2-1 4 0,-1 0-2 0,1 1 12 0,1-1 0 15,-2 0 3-15,1 1 0 0,0-1 2 0,-2 0 5 0,2-2 2 0,-1-1 10 16,-2-1-2-16,0 1 2 0,1-1-3 0,-1-1-9 0,-1 1-1 16,1-2-5-16,-3 2 0 0,0-1-6 0,-2 1 3 0,1-1-4 0,0 0-1 15,-2 0 4-15,0-1-4 0,-2 2-3 0,0-1 5 0,1-1-4 0,-1 1 2 16,1-1-1-16,-2 0-2 0,0 0-2 0,-1-1 2 0,-1 0 2 16,0 0-7-16,0 0 2 0,0 0-3 0,-1-1-10 0,-1 1-4 0,0-2-18 15,-1 0-18-15,0-1-11 0,-1 0-21 0,0 0-20 0,-1-1-23 16,-1-2-27-16,-1-1-29 0,0 0-31 0,0 0-14 0,-3-2-63 0,0-3-226 15</inkml:trace>
-  <inkml:trace contextRef="#ctx0" brushRef="#br0" timeOffset="-50659.69">23209 7168 1570 0,'-1'-12'51'0,"1"0"33"0,1-2-1 0,4 4-31 0,3 3-9 16,2-1-19-16,4 1-9 0,1-1-2 0,1 2-5 0,4 0 3 16,0 1-4-16,1 1-3 0,0 0-4 0,0 1-3 0,-2 0 6 0,1 1-3 15,-1 0 4-15,-1 0-4 0,0 1 0 0,0 0 3 0,-2 0-4 0,-1 0 5 16,0 0-7-16,1 0 4 0,-1 0 1 0,-2 1-4 0,-1 0 8 15,0 0-9-15,-1 0 4 0,0 1-1 0,-1 1 0 0,0 0 3 0,1 0-1 16,0 3-1-16,-1 0-2 0,0 0-5 0,0 2 5 0,0 0 1 16,0 1 1-16,1 1 2 0,0 1-3 0,1-1-3 0,-2 1 2 0,1 2-1 15,-1 2 2-15,1 0 0 0,1 3-2 0,-1 2 0 0,0 2-1 0,0 1 1 16,0 1 2-16,-1 2-5 0,0-2 1 0,-2 3-3 0,2-1 0 16,-1 4 6-16,0 0-3 0,1 2 0 0,-1 1 1 0,-1 1-11 0,0 0 3 15,0 1 3-15,-1-3 3 0,-2 2 6 0,-1-4 5 0,0 0-6 0,-1-4-2 16,0-1 5-16,-2-3 8 0,0-2 4 0,-3 0 7 0,-1-2 4 15,-1 0-2-15,-2-1 1 0,-2-1 5 0,-2-1 1 0,0-2 2 0,-2-1 0 16,-1 0-7-16,-1-1-2 0,0-1-5 0,1 0-3 0,-1-2-6 0,0-1-1 16,0 1-6-16,0-1-3 0,1-1-4 0,1 1-4 0,1-2-3 15,2-1-6-15,0 0-5 0,2-1-4 0,0 0-6 0,2 0-7 0,-1-1-5 16,2 1-11-16,0-1-11 0,1 0-14 0,2 0-20 0,0-1-22 16,1 0-28-16,2-1-24 0,1 1-27 0,1-1-28 0,1 0-30 0,3 0-198 15</inkml:trace>
-  <inkml:trace contextRef="#ctx0" brushRef="#br0" timeOffset="-50325.69">25784 7192 823 0,'-4'-12'201'0,"-1"1"-208"0,-2-4-5 0,2 4-21 0,0 3-13 16,-1 1-10-16,0 1-13 0,0 0-8 0,-3 1-17 0,1 1-15 0,-3 1-69 16,0 0-94-16</inkml:trace>
-  <inkml:trace contextRef="#ctx0" brushRef="#br0" timeOffset="-49909.43">25555 7097 310 0,'-1'-1'155'0,"1"0"-19"0,-1-1-9 0,0 1-1 0,1-1-3 15,-1 1-6-15,0 0-5 0,1 1 0 0,-1-1-15 0,1 1-13 0,-1 0-17 16,0 0-14-16,1 2-9 0,-1 0-9 0,0 0-7 0,0 2-7 15,0 1-7-15,0 1 1 0,0 1-7 0,0 2-2 0,-1 1 1 0,1 2-2 16,0 2-7-16,-1 1 4 0,1 4 0 0,-1 1-4 0,0 2 6 16,1 3-2-16,-2 2-2 0,1-1-2 0,1 2-3 0,0 0 0 0,-1 2-1 15,0 1 1-15,0 1 4 0,1 0-5 0,0 2-7 0,0-1 5 0,1 2-5 16,0-2 3-16,1 0 3 0,1 1 0 0,0-3-5 0,1 1 5 0,-1-3 4 16,1 0 0-16,1-1 6 0,1-2-3 0,-1-1-2 0,0-3 5 15,-1-1 1-15,-1-3 7 0,0-4 9 0,1 0 5 0,-1-2 1 0,0-1-6 16,0 0 1-16,-1-1-6 0,1 1 2 0,-1 0-3 0,0-1-6 15,-1 0 4-15,0-2-5 0,1 0 1 0,-1-1-4 0,1 0-1 0,-1-1 0 16,0 1-2-16,1-1-1 0,0 0 2 0,-1-1-5 0,2-1 0 0,-1 0 3 16,1 0-5-16,0-1 0 0,1-1-3 0,1 0 4 0,0-1 4 15,1 0 6-15,2 0 2 0,0-1 3 0,0 1 1 0,1-1-1 0,1 0 2 16,1 0-1-16,-1-1 0 0,2 0 0 0,0 1-1 0,2 0-1 16,1 0 1-16,-1 0 0 0,1 0-3 0,0 1 5 0,-2 0 4 0,1 0 3 15,0 0 3-15,1-1-3 0,2 1-1 0,-1 0-3 0,0 0-3 0,0 0 0 16,0 1 6-16,0-2 2 0,-2 2 1 0,1-2-1 0,-1 1-3 15,0 1 0-15,-2-2 2 0,-2 2 1 0,1-2 3 0,-1 1 2 0,0-1 0 16,1 0 2-16,-2 0-5 0,-1 0-4 0,-1 0-8 0,1 1-3 0,0 0-2 16,-1 0-11-16,0 0 7 0,0 0 0 0,-1 0-2 0,1 0 4 15,-2 0-10-15,1-1-13 0,0 1-3 0,-2 0-7 0,0-1-2 0,0 0-3 16,0 0-10-16,-1 0-7 0,0-1-11 0,0 0-16 0,0-1-9 16,-1 0-13-16,-1-1-16 0,0-2-12 0,-1 1-25 0,-1-2-33 0,-1 0-22 15,-1-1-44-15,-1-3-257 0</inkml:trace>
-  <inkml:trace contextRef="#ctx0" brushRef="#br0" timeOffset="-49459.42">25600 7042 1984 0,'-1'-9'47'0,"2"2"2"0,3-1-4 0,3 5-35 0,3 0 1 16,3 3 4-16,0 0-1 0,4 0 4 0,2 2-6 0,0 0-5 15,0 1-1-15,0 1-2 0,1 1 7 0,-1 1-7 0,0 0 5 0,1 1-6 16,-1-1-2-16,0 2 1 0,1 0-4 0,-1 0 2 0,1-1 0 16,0 0 3-16,-2 0-1 0,2-1-4 0,-1 0 2 0,0-2 0 0,2 1 2 15,-1-2 5-15,-1 0 4 0,-1 0 7 0,0-1 9 0,-3 0 4 0,-2 0 4 16,1 0 4-16,-3 0-9 0,1 1-5 0,-2 0-4 0,-2 1-4 15,-1 0-2-15,1 2-2 0,-1 0-3 0,0 3-3 0,-2-1 0 0,2 2 1 16,-1 3 0-16,0 1 0 0,0 3-5 0,-2 0 2 0,-1 3-4 0,1 2 1 16,0 0-1-16,0 1-4 0,1 2 5 0,-1 3-5 0,0 1-1 15,0 4 3-15,-1 2-2 0,1 0-12 0,0 0 6 0,-1-1 2 0,0-1 7 16,0 1 8-16,1-3-1 0,0-1-6 0,-1-1 2 0,1 0 4 16,-1-1 2-16,1 2 4 0,-1-2 6 0,0 1 7 0,1-4 5 0,-1-1 4 15,1-1 1-15,-2-2-1 0,1-1-4 0,-1 0-1 0,0-1-1 0,-1-1-9 16,-1 0-1-16,-1-2-6 0,-1 1-4 0,-1 0 2 0,-1-1 0 15,-1-1-3-15,-1 0-13 0,-1-1-3 0,0 0-6 0,-1-2 0 0,0 1 18 16,-3-1-9-16,0 0-7 0,0-2-8 0,-2-2-22 0,1 0-6 0,-2-2-7 16,0-1-15-16,-1 0-18 0,1-1-33 0,-2-1-52 0,-2 1-65 15,-1-2-112-15,-1-1-173 0,-7-2-295 0</inkml:trace>
-  <inkml:trace contextRef="#ctx0" brushRef="#br0" timeOffset="-47209.43">21626 6718 2852 0,'-11'-4'37'0,"2"2"-23"15,1 1-11-15,10 2-3 0,6 1 0 0,5-1 0 0,5-1 2 0,1-3 3 16,3-2 3-16,1-1 13 0,1-3 16 0,2-1 8 0,4-5 8 0,1-4 3 16,5-2 0-16,1-3-8 0,3-4-5 0,5 1-7 0,1-6-4 15,2-3 2-15,3-3-10 0,4-8 15 0,3-3-3 0,4-5-1 0,3-6 1 16,5-4-18-16,3-5 1 0,3-3-6 0,3-2-1 0,1-3-5 16,3-1 4-16,2-2 3 0,3-2-3 0,1 0 4 0,0 1-11 0,3 2 0 15,0 3 1-15,3 3-5 0,-3 6 10 0,0 1-1 0,0 3 1 0,-3 3 7 16,-3 2-9-16,-1 4-3 0,-2 0 1 0,-1 4-4 0,-2 4 4 15,-1 2-4-15,-2 3-2 0,-1 5 5 0,-2 3-8 0,-3 1 3 0,-3 4 3 16,-1 1-26-16,-3 3-11 0,0 1-27 0,-4 2-40 0,-2 3-22 0,-2 0-35 16,-2 1-37-16,-1 2-33 0,-3 2-38 0,-3 1-58 0,-2 1-37 15,-2 2-53-15,-3 1-434 0</inkml:trace>
-  <inkml:trace contextRef="#ctx0" brushRef="#br0" timeOffset="-46859.43">23738 6425 3513 0,'-17'-12'-6'0,"-2"-5"12"0,2-3-8 0,2-5-13 0,24 9 2 16,11 0-18-16,12-1 3 0,9-2 8 0,7-2 4 0,5-1 5 15,1 0 2-15,3 1 7 0,3-1-7 0,2 1 7 0,3 1 2 0,3-3 0 16,0-3 6-16,2 0-4 0,3-3-1 0,1-1 5 0,1-1-3 0,0 1-1 16,1-2-2-16,1 0 2 0,1-1 0 0,-2 0-4 0,2-1 15 15,1 3-11-15,-2-1 5 0,0 2 0 0,-2 1-14 0,-2 3-8 0,-3 1-28 16,-3 4-20-16,-3 1-19 0,-2 2-27 0,-3 3-9 0,-4 1-15 0,-2 1-28 15,-3 3-9-15,-2 2-34 0,-2 2-52 0,-1 2-43 0,-3 2-75 16,-2 1-195-16,-1 1-25 0</inkml:trace>
-  <inkml:trace contextRef="#ctx0" brushRef="#br0" timeOffset="-46575.43">26146 6503 3122 0,'-6'-4'271'0,"2"0"-296"0,3-1-24 0,5 1-8 0,7-2 2 0,6-2 28 16,7-3 17-16,5-3 11 0,6-1 8 0,5-2 4 0,1-2-8 15,3 1 2-15,4-1 7 0,0 0-9 0,1 0 17 0,2 1-3 0,1 0 1 16,0 0 5-16,-1 1-5 0,-1 0-2 0,-1 0-5 0,1 0-2 0,0 2 1 15,2-1 8-15,-2 0-9 0,2 1-5 0,0 0-1 0,0 0-3 16,4-1 2-16,-2 1 1 0,0 2-5 0,0-1-11 0,-3 0-3 0,-1 0-25 16,-1 2-24-16,-1-1-31 0,-1 0-36 0,-2 0-21 0,-2 0-19 15,-2 0-2-15,1 0-8 0,-2-1-20 0,-1 0-20 0,1-1-56 0,-1-2-104 16,-1-1-475-16</inkml:trace>
-  <inkml:trace contextRef="#ctx0" brushRef="#br0" timeOffset="-45892.43">27520 4781 1900 0,'-6'-6'-21'15,"2"2"-10"-15,1 0-5 0,2 2 1 0,3 2 9 0,0-1 8 0,1 0 11 16,0 0 1-16,0 0 0 0,0 0 0 0,0 1 6 0,-1 0 1 0,-1-1 1 16,0 1 4-16,0-1-2 0,-1 0 2 0,1 1 3 0,-1-1-1 15,0-1 3-15,-1 1-2 0,1-2 1 0,-1 0-3 0,1 0 1 0,0 0 5 16,0 0 2-16,1 0 8 0,-1 1 5 0,2 0 8 0,0-1 3 15,-1-1-3-15,3 0-5 0,0 0-2 0,1 0-5 0,1-1 3 0,0 1 3 16,0 0-5-16,1-1 5 0,0 1-6 0,0 0-5 0,-1 0-3 0,0 0 0 16,1 0-1-16,-1 1-1 0,-1 1 4 0,0-2-8 0,0 2 4 15,-1 0 4-15,0 0-3 0,-2 1 3 0,0 0-1 0,0 0-6 0,-1 0 2 16,1 0-8-16,-1 0 6 0,0 0 0 0,0 0-2 0,-1 0-1 16,1 0-2-16,0 0 2 0,-1-1-5 0,0 0 11 0,0-1-3 0,0 1-2 15,0-1 2-15,-1 0-5 0,0 0 2 0,1 0 0 0,-1 1-2 0,1-1-3 16,-1 1 4-16,0 0-6 0,0 0 2 0,1 1-1 0,1-1 0 15,-1 2 4-15,0-1-3 0,1 0-1 0,-1 0 1 0,0 1-2 0,1 0 6 16,-1 0 1-16,0 0 0 0,0 1-2 0,1 0 4 0,0 1 1 0,-1 2 0 16,2 1 7-16,0 3-4 0,1 5-6 0,0 4 4 0,1 4-11 15,1 7-2-15,0 3 4 0,0 6-8 0,0 2 4 0,-1 2 1 0,1 3-9 16,0-1 8-16,0 1 1 0,-1 1-8 0,1-2 5 0,0-3-2 16,-2 0-3-16,1-2 11 0,-1-3 3 0,0-2-2 0,-1-5 4 0,0-1 1 15,-1-3 3-15,1-4 7 0,-1 0 4 0,1-4 7 0,0-4 8 0,0-1 1 16,2-2 10-16,-1-1 5 0,1-2-3 0,1-1 8 0,0-2-9 15,1-1-6-15,1-2 0 0,-1-1-9 0,3-2 1 0,2-2 3 0,0 0-12 16,2-2-3-16,1-1-10 0,4 0 5 0,2-3-1 0,2 1-7 0,1-3 5 16,4-1-8-16,0 1 1 0,3 0 0 0,-1 1-2 0,3 0-5 15,0 1 4-15,1 1-4 0,0 1-2 0,1 2-4 0,-3 1 13 0,1 1 2 16,-2 1-7-16,-2 0 5 0,-1 0-14 0,-1 1-10 0,-1 0 2 0,-1 0-15 16,-1 0-12-16,-2-1-13 0,0 0-15 0,1-2-14 0,-1 0-18 15,1-1-19-15,-1-2-21 0,1-2-26 0,-2-2-33 0,-2-1-57 0,1-1-75 16,-2-3-96-16,0-4-495 0</inkml:trace>
-  <inkml:trace contextRef="#ctx0" brushRef="#br0" timeOffset="-45676.43">27525 4616 3305 0,'-7'-1'-25'0,"3"2"-15"0,2 1-7 0,8 2-4 0,7 2 7 0,5 1 18 16,7-1 10-16,3 0 9 0,4-1 2 0,1 0 0 0,2-1-2 0,1-1-3 16,1 1-4-16,-1-1 2 0,0-1-5 0,0 2-22 0,0 0-27 15,-2-1-33-15,-3 0-32 0,0-1-14 0,-6-1-27 0,1-1-23 0,-3 0-37 16,1-1-47-16,-1-1-42 0,-2-1-65 0,1 0-241 0</inkml:trace>
-  <inkml:trace contextRef="#ctx0" brushRef="#br0" timeOffset="-45509.44">28114 4858 2315 0,'13'-4'51'0,"6"0"-87"0,12 1 10 0,4 2 8 0,7 2 2 0,3 0-18 15,2-1-28-15,1 1-27 0,-1-1-34 0,-2 0-23 0,-1 0-24 0,-2-1-27 16,1-1-28-16,-4 1-39 0,-2-2-362 0</inkml:trace>
-  <inkml:trace contextRef="#ctx0" brushRef="#br0" timeOffset="-45241.44">29133 4761 1746 0,'-5'12'90'0,"1"5"-102"0,0 6 4 0,1 5 2 0,2 0 2 16,2 3 2-16,0-1-1 0,1 1 3 0,0-1 0 0,0-1 0 15,1-4 4-15,-1 0 8 0,-1-3 4 0,1-2 16 0,-1 0 7 0,0-3-3 16,-1-3 4-16,-1-1-3 0,0-3 5 0,-1-2 2 0,0-3 7 0,1-1 0 16,-1-2-1-16,-1-2-1 0,1-2-2 0,0-3-2 0,-1-2 2 15,-1-2-5-15,-1-2-8 0,0-2-7 0,0-4-12 0,0-1-8 0,0-3-4 16,2 2 6-16,0-4 3 0,0 0 4 0,3-2-2 0,1-3-1 0,1 1-5 16,2-3 1-16,2 0 1 0,3 0-10 0,2 2-2 0,1 3-6 15,4 3-3-15,1 3-6 0,1 2 1 0,1 2-2 0,1 4-1 0,-1 0 5 16,-2 3-1-16,-1 1 1 0,0 2 3 0,-2 1-14 0,-1 1-29 15,1 0-47-15,-2 2-71 0,1 1-72 0,0 1-58 0,0 2-61 0,2-1-287 16</inkml:trace>
-  <inkml:trace contextRef="#ctx0" brushRef="#br0" timeOffset="-44926.43">29649 4787 2622 0,'-2'7'13'16,"0"6"-16"-16,1 6-2 0,3 5 3 0,2 0 1 0,1 1-1 0,1 1 2 16,-1 0-2-16,-2-1 1 0,0 0 1 0,-1-2-2 0,-1-5-7 15,-1-1-4-15,0-3 5 0,-2-3-5 0,1-2 10 0,-1-3 9 0,-1-1-6 16,1-3 10-16,-1-1 4 0,0-2 2 0,0-3 0 0,0 0 3 16,-1-4-7-16,1 0 1 0,1-2 1 0,0-2-9 0,2 0-2 0,0-2-11 15,2-2 2-15,1 1-2 0,1-1 0 0,2 1 1 0,0 0 2 0,0 0 4 16,3-1 4-16,-2 2-2 0,2-1-1 0,0 0 0 0,-1 1-3 15,2 0-2-15,-1 2-3 0,0 0-4 0,3 2-3 0,-1 1-1 0,2 1 2 16,0 0-2-16,0 3 0 0,2-1 2 0,0 0-3 0,0 2-5 0,-2-1-8 16,0 1-18-16,1 1-16 0,-1-1-23 0,-1 0-25 0,-1 1-20 15,1 0-16-15,-1 3-4 0,0 0 3 0,-2 1 2 0,1 2 5 0,-1 0 5 16,0 1-3-16,0 1-2 0,0-1-16 0,0 0-109 0,1 0-71 0</inkml:trace>
-  <inkml:trace contextRef="#ctx0" brushRef="#br0" timeOffset="-44675.44">30134 4860 656 0,'-2'8'90'0,"1"1"-34"0,1 4 11 16,0 0-1-16,1-1-10 0,1 2-9 0,1-1-12 0,2 1-2 0,1-1-2 16,0-2 4-16,-1 2 4 0,3-1-2 0,2 1-5 0,1-1-6 15,1-1 7-15,0-1 11 0,-1-3 18 0,1 0 10 0,1-2-7 0,-1-2-4 16,1 0-5-16,-1-1-3 0,-1-2 5 0,0 1 8 0,-1-4 12 0,0 1 4 16,-1-4 4-16,-2 1-8 0,2-2-11 0,0-1-6 0,-1-1-3 15,-1-2-9-15,0-1-12 0,-2-2-1 0,1 0-11 0,-1 0-3 0,-3-1-1 16,0-1-2-16,-2 0 3 0,-1 0-4 0,0-2 3 0,-3 1-4 15,-1-2 0-15,-2-1-1 0,0-1-5 0,-3-1-3 0,1-1-3 0,-1 1 2 16,0 0-6-16,-3-1-2 0,0 3-1 0,-1 1-6 0,0 2 1 0,1 2-2 16,-2 1-4-16,-1 3-2 0,-1 0-3 0,0 2 1 0,-1 1-4 15,1 3-5-15,2 1-1 0,0 3-11 0,-2 2-13 0,2 1-18 0,-1 3-14 16,0 2-10-16,1 1-17 0,1 1-16 0,2 1-28 0,1 1-29 0,0 1-28 16,2 2-28-16,0 1-36 0,3 0-345 0</inkml:trace>
-  <inkml:trace contextRef="#ctx0" brushRef="#br0" timeOffset="-43959.66">31036 4891 1263 0,'-1'-1'840'0,"1"1"-837"0,2 2-6 16,0 2-4-16,2 1 3 0,2 2 2 0,2 0 2 0,3 2-4 15,2 0 3-15,3 0 3 0,1-2 7 0,2-1 7 0,-2-2 5 0,1 0 7 16,-1-2 2-16,-2 0 1 0,2-3-1 0,-3-1 0 0,1-1-2 0,-3-1-4 15,1-2 5-15,0-1 3 0,-2-2 2 0,-1-1-3 0,-1 0 1 16,-3-1-7-16,0-1-1 0,-1-1 3 0,-1-1-10 0,0 1-1 0,-2-1-9 16,0 0-1-16,-3-1 4 0,1 0-2 0,-1 0-2 0,-1 0 2 15,0 1-3-15,-2 0-2 0,1 2 5 0,1 0-5 0,0 2-6 0,-1 1 6 16,2 2-8-16,0 2-3 0,0 0 4 0,1 3-6 0,-1 0-1 0,2 1 3 16,-1 0-3-16,0 0-2 0,1 1 6 0,-1 1-2 0,0-1 3 15,0 1-1-15,1-1 2 0,0 0 4 0,1 1-1 0,-2 0 2 0,1 2 0 16,-2-1 2-16,2 1 4 0,0 0 2 0,-1 0 2 0,0-1-2 0,0 0 0 15,-1 1 1-15,2-1-4 0,-2 2 1 0,1-1-1 0,0 1-3 16,-1 0 3-16,2-2-2 0,-1 1-2 0,1 1 1 0,-1 0-4 0,1-1 1 16,0 1-1-16,1-3 1 0,0 0 2 0,0 1 2 0,0-1 2 15,-1 0-3-15,1 0 1 0,0-1 0 0,0 0 2 0,0 0 5 0,0-2-5 16,0 2-2-16,-1-2 2 0,1 1 1 0,-2 0 2 0,0 0-1 0,1 1-6 16,-2-1 1-16,2 0 1 0,-1 1 0 0,-1 0 4 0,1 0-5 15,0 1-1-15,-1-1 1 0,1 2-4 0,0-2 2 0,-1 1-5 0,0 3 0 16,1 1 1-16,0 1-5 0,0 2 5 0,0 2-1 0,2 1 0 0,0 4-2 15,1 0-2-15,0 2 1 0,1 2 3 0,2-1 3 0,-1 3 2 16,0 0-1-16,3 1-1 0,-2 0 5 0,2 1-6 0,-1-2 3 0,-1-1-2 16,1-1-9-16,-2-4 11 0,0 0-1 0,1-1-1 0,-2-1 12 15,0-2-7-15,1-2 3 0,-3-1 9 0,1-1 4 0,-3-3 12 0,-2 0 10 16,0-2 8-16,-2-2 6 0,-1-1-3 0,0-2-11 0,-2-3-16 0,-2-2-9 16,-2-3-4-16,-1-2 3 0,0-4 4 0,0-2 10 0,0-1 4 15,0-1 2-15,1-4 4 0,2 1-4 0,0-3 1 0,3-1-10 0,0-1-2 16,0 0-13-16,2-2-6 0,3-1-1 0,2-3-6 0,3 0-5 0,3 0-2 15,2 2-13-15,5 3-8 0,3 3-11 0,3 2-5 0,1 4-6 16,4 1-4-16,2 2-14 0,2 2-33 0,1 3-22 0,0-1-33 0,-2 1-45 16,3 1-73-16,-2-1-123 0,2 2-321 0,1-2 13 0</inkml:trace>
-  <inkml:trace contextRef="#ctx0" brushRef="#br0" timeOffset="-41725.5">22633 10618 1764 0,'-6'7'255'16,"1"2"-236"-16,0 5-14 0,5 2-5 0,3 4 6 0,1 3-3 16,2 0-6-16,2 3 6 0,0-1 10 0,1 3 18 0,1 1 19 0,2 0 9 15,4 2-3-15,2-2-5 0,1 1 1 0,4-1-6 0,1 0-3 16,3-3-11-16,4-1-22 0,1-4-2 0,2-2-2 0,1-3-7 0,-1-3 1 16,1-4-5-16,-1 0 1 0,3-2 5 0,-1-1 1 0,-3-2-13 0,-1-1-17 15,-4-2-23-15,0-1-33 0,-4-3-26 0,-2-2-38 0,-2-3-46 16,-2-3-78-16,-2-1-134 0,-1-5-410 0</inkml:trace>
-  <inkml:trace contextRef="#ctx0" brushRef="#br0" timeOffset="-41256.5">23328 10756 2891 0,'-9'2'85'0,"0"1"-77"0,0 0-45 15,3 2-26-15,3-2-28 0,2 1-3 0,1 0-4 0,-1 0 24 0,1 2 25 16,-1-1 28-16,-1 1 21 0,-1 1 3 0,0 0 4 0,0 2-8 15,-1 0 2-15,0 1 1 0,0 2-7 0,0 2 1 0,-1 4-6 0,1 2-4 16,2 5 4-16,-1 3-4 0,2 5-3 0,0 4 3 0,1 6 1 16,2 4 0-16,2 3 3 0,1 3-4 0,1 3-1 0,1 1-9 0,2 4-16 15,2 2-15-15,1 1-10 0,1 2-7 0,1-2 23 0,3-3 17 0,-2-4 17 16,2-5 19-16,-4-6 5 0,0-4 26 0,0-4 32 0,-2-3 18 16,-2-2 36-16,-3-9-121 0,-4 3-72 0,-3 0-8 0,-4-3 13 0,-3 6-35 15,-1-8 174-15,-3-3-22 0,-3 1-17 0,0-4 9 0,-5-2-19 0,-2-3 6 16,-1-2-1-16,-4-1-13 0,0-3 8 0,-1-2-7 0,0-3-11 15,1-4 11-15,-1-4-16 0,1-2 8 0,1-2-7 0,0-2-7 0,3-4 11 16,0-5-2-16,3-2-3 0,1-6 18 0,2-3-15 0,3-4-2 16,2-3 8-16,2-1-21 0,4 1 20 0,5-1-11 0,2 5-3 0,3 1 1 15,1 4-10-15,2 1 9 0,0 1 5 0,2 2-8 0,-1 3 6 0,2 1-5 16,0 3-4-16,0 1 11 0,2 2-19 0,0 1 11 0,0 1-4 16,0-1-3-16,1 1-11 0,-2-1-34 0,0 3-32 0,-2-3-33 0,0 2-43 15,-1 0-32-15,-1-2-63 0,-1 0-69 0,-2-1-61 0,1-1-68 0</inkml:trace>
-  <inkml:trace contextRef="#ctx0" brushRef="#br0" timeOffset="-40759.5">23692 11630 2024 0,'0'-1'167'0,"0"1"-139"0,1-2-23 16,3 1-7-16,1-2-1 0,3 1-1 0,2-1 5 0,0 0-6 15,2-1 7-15,0 0 3 0,1 0 5 0,0 1 5 0,0-1-2 0,0 2 2 16,-2 0-3-16,1 1-4 0,0-1-4 0,0 0 2 0,0 1 0 0,-1 1 0 16,1-1 2-16,0 1-11 0,0-1 3 0,0 1-3 15,-2-1-5-15,-1 1-2 0,0 0-25 0,-1 0-24 0,-1-1-39 0,0 0-49 0,-1 0-42 16,0-1-49-16,0 0-47 0,-1-2-48 0,3-1-316 0</inkml:trace>
-  <inkml:trace contextRef="#ctx0" brushRef="#br0" timeOffset="-40475.5">24421 10824 3157 0,'-4'6'66'0,"0"2"-34"0,0 3-23 15,1 4-13-15,2 1-3 0,2 3 2 0,1 3 1 0,2 2-5 0,0 0 4 16,0 3 1-16,0 0 1 0,-2 4 4 0,1 1-1 0,-1 2-5 0,-2 0 10 16,1 1-5-16,-2 0 0 0,0 2 2 0,1 0-2 0,0 0 6 15,0 0-3-15,1-2-5 0,1 0-3 0,2-4-7 0,1 0 4 0,0-3 0 16,1-1-14-16,1-3-4 0,0-2-11 0,2-2-17 0,-1-2-7 15,0-1-11-15,0-2-14 0,0-2-11 0,0-3-10 0,-1 0-15 0,-1-2-8 16,0-3-15-16,-1-1-17 0,0-5-41 0,-3-2-74 0,-1-3-72 0,-1-4-137 16,-2-3-102-16</inkml:trace>
-  <inkml:trace contextRef="#ctx0" brushRef="#br0" timeOffset="-40275.5">24221 11352 2616 0,'-5'2'91'0,"1"-1"-46"15,1 1-39-15,2 0-11 0,3 0 0 0,2 1 2 0,2 0 5 0,2 1 1 16,0 0 7-16,0-1 6 0,0 1 6 0,2 0-1 0,-1-2-3 0,1 2-11 16,0-1-5-16,0 0-2 0,-1 0-2 0,1-1 5 0,0-1-16 15,1 0-8-15,-1 0-9 0,1-1-11 0,-1 1 5 0,1-1-16 0,1 1-4 16,1-1 7-16,-1-1-15 0,0 0 6 0,0 0-14 0,1-1-6 0,0 0-2 16,-1-1-18-16,0 1-14 0,1-1-23 0,-1-1-18 0,0 2-21 15,0-1-13-15,-1 0-25 0,1 0-24 0,0 0-9 0,0 0-236 0</inkml:trace>
-  <inkml:trace contextRef="#ctx0" brushRef="#br0" timeOffset="-39875.5">24794 11364 257 0,'0'2'153'16,"1"1"-46"-16,0 1-19 0,0-1-8 0,1 0-1 0,-1-1-1 15,2 0 5-15,-1 0 2 0,0-1 5 0,1 0 8 0,0-1-2 0,-1 0 4 16,1 0-1-16,0 0-5 0,0 0-9 0,1 1-6 0,-1-1-14 15,2 0-8-15,-1-1-2 0,1 1-12 0,0 0-7 0,-1 0-7 0,1-1 2 16,1 0-2-16,-1 0 1 0,1 0-10 0,-1 0 1 0,1 0-5 0,0 0-3 16,1-1 2-16,-1 0-5 0,0-1-4 0,2 0 1 0,0-1-1 15,0 0 0-15,1-1 3 0,-1-1-8 0,-1-1 2 0,0 0 2 0,-1-1 5 16,0 1 7-16,-2-2 1 0,0 0 1 0,-1-1 7 0,-1 1-2 0,-1-2 7 16,-2 1-8-16,0-1-8 0,-2 0-2 0,-1 1-2 0,-1 1 1 15,-1 1 7-15,1 1-2 0,-3 3 3 0,-1 0 6 0,-1 1 2 0,0 2 3 16,-1 1-4-16,1 2-9 0,0 1-9 0,-1 0-6 0,2 2 2 15,-1 2 0-15,0 1 0 0,1 3-7 0,0 1-1 0,1 2 0 0,1 1 1 16,1 1 4-16,1 1-7 0,1 1 5 0,1 1 2 0,1 0 6 0,2-1-11 16,2-1 17-16,1 1-1 0,1 0-1 0,1-1 7 0,2 1-17 15,1-1 1-15,1-1-6 0,-1-1 6 0,3 1-8 0,0-2 2 0,0 0 0 16,2-2-9-16,0 0 4 0,0 0 2 0,1-3-14 0,1 0-9 0,-2-1-16 16,-1-2-17-16,0 0-4 0,0-2-4 0,0-1 0 0,0-1 1 15,-1-2-4-15,0-1-3 0,-1-2-11 0,-1-1-19 0,0-1-15 0,-1-1-11 16,1-2-3-16,-2-2 7 0,2-1 6 0,1-2 3 0,0-1-15 15,1-2-15-15,1-1-10 0,-2 1-15 0,3-1-12 0,-2-1-125 0</inkml:trace>
-  <inkml:trace contextRef="#ctx0" brushRef="#br0" timeOffset="-39559.5">25416 10970 2699 0,'-2'-8'102'0,"1"0"-32"0,1-4-40 0,1 0-6 0,0 4 1 15,1 0 1-15,1 3 3 0,-1 2 0 0,1 2 5 0,-1 2 13 0,-2 0 6 16,0 1 0-16,-1 3-3 0,-1 0-23 0,1 3-11 0,-1 3-11 15,1 1 2-15,-2 2-3 0,0 4-6 0,0 3-1 0,0 3-5 0,0 3-2 16,0 3-1-16,0 3-7 0,0-1-5 0,-1 1 0 0,2-1-9 0,-1 0 2 16,2-2-14-16,0 1-17 0,0-1-11 0,2 0-33 0,1-2-33 15,0-1-30-15,1-1-31 0,2-2-29 0,-1 0-39 0,2-2-41 0,1 1-50 16,0-2-103-16,0-2-118 0</inkml:trace>
-  <inkml:trace contextRef="#ctx0" brushRef="#br0" timeOffset="-39025.32">25624 11101 1903 0,'-5'-9'139'0,"-3"-1"-32"0,-2-1-22 0,-2 0-24 0,1 2-13 16,-2 2-5-16,-2 1-2 0,1 1 4 0,0 1 2 0,-2 0-3 0,-1 2-7 16,-1 1-12-16,1 2-7 0,-3 1-9 0,0 2-5 0,0 1 0 0,0 2-5 15,1 3 1-15,3 1 3 0,0 2-8 0,1 2 2 0,1 3-2 16,1 0-4-16,4-1 4 0,1 0-5 0,1 0 2 0,3-1 0 0,1-1 0 16,2 0 5-16,3-1-3 0,2 1 1 0,2-1-2 0,2 1-2 15,1-1 4-15,2 0 4 0,3 0-3 0,2 0 4 0,2 0-4 0,0 1 5 16,4 0 2-16,-1-2-3 0,0 1-6 0,1-2 8 0,-2 2 7 0,-2-2 1 15,1-1 14-15,-1 2-10 0,-3-1-3 0,1 0 2 0,-2-1 0 16,-2-1 1-16,-2-1 6 0,-3 0-6 0,-1 0 7 0,-2 0-1 0,-2-1-4 16,-2-1 3-16,-2 0-11 0,-1 0-12 0,-4 1-9 0,0-1-6 15,-3 0-14-15,-3 0-3 0,-2 0-12 0,-2 0-8 0,0 0-9 0,-2 0-12 16,-1 1-12-16,0-1-13 0,0 0-19 0,0-1-17 0,2-2-31 0,0-2-39 16,2-1-53-16,3-3-66 0,4-4-381 0</inkml:trace>
-  <inkml:trace contextRef="#ctx0" brushRef="#br0" timeOffset="-38842.73">25888 10789 2727 0,'0'4'383'0,"1"2"-316"0,2 4-36 0,1 3-23 16,1 2 2-16,2 3-10 0,1 4 7 0,0 2-7 0,1 2 0 15,-1 3 7-15,-1 1-3 0,-3 3 5 0,1 3 2 0,-2 2-8 0,-1 2 1 16,-1 0-6-16,-2 0-3 0,1 2 3 0,0-1-7 0,-1 0-2 0,2-1-8 15,0-1-19-15,1-1-16 0,1 0-24 0,0-3-25 0,0 0-25 16,1-5-22-16,-2-2-25 0,0-3-6 0,0-2-18 0,-1-2-9 0,-1-4-29 16,-1-2-41-16,-2-2-63 0,-1-4-387 0</inkml:trace>
-  <inkml:trace contextRef="#ctx0" brushRef="#br0" timeOffset="-38707.74">25684 11478 2325 0,'-1'-2'111'0,"1"-1"-28"0,0 0-37 0,2-1-13 15,3 2-11-15,2-2-4 0,2 0-4 0,3 1-2 0,2-1 1 16,1 1-9-16,1 0 3 0,0 0-15 0,2 0-16 0,-1 0-15 0,1 0-28 16,0 0-22-16,2 1-21 0,-2 1-26 0,0 1-24 0,0-1-41 0,-2 1-71 15,0 0-85-15,3 0-159 0,0 1-42 0</inkml:trace>
-  <inkml:trace contextRef="#ctx0" brushRef="#br0" timeOffset="-38508.74">26384 11666 2449 0,'3'19'612'0,"2"3"-596"0,3 9-25 15,2 2-29-15,-1 3-27 0,2 3-28 0,0 5-24 0,1 4-16 0,0 2-4 16,-2 1-11-16,-2 0-8 0,-2 0-39 0,-4 0-73 0,-2-1-133 0,-3 2-485 15</inkml:trace>
-  <inkml:trace contextRef="#ctx0" brushRef="#br0" timeOffset="-36875.14">20084 11961 2375 0,'-11'10'38'0,"0"4"-8"0,0 8-4 0,4 7 4 0,4 4-13 16,3 7-5-16,3 3-7 0,1 3-7 0,1 2 4 0,1 1 0 16,0-1-6-16,0-2 0 0,-2-1-1 0,1-3 2 0,0-1 4 0,1-2-4 15,1-1-11-15,1-3-3 0,1-3-5 0,-1-2-9 0,1-2-1 0,-3-5 2 16,1-2-2-16,-2-4 11 0,-1-5 15 0,-3-3 1 0,1-4 17 15,-1-2 11-15,-1-3 10 0,-1-2 10 0,-1-2-6 0,-2-4-4 0,-2-3-16 16,-2-5-5-16,-2-4 2 0,0-3-6 0,-2-3-1 0,0 0 8 0,-1-2 1 16,0-2 13-16,0-1 13 0,0-3-4 0,1-1 13 0,0-1-7 15,-1-2-4-15,0-1 0 0,2-3-12 0,0-3 3 0,2 1-13 0,2 1-4 16,4 3-7-16,2 4-6 0,4 4 3 0,4 2-20 0,1 3 3 0,2 5 9 16,2 1-2-16,0 2 12 0,2 4 1 0,1-1-14 0,0 2-3 15,2 1 2-15,0 3-6 0,2 0 1 0,0 1-6 0,0 2-14 0,2 1-22 16,0 1-38-16,1 2-39 0,-2 0-29 0,0 1-39 0,0 1-35 15,-1 0-55-15,0 2-73 0,0 0-104 0,0 0-161 0</inkml:trace>
-  <inkml:trace contextRef="#ctx0" brushRef="#br0" timeOffset="-36559.14">20376 11930 2585 0,'-5'-4'119'0,"2"0"-50"0,1 1-18 0,4 1-14 0,5 0-27 16,2 1-9-16,4 1 5 0,3 1-8 0,1 1 4 0,1 0 3 0,-2 2-5 16,0 0 0-16,0 0 5 0,-1 2-5 0,-2-1 0 0,1 2 0 15,-1 0-5-15,0 2-6 0,-1 0-14 0,-4 0-19 0,0 2-19 0,-2-1-15 16,-1 4-8-16,1 1-2 0,-3 3-8 0,-1 0 2 0,-2 3 8 0,-2 1 2 16,-1 2 9-16,-2 1 20 0,-2-1 16 0,-1 2 16 0,0-3 12 15,-3 0 4-15,-1-1 6 0,-2 0 14 0,0-2 14 0,1-1 23 0,1 1 16 16,1-4 10-16,1 0 3 0,2-1-18 0,2-1-4 0,2-3-19 15,1 0-12-15,2 0-4 0,1-2-14 0,2-1 1 0,2-1 13 0,0 0-10 16,2-3 0-16,0 1-1 0,0-1-9 0,2-1 7 0,1-1-2 0,2-2-3 16,0-1-1-16,3 0-9 0,1-1 1 0,1-1-4 0,0-1-5 15,1 0-8-15,1 0-24 0,-1 1-12 0,1-2-33 0,1 0-33 0,0-1-43 16,1 0-83-16,0 0-131 0,1 0-520 0</inkml:trace>
-  <inkml:trace contextRef="#ctx0" brushRef="#br0" timeOffset="-36158.14">21043 12113 3006 0,'-10'-3'40'0,"3"-1"-18"0,0 1-15 0,6 1-5 0,5 2-14 15,3 1-11-15,4 0 1 0,2 1-5 0,2 0 6 0,0 0 16 16,0-1-5-16,-1 1-12 0,-1-1-19 0,-2 0-32 0,1 0-34 16,0 1-20-16,1-1-24 0,-1 0-12 0,0 0-18 0,0-1-42 0,-1 1-61 15,0-1-84-15,0 0-452 0</inkml:trace>
-  <inkml:trace contextRef="#ctx0" brushRef="#br0" timeOffset="-36008.14">21144 12404 2372 0,'-9'0'155'0,"3"0"-138"0,-1 0-22 16,6 0-18-16,2 0-16 0,4-1-17 0,0 1-17 0,3-1-7 15,2-1-7-15,3 0-14 0,1-1-25 0,0 1-56 0,-1-2-78 0,0-2-111 16,2-1-412-16</inkml:trace>
-  <inkml:trace contextRef="#ctx0" brushRef="#br0" timeOffset="-35725.14">21542 12007 2087 0,'-4'2'346'0,"2"0"-268"0,0 3-26 0,4 3-15 0,2 3-10 0,3 3-5 16,2 2-2-16,2 3-14 0,0 0 4 0,2 1-4 0,0 0-4 0,-1 1 3 15,-2-1-4-15,0-1-6 0,-1 0 5 0,-2-1-1 0,-1-2-1 16,-1-1 4-16,-1-1-9 0,-1-2-2 0,-1-3 1 0,0-1-5 0,-2-3 6 16,0-2 6-16,-1-1-3 0,-1-1 9 0,-1-2-2 0,-3-2 1 15,-1-2-1-15,-1-2-2 0,-3-2 4 0,-1-2-3 0,1-2 4 0,-2-1 4 16,0-1-7-16,2 1 10 0,0-3-5 0,2 0-1 0,1-1 6 0,0 0-10 16,2-2 5-16,1-1-4 0,0 0-1 0,2-1-3 0,1-1-3 15,-1-1 11-15,3 0-8 0,0 0 0 0,2 1-5 0,2 0-18 0,2 4 0 16,2 0 1-16,0 3-3 0,2 2 0 0,0 1-1 0,2 3-4 0,1 0 5 15,1 3-2-15,1 1-9 0,-2 1-15 0,1 1-23 0,0 3-32 16,-1 0-36-16,0 2-44 0,2 0-48 0,0 3-50 0,0 1-66 0,-2 0-377 16</inkml:trace>
-  <inkml:trace contextRef="#ctx0" brushRef="#br0" timeOffset="-35242.14">21842 12077 671 0,'-5'-1'321'16,"1"0"-254"-16,-1 1-21 0,3 1-18 0,2 0-11 0,-1-1-4 0,1 0-11 16,0 0-2-16,0 1 6 0,0 0-6 0,0-1 4 0,-1 1-1 0,0 0 4 15,1 0-3-15,-1 0 5 0,0-1-1 0,0 0-7 0,0 1 8 16,0-1 2-16,0 0 0 0,0 0 6 0,0 0-1 0,0-2 4 0,0 1 9 15,0 0 7-15,-1 0 2 0,1 0 4 0,0 0 4 0,0 0 6 0,0-1 5 16,0 0 2-16,-1-1-1 0,1 1-2 0,1 0 1 0,-1-1 1 16,0 1 0-16,0 0-4 0,1 0-6 0,0-1-12 0,0 0-4 0,1 0-1 15,-1 0-4-15,1 0 5 0,-1 1-11 0,1 0 2 0,1 0-5 16,0 0-4-16,1 1-1 0,0 0-2 0,0 1-2 0,1 0-2 0,0 0-1 16,1 0-1-16,0 1-2 0,1 1 4 0,-1 0 1 0,0 1-2 0,-1 0-3 15,1 1 1-15,0 0 4 0,-1 1 3 0,1-1-1 0,0 2 1 16,-1 0-8-16,0 1-1 0,-1 0 2 0,1 1-2 0,-2-1-4 0,1 2-2 15,-2-1-1-15,0 1-6 0,-2 1 4 0,1 0-4 0,-1 1-4 0,-1 0 4 16,-1 0-1-16,0 0 3 0,-2 0-1 0,-2 1-1 0,0 0 7 16,-1 0 4-16,-2-1 4 0,0 2 7 0,-2-1 1 0,1-1 4 0,-1 0 4 15,2-2 6-15,0 1-3 0,1 0 7 0,2-1-5 0,1-2-6 16,0 0 3-16,3-2-13 0,1-1-3 0,2-1 1 0,0 0-9 0,2-1 7 16,-1-1-2-16,2 0-5 0,1 0 5 0,0 0-7 0,3-1 2 0,1 0 5 15,1-1-6-15,0 0-2 0,0 0 2 0,0 0-9 0,2-1-4 16,0 0-12-16,1-1-23 0,0 1-25 0,0-1-33 0,0-1-31 0,0 0-49 15,-1 0-72-15,1-2-84 0,-2 0-107 0,0-1-173 0</inkml:trace>
-  <inkml:trace contextRef="#ctx0" brushRef="#br0" timeOffset="-35042.14">22066 12197 2592 0,'-3'-2'150'15,"2"1"-81"-15,0-1-26 0,4 2-9 0,2-1-9 0,4 0-5 0,3 1-15 16,2 0 0-16,1 0-1 0,0 0-1 0,0 0 0 0,1 0-4 16,-2 0 1-16,1-1 0 0,-1 1-9 0,1-1 4 0,-1 0 0 0,0-1-7 15,0-1 7-15,-2 0-12 0,0-2-3 0,-2 0-17 0,2-1-14 16,0-1-11-16,0-1-16 0,0 0-12 0,-2 0-4 0,1-1-15 0,-1 1-8 16,0-2-24-16,0 0-39 0,1-2-49 0,-1 1-72 0,1-1-94 0,0 2-308 15</inkml:trace>
-  <inkml:trace contextRef="#ctx0" brushRef="#br0" timeOffset="-34742.13">22569 11929 1277 0,'-13'-4'826'0,"0"1"-764"0,-3-2-21 0,2 3-23 16,4 0-5-16,2 1-6 0,0 1-8 0,-1 1 1 0,2 0-2 0,-3 2 0 15,-1 0 3-15,-1 2 11 0,-2-1 1 0,1 2 7 0,0-1 4 16,1 2 1-16,0-1 1 0,1 0 9 0,0 1-12 0,2 0-5 0,0-1-5 15,2 0-12-15,1 0 9 0,2-1-13 0,1-1-4 0,2 0-8 0,0 1-7 16,1-1 7-16,1 0 0 0,1 2 7 0,1 0 7 0,1 0-1 16,1 0 10-16,1 0 2 0,1 0-5 0,2 0 3 0,0 0-7 0,1 1-1 15,1-1 3-15,0 1-6 0,-1 0 5 0,1-1 2 0,-1 0-4 16,1 0 3-16,0-1 2 0,-1-1-5 0,-1 1 2 0,-2 0-1 0,-1 0-4 16,-1 0 1-16,0 0-1 0,-1 1-4 0,-1-1 2 0,-1 0-7 0,-1 1 0 15,-1-1-8-15,-1 0-4 0,-1-1-3 0,-1 0-5 0,-1-1-5 16,0 1-19-16,-1-2-16 0,0 1-26 0,-1-2-18 0,-1 1-8 0,1-1-7 15,0 0 5-15,-1 0-5 0,1 0-14 0,0 0-18 0,1 1-33 0,2-2-41 16,1 1-236-16</inkml:trace>
-  <inkml:trace contextRef="#ctx0" brushRef="#br0" timeOffset="-34425.14">22666 12020 1125 0,'0'-2'425'0,"1"1"-317"0,2-1-50 0,1 1-21 0,1 0-5 15,1 1 0-15,1-1-16 0,1 1-1 0,1-1-9 0,-1 1 2 0,2 0 3 16,0 0-3-16,0 1 3 0,-1-1-4 0,-1-1-3 0,0 1 4 16,-2 0 1-16,1 0 7 0,-1 0 9 0,1-1-7 0,-1-1 13 0,-1 0-9 15,1-1 5-15,-2 0 3 0,0 1 0 0,0-2 2 0,0 1 6 0,0-1-3 16,-2-1-3-16,0 1-2 0,-1-1-7 0,0 1-8 0,0-1 0 16,-1 1 0-16,0 0-3 0,-1 0 5 0,-1 0-2 0,1 1 2 0,-1 0-2 15,-2 0-5-15,0 1-6 0,-1 0-4 0,-1 0 0 0,0 0 2 16,0 1-4-16,-1 1-6 0,0 1 5 0,-1 0 0 0,2 1 2 0,-2 0-1 15,0 1-4-15,-1 1 1 0,-1 1 1 0,1 1 4 0,-1-1-5 0,1 1 1 16,0 0 4-16,1 0-3 0,0 0 1 0,1 0-1 0,2-1 0 16,0-1 0-16,2 0-6 0,-1 0-14 0,2-1 3 0,1-1-19 0,1 0-9 15,2-1-2-15,-1-1-20 0,2 1 9 0,1 0-11 0,0 0-16 0,3-1-13 16,-1 0-31-16,2 0-18 0,1-1-22 0,0 0-23 0,1 0-21 16,1 0-28-16,0-2-171 0</inkml:trace>
-  <inkml:trace contextRef="#ctx0" brushRef="#br0" timeOffset="-33158.12">22663 10531 1869 0,'-8'-4'86'0,"-1"2"-8"0,-1 2 1 0,3 3-13 16,4 2-29-16,1 5-22 0,0 5-5 0,2 5 0 0,-1 4 4 0,0 6 4 15,-1 4-5-15,0 4-8 0,0 3 2 0,0 3-1 0,-1 5 2 0,0 1 8 16,1 2 4-16,-1 5 12 0,1 1 8 0,2 3 3 0,0 2-6 16,3 1-7-16,3 0-20 0,2 2 7 0,3 2-4 0,4-1-5 0,1 2 8 15,5 3-15-15,4 0-2 0,3 1-2 0,4-1-2 0,1-5-16 0,6-1 8 16,2-3-9-16,4-4-11 0,3-3-2 0,2-6-33 0,1-2-10 16,3-4-16-16,2-3-15 0,1-4-15 0,3-5-20 0,1-2-11 0,3-4-28 15,3-3-45-15,1-2-72 0,4-4-383 0</inkml:trace>
-  <inkml:trace contextRef="#ctx0" brushRef="#br0" timeOffset="-31924.12">26978 10227 2133 0,'-9'-9'296'0,"1"1"-233"0,-1 1 14 0,3 4-22 0,3 4-23 0,2 4-19 15,3 3-13-15,2 2 4 0,2 4 3 0,2 5 3 0,1 3 3 0,2 3 8 16,0 2-3-16,2 1 1 0,2 3 4 0,-1-3-3 0,0 2-3 16,2-2-7-16,0-3 1 0,2 0-2 0,0-3 1 0,1 0-4 0,2-1-7 15,0-1-6-15,2-2 2 0,1-2-12 0,-2-3-11 0,3 0-20 0,-2-4-30 16,2-1-13-16,-1-3-15 0,-2-3-19 0,0-2-25 0,-3-2-42 16,-2-2-62-16,0-2-74 0,0-3-99 0,0-4-284 0</inkml:trace>
-  <inkml:trace contextRef="#ctx0" brushRef="#br0" timeOffset="-31625.12">27488 10296 1612 0,'-3'0'682'0,"-1"2"-602"0,1 1-24 0,0 4-48 0,4 2-3 16,0 4-4-16,3 1 2 0,1 3 3 0,1 4-2 0,0 1 0 16,2 0 7-16,-1 3-2 0,1-2 5 0,1 1 2 0,-1 1 1 0,2-1 12 15,0 3 2-15,1 1 0 0,0 2-10 0,1 1-1 0,-1 1-8 16,2 0-3-16,0 1 3 0,-1 1-7 0,1 1 3 0,-1 0-2 0,0 1-6 15,-1 1-1-15,-1-2 1 0,-3 3 1 0,-1-2-2 0,0-1-3 0,-4-2 0 16,1-2-8-16,-3-1-2 0,0-2-11 0,-1-1-13 0,-2-1-3 16,0-3-4-16,-3 0-2 0,-3-1 7 0,-1-4-6 0,-2 0-1 0,-2-2 17 15,0-3 1-15,-3-1 16 0,-2-2 11 0,1-3-2 0,1-2 7 0,0-2 4 16,0-3 4-16,3-1-2 0,0-3-2 0,2-2 1 0,1-1-7 16,0-2 1-16,2-1-4 0,1 0 14 0,2-3 11 0,0-2 0 0,2 0 12 15,1-3-15-15,0 0-5 0,2-2 2 0,0 2-4 0,2-1-1 16,0 1-10-16,3-1-7 0,1 2-7 0,1 1-15 0,3 0-21 0,1 0-30 15,3 0-66-15,2 0-80 0,2-1-119 0,2 2-150 0,2-2-288 0</inkml:trace>
-  <inkml:trace contextRef="#ctx0" brushRef="#br0" timeOffset="-31442.11">28071 10791 2709 0,'1'-5'429'0,"2"2"-362"15,2 1-23-15,2 2-37 0,4 1-14 0,4 1-3 0,4 2-10 0,-1 1-22 16,2 0-16-16,0 2-24 0,-2-2-15 0,1 0-6 0,-1-1-9 16,-3-1 9-16,-2-2-5 0,0 0 6 0,-2 0 3 0,0-2-5 0,-1 0-2 15,-1-1-13-15,1-1-24 0,-1-2-49 0,1-1-52 0,-2-1-44 0,1-2-34 16,1-1-249-16</inkml:trace>
-  <inkml:trace contextRef="#ctx0" brushRef="#br0" timeOffset="-31242.12">28563 10537 2505 0,'-1'-1'154'0,"0"1"-58"16,1 1-43-16,2 2-22 0,0 1-1 0,1 3 2 0,0 1-7 0,1 3 4 15,1 2-7-15,0 2-11 0,1 3-5 0,-1 2-2 0,1 0 3 0,0 4 0 16,-1 0-4-16,1 1 2 0,0 3-1 0,0-1 4 0,-1 4 4 16,2 0-3-16,-1-2-1 0,1 0-9 0,-1-1 1 0,1 0-4 0,0-2 3 15,-1 1-1-15,0-3-9 0,-1-2-13 0,-1-1-15 0,1-5-20 0,-1 0-22 16,-1-2-23-16,1-2-11 0,-2-4-6 0,-1 2-27 0,-1-3-6 15,-2 0-18-15,-2-2-15 0,1-3-10 0,-1-2-36 0,-1-3-28 0,0-4-22 16,0-3-321-16</inkml:trace>
-  <inkml:trace contextRef="#ctx0" brushRef="#br0" timeOffset="-31008.12">28606 10598 1582 0,'-1'-22'339'16,"1"-2"-224"-16,2-3-16 0,1 3-31 0,1 5-6 0,1 3-6 0,1 2-6 15,1 1-9-15,1 2-7 0,2 2-6 0,1 0-3 0,1 2-7 16,1 0 3-16,0 2-2 0,2 1 0 0,3 1-3 0,2 1 0 0,0 1-2 15,1 2 4-15,1 1-2 0,-1 1 0 0,2 1 0 0,-1 3 0 0,1 0 10 16,-1 1-3-16,-1 1-1 0,-1 1-6 0,-1 0-4 0,-4 1-2 16,0 1 6-16,-2-1-11 0,-3 1-5 0,-1 1-10 0,-4-1-11 0,-2 2-1 15,-2-2-4-15,-4 2-2 0,-1 1-8 0,-4 0-11 0,-1 0 1 0,-3 2 0 16,-1-2-1-16,-1-1 13 0,-3-1-1 0,-3-2 6 0,0 0 9 16,-1-1-3-16,0-3 2 0,2-2-3 0,-1 0-9 0,0-3-14 0,3 0-33 15,1-1-40-15,2 0-48 0,0-2-36 0,3 0-23 0,-1-1-19 0,2 0 2 16,2 0-2-16,0 0-28 0,4-1-69 0</inkml:trace>
-  <inkml:trace contextRef="#ctx0" brushRef="#br0" timeOffset="-30758.12">28911 10654 504 0,'15'0'126'0,"0"0"-15"0,6 1-11 0,-3 1-4 0,0 1-6 0,-2 0-6 16,1 1 0-16,1 2-3 0,-2 0-2 0,2 1-7 0,-2 1-4 16,0 1-2-16,0 0-7 0,0-1 1 0,1 2-18 0,-1 0-7 0,-1 1-4 15,1 0-17-15,-1 0 4 0,-1-1-10 0,-4 0-2 0,0-1 5 0,-3-1-2 16,-1-1 3-16,-1-2 5 0,0-2 3 0,-1 0 5 0,-2-2 4 15,1-1 3-15,-3-2 0 0,0-1-8 0,0-1-7 0,-2-2-6 0,-2-2-2 16,1-4 5-16,-2-1 0 0,-1-2 6 0,2-2 5 0,-1 0 6 0,-1-1 2 16,1-1-3-16,0-1-6 0,0 1 0 0,0 0 6 0,1-1 0 15,1 0 6-15,2 0 0 0,-2 0 1 0,4 1-1 0,-2 0-7 0,1 0-5 16,0 0-8-16,-1 0-7 0,4 1-9 0,-1 0-3 0,2 3-1 16,1 2-8-16,-1 1 9 0,3 2-8 0,0 2 0 0,0 1 5 0,1 3-11 15,0-1-2-15,1 2-8 0,0 1-14 0,-1 0-14 0,2 1-19 0,-1 1-33 16,1 2-38-16,0 0-42 0,1 0-40 0,-1 3-34 0,2 0-29 15,0-1-24-15,0 3-236 0</inkml:trace>
-  <inkml:trace contextRef="#ctx0" brushRef="#br0" timeOffset="-30258.12">29624 10525 1528 0,'3'0'216'16,"1"0"-135"-16,1 0-46 0,1 1-19 0,1 0 3 0,2 1-3 0,-1-1 2 15,-1 0-4-15,2-1-4 0,-2-1 2 0,-1 0 0 0,0 0 2 0,-2-1 5 16,0-1-1-16,-1-1 2 0,0 0-1 0,-1 0 6 0,0-1-5 15,0-1 0-15,-1 0-4 0,0-1-2 0,0 0 5 0,-2-1 2 0,1 1 1 16,0 0-2-16,-2-1 6 0,1 1 1 0,-2 1 0 0,0 0-2 0,0 0-2 16,-2 1-12-16,0 0-5 0,-1 1-11 0,-2 3-4 0,0 0 2 15,-1 0-3-15,-1 1 4 0,0 2-4 0,-1-1 5 0,-1 3 1 0,1 1-1 16,1 0 4-16,0 1-5 0,0 1 1 0,1 0 1 0,0 2-5 16,1 1-5-16,1 0-1 0,1 1 0 0,1 0 3 0,1 0 4 0,1 1-4 15,1 0 3-15,1 0-4 0,2 0 2 0,0 1 6 0,2-1 2 0,1 0 3 16,1-1 1-16,-1 0 5 0,2 0-2 0,1 1 1 0,0-1-4 15,1-2-1-15,1 0 8 0,0-1 2 0,1-1 0 0,-2 0 3 0,2-2-1 16,0 0-4-16,0-2 7 0,-1 0-3 0,0-1 0 0,0-2 0 0,2 0-3 16,-1 0 7-16,0-2-5 0,-1 0 4 0,1-1 3 0,-1-1-6 15,0 1 5-15,1-1-1 0,0 0-1 0,1 0-1 0,0 0 2 0,-1 1 2 16,1 1 4-16,0 0 5 0,1 0 1 0,0 1 1 0,0 0-5 0,0 1 0 16,0 1-6-16,0-1-9 0,1 2 3 0,1 0-11 0,-1 0 4 15,1 1 0-15,0-1-5 0,0 0 0 0,0 1-2 0,2-1-4 0,-1 0 4 16,2-1 7-16,-2-1-6 0,1 0 5 0,0-1 1 0,0 0 7 15,-2-2 7-15,-1 0 3 0,-1-1-3 0,-2-1-9 0,-2 1 10 0,-1-1 1 16,-2 0 4-16,-2 1 6 0,0-2-6 0,-1 0-10 0,-1 0 0 0,-2 0-3 16,-2 0-9-16,0-1 1 0,-2 0-6 0,-1-1-1 0,-2 1 6 15,-2-1-5-15,0 0 7 0,-2 0-3 0,0 1-5 0,1 0 8 0,-1 0-9 16,0 3 3-16,0 0-3 0,0 2-2 0,1 2-3 0,-1 0-3 0,-1 1 0 16,1 0-3-16,0 1 0 0,3 0-7 0,0 1-16 0,-1 0-36 15,0-1-36-15,1 1-36 0,0-1-28 0,2-1-34 0,1 0-35 0,0-2-32 16,2 0-53-16,0-3-45 0,3-1-256 0</inkml:trace>
-  <inkml:trace contextRef="#ctx0" brushRef="#br0" timeOffset="-30075.12">30236 9977 3164 0,'6'-2'87'0,"-1"4"-13"0,3 4-38 0,1 4-25 16,2 7-1-16,-1 3-2 0,4 3-10 0,0 5-5 0,-1 2 8 0,1 2 1 15,-4 2 7-15,2 3 6 0,0-1-17 0,-1 0 2 0,-1-1 0 16,-2 0-3-16,1 1 1 0,0-4-7 0,-2-1-26 0,0-5-19 0,-1-1-37 16,-1-3-37-16,0-2-33 0,-3-2-30 0,0-2-19 0,-2-3-30 15,0-1-51-15,-1-3-61 0,-3-1-84 0,1-5-377 0</inkml:trace>
-  <inkml:trace contextRef="#ctx0" brushRef="#br0" timeOffset="-29872.12">30540 9464 2959 0,'26'-1'63'0,"5"5"9"16,15 9 30-16,5 11-24 0,7 12-15 0,8 7-7 0,5 6-23 0,0 5-14 16,1 5-10-16,-3 1-2 0,-2 2-3 0,-2 0 5 0,-5 1 6 15,-2 0 11-15,-4-1 0 0,-3 0 5 0,-4-2-6 0,-4-1-8 0,-6 1-4 16,-2-2-11-16,-5-2-8 0,-3-1-24 0,-8-4-28 0,-5-4-43 0,-4-2-82 15,-7-3-63-15,-4-2-66 0,-6-1-78 0,-6-1-73 0,-6-2-71 16,-8-4-353-16</inkml:trace>
-  <inkml:trace contextRef="#ctx0" brushRef="#br0" timeOffset="-28975.61">20442 14120 1704 0,'-2'-4'121'0,"1"-1"-21"0,0 1 10 16,3 1-16-16,1 0-30 0,2 1-11 0,2 0-5 0,0 0 0 0,3 3 2 16,1-1 4-16,1 3-1 0,1 1 0 0,2 0-9 0,1 3-2 15,3 1-5-15,1 2-9 0,0 1 1 0,1 3-8 0,1 2 2 0,-1 2 0 16,2 1 5-16,-1 1-3 0,1 0-3 0,0-1-3 0,-2 0-11 0,-1 0 2 16,0-1-5-16,-2 0-1 0,0 0 4 0,-2-1-1 0,0-1-7 15,-3 1 10-15,-1-1-3 0,-1-3 3 0,-1-1 2 0,-1 0-5 0,-3-2 6 16,-1-2-1-16,-1-2 11 0,0-1 4 0,-1-2 3 0,-1-1 5 0,0 0-2 15,-1-2 7-15,0-1-8 0,0 0-3 0,0-1-1 0,0-2-6 16,0-1 5-16,0-1 2 0,-1-3-8 0,-1-1-4 0,0-1-4 0,0-1-4 16,0-2 4-16,-1-2-4 0,1 0-2 0,-1 0-5 0,1 0 2 15,1 1-1-15,2 3 5 0,0 1-8 0,2 2-4 0,1 1-2 0,0 2-1 16,1 1 2-16,1 2-1 0,0 1 1 0,0 1-12 0,1 2 19 0,0 1-6 16,0 1 4-16,1 1-3 0,0 1-8 0,1 1 5 0,-1 1 1 15,-1-1 1-15,1 1-1 0,-1 0-4 0,0-1-2 0,0 0 3 0,-2-1-4 16,0 0 1-16,0-1 6 0,-1-1-4 0,-1 0 7 0,0-1 0 0,0-1 0 15,-1 0 9-15,1-1-8 0,-1-1 1 0,0-1 1 0,1-1-1 16,0 0 2-16,-1-1-4 0,1 0-3 0,0-1 7 0,-1-1-2 0,1 0 0 16,-1 0 2-16,0-1-4 0,-1-1 5 0,1 1 1 0,-1-1-4 15,0 0-2-15,2 0 6 0,-1 1-6 0,0 0-2 0,1 2 3 0,1 1-5 16,-1 0 8-16,1 1 2 0,0 2 1 0,0-1-5 0,0 2-2 0,0 0-1 16,1 1 1-16,-1 1 2 0,1 0 0 0,0 2-2 0,2 0-5 15,-1 1 5-15,0 1-2 0,1 0-8 0,-2 0 5 0,0 1-24 0,-1 0-15 16,-1-1-14-16,0 0-32 0,1-2-14 0,0 0-20 0,-1-1-13 0,1-1-5 15,-1 0 0-15,0-1-2 0,1-2-11 0,0 0-23 0,1-2-40 16,0 0-52-16,1-1-63 0,1-2-33 0,0-3-169 0</inkml:trace>
-  <inkml:trace contextRef="#ctx0" brushRef="#br0" timeOffset="-28721.61">21548 14029 1444 0,'-3'-4'238'0,"0"1"-90"15,0-1-21-15,-1 1-31 0,2 2-24 0,0 0-26 0,-1 1-18 0,2 1-12 16,-2 0-6-16,0 1-2 0,1 1-7 0,-2 0 5 0,1 3-3 0,0 0-5 15,-1 2 2-15,1 1 0 0,-1 0 5 0,2 1 5 0,-1-1 1 16,0 1 4-16,0 1 1 0,1-1 2 0,0 0-4 0,2 1-5 0,1-2-3 16,1 1-3-16,1-1 3 0,2 1-2 0,0-1 1 0,2 0 3 15,2-1-4-15,2-1 2 0,-1 1 3 0,2 0 1 0,0-1 0 0,2-1 0 16,2 0 0-16,0 1-4 0,0-1 1 0,0 0-3 0,-1 0-2 0,-1 0 6 16,-1-1 1-16,0-1 3 0,-1 0 2 0,0 0-1 0,-3 0 1 15,-1 0 2-15,-1 0-2 0,-4-1-2 0,1 0-12 0,-2 1 0 0,-1-1-7 16,-1 1-1-16,0-1-7 0,-2 1-10 0,0 1-7 0,-1 0-9 0,-1 1 0 15,-3 0-6-15,-1 0-7 0,-2 0-6 0,-1 1-6 0,-2-1-10 16,2 0-19-16,-2-1-22 0,0-1-29 0,1 1-19 0,-1-2-8 0,3 1-18 16,0 0-16-16,2-1-22 0,2-1-21 0,2-1-149 0</inkml:trace>
-  <inkml:trace contextRef="#ctx0" brushRef="#br0" timeOffset="-28442.1">21657 14355 534 0,'3'-2'211'0,"2"0"-46"15,0-1-13-15,0 1-22 0,-1-1-18 0,0 0-17 0,2 0-13 0,0-1-3 16,0 1-5-16,1-1-7 0,1-1-3 0,-1 0-11 0,2-1-6 0,-1-2-5 15,0 1-6-15,3-1 1 0,0 1-9 0,0-1-3 0,0-1 2 16,0 1-8-16,1-2 5 0,-1 0-2 0,0 0-5 0,0-1 2 0,0-1-8 16,-3 1 0-16,1 0 3 0,-1 0-5 0,-1 0 1 0,-1 1-1 0,-2 0-3 15,-1 0 4-15,-1 1 5 0,-2 0 2 0,0 0 1 0,-1 0 6 16,-1 2 1-16,-1-1 4 0,-2 1 3 0,-1 1 3 0,0 0 7 0,0 1 2 16,-2 2 0-16,2 0 7 0,-3 2 1 0,0 1-7 0,1 0-6 0,-1 2-1 15,1 0-10-15,1 1-1 0,0 1-1 0,1 1-7 0,0 0-7 16,0 2 8-16,1-1-12 0,1 2-2 0,0 0 2 0,1 2-11 0,1 1 6 15,1 1-1-15,1 0-9 0,0 1 4 0,2 2 1 0,2-1-5 16,2 1 4-16,1 1-1 0,1 0-1 0,1 0-3 0,1-2-2 0,2 0-4 16,0-2-9-16,0 0-16 0,1-1-33 0,0-2-37 0,2-2-40 0,0 1-37 15,0-2-43-15,1-1-64 0,1-1-119 0,1-2-497 0</inkml:trace>
-  <inkml:trace contextRef="#ctx0" brushRef="#br0" timeOffset="-28275.1">22228 14180 3032 0,'1'2'103'15,"1"0"-30"-15,2 0-16 0,3 1-12 0,2 0-5 0,1-1-24 16,3 0-14-16,1 1 3 0,-1-1-1 0,3 0 1 0,0 0-6 0,-1-1-12 16,-1 0-14-16,0-1-20 0,-1-2-24 0,1 1-21 0,-1-2-17 0,0 0-25 15,0 0-34-15,-2-1-39 0,-1 0-62 0,0-1-79 0,-2 1-103 16,1 0-230-16,0 1 75 0</inkml:trace>
-  <inkml:trace contextRef="#ctx0" brushRef="#br0" timeOffset="-28125.1">22483 14371 2486 0,'0'2'163'0,"2"0"-36"16,3 1-46-16,1-2-17 0,2 0-8 0,0 0-23 0,2-1-21 0,1 0-7 15,1-1-8-15,2 0 1 0,-2 1-8 0,1-3-21 0,-1 0-32 16,1-1-42-16,-1 0-49 0,1 0-41 0,-2-1-47 0,0 0-70 0,-1-2-109 15,-1-1-244-15,-1-1 26 0</inkml:trace>
-  <inkml:trace contextRef="#ctx0" brushRef="#br0" timeOffset="-27775.1">22860 14067 3314 0,'-1'1'92'0,"0"1"-42"0,1 2-34 15,2-1-14-15,2 1-11 0,3 1 1 0,4 1-6 0,2 2 6 16,0 2-1-16,3 2-2 0,-1 0 11 0,-1 0-3 0,-2 0 1 0,1 0 2 16,-1 0 0-16,1-2-9 0,-1 0 11 0,-2 0-2 0,1-1-4 0,0-1 2 15,-2-2-7-15,0-1 0 0,-1-2 0 0,-2 0-6 0,-1-2-1 16,-2 0 2-16,-1-1 6 0,-1 0 12 0,-3-1 7 0,1-2 1 0,-2-1-13 15,-2-4-8-15,-4-2-11 0,-4-3-16 0,-2-2 6 0,-3-2-2 16,0-1 16-16,-2 1 14 0,1 1 4 0,2 0 15 0,-1 2 8 0,2-2 2 16,0 1 2-16,1-2-8 0,0 0-5 0,1 1-8 0,2-1-10 0,3-1-9 15,0-1-7-15,2 3-11 0,1 0 8 0,3 1-2 0,1 2-6 16,3 3 6-16,2-1-17 0,1 2-6 0,1 2 0 0,2 0-4 0,1 2-3 16,1 1-11-16,1 0-26 0,3 2-25 0,1 2-35 0,0 0-32 0,1 2-54 15,1 1-86-15,0 1-122 0,2 1-463 0</inkml:trace>
-  <inkml:trace contextRef="#ctx0" brushRef="#br0" timeOffset="-26458.1">22824 13899 2060 0,'-5'-3'332'0,"-1"0"-183"0,1 1-15 16,2 1-38-16,1 1-18 0,3-1-24 0,-1 1-24 0,1 0-8 0,1 0 5 15,0 2 8-15,2-1 9 0,-1 4 2 0,2 1-4 0,0 1-25 0,2 2-1 16,1 2 3-16,2 2-1 0,3 1 16 0,0 2 0 0,2 2-11 16,-1 1-5-16,2-1 0 0,0 0 0 0,1 1-1 0,-1-2 1 0,1 0-2 15,1 0-7-15,-2-1-1 0,2-1-3 0,0 0-5 0,-1-1 6 0,-3-1 3 16,0-2-2-16,-1 0 1 0,-3-1-3 0,0-1 4 0,-3-1 12 16,-1-2-1-16,-1-1 2 0,-1-1 4 0,-2-2-5 0,0 0 2 0,-1-2-3 15,0 0-7-15,-1 0-1 0,0 0-3 0,0-1-3 0,-1-2 1 16,1-1-7-16,-2-1 4 0,0-2-4 0,-1-2-4 0,-1-2 6 0,0-2-2 15,1 0 0-15,0-2 2 0,0-1-4 0,-1-1 0 0,2 0 8 0,-1-1-8 16,0-1 4-16,2 1 2 0,1-1-10 0,2 1 8 0,0 3-9 16,2 2-1-16,0 1 10 0,2 3-4 0,-1 1 2 0,1 2-2 0,1 2 0 15,0 1 4-15,0 2 8 0,-1 1-10 0,1 2 0 0,1 2-4 0,0 2 4 16,2 1-2-16,-1 2 2 0,1 1-6 0,0 0 1 0,0 1 1 16,0-1-2-16,-2 1 10 0,2-1-2 0,-2-1 2 0,2 0-4 0,1-1 0 15,-1-1 1-15,0-1-6 0,0 0 5 0,-1-2-8 0,-1 1 6 16,0-2 4-16,-2-1-7 0,-1 0 6 0,0-2-2 0,-1 0 2 0,-1 0 11 15,0-1-8-15,0 0 1 0,-1-1-5 0,0 0 4 0,0-1-10 0,1 0 8 16,-1-1 0-16,1-2 0 0,-2 1 2 0,0-2-10 0,0 1 12 16,1-1-12-16,-1-1 8 0,1 0 2 0,-2 0-10 0,1 0 12 0,0 0-2 15,0 2 1-15,1 0-3 0,0 3-2 0,0 0 2 0,1 1-4 0,0 1 2 16,0 0 4-16,-1 2-2 0,1 0-2 0,0 1 4 0,-1 1-4 16,1-1 0-16,1 3 2 0,0 1-2 0,1 0-6 0,0 1 6 0,0 1 2 15,0 1 0-15,0 0-2 0,0 0 2 0,1-2-4 0,1 1 0 16,0-2 2-16,0 0-6 0,1-1 8 0,0 0-2 0,-1-2 0 0,1 0 8 15,1-2-10-15,-1 0 0 0,0 0 2 0,-1-2-4 0,1 0 4 0,0 0 0 16,0 0-10-16,-2-1 7 0,1 0-9 0,-1-1 1 0,1-1 5 16,-1 0-5-16,1-1 5 0,-1-2 1 0,1 0-1 0,0 0-1 0,-1 0-5 15,1-1 1-15,-1-1 0 0,0 0-2 0,0 1 5 0,-2-1-10 0,1 0 3 16,-1 0 0-16,-1-1 2 0,-1-1 6 0,0 1-3 0,-2-1 3 16,0 1 0-16,-1 1-17 0,-2-1 2 0,0 1 11 0,-1 1 2 0,-1 0 20 15,1 1-2-15,-2-1-9 0,0 2-4 0,0 0 4 0,-1 0-2 16,0 2-1-16,0 0 6 0,-1 2-1 0,1-1-2 0,1 2 2 0,-1 1 0 15,0 0 0-15,-1 1 1 0,1 1-3 0,1 0 0 0,-1 1-3 0,1 0 3 16,-1 1-4-16,2 1-2 0,0 0 6 0,1-1-1 0,1 2-1 16,1 0-5-16,0 0-12 0,1 0-1 0,0-1 4 0,0 1-4 0,1 1 31 15,1 0-4-15,1 1 4 0,0-2 2 0,1 1-17 0,0-1 6 0,0 0 2 16,1 0-1-16,-1 0-1 0,1-1 0 0,1-1 5 0,0 0-1 16,-1-1-1-16,1 1 2 0,-1-1-1 0,1 0 5 0,-1-2 0 0,0 1-6 15,0-1 1-15,0 1 1 0,0-1-1 0,0-1 1 0,0 1-9 16,-1-2 2-16,0 1 2 0,1-1-8 0,-1 0 5 0,0 0 1 0,-1 0-8 15,0-1 5-15,1 2-5 0,0-1-3 0,-1 0 9 0,0-1-3 0,-1 1-2 16,0-1-4-16,1 1-6 0,-1 0-10 0,0 1-18 0,-1 0-25 16,1-1-39-16,-1 1-45 0,0 0-70 0,0 0-101 0,0-1-126 0,1 0-158 15,0-1-339-15</inkml:trace>
-  <inkml:trace contextRef="#ctx0" brushRef="#br0" timeOffset="-25025.05">23675 13897 875 0,'-2'0'188'16,"0"1"-90"-16,1-1-31 0,0 0-13 0,0 0-6 0,1-1-13 0,-1 1-6 16,2 0 1-16,-1 0-4 0,-1 0 18 0,1 0-4 0,-1 0 3 0,1 2 4 15,-1-1-7-15,1 0 3 0,-1 0-7 0,0 1 3 0,0 0-8 16,0 0 2-16,1 2 4 0,-2 0 1 0,1 1 3 0,0 0 0 0,0 0-6 15,1 1-7-15,0 0-8 0,0-1-4 0,1 1-3 0,1 1 0 0,0 1 1 16,1 0 5-16,1 0 0 0,0 0 1 0,1-1 1 0,1 2-2 16,0-2 3-16,0 2 7 0,2 0 1 0,0 0 4 0,0 1 9 0,1 0 2 15,0-1 4-15,-1-1 1 0,0-1 1 0,0 1-8 0,0 0-6 16,0-1 1-16,-1 1-7 0,-2-1 0 0,1 0 0 0,-3-1-1 0,0 0 0 16,-1 0 4-16,-2-1-6 0,-1 1-2 0,-1 0-2 0,-1-1-7 0,-1 0 2 15,0 0-13-15,-3-1-4 0,0 0 2 0,-1 0-4 0,1-1 1 16,-1 1 1-16,0-1 3 0,0 0 0 0,-2-2 2 0,2 0 0 0,-1-1-7 15,1 0 5-15,1-2-5 0,0 1-5 0,0-1 7 0,1 0-6 0,1 1-3 16,1-2-5-16,1 1-1 0,1 0-4 0,0 0-1 0,0-1 5 16,2 1-11-16,0-1 0 0,1 0 1 0,0 0-8 0,0 0 0 0,2-1-1 15,0 0-2-15,1-1 7 0,2 1 0 0,-1-1-1 0,2 0 9 16,0 0-4-16,1 0 12 0,1 0 3 0,1 0 0 0,-1-1 1 0,2 1 3 16,-1-1 0-16,-1 0 3 0,2 0 4 0,0 0 0 0,0 1 0 0,1-1 1 15,-1 0 2-15,0 1-1 0,1-1 4 0,-1-1 3 0,0 1-8 16,0-1 3-16,-1 0-4 0,0 1-3 0,0 0 0 0,-2 0 5 0,-1 1-2 15,1 0 0-15,-2 0-3 0,0 1 0 0,-1 0 2 0,-1 0 3 0,-1 1-2 16,0 0 0-16,0 1 2 0,-1 0-2 0,1 0 2 0,-2 0-1 16,1 1-3-16,-2 0 4 0,1 1-5 0,-1 0-2 0,1-1 2 0,-1 1-3 15,0 1 2-15,0-1-3 0,0 1-12 0,-1 0 3 0,1 0-6 16,0 0-16-16,-1 0-10 0,1 0-15 0,0 0-19 0,0 0-16 0,-1 0-23 16,1 0-25-16,-1 0-23 0,1-1-21 0,-1 1-30 0,0 1-34 0,0-2-37 15,-1 0-38-15,-1 1-161 0</inkml:trace>
-  <inkml:trace contextRef="#ctx0" brushRef="#br0" timeOffset="-24058.13">23626 14104 2012 0,'-2'0'255'16,"0"1"-96"-16,0 0-38 0,2 0-32 0,1-2-18 0,2 2-22 0,1-2-26 15,1 0-3-15,2 1-5 0,1-1 5 0,0-1 2 0,0 1-14 16,2-2 4-16,-1 0-5 0,1-1-2 0,2-1 3 0,-1 0 0 0,2-1 1 15,-1 0 3-15,-1-2 1 0,0 1-3 0,1-2 1 0,-1 0-6 0,0 0-2 16,-2-2 0-16,-1 2-1 0,-1-2-5 0,0 0 1 0,-1-1 4 16,-1 2-1-16,-2-1-4 0,0 0 5 0,-2 1 6 0,0-1-3 0,-2 1 18 15,0-1-13-15,-2 0-3 0,0 0 1 0,-1 1-1 0,-1-1 11 16,-1 2-8-16,0 1 4 0,1 1-9 0,-1 3-2 0,-1-1 4 0,0 1 4 16,0 1-4-16,1 1-5 0,-1 2-1 0,1 0-2 0,0 2 4 0,0 0 2 15,1 2-5-15,-1 0 2 0,0 1-4 0,0 2 1 0,1 1-1 16,-1 2 4-16,0 2-4 0,1 1-2 0,1 1 3 0,1 2-15 0,0 1 23 15,2 0-5-15,-1 1-4 0,2 3 14 0,1 0-14 0,0-1 6 0,2 0-1 16,0 0-4-16,2-4 2 0,1 1-2 0,1-2 2 0,1-2-6 16,0-1-2-16,2 0-2 0,0-1 2 0,2-1 2 0,2-1-3 0,-1-2 4 15,0-1-3-15,0-3 4 0,0 1 4 0,0-2-2 0,0-1 8 16,-1-1 0-16,0-2-4 0,0-2 7 0,0 0-1 0,-1-1-4 0,-1-1 2 16,-1-1-7-16,0 0 4 0,0-1-2 0,-1 0-2 0,0-1 0 0,-1 1-2 15,1 0-2-15,-2-1 3 0,0 1-6 0,0 0 3 0,0 1 4 16,-1 1 0-16,0-1 0 0,-1 2-3 0,0 1 1 0,0 0 2 0,0 2 0 15,-1 1 3-15,1 0-1 0,-1 1 3 0,1 1-3 0,0 0 2 0,-1 0-3 16,1 1-2-16,1 0 4 0,1 0-1 0,-1 0 0 0,2 0 5 16,0 1-6-16,0-2 1 0,0 1-7 0,1-2 1 0,-1-1 8 0,2 0-1 15,0-1 1-15,0 1-2 0,0-2-1 0,-1 0 5 0,-1-2-1 16,-1 0 0-16,0-1 2 0,0-1-2 0,0 1 8 0,-2-1-5 0,0 0-6 16,0 0 9-16,-2 1-11 0,0-1 3 0,0-1 10 0,0 1-8 0,-1-1 9 15,-1 0-5-15,0 0-7 0,-2 1 2 0,1 0-1 0,-2 1-12 16,-2-2-5-16,0 0 10 0,-1 0-4 0,-1 1 16 0,-1 0 0 0,-1 0-19 15,-1 0 0-15,-1 0-6 0,-1 2-3 0,1 1 4 0,0 1 2 0,1 1 2 16,0 1 5-16,0 2-2 0,1 0-8 0,0 2 8 0,0 0-10 16,2 2 2-16,-1-1 5 0,0 3-9 0,1 1 2 0,0 1-10 0,0 0-8 15,0 0 22-15,1 2-1 0,0-1 8 0,2 2 1 0,-1 0-16 0,2 0-6 16,1-1-4-16,1-2-10 0,0-1-14 0,2-1-15 0,1 0-5 16,1-1 0-16,0-1 11 0,1-1 8 0,1-1 13 0,1-1 18 0,1 0 7 15,0-1 13-15,0-1 2 0,0-2 5 0,0 1 3 0,1-1 6 16,0 0 6-16,2 0-3 0,-1 0 3 0,1-1-3 0,0 1 2 0,-1 0 5 15,1 1 1-15,-1-1 6 0,2 1-5 0,1 0 3 0,0 0-1 0,0 1-5 16,-2 0 0-16,2 0-9 0,-1 1-4 0,0-1 1 0,0 1 2 16,0 1-4-16,-1 0-2 0,1 0 1 0,1-1-3 0,-1 0 2 0,0 1 1 15,0-1 0-15,1 0-1 0,2-1-2 0,0 0 4 0,-1 0 1 0,0-2 1 16,0 1 4-16,1-1-2 0,0-2 6 0,0 1 4 0,0-2 7 16,0 0-5-16,-2-1 7 0,0-1-3 0,-1 1-2 0,0-2-1 0,1-1-6 15,-1 0 6-15,1 0-3 0,-2-1 0 0,-1 0-13 0,0 1 0 16,-1-1 14-16,-1 0-6 0,-1 1 14 0,-1 0 0 0,-1-2-15 0,-1 3 5 15,0-2-5-15,-2 0-2 0,0 2 2 0,-1-2-4 0,-1 2 1 0,-1 1-2 16,-1 1 5-16,-1 0 3 0,-1 2 4 0,1-1 2 0,-1 3-6 16,0-1 6-16,0 1-1 0,0 1-6 0,-1 1 3 0,1 1-1 0,1 0 0 15,0 0 0-15,1 1-2 0,1 0-9 0,0 0 1 0,1 1-6 0,0 0-2 16,2 0 0-16,0 1 0 0,1 0 2 0,1 1-5 0,1 2 0 16,0 0 1-16,3 1 0 0,0 0 1 0,1 2 5 0,1 0-2 0,0-1 5 15,0 2 2-15,0-2-12 0,0 0-1 0,0-1 15 0,1 1 0 16,-1 0 13-16,0 0-5 0,-2 0-22 0,0-1 7 0,-2 0-8 0,1 0 8 15,-1 0 4-15,-1-1-10 0,-1 0 6 0,-1-2-11 0,-2 1 5 0,0 1-1 16,-2-1-16-16,-2-1-2 0,0 1-20 0,-1-2-4 0,-2 1 7 16,0-1-12-16,-1 0-1 0,-2 0-11 0,-1-2-8 0,0 0 4 0,-1-1-2 15,3-1-15-15,-1 0-19 0,1 0-18 0,1-1-30 0,0 0-21 0,1 0-40 16,1 0-29-16,1 0-32 0,2 1-26 0,1 0-14 0,1-1-213 16</inkml:trace>
-  <inkml:trace contextRef="#ctx0" brushRef="#br0" timeOffset="-23741.13">24931 14033 2903 0,'6'-1'191'16,"1"0"-85"-16,4-1-62 0,3 1-28 0,1-2 0 0,3 0-11 16,2-1-12-16,1 1 0 0,2 1-2 0,-1 0-16 0,-2-1 0 0,1 1-8 15,-2-2-20-15,-2 1-8 0,1-1-21 0,-1-1-14 0,-1 0 6 0,-1-1 1 16,0 0 2-16,0-1-13 0,-1 0-40 0,-1-1-41 0,1-1-54 15,-2 0-51-15,1 0-68 0,-1 0-91 0,1-2-196 0</inkml:trace>
-  <inkml:trace contextRef="#ctx0" brushRef="#br0" timeOffset="-23458.13">25562 13690 2527 0,'0'-1'269'16,"1"2"-149"-16,0-1-72 0,2 2-43 0,0-2-4 0,3 1-2 0,1 1-3 15,0 0-4-15,1 1 4 0,0 0 11 0,-1 0 5 0,-1 0 7 0,0 0 0 16,1 0-4-16,-2 1-4 0,0 0-3 0,-2-2-3 0,2 1-5 15,-1-1-1-15,-1-1 1 0,1 0-6 0,-1 0-9 0,-1 0-16 0,0-1-23 16,0-1-5-16,0 1-10 0,-1-1-7 0,0 1-8 0,-1-1-20 16,0 0-10-16,1 0-22 0,-1-1-32 0,0 0-44 0,1 0-67 0,-1 0-64 15,0-1-60-15,0 0-245 0</inkml:trace>
-  <inkml:trace contextRef="#ctx0" brushRef="#br0" timeOffset="-23325.13">25794 13793 1947 0,'-1'1'223'0,"2"2"-119"0,-1-1-68 16,1 0-37-16,0-1-13 0,1-1-17 0,-1 0-25 0,1-1-23 16,0 0-18-16,1-1-13 0,-1 1-10 0,0-1-13 0,1 1-33 0,-1-1-38 15,1 0-41-15,0-2-32 0,1 1-12 0,-1-1-99 0</inkml:trace>
-  <inkml:trace contextRef="#ctx0" brushRef="#br0" timeOffset="-23191.13">26001 13742 1115 0,'9'0'291'0,"2"0"-71"0,3 1-44 0,2-1-31 15,-2 0-27-15,0 1-24 0,0-1-25 0,0 0-27 0,-1 0-24 0,-1-2-12 16,1 2-9-16,-2-1-9 0,1 0-12 0,-2 1-20 0,-1-1-13 0,-1 1-8 16,0 0 0-16,0-1-4 0,0 1-9 0,-1-1-18 0,1-1-19 15,-1 0-20-15,0-1-29 0,-1-1-49 0,1 0-98 0,0-2-289 0</inkml:trace>
-  <inkml:trace contextRef="#ctx0" brushRef="#br0" timeOffset="-22691.13">26591 12329 2509 0,'-2'-5'29'0,"0"3"4"0,0 2-19 16,1 5-11-16,2 5-7 0,1 6-6 0,1 4-4 0,1 7 3 0,2 6 1 16,1 6 2-16,1 6 8 0,0 6-3 0,4 4 19 0,0 4 1 15,2 3 12-15,2 4 8 0,0 2-12 0,3 2 8 0,1 1-1 0,0 0 9 16,1 0 14-16,2 2-4 0,0 0-6 0,3-1-1 0,0-1-13 15,3-1-3-15,0-3-3 0,1-1-7 0,1-2-6 0,0-6 2 0,-1-4-16 16,1-6 7-16,-1-6-5 0,0-4-14 0,-1-4-10 0,0-4-43 16,1-3-48-16,1-3-51 0,0-4-49 0,1-3-65 0,-4-3-95 0,1-4-192 15,-3-6-307-15</inkml:trace>
-  <inkml:trace contextRef="#ctx0" brushRef="#br0" timeOffset="-21991.13">23216 12011 1173 0,'-26'-10'304'0,"-3"0"-191"16,-4-4 11-16,5 1-9 0,8-1-30 0,3 1-26 0,2-2-14 0,3-1-10 15,4 0 4-15,1 1 7 0,2-2 2 0,2 1 12 0,2 2 7 0,1 1 3 16,3 1 5-16,2-1-2 0,2 0-6 0,3-1 4 0,4 1-10 16,3-3 2-16,3-1-12 0,4 0-7 0,5-1-16 0,2 0-16 0,3 0-7 15,4 2-3-15,2-1 6 0,3 2-3 0,2 0 2 0,2 1-2 0,1 0-1 16,1 1 4-16,0 1 2 0,-1 2-8 0,-1 1-2 0,2 3 5 16,0 1-6-16,3 1 7 0,0 2 8 0,1 2-7 0,0 0 14 0,4 0-1 15,4 2 3-15,4 0-2 0,5 2-6 0,5 2 1 0,4 0-5 16,8 2-1-16,6 0-1 0,7 0-6 0,4 1 3 0,7 1-5 0,6 1 8 15,6 3-7-15,6 4-2 0,3 3-4 0,4 3-10 0,1 3 16 0,-1 0-2 16,2 1 2-16,-4-1 5 0,-4-3 0 0,-4-1-2 0,-10-3 13 16,-5-3 19-16,-9 0 13 0,-7-3 24 0,-8-1 5 0,-6 1 15 0,-5-2-6 15,-5 0-16-15,-7 0-6 0,-3-3-23 0,-4 1-5 0,-5 0-14 0,-3-1-1 16,-5-1-3-16,-5 0-13 0,-2-2 3 0,-5 0 0 16,-3-1-10-16,-4 0 0 0,-2-1 2 0,-5-1-26 0,-3-1 11 0,-5 0 3 0,-2-1-4 15,-3 1 10-15,-3-1 1 0,-1 0-9 0,-1 0 0 0,-1-1 5 16,0 1-13-16,-1 0 1 0,0 0-12 0,1-1-21 0,-2 1-23 0,0 0-32 15,-1 0-35-15,-1-1-27 0,-2 0-49 0,-1 1-60 0,-3-1-70 0,0 1-103 16,-3 1-114-16,-2 0-368 0</inkml:trace>
-  <inkml:trace contextRef="#ctx0" brushRef="#br0" timeOffset="-21656.13">27115 12340 3552 0,'-3'-7'62'0,"2"1"-8"0,0-1-48 0,3 1-21 0,1 1-6 15,2-1-3-15,4 2 12 0,1-1 3 0,1 2-4 0,1 0 5 0,-2 2-1 16,0 1 7-16,-2 0 8 0,0 1-4 0,-1 1 7 0,-1 1-9 16,0 2 2-16,-1 0 3 0,1 1-6 0,-2 3 6 0,2 2-14 0,1 3 1 15,1 2 6-15,1 3-5 0,-1 5 7 0,2 2-2 0,0 5-13 16,-1 2 6-16,-1 4-2 0,0 0 5 0,-2 2 10 0,0-2-4 0,-2 0-2 15,1-1 4-15,1-1 0 0,-1-3 5 0,1-2-5 0,0-3 4 0,1-2 5 16,1-1-6-16,1-2 10 0,0 0-5 0,1-2 7 0,0-3 16 16,-1-4 3-16,2-3 12 0,-1-2-6 0,0-4-4 0,0-1-5 0,0-2-12 15,0-3 5-15,2-1-11 0,1-2 3 0,0-2-9 0,2-2-14 0,3-2 3 16,5-4-4-16,-2-3-4 0,1-1-2 0,1 0-19 0,-3 0-2 16,2 0-17-16,-3 3-26 0,0 0-28 0,-1 1-37 0,-1 2-38 0,1 2-41 15,-3 0-40-15,-1 3-54 0,0 1-61 0,0 2-121 0,-1 3-543 16</inkml:trace>
-  <inkml:trace contextRef="#ctx0" brushRef="#br0" timeOffset="-20858.13">28159 12585 2925 0,'-6'-4'142'0,"1"2"-46"15,1 1-17-15,-1 3-23 0,2 3-20 0,0 1-24 0,2 4-12 0,1 2-11 16,0 4-1-16,2 5 5 0,1 2 8 0,1 5 10 0,0 1 7 16,3 2-7-16,0 0-2 0,1-3 4 0,0 0 1 0,3-3 6 0,0-1 1 15,1-1-9-15,2-3 5 0,1-1-10 0,2-3 6 0,1-4-2 0,2 1-3 16,3-3-1-16,-1-2-9 0,2-1-3 0,1-3 3 0,-2-2-7 15,0-3-8-15,-2-3-7 0,-1-1-9 0,0-3 2 0,-3-1-7 0,0-2-11 16,-1-1-11-16,-2-1-9 0,-1-3-10 0,0-2 5 0,-2 0-8 16,-1 1-7-16,-3-1 6 0,-2 1 10 0,-1 2 16 0,-2-1 17 0,-1 1 15 15,-2 0 14-15,-1 1 9 0,-2-1 10 0,0 2 11 0,-1 0 2 0,1 3 6 16,0 2 0-16,0 1-3 0,1 2 2 0,0 2-1 0,0 1 1 16,1 3 0-16,0 1-2 0,0 1-3 0,0 1 4 0,1 1-5 0,-1 0 2 15,1 5-3-15,1 2-6 0,0 2-1 0,2 3-7 0,1 1 3 16,1 3-1-16,1 3 2 0,1 1 1 0,1 5-7 0,0 1 1 0,1 1-6 15,0 2 4-15,1 1 3 0,1 0 2 0,0 1 3 0,0 1 4 0,0 0 3 16,0 0-10-16,-1-1 12 0,1-2 0 0,-2 0-5 0,0-2 7 16,0 1-16-16,-2-3-1 0,-1 0-3 0,-1-1 1 0,-2-1 0 0,-2-1-4 15,-1 0 2-15,-1-3-3 0,-1-3 1 0,-2-2 2 0,1-4 0 0,-2-3 2 16,-1 0-2-16,0-4 0 0,-1 0-2 0,0-2-2 0,-1-2 6 16,-1-1-2-16,0-3 2 0,-1-2-9 0,-1-2 2 0,2-2 1 0,-3-3-5 15,1-2 9-15,-2-1-8 0,1-4-10 0,1-2-4 0,0-4-18 0,0-1-4 16,2-3 5-16,0 0-3 0,0-1 11 0,3 1-9 0,1-1-16 15,2 1-17-15,2 2-38 0,2 0-31 0,3 3-32 0,1 0-34 0,2 2-43 16,0 2-52-16,4 3-105 0,1 0-343 0</inkml:trace>
-  <inkml:trace contextRef="#ctx0" brushRef="#br0" timeOffset="-20691.13">28949 13231 3017 0,'2'-2'188'15,"0"1"-63"-15,2 0-60 0,1 1-34 0,1-2-9 0,2 1-14 0,1-2-8 16,-1 2-11-16,0 0-8 0,1 0-6 0,-1-1-10 0,0 0-5 0,-1-1-8 16,0 0-14-16,0-1-18 0,-1-1-27 0,0 0-29 0,-1-1-24 15,0 0-18-15,0-1-13 0,-1-1-12 0,0 0-15 0,1-1-26 0,-2-2-28 16,2-2-33-16,0-1-58 0,0-2-192 0</inkml:trace>
-  <inkml:trace contextRef="#ctx0" brushRef="#br0" timeOffset="-20474.13">29246 12540 2632 0,'0'0'187'15,"1"0"-49"-15,1 2-46 0,2 2-19 0,1 1-11 0,1 2-7 0,0 4-11 16,1 3-11-16,0 3-15 0,1 1-18 0,0 4 16 0,-1 3 2 0,1 2 4 16,0 4 11-16,0 1-19 0,-1 2-10 0,0 0 3 0,-1 1-1 15,-2 2-4-15,1-1 7 0,-2 0-6 0,0-3-1 0,-1-1-2 0,1-4-2 16,-1-2-7-16,1-3-16 0,-1 0-17 0,0-3-29 0,-1-3-20 15,0-1-18-15,-1-1-28 0,-1-3-20 0,0-2-24 0,-1-1-15 0,-1-3-18 16,-2-2-18-16,1-2-9 0,-1-3-15 0,-2-3 0 0,-1-3-17 0,-2-3-37 16,-1-3-185-16</inkml:trace>
-  <inkml:trace contextRef="#ctx0" brushRef="#br0" timeOffset="-19958.12">29183 13061 798 0,'-1'-2'632'0,"1"2"-408"0,0 0-54 0,1-1-33 0,0 1-29 15,0-1-19-15,2-1-17 0,2 2-14 0,-1-2-9 0,3 2-8 0,0 0-7 16,1-1-3-16,1 1-7 0,1-1-3 0,-1 0 5 0,1 1-9 15,0-1 4-15,1-1-8 0,2 0-2 0,-1-1-3 0,2 0-2 0,1 1 7 16,0-1 0-16,0 0-1 0,1-1 8 0,0-1 2 0,1 1 1 0,-1 1 8 16,0-1-2-16,1 0-6 0,0 0 0 0,-2-1-6 0,1 1 3 15,-1 0-4-15,1 0 1 0,-2 0-8 0,0 0-9 0,0 0 5 0,0-1-7 16,-3-1 10-16,0 0-1 0,-2 0-7 0,-2-1 2 0,1 1-2 16,-3-1 3-16,0 0-6 0,-2 0-6 0,0 1-2 0,0-2-10 0,-2 0 5 15,1 0 7-15,-1 0 1 0,0 0-3 0,0 0-4 0,0-1-2 0,-1 2-1 16,-1-1 2-16,0 1 1 0,0 0-6 0,-1 2 1 0,0-1-4 0,0 1 0 15,-2 1 5-15,1 0-9 0,-2 2 8 0,0 0-7 0,1 0 3 16,-2 2 4-16,1 0 4 0,0 2 12 0,0 1-3 0,-1 0 12 0,1 2 0 16,-2-1-5-16,1 2 11 0,0 0-8 0,0 0 8 0,0 2 4 15,1 0-4-15,0-1 2 0,2 3-7 0,-1 0 4 0,2 0-1 0,1 0 6 16,-1 1-3-16,3-1-8 0,-1 0 2 0,2 0-3 0,1 1 0 0,1-1 4 16,1-2-1-16,0 1 4 0,1-2-1 0,1 1-1 0,1-2-3 15,1-1-8-15,-1 0-3 0,2-1-1 0,0 0-2 0,0 0 2 0,0-2 1 16,1 1-1-16,-1-1 4 0,1 0 0 0,1-2 6 0,-2 0-4 0,0 0-1 15,-1-2-3-15,-1 1 4 0,1-2 2 0,0 1-1 0,0-2 2 16,-1 0-4-16,0 1 4 0,-1-1 4 0,0 1-3 0,-1-1 7 0,2 1-4 16,0 1-1-16,-1-1 5 0,0 2-1 0,-1 0 8 0,0 1-1 15,0 1 15-15,-1 1 1 0,-1 0 0 0,-2 1 7 0,1 2-14 0,0 0 1 16,0 1-6-16,-2 2-14 0,0 0 3 0,-1 1-11 0,-1-1 2 0,0 2 5 16,1 1-6-16,-2-1 4 0,-1 0-8 0,-1-1-4 0,1 0 9 15,-1 1 0-15,-2 0 4 0,0 0 3 0,1-2-4 0,-1 1-5 0,-1-2 2 16,1 0 2-16,-2-1-4 0,1 1 2 0,1-1-8 0,-1-1-2 0,0 0 1 15,-1-1-2-15,-1-1-6 0,2-1-8 0,-1-1-8 0,2-1-18 16,-1 0-15-16,2-2-24 0,0-2-15 0,1 0-5 0,1-2-7 0,0 0-1 16,1-1-11-16,1-1-13 0,0 1-6 0,2-3-9 0,0 0-8 15,2-2-35-15,1-3-67 0,2 0-256 0</inkml:trace>
-  <inkml:trace contextRef="#ctx0" brushRef="#br0" timeOffset="-19758.12">30104 12667 2162 0,'8'-8'193'0,"0"0"-31"0,1-1-27 0,-1 2-19 0,-2 2-13 0,1 0-14 16,-1 2-17-16,-2 2-13 0,2 1-8 0,-2 1-11 0,1 2 1 0,0 1 3 16,-2 1-8-16,1 2-5 0,-2 0-8 0,2 3 12 0,-1 1 5 0,1 4-5 15,0 3-4-15,-1 1-24 0,0 1-10 0,1 2 5 0,-1 2 3 16,-1-2-1-16,2 2-2 0,-2-2-6 0,1 1-7 0,0-1-4 0,0 0-3 16,-1-2-15-16,0-1-17 0,0-2-17 0,0-3-18 0,-1-2-12 15,1-1-21-15,-2-2-27 0,1-2-31 0,-2-2-29 0,-1-3-24 0,0-1-35 16,0-3-54-16,-1-1-90 0,-3-5-438 0</inkml:trace>
-  <inkml:trace contextRef="#ctx0" brushRef="#br0" timeOffset="-19624.13">30296 12717 2798 0,'11'1'123'0,"1"1"-65"15,5 1-60-15,-1 0-13 0,2 1-17 0,3-1-22 0,-2 1-47 0,1 1-68 16,0 0-50-16,-3 0-46 0,1 1-41 0,-2-1-57 0,-1 1-60 0,-3-1-295 15</inkml:trace>
-  <inkml:trace contextRef="#ctx0" brushRef="#br0" timeOffset="-19458.13">30662 13072 2683 0,'2'8'184'0,"1"3"-96"0,1 3-43 0,-1 2-32 15,2 1-4-15,2 1-7 0,0 0-9 0,0 2-14 0,0 0-15 16,-1 0-31-16,1-2-47 0,0-2-13 0,-1-4-30 0,-1 1-20 0,-1-2-16 16,1-2-41-16,0-2-37 0,-1-1-42 0,1-3-28 0,-1-2-264 0</inkml:trace>
-  <inkml:trace contextRef="#ctx0" brushRef="#br0" timeOffset="-18975.12">30962 12557 2711 0,'4'4'133'0,"1"3"-37"0,2 3-55 0,1 2-26 0,2 1-11 16,3 0-4-16,-1 2-6 0,2-2-11 0,0 0-3 0,-1-1 3 0,0 0-12 15,1-1 6-15,-1-1-1 0,1-1-11 0,-2-2-1 0,-3-1-2 16,0-3 0-16,-1-1-4 0,0-1 7 0,-2-2 3 0,2 0-5 0,-1-2 7 16,1-2 6-16,-3 0 9 0,2-1 10 0,-1 0 5 0,-1-2 3 0,0-1-14 15,-1-1 7-15,-2 3 4 0,1-2 0 0,-1 1 15 0,0 1-7 16,-2-1 0-16,1 2-4 0,-2 1 4 0,0 1-1 0,0 2-3 0,0 1 7 15,0 0 2-15,0 1 6 0,0 1-5 0,0 1-4 0,0 1-8 16,0 1-2-16,0 1 0 0,0 2-4 0,1 0 0 0,0 2 0 0,-1 2 9 16,2 0 3-16,0 4 3 0,1 1 2 0,1 2-14 0,-1 0-1 0,0 2 4 15,1 1-4-15,2 0 0 0,-1 1 2 0,-1 0-1 0,1-1 1 16,-1 0 5-16,0 0-2 0,0 0-2 0,1 1 1 0,0-2 3 0,-1 0 1 16,0-2-1-16,-1-1 5 0,-1-2-2 0,-1 0 5 0,0-1 1 0,-1-2 1 15,-1-2-2-15,-1-1-8 0,0-1-4 0,-2-1-7 0,-1-1-5 16,1-1-4-16,0-1-5 0,-1-2-2 0,-1-1-2 0,0 0-2 0,1-2-4 15,-1-1-10-15,0-3-4 0,1-1-4 0,-1-1-7 0,0 0-1 0,1-2-13 16,0-1-15-16,1-2-12 0,0-4-19 0,0-2-17 0,1-2-30 16,-1-4-64-16,2-4-103 0,1-1-417 0</inkml:trace>
-  <inkml:trace contextRef="#ctx0" brushRef="#br0" timeOffset="-18657.12">31338 12831 1431 0,'0'0'495'0,"0"1"-390"16,1 1-71-16,-1 1-37 0,0-1-10 0,2 0-5 0,-1 0-10 0,-1 0-3 15,1 1-16-15,-1 0-7 0,0-1-3 0,0 1-2 0,-1 0 4 0,0 0-2 16,0 0 5-16,0-1 9 0,1 0 4 0,0 0 6 0,0-1 4 16,2 0 5-16,-1 0 9 0,1-1 7 0,0 1 13 0,1-1 3 0,0 0 3 15,1 0 9-15,0-2-2 0,1 1 6 0,1 1 2 0,-1-1-2 16,0 0 0-16,0 0 1 0,1 0 2 0,0 1 4 0,0 1 2 0,0 0-2 15,0 1-2-15,-1 1 0 0,2 0-5 0,-1 3 12 0,-1 0 4 0,1 1 2 16,0 2 4-16,1-1-2 0,-1 2-1 0,2 3 3 0,-2 0-6 16,0 3-14-16,0 0-3 0,1 1-1 0,-2 0-4 0,2-1-3 0,-1-1-8 15,-1 1-5-15,1-1 3 0,-1 0 0 0,0-2-5 0,-1 0 1 16,0 0-7-16,0 0 3 0,-1-2 3 0,-1-2-11 0,2-1-10 0,-2-2-21 16,-1 0-25-16,-1-3-26 0,0-1-27 0,0-1-27 0,0-2-25 0,0-1-35 15,0-3-41-15,-1-1-64 0,1-3-253 0</inkml:trace>
-  <inkml:trace contextRef="#ctx0" brushRef="#br0" timeOffset="-16957.97">26792 9940 1825 0,'-18'-31'60'0,"1"-2"27"0,-1-6 0 0,6 8-20 0,7 6-22 0,1 0-19 15,3 3-12-15,4 0-9 0,1 2 1 0,3 3-4 0,2-1-4 16,1 1 2-16,4-1-4 0,2 2 1 0,1-1 0 0,1 0-1 0,4 1 1 16,1 1 1-16,3-1-5 0,3-1 4 0,1 2-1 0,3 0-4 0,4 0 16 15,3 1-6-15,5 0 9 0,2 1-2 0,3 0-8 0,5 1 0 16,3 1-1-16,4 2 2 0,5 2-1 0,1 0 4 0,7 1-2 0,2 1 1 15,6-1 2-15,2 0-3 0,3-1 1 0,3-1 2 0,2-1-4 0,2 0 5 16,1-1-2-16,2-1-1 0,2 0 4 0,-1 0-4 0,1 1-1 16,1-2 6-16,-1 0-3 0,4 0 0 0,2-1-1 0,-1 3-5 0,-2 3-2 15,1 0-4-15,-7 1 9 0,0 1-4 0,-2 0-4 0,-2 1 8 16,1 2-6-16,-3 1 2 0,-2 2 5 0,-2 0 1 0,-3 2-5 0,1 2-2 16,-2 1-1-16,-1 3-4 0,-4 2 5 0,-4 4 1 0,-5 3 5 0,-3 3 1 15,-3 2-4-15,-3 5 1 0,-4 2-4 0,-3 5-1 0,-2 2-4 16,-2 3 7-16,-2 4-3 0,-2 3 3 0,-3 2 3 0,-2 1-6 0,-2 5-2 15,-1 1-5-15,-5 2 10 0,-2-1-3 0,-4-1-2 0,-2 1-1 0,-5 0-16 16,-4 0 3-16,-4 0 3 0,-6-1 1 0,-3 0 9 0,-6 2-1 16,-5 0 3-16,-5 1-2 0,-5 0-4 0,-5-4-9 0,-4 1 0 0,-6-2-4 15,-3-2 8-15,-4-1 12 0,-4-1 6 0,-1-1 7 0,-7-1-5 0,-1-1 7 16,-4-2-1-16,-2-2-1 0,2-2 2 0,-3-4-4 0,-2-2-3 16,-1-1 2-16,-1-3 5 0,0-3 1 0,-2-4 6 0,0-1 10 0,-1-3 4 15,-4-4 1-15,0-5 5 0,-5-3-1 0,-3-5-3 0,-1-3 5 16,-4-2-2-16,-2-2 1 0,-1-3 0 0,-4-3 4 0,0-3-6 0,-6-3-15 15,1-2 4-15,-3-1-3 0,-1-2 5 0,2-1 5 0,-1 0-10 0,2-2-5 16,4-1-3-16,1 0-9 0,4-2-1 0,3-2-1 0,3-1-3 16,8 1-12-16,3-1-16 0,6 4-29 0,4 2-83 0,4 1-127 0,-1 4-157 15,-2 3-204-15,-3 3-279 0</inkml:trace>
-  <inkml:trace contextRef="#ctx0" brushRef="#br0" timeOffset="-16390.97">22890 10875 1881 0,'-3'-24'-35'0,"6"1"68"0,8-8-3 0,14 5-11 0,10 1-8 16,11-3 0-16,8 0-4 0,8-2-10 0,10-1-3 0,7-1 1 0,6 3-5 15,6 0-5-15,4 3-14 0,3 2-24 0,4 4-28 0,1 0-24 16,1 1-22-16,2 2-13 0,-3 4-9 0,-1 2-1 0,-1 5 6 0,-1 6 21 16,-4 5 31-16,0 6 29 0,-7 5 23 0,-4 6 17 0,-5 6 6 0,-5 4 10 15,-3 6 5-15,-4 7 5 0,-3 4 4 0,-4 3 2 0,-4 5 1 16,-2 2 12-16,-3 0 1 0,-3 2 6 0,-2-1 2 0,-4-3-7 0,-3-2 6 15,-1-2 6-15,-3-5 15 0,-5-3 16 0,-5-5 3 0,-4-1 1 0,-5-6-16 16,-5-1 0-16,-6-3 4 0,-5 0-3 0,-6-1 8 0,-4 0-10 16,-6-3 3-16,-6 0-1 0,-6 1-4 0,-5-2-5 0,-6 2 1 0,-5 1 0 15,-3 0 5-15,-2 0 4 0,-3 0-3 0,-2-2 1 0,-1-1-5 16,0-1 0-16,1-2-3 0,0 1-1 0,0-1-4 0,3-3 0 0,1-2-1 16,3-1 0-16,3-3 1 0,4-1-15 0,3-4-9 0,5-1-10 0,0-1-11 15,4-4-2-15,3-1-16 0,2-3-30 0,5-2-59 0,1-3-84 16,2-1-108-16,3-4-92 0,4-7-482 0</inkml:trace>
-  <inkml:trace contextRef="#ctx0" brushRef="#br0" timeOffset="-8290.61">23332 9443 1220 0,'-1'1'151'0,"2"-1"-78"0,0 1-11 0,1 1 6 0,0 0 2 0,0 0 11 16,1 1-14-16,-1-1-2 0,1 2 0 0,0-1-12 0,0 1 7 15,-1 0-6-15,1 0-8 0,-1 0 5 0,0 0-9 0,0 2-3 0,0-1-3 16,0-1-3-16,0 2 3 0,0-1 2 0,-1 2 2 0,1 3 7 0,0 1-2 16,0 0-2-16,0 0 0 0,0 2-12 0,0 0 0 0,0 1-1 15,-1 0 2-15,2 0 2 0,-1 0-6 0,-1 2 4 0,1-1-6 0,0-2-4 16,0 2 2-16,1-1-7 0,-1 0 0 0,0-2-5 0,1 2-2 0,0-1 0 15,0 0-3-15,0 0 2 0,0-2-1 0,1 1-4 0,0-1 4 16,0 0-3-16,-2-2-6 0,1 1 2 0,0-3 3 0,0 1-4 0,-1 0 3 16,-1-2-3-16,0 0-2 0,0 0 2 0,0-1-1 0,1 0-1 15,-1-1 0-15,-1-2-3 0,0 0-5 0,0-1-18 0,0 0-21 0,-1 0-27 16,1-2-21-16,-1 1-25 0,1-2-21 0,0 0-28 0,-1 0-43 0,1-2-46 16,0-1-68-16,0-1-67 0,1-1-365 0</inkml:trace>
-  <inkml:trace contextRef="#ctx0" brushRef="#br0" timeOffset="-7955.61">23781 9449 2489 0,'-7'1'212'0,"2"2"-178"0,0 1-37 0,2 1-5 16,3 1 3-16,0 0 5 0,-1 0-2 0,0 1 2 0,0 0-10 0,-1 1 1 15,0 0-3-15,0 1-2 0,-1 1 11 0,0-1-2 0,0 0 5 16,0 0-4-16,-1 0 0 0,2 0 0 0,-1-1-4 0,2 1 7 0,-1-2-2 16,2 1 1-16,1-1 0 0,0-2-1 0,3 2 0 0,-1 0 5 15,1 0-2-15,1 0 3 0,0 1 0 0,-1-1-3 0,2 0 5 0,1 1 0 16,0-2-4-16,1 1 4 0,-1 0-2 0,1 1-1 0,-2-1-5 0,1 0 3 16,-1 1-2-16,0 0-1 0,0-1 4 0,-1 2-2 0,-1-1 1 15,0 0 0-15,0 0 1 0,-1-1-1 0,-1 1 0 0,-1-2 4 0,-2 0-8 16,1 1 1-16,-3-2-2 0,0 2-1 0,-2-2-2 0,-1 1-3 0,0-2 1 15,-1 0 2-15,0-1 2 0,-2-1 1 0,-1 0-6 0,-1 0-3 16,0-2-7-16,-1 1-7 0,0-2-5 0,-2-1-7 0,1 0-3 0,0-1 0 16,1 0-2-16,2-1-5 0,-1-2-12 0,1 0-28 0,0-1-44 15,2-1-53-15,0 1-49 0,2-2-35 0,1-1-60 0,-1-2-338 0</inkml:trace>
-  <inkml:trace contextRef="#ctx0" brushRef="#br0" timeOffset="-7773.61">23679 9489 1752 0,'10'-2'518'15,"1"1"-466"-15,8 0-43 0,2 1-3 0,0 0-4 0,1 0-5 0,1-1-5 16,-2 1-7-16,1 0-7 0,-1 0-19 0,-2 1-20 0,-1-1-28 0,0-1-27 16,-2 0-8-16,0 0-2 0,-1-1 14 0,-1-1 15 0,-3 0-1 15,0-1-1-15,-1 0-17 0,0-1-18 0,0 0-17 0,0 0-21 0,-1-2-15 16,-2 0-154-16</inkml:trace>
-  <inkml:trace contextRef="#ctx0" brushRef="#br0" timeOffset="-7523.58">24135 9357 2375 0,'-2'5'108'0,"1"2"-83"0,2 3-16 15,3 2 1-15,0 0 5 0,1 0 0 0,-2 2 1 0,0-1-7 16,0 3-1-16,0 1 0 0,-1-2-13 0,0 0 2 0,-1 2 5 0,0 1 1 16,0-1 6-16,0 2-1 0,0 0-4 0,-1-1-3 0,2 1 1 15,-1 0-2-15,1-1-2 0,1-1-1 0,-2 1 5 0,3-2-2 0,-2 0 0 16,2-1-4-16,1-1 0 0,-1-1-6 0,1 0-8 0,1-3-8 0,-1 0-17 16,1-1-22-16,1-1-23 0,-1-1-14 0,0-2-15 0,0-2-12 15,1-3-17-15,1-1-23 0,1-2-26 0,0-1-19 0,0-2-18 0,2-3-11 16,0-1-1-16,0-2-188 0</inkml:trace>
-  <inkml:trace contextRef="#ctx0" brushRef="#br0" timeOffset="-7173.6">24656 9417 1619 0,'0'0'645'0,"1"1"-570"0,2 0-59 0,-1 2-13 0,2 0 2 0,-2-1-2 15,0 1-3-15,0-1-2 0,-2 1 1 0,-1 2 1 0,-2 0-6 16,0 1-2-16,-3-1-4 0,-2 0-7 0,-1-1 1 0,-1 0 0 0,-3 0 0 16,0 0 7-16,-2-1 2 0,0 0 4 0,0-1 3 0,0 0 2 15,-1 0 3-15,-1 1 1 0,0-1 8 0,2 1 2 0,-2 1 2 0,1-1 11 16,0 1-9-16,2-1 0 0,-1 2 4 0,2 0-12 0,-1 1 7 0,3 0 6 16,1 0-4-16,-1 0-1 0,3 0-1 0,-1 0-11 0,3 1 1 15,1 1-3-15,1 0-1 0,2 2 4 0,1-1 0 0,1 2-2 0,0-2 5 16,1 1-3-16,2 0 4 0,1 1 4 0,0 0 1 0,3 0-2 0,1-1-3 15,1 0 2-15,1-1-2 0,0 0-3 0,2 0 0 0,1 0-5 16,1 0 0-16,2-1 2 0,-2 1-3 0,3-2-1 0,0 0-1 0,0-1-3 16,0 0 2-16,2-1 2 0,-1-1-9 0,-1-1 5 0,2 0-13 15,-1 0-8-15,0-1-11 0,1-2-19 0,-1 1-14 0,-1 0-21 0,0 0-22 16,0 0-25-16,0 0-34 0,-1 1-57 0,1 0-78 0,0 0-101 0,1 3-303 16</inkml:trace>
-  <inkml:trace contextRef="#ctx0" brushRef="#br0" timeOffset="-5955.6">28593 8388 2262 0,'-4'0'74'0,"1"1"-88"0,-1 0-7 0,4 1 3 0,0-1 20 0,0 1 11 16,1 1 1-16,-1 1-1 0,0 0-4 0,0 1-1 0,1 1 5 0,-1 1 6 15,0 0 5-15,0 1 5 0,-1 0 5 0,1 1 0 0,-1 0 1 16,1 2 0-16,0 1-4 0,1 2 5 0,-1 1-3 0,2 1 1 0,0 3 2 16,0 2 2-16,1 0 3 0,1 3 4 0,0-2 4 0,1 1-4 0,1 0-9 15,-1 0-5-15,0 2-12 0,-2 0-9 0,1 0 1 0,-1 1-8 16,-1-2 4-16,1 0-14 0,-1-1 5 0,1-2 2 0,0-1-8 0,0-1 15 15,1-2-9-15,0-2 0 0,1-1 2 0,0-2-5 0,-1-2 0 0,1-1-9 16,-1-2-1-16,0-1-9 0,-1-2-14 0,1-2-28 0,-1-1-24 16,-1-2-32-16,1-1-33 0,-1-1-25 0,2-2-32 0,0-1-18 0,-1-2-15 15,1-1-11-15,0-1-9 0,0-3-15 0,0-1-309 0</inkml:trace>
-  <inkml:trace contextRef="#ctx0" brushRef="#br0" timeOffset="-5507.6">28933 8319 3126 0,'-6'-1'-28'0,"1"2"-5"0,0 0-3 0,3 1 13 0,2-1 18 0,0 2 4 16,1 0 1-16,-1 1-6 0,0 0-4 0,0 2 0 0,-1 1 0 0,-1 0-1 15,0 1 3-15,-1 1 0 0,-1 2 1 0,0-1 0 0,-1 2 7 0,0 1 2 16,0 0-4-16,0 1 4 0,1 0-6 0,0 3 1 0,0 2 1 16,1 0 6-16,0 1-1 0,0 2 0 0,2 0-1 0,0 1-4 0,0-1 2 15,0-1 7-15,0-1 2 0,2 0-6 0,0-3 2 0,2 1-5 0,0-1 3 16,2 0 4-16,2-2-3 0,-1-1-1 0,2 0-1 0,2-2-4 16,0 1 2-16,2-3 2 0,0 0 5 0,0-1 1 0,2-1-3 0,0-1 7 15,0-2 0-15,0-2 4 0,1 0-1 0,-1-2 1 0,0-2-2 16,-1-1-6-16,-2-2 1 0,1-1-9 0,-1-1-4 0,1 0-1 0,-2-2-3 15,-2 0-3-15,0 0 4 0,-1 0 4 0,0-1 1 0,-2 0 6 0,-1-1-8 16,0 1 2-16,-2 0 1 0,-1 0-3 0,-3 1 6 0,0-1-4 16,-3 1 4-16,0-1 3 0,-1 1 2 0,-1 1 0 0,-1 1 5 0,0 1-7 15,-1 1 2-15,-1 2 5 0,1 1-5 0,-1 0 4 0,-1 1-8 16,1 0-13-16,-1 1-4 0,0-1-2 0,1 1 1 0,-1 1-6 0,-1 0 0 16,3 0-8-16,-1 1-8 0,1 0-2 0,2 1-14 0,0-1-18 0,1 1-16 15,1 0-32-15,1-1-27 0,0-1-33 0,1 0-46 0,3-1-31 16,-2 0-46-16,1-2-44 0,1 0-25 0,1-3-189 0</inkml:trace>
-  <inkml:trace contextRef="#ctx0" brushRef="#br0" timeOffset="-5257.6">29357 8409 2443 0,'-2'2'74'0,"-1"1"-67"0,0 1-11 15,3 0 14-15,0 1 12 0,1 1 10 0,0 1 0 0,0 0-7 0,1 2-7 16,-2-1-5-16,1 3-2 0,-1 2 0 0,1 0 2 0,-1 2-3 16,0 1 2-16,1 2-9 0,-1 2 2 0,1 0-4 0,2 1-1 0,0 0 4 15,0-2-4-15,1 1 1 0,1-1-4 0,0-2 3 0,1 0-3 0,0 0 3 16,1-1-4-16,0-3-4 0,1 0 0 0,-1-2-8 0,-1 0-15 16,1-2-17-16,1-1-25 0,-2-2-16 0,1 0-19 0,-1-2-14 0,-2-2-19 15,1-1-19-15,-1-1-16 0,0-2-19 0,-1-2-17 0,0 0-9 16,-1-3-10-16,1-1-2 0,-1-2-241 0</inkml:trace>
-  <inkml:trace contextRef="#ctx0" brushRef="#br0" timeOffset="-4940.57">29953 8332 2568 0,'6'2'33'0,"0"2"-42"0,3 1-7 0,0 1 1 16,-2-2 12-16,0 0 3 0,-1 1-17 0,-1-1-18 0,-1 1-27 16,-2-1-13-16,-3 1-9 0,0-1-10 0,-3 0 6 0,-1 0 2 0,-3-1 12 15,-1 0 18-15,-3 0 15 0,-1 1 15 0,-2-1 12 0,-2 0 9 0,1 0 8 16,-1-1 7-16,-1 1 4 0,1 1 4 0,1-1 5 0,-1 0 0 16,0 0 5-16,-1 1 0 0,2-1 4 0,-1 0 6 0,2 1-3 0,1-1 4 15,2 1-2-15,1-1-1 0,1 1 1 0,2 1 1 0,2-1-2 0,1 0-6 16,0 1 0-16,4 1-9 0,0 0-6 0,3 1 0 0,0 0-7 15,2 1 6-15,1 0-7 0,1 2 3 0,2 1 8 0,2 1 2 0,0 2 11 16,2-2 4-16,3 1-4 0,2 0-4 0,2 0-1 0,0 0-10 16,2-2-5-16,1 2-1 0,-1-2-9 0,2 0 1 0,-1-1-8 0,0-2-14 15,1-1-20-15,0-1-29 0,1-1-49 0,-2-1-74 0,-1-2-82 0,1-3-98 16,-1-2-94-16,0-4-293 0</inkml:trace>
-  <inkml:trace contextRef="#ctx0" brushRef="#br0" timeOffset="38097.94">18886 8282 1 0,'21'18'224'0,"-11"-12"606"0,-6-5 593 0,-8-11-1359 0,-2-2-38 0,1 0-39 15,1 3-18-15,1 1-10 0,2 2-7 0,1 2 3 0,2 3 1 0,1 0-4 16,1 2-1-16,0 1-22 0,-1 1-22 0,1 2-27 0,-1 1-8 16,-1 1 9-16,0 1 29 0,-2 1 28 0,-2 2 24 0,0-1 19 0,-1 1 10 15,-1-1 9-15,0-2 0 0,0 1 0 0,0-2-2 0,1 1-14 0,0 0-5 16,1-1-13-16,1-1-15 0,0 0-14 0,1-1-18 0,1-1-17 16,1 0-7-16,0-1-1 0,2 0 8 0,1 0 8 0,3-1-3 0,1-1-4 15,0-1-30-15,2-2-193 0</inkml:trace>
-  <inkml:trace contextRef="#ctx0" brushRef="#br0" timeOffset="38828.93">20438 7605 2779 0,'-31'-6'9'15,"6"2"20"-15,-4 1-47 0,12 3-65 0,10 4-45 0,4 2-34 16,4 3-15-16,4 4 13 0,2 2-10 0,4 3-14 0,3-3-21 0,2 3-38 16,3 0-23-16,-2-2-52 0,2 0-182 0</inkml:trace>
-  <inkml:trace contextRef="#ctx0" brushRef="#br0" timeOffset="39061.93">23615 7732 1000 0,'4'2'282'0,"2"3"-372"0,4 4-33 0,7 4-11 16,3 0 15-16,4 0-23 0,6-1-56 0,1-1-166 0</inkml:trace>
-  <inkml:trace contextRef="#ctx0" brushRef="#br0" timeOffset="39228.93">25899 7380 1617 0,'1'1'519'0,"2"2"-578"15,2 4-60-15,1 4-10 0,2 4 9 0,3 3-5 0,2 4-42 16,0 2-71-16,2 2-62 0,1 3-313 0</inkml:trace>
-  <inkml:trace contextRef="#ctx0" brushRef="#br0" timeOffset="100765.43">29083 7115 1615 0,'-10'-4'13'0,"0"0"-15"0,1-2 25 0,2 2 6 16,1-2 0-16,2 1-1 0,-1 0-2 0,1 1 2 0,1 0 0 15,0 0 0-15,0 0 4 0,0 0 11 0,0 1 19 0,1 1 15 0,-1 0 22 16,1 0 17-16,0 1 5 0,0 0 4 0,1 0-2 0,0 1-1 0,-1 1-3 15,2 0-12-15,0 0-5 0,-1 0-18 0,1 1-8 0,1 0-4 16,-1 0-9-16,0 3 3 0,3 1-2 0,0 1 0 0,2 2 1 0,2 1-8 16,0 1-7-16,2 1-4 0,0 1-11 0,2 0-2 0,0 2-10 15,2-1-9-15,2 2 1 0,-1 3-7 0,1 1 2 0,0 0 0 0,1 4-8 16,1-1 0-16,-1 0-4 0,0-1 0 0,-2-1 2 0,0 1-2 0,-2 0 0 16,-1-1-8-16,-1 2 0 0,-1-2-13 0,-1-1-8 0,-1 0-6 15,-1 0-23-15,-1-2-9 0,-1 0-8 0,-1-3-35 0,-1-2-10 0,1-3-18 16,-1-2-27-16,-1 0-11 0,0-2-16 0,-1-2-34 0,0-2-25 0,1-4-45 15,-1-2-69-15,0-4-84 0,1-1-308 0</inkml:trace>
-  <inkml:trace contextRef="#ctx0" brushRef="#br0" timeOffset="101115.43">29761 7021 3177 0,'-6'9'215'0,"1"4"-204"0,-1 5-11 0,3 4 1 0,3 2-2 16,1 0 2-16,1 4-2 0,-1 0-9 0,3 2 10 0,-1-1-3 0,3 2-3 15,0-1 4-15,0-1-3 0,0-1-2 0,0-2 0 0,2-2-6 16,-1-3-3-16,4-1-2 0,1-2 1 0,0-2 1 0,2-2 5 0,-1-2 4 16,1-2 6-16,0-3 2 0,1-1 5 0,-1-3 3 0,3-1 1 0,-1-2 5 15,1-2-1-15,0-1 2 0,-1-3 4 0,1-1 0 0,0-2 2 16,-3-1 0-16,1-1-6 0,-1-1 3 0,-2 1-6 0,-2-3 5 0,-1 0-1 15,-2-1-1-15,0 2 5 0,-3-3-8 0,-1 0-2 0,-3 0 0 16,-1 1-7-16,-3-2-2 0,0-1 0 0,0-1 1 0,-2 1-3 0,-2 0 4 16,0 0-4-16,-3 1-2 0,-1 1 6 0,0 0-10 0,-1 1 1 0,0 1 1 15,-2-1-5-15,1 1 3 0,0 1 1 0,0 1-7 0,2 3 3 16,-2 1-2-16,1 1-4 0,-1 3 10 0,1 0-7 0,-1 2 3 0,0 2 0 16,-1 1-2-16,1 1-4 0,0 2-1 0,-1 1-8 0,1 2-7 0,0 2-16 15,2 1-21-15,-1 2-19 0,2 1-32 0,2 1-26 0,0 0-31 16,2-1-37-16,1 3-39 0,1 0-61 0,1 1-102 0,1-1-112 0,3 1-190 15</inkml:trace>
-  <inkml:trace contextRef="#ctx0" brushRef="#br0" timeOffset="101665.42">30268 7065 2355 0,'-2'1'66'0,"1"1"-77"0,0 1 1 16,2 1 6-16,-1 1 0 0,2 0 4 0,-2 1-5 0,1 1-1 16,0 1 0-16,-1-1 0 0,0 2-5 0,-1 0 1 0,0-1-1 0,-1 0 2 15,-1-1 8-15,1 0 2 0,0-2 8 0,0-1-1 0,1-1 4 0,-1-2 6 16,0 0 2-16,1 0 3 0,0-1 0 0,0 1 5 0,1-1 2 16,0 0 1-16,1 0-1 0,-1 0-8 0,1 0 0 0,-1-1 1 0,1 1-6 15,0 0 1-15,0-1-2 0,0 1-4 0,0-1 2 0,-1 1-1 0,1 0-6 16,0 0-1-16,-1-1 1 0,1 1-6 0,-1-1 8 0,1 1-3 15,-1-1 6-15,2 1-1 0,-1 0-1 0,0 0 2 0,0 0-4 16,0 0 3-16,-1 0-4 0,0 0 0 0,1 0-2 0,-1 0 0 0,1 1 5 16,0 1-4-16,-1-2 3 0,0 2 4 0,0 0-4 0,0 1-4 0,1 0 5 15,-2 1-4-15,3 0 3 0,-2 1-2 0,0 1-2 0,2 0 2 0,-2 0 1 16,0 2-1-16,0 0 0 0,0 0-1 0,1 3-4 0,1 0 3 16,-1 1-1-16,0 1-1 0,1-1 2 0,1 1-1 0,2 0-1 0,0-2-3 15,2 0 0-15,1 0 0 0,1-1 0 0,2 0 2 0,1 0-6 16,2 0 8-16,2-2-4 0,1 0 0 0,1-2 1 0,1 1-1 0,0-3-1 15,0 1 2-15,-2-3 1 0,0 0-2 0,0-2 4 0,-2-1 1 0,0-1 7 16,-1-2 0-16,0 0 1 0,0-2 0 0,-2 1-7 0,1-3 1 16,-2 0 9-16,0-1-6 0,-1-2 1 0,-3 0 1 0,1-1-8 0,-3 0-1 15,0-3-1-15,-2-2-6 0,-1-1 8 0,-2 1-2 0,0-2 5 16,-3 0 1-16,0 1 3 0,-2 0 5 0,-2 0 1 0,1 1 1 0,-1 0-7 16,-1-1-1-16,-1 1-4 0,-1 2-3 0,-1-1-3 0,-1 2-3 0,2-1-5 15,-1 3-2-15,0-1-6 0,-2 2-5 0,-1 0-7 0,0 2 17 0,-1 1-1 16,-1 2 7-16,-1 1 6 0,1 0-9 0,-2 0 2 0,0 3 1 15,1 0-4-15,-2 2-3 0,1 1-12 0,1 1-16 0,-1 1-11 0,1 2-13 16,-3-1-17-16,2 1-16 0,0 0-14 0,0 1-25 0,3 1-24 16,1 1-43-16,0-1-79 0,2 0-84 0,0 1-85 0,3-1-256 0</inkml:trace>
-  <inkml:trace contextRef="#ctx0" brushRef="#br0" timeOffset="103166.42">31147 6949 2046 0,'-2'-7'56'0,"0"1"-53"0,-2-1 2 0,3 0 10 16,-2 1 2-16,1 0-1 0,2 2-3 0,-2 1-3 0,1 1-1 0,0 0 4 16,0 2 2-16,0 0 3 0,-1 1 1 0,1 0-4 0,-2 3 3 15,0 0-3-15,-1 3 4 0,0 1 2 0,-2 1-1 0,2 2 1 0,0 2 4 16,-1 0-16-16,0 1 3 0,0 0 1 0,1 2-13 0,1 2 12 0,3 0-9 15,2-1-3-15,0 1 2 0,4 0-2 0,2-1 3 0,1 0-3 16,3-3 0-16,-1 0 6 0,4-3 5 0,2-1 6 0,2 0 5 16,1-2 3-16,1 0 10 0,4-3 0 0,0-1 5 0,3-1-1 0,0-1-3 15,2-2-2-15,0-1 2 0,1 0-3 0,-1-1-4 0,-1-1-2 0,-1-1-11 16,0-1 3-16,0 0-4 0,-2-1 0 0,-2-1 1 0,-1 0-1 0,-3 0 4 16,1 1 3-16,-3-2 2 0,0 0 4 0,0-1 5 0,-5 0 4 15,-2 0 0-15,-1-1 7 0,-4 2-5 0,0-1 1 0,-5 0 3 0,0-1-1 16,-2 0 7-16,-3 0-3 0,-1 0-7 0,-2 0-8 0,-4-2-6 0,0 0-22 15,-3 0-6-15,-4 1-14 0,0 1 2 0,-2 0 11 0,-3 1 0 16,1 0 4-16,-4-1-20 0,0 1-13 0,-1 0-13 0,-5 1-16 0,-1 0-21 16,-2 1-12-16,-1 0-27 0,0 0-31 0,-3 0-51 0,-3 1-70 15,-1 0-83-15,-5 1-126 0,-5-1-524 0</inkml:trace>
-  <inkml:trace contextRef="#ctx0" brushRef="#br0" timeOffset="103616.42">28266 6978 3166 0,'-7'-5'14'15,"2"2"-54"-15,2 0-4 0,4 1 9 0,3 1 6 0,4 1 17 0,3 0 10 16,5 1 2-16,5-1-1 0,3 0-3 0,6 0 3 0,2 0-6 0,4-2 5 15,3 1 12-15,5-2-13 0,5-1 11 0,4-1-2 0,3-2-13 16,3-2 15-16,5-1-11 0,6-3 3 0,3-2 5 0,5-1-10 0,3 1 0 16,1-2-2-16,4 0-3 0,2-1 1 0,2 0 4 0,4 0-2 15,3 0 2-15,4 1-2 0,3-1 0 0,1 1-1 0,1 0-6 0,0 2 7 16,2 0-1-16,-2 1 1 0,-2 2 0 0,1 2 1 0,-2 1 2 0,-2 2-1 16,0 2-1-16,-4 3 1 0,-2 2-2 0,-1 1 0 0,-4 4 7 15,-3 1-5-15,-1 4 0 0,-3 2 2 0,-2 3-1 0,-2 2-1 0,-7 2-1 16,-2 2 1-16,-6 2-7 0,-4 1 1 0,-4 4 15 0,-29-14 0 15,4 5-4-15,-1 2 3 0,4 5-29 0,-3 0 14 0,3 6 1 0,-2 1-4 16,1 6 16-16,-2 1-7 0,-5 1-4 0,-3 0 3 0,-4 2 2 0,-5-2 4 16,-4 1 7-16,-3 0 1 0,-4-2 1 0,-5-1-1 0,-4 1 8 15,-5-3 1-15,-3 0-14 0,-4-3 21 0,-6-1-3 0,-4-1 10 0,-5-3 17 16,-39 22-45-16,2-13 1 0,-1-11-1 0,10-10 3 0,3-5 32 0,-4-2 2 16,1-4-1-16,-4-2-5 0,-2-2-12 0,1-2-7 0,-2-2-4 15,0-2-13-15,0 0-1 0,0-1-3 0,-1 0-5 0,0 1 2 0,-2 0-16 16,1-1-26-16,0 1-40 0,-1-1-48 0,2 0-58 0,-2-1-47 0,1-2-64 15,-2-2-116-15,-4-4-420 0</inkml:trace>
-  <inkml:trace contextRef="#ctx0" brushRef="#br0" timeOffset="111299.4">24471 15876 14 0,'2'-1'11'16,"1"1"4"-16,-1-1 1 0,0 1 6 0,0-1-2 0,-1 0-2 0,1 0 0 16,-1-2 0-16,1 1 6 0,0 1 9 0,0-1 7 0,-1 0-8 15,1 0 3-15,0 0-7 0,-1 0-2 0,0 0 2 0,0 0-7 0,0 0-2 16,0 1-6-16,-1 0-2 0,0-1 2 0,0 1 0 0,0 1-6 0,0-2-2 15,0 1-3-15,-1 0-4 0,1 0 4 0,0 0-6 0,-1 0 1 16,1-1 1-16,-1 2 0 0,0-1 6 0,1 1-6 0,-1 0 0 0,-1-1 3 16,1 0-1-16,-1 0 5 0,0 0 2 0,1 1 3 0,-1-1 8 15,1 1 8-15,0 0 6 0,-1 1 6 0,1-1 0 0,0 1 0 0,1-1-1 16,0 0-1-16,-1 0-5 0,0 1 2 0,1 0-2 0,-1-1 4 0,1 1 6 16,0-1 2-16,-1 0 3 0,1 1-9 0,-1 0-4 0,1-1-4 15,-1 1-2-15,0-1-2 0,0 1-1 0,1 0-2 0,-1 1-9 0,0 0 3 16,0-1 2-16,0 0-2 0,0 1 2 0,0 0 0 0,0 0 4 0,0 1 5 15,-1-1 2-15,0 1 1 0,1-1-1 0,-1 1 1 0,1-2 2 16,-1 2 1-16,1-1-2 0,0 0-2 0,0 1-1 0,-1-1-3 0,1 0 2 16,0 0-7-16,-1 0 5 0,1 0-11 0,0 1-1 0,1 0 8 15,-1 0-14-15,1-1 12 0,0 1-9 0,0 1-2 0,-1-3 8 0,0 1-10 16,0 1 3-16,0-1 2 0,0 1-1 0,0 0 6 0,1-2 3 0,-1 0-2 16,1 0 6-16,0-1 8 0,0 1 7 0,0-1 7 0,-1 0 0 15,1-1-1-15,0 0 6 0,-1-1-5 0,0 0 6 0,0-1-1 0,-1 0-6 16,1-1 10-16,-1 0-9 0,0 0-1 0,1-1 4 0,-1-1-13 0,0 1-4 15,0-2-6-15,0 0 1 0,-1 0 2 0,1 0 0 0,0-1-3 16,1 2-13-16,-1 0 1 0,1-1 3 0,0-1-6 0,0 1 2 0,1 0 0 16,0 1 3-16,1 0 2 0,1 0 1 0,0 1-9 0,1-2-7 15,0 1-6-15,2-1 6 0,0 1 6 0,0 0-6 0,4 0 6 0,0 1-8 16,2 1-1-16,1-1 6 0,-1 2 0 0,1 0-3 0,2 2-4 0,0 1 2 16,1 0-3-16,-1 2 3 0,1 0-4 0,-2 1 6 0,1 2 1 15,-1 1 1-15,-1-1-1 0,1 2-3 0,-1-1 0 0,0 1 2 0,-1 0 5 16,-2 1 1-16,1-2-13 0,1 1 5 0,-2 1-2 0,1 0 1 0,-2 0 9 15,-1 1 4-15,0 0 9 0,-1 0-8 0,0 1-2 0,-1 1-4 16,-1 0-7-16,-1 1-2 0,-1 0 2 0,-2 1-2 0,-1 4 0 0,-2 0 4 16,-3 0-7-16,-1-1 2 0,-4 2 1 0,0 1 5 0,-4 0 2 15,-1 2-8-15,0 0 1 0,-1-1-1 0,-2 2 1 0,-1-3 6 0,1-1-8 16,1-1 2-16,0-1 2 0,0-1 6 0,1 0 0 0,-2 0-7 0,0 1-1 16,1 0-7-16,0-2 3 0,1 1 14 0,2-2 4 0,0-1-7 15,1 0-1-15,2-3 1 0,2 1 5 0,1-1 9 0,3-1-5 0,0-1 0 16,0-2 0-16,2 0 4 0,1-1 12 0,1-1-6 0,1-1 3 0,0-1 3 15,1 0-3-15,1 0 11 0,1 0 0 0,0-1-11 0,1 0 8 16,1 0-13-16,1-1 0 0,2 1 3 0,1-1-4 0,2 0 1 0,2 0-15 16,3 0 14-16,1 0-4 0,1 0-6 0,1-1 12 0,1 0-16 15,-1 0 6-15,2 1 6 0,1 0-17 0,0-1 2 0,0 1 1 0,1-1-5 16,-1 1 17-16,0 0-13 0,0 0-6 0,-2 0 6 0,0 1-10 0,0-1 10 16,-2 0 4-16,1 0-16 0,0 0 14 0,1 1-6 0,-3 0-4 15,1-1 16-15,-2 0-14 0,-1 1-2 0,0-1 2 0,-1 1-2 0,1-1 8 16,-5 1 2-16,1 0-10 0,-3 0-4 0,0 0 10 0,1-1-2 0,-1 1 10 15,0 0-10-15,0 0-8 0,-1 0 8 0,-1 0 0 0,-1 0 8 16,-1-1-5-16,-1 1-3 0,1 0 2 0,0 0 0 0,0 0 6 0,-1 0-6 16,0-1 9-16,-1 0-1 0,1 1-12 0,-1 1 4 0,-1-1 0 15,1 0-2-15,-1 0 5 0,1-1-3 0,0 1 0 0,-1 0 2 0,0 0-8 16,0 1 6-16,0-1-4 0,0 0 10 0,0-1-2 0,0 1-8 0,0 1-2 16,0-1-4-16,0 0 4 0,0-1 8 0,0 1-2 0,0 1-4 15,1-1-2-15,-1 1-3 0,0-1 3 0,0 1 2 0,0-1 2 0,0 1-2 16,1 0-7-16,0 1-1 0,1-2 12 0,-1 1-2 0,0 0 0 0,0 0-6 15,-1 1 1-15,2 0 5 0,0 0-4 0,-1 1-2 0,1-2 2 16,0 1-3-16,-1 0 7 0,1-1-10 0,0 1-5 0,0 0 2 0,0 0-30 16,-1 0-12-16,1 0-22 0,-1 0-44 0,0-1-22 0,-1 0-60 15,0 2-83-15,-1 0-128 0,-1 1-254 0,-3-1-411 0</inkml:trace>
-  <inkml:trace contextRef="#ctx0" brushRef="#br0" timeOffset="117132.96">27587 15523 3258 0,'-3'5'123'0,"1"1"-37"0,2 1-46 16,2 1-29-16,2 0 6 0,2 1 5 0,1 2 16 0,3 1 11 16,2 1-12-16,1 1 0 0,1 3-16 0,-1 1-12 0,2 1 3 0,0 2-5 15,0 1 1-15,-1 1 0 0,0 2-6 0,1 0-18 0,-2 2 18 16,-1 3-2-16,-1 0 0 0,-1 3 2 0,0 4-4 0,0-1 2 0,0 4 2 16,-1-1 4-16,-1 1-8 0,0 2-6 0,0-3-7 0,0 0-2 0,-1-2-18 15,0-3 5-15,1-2-17 0,-1-2-4 0,0-2-8 0,0-2-19 16,2-1 14-16,-1-3-24 0,1-2-12 0,-1-2-20 0,0-2-36 0,0-3-21 15,0-2-30-15,1-1-32 0,1-3-50 0,1-2-92 0,1-3-77 0,-1-3-338 16</inkml:trace>
-  <inkml:trace contextRef="#ctx0" brushRef="#br0" timeOffset="117482.96">28628 15684 2065 0,'0'10'253'0,"1"2"-118"16,2 4-41-16,0 4-64 0,3 1-11 0,1 1-7 0,1 3 15 0,2 2 5 15,0 1-9-15,1 2 1 0,0 2-13 0,1 0 2 0,3-2 1 16,-1 1-8-16,1-4-1 0,2 0-8 0,1-2 3 0,1-1 0 0,1-2-12 16,0-4 22-16,2-3-3 0,-1-3 3 0,0-2 21 0,2-2-5 0,-1-3 4 15,1-1 11-15,1-1 3 0,-1-4 3 0,1-1 12 0,-2-3-5 16,-1-1 7-16,1-3 8 0,-1-1-7 0,0-3 11 0,1 0-22 0,-3-2-4 15,0-4-2-15,-2 1 1 0,-1-2 8 0,0 2-16 0,-2-2 0 0,-1-1-4 16,-3 1-5-16,0-2 9 0,-3 0-1 0,-2-2-4 0,-2-2 4 16,-3 1-8-16,-3-3-17 0,-4 0 8 0,-3-2-9 0,-2 0 1 0,-5 0 12 15,-3 0-14-15,-2-1 10 0,-6 4-18 0,-3-1 2 0,-3 1 4 16,-2 3-12-16,-3 0 12 0,-2 2-10 0,-2 0-10 0,-5 3-4 0,0 4-6 16,-2 3 0-16,0 3-3 0,0 3-11 0,1 5-5 0,0 5-25 0,2 4-27 15,1 5-49-15,2 3-95 0,0 5-162 0,0 5-285 0,1 3-722 16</inkml:trace>
-  <inkml:trace contextRef="#ctx0" brushRef="#br0" timeOffset="118565.96">25750 16124 1932 0,'-4'-1'677'15,"0"0"-544"-15,1 0-19 0,1 0-23 0,2 0-9 0,0 0-11 16,2 0-5-16,0 0-16 0,2 0 1 0,0 0-2 0,2-1-17 0,2 1 6 16,0-2-23-16,3 0 1 0,1 0-1 0,3 0-13 0,2 0 7 15,3 0-13-15,2-1 6 0,0 2 3 0,3-1-3 0,-1 0 4 0,1 1-8 16,3 1 0-16,0 1 6 0,2 0-8 0,0 1-7 0,1 1 13 0,1 1-15 15,2 0 6-15,1 1 7 0,3 0-11 0,0 0 13 0,1 1-21 16,2 0-15-16,0-1-11 0,2-1-32 0,0 0-11 0,1-1-25 0,1-1-29 16,2 0-22-16,1-2-49 0,0-1-55 0,0-2-87 0,1-2-138 0,4-4-436 15</inkml:trace>
-  <inkml:trace contextRef="#ctx0" brushRef="#br0" timeOffset="119332.95">30391 15541 2043 0,'-15'-2'46'0,"-1"0"-25"0,-3-3-6 0,2 1-10 15,2 0-3-15,0-1-4 0,1 0-2 0,3 0-9 0,0 1 2 0,1 0-4 16,0-1 3-16,0 1-1 0,2-1-7 0,1 1-3 0,1 0-2 0,-1 1 0 16,1 0 3-16,0 0 12 0,1 2 2 0,0 1 7 0,2 0 3 15,0 0 0-15,1 3 2 0,0-1 0 0,0 1 2 0,2 1 12 0,0-1 2 16,1 0 17-16,1 1 7 0,-1-1 4 0,2 0 10 0,0 1-2 0,0 0-7 16,2-1 2-16,0 0-6 0,1 0-2 0,1 0 2 0,0 1-3 15,2-1 0-15,0 0-2 0,1 0-7 0,0 0 2 0,0-1 4 0,1 0-8 16,0-1 8-16,0 0-9 0,1 0 1 0,-2 0 14 0,0 0-6 15,-2-2 14-15,-2 0-12 0,-2 1 1 0,1-1 2 0,-1 0-11 0,-1-1 4 16,0-1-8-16,-2 1 0 0,1 1 3 0,-2-2-9 0,-1 1-5 0,0-1 0 16,0 0-11-16,-2 0 6 0,1-1-6 0,-2-1-7 0,1 0 0 15,1 0-15-15,-1 0 5 0,0-1-5 0,0 0-1 0,0 1 0 0,0-2-9 16,0 1 6-16,1 0 1 0,0-1 2 0,2 1 0 0,-2 0-3 16,1 0-2-16,1 2 5 0,-2-1 0 0,2 1-3 0,-3 0 2 0,3 0-5 15,0 0 3-15,-1 0 3 0,1 1-4 0,-2 0-1 0,1 1 1 0,-1 0-5 16,-1-1-2-16,-1 1-4 0,-1 1 1 0,1-1 6 0,-2 1 14 15,2 0 6-15,-2-2 8 0,-1 2-3 0,0-1-12 0,-1 1-4 0,2 1 0 16,-2-1 4-16,2 0 2 0,0 1 6 0,0-1 5 0,1 1 1 0,1-1 7 16,0 1-7-16,1-2 12 0,1 1 8 0,-1 0 5 0,3-1 9 15,-1 1-5-15,0-2-7 0,2 1 2 0,-1-1-3 0,1 2-4 0,0-2 6 16,-1 0-2-16,2 1-4 0,0-1 5 0,0 1-1 0,1-1-8 16,0 0-2-16,2 0-4 0,-2 0-3 0,3 0 4 0,0 0-4 0,-1 0-4 15,2 1-5-15,0-1-3 0,1 1 5 0,2 1 4 0,-1-1-6 0,-1 0 0 16,2 1-1-16,0-1-3 0,1 1 3 0,0 0-1 0,-1 1-3 15,0-1-3-15,1 1-8 0,0 0-6 0,0-1-11 0,0 0-14 0,-1 1-18 16,-1 1-19-16,0-1-9 0,0 0-14 0,0 0-4 0,1 0-7 0,-1 1-7 16,-1 0-4-16,0-1 4 0,-1 1-2 0,0-1 6 0,0 1 10 15,-2 1 9-15,0 0 23 0,-1-1 14 0,-1 0 17 0,1 0 14 0,-2 0 4 16,-1 1 9-16,-1 0-3 0,0-1 4 0,1 1-3 0,-2-1-13 0,0 2-24 16,-2-1-51-16,-1 2-56 0,-1-1-322 0</inkml:trace>
-  <inkml:trace contextRef="#ctx0" brushRef="#br0" timeOffset="119549.95">30096 15633 2211 0,'-6'2'204'0,"2"1"-92"0,0 1-14 0,4-1-51 0,2 0-18 16,5 0-6-16,1-1-9 0,3 0 14 0,4-1 4 0,0 0-1 15,4 0 6-15,3 0-9 0,2 0 1 0,1-2-7 0,1 1-3 0,1-2-2 16,1 1-5-16,0 0 0 0,0 0 3 0,-1-1-3 0,-2 1-3 15,3-1-2-15,-3 1-6 0,1 0 5 0,-1-1-6 0,-2 0-6 0,0-1 1 16,-1 1-7-16,1 1-10 0,-2-1-14 0,0 0-39 0,-1-1-25 0,-1 0-34 16,-1 0-28-16,-1 0-11 0,0 0-27 0,-1-1-24 0,1-1-52 15,1 0-67-15,1 0-131 0,2-1-123 0</inkml:trace>
-  <inkml:trace contextRef="#ctx0" brushRef="#br0" timeOffset="120165.95">31621 15198 1845 0,'-6'-2'585'0,"-2"0"-436"0,-2 0-29 0,2 0-30 16,0 1-12-16,-1-1-7 0,2 1-1 0,2-1-10 0,0 0-23 0,-1 2 8 15,2-1-13-15,0 0-25 0,1 1 20 0,1 0-36 0,1 1 10 16,-1-1 12-16,0 1-22 0,2 0 11 0,-1 0-15 0,2 1-4 0,-1 1-3 16,1 2-4-16,1 1-9 0,3 2-2 0,1 3-7 0,1 2-14 15,1 1-12-15,2 4-17 0,5 2-16 0,-1 0-3 0,3 4-6 0,0 0 2 16,2 1-10-16,4 2-6 0,-2 1 0 0,5 3 2 0,-1-2 14 0,2 1 17 15,-1-3 18-15,-2-1 21 0,0 0 19 0,-3 0 18 0,1-2 14 16,-3-2 8-16,-3 0 10 0,-2-2 13 0,-2-1 19 0,-5-1 20 0,-2-1 16 16,-3-2 24-16,-1 1 2 0,-2-1 7 0,-3 0 3 0,-2-1-17 0,-1-1-3 15,-2-1-20-15,-3 0-8 0,-2 0-7 0,-2-1-11 0,-1-1-13 16,-1 0 7-16,-3 1-9 0,-2-2 7 0,-1-2 7 0,-3 1-26 0,0-3 18 16,-1-2-22-16,1 0-5 0,3-2 13 0,4 0-27 0,0-2 12 15,3 0-10-15,0-2-7 0,2-1 2 0,1-1-7 0,4-2-11 0,2-2-3 16,0-1-11-16,4-1 6 0,-1-1 5 0,1 1-5 0,4-1 12 0,-1-1-2 15,3-2 4-15,-1 0 3 0,1-2-16 0,3-1 4 0,0-1 5 16,3 1 1-16,1-1 10 0,0-3-16 0,1 0 2 0,2-1 2 0,2-1 2 16,2 2 3-16,-3-3 0 0,6 0 2 0,-2-1 0 0,2 1 4 0,1-3 3 15,-1 0-4-15,2 1 5 0,-1-1-2 0,-2 2 2 0,0 1 8 16,-4 1 1-16,-1 1 1 0,0 1 3 0,-3 1-2 0,-1 1 4 0,-1 0 7 16,-5 4 2-16,3-1 3 0,-4 2-9 0,1 1-1 0,-1 2 4 0,-4 1 11 15,2 2 9-15,-3 1 3 0,-1 2-6 0,0 1-5 0,-2 0 1 16,-1 1 0-16,-1 0-6 0,-1 1-12 0,-1 1 2 0,-1 1-2 0,1 1-3 15,0 0-2-15,0 2-10 0,-2 1-2 0,1 0-3 0,-2 1-5 16,2 1-16-16,-1-1-27 0,1 2-42 0,2-1-60 0,0 0-58 0,2 1-61 16,-1 1-64-16,3 1-86 0,-1 2-143 0,0 2-251 0</inkml:trace>
-  <inkml:trace contextRef="#ctx0" brushRef="#br0" timeOffset="120549.95">31055 14959 2555 0,'-8'-6'128'0,"1"-1"-30"0,-2-1-18 0,2 0-21 16,2 1-26-16,3-2-17 0,3 2-6 0,0-1-13 0,2 1-6 0,3 0 6 16,0-1-8-16,3 1-2 0,2 1-2 0,2 0-4 0,2 1 4 0,2-1 5 15,3 2-2-15,0-1 2 0,1 0 8 0,3 2 1 0,1 0 7 16,5 1-1-16,1 1 0 0,4 0-3 0,4 1-5 0,3 2 6 0,5 1-8 15,3 4 3-15,0 1-1 0,2 2-12 0,1 1 2 0,2 1-15 0,0 2 3 16,0 3 0-16,-2 3-11 0,-3 1 0 0,1 4-6 0,-24-11 20 16,5 4-5-16,0 2 1 0,8 6-15 0,-1 2-15 0,6 6-3 0,0 3 10 15,4 4 18-15,-2 3-4 0,0 3 7 0,-1 0-8 0,-3 2 5 16,-2 0 6-16,-1 2 3 0,-3-2 4 0,-2 2-14 0,-3-1 2 0,-4 0 64 16,-2-1 12-16,-4 1 37 0,-6-3 17 0,-3-1-43 0,-5-3 35 0,-4 0 13 15,-5-4-41-15,-4-3 26 0,-5-1-11 0,-5-4-2 0,-4-2 62 16,-5-2-17-16,-5 0-6 0,-5-2-26 0,-6-3-21 0,-6 0-12 0,-6 0-18 15,-4-2 0-15,-5 1-7 0,-16 0-45 0,-62 14 0 0,13-7-19 0,15-4 19 16,29-8 32-16,5-2-3 0,2 0 18 0,3-2-30 0,4-2 2 16,5-1-25-16,5-4-19 0,4-2-23 0,3-5-42 0,3-3-16 0,3-5-31 15,2-5-31-15,0-4-32 0,0-6-31 0,2-5-81 0,2-5-192 16,3-7-526-16</inkml:trace>
-  <inkml:trace contextRef="#ctx0" brushRef="#br0" timeOffset="127668.14">30195 15095 463 0,'-12'2'53'15,"-1"-1"5"-15,-3 0 0 0,3-2-16 0,1 0-15 0,-1-1-7 16,0 1 6-16,1-1 12 0,0 1 4 0,2 0 2 0,1 0-7 0,0 1-4 16,1 0-1-16,0 0-2 0,2 0-1 0,-1-1-2 0,-1 0 0 0,1-1-2 15,0 0 0-15,0-1-2 0,0-1-3 0,0 1 6 0,2 0 0 16,0-1 3-16,0 1-2 0,0-1-6 0,1 0-6 0,0 1-1 0,1 0-4 15,0 0-2-15,1-1 6 0,1 2-3 0,0-1 1 0,0 1 0 16,1 0-9-16,1-1 0 0,1 0 2 0,-1 1-2 0,1-1 0 0,1 0 1 16,0 0-3-16,1 0 4 0,0-1 0 0,2 1 0 0,0-1 3 0,0 1-1 15,2 0 1-15,1 0 1 0,1 0 4 0,1 1-4 0,1-1 5 16,1 0 0-16,0 1-4 0,1 0-1 0,0 0-1 0,0 1-4 0,1 0 1 16,3 0 4-16,0 2-6 0,-1-1 5 0,1 0-1 0,3 1-2 0,-1-1 0 15,2 0 1-15,-2 2-2 0,-1-2 4 0,2 2-3 0,0-1-4 16,-1 1 5-16,1-1-6 0,0 0 4 0,-3 0 1 0,0 0-9 0,-2 0 11 15,0-1-6-15,0 1-1 0,-2-1 9 0,0 0-12 0,-1 1 6 16,0-1-2-16,0 1-1 0,1-1 4 0,-1 1-3 0,0-1-1 0,-1 2-6 16,0-1-7-16,1 0-17 0,-1 0-16 0,1 0-27 0,-2 0-31 0,2 1-22 15,0 0-22-15,-2 0-13 0,2 1-22 0,-3 1-315 0</inkml:trace>
-  <inkml:trace contextRef="#ctx0" brushRef="#br0" timeOffset="127900.14">30012 15454 1270 0,'-10'13'55'0,"1"1"-13"0,-1 2 16 0,5-3 5 15,3-3-4-15,2-1-7 0,0 0-18 0,2-3-12 0,2 2-5 16,1 0-9-16,1-1-2 0,3 0-1 0,1-2-10 0,4 0-8 0,0-2-6 15,2-1 8-15,3-1 1 0,0-2 5 0,2 0-11 0,4-2-30 0,1-3-41 16,5-2-70-16,0-3-68 0,5-1-277 0,0-1 50 0</inkml:trace>
-  <inkml:trace contextRef="#ctx0" brushRef="#br0" timeOffset="132583.81">30415 6353 73 0,'-31'-4'68'0,"-6"0"-13"0,-9-1-10 0,3 2-8 0,4 0-9 16,1 2-5-16,-1 0-3 0,-1 1 1 0,0 1-4 0,0 0 3 0,-1 2-3 16,2 1 4-16,-2 0-2 0,0 0 0 0,0 0-2 0,1 1-3 15,0 1 0-15,2 0-5 0,0 0-1 0,-2-1-3 0,2 1-4 0,0 2 4 16,0 0 3-16,2 0 1 0,-3 3 4 0,3-1 4 0,-1 0 2 0,1 1 3 15,0 0 1-15,-5 1-2 0,3 0-4 0,-2 1 0 0,0 0 1 16,0 2 0-16,0 1 6 0,-1 1 10 0,2 1 1 0,0 1 5 0,0 1-1 16,2-2-7-16,-1 1 2 0,1 1 3 0,2-2-4 0,-1 2-2 0,2 1-3 15,-2 0-4-15,2 1-1 0,0 2-1 0,-1-1 1 0,4 1-3 16,-1 0-4-16,1 1-2 0,0-1-2 0,1 0 1 0,1 1 4 0,3 0-2 16,0 1-2-16,3 0-3 0,2-2-5 0,2 1 5 0,2-2-2 15,2 1 2-15,2-1 3 0,2-1 1 0,2 3 3 0,2-2 0 0,3 1 3 16,2-2-4-16,1-1 4 0,3 0-3 0,2 0-4 0,1-2 2 0,3 2-3 15,2-1-6-15,1-1 3 0,1 2-2 0,2-2-1 0,2 1 4 16,1 0-5-16,0-1-3 0,1-1-5 0,3 1 3 0,0 0 1 0,3 1 6 16,2-2 4-16,-1 1-4 0,3 0 6 0,0-1-2 0,2 1-3 0,0 1 0 15,2-2-2-15,3 0-1 0,0 0 5 0,1-1 2 0,-1-1-4 16,1 0 3-16,1 0-5 0,1-1 0 0,0 1-1 0,0-2 6 0,3-1 4 16,-1-3 2-16,2-3 11 0,3-2 0 0,1-2 3 0,3-2-1 15,2-2-6-15,1-1 1 0,1-2-4 0,2 0-2 0,1-3-1 0,0 0-2 16,3-1-2-16,0-1-4 0,1 0 1 0,0 1-4 0,0 0 0 0,-1 2 2 15,1-1-4-15,-2 0 1 0,-1 1-2 0,0 0 1 0,0 1 2 16,1 0-1-16,0 0-1 0,-1 2 2 0,1-1-7 0,0 1 2 0,-2 1 1 16,2-1 1-16,-3 1 0 0,-1 0-2 0,-2 0 1 0,0 1-3 15,-1 0 7-15,-1 0 3 0,0 1 0 0,-3-1-1 0,-2 0-6 0,0-1-2 16,2-1 1-16,-2 1 4 0,1-2 0 0,-3 0 1 0,-2 0 2 0,-1-1-1 16,-3-1 3-16,3 1 1 0,-2 0 7 0,1-2 2 0,1 1-2 15,-1-3-1-15,3 0-7 0,-2 0-7 0,-3-1 5 0,-1 1-6 0,-4 1-1 16,1 2 2-16,-2-1-2 0,1 1 1 0,-2-1-2 0,-2 0 2 0,0 0-7 15,0 0-2-15,-3 1 1 0,2-1-2 0,-3 0 8 0,-1 1-1 16,0 0 3-16,-5 0-3 0,0 0 0 0,-2 0 20 0,-2 0 3 0,-3 2-3 16,0-1 1-16,0 1-18 0,-6 2-4 0,0 0 7 0,0-1 6 0,2 0-3 15,-2 1 2-15,0-2-6 0,-1 0-16 0,2-1-6 0,0-1-17 16,0 0-18-16,0-1-21 0,-1 0-36 0,2-2-33 0,1 0-58 0,0-1-88 16,1-3-82-16,3 0-385 0</inkml:trace>
-  <inkml:trace contextRef="#ctx0" brushRef="#br0" timeOffset="137250.81">31675 6031 1805 0,'-9'-20'70'0,"2"2"-27"0,0-2 16 0,4 8 7 0,1 5-14 0,1 4-18 15,1-1-11-15,0 2-10 0,3 1-10 0,0 2 0 0,1 0-6 0,5 4-3 16,1 0 3-16,4 4 0 0,3 3 3 0,1 0 0 0,1 3 0 16,2-2 0-16,1 3 0 0,0 1 0 0,0 0 3 0,-1 1-4 0,1 2 4 15,1 2 1-15,1 0-2 0,-1 4 11 0,2-1-3 0,1 3-1 0,-1 0 5 16,2 1-2-16,0-1 13 0,0-1 10 0,-13-14 2 0,5 3 4 15,2-2-11-15,3 2-5 0,3 0 3 0,4 1-5 0,5-3-4 0,5 2 1 16,2-2-4-16,2-2-7 0,1-3 5 0,1-3-3 0,3-2-3 16,1-3 48-16,0-2-6 0,-26-1-11 0,5 0-3 0,0-3-59 0,4 0-10 15,1-2-4-15,4-2-11 0,-1-1-6 0,4-2 44 0,1-1-8 0,4-1-25 16,2-2 2-16,3-2-41 0,2-1 15 0,3-2 32 0,0-1 28 16,4-2 20-16,1-1 34 0,-1-1 42 0,1-3 37 0,4-1 33 0,-5 2-159 15,-3 1 0-15,-3 2 0 0,-3 1 0 0,-5 3 0 0,-41 0 0 0,-6 2 0 0,0 2 0 0,0 2 0 0,0 2 0 0,0 1 0 0,0 3 0 0,0 1 0 0,0 3 0 16,0 4 0-16,0 1 0 0</inkml:trace>
-  <inkml:trace contextRef="#ctx0" brushRef="#br0" timeOffset="141100.53">23437 16950 2336 0,'-32'28'300'0,"16"-14"-238"15,-3 3-12-15,-3 3-17 0,-3 2-18 0,3-5 10 0,-2 2-40 0,6-4-13 16,-3 1 3-16,3-3-12 0,3-1 9 0,2-2-4 0,2-2-28 0,3 0-25 16,2-3-42-16,2-1-38 0,3-1-23 0,3 0-18 0,3-2 20 15,5 0 3-15,3-2-21 0,4 0-18 0,5-2-51 0,4-1-267 0</inkml:trace>
-  <inkml:trace contextRef="#ctx0" brushRef="#br0" timeOffset="142834.81">29410 16615 113 0,'-7'-1'-58'0,"0"-2"27"0,-1-2 32 0,1-1 16 16,1 0 21-16,-1-2 22 0,0 1 11 0,-3 1 2 0,0-2-13 16,-2 0-4-16,-1 0 1 0,0 0-3 0,0 2 2 0,-3-2 6 0,-1 2 3 15,-1 0-6-15,-4 0-2 0,-1 0-6 0,-2 2-9 0,-1 0 3 0,-1 0-7 16,0 1 2-16,-3-1-2 0,0 1-5 0,-2-1 3 0,-3 0-7 15,-1 1-4-15,-3-1-1 0,0 0-5 0,-2-1-1 0,-3 0 3 0,1 0-2 16,-2 0-2-16,-1-1 2 0,-5 1-3 0,1-2-7 0,-3 2-5 16,-1-1-5-16,0 0 1 0,-1 0-4 0,-2 1 3 0,1 2-4 0,-1-2 3 15,-1 1 0-15,2 1-4 0,-1-1 0 0,2 1-8 0,2 0-1 0,-1 0-13 16,3-1-18-16,1-1-13 0,-1-1-11 0,4-2 9 0,1 1 0 16,2-1-4-16,0 0-19 0,2-2-54 0,-1-3-324 0</inkml:trace>
-</inkml:ink>
-</file>
-
-<file path=ppt/ink/ink7.xml><?xml version="1.0" encoding="utf-8"?>
-<inkml:ink xmlns:inkml="http://www.w3.org/2003/InkML">
-  <inkml:definitions>
-    <inkml:context xml:id="ctx0">
-      <inkml:inkSource xml:id="inkSrc0">
-        <inkml:traceFormat>
-          <inkml:channel name="X" type="integer" max="34422" units="cm"/>
-          <inkml:channel name="Y" type="integer" max="19362" units="cm"/>
-          <inkml:channel name="F" type="integer" max="4095" units="dev"/>
-          <inkml:channel name="T" type="integer" max="2.14748E9" units="dev"/>
-        </inkml:traceFormat>
-        <inkml:channelProperties>
-          <inkml:channelProperty channel="X" name="resolution" value="1000.05811" units="1/cm"/>
-          <inkml:channelProperty channel="Y" name="resolution" value="1000.10333" units="1/cm"/>
-          <inkml:channelProperty channel="F" name="resolution" value="0" units="1/dev"/>
-          <inkml:channelProperty channel="T" name="resolution" value="1" units="1/dev"/>
-        </inkml:channelProperties>
-      </inkml:inkSource>
-      <inkml:timestamp xml:id="ts0" timeString="2025-07-17T10:55:55.635"/>
-    </inkml:context>
-    <inkml:brush xml:id="br0">
-      <inkml:brushProperty name="width" value="0.05292" units="cm"/>
-      <inkml:brushProperty name="height" value="0.05292" units="cm"/>
-      <inkml:brushProperty name="color" value="#FF0000"/>
-    </inkml:brush>
-  </inkml:definitions>
-  <inkml:trace contextRef="#ctx0" brushRef="#br0">7591 6171 769 0,'2'2'47'0,"3"2"-13"0,3 2-4 0,2 1-11 0,2 0-8 0,2 1-1 15,0 0-6-15,2 0-2 0,0 1-1 0,2 0-3 0,1 1-3 16,2-1 0-16,3 1-2 0,0-1 2 0,3 0 1 0,1-1 2 0,0 0 1 16,0-1 1-16,4-3 2 0,-1 0 1 0,4-2 3 0,2-1 7 0,0-1 4 15,2-1 11-15,1 1 9 0,2-3 3 0,0 0 10 0,2-1 0 16,0-1 5-16,4 0-3 0,0-1-5 0,1-1-10 0,1 0-7 0,-1 0-8 15,2-1-3-15,1 1-4 0,0-2-3 0,1 0-2 0,1-1 4 0,-1-1 1 16,2 0-3-16,0-1 5 0,1-2-5 0,-1 0 6 0,1-1 2 16,-1-1 0-16,-1 2 3 0,0-2-1 0,-1-1-3 0,-1 1 0 0,-1-2-2 15,0-1 4-15,-4-1 1 0,-1 2 5 0,-2-2-1 0,-2 1 3 16,-3 2 5-16,-2-1-4 0,-2 0 3 0,-2 1 4 0,0-1 3 0,-3-1 2 16,-2-1 4-16,-3 2-12 0,-1-2-1 0,-1 0 2 0,-3 1-12 0,1-2-1 15,-3 1 8-15,-1 2-7 0,-2-3 7 0,-2 0 3 0,-1 0-10 16,-1-1-5-16,-3 0-1 0,0 0 1 0,-2-1-1 0,-4 0 1 0,-1 0-1 15,-2 0-7-15,-3-1-6 0,-2-2-1 0,-4-1-7 0,-4-1 2 0,-1-1-6 16,-5 0-4-16,-2-1-10 0,-4 1-4 0,-3-2 2 0,-6-1-6 16,-3-1-8-16,-6-2-4 0,-5 0-1 0,-3-1 2 0,-6 1 11 0,-4 0 4 15,-6 1 0-15,-4 0 8 0,-2 2 8 0,-5 1 7 0,-2 0 6 16,0 2 5-16,-2-1 4 0,0 2-4 0,1 1-1 0,-2 2-4 0,0 3 2 16,1 2 3-16,-2 1-1 0,2 3 1 0,-2 2-7 0,0 1 2 0,0 3-3 15,-1 3 3-15,0 1-2 0,-1 3-2 0,2 3 4 0,-2 3-6 16,1 2-2-16,1 3 8 0,-3 4-4 0,0 3 2 0,1 2 4 0,-1 5-5 15,2 3 3-15,0 4-1 0,1 6 4 0,1 3-3 0,2 2-4 0,2 4 2 16,3 1-1-16,2 2 0 0,3 3 2 0,4 2-11 0,2 0 5 16,5 2 1-16,3 1 0 0,5 1 9 0,5 3-2 0,3 2-6 0,4 0 4 15,5 3-1-15,5 0-4 0,3-1 1 0,6 2 3 0,5-2 2 16,4-2 3-16,7-2 5 0,4-1-1 0,4-4-4 0,4-1 0 0,5-2 1 16,3-3 2-16,6-1 4 0,3-1 2 0,2-2-4 0,4 0 5 0,3-2-6 15,4-2 2-15,1 1 5 0,3-3-11 0,1-1 3 0,0-1-8 16,3-2-1-16,3 2-1 0,1-3-2 0,1 0-2 0,1-2-4 0,1-3-12 15,3 0-11-15,2 0-23 0,1-3-54 0,2 1-116 0,2-3-169 0,1-2-527 16</inkml:trace>
-  <inkml:trace contextRef="#ctx0" brushRef="#br0" timeOffset="4250.39">28459 6312 1173 0,'6'1'43'0,"4"1"-57"0,5 1-1 0,2 1 13 15,0 2 17-15,2-2-1 0,2 1-6 0,1 0-16 0,2 1-13 0,1 2-1 16,2 2 1-16,2-1 2 0,0 0 3 0,3 1 0 0,0-1 3 16,2 1 2-16,0-1 11 0,1 0 5 0,1-2 1 0,-1-1-1 15,2 1-1-15,0-1-1 0,-1 0 7 0,3-1 2 0,-2-1 1 0,3 0 4 0,0-1 5 16,-1 0 1-16,0 0 4 0,-1 0-4 0,-1-1-6 0,2-1 1 16,0-1-3-16,-2 0 2 0,2-1 0 0,-1-2 0 0,-1 1 0 0,0-2 6 15,-1 1 3-15,0-1 6 0,-1-1 7 0,0 0 0 0,0-1 2 16,0-1 5-16,1 0-9 0,-4 0 2 0,0-1-10 0,-1-1-5 0,0-1 1 15,-2 0-8-15,1-1 0 0,-3 1-2 0,-1-2 1 0,0 0 5 16,-2 0-1-16,0-1 2 0,-2 0-4 0,0-4-6 0,-3 0 3 0,-3-1-4 16,2-1-1-16,-1-2-2 0,-1-2-1 0,-2 0-2 0,0 0-3 0,-1 0 1 15,0-1-2-15,0 1-1 0,-3 1 3 0,0-1 1 0,0 0 2 0,-3 2 1 16,1-1 0-16,-3 2 4 0,0 1-4 0,-1 1 7 0,-2 0 3 16,-1 1 0-16,-2-1 7 0,-1 0-1 0,-2 1-3 0,-1 0-2 0,-1-1-7 15,-1-1-5-15,-3 1-4 0,-1-1 4 0,-2-1 1 0,-1 0-1 0,-1-3 1 16,-2-1-8-16,-2 0 1 0,-3-2 3 0,-2 1-3 0,-1-2 1 15,-3 0-1-15,-1-1 3 0,-4-1-3 0,-1-1 3 0,-3-2 1 0,0 0 1 16,-3 1 2-16,0 0-1 0,-2 2 0 0,-2 0-2 0,-2 0 1 16,0 2-1-16,-1-1 4 0,0 3-4 0,-1 1 11 0,-1 3 2 0,0 0-10 15,0 1 1-15,-1 1-7 0,1 2 1 0,-1 2 2 0,1 0 2 16,-1 2-4-16,1 2-2 0,-2 0 3 0,0 2 1 0,1 2 2 0,-1 1-3 16,-1 1-9-16,-1 2-3 0,-2 2 0 0,-2 0 2 0,1 2 10 0,0 1-5 15,3 0 2-15,1 2-1 0,1 0-2 0,1 1 4 0,1 0-1 0,-1 2-1 16,1-1-5-16,0 0-3 0,2 2 3 0,1-2 0 0,2 1 7 15,4 1 1-15,2 0-2 0,2 2-3 0,2 0 3 0,2 1-11 0,2 0 7 16,1 2-2-16,3 0-15 0,2 0 9 0,1 1-4 0,2 1 1 16,0 4 4-16,2 0-6 0,2 1 1 0,1 3 2 0,1 0-2 0,1 0 6 15,1 2-3-15,1 1 0 0,1 1 2 0,2 1-1 0,0 3 2 0,1-1-14 16,3 3 2-16,-1-1 2 0,1-1 2 0,1 0 14 16,0-1 4-16,2-2 0 0,0 1 0 0,3-2 3 0,1-1-4 0,0 0 7 0,2-1 4 15,1-1 13-15,2 0 3 0,1 0 0 0,2 0-9 0,3-1-9 0,2 0-5 16,0-1-1-16,1-2 6 0,2 0-9 0,0 1 2 0,2-1-4 15,0 0-1-15,1 0 10 0,-2-4-8 0,-1 0 1 16,0-1 2-16,0-2-3 0,-1-2 7 0,2 0 1 0,-1-1-2 0,0-1 1 0,1-1 2 0,0 0 1 16,-2-1 3-16,1-1 0 0,-1 1-5 0,1-1 3 0,-1 0-2 15,2-1 0-15,0 0 2 0,-1 0-3 0,2 1-2 0,-1-2 4 0,-2 2-5 16,2-2 2-16,-1 0 4 0,0 1 3 0,-2-1-2 0,1 0 7 16,-1 0-10-16,0 0 4 0,-1-1-5 0,1 1 4 0,-2 0-4 0,1 0-3 15,-3-1 3-15,0 1-10 0,1 0 7 0,0-1-3 0,-2 1 3 0,-2-1 3 16,0 0-3-16,-1-1 3 0,0 1-5 0,-1 0-1 0,-1 0 3 15,0 0 5-15,-1-1 1 0,0 1 1 0,-2-1-3 0,0 0 2 0,1 0-6 16,-1 0 3-16,-1-1 6 0,1 1-10 0,-1-1 4 0,-1 0-2 0,2 0-7 16,-2 0 6-16,0-1-6 0,1 1 2 0,-2-1 2 0,1 1 1 15,-1 0 1-15,1-1 1 0,-2 1 1 0,1-1-8 0,0 0 8 0,0 0-8 16,0 1-1-16,0-1 4 0,0 0-3 0,-1 0 2 0,0 0-1 0,0 1-1 16,0 0-4-16,-1-1 2 0,1 1-3 0,-1 0-4 0,1 0 5 15,-1 1-6-15,0-1 3 0,0 0-7 0,-1 0-8 0,0 0-16 0,0 1-9 16,1-1-11-16,0 0-20 0,-1 1-25 0,-1-2-32 0,0 0-35 15,-1 0-46-15,-1-1-55 0,-1 0-99 0,-2-2-184 0</inkml:trace>
-  <inkml:trace contextRef="#ctx0" brushRef="#br0" timeOffset="33553.01">12905 10325 1543 0,'-9'-3'66'0,"-1"-1"-32"0,0 0-23 0,4 2-6 0,3 0-2 0,1-1-8 16,1 0-2-16,2 1-5 0,0 0 0 0,0 0 7 0,0 1 3 16,0 0 5-16,0-1 3 0,1 1-4 0,-1-1-1 0,1 0 1 0,1 1-4 15,-1 0 6-15,2-1 1 0,-1 1 3 0,1-1 3 0,0 0-2 16,-1 0 3-16,1 0-2 0,1-1 5 0,0 1 5 0,-1-1-3 0,0 1 5 16,1 0 2-16,0-1-3 0,1 1 3 0,1-1 0 0,0-1-5 0,1 2 3 15,0-2-3-15,1 1-7 0,1 0 3 0,0-1-2 0,1 1-5 16,0 1 4-16,0-1-3 0,0 2 1 0,1-1 5 0,0 0 0 0,0 1 4 15,-1 0 9-15,1 0-5 0,0 0-2 0,1 0 7 0,-1 1-9 0,0-1 4 16,1 0 3-16,0 0-11 0,1 1-6 0,0-1-2 0,-1 0-2 16,1 0-1-16,0 0 2 0,1 0 2 0,-1 0-4 0,1 1 7 0,0-1-4 15,-1 0-1-15,-1 0 6 0,2 0-6 0,-1 1 0 0,1-1 0 16,-1 0-1-16,2 1-1 0,-1 0 1 0,1 1-2 0,-1-1-2 0,1 0 1 16,-2 1-4-16,0-1 2 0,-1 1 2 0,0 0-1 0,1-1 4 0,-1 1-4 15,0 0-2-15,-2-1 4 0,2 1-2 0,0 0 4 0,-1 1-2 16,1-1-3-16,-2 1 3 0,0-1-1 0,1 1-1 0,0 0 1 0,-1 0 2 15,1 1-1-15,-3-1 0 0,2 1 0 0,-1-1-3 0,1 1 0 0,-2 0-1 16,1-1-1-16,-2 1 1 0,1 0 2 0,0 0 2 0,0-1-3 16,-1 1 0-16,0 0 0 0,0-1 2 0,-2 1 1 0,1-1-6 0,-1 1 3 15,0-1 1-15,-1 1-1 0,0-1 5 0,0 1-2 0,0-1-3 16,0 1 0-16,1 0 0 0,-1-1 0 0,0 2 5 0,0 0-4 0,0 0-2 16,0 1 2-16,0 0 4 0,1 0-7 0,-1 0 7 0,0 0-7 0,-1 0 1 15,0 1 5-15,0-1-2 0,0 1 2 0,1-1-4 0,-2 2 0 16,0-1 2-16,0 1-2 0,0 0 0 0,1 0 2 0,-2-1-1 0,1 0-1 15,0 1 3-15,0-2-1 0,0 1-2 0,-1 1 1 0,-1-1 1 0,1 1 1 16,-1 0-2-16,0 1-1 0,0-1-4 0,0 0 4 0,0-1 1 16,-1 1 1-16,1 0-1 0,-1 0 1 0,0 0-2 0,1-1 0 0,-2 1 1 15,0 0-1-15,0 0 0 0,0-1 0 0,-1 2 5 0,1-1-5 16,-1 0-3-16,0 0 5 0,0 0-4 0,-1 0 0 0,0 0 6 0,-1 0-8 16,0-1 3-16,-1 1 1 0,0 0-2 0,0 1 1 0,-1-1 2 15,-1 0 1-15,0 0-5 0,-2-1 4 0,0 1 2 0,0-2-3 0,-1 1 4 16,1 0-4-16,-1 0-4 0,0 0 6 0,-1 0 1 0,-1 0-4 0,1-1 1 15,-3 1 0-15,0 0 3 0,-1 0 0 0,1-1-2 0,0 0 1 0,-2 1-1 16,-1-1-1-16,1 0 7 0,0-1-4 0,-1 0 0 0,2-1 0 16,0 0-5-16,-2-1 7 0,1 0 3 0,0-1-4 0,1-1 3 0,0 0-4 15,-1-1 0-15,0 0 2 0,1-1 1 0,0 0 0 0,-1-1-1 16,0-1 1-16,1 1-4 0,-2-2 4 0,0 1-5 0,0-1 3 0,1 0 0 16,0 0-1-16,0 1-1 0,0-2 1 0,1 0 0 0,-1 0-3 0,-1 0 4 15,0 0 2-15,-1 1-5 0,0-1 3 0,1 0-3 0,0 0 1 16,0 0 1-16,1 2 0 0,0-3-1 0,1 1-1 0,0-1 2 0,1 0-1 15,1 0 0-15,0-2-10 0,1 1-5 0,0-1 4 0,1 0 1 0,1 0-5 16,1-1-1-16,1-2-3 0,1 0 1 0,0-1 4 0,2-2 4 16,0-1 2-16,1-2-4 0,1 0-5 0,0-2-5 0,2 0-9 0,1 1-8 15,1-1-6-15,2 1-27 0,1 3-31 0,2-2-36 0,1 0-53 16,2 0-64-16,2 0-93 0,1-2-466 0</inkml:trace>
-  <inkml:trace contextRef="#ctx0" brushRef="#br0" timeOffset="34269.08">13116 10320 2416 0,'-18'-7'55'0,"1"-2"-27"0,-5-1-32 0,6 1-11 15,4 0 1-15,1 0-11 0,2-1-7 0,0 1 0 0,0 0 3 0,-1 1 14 16,-2 0 10-16,0 0 8 0,-1-1-1 0,-3 0-1 0,-1 0-2 0,-1 0 4 16,-1 1-8-16,-2 0-2 0,0 0 7 0,-2 0-5 0,-1 0 10 15,1 1 8-15,-2 0-2 0,1 0-1 0,-1 1 4 0,-1-2-3 0,0 0-5 16,-2-1 3-16,0 0-1 0,-2 0-1 0,1 0 6 0,-3 0-3 0,0 1 3 15,-1-1-2-15,0 0-4 0,-1-1 3 0,1 0 4 0,-3 1-3 16,3-2 3-16,-3 1-3 0,-3-1 0 0,1 0 3 0,-1 0 5 0,1 0 3 16,2 2 1-16,-2-2 1 0,1-1-2 0,-1 1 4 0,-1-1 3 0,0 2-1 15,-1 0 2-15,0-1-7 0,1 0-4 0,0-1 6 0,1 1-1 16,-2 0-2-16,-1-1 6 0,0 0 1 0,1 1 3 0,-1 1 3 0,2-1 1 16,-1 1-2-16,0 0-1 0,0 0 6 0,0 1-9 0,-2-1-7 15,1 1 3-15,0 1-6 0,1-1 3 0,2 0 2 0,1 0 2 0,-1 0-2 16,0 1 3-16,1-1 4 0,1 1-4 0,2 0 1 0,0-1-5 0,1 0-9 15,0-2 2-15,1 1-1 0,1-2-2 0,2 2-16 0,-1-2-4 16,0-1-5-16,0 1 13 0,0 0 1 0,2 0 11 0,2 0-5 0,1 0-18 16,0 0 14-16,3 0-9 0,0 1 4 0,0 0 2 0,4 0 2 15,-1 0-4-15,1 1-4 0,2 1 6 0,0 1-6 0,4-1 1 0,1 0-3 16,1 2-1-16,3-1-1 0,1 2 4 0,0-1 3 0,2 1-5 0,1 1 0 16,0 0-3-16,2 0-2 0,0 1 2 0,1-1-8 0,1 1 6 15,1-1 4-15,1-1-6 0,1 1 6 0,0-1-2 0,1 0-1 0,2 0 1 16,-1 1-3-16,3 0-3 0,0-1-3 0,1 1-18 0,0 0-9 0,2 1-23 15,-1 0-18-15,1-1-11 0,2 1-24 0,-1 0-9 0,1 0-14 16,-1 0-19-16,2-1-26 0,1 0-39 0,2-3-63 0,-1-2-70 0,3-3-155 16,1-2-133-16</inkml:trace>
-  <inkml:trace contextRef="#ctx0" brushRef="#br0" timeOffset="34686.51">10325 8492 2699 0,'-23'-7'142'0,"4"2"-114"0,0 0-19 0,6 3-16 15,8 1-8-15,2 1-9 0,2-1 0 0,2 1-1 0,0 1 5 16,1-1 9-16,0 1 7 0,0 0 8 0,1 0 2 0,-1 1 4 0,2-1 0 15,-1 1 3-15,1 0-5 0,1 1 1 0,-1 0-4 0,0 0-2 16,1 0 0-16,0 0-1 0,2-1 1 0,0 1 2 0,0 1 2 0,0-1-2 16,0 0 1-16,2 0-4 0,0 0 1 0,3 0 1 0,0 0 1 0,1 1-5 15,1-1 5-15,1 1-5 0,2-1 1 0,2 1 1 0,1 0-2 16,2 0 2-16,2 1-2 0,-1 0 3 0,1 1-8 0,0 0-5 0,1-1 5 16,0 1-3-16,-1 0 6 0,1 0 5 0,-2 0-3 0,-1 0 4 15,1 0 2-15,-3 0 1 0,0 0 0 0,-1 1 5 0,-1-1-2 0,-3-1 3 16,1 2 1-16,-2-1 4 0,0 0 4 0,-3 0 2 0,0 1-2 0,-1-1 2 15,-3 1 2-15,-2 0-1 0,0 0 4 16,-2 2-3-16,-2 1 2 0,0 1 1 0,-2 1-1 0,-1 1-3 0,-1-1 0 0,-1 3-9 0,-2 1-4 16,0 1-1-16,-2 0-4 0,-1 0-8 0,1 1-5 0,0-2 12 15,0 3-6-15,1 0 0 0,0 1-33 0,1-2-43 0,1 1-50 0,0 0-56 16,2 0-77-16,0 0-116 0,0 1-183 0,0-1-553 0</inkml:trace>
-  <inkml:trace contextRef="#ctx0" brushRef="#br0" timeOffset="36935.43">10871 7451 1932 0,'-9'0'83'0,"2"1"-36"0,-2 1-12 0,4 1-9 0,3-1-1 16,-1 1-1-16,2 1-2 0,0 0 0 0,0 1 3 0,1 0 8 0,-1 2 11 15,1 1 10-15,0 2-2 0,0-1-1 0,0 2-2 0,1 0 1 0,0 0 1 16,0 3-1-16,0 1-1 0,2 1-2 0,0 0-10 0,0 3 7 16,2 2 2-16,1 2-1 0,1 4 8 0,1 2-8 0,1 3-7 0,1 0-9 15,0 4 1-15,2 0-4 0,-1 3-3 0,0 0-5 0,1 0-9 0,-2 2-4 16,1-3-1-16,1-1 3 0,-2 0 0 0,1-2-4 0,-1-1-1 15,0-2-11-15,0 0 11 0,0-3-4 0,1-1 1 0,0-1 4 0,-2-1-6 16,2-2 1-16,-2-2 0 0,1-1-2 0,-2-4-4 0,1 0-5 16,0-2-5-16,-3-1-3 0,1-2-10 0,-1-1-9 0,-1-2-16 0,-1-1-14 15,-1-2-28-15,-1-2-33 0,0-1-34 0,-2-2-65 0,0-3-80 16,-2-1-141-16,-1-3-121 0,-2-3-167 0</inkml:trace>
-  <inkml:trace contextRef="#ctx0" brushRef="#br0" timeOffset="37385.54">11071 7791 2149 0,'-4'-5'966'0,"1"3"-939"0,0-2-24 0,4 2-10 0,4 0-9 15,1 0 2-15,5 1 0 0,0-1 2 0,1 2 4 0,1 1-1 0,-2 1-1 16,0 1 3-16,0 2 0 0,-2-2-4 0,0 2 1 0,-2 1-5 15,0 0-6-15,-1 0 4 0,-2 0-3 0,0-1 4 0,-2 1 5 0,0 0 6 16,-2-1-2-16,-1 1 2 0,0-1 3 0,-2 2 2 0,-1-1 7 0,0 1 0 16,-2-1-2-16,-1 1-4 0,-2 0-2 0,0 0 1 0,-1 0 1 15,-1 0-2-15,1 1-8 0,-2 0-1 0,1-1-2 0,-2 2-1 0,0-1 8 16,1 0-7-16,-1-1 2 0,1-1 3 0,1 0-4 0,0-1 1 16,2 1-3-16,1 0-4 0,-1 0-3 0,2 0 5 0,-1 0-6 0,1 1 5 15,0-1 4-15,1 1 1 0,1 1 5 0,1-1 1 0,1 1 1 0,1 0 3 16,1 0 2-16,-1 1 1 0,2-1 1 0,0-1 1 0,2 1 2 15,-1 0 4-15,1 0 4 0,2 1 3 0,1-2-1 0,2 1 1 0,0-1-3 16,0-1 3-16,2 0-4 0,1 0-1 0,0 0-2 0,1-2 1 16,1 1 1-16,2-1 0 0,1 0 6 0,-1 0-1 0,1-1 3 0,0 0 6 15,-1 0-1-15,0 0 1 0,1 0 1 0,1-1-2 0,-1 0-3 0,0 0-1 16,-1 0-7-16,0 1-2 0,1 0-5 0,0-1-2 0,-1 0 6 0,2 1-6 16,-2 0-1-16,-1-1 4 0,-1 0-8 0,1 0 0 0,0-1 2 15,0 1-9-15,-1-1-3 0,-1 0-4 0,-1-1-14 0,-1 0-11 0,0-1-12 16,0-1-11-16,0 0-17 0,-1-1-13 0,-1 0-4 0,0-1-7 15,-1 0 1-15,0 0-4 0,-2-2-28 0,0 2-29 0,-1-3-38 0,0 0-35 16,-2 0-34-16,0-1-45 0,-1 0-45 0,0 1-163 0</inkml:trace>
-  <inkml:trace contextRef="#ctx0" brushRef="#br0" timeOffset="37735.54">11461 8138 1398 0,'-2'1'349'0,"0"0"-235"0,1 0-32 0,0-1-21 16,2 1-8-16,0-2-3 0,0 1-11 0,2 0-1 0,-1-1-3 15,1 1 2-15,0-1 13 0,0-1-2 0,1 0-2 0,0 0 0 0,1-1-12 16,0-1-5-16,1-1-7 0,-2 0-7 0,3-2-1 0,1 0-1 0,0-1 1 16,-1 0 3-16,1-1-5 0,-2-1 0 0,0 0 0 0,-1-1-8 15,-1 0 4-15,2 0 0 0,-2-1-1 0,0 1-1 0,-2-2-4 0,0 1 3 16,-1 0-4-16,1-1 1 0,-2 1 0 0,0 1-1 0,0 1 7 0,-2 1-9 16,1 3 9-16,-1-2-2 0,0 2-4 0,-2 0 5 0,1 1-12 15,-1 0 0-15,1 2-2 0,0 0 4 0,-1 1 3 0,-1 2 0 0,-1-1 0 16,0 2 2-16,1 0 3 0,0 2-1 0,0-1 1 0,0 2 2 15,0 1 1-15,1-1 2 0,1 2 0 0,1 0 1 0,0 1 6 0,0 0-4 16,1 0 3-16,1 2 1 0,-1 0 1 0,2 1 0 0,0-1 3 0,3 1 0 16,1-2-4-16,0 2-2 0,2-1 2 0,0 0-3 0,0 1 0 15,2 0 3-15,0 0-2 0,-1 1 4 0,1-2-2 0,0 1-1 0,0 0-6 16,1-1 1-16,0 1-5 0,1-3 0 0,0 1-1 0,0-1-5 0,0 0 0 16,1-1 0-16,0-2-4 0,-1 0-8 0,2-2-5 0,-1 0-9 15,1-2-13-15,-1-1-11 0,0 0-22 0,0-2-18 0,0-1-20 0,1-1-18 16,-1-2-18-16,-2 0-30 0,1-1-48 0,-1-2-62 0,-1 0-76 15,-1-2-98-15,-1-3-191 0</inkml:trace>
-  <inkml:trace contextRef="#ctx0" brushRef="#br0" timeOffset="38202.65">11819 7659 2758 0,'-3'4'96'0,"1"3"-84"15,2 5-19-15,5 1 4 0,3 1-6 0,2 0 3 0,1 0-3 0,1 1 4 16,0 0-3-16,2 0 3 0,0-3 7 0,0 0-2 0,-1-1-3 0,-1-2-1 16,1-1-4-16,-1-1-9 0,0-2-1 0,-1-2-3 0,1 0-7 15,0-1 5-15,-1-2 1 0,-2-2 4 0,0-2 7 0,-3 0 8 0,0-2 4 16,0-2 7-16,-2-1 2 0,0-1 0 0,-1-3-2 0,-1 0 0 0,0-2-2 16,-1-1-3-16,0-1 2 0,0 1-1 0,-1 0-1 0,0 0 3 15,0 1-4-15,0 3-9 0,0-1-1 0,0 2 2 0,0 3 9 0,1 0 8 16,-1 2-1-16,1 2 0 0,1-1-13 0,0 1-2 0,1 3 3 15,1 0 2-15,-1 1 0 0,2 1-3 0,1 2 6 0,0 2-6 0,2 1-4 16,1 1 6-16,1 2-7 0,2 2 13 0,1 2 4 0,0 1 4 0,1 2 0 16,0 1-8-16,1 2-1 0,0 0-6 0,1 2-3 0,1 0-3 15,-1-1 6-15,0 1-1 0,0-1 5 0,-1-1-2 0,1 2-2 0,-2 0 7 16,-1 0-2-16,0 0 2 0,-2-1 2 0,-2-1 4 0,-2 0 1 0,-2-1 1 16,-4-1 2-16,-2 0-7 0,-3 1-5 0,-1-1-13 0,-3 2-8 15,-3 0-5-15,-3-1 2 0,-2 0 3 0,0-1 13 0,-2-1 5 0,-1-2 6 16,1-2 9-16,0-1-5 0,-1-3 3 0,1-2 13 0,1-2 11 15,0-3 14-15,0-1 17 0,2-1 10 0,-1-3-7 0,1-2-3 0,2-2-13 16,2-2-23-16,2-2-9 0,1 0-10 0,2-2-4 0,3-2-8 0,1-1-1 16,3 1 0-16,2-2 0 0,2 0-3 0,1 0-1 0,1-1 1 15,2 0-6-15,1 1 3 0,1 2-8 0,0-1-2 0,2 0-14 0,-1-1-21 16,0 0-26-16,0-2-35 0,-1 3-32 0,-1-1-39 0,-1 0-39 16,-1 0-49-16,1 1-81 0,0-2-110 0,0 1-431 0</inkml:trace>
-  <inkml:trace contextRef="#ctx0" brushRef="#br0" timeOffset="38552.65">12693 7282 3591 0,'-8'1'62'0,"3"2"-41"0,-1 2-21 0,6 0-6 16,3 3-5-16,2 2 5 0,4 2 2 0,1 1 6 0,3 2 0 0,-1 1 2 16,1 2 5-16,0 1-1 0,-1 0 3 0,1 1-1 0,2 1-3 15,1 0-1-15,0 2 4 0,-2-1-5 0,0-2 1 0,1 1 4 0,1-3-26 16,-2-1 3-16,0-2 5 0,-1 0-1 0,0-2 22 0,1-1 1 16,-1-1-12-16,0-1-1 0,0-1 5 0,-1-2-2 0,-1-1 0 0,-2-1 3 15,2-1-1-15,-2-3 0 0,1-1 5 0,-2 0-3 0,0-2 7 0,0-2-1 16,-1-1-3-16,1-2 3 0,0-3-4 0,0-1 5 0,1-3-17 15,0 0-4-15,0-3 10 0,-1-1-4 0,1 1 12 0,0-4-8 0,0 1-18 16,-1-1-1-16,0 0-7 0,-1-1-1 0,0 2-9 0,-1 0-6 0,-1 1-10 16,1 2-10-16,-1 1-12 0,0 0-9 0,-1 1-16 0,0 2-15 15,0 1-31-15,-2-1-26 0,-1 1-35 0,0-1-53 0,-2 2-72 0,-2 2-94 16,-1-1-103-16,-2 1-323 0</inkml:trace>
-  <inkml:trace contextRef="#ctx0" brushRef="#br0" timeOffset="39086.65">13051 7165 3098 0,'-6'2'96'0,"2"3"-69"0,0 0-24 16,3 2-6-16,4 0-1 0,2 1 4 0,1 1-1 0,1 1 1 16,2 1 5-16,-1 0 0 0,-1 3 4 0,3 1 7 0,-1 2-2 0,1 1 1 15,1 1-5-15,0 0-1 0,0 0-3 0,1 0-4 0,2 0 1 0,0 1-1 16,0 0 0-16,-1 2 1 0,1-2 3 0,0 0-6 0,0 0 2 15,0-1-2-15,0-3-2 0,0 1 0 0,-1-1 4 0,0-3-17 0,-1-1 1 16,1-1 1-16,0-2 3 0,0-2 11 0,0 1-1 0,-1-3 2 0,2-2-7 16,0 0 7-16,-1-2-1 0,-3-2-2 0,0-1 1 0,-1-1 1 15,-1-2-4-15,-2-1 5 0,0-2-2 0,-1-1 12 0,0-1 4 0,0-1-3 16,0-2-2-16,-1-1-15 0,0-1 1 0,0-1-1 0,1 1 2 0,-2-2 2 16,1 0 0-16,-1 0 2 0,0 2 3 0,0 0-3 0,0 1 0 15,1 2 3-15,-1 2-5 0,2 0 2 0,-1 2-4 0,1 1-1 0,0 0 6 16,0 2 5-16,1 1-3 0,0 1 6 0,1 2-6 0,0 0 3 15,0 1-1-15,1 1 0 0,-1 0-2 0,1 2 3 0,-1 0-5 0,1 0-1 16,1 1-2-16,1-1-3 0,0 0-1 0,1 0 2 0,-1 0 0 0,1-1 2 16,1 0 2-16,0-1-2 0,0-1-2 0,0 0 2 0,-1 0-2 15,1-2-3-15,0 0 1 0,0-1 4 0,0 0 2 0,-2 0-4 0,1 0 8 16,-2-1-6-16,0 0 2 0,-1 0 3 0,-1-1-7 0,0 0 6 0,-1 1-6 16,-1 0 2-16,0-1 0 0,0 0 0 0,-1 0-2 0,-1 0 4 15,0 0-7-15,-2-1-1 0,-1 0 4 0,-1-2 1 0,-1 1 1 0,-1-1 5 16,-1 2-3-16,-2-1 1 0,0 1 5 0,-1 0-1 0,-1 0-3 15,-2 0 3-15,-2 0 2 0,-2 1 0 0,-1 0 2 0,-1 0-3 0,-2 1-3 16,-1 0-5-16,2 1-4 0,-1 1-1 0,0 1-2 0,0 0-6 0,1 1 2 16,-1 1-7-16,2 0-6 0,1 1-3 0,1 0-11 0,0 2-5 15,1-2-7-15,2 2-8 0,1-1-3 0,1 1-8 0,1 1-6 0,1-1-15 16,0 1-6-16,1 0-19 0,0 0-14 0,2-1-10 0,0 0-8 0,2 0-1 16,0-1-6-16,2-1-1 0,1-1-9 0,0 1-5 0,1-1-7 15,2 0-14-15,1 0 0 0,2 0-16 0,0 0-37 0,1-1-100 0</inkml:trace>
-  <inkml:trace contextRef="#ctx0" brushRef="#br0" timeOffset="39369.65">13846 7296 1307 0,'4'2'148'0,"1"3"-63"0,2 1-23 16,1 0-19-16,-1 1-3 0,3-1-4 0,1 0-2 0,-1 1 8 0,1 1 2 16,-1 0 2-16,-2-1 2 0,0 1-7 0,1-1-7 0,-1 1-8 15,0-1-6-15,0 0 1 0,0-1 5 0,-1 0 3 0,0-3 7 0,-1 0 2 16,-1-1 11-16,0 0 9 0,-1-1 7 0,-1 0 12 0,0 0-7 0,-2-2 1 15,0 1-7-15,-1-1-15 0,0-1-8 0,0 1-13 0,-2-1-5 16,0-1-2-16,-1 0-4 0,0-3-2 0,-2 1-10 0,1-1-8 0,-2-1-4 16,0 0-5-16,0-1 1 0,-1 0-4 0,-1 0 3 0,1 1 1 15,-1-1-1-15,0 0 9 0,0-2 0 0,0 0-1 0,2 0 4 0,-2 0-3 16,1 0-5-16,0 0-4 0,0 1-9 0,3 0-8 0,0-1-7 0,1 2-5 16,2 0 2-16,0 0-3 0,2 0-2 0,0 1-6 0,0 0-10 15,1 0-11-15,1 0-14 0,1 1-11 0,0-1-9 0,1 1 1 0,1 0-8 16,0-1-4-16,0 0-2 0,0 0-10 0,-1 0 0 0,1 0-11 15,0 1-12-15,1 0-9 0,1 1-34 0,-1 0-284 0</inkml:trace>
-  <inkml:trace contextRef="#ctx0" brushRef="#br0" timeOffset="39852.75">14185 7241 2546 0,'0'1'179'0,"2"3"-136"0,2 1-38 0,2 2-12 15,1 0 1-15,3 1-2 0,1 0 1 0,1 2-1 0,1-1 3 16,0 1 6-16,-2 0 4 0,1-1-1 0,-1 0 1 0,-2-2-5 0,2 1 5 16,-1-3-4-16,1 0 2 0,-1 0-1 0,-1-2-2 0,0-1 5 0,0-1-2 15,-1-1 15-15,0-1 6 0,-1-1 2 0,0 0 9 0,-1-2-5 16,-1-1 2-16,0 1 2 0,-1-3-3 0,0 0-3 0,-1-1-6 0,0-2-7 15,0 1-4-15,0-2-4 0,-1 1-5 0,0-2 1 0,0 1 0 16,-1 1-4-16,0-1 2 0,-1 1-2 0,-1 0 4 0,0 0-1 0,-2 0 3 16,1 1-1-16,-2-1-1 0,0 2 1 0,0-1-1 0,-1 3 1 0,1-2-6 15,-2 1 4-15,0 0-6 0,-1 0-8 0,0 2-4 0,-2 1-15 16,0 1-8-16,-1 2-4 0,-1 0 2 0,-1 2 4 0,1 0 8 0,-2 1-1 16,1 1-9-16,1 1-6 0,-1 1-17 0,1 0-28 0,0 0-37 0,0-1-45 15,2-1-62-15,0 0-55 0,1 0-72 0,-1-2-89 0,0 0-239 16</inkml:trace>
-  <inkml:trace contextRef="#ctx0" brushRef="#br0" timeOffset="40119.08">14223 6633 3465 0,'-1'0'74'0,"0"0"-67"0,3 2-33 0,2 3-5 0,3 1-8 16,3 2 4-16,2 3 12 0,3 1 3 0,-1 2 9 0,1 3 11 0,-1 2-4 15,0 1 6-15,0 2 2 0,1 2-4 0,-2 1 3 0,1 3 3 16,1 1-5-16,-1 3 3 0,-1-2-13 0,0 1 7 0,1-2-1 0,-1 0-3 16,-1-2 12-16,-1 0-14 0,0-1 3 0,0-3-11 0,-1-2-19 0,0-1-18 15,0-3-16-15,-2-1-7 0,1 0 2 0,-2-2-8 0,-1-3-9 16,-1 1-20-16,1-1-13 0,-1-2-23 0,-1 1-27 0,0-2-34 0,-1-2-53 15,0 0-71-15,0 0-122 0,-2-1-279 0</inkml:trace>
-  <inkml:trace contextRef="#ctx0" brushRef="#br0" timeOffset="40469.08">14876 6898 3264 0,'-1'-3'109'0,"0"2"-109"0,1-2-41 0,0 1-27 16,1 0-11-16,1-1 1 0,0 1 7 0,0 0 19 0,-2 2 10 0,0 1 8 15,-3 0 15-15,-1 2 2 0,-1 0 6 0,-1-1-4 0,-1 2-7 16,-1 0-9-16,-1 2-7 0,-2 0 3 0,-2 2 1 0,1 0 8 0,-2-1 12 16,1 2 4-16,-1 0 9 0,-1 0-9 0,0 0 1 0,1 0 2 0,0-1 6 15,1 0 9-15,2 1 3 0,2-1 0 0,2-1-8 0,0-1-1 16,2 1-9-16,0-2-5 0,2 0-3 0,1-1-7 0,1 0-4 0,1-1-2 15,2 1-2-15,1 1 7 0,1-2 3 0,1 1 3 0,1 1 7 0,0-1 1 16,2 1 5-16,3 0 0 0,0 0 6 0,2 0 3 0,0 1 2 16,-1 0 6-16,2 0 2 0,-1 1 12 0,-1 1 12 0,1 0 13 0,-1 0 10 15,-1 0 6-15,1 0-3 0,-1 1-5 0,-2-1-7 0,-1 3-14 16,0 0-5-16,-1 1-10 0,0 0-4 0,0-1-4 0,-2 1-4 0,-1 0-4 16,-1 1-11-16,-2 0-13 0,-2-1-20 0,-1 0-31 0,-2-2-32 0,-2 0-37 15,-2 0-64-15,-3-2-67 0,0 1-92 0,-3-3-124 0,-3 0-435 16</inkml:trace>
-  <inkml:trace contextRef="#ctx0" brushRef="#br0" timeOffset="41270.64">13071 6323 1386 0,'-41'5'399'0,"-5"0"-408"0,-12 2-49 0,2 1-48 0,4 1-30 0,-2 2-8 15,-2 1-1-15,-3 1 19 0,-2 3 26 0,-3-1 20 0,-2 1 37 16,-1 0 27-16,-1 2 10 0,-4 2 8 0,0 0 1 0,-1 1 5 0,-1 2 6 16,0 2 12-16,-1 3 7 0,0 1 10 0,1 2 15 0,-1-1 8 0,0 2 11 15,2-1 6-15,0 3-7 0,1 0-5 0,1 2 4 0,2 2-1 16,1-1-3-16,3 3 4 0,2 0-7 0,2 1-3 0,1 2 8 0,1 0-6 15,2 0-3-15,3 2-9 0,3 1-9 0,3 0-6 0,0-2-6 0,5 0-6 16,1 1-8-16,3 0 1 0,4 0-8 0,1 1 2 0,5-1 5 16,3-1 1-16,1 1 9 0,3-1 0 0,3-1-4 0,4-1 0 0,3 0-4 15,4-1-6-15,4-2-2 0,3 0-5 0,3-2-3 0,4-1 2 0,2 0-3 16,5-2-1-16,3-1-5 0,5-1 7 0,4-1 2 0,1-1-2 16,3-1 7-16,2-1-12 0,6-1 1 0,2-2-2 0,5 0 3 0,4-2-4 15,4-1-1-15,4-1-4 0,1-1-1 0,3-1 7 0,4 0-1 16,2-2 1-16,3-3 1 0,3-1-4 0,3-1-2 0,4-3-1 0,1-1-5 15,1-2 2-15,4-1 1 0,0-2 0 0,2-1 4 0,3-2-3 0,1-1 3 16,2-2 1-16,2-1-4 0,0-1 6 0,1-1 4 0,2-1 3 16,2-2 5-16,1-2-2 0,0-1 2 0,2-2-3 0,-1-3 3 0,-1 0 2 15,2-1-2-15,1-3 0 0,-1-1 1 0,2-1-1 0,-1-2-1 0,-1-1-2 16,0-2 0-16,-2-2 5 0,1-2 0 0,-1-1 6 0,-1 0-1 16,-5-2-4-16,-1 0 2 0,-6-2-8 0,-1-1 1 0,-2 1 4 0,-1-2-5 15,-3-1 7-15,-3-1 1 0,-1 0-5 0,-3-1 3 0,-3 1-4 0,-3 0 1 16,-2 0 4-16,-5 0-3 0,-1 0 9 0,-3-1 1 0,-5 0-3 15,-2 1 8-15,-5-1-12 0,-4 2 2 0,-4 1-3 0,-4-1-6 0,-2 1 4 16,-5-2-7-16,-3 0 0 0,-3 2 6 0,-7 1-10 0,-3 0 6 16,-6 3-2-16,-4-3-11 0,-5 1 7 0,-5 0-4 0,-3-2 1 0,-7 0 9 15,-4 0-7-15,-3 0-10 0,-5 1-6 0,-2 0-4 0,-3 1-11 0,-6-2-1 16,-4 0 0-16,-4 1 7 0,-5 0 6 0,-4 0 9 0,-3 2 10 16,-4-1 0-16,-5 1-5 0,-5 2 15 0,-3-2 7 0,-6 3 0 0,-2 1 16 15,-5 2-2-15,-1 1-7 0,-4 2 3 0,1 2-7 0,-4 3-6 16,1 3-5-16,0 2-4 0,-2 4-2 0,3 4-8 0,0 5 0 0,0 5-5 15,1 4-1-15,0 6-1 0,1 5-5 0,0 4-8 0,1 6-9 0,0 6-13 16,-1 5-23-16,2 5-25 0,-1 5-50 0,-1 5-44 0,4 5-58 16,-1 3-86-16,4 7-126 0,-2 2-423 0</inkml:trace>
-  <inkml:trace contextRef="#ctx0" brushRef="#br0" timeOffset="54853.12">14875 10071 560 0,'-6'2'69'0,"-1"-1"-34"0,0 2-16 15,2-2-3-15,2 1 1 0,0 0-2 0,1-1 1 0,0 0 2 16,1 0 3-16,-2-1 8 0,2 0 5 0,0 0 6 0,-1 0 8 0,2-1 2 15,0-1 1-15,0 1 1 0,0-2 1 0,1 0 2 0,1-1-1 0,0-1 4 16,1 0-6-16,0-2-3 0,1 0-2 0,0-1-6 0,2-1 2 16,2-2-4-16,0 0-1 0,1-2-4 0,2 0-2 0,0-1 3 0,1-2-2 15,3 0 10-15,1-2 1 0,2-1 4 0,-1-2 5 0,3 0 0 0,3-3-1 16,-1-2-3-16,3 1-1 0,1 0-1 0,3 1-3 0,0-1 1 16,2-1-2-16,1 1-8 0,3-3-2 0,0 2-14 0,2-1-4 0,0 1 7 15,-1-2-8-15,2 2 7 0,-1 1-5 0,2-2-8 0,-1 3 0 0,1-1-2 16,0 1 3-16,-3 1-2 0,1 0-6 0,-3 2 5 0,-1 0-4 15,0 0 0-15,-2 0-1 0,0-1-2 0,0-1 2 0,0 1 2 0,-1 0 2 16,0 0-2-16,-2 1-1 0,1 0-2 0,0 0-2 0,1 1 2 16,-1-1 2-16,0 1-2 0,1 0 3 0,-2 2 2 0,0 0-12 0,-3 1 3 15,-1 2 8-15,-1 2 0 0,-2 1 7 0,-1 2-2 0,-3 0-10 0,1 0 5 16,-3 1 0-16,-1 1-1 0,-3 3 0 0,-3 1-3 0,0 1 0 16,-2 2-2-16,-2 1-7 0,0 1-2 0,-2 1-8 0,-1 1-13 0,-1 1-12 15,-1 1-14-15,-2 2-25 0,-2 2-24 0,-1 1-23 0,-2 0-36 16,-1 0-29-16,-1 1-32 0,-2 0-35 0,-2 2-39 0,-1-1-357 0</inkml:trace>
-  <inkml:trace contextRef="#ctx0" brushRef="#br0" timeOffset="55203.62">16244 8626 1961 0,'-5'-8'138'0,"3"1"-107"16,1-2-20-16,6 2-22 0,4 1-2 0,3-1 5 0,4 1 5 0,4-2 0 15,1 1 2-15,2 0 4 0,3 2-2 0,-1 0 2 0,1 0-6 0,0 3 0 16,0-1 0-16,0 2-4 0,2 1 6 0,1-1-1 0,-2 1 1 16,-1 0 2-16,0 1-1 0,-1 0-4 0,1 0 8 0,3 1-2 0,-1 0 3 15,2 0 4-15,0 1-6 0,-1 0 0 0,1-1-3 0,-2 2-2 0,0-1 5 16,0 0-3-16,-1 1 6 0,-2 0 5 0,0 0 4 0,-2 0 10 15,-4 0 1-15,-2 1 2 0,-1-1 3 0,-3 2 0 0,0-3 8 0,-2 2 4 16,-3 0-4-16,-1 0 6 0,-1 0 0 0,-2 1-9 0,-1 1 4 0,-3 0-7 16,-2 1-6-16,-1 2 4 0,-3 0-10 0,-1 3-5 0,-3 1-3 15,-1 0-3-15,-3 2-7 0,0 3-3 0,-3 1 0 0,-2 0-8 0,0 3-2 16,-4-1-3-16,-2 3-23 0,2 1-24 0,-2-1-20 0,0 3-34 16,0 0-43-16,0 2-40 0,1 1-66 0,1-1-85 0,2-2-148 0,1 0-190 15</inkml:trace>
-  <inkml:trace contextRef="#ctx0" brushRef="#br0" timeOffset="56403.71">17655 7980 2012 0,'-9'-3'44'0,"0"0"-14"0,-1 0-20 0,5 2-9 16,3-1-5-16,2 1-6 0,1-2 0 0,1-1 3 0,0-1 4 0,1-2 3 15,1 0 3-15,0-3 3 0,1 0-2 0,0-1 0 0,1-1-1 16,0-2-9-16,1-1 5 0,1-1 1 0,-1 0 0 0,0-2 3 0,0-1 1 15,-1-1-2-15,0-4 3 0,0-1 0 0,-1-1-3 0,1-3 1 16,0 0 2-16,1-4 0 0,-2 1 5 0,1-3-2 0,-2-2 2 0,0 1 0 16,-1-2-3-16,-1 0 5 0,0-2 4 0,0 0 6 0,-1-1 13 0,0 1 14 15,-1 2 2-15,-2 3 9 0,1 2 0 0,-2 2-4 0,1 2-6 16,-2 5-8-16,0 1-6 0,0 3 6 0,-1 5-1 0,-1 1 2 0,-1 2-2 16,1 3-15-16,0 1-4 0,-1 2 0 0,-1 2-10 0,-1 2-4 0,0 2-6 15,-2 3-7-15,-1 3 0 0,0 4 1 0,-2 2-6 0,0 3-2 16,-1 3 2-16,1 5 10 0,-1 5 9 0,0 3-3 0,0 4 1 0,1 3-10 15,-1 3 3-15,1 3 0 0,-1 4-5 0,1 2 3 0,2 2-1 16,0 3 1-16,1 3 4 0,2 4-11 0,0 5 1 0,3 3-2 0,2 2 0 16,1 3 8-16,3 0-1 0,3 1-2 0,0 0-1 0,4-3-23 0,3-1-3 15,1-4-9-15,2-4-6 0,2-1 8 0,0-2 6 0,2-3 9 16,0-4 6-16,-1-5 14 0,1-8 2 0,0-4 2 0,0-3 0 0,-1-3 2 16,1-2-1-16,-1-5 4 0,-1-4-3 0,-2-3 1 0,-1-2 1 0,-2-4 4 15,-1 0 2-15,-2-3 7 0,-1-3-1 0,-1-1-3 0,-2-3 2 16,-1-1-4-16,0-1-3 0,-1-2 2 0,0-1 1 0,-2-2-8 0,-1-4-1 15,0-3 9-15,-2-1-4 0,0-5 6 0,-2-2-2 0,-1-2-11 0,-2-3 2 16,-1 1-1-16,-2-2-1 0,1-1 3 0,-2 2-1 0,0-2 1 16,-1 2 6-16,0-1 4 0,1 1 2 0,0-1 3 0,0 1 3 0,1 2 1 15,2 1-1-15,1 3 0 0,1 2-8 0,1 2 2 0,2 1-3 16,0 3-4-16,0 0 4 0,2 1-5 0,-1 1-2 0,2 1 4 0,1 1-8 16,0 2 4-16,0 0-1 0,1-1-3 0,2 1 1 0,-1 0-4 0,2 0 6 15,0 1-4-15,0 0-4 0,2 1 1 0,1 0-4 0,0 0-1 16,1 1 4-16,1 0 3 0,-1 1 2 0,2 1-2 0,1-1 1 0,1 2-4 15,1-1-1-15,0 0-5 0,1 0-12 0,1 0-20 0,-1 0-29 16,2-1-39-16,-1 0-32 0,1-1-41 0,0 0-43 0,-1-1-42 0,-2 0-48 16,1-1-45-16,-1 0-431 0</inkml:trace>
-  <inkml:trace contextRef="#ctx0" brushRef="#br0" timeOffset="56603.78">17951 7994 2733 0,'-2'-1'76'0,"1"0"-39"0,2 2-36 0,4 0-6 0,2 1 2 16,5 0 0-16,2-1 3 0,3 1-2 0,0-1 4 0,-1 0-4 0,1 1 2 15,0-1 0-15,-1 0-3 0,1-1-4 0,0 1-13 0,-1 0-11 0,-3-1-12 16,1 0-6-16,-2 0-5 0,0-1 0 0,-1 0-8 0,-3-1-5 16,1 0-6-16,0 0-4 0,-2-1-9 0,0-1-7 0,0-1-12 0,0 0-25 15,0 0-17-15,0-1-18 0,0 0-12 0,0 0-19 0,-1-1-19 0,2-1-44 16,-1 0-257-16</inkml:trace>
-  <inkml:trace contextRef="#ctx0" brushRef="#br0" timeOffset="57369.84">18449 7614 2132 0,'-7'-1'70'0,"-1"2"-29"0,-1-1-32 0,3 3-3 0,3 0-11 16,2 1 4-16,0 2 1 0,1 0-2 0,1 2 2 0,0 0 6 0,0 3 2 15,0 0-2-15,0 2 1 0,1 1-4 0,1 2 0 0,0 0-1 0,1 3-1 16,1 1 1-16,-1 0-1 0,2 1-1 0,0-1 0 0,1 0-1 16,2 0 1-16,0 0 0 0,-1-3 0 0,2-1-2 0,0-1-1 0,0-2 5 15,1-3-2-15,2-2 0 0,0-1 7 0,0-2-5 0,-2-1-1 0,1-2 7 16,-1-2 2-16,1-2 14 0,-1-1 10 0,-2-2 7 0,1-1 2 15,0-2-3-15,0-1-2 0,-1-2-10 0,1-2-4 0,-2 1-8 0,-1-1-1 16,1 2-4-16,-2-1-5 0,0 1-1 0,0 0-2 0,-1 2-1 16,-1 1 3-16,0 2 1 0,-1 1 2 0,0 0-1 0,-1 2-6 0,0 1 7 15,-2 1-5-15,0 2 2 0,0 0 3 0,-1 1-6 0,1 1 1 0,0 2 2 16,-1 1 0-16,0 2 0 0,0 3 3 0,0 2-1 0,1 4-6 16,0 1 2-16,1 3-4 0,0 1-1 0,1 1 4 0,1 2-2 0,1 2 1 15,0 0 3-15,2 3 1 0,0 0-7 0,0 1-5 0,1-1 4 0,0 0-13 16,0-1 6-16,2 1 5 0,-1-1-3 0,-1 2 13 0,0-2-2 15,-1 1-8-15,0 1 4 0,-1 3-4 0,0 0 3 0,-2 2 7 0,-1-2-3 16,-2-5 3-16,-1-2-4 0,-1-3-1 0,-2-5 2 0,-1-1 0 16,0-2 1-16,-2-2 0 0,-1-2-8 0,0-1 0 0,-3-2-6 0,0-2-2 15,-1-3 3-15,-1-2-3 0,1-1 4 0,-2-3-1 0,1-2 4 0,0-2 4 16,2-3 4-16,0-1 1 0,1-2 5 0,0-1-6 0,1-4-1 16,1-2 4-16,1-2-2 0,1-3 0 0,0-4 1 0,3-2-3 0,0-2 2 15,2 0-4-15,2 1 1 0,1 0-3 0,1 1-1 0,2 1 4 0,1 2-3 16,0 3 0-16,1 1 0 0,0 3 9 0,1 1 2 0,-1 1 4 15,1 3 0-15,0 3-5 0,-1 0-1 0,3 3-2 0,-1 2-3 0,0 2 1 16,1 2 4-16,-1 1 1 0,-1 2-2 0,2 2 0 0,0 1-2 16,0 2 0-16,1 1 0 0,1 0 2 0,-1 1-5 0,1-1 2 0,2 0-4 15,0-1-1-15,0 1 3 0,0-1 0 0,1-2 5 0,2 0-3 0,-2-1-2 16,1-1 1-16,0-1-4 0,-2 0 3 0,1-2 5 0,-2-1-5 16,0 0 7-16,0 0 2 0,-1-2-2 0,-2 0 4 0,0 1 1 0,1-3-4 15,-2 1 2-15,0-2 2 0,-1 1-2 0,-2-1 3 0,0-1 0 16,-1 0-1-16,0 1-2 0,0-3-1 0,-1 1-1 0,-1-1 0 0,-1-1 4 15,0 0-3-15,-1 1-1 0,0-2 1 0,0 1-1 0,-2 0 2 0,0 0-1 16,0 1-6-16,-1-2 2 0,-1 1 0 0,-1 1-1 0,0 0 6 16,-1 3-5-16,0-2 2 0,-1 2 3 0,-2 1 1 0,-1 1-1 0,-1 1-1 15,0 1-1-15,-1 2-1 0,2 1-2 0,-2 1-1 0,0 2-1 16,0 1-6-16,-1 2-4 0,1 1 3 0,0 1-2 0,-1 0 2 0,2 2 4 16,0-1-3-16,1 1-1 0,1 0-3 0,0-1-10 0,0 1-9 0,1-1-6 15,1 1-7-15,1-2 2 0,2-2-5 0,-1 0-8 0,3-1-12 0,-1-1-19 16,1-1-23-16,0-1-31 0,0-1-36 0,0 0-42 0,1 0-60 15,0-1-67-15,2-1-106 0,1-2-242 0</inkml:trace>
-  <inkml:trace contextRef="#ctx0" brushRef="#br0" timeOffset="57586.84">19238 8036 3334 0,'-3'3'138'0,"1"3"-125"0,1 6-22 0,4 4-8 0,3 4-1 15,3 3 3-15,2 1-3 0,2-1-2 0,0 0-4 0,-1-2-1 0,-2-2-13 16,-1 0-14-16,1 0-19 0,-1-1-42 0,0 0-26 0,-1-1-32 16,0-2-30-16,-1-3-31 0,-1-2-41 0,-1-1-55 0,-1-2-94 0,-1-1-451 15</inkml:trace>
-  <inkml:trace contextRef="#ctx0" brushRef="#br0" timeOffset="58270.34">20216 7641 2145 0,'-5'-8'318'0,"1"2"-273"0,1 0-17 15,3 2-22-15,1 1-9 0,2 1 10 0,1-1-4 0,0 1 3 0,-1 0 7 16,0 2 15-16,0 0 14 0,0 1 8 0,0 1-1 0,1 0-2 16,-1 1-9-16,1 1-8 0,1 0 2 0,-1 1-3 0,1 0 5 0,0 4 8 15,0 0 1-15,0 3-3 0,1 1-4 0,-1 2-4 0,1 1-13 0,0 2 2 16,1 0-8-16,0 2 4 0,0 1-1 0,0-3-2 0,0 1 1 15,-1 0-1-15,0-3 0 0,2 2 1 0,-2-1-3 0,2 0-1 0,0-3 0 16,-1 1-4-16,1-2 7 0,0-2 3 0,-1-2 6 0,2-1-1 16,0-1 2-16,0-1-2 0,0-2 6 0,-1-1-1 0,1-1 5 0,-1-1-2 15,0-1 2-15,1-1-2 0,-1-1-6 0,1-1-3 0,0-1-2 0,1-1-5 16,-2-1-1-16,2-1-3 0,1 0-3 0,-1-1-1 0,0-1 0 16,1-2-1-16,-1 0 5 0,0-2-2 0,1 2 1 0,-1-1 1 0,1-1-4 15,-1 0-1-15,-1-1-5 0,0 2 4 0,1-2-2 0,0 1 0 0,-1 1 2 16,2 1-4-16,-2 2 6 0,1 0-4 0,-1 2 2 0,1 1-6 15,-2 1 8-15,0 0-1 0,0 2 3 0,-2 0 0 0,0 1-4 0,0 2-6 16,0-1 2-16,0 1 4 0,0 1-6 0,1 0 2 0,-1 2 4 16,0 1-4-16,0 0 2 0,0 1 2 0,-1 1-8 0,0 0 6 0,1 1 0 15,-1 1-2-15,0-1 7 0,-1 1-5 0,1 1 2 0,-1-1 2 0,1 1-8 16,0 0 2-16,0 1 2 0,0-1-2 0,-1 1 0 0,0-1 2 0,0 0-4 16,0 0 0-16,0-1 2 0,0-1-2 0,0 0 4 0,-1 0-2 15,0 1 2-15,0-1-4 0,-1-1-4 0,0 1-7 0,1-1-7 0,-1 0-1 16,0-1-10-16,0 1-2 0,0-2-5 0,0 1-6 0,-1 0-5 15,1-2-9-15,-1 0-9 0,1 0-14 0,0-1-23 0,0-1-26 0,-1 0-26 16,0-1-34-16,0-2-40 0,1 0-23 0,0-2-44 0,2-1-55 0,0-4-55 16,1-3-469-16</inkml:trace>
-  <inkml:trace contextRef="#ctx0" brushRef="#br0" timeOffset="58620.58">21219 7593 2325 0,'-5'3'284'0,"1"0"-231"0,0 3-48 0,2 2-13 16,2 3-2-16,1 1 20 0,1 1 1 0,0 1 2 0,1 1 7 0,-1 1 2 16,1 2 6-16,-1-1 5 0,0 1-8 0,-1 0-2 0,2 0-10 15,-1-1-4-15,2-1-1 0,-1 1-5 0,0-2 2 0,0 0 4 0,0 0-2 16,2-1-1-16,0-1 1 0,0-2-2 0,2-1 5 0,1 0 5 0,-1-2 4 16,1-1 5-16,0-2 3 0,-1 0 9 0,1-2 1 0,0-1 1 15,0-1 2-15,1-2-7 0,-1-1 3 0,1-1-2 0,-1-1-2 0,0 0-5 16,-1-2-7-16,2-1-2 0,-2 0-7 0,0-2-1 0,0-1 1 0,-1 2-9 15,1-3 9-15,-2 0-5 0,1 0 6 0,-2-2-4 0,-1 0-5 16,0 0 3-16,0-2-4 0,-2 0 1 0,-1-1 5 0,-1 0-1 0,-1-2-2 16,-1-1 3-16,-1 2-6 0,-2-1 3 0,0 1 1 0,-2 0-12 15,0 0 2-15,0 1 12 0,-2 0-3 0,-1 1 10 0,0 3 5 0,0 0-14 16,-1 1-4-16,1 1-2 0,-1 3-15 0,0 1 0 0,-1 3-7 0,0 0-2 16,-1 1 2-16,0 3 0 0,0 0-3 0,-1 2-4 0,0 3-7 15,1 1-16-15,1 2-17 0,0 1-21 0,0 3-20 0,1-2-34 0,2 2-20 16,2 1-29-16,0 0-19 0,1 2-20 0,1 0-24 0,2-1-36 15,1 0-25-15,2-1-79 0,2-2-183 0</inkml:trace>
-  <inkml:trace contextRef="#ctx0" brushRef="#br0" timeOffset="59353.63">21523 7613 2852 0,'-5'-2'63'16,"2"1"-50"-16,0 0-25 0,3 3-13 0,2 0 17 0,1 2-3 0,1 0 10 16,-1 2-8-16,0 1 6 0,0 0 13 0,-2 2-3 0,1 0 3 15,-1 0-3-15,1 2-9 0,0 0 2 0,-1 0 3 0,1 1-3 0,-1-1 2 16,1 3-2-16,-1 0-2 0,1 1 6 0,1 0-3 0,-1-1 1 0,2 1 0 16,-1-1-2-16,0-1 0 0,1 0 0 0,0-1 0 0,0 0 0 15,0-2 1-15,1 0 3 0,1-1 3 0,0-1-1 0,1 0 1 0,0-1 0 16,0-1 1-16,0-2-3 0,0 0 4 0,1-2-1 0,-1-1 1 15,-1-1 3-15,1 0 3 0,-1-2 1 0,0 0 3 0,0 0-2 0,0-2-5 16,0-1-2-16,0-2-3 0,1 0-7 0,-1 0 4 0,0 1-1 0,1-2-1 16,-1 0 1-16,0-1-1 0,0 0 0 0,-1 0-4 0,1 0 4 15,-1 0 0-15,0 0-2 0,0 0 0 0,-1 1 1 0,1 1 5 0,0 0-6 16,0 2 0-16,1 0-2 0,-1 1-3 0,0 2 3 0,-1 0 0 0,0 1 2 16,0 0 0-16,0 0 4 0,-1 2-3 0,1 0 1 0,-2 1 2 15,1-1-3-15,-1 1 1 0,-1 1 2 0,0 0-1 0,1 0 2 0,-2 1-1 16,1 0-1-16,-1 1 1 0,1-1-2 0,-1 2 6 0,2-2-2 15,-2 1-5-15,1 1 5 0,0-2-5 0,-1 1-2 0,1 0 6 0,-1-1-7 16,1 1 4-16,0-1 1 0,-1 0-6 0,1 1 5 0,1-1-8 0,0 0 8 16,0 1 3-16,1-1-6 0,-1 0 2 0,1-1-2 0,-1 1-10 15,1-1 6-15,-1-1-2 0,2 1-2 0,-1-2 2 0,0 0-5 0,0 0 0 16,0-1-2-16,0-1-9 0,1 0-1 0,-2 1-12 0,1-2-7 16,-2 0-4-16,2 0-10 0,-1-1 0 0,0-1-12 0,0 0-13 0,-2 0-16 15,0-2-12-15,0 0-17 0,0-1-19 0,-1 0-13 0,1-1-9 0,0 1 4 16,0-2 11-16,0 0 20 0,0 0 19 0,0 1 21 0,1 0 22 15,1 1 15-15,-1 0 15 0,1 2 10 0,-1-2 6 0,1 1 8 0,0 1 0 16,1 0-2-16,0 1-7 0,-1 1-5 0,1 1 2 0,0 0 1 0,-1 1 7 16,2 1 8-16,-1 0 6 0,0 0 6 0,0 1 5 0,0 0 1 15,0 0 0-15,1 1 3 0,-1 1 4 0,1 0 0 0,-1-1 6 0,0 1 1 16,0 1 3-16,-1 0 3 0,1-1-2 0,-1 1-1 0,1 0-1 16,-1-1-1-16,0 1-5 0,0-1 2 0,-1 1 3 0,0 1 5 0,0-1 12 15,1 0 3-15,0 1 5 0,0-1 7 0,0 0-4 0,1 1-1 0,0 0 4 16,-1 0-4-16,0 1-2 0,0-1 0 0,0 2-6 0,1 0-1 15,0 0-4-15,0 0 4 0,1 1-6 0,0 1 3 0,0 0 2 0,1 0-6 16,1 0 3-16,0-1 1 0,1 0-3 0,3-1 4 0,0 1-6 0,2-2-5 16,0 0-3-16,0-2-9 0,1 1 0 0,0-1-2 0,0 1-3 15,1-2 5-15,-1 0-4 0,1-2-4 0,0 1 0 0,0-1-4 0,-2-2-2 16,2 1 1-16,-2 0-3 0,0-1-2 0,0 0 1 0,-1-1-3 0,-2 0 1 16,0-1-1-16,0 0-7 0,-2 1-21 0,1-2-24 0,-2 0-20 15,-1 1-25-15,0-1-15 0,-2-2-28 0,0 0-35 0,0-1-38 0,-1-3-70 16,-1-2-278-16</inkml:trace>
-  <inkml:trace contextRef="#ctx0" brushRef="#br0" timeOffset="59554.63">22345 7436 3242 0,'-7'-5'30'0,"1"2"-46"0,0-1-24 0,4 4-13 0,3 0-2 0,0 0 3 16,2 1-1-16,-1 1-2 0,0 0-5 0,0 0-4 0,-1-1-27 15,0 1-34-15,0 0-62 0,0 0-43 0,0-1-26 0,0 0-25 0,0 0-9 16,0 0-13-16,0-1-73 0,1-1-138 0</inkml:trace>
-  <inkml:trace contextRef="#ctx0" brushRef="#br0" timeOffset="60186.65">22575 7710 2569 0,'-4'-1'100'0,"0"0"-107"0,1 0-44 0,1 2-16 0,2 0 4 16,2 0 20-16,1 1 15 0,1 0 18 0,-1 0 10 0,0 0 4 15,-1 0 7-15,0 0 1 0,0-1 2 0,0 0 0 0,-1 1-2 0,1 1 2 16,-1 1 0-16,1 0 0 0,0 0 2 0,0 1-5 0,0 0 0 0,0 1 0 16,0 0-4-16,0 0 1 0,1 1-2 0,-1 0 0 0,2 0 1 0,-2 1 1 15,1 0-5-15,0 1 0 0,0-1 2 0,0 1-4 0,1 0 1 16,0-1-2-16,1 2-2 0,0-1 4 0,0-1-2 0,0 1 2 0,0-2-1 15,1 1 1-15,1-1-2 0,0-1 1 0,-1 1 3 0,1 0-3 16,-1-2 4-16,2-1-5 0,0 1 0 0,-2-1-2 0,3 0 2 0,-2-1 2 16,1 0-2-16,-1 0-2 0,-1-2-7 0,0 0-10 0,-1 0-29 0,-1-1-41 15,-1-1-49-15,-1 0-35 0,-1-1-36 0,0-1-25 0,-2-2-24 16,1 0-44-16,-1-3-47 0,-1-3-234 0</inkml:trace>
-  <inkml:trace contextRef="#ctx0" brushRef="#br0" timeOffset="60354.65">22528 7468 2644 0,'-6'-4'8'0,"1"2"-111"0,0 1-75 16,2 2-51-16,4 2-47 0,0 0-31 0,2 2-30 0,0 0-186 0,1-2-18 15</inkml:trace>
-  <inkml:trace contextRef="#ctx0" brushRef="#br0" timeOffset="69221.33">24970 7243 709 0,'1'0'539'0,"-1"3"-517"0,1 1-20 0,1 3 3 0,2 1-2 0,0 0 4 15,2 0 0-15,-2 0 2 0,0-1 5 0,1 2 1 0,-1 1 2 16,0 1 5-16,0 1-1 0,0 1 2 0,1 0 0 0,-1 4 0 0,1 1 1 15,-2 2-3-15,0 3 1 0,0 4-7 0,-1 2 1 0,0 3-11 0,-1 3 1 16,0 3 4-16,-1 3 0 0,0 3 11 0,-1 2-3 0,-1 4-6 16,-1 1-4-16,-2 3-8 0,1 2 0 0,-2 2-3 0,0 0 0 0,-1 0-6 15,2-4 1-15,2-3 7 0,1-3 4 0,4-5 10 0,0-3 13 0,2-3 3 16,1-5 22-16,0-2 23 0,1-4 8 0,0-1 8 0,0-3-4 16,0-3-13-16,0-2 2 0,0-2-7 0,0-3-3 0,0-1 1 0,0-3-6 15,-1-1 3-15,0-3-4 0,-1-1-5 0,1-1-5 0,0-1-10 16,1 0-11-16,0-1-5 0,1-1-8 0,0 0-5 0,2 1 1 0,0-1-7 15,3 0-1-15,-2-1 0 0,4 0-4 0,0 2 1 0,-1-1 0 0,1 1 0 16,0 0 3-16,1 1-5 0,1-1 2 0,0 1-3 0,1 0 1 16,-1 1-1-16,0-1 1 0,-1 0-1 0,0 0 0 0,1 1-1 0,1-1-7 15,-3 0-1-15,3 0-3 0,-1 0 2 0,0-1 0 0,-2 0 2 0,0-1 2 16,-1 0-5-16,-1 0 2 0,0-1 6 0,-1 0-7 0,0-1 1 16,1-1-4-16,-1 0-10 0,0-1 2 0,-1 0-9 0,2-1-7 0,1 0-7 15,-2-1-15-15,2 1-16 0,-3-2-18 0,1 0-32 0,-1 2-47 16,0-2-57-16,-1 1-82 0,-1-1-90 0,1 0-302 0</inkml:trace>
-  <inkml:trace contextRef="#ctx0" brushRef="#br0" timeOffset="69737.36">25152 7330 2681 0,'-10'-6'13'0,"2"1"-13"0,1 0-9 0,6 3-1 0,4 2-1 16,2 0 1-16,2 1 12 0,1 0-1 0,0 1-1 0,2 0 3 0,1 1-4 15,-2 1 2-15,1 1 1 0,-1 0-2 0,0 1 2 0,-1 0-4 16,2 0 2-16,-1-1-2 0,1 1 1 0,0 0-6 0,-1 0-4 0,0-1-8 16,1 0-23-16,0-1-24 0,1 0-35 0,-1-1-47 0,1-2-61 0,-1 0-82 15,2-2-85-15,0-1-119 0,0-2-154 0</inkml:trace>
-  <inkml:trace contextRef="#ctx0" brushRef="#br0" timeOffset="70020.88">26222 7371 3500 0,'0'0'-2'0,"2"3"-24"0,3 3 0 0,3 4 6 15,3 3 6-15,1 0 5 0,1 1 9 0,-1 0-4 0,-1 0 0 0,-1 1 4 16,-1-2-3-16,-2 3-1 0,0 0 2 0,-2 0-3 0,0-1-3 16,-2 0-12-16,-1-1 2 0,-1-1 0 0,-1-2 4 0,1 1 25 0,0 0 0 15,0-2-1-15,1 0-2 0,0-1-10 0,1-1-5 0,2-3 3 16,-1 2-5-16,2-3 0 0,0 0-16 0,-1-1-13 0,3-1-15 0,0 0-10 15,0-2-9-15,-1 0-10 0,1 0-9 0,0-2-14 0,0 0-13 0,-1-2-14 16,0 0-15-16,0 0-17 0,0-2-15 0,1 0-12 0,0-3-20 16,0 0-19-16,2 0-24 0,-1-2-39 0,0-1-300 0</inkml:trace>
-  <inkml:trace contextRef="#ctx0" brushRef="#br0" timeOffset="70470.88">26023 7220 2488 0,'-5'-12'92'0,"2"2"-98"0,1-2 0 0,3 5-5 0,4 2-5 0,2 1 8 15,1-2 2-15,1-1 3 0,3 1 4 0,0 1-4 0,0 0 5 16,1 1 1-16,0 0-3 0,0 1-2 0,0 0 1 0,1 0-6 0,2 0 9 15,0 1-1-15,0 0 4 0,2 0-5 0,1 0-1 0,1 1 2 0,0-1-4 16,1 0 5-16,1 1-4 0,0 1 2 0,1 0 8 0,-1 0-3 16,1 2 2-16,0 1 1 0,-1 0-9 0,0 2 4 0,0 2-5 0,-1 1-1 15,2 2 2-15,-2 4-1 0,0 1 2 0,0 3-3 0,-1 4 1 0,-1 1 1 16,2 3-4-16,0 2-1 0,-2 0-1 0,1 1 1 0,-1-1-3 16,-2 3 4-16,1 0 0 0,0 1-1 0,-3-1 3 0,1 0-11 0,0-4-1 15,-2 0-4-15,-1-3 2 0,-2 1 11 0,-3 0 6 0,-3-3 3 16,-4-1 3-16,-2-3-1 0,-5-3 1 0,-3 0 3 0,-3-2 2 0,-5-1 6 15,-2-2 6-15,-3 1-2 0,-2-1-1 0,-4 0-4 0,-3-2-5 16,-3 0 3-16,-2 0-3 0,-1-2 4 0,-2 0-4 0,0-1-3 0,-1-3 2 16,-2 0-4-16,2-3-6 0,1-2 2 0,0-2 2 0,5-3 3 0,1-2 12 15,4-4-1-15,2-1 0 0,3-2-5 0,1-2-7 0,2-3-1 0,4-2-6 16,1-1-3-16,1-4-4 0,3 1-10 0,0 0 7 0,4-1-4 16,1 0-1-16,3 0-1 0,2 0-20 0,2 1-22 0,2 0-33 0,3 2-53 15,1 0-86-15,1 1-122 0,4 1-147 0,1 0-333 0</inkml:trace>
-  <inkml:trace contextRef="#ctx0" brushRef="#br0" timeOffset="71903.86">27683 7142 768 0,'1'-2'93'0,"1"1"1"0,1 0 16 0,0 0 13 16,0 0 4-16,0 0-11 0,0-1-14 0,1 1-15 0,-1 0-16 0,1 0-9 16,0-1-5-16,-1 1-2 0,1-1-3 0,1 0 0 0,0 0-2 0,1-1 0 15,-1 1-4-15,0-1 0 0,0 1-4 0,-1-2 1 0,0 1 0 16,0-1-4-16,0 0 1 0,-1 1-12 0,-1-1-3 0,0 0-3 0,-1 0-7 16,-1-1 5-16,-1 1-4 0,-2-1-1 0,0 0-4 0,-3-1 0 15,0 2 5-15,-2-1-2 0,-1 1 12 0,-2 2-1 0,-2 0 3 0,1 1 2 16,-3 1 1-16,-1 1 6 0,0 0 0 0,-1 2 2 0,-1 0 3 0,-1 3-2 15,0 0 1-15,-1 2-8 0,0 1-3 0,2 0-6 0,0 1-9 16,0 1-1-16,1 0-2 0,1 2 0 0,-1 0 2 0,2 0-2 0,0-1 0 16,4-1 1-16,-1 1-3 0,1-1 2 0,1 0-5 0,2 0 0 0,1-1 2 15,3-2-4-15,1 2 2 0,1-1 1 0,2 0-3 0,1 0 2 16,2 0 4-16,1 0-8 0,1 0 6 0,3 0 0 0,0-1-2 0,3-1 0 16,0 1-2-16,1 1 3 0,1 0-10 0,2-1 5 0,1 1 3 0,1 0-6 15,0 1 5-15,0 0-5 0,1 0-4 0,-1-1 4 0,2 1 0 16,-1 1 4-16,0 0 1 0,-1-1-1 0,0 1 0 0,-1-1-3 0,0-1-2 15,-1 0-3-15,0 0 4 0,-2-1-4 0,-1 1 4 0,-2-1 0 16,-1-2 0-16,-1 0 2 0,-2 0-2 0,-2 0 2 0,0-1 3 0,-2-1-5 16,0 0 0-16,-3 0 4 0,0-1-2 0,-2 0 1 0,-2 1-1 0,-2-1-2 15,-2 1-2-15,-1-1 2 0,-2 1 2 0,-1-2-13 0,-2 1 1 16,-1 1-3-16,1-2 1 0,-3 2 12 0,1-1-2 0,0 2-2 0,0-1 4 16,0 1-5-16,0 0 5 0,3 0 0 0,-1 0 0 0,1 0 12 0,1-1-3 15,1 1 2-15,3-1-2 0,-2 1-13 0,1 0 1 0,1-1-8 16,1 1 2-16,1-1-3 0,1 0-2 0,2-1-1 0,1 0-4 0,2-1-8 15,0 0-13-15,1-1-17 0,0-1-9 0,1 1 0 0,1-1-4 16,1-1-3-16,2-2-15 0,0 1-19 0,2-2-22 0,0 0-7 0,1-1-19 16,-1-2-21-16,2 1-23 0,-1-1-50 0,1 0-41 0,-1-1-62 0,1-1-277 15</inkml:trace>
-  <inkml:trace contextRef="#ctx0" brushRef="#br0" timeOffset="72321.87">27871 7381 1849 0,'-4'1'42'0,"0"3"-29"0,-1 2 7 16,3 1 14-16,1 1 16 0,1 0 4 0,0 1-1 0,0 2-6 0,1 1-7 15,1 1-9-15,-1 1-5 0,1 0-5 0,0 0-1 0,1 0-2 16,0 0 6-16,1-2-5 0,1 1 4 0,1-1 2 0,1-1-4 0,2-1 7 15,2-2-9-15,2-2-2 0,0 1 0 0,0-2-6 0,0 0 14 16,2-2 5-16,2 0 1 0,-1-2 5 0,-1-1 1 0,1-1 4 0,0-1-7 16,0-1-1-16,-2-1 0 0,-1 1 12 0,1-2-4 0,0-1 10 0,0 1-4 15,-3-3-16-15,2 0 9 0,-2-1-12 0,-1-1-7 0,1 1-4 16,-3 0-1-16,0 1-4 0,-1-1 1 0,-1 0 4 0,-2 2-2 0,-1-1-1 16,-1 0 0-16,-2-1-2 0,-2 2-1 0,-1-1 3 0,-1-1-1 0,-2 1-6 15,-2-1-5-15,-1 0 2 0,-2 0-4 0,-2 0 3 0,-2 0-1 16,-1-1-2-16,-1 2-2 0,0 0 0 0,-1 0 2 0,1 2-1 0,0 2-3 15,0 0 0-15,0 1-1 0,2 2-6 0,-1 1 4 0,0 0-4 0,1 1-1 16,2 1-4-16,-1 1 0 0,2 2-5 0,-1 0 3 0,2 1-5 16,1 1-1-16,0 0-1 0,2-1-6 0,1 2 0 0,0-1-9 0,2-1-11 15,0 0-10-15,2 0-13 0,1 0-11 0,1 0-11 0,1-1-9 16,1 0-24-16,1-1-28 0,1-1-36 0,1 0-36 0,1 0-28 0,1-1-24 16,1 0-22-16,1-1-346 0</inkml:trace>
-  <inkml:trace contextRef="#ctx0" brushRef="#br0" timeOffset="72805.11">28557 7262 1954 0,'1'3'39'0,"-1"1"-13"0,1 3 15 0,1 2 16 0,0 0 9 16,1 0-8-16,0 2-10 0,0 1-6 0,0 1-9 0,-1 1 1 0,1-1-5 15,-1 1-1-15,1 0-5 0,-1-1 1 0,1 0-2 0,-1 1-4 0,1 0 8 16,0-1-7-16,2 0-3 0,1-2-2 0,0 1-4 0,0 0 3 16,1 1 3-16,-1-1 11 0,1-2 4 0,-1 0 7 0,1-3 4 0,-1 0-5 15,0-2-4-15,0 0 2 0,-1-1-1 0,1 0 7 0,-2-3-12 16,0 1 14-16,-1-1-14 0,1-1 8 0,0 0 12 0,0-1-21 0,-1 0 15 15,1-1-20-15,1 0 3 0,-2-1-2 0,2 0-1 0,0 0 1 0,-1-1-1 16,2 0 3-16,-2-1 1 0,1 0 1 0,-1 0 1 0,0 0-1 16,2 1-2-16,-1 0-4 0,0 0 1 0,0-1-7 0,1 2-1 0,-1 0-3 15,1 0-10-15,1 2 5 0,0-1 1 0,-2 2 3 0,1 0 4 0,1 1-2 16,-1 0-1-16,0 1-5 0,1-1-1 0,-1 1-2 0,-1 1 7 16,0 0-1-16,0 1-1 0,-1 1-1 0,0 0-8 0,1 2 4 0,0-1 0 15,0 1-4-15,0 1 2 0,-1-1 1 0,0 0-20 0,1 0 6 16,-1-1-4-16,0-1-5 0,1 2 20 0,-1 0-7 0,1-1 14 0,-1 0-1 15,0-1-2-15,1 0 0 0,-1 0-16 0,1 1-12 0,-1 0-8 16,0-1-2-16,-1 0 0 0,1 0 0 0,-2 0-8 0,1-1-17 0,-2-1-16 16,0-1-8-16,0 0 8 0,-1 0 7 0,1 0-6 0,-1-1-10 0,0 0-19 15,0-1-23-15,1 0-21 0,-2 0-20 0,1-1-18 0,0-1-12 16,0 0-40-16,1-2-59 0,0-1-81 0,0-2-386 0</inkml:trace>
-  <inkml:trace contextRef="#ctx0" brushRef="#br0" timeOffset="73103.89">29165 7039 2386 0,'-5'-2'17'0,"0"2"9"0,0 0 16 0,2 2 17 0,1 0 20 15,0 2 8-15,2 0 1 0,-2 1-1 0,1 2-11 0,-1 1-13 16,-1 1-1-16,1 2-6 0,-2 2-2 0,1 1 8 0,-1 3-10 0,1 1-11 15,-1 2-10-15,0 0-13 0,2 2-5 0,-1 1 0 0,0 3 5 0,1 1-5 16,-1-1-4-16,0 0-4 0,1-2-3 0,1 0 0 0,1-2-2 16,0-2 2-16,3 0-2 0,0 0 2 0,1-2-2 0,1 1-4 0,1-1 4 15,2-1-4-15,2 0 1 0,1-1-8 0,3-2-11 0,0-2-4 16,0 2-1-16,2-1-6 0,0 0 14 0,1 0-7 0,-1-2-15 0,0-1-12 16,1-1-26-16,-1-1-18 0,0-1-12 0,0-1-11 0,0-2-17 0,-1-1-22 15,-2-1-21-15,1-2-35 0,-1-1-44 0,0-3-48 0,-2-1-32 16,0-2-26-16,0-3-223 0</inkml:trace>
-  <inkml:trace contextRef="#ctx0" brushRef="#br0" timeOffset="73837.88">29529 7445 1180 0,'-4'-1'203'0,"0"2"-118"0,-2 0 18 0,2 2 13 16,0 1-1-16,1 1-8 0,0 1-11 0,0 1-5 0,0 1-12 16,0 0-10-16,0 1-3 0,1 1-8 0,0 1-3 0,1 1 3 0,0-1-4 15,0 0-4-15,1 1-5 0,1-1-6 0,2 1 1 0,-1-2-12 16,-1-1 5-16,4 1-2 0,0-1 0 0,2 0 11 0,2 0 2 0,-1-1-2 15,2-1-8-15,-1-1 2 0,0-1-5 0,1 0-6 0,-1-1 3 0,3-1-7 16,-2-1 0-16,1-1 5 0,-2-1-8 0,2-2 1 0,1-1-1 16,-1-1-9-16,-1 0 10 0,1-2-3 0,-3 1 2 0,1-2 2 0,-1-1-7 15,-1-1 1-15,0 1 1 0,0-1-3 0,-1 1 18 0,-1 0-3 0,0 1 2 16,-2 0 1-16,-2-2-12 0,0 0 1 0,0 1-3 0,-2-1 1 16,1 0-2-16,-2 2-2 0,0-2 0 0,-2 1-1 0,-1 0-7 0,-2 0-1 15,-2 2-11-15,0 0 1 0,0 0-7 0,-2 1-2 0,0 2 0 16,-3-1-2-16,0 1 2 0,-1 1-2 0,1 2 5 0,0 0-11 0,-1 2 5 15,1 1 0-15,-1 0-6 0,2 0 2 0,-1 2-7 0,2 0-6 0,3 1 1 16,0 0 0-16,2 0 2 0,2 0 0 0,1-1 0 16,1 0-6-16,2 1 1 0,2-1 2 0,0 0 3 0,1 0 3 0,1 1 1 0,0-1 4 15,0 1 2-15,2-1 0 0,0 0 11 0,1 1-6 0,2-2 5 0,0 0 4 16,1 0-9-16,1-1 5 0,0 0 1 0,1-1-1 0,0 0-8 16,1-1 14-16,0-1-1 0,0 0 4 0,0 1 11 0,1-1-11 0,-1-1 5 15,1 1 1-15,0 0 3 0,-4 0 3 0,1 0 2 0,-1 0 7 16,0 0 1-16,-1 0 6 0,0 1-2 0,0-1-9 0,-2 0 9 0,1 1-18 15,-1 0 1-15,0 1 4 0,0-1-12 0,0 2 9 0,-1 0 0 0,1 1-4 16,1 0-1-16,-1 1 3 0,-1 0-4 0,1 1 3 0,0 0-1 16,1 0-1-16,-1 0 0 0,3 0 1 0,0-1 1 0,0 1-4 0,1 0 0 15,-1-1 1-15,1 0 1 0,-1 1 3 0,2-2 0 0,0 1-1 0,-2 0 6 16,2-1-3-16,0 1 1 0,-1-1 3 0,0-1-3 0,-1 0 8 16,1 0-2-16,0 0 0 0,-1 0 0 0,1-1-2 0,-1 1 7 0,0-2-1 15,0 1-3-15,-2-2-1 0,2 1-1 0,-2-1-4 0,0 1 0 16,0 0 1-16,-2-1-1 0,1 0 4 0,-1 1-5 0,-1-1-2 0,-1 1-3 15,0-1-3-15,0 1 2 0,0-1 2 0,-1 1-1 0,-1 0 1 0,1 0-1 16,-2 0-4-16,1 0-3 0,-1 0 2 0,-1 0-3 0,1 0 1 16,-1 1 4-16,0-1-7 0,0 0 9 0,0 0-6 0,1 1 6 0,-2 1-4 15,1-1 1-15,0 0 1 0,0 0-6 0,-1 1 6 0,2-1 0 0,-2 0 0 16,0 0 2-16,0 0-4 0,-1-2 1 0,0 2 4 0,-2-1-1 16,1-1 7-16,-1 1-6 0,-1-2 1 0,2 1-1 0,-3-2 5 0,0 1-7 15,0-2 5-15,1-1-3 0,-1-2-3 0,1 1 4 0,-1-1 0 16,2 0 1-16,0-1 4 0,1-1-2 0,0-1-1 0,0 0 3 0,2-1 7 15,0 0 0-15,-1-2 2 0,0 0-5 0,3-2 2 0,0-1-6 0,1-1-2 16,2 0 21-16,1 2-8 0,1 1 4 0,1 0-4 0,0 1-18 16,1 0 2-16,1 2-1 0,2 0 3 0,-2 0-4 0,1-1-2 0,2 1 0 15,0 1 0-15,0 1 0 0,1 0-2 0,-2 1 2 0,2-1-6 0,-1 1 1 16,-2 0-4-16,1 1-8 0,-1 0 0 0,0 1-8 0,-1 0-14 16,0 0-19-16,-1 2-27 0,0-1-25 0,1 0-34 0,-1 1-32 0,-1-1-40 15,0 0-57-15,-1 1-81 0,1 0-111 0,0 1-483 0</inkml:trace>
-  <inkml:trace contextRef="#ctx0" brushRef="#br0" timeOffset="74737.89">26600 8476 1036 0,'-4'-3'306'16,"-1"2"-261"-16,-2 0 7 0,2 2 21 0,1 1 20 0,1-1 6 0,-1 1-5 16,0-1-9-16,0 0-9 0,0 0-3 0,-1 0-3 0,0 0 2 15,2 0 4-15,0 0 5 0,1 0 0 0,1-1-1 0,-1 0-9 0,1 0-9 16,2-1-4-16,0 0-6 0,1 0-11 0,0-1-1 0,2 1-9 15,2 0 1-15,0 0 0 0,1-1 0 0,3 1-3 0,1 0-8 0,1 0-2 16,0 0-7-16,0 1 1 0,5-1-1 0,-1 0-3 0,0 0-4 0,-1 0-3 16,-2 1 3-16,0 0-5 0,0 1 4 0,-2-1-3 0,0 0-6 15,-1 2 9-15,-1-1-6 0,0 0-2 0,-2 1 4 0,0 0-7 0,-1 1 2 16,0 1-3-16,-2 0-4 0,-1 1 6 0,0 2-7 0,-1 0 8 0,-1 1-2 16,-1 1-2-16,-3 1 9 0,0 1 0 0,0 1 0 0,-3-1 4 15,0 1 1-15,-1-1 0 0,-1 1 2 0,-1 0 5 0,1 0-5 0,-1 0 6 16,1-2 3-16,-1 1 0 0,2-1 3 0,0 0 0 0,2-1 4 15,1 0-2-15,1-2-2 0,1-1 0 0,2-1 3 0,0 0-3 0,3-1 6 16,0-1-2-16,1-1 3 0,2 0-1 0,1-1 2 0,1 0-2 0,-1-1 3 16,3 0-6-16,1-1-2 0,2 0-2 0,-1 0-8 0,2 0 1 15,0-1-4-15,1-1-3 0,0 0-1 0,2 1 1 0,-3-1-2 0,2 1-2 16,1 0 2-16,-2-1-4 0,1 0 2 0,-1 0 2 0,-2 1-8 0,0-2 6 16,-3 1-16-16,0 0-18 0,-1-1-8 0,-2 0-21 0,-2 1-11 15,0-1-15-15,-2 0-15 0,-1 0-16 0,-1 0-15 0,-2 0-25 0,0-1-33 16,-1 1-36-16,-2-1-39 0,-1-1-38 0,-1 2-48 0,-1-2-7 15,-1 0-308-15</inkml:trace>
-  <inkml:trace contextRef="#ctx0" brushRef="#br0" timeOffset="75138.06">26609 8315 1630 0,'-6'-9'288'16,"2"1"-234"-16,0-1 9 0,3 2 2 0,2 2 2 0,1 0-12 0,1-1-9 15,0-1-1-15,2 0-4 0,1 0-2 0,0 1 14 0,3-1-11 16,2 1 16-16,1 0-1 0,0-2-6 0,2 3 6 0,-1-3-12 0,2 1-2 16,1 0-8-16,1 0-3 0,-2 1-5 0,4 1 0 0,0 0-5 0,1 1-4 15,2 2-2-15,0 0-4 0,-1 2 0 0,2 0-2 0,0 2 0 16,-2 1 2-16,0 1-2 0,-1 2-3 0,0 1-3 0,1 2-8 0,-1 2 1 16,1 0-13-16,1 1-2 0,-1 1 2 0,2 3 1 0,1 2 13 15,-1 2-7-15,1 1-6 0,2 2-5 0,1 0-4 0,1 1 1 0,0 1-8 16,0 2-2-16,-3 0-2 0,1 0-1 0,-3 3 8 0,-1-2 2 0,-2 1 5 15,-3-3 3-15,-3-1 2 0,-2-3 7 0,-4 0 2 0,-3-2 3 16,-4-1 5-16,-3 1-2 0,-5 0-1 0,-4 0 0 0,-4 2 1 0,-2 0 2 16,-5-1-10-16,-2 1 2 0,-3 0 6 0,-1-1-1 0,-4 2 13 0,-2-1 1 15,0-2-4-15,-1 1 0 0,1-1 0 0,1-2 0 0,0 0 0 16,1-3-2-16,0-1 4 0,3-3-2 0,1 1-3 0,4-3 5 0,0-1 3 16,1-3 1-16,4-3 4 0,-1-1 5 0,4-1 0 0,1-3 4 15,2-1-4-15,1-2-1 0,0-2-10 0,1-2-2 0,2-1 1 0,3 0-2 16,-1-3-4-16,1-2-2 0,1-4-4 0,1 0-11 0,1-4-3 0,1 0-17 15,1-2-36-15,0-1-34 0,1 1-42 0,1-3-56 0,1 2-87 16,0-2-137-16,2-1-155 0,0-2-176 0</inkml:trace>
-  <inkml:trace contextRef="#ctx0" brushRef="#br0" timeOffset="79421.57">27876 8205 1536 0,'0'-1'153'0,"1"-1"-135"0,0 1 2 15,2 0 14-15,-1 2 29 0,0 0 20 0,-2 0 6 0,0 1-6 0,-1 0-14 16,0 1-11-16,-1 0 1 0,0 2 3 0,-2 1 3 0,0 0 0 15,0 0-3-15,-1 0 3 0,0 0 0 0,1 2 5 0,0 1-1 0,1 0 0 16,-1 1 4-16,2 1-5 0,1 2-1 0,-2-1-10 0,1 1-8 0,1 0 1 16,1 2-7-16,0 2-4 0,0 0-7 0,0 0-6 0,1 1-6 15,0 0-9-15,1 0-4 0,0 2 2 0,1 0-4 0,2 1-1 0,0 1 0 16,1-2-6-16,1 0 2 0,1 0 2 0,1 0-2 0,0 0 0 0,1 0 0 16,-1 0-2-16,2 0 4 0,-1-1-4 0,-1-1 4 0,2-2-2 15,-2 0-4-15,0-2 4 0,1-2 2 0,-1 0 2 0,-1-2-4 0,0 0-2 16,-1-1 5-16,0-2-3 0,-2-1 8 0,2-1-14 0,-2-1-7 15,1-2 3-15,-1-1-11 0,-2 0 0 0,0-2-19 0,-1-1-12 0,0-1-19 16,0-1-17-16,-1-1-22 0,0-2-31 0,-1-1-19 0,-1 0-22 0,-2-1-26 16,0 0-28-16,0-2-13 0,-2 0-10 0,1-1 6 0,0 0 21 15,0 2 16-15,0-2 9 0,0 0 14 0,1-1-157 0</inkml:trace>
-  <inkml:trace contextRef="#ctx0" brushRef="#br0" timeOffset="80038.14">27768 8265 1703 0,'-5'-3'68'16,"1"0"-25"-16,-1-1 26 0,2 2 20 0,1 1 16 0,2 0-1 0,-1 0-15 16,1 1-10-16,0 0-8 0,0 1-13 0,0-1-6 0,0 1-8 15,1 0-7-15,0-1-2 0,1 1-3 0,1-1-4 0,-1 0-4 0,2 1 1 16,0-1-9-16,1 0-3 0,1 0-1 0,-1-1-2 0,2 0-2 15,1-1 2-15,0-1 0 0,1 1-2 0,2-1 16 0,0 0-2 0,1 0-1 16,2-2 7-16,0 0-12 0,2 0 3 0,0-1-2 0,0 2 0 0,0 0-1 16,0 0-1-16,0 0-1 0,1 1-4 0,1 0-1 0,-1 1 0 15,1 1-2-15,-1 0 0 0,1 0-2 0,-2 2-5 0,1 1 5 0,-1 0-1 16,1 2-3-16,-1-1 5 0,-1 1-8 0,0 1 4 0,-2-1 1 0,-2 2 1 16,-1-1-1-16,-1 1-1 0,-1 0-13 0,-1 0 1 0,-1 1-1 15,-2 1-1-15,-2 1 11 0,-2 0-1 0,-1 2 4 0,-2 0 1 0,-1 1-3 16,-1 0-2-16,-2 0 1 0,-1-1-8 0,-1 1-2 0,-1-1-1 15,1 1 2-15,-1-1 1 0,-1-1 11 0,1 1-5 0,0-2-1 0,1 0 3 16,1-1 1-16,-1-1 1 0,1-1 1 0,1-1 1 0,0 0-1 0,1 0-2 16,0-1 0-16,0-1 2 0,1 0-2 0,0-2 2 0,1 0 3 15,1-1-4-15,-1 0 3 0,2-1-1 0,-1 1-1 0,2-1 0 0,-1 0 0 16,2 0 1-16,-1 0-1 0,2-1-2 0,-1 1-2 0,1-1 2 0,0 0 2 16,2 1-1-16,1-1 3 0,0 1-1 0,0-1-3 0,2-1 2 15,-1 2 2-15,2-1-4 0,0 0 0 0,1 0 1 0,0 0-2 0,1 1 1 16,0-1 1-16,0 1-1 0,1 0 0 0,0 1 4 0,0-1-2 0,1 2 1 15,-1-1 0-15,-1 1 4 0,2 1-3 0,-1 0 5 0,0 1-4 16,0 0-7-16,0 0 2 0,-1 2 0 0,0 1-2 0,0 1 2 0,0 2-1 16,-1 1-1-16,-1 1 0 0,-2 1 0 0,-1-1 1 0,0 2-3 0,-2 0 4 15,1 1-3-15,-1-1-1 0,-1-1 2 0,0 0 1 0,-2 0 4 16,-1-1-3-16,-1 0 2 0,1 0 1 0,-2-1-1 0,-2 0-2 0,0 0-2 16,0-2 1-16,-2 0 4 0,1-1-1 0,-1 0 3 0,-1 1 0 15,1-2-1-15,-1-1-1 0,0 1-6 0,0-2-1 0,1 0-11 0,-1-1-8 16,0-1-1-16,1-1-12 0,-1 0 0 0,-1-1-1 0,1 0-2 0,-1-2 0 15,0 1 1-15,1-1-2 0,1-1 1 0,0-1-5 0,1 0 0 16,0-2-10-16,1 1-8 0,0 0-4 0,1-1-17 0,1 1-17 0,1-1-19 16,0 3-34-16,2-1-32 0,1 0-33 0,0 1-47 0,2-1-46 15,0 1-367-15</inkml:trace>
-  <inkml:trace contextRef="#ctx0" brushRef="#br0" timeOffset="80538.14">28432 8466 1486 0,'-4'5'176'16,"-2"1"-149"-16,1 3 2 0,0 0 17 0,2 0 23 0,0 0 12 0,1-1-2 15,0 2-15-15,1 0-12 0,-1 1-10 0,1 1-6 0,1-2-5 16,1 0-2-16,0 0 1 0,1 0-4 0,0 0 2 0,1 0 2 0,0-2-1 15,1 0 1-15,1 0-6 0,0-1-5 0,2 0-1 0,0-1-2 16,1-1 0-16,1-1-2 0,1-1-3 0,0 0 1 0,1 1-2 0,0-1-5 16,1 0 1-16,0 0 0 0,1-1-1 0,1-1-3 0,0-1-1 0,-2 0-2 15,1-2 5-15,-1 0 1 0,0 0-3 0,-1-1 3 0,-1 0-10 16,-1-1 5-16,0 0 0 0,-1 0-3 0,0-1 1 0,-2-1-1 0,0 0-4 16,-1-1 4-16,0 1-1 0,0-1-4 0,-2 0 3 0,3 0-5 0,-3 0 7 15,0 0 3-15,1 0 2 0,-3-1-2 0,0 1-3 0,0 0 4 16,-1-1-2-16,1 0 2 0,-1 0 7 0,0 1-3 0,0 0 3 0,-1 1-3 15,1 2-5-15,-1-1 4 0,0 2 1 0,0 2 5 0,-1-1 1 16,0 2 2-16,-1 1-2 0,0 0 2 0,1 1-1 0,0 0 0 0,-1 2-3 16,1-1-1-16,0 1 1 0,-1 0-6 0,1 1 3 0,0-1-2 0,1 2-3 15,0-1 1-15,0-1-2 0,1 2 3 0,0-1-5 0,0 0 1 16,1 1-1-16,-1 0 2 0,1-1 0 0,1 2 3 0,0-1-3 0,0 0-1 16,-1 1 4-16,2 0-6 0,-2 0 1 0,1 1 2 0,1 0-1 0,0 0 2 15,0 1-4-15,1-1 1 0,-1 0 1 0,0 0-1 0,1-1 2 16,-1 2-2-16,1-1-11 0,0 2-3 0,1 0 0 0,0 0-1 0,-1-1 9 15,0-1-4-15,1-1-8 0,-2-1-12 0,1-1-9 0,1 0 0 16,-1-1 6-16,-1 0 1 0,1-2-3 0,-1 0-10 0,0-1-13 0,0-1-14 16,0-1-24-16,1-1-23 0,-1-1-19 0,2-1-35 0,-1 0-41 0,1 0-59 15,-1-1-83-15,-1-1-221 0</inkml:trace>
-  <inkml:trace contextRef="#ctx0" brushRef="#br0" timeOffset="80854.75">29119 8576 1959 0,'-2'3'45'16,"0"2"-35"-16,1 3-5 0,0 0 4 0,1-1 8 0,1 1 7 0,1 0 2 16,-1 0-4-16,0 0-10 0,1-1-5 0,0 0-5 0,1 1-2 0,1-1 1 15,-1-1 2-15,1-1 0 0,0 0-2 0,0 0 2 0,2-1-3 16,-1 1 2-16,2-2-4 0,0-1 1 0,1 1-5 0,-1-1 3 0,2 0-1 16,0-1 1-16,-1-1 0 0,0-1-9 0,0 0-3 0,-1 0-8 0,0-2-10 15,-1 0-12-15,0 0-20 0,0-2-58 0,-1 1-22 0,1 0-18 16,-3 0-33-16,1 0-38 0,-1-2-100 0,-1-1-205 0</inkml:trace>
-  <inkml:trace contextRef="#ctx0" brushRef="#br0" timeOffset="81055.75">29095 8366 1727 0,'-5'-2'280'0,"0"1"-279"0,-1 0 9 15,1 1 0-15,3 1 15 0,0 0 2 0,1 0 2 0,0 1-6 16,0-1-9-16,1 2-1 0,0-2-2 0,0 0-4 0,0 0 3 0,1 0-4 16,-1 0-3-16,1-1-3 0,-1 0-2 0,1 0-1 0,-1 0-2 15,1-1-11-15,1 0-19 0,-1 0-23 0,0-1-39 0,0-1-39 0,0 0-33 16,1 0-36-16,0 0-29 0,0 1-45 0,0-1-366 0</inkml:trace>
-  <inkml:trace contextRef="#ctx0" brushRef="#br0" timeOffset="81738.81">29397 8510 1141 0,'0'0'109'0,"0"0"-45"15,0 1 8-15,0 1 16 0,1-1 14 0,0 1 5 0,1-1-6 0,-1 0-14 16,1 1-11-16,-1 3-2 0,1 0-3 0,0 0 2 0,1 1 8 16,-1-1-6-16,0 0-3 0,1 1-10 0,-1 1-14 0,-1-1-9 0,2 1-13 15,-3-1-7-15,2 2-8 0,0 0 0 0,0 0-8 0,1 0 1 0,0-1 0 16,0 0-4-16,0 1 7 0,0-3-9 0,0 1 4 0,1 0-7 16,0 0-9-16,0-2 2 0,0 0-10 0,0-2-8 0,-1 1-8 0,2-1-8 15,-1-1-7-15,-1 1-5 0,1-2-15 0,0 0-23 0,0-1-38 16,0-1-41-16,-2 0-46 0,1-1-47 0,-2-1-58 0,0-1-135 0,-1 0-5 15</inkml:trace>
-  <inkml:trace contextRef="#ctx0" brushRef="#br0" timeOffset="82088.81">29382 8246 1398 0,'-3'-4'242'0,"-2"-1"-213"0,-1-1 19 0,2 2 19 16,1-1 11-16,1 1 11 0,0 0-1 0,1 1-5 0,0 1-11 0,0 0-2 15,0 1-7-15,0 0-1 0,0 1 4 0,0 1-1 0,1 1 2 16,0 0-2-16,0 0-10 0,1 1-10 0,-1 2-9 0,1 0-18 0,2 2-3 15,-1 0 0-15,0 1-9 0,0 2 11 0,-1 2 2 0,1 0-4 0,-1 2 3 16,-1 1-4-16,3 0-6 0,-1 2-3 0,0 2 0 0,2 2-1 16,-2 1-3-16,2 1 3 0,-1 1-6 0,2 0 2 0,-1 0 0 0,1 2 2 15,1 1-2-15,0-1 0 0,0-1-2 0,1-2-5 0,-1-1-1 0,2-1-18 16,0 1-17-16,0-3-20 0,0 2-21 0,0-2-10 0,0-2-4 16,0 1 0-16,0-2-1 0,3-1-4 0,-2-3-9 0,0-1-28 0,1-1-31 15,-2-2-47-15,1-2-44 0,-2-1-50 0,1-3-371 0</inkml:trace>
-  <inkml:trace contextRef="#ctx0" brushRef="#br0" timeOffset="82388.36">29799 8172 2352 0,'-8'4'34'0,"2"1"-19"0,-3 3 4 0,2 1 16 16,2 1 27-16,1-1 11 0,0 1-3 0,0 0-10 0,0 2-19 0,-1 0 2 15,1 1-3-15,0 1-3 0,0 0-2 0,0 2-1 0,1 0 0 0,-1 0-1 16,0 2-1-16,1 1-11 0,0 0-7 0,-1 1-5 0,2 1-8 16,1-1 3-16,-1 3-2 0,2 0-1 0,0 0 1 0,2 0-5 0,1-3-1 15,0 1-1-15,2-2-4 0,0-1 1 0,1-1-5 0,1-1-4 0,2 0-7 16,1-1-7-16,1-1-15 0,0 0-13 0,1 0-16 0,2-1-14 15,1-2-14-15,0 0-3 0,0-1-7 0,-2-1-6 0,1-1-8 0,0-2-31 16,-1-2-51-16,0-1-62 0,-1-3-67 0,-2-1-439 0</inkml:trace>
-  <inkml:trace contextRef="#ctx0" brushRef="#br0" timeOffset="82555.36">29631 8585 1678 0,'-5'0'229'0,"2"0"-219"0,0 0-7 0,2 2-2 16,3-1 4-16,2 0-2 0,1 1 0 0,2 0-3 0,1 1 0 16,1 0-4-16,1-1 1 0,-1 0-4 0,1 0-2 0,0 1-4 0,0-1-7 15,0 1-6-15,1 0-8 0,-1 0-21 0,1 0-34 0,1 1-36 0,0-1-35 16,0 1-22-16,0-1-15 0,2 0-35 0,2-2-303 0</inkml:trace>
-  <inkml:trace contextRef="#ctx0" brushRef="#br0" timeOffset="82872.87">30543 8653 2366 0,'-5'6'44'16,"-1"2"-34"-16,1 4-7 0,1 0-3 0,4-2-10 0,0 3 3 0,0-1-10 15,3-1 0-15,1 0-6 0,0-1-13 0,-1-2-7 0,1 0-19 16,-1-1-13-16,1-1-22 0,-1-1-21 0,-1-1-22 0,0 0-28 0,1-3-15 15,0 0-27-15,0 0-30 0,0-2-82 0,1-2-161 0</inkml:trace>
-  <inkml:trace contextRef="#ctx0" brushRef="#br0" timeOffset="83056.87">30571 8286 1848 0,'-4'0'88'0,"0"2"-100"0,-2 1-17 0,1 1-6 15,2 1 1-15,1-1-15 0,0 0-27 0,1 0-38 0,0-1-45 0,-2 1-21 16,2-1-10-16,-2 0 7 0,-1 1-1 0,-1 1-5 0,1-1-182 16</inkml:trace>
-  <inkml:trace contextRef="#ctx0" brushRef="#br0" timeOffset="83421.87">30844 8491 1425 0,'-1'0'145'0,"1"-1"-85"0,0 1 2 0,0 2 9 0,1-1 7 0,0 1 2 15,0 1-8-15,-1-1-12 0,2 1-10 0,-1 1-11 0,0 0-3 0,1 1-2 16,-1-1 1-16,0 3 0 0,0-1-4 0,0 0-2 0,0 1 0 16,0-1-5-16,0 0-7 0,2 1-6 0,0-1-2 0,0 0-5 0,0-1 3 15,0 2 3-15,-1-1-5 0,0 0 3 0,1-1 4 0,0 0-1 0,0-1 2 16,-1 0-4-16,-1 0-6 0,1-1 2 0,1 0 0 0,-1-1 2 16,0 0-2-16,0 0-2 0,-1-1-1 0,1 0-4 0,-1-1 5 0,1 0-1 15,0 1 3-15,0-1-4 0,0 1-2 0,1 0-2 0,0 1-1 0,1 1-2 16,-1 0 0-16,1 1-4 0,0 0 1 0,0 0 4 0,1 0-2 15,0 0-4-15,0 0-2 0,1 1-5 0,0-1-6 0,1 0 0 0,-1-1-4 16,0 0-2-16,2 0-5 0,-2 0-10 0,1 0-5 0,0-2-15 16,0 0-8-16,1-1 1 0,-1 0-4 0,0 0-1 0,-1-1 3 0,1-1-10 15,-1 0-11-15,1-1-21 0,-2 0-23 0,0 0-24 0,1-1-15 0,0 1-18 16,1-1-24-16,-1 1-209 0</inkml:trace>
-  <inkml:trace contextRef="#ctx0" brushRef="#br0" timeOffset="84221.7">30969 8498 1410 0,'-5'-1'70'0,"-1"0"-27"0,0 1 18 0,3 1 26 0,-1 0 20 16,1-1 14-16,1 1-8 0,0-1-6 0,1 1-1 0,-1 0-10 0,1 0-1 15,0 1 2-15,1 0-9 0,0 1-3 0,2-1-6 0,0 0-10 0,1 1-4 16,-1 0-2-16,1 2-12 0,0 1-6 0,0 1-2 0,3 0-11 15,-1 0-6-15,1 1-7 0,1-1-6 0,-1 0-1 0,0-1 4 0,0 1-9 16,0 0 2-16,1 0 0 0,-2-1-7 0,2 0 5 0,0 0-4 0,0-1-3 16,0-1 8-16,-1 0-7 0,-1-1-1 0,1 0 4 0,-2-2-6 15,1 1 7-15,0-2-1 0,-2 0 0 0,2 0 1 0,-1-1-3 0,0 0 0 16,0 0-1-16,0-2 1 0,2 0 0 0,-2-1 0 0,0-1-6 0,2 0 4 16,-1 0-5-16,0-2-1 0,1 1 3 0,-1-1-4 0,0-1 7 15,2 2 0-15,-1-2 1 0,0 0 5 0,0-1-1 0,0 1 4 0,1-1-2 16,-2 0 1-16,1 1-12 0,-1 2 6 0,-2 1 0 0,2 1 3 15,-1 2 2-15,0 1-1 0,0 1 3 0,-1 0-8 0,0 1 5 0,-1 2-1 16,-1 0-5-16,2 1 6 0,0 2-5 0,0 0 1 0,1 2 0 0,-2 1 0 16,1 0-8-16,-1 0 5 0,1 0-1 0,0 0 0 15,-1-2 2-15,1 2 0 0,-1 0 2 0,0-1 0 0,1 1-4 0,-1-2 2 0,0 0-11 16,1-1-5-16,0-2-9 0,-2 0-17 0,1 1-11 0,-1-2-12 16,1 0-8-16,-1 0-8 0,0-2-12 0,0 0-14 0,0 0-25 0,1-2-21 15,-1 0-27-15,0 0-36 0,1-1-46 0,-1 0-80 0,2-1-95 0,-1 0-299 16</inkml:trace>
-  <inkml:trace contextRef="#ctx0" brushRef="#br0" timeOffset="85121.71">31715 8025 2080 0,'-8'-4'0'0,"2"1"2"0,-2-1 9 0,2 2-2 0,3 1 5 16,0 0-1-16,1 0-4 0,0 1 2 0,0-1-1 0,-1 1 3 15,0 0 5-15,-1 0 8 0,1 1 2 0,-1-1 13 0,0 1-2 0,1-1 0 16,-1 1 2-16,2-1-7 0,-1 1 2 0,0-1-2 0,2 1 4 0,-1 0 3 16,0-1 5-16,2 0 12 0,-1 1 4 0,2-2 6 0,-2 1 2 15,1-1-4-15,1-1-6 0,-1 1-3 0,2-1-7 0,-1 1-6 0,0-1 2 16,0 0-9-16,0 1-5 0,0-1-1 0,2-1-6 0,-2 1-7 0,-1-1 2 15,1 1-7-15,-1-1-4 0,1 1-4 0,1 0-1 0,-2 0 9 16,2 0-10-16,-2 0 10 0,1-1-4 0,-1 1-5 0,0 0 3 0,0 0 6 16,0 2-2-16,1-1-1 0,-1 0 3 0,0 1-10 0,1-1 8 0,0 1 2 15,0 0 0-15,0 0 0 0,0 1 2 0,-1 0 0 0,3 0-3 16,-1 0 1-16,0 2-8 0,2 0 1 0,-2 1-4 0,1 1 3 0,-1 1-1 16,0 2 2-16,1 0 0 0,-2 3-6 0,2 1 0 0,0 2 0 15,1 3 0-15,-1 2 0 0,1 1 1 0,0 3-6 0,1 3 1 0,0 0-9 16,0 2-2-16,0 1 9 0,0 2 1 0,2-1 12 0,-1 2-5 0,-1-1-6 15,1 1 0-15,-1-2 1 0,1 2 3 0,0-3 0 0,0 2-2 16,0-1 2-16,0-1-6 0,0-2 1 0,0-2 1 0,-1-3-2 0,4 0-1 16,-3-1-1-16,1-2 1 0,1-1 1 0,-1-2 8 0,1-2-2 15,0-2-2-15,-2 0 0 0,0-3 2 0,1-1 2 0,-1-2 2 0,-1-2 0 16,-2-2-2-16,1-1 1 0,-1-1-1 0,0-2-4 0,1-1 4 0,-4-1 0 16,1-1-4-16,0-3 2 0,-4 0-2 0,2-2 0 0,-2 1 4 15,-3-3-9-15,1-1 1 0,-2 0-1 0,-2-1-4 0,0 1 5 0,-2-2 2 16,-2 0 2-16,0 0-1 0,0 2-1 0,1-1-1 0,-1 1 1 0,2 2 4 15,-1 2 4-15,0 1-6 0,1 0 2 0,0 1-4 0,1 0 4 16,2 2 0-16,0-1 2 0,0 2 0 0,3 0-6 0,0 0 2 0,2 0-2 16,2 0 3-16,0 1 1 0,1 1-6 0,0 0-3 0,2 0 1 0,0 0-4 15,1-1-3-15,2 0 2 0,-1 0-2 0,2-1-5 0,2 1 4 16,-1-1-13-16,2 0-7 0,-1 0-7 0,-1-1-12 0,4 0-5 0,-1 0-8 16,0-1 2-16,0 1 5 0,-1 0 1 0,0 1 0 0,1 0 2 15,-1 0-3-15,1 1 5 0,0 0 3 0,0 1-1 0,0 0-3 0,-2 0-16 16,2 0-18-16,-2-1-20 0,1 1-25 0,1 0-14 0,-1 0-20 0,2 0-15 15,-2 0-1-15,2-1-11 0,-1 0 4 0,0 0-12 0,1 1-17 16,-2-1-203-16</inkml:trace>
-  <inkml:trace contextRef="#ctx0" brushRef="#br0" timeOffset="85288.7">32112 8380 885 0,'1'0'339'0,"-1"-1"-170"0,0 1-12 16,0-1-6-16,0 1-10 0,0-1-14 0,-2 1-20 0,1 0-22 0,-1 0-21 15,1 1-12-15,-1 0-16 0,0 0-7 0,-1 0-5 0,2 0-9 16,-1 0-4-16,0 1-3 0,0-1-8 0,0 1-4 0,1 0 3 0,0 0-4 15,0 0 7-15,0-1-5 0,-1 2-2 0,3-2-4 0,-1 1-11 16,0-1-2-16,1 0-17 0,0-1-19 0,-1 0-20 0,2 0-30 0,0-1-25 16,0-1-33-16,0 1-29 0,0-1-28 0,0 0-25 0,1 0-33 0,0-2-249 15</inkml:trace>
-  <inkml:trace contextRef="#ctx0" brushRef="#br0" timeOffset="86071.7">32281 8237 1362 0,'-1'0'59'16,"0"1"-39"-16,0 0 9 0,1 1 18 0,-1 1 20 0,0 0 4 0,-1 1 1 15,1 1 1-15,1 1-8 0,-1 0 10 0,0-1 7 0,-1 2 2 16,0 1 3-16,1-1-9 0,-1 1-9 0,0 0-11 0,-1 0-13 0,1 1-8 16,-1-1-8-16,2 1-7 0,-2 1-6 0,1 1-5 0,1 0 2 0,-1 0-5 15,1-1 5-15,0 2-5 0,0 0-7 0,1-1 2 0,-1 1-1 16,1-1-2-16,0-1 0 0,0 2 0 0,0-1-2 0,0 1 2 0,1-1-1 15,0-1-4-15,0 1-1 0,1 1-4 0,0-2-1 0,1 1-2 16,-1-1 2-16,2 0-11 0,-1 1-20 0,0-1 0 0,0 1-4 0,0 0 6 16,-1 0 13-16,1-1-6 0,-1 1-10 0,0 0-6 0,0-1-2 0,0-1 4 15,-1-1 7-15,0-2 0 0,0 1-9 0,-1-1-16 0,0-2-18 16,-1 0-18-16,-2-1 0 0,1-1 1 0,-1 0 10 0,0-1 19 0,-1-1 14 16,-1-1 18-16,0 0 13 0,1-1 9 0,-2-1 14 0,1 1 7 15,-1-2 12-15,1 1 13 0,1-1 15 0,0-1 20 0,-1 0 12 0,2 1 12 16,0-2-4-16,-1 0-1 0,2 0-2 0,-1-1-9 0,2-1-3 0,-1 1-12 15,0-2-16-15,1 1-13 0,1 1-10 0,1-1 0 0,-1 0-3 16,1 0-5-16,1 2 0 0,1-1 1 0,-1 2-4 0,1 0 4 0,1 1 4 16,0 0 0-16,1 2-2 0,-1-1 3 0,0 0-3 0,2 1 3 0,0 1-4 15,0 0-4-15,0 1 1 0,1-1-5 0,1 1 2 0,-1 1 6 16,0-1 0-16,0 0 0 0,2 1 8 0,0-1-8 0,0-1 0 0,0 1 0 16,2-1-6-16,0-1 6 0,-2 1-2 0,2-1-3 0,0-1 6 0,1 1-4 15,-1-2 6-15,-1 1 1 0,0-1-1 0,0-1 3 0,0 0-3 16,-1 0 2-16,-1 0 1 0,1 0-2 0,-3 1-1 0,1-1 3 0,0 1 0 15,-2-1-1-15,1 1 1 0,-1 1 1 0,-2-1 2 0,1 1 2 16,-1 0 5-16,-1 1 5 0,0-1-2 0,-1 1 2 0,1 0-1 0,-1 1-2 16,0-1-8-16,-1 1-2 0,1 0-3 0,0 1-7 0,0-1 4 0,0 0-5 15,0 0-1-15,0 1 1 0,1 0 3 0,-2 0 2 0,1 0-1 16,0 0 6-16,0 1-1 0,-1 0 1 0,0 0 2 0,1 0-4 0,0 1-3 16,0-1 4-16,-2 2-8 0,1-1 6 0,0 1-7 0,1 0-3 0,-1 1-1 15,0-1-5-15,0 2 5 0,0 0-5 0,1-1 0 0,0 1 0 16,0 0 0-16,1 0 0 0,0 0 0 0,0 1 2 0,3-1 3 0,-1 0-3 15,2-1 3-15,0 1-1 0,1-1 7 0,2-1 1 0,0 0 4 0,0-1 0 16,0-1 2-16,1 0 0 0,2-1 4 0,-1 0-4 0,1-1 0 16,-2-1-5-16,2 0 0 0,1 0 81 0,-1-1 1 0,-1-1 5 0,0-1 2 15,1 1-91-15,-2-1 1 0,0-1-2 0,0 0-3 0,-1 0 3 16,-1 1 4-16,-2 0-3 0,1-1 3 0,-2 0 0 0,-1 0-3 0,-1 0-1 16,-2 0-2-16,-1-1-6 0,-2 0-8 0,-1 0 2 0,-3 0 0 0,0-1-10 15,-1 0 5-15,-1-1-5 0,-3 1-91 0,-1-1 12 0,1 1-2 16,-2 0 8-16,-1 2 87 0,1-1-2 0,-2 0-2 0,2 2-1 0,-2 0-1 15,2 2 4-15,-1 1-1 0,1 1-1 0,-1 1 2 0,2 1-5 0,1 1 10 16,2 1-4-16,1 0 4 0,1 1 3 0,2 0-4 0,3 0-1 16,2 0 1-16,0 0 0 0,3 0 4 0,1 0 1 0,4 0 0 0,2 1-3 15,1 0-2-15,2 0-2 0,4 0-4 0,3-1 1 0,-1 1 77 16,4-1-2-16,0 0-8 0,-11-2-12 0,1 1-117 0,2-2-47 0,1 1-60 16,1 0-86-16,1 0-83 0,0 0-133 0,2-1-245 0,0 0-361 0</inkml:trace>
-  <inkml:trace contextRef="#ctx0" brushRef="#br0" timeOffset="87088.7">26193 9621 1548 0,'-12'-1'148'0,"-1"2"-119"0,-3 3-7 16,2 2 7-16,4 2 7 0,0 2 5 0,1 0 0 0,-1 4 1 0,0 0 4 15,-1 4 7-15,0 2 8 0,0 2 4 0,-1 2-4 0,1 3 2 0,0-1-3 16,0 3 1-16,1 1 2 0,-2 4-10 0,2 1-12 0,-1 2-4 16,1 4-26-16,1 2 0 0,-2 2-6 0,2 2-5 0,0 2 9 0,1-1-7 15,3 0 1-15,2 0-6 0,3 0 3 0,4-2 0 0,4-1-8 0,3-4 0 16,3 0-11-16,2-2-11 0,4-1-16 0,5-1-23 0,4-4-6 16,3 0-13-16,2-5-7 0,1-1 1 0,1-3-22 0,-1-1-33 0,2-4-28 15,-2-2-28-15,0-5-25 0,-2-2-20 0,-1-4-66 0,-3-2-181 0</inkml:trace>
-  <inkml:trace contextRef="#ctx0" brushRef="#br0" timeOffset="87989.25">26746 10068 1383 0,'-1'-2'256'15,"1"0"-205"-15,-1-1-30 0,2 2-18 0,0 0-4 0,1 1 2 16,1-1 2-16,0 1-6 0,0-1 6 0,-1 1-4 0,0 0 1 0,-1 0 2 16,0 0-4-16,-1 0-3 0,0-1-17 0,-1 1-19 0,0 0-30 0,-2-1-21 15,1 1-14-15,0 0-4 0,-1 0 5 0,0-1 4 0,-1 1 14 16,2 0 18-16,-1 0 18 0,-1 1 18 0,0-1 11 0,1 1 6 0,-1-1 5 16,1 1 1-16,-1 0 1 0,0 1 3 0,1 1 3 0,-1-2 4 15,1 2 3-15,0-2 4 0,-1 0-1 0,1 1 5 0,-1-1 0 0,0 1 1 16,1-2 0-16,2 1 0 0,-2 0-1 0,0 0-6 0,1 0 2 0,-1 0 0 15,1 0-6-15,1-1 3 0,-1 1-3 0,0 0-1 0,1 0 1 16,-1 0 0-16,0 0 6 0,1 0 2 0,0-1 2 0,0 0 13 0,-1 0-1 16,1 1 11-16,-1-1 5 0,1-1 1 0,0 2 7 0,-1-3-5 0,2 3 10 15,0-2-1-15,-1-1-4 0,1 1 4 0,-1-1-3 0,1 1-2 16,0-2 4-16,1 1-7 0,0-1-3 0,1 0-3 0,-1-1-4 0,0-1 2 16,1 0 0-16,1 0 1 0,0 0 0 0,0 1-2 0,0-2-1 15,-1 0 1-15,1-1 2 0,-1 1 7 0,-1-1-4 0,0 1-3 0,-1 0-2 16,-1 1-7-16,-1 0 0 0,0 2 1 0,-1-1-4 0,-1 1 5 0,0-1-6 15,-2 1-5-15,0 1 2 0,-2-1-9 0,1 1-3 0,-2 2-1 16,2-1-5-16,-1 0 1 0,-1 2 2 0,0-1 1 0,0 1-6 0,1 1-1 16,0 0-3-16,1 0 0 0,-1 1 0 0,1 0 0 0,1 1 0 0,0 1-2 15,0-1 1-15,1 2-1 0,0 0 4 0,1 0-8 0,2 1 1 16,0 2-1-16,2-1 2 0,0 2 5 0,2-1-2 0,0 2 4 0,2 0 0 16,0 0-6-16,2 0 0 0,1 1 0 0,0-1 1 0,2 2 13 15,0 0-7-15,-1-1 5 0,1 1-1 0,1 0-2 0,1 0 4 0,-1 0-2 16,2 0-8-16,-2-2 1 0,2 2 10 0,1-1-7 0,-2-1 10 0,1 1-2 15,0-1-9-15,0 1 6 0,0 1 0 0,0 0-8 0,-1 0 1 16,-1 0-2-16,-3 0 1 0,1 1 4 0,-2 0 10 0,-2 0 0 0,-1-2 2 16,-1 0 9-16,-2-1-2 0,-1 0 5 0,-2-1 1 0,-2-2-4 0,0 1 4 15,-2 0-4-15,-1-1-4 0,-1 1-3 0,-3-1-3 0,-3 0-5 16,-2-1 3-16,-1-1 0 0,-1-1-9 0,1 0 6 0,0-1-3 0,0-1-4 16,-1 0 7-16,1-2-8 0,1 1 0 0,-1-2-4 0,2 0-6 15,2-1-9-15,1 0-15 0,1-1-13 0,3 0-33 0,0-1-18 0,2 0-22 16,1-2-41-16,2 0-39 0,2 1-60 0,1-3-65 0,2 0-58 0,1 0-266 15</inkml:trace>
-  <inkml:trace contextRef="#ctx0" brushRef="#br0" timeOffset="88422.21">26907 10117 2369 0,'-2'-1'92'0,"2"0"-78"0,1 2-25 0,1 2-6 0,2 2 6 16,1 2 10-16,0 1-5 0,1 1 4 0,-1 1-2 0,1 1-6 0,-1 2 9 15,0 0-4-15,0 1 5 0,0 1 0 0,-2-2-4 0,0 2 4 16,-1 0-2-16,0-2 1 0,0-1-3 0,0 0 6 0,2-1-2 0,0 0 0 16,1-2 5-16,1 0-7 0,1-3 1 0,2 0 2 0,0 0-1 0,2-2-1 15,-2 0-1-15,0 1 5 0,0-2-4 0,-1-1 10 0,0 0-2 16,-1-3 3-16,1 0 2 0,-1-2-3 0,1-1 1 0,0-2-1 0,0 0 8 15,0 0-8-15,-1 0 1 0,1-1-6 0,-1 0-5 0,0-2 4 16,0 1 5-16,0 0-4 0,-3-1 0 0,1 2 7 0,-1 0 0 0,-1-1 0 16,0 0 1-16,-2-1-1 0,1 1 4 0,-2 0 12 0,0-1-5 0,-1 0 7 15,-1 0 1-15,1 0-6 0,-2 0 9 0,-1 0-5 0,0 1-7 16,0 1-3-16,2 0-6 0,-2 3-2 0,0 0-2 0,0 2-1 0,1 0-2 16,1 2-7-16,0 1-1 0,1 1 3 0,-2 1 0 0,1 0 0 0,-1 3 0 15,0 0-2-15,1 1 2 0,0 1-1 0,-1 1 1 0,0 0 3 16,2 2-3-16,-1-1 3 0,1 1 1 0,1-1-8 0,0 1 4 0,1 0-8 15,0-1 1-15,1 0 4 0,2 0-4 0,0 1 2 0,1-1-6 16,0 0 4-16,2-1-3 0,0-1-10 0,1 1-11 0,1-2-23 0,0 1-20 16,0 0-17-16,0-1-18 0,0 0-9 0,1 1-27 0,-1-4-25 0,1 2-25 15,1-2-42-15,-1-1-37 0,0-1-44 0,-1 0-356 0</inkml:trace>
-  <inkml:trace contextRef="#ctx0" brushRef="#br0" timeOffset="88956.21">27386 10092 2699 0,'4'0'49'0,"1"2"-44"0,4 1-15 0,-1 2 0 0,3 1 2 15,1 2 3-15,-1 2 12 0,1 1-5 0,-1 1-1 0,-2 1 6 16,1-2-11-16,-1 2 6 0,-1-1-2 0,-1-1-3 0,-2 0 3 0,0-1-2 15,0-1 5-15,-1 0 1 0,0-1-6 0,1-1-4 0,0 0 1 0,1-2-7 16,0 0 4-16,-1 0 2 0,1-2 2 0,0-1 1 0,-1 1 3 16,0-1 2-16,-1-1 1 0,1 0-3 0,-2-1-2 0,-2 0-1 0,2-1 0 15,0-1 1-15,0 1-1 0,1-2-3 0,-1 1-7 0,0 1 5 16,1-2-7-16,-1-1-2 0,1 0-3 0,0 0-4 0,0-1 13 0,0 0 5 16,0-1 6-16,0 1 0 0,0-1 0 0,-1 0 2 0,0 0-4 0,1 1 8 15,0 1-2-15,0-1-3 0,0 0-1 0,0 0-1 0,0 0 2 16,-1 1 1-16,1 0 1 0,0 1-3 0,0-1 0 0,1 1 1 0,0 0-1 15,-1 0-3-15,1 0 3 0,-1 0 0 0,2 2 2 0,0-1 1 16,-1 2-3-16,0 0 3 0,0 1 0 0,-1 2 7 0,1 0 3 0,-2 1-2 16,0 0 5-16,1 1-8 0,-2 1-2 0,1-1 6 0,-1 2-7 0,0-1-1 15,0 1 0-15,0-1-8 0,-2 1 12 0,1 0-8 0,0-1 2 16,0 0 0-16,0 0-2 0,0-1 5 0,1-1-2 0,0 0 2 0,0-1-5 16,1-1 1-16,-1-1 6 0,1 0-4 0,0-1 8 0,-1 0 1 0,2-1 3 15,0 0-1-15,0-1 1 0,1 0-2 0,0-1-3 0,0 0-5 16,1-2-1-16,-2 1-4 0,1-1 6 0,2 0-1 0,-1 1-5 0,0-1 0 15,0 0 0-15,0 0 5 0,-1 2-2 0,1-2-3 0,-1 2-3 0,0 1 3 16,-1 0 0-16,-1 2 3 0,1 0-4 0,-2 0 1 0,1 2 3 16,0 0 0-16,-1 1 4 0,0 0-7 0,0 0 0 0,0 2-3 0,1 1-2 15,-1 0 5-15,1 0-4 0,0 1 3 0,-1 0-3 0,2-1-7 16,0 0-7-16,-1-1-19 0,1-1-23 0,0-1-28 0,1 0-23 0,-1 1-15 16,1-1-14-16,1 0-19 0,0-1-26 0,0-1-26 0,0 0-28 0,1 0-23 15,0 0-23-15,0-1-88 0,-1 0-39 0</inkml:trace>
-  <inkml:trace contextRef="#ctx0" brushRef="#br0" timeOffset="89139.21">28206 10391 2240 0,'0'0'91'16,"1"2"-67"-16,2 1-24 0,-1 2-6 0,1 0 5 0,0 1 4 0,0 0-3 15,0 1 0-15,0 1-9 0,-1-1 0 0,-1 1 3 0,0 1-3 16,1-1 3-16,-2 0-5 0,0 2-1 0,1-1 2 0,-1 1-10 0,1-1-12 15,0 0-23-15,0-1-27 0,1-2-33 0,0 1-22 0,2-1-20 0,2 0-13 16,0-1-18-16,1-1-31 0,-1-1-73 0,1-1-284 0</inkml:trace>
-  <inkml:trace contextRef="#ctx0" brushRef="#br0" timeOffset="89706.21">28564 10063 2416 0,'-4'-4'433'0,"2"2"-406"0,0 1-24 16,1 1-16-16,1 3-1 0,1 0 1 0,2 2 8 0,-1 3 5 16,1-1-8-16,-1 3 4 0,0 0 4 0,0 1 2 0,-1 2 20 0,0 1 1 15,0 0-4-15,0-1 9 0,-1 2-11 0,-1-1-2 0,2 0 1 0,-1-1-6 16,1 0 0-16,2-1 0 0,-1-1 1 0,2-2-11 0,-1-1 1 15,1-1 3-15,0-2-6 0,1-1 7 0,0 0 2 0,0-1-3 0,0 0 6 16,1-2 0-16,-1 0-1 0,1-1 10 0,-2-2-4 0,1 0 6 16,0-2 2-16,0 0-4 0,0 0 8 0,-1-1-6 0,0 0-2 0,1-1-3 15,-1-1-5-15,0 0-2 0,-1-1-6 0,1-1 5 0,-1 1-5 0,1 0 2 16,-2 0-6-16,1 1 2 0,-1 0-4 0,0 0-1 0,1 2 4 16,-1 1-9-16,-1 1 1 0,0 2-3 0,0 0 2 0,-1 1-5 0,0 0 3 15,1 1 2-15,-1 1-3 0,0 0 7 0,0 2-6 0,0 0 4 16,0 1 2-16,-1 2 0 0,1-1-4 0,1 0 7 0,-1 1 2 0,1-2 2 15,0 1-7-15,1 0-6 0,-1-1-6 0,1-2-3 0,1 1 0 0,-2-2-3 16,2 0 3-16,-1 0 1 0,0-1 5 0,1-1 5 0,-1 0-1 16,1-1 7-16,0 0-1 0,0 0-4 0,-1-1 8 0,1 0-4 0,-1-1 4 15,0 1-1-15,1 0 1 0,-1 1 0 0,1-1 3 0,-1-1 1 0,0 0-6 16,1 0-2-16,0 1 3 0,0-1 1 0,0 0-4 0,1 0 4 16,-1 0-5-16,2-1 2 0,-1 0 5 0,1 0-6 0,0-1 11 0,0 1-7 15,0 0 0-15,0 0-2 0,0 1-6 0,0 0 6 0,1 0 0 16,0 2 1-16,0-1 4 0,0 2-6 0,-1-1 4 0,-1 1 3 0,0 1-1 15,-1 0 14-15,1 0-3 0,-1 2 3 0,0-1-2 0,-2 1-6 0,2 1-2 16,-1 1-6-16,1 0-2 0,-1 1 1 0,0 1-4 0,1 1 4 0,-1-1 0 16,0 1-3-16,-1 0 10 0,0 1-7 0,1-2 3 0,0 0 4 15,0-1-10-15,0 0-1 0,1-1-8 0,-1 0-12 0,1 0-1 0,0-1-18 16,0-1-12-16,1 0-15 0,0 0-20 0,0-1-3 0,0 0-2 16,-2-1-6-16,2-1-10 0,-1-1-26 0,1 0-33 0,-1-2-43 0,1 0-46 15,-1-2-50-15,0 0-56 0,-1-2-245 0</inkml:trace>
-  <inkml:trace contextRef="#ctx0" brushRef="#br0" timeOffset="90104.81">29036 10173 2474 0,'0'2'61'0,"0"1"-42"0,1 3-19 0,1 0-4 15,0 2 9-15,2-1 1 0,1 1 1 0,0 1-1 0,-1-1-1 0,1 1-2 16,0 1 0-16,0 0 0 0,0-1-1 0,-1 0 0 0,1-1 2 15,0-2 1-15,1 1-2 0,1-1-1 0,1-1 1 0,-1 1 4 0,1-2 4 16,1 0 0-16,-1-2 5 0,1 0 5 0,0-2 3 0,0 0 7 0,0 0 7 16,0-1 0-16,2-1-5 0,-2-1 6 0,1 0-4 0,-2-1-3 15,0-1-1-15,-2 0-7 0,0-1-11 0,0 0-1 0,-1 1-5 0,-1-1-7 16,-2 0-2-16,0-2-6 0,-1 1-2 0,-2-1-4 0,0 0-5 16,-2 0-3-16,0 0-5 0,-2 0-5 0,-2 0-10 0,0-1 0 0,-2 1-1 15,-2 0 1-15,0 0 7 0,-1 1 13 0,0 1 10 0,1-1 12 0,-1 0 5 16,0 1-10-16,1 2 2 0,0 0-2 0,1 0 4 0,3 2 6 15,-2 1-4-15,2 1-1 0,1 1-1 0,-1 1-1 0,1 1-3 0,1 0 13 16,0 1 0-16,0 1-1 0,1 0 6 0,2 0-12 0,0 1 4 16,1 0 2-16,0 1-6 0,3 2-2 0,-1-1-1 0,2-1-3 0,0 1-3 15,1 0 5-15,2 1-4 0,0-3 4 0,1 1-2 0,0 0 5 0,0-1-3 16,1 0 6-16,0 0 1 0,0-1-4 0,1-1 3 0,0 0-5 16,0-1 4-16,0 0 1 0,0-1-6 0,-1 0 0 0,-1-1-12 0,2 0-11 15,0 1-14-15,0-2-29 0,0 0-23 0,-1-1-31 0,0 0-30 0,-1 0-33 16,-1 0-35-16,1-2-52 0,0 0-67 0,-1 0-151 0,1-1-12 15</inkml:trace>
-  <inkml:trace contextRef="#ctx0" brushRef="#br0" timeOffset="90571.81">29412 10139 1471 0,'2'-2'89'16,"0"0"-89"-16,1 1-15 0,1 0-2 0,-2 2 4 0,0-1-1 0,2 1 0 16,-2 1-14-16,-1 0-12 0,0 0-12 0,-1 0 0 0,0 0 8 15,0 0 4-15,0 0 15 0,-1-1-8 0,2 1-11 0,0-2-7 0,0 0-6 16,0 0 7-16,1-1 18 0,0 0 17 0,1 0 16 0,0-1 10 16,-1 0 7-16,1 0 13 0,0-1 5 0,0 1 7 0,-1 0 2 0,1-1-5 15,0 1-3-15,0 0-9 0,0-1-8 0,0 1-6 0,0-1-5 0,1 1-3 16,-1 0-1-16,-1 0-4 0,0 1 2 0,0 1-3 0,1-2 7 15,-1 2 1-15,-1-1 2 0,0-1 10 0,0 2 1 0,0 0 12 0,0 0 10 16,-1 0 7-16,2 0 7 0,-2 0 2 0,1 0 2 0,0 1 1 0,0-1 6 16,0-1-5-16,1 1 1 0,-1 0-5 0,0 0-8 0,1 0 3 15,-1 0-10-15,1 0-1 0,0 0-5 0,0 1-4 0,1-1 3 0,-2 1 3 16,1 0-1-16,-1-1-1 0,1 1-1 0,-1 0-6 0,0 0 3 16,1 0 2-16,-1 0-5 0,0 0 1 0,0 1 0 0,0-1-4 0,1 1-4 15,-1 1 1-15,-1 0-3 0,1-1 3 0,-1 2 1 0,0 0 0 0,0 0-2 16,0 2-3-16,-1 0 2 0,1 1-8 0,-1 0-6 0,0 3-4 15,0 0 0-15,-1 0-3 0,1 2 8 0,-2-1-5 0,1 0-4 0,0 2 6 16,-1-1-9-16,0-1 8 0,-1 0-5 0,0-2-2 0,0 0-3 0,-1-1-6 16,1 0-7-16,-1-2-5 0,1-1-13 0,-1-1-11 0,1-1-19 15,0 0-23-15,-1-2-21 0,2 0-17 0,-1-3-11 0,2-1-13 0,-1-1 1 16,1-2-7-16,0-2-1 0,0-2-8 0,1-1-26 0,0-1-17 16,1-2-13-16,0-1 2 0,0 0 28 0,0 1-32 0,0 1 23 0</inkml:trace>
-  <inkml:trace contextRef="#ctx0" brushRef="#br0" timeOffset="90738.81">29439 10152 221 0,'-4'-7'215'16,"0"0"-29"-16,-2-3-13 0,0 1-22 0,1 3-25 0,-1 0-23 15,1 2-19-15,0 0-18 0,0 0-14 0,1 0-17 0,-1 1-3 0,0 2-3 16,1 1 2-16,-2 1 7 0,2 1 6 0,1 1 14 0,-1 1 9 0,1-1 3 16,0 1 6-16,0-1 0 0,1 2 5 0,1 2 5 0,0 1-6 15,1-1-1-15,0 0-8 0,0 1-8 0,2-1-9 0,0 2-13 0,2 0-9 16,0 0-3-16,2 0-1 0,-2 0 1 0,3 0 0 0,1-1-7 0,0 1-1 16,1 0-1-16,0 0-2 0,1-1 1 0,-1 0-7 0,0 0-4 15,0-1-3-15,0 0-9 0,0-2 6 0,-1 1-10 0,0-2-22 0,-2 0-26 16,0 0-37-16,0-1-29 0,0 1-23 0,0-1-24 0,-1 0-36 15,1-1-38-15,-1 0-47 0,0 0-62 0,0-1-363 0</inkml:trace>
-  <inkml:trace contextRef="#ctx0" brushRef="#br0" timeOffset="90938.81">29725 10503 2197 0,'3'-1'654'0,"-1"2"-592"0,3 1-35 0,0 1-14 0,-1 1-7 0,1 1-6 16,0 1-14-16,1 1-6 0,-1-1-12 0,0 1-24 0,-2 1-23 15,0 1-31-15,-2 1-32 0,-2 0-9 0,-1 0-15 0,-2 0-27 0,0 1-35 16,-2-1-41-16,0 0-44 0,-1 0-49 0,-1 0-233 0</inkml:trace>
-  <inkml:trace contextRef="#ctx0" brushRef="#br0" timeOffset="91922.8">30087 10113 2059 0,'1'0'132'0,"0"-1"-53"0,1 1-36 0,0 2-16 0,0 0 7 0,0 0 15 16,1 2 2-16,0 0 2 0,0 2-7 0,0 1 3 0,0 0-2 0,-1 2 1 16,0 0-2-16,-1 0-6 0,0 3-2 0,-1 0-8 0,0 0-3 15,1 0-4-15,-1-1-7 0,2 1-3 0,0 0-1 0,-1 0-2 0,2-2-3 16,0 0 2-16,0-2-6 0,1 0 6 0,0 0 8 0,2-2 0 0,-2 0 14 15,1-1 4-15,0-1 5 0,1 0 4 0,1-1 5 0,-1-1-4 16,0-2-4-16,1 0 1 0,0-1-11 0,0-1-2 0,0-1-5 0,-1 0-4 16,2-1-2-16,-1 1-9 0,0-1 3 0,0-1-9 0,-1 0-3 0,0 0 8 15,0-1-10-15,0 1 2 0,-1 0 3 0,-1 0-1 0,1 0 0 16,0 0 0-16,-1 1-4 0,-1 0-2 0,1 2 4 0,-1-1-9 0,0 2 6 16,0 0 1-16,-1 1-6 0,-1 0 14 0,1 1-10 0,0 0 2 15,1 0 0-15,-2 1-9 0,1 1 8 0,1-1-1 0,-1 1-3 0,2 1 5 16,-2-1-2-16,1 0-1 0,-2 0-1 0,1-1-9 0,1 1-7 0,0-1 10 15,0 0-3-15,1 0 10 0,-1-1 1 0,0 0-1 0,0 0 3 16,0 0 5-16,0-1-3 0,-1 0 2 0,1 0-2 0,0 0 0 0,0-1 4 16,0 1-1-16,-1-1-3 0,1 0 4 0,1 0-6 0,-1 0 0 0,-1 0 4 15,1-1-2-15,-1 1-3 0,2 0-1 0,0-1 0 0,-1 1 3 16,0 0 2-16,1-1 1 0,0 0-5 0,-1 1-1 0,1-1 4 0,1 0 0 16,-2 1-2-16,2 0-7 0,-1 1 2 0,-1 0 0 0,0 0-1 15,0 0 7-15,-1 1-5 0,1 0-3 0,-1 1 0 0,-1 1 2 0,1 0 2 16,-2-1-1-16,2 2 1 0,-2 0-6 0,0 0 4 0,2 1 3 0,-2 0-1 15,1 0 1-15,1 1-3 0,-1-1 0 0,1 0 2 0,1 0 0 16,-1 0-6-16,1 0 4 0,-1-2-6 0,0 1 5 0,1-1 2 0,0 0-10 16,1 0 6-16,-1-1-9 0,0 0-4 0,0 0-7 0,-1-1-13 0,1 0-5 15,0-1-13-15,0 0-4 0,-2 0-1 0,1-1-8 0,-1 1 1 16,2-1-6-16,-1 0 4 0,0 0 6 0,0-1 1 0,0 0 4 0,1 0-9 16,-2-1-10-16,1 1-10 0,1-1-12 0,-1 0-12 0,0 1-4 15,1-2-2-15,-1 1-4 0,1-1 6 0,0 0 4 0,1 1 1 0,-1 0 5 16,0 0 7-16,0 0 11 0,-1-1 15 0,3 0 15 0,-1 1 11 0,-1 0 14 15,1 0 10-15,-1 0 13 0,1 0 10 0,0 1 6 0,0-1 6 16,0 1 7-16,-1 0 4 0,1 1 6 0,0 0 9 0,-1-1 9 0,0 1 7 16,0-1 13-16,0 0 4 0,0 0-1 0,0 1 2 0,0-1-8 0,0-1-1 15,-1 1 0-15,1 0-5 0,0-1-1 0,-2 1-1 0,2-1-6 16,-1 1-3-16,-1 0 7 0,2 2 2 0,-2 0 6 0,0 1 6 0,0 0 5 16,0 1-1-16,-1 1 4 0,1-1-1 0,-1 0 1 0,2 1-3 0,-1 1-5 15,0 0-13-15,0 0-10 0,0 1-15 0,0-2 0 0,0 3-9 16,0 0-4-16,1 0 0 0,-1 0-7 0,0 1 1 0,0 0-3 0,0 1-2 15,1 0 1-15,0-1-4 0,0 1 1 0,0 0 4 0,-1-2-5 16,2 2 4-16,0-2-5 0,-1 1-5 0,2 0-1 0,-1-1-7 0,0-2-11 16,2 0-14-16,-1 0-17 0,1-1-23 0,0-1-26 0,1 0-25 15,-2-2-18-15,1 0-19 0,-1-2-15 0,-1-2-22 0,0-1-31 0,-1-1-32 16,-2-2-172-16</inkml:trace>
-  <inkml:trace contextRef="#ctx0" brushRef="#br0" timeOffset="92089.8">30706 9976 1946 0,'0'0'542'15,"0"0"-492"-15,2 0-49 0,1 1-18 0,1 1-3 0,1 0-8 16,0 0-5-16,1-1-18 0,-1 2-33 0,0 1-26 0,0-1-13 0,-3 1 0 16,1 0 7-16,-1-1 12 0,-2 1 7 0,0 0-4 0,-1-1-10 0,0 0-21 15,1 1-19-15,0-1-25 0,0 1-33 0,-1 1-179 0</inkml:trace>
-  <inkml:trace contextRef="#ctx0" brushRef="#br0" timeOffset="92521.8">30941 10091 1903 0,'2'1'566'0,"1"0"-486"16,-1 3-31-16,2 0-23 0,-1 0-2 0,1 1 6 0,2 1-1 0,-2 1-1 15,0 3 0-15,-1 0-8 0,1 0-5 0,-1 1 1 0,-1-1-9 16,1 2 9-16,-1 0-7 0,0 0-3 0,0-1-2 0,0 0-4 0,-1 1 1 16,1 0 3-16,0-1-1 0,1-1 4 0,0 0 0 0,-1-3-4 0,1 1 2 15,0-1-3-15,1-1 8 0,1 0 1 0,0-2 5 0,-1-1-1 16,0 0 4-16,0-2-2 0,-1 0 1 0,1 0 3 0,0-1 0 0,0-1 1 16,0-1-6-16,0 0-1 0,-2 0-1 0,1-1 0 0,-1 0 4 0,0-2-10 15,3-1-1-15,-1 0-3 0,1 0 1 0,0-1-1 0,-1 1-1 16,0-2-1-16,1 1-4 0,1-1 2 0,-1 0 2 0,0 0 3 0,-1 1-5 15,0 0 2-15,0 1-4 0,-1 0 2 0,0-1 2 0,1 2 3 0,-1 0-10 16,1 1 3-16,0 0-1 0,-1 0 4 0,0 1 3 0,1 1-4 16,-2 0 2-16,2 2-4 0,-1-1 0 0,1 1 4 0,-1 1 1 0,0-1 3 15,0 2-1-15,0 0 2 0,1 1 2 0,-2 1 0 0,2-1 1 0,-1 1-6 16,-1 0 0-16,0 1-1 0,0 1 1 0,1 0 1 0,0-2-3 16,-1 3 0-16,2 0 1 0,-2 0-3 0,1 1 4 0,-1 0-4 0,0 0-4 15,1 0 8-15,-1-1-6 0,0-1-2 0,1 2 8 0,-1-1-8 16,1 0-3-16,-1 0-12 0,1 0-24 0,1 0-15 0,-3 0-18 0,1 0-18 15,-1 0-11-15,1-1-18 0,1 1-16 0,-1-1-14 0,0-1-18 0,-1 0-27 16,0 0-43-16,0-1-45 0,0 0-51 0,0-1-70 0,0 0-175 16</inkml:trace>
-  <inkml:trace contextRef="#ctx0" brushRef="#br0" timeOffset="92705.8">31523 10385 2273 0,'2'3'806'0,"1"2"-770"15,1 2-25-15,0 2-13 0,0 0-7 0,2 4 2 0,-2 2-7 0,1 1-13 16,0 0-23-16,-3 4-27 0,1 0-24 0,-2 1-21 0,-2 2-15 16,-3 1-14-16,0 0-20 0,-3 1-47 0,-1-2-55 0,0 0-48 0,1-1-57 15,-2-4-350-15</inkml:trace>
-  <inkml:trace contextRef="#ctx0" brushRef="#br0" timeOffset="93655.8">27454 10963 3136 0,'-7'6'117'0,"1"2"-81"0,0 4-31 0,4 4-7 16,3 2-5-16,2 4 0 0,1 1 1 0,2 0-1 0,1-1 2 0,1 0 0 15,0-2-1-15,-2 0 6 0,3-1 0 0,0-2 0 0,-1-1 2 0,1-2-5 16,-2-1-3-16,1-2 3 0,0-1-4 0,0-1 7 0,1-2 0 16,-1-1-6-16,1-2 4 0,-2-1 4 0,1-2 0 0,0-1 5 0,-2-1-5 15,1-1 9-15,0-2-3 0,0-2 7 0,-1-1-1 0,1-1 4 0,-2-1 2 16,0 0-11-16,0-2 5 0,0-1-10 0,0 0 3 0,-1-2 4 15,2 1-2-15,-2-1-2 0,1 0 2 0,-1 1 1 0,0 0-10 0,0 2 1 16,0-2-2-16,0 2 2 0,0 0 5 0,1 1-10 0,-1 3 1 16,0 0-3-16,0 2-1 0,-2 0 7 0,2 2-2 0,-1 0-4 0,1 3 1 15,-1 0-2-15,0 0 3 0,0 2 2 0,0 0 4 0,0 1 0 0,-1 0-9 16,1 1 1-16,0 0 1 0,1 0-1 0,-1-1 5 0,0 0-1 16,1 1-4-16,1-1 5 0,0 0-3 0,-1-1-3 0,2 0 1 0,-1-1 1 15,2 0-2-15,-1 0 3 0,0-1 2 0,0 1-1 0,1-2 1 0,0 0 6 16,0 0-4-16,0-1-2 0,0-1 5 0,1 0-1 0,0 0 4 15,1 0-6-15,1-1 1 0,-2 2-1 0,0-2 2 0,0 0 2 0,1 1 1 16,-1-1-1-16,0 1-4 0,-1 0 7 0,1-1-3 0,-1 2 1 16,-2-1 4-16,1 1-2 0,-2 2-3 0,1-2 5 0,-1 1-5 0,0-1 1 15,0 1 4-15,0 0-9 0,-1 2 6 0,1 1-5 0,0 0-1 0,1 1 4 16,-1 0 3-16,1 0-7 0,-1 2 4 0,0 0-2 0,1 1-2 16,0 1 3-16,-1 0-4 0,1 0-3 0,-1 1 8 0,0 0 5 0,0 0 0 15,0 1-2-15,0-1-5 0,-1-1 2 0,0 0-4 0,1 1 9 0,-1-1-5 16,0 0-4-16,-1-1 7 0,1-1-13 0,1 0 8 0,-1-1 0 15,0 0-6-15,0-1 3 0,-1 0-14 0,1-1-5 0,0-1-13 0,0 0-5 16,-1-1-9-16,0-1-16 0,1 0-14 0,-1-1-21 0,1 0-32 16,-1 0-40-16,-1-1-24 0,0 0-28 0,1 0-25 0,0 0-39 0,-1 0-47 15,1-1-52-15,0-1-359 0</inkml:trace>
-  <inkml:trace contextRef="#ctx0" brushRef="#br0" timeOffset="94505.8">28162 11109 2492 0,'0'1'301'0,"1"1"-232"0,1 1-52 0,2 1-18 0,2 0-10 0,3 0 3 15,0-1 5-15,2 2-2 0,-1-1 6 0,2-1 1 0,0-1-5 0,-1 0 3 16,0-1-9-16,-2 0-2 0,1-2 1 0,1 0-5 0,-2-1 3 16,1 0-3-16,-1-2 7 0,-1-1-10 0,-1-1 2 0,2-1 3 0,-1 0 0 15,-1-1 5-15,-1 0 3 0,-2-1 6 0,0 1 3 0,0-3 7 0,-2 1 2 16,0-1 0-16,-1 0 8 0,-1 1 1 0,0 0-2 0,-1 0 3 15,-1 1-8-15,-1-1-7 0,1 1 4 0,-1 0-6 0,0 2-1 0,1 2 6 16,-1 0-5-16,1 0 1 0,-1 2 0 0,0 0-4 0,-1 2 0 16,1 0-4-16,-1 1-4 0,1 1 0 0,-1 1-5 0,1 0 1 0,-1 2 4 15,1 2-2-15,-2-1 2 0,1 4 0 0,1 1 4 0,-1 2 1 0,1 1-2 16,1 2 4-16,-1 1-2 0,1 3-2 0,1-1 4 0,0 0-2 16,2 0 5-16,1 0-5 0,1-1 1 0,1-1 1 0,1-1-2 0,1-1 2 15,1-1-1-15,0-1-2 0,2 1-3 0,1-2-1 0,1 0 4 0,0-2-4 16,1-1 3-16,-1-1 4 0,3-1-4 0,-1 0 2 0,0-3 2 15,-1 0-2-15,-1-2 1 0,1-1 3 0,0-2-3 0,0-2 4 0,0 0-5 16,-1-1 0-16,1-1 4 0,-1 1-3 0,0-2 8 0,-2-1-1 16,1 1-4-16,0-2 4 0,0 1 2 0,-1 0 4 0,-1 0 1 0,-1 1-2 15,-1-1 1-15,0 1 0 0,-1 1-6 0,2 0-1 0,0 2-4 0,-2 0-1 16,2 1 3-16,-2 1-1 0,0 1 8 0,1 1 3 0,0 0 1 16,0 0-3-16,0 1 0 0,-1 0-6 0,0 1-1 0,-1 1-2 0,2-1 1 15,0 1-7-15,0 1 2 0,1-1 0 0,0 0 0 0,1 0 2 0,0 0-2 16,1 0 2-16,-1-1-7 0,1 0 3 0,1-1 2 0,-1 0-4 15,0-1 10-15,0-1-6 0,1-1 0 0,-1 0 5 0,1-1-7 0,-1 0 6 16,0-1 8-16,-1 0-7 0,-2-1 9 0,0-1 0 0,-1-1-5 16,-1 0 3-16,-1 0-3 0,-1 0-6 0,-1 0-6 0,-1 0-2 0,-2 0-2 15,0 0-4-15,-1 1-5 0,-2-1-5 0,-2 0-1 0,0 0-3 0,-2 0 6 16,-2 1 7-16,1 0 2 0,-2 1 3 0,0 0 4 0,2 1 3 16,-1 2 1-16,0 1 5 0,0 3-6 0,1 0 0 0,-1 2 0 0,4 0 0 15,-1 2 0-15,0-1-9 0,3 0 2 0,-1 0-3 0,2 0 0 0,1 1 4 16,1 0-6-16,1 0 4 0,0 0-1 0,1 0 1 0,1-1-2 15,1 0 5-15,1 0-5 0,0 0-4 0,2-1 4 0,0-1-3 0,1 1-1 16,2 0 6-16,-1-1-4 0,1 1-5 0,1-2 9 0,1 0-7 16,0 0 4-16,1-1-3 0,0 0 1 0,-1 0 2 0,2 0-1 0,0 0 9 15,0 0-4-15,0-1 2 0,-2 0 1 0,1 0 4 0,0 0 1 0,0 0-1 16,0 1 3-16,0-1-3 0,-1 1-3 0,0 0 5 0,0-1-4 16,1 1 2-16,-2-1 2 0,1 1-2 0,-1-1 3 0,0 0-1 0,0 1-2 15,0 0 1-15,0 0-7 0,0 1 9 0,0 0-3 0,-2 0-3 0,0 0 11 16,-1 1-5-16,0 0 6 0,-2 0 2 0,1 2-6 0,0-1 5 15,-1 1-4-15,0 2 3 0,-1 0 7 0,1-1-4 0,-1 2 1 0,1-1 0 16,-1 0-3-16,0 1 2 0,0-2-2 0,1 1 0 0,-1 1-1 16,1-1 4-16,0 0-4 0,0 0-1 0,0-1 1 0,0 0-8 0,0-1 8 15,-1 0-1-15,1-2-3 0,-1 1 4 0,0-1-2 0,0 0-4 0,0-1 7 16,0 0 1-16,-1-1-3 0,-1-1-3 0,1 1-1 0,0-1-4 16,0-1-2-16,-1 0 0 0,1 0-11 0,-1-1-5 0,1 1-7 0,-1-1-4 15,0 0 2-15,1-1-2 0,0 0-1 0,-1 0-3 0,2-2-3 0,-1 1-8 16,0-1-10-16,1 1-18 0,-1 0-31 0,0-1-31 0,0-1-38 15,-2 1-33-15,1-1-34 0,-1 0-41 0,0 0-41 0,-1 0-45 0,0-1-209 16</inkml:trace>
-  <inkml:trace contextRef="#ctx0" brushRef="#br0" timeOffset="95021.8">29239 11083 2474 0,'0'1'167'16,"0"1"-83"-16,1 2-57 0,0 1-29 0,0 0 2 0,3 0 2 0,0 2 6 15,1 0-3-15,1 2-2 0,-1 1 7 0,0-1-9 0,1 2 4 0,-1-1-1 16,1 0-3-16,-2 1 9 0,0-1 4 0,0-2 0 0,-1 2-5 16,1-1-9-16,1-1-2 0,0 0 0 0,0-2 6 0,0 0-1 0,-1-1-3 15,2-1-5-15,-1-2 7 0,0 0 4 0,0-1 3 0,0 0 4 0,0-2 2 16,-2 0 7-16,2-1 7 0,0 0 0 0,-1-1 3 0,1-1-5 15,0-1-3-15,-1 0-1 0,2-1-2 0,-1 0-6 0,0 0-4 0,1-1-8 16,-1 1 1-16,1 0-2 0,0 1 1 0,0 0 1 0,0-1-4 16,0 2 1-16,-1 1 1 0,0 0 0 0,0 0 3 0,0 0-1 0,-1 1-1 15,1 0 1-15,-1 1-3 0,-1 0 1 0,0 1-4 0,0-1 1 0,-1 2-1 16,0 0-3-16,1 0 1 0,-1 0-3 0,1 1 4 0,-1 0-4 16,1 1 3-16,-1-1 2 0,0 2-3 0,0 0 3 0,-1 0-1 0,1 1-4 15,1 0 5-15,-1 1 0 0,1 0-8 0,-2 0 8 0,1 1-8 0,0 0 5 16,1-1-2-16,0 1-9 0,0 0 1 0,0 0-11 0,1-1-8 15,-2 0-14-15,1-1-17 0,1 1-26 0,-1-1-22 0,0 0-23 0,1-1-26 16,-1-1-25-16,1 0-27 0,-1-1-34 0,0 1-45 0,-1-2-108 16,0 1-304-16</inkml:trace>
-  <inkml:trace contextRef="#ctx0" brushRef="#br0" timeOffset="95223.8">29726 10696 3150 0,'14'10'58'0,"4"3"-24"0,9 8-20 0,4 6 4 0,3 4 18 0,4 5 15 16,0 4 27-16,2 0-10 0,-1 3-18 0,-1 2-7 0,0-1-14 16,-3 1-9-16,-2 1-5 0,-3-1-11 0,0 0 2 0,-7 0 0 0,-1 1-25 15,-5-3-10-15,-3 1-34 0,-2-1-52 0,-2 0-34 0,-4-4-82 0,-1-1-108 16,-2-1-196-16,-3-2-254 0,-2 4-207 0</inkml:trace>
-  <inkml:trace contextRef="#ctx0" brushRef="#br0" timeOffset="100436.74">15047 11519 2022 0,'-8'2'44'0,"2"1"-7"16,-3 0-35-16,1-1-14 0,3-1 1 0,1 0-38 0,1 0-43 0,1 0-36 15,1 0-33-15,1 1-14 0,1 0-10 0,2 0-21 0,0 0-30 0,2 1-38 16,2 0-175-16</inkml:trace>
-  <inkml:trace contextRef="#ctx0" brushRef="#br0" timeOffset="105573.2">16402 10124 37 0,'-2'0'20'0,"-1"0"-15"16,-1 0-5-16,0 1-4 0,1-1-5 0,-1 1-4 0,1 0-12 15</inkml:trace>
-  <inkml:trace contextRef="#ctx0" brushRef="#br0" timeOffset="106089.86">16290 10172 70 0,'-5'3'59'0,"0"0"-7"0,-2 1 9 0,1 0 11 0,0-3-3 0,1 0-2 16,1 1-2-16,1-1-4 0,0 0-5 0,0 0-6 0,0-1-2 15,0 1-1-15,1-2-2 0,1 1 2 0,-1 0 4 0,1 0 2 0,1-1 11 16,-1 0 0-16,1 1 0 0,0-1 0 0,0 0-7 0,0 1-4 0,1-1-1 16,-1 1-10-16,1-2 2 0,0 0-3 0,1 1-6 0,1-1 3 15,1 0-5-15,-1 0-2 0,2-1 3 0,-1 1-10 0,2-1 5 0,0 1 5 16,1 0-1-16,0-2 6 0,1-1-7 0,2 0 1 0,1 1-5 0,-1-2 2 15,4 1-3-15,-1 1 10 0,1 0 0 0,0-1 3 0,0 0-1 16,4-1-13-16,1-1 5 0,-1 0-3 0,2-1 1 0,0 0 0 0,-1 0-2 16,2-1 1-16,2 0-3 0,1-1-3 0,1 0 2 0,-2 1-9 15,2-2 5-15,-1 1 3 0,1 0-1 0,1-1 0 0,-1 1 2 0,2-1-5 16,1 2 0-16,-1 0-7 0,2 1 6 0,-1-1-8 0,1 1-2 0,0-1 1 16,0 0-7-16,0 0 4 0,2 0 1 0,-2 1-3 0,2-1 6 15,-1 2-3-15,0-2 1 0,1 0 0 0,2 1-7 0,-1-1 4 0,1 0-5 16,-3 0 4-16,1 1 4 0,-1-1 0 0,0 0 3 0,1 2-3 15,1 0-6-15,-3 0 5 0,2 0-4 0,-1 1 5 0,0-1 9 0,-1 2-9 16,1-1 7-16,-1 0-2 0,0 2-2 0,-2-1 1 0,0 1-2 0,-1 0 0 16,3 0 2-16,-1 0-4 0,-1 0 2 0,1 0-1 0,-2 1-3 15,1 0 1-15,-1 0 0 0,1-1-2 0,-1 2-3 0,2-1 1 0,-1 0 2 16,0-1-3-16,0 1 6 0,0-1-1 0,1 0-4 0,-3 1 4 0,1 0-3 16,1 0 1-16,-3-1-2 0,2 1-1 0,-1 0-1 0,0 0-1 15,-1 0 4-15,0-1-1 0,2 1-1 0,-1 0 3 0,2 0-3 0,-2-1 5 16,1 0-2-16,-2-1-3 0,0 0 1 0,0 1-3 0,-1-1 0 15,2 1 3-15,-1-1 3 0,-2 0-5 0,1-1 3 0,-1 1-4 0,-1 0-2 16,-1 1 2-16,0 0-5 0,-3 0 1 0,1 0 4 0,0 1-6 0,-3 0-3 16,0-1-1-16,-1 1 5 0,1 0 5 0,-3 0 3 0,1 0-1 15,-1 0-4-15,-1 2-3 0,-2 0-4 0,-1 0-3 0,-2 1-6 0,1-1-9 16,-3 2-10-16,0-1-10 0,-1 1-9 0,-2 0-14 0,0 0-14 0,-1 0-16 16,-1 0-27-16,0-1-41 0,-1 1-46 0,0 0-60 0,0-1-59 15,-2 0-66-15,1-1-309 0</inkml:trace>
-  <inkml:trace contextRef="#ctx0" brushRef="#br0" timeOffset="106439.86">19076 9280 1658 0,'-2'-6'592'0,"2"1"-526"0,0 0-43 0,2 3-26 0,3 1-3 0,3 1-3 16,4 0 1-16,1 0 2 0,1 1 0 0,0-1 5 0,0 1 1 0,-1 0 0 15,-1 0 4-15,1 0-4 0,0-1 2 0,1 1-4 0,0-1 1 16,0 0-1-16,0 1 4 0,1 0 2 0,1 0-2 0,0 1-1 0,1 0 1 16,0 0-1-16,0 0 1 0,0 0 2 0,1 1-1 0,0 1-4 15,-2 0-2-15,2-1 3 0,-1 1 0 0,0-1-2 0,-2 2 4 0,0-1-4 16,-2 1 7-16,-1 0 1 0,-3 0-5 0,1 0 2 0,-2 0-1 0,-1 1 1 15,-1-1 4-15,-1 0-4 0,-3 1 5 0,0-1 4 0,-3 0-1 16,-2 0 2-16,-1-1 7 0,-1 3-1 0,-4 0 2 0,0 1 1 0,-1 0-3 16,-4 0-7-16,-1 0 1 0,-1 0-4 0,-2-1-1 0,-1 1-3 0,0 0-1 15,-1-1 0-15,1 1-12 0,0-2 3 0,-2 1-8 0,2-1-5 16,0 1-1-16,-1 0-15 0,2 0-20 0,-1 0-34 0,1 0-49 0,1 1-75 16,-1-2-103-16,0-1-147 0,-1 0-365 0</inkml:trace>
-  <inkml:trace contextRef="#ctx0" brushRef="#br0" timeOffset="111856.93">19896 8752 2427 0,'-5'-7'87'0,"0"0"-76"0,-1 0-8 0,4 2-6 0,1 3-3 15,2 0 1-15,1 2-1 0,1-1 11 0,1 1 10 0,-1 1 11 0,-1-1 7 16,0 2 4-16,0 0 1 0,0 0-7 0,0 1-4 0,0 1 0 0,0 1-3 15,0 0-2-15,1 2-1 0,-1 1-6 0,1 1 2 0,0 2-4 0,0 3-5 16,1 0-8-16,-1 1-3 0,1 2 6 0,0 3 1 0,0 2 4 16,0 1-1-16,0 3-5 0,0 0-2 0,-1 1 0 0,0 1-4 0,-1 2 4 15,0 1-1-15,0 4-4 0,0 0 3 0,1 3-3 0,1-2 0 16,-1 0-4-16,2 1-4 0,1-1-7 0,1 0-5 0,2-2-14 0,0 0-22 16,1-4-10-16,1 1-10 0,1-4-9 0,1 2-3 0,0-4-9 0,0-1-8 15,-1-3-6-15,0-2-3 0,-1-3-26 0,-1-1-58 0,0-4-69 16,-2-1-102-16,-1-3-295 0</inkml:trace>
-  <inkml:trace contextRef="#ctx0" brushRef="#br0" timeOffset="112189.74">19797 8904 2585 0,'-9'-2'40'0,"-1"0"-32"0,0 0 2 0,5 1-9 0,4 1-2 16,2-1-4-16,3 1-1 0,-1 0 12 0,3 0 7 0,0 0 5 16,2 0 1-16,0-1 0 0,3 0-1 0,1 1-3 0,1 0 0 0,2-1 0 15,-1 1-6-15,2 0 1 0,0 1-1 0,0 0-4 0,2 1 0 0,0 1 1 16,0 1-4-16,-1 1 3 0,1 1-5 0,1 1 1 0,-1 2 1 16,1 0-2-16,0-1 0 0,-2 2 2 0,-1-1-2 0,1 0 1 0,-1 1-1 15,-2-1 4-15,-2 0 1 0,0-1-2 0,-1 0 4 0,-2-1-2 16,-3 0 1-16,0-1 4 0,-3-1 1 0,-1 0 0 0,0 0 4 0,-2-1-3 15,0 1 0-15,-2-1-7 0,-1 1 2 0,-1 0-2 0,-2 0-2 0,-1 1 1 16,-1 0-4-16,-1-1-2 0,-2 1-5 0,0-1 4 0,0-1-2 16,-1 1-4-16,0 0-6 0,-1-1-7 0,1 1-6 0,1 0-16 0,1-1-17 15,0 1-20-15,1-1-23 0,1 0-14 0,0 0-16 0,3 0-18 0,1 0-26 16,0 0-46-16,3 0-42 0,1-1-36 0,2 0-31 0,1-2-290 16</inkml:trace>
-  <inkml:trace contextRef="#ctx0" brushRef="#br0" timeOffset="112505.99">20338 8879 1552 0,'0'1'452'16,"-2"1"-397"-16,1 2-27 0,2 1 0 0,1 3 9 0,0 1 11 0,2 1 14 16,-1 2 13-16,1 0 8 0,-1 1 2 0,1 1 0 0,0 1-10 0,0 1-11 15,1 1-15-15,1 0-13 0,-1 0-13 0,1-1-4 0,1-2-6 16,-1 1-3-16,2-2 2 0,1-1-4 0,1-3-3 0,1-1 2 0,1-1-2 15,-1-1-1-15,1-3 1 0,0 0 1 0,0-1-2 0,0-2 4 0,0-2 1 16,1-1-6-16,0-2 2 0,-1 0 2 0,1-1-4 0,-3-2 3 16,2 1-3-16,0-3-5 0,-1 0 4 0,0 0-2 0,-1-1 2 0,-1 0 1 15,1 1-1-15,-1-2-4 0,-1 1-1 0,0-2-6 0,-1 1 4 16,-2 0 5-16,0 0-2 0,-1 0-1 0,-3 1 5 0,1 0-4 0,-3 0-3 16,-1-1-7-16,-1 0-12 0,-2 0-6 0,-2 0-4 0,-2 1 4 0,-1 2 11 15,-3-1 5-15,-1 1-1 0,-1 2 4 0,-2 0-10 0,-1 3-2 16,0 1-5-16,-2 2-6 0,1 1-9 0,0 2-8 0,1 2-6 0,0 2-7 15,2 0-25-15,2 1-30 0,0 0-54 0,2 2-69 0,0-1-78 0,3 1-67 16,2 1-368-16</inkml:trace>
-  <inkml:trace contextRef="#ctx0" brushRef="#br0" timeOffset="112740.95">20547 9017 2221 0,'-5'5'427'0,"2"2"-403"0,1 3-32 0,5 1-10 0,3 1 2 16,1 0 5-16,3 2 3 0,-1-1 1 0,1 0 4 0,2 0 0 16,-1-2 5-16,0 1-1 0,-1-1-6 0,2 0-4 0,-2 0-4 0,2-3-4 15,-1 1-4-15,1-2 2 0,0-2-9 0,-1 0 0 0,1-1-13 16,-1-1-24-16,0-1-20 0,0-2-27 0,-2 0-32 0,-1-1-42 0,0-1-46 15,-1 0-40-15,0-2-24 0,0-1-32 0,0-2-199 0</inkml:trace>
-  <inkml:trace contextRef="#ctx0" brushRef="#br0" timeOffset="113023.95">20914 9031 2310 0,'-4'6'251'0,"1"3"-228"0,0 3-31 16,3 0 3-16,2 2-1 0,2 1 1 0,-1-1 2 0,1-1 1 0,-1-2 4 15,-1-1 4-15,0-1-1 0,-2-1-2 0,0-1 2 0,0-2-5 0,-2-2 0 16,1-2-5-16,-1-1-3 0,-1-1-3 0,-1-1 0 0,0-2 3 16,0-2-6-16,-1-1 6 0,0-3-6 0,1 0-5 0,1-2 1 0,0 0-2 15,0-2 4-15,1-1 2 0,1 0 4 0,1 0-3 0,1-1 4 16,1-2 2-16,3 1-1 0,-1-1 6 0,3 0-4 0,2 0-6 0,0 2-4 15,1 0-10-15,3 2-2 0,-1 1 13 0,1 4 1 0,2 1 4 0,-1 1 4 16,0 2-10-16,-2 0-2 0,0 0-8 0,0 2-19 0,-2 1-32 16,1 1-48-16,-3 2-69 0,2 0-69 0,-1 0-58 0,0 1-48 0,0-1-209 15</inkml:trace>
-  <inkml:trace contextRef="#ctx0" brushRef="#br0" timeOffset="114157.15">21243 8952 1714 0,'-2'3'658'0,"0"1"-570"15,2 1-57-15,3 2-17 0,1 0-3 0,3 1-7 0,0 1 4 0,1 0 5 16,1 0 0-16,0 1 10 0,0 1 11 0,0 0-1 0,0-1 0 16,-1-1-12-16,1 0-8 0,1-1-8 0,-1 0 4 0,0-1-2 0,1-1-4 15,-1-1 0-15,1 0-1 0,0-2-2 0,0-1 5 0,-1 0-7 16,2-2 2-16,-2-1 2 0,3-1-2 0,0-2 5 0,0-1 1 0,0 0 3 15,-3-2-1-15,0 0 0 0,1-1 4 0,0 0-9 0,-2 0 0 0,0-2-3 16,0 0-3-16,-1-1 3 0,-2 0 0 0,0 1-2 0,-2 0 2 16,0 0-1-16,-1 0 1 0,-2 0 0 0,-1 0 1 0,-3 0-2 0,0 0-4 15,-1 0-2-15,-2 1-1 0,-1 0-5 0,-2 1 1 0,-1 0-1 0,0 2-3 16,0 1 16-16,-1 2-13 0,-2 1 8 0,0 1-8 0,-1 2-11 16,1 1 9-16,0 0-2 0,0 4 7 0,0 0 10 0,2 2 0 0,1 0 0 15,1 1-3-15,1 0-10 0,1 0-9 0,3 0-8 0,1 0-5 16,1 0-1-16,1-1-4 0,2 0-2 0,1-1 1 0,0 0 2 0,3-1 3 15,0-1 3-15,1 0 2 0,1-1 3 0,1 0 3 0,1-2 2 0,1 0 4 16,0 0-1-16,1-1 4 0,0 0-2 0,0-1 2 0,1 0 3 16,0 0 2-16,1 0 4 0,0 0 1 0,1 1 4 0,0-1 0 0,-1 0 4 15,-1 0 0-15,1 0-2 0,-1 1 3 0,2 0-1 0,-1 1 3 0,-1 0 1 16,0 0-1-16,0 1 3 0,0-1-3 0,0 0 2 0,-2 1 3 16,-1-1 0-16,-1 1 2 0,-1-1-4 0,0 0 1 0,-2 1-1 0,1-1 3 15,-1 1 0-15,0-2-1 0,-1 2-1 0,1 0 4 0,-1 0 0 16,-1 0 0-16,0 0 2 0,0 0 6 0,0 0 1 0,0 0 3 0,-1-1-1 15,-1-1-1-15,2 1 1 0,-1-1 0 0,-1 0 1 0,1 0 1 0,-1-1-5 16,1 0 4-16,0 0-6 0,1-2-1 0,-1 1 1 0,1-1-8 16,1 0 2-16,-1-1 0 0,1 1-2 0,-1-2-2 0,1 1 1 0,0-1-1 15,0 1-4-15,1 0 2 0,-1 0-1 0,1 1-3 0,0 0 7 0,-1 0-4 16,0 0-1-16,1 1 5 0,-1 1-4 0,0 0 5 0,-1 0 1 16,1 2 2-16,0-1-4 0,0 1-2 0,0 1-1 0,1-1-7 0,1 1 1 15,-1 1-1-15,1 0 2 0,0 0-2 0,0 2-2 0,1-1 2 16,-1-1 5-16,2 1-8 0,-1-1 0 0,0 0-1 0,1-1-4 0,-1-1 5 15,1 0-2-15,0 0-6 0,0-1-4 0,0 0 4 0,0 0 3 0,-2-1 5 16,1-2-1-16,0 0 3 0,0-1-4 0,0 0-1 0,0-1-1 16,0-1 2-16,1 0 1 0,-1-1-1 0,2 0 8 0,-3 0 0 0,2 0 2 15,-1 0 1-15,-1 1-6 0,1-1 4 0,-1 0-4 0,0-1 6 0,-1 1-1 16,0 0-4-16,1 1 4 0,-1 1-3 0,0 1 4 0,-1 1-2 16,1 1-6-16,-1 1 4 0,1 0-2 0,-1 1 4 0,1 1 3 0,0 0-4 15,-1 1 2-15,0 0-3 0,0 0-1 0,-1 1 2 0,1 0-3 16,-1 0 0-16,-1 1-1 0,1-1-2 0,-1 0 1 0,0-1 4 0,1 0-4 15,-1-1 0-15,1 0-1 0,0-1 0 0,0 0 0 0,0 0-2 0,0 0 0 16,0-1 0-16,-1 1-1 0,0-2 6 0,1 1 0 0,0 0 0 16,0-1 3-16,-1 1-2 0,1-1-2 0,-1 1-1 0,1-1 2 0,0 0-3 15,-1 1-3-15,1-1 1 0,0 0-2 0,-1 0 1 0,1 1 4 0,0-1 1 16,-2 0-2-16,1 1-2 0,-1 0 2 0,0 0-4 0,1 1-4 16,-1-1 3-16,1 1-9 0,-1 1 1 0,0-1 0 0,0 2 2 0,1 1 1 15,-1-1 2-15,1 1 2 0,-1-1 1 0,1 1 0 0,1 0-3 0,-1-1 2 16,1 0-3-16,0-1 1 0,0 1 2 0,0-1-4 0,1-1 0 15,1 1-16-15,-1-1-2 0,1 1 1 0,-2-1-1 0,1 0 14 0,0-1 5 16,0 0 1-16,1-1 2 0,0 0-3 0,-1-1 2 0,2 0 1 16,0-1 1-16,-1 0 0 0,2 0 0 0,1-1 4 0,-1-1-2 0,2 0 2 15,-1 0 1-15,0 0-1 0,2 0-1 0,-1 0 2 0,1-1 2 0,0 0 1 16,1 0 0-16,0-1 0 0,1 0 0 0,-1 0 1 0,1-1 2 16,-2 1 4-16,1 1-2 0,0-2-2 0,0 1 1 0,0-1-2 0,1 1 2 15,0-2-1-15,-1 1 0 0,-1-1 0 0,0 1 1 0,-1-1 0 0,0-1 1 16,-1 1-8-16,-1 1 3 0,-1-1 1 0,0 2 11 0,-2 2 12 15,1-2-1-15,-2 2 4 0,-2-1-1 0,-1 0-8 0,-2 1 1 0,-2 1 1 16,0 1-8-16,0 0 6 0,-1 1 1 0,-2 0-4 0,1 2 1 16,-2 0-1-16,0 1-2 0,1 1-3 0,0 1-3 0,-1 1-3 0,2 1-2 15,-1 1 3-15,0 0-4 0,0 1-7 0,1 1 3 0,2 0 7 0,1 1-2 16,1 1 10-16,1 1-2 0,1 0-15 0,2 1 2 0,0-1-5 16,2 1 4-16,2-1 4 0,0 0 0 0,1-1 0 0,2-1-2 0,1 0-3 15,1-1 5-15,0-1-1 0,1 0 1 0,-2-1-3 0,2 0-7 0,0 0 4 16,0-1-3-16,1-1-1 0,0-1 1 0,-1 0 1 0,2-1 1 15,-3 0-4-15,0-1 0 0,1 0-10 0,-2 0-4 0,1-1-3 0,-1-1-13 16,-1 0-10-16,1-2-13 0,-2 0-30 0,0 0-32 0,1-2-34 16,-3-1-33-16,2-1-24 0,0-2-15 0,-2 0 4 0,1-2-1 0,0 1 0 15,-1-1-143-15</inkml:trace>
-  <inkml:trace contextRef="#ctx0" brushRef="#br0" timeOffset="114640.36">22685 8842 2262 0,'1'1'148'0,"2"1"-111"0,0 1-34 0,3 2-7 15,1 1 1-15,1-2-2 0,2 1 11 0,1 0 8 0,-1 1 13 0,0-1 19 16,-3 2 3-16,1-1 3 0,-1 0-11 0,-2 0-15 0,1 0-5 0,0-1-8 15,1 1 4-15,-2-1-7 0,0 0-2 0,0 0-1 0,0-1-6 16,-1 1 11-16,1 0-4 0,-2-1 2 0,-1-1 1 0,1 0-2 0,-2-1 1 16,0 0 5-16,0 1-7 0,0-2-1 0,1 0-1 0,-1 0-2 15,0-1 3-15,-1 1-2 0,0-1 0 0,0 0 1 0,0 0-2 0,1-1 2 16,-1 1 0-16,0 0-1 0,0-1 1 0,0 0-6 0,1 0 2 0,-1 0 5 16,1 0-5-16,-1 0 8 0,-1 0-5 0,1 0-5 0,-1-1 1 15,2 0-4-15,-1 1 1 0,0-1 2 0,-1-1-6 0,0 1 1 0,1 0-6 16,-1-1-9-16,1 0-10 0,0 1-20 0,-1-1-24 0,0 1-26 0,0-2-22 15,0 1-21-15,0-1-22 0,0 0-24 0,-1-1-22 0,3 0-29 16,0-1-13-16,0 0-14 0,0-1-10 0,2 0-57 0,0 0-40 0</inkml:trace>
-  <inkml:trace contextRef="#ctx0" brushRef="#br0" timeOffset="114923.35">22845 8379 2846 0,'-6'0'91'0,"3"3"-90"16,-2 1-38-16,3 3-17 0,3 2-4 0,0 1 7 0,1 2 19 0,1 1 20 16,-1 0 14-16,0 0 1 0,1 1 2 0,-2 1-3 0,1 1-2 15,-2 1 0-15,1 2-2 0,1 1-1 0,-2 0 1 0,1 0 1 0,1 1-6 16,0-1 1-16,1 3-9 0,0 1-3 0,2-1 1 0,-1 1-6 0,1-1-2 15,1 0-2-15,0-1-6 0,1-1-11 0,0-2-9 0,0 0 0 16,0-1-8-16,0-2-2 0,0 2-10 0,0-2-24 0,0-2-15 0,-1 0-9 16,1-2-6-16,-1-2-10 0,-1 0-19 0,1-2-17 0,0-3-14 15,-2 0 6-15,1-2 22 0,-1-2 6 0,-1-1 2 0,0-3-182 0</inkml:trace>
-  <inkml:trace contextRef="#ctx0" brushRef="#br0" timeOffset="115240.35">22821 8786 1412 0,'-2'-1'318'0,"2"1"-268"0,0 0-53 0,2-1-23 16,1 0-14-16,1 0 1 0,2 1 10 0,-1-1 6 0,3 1 17 15,0 0 4-15,1 0 4 0,1 0 1 0,1 0-4 0,2 0-3 0,-2-1-2 16,3 1-5-16,-1-1 0 0,-1 0-3 0,0 0-6 0,1 1-2 0,0 0-5 16,1 1 1-16,0 0 6 0,-2 0 5 0,0 1 7 0,1-1 3 15,0 1 5-15,0-1 1 0,-1 0 3 0,0 1 1 0,0 1 3 0,-1-1 3 16,1 1-2-16,-2 0 3 0,2 0-2 0,-1 1-4 0,1 0 5 0,-1 2-3 15,1 0 1-15,-2 0-4 0,1 2-2 0,1 0 5 0,-1 0-2 16,1 0 10-16,-2 1 9 0,0 1 11 0,0 0 15 0,-1 1 14 0,-1 0 13 16,0 0 10-16,-1 0 10 0,-2-2-8 0,0-2-6 0,-1 1 1 15,0-2-8-15,-2-1 2 0,-1-1-3 0,-1-1-9 0,-2-2-6 0,-1 0-10 16,-3-2-7-16,1 0-11 0,-2-1-1 0,-2-2-5 0,-1-1-7 0,-2-2-4 16,-1-2-9-16,2 1-4 0,-2-2-9 0,1-2-8 0,2 0 6 15,2-1-18-15,1 0-1 0,2-1-14 0,0-1-12 0,3-1-2 0,-1 0-7 16,2-1-1-16,2-1-8 0,1-1-15 0,1 0-24 0,2-1-61 0,2 1-90 15,1 0-147-15,2-1-405 0</inkml:trace>
-  <inkml:trace contextRef="#ctx0" brushRef="#br0" timeOffset="123673.81">14207 11213 1391 0,'-6'-2'140'0,"1"0"-94"0,0-1-7 0,3 1 7 16,-1 1 5-16,1-1-16 0,-1 0-10 0,1-1-1 0,-1 1 3 15,-1-1 11-15,0 0 0 0,-1 0-6 0,-1 0-5 0,0 0-3 0,-1 0-4 16,0 0-1-16,-1 0 1 0,-1 0-3 0,1-1 1 0,-3 0 2 0,1 0 0 16,-2 1 2-16,0-1 0 0,0-1-2 0,-3 2 4 0,-1-1 4 15,0 0-5-15,0-1 1 0,-1 0-7 0,-2 0-7 0,0 0 7 0,-1 0-5 16,-4 0-5-16,1-1-5 0,-2 1-4 0,-1 0-1 0,0 1 2 0,-2 0-1 15,-1 0 2-15,-3 0-4 0,1 0 5 0,-3 1 5 0,0 0-4 16,-1 1 7-16,-1 0-5 0,1 0-2 0,-3 0 5 0,-1 0 3 0,1 0 0 16,-3 0-2-16,1 1-2 0,0 1 0 0,-1 0-4 0,1 0 7 0,0 1 0 15,-1-1-3-15,0 1 5 0,0 0-11 0,-2 1 2 0,2 0-2 16,0 2-3-16,-2-1 6 0,0 1-2 0,0 0 2 0,0 1 2 0,0 0 9 16,2 0-5-16,-1 0 4 0,1 1 5 0,1 1-4 0,-2-1 2 15,1 0-2-15,2 0 5 0,-2 1-1 0,3 0-2 0,1-1-5 0,-2-1 0 16,2 1 0-16,-1-1 4 0,-1 1-1 0,2 0-6 0,0 0 2 0,1 0 5 15,1 1 1-15,-2-1 0 0,1 0-3 0,0 1 4 0,-1-3-1 16,1 3-3-16,-2-1-1 0,1 0-4 0,0 0-1 0,1 0 4 0,1 0 4 16,-2-1 2-16,1 1 2 0,-2 0 1 0,1-1-7 0,3 1 4 15,-2-1 3-15,2 0 1 0,-1-1 3 0,1 0-11 0,0 0 8 0,2 1-4 16,-1-1-1-16,1 0 5 0,0 1-15 0,1-1 0 0,1 1 1 0,2-1-9 16,1 2 2-16,1-1 7 0,0 1-7 0,1-1 7 0,0 1-2 15,1-1-5-15,2 1 7 0,0 1-10 0,3-1 1 0,0 1 5 0,2-1-10 16,0 1 0-16,3 1 2 0,-2 0-7 0,1 0 3 0,0 1 18 0,3 1-7 15,-1 0 6-15,2 0-1 0,1 2-3 0,-1-1-2 0,2 0-6 16,0 0-1-16,1 0-2 0,1 1 0 0,0 0-2 0,1 0-5 0,1 1-5 16,0-2-3-16,1 0-14 0,1 1-12 0,0-1-16 0,0 0-21 15,1-1-18-15,1 1-28 0,0-1-37 0,0 0-41 0,1-1-49 0,0-1-68 16,-1-1-73-16,1-2-416 0</inkml:trace>
-  <inkml:trace contextRef="#ctx0" brushRef="#br0" timeOffset="124040.81">10248 11193 2979 0,'-21'-4'88'0,"6"2"-55"16,-2 1-19-16,9 2-4 0,5 0-3 0,2 1-3 0,0 1-11 0,2 1 0 15,1 0 1-15,0 1 5 0,-1 1 8 0,1 0-6 0,1 1-4 16,0 1-1-16,0 1-8 0,1 1 5 0,-2 1-3 0,0-1-11 0,-1 2-3 16,-2 0-5-16,0 1-1 0,0 1 5 0,-2 0 5 0,-1 2 1 0,-1 1 9 15,0 0 3-15,-1 1-10 0,0 1 11 0,-2 1-1 0,1 0-2 16,0 2 16-16,-1 0-7 0,1-1 5 0,-1 1-3 0,0-1 1 0,1 0-1 16,0 0 3-16,0-2-5 0,-1 1 3 0,2 0 2 0,-1-2-3 15,0 2 13-15,2 0 0 0,0-1 2 0,1-2 2 0,1-1-4 0,0-1 1 16,3-2-6-16,0-1-5 0,2 0 2 0,2-1-5 0,1-1-1 0,2 0 6 15,1-1-3-15,3 0-8 0,0 0 6 0,3 0 0 0,0-2-2 16,4 0 3-16,-1-2-5 0,6-1-3 0,1 0-2 0,3-1-1 0,1-1-18 16,1-1-43-16,1 0-86 0,0-1-127 0,3 0-181 0,0-1-176 0,3-3-315 15</inkml:trace>
-  <inkml:trace contextRef="#ctx0" brushRef="#br0" timeOffset="125006.81">7154 12205 2471 0,'-29'11'233'0,"1"4"-134"15,-4 5-50-15,9 3-20 0,8 1-2 0,2 4 2 0,2 3-1 0,3 1-5 16,1 3-8-16,2-1-6 0,1 2-3 0,1 3 1 0,2 0 0 0,0 1-5 16,3-1 0-16,1-2-1 0,1-1-2 0,3-1 2 0,1-1 1 15,2-1-4-15,2-4 4 0,1-1 1 0,1-3-1 0,3-3 5 0,2-1-2 16,0-2-3-16,1-4 5 0,2 0-2 0,-1-3 6 0,0-2-1 0,2-1-3 16,-1-4 3-16,3-1 3 0,0-2-5 0,-1-1 6 0,1-3-5 15,-1-1 3-15,0-2-1 0,0-3 1 0,-1-2 6 0,1-4-7 0,-2-1 1 16,1-1-1-16,-1-2-8 0,-2-2 6 0,1-1 0 0,0-2-5 0,-3-1-1 15,1-1-5-15,-2-3 6 0,-1 0 1 0,-1-2-1 0,1 1-13 16,-3-2 5-16,0 2 1 0,-3-2 1 0,-2 1 13 0,-2-2-15 0,-3 1 8 16,-2 0 1-16,-3 0-5 0,-4 0 5 0,-2-1-12 0,-2-1 7 15,-3 0-2-15,-2 0 1 0,-3 1 4 0,-1 2-5 0,-3 3 2 0,-2 0 2 16,-1 4 4-16,-1 1-5 0,1 2 1 0,-2 5-2 0,2 1-2 0,-2 3 8 16,1 3-3-16,0 3 3 0,0 2-3 0,2 3-12 0,-1 2 6 15,2 3-4-15,3 2-6 0,0 3-1 0,1 2-13 0,3 3-3 0,-1 2-5 16,1 4-4-16,0 3-15 0,1 2-9 0,0 2-11 0,1 2-23 15,-1 0-18-15,3 4-41 0,0-3-53 0,3 1-62 0,2-2-98 0,3-2-118 16,2-2-348-16</inkml:trace>
-  <inkml:trace contextRef="#ctx0" brushRef="#br0" timeOffset="125390.81">7850 12364 2819 0,'-12'0'124'0,"3"0"-57"0,-1 0-53 15,4 1-8-15,5 0 0 0,1 2-3 0,0 1-1 0,1 1-4 0,1 2-5 16,1 3 2-16,0 2 2 0,0 4-8 0,1 0 1 0,0 3-7 0,0 1-2 16,0-1-3-16,0 1-7 0,1 1 2 0,0-2-1 0,-1-1 3 15,1 0 6-15,1-3 6 0,-1 0-2 0,2-2 4 0,1-2-2 0,0-2 1 16,0-1 9-16,1-3 0 0,0-1 3 0,2-1 3 0,-1-2 3 0,1-1 9 15,-1-1-3-15,1-2-2 0,1-1 1 0,-1-3-4 0,-1 0 4 16,0-2 4-16,0-2-8 0,1-1-4 0,-1-1 2 0,0 0-1 0,0-2 4 16,-1 1 0-16,-1 0-1 0,0 1-8 0,0-1 2 0,-1 1 3 0,0 1-1 15,-1 1 4-15,-1 3-2 0,-2-2-2 0,0 3 0 0,-1-1 2 16,1 2 2-16,-2 1 0 0,0 2 3 0,-1 0 5 0,0 1 4 0,0 2-2 16,0 0-1-16,0 0-1 0,0 1-10 0,0-1 0 0,0 2-6 15,0 0-5-15,0 2 0 0,0 1-6 0,2 2 1 0,-1 1-6 0,1 1 0 16,1 0-3-16,0 1 3 0,0 1-7 0,0 1 1 0,0 1-9 15,1-1-4-15,0 0-6 0,-1 0-7 0,2-1-9 0,-1 0-25 0,0-1-16 16,1-1-16-16,-1 1-31 0,2-1-26 0,-2-1-46 0,1-1-54 0,1 0-114 16,-1 1-397-16</inkml:trace>
-  <inkml:trace contextRef="#ctx0" brushRef="#br0" timeOffset="125957.81">8363 11929 2172 0,'-10'-1'111'15,"1"-1"-66"-15,-1 0-13 0,4-1-2 0,3 0 6 0,2-1-4 16,-1 1-9-16,0 0-7 0,1-1-8 0,-1 1 0 0,0-1-4 0,0 1-1 16,0 0 2-16,0-1-2 0,-1 1-3 0,0 1 2 0,1 0-1 0,0 2 4 15,-1-1-2-15,0 1 5 0,0 1 0 0,-1-1-2 0,0 0 10 16,-1 2-3-16,1-1 9 0,1 0 1 0,-1 0 4 0,1 0 9 0,0 0-5 16,1 0 0-16,-1 1-7 0,1-1-9 0,1 0-5 0,-1-1 3 15,2 1-3-15,0-1-5 0,0 0-6 0,0 0-1 0,0 0-1 0,0 0 3 16,1 0 0-16,-1-1-2 0,0 1 0 0,1-1 4 0,-1 0-4 0,1 0 4 15,0 0-4-15,0-1 2 0,0 0 4 0,0 1-4 0,0-1 5 16,1 0 0-16,-1-1-2 0,0 2 5 0,0-2-1 0,-1 1 5 0,0-1 3 16,1 1 2-16,0-1 0 0,-1 0-6 0,0 1 5 0,1 1-3 0,-2 0-4 15,2 0 6-15,-1 0-3 0,-1 0 2 0,1 1 3 0,0 0-7 16,0 0 1-16,-1 0-4 0,1 0-2 0,0 0 2 0,1 1-2 0,0 0-3 16,-1 0 1-16,1 2-3 0,0-1 7 0,1 2-9 0,0 0 4 0,1 2 0 15,1 0-4-15,1 3 9 0,0 2-5 0,1 1 3 0,0 3 2 16,0-1 0-16,1 4 0 0,2 2 0 0,-1 1-2 0,2 1-12 0,0 2 11 15,0 1 1-15,0 2 2 0,0 0 9 0,-1 4-13 0,1-2-6 16,0 2 1-16,-1-3 2 0,0 1 0 0,0-2-2 0,-2-1-1 0,0 0 3 16,-1-2 1-16,1 0 5 0,0-2-6 0,0-4-2 0,0 0-3 0,0-1-1 15,0-2 5-15,0-1-3 0,-1-1-3 0,1-1-7 0,0 0-7 16,0-2-7-16,0 0-6 0,-1 0-6 0,-1-1-6 0,-1-2-16 0,-1-1-20 16,0 0-28-16,-2-2-45 0,0-1-59 0,-1-1-79 0,-1-2-98 15,-1-1-94-15,-1-2-318 0</inkml:trace>
-  <inkml:trace contextRef="#ctx0" brushRef="#br0" timeOffset="126140.81">8148 12187 2693 0,'-14'2'131'0,"0"2"-59"0,-2-1-31 16,8-1-11-16,5 0-1 0,3-2 0 0,2 1-15 0,1 0-4 0,2 0-4 15,1 0-1-15,2 0 0 0,2 1-2 0,1-1-3 0,0 0-3 16,2 0-1-16,1-1-1 0,2 0 4 0,1 1-5 0,0-2-11 0,0 1-9 15,2 0-13-15,-2-1-17 0,2 0-19 0,1 0-23 0,0-1-21 0,0 0-28 16,1-1-33-16,-2-1-49 0,1 0-73 0,-1-1-91 0,-1-1-78 16,1 0-186-16</inkml:trace>
-  <inkml:trace contextRef="#ctx0" brushRef="#br0" timeOffset="126357.81">8770 12125 2060 0,'-8'10'596'0,"0"4"-499"0,1 4-39 16,2 2-13-16,5 1 3 0,1 2 12 0,1 1 1 0,2 3-2 0,-1 1-10 16,1 5-5-16,0 0-4 0,1 3-4 0,0 0-2 0,0 1-13 0,0-1-13 15,0 2-3-15,1 0-5 0,0-1 2 0,1-1-6 0,1 1-8 16,1-4-12-16,2 2-15 0,0-2-11 0,2-1-9 0,-2-2-11 0,0-2-7 16,2-3-23-16,0 1-4 0,-1-3-7 0,0-2-15 0,-2-2-11 0,0-5-49 15,0-4-30-15,-1-2-21 0,-2-3 3 0,-1-3 19 0,-1-2 12 16,-1-4 18-16,-1-3 8 0,-2-3 16 0,-1-7 21 0,-1-6 10 0,-2-3-129 15</inkml:trace>
-  <inkml:trace contextRef="#ctx0" brushRef="#br0" timeOffset="126590.81">8954 12730 291 0,'-5'-24'167'0,"-2"-1"-35"0,-1-5-22 16,-2 3-3-16,0 3-7 0,-1-1-5 0,-1 1-2 0,0 0-10 0,0 0-3 15,-2 1-6-15,0-2-8 0,0 1-7 0,0 1 0 0,0-2 5 0,1 2 11 16,1 0 10-16,2 1 12 0,1 2-4 0,2 0-9 0,0 2-11 16,2 1-19-16,0-1-8 0,2 0-11 0,2-1-5 0,0 0 0 0,1-2-6 15,2 1-5-15,1 2 1 0,3-2 1 0,1 2 0 0,1 2 7 16,1 1-5-16,1 0-3 0,3 2 7 0,1 1-1 0,1 2-6 0,1 1-1 15,1 2-9-15,0 2-4 0,-2 2 2 0,2 2-5 0,1 3 4 0,0 2 2 16,0 2 2-16,0 2-3 0,1 2 4 0,-1 1-4 0,0 2 0 16,-3-1-2-16,0 1 4 0,-3 0 6 0,-1 1-2 0,-1 1 14 0,-1 1-7 15,-2 0-1-15,-1-2 0 0,-2 2-1 0,0-1 4 0,-1 0-4 0,-2-2-1 16,-1 2-5-16,-1-2-6 0,-1 1 0 0,-1-2-10 0,-1 0-4 16,0-1-5-16,-2 1-6 0,0-1-12 0,-1-2-23 0,-1 0-17 0,-1-2-26 15,1 0-32-15,1-2-44 0,0 1-64 0,1-3-89 16,1 0-115-16,0-1-405 0</inkml:trace>
-  <inkml:trace contextRef="#ctx0" brushRef="#br0" timeOffset="126957.81">9257 12056 3046 0,'-11'15'90'0,"4"1"-56"0,0 4-26 0,6-2 1 15,4 0 2-15,2 0-13 0,3 0 6 0,1-1-1 0,1 0-8 0,0-2 3 16,0-1-10-16,0-2-2 0,-1 0-2 0,0-2-10 0,-1-2-4 16,1-1-7-16,-2-2 1 0,0-1-1 0,-2-1 1 0,0-3-5 0,0 0-1 15,-3-1 7-15,1-2 2 0,1-1 18 0,-2-2 5 0,1-2 9 0,0-2-3 16,-1-1 3-16,0 0-3 0,0-1 4 0,0 0 7 0,0-2-2 16,-1-1 8-16,1 0 0 0,-1 1 0 0,0 0 4 0,-1 0 0 0,0 0 4 15,0 1-2-15,-2-1 3 0,1 0-4 0,-1 2-4 0,0 1-7 0,0 2 6 16,-1 1 8-16,1 1-13 0,-1 2 10 0,1 0-8 0,0 1-3 15,-1 2 5-15,1 0 0 0,0 1-10 0,0 1-1 0,0 1 1 0,1 2 3 16,-1 0 0-16,0 3-5 0,0 0-10 0,0 2 7 0,1 2 8 16,-1 0 2-16,1 5 3 0,0 0-10 0,1 2-5 0,0-1 0 0,1 2 5 15,0 1-6-15,1-1 0 0,0 0-3 0,1-1-7 0,0 0 8 0,0-1-6 16,2 0-5-16,-1 0-1 0,2-2-14 0,-1-1-13 0,1 1-24 16,1-2-35-16,-1 0-47 0,1-1-60 0,0-3-65 0,0 0-98 0,0-3-112 15,1-2-344-15</inkml:trace>
-  <inkml:trace contextRef="#ctx0" brushRef="#br0" timeOffset="127157.81">9599 11556 1926 0,'-13'7'1252'0,"1"1"-1161"0,-1 4-52 0,6 1-22 15,5 1 6-15,1 2 6 0,3 2-11 0,1 4-1 0,0 4-14 0,2 1 3 16,0 4 3-16,1 0-7 0,-1 0-8 0,1 0-10 0,0 2-2 15,0-1-1-15,1 1-11 0,-2 1-6 0,2-1-15 0,-1 1-16 0,-1-2-7 16,1-1-16-16,0 0-15 0,0-1-2 0,0-2-12 0,-1-1-7 16,0-2-13-16,-1-2-47 0,-1-1-64 0,-1-1-77 0,1-1-78 0,-3-1-90 15,0-3-89-15</inkml:trace>
-  <inkml:trace contextRef="#ctx0" brushRef="#br0" timeOffset="127290.8">9428 12134 2250 0,'-6'-1'171'15,"1"0"-67"-15,1 1-26 0,3-2-11 0,3 1-10 0,4 0-11 16,1 0-5-16,6-1-6 0,4 0 0 0,2-1-11 0,3 0-14 0,3-4-7 16,1-1-16-16,7-2-26 0,1-3-75 0,4-3-117 0,0-2-230 0,2-7-332 15,3-6-124-15</inkml:trace>
-  <inkml:trace contextRef="#ctx0" brushRef="#br0" timeOffset="143991.78">11726 13977 1932 0,'-13'1'661'0,"1"2"-569"0,-3 1-4 0,3 1-20 15,3 1-16-15,1 1-36 0,-1 0-9 0,0 0-14 0,0 2-6 0,-2 2 5 16,0 2-9-16,-2 2 8 0,-2 0 3 0,-2 1-4 0,-2 1-4 15,-3 1 3-15,-1 0-1 0,0 2 6 0,-1 0-3 0,-1 1 6 0,-4 2 3 16,0 1 0-16,-2 0-2 0,-3 1-3 0,-1 0 12 0,-2 3 5 16,-4 1 4-16,0 3 1 0,-3 1-14 0,0 3 4 0,-3 0-1 0,0 1 6 15,-1 2 8-15,0 1 2 0,-1 1 7 0,0 1 0 0,2-1 3 0,1 1-1 16,0 1 12-16,2-2-3 0,3-2-14 0,4-1-1 0,1-3-20 16,5-2-3-16,4-2-2 0,4-2-16 0,2-1-8 0,3-3-32 0,1-1-18 15,4-3-30-15,0-2-37 0,2 1-44 0,1-4-59 0,1 0-66 0,1-1-90 16,-1-2-85-16,0-3-308 0</inkml:trace>
-  <inkml:trace contextRef="#ctx0" brushRef="#br0" timeOffset="144274.76">10186 14560 2716 0,'-12'2'97'0,"2"0"-2"0,-1 2-27 0,4 0-17 15,3 0-17-15,0 1-6 0,2 2-10 0,-1 3-11 0,0 2 5 0,0 3-12 16,0 5 5-16,-1 3 0 0,-1 4-5 0,-2 3 4 0,-2 3-2 16,-1 4-4-16,-2 2 4 0,-1 2-9 0,-3 1-6 0,0 0 13 0,-2 0-7 15,-3 3 11-15,1 0 5 0,-2 0-13 0,-1 1 16 0,1 2 2 0,-1-3-5 16,1 0 12-16,2-4-3 0,2-2 10 0,2-4 11 0,3-3 6 16,5-6 2-16,1-2-1 0,3-4-12 0,4-6 1 0,1 0-7 0,4-4-6 15,2-1 2-15,2-2-1 0,3-1-1 0,2-2 1 0,3-2-3 0,1 0 1 16,5-3-6-16,2-1-2 0,1 0-7 0,4-3 0 0,1-1-10 15,2-3 6-15,1-1 0 0,1 0 0 0,0-2-2 0,0 2-12 0,0-2-5 16,1-1-9-16,1-1-14 0,-1 0-20 0,-2-1-34 0,1-1-40 16,-2-1-47-16,2-1-54 0,-2-1-105 0,2-5-206 0,-1-2-230 0,-1-5-130 15</inkml:trace>
-  <inkml:trace contextRef="#ctx0" brushRef="#br0" timeOffset="144791.76">7527 15282 3082 0,'-15'24'61'0,"3"5"-38"0,0 7-4 15,8 2-15-15,7-1-9 0,3 1 8 0,4 2-10 0,2-2 0 0,1-1 7 16,1-3-5-16,2-5 1 0,0-2-10 0,-1-5 0 0,-2-4 0 0,2-3-8 16,-1-3 4-16,2-2-9 0,-2-4 1 0,0-3 0 0,0-2 0 15,-2-3 4-15,-1-2 2 0,-2-2 5 0,-1-2-2 0,-3-1 3 0,-1-1 9 16,-3-2 0-16,-2 0 0 0,-2-3 2 0,-3-2-4 0,-3 0 4 15,-1 0 4-15,-2-1-6 0,-1 1 0 0,-2 1 7 0,-1 0-2 0,-3 0 10 16,-2 1-2-16,-1 1-2 0,-2 0 5 0,-2 1-4 0,0 2 0 0,-1 2 6 16,0 2-9-16,-1 4 6 0,2 2-2 0,-2 3-3 0,0 6 4 0,0 4-6 15,-1 5 2-15,1 3-3 0,0 3 3 0,1 5 4 0,0 2-3 16,1 5 10-16,1 1-4 0,0 5 10 0,3 2-5 0,1 2 6 0,4 2 3 16,4 2 7-16,2 4 7 0,2-2 8 0,3 1 4 0,2-1-7 15,3-2 14-15,2-1-6 0,2-2 0 0,2-5 18 0,2-2-15 0,3-1-5 16,3-6-25-16,1-1-1 0,3-6 11 0,2-2-5 0,1-1 4 0,3-5-16 15,1 0-21-15,0-3 12 0,1-3-5 0,1-4-6 0,2 0 12 16,-1-3-7-16,3-2 10 0,-2-2-7 0,-1-3-12 0,1-3-1 0,-2-1-16 16,0-3-11-16,-3-2-18 0,0-3-35 0,-1-3-20 0,-3-1-58 0,1-2-32 15,-1-4-40-15,-2-1-103 0,1-5-155 0,0-2-240 0,-2-4-245 16</inkml:trace>
-  <inkml:trace contextRef="#ctx0" brushRef="#br0" timeOffset="145291.76">7805 15906 3089 0,'-12'17'164'0,"1"2"-80"0,0 5-22 0,6-2-29 0,5-2-8 16,3 0 5-16,4 3-10 0,0 1-5 0,3 1 4 0,1 0-10 15,1-1 2-15,0-2-3 0,1-1-1 0,2-4 4 0,0-3-13 0,1-1-1 16,0-3-1-16,1-1 4 0,1-2 2 0,-1-3-4 0,-1-1 4 0,0-2-4 15,-1-2 2-15,-1 0 4 0,-3-2-14 0,1-2 14 0,-2-1-13 16,-1-1 14-16,-1-2 14 0,-1-2-6 0,0-1 4 0,-2-2-8 0,1-2 5 16,0-2-5-16,-1-1 6 0,-1-2-9 0,0-1-4 0,-1 0-4 0,0 1 8 15,-2-1 5-15,0 3-7 0,-2-1-4 0,-1 0-4 0,-2 2-2 16,-1-1 4-16,-2 1 4 0,-2 0-15 0,-1 1 0 0,-1 0-19 0,-2 1-4 16,-2 2-13-16,0 3-1 0,0 1 12 0,-1 4-21 0,-2 1 19 0,0 3-1 15,2 1-8-15,-2 3 7 0,1 1-13 0,1 4 2 0,-1 2 29 16,1 2-4-16,2 3 14 0,1 3 11 0,1 2-11 0,1 0 12 0,0 2 4 15,1 1-9-15,1-1 7 0,3 1-3 0,0 0 5 0,2-2 4 16,2 1-7-16,2-2 11 0,0-1-10 0,3 0 3 0,0-3 10 0,2-2-12 16,1-3 11-16,1-1-1 0,4-2 1 0,-1-2 5 0,3-1 4 0,0 0-1 15,0-2-3-15,3 0 8 0,1 0-6 0,1-1 3 0,-2 0-14 16,3 1 1-16,0-1 11 0,-1 0 1 0,2 0 3 0,0 1-12 0,-1 0-4 16,1-1-3-16,-1 0 2 0,0 1 6 0,0-1 0 0,-1 0-4 0,1 1-8 15,-3-2-1-15,3 1 0 0,-1 0 8 0,-3-2-5 0,0 1-6 16,-1-1 3-16,-1 0-2 0,0 0 7 0,0 0 1 0,-1 0-12 0,0-1-1 15,0 0 7-15,-1 0 0 0,-1 1 0 0,2-2-9 0,-1 1 0 0,-1 0 0 16,0-1-2-16,-1 1 2 0,1 0-9 0,-1-2-4 0,0 2-10 16,0-1-14-16,-1 0-12 0,0 0-19 0,-1-1-11 0,-1 1-31 0,0-1-27 15,-1 0-40-15,1 0-79 0,-1-2-96 0,0-2-126 0,-1-3-465 16</inkml:trace>
-  <inkml:trace contextRef="#ctx0" brushRef="#br0" timeOffset="145574.76">8409 14889 1864 0,'-12'-2'1229'0,"2"1"-1106"0,0 0-14 16,2 2-44-16,5 1-9 0,1 0-6 0,1 2-18 0,2 2-12 0,0 2-3 15,1 4 0-15,2 3 1 0,0 4 3 0,1 4-10 0,0 3-1 16,0 4-1-16,2 2-3 0,0 4 1 0,1 0-16 0,1 3 11 0,1 3 0 15,0 0-10-15,-1 3 23 0,2 0-15 0,0 1-2 0,1 0 1 16,1 1-1-16,0 2 2 0,1-4 0 0,2 0-2 0,-1-3 0 0,-1 2 6 16,2-4-21-16,-1-3 13 0,1 0-4 0,-1-4 3 0,0-1 10 0,0-2-7 15,0-1-3-15,-1-5-20 0,-1 1 20 0,0-2-14 0,0-3 2 0,-1 0 0 16,-2-2-34-16,1-4-14 0,-1 0-33 0,-2 0-32 0,0-3-13 16,0-2-40-16,-1-3-43 0,-1-3-86 0,-1-1-143 0,0-5-135 0,-1-4-304 15</inkml:trace>
-  <inkml:trace contextRef="#ctx0" brushRef="#br0" timeOffset="145808.76">8845 14776 2893 0,'-10'6'137'0,"1"2"-24"15,0 4-51-15,4 0-12 0,4 2-2 0,1 5-12 0,2 2-12 16,3 6-1-16,1 3-5 0,2 1 8 0,2 3-4 0,-1 5-2 0,1 1 0 15,1 4-5-15,0 3 6 0,3 3-14 0,0 1 0 0,1 4-5 0,-1 1-5 16,2 1 3-16,0 1-8 0,1 0 14 0,-2-1-14 0,0 1-3 16,0-4 6-16,-1-2-23 0,-2-3 4 0,1-2-2 0,-1-2-16 0,0-1-12 15,0-4-36-15,-3-3-44 0,2-2-43 0,-1-2-36 0,0-1-73 0,-1-1-233 16,-1 4-375-16,-1 1 107 0</inkml:trace>
-  <inkml:trace contextRef="#ctx0" brushRef="#br0" timeOffset="146408.76">7576 14516 2398 0,'-72'31'189'0,"-6"6"-164"0,-17 11-5 0,14 1-3 16,13-3-9-16,3 2 5 0,3 4-2 0,1 3 7 0,3 3-1 0,1 3-4 15,1 3-2-15,3 1-1 0,1 4-4 0,3 1 1 0,3 1-2 0,3 5-3 16,2 0-2-16,0 3 1 0,5 2-2 0,0-2 4 0,3 3 2 16,6 2-5-16,0 2 5 0,4 4 1 0,3-1 11 0,3 1 11 0,5-1 0 15,5 0 9-15,4-3 7 0,4-1-1 0,4-3 7 0,3-5-18 0,6-2-6 16,4-2-3-16,3-2-5 0,-7-38-4 0,5 10-4 0,1-3-5 15,8 6 1-15,1-1-3 0,8 6-3 0,3-4 18 0,8 5 3 0,4-4-5 16,4-3-9-16,3-4 11 0,4-4 1 0,4-3 12 0,2-5 12 16,5-4-12-16,2-6 9 0,4-5-1 0,1-2-14 0,4-6-1 0,4-6 6 15,0-4-4-15,3-5 4 0,1-4-6 0,2-2-29 0,1-5 22 0,0-4-12 16,0-1 7-16,-1-5 12 0,-1-1-12 0,-1-5 12 0,-2-1-18 16,-2-3-16-16,-1-4 18 0,-3-2 4 0,70-46 5 0,-27 5 0 0,-24 11-23 15,-22 12 2-15,-14 7-3 0,0-2-3 0,-3-1 12 0,-4-1 0 16,-3 0 13-16,-2 2-7 0,-2 0-21 0,-6 1 14 0,-2 1-6 0,-5-2 12 15,-3 0 16-15,-4 1-25 0,-3-2 14 0,-5 2-8 0,-2-1 7 0,-5 0 7 16,-5-2-20-16,-4-2 9 0,-4-1-3 0,-4-1-10 0,-5 2 32 16,-3-1-15-16,-5 0 5 0,-4-1-1 0,-5-1-11 0,-3 1 6 0,-4-2-22 15,-4 1 18-15,-1 1-6 0,-5-1 4 0,-3 2 8 0,-3 0-16 0,-4 0 0 16,-4 0-12-16,-2-1 7 0,-2 2-1 0,-4 2-19 0,-5 3 15 16,-3 4 5-16,-1 3-3 0,-3 5 16 0,-1 7-2 0,-3 5-8 0,-5 5 8 15,-2 7 4-15,-5 5-12 0,-2 7 14 0,-1 5-3 0,-5 7 1 0,2 5-6 16,-1 5 4-16,-2 3-8 0,2 7 2 0,-2 3 4 0,3 7-13 15,-1 6-1-15,2 6-17 0,2 4 14 0,2 7 4 0,3 5-1 0,4 4 16 16,5 5-16-16,1 2-5 0,4 1-6 0,5 4-7 0,3 0-22 16,7 2-12-16,5 0-32 0,3-1-47 0,6 1-43 0,5-1-80 0,6-2-106 15,6 2-189-15,4 0-237 0,6 0-24 0</inkml:trace>
-  <inkml:trace contextRef="#ctx0" brushRef="#br0" timeOffset="157228.06">14584 10723 1237 0,'-1'-1'383'0,"-1"0"-327"0,0 0-40 0,2 2-31 0,0 0-26 0,2 0-34 0,2 0-48 0,1 1-46 0,1 0-41 0,2 2-25 16,0-2-47-16,2-1-143 0</inkml:trace>
-  <inkml:trace contextRef="#ctx0" brushRef="#br0" timeOffset="157461.69">14771 10684 1026 0,'0'-1'161'0,"1"0"-36"16,0 0-34-16,1 1-18 0,1-1-11 0,1 2-15 0,1-1-7 16,1 0-10-16,1 1-7 0,2 0 2 0,1 0-8 0,0 0 2 0,2 0-2 15,-1 0 1-15,3-1 4 0,1 0-4 0,0 0 1 0,0 0 2 0,2 0-3 16,0 1 8-16,2 1 6 0,-1-1 2 0,2 0 9 0,1 0-4 15,-1-1 0-15,4 1-5 0,0 1-10 0,0 1-8 0,2 0-8 0,1 0-1 16,1 1-1-16,-1 1-3 0,2-3-9 0,-2 3 1 0,3 0-8 0,1 0 2 16,1 1 2-16,-1-1-10 0,0 1-8 0,-2 0-17 0,2 0-33 15,-1 0-42-15,3-1-56 0,-1-1-79 0,2-2-78 0,1 0-426 0</inkml:trace>
-  <inkml:trace contextRef="#ctx0" brushRef="#br0" timeOffset="158942.97">13430 14356 1564 0,'-2'-1'205'0,"-1"0"-86"0,0 0-24 15,1-1-13-15,-1 0-14 0,2 1-23 0,-1 0-21 0,1-1-15 16,1 2-4-16,0-1-3 0,0 1 2 0,0 0-10 0,0 0-5 0,0-1-8 16,1 1-5-16,0 0 0 0,-1 0-4 0,1 0 5 0,0 0-1 0,0 0 0 15,1 0 10-15,-1 0-1 0,2 1 8 0,1-1 4 0,0 1 0 16,0-1 7-16,0 0-2 0,1 0 6 0,-1 0 2 0,2 1 2 0,0 1 8 15,1-1 4-15,-1 1 5 0,2-1 10 0,-1-1 15 0,2 1 5 0,1 0 5 16,1 1-8-16,2 0-19 0,1 0 0 0,1 0-4 0,1 1-15 16,3 0 9-16,1 0-10 0,1 1-9 0,2-1 2 0,1-1 1 0,0 2-3 15,1-1-2-15,-1 0 0 0,1-1 2 0,-1 0 8 0,0-2 13 16,0 1 5-16,-1 0 2 0,1-2-3 0,-2 1-2 0,-2 0 2 0,0-1 2 16,0 0-7-16,-1-1-1 0,1 0 2 0,-1-1-2 0,-1 0 0 0,1 0 4 15,-1 1-7-15,0-2-1 0,-2 0-4 0,1 0-2 0,-2 0-3 16,1 0 2-16,-2-1-7 0,0 1 1 0,2-1-1 0,-2 0-4 0,-1 1 2 15,1-1-7-15,-2 0 5 0,0 1 1 0,-1 0 4 0,0-1-6 0,0 1-4 16,-1-2 7-16,1 1-7 0,-1 0 5 0,0-1-3 0,-1 1-4 16,0 0 2-16,0 0 0 0,-1 0-3 0,0 0 3 0,1 1 3 0,-1-1-5 15,-1-1 4-15,0 0-2 0,0 1-3 0,-2-2 4 0,1 0 1 16,-1-1-4-16,-1 0 1 0,-1-1-1 0,1 1-2 0,-2-1-1 0,1-2 7 16,-1 0-13-16,-1-3-6 0,0 1 1 0,-1-3-14 0,1 0 9 0,-1-1 5 15,0 0-3-15,0-3 4 0,-1 1-1 0,1 1 8 0,-1-1 1 16,-1-1-2-16,0 1 4 0,0 1 3 0,-2 1 2 0,-1 0 14 0,0 2 0 15,-1-3-6-15,-1 1 5 0,-2 0-12 0,-1 2 1 0,0-1 1 0,-3 0-11 16,0 1 4-16,-2 0-4 0,-1-1-8 0,-3 1 3 0,-1 1-3 16,0 0-6-16,-2 0 1 0,-2 0 1 0,1 0 3 0,-2 1 4 0,0-1-2 15,-1-1-2-15,-1 1-5 0,-2 1-5 0,-3-1 6 0,0 2 3 16,-2 1 6-16,2 1 4 0,-1 2-3 0,-1 2 4 0,1-1 0 0,-2 2 2 16,2 2 5-16,0 1-1 0,0 2 6 0,1 0-5 0,1 3-4 0,-2 1 4 15,3 1-9-15,-1 2-1 0,3 1 0 0,-1 2-1 0,2 1 1 16,-2 2-1-16,2 3 8 0,-1-1-1 0,2 2 6 0,1 1-2 0,2-2-5 15,0 2 3-15,0 2-1 0,1 0 6 0,2 0 6 0,-1 3-5 0,2 0 0 16,1 2-6-16,2 1 2 0,0 0 0 0,2 0-3 0,3 0 0 16,1 0 7-16,2-1 6 0,2 1 5 0,2 0-1 0,2-3-10 0,3 1-1 15,3-2-3-15,0-3 8 0,3 0-5 0,2-3 0 0,1 0 7 16,1-2-3-16,4-1 4 0,2-1-4 0,0-1 1 0,1-2 2 0,1 0 0 16,2-1 5-16,0-1-4 0,2-1-4 0,0-1-2 0,0-1-2 0,1-1 2 15,0 0 4-15,2-2-3 0,0-1-2 0,-2 0-1 0,0-1 0 16,-2 0 1-16,0 1 3 0,0-1-2 0,-2-1-2 0,1 0 2 0,-1 0 0 15,-2-1 2-15,1 0-7 0,-2-1 0 0,0 0 6 0,-1 1-7 0,0-2 2 16,-1 1-9-16,-3-2-5 0,0 1-3 0,0-1-2 0,-1 3 3 16,0-2-15-16,-2 0-6 0,-1 0-15 0,-1 0-1 0,0 1 4 0,-1 0 0 15,0-1-1-15,-1 1-16 0,-1-1-9 0,-1 0-23 0,0 0-20 16,0 0-22-16,-1 1-18 0,1-1-14 0,0-1-22 0,1 0-16 0,-1 0-39 16,0-1-15-16,1 2-26 0,2 0-116 0</inkml:trace>
-  <inkml:trace contextRef="#ctx0" brushRef="#br0" timeOffset="165408.97">12683 16275 963 0,'3'-2'130'0,"2"1"-43"0,1-2-6 16,1 1-2-16,2-2-19 0,-1 1-9 0,3 0-19 0,1-1-9 0,2 1 3 15,2-1-11-15,-1-1 8 0,3 1-8 0,1-1-8 0,0 2-2 16,1-1-15-16,2 0 5 0,0 0-1 0,3 1-4 0,0 0 7 0,1 0-5 16,2 0 6-16,1-1 3 0,1 0-1 0,0 0-2 0,3 0 2 0,-1 0 3 15,4 0 2-15,0-1 11 0,2 0-1 0,4 0 5 0,0 0 3 16,2-1-3-16,0 0 4 0,2-1-8 0,-1-2-2 0,0 1-8 0,2-1-3 15,0 1 5-15,-1-1-6 0,0 0 2 0,-2 1-2 0,2-1 0 16,-3-1 3-16,-1 1 2 0,0 0-2 0,-2 0-1 0,-1 1 4 0,0 0 4 16,-5 0 1-16,1 0 0 0,-3 1 1 0,1 1 0 0,-2-2 2 0,-1 2 7 15,-2-1-4-15,1 1-3 0,-3 0 4 0,0-1-9 0,-2 0 9 16,-1 0-4-16,0 1-5 0,-2-2-7 0,1 0 0 0,-1 0 7 0,-2-1 2 16,0-1-1-16,-1-1-2 0,-1-3-6 0,1 1-8 0,1-1 4 0,0 1 0 15,-1-1-1-15,-1-2 9 0,-1 1 8 0,-3-4 1 0,0 1 3 16,-2-1 10-16,-1 0 2 0,-2 0 3 0,-1-1 8 0,-2 1 1 0,-2-2-3 15,-2 0 2-15,-1 0-7 0,-3-1-7 0,0-1-1 0,-2-2-7 16,-2 0-4-16,-3 0-13 0,-2 1-4 0,-1 3-10 0,-2-1-7 0,-3 2 0 16,-4 1-9-16,0 1 4 0,-3-1-1 0,-1 2-1 0,-1 2 3 0,-3-1 4 15,0 1 5-15,-4 1 6 0,1 1-3 0,-3 1-7 0,0 0 7 16,-2 3 6-16,-2 1 9 0,0 1 4 0,-2 0-5 0,-2 2-8 0,1-1 1 16,-2 2 2-16,-2-1 2 0,-1 0 10 0,-2 1-3 0,2 0-2 0,0 0 4 15,-2 2-8-15,-3 0 1 0,1 2 2 0,-1 1-3 0,-1 1 9 16,1 1 2-16,0 1 6 0,1 1 1 0,2 1 1 0,-2 2-2 0,3 1-3 15,3 0-5-15,0 2-4 0,1 1 9 0,3 1-3 0,1 3 4 0,1-1-4 16,4 2-11-16,0 1-1 0,2 1-6 0,2 2-2 0,1 1 0 16,1 0-2-16,1 3 0 0,2 1 0 0,1 1 2 0,3 4 0 0,3 0 4 15,3 2-4-15,1 1-2 0,3 0 3 0,0 2 2 0,2-1 2 16,3 1-2-16,2-3-4 0,1 0-10 0,2-1 5 0,1 0 3 0,2-3 0 16,2 1 2-16,1-3 1 0,1-1-8 0,0-3 5 0,2-1 3 0,0-2-1 15,0-3-1-15,2 0-7 0,0-1 12 0,-1-2 1 0,1-3 1 16,1 1 5-16,-2-1-7 0,2 0 3 0,-1-1 8 0,2-2-8 0,0-3 4 15,1 0 1-15,2 0-5 0,-1-1 3 0,2-1-6 0,0 1-15 0,1-2 7 16,-1 1-8-16,-1-1-10 0,-1 0-7 0,2-1-30 0,-1 1-16 16,2-1-27-16,-2 0-35 0,-1-1-36 0,2 0-50 0,0-1-52 0,1 0-67 15,0 0-239-15</inkml:trace>
-  <inkml:trace contextRef="#ctx0" brushRef="#br0" timeOffset="172126.81">3557 6207 944 0,'-13'-1'49'0,"-1"2"25"16,-2 0 1-16,5 2-1 0,3-1-5 0,0 2-7 0,1 0-15 0,1 1-17 16,1 0-3-16,2 0-9 0,0 1 0 0,3 0-8 0,0 0-8 15,1 0 4-15,2 1 1 0,1 0 3 0,2 1 1 0,0-1-2 0,2 0 2 16,2 1 2-16,-1-1 0 0,4 1-2 0,0-1 1 0,1 1 2 16,1 0 0-16,-1-2 10 0,5 2-1 0,0-1 7 0,0 2 2 0,3-1 5 15,0 2 8-15,1 0-4 0,2-1 1 0,1 0-6 0,4 1-8 0,0 0-2 16,3-2 1-16,1 1-3 0,3 0-4 0,2-1-2 0,2 1 1 15,3-1-1-15,-1 0 0 0,1-2-7 0,4 1 1 0,0-1-2 0,2-1-3 16,1-1 6-16,1 0-2 0,2 0 2 0,1 0-4 0,1-1-3 0,3-1 3 16,0 1-1-16,3-1 4 0,2 0 0 0,0-1-1 0,3 0-2 15,2 0 1-15,-1 0-1 0,2-1 2 0,1 0-4 0,-2-1 2 0,2 0 2 16,0-1-2-16,1 1 2 0,1-1 1 0,2-1 0 0,0 0 6 16,1 0-2-16,1 0-4 0,-1 0 0 0,1 0-4 0,2-1-5 0,0 0 2 15,1-1 3-15,-1 1-10 0,3-1 13 0,1 2-2 0,-1-1-4 0,2 1 1 16,-2 0-7-16,0 0-4 0,1 1 5 0,-2 0-2 0,1 1 4 15,0 0 3-15,-2 1-2 0,2-1 0 0,0 0 2 0,-1-2-2 0,3-1-2 16,2-3 4-16,1 0-3 0,1-2-7 0,-1-1 3 0,1-2-4 0,-1-2-5 16,0-2 3-16,-2-3 8 0,-1 1 0 0,-3-5 10 0,1 0-3 15,-3-4-10-15,0-3-1 0,1-2-1 0,-3-2-3 0,2-4-1 0,0-2 0 16,-2-3-9-16,-1-3 1 0,0 0-3 0,-1-2-3 0,1-1 8 16,-2-1-2-16,-2-1 10 0,0 1 5 0,-4-1 2 0,-3 1 5 0,-3 1-2 15,-5 0-3-15,-2 1-6 0,-2 0 3 0,-3-1 1 0,-2 0 1 0,-4 0 8 16,-3 3-1-16,-4 0-6 0,-4 1 7 0,-3 0-4 0,-3 1 3 15,-2 0 3-15,-5 0-3 0,-4 3 2 0,-5 1-7 0,-4 0 4 0,-5 0-10 16,-4 0 2-16,-5-2-5 0,-3 2-1 0,-7 1-1 0,-4 0 0 16,-4 1 0-16,-5-1-10 0,-4 2 4 0,-5 1-2 0,-5 1 0 0,-6 1 3 15,-6 0 6-15,-5 1 1 0,-6 3-2 0,-4-1 6 0,-7 2-10 0,-5 1-5 16,-5 2 5-16,-6 2 2 0,-4 2 3 0,-4 2 6 0,-3 3-3 16,-2 3-2-16,-4 3 3 0,-4 3 0 0,-2 3 5 0,-2 3 3 0,0 2-2 15,-1 1 8-15,0 4-2 0,-2 2 5 0,1 2-1 0,-3 3-3 0,1 2-1 16,-2 2-3-16,0 3 4 0,3 0-5 0,0 1 2 0,0 2 4 15,0 2-3-15,-3 1 3 0,1 3-2 0,-1 1-2 0,0 3-1 0,1 2 2 16,0 1-1-16,1 3-1 0,-1 2 14 0,0 3 2 0,-1 3 8 16,1 0-2-16,2 2-5 0,-1 5 4 0,0 2-1 0,0 1 7 0,0 3 8 15,2 0-3-15,1 2-1 0,2 4 7 0,2 2-4 0,2 2 7 0,1 2 8 16,4 3-6-16,3 1 0 0,4 2-5 0,2 0-9 0,8 0-7 16,4 1-6-16,7 1-3 0,7-2-1 0,6 2 1 0,8-1-2 0,7-1-6 15,6 1-4-15,4-1-9 0,9 0 11 0,7-2 0 0,6-2 0 0,7 1 2 16,5-1-20-16,5-1-4 0,6-1-7 0,5-2-25 0,6 0 10 15,4 0-27-15,7-1-31 0,7-1-24 0,6 1-77 0,5-1-80 0,6-1-140 16,8 1-300-16,2-3-38 0</inkml:trace>
-  <inkml:trace contextRef="#ctx0" brushRef="#br0" timeOffset="173328.26">13685 14145 472 0,'-4'0'62'0,"0"0"-17"16,-2-1-4-16,2 1-9 0,1 0-12 0,-1-1-6 0,1 0-1 0,0-1 5 15,0 0-4-15,1 1 8 0,-1-1-4 0,0 0-1 0,0 0 4 16,-1-1-3-16,1 0 4 0,0 1 5 0,1-1 4 0,-1 2 9 0,0-1 13 15,0 0 2-15,0 0 4 0,-1 1-2 0,1-1-5 0,0 2-2 0,0-1-3 16,0 0-9-16,1 2-5 0,-2 0-10 0,1 0-10 0,0 0-2 16,0 1-6-16,0-1-7 0,0 1 5 0,1 1-3 0,-2-1 0 0,1 1 5 15,1-1-3-15,-1-1 3 0,1 0 6 0,0 0-1 0,0-1 4 16,0 1-2-16,1-1-1 0,-1-1 0 0,1 1 0 0,0-1-2 0,0 0-4 16,-1 0 3-16,0 0-2 0,1-1 4 0,0 2 0 0,0-1 0 0,0 0 2 15,-1-1-3-15,1 1 1 0,-1 1-1 0,0-1 3 0,-1 1-3 16,1-1-1-16,0 1 0 0,-1 0-4 0,1 0-1 0,-1 0-1 0,0 1-4 15,0 0 0-15,0 0 1 0,1 0-2 0,0-1-1 0,0 1 2 0,0 0-7 16,0 0 1-16,-1 1-1 0,2-1-2 0,-1 0 3 0,0 0-2 16,1-1 0-16,-1 1 0 0,1 0-1 0,0-1 1 0,1 0 3 0,0 0-2 15,0 0 0-15,0 0 0 0,0 0-2 0,0 0 2 0,1 0-6 16,-1 1 5-16,0-1-6 0,1 1-2 0,0 0-6 0,0 0-3 0,1 0-8 16,-1 1-6-16,1 1-12 0,1 0-23 0,0 2-26 0,0-1-35 0,-2 1-25 15,3 0-35-15,1 0-211 0</inkml:trace>
-  <inkml:trace contextRef="#ctx0" brushRef="#br0" timeOffset="176527.6">18448 11522 805 0,'-7'-6'59'16,"-2"1"-24"-16,-2 0-8 0,3 0-8 0,2 1-7 0,0 1-2 0,0 0-6 15,0 1 5-15,1 0 2 0,-1 0-2 0,0 1-3 0,-1 0 0 0,0 1-7 16,-1 1-3-16,-1 0 2 0,-1 2-3 0,2 0 4 0,-3 1 2 0,0 1-2 16,0-1 3-16,0 1-2 0,0-2 2 0,3 0 4 0,-2 0-5 15,1 0 5-15,1-1 3 0,-1 0 3 0,0-1 12 0,1 0 17 0,1-1 14 16,-1-1 24-16,1 0 16 0,-1-1 6 0,1-1 9 0,1 1-11 16,1-1-7-16,1 0-7 0,0 0-7 0,1 1-2 0,0-1-6 0,1-1-12 15,2 0-10-15,-2 1-13 0,1-1-7 0,1 1-5 0,1 0-2 0,0 0-6 16,0-1-3-16,-1 0 1 0,1 0-1 0,2 1 2 0,-1-1-1 15,1 0-2-15,0 0 4 0,1-1-1 0,-1 2-1 0,3-2-4 0,0 0-13 16,1 1-4-16,2-1 2 0,0 0 6 0,0-2 6 0,2 2 6 0,0-2 1 16,0 0-2-16,1 0 1 0,0-1-6 0,0 0-1 0,2-1-4 15,0-1 4-15,0 0 1 0,-1-1-3 0,1 1 3 0,-2-1-3 0,1 0 1 16,0 0 3-16,-1 0 0 0,1 0-4 0,0 2 3 0,-1-2 5 16,-1 1 0-16,0 1 0 0,0-1-2 0,0 1-3 0,-1 1 2 0,-2-1 2 15,1 1 1-15,-3 0-5 0,2-1 1 0,-2 0-1 0,2 0-4 0,0 0 4 16,0-2-3-16,3 0-4 0,-1-2-4 0,1-2 3 0,2 0-1 15,1-1 5-15,1-1-2 0,0-1-8 0,2 1 3 0,0-1-3 0,0 1 0 16,-2 1 3-16,0 1-3 0,0-1 5 0,-1 1 3 0,-3 2 3 0,0-1 4 16,-1 1-4-16,0 2-5 0,-3-1 5 0,0 3-4 0,0-1 1 15,-3 1 5-15,0 1-9 0,1 1 4 0,-2 0-3 0,0 1-1 0,0-1 5 16,-2 2 10-16,1 1-12 0,-1 0 12 0,0 0-3 0,-1 1-7 16,0-1 7-16,0 1-11 0,0 1 1 0,0-1 4 0,0 1 0 0,0 0-2 15,0 1-2-15,0-1-1 0,-1 1 3 0,1 0 0 0,0 0-3 0,0 0-1 16,0 0 3-16,0 0-1 0,-1 1 5 0,1-1-6 0,0 0 5 15,0 0-4-15,0 1-2 0,-1 0 8 0,1-1-7 0,0 1 3 0,-1-1-1 16,1 1-4-16,0 0 5 0,0 0 1 0,1 0-2 0,-1 0 1 0,-1-1-2 16,1 1-1-16,0 0 3 0,1 0-2 0,-1 0 1 0,1 0-5 15,-1 0 9-15,1 1-6 0,-1-1-1 0,1 0 6 0,0 0-5 0,0 0 6 16,0 0-1-16,-1 0-2 0,0 0 1 0,1 0-1 0,-1-1 5 16,0 1-2-16,0 0-5 0,0-1 2 0,0 1-1 0,-1-1-2 0,0 0 7 15,0 1-2-15,0-1-2 0,0 0 2 0,-1 0-9 0,1 0 4 0,-1 0 0 16,0 0-7-16,1 0 9 0,0 0-7 0,-1 0 3 0,0 1 4 15,0-1-9-15,0 0 9 0,1 0-7 0,0 0 0 0,-1 0 5 0,0 1-3 16,2-1 3-16,-2 0-4 0,1 0 6 0,-2 0-1 0,1-1 2 0,1 1 0 16,-1-1-4-16,0 1 2 0,1 0 2 0,-1 0 0 0,1 0-1 15,0 0-3-15,-1 1-2 0,1 0 5 0,0-1 1 0,-1 1-2 0,2-1-4 16,-1 1 1-16,1 1 2 0,-1-1 0 0,1 1-2 0,0 0-1 16,-1 0 2-16,1 0-2 0,0 1 1 0,0 1 0 0,0-2 1 0,0 2 1 15,1-1 0-15,-1-1-1 0,1 2 1 0,0 0 2 0,-1-1 1 0,0 0-2 16,1 0-2-16,0 0 2 0,0 1-7 0,0-1-3 0,0 1-2 15,0-2-2-15,0 2-1 0,-1-1-2 0,0 0-8 0,0 1-7 0,0 1-5 16,0-1-20-16,0 1-29 0,0 0-36 0,0 0-38 0,0 1-31 0,-1-1-44 16,1 1-47-16,-1 2-61 0,0 1-192 0</inkml:trace>
-  <inkml:trace contextRef="#ctx0" brushRef="#br0" timeOffset="189561.31">17637 6812 1501 0,'3'4'33'0,"3"1"-41"0,3 0-15 0,5 0 7 0,2-1-4 16,2-1-4-16,1-1-1 0,4-1-13 0,2-1-12 0,2-2-24 0,2 0-36 16,0-1-31-16,0-1-21 0,0-1-5 0,3 0 20 0,-1-1 28 0,3 0 33 15,-1 0 34-15,2-2 24 0,-1 0 24 0,1-1 19 0,1 1 20 16,-1 0 30-16,3-1 20 0,-1 0 17 0,1-3 3 0,3 0-17 0,0-2-14 16,2-1-16-16,3 1-11 0,-1-3-6 0,2-1-11 0,1 1-5 15,2-3-9-15,1 0-7 0,0-1-3 0,3-1-1 0,-1-2-3 0,0 0 1 16,2-1 3-16,-1-1-3 0,1 0 3 0,-1 0-2 0,-2-1-2 0,-2-1 0 15,0 0-1-15,-1-2 6 0,0 1 1 0,-3-2 6 0,0 2 4 16,-3-2 1-16,0 0 1 0,-1-3-1 0,-2 2-4 0,1-3-2 0,-4 2 3 16,-3 0-2-16,1 0 4 0,-3 0-1 0,-1 0 1 0,-2-1 0 0,-2 0 6 15,-3 1-1-15,-1-2-1 0,-2 1 3 0,-4-2-2 0,-2 1-2 16,-3 1 5-16,-2-1-2 0,-3 1 2 0,-3-3 6 0,-3 1 0 0,-4 0 2 16,-2 2-6-16,-4 1 1 0,-2 0-3 0,-4 1 5 0,-4 1 3 15,-5 0-3-15,-3 1-1 0,-4 4-4 0,-2-1-5 0,-5 1 0 0,-2 2-1 16,-3 1-1-16,-6 2 5 0,-1 2 4 0,-4 2 7 0,-3 2 10 0,-2 2 1 15,-1 2 3-15,-5 1-5 0,-1 4-3 0,-2 2 4 0,-2 4-5 16,-2 4 6-16,-2 4 3 0,-3 5-7 0,-3 3 0 0,-1 6 6 0,-3 3-14 16,-1 4 1-16,-1 5-8 0,-2 4-12 0,1 3-1 0,-3 7-2 0,2 2 4 15,2 1-5-15,1 2-6 0,4-1-10 0,2 0-26 0,3-2-35 16,5-1-56-16,2-3-92 0,6-1-92 0,3-2-116 0,3 0-563 0</inkml:trace>
-  <inkml:trace contextRef="#ctx0" brushRef="#br0" timeOffset="-211217.87">28962 9161 344 0,'35'6'12'0,"8"2"-13"15,15 2-5-15,0 0 2 0,-1-1 1 0,3 1 3 0,2 0 2 0,5-1-1 16,2 0-1-16,3-1 1 0,1-1-2 0,3 1 0 0,1-1-1 16,0 0 2-16,-1 0-1 0,-1-1 2 0,-1 0-1 0,-1-2-2 0,-3 0 2 15,0-1 0-15,-1-1-1 0,1-1 2 0,-1-1-1 0,0-1 0 16,-2 0 1-16,2-3 0 0,0 0 1 0,-1-3-6 0,2 1-12 0,1-2-11 15,2 0-53-15,-1-2-99 0</inkml:trace>
-  <inkml:trace contextRef="#ctx0" brushRef="#br0" timeOffset="-204967.09">25427 13987 134 0,'-2'5'83'0,"1"1"-54"0,-1 1-6 15,0 0 2-15,1-2-2 0,0 0 4 0,0 1 8 0,0 0 9 0,0-1 11 16,0 2 9-16,0-2 12 0,1 1 13 0,-1-2 17 0,2-1 18 0,-2 0 20 16,2-1 22-16,-1-1 18 0,0 0 11 0,1-2 1 0,0 0-10 15,1-1-14-15,-1 0-25 0,3-3-19 0,-1 0-18 0,1-3-13 0,0-2-6 16,-2-1-18-16,1-1-8 0,1 0-11 0,0-2-11 0,-1-1-9 16,0-2-8-16,1 0-16 0,-2-1-7 0,1 0 15 0,-2 1-4 0,0-2 8 15,0 0 8-15,-1-1-14 0,0-2 1 0,-2 1-1 0,1-1-2 0,-3-1 2 16,0-1-1-16,-2 1 1 0,1-1-2 0,-4 0-3 0,2-2-6 15,-1 0 2-15,0 0 0 0,2-1 1 0,0 3-3 0,1 1-5 0,-1 2 4 16,1 3-6-16,1 1 4 0,0 3-2 0,0 2-8 0,2 3 12 0,1 4-4 16,-1 2 4-16,1 2-8 0,0 3-5 0,0 1 9 0,0 2-5 15,1 4 5-15,-1 6 0 0,2 3-6 0,0 6 3 0,0 6-3 0,1 5 1 16,-1 6-4-16,1 2 2 0,-1 3-6 0,1 1 3 0,-1 3-6 16,-1 1-9-16,1 1 14 0,1 0-1 0,0-2 7 0,1-2 17 0,1-3-12 15,0-4 0-15,2-4 2 0,0-1-6 0,2-3 9 0,2-1-1 0,-1-4-4 16,3-2-4-16,-1-2-1 0,0-3 0 0,-2 0 3 0,0-2-1 15,0-3-8-15,-1-1-3 0,-1-2-12 0,0-2-11 0,-2-3-13 0,0-2-17 16,-3-2-24-16,1-2-28 0,-2-1-33 0,-1-3-44 0,0-1-66 0,-1-3-79 16,-1 0-35-16,-1-4 0 0,-2-3 47 0,0-3 84 0,-1-2-130 15</inkml:trace>
-  <inkml:trace contextRef="#ctx0" brushRef="#br0" timeOffset="-204384.09">25514 14006 416 0,'5'-6'267'0,"-2"1"-92"16,3-1 5-16,0 3 8 0,0 0-1 0,-1 1-6 0,1 1-23 15,0 1-15-15,-1 0-17 0,0 2-17 0,0 0-12 0,0 0-11 0,0 2-13 16,-1 1-16-16,0 0-11 0,-1 1-13 0,1 0-6 0,-1 0-10 0,0 0-6 16,-1 1-4-16,1 0 2 0,-1 0-2 0,-1-1-4 0,0 1 2 15,-1-1-4-15,-1 1 1 0,1-1-4 0,-1 1 10 0,0 1-3 0,-1 0 3 16,-1 0 2-16,0 2-10 0,1 0-2 0,-1 0 5 0,0 3 0 16,1 0-1-16,-1 1-4 0,0 1-2 0,1 0 5 0,0 2 4 0,0 0 3 15,0-1-3-15,0 0-4 0,1 1-1 0,0-1-1 0,2-1 9 0,-1-1-8 16,2 0 2-16,1-1 2 0,-1-1-2 0,0-1 4 0,0 0 1 15,2-1-4-15,0-2 4 0,1-1-2 0,2-1 3 0,-1-1 6 0,0 0-2 16,1-3 3-16,0 0 3 0,0-1 0 0,-1-2 0 16,2 0 2-16,0 0 5 0,0-2-5 0,1-1 2 0,-1 0-6 0,0-1-5 0,0-1 9 15,-2 0-3-15,2-1-2 0,-1 0 2 0,-1-2-3 0,0 0 1 0,-1 0 1 16,1 0-2-16,0-1-4 0,-1 0 0 0,1 0-1 0,-2 1-4 16,0 1-5-16,1 0 0 0,1 1-1 0,0 1-5 0,0 2-1 0,0 1 2 15,-1 2 2-15,0 0 4 0,0 1-7 0,-1 1 0 0,0 1 1 0,1 1 0 16,-3 1 3-16,3 0-1 0,0 2 1 0,-1 0-6 0,1 1 2 15,0-1 1-15,0 1 0 0,0-1 3 0,0 0-3 0,0 0 4 0,0 0 2 16,0 0 3-16,0-1 3 0,1-1-9 0,-1 0 2 0,2 0 3 0,-1-3 1 16,-1 1-3-16,1-1-2 0,1-1-3 0,0-1 8 0,0-1-1 15,0 1 7-15,1-3-1 0,1 0-6 0,-2-1 4 0,2 0-3 0,0 0-1 16,-1-1-3-16,1 0 2 0,-3 0 0 0,1 0 5 0,0 0 7 16,-1 0-1-16,0 0 0 0,-1-2-6 0,0 1 5 0,-2 0-2 0,-1-1 4 15,-1 1 0-15,-2-1-10 0,-1 0 5 0,-1 1-6 0,-2-1-1 0,-1-1-9 16,-2 1-7-16,0 0-4 0,-2 1 1 0,0 1 3 0,1 2 3 15,-2 1 4-15,-1 1-3 0,0 2 5 0,0 1 1 0,1 1 4 0,1 2 0 16,0 1 2-16,1 0 0 0,0 2-4 0,2 0 6 0,1 1-4 0,0-1 1 16,3 1-4-16,0-1-1 0,3 2 1 0,0 0-4 0,3-1 7 15,0 1 2-15,3 0 1 0,1-2 4 0,2 1-3 0,1-2-3 0,0 1 1 16,2-1 1-16,1 0-1 0,1 0-2 0,1-1-5 0,2 0 3 16,-1 0-10-16,2 0 2 0,0-1-2 0,0-1-11 0,-1 0-2 0,-1-1-20 15,-1 1-26-15,-1-2-29 0,-1 0-33 0,0-1-51 0,-1-1-61 0,0-1-73 16,-1-1-86-16,0-1-52 0,0-2 84 0,-1-2-148 0</inkml:trace>
-  <inkml:trace contextRef="#ctx0" brushRef="#br0" timeOffset="-204183.09">26410 13691 2055 0,'-1'-13'392'0,"2"1"-266"0,0-3-6 0,1 6-35 0,0 2 3 15,1 3-2-15,-1 1-21 0,1 2 2 0,0 2-11 0,-1 2-7 0,1 1 11 16,-1 2-11-16,2 1-4 0,-2 4-6 0,2 3-17 0,-1 3-2 15,0 2-5-15,1 4-9 0,-1 2 5 0,0 1-4 0,0 4-3 0,0 1-1 16,0 3-12-16,1-1 20 0,-1 2-7 0,1 0-6 0,0 0 0 0,2 2-22 16,0-3-14-16,-1 1-22 0,3-2-21 0,0 2-27 0,1-2-23 15,0 0-20-15,2-3-25 0,0-1-98 0,-1-2-27 0,2 0-25 0,0 0 0 16,0 0 70-16,0-4 23 0,-2-2 18 0,2-2 28 0,-2-4 40 16,-1-3-139-16</inkml:trace>
-  <inkml:trace contextRef="#ctx0" brushRef="#br0" timeOffset="-204001.09">26319 14211 2212 0,'-5'1'408'15,"-2"1"-214"-15,-1 1-43 0,3 0-56 0,3 0-20 0,1-1-9 0,2 0-21 16,1 1-15-16,2-1-10 0,2-1-15 0,1 1-1 0,0-1-4 0,4 0-9 16,0-1-13-16,2-1-13 0,0-2-15 0,0 0-6 0,2-3-14 15,2-1-14-15,0-2-17 0,-1 0-24 0,2 0-35 0,0-1-38 0,0-1-36 16,1-1-23-16,0 0-21 0,1-1 0 0,-1 0-15 0,1 0 3 15,1-1 66-15,-1-1-190 0</inkml:trace>
-  <inkml:trace contextRef="#ctx0" brushRef="#br0" timeOffset="-203767.09">27145 13530 2729 0,'-4'-6'160'0,"2"1"-43"0,0-2-32 0,2 2-24 16,1 2-1-16,1 0-12 0,-1 1-19 0,0 2 1 0,1 0-5 15,-2 3-1-15,1 1 5 0,0 2 0 0,-1 3 1 0,0 1-6 0,-1 5-2 16,-1 4-11-16,0 3 4 0,1 3-8 0,-2 4 4 0,1 1 0 0,-1 3-7 16,0 2 0-16,0 2 0 0,0 1-1 0,1 0-10 0,0 1 12 15,1 1-1-15,-1-1-11 0,1 0 7 0,2-3-23 0,0-1-6 0,1 0-10 16,1-3-7-16,0 2-12 0,2-2 0 0,0-1-5 0,0-3-6 0,2-2 2 16,0-3-6-16,1-1 1 0,-1-1-10 0,2-3-27 0,0 2 2 15,0-2-4-15,1-1-3 0,1-2-18 0,0-1-50 0,-2-1-59 0,2-2-81 16,-1-2-47-16,-1-2-5 0,1-1 73 0,-2-2-114 0</inkml:trace>
-  <inkml:trace contextRef="#ctx0" brushRef="#br0" timeOffset="-203300.09">26941 14155 2752 0,'-7'-5'183'0,"0"1"-37"0,0-2-38 0,3 1-33 15,4 3-11-15,1-1-22 0,0 1-13 0,2 0-7 0,1 1-17 0,0 1 4 16,3 0-5-16,1 0 3 0,2 0-1 0,0-1-4 0,2 1 0 15,0 0-1-15,2 0-1 0,1-1-1 0,0-1-18 0,1-1-14 0,2 0-8 16,1 0-14-16,-1-1-5 0,0 1-20 0,1-1-6 0,0 0 4 0,-2 1 0 16,1 1 8-16,-3 0 11 0,1 1 2 0,-2-1 3 0,0 2 7 15,-1 0 5-15,-1 0 12 0,0 0 8 0,-1 2 7 0,1 0 2 0,0 1 8 16,-1 0 13-16,-1 0 3 0,-1 0 8 0,1 0-1 0,-1 1 3 0,0-1 8 16,0 1 2-16,-1 0 7 0,1-1 1 0,-3 1 0 0,1 1-1 15,0 0 1-15,-2 1-2 0,0 1-5 0,1-1-5 0,-1 2-3 0,0-1-7 16,1 1-1-16,-1 1 3 0,1-1-5 0,-1 1-2 0,1 1 8 0,0-1-5 15,1-1 3-15,0 0 3 0,1-1 0 0,0-1-3 0,1-2 10 16,0 1 5-16,3-1-7 0,0 0 11 0,1-2-5 0,1 0-5 0,-3-1 7 16,2-1 7-16,0-1 4 0,0-1-5 0,-1-2-2 0,0 0-3 15,0-1-4-15,1 0 6 0,-2-2-15 0,1-2-9 0,-3-1 0 0,0-1-5 16,-1 0 7-16,-1 0-7 0,-2-1-2 0,-2 1 3 0,0-2-1 0,-3 1 3 16,0 0 3-16,-3 1 1 0,-1-1-8 0,-2 1-1 0,-2 0 2 15,-2 0-8-15,-1 2 6 0,-2-2-2 0,-1-1-4 0,0 2 6 0,0 0-4 16,1 3-7-16,-2 2 5 0,1 2-7 0,-1 2 2 0,2 1 16 0,-2 1-8 15,2 1 1-15,0 3 3 0,1 1-5 0,1 2 2 0,0 2-1 16,1 1-9-16,2 1 1 0,2-2 5 0,1 1-8 0,2 1 1 0,1-1 0 16,2 0-6-16,1 1 3 0,2-1-10 0,2 1-5 0,1 0-5 15,2-1-4-15,0 0-1 0,1-1-4 0,2 1 1 0,0-1-5 0,2 0-5 16,1-1-15-16,2 0-15 0,-1-2-21 0,1 1-27 0,1-2-48 0,0 1-56 16,-1-2-81-16,3 0-73 0,0 0-30 0,0-1 35 0,2-1-174 15</inkml:trace>
-  <inkml:trace contextRef="#ctx0" brushRef="#br0" timeOffset="-202800.1">28192 14345 2221 0,'-2'0'1075'0,"1"1"-919"0,0-1-47 0,3 0-45 0,1 0-9 16,2 0 0-16,1 1-2 0,1 0-8 0,2 1-6 0,1 0-2 0,1 1 0 15,1-1 8-15,1 1 3 0,0 0-2 0,2 0-36 0,1-1-10 16,1 0 0-16,-1 0 0 0,2-1 0 0,0 0 0 0,0-1 0 0,2 0 0 15,-1-1 0-15,-1 0 0 0,0 0 0 0,-1 0 0 0,0 0 0 16,-3-1 0-16,2 0 0 0,-3 1 0 0,-1-1 0 0,-1 0 0 0,-1 1 0 16,0 0 0-16,-2 1 0 0,-1-1 0 0,-1 0 0 0,-1 1 0 0,-1-1 0 15,-1 2 0-15,0-1 0 0,-2-1 0 0,-1 1 0 0,0 0 0 16,-1 0 0-16,-1-1-70 0,1 0-58 0,-2 0-46 0,0-2-49 0,-1 0-65 16,0 0-78-16,-1-2-123 0,1 0-145 0,1-1 11 0,0-1-173 0</inkml:trace>
-  <inkml:trace contextRef="#ctx0" brushRef="#br0" timeOffset="-202383.1">28810 14025 3542 0,'2'-5'141'0,"1"-1"-59"0,3-1-53 16,2 0-29-16,1-1 2 0,2-1 6 0,0 0-8 0,0 0 2 0,-1 1 0 15,0 1-8-15,-2 0 12 0,0 0-4 0,0 1-18 0,0 1-3 16,0 0-4-16,0 1 10 0,0 0 15 0,0 0-1 0,2 1-2 0,-1 1-7 15,1 1 4-15,0 1 2 0,0 0 4 0,1 2 0 0,1 1-2 0,-1 0 8 16,1 3 16-16,-3 0 11 0,1 0-6 0,-1 2-6 0,-2 0-23 16,0 0-4-16,0 3 6 0,-1 0 0 0,-1 1-11 0,-1 0-3 0,-1 0-4 15,-2 0 1-15,1 2 13 0,-2 0-6 0,0-1 5 0,-1 0-5 16,-1-1 0-16,-2 1 6 0,0 0-5 0,-2 0 9 0,0-2-6 0,0 2 6 16,-2 0 1-16,1 0 5 0,-1 0 2 0,-1 0 3 0,0 1 6 15,0-1 5-15,0 0 1 0,2-2 2 0,0-2 2 0,2 1-1 0,1-2 3 16,2 0-9-16,1-2 2 0,2 0-6 0,0-1 0 0,2-1 6 0,1-1-12 15,1 0-12-15,1-1 0 0,2 0 0 0,2-1 0 0,2-1 0 16,1 0 0-16,1 1 0 0,0-1 0 0,2-1 0 0,1 1 0 0,2-2 0 16,1 1 0-16,0-1 0 0,2-1 0 0,0 1 0 0,0-1 0 0,0 0 0 15,0 0 0-15,-2 1 0 0,0-1 0 0,0 1 0 0,0-1 0 16,0 0 0-16,-1 1 0 0,-1 0 0 0,-1 0 0 0,0-2 0 0,-1 2 0 16,-2-2 0-16,0 0 0 0,-1 1 0 0,-2-1 0 0,-2 1 0 0,1 0-100 15,-1-1-31-15,-2 0-25 0,-1 0-32 0,-2 0-49 0,-1 0-87 16,-1 0-136-16,-2-1-163 0,-1 0-41 0,-2-1 126 0,-1 0-2 0</inkml:trace>
-  <inkml:trace contextRef="#ctx0" brushRef="#br0" timeOffset="-201683.1">27373 12423 897 0,'-86'6'151'0,"-9"4"-123"16,-23 4-28-16,10 3-5 0,12 3-1 0,-1 5 4 0,-1 6 8 0,-1 4 10 15,1 3 19-15,2 7 23 0,3 1 13 0,3 3 9 0,3 3-5 16,2 2-8-16,5 3 6 0,2 1 5 0,6 2 1 0,3 0-4 0,4 2-9 16,4 1-6-16,6 1-9 0,2 1-7 0,4 0-2 0,4 1-9 0,4 1 1 15,6-2-7-15,2 0-2 0,5-1-5 0,3-2-9 0,4 2 13 0,5 0-4 16,3 0 2-16,5-1 12 0,4-1-2 0,6-2 8 0,4-3 2 15,4-2-4-15,6-3 2 0,3-2-4 0,6-1-6 0,2 0-1 16,7-2-15-16,2-1-12 0,7-1-2 0,3 0-5 0,3-1-5 0,6-2-6 16,0 1-3-16,4-1-12 0,5-1-8 0,1-3-1 0,5 0-8 0,2-2-2 15,4 1 2-15,0-2 1 0,4-1 7 0,2-3 22 0,1-1 12 0,5-2 5 16,0 0 8-16,4-2-4 0,0-1-10 0,3 0 0 0,0-2 1 16,2 1-7-16,2-1 1 0,1-1-8 0,1 1-14 0,0 0-12 0,0-1-10 15,1-1 6-15,0-2 8 0,-1-1 8 0,1-4 18 0,-2-4 17 16,-1-1 19-16,-1-4 27 0,-3-3 17 0,2-3 13 0,-1-4 11 0,-1-3-4 15,0-1 9-15,0-5-2 0,-2-4-2 0,1-3-10 0,0-4-17 0,-1-2-18 16,-1-3-10-16,-2 0-8 0,1-3-6 0,-4-3-9 0,-1-2-11 16,-4-2 4-16,-5-1-13 0,-2 0 6 0,-5-1 3 0,-2-2 3 0,-4 0 12 15,-4-2 0-15,-2 0 2 0,-4-3-1 0,-3-1 2 0,-2 1 1 0,-2-2-2 16,-5 0-4-16,-1-1-6 0,-2-3-7 0,-6 2-2 0,-1-1-11 16,-7 0-4-16,-3 0-2 0,-5-1-2 0,-5 0 9 0,-2 0 2 0,-4 0 0 15,-4 0-3-15,-4 0 0 0,-3 0-10 0,-4-3 5 0,-4 0-2 16,-6 1-6-16,-5-2 7 0,-5 1 3 0,-7-3 8 0,-5 1 6 0,-4-1 12 15,-4 0 6-15,-6 0 3 0,-5-1 20 0,-5 1 11 0,-7-2 4 0,-3 3 10 16,-6-1-17-16,-2-1-6 0,-5 0-7 0,-3 0-13 0,-3 0-8 16,-2 2-33-16,-3 2 6 0,-2 2-10 0,0 1-5 0,-3 6 14 0,3 2-29 15,1 6-3-15,0 6-10 0,3 5-12 0,0 8-9 0,3 3-19 0,-1 7-25 16,2 5-28-16,-1 6-60 0,0 8-83 0,-1 5-90 0,-2 6-54 16,-1 3-86-16,-4 4 145 0</inkml:trace>
-  <inkml:trace contextRef="#ctx0" brushRef="#br0" timeOffset="-59225.5">4850 4745 1 0,'-11'-14'62'0,"-3"0"275"0,-4 1 280 0,5 11-500 0,2 2-105 0,2 2-4 0,3 0-5 0,1 1-4 15,0 0 1-15,2 0 0 0,-1 0-1 0,0 1-2 0,2 0-4 16,0 1-2-16,1 1-3 0,2 3-7 0,2 0-2 0,1 1 2 0,1-1 5 16,1 0 7-16,1 1 4 0,1-2-1 0,1 0 4 0,0 1 1 0,3-1 10 15,2 0 6-15,2 0 6 0,1 0 4 0,3-2 2 0,3 2 2 16,2 1-1-16,2-1-2 0,0 0-6 0,4 1-1 0,-1-1-6 0,4 0 3 15,0 0-2-15,2 1-1 0,1 1-1 0,2 0 1 0,3 1 0 0,1-2 1 16,1 1 4-16,3 0 0 0,-2 0 6 0,3 0 4 0,1-1 2 16,4-1 13-16,1 0 6 0,3 0 6 0,1 2 7 0,1 1-4 0,5 0-5 15,1 1-5-15,3-2-2 0,1 1-7 0,2 0-5 0,3 0-6 0,2 0-3 16,0 0 3-16,6 0 1 0,0 2-5 0,1-1-4 0,2-1-6 16,-1 0-6-16,0-1-4 0,1 2 1 0,0 0-4 0,1 1 5 0,-2 0 2 15,1-1 1-15,0 3 5 0,-2 1 7 0,2 0-2 0,-3 0 6 0,1 2 5 16,0-1 3-16,0 0 1 0,-1-1 0 0,-2 0-11 0,1 1-10 15,-2 1-2-15,-1-1-8 0,0 3-1 0,-1 0-4 0,-2 1 2 0,-1 0-2 16,-2 2-9-16,0-1-20 0,-1 1-67 0,-1-1-106 0,0 2-157 16,0-2-132-16,-1 1 11 0,1-2-174 0</inkml:trace>
-</inkml:ink>
-</file>
-
-<file path=ppt/ink/ink8.xml><?xml version="1.0" encoding="utf-8"?>
-<inkml:ink xmlns:inkml="http://www.w3.org/2003/InkML">
-  <inkml:definitions>
-    <inkml:context xml:id="ctx0">
-      <inkml:inkSource xml:id="inkSrc0">
-        <inkml:traceFormat>
-          <inkml:channel name="X" type="integer" max="34422" units="cm"/>
-          <inkml:channel name="Y" type="integer" max="19362" units="cm"/>
-          <inkml:channel name="F" type="integer" max="4095" units="dev"/>
-          <inkml:channel name="T" type="integer" max="2.14748E9" units="dev"/>
-        </inkml:traceFormat>
-        <inkml:channelProperties>
-          <inkml:channelProperty channel="X" name="resolution" value="1000.05811" units="1/cm"/>
-          <inkml:channelProperty channel="Y" name="resolution" value="1000.10333" units="1/cm"/>
-          <inkml:channelProperty channel="F" name="resolution" value="0" units="1/dev"/>
-          <inkml:channelProperty channel="T" name="resolution" value="1" units="1/dev"/>
-        </inkml:channelProperties>
-      </inkml:inkSource>
-      <inkml:timestamp xml:id="ts0" timeString="2025-07-17T11:27:25.157"/>
-    </inkml:context>
-    <inkml:brush xml:id="br0">
-      <inkml:brushProperty name="width" value="0.05292" units="cm"/>
-      <inkml:brushProperty name="height" value="0.05292" units="cm"/>
-      <inkml:brushProperty name="color" value="#FF0000"/>
-    </inkml:brush>
-  </inkml:definitions>
-  <inkml:trace contextRef="#ctx0" brushRef="#br0">6539 7781 265 0,'-8'-3'206'0,"1"1"-165"0,0 0-13 0,3 1-11 16,3 1-10-16,2 0-7 0,1 0-5 0,2 0-5 0,1 0-5 15,0 0-7-15,2 0-5 0,-1 2-1 0,1-1 1 0,0 2 4 0,0-1 4 16,1 1-3-16,0 1-7 0,-1 0-19 0,1 0-23 0,-3 1 0 16,0-1 11-16,-1 1 23 0,0 0 22 0,1 0 22 0,-2 0 27 0,0 0 25 15,1-1 21-15,0 1-9 0,0-1-21 0,1 0-2 0,0 0-2 0,0 1 4 16,0-1 2-16,0-1 2 0,1 1 5 0,0 0 1 0,2-1 1 0,1 1 0 15,0 0-3-15,2-1-3 0,0 0-8 0,1 0 1 0,2 0-8 16,2-2 0-16,4 1-2 0,-1-2-7 0,4 0-2 0,3-2-5 0,0 0-2 16,3-1-2-16,2-1-3 0,1 0-3 0,0 0-1 0,3 0-3 15,-2 0-2-15,2 0 3 0,0 0-2 0,0 1 3 0,1-1 4 0,-3 1 3 16,3 0-1-16,-2 0 1 0,1 1 3 0,2-2-4 0,-2 2-2 0,2-1 3 16,0-1-6-16,-1 1-4 0,0-1 1 0,0 0-3 0,1 0-1 15,0-1 4-15,-1-1-3 0,1 0 5 0,0-1-1 0,3-1 4 0,-1-1 3 16,0-2-2-16,2 0 2 0,0 0-4 0,0-2-6 0,0 2 1 0,-1-2-3 15,-2 0-3-15,2 0 3 0,-2 0 1 0,-1 1-3 0,-1-1 3 16,0 0-3-16,1-1-2 0,-2 2 11 0,1 0-1 0,-2-1 1 0,-1 0 4 16,-1-2-12-16,1 0 3 0,1 0-1 0,-1-1-2 0,1 0 1 15,-3 0-4-15,1-1 2 0,-1 0 0 0,0-1-1 0,0 2 1 0,0-1 0 16,-2 0-1-16,0 1-1 0,-2-3 1 0,1 1-2 0,0-2 3 0,1 0 0 16,-3-1 1-16,2 1 0 0,-2-1 0 0,-2 0 3 0,2 2-3 15,-2-3 0-15,0 0-2 0,0 0-7 0,-2-1 6 0,0 1 1 0,-2 1-2 16,-4-1 1-16,0 0-1 0,-3 3 5 0,-1-3 2 0,-4 1 6 0,-2 0-1 15,-1 0-2-15,-2-1 2 0,-3 0-5 0,-3 0 5 0,-2 0-5 16,-1 0-1-16,-5-1 2 0,-3 2-4 0,-3-1 1 0,-4 0-2 0,-4 0-5 16,-4 0-5-16,-3-1 2 0,-3 3-7 0,-6 0-3 0,-5 0 0 15,-6 3-4-15,-4 0 4 0,-6 0 3 0,-4 1 0 0,-4 0 3 0,-5 1-1 16,-3 1 4-16,-2 0 1 0,-7 3 0 0,-1 0 5 0,-3 0 0 0,-2 2 2 16,-2 0 1-16,1 1 0 0,-3 1 0 0,2-1 1 0,0 1 3 15,1 1 1-15,3 0 2 0,0 0 0 0,3 1 2 0,3 0-1 0,0 1 4 16,3 1-2-16,0 0-4 0,3 0 1 0,1 1-3 0,1 2-2 15,-1 0 0-15,1 1-5 0,1 2 2 0,-1 0-7 0,0 1 1 0,0 1 6 16,1 2-5-16,0 2 9 0,-1 2-5 0,2 2-1 0,-2 0 12 0,-1 2-2 16,1 2 1-16,-3 1-1 0,2 0-5 0,-2 4-2 0,0 2 5 15,1 2-6-15,-4 4-2 0,-2 3-1 0,-1 2 5 0,-1 2 3 0,3 0 1 16,0 0-2-16,4 0 1 0,2 0-6 0,1 1 3 0,4 0-4 0,2-2-8 16,5-1 1-16,5 0 12 0,3 1 4 0,5-1 5 0,4 0-3 15,5-2-9-15,4-1-2 0,5-1-1 0,5 2 0 0,5-1-3 0,3 0-1 16,5-2 1-16,5-1-2 0,3-1-2 0,5 2-5 0,4-1 1 15,3 3-2-15,5-1-5 0,2 3-3 0,4-2-12 0,3 2-7 0,4 0-13 16,1 0-55-16,5 2-20 0,2-1-19 0,5 1-22 0,5-2 11 0,4 2-8 16,5-1-10-16,4-1 11 0,4 2 31 0,4-5-290 0</inkml:trace>
-  <inkml:trace contextRef="#ctx0" brushRef="#br0" timeOffset="2882.82">21889 7822 644 0,'18'4'106'0,"-1"0"-39"0,3 0-21 0,-4-1-21 0,-3 0-20 0,-1 0-9 15,2 0-9-15,0 2-15 0,0 2-12 0,3 1-14 0,0 0-3 0,2 2 4 16,1 0 4-16,0 1 13 0,3-1 13 0,0-1 9 0,1 1 13 15,2-1 9-15,0-1 10 0,1-1 16 0,0 0 18 0,3-2 19 0,0 0 10 16,4-1 1-16,-1 0-6 0,0 0 0 0,1 0-2 0,2 0 6 0,0 0-2 16,1 1-5-16,3 0-4 0,0 1-9 0,0 1-7 0,4 0-6 15,-2 0-3-15,2 0 0 0,1 2-9 0,0-1-10 0,1 0-8 0,0 0-4 16,2-1-5-16,-1 0 1 0,0 0-2 0,0-1-1 0,0 0 2 16,0-1-1-16,-1-1-1 0,-1-1 5 0,-1-2 0 0,1-1 6 0,-1-1-1 15,0-3-3-15,2 0 2 0,-1-2-8 0,0 0-3 0,1 0 1 0,1-1-6 16,0-1 5-16,-1-1-4 0,0 0 0 0,1-1 3 0,-1-1-3 15,-2 1 4-15,-1 0-1 0,-1 0 1 0,0-1-3 0,-2 0 3 0,1 0-1 16,-4 0 1-16,-1-2 1 0,-1 1-3 0,-3-1 1 0,0 0-1 0,-4 0 0 16,-1-1 0-16,-3-1-4 0,0-1-5 0,-1 2 1 0,-3-2-2 15,-1 0-4-15,-3 0 4 0,-2 0-4 0,-4-1 1 0,-1-1 1 0,-2 0 2 16,-4 0-4-16,-1-1-2 0,-3 0 3 0,-3 2 0 0,-2-2 1 16,-2-1 3-16,-1-2-3 0,-5-3-1 0,-1-2 7 0,-4 1-5 0,-1-2 1 15,-2 0 3-15,-3-2-5 0,1 1 4 0,-4-3-3 0,-1 0 3 0,-2-1 2 16,-2 0-1-16,-2 1 1 0,0 0 0 0,-2 0 0 0,-2 0 1 15,-1 0 0-15,1 1-3 0,0 2 7 0,0 0-1 0,-2 1 4 0,1 2 5 16,-1-2-8-16,-2 1 5 0,1 0-3 0,-1 1 3 0,-2 0-3 0,-2 1-2 16,0 2 0-16,-2-1-4 0,-2 1 1 0,0-3 1 0,-2 1-3 15,-1 1 3-15,-1-1-2 0,-3 4 5 0,0-1-1 0,-3 0-5 0,-2 1 4 16,-1-1-4-16,-4 0 0 0,1 1 1 0,-4 1-5 0,-2 0 3 16,-1 3 1-16,0 0-1 0,-1 3 7 0,0 3 2 0,-2 3 6 0,0 2 8 15,2 1-7-15,1 4-1 0,2 1-4 0,3 5-2 0,2 1-4 0,2 2 2 16,4 5-5-16,1 1 6 0,2 3 4 0,2 0-3 0,1 3 1 15,3 1-2-15,0-1-3 0,0 2-4 0,3 1-8 0,1-1-7 0,2 2-7 16,1 0 2-16,1-1-5 0,1 3-21 0,1-1-34 0,1 1-43 0,1-2-34 16,2-1-27-16,0 1-23 0,4-3 29 0,-1 3 29 0,3 0-200 15</inkml:trace>
-  <inkml:trace contextRef="#ctx0" brushRef="#br0" timeOffset="9083.03">11262 9232 899 0,'-9'0'112'0,"0"0"-11"0,-3 3-36 0,2 2-17 0,1 3-14 0,1 1-11 16,0 4-4-16,1 3 3 0,-1 4-1 0,-1 3 4 0,0 4 3 0,0 3 0 16,1 3 0-16,0 3 7 0,2 3 19 0,0 4 9 0,1 2 17 15,0 0 6-15,0 2-4 0,1 2-3 0,2 0-1 0,1 0-6 0,2 2 1 16,3-1 0-16,0-1-4 0,3-1-9 0,1 0-28 0,1-3-1 16,5 0-11-16,4-3-10 0,2-2 7 0,2 0-17 0,3-3-9 0,2-2-3 15,3 0-4-15,0-3-8 0,3-2-14 0,0-3-42 0,2 0-73 0,-1-1-129 16,0-2-116-16,-1 0-54 0,0-4 70 0,1-1-108 0</inkml:trace>
-  <inkml:trace contextRef="#ctx0" brushRef="#br0" timeOffset="10067.03">12608 9416 1564 0,'-13'-17'402'0,"3"2"-406"15,-1 1 21-15,7 5-12 0,7 5-6 0,4 2-10 0,2 1-3 16,2 1 4-16,3 2 1 0,0 0 2 0,1 0-3 0,0 3-8 0,-1 1-3 15,0 0-8-15,-2 3-8 0,-1 2 1 0,-1 0-2 0,-1 1 7 16,-2-1 5-16,0-1 8 0,-2 1 9 0,-1-2 3 0,-1 0 6 0,-2 0 4 16,-1-1 3-16,-1 0 6 0,0 0 4 0,0-1 5 0,0 0 4 0,-2-1 5 15,-1 1 6-15,0-3 3 0,-2 0 6 0,-1-2 1 0,0 0 0 16,-1-1-1-16,-2-1-7 0,-1-1 3 0,-1 0-1 0,-1-3 3 0,0 0 6 16,-1-1-10-16,0-1 8 0,-1 1-8 0,-1 1-7 0,1-1 12 15,-3 1-9-15,0 0 0 0,0 1 0 0,-3 2-2 0,0 0 2 0,-1 1 5 16,-2 2 4-16,0 1 4 0,-1 2-3 0,1 0-1 0,2 2 8 0,1 2-9 15,1 0-5-15,3 2-3 0,0 0-14 0,1 3-8 0,1 3-2 0,3 1 0 16,-1 1-3-16,1 2 0 0,2 2-4 0,1-1-3 0,4 2-2 16,1 1 0-16,3 0 3 0,2 0 1 0,2-3-6 0,2 0 4 0,3-1 0 15,3-3-8-15,2 1 8 0,3-3-7 0,-1-2 0 0,4-2-1 16,1 0-4-16,1-1 3 0,3-2-3 0,0 0-4 0,2-2-2 0,2-3 1 16,-2 0 1-16,1-1 4 0,-2-2-2 0,-1-1-4 0,-2-1 6 0,-3-2 1 15,1-2 11-15,-1-1 3 0,-3-2 5 0,1-2 4 0,-1-2 0 16,0 0 1-16,-1-2-1 0,0 1 0 0,-1 0 1 0,-1-1-1 0,-1 1 0 15,0 3 4-15,1-1-3 0,-1 2 1 0,0 2-2 0,-1 2-5 0,0 1 3 16,0 3 2-16,1 1 0 0,0 3-5 0,-1 2 0 0,2 2-3 16,0 2-5-16,0 3 5 0,-1-1-3 0,0 3 1 0,-1 0-1 0,1 1 1 15,0-1-4-15,0 1 2 0,1 1-2 0,1 0 1 0,1-2-1 16,1 1-1-16,1-3 4 0,0 0-5 0,2-1 2 0,0-3 4 0,0-1-4 16,1-2 0-16,0-1 2 0,0-2-6 0,0-1 8 0,-1-2-1 0,-1-2 4 15,0-2 4-15,-2 0-7 0,-1-2 5 0,-2-2 0 0,1-1-6 16,0-2 6-16,-1-1 0 0,-3-1-1 0,-1 1 4 0,-1-2-6 0,-1 0-6 15,-2 1 5-15,0 0-3 0,-3 0 2 0,0 0 1 0,-3 0-5 0,-2 0 4 16,-3-1 1-16,-1-1 0 0,-2 1-5 0,-3-1 0 0,-1-2-1 16,-5 1-3-16,-1 1 4 0,0 5-2 0,-3-1-3 0,0 3 1 0,0 1-5 15,-1 2 0-15,0 2 5 0,1 2-3 0,0 1-4 0,2 0-3 16,0 1-6-16,2 1-10 0,2 2-18 0,3 1-28 0,1 1-42 0,2 1-38 16,3 2-51-16,1 1-49 0,4 2-100 0,2 1-99 0,4 3-37 0,2 0 99 15,4-1-151-15</inkml:trace>
-  <inkml:trace contextRef="#ctx0" brushRef="#br0" timeOffset="10417.03">13947 9725 2413 0,'-13'-5'142'0,"2"2"-45"0,-1 0-35 16,4 4-16-16,5 3-22 0,1 3-15 0,0 2-6 0,2 2-3 0,1 4 3 15,-1 2-3-15,2 1 0 0,-1-1 2 0,2 1-5 0,0 0 3 0,2-1-2 16,0 1 4-16,1-1-2 0,2 0-5 0,0-1 0 0,1 0 3 16,0-1-3-16,0-1 7 0,1-3-1 0,0 0-7 0,1-2 3 0,1-1 1 15,1-1 0-15,1-2 6 0,0-1 4 0,0-2-3 0,2-2 1 0,1-2 4 16,0-1-3-16,-1-3 6 0,0 0 0 0,-1-1-1 0,-1-2-2 16,-1-1 0-16,-1 0 2 0,0-3-2 0,-1-1-3 0,-1-1 1 0,-2 0-5 15,0 0 3-15,-2-1-1 0,-1 0 0 0,-2 0 3 0,-3-1 1 16,-1-1-1-16,-4-1 1 0,-1-1-6 0,-4-2 2 0,0-2-3 0,-4 1 1 15,-2-2-1-15,-1 2 3 0,-2-1-2 0,-1 1-1 0,0 3 2 0,0 0-1 16,0 3-1-16,0 4 1 0,2 1-5 0,1 2 1 0,1 0-1 16,2 4-10-16,2 1-3 0,-1 3-4 0,2 1-1 0,0 1-4 0,-1 1-13 15,2 0-13-15,0 1-31 0,1 1-46 0,2 2-69 0,0 1-98 0,1 0-111 16,0 0-83-16,2-1 56 0,1-1-174 0</inkml:trace>
-  <inkml:trace contextRef="#ctx0" brushRef="#br0" timeOffset="11117.03">14205 8879 2494 0,'-9'-10'144'0,"1"4"-58"0,1 0-34 0,6 7-24 16,3 3-10-16,2 3-9 0,2 4 9 0,2 4 0 0,1 4 3 16,1 4 2-16,0 3-8 0,-1 4-3 0,-1 2-5 0,1 4-5 0,-2 3-1 15,1 3-2-15,-1 2-3 0,-1-1-4 0,1-1-6 0,-1 0-8 0,0 1-11 16,1 0-20-16,0-2-20 0,0 1-21 0,1-2-27 0,0-1-29 15,1-1-23-15,0-1-22 0,-2-2-10 0,0-2-1 0,0-2 8 0,-1-4 20 16,1-3 35-16,0-4 43 0,0-3 40 0,0-3 32 0,0-3 21 16,0-3 17-16,1-3 18 0,0 0 25 0,0-2 26 0,0-2 24 0,0-1 21 15,0-1 11-15,0-1 9 0,-1-1-2 0,0 0-6 0,1-3-18 0,1 0-10 16,1-1-12-16,0 0-13 0,0 0-11 0,1-1-14 0,0 0-9 16,2 0-11-16,-1 1-7 0,0-3-4 0,0 1-10 0,1-1-3 0,1-1-6 15,1 2-2-15,0 0 1 0,2 1 1 0,2-1-8 0,1 0 1 0,0 0-1 16,0 0-4-16,0 0 7 0,-2 0-2 0,0 0 1 0,1-1 4 15,-3 0 1-15,2 0 4 0,-1-1 3 0,-3 1 7 0,-1-1 3 0,-2-1 15 16,-2 0 0-16,-1 0 4 0,-2 0-4 0,-1 0-10 0,-1-1-4 16,-1-1-13-16,-1 1 1 0,-2 1-6 0,-2 0 3 0,-1 0 10 0,-2 0-1 15,-2 2 6-15,-1-1-11 0,-1 3-4 0,-2 0 1 0,-1 1-8 0,-1 3 9 16,-2 1-2-16,0 2-3 0,-1 1 2 0,2 4-4 0,-2 0 0 16,1 4 6-16,1 2-6 0,1 1-8 0,1 5-6 0,0 2 11 0,1 3-1 15,0 6 6-15,3 3 5 0,-1 0-15 0,3 2 5 0,2 1-2 0,1 1-2 16,3 1 0-16,1 0-6 0,2 0-3 0,2-1-10 0,2-2-3 15,2-3-10-15,2 0-7 0,2-1-13 0,0-1-13 0,2-2-4 0,1-1-14 16,0-2-8-16,0-2-13 0,0-1 3 0,-3-2 14 0,2-3 18 16,0-3 30-16,-1-2 13 0,-2-4 18 0,-1-2 17 0,-1-3 9 0,0-2 7 15,-1-3 18-15,1-3 11 0,-1-2 13 0,1-2 15 0,1-4-2 0,1-3-7 16,0-2-8-16,0-2-8 0,-1-1-8 0,0 0 1 0,0-2-2 16,-1 1-11-16,0-1-5 0,1 0-6 0,-2 3-16 0,3 0 2 0,-1 3-3 15,2 4-8-15,0 2 4 0,-1 5-1 0,2 4-1 0,0 4 8 0,-1 4 1 16,-1 3 5-16,1 3 4 0,-1 2-2 0,0 1 2 0,1 2-3 15,-1 3-3-15,1 2 3 0,2-1-2 0,0 4 2 0,0 0-4 0,1 0 0 16,0 2 2-16,1-1-2 0,-2-2 6 0,1 0 5 0,0-2-4 16,0-2 8-16,-1-1-16 0,0-4-4 0,0-2 5 0,-1-2-6 0,-1-2 13 15,1-1 8-15,-2-3 0 0,-1-2 8 0,-1-1-4 0,-1-2 0 0,0-1-9 16,-1-1-3-16,1-3 8 0,0-2 1 0,-1-3-4 0,0-3 3 16,0 0-20-16,-1-5-3 0,0 0 11 0,1 0-11 0,-2-3 1 0,0 0-1 15,-1-1-6-15,0-1 2 0,1 2-4 0,0 0 3 0,1 0-9 0,-1 4-3 16,0 1-11-16,1 2-16 0,0 4-13 0,0 1-21 0,0 2-25 15,0 0-37-15,0 1-58 0,-2 0-76 0,0 1-101 0,-2 1-145 0,-1 0-75 16,0 1 124-16,-2 0-136 0</inkml:trace>
-  <inkml:trace contextRef="#ctx0" brushRef="#br0" timeOffset="11767.02">15454 9674 2837 0,'-7'-3'132'0,"1"1"-46"15,2 2-52-15,3 2-13 0,2 3-3 0,2 2-6 0,2 4-3 0,1 2 6 16,2 3 5-16,0 0 6 0,1 4-3 0,0 1-3 0,-1 1-11 0,2 2-4 16,1-1-3-16,0 2-4 0,2 0 2 0,-1 0-2 0,1 1-1 15,-2-1-4-15,0-1-4 0,2 0 0 0,0-2-5 0,-1 0-8 0,1-2 1 16,-2-2 0-16,2-3 12 0,-1-1 17 0,0-1 6 0,-1-2-9 16,0-3-4-16,0 0-3 0,1-2-6 0,-1-2 17 0,1-1-2 0,0-2-2 15,0-2 3-15,1-1-6 0,1-1 3 0,1-3 1 0,0-1-1 0,1-1-1 16,0-2-2-16,1-1-2 0,0 0-1 0,2 1-3 0,0 0 10 15,0 1 8-15,1 1-3 0,0 0 0 0,-1 0-11 0,0 2 2 0,-1 0 0 16,-1 2-3-16,1 2 3 0,-2 0-8 0,0 2 5 0,-1 0-1 0,0 2-1 16,1 0 0-16,-1 1 3 0,-2 0 2 0,0 0-5 0,1 0 5 15,-1-1 0-15,1 0-2 0,-1-1 4 0,0-1-2 0,1 0-7 0,1-2 7 16,-1-1 0-16,2-1-9 0,1-2 0 0,1-1-1 0,-2-1-8 16,0-1 6-16,0-1 0 0,-2-1 9 0,-1-2 1 0,0-1 4 0,0 0 1 15,-2-3-1-15,-2 0 3 0,-2 0 2 0,-3 0-2 0,0 0 6 0,-3 1 3 16,-2 0 0-16,-1-1 0 0,-2 1 0 0,-1 0-4 0,-2 1-1 15,-1 0-4-15,-1 1-5 0,-2 1-1 0,-1 2-3 0,0 3 6 0,-2 1-8 16,0 1 1-16,-1 1-4 0,0 2-1 0,1 1-2 0,-2 1-2 16,1 1 0-16,1 1-9 0,1 1-5 0,0 1-6 0,1 2-13 0,1 0-9 15,0 1-18-15,2 1-30 0,-1 0-34 0,3 2-29 0,1-1-21 0,1 1-8 16,2 0-30-16,1-1-20 0,1 1-10 0,1-3 7 0,1 1 36 16,1-1 39-16,2-1 44 0,2-1 36 0,1 1 31 0,3-1 24 0,-1-1 14 15,3 0 12-15,2-1 4 0,0 0 6 0,4-1 5 0,-1 0 4 0,2 0 9 16,2-1 10-16,-2 1 9 0,3 0 13 0,2 2 10 0,0 1 8 15,3 0 6-15,-1 0-1 0,1 2-4 0,0 0-10 0,2 1-6 0,-2 0-3 16,1 2-7-16,-1-1-1 0,-3 2-2 0,-1 0 2 0,-2 2 10 0,-1 0 12 16,-1-1 15-16,-1 0 14 0,-3-2 9 0,-2-1 2 0,-1 0-3 15,-2-1-14-15,-2-1-20 0,-2-1-13 0,0 0-16 0,-2-1-3 0,0-1 0 16,-2-1 5-16,-1-1 21 0,0-2 3 0,-2-2 9 0,0-1-7 16,-1-2-15-16,-1-3-10 0,0-3-14 0,-2-1-6 0,0-3-9 0,-1-3 8 15,-1-3 5-15,-1-1 9 0,0-2 4 0,0-2 3 0,0-4 6 0,0-1 1 16,1-4-3-16,1 0-13 0,0-1-13 0,1 2-22 0,2 3-7 15,1 2-12-15,1 3-4 0,2 6 7 0,1 0-5 0,1 5 5 0,1 4 3 16,0 1-2-16,1 3-5 0,0 1-27 0,2 2-30 0,1 1-50 0,1 2-38 16,2 2-44-16,0 2-43 0,2 2-27 0,0 0-23 0,2 2 23 15,1 1 72-15,0 0-175 0</inkml:trace>
-  <inkml:trace contextRef="#ctx0" brushRef="#br0" timeOffset="12300.02">16568 9945 2770 0,'-5'0'56'0,"0"0"-55"0,1 2-32 0,3 2-23 0,1 2-16 16,2 3-15-16,2 1-14 0,2 1 9 0,2 3 7 0,1-1 7 15,0-2-15-15,0 0-78 0,0-3-118 0,0 0-126 0,2-1-23 0,1 2-201 16</inkml:trace>
-  <inkml:trace contextRef="#ctx0" brushRef="#br0" timeOffset="12550.02">17311 9429 730 0,'-4'-5'43'0,"0"1"-51"0,1-1-27 16,1 2-25-16,1 2-21 0,1 1-5 0,-1 0 7 0,0 2 16 16,1-1 22-16,-2 2 15 0,1-1 2 0,-1 1-57 0,1-1-83 0</inkml:trace>
-  <inkml:trace contextRef="#ctx0" brushRef="#br0" timeOffset="13001.02">17567 9465 1668 0,'-7'-11'588'0,"1"0"-514"15,0 1-47-15,0 2-26 0,2 3-7 0,1 1-4 0,0 1-11 0,-1-1 1 16,-1 1 4-16,0-1 1 0,-2 1 10 0,-1 0 4 0,-1 0-7 16,-2 2-2-16,-1 0-6 0,-1 1-1 0,-2 1 4 0,0 1-3 0,-1 1 3 15,-1 1-2-15,0 2 2 0,-1 1 2 0,0 1 1 0,0 2 1 0,-1 0 1 16,2 2 8-16,1-1-2 0,0 0 2 0,1 0 2 0,2-1-7 15,3 2-3-15,2 0-8 0,3 1-8 0,1 0-4 0,2-1-2 0,2 0 5 16,2 0 7-16,2-1 3 0,2 1 14 0,1-1 3 0,2-1 5 0,2 1 6 16,2-1-5-16,3 1-1 0,0-1-2 0,-1 0-3 0,2 1 3 15,1 0 5-15,-1 0 1 0,-2 0 2 0,1-1 1 0,0-2-1 0,-1 1 7 16,-1 0 2-16,0 0 6 0,-2 0 2 0,-2 1 0 0,-1-1 7 0,-2-2-5 16,-1-1 1-16,-2 0-6 0,0-1-7 0,-2 1-4 0,-2 0-7 15,-1-1 3-15,-1 1-5 0,-1-1-7 0,-2 2 0 0,-1-1-10 0,0-1 3 16,-2 2 1-16,-2 0 0 0,0 1-2 0,-2-2 4 0,-2 2-4 15,1-2 4-15,-2 0-1 0,0 0-2 0,0-3-11 0,1 2-33 0,-2-1-53 16,1-1-79-16,-1-1-72 0,3-1-72 0,-2-1-41 0,1-1 50 0,-1-3-121 16</inkml:trace>
-  <inkml:trace contextRef="#ctx0" brushRef="#br0" timeOffset="13235.02">17397 9125 2368 0,'-1'-10'251'16,"2"1"-184"-16,2-1-44 0,4 3-26 0,3 4-9 0,5 0 6 0,4 2 1 16,3 3 7-16,3 2 7 0,0 2 8 0,-1 2 9 0,1 2 2 15,0 3 5-15,1 3-5 0,1 5 10 0,-1 1-4 0,2 3 1 0,0 2 1 16,-1 0-5-16,0 5 5 0,1 1-4 0,1 5 0 0,1 3-10 16,-1 3-4-16,1 3-4 0,-2 7-2 0,1-1 7 0,-1 3-1 0,-3 1 2 15,0-1-3-15,-4-1-1 0,0 1-1 0,-3-2-3 0,-2 1 1 0,-2 1-20 16,-2-1 17-16,-3 3-4 0,-2-2-1 0,-2 2 6 0,-4 1-16 15,-2-2-22-15,-3 0-22 0,-3-3-53 0,-4-1-88 0,-4 1-120 0,-3-1-259 16,-7 3-190-16,-8 5-198 0</inkml:trace>
+  <inkml:trace contextRef="#ctx0" brushRef="#br0">4521 5745 1845 0,'0'3'232'0,"1"1"-94"16,1 2 30-16,0 3 25 0,1 0-8 0,1 3-26 0,1 3-38 0,0 3-31 15,0 2 5-15,2 4-7 0,-1 2 1 0,2 1-7 0,0 5-15 0,1 2-5 16,2 3-10-16,-1 3-8 0,4 1-8 0,-1 2-9 0,2 4-6 16,-2 0-3-16,-3 1-15 0,1 1 17 0,-2 1-7 0,1 2 1 0,0-1 5 15,-2 0-19-15,-1 0 0 0,0-1 2 0,-1-1-2 0,0-1 4 16,0-5-4-16,0-2-4 0,-2-1 2 0,0-2 2 0,0-3-9 0,-1-1-3 15,-1-3 16-15,-1-2-2 0,0-2 13 0,0-2 3 0,0-3-14 0,-2-3-2 16,1-3 2-16,0-3-2 0,-1-3-2 0,1-4 0 0,0-3 4 0,0-4-8 16,-1-4 6-16,-1-3-2 0,-1-4-4 0,-1-5 8 0,0-3-4 15,-2-6 0-15,0-3-10 0,-1-3-6 0,-2-4 14 0,0-5-4 0,-1-2 16 16,-1-3 4-16,-1-2-8 0,0-4 0 0,-1-3 3 0,1-2-3 16,0 0-4-16,1 0 4 0,3 3-24 0,0 0 3 0,2 4 9 0,1 2 0 15,3 3 26-15,1 5 1 0,0 2-9 0,1 4 2 0,0 2-8 0,2 2 7 16,-1 2 5-16,2 1 2 0,1 1 10 0,1 3 4 0,1-1-20 15,2 3-14-15,0 5 0 0,0 0 0 0,1 3 0 0,-1 1 0 0,0 3 0 16,3 1 0-16,-1 1 0 0,1 1 0 0,0 2 0 0,0 3 0 16,1 1 0-16,1 4 0 0,1 2 0 0,2 2 0 0,-1 4 0 0,3 0 0 15,1 6 0-15,-1 1 0 0,3 3 0 0,1 5 0 0,-1 0 0 0,2 4 0 16,0 0 0-16,-2 1 0 0,2 1 0 0,-1 1 0 0,0 1 0 16,1 1 0-16,0-1 0 0,-1 0 0 0,-2-1 0 0,-1-3 0 0,-1-2 0 15,-1-2 0-15,0-1 0 0,-2-2 0 0,0-3 0 0,-2 0-58 16,-2-1-45-16,-2-3-27 0,-4 1-44 0,-2-2-48 0,-1-1-57 0,-2-2-74 15,-1 0-93-15,-1-1-197 0,-2-4-462 0</inkml:trace>
+  <inkml:trace contextRef="#ctx0" brushRef="#br0" timeOffset="166.99">4869 6635 1856 0,'-26'-5'469'0,"-1"0"-356"16,-4 0 7-16,9-1 20 0,5 2 14 0,4 0 7 0,3 1-20 16,0-1-19-16,2 0-6 0,1 0-1 0,1 0 5 0,2-1-14 0,2 0-16 15,2 0-18-15,4-2-7 0,2-1-16 0,3-1 1 0,3-3-14 16,0 1-36-16,6-3 0 0,1 0 0 0,2-1 0 0,3-2 0 0,2 0 0 15,0 0 0-15,2 0 0 0,-2 0 0 0,2 0 0 0,-2 1 0 0,1 0 0 16,2 1 0-16,-3 1 0 0,2 1 0 0,-2 0 0 0,0 1-70 16,2 2-87-16,0 0-50 0,3 2-59 0,2 0-107 0,0 1-157 0,3 1-322 15,-2 0-262-15</inkml:trace>
+  <inkml:trace contextRef="#ctx0" brushRef="#br0" timeOffset="499.74">6458 6221 2208 0,'-2'-4'261'0,"0"1"-153"0,0-3 22 16,-1-1 17-16,0 1 2 0,-1-2-26 0,1-1-35 0,0-1-17 15,-1 0-4-15,-3-2 2 0,-1 2-5 0,-2-1-14 0,1-1-9 0,-2 1-11 16,-3-1-9-16,0 2-2 0,-3 1-1 0,-1 1 3 0,1 2 2 15,-4 1 8-15,0 3-3 0,-1 2 3 0,-1 2 6 0,1 3 0 0,1 3 4 16,-2 2 2-16,0 3-12 0,0 4 1 0,1 2-8 0,0 2 4 0,1 3-4 16,2 3-24-16,2 2 0 0,3 2 0 0,2 0 0 0,2 1 0 15,3 0 0-15,2-1 0 0,4 1 0 0,2-3 0 0,3-1 0 0,4-2 0 16,1-4 0-16,4-2 0 0,1-1 0 0,4-4 0 0,3-1 0 16,2-3 0-16,6-3 0 0,1-1 0 0,1-3 0 0,2-2 0 0,1-3 0 15,0-1 0-15,2-1-14 0,-2-2-58 0,0-1-22 0,-2-1-19 0,0-2-40 16,-3-1-33-16,2 0-58 0,-2 0-84 0,0-1-91 0,-2 0-200 15,-2-1-572-15</inkml:trace>
+  <inkml:trace contextRef="#ctx0" brushRef="#br0" timeOffset="1634.73">7309 6090 2145 0,'-8'-2'307'0,"-1"-1"-171"0,-1-1 8 16,-1 0 25-16,2 1-2 0,-1-2-32 0,-2 0-28 0,-1 0-18 15,1-1-1-15,-3 0-3 0,-1 0-10 0,0 0-14 0,-1 1-11 0,-1 0-16 16,-1 1-3-16,3 0-4 0,-1 2-7 0,-1 1-1 0,0 3-1 16,2 1 5-16,-1 2 3 0,0 3-5 0,1 1-1 0,-1 1 0 0,1 3-8 15,1 1 8-15,2 3-4 0,0 3-2 0,0 1-2 0,1 2-8 0,3 3-4 16,1-2 0-16,4 3 0 0,1-2 0 0,4 1 0 0,2-1 0 15,1-1 0-15,5-1 0 0,0-2 0 0,3-2 0 0,2-1 0 0,1-1 0 16,3-3 0-16,3-1 0 0,0-2 0 0,3-3 0 0,2-1 0 0,0-2 0 16,3-2 0-16,2-1 0 0,1-2 0 0,-1-2 0 0,1-1 0 15,-2-1 0-15,-1 0 0 0,-2-2 0 0,-1-2 0 0,-2-2 0 0,0-1 0 16,-1-1 0-16,-1-2 0 0,-3 0 0 0,0-2 0 0,-4 1 0 16,0-3 0-16,-1 1 0 0,-1-2 0 0,-2 1 0 0,-2 0 0 0,-1 0 0 15,-1 4 0-15,-1-1 0 0,-1 2 0 0,-2 1 0 0,-1 1 0 0,0 2 0 16,-2 0 0-16,0 2 0 0,-1 2 0 0,-1 2 0 0,0 2 0 15,-1 2 0-15,0 1 0 0,-1 2 0 0,0 1 0 0,-1 2 0 16,1 0 0-16,0 0 0 0,1 2 0 0,0 0 0 0,2 1 0 0,-1 0 0 0,2 1 0 16,0-1 0-16,0 2 0 0,2 0 0 0,1 0 0 0,-1 0 0 15,2-2 0-15,2 2 0 0,-1-2 0 0,1 1 0 0,1 0 0 0,0-1 0 16,2-2 0-16,0 1 0 0,1-1 0 0,1 0 0 0,0-2 0 16,1-1 0-16,0-1 0 0,0-1 0 0,0-1 0 0,1-2-6 0,0 1-64 15,0-1 3-15,-2-1-21 0,2 0-20 0,0-2-2 0,1-1-23 0,1-3 1 16,-1-1-3-16,0-2-10 0,-1 0-3 0,-1-1 3 0,0-1 4 15,-1 0 20-15,0-2 27 0,0 0 17 0,-2 1 21 0,0-4 22 0,-1 0 14 16,-2 0 7-16,1 0 22 0,-1 0 10 0,-1 0 17 0,0 2 17 0,0 0 5 16,-2 2 17-16,0 1 3 0,-2 1 11 0,0 4 17 0,-1 0-3 15,0 2 10-15,-2 1 3 0,1 1-9 0,-1 2 2 0,0 1-9 0,-1 1-5 16,0 2-13-16,1 1-8 0,-1 1-4 0,1 1-4 0,0 1 1 16,0 1-10-16,0 0 0 0,1 2-9 0,0 0-10 0,1 0-20 0,1 0-18 15,0 0 0-15,2 1 0 0,0 0 0 0,2 1 0 0,1 0 0 0,0 0 0 16,2 2 0-16,-1 0 0 0,1 0 0 0,-1-1 0 0,2-1 0 15,-1 0 0-15,1 1 0 0,0-1 0 0,1-1 0 0,0-1 0 0,0 0 0 16,0 0 0-16,0-2 0 0,1-1 0 0,-1 0 0 0,0-1 0 0,-2-1 0 16,1 1 0-16,0-3 0 0,0 0 0 0,1-3 0 0,0-1 0 15,-1-1 0-15,0-1-2 0,-1-2-2 0,0 1 4 0,0-3-2 0,-1-1 0 16,0-1 0-16,-1-2 4 0,-1 0-16 0,2-1 2 0,-2-1 8 16,1 0-10-16,-1 0 30 0,0-1 0 0,0 1-8 0,-1-1 6 0,-1-2-14 15,0 2 0-15,-1 0 0 0,0 1 0 0,0 0 0 0,0 0 0 0,0 2 0 16,-1 1 0-16,1 2 0 0,-1 1 0 0,0 1 0 0,0 2 0 15,-1 0 0-15,1 3 0 0,-1 0 0 0,0 0 0 0,0 1 0 0,-1 1 0 16,1-1 0-16,0 2 0 0,0 1 0 0,-1 0 0 0,1 1 0 0,0 1 0 16,0 0 0-16,1 0 0 0,0 0 0 0,0 1 0 15,0 2 0-15,1 0 0 0,0 1 0 0,1 0 0 0,0 1 0 0,0 0 0 0,1 1 0 16,0 1 0-16,0 1 0 0,0 0 0 0,1-1 0 0,0 1 0 16,0 0 0-16,0 0 0 0,1-1 0 0,-1-1 0 0,1 1 0 0,0-1 0 15,-1 1 0-15,1-1 0 0,-1-1 0 0,0-1 0 0,-1 1 0 0,-1-1-8 16,0 1-24-16,-1-3-4 0,0-1-4 0,0-1 3 0,-1-2-10 15,0 1 16-15,0-2 4 0,-1-1-6 0,0 1 6 0,0-2-2 0,0 1 4 16,-1-1 10-16,0-1 0 0,0 0 2 0,0 0 3 0,1 0-3 0,-1-1 9 16,1-1 2-16,1 0-5 0,0 0 9 0,0 0-6 0,0-1 0 15,1 1 6-15,0-1-8 0,0 0 2 0,1 1 3 0,-1 0 1 0,1-1 3 16,0 1 3-16,-1 0 0 0,0 1-6 0,0 0 2 0,1 0 3 16,0 0 1-16,0 0 7 0,-1 0-2 0,0 1 1 0,0-1 3 0,0 2 0 15,-1-2 3-15,0 1 3 0,0-1-6 0,-1 1 2 0,1-1 1 0,-1 1-7 16,0-1 10-16,-1 1 1 0,1-1-1 0,-1 0-1 0,0 1-9 15,-1-1 5-15,0 0-2 0,-1 0 0 0,-1-2 1 0,0 1-1 0,0-1 2 16,0-1-4-16,1 0 8 0,-1-2 0 0,2 1-16 0,-2 0 10 0,0-3-10 16,1 0 0-16,0-2 6 0,0-1-10 0,0 0 0 0,0 0 0 15,0-3 0-15,1 0 0 0,0-1 0 0,1 1 0 0,1-1 0 0,0 0 0 16,1 0 0-16,1 2 0 0,1-1 0 0,2 2 0 0,0 2 0 0,2 1 0 16,0 1 0-16,-1 1 0 0,2-1 0 0,0 2 0 0,0-1 0 15,1 2 0-15,-1 0 0 0,-1 2 0 0,1 0 0 0,-1 2 0 0,0 1 0 16,1 0 0-16,0 1 0 0,0 0 0 0,-1 1-78 0,0 0-50 15,0 1-38-15,-1-1-42 0,2 1-58 0,1 1-58 0,0 0-68 0,1 0-92 16,0 0-147-16,0-1-340 0</inkml:trace>
+  <inkml:trace contextRef="#ctx0" brushRef="#br0" timeOffset="2599.73">8806 6187 1747 0,'1'-1'328'0,"0"1"-127"0,1-1-10 15,0-1 7-15,0-2-14 0,1 0-39 0,0 0-31 0,-1-2-19 0,0 0-4 16,0 0-15-16,-2 0-9 0,1-1-15 0,-2 2-23 0,-1-2 5 0,0 0-6 16,0 1-6-16,-3-1-1 0,1 1-12 0,-2 1 1 0,-2 0-1 15,0 2-9-15,-1 1 2 0,0 1-6 0,-1 2 1 0,0 2 4 0,0 1 1 16,0 2 0-16,0 2-4 0,-1 0 2 0,1 3 0 0,0 0 4 0,0 2 2 16,1 2-2-16,0 0-1 0,2 1-3 0,3 0 0 0,1 0 2 15,3 1-2-15,1-2 4 0,3 1-4 0,1 0-2 0,1-2-5 0,2-2-1 16,1-1 2-16,1-1-7 0,3-1 9 0,1-1 4 0,2-1 14 15,1-2-9-15,1-2 3 0,2-1-6 0,1-1-10 0,0-2 4 0,1-1 2 16,-2-1-13-16,1-1 2 0,0-1-6 0,-2 0-1 0,-2-2 10 0,1 0-10 16,0 0 5-16,-1 0-4 0,0-1-16 0,-1 1-7 0,0-1-24 15,-3 0-6-15,1-1 1 0,-1 0 11 0,-2-1 21 0,1 0 16 0,-2 0 11 16,1-1 10-16,0 0 4 0,0 1 0 0,0-1-2 0,-1 3 2 0,1 0-4 16,-1 0 2-16,-1 2 2 0,1 2-2 0,-1 1 5 0,-1 1-3 15,-2 2 1-15,1 1 2 0,-2 2 2 0,0 0-3 0,0 1 1 0,-2 0-1 16,1 1-3-16,0 0 5 0,-1-1-3 0,2 0-5 0,-1 0 6 0,1-1-4 15,0-1-4-15,0 0 6 0,2-2-2 0,0 1-5 0,0-1 7 16,1 0-1-16,0-1-1 0,1-1 7 0,0 0-1 0,-2 0 2 0,2-1 6 16,0 0-1-16,-1 1 3 0,1-1 0 0,-1-1 0 0,0 1 7 15,-2-1 5-15,1-1 3 0,-1 0 3 0,0-1 4 0,-1 0-8 0,-1 0 3 16,-1-1-6-16,-1-1-3 0,0 2-2 0,-1-2-3 0,-1-1 0 0,0 1-8 16,-2 0 2-16,-1-1-5 0,-1 1-3 0,0 0 3 0,-2 1-5 15,0-1 5-15,-1 1-1 0,0 1-8 0,0 0-3 0,-1 1 0 0,-1 0 2 16,0 1 4-16,-1 1 2 0,1 1 0 0,-1 1-6 0,-2 2 2 15,0 2 0-15,0 0 0 0,1 2 5 0,1 1-1 0,3 1 9 0,1 0 2 16,2 2-1-16,1 1 7 0,2-1-8 0,1 3-4 0,1 1-1 0,3 1-4 16,0 0 2-16,2 0-4 0,1 1 1 0,1 1 1 0,2-1 2 15,2-2-4-15,0 0-2 0,2 0 2 0,-1-2-6 0,2-1 6 0,1-2-6 16,1 0 2-16,0-2-2 0,0-1-5 0,0-2-1 0,1-1-5 0,0-1-4 16,0-1-10-16,-1-1-1 0,-2-1 2 0,0-1 6 0,-1-1 10 15,0-2 5-15,-1-2 3 0,2-1-3 0,0-1 3 0,-1-1 2 0,0-2-4 16,-1 1 1-16,0-1-4 0,-1-2 5 0,-1 0 4 0,-2-1 2 0,-1 1 5 15,0-1 1-15,0-1-3 0,0 0 8 0,0 2-2 0,-1-1 3 16,-1 1 1-16,0 1-4 0,-2 3 0 0,0 0 0 0,-1 2 4 0,0 3 4 16,-1 1 0-16,-1 3 2 0,-1 1-4 0,0 2 1 0,0 1-1 0,0 1-2 15,0 1-3-15,0 1-7 0,1 1-1 0,-1 0-2 0,2 1-2 16,0-2 0-16,1 0 2 0,1 1-2 0,0-2 0 0,1 1 0 0,1-1-4 16,1-1-2-16,1-1-1 0,-1 0-1 0,2 0-2 0,1-2 5 15,0 0-5-15,0-1 3 0,0 0-1 0,-1-1-11 0,1 0 2 0,0 0 3 16,-1-2 1-16,0-1 4 0,1-1 12 0,0-1-6 0,-1 0-3 0,0-2 12 15,-1 0-16-15,-1 0 10 0,0 1-2 0,0 0 2 0,0-1 8 16,-1 2-8-16,-2 1 4 0,1 0-2 0,0 0 1 0,-1 1 3 0,-1 1 2 16,0 1-5-16,-2 2 3 0,1 1 5 0,-1 1-5 0,1 1 0 0,0 1 2 15,1 2-10-15,1 1 5 0,0 2-1 0,-1-1-2 0,1 2 4 16,0 2-6-16,1 0-2 0,-1 3 3 0,-1-1-9 0,2 3 2 0,0-1 6 16,1 0-9-16,1 0 5 0,-1-1-1 0,1 2-6 0,-1 0 3 15,1-1-3-15,-1 0-2 0,-1 2-6 0,-1-1-5 0,-1 0-4 0,0 1-3 16,-1-1 1-16,-1-1-12 0,-1 0-7 0,-2 0-14 0,-1 1-5 0,-1-2-1 15,-1-2 6-15,-2 0 16 0,-1 0 22 0,-1 1 18 0,0-2 13 16,-1 0 6-16,0-2-3 0,2 0 5 0,-2-2 12 0,1-1 16 0,0-2 13 16,1-2 16-16,1-1 5 0,1-1 4 0,1-2-9 0,1-1-10 0,2-2-14 15,-1-2-13-15,1-2-8 0,1-2-5 0,2-1-11 0,0-2-12 16,2 0 6-16,0 0 4 0,3 1-1 0,2-2 3 0,1 0-18 0,1 0-20 16,1 2-22-16,1-2-43 0,-1 1-35 0,2 1-49 0,1 0-58 15,-1 1-90-15,0-2-180 0,0 1-218 0,-1-1-253 0</inkml:trace>
+  <inkml:trace contextRef="#ctx0" brushRef="#br0" timeOffset="2766.73">10367 6171 2492 0,'3'8'359'0,"1"-1"-142"0,3 3-11 0,1-4-12 0,2 0-26 16,1 0-44-16,3-2-32 0,2-1-4 0,3 0-11 0,2-2-5 0,4-1-66 15,3 0-6-15,2-1 0 0,1-2 0 0,2 0 0 0,-1-1 0 16,0 0 0-16,-1-1 0 0,0-1 0 0,-2 1 0 0,0-2 0 0,-2 1 0 15,0-1-74-15,0 1-42 0,2 0-54 0,-2 0-58 0,1 1-78 16,-1 0-102-16,-2-1-199 0,0 2-270 0,-1-1-80 0</inkml:trace>
+  <inkml:trace contextRef="#ctx0" brushRef="#br0" timeOffset="3116.73">11730 5582 1282 0,'-10'-1'793'0,"-1"1"-677"15,-5-1 3-15,1 2 0 0,0-1-7 0,-3 2-20 0,0 2-35 16,-4 0-18-16,-2 2-13 0,-1 1-3 0,-2 1-2 0,1 0 1 0,3 1-4 16,0 1-3-16,3 0 10 0,3 1 2 0,3 0 0 0,5-1 5 15,3 0-4-15,3-1-9 0,3 0 5 0,2 2-12 0,1 0 5 0,3 0 4 16,3 1-9-16,2 0 7 0,2 0-8 0,3 1-4 0,2-1 3 0,3 1-3 15,1 0-2-15,4-2 2 0,2 1-5 0,0 0 0 0,0 0 1 0,0 0-3 16,-2-1 4-16,-2 2-1 0,0 0-4 0,-3 0 6 0,1 0 2 16,-1 0 5-16,-3 1 13 0,-1 0 11 0,-2 1 12 0,-1-2 8 0,-3 1-7 15,-2 0-7-15,-2 0-10 0,-1-1-12 0,-3 0-1 0,-1 1-8 16,-2-1-4-16,-1 0-1 0,-3-2-10 0,0 1-5 0,-2-1-10 0,-2 0-16 16,0-1-16-16,-2-2-20 0,-2-2-18 0,-1-1-5 0,0 0-11 0,0-2-8 15,-1-1 0-15,0 0-14 0,1-2-11 0,0 0-17 0,2-1-40 16,1-1-57-16,-1-1-113 0,2 0-139 0,-1-2-287 0</inkml:trace>
+  <inkml:trace contextRef="#ctx0" brushRef="#br0" timeOffset="3616.73">12401 5802 1837 0,'0'-3'249'0,"0"-2"-102"0,0-1-11 0,-1 1 6 0,0 0-17 15,0 1-31-15,-1 0-21 0,-2 1-15 0,0 0 1 0,-1 0 0 0,-1 0-1 16,0 2-9-16,-2-1-6 0,1 2-6 0,0-1-7 0,-2 2 2 16,0-1 5-16,0 2-1 0,-2 0 9 0,1 1-9 0,-2 2-3 0,1-2-3 15,-2 3-8-15,-1-1 5 0,0 2-6 0,1 0 1 0,-2 2 0 0,0 1-5 16,1 0 2-16,3 0-2 0,2 2 0 0,1 0-6 0,3 0 0 16,2 0-3-16,2-2-4 0,1 1-3 0,2 0 1 0,2 0-5 0,2-1 1 15,2 0 0-15,2-2-4 0,3 0 4 0,3 0-2 0,1-1-3 16,0-1-4-16,2-1-4 0,1 0-6 0,-2-2-2 0,3 0-5 0,-1-1 1 15,-1-1 3-15,0-1 3 0,0 0 12 0,-2-2 9 0,0-1-4 0,-1 0 12 16,-1-1-5-16,0-1 1 0,-3 0 5 0,1-1-5 0,-2 0 2 16,-1-1 3-16,0 1-2 0,-2 0-1 0,1 0 1 0,-1 0-1 0,-1 1-1 15,0 0-1-15,-1 0 0 0,0 1-1 0,0 0-1 0,1 0 0 16,-1 1 0-16,0 0 2 0,0 1 1 0,0 1-1 0,1 0-4 0,-1 0 2 16,0 2-8-16,1-1 8 0,-1 1-4 0,1 1 1 0,-1-1-1 0,1 0-2 15,1 0 4-15,-1 0-6 0,0-1 6 0,1 0 4 0,-2-1-8 16,1 0 4-16,-2 0 0 0,0-1-2 0,1-1 4 0,0 1 2 0,-2-1-2 15,1 0-2-15,-1 1 4 0,-1-2-1 0,0 0 5 0,-1 0 5 0,0 0 0 16,-2-1 2-16,0 0 2 0,-1 0-2 0,-1-1 6 0,-1 0 1 16,0 0-3-16,-2 0 6 0,0 1-2 0,-1-1-6 0,-1 0-1 0,-1 0-5 15,-1 0-7-15,-2 0-2 0,-2 0-6 0,-2 0-3 0,-1 0 5 0,-1-1-6 16,-2 1-2-16,0-2 3 0,1 1-11 0,0 1 5 0,4 1-6 16,1 3-10-16,6 1-5 0,1 4-13 0,2 1-16 0,1 2-18 0,1 1-32 15,1 2-30-15,1 0-32 0,1 1-44 0,2 0-51 0,1 0-94 0,1 1-184 16,2 0-518-16</inkml:trace>
+  <inkml:trace contextRef="#ctx0" brushRef="#br0" timeOffset="3883.73">12914 5944 1748 0,'-1'7'232'0,"0"0"-105"0,1 3-19 0,-2 0 2 0,2-2-9 0,-2 1-25 15,0-1-23-15,1-1-16 0,-1-1-2 0,1-2 2 0,-1 1-11 0,0-2 0 16,1-1-10-16,0 0-3 0,-1-2 2 0,0 0-2 0,1-1 2 16,0-1 0-16,-1 0-1 0,0-1 8 0,1-1-2 0,-1-2 5 0,-1-2 7 15,1-2 2-15,0-1 16 0,0-1-2 0,1 1 2 0,0 0-5 0,-1-2-3 16,2 0-3-16,0-1 1 0,0 0-3 0,1 1-4 0,1-1 5 16,0-2-7-16,1-1 3 0,0 1-4 0,1-2-5 0,0 0-1 0,1 2-14 15,0 0 1-15,1 3-22 0,1 1-8 0,1 3 3 0,0 1-10 0,-1 1 6 16,1 2-13-16,-2 1-26 0,1 1-23 0,-2 2-44 0,1 0-47 15,-1 1-64-15,0 0-85 0,0 2-129 0,1 0-206 0,0 2-261 0</inkml:trace>
+  <inkml:trace contextRef="#ctx0" brushRef="#br0" timeOffset="4200.34">13230 5919 1976 0,'7'2'319'16,"1"0"-145"-16,3 0-16 0,-2-1 6 0,1-2-13 0,1-1-40 15,0-1-26-15,1-2-15 0,0 0-7 0,-1-2-2 0,1 0-11 0,0 0-9 16,0-2-7-16,0-1-10 0,0-1-3 0,-1-1-3 0,1-1-1 16,-1 2-2-16,-1-2-4 0,0 0 6 0,0 1 0 0,0-2-10 0,0 2 12 15,-1-2-21-15,-1 0-5 0,-2 0 7 0,0 2 11 0,-3-1 11 16,0 0 3-16,-1 1 2 0,-2 0-12 0,-1 2 6 0,-2-1-2 0,0 3-4 16,-3 0-5-16,-2 2 3 0,-2 2-5 0,-1 2-2 0,-2 3-4 0,-1 2-4 15,-2 2 6-15,-2 2-2 0,-1 2 1 0,1 3-1 0,0 1 0 16,0 3-8-16,2 1 5 0,2 2 10 0,2 1 7 0,3 2 17 0,2 0 0 15,1 3-14-15,3 0 5 0,2 0-4 0,1 1-9 0,3-1 5 0,2 0-6 16,2 1-4-16,3-2 10 0,1 0-12 0,2-2-2 0,0-1 0 16,2-3-2-16,2-2-2 0,1-4-2 0,1-1-6 0,2-1-10 0,2-3-8 15,-1-2-15-15,2-2-11 0,0-2-12 0,2-3-13 0,-1-1-19 0,0-1-26 16,3-3-31-16,-1-1-45 0,3-2-35 0,-1-1-55 0,0 0-58 16,0-3-113-16,1 1-195 0,-1-2-178 0</inkml:trace>
+  <inkml:trace contextRef="#ctx0" brushRef="#br0" timeOffset="4417.13">14395 5794 2031 0,'0'8'362'0,"0"1"-155"0,1 4-8 0,0-2 17 0,1 0-17 16,2 1-20-16,0-2-28 0,1 0-23 0,1-1-15 0,1-2-22 16,2 2-13-16,2 0-13 0,1-1-11 0,2-1-32 0,1-2-22 0,1-1 0 15,1-1 0-15,2-1 0 0,0-1 0 0,2-2 0 0,1 0 0 16,-1-1 0-16,2-2 0 0,0 0 0 0,2-1 0 0,1 0 0 0,-1-2 0 15,1 0 0-15,-1 0 0 0,-1 0 0 0,-1 0 0 0,-2 0 0 0,2-1 0 16,-1 1 0-16,-2-1-12 0,1 0-80 0,-2-1-33 0,-2 2-31 16,0-1-47-16,-2 0-53 0,-2 1-47 0,-3 1-76 0,0 0-147 0,-2 0-238 15,-2 2-157-15</inkml:trace>
+  <inkml:trace contextRef="#ctx0" brushRef="#br0" timeOffset="4569.13">14653 6283 2122 0,'16'8'460'0,"3"0"-318"16,7 1 0-16,0-2 19 0,-1-3 5 0,2 0-43 0,0-1-40 0,0-1-26 15,1-2-19-15,0-1 22 0,0-1-17 0,2-2-26 0,-3-1-31 0,0-3-58 16,0-1-63-16,0-2-85 0,-1 1-121 0,0-3-193 0,-1 1-509 16,-1-3 105-16</inkml:trace>
+  <inkml:trace contextRef="#ctx0" brushRef="#br0" timeOffset="7667.08">15923 4726 2154 0,'-1'-1'218'0,"1"1"-41"0,1 0-19 0,0 0-1 0,1 0 9 16,0-1-9-16,1 1-25 0,0 1-21 0,2 1-12 0,0 0-11 15,0 1-3-15,1 2-10 0,1 1-11 0,1 2-8 0,1 2-3 0,2 1 0 16,-1 2-3-16,0 0-8 0,0 2-42 0,1 2 0 0,0 2 0 0,0-1 0 16,1 3 0-16,-2 2 0 0,2 0 0 0,-1 3 0 0,0-1 0 15,-2 2 0-15,1-1 0 0,-2 1 0 0,1-1 0 0,-1-1 0 0,0 0 0 16,-1-2 0-16,-1 2 0 0,0-3 0 0,-1-2 0 0,-1-1 0 15,-2-3 0-15,-1-1 0 0,1-3 0 0,0-1 0 0,-1-1 0 0,0-3 0 16,-1-2 0-16,0-2 0 0,0-2-76 0,0-2-28 0,-1-4-38 0,-1-1-51 16,-1-5-48-16,1-4-54 0,-3-1-59 0,0-5-105 0,-1-1-255 15,0-3-315-15</inkml:trace>
+  <inkml:trace contextRef="#ctx0" brushRef="#br0" timeOffset="7884.08">15540 4737 1630 0,'-3'1'686'0,"0"0"-467"0,-1 1-12 0,4-1-14 16,2-1 1-16,2 0-6 0,3 0-13 0,2-1-31 0,3 0-20 0,2 0-24 15,2-2-16-15,3 0-13 0,2 1-13 0,0-2-36 0,3-1-22 16,1 1 0-16,0-1 0 0,1 0 0 0,0-1 0 0,0 0 0 0,-1 0 0 16,0 0 0-16,0 0 0 0,-3 0 0 0,0 2 0 0,0-1 0 15,0 0 0-15,-1 1 0 0,-1 0 0 0,-1 1 0 0,-1 1 0 0,-1 0 0 16,-2 0 0-16,2 1 0 0,-2 1-64 0,0 0-54 0,0 1-39 0,0 1-49 15,-1 0-73-15,0 2-101 0,-3-1-156 0,2 1-342 0,-1 1-150 16</inkml:trace>
+  <inkml:trace contextRef="#ctx0" brushRef="#br0" timeOffset="8134.08">16529 4781 2334 0,'-2'8'378'0,"-1"1"-175"0,-1 5-3 16,1-2-21-16,1 0-8 0,0 1-13 0,2-2-39 0,0 3-24 0,2 0-16 16,0 1-16-16,0 0-7 0,1 3-6 0,2 1-40 0,0 1-10 0,0 1 0 15,2 1 0-15,1 0 0 0,0 1 0 0,3 1 0 0,1-1 0 16,2 2 0-16,1 0 0 0,-1 1 0 0,1 0 0 0,0-1 0 0,0 0 0 16,-1-2 0-16,0 2 0 0,0-3 0 0,0 0 0 0,-1-2 0 15,-1-2-18-15,1-2-42 0,-1-3-11 0,-1-2-7 0,0-1-15 0,-3-3-14 16,-1 0-26-16,-2-4-41 0,-1 0-54 0,-2-3-51 0,-2-1-39 0,-1-3-108 15,-1-2-146-15,-1-3-77 0,-1-4-37 0</inkml:trace>
+  <inkml:trace contextRef="#ctx0" brushRef="#br0" timeOffset="8350.08">16520 4972 1237 0,'-7'-11'499'0,"-1"0"-331"0,-1-4-5 16,3 2-5-16,2 2 4 0,0-1 14 0,2 2-9 0,2 0-11 15,0 0-20-15,3 0-6 0,2 2-13 0,2-2-9 0,1 0-2 0,3-1-9 16,3 0-9-16,1 0-2 0,2 1-13 0,4-1-9 0,1-2-1 0,0 1-12 15,0 0-9-15,0 1-4 0,-1 1-28 0,0 2-10 0,0 1 0 16,-2 2 0-16,1 2 0 0,-1 1 0 0,-1 2 0 0,-1 1 0 0,0 2 0 16,-1 2 0-16,-2 1 0 0,0 2 0 0,-2 1 0 0,-1 0 0 0,-2 3 0 15,-2-1 0-15,-2 1 0 0,0-1 0 0,-2 1-18 0,-1-1-34 16,-3 0-5-16,-1 1-8 0,-2 0-11 0,-3 0 1 0,0 0-9 0,-3 0 0 16,-3 0 4-16,0 0-1 0,-2-1 2 0,1-1-9 0,0 0-19 0,0-1-27 15,0-2-32-15,3-1-32 0,0-2-44 0,1-2-68 0,3-1-135 16,3-1-443-16</inkml:trace>
+  <inkml:trace contextRef="#ctx0" brushRef="#br0" timeOffset="8567.08">17250 4858 2489 0,'3'2'266'0,"1"1"-98"0,1 1 2 0,0 0 2 0,1-1 13 0,2-1-27 16,0 0-41-16,1-1-34 0,1-1-27 0,2 0-15 0,-1 0-12 0,1-1-7 15,0 0-9-15,0 1 1 0,1-1-8 0,-1 0 0 0,1 0-4 16,0 0-2-16,0 0 2 0,1 0-4 0,-1-1-2 0,0 1 2 0,-1-1-8 16,0 0-5-16,0 1-11 0,-1 0-15 0,-1-1-10 0,-1 0-12 0,0 0-23 15,-1 0-44-15,-1-1-44 0,0-1-58 0,0-1-62 0,-1 0-75 16,1-1-214-16,-1-1-629 0</inkml:trace>
+  <inkml:trace contextRef="#ctx0" brushRef="#br0" timeOffset="8753.08">17475 4550 2557 0,'-3'0'213'0,"-1"0"-38"0,-1 2 13 0,2 1-13 15,1 1-5-15,1 2-18 0,0 0-30 0,1 2-24 0,0 2-12 16,1-1-5-16,0 2-15 0,1-1-54 0,1 3-12 0,-1 1 0 0,2 1 0 16,-1 0 0-16,0 2 0 0,2 2 0 0,0 0 0 0,0 0 0 0,1 1 0 15,0-1 0-15,0-1 0 0,0 1 0 0,1-1 0 0,0-2 0 16,-1 0 0-16,1-1 0 0,0-2-18 0,0-2-125 0,1-3-58 0,-1 0-98 15,1-2-125-15,0-1-205 0,0-3-352 0,1-1-31 0</inkml:trace>
+  <inkml:trace contextRef="#ctx0" brushRef="#br0" timeOffset="8968.07">17922 4516 2557 0,'-2'3'209'0,"0"1"-42"0,-1 2 15 0,1 1 4 15,0 1 13-15,1 0-29 0,1 3-38 0,0 0-39 0,1 0-32 16,0 2-6-16,0-1-9 0,1 3-8 0,1 2-38 0,-1 1 0 0,1 1 0 16,0 3 0-16,0 2 0 0,0 0 0 0,0 3 0 0,0-1 0 0,0-1 0 15,0 1 0-15,0-2 0 0,0 1 0 0,1-2 0 0,-1-1 0 16,0-3 0-16,2-3 0 0,0-1-6 0,1-3-68 0,0-2-13 0,1-2-16 16,0-3-25-16,0-2-28 0,1-2-35 0,0-2-28 0,-2-4-46 0,1-2-62 15,0-2-129-15,-1-3-175 0,-1-1-358 0</inkml:trace>
+  <inkml:trace contextRef="#ctx0" brushRef="#br0" timeOffset="9167.07">17721 4519 2259 0,'-10'-1'196'0,"0"1"-8"0,-2 0 6 0,4 0 5 0,3 0 0 0,2 0-21 16,2 0-34-16,2 0-31 0,0-1-20 0,2 1-12 0,1-1-14 0,2-1-1 15,2 1-6-15,3-2-8 0,1 1-46 0,4-1-6 0,0 0 0 16,1-1 0-16,1 0 0 0,1-1 0 0,2 1 0 0,-1-2 0 0,1 1 0 15,1 0 0-15,-3-1 0 0,1-1 0 0,-1 1 0 0,-2-1 0 0,0 2 0 16,-1 0 0-16,-1 2 0 0,-2 0 0 0,-1 1 0 0,1 1-78 16,-2 0-52-16,0 1-62 0,0 0-88 0,-2 1-105 0,0 1-151 0,0-1-317 15,0 1-259-15</inkml:trace>
+  <inkml:trace contextRef="#ctx0" brushRef="#br0" timeOffset="9400.07">18334 4440 2328 0,'-1'3'302'16,"3"1"-111"-16,1 2-7 0,1 0-7 0,0 0 4 0,0 1-18 0,0 0-25 15,2 1-40-15,-1 0-25 0,1 3-21 0,0 0-5 0,0 1-4 0,-2 2-7 16,2 1-4-16,0 2-10 0,1 1-2 0,-1 0-12 0,0 2-8 16,0 2 0-16,1 0 0 0,-1 3 0 0,0 1 0 0,-1-2 0 0,0 0 0 15,0-3 0-15,-1-2 0 0,0-1-2 0,-1-2-22 0,1-4-16 16,-1 0-12-16,0-2-20 0,-1-2-10 0,0 0-58 0,-1-2-12 0,-1-2-4 15,-1-1-21-15,-2-2 4 0,1-2-54 0,-1-2-74 0,-1-3-66 0,1-2-71 16,0-2 18-16,-1-1 31 0,0-2-251 0</inkml:trace>
+  <inkml:trace contextRef="#ctx0" brushRef="#br0" timeOffset="9717.08">18437 4588 1143 0,'-1'-14'422'0,"0"-2"-231"0,1-3-4 16,0 1-13-16,0 3 10 0,0 0-10 0,0 2-25 0,1 0-23 0,0-1-22 15,0 2-8-15,1 0 5 0,-1 3-5 0,1-1 1 0,1 1-6 16,-1 1-13-16,0 1-6 0,0 1-7 0,0 2-7 0,1 2-2 0,1 2 1 15,-1 2-7-15,1 1-6 0,1 4-1 0,0 1-8 0,1 3 0 0,1 1-5 16,0 1-7-16,0 2 13 0,0 3-14 0,1 0 8 0,0 1-6 16,0 2-22-16,-1-1-2 0,1 0 0 0,0 0 0 0,1-2 0 15,-2-1 0-15,3-1 0 0,-1 1 0 0,1-2 0 0,-2-2 0 0,0 0 0 0,-1-3 0 16,-2 0-10-16,1-4 4 0,-1-2 2 0,0-2 0 0,1-3-2 16,1-2 8-16,0-2-6 0,0-2 10 0,1-2 2 0,0-1-6 0,-1-3 8 15,2 0-4-15,-1-2-6 0,1-1 0 0,0-1 0 0,0 1 0 16,-1-2 0-16,1-2 0 0,0 0 0 0,0-2 0 0,0-1 0 0,0 1 0 15,1-1 0-15,-1 0 0 0,-2 0 0 0,2 1 0 0,0 3 0 0,0 2 0 16,-1 4 0-16,0 2 0 0,-1 3 0 0,-2 3 0 0,1 3 0 16,-2 0 0-16,-1 2 0 0,0 2 0 0,-1 0 0 0,0 3 0 0,-1 0 0 15,-1 1 0-15,0 1 0 0,-1 1 0 0,0 0-36 0,-1 1-46 0,0 0-10 16,-1 0-30-16,1 3-26 0,-1-1-35 0,1 1-53 0,-1-1-61 16,1 0-88-16,0 1-207 0,-1 0-294 0,-1 1 92 0</inkml:trace>
+  <inkml:trace contextRef="#ctx0" brushRef="#br0" timeOffset="10149.95">15886 5893 1947 0,'-1'0'140'0,"-2"1"-31"0,0 1-20 0,3 0 6 16,0-1 10-16,2 0-5 0,1 0-2 0,0-1-21 0,2 0-13 0,2-1-2 15,3-1-11-15,2 0 1 0,3-1 1 0,4 0-9 0,4-2-1 16,4 0 5-16,4-3 5 0,2 0 7 0,5-2 9 0,5-1 4 0,5-1 2 15,6 0 3-15,7 0 9 0,3-1 1 0,6-1 4 0,7 2 0 0,5-2-1 16,3 0-31-16,8 0-60 0,1 0 0 0,6 2 0 0,0-2 0 16,4 0 0-16,2-1 0 0,1 1 0 0,1-1 0 0,0-1 0 0,2 0 0 15,-1 1 0-15,-1-1 0 0,-1-1 0 0,-1 0 0 0,0 2 0 0,-2-2 0 16,-1 1 0-16,1-1 0 0,-2 1 0 0,1-2 0 0,-1 1 0 16,-3-1 0-16,0 0 0 0,-2 0 0 0,-2 1 0 0,-1 2 0 0,-4 1 0 15,-3 0 0-15,-3 1 0 0,-1 1 0 0,-4 0 0 0,-3 1 0 16,-2 0 0-16,-6 0 0 0,-5 1 0 0,-6 0 0 0,-7-1 0 0,-5 1 0 15,-8 1 0-15,-5-1 0 0,-4 2 0 0,-5 2 0 0,-5-2 0 0,-4 1-198 16,-4-1-108-16,-5 1-115 0,-4-2-213 0,-5 0-242 0,-4-1-275 16</inkml:trace>
+  <inkml:trace contextRef="#ctx0" brushRef="#br0" timeOffset="16701.52">21130 4955 1925 0,'-6'2'287'0,"-1"1"-99"0,-1 1 4 15,2 0-11-15,0 0-2 0,1 0-10 0,0 1-32 0,1 1-20 0,0 0-20 16,2-1-17-16,0 0-2 0,2 0-6 0,-1 0-5 0,2-1-7 0,0 1-10 15,1 0-3-15,1-2-5 0,2 1-7 0,0-2-1 0,2 0-16 16,1 1 2-16,0-1-6 0,2 0-8 0,1-2-6 0,1-1 0 0,1-1 0 16,1 1 0-16,1-3 0 0,0 1 0 0,1-1 0 0,2-1 0 15,-2-1 0-15,1 1 0 0,1-1-16 0,-1 0-24 0,-1 1-18 0,0-1-24 16,0 1-34-16,-1 0-46 0,0 0-64 0,0 3-82 0,-1-1-91 0,0 0-111 16,-3 0-203-16,1 1-295 0</inkml:trace>
+  <inkml:trace contextRef="#ctx0" brushRef="#br0" timeOffset="16884.52">21153 5245 2587 0,'-6'17'257'0,"1"1"-113"0,1 4-17 16,4-4 0-16,4-2 17 0,2-2-2 0,2 1-26 0,4-2-33 0,2-1-23 16,2-2-16-16,4-4-11 0,3-1-2 0,1-2-8 0,4-1-11 15,0-1 10-15,2-2-12 0,0-2 1 0,2-1-3 0,0-2-14 0,2-2-9 16,-1-2-25-16,1-4-28 0,-2-1-47 0,1 0-61 0,-1-1-87 15,0 0-154-15,-4 0-227 0,2 2-766 0</inkml:trace>
+  <inkml:trace contextRef="#ctx0" brushRef="#br0" timeOffset="24301.37">15623 7055 1250 0,'-5'-2'786'16,"-1"1"-609"-16,-1 1 16 0,1-1 1 0,2 2 15 0,0-1-15 15,1 2-47-15,1 1-30 0,1 2-20 0,0 1-13 0,1 1-4 0,0 3-11 16,1 0-5-16,0 2-11 0,2 1-9 0,1 2-2 0,1 2-1 0,0 1-5 16,2 1 2-16,0 3-3 0,0 2-4 0,2 4 3 0,-1 0-4 15,-1 0-4-15,2 1-6 0,0-3-16 0,0 1-4 0,0-1 0 0,-1 0 0 16,1 0 0-16,-3-4 0 0,3 1 0 0,-1-4 0 0,0-1 0 0,0-2 0 15,0-3 0-15,-1-1 0 0,-1-3-10 0,-2-1 6 0,1-1-4 16,-1-2-14-16,-1-2-16 0,-1-2-21 0,0-2-25 0,-1-2-26 0,-2-3-36 16,0-3-47-16,-1-1-53 0,-1-2-67 0,0-3-72 0,-2-4-115 15,0-1-136-15,0-3-304 0</inkml:trace>
+  <inkml:trace contextRef="#ctx0" brushRef="#br0" timeOffset="24485.36">15458 7088 1204 0,'-19'-2'210'16,"-4"0"-3"-16,-3 0-2 0,2 0 15 0,4 2 4 0,3-1-9 0,1 1-14 15,4 1-16-15,2-1-8 0,3 0-20 0,2 0-16 0,3 1-15 16,0-1-20-16,1 0-20 0,1 0-9 0,2 0-12 0,0-1-3 0,2 0-6 16,3 0 1-16,3-2-5 0,1 0-10 0,4 0-22 0,1-1-20 15,2-1 0-15,1-1 0 0,1 1 0 0,0-2 0 0,1-1 0 0,0 0 0 16,1 0 0-16,2 0 0 0,-2-1 0 0,3 0 0 0,0 1 0 0,0-2 0 16,1 1 0-16,-1 0 0 0,1 1 0 0,-1 1-72 0,0 1-62 15,2 1-49-15,-2 2-77 0,0 0-99 0,1 0-120 0,0 1-226 0,0 2-542 16</inkml:trace>
+  <inkml:trace contextRef="#ctx0" brushRef="#br0" timeOffset="24684.09">16120 6918 2063 0,'-8'12'551'16,"2"1"-344"-16,-2 6 6 0,4 0-19 0,1-1 6 0,1 4-29 15,2 1-41-15,1-1-22 0,1 3-25 0,0-2-10 0,1 3-17 0,1 1-12 16,1 1-42-16,2 4-2 0,1 0 0 0,1 2 0 0,2 1 0 15,2-1 0-15,0 2 0 0,-1 0 0 0,1-1 0 0,1-1 0 0,0-1 0 16,1-3 0-16,0-1 0 0,-1-3 0 0,0-1 0 0,-1-4-20 0,-1-1-42 16,0-3-27-16,-1-4-16 0,-1-4-36 0,-1-2-50 0,0-2-70 15,-2-3-74-15,0-3-96 0,-2-3-189 0,-1-4-535 0</inkml:trace>
+  <inkml:trace contextRef="#ctx0" brushRef="#br0" timeOffset="24901.09">16039 7004 1887 0,'-8'-4'404'16,"0"-2"-285"-16,0 1 32 0,4 0 18 0,3 1 16 0,3 1-13 0,3-1-42 16,2 1-24-16,3-1-8 0,1 0-8 0,4 0-4 0,0 0-15 0,3 1-12 15,4 0-19-15,-1 1-7 0,4 1-2 0,1 2-12 0,-2 0 1 16,2 2-1-16,-3 0-7 0,0 2 0 0,0 0-20 0,-2 0-4 0,-1 1 6 16,-1 0-5-16,-2 0 18 0,-1-1-9 0,-2 2-3 0,-2 0-3 15,-3 0 6-15,-3 0-10 0,-1 1-13 0,-2 0-6 0,-2 1-19 0,-2-1-9 16,-2 1-9-16,-2 1-16 0,-3-1-19 0,-2 2-15 0,-3 1-5 0,-1-1-2 15,-1 1 7-15,0 1 5 0,-2-2-13 0,-1 1-19 0,1 0-23 16,-1-3-36-16,0 1-73 0,2 0-119 0,1-2-147 0,0-1-180 16</inkml:trace>
+  <inkml:trace contextRef="#ctx0" brushRef="#br0" timeOffset="25101.48">16672 6971 2579 0,'-1'1'187'16,"1"0"-59"-16,1 1 24 0,2 1 12 0,1-1 1 0,0 0-42 0,1-1-47 16,1-1-20-16,1 0-20 0,1 0-3 0,1-2-9 0,1 0-6 15,2 0 3-15,-1 0-14 0,2-1 1 0,-1 1 5 0,0 0-7 0,0 0 11 16,-1-1-9-16,3 1-6 0,-1-1-10 0,1-1-11 0,-1 1-8 0,0-2-21 16,1 1-18-16,-1-1-19 0,-1 0-26 0,-1 1-32 0,2-1-45 15,-2-1-54-15,0 0-68 0,0-1-101 0,-1 0-194 0,-2 0-445 0</inkml:trace>
+  <inkml:trace contextRef="#ctx0" brushRef="#br0" timeOffset="25284.48">16815 6785 2617 0,'-4'2'342'0,"1"1"-172"0,-1 1 13 0,4 1-12 0,2 1-18 15,1-1-26-15,2 3-30 0,1 1-31 0,1 0-1 0,1 1-13 0,0 0-6 16,1 2-40-16,1 0-6 0,0 3 0 0,1 0 0 0,1 2 0 0,-1 1 0 15,0 3 0-15,-1 1 0 0,2 1 0 0,-2 1 0 0,0-1 0 16,-1 1 0-16,-1-1-14 0,0-2-72 0,-1-1-39 0,0-3-56 0,0-3-78 16,-1 0-108-16,0-2-155 0,1-2-297 0,-1-2-362 0</inkml:trace>
+  <inkml:trace contextRef="#ctx0" brushRef="#br0" timeOffset="25534.23">17254 6715 2345 0,'-4'-2'517'0,"0"2"-349"0,0 0 18 0,2 3-7 16,0 0-2-16,2 2-28 0,0 1-37 0,0 2-29 0,2 1-18 0,0 1-7 16,0 2-12-16,2 1-36 0,0 1-10 0,1 1 0 0,0 4 0 0,0 1 0 15,1 2 0-15,0 2 0 0,1 2 0 0,0-3 0 0,0 2 0 16,0-1 0-16,1 0 0 0,-1 0 0 0,0-3 0 0,0 1 0 0,-1-2 0 15,0-2 0-15,-1-1 0 0,0-3 0 0,1-2-40 0,-1-2-44 16,1-2-10-16,-1-2-25 0,1-2-25 0,0-2-62 0,-1-1-48 0,-1-3-69 16,-1-1-116-16,-1-2-189 0,0-3-542 0</inkml:trace>
+  <inkml:trace contextRef="#ctx0" brushRef="#br0" timeOffset="25718.23">17169 6780 2294 0,'-2'-3'212'0,"-1"0"-54"15,0-1 24-15,2 1 2 0,3 1 2 0,0 0-36 0,1 0-40 16,3-1-19-16,2 0-11 0,2-1-13 0,1 1-2 0,4-1-9 0,-1 0-15 16,2-1-4-16,1 0-10 0,-2 1 1 0,1 0-5 0,0 0-9 0,0 0 0 15,-1 0-8-15,-2 0 4 0,2 1-6 0,-1 0-8 0,0 2 4 16,-1-1-10-16,-2 1 2 0,0 1-14 0,0 0-21 0,-2 0-26 0,0 0-37 16,0 1-39-16,-3 0-66 0,1 1-81 0,0 1-104 0,-2 1-166 0,0 2-370 15,-2-1 14-15</inkml:trace>
+  <inkml:trace contextRef="#ctx0" brushRef="#br0" timeOffset="25868.23">17309 6900 2120 0,'6'3'114'16,"1"-1"-26"-16,4 0 19 0,1 0 24 0,0-1 10 0,2 0-18 0,2-1-32 16,1 0-36-16,0-2-12 0,2-1-12 0,0-1-17 0,1-1-7 0,0 0-11 15,0-2-33-15,-2 1-35 0,0-2-59 0,-1 1-70 0,0-1-83 16,-2 0-120-16,1 0-191 0,-2-1-336 0</inkml:trace>
+  <inkml:trace contextRef="#ctx0" brushRef="#br0" timeOffset="26051.27">17757 6821 1720 0,'-4'14'285'0,"0"1"-110"0,0 4 32 0,1 0 22 15,2-1 6-15,1 2-31 0,0-1-63 0,2 3-29 0,1 0-1 16,1-1-14-16,1 3-5 0,0 0-13 0,1 1-27 0,1 1-16 0,0-1-7 15,1 1-12-15,2-2 3 0,-1 1-11 0,1 1-5 0,0-3 2 16,0 0-10-16,-1-4 4 0,0-3-12 0,-1-3-38 0,0-2-28 0,-2-3-53 16,-1-2-62-16,0-2-77 0,-2-3-109 0,0 0-140 0,-1-3-250 0,-1-3-255 15</inkml:trace>
+  <inkml:trace contextRef="#ctx0" brushRef="#br0" timeOffset="26253.27">17645 6790 2358 0,'-3'-5'210'0,"-1"-2"-130"16,2-2 15-16,2 0 21 0,3 2 30 0,2 0 3 0,0 0-18 0,2 0-21 16,3 0-16-16,3 0-5 0,4 0-8 0,0 0-7 0,1 1-13 0,1 0-11 15,1 1-15-15,0 3-9 0,1 0-3 0,0 2-3 0,-2 1 0 16,0 1-9-16,-1 1 3 0,-3 2-6 0,0 2-2 0,-2 0 2 0,-1 1-8 16,-2 0 6-16,-1 1 0 0,-1 0-4 0,-2-1 2 0,-1 2-10 0,-2-1-4 15,-1 1 2-15,-2 0-16 0,-1 0-15 0,-2 0-18 0,0 1-22 16,-1-1-19-16,-2 0-30 0,-1-1-35 0,0 0-30 0,-1 0-29 0,-1-1-18 15,-1 0-34-15,1 0-51 0,0-1-107 0,0-1-167 0,2 0-221 16</inkml:trace>
+  <inkml:trace contextRef="#ctx0" brushRef="#br0" timeOffset="26451.27">18089 6811 2453 0,'2'0'280'0,"1"0"-120"15,2 1 2-15,1-1 16 0,1 0-5 0,2 0-37 0,0-1-38 16,1-2-34-16,0 1-24 0,1-2-9 0,0 0-14 0,3-1-9 0,-1 1-4 16,0-1-4-16,2 1 4 0,-1 1 0 0,-1 0-3 0,-1 0-4 0,0 1 1 15,-1 1-8-15,0-1-5 0,0 0-14 0,-1 1-25 0,-1-1-21 16,0 0-34-16,0 0-34 0,-1 1-46 0,0-2-50 0,-2 0-73 0,1 0-109 16,-1 0-214-16,-2-1-433 0</inkml:trace>
+  <inkml:trace contextRef="#ctx0" brushRef="#br0" timeOffset="26635.27">18254 6632 2520 0,'-2'5'225'0,"0"2"-5"16,1 2 2-16,0 1 1 0,1 1-40 0,2 1-34 0,0 0-45 0,1 2-22 16,1 1-17-16,0 0-15 0,0 0-4 0,2 2-40 0,0 2-6 0,1 0 0 15,0 2 0-15,0 1 0 0,1 0 0 0,0 2 0 0,1-1 0 16,-2-1 0-16,1-1 0 0,0-2 0 0,-2-4 0 0,1-1 0 0,-2-2-12 15,1-3-119-15,-1-3-67 0,1-2-102 0,0-2-122 0,2-3-184 16,1-2-297-16,1-3-185 0</inkml:trace>
+  <inkml:trace contextRef="#ctx0" brushRef="#br0" timeOffset="26837.27">18678 6510 1828 0,'-7'6'627'0,"0"2"-415"0,-3 3-7 0,2 0-10 0,1 0 7 15,1 1-21-15,2 3-46 0,-2 1-31 0,1 1-28 0,0 0-10 16,1 1-8-16,2 1-3 0,-1-2-6 0,2 1-13 0,0-1-4 0,1 0-8 16,1-1-14-16,1 2-10 0,-1-1 0 0,1 0 0 0,0 1 0 0,0-1 0 15,0 0 0-15,0-3 0 0,1 0 0 0,1 0 0 0,0-2-2 16,0-1-26-16,0-2-8 0,1-1-20 0,0-1-22 0,-1-2-23 0,1-1-32 16,0-2-37-16,0-1-61 0,-1-1-62 0,0-3-97 0,-1-1-141 0,-1-2-178 15,1-3-245-15</inkml:trace>
+  <inkml:trace contextRef="#ctx0" brushRef="#br0" timeOffset="27020.27">18434 6585 2162 0,'-5'-4'270'0,"0"0"-109"0,-1 0 21 0,2 1 5 16,3 1 12-16,0 2-26 0,1 0-39 0,2 1-22 0,0 0-22 0,2 1-2 16,2-1-11-16,1 0-13 0,2-1-5 0,0 0-12 0,3 1-3 0,2-2-4 15,1 1-34-15,1-1-6 0,-1-1 0 0,1 1 0 0,0-1 0 16,-1 0 0-16,-1 0 0 0,0 1 0 0,0-1 0 0,-1-1 0 0,-1 0 0 15,0 0 0-15,1 1-66 0,-1-1-35 0,0 1-27 0,-2 0-36 0,2 1-57 16,0-1-72-16,0 1-91 0,0 1-135 0,0 0-217 0,-1 0-296 16</inkml:trace>
+  <inkml:trace contextRef="#ctx0" brushRef="#br0" timeOffset="27467.97">18904 6512 2043 0,'-1'4'275'0,"1"1"-87"0,1 1 12 0,-1 0 12 0,2 1-8 16,0 1-37-16,2 1-46 0,0 0-39 0,-1 2-20 0,1 1-17 0,0 1-6 16,0 0-9-16,1 2-7 0,-1 1-8 0,2 1-7 0,-1 0-4 0,0-1-1 15,0 0-3-15,-1 0 2 0,-1-1 4 0,2-1 0 0,-2 1-8 0,1-2 2 16,-1 0-12-16,1-3-3 0,-1 0 0 0,0-1-17 0,0-3-4 16,-2-1-15-16,1-1-16 0,0-2-19 0,-1 0-5 0,-1-1-7 0,0-2-18 15,-1 0-14-15,1-2-18 0,-1-2-7 0,1-2 23 0,-1-1 26 16,0 0 27-16,0 0 19 0,1-2 12 0,-1 0 19 0,-1 1 13 0,1-1 10 15,0 0 16-15,0 0 3 0,1 1 11 0,-1-2 13 0,0 1 14 0,1-1 22 16,-1 0 20-16,1-1 10 0,-1-1 10 0,2-1-4 0,0 0 5 16,0 0-4-16,1 2-9 0,0 2-6 0,0 1-12 0,-1 1-4 0,0 2-11 15,1 2-7-15,0 0-3 0,1 2-9 0,-1 1 4 0,1 2-5 0,0 1-4 16,0 1-7-16,-1 2-2 0,1 1-8 0,1 1-2 0,0 2-1 16,0 0-4-16,1 2 1 0,0-1-3 0,1 2-4 0,0 1 0 0,-1-1-2 15,2 0 0-15,0-2 0 0,0 1-6 0,0-2-2 0,1 0-4 16,0-2 0-16,0-2 0 0,-1-1 0 0,2-2 0 0,-1-2 2 0,-1-1 0 15,1-3-8-15,0-1 2 0,-1-1-6 0,1-3 2 0,-2-1 4 0,2-2-4 16,0 0 6-16,-1-1 2 0,0-2-4 0,-1 1 4 0,0 0-4 16,-1 1 4-16,1-1-2 0,-1-1-2 0,-1 1 4 0,0 0-6 0,1 0 2 15,-1-2-2-15,1 0-10 0,-1 0-6 0,1 0-21 0,0 1-11 0,0 3-16 16,0 2-30-16,0 0-28 0,0 3-40 0,-1 0-67 0,0 2-70 16,-1 3-112-16,0 0-206 0,0 3-536 0</inkml:trace>
+  <inkml:trace contextRef="#ctx0" brushRef="#br0" timeOffset="27667.97">19446 6592 2585 0,'1'2'171'0,"1"0"-24"0,2 1-4 15,1 0 5-15,1-1-12 0,1-1-32 0,1 0-36 0,-1-1-24 16,3-1-12-16,-1-2-10 0,1 0-3 0,1 0-11 0,-2-2-3 0,1 2-3 15,-1-1-4-15,1 0 2 0,-1 1-7 0,1-1-6 0,-1 0-12 0,0 1-8 16,-1 0-14-16,0-1-6 0,0-1-13 0,0 1-19 0,-1 0-33 16,0-1-37-16,1 1-39 0,-1-1-57 0,-1 0-69 0,0 0-141 0,0 0-255 15,-1-1-92-15</inkml:trace>
+  <inkml:trace contextRef="#ctx0" brushRef="#br0" timeOffset="27834.68">19591 6409 2375 0,'-2'10'171'0,"2"0"7"16,-1 4 2-16,3 1 5 0,0 0-23 0,1 0-45 0,1 0-46 0,1 0-25 15,-1 1-24-15,2 0 4 0,0-1-7 0,0 2-10 0,1 0-1 0,-1 1-8 16,1-1 0-16,0 0-2 0,-1-1-17 0,1-3-31 0,-1-2-53 16,1 0-78-16,0-2-88 0,0-2-103 0,0-2-134 0,1-2-206 0,1-2-250 15</inkml:trace>
+  <inkml:trace contextRef="#ctx0" brushRef="#br0" timeOffset="28068.68">19929 6265 2595 0,'-3'1'175'0,"0"2"7"0,-1 2-1 0,1 0 7 0,1 3-2 15,-1 0-30-15,2 2-46 0,0 1-33 0,0-1-16 0,2 2-12 0,0 1 14 16,1 1-5-16,1 1-44 0,0 1-14 0,2 0 0 0,0 2 0 15,1 0 0-15,0 2 0 0,1 2 0 0,1-2 0 0,-1 2 0 0,2 0 0 16,-2 0 0-16,2 1 0 0,-1-1 0 0,1-1 0 0,0-1 0 0,0-1 0 16,0-3 0-16,-1-1 0 0,1-2 0 0,-1-1 0 0,0-2-58 15,0-3-61-15,-2-1-20 0,0-1-38 0,0-3-37 0,0-3-46 0,1-2-62 16,0-3-77-16,-1-4-117 0,-1 0-185 16,0-3-167-16</inkml:trace>
+  <inkml:trace contextRef="#ctx0" brushRef="#br0" timeOffset="28254.68">19911 6256 2045 0,'-2'-2'237'0,"1"2"-53"0,-1 0 2 0,3 0 4 0,0 1 7 15,1 1-26-15,0-1-29 0,2 1-29 0,2 0-28 0,3 0-10 0,0 0-9 16,3-1-13-16,1 0 3 0,1 0-10 0,2-1-9 0,1 0 2 0,1 1-9 16,-1-2-7-16,0 1-3 0,0 0-6 0,-2-1-6 0,1 0-6 15,0-1 0-15,-1 0-2 0,-2 0 2 0,-1 1-4 0,0-1-12 0,-2 1-16 16,-1 0-21-16,-1-1-21 0,0 1-30 0,-2 0-35 0,0 1-48 15,-1 1-67-15,-1 0-87 0,-1 1-136 0,-1 1-249 0,-2 2-392 0</inkml:trace>
+  <inkml:trace contextRef="#ctx0" brushRef="#br0" timeOffset="28418.68">20077 6446 2100 0,'6'6'212'0,"1"2"-64"0,2 0-16 0,1 1 13 16,2-2 6-16,1-1-21 0,0 0-33 0,1-1-44 0,1-2-16 15,0-1-16-15,1-1-5 0,0-2-7 0,1 0-11 0,0-1-15 0,-1 0-15 16,-1-2-26-16,2-1-43 0,-1 0-51 0,0-2-56 0,-1 0-58 0,0-1-73 16,1-1-127-16,0-1-149 0,-2 1-128 0</inkml:trace>
+  <inkml:trace contextRef="#ctx0" brushRef="#br0" timeOffset="28851.68">20580 6236 1937 0,'-1'2'240'0,"0"1"-62"16,0 1 14-16,0 2 16 0,1 0 16 0,-1 1-19 0,1 2-43 0,1 1-36 16,-1 1-22-16,0 0-29 0,1 0-6 0,0 0-14 0,1 2-3 15,0 1 6-15,0 0-9 0,1 0 0 0,-1 0-21 0,1 1-6 0,1 0 0 16,0 0-12-16,0-1 0 0,0 1 0 0,2-1-8 0,0-1 2 0,0-2 0 16,0 0-4-16,0 1 0 0,-1-2-2 0,-1 0-4 0,1-1-4 15,-1-3-2-15,-1 0-18 0,-1 0-4 0,-1-2-21 0,0 0-4 0,-1-2-11 16,-1-1-16-16,-1-2-11 0,0-1-22 0,-2-2-24 0,0-1-26 15,0-1-10-15,1-1-6 0,-2-2 3 0,-2-2 16 0,1 0 11 0,-1-1 22 16,0 0 33-16,0 0 35 0,-1-1 31 0,2-1 30 0,0 0 25 0,2 1 15 16,-1 1 19-16,2-1 13 0,0 0 13 0,0 0 12 0,1 1 14 15,-1-1 6-15,1 0 4 0,1 1 1 0,0 1-1 0,1 1-1 0,1 2-8 16,1 1-2-16,0 0-19 0,1 3-2 0,1 0-6 0,-1 2-12 0,2 1-3 16,-1 0-2-16,1 3-12 0,2 0 4 0,0 2-8 0,1 1-11 15,1 2-15-15,0 0-5 0,2 1 1 0,0 2-6 0,1 0 17 0,1 2 17 16,1 1-8-16,0-1-4 0,-1-1-22 0,1 1-10 0,0-2 0 15,1 0 0-15,-1-2 0 0,0 0 0 0,0-3 0 0,-2 0 0 0,-1-1 0 16,-2-4 0-16,0-1 0 0,1-2 0 0,-2-3 0 0,1 0 0 0,0-3 0 16,-1-2 0-16,-1-2 0 0,0-1 0 0,1-2 0 0,0-1 0 15,0-1 0-15,-1 0 0 0,1 0 0 0,-1-1 0 0,-1-1 0 0,2 0 0 16,-1 0 0-16,0-1 0 0,0 1 0 0,1-3-2 0,0 1-20 0,-1 0-16 16,0-1-12-16,2 2-11 0,0-2-28 0,0 2-28 0,-1 1-55 15,0 1-64-15,0 1-76 0,0 3-121 0,-1 2-250 0,0 1-519 0</inkml:trace>
+  <inkml:trace contextRef="#ctx0" brushRef="#br0" timeOffset="36452.08">22018 4115 1731 0,'-2'0'168'0,"-1"2"-4"0,0 1 26 16,1 0 12-16,0 3 0 0,0 2-20 0,0 1-37 0,1 1-35 0,0 2-20 15,0 0-23-15,2-1 1 0,1 3-12 0,1 1-10 0,2 0 0 0,0 0-13 16,3 2-4-16,1-1-1 0,4 0-5 0,0 0-8 0,4 1-4 15,1 0-3-15,0 0-5 0,1-1 3 0,1 0-2 0,-1 0-6 0,2-4 4 16,2-2-2-16,-2-2 3 0,2-1 3 0,1-3-4 0,-3-1-4 0,1-1 0 16,-1-2 4-16,-1-2 2 0,0-2 3 0,0-2-5 0,-2-1 0 15,0-3-2-15,-3 0 4 0,0-3 5 0,-1-2-3 0,-1 0 5 0,0 0-1 16,-2-1-1-16,-1 0 1 0,-1-1 5 0,-2 2 2 0,-1-1 6 16,-1 0 2-16,-1 1 2 0,-2 1 4 0,-1 1 2 0,0 0 12 0,-3 2-3 15,1 1 3-15,-1 2-1 0,-1 4-12 0,0 0-26 0,1 2-6 0,-1 3 0 16,0 1 0-16,0 2 0 0,0 1 0 0,0 3 0 0,-1 3 0 15,1 2 0-15,0 3 0 0,0 1 0 0,1 2 0 0,0 2 0 0,1 1 0 16,1 3 0-16,2 3 0 0,1 0 0 0,0 1 0 0,1 2 0 0,0 0 0 16,1 0 0-16,2 1 0 0,0-2 0 0,1 2 0 0,1-1 0 15,1 0 0-15,0 0 0 0,-1-2 0 0,0-4 0 0,1 0-52 0,2-4-71 16,0-1-34-16,-1-3-52 0,-1-2-78 0,1-1-111 0,0-2-152 16,0-1-288-16,0-3-196 0</inkml:trace>
+  <inkml:trace contextRef="#ctx0" brushRef="#br0" timeOffset="36735.08">21801 5286 1645 0,'-20'23'1088'0,"0"1"-935"0,-3 4 14 15,7-4-8-15,6-5 24 0,5-4-2 0,4-2-37 0,4-1-33 0,4-3-26 16,5-1-14-16,3-4 9 0,7-1-52 0,6-2-28 0,7-1 0 0,5-3 0 15,8-1 0-15,5-3 0 0,5-1 0 0,6-3 0 0,5-2 0 16,2-1 0-16,5-3 0 0,5-3 0 0,1 0 0 0,4-3 0 0,3 1 0 16,2-1 0-16,3 1 0 0,-1-2 0 0,4 1 0 0,-1-2 0 15,-1 0 0-15,2 1 0 0,-1 0 0 0,-1 2 0 0,-2-1 0 0,1 0 0 16,-4 2 0-16,0-1 0 0,-3 2 0 0,-1 2 0 0,-3 1 0 0,-4 1 0 16,-1 0 0-16,-5 3 0 0,-3 0 0 0,-6 2 0 0,-2 1 0 15,-5 2 0-15,-6-1 0 0,-3 2 0 0,-2 1-163 0,-4 0-238 0,-1 2-217 16,-4 0-420-16,-1 1-242 0</inkml:trace>
+  <inkml:trace contextRef="#ctx0" brushRef="#br0" timeOffset="42535.65">23138 5482 2239 0,'-2'5'115'0,"2"1"-40"16,-2 3 16-16,1 0 37 0,1 2 17 0,0-1 0 0,0 2-34 15,1 1-29-15,-1 0-20 0,0 1-11 0,0-3-6 0,1 3-9 0,-1 0-6 16,0 0-1-16,1 0-5 0,-1 0-4 0,1-1-11 0,-1 0-1 0,1-2-7 16,0 0 3-16,-1-1 5 0,1 0 0 0,0-1 6 0,0-2 0 15,0-2 3-15,0 0-3 0,0 0-4 0,1-1-3 0,0-2 11 0,0-1-1 16,0 1 1-16,-1-2 5 0,1 1-8 0,0-1 8 0,0 0-5 0,1 0 0 16,0 0-6-16,1 0-3 0,1 0 3 0,0 0-1 0,0 2-1 15,1 0-3-15,0 0-6 0,1 1 2 0,0 0 5 0,1 1-11 0,0 0 6 16,2 0-2-16,0 1-4 0,0 0 6 0,1 1-6 0,2 0 4 15,1 0 0-15,1-1-4 0,1 2 8 0,0-1-8 0,2 2 0 0,0 0 0 16,0 0-4-16,0 1 3 0,1-1-1 0,-2 0 6 0,1 2-2 0,-1-1 3 16,-1 2-3-16,-2-1 2 0,1 1-2 0,-1-1-2 0,-3 2 6 15,-1-1-4-15,-3 2 0 0,-2 1 0 0,-1-1 2 0,-1 1 0 0,-3-2 10 16,-1 0-7-16,-2 0 7 0,-2-1 0 0,0 0-1 0,-4 0 3 0,-2 0-4 16,-1 0-5-16,-1 0 1 0,-1-2-4 0,2 2-2 0,-2-1 6 15,-1 0-4-15,1 0 4 0,1 0-2 0,-1-2-8 0,2 1 6 0,-2-2 0 16,2 0 0-16,1-1 2 0,-1-2-2 0,1-1-2 0,-1-1 0 0,2-1 0 15,1-2-6-15,0 0-12 0,0-3-15 0,1-2-17 0,-1-2-33 16,-1-2-26-16,2-3-57 0,1-1-73 0,-2-5-84 0,2-1-106 0,-1-1-170 16,2-3-118-16,1-1-124 0</inkml:trace>
+  <inkml:trace contextRef="#ctx0" brushRef="#br0" timeOffset="42702.64">23059 5424 1858 0,'-3'-10'499'0,"2"0"-277"0,1-5-13 0,3 1-20 0,2 1-21 0,2-1-24 15,2 1-34-15,2 0-26 0,3 1-10 0,2 0-1 0,3 1-4 16,0 0-10-16,3 1-5 0,2 1-14 0,-1 0-5 0,3 3-9 0,-2 1-9 16,2 1-5-16,-2 1-4 0,0 1-4 0,-1 1 0 0,-2 1 0 0,1 0-2 15,-3 0 0-15,0-1-8 0,0 1-12 0,0 0-19 0,-2-1-18 16,2-1-35-16,-2 0-30 0,1 1-37 0,-2-2-52 0,0 0-41 0,0-2-62 16,0 0-84-16,-1-1-195 0,0-1-534 0</inkml:trace>
+  <inkml:trace contextRef="#ctx0" brushRef="#br0" timeOffset="43052.64">25324 4480 1929 0,'-2'4'227'0,"0"0"-32"0,1 2 1 0,2-1 5 16,2-1-14-16,3-2-24 0,1 0-29 0,3-1-31 0,3-1-15 0,2-1-22 15,2-1-13-15,2-1-13 0,2-1-14 0,2-1-5 0,-1 1-16 16,1-1-1-16,0-1-2 0,-1 0-4 0,1-2 2 0,-2 0-4 0,1 0-11 16,0 1-7-16,-3 1-34 0,1-1-44 0,-2 2-51 0,-2-1-60 0,0-1-52 15,0 2-72-15,-2 0-97 0,0 0-159 0,-2 1-383 0</inkml:trace>
+  <inkml:trace contextRef="#ctx0" brushRef="#br0" timeOffset="43202.64">25548 4603 1569 0,'0'7'252'0,"0"3"-112"0,1 1 9 0,2-3 3 0,1-1-5 0,3 0-14 16,2-2-37-16,2-1-31 0,0-1-15 0,3-2-12 0,2-1-5 0,1-2-6 15,0-1-7-15,2-2-8 0,2-1-14 0,-2 1-15 0,2-2-39 16,0-1-54-16,-3 0-77 0,2-2-87 0,-2 0-127 0,-1-2-212 0,-1-1-238 16</inkml:trace>
+  <inkml:trace contextRef="#ctx0" brushRef="#br0" timeOffset="43552.64">26078 4129 2146 0,'-1'8'280'0,"0"2"-34"15,0 3-17-15,0 0-22 0,0 0-25 0,2 1-33 0,0 1-27 0,2 0-20 16,1-1-11-16,0 2-10 0,1-1-11 0,2 1-11 0,0-1-8 0,1 0-11 15,2-1-10-15,0-1-20 0,2-1-10 0,1-3 0 0,1 1 0 16,2-2 0-16,1-2 0 0,1-2 0 0,2-3 0 0,-1-1 0 0,2-3 0 16,1-1 0-16,-2-2 0 0,1-1 0 0,0-1 0 0,-2 0 0 0,0-1 0 15,0-2 0-15,-3-2 0 0,-1-1 0 0,0-1 0 0,-2-3 0 16,0-1 0-16,-1 0 0 0,0 1 0 0,0-1 0 0,-2-1 0 0,-2 2 0 16,-1-2 0-16,-3-1 0 0,-1 1 0 0,-2-1 0 0,-1 0 0 15,-3 3 0-15,-1-1 0 0,-2 2 0 0,-3 1 0 0,0 0 0 0,-3 2 0 16,-1 0 0-16,1 1 0 0,-2 3 0 0,-2 0 0 0,0 3 0 0,-1 2 0 15,-1 3 0-15,0 3 0 0,-2 1 0 0,1 4 0 0,-1 2 0 16,-1 2 0-16,1 2 0 0,1 2 0 0,0 2 0 0,3 1 0 0,-1 0 0 16,1 3 0-16,0 1-14 0,4 0-42 0,0 3-21 0,0-1-27 0,3-3-38 15,2-1-53-15,2-3-70 0,5-3-76 0,2-1-99 0,3-3-237 16,4-3-477-16</inkml:trace>
+  <inkml:trace contextRef="#ctx0" brushRef="#br0" timeOffset="43738.64">26810 4135 2090 0,'-3'11'244'0,"1"1"-21"16,-1 4-4-16,0-2-26 0,1-2-33 0,-1 0-49 0,2-1-30 0,1-1-23 16,0-1-16-16,1-2-4 0,0 1-12 0,0-1-11 0,1-1-11 0,0 0-4 15,0 0-6-15,0-1-14 0,0 1-28 0,2-1-43 0,-1 1-59 16,0-2-69-16,0 3-79 0,0 0-109 0,1-1-227 0,1 2-436 0</inkml:trace>
+  <inkml:trace contextRef="#ctx0" brushRef="#br0" timeOffset="44236.82">27288 3741 1986 0,'-6'13'220'0,"0"1"6"16,-3 4-17-16,3-1-19 0,-1-4-28 0,3 2-19 0,1 1-26 0,0 0-18 15,1-2-12-15,2 1-19 0,0 0-12 0,2 0-15 0,0 0-9 0,1-1-11 16,1 0-8-16,2 0-5 0,0-1-3 0,1 0 5 0,2 1-8 16,0-1 2-16,-1 0-6 0,3-1 2 0,1-2 5 0,0 0-3 0,-1-1 2 15,-2 0-2-15,0-1-4 0,-1 0 4 0,-1 0 0 0,-2-3-4 0,-1 0-2 16,-3 0 2-16,-1-1-3 0,-2-1 1 0,-2-1 0 0,-1 0-4 15,-1-1-1-15,-2-1-2 0,-2 0-5 0,0-1-8 0,-4-1-4 0,0-1-8 16,-2 0 5-16,1-1 1 0,-1-1 6 0,0-1 7 0,1 0 1 16,1-2 10-16,1 0 5 0,0-1 1 0,1 0 3 0,0 0-5 0,2-1 2 15,1 2-3-15,2-1-3 0,2 0 1 0,4 1-3 0,0-2 1 16,4 1-4-16,0-1 0 0,3 2 2 0,2-1-3 0,1 0 1 0,2-1 3 16,0-1-8-16,2 0 2 0,2 0-8 0,0-1-6 0,2 0-3 0,1 0-2 15,1-1-1-15,1 0 1 0,1-1-2 0,0 0 2 0,-2 0 9 16,-2 2 13-16,1-2 10 0,-3 1 6 0,0 0 3 0,-1-1-6 0,-3 2 3 15,-1-2 2-15,-2 2 2 0,-1 1 0 0,-2 0 1 0,-2 1 6 16,-2 0 5-16,-2 0 5 0,-2 0 4 0,-2 0 3 0,-1 0 6 0,-2 1-1 16,-1-1 1-16,-2 1-1 0,-2 1-3 0,0 1-4 0,-1 0-7 0,-2 2-6 15,-1 0 1-15,-2 1-6 0,1 1 1 0,-1 1-3 16,0 2 2-16,1 0 2 0,1 0-7 0,0 2-3 0,0 1-1 0,1 2-6 0,1 1 2 16,-1 1-5-16,0 2-1 0,3 0-3 0,0 3 1 0,1 0-3 0,2 2-6 15,1 1-12-15,3 1-21 0,1-1-23 0,3 1-29 0,2 0-43 16,1 0-51-16,3-1-63 0,0-2-91 0,3-2-168 0,2-3-609 0</inkml:trace>
+  <inkml:trace contextRef="#ctx0" brushRef="#br0" timeOffset="44502.36">28147 3584 2162 0,'-7'2'209'0,"0"1"16"0,-3 1 0 15,1 1-33-15,1 0-30 0,1 2-34 0,-1 2-30 0,0 1-10 16,0 0-16-16,-1 3-6 0,-2 0-8 0,0 1-20 0,0 1-7 0,0 1-10 16,0 3-8-16,0 1-5 0,0-2-12 0,-2 2-3 0,2-2-1 0,1-4 6 15,0 1 10-15,0-3-12 0,2-1-15 0,-1-2-33 0,1-4-33 0,1-1-34 16,2-3-48-16,-1-3-65 0,1-2-89 0,1-3-130 0,1-3-177 15,0-3-453-15</inkml:trace>
+  <inkml:trace contextRef="#ctx0" brushRef="#br0" timeOffset="44635.36">27748 3346 1489 0,'-2'2'197'0,"-1"1"-61"0,0 1 11 0,0 2-26 0,0 1-22 0,1 0-35 15,0 1-19-15,1 0-13 0,1-1-7 0,2 1-2 0,1-3-5 16,1 0-7-16,1-1-3 0,2 0 0 0,1-1-13 0,1-1-12 0,0-1-26 15,1 0-57-15,0 0-73 0,2-2-114 0,-1 0-202 0,-1 0-374 0</inkml:trace>
+  <inkml:trace contextRef="#ctx0" brushRef="#br0" timeOffset="45352.63">27913 3818 1116 0,'-3'-2'218'0,"0"-1"-14"0,0-1-2 0,0-1-7 0,2 1-21 16,0-1-13-16,0 0-18 0,0-1-7 0,1 0-2 0,1-1-11 15,1-1-6-15,0 0-11 0,3-1-11 0,2-1-5 0,1 2-12 0,3-2 0 16,2 1-14-16,2 0-9 0,-1 1-9 0,2-1-14 0,-1 2-6 0,-1 2-5 16,-2 1-3-16,1 2 3 0,-2 2-4 0,0 1-2 0,-2 1-3 15,-1 2 1-15,-1 2 2 0,-1 0 2 0,-2 1 1 0,-1-1-1 0,-2 2 2 16,-1 1 4-16,-2-1 1 0,0 1 1 0,-3 0-6 0,0-2 1 16,-2 1-5-16,0-2-1 0,-2 1 2 0,-1-1-6 0,-1 0-4 0,-1-2-1 15,0 0-14-15,2-2 3 0,-2 0 0 0,1-1-2 0,0 0 10 0,0-1 14 16,1-1-12-16,1-2 9 0,1-1 7 0,1-1-16 0,2-1 14 15,0-2-8-15,2 1-4 0,1-1-2 0,1 0 2 0,1-1-2 0,1 1 0 16,1-1 4-16,0 1-4 0,1 0 4 0,0 1 6 0,2 2-8 16,0 1-6-16,0 1 0 0,1 2 0 0,1 0 0 0,-1 2 0 0,1 1 0 15,0 1 0-15,-1 2 0 0,1 0 0 0,-1 2 0 0,0 0 0 0,0 2 0 16,1 0 0-16,-1 1 0 0,-1 0 0 0,1 0 0 0,0-1 0 16,-1 0 0-16,0-1 0 0,-2-1 0 0,-1-1 0 0,-1-1 0 0,-1-1 0 15,0 0 0-15,-1-2 0 0,-1-1 0 0,0-1 0 0,0-1 0 0,-1-1 0 16,0-1 0-16,-1-2 0 0,-1 0 0 0,1-2 0 0,-2-1 0 15,1-2 0-15,-2-1 0 0,1 0 0 0,0-1 0 0,0 0 0 0,1 0 0 16,-1 1 0-16,2 1 0 0,1-1 0 0,0-1 0 0,0 0 0 0,0 0 0 16,1-1 0-16,0 3 0 0,1 0 0 0,2 0 0 0,0 3 0 15,1 2 0-15,0 2 0 0,0 3 0 0,1 1 0 0,-1 1 0 0,0 2 0 16,1 1 0-16,-1 0 0 0,1 3 0 0,-1 0 0 0,1 1 0 0,0 0 0 16,0 1 0-16,1 0 0 0,0-1 0 0,0 0 0 0,0-2-88 15,1 0-47-15,0-3-44 0,0 0-73 0,2 0-88 0,0-2-128 0,1 0-262 16,1-1-489-16</inkml:trace>
+  <inkml:trace contextRef="#ctx0" brushRef="#br0" timeOffset="45552.63">28520 3403 2440 0,'-2'0'464'0,"-1"2"-233"0,0 1 15 0,1 4-58 0,-1 2-36 16,0 3-34-16,0 5-23 0,0 3-16 0,0 2-13 0,-1 1-50 15,0 2-16-15,0 2 0 0,-1-1 0 0,0 2 0 0,1 0 0 0,-1 2 0 16,1 0 0-16,1 0 0 0,-1-2 0 0,2-1 0 0,0-4 0 0,2-2 0 16,1-3 0-16,2-3-54 0,0-5-202 0,-1-1-159 0,2-3-235 15,0-1-617-15,0-3 205 0</inkml:trace>
+  <inkml:trace contextRef="#ctx0" brushRef="#br0" timeOffset="45887.63">29062 3441 1723 0,'-2'13'1338'0,"0"2"-1105"0,-2 5 15 0,-1 0-51 0,1-3-37 15,0 2-40-15,2 1-44 0,2-2-76 0,0 2 0 0,3-3 0 0,-2-1 0 16,2-1 0-16,0 0 0 0,2-2 0 0,0-2 0 0,0-3 0 15,1 1 0-15,1-2 0 0,0-1 0 0,1-2 0 0,1-1 0 0,0-2 0 16,1-3 0-16,1-1 0 0,1-2 0 0,0-2 0 0,1-2 0 0,0-1 0 16,1-2 0-16,1-2 0 0,-2-1 0 0,-2 0 0 0,-1-1 0 15,-2-1 0-15,1-1 0 0,-3 1 0 0,1-2 0 0,-1 0 0 0,-1-1 0 16,0-1 0-16,-3 0 0 0,-2 1 0 0,-2 0 0 0,-3 1 0 0,-1 1 0 16,-3 1 0-16,0 1 0 0,-1 0 0 0,0 3 0 0,-2 3 0 15,-1 2 0-15,-1 3 0 0,0 3 0 0,2 4 0 0,0 3 0 0,0 2 0 16,1 3 0-16,1 1 0 0,0 2 0 0,4 1 0 0,0 1-120 15,3-1-22-15,2 1-32 0,1-1-29 0,5-1-41 0,2 0-52 0,3-4-59 16,4 1-103-16,4-2-127 0,3 0-407 0</inkml:trace>
+  <inkml:trace contextRef="#ctx0" brushRef="#br0" timeOffset="46135.63">29635 3443 1752 0,'7'7'273'15,"-1"2"-37"-15,5 3-19 0,-1-1-33 0,-2 0-37 0,2 1-31 0,-1-2-21 16,-1 1-8-16,1-2-14 0,0 0-18 0,-1-2-7 0,2 1-14 15,0-2-7-15,0-1 2 0,2-2-3 0,0-1 1 0,-1 0 3 0,2-2-1 16,0-1 10-16,0-2-2 0,-1 1 2 0,-2-3 5 0,0 0 5 0,-1-2 8 16,-1 1 3-16,0-2 2 0,-1-1-4 0,-1 0-9 0,-1-1 1 15,-1 0-4-15,-1-1-26 0,-2 0-20 0,-2-1 0 0,-1 0 0 0,-2 2 0 16,-1 0 0-16,-4-1 0 0,-2 0 0 0,0 0 0 0,-2 0 0 0,-1 1 0 16,-1-1 0-16,-1 1 0 0,1 0 0 0,-1 1 0 0,-1 2 0 15,1 0 0-15,-2 4 0 0,3 2 0 0,0 2 0 0,1 2 0 0,1 4 0 16,1 2 0-16,1 0-72 0,2 1-50 0,2 0-35 0,3 1-48 15,3-1-62-15,2 1-58 0,5 0-81 0,1-1-178 0,4-2-615 0</inkml:trace>
+  <inkml:trace contextRef="#ctx0" brushRef="#br0" timeOffset="46335.94">30232 3467 1062 0,'-3'-3'587'16,"0"0"-435"-16,-1-2-3 0,1 1-24 0,2 1-36 0,-1 0-29 15,1 0-32-15,0-1-15 0,0 2-4 0,2-1-4 0,-2 0-5 0,2-1-9 16,-1 2-12-16,0-1-17 0,-1 0-30 0,0 1-39 0,1 0-48 0,-1 0-48 16,1 1-54-16,-1-1-61 0,0-1-202 0,2 1 66 0</inkml:trace>
+  <inkml:trace contextRef="#ctx0" brushRef="#br0" timeOffset="46553.04">30473 3124 1808 0,'-3'4'546'0,"1"0"-292"0,-2 1 19 0,2 1-40 0,-1 0-46 0,-2 3-40 16,2 2-30-16,-1 1-19 0,-1 2 4 0,1 0-9 0,0 3-17 0,-2 1-23 15,1 2-25-15,-2 1-14 0,-1 3-6 0,1 1 0 0,-2 2 0 16,0 1-6-16,1 3 0 0,-2 0-2 0,3 0-2 0,-2-2-2 0,1-2-4 16,2-5-24-16,-2-4-29 0,1-2-39 0,1-3-48 0,-1-2-41 0,0-3-52 15,0-3-64-15,1-4-78 0,1-2-118 0,0-4-113 0,-1-3-358 16</inkml:trace>
+  <inkml:trace contextRef="#ctx0" brushRef="#br0" timeOffset="46703.04">30122 3043 2158 0,'-2'-23'188'0,"-2"0"12"0,0-4-22 0,2 10 2 0,0 5-31 16,1 6-48-16,1 3-16 0,-2 5-34 0,2 3 14 0,-2 2 8 0,0 3-14 16,1 0-20-16,-2 2-17 0,3 2-5 0,0 1-2 0,1 0-2 15,1 3-6-15,1 1-7 0,2 0 2 0,0-1 0 0,1 1-6 0,1-1-7 16,0-4-39-16,2 0-52 0,-1-2-63 0,1-1-68 0,1-1-64 0,2-1-88 16,1-2-187-16,-1 0-546 0</inkml:trace>
+  <inkml:trace contextRef="#ctx0" brushRef="#br0" timeOffset="46937.03">30633 3489 1751 0,'3'12'211'0,"2"1"-9"0,0 5 0 16,1-3-22-16,-1-1-43 0,0-3-34 0,0-1-17 0,1-1-1 0,0 0-8 16,0-2-8-16,0-1-11 0,0-2-11 0,0-2-2 0,-1-2 0 0,0-1-4 15,2-2 4-15,0-1-5 0,-1-2 1 0,0-1-1 0,-1-2-1 16,1 0 1-16,-1 0-1 0,0-2 1 0,0-1-1 0,-3-1 3 0,1 0-1 15,-2 2-7-15,-1-3 1 0,0 1 0 0,-3-1-2 0,0 0-7 16,-2 3-1-16,-1-1-11 0,-2 0 0 0,-1 1-6 0,-1 1-6 0,1 0-4 16,-1 3-8-16,0 0 4 0,0 1-12 0,-1 4-5 0,0 1-16 0,0 3-31 15,-1 3-21-15,-1 2-32 0,0 2-34 0,1 4-34 0,-1 0-54 16,1 3-59-16,-1 1-80 0,1 1-179 0,-2 1-555 0</inkml:trace>
+  <inkml:trace contextRef="#ctx0" brushRef="#br0" timeOffset="47236.03">26698 5845 2435 0,'11'-2'453'0,"0"0"-295"0,4 0 15 0,-4-1-13 0,2 1-17 15,0-1-29-15,1 0-32 0,2 0-23 0,-2-2-11 0,2 0-11 16,1-2-14-16,-2 1-1 0,2-1-9 0,-1-1-5 0,-1 0 0 0,0 0-10 16,1 0 0-16,0-2-8 0,-1 0-21 0,-2 0-19 0,-1 0-22 0,0 0-21 15,-2 1-27-15,0 1-39 0,-2 0-47 0,-1 1-60 0,-1 1-79 16,0-1-138-16,-1 0-216 0,0 1-262 0</inkml:trace>
+  <inkml:trace contextRef="#ctx0" brushRef="#br0" timeOffset="47369.04">26866 5776 1935 0,'-6'15'311'0,"0"3"-131"0,0 4 2 0,2-1-11 0,2-3-17 16,4-1-41-16,-1-1-44 0,3 0-13 0,0-2-15 0,2-1-2 0,1-4-5 15,2-2-12-15,3-1-8 0,1-2-10 0,2-3-12 0,1-2-24 16,4-3-37-16,1-2-49 0,0-2-54 0,2-1-73 0,1-4-108 0,-1-3-186 15,2-2-587-15</inkml:trace>
+  <inkml:trace contextRef="#ctx0" brushRef="#br0" timeOffset="47819.81">27577 5223 2197 0,'-9'9'281'16,"-2"1"-22"-16,-1 4-2 0,2 0-23 0,3-1-43 0,0 3-43 0,1 0-30 15,2 2-18-15,1-1-11 0,0 3-17 0,1 0-15 0,2-1-7 0,2 0-18 16,2 1-22-16,1-1-10 0,1 1 0 0,2 0 0 0,0 0 0 16,2 0 0-16,1 0 0 0,2 0 0 0,0-2 0 0,0 0 0 0,1 0 0 15,0-3 0-15,0 1 0 0,-1-2 0 0,-2-1 0 0,1-1 0 16,-2 0 0-16,-3 0 0 0,-1-2 0 0,-2 1 0 0,-4-2 0 0,-1-1 0 16,-2 0 0-16,-4-1 0 0,0 0 0 0,-5-1 0 0,0-1-24 0,-1 0-32 15,-4-1-5-15,-1-1 6 0,-1-1 12 0,-2-1 6 0,-1-1 5 16,1 0 5-16,-1-1 8 0,0-1 3 0,1 0 9 0,1-1-3 0,0-2 2 15,0-1 3-15,1-2-3 0,0 0 6 0,-1-2-7 0,3 0 3 0,3-2 2 16,3 0-7-16,5 0-4 0,3-1-2 0,4 1 8 0,2-2 10 16,5-1 3-16,3-1-8 0,3 0-1 0,4-2-5 0,2 0 9 0,2-2 2 15,1 1-4-15,4-1 3 0,0-1-2 0,1 3-2 0,1 0 2 16,-1-1 2-16,1 2 0 0,-2-1 8 0,0 1-1 0,-2 0 1 0,-2 2 3 16,-1 0-5-16,-4 0 1 0,-2 1 1 0,-2 2-5 0,-4 1 5 15,-2 1 1-15,-2 1 7 0,-4 1 10 0,-1 0 5 0,-2 2 7 0,-3 0-1 16,-1 1-10-16,-4 2-4 0,-2-1-6 0,-1 1 1 0,-4 0-6 0,0 1-1 15,-2 2-5-15,-2 0 4 0,0 1-10 0,-2 1-4 0,0 1 0 0,1 2-2 16,-2 2 6-16,0 1 4 0,1 3-2 0,0 2 0 0,1 1 2 16,0 3-8-16,1 0 4 0,1 3-4 0,2 1-2 0,1-2 6 0,3-1-9 15,2-1-5-15,4-2-7 0,2-2-24 0,4 0-21 0,3-1-27 0,4-1-50 16,2-3-56-16,4-2-80 0,4-2-94 0,3-2-131 0,2-2-211 16,4-3-283-16</inkml:trace>
+  <inkml:trace contextRef="#ctx0" brushRef="#br0" timeOffset="48102.81">28055 5320 2253 0,'0'4'261'0,"0"0"-28"16,1 2 6-16,-1 1-27 0,1 0-47 0,-1 2-37 0,0 2-22 0,0 0-12 15,0 1-2-15,0 0-17 0,-1 0-17 0,2 1-14 0,0 0-15 0,2-1-3 16,1 0-4-16,0-3-4 0,1 1 2 0,1 0-12 0,-1-2 2 16,2-1-8-16,0-1-2 0,1-1 0 0,0-1 0 0,1-2 0 0,2 0 0 15,-2-2 0-15,0 0 0 0,0-2 0 0,0-1 0 0,-1-2 0 16,0 0 0-16,-1-2 0 0,-1-2 0 0,-1 0 0 0,0-3 0 0,0 1 0 15,-1-3 0-15,-1 0 0 0,-2 0 0 0,0-1 0 0,-1 2 0 0,-2-1 0 16,-3-1 0-16,-1 1 0 0,-1 2 0 0,-2 0 0 0,-2 0 0 16,-1 1 0-16,-1 1 0 0,-2 0 0 0,2 1 0 0,-3 0 0 0,1 2 0 15,0 1 0-15,1 3 0 0,-1 1 0 0,0 2 0 0,0 2 0 16,3 2 0-16,-1 1 0 0,2 1 0 0,1 2-16 0,3-1-48 0,2 0-35 16,3 0-21-16,4 0-40 0,2-1-50 0,4-2-64 0,3-1-74 0,4-1-98 15,2-1-192-15,6-2-481 0</inkml:trace>
+  <inkml:trace contextRef="#ctx0" brushRef="#br0" timeOffset="48302.81">29016 5061 2351 0,'-1'10'266'16,"-1"4"16"-16,0 3-18 0,-1 1-41 0,0 0-40 0,-2 1-44 0,1 0-22 15,-4 1-16-15,0 2-10 0,-2-1-17 0,0 1-70 0,0 1-4 0,0 1 0 16,0 1 0-16,0 0 0 0,2 1 0 0,0-1 0 0,-1 0 0 15,1-1 0-15,0-2 0 0,1 0 0 0,0-1 0 0,1-3 0 0,1 0 0 16,1-4 0-16,0-2 0 0,2-6 0 0,0-1 0 0,1-4-2 16,0-3-78-16,0-2-13 0,0-1-33 0,1-5-54 0,-2-3-70 0,1-3-72 15,-2-3-68-15,0-1-40 0,0-4-200 0,0-1-417 0</inkml:trace>
+  <inkml:trace contextRef="#ctx0" brushRef="#br0" timeOffset="48485.81">28632 4752 1891 0,'-4'12'270'0,"-2"1"-53"0,0 4 25 16,1-1-20-16,3-1-23 0,1 0-32 0,1-1-27 0,2 1-5 0,2 0-12 15,2 0-15-15,1 0-12 0,-1-3-23 0,2 0-8 0,1 0-22 0,0-3-11 16,-1-1-8-16,1-1-16 0,-2-5 2 0,0 1-6 0,-1-3-4 16,1-1-6-16,0-1-20 0,1-3-22 0,0-1-25 0,1-1-35 0,1-2-41 15,0 1-71-15,2-2-84 0,1 1-119 0,0 2-210 0,-1-2-669 0</inkml:trace>
+  <inkml:trace contextRef="#ctx0" brushRef="#br0" timeOffset="48736.81">29350 5581 988 0,'3'7'90'0,"1"3"-23"0,2 1 10 0,-2-2 2 0,2-4 0 16,0-1 9-16,0-1 26 0,1-3 34 0,-1-1 25 0,1-3 14 0,-1-1-4 0,1-1-16 16,0-2-15-16,-1-2-17 0,3 0-13 0,0-2-9 0,0-2-1 15,0-1-2-15,-2-1 0 0,0 1 0 0,-2-1-14 0,-1 0-14 0,-1 0-7 16,-2 2-18-16,-2-1-13 0,-2 2-6 0,-1 1-15 0,-3 1-3 16,-2-1-13-16,-1 2-12 0,-2 1-9 0,0 2-11 0,1 2-23 0,-2 3-38 15,-1 2-53-15,0 2-82 0,-1 2-120 0,0 3-185 0,0 1-346 0,-2 1-209 16</inkml:trace>
+  <inkml:trace contextRef="#ctx0" brushRef="#br0" timeOffset="50302.71">4024 7618 3533 0,'-10'3'-2'0,"1"5"-1"0,2 6 10 0,3 6-5 15,13 9-8-15,3 7-9 0,3 9-36 0,-1 10-28 0,-2 5-22 0,2 7-9 16,-1 5 12-16,0 2 17 0,-2 6 20 0,-1 3 10 0,-2 3-7 15,1 4-18-15,-1 1-17 0,1 3-17 0,1 1-21 0,2-1 18 0,-1 0 12 16,1-1 22-16,2-3 35 0,0-2 10 0,1-4 15 0,1-3 14 0,2-4 5 16,0-3 8-16,1 0 5 0,3-3 4 0,1 0 7 0,3 0-1 15,1-2 1-15,2-2 7 0,4-3-6 0,3-3 2 0,4-2 9 0,5-2 0 16,5-3 12-16,3-3 5 0,5-3-7 0,5-2-1 0,4-2-19 16,7-3-7-16,3-2-5 0,7-2-8 0,6-2 2 0,3-1 2 0,7-2-2 15,6 1-7-15,4-2 6 0,7 0-9 0,3-3 7 0,5 0 16 0,6-1-1 16,3 0 19-16,6 0 3 0,5-1 9 0,5-2 1 0,4-1 3 15,5-2 9-15,5-4 2 0,5-2 5 0,6-2-7 0,4-3-3 0,8-3-7 16,4-3 5-16,6-2-5 0,5-3-7 0,5-3-7 0,6-2-9 0,7-3-7 16,3 0-5-16,6-3-3 0,7-1-1 0,6 1-2 0,7-3-9 15,6-2-2-15,6 0 5 0,4-5-8 0,4-2 2 0,8 0-10 0,3-3-10 16,7 0 6-16,6-2-1 0,4-2 6 0,4 0 19 0,5 0-9 16,4-2-2-16,5 4 2 0,3-2-4 0,5 2 10 0,2 1 5 0,3 1 0 15,3 1-6-15,3-2-1 0,5 3-3 0,0-2 1 0,6 3 2 0,1 0-12 16,4-1 4-16,4-1-7 0,2-1 7 0,2 0 8 0,1-2-4 15,3 1-14-15,0-1 14 0,3 1-4 0,1-2 6 0,1-1 24 0,3-3-24 16,0 0 2-16,3-4 1 0,-1 1 8 0,2-3 0 0,0-4 6 0,1 0 3 16,3-1-3-16,2-3 10 0,2 0 7 0,-1-2-17 0,-2-2 14 15,0-1 8-15,0 1-8 0,-1 0 22 0,0 1-22 0,-6 2-1 0,-2 1 0 16,-6 2-6-16,-5 1-26 0,-5 3-2 0,-6 4 0 0,-9 2 0 16,-6 4 0-16,-9 2 0 0,-8 2 0 0,-11 3 0 0,-12 2 0 0,-13 3 0 15,-10 3 0-15,-142 10 0 0,29-2 0 0,-10 2 0 0,-61 3 0 0,10-1 0 16,-5 0 0-16,9 0 0 0,7 0 0 0,8 0 0 0,-13 0-229 15,5 0-280-15,5 0-155 0,6-2-219 0,-11 1-357 0,0-1 1240 0,-15 1 0 16,2 0 0-16,-14 1 0 0,0-1 0 0,-11 1 0 0,-11 1 0 0,-12 0 0 0,-7 0 0 0,-9 1 0 0,-6 0 0 0,-13 0 0 0,-11 1 0 0,0 0 0 0,0 2 0 0,0 0 0 0</inkml:trace>
+  <inkml:trace contextRef="#ctx0" brushRef="#br0" timeOffset="53087.88">15418 4508 799 0,'-36'20'35'0,"-5"4"-21"0,-10 11-1 15,8 1-3-15,5 0-5 0,1 3-3 0,0 2-3 0,-1 2 0 0,2 0 0 16,1-1-7-16,1 2-1 0,2-1-3 0,1 1-2 0,3 0-2 0,0 2 3 16,4 1 0-16,0 0 3 0,1 2 6 0,4 1-3 0,0 3 5 15,2-1-1-15,1 1 1 0,2-1 2 0,0 2-3 0,3-1-2 0,-1 1 0 16,2 1 0-16,3-1 0 0,0 0 7 0,1 0 10 0,3 1 6 0,2 2 11 16,2-1 4-16,3 0 8 0,3-1 6 0,2-1 3 0,2 2 1 15,3-1-10-15,0 1-5 0,2 1-5 0,0 0 2 0,3 3 5 0,0 1 1 16,1 0 0-16,3 0 2 0,1 0-3 0,0-1 2 0,3 1-1 15,1 1-1-15,1 1-1 0,2 0-1 0,2 3 0 0,0 2-6 0,4-1-4 16,0 1-7-16,1 1-6 0,4 0-2 0,0 0-12 0,2 2 2 0,2 0 2 16,0 0-3-16,0 0 8 0,2 0-1 0,3 0 0 0,3-3 2 15,1-1 1-15,2-3-14 0,2-1 2 0,2-3-3 0,4-3-2 0,0-1 11 16,3-3 1-16,3-1 0 0,1-3 8 0,3-1-1 0,2-5 0 0,1-3 0 16,3-1 0-16,1-4 1 0,0 0 7 0,4-2 5 0,-1-3 8 15,1 0 7-15,2-3 4 0,-1 0 7 0,3-1 2 0,-1-2 1 0,3-1-1 16,-1-2-8-16,3-2-5 0,1 0-10 0,2-3-6 0,0-1-6 0,0-1-5 15,3-3-2-15,-1 0-2 0,3-2-3 0,1-2-1 0,-1 0 1 16,0-2-2-16,2-2 2 0,-2-5-1 0,1-2 1 0,2-3 2 0,-2-3-2 16,-1-2 0-16,1-2-3 0,-2-2-1 0,-1-1-1 0,0-3 4 0,-1-3-4 15,-2-1 5-15,1-3 1 0,0-2-1 0,-2-3-2 0,-1 0-2 16,1-3 10-16,-2-2-1 0,0-2 2 0,-1-1 5 0,-2-2-11 0,0 1-6 16,-1-2 4-16,-3 0-5 0,0-1 0 0,-5-2 6 0,0 0-4 15,-4-2 4-15,-3 1 5 0,0-3-11 0,-6 1 10 0,-3 0-4 0,-3-2 5 16,-4-1 10-16,-1-1-8 0,-4-2 1 0,-5-2 2 0,-1 0-2 15,-5-1 1-15,-2 0-4 0,-3 0-8 0,-4-1 10 0,-3 0 0 0,-4-3-1 16,-1 2 6-16,-6-2-12 0,-1-1 1 0,-5 0 3 0,-3-1-5 0,-4-1 3 16,-2 0-11-16,-3 1 3 0,-2-1 5 0,-4-2-5 0,-1 2 9 15,-5-2-10-15,-4-1-4 0,-3-1-3 0,-2-3-4 0,-5-2-4 0,-2 2 9 16,-2-2 2-16,-4-1-1 0,-2 1 7 0,-3-2-6 0,-2-2 2 0,-2 0 8 16,-3-2-2-16,-3 4 7 0,-3-1 2 0,-3 1-4 0,-2 0 7 15,-1 1-4-15,-2 0 2 0,-1 0-4 0,-2 0-3 0,-2 2-2 0,-1 0 12 16,-2 0 7-16,-1 2-3 0,-1 1 6 0,-3 0-16 0,-1 2-2 15,-1 1-4-15,-3 1-3 0,-3 3-7 0,-1 2 7 0,-2 2 3 0,-3 3-3 16,-1 1 11-16,-5 4-12 0,-1 3 0 0,-3 1-3 0,-1 2-1 0,-5 1-1 16,-2 4 2-16,-4 3-4 0,-3 4 4 0,-3 4-1 0,-5 4-2 15,-1 3-3-15,-5 7-6 0,-4 3 10 0,-6 6 0 0,-5 6 3 0,-5 5 4 16,-3 7-4-16,-5 5 7 0,-2 7-6 0,-1 5-3 0,0 5 1 0,0 3-17 16,4 6-28-16,2 3-57 0,5 2-79 0,2 4-87 0,1 3-120 15,4 4-134-15,-1 3-362 0</inkml:trace>
+  <inkml:trace contextRef="#ctx0" brushRef="#br0" timeOffset="67603.45">17010 5001 791 0,'-7'-16'24'0,"1"3"17"0,1-3-17 0,5 7-13 0,5 2-10 0,2 2-3 15,3 0-3-15,2 1 1 0,2 0-1 0,3 1 1 0,2 0-6 16,1 1-5-16,-1 0-6 0,0 1-10 0,0 1-7 0,0-1-7 0,1 0-2 16,0 0 2-16,1 0 4 0,1 0 9 0,0 0 10 0,-1 0 9 0,-1 0 9 15,0-1 3-15,-2 2 2 0,2 0 0 0,1 0 0 0,-1 1 0 16,1 0 0-16,0 0 1 0,-2 1 2 0,1 1 0 0,0 0 3 0,-2-1-5 15,1 0 1-15,-1 2 1 0,1-2 2 0,-2 1 6 0,1-2 2 16,0 0 4-16,-2-2 3 0,1-1 6 0,-1-1 4 0,-2 0 1 0,-2 0-1 16,-1 1-2-16,-2 0-3 0,-2 0-4 0,-2 1-3 0,-1 0-3 0,-2 0-4 15,0 1 0-15,-1-1 1 0,-1 1 1 0,0 0-2 0,-1-1-2 16,-1 0-5-16,0-1-5 0,0 2-2 0,-1-2-4 0,0 1-4 0,0-1-8 16,0-1-4-16,-1 1-16 0,1-1-12 0,0 0-20 0,-1 0-7 15,0 0-7-15,0-1-6 0,0-1 4 0,1 0-73 0,-4 0-19 0</inkml:trace>
+  <inkml:trace contextRef="#ctx0" brushRef="#br0" timeOffset="67870.45">17289 4563 106 0,'-6'-5'82'0,"0"1"-21"16,1-1-29-16,3 3-19 0,4 2-9 0,1 2-2 0,2-1-1 0,3 3 2 15,0-1-1-15,3 1 0 0,2 0 0 0,1 2-1 0,0 0 0 16,-1 1-1-16,1 0-1 0,-2 1 4 0,0 0-1 0,-1-1 4 0,-3 2 5 15,1 1 7-15,-2 0 7 0,-2 2 8 0,-1 0 2 0,-2 0 1 16,-1 2-1-16,-1 1-3 0,-1 2 2 0,-2 0 0 0,0 2-1 0,-2 0-1 16,-2-1-1-16,1 1-1 0,-2 1-1 0,2-2 0 0,-1 1-4 0,0 0-2 15,2 0-2-15,1-1-4 0,2 0-2 0,1 1-3 0,2-3-2 16,1 0 0-16,3-1-2 0,0 0 1 0,1-3-4 0,2 0 0 0,-1 0-2 16,2-1 1-16,0 1 1 0,0 0 0 0,1-1-4 0,-2 1 0 0,1-1 1 15,-2-1-4-15,0 2 1 0,0-2-6 0,-1 2-9 0,1 0-23 16,0 0-54-16,-1 0-62 0,1-1-132 0,-1 0-23 0</inkml:trace>
+  <inkml:trace contextRef="#ctx0" brushRef="#br0" timeOffset="-156048.39">16060 5323 49 0,'-3'-1'31'0,"-2"1"3"0,0-1 2 0,1 2-13 0,1 1-1 15,-1 1-9-15,1 1-4 0,0 1-2 0,0 0-2 0,0 0 1 16,0 1-1-16,1 0-1 0,1 0-3 0,1-1 0 0,0-1 2 0,1 1 0 16,1 0 0-16,0-1 1 0,0 0 0 0,1-1 4 0,0-1 7 15,0 0 2-15,1-1 1 0,-1 0 4 0,-1-1 2 0,2 1 0 0,-1 0 5 16,0-1-2-16,-1 1 0 0,1-1-1 0,0 0-4 0,-1 1-2 15,1-1 0-15,0 0-3 0,-1 0 0 0,1 0-2 0,1 0-1 0,0-1-1 16,0 1-5-16,1-1-2 0,1-1-4 0,0 1 1 0,0-1-4 0,1 1 2 16,0 0-2-16,0 0-6 0,0 0-2 0,2 0-9 0,0-1-9 15,0 0-15-15,1 1-31 0,-1 0-54 0,0 0-138 0</inkml:trace>
+  <inkml:trace contextRef="#ctx0" brushRef="#br0" timeOffset="-155295.97">18429 4976 197 0,'-3'-3'94'0,"0"-2"-19"0,0 0-15 0,0 0-20 0,1 2-11 16,-1 1-10-16,1 1-9 0,-1 0-6 0,1 2-5 0,-1 0-3 15,1 1 0-15,-1 1-3 0,-1 2 0 0,0 0-1 0,2 0-1 0,-2 0-2 16,0 2-3-16,1 0-5 0,0 1-2 0,0-1-8 0,0-1-7 0,0 1-1 15,1-1-6-15,0-1-11 0,0 0 6 0,0-1-9 0,-1-1 7 16,1 0 19-16,1 0 11 0,-1-1 14 0,-1-1 4 0,1 0 6 0,0-1 4 16,0 0 4-16,1-1 8 0,0 0 6 0,0 0-2 0,1-1 2 15,0 1-7-15,0-1-7 0,0 2 1 0,1-1-5 0,1 1-1 0,0 0-5 16,1 0-2-16,0 0-2 0,-1 1-1 0,0-1 1 0,0 2-7 0,0 1-6 16,-1-1-32-16,-1 1-55 0</inkml:trace>
+  <inkml:trace contextRef="#ctx0" brushRef="#br0" timeOffset="-151681.81">21262 6678 1 0,'-10'-24'146'16,"-3"5"514"-16,-5-2 499 0,2 5-1072 0,2 2-176 0,5 1-23 0,4 2 2 15,2 1 34-15,1 2 19 0,1 1-16 0,1-1-24 0,2 1-24 0,0 0 5 16,1 0 28-16,0 2 31 0,0 1 27 0,-1 0 14 0,0 2 10 15,1 0 13-15,-2 1 9 0,-1 1 3 0,0 1 9 0,0 1 2 0,1 0 1 16,-2 0 1-16,1-1-2 0,1 1 0 0,-1 0 4 0,1 1 10 16,1 1 5-16,1 2 10 0,1 2 6 0,1 2 8 0,3 1 6 0,2 3 8 15,3 1 5-15,2 4 0 0,5 5-7 0,5 3-2 0,3 5-15 16,6 4-15-16,3 2-14 0,6 5-16 0,6 1-9 0,4 3-4 0,3 2-13 16,2 5-1-16,3 0-1 0,1 1-5 0,1 0 4 0,-2 0-9 0,-2-1-10 15,-2-1-10-15,-4-3-4 0,-4-1 4 0,-3-5 8 0,-5-1 14 0,-6-1 10 16,-4-3-2-16,-6-2 12 0,-7 0-4 0,-4-3 4 0,-4 2 13 15,-5-2-2-15,-4-1 14 0,-3 1 4 0,-4-2 8 0,-5 2 2 0,-3 0 4 16,-5 1 3-16,-5-1-5 0,-5 1-6 0,-6-2-11 0,-5 2-9 16,-8 3-9-16,-6 0-1 0,-7 1-15 0,-10 1 1 0,-7 2-5 0,-10 1-8 15,-9 3 5-15,-11-1-9 0,-10 0-9 0,-11 3-6 0,-9 2 3 0,-11 1-1 16,-7 2 19-16,-10-1 4 0,-7 0 4 0,-5 0 1 0,-5 1-4 16,-4-2 5-16,-1 0 2 0,-2 0 10 0,1 0-2 0,-1 4 7 0,1 0 5 15,3 1-2-15,1 0 11 0,5-2-1 0,1 0-3 0,4 1-9 0,1 2-6 16,1 2-2-16,0-1-4 0,-1 4 0 0,0 2 2 0,-1 1 4 15,0 2 7-15,-2 0 9 0,-2 0 6 0,-1-1 6 0,-3-1 3 0,-1-1 1 16,-3-1-7-16,1-1-10 0,-2 0-4 0,-3-1-8 0,1 1-2 16,-3 0 5-16,0 0-6 0,0 0 8 0,1 0 3 0,6 0 9 0,2-2 18 15,6-1 7-15,8 0 5 0,5-3-4 0,7 0-13 0,6-1 0 0,5-2-3 16,7 1-7-16,6 2 2 0,4 2-3 0,7 2-2 0,4 0 1 16,6 1-8-16,4 1 0 0,4 0 2 0,5 0-6 0,4 1 6 0,3-1-5 15,3 1-4-15,4-1 3 0,2 1-1 0,4-3-2 0,5-3 17 0,4-1-2 16,5-4-5-16,6-2 1 0,6-3-18 0,6-5-6 0,4-2 3 15,2-1-5-15,7-1 0 0,2-3-4 0,6 0 4 0,1-1-3 0,4 1-1 16,-1 2 4-16,2 1-17 0,4-2-4 0,-1-1-24 0,2-2-24 16,2-2-26-16,3-1-32 0,0-4-29 0,2-1-42 0,1-3-53 0,3-3-33 15,0-1-43-15,0-2-42 0,1-4-26 0,0-5 0 0,2-1 46 0,0-6-116 16</inkml:trace>
+  <inkml:trace contextRef="#ctx0" brushRef="#br0" timeOffset="-151464.81">10403 12792 1626 0,'-25'7'311'0,"-2"3"-116"0,-5 3-17 0,6 1-17 0,7 1-24 15,3 0-44-15,3 2-31 0,5 3-27 0,4 3-14 0,4 7 1 0,3 3 3 16,4 6 0-16,4 2 2 0,4 4-12 0,2 3-6 0,5 3 1 16,3 2-9-16,2 1 5 0,5 1-5 0,2 0-1 0,3-1-1 0,5-1 1 15,-1-1-14-15,3-1 0 0,1-4 1 0,0-4 1 0,-2-2 9 0,0-3-2 16,0-2-7-16,-4-2-18 0,-1-3 1 0,-5-1-17 0,-4-2-5 16,-5 0 6-16,-3-4-4 0,-6-1 17 0,-2-3 23 0,-4-4 7 0,-3-2 5 15,-2-4 9-15,0-2-1 0,-2-3 19 0,1-2 11 0,1-2 2 0,-1-1-6 16,1-1-11-16,2-1 2 0,1-1 2 0,5-4 5 0,1-1-8 15,3-3-5-15,1-3-1 0,3-1-8 0,3-2-9 0,0-2-15 0,1 1-2 16,3-2-19-16,-1-1-42 0,3 2-71 0,0-3-158 0,3 0-257 0,0-4-228 16,1-6-24-16</inkml:trace>
+  <inkml:trace contextRef="#ctx0" brushRef="#br0" timeOffset="-148197.18">16671 12513 178 0,'-1'-6'97'16,"0"0"-15"-16,0-2-10 0,1 1-10 0,1 2-8 0,0-1-5 0,1 0-5 15,0 1 1-15,0 0-3 0,1 0-2 0,-2 0-3 0,1 2-4 0,1 0-3 16,-1 1-6-16,1 1-4 0,-1 0-9 0,0 0-7 0,1 2-4 15,0 0-4-15,1 2-4 0,1 1-3 0,0 0-2 0,0 1-5 0,0 0 4 16,1 0-2-16,-2 1-1 0,0 0 2 0,-1 0-2 0,0 0 4 16,-1 0 3-16,0 0 1 0,-1 0 3 0,-1 0 4 0,-1-1 0 0,-1 1 4 15,-1-2-2-15,0 1 5 0,-1-1 2 0,0-1 1 0,-1 0 6 0,-2 0-4 16,0-2 5-16,-1 1 1 0,-1 0 2 0,0-1 2 0,1 0-2 16,-2 0 0-16,-1-1 0 0,0 0 4 0,-2 0-6 0,2-2 3 15,1 1-4-15,0 0-2 0,1 0 4 0,0-1-1 0,1 1 1 0,2-1 0 0,0-1 3 16,1 0-1-16,2 1 5 0,0-2-2 0,1 1 1 0,2-1 1 15,0-1-1-15,3 1-3 0,0-2 1 0,4 0-2 0,3-1-1 0,2-1 3 16,4 1-4-16,1-2 2 0,4 1-4 0,3 0-3 0,0-1 2 0,2 1-2 16,0 0 0-16,3 0-3 0,0 1-3 0,-1 0 1 0,2 1 1 15,-1-1-1-15,-1 1 5 0,0 0-5 0,-1 0 4 0,-3 1 1 0,0 1-4 16,-1 0 6-16,-1 1-4 0,-1 0-4 0,-1 1-1 0,-4 1-4 16,-1 2 0-16,-4 0-1 0,-1 1-1 0,-2 0-2 0,-3 0-6 0,-1 3 6 15,-3 0-4-15,-2 1 6 0,-2 0 3 0,-3 2-2 0,-4 1 5 0,-4 0-3 16,-4 2 2-16,-4-1 1 0,-3 1 0 0,-2 0 3 0,-1 0 1 15,-2 1 1-15,-1-2-3 0,-4 1 0 0,1 0-2 0,0 0 2 0,-3-1 2 16,2 0-2-16,0-1 5 0,2-2 2 0,2 0 7 0,3-2 5 16,1-1-2-16,4 0 5 0,2-3-5 0,3 1-5 0,4-2-1 0,1 0-10 15,4-1-2-15,0-1 4 0,2 0 0 0,2-2 1 0,0-1 0 0,3-1-6 16,2-1-4-16,0-1-1 0,2 1 2 0,2-2-5 0,2-2-1 16,3 0 0-16,3-1-1 0,2 0 6 0,1-1-5 0,4-1 0 0,3 0-1 15,-1 1-1-15,4 1 2 0,-1 1 3 0,0-1 0 0,2 1-2 0,-2 0 2 16,3 1-2-16,-1 3 6 0,2 0-5 0,0 3 2 0,-2 1-1 15,1 2 0-15,0 1 1 0,-1 1 1 0,-3 2-1 0,0-1-1 0,-1 2 1 16,-4-1 0-16,2 2 8 0,-2-1-6 0,-1 3 0 0,-4-1 0 0,-2 2-4 16,-2-1 2-16,-1 1 4 0,-2 0-2 0,-2 0 0 0,-1 0-5 15,-3 0 3-15,-1 0 0 0,-3 2-1 0,-2 0-1 0,-3 1-8 0,-4 0 4 16,-4 0 2-16,-3 0 4 0,-3-1 0 0,-1 0 0 0,-2-1 0 16,-1-1 4-16,1-2 3 0,-2-1-6 0,0-2 9 0,1 0-6 0,1-2 1 15,0-1 8-15,2-1-3 0,1-1-2 0,1-1 3 0,2 0-4 0,2 0 1 16,0-1 3-16,2-1-4 0,2 0 2 0,1-1 1 0,1 1-1 15,2-1 2-15,1 0 2 0,2 1-2 0,3-1-4 0,2 2-3 0,2 1-5 16,0 0-6-16,2 1 3 0,2 0-2 0,1 0 1 0,3 1 5 0,1 1-5 16,0 0 5-16,2 1 0 0,0-1-1 0,0 1 1 0,3 1-4 15,0-1 5-15,1 1-4 0,-1-1 1 0,1 1 3 0,1-1-5 0,0 0 7 16,-1 0-2-16,1-1 0 0,0 1 2 0,-2-1 1 0,0 0-2 16,-1 0-1-16,-1 0 2 0,-1 1-3 0,-2-1 1 0,-1 0-1 0,-3 0-1 15,1 0 6-15,-1 0-2 0,-3 0 1 0,0 0 5 0,-1 0-2 16,-1 0 5-16,0 0 2 0,0 0 5 0,-1 0-4 0,0 0 1 0,0-1-3 15,-1 1-3-15,0-1 0 0,-1 1-3 0,0 0-1 0,1 0-5 0,0-1-2 16,0 1 5-16,-1-1 0 0,-1 1 1 0,1-1-2 0,0 1-5 0,-1 1 1 16,1-1 1-16,-1 0 0 0,0 1-2 0,1 0 2 0,-1 0-1 15,0 1-1-15,0-1 2 0,0 1-4 0,-1 0 0 0,1 0 2 0,0 0 1 16,1 1 2-16,-1-1 1 0,0 0-4 0,0 1 1 0,0-1-1 0,1 0 1 16,-1 0 2-16,1 0-3 0,0 0-1 0,0 0 6 0,1 0-5 15,0 0 8-15,1-1-5 0,0-1-2 0,1 0 4 0,0 0-5 0,-1 0 5 16,1 0-3-16,1 0-3 0,0 0 5 0,0-1 1 0,0 0 2 15,0 0-3-15,1 0-1 0,0-1 5 0,0 1-3 0,0 0 0 0,0 0 1 16,0 0-7-16,-1 0 8 0,0 0-1 0,1 0-1 0,-1 1-2 0,1 0-2 16,-1-1-1-16,0 1 1 0,0 0 1 0,0-1 0 0,-1 1 1 15,1 1-2-15,0-1-2 0,0 0 2 0,-1 0 2 0,1 0-2 0,0-1 1 16,0 2 0-16,-1-1-2 0,1 0 4 0,0 0-2 0,-1-1-3 0,1 1 0 16,-1 0 3-16,0 0 4 0,0 0-1 0,1 0 1 0,-1 0-2 15,-1 0-5-15,2 0 6 0,-2 0-5 0,0 0 5 0,1 0-1 0,-1 0-5 16,1 0 3-16,-1 0-2 0,0 1 2 0,0-1 3 0,1 1-4 0,-1 0-2 15,1-1 2-15,-1 2 1 0,1-1 4 0,0 0-4 0,-1 1 1 16,1-1-4-16,0 0 1 0,1 1 0 0,-1-1 1 0,0 1 4 0,0-2-3 16,0 1 0-16,1-1 1 0,-2 0-4 0,1 1 2 0,0-1 1 15,0 0 0-15,1 1 4 0,-1-1-1 0,0 0-2 0,0 0-1 0,0-1 2 16,0 1 1-16,0 0-3 0,-1 0 0 0,1 0 3 0,0 0-2 0,-1 0 1 16,2 0-4-16,-1 1-2 0,0-1 2 0,0 1 4 0,0 0-1 15,1 0-4-15,-1 0 0 0,0 0 2 0,0-1 1 0,1 1 3 0,-1-1-5 16,0 1-1-16,1-1 2 0,-1 1-2 0,0-1 2 0,1 1 4 0,-1-1-6 15,1 0-2-15,0 1 4 0,-1 0-2 0,1 0-1 0,-1 0-4 16,1 0-3-16,0-1-2 0,1 1-4 0,0 0-9 0,1 0-8 0,1 1-11 16,0 0-24-16,0 0-44 0,0 0-50 0,0 0-53 0,0 1-33 15,0 1-8-15,-1 1 5 0,-1 1 13 0,-2 0-110 0</inkml:trace>
+  <inkml:trace contextRef="#ctx0" brushRef="#br0" timeOffset="-147848.56">14744 13953 1093 0,'-4'-1'134'0,"3"-1"-20"0,3-1-5 16,9 0-10-16,6-3-3 0,7-2-18 0,9-3-15 0,6-3-9 15,10-1-13-15,8-4 2 0,6-4-6 0,9-1-8 0,6-5-11 0,10-1-9 16,5-1-8-16,8 0-5 0,8-2 0 0,5 0 4 0,6-1-3 0,4-2-4 15,3-2 0-15,4 3-3 0,1-1 7 0,1 1 6 0,1 1-3 16,-1 1 6-16,-1 3-18 0,-3 0 10 0,1 3 20 0,-2-2 1 0,0 1 26 16,-1 1 14-16,-2 0 5 0,-2 5 15 0,-3 0 7 0,-2 4-5 15,-1 1-7-15,-3 3-8 0,-2 2 4 0,-4 3-3 0,-5 1-9 0,-4 3-11 16,-2 0 1-16,-6 1-5 0,-4 1 10 0,-7 1-2 0,-4 2-8 0,-5 0-7 16,-5 1-3-16,-6 1-8 0,-6-1-2 0,-7 2-6 0,-3 2-12 15,-5 0 4-15,-4 0-5 0,-5 2-2 0,-4-1-1 0,-5 2-8 0,-4 1-3 16,-3 0-10-16,-5 1-4 0,-3-1-16 0,-5 1-18 0,-3 0-12 0,-6 2-21 15,-5-1-24-15,-6 0-37 0,-5-2-69 0,-8-1-80 0,-6-2-106 16,-9-1-118-16,-7-1-304 0</inkml:trace>
+  <inkml:trace contextRef="#ctx0" brushRef="#br0" timeOffset="-146191.58">17025 14509 1118 0,'6'-15'84'0,"3"-2"-57"16,4-4-15-16,6 2-3 0,4 1-9 0,3 0-15 0,6 2-6 15,3 2-5-15,5 2 1 0,2 1 2 0,-1 2 0 0,1 1-2 0,1 3 1 16,-1 2-1-16,2 2 3 0,2 0 2 0,-2 3 6 0,0-1 8 0,-1 2 8 16,-1 0 2-16,-4 1-1 0,0 0-3 0,-3 1 2 0,-1 0 2 15,0 1 1-15,-3 1-3 0,-3 1-1 0,-4 1 2 0,-3 0-2 0,-3 1 5 16,-3 0-5-16,-4 1-1 0,-2-1 1 0,-4 0-2 0,-3-1 2 0,-5 1-2 16,-3 1 4-16,-5 1 0 0,-2-2 4 0,-4 0 9 0,-3-2 1 15,-2 0 5-15,-4 1 6 0,-3-1-4 0,-3-1-1 0,-2-1 3 0,-2-2-3 16,-1 0 7-16,-3-2 6 0,0-1 11 0,0-2 11 0,1-1 19 0,2-1 15 15,3-3 4-15,0-1-1 0,5 0-19 0,0-2-17 0,4 2-15 16,3-1-8-16,2 1-12 0,3-2-10 0,3 0-4 0,4 0-10 0,2 0 3 16,4 1-6-16,3-1-8 0,2 2-3 0,4-1-11 0,2 1-1 15,4 0 0-15,2 1 2 0,5 0 2 0,5 2 1 0,1 1 1 0,4 2 0 16,1 2 5-16,4 1 6 0,0 1-3 0,3 1 0 0,-1 2-2 0,1 0-4 16,0 1 4-16,-2 1-4 0,2 1-2 0,-3 0 0 0,-2 1-3 15,-1-1 2-15,-2-1 1 0,-3 0 3 0,-2-3-3 0,-5-1 4 0,-3 0 7 16,-6-2-1-16,-1 1 5 0,-5-1-5 0,-2 0-3 0,-3 1 7 0,-4-1 3 15,-3 1 3-15,-3 0 10 0,-5-1-2 0,-5 0 7 0,-2 0 7 16,-3-1-1-16,-1 0 5 0,0-1-4 0,0-1 3 0,-2 0 3 0,1-1 0 16,-1 1-1-16,-1-1-10 0,-1 0-2 0,1 0-2 0,0 0-4 15,1-1 5-15,2 1-4 0,2 1-11 0,3 0 6 0,1 1-6 0,2 1 1 16,2-1 2-16,2 1-4 0,2 0-1 0,2 0-1 0,3 1-1 0,2 0 4 16,0 0 1-16,2 0-3 0,1 0-1 0,1 0 0 0,2 0-5 15,1 1 4-15,1 0 2 0,2 1 2 0,1 1 5 0,1 0 0 0,0 1 0 16,2-1 1-16,1-1 3 0,-1 1 0 0,2-1-2 0,0 0-3 0,2 0 1 15,0-1 1-15,1 1 0 0,-1-2 1 0,2 1-4 0,-2-1 0 16,0-1-4-16,-1 0 4 0,-1 0-1 0,-2 0-1 0,1 0 3 0,-1 0 2 16,-1 0 2-16,-2-1 7 0,0 0 8 0,-1 0 1 0,-1-1 1 0,0 1 5 15,-1 0 4-15,-1-1-2 0,0 1 5 0,1 0-5 0,-1 0-4 16,0 0-2-16,0-1-5 0,0 1-6 0,0 0-2 0,0 0-9 0,0 0-2 16,0 0 1-16,0 0-5 0,0 0 0 0,0 1 0 0,0-1-3 15,0 1-1-15,0 1 7 0,0-1-3 0,0 1 4 0,0-1 1 0,0 2 4 16,-1-1-6-16,1 0 1 0,-1 0 5 0,0 0-3 0,0-1 4 0,0 1-1 15,-1 1 0-15,1-2 1 0,-1 0 2 0,0 1-2 0,0-1-1 16,0 0-4-16,0 1-1 0,1-1 0 0,-1 0 4 0,0-1 1 0,1 0-2 16,0 1-4-16,0 0 0 0,0-1 0 0,1 0-1 0,0-1 8 0,0 1-11 15,-1-1 8-15,0 1 2 0,1-1-5 0,0-1 5 0,0 2-3 16,0-1 0-16,-1-1 3 0,1 2 5 0,0-1-5 0,0 0 0 0,-1 1-3 16,1-1-3-16,0 0 1 0,-1 1 4 0,0-1 2 0,0 0 2 15,0 2-1-15,0-2-2 0,0 1 0 0,0 0-2 0,0-1 7 0,-1 0-5 16,1 1-3-16,0-1 3 0,-1 1-5 0,2-1 1 0,-1 1-4 0,0-1 1 15,0 1 2-15,-1 0-4 0,1-1 5 0,-2 2-4 0,2-1-1 16,0 0 2-16,-1 0-2 0,1 0-3 0,-1 0 3 0,0 1 1 0,1-1-4 16,-2 2 2-16,2 0 2 0,-1-1-1 0,-1 0 5 0,1 0-1 0,0 1 1 15,-1 0-2-15,1 1 6 0,0-1-6 0,0 1 0 0,-1 0 1 16,1-1-1-16,1-1 2 0,-1 1-2 0,2-1 3 0,0 0-8 0,0-1 7 16,1 1-1-16,0 0-4 0,-1-1 6 0,1 1-1 0,1-1-1 0,-1 1-2 15,0 0-4-15,0 0 2 0,0 0 2 0,0-1 2 0,1 0-1 16,-1 1 2-16,1-1-1 0,0 0 2 0,-1 1 2 0,0-1-5 0,0 1 0 15,0 0 0-15,-1-1 0 0,1 1-2 0,0 0 7 0,-1-1-1 16,0 0-2-16,1 1 1 0,-1-1-3 0,0 0 3 0,0 0 4 0,1 0 0 16,0 0-1-16,0 0-6 0,0 0 7 0,0-1-4 0,1 1 5 0,0-2 4 15,0 1-6-15,0-1-3 0,0 0 4 0,0-1-3 16,1 1 2-16,0-1-1 0,-1 1 0 0,0-1-5 0,1 1 1 0,-2-1-1 0,2 1 0 16,-2 0 6-16,1 0-4 0,-1 1 4 0,0 1 2 0,1-1-11 15,-1 1 6-15,-1-1-2 0,1 0-1 0,-1 1 5 0,0 0-5 0,-1 0-5 16,1 0 7-16,0 0 1 0,0 0 6 0,1 0-2 0,-1 0-6 0,1 0 1 15,-2 0-1-15,2 0 2 0,-1 0-4 0,0 0 1 0,0 0-2 0,0 0 5 16,-1 0 1-16,1 0-1 0,0 0-5 0,0 0-1 0,0 0 1 16,-1 0-2-16,1 1 2 0,0-1-1 0,0 1 0 0,-1 1 0 0,0-1 1 15,1 1 1-15,0 1-1 0,-1-1 5 0,0 1 0 0,0 0-3 16,0-1 4-16,-1 0-4 0,0-1-2 0,1 1-1 0,0 0 3 0,2-1 6 16,-1 0-7-16,0 0 4 0,1 0-3 0,-1-1-3 0,0 0 6 0,-1 0-3 15,2 0-5-15,-2 0 2 0,1 1 0 0,1-1 3 0,-1-1-3 16,0 2 1-16,1-1 1 0,-1 0-1 0,1 0 4 0,0-1-4 0,-1 1 0 15,2 0-4-15,-2-1 0 0,2 0-2 0,-1-1 7 0,0 0 2 0,0 0 2 16,0 1-3-16,1-1-3 0,0 1 0 0,-1 0 6 0,0-2 2 16,1 1-4-16,-1 0-7 0,1 0 5 0,-1 1 1 0,1-1 0 0,-2 1 6 15,2 0-5-15,-1 0-1 0,-1 1-3 0,2-1 3 0,-2 0-3 16,1 0 3-16,-1 0 6 0,1 1-9 0,-1-1-1 0,0 1-1 0,0-1-7 16,0 1 3-16,1 0 1 0,-1-1-3 0,1 1-6 0,-1 0 2 0,0 0-9 15,0 1 3-15,0-1 6 0,1 2-3 0,-1-1 4 0,1-1 2 16,-1 0-1-16,0 1 5 0,1 0 1 0,-1 0 0 0,1-1 7 0,-1 0-6 15,1 0 6-15,0 0-3 0,0 0-3 0,0 0 7 0,0 0-4 0,0 0 1 16,1 0-4-16,-1-1-9 0,1 0-4 0,-1 1-17 0,1-1-34 16,0 1-42-16,-1-1-44 0,3 0-41 0,0-1-39 0,1 1-39 0,0 1-32 15,1-2-28-15,1-1-42 16</inkml:trace>
+  <inkml:trace contextRef="#ctx0" brushRef="#br0" timeOffset="-144613.58">20297 13138 493 0,'-2'-4'141'0,"1"0"-22"16,-1-1-36-16,0 1-20 0,1 0-22 0,0 2-20 0,1 1-13 0,-2 0-10 15,2 0-8-15,-1 1-4 0,0 0-4 0,1 1-4 0,-1-1 0 0,1 1-4 16,-1 1 7-16,0-1 2 0,1 2 1 0,-1 0 2 0,0-1 3 16,1 1 4-16,-1-1 3 0,1-1 4 0,0 0 3 0,0 0 2 0,1-1 0 15,-1 0 0-15,1 0-3 0,-1 0-4 0,0 0 2 0,1 0 0 16,-1-1 0-16,0 1 2 0,0-1-1 0,0-1 1 0,1 1-2 0,-1-1-1 16,1 0 1-16,0 0-2 0,-1-1 0 0,0 1-2 0,-1 0-1 0,0 1-4 15,0 0 4-15,0 0-2 0,0 0-1 0,-1 1 4 0,1-1 0 16,0 2-1-16,-1-1 1 0,0 1 1 0,0 0 0 0,-1 0 5 0,1 0 2 15,0 1 0-15,1-1 3 0,0 0 2 0,0-1 4 0,0 1 9 0,1-1 7 16,0-1 7-16,2 0 6 0,0-1 9 0,2 0 7 0,1-3 7 16,1 0 6-16,3-2-5 0,2 1-3 0,2-1-6 0,1-1-1 0,0 0-1 15,3 1 3-15,1-1-1 0,1 1-2 0,0 0-5 0,1 2-6 0,0-1-6 16,-1-1-9-16,1 2 0 0,0 0-6 0,0 1-7 0,1 1-4 16,0 1-7-16,-1 0-2 0,0 1-3 0,-1 0-1 0,-1 1-5 0,0 1-4 15,-1 0-6-15,-1 1 6 0,-2 0-10 0,2 0 2 0,-1 0-4 16,-1 1-12-16,-1-1 4 0,0 1-10 0,1 0-9 0,-1 0-12 0,-2 0-31 15,0 0-51-15,-1-1-43 0,0 1-39 0,0 0-27 0,-1 1-75 0,-2 0 51 16</inkml:trace>
+  <inkml:trace contextRef="#ctx0" brushRef="#br0" timeOffset="-144444.58">20049 13588 2763 0,'7'-10'125'0,"2"-1"-15"0,3-3-52 0,0 2-25 16,0 2-31-16,7 3-32 0,4 0-33 0,4 3-44 0,9 3-54 0,3 3-60 15,4 1-70-15,4 1-75 0,-1 1-97 0,1 1-70 0,1 2-123 0</inkml:trace>
+  <inkml:trace contextRef="#ctx0" brushRef="#br0" timeOffset="-142781.04">21559 13257 2406 0,'-10'-8'97'16,"-1"2"-7"-16,1-1-19 0,4 5-29 0,4 2-26 0,2 1-18 0,2 2-7 15,1 1-8-15,4 2 6 0,2 2 1 0,2 2 2 0,3 0-6 16,3 1-5-16,4 3 1 0,0 2 4 0,3 2-1 0,3 0-12 0,-1 2-14 16,3 0-21-16,0-1-9 0,1 1-4 0,2-2-1 0,0-2 5 0,-1-1 11 15,2-1 15-15,-2-2 14 0,0-1 10 0,-1-3 14 0,0-1 9 16,-2-3 13-16,1-2 10 0,-3-2 14 0,-2-4 12 0,-3-1 18 0,0-3 17 16,-2-3 9-16,0-2 6 0,-1-4-9 0,0-2-13 0,1-4-15 15,-2-2-14-15,1-1-8 0,-1-2-23 0,0 0 6 0,-4-1-13 0,0 1 2 16,-2-1 4-16,-2-1-8 0,-4-2-1 0,-2 1-8 0,-2-1 3 15,-5 0-1-15,-4-1-5 0,-3-2-1 0,-4-1-2 0,-2 1-2 0,-1-1 7 16,-4 4 9-16,0 2-1 0,-5 1 2 0,1 2 2 0,0 4 0 0,-1 2-4 16,3 3-9-16,0 4-3 0,-1 3-4 0,1 3-1 0,0 3 16 15,1 4-10-15,-2 4 3 0,0 3 10 0,2 5-10 0,-2 4 5 0,1 2-7 16,0 6-20-16,-2 3 2 0,3 3-14 0,0 3-11 0,2 2-13 0,2 3-29 16,2 3-38-16,3 0-54 0,5 1-82 0,2 0-101 0,2 2-84 15,5 0-59-15,2 2-119 0</inkml:trace>
+  <inkml:trace contextRef="#ctx0" brushRef="#br0" timeOffset="-142581.04">22977 13085 2250 0,'0'2'104'0,"0"1"-75"0,1 4-26 16,2 3-14-16,2 3 0 0,3 5-1 0,1 2-12 0,4 4-3 0,-1 3-3 15,4-1-11-15,-1 3 14 0,0 0-4 0,0 1-11 0,-1 2-6 16,0 1-27-16,1-1-23 0,-2 1-19 0,1-2-32 0,-1 1-62 0,1-3-56 16,-2-2-45-16,0-3-12 0,1-2-98 0</inkml:trace>
+  <inkml:trace contextRef="#ctx0" brushRef="#br0" timeOffset="-142280.47">23317 12444 2565 0,'-4'-9'141'0,"1"1"-53"0,2 1-25 0,3 3-49 0,4 3-9 15,2 1-3-15,5 2-16 0,6 2 9 0,4 2-5 0,4 4-3 16,1 2 6-16,0 2-9 0,3 2-8 0,1 2-12 0,0 4-16 0,0 3-16 16,-1 0-11-16,-2 2-20 0,0 0-11 0,-2 3 9 0,0 0-8 0,-3 1 5 15,-1 0 1-15,0 1-16 0,-3-1 5 0,0 0 8 0,-1-2 8 16,-2 1 11-16,0-3 17 0,-2-1 23 0,-1-3 17 0,-2-6 23 0,-1-2 16 15,0-4 13-15,-1-4 21 0,1-2 19 0,0-3 21 0,-2-1 18 16,2-2 19-16,-1-1 20 0,-1-1 19 0,0-1 13 0,-2 0-2 0,0-1-18 16,-2 0-19-16,0-1-19 0,0 1-13 0,-1 0-11 0,-1 2-10 0,-1 2-9 15,-1 0-24-15,0 1-10 0,-1 0-16 0,-1 1-13 0,0 2 5 16,-1 2-8-16,-1 2-3 0,-2 3-4 0,-3 4-3 0,0 2-9 0,-6 6-11 16,-4 3-19-16,-3 2-42 0,-5 6-67 0,-7 3-96 0,-4 2-156 0,-7 5-202 15,-5 2-457-15</inkml:trace>
+  <inkml:trace contextRef="#ctx0" brushRef="#br0" timeOffset="-140960.48">17634 11637 333 0,'-11'0'60'0,"1"2"-61"15,-1 2-9-15,5 2-12 0,4 1-15 0,1 2-22 0,0 0-30 0,1 0-69 16</inkml:trace>
+  <inkml:trace contextRef="#ctx0" brushRef="#br0" timeOffset="-140464.47">17537 11777 192 0,'-10'1'218'0,"-3"0"-28"0,-2 0 7 0,1-1 6 16,2 0 7-16,2-1-6 0,0 1-7 0,0-1-16 0,2 1-20 16,1-1-21-16,3-1-22 0,2 0-22 0,1 1-22 0,0-1-17 0,3 0-17 15,1 0-10-15,3-1-11 0,3-2-7 0,4 1-1 0,3-1 4 16,4 0-7-16,3 0-2 0,1 0-5 0,2 1-1 0,2 0 2 0,-1 2 0 15,3 1 1-15,-2 2-2 0,1 0-2 0,-1 2-1 0,-1 2 4 0,-4 0-7 16,1 3 5-16,-2 1-2 0,-2 2-4 0,-1 2 5 0,-1 1-4 16,-4 2 2-16,-4 1-1 0,-2 3 0 0,-2 2 4 0,-3 0 0 0,-3 1 0 15,-3 1-3-15,-2-1-4 0,-2 0 1 0,-2-1 0 0,-1-1 9 16,-2 1 8-16,-2-3 1 0,-1 1 4 0,0-2-3 0,0-2-11 0,0 0 9 16,1-3 3-16,1-1 1 0,2-2 5 0,-1-2-2 0,3-4 0 0,1 1 1 15,1-2 3-15,3-1-1 0,1 0 0 0,1-2-4 0,1 0-6 16,2 0-2-16,0-2 0 0,1 0-2 0,3-1-5 0,1-2-4 0,3 1 0 15,2-2 1-15,2-2 4 0,1 0-3 0,2 0 0 0,2 0-2 0,1 1 4 16,0 2-2-16,2 0 3 0,-2 3-3 0,-1 1-1 0,1 3 1 16,-1 1 1-16,1 3 3 0,0 2-3 0,0 3 1 0,-1 2-7 0,3 2 5 15,0 2 2-15,-2 5 4 0,2 2-4 0,-1 4-2 0,-1 3 0 0,-1 0 3 16,-1 1-3-16,-1 1 0 0,-3 0-3 0,-1 0-4 0,-1 0 4 16,-2-1 3-16,-2-3 0 0,-1-3-3 0,-2-4-2 0,-2-4 1 0,-2-1 1 15,-1-2 15-15,-3-3 14 0,-1-1-4 0,-3-2 8 0,-3 0-1 16,-2-1-12-16,-2-2 2 0,1-1 3 0,-4-1 2 0,1-2 0 0,1-1 4 15,-2-1-1-15,1-2 0 0,0-1 1 0,3-1-6 0,-1-2 1 0,1-1-7 16,0 0-2-16,3-1-22 0,1 0-1 0,0 0 0 0,1 1 2 16,2-1 17-16,0 0-1 0,2 1 2 0,-1 1-6 0,1 1 4 0,1 2 2 15,0 0-9-15,1 2 10 0,-1 0-10 0,1 0 0 0,0 2-1 0,0-1-11 16,1 1 8-16,-1 2-2 0,1 1 4 0,0 1-3 0,1 1-1 16,0 1 2-16,0 1-3 0,0 0 3 0,1-1 17 0,1 1-10 0,0 0 9 15,0 1-3-15,2-1-22 0,-1 0 4 0,2 1-9 0,0-1 2 16,1-1-6-16,-1 1 3 0,1 1-8 0,-1-1-10 0,-1-1-4 0,2 1-14 15,-1-1-11-15,1-1-14 0,-2 0-20 0,1 0-22 0,-1 0-31 0,0 0-27 16,1 0-51-16,-2 2-54 0,1 1-57 0,-1 2-38 0,0 1-11 16,0 3-172-16</inkml:trace>
+  <inkml:trace contextRef="#ctx0" brushRef="#br0" timeOffset="-139945.78">18349 14399 1711 0,'-2'-2'1036'0,"-1"0"-989"0,1 0 6 0,2 1-4 0,1 0-25 15,4 0-9-15,2-1-10 0,4-1-5 0,3-1-5 0,2-1-4 0,1-3 3 16,2-2 2-16,0-1 6 0,1-3-11 0,-1-1-6 0,0-4-10 15,-1-3-3-15,-1-3 0 0,0-4-9 0,-3-1 1 0,-1-3 7 0,-1 0 1 16,-2-3 18-16,-1 1 7 0,-2-3 8 0,-2-1 1 0,-1 1 11 16,-1 0 4-16,1 2-2 0,-3 2 16 0,0 3-5 0,0 2 9 0,-1 4 8 15,-1 3 9-15,0 4-7 0,-1 3 1 0,1 3 0 0,-1 2-9 0,0 4 2 16,0 2-11-16,0 2-10 0,1 1 1 0,-1 2-11 0,0 3-3 16,0 2-9-16,-1 6-5 0,0 5 1 0,-1 6 2 0,1 5 4 0,-1 5 0 15,0 4-2-15,0 1-14 0,1 1 5 0,2 2 3 0,-1-1 3 0,2 0 5 16,2-1-6-16,0-2 1 0,3 1-3 0,0-3 6 0,2 1-5 15,1-1-4-15,0-3 2 0,1 0 3 0,1-3 8 0,1 0-4 0,0-2-2 16,1 0 7-16,-1-1-5 0,1-2 8 0,-1-2 0 0,-1-3-18 16,0-1 10-16,-2-2-9 0,-1-3 9 0,-3-1 21 0,1-1-10 0,-2-2 1 15,1-2-5-15,-2-1-7 0,0-1 4 0,-1-1 0 0,0-1-3 0,0-1-1 16,0-1 7-16,-1-1-1 0,0 1-6 0,0-1-2 0,-1 0-3 16,1 0 3-16,-1 0-2 0,0 1-5 0,-2 1-3 0,0 0 0 0,-1-1-3 15,-1 2 1-15,-1 0 7 0,0 1-5 0,-1 2 12 0,-1-1 0 0,0 1-2 16,1-1 5-16,0 1 1 0,0-2-6 0,2 1 0 0,0 0 1 15,2-1-1-15,0 0 2 0,0-1-7 0,1 0-9 0,0-2-1 0,1 1-4 16,1-1-4-16,0 0-8 0,0 0-10 0,0-1-7 0,0 0-4 16,0 0-18-16,0-1-20 0,0 0-30 0,0 0-27 0,0-1-34 0,-1-1-48 15,1-1-56-15,0-2-79 0,-1-2-55 0,1-2 11 0,0-2-66 0</inkml:trace>
+  <inkml:trace contextRef="#ctx0" brushRef="#br0" timeOffset="-139678.79">18806 14437 1846 0,'0'0'159'0,"1"1"-42"0,0 1-8 0,3-2-18 0,0 2-20 0,4 0-29 16,4 2-25-16,3 1-5 0,3 0-2 0,0 1-1 0,4 1-4 15,1 0-4-15,-1 1-4 0,2 1 3 0,-1-1-5 0,1 0 1 0,0 0-7 16,1-2-5-16,0-1 6 0,-1-1-3 0,1-1 10 0,-2-1-1 16,-1-1 0-16,-1-2 9 0,0-1 9 0,-3-2-3 0,1-1 4 0,0-2 7 15,-1-2-11-15,0 0 14 0,0-1-6 0,0-3 1 0,-3-1 6 0,0-1 1 16,-1 0 6-16,-3-2 6 0,-2-1 5 0,-2 0 5 0,-2-1 6 15,-2-3 2-15,-5-1-8 0,-2-1 0 0,-4-3-5 0,-2-2-6 0,-4-1-1 16,-4 0 0-16,-3-1-4 0,-1 4-5 0,-2 0 4 0,-2 5-5 16,0 1-4-16,0 4 0 0,0 3-6 0,0 5-5 0,1 3-1 0,-3 3-13 15,0 3-7-15,0 4-16 0,0 3-20 0,0 5-22 0,1 6-44 0,-2 4-62 16,0 4-92-16,0 6-153 0,-1 5-198 0,2 5-165 0,-2 5 102 0</inkml:trace>
+  <inkml:trace contextRef="#ctx0" brushRef="#br0" timeOffset="-137764.37">23628 12295 1027 0,'-19'-10'807'0,"-1"1"-644"16,-4 0 11-16,2 4-36 0,3 2-32 0,2 2-30 0,2 1-20 15,2 1-11-15,2 1-10 0,1 1-6 0,1 1-12 0,4 2-9 0,0 1-8 16,2 0-1-16,3 4-6 0,2-1 1 0,3 2-2 0,3 1 1 16,4-1 6-16,4 1-1 0,4-1 2 0,3 1-6 0,4 1-5 0,2 0-4 15,3-1-2-15,1 1-6 0,1 1-4 0,1 1 4 0,0 1-4 0,0 2 8 16,0 2 4-16,0 0-1 0,-3 1 9 0,-1 0-9 0,-4-1 2 16,-1 2 25-16,-2 0 3 0,-5 0 9 0,-2 1 5 0,-3-1-14 15,-4-1 3-15,-3 1 5 0,-2-2 2 0,-3 1 2 0,-2-1 4 0,-4-1 0 16,-2 0 3-16,-3-1 1 0,-3-2-3 0,-3 0-2 0,-2-1 0 0,-2-1-5 15,-3-2-7-15,-2-2 1 0,1 0-4 0,-1 0 3 0,1-1 3 0,2-2-7 16,1 0 3-16,4-3-4 0,2 0-4 0,2 0-5 0,4-2-3 16,2 0-6-16,2-2-10 0,3 0-4 0,1 0 1 0,2 0-2 0,1 0 0 15,2 0 6-15,1 2 4 0,2-1 9 0,1 2 9 0,0 1-6 0,1 1-4 16,2 2 1-16,0 2-1 0,1 2 5 0,1 2 4 0,-1 2-7 16,4 1 4-16,0 3-5 0,1 1 6 0,1 0-8 0,-1 2-2 0,2 0 17 15,-1 0-6-15,-1 1 14 0,1 0 3 0,-5-2-19 0,0 2-1 16,0-1 1-16,-3-1 4 0,-2-1 0 0,-2-2 8 0,-3 0-5 0,-1 0-3 15,-2-2 6-15,-2-1-4 0,-1 1 1 0,0-2 0 0,-3-1-4 0,-2-2-3 16,-1 0 2-16,-1-1 0 0,-2-1-5 0,0-1 2 0,1-2-2 16,-2-1 2-16,1-1 3 0,1-1-2 0,0-2 1 0,0 0-4 0,3-3-4 15,2 0 1-15,0 0-7 0,3-2-11 0,0 1-3 0,0-2-8 16,2 1 0-16,-1 0-9 0,1 0-8 0,0 0-12 0,0-1-18 0,0 0-15 16,0 1-13-16,1 0-11 0,0 1-21 0,1-1-21 0,-1 1-18 0,0 1-22 15,0-1-21-15,2 1-18 0,0-2-21 0,1 0-19 0,2 0-216 16</inkml:trace>
+  <inkml:trace contextRef="#ctx0" brushRef="#br0" timeOffset="-137347.37">24734 13126 3271 0,'-8'-11'84'16,"2"2"-13"-16,0 0-16 0,6 4-27 0,5 0-11 0,3 0-10 16,2 0-5-16,5 1-6 0,2 1-1 0,2 2-10 0,0 0-2 0,0 1-10 15,-1 1-19-15,-2 1-25 0,1 1-28 0,-1 1-16 0,-1 0-8 0,-1 1-4 16,1 0-1-16,-1 0 10 0,-2 0 3 0,-2 1 10 0,0 0 12 15,1 0 7-15,-2 0 26 0,-1 1 21 0,1-1 17 0,-2 0 17 0,0-1 7 16,-1 0 16-16,-2-1 3 0,0 0 12 0,-1 0 12 0,1 1 4 16,-2-2 1-16,2 0 0 0,-1 0-4 0,2-1-1 0,0 0 6 0,0 0 1 15,0 0 4-15,1-1-6 0,-1-1 7 0,1 0-4 0,1-1-17 0,0-1-1 16,0 0-8-16,-1-1 0 0,-1 0-2 0,1 0-4 0,-1-1-8 16,0 1-9-16,-1-1-1 0,-2 0 1 0,0 1-3 0,0-1 1 0,-1 0-5 15,0 0-3-15,-1-1-2 0,0 1-4 0,-1-1-3 0,1 1-7 0,-1 1-2 16,1-1-8-16,-1 1-6 0,0 0-9 0,0 0-17 0,0 1-18 15,1 1-34-15,-1 0-31 0,0 1-47 0,1 0-47 0,0 2-31 0,0 0-18 16,0 4-2-16,-1 1-4 0,0 3 27 0,0 3-142 0</inkml:trace>
+  <inkml:trace contextRef="#ctx0" brushRef="#br0" timeOffset="-137064.39">24843 13524 1932 0,'-8'-2'494'0,"1"-2"-392"0,-1-1-16 0,4 2-43 0,3 0-4 15,2 0-11-15,1 0-7 0,2-2-1 0,1 0 1 0,2 0-3 0,0-2-11 16,3 0 4-16,-1-1-7 0,2 0-1 0,2 0-5 0,2-1-9 0,-1-2-1 16,2 1-3-16,2 0 1 0,1 2-3 0,0 0-11 0,2 2 2 15,-1 3-6-15,-1 4-4 0,0 3 9 0,-1 3 3 0,-3 3 8 0,-1 3 8 16,-1 1-1-16,-2 2 6 0,0 1 3 0,-1 1 3 0,-1 2 2 16,0 0 9-16,1-2 3 0,-2 2 6 0,2-2 4 0,-1-3-3 0,0-2-3 15,3-1 7-15,-1-2-4 0,2-3 6 0,0 0 4 0,0-4 6 0,-1-1 10 16,0-2-4-16,-2-1-2 0,-1 0-10 0,0-3-5 0,-2 0-6 15,0-2-6-15,0-2-3 0,-1-1-12 0,1-1 0 0,-1-2-11 0,-1 0 2 16,1-3-10-16,0-2-13 0,-1 1-7 0,0 0-21 0,-1-1-17 16,0 0-17-16,-1 0-23 0,0 1-18 0,0 0-17 0,0-1-34 0,1 2-15 15,-1 0-38-15,1 0-40 0,0 2-31 0,0 1-23 0,1 3-1 16,1-1-77-16</inkml:trace>
+  <inkml:trace contextRef="#ctx0" brushRef="#br0" timeOffset="-136480.39">25917 13131 2237 0,'-2'-11'226'0,"0"-2"-35"0,1-1-39 16,3-2-55-16,2 1-16 0,2 0-19 0,3 0-24 0,1-2-5 0,0 3-15 16,2 0-4-16,1 2-4 0,0 3-13 0,1 2 3 0,-1 3-7 15,1 3-9-15,1 2 5 0,-2 4-8 0,-1 1-2 0,-1 3-1 0,-2 2-2 16,-1 4-2-16,-2 4-5 0,-2 2-13 0,-2 4-5 0,-3 2-10 0,-2 2-5 16,-1 2-1-16,-4 1-8 0,-1 0-3 0,-2-2 7 0,-2 1 19 15,-1-3 9-15,0 0 9 0,2-2 3 0,0-1 1 0,2-3 11 0,2-1 22 16,1-5 19-16,1-2 18 0,3-4 22 0,1-2 20 0,2-1 17 0,0-3 7 15,0-2-3-15,2 0-12 0,1-2-18 0,2-2-4 0,1-1-14 16,1-1-15-16,1-2-7 0,1-2-16 0,2 0-6 0,1-1-4 0,2-1-7 16,-2-1-8-16,1 0-6 0,-1-1-4 0,-1 1-2 0,0 0-1 15,-1 0-11-15,0 2-1 0,-3 0-9 0,2 2-3 0,-2 1 3 0,0 3-6 16,-1 1 11-16,-1 2-4 0,-1 2 8 0,-1 1 11 0,-1 3-3 0,-1 2 11 16,-1 3 1-16,-2 3-6 0,-1 2 1 0,-2 3-8 0,-1 2-1 15,-2 1-1-15,-2 2 4 0,0 1 1 0,1 2 2 0,-2 2-2 0,-1-1-1 16,1 2 2-16,0-3-1 0,0 0-7 0,3-1-10 0,0-1-21 0,2 0-42 15,1-2-57-15,2 0-57 0,2-2-57 0,2-2-33 0,2-1 1 16,2-3 22-16,2-3 33 0,0-3-72 0</inkml:trace>
+  <inkml:trace contextRef="#ctx0" brushRef="#br0" timeOffset="-136213.83">26427 13581 1413 0,'8'-19'267'0,"-1"-1"-94"15,4-2-43-15,-3 5-30 0,-2 6 3 0,0 3-12 0,-1 3-10 0,-2 2-13 16,-1 2-17-16,0 1-14 0,-2 2-15 0,0 2-4 0,1 2-12 0,-1 3-6 15,1 1-8-15,0 3-13 0,2 0-10 0,0 2-5 0,1 1-5 16,2-1-11-16,1-1 9 0,4 0 0 0,1-2 2 0,2-2 15 0,0-2-1 16,1-1 4-16,1-3 4 0,1-1 6 0,-2-2 9 0,0-2 15 15,1-1 8-15,0-2 6 0,-1-2 9 0,-1-1 3 0,-1-1 6 0,-2-1 7 16,-2-1 2-16,-1-1 3 0,-1-1 1 0,-2-1-1 0,-1-2-4 0,-2-2-2 16,-1 1-2-16,-2-3 0 0,-2-1-6 0,0 0-6 0,-3-3-2 15,0 0-11-15,0 1 0 0,-3-1-5 0,0 2-20 0,0 3-1 0,-3 3-24 16,0 1-11-16,-1 2 6 0,0 2-12 0,0 1 14 0,-1 2-15 15,1 1-15-15,-1 2-14 0,1 2-22 0,1 1-22 0,1 2-14 0,1 1-23 16,4 1-42-16,0 0-46 0,2 3-69 0,2 2-34 0,3 0 10 0,2 4-148 16</inkml:trace>
+  <inkml:trace contextRef="#ctx0" brushRef="#br0" timeOffset="-135997.83">27381 13371 2392 0,'11'-5'149'0,"2"0"-30"15,1-1-60-15,2 0-26 0,-3 1-12 0,3 1-11 0,-3 1-15 0,-1 2-10 16,-2 1-6-16,-4 2-10 0,0 1-3 0,-4 1-7 0,0 2-3 0,-1 3-7 16,-2 2 2-16,-2 2 17 0,-3 2 12 0,-3 0 16 0,-2 2 14 15,-1-1 1-15,-1-1 9 0,-1-2 0 0,0 1 0 0,-2 0 5 0,2-1-6 16,-3-2 4-16,0 0 2 0,0-1 4 0,-3-1 2 0,0-2-2 0,0-1 0 16,3 0-1-16,-1-3-5 0,1-1-8 0,2-2-12 0,1-2-5 15,0-2-11-15,0-2 2 0,1-2-12 0,0-2-18 0,0-3-24 0,0-2-19 16,1-3-23-16,1-3-22 0,3-1-9 0,-1-4-16 0,0-3-77 15,0 1-49-15,1-5-90 0,0 1-76 0,1-1-97 0</inkml:trace>
+  <inkml:trace contextRef="#ctx0" brushRef="#br0" timeOffset="-135880.65">26950 12669 1024 0,'-7'-14'227'0,"-1"0"-138"0,0-2-14 0,3 5-27 0,1 4-18 0,1 0-3 16,0 2-16-16,1 2-8 0,0 1-11 0,0 1-17 0,1 2-8 15,0 1-11-15,2 2-16 0,1 2-6 0,0 1-8 0,2 2-15 0,0 1-14 16,1 2-39-16,0 0-42 0,3 1-36 0,-1 0-159 0</inkml:trace>
+  <inkml:trace contextRef="#ctx0" brushRef="#br0" timeOffset="-135597.28">27502 13606 2421 0,'-2'12'68'0,"2"3"-49"0,0 5-16 16,1 2-12-16,0-2-7 0,0-1 5 0,0 0 3 0,-2-1 10 0,3-2 7 16,-1-4-6-16,0-1-4 0,0-1-18 0,-2-3-18 0,1-1-15 15,0-2-17-15,-1-2-15 0,1-2-6 0,-1-3-6 0,-1-3 13 0,2-1 12 16,-2-3 18-16,2-3 20 0,0 0 11 0,1-4 15 0,1 0 11 0,1-3 13 16,1 0 12-16,1-4 9 0,0-2 5 0,2-4-2 0,-1 2-8 15,0-1-8-15,0 2-11 0,-1 5-3 0,-1 2 6 0,0 3 4 0,-2 5 11 16,-1 1 4-16,-2 2-9 0,-1 2-1 0,-2 1-8 0,-1 2-17 0,0 0-8 15,-2 1-12-15,-1 2-13 0,-1 0-15 0,-2 2-27 0,-2-1-57 16,-1 3-74-16,0 0-69 0,-1 1-42 0,-1 1-26 0,1-1-175 0</inkml:trace>
+  <inkml:trace contextRef="#ctx0" brushRef="#br0" timeOffset="-129513.9">15240 4703 29 0,'0'0'12'15,"1"0"-4"-15,0-1-6 0,2 2-1 0,1-1 0 0,0 2-4 0,1-1 0 16,-1 0 0-16,0 2 2 0,-1 0-1 0,0 1 1 0,-2 0 1 0,0 0-6 16,-2 1-1-16,-2-2 2 0,-1 3-1 0,0-1 6 0,-1-2 1 15,0 1 0-15,-1 0 1 0,2-2 3 0,0 1 5 0,1-2 2 0,1-1-1 16,0-1 1-16,1 0-3 0,0 1 4 0,1 0 7 16,0-1-2-16,1 1 1 0,0-2-1 0,0 0-2 0,0-1 4 0,1 0-4 0,1-1-2 15,1 0-2-15,1-1-5 0,1 1 0 0,0-3 1 0,1 0-1 0,0 1 0 16,0-2 0-16,0 1-3 0,1 0 2 0,-1 0 0 0,0 0-3 0,-1 1 4 15,-1 0 0-15,0-1 2 0,-1 1 6 0,-2 0 1 0,0 1 1 16,0 1 5-16,-2-1-2 0,1 1 3 0,-1 0-3 0,0 0-3 0,0 2-5 16,0-1-4-16,1 0-1 0,0 2-5 0,0-2 0 0,1 0 1 15,2 0-1-15,1 0-1 0,1-1 1 0,1 0-2 0,1-1 1 0,1 0 1 16,2-1 0-16,-2 0 0 0,2 0-1 0,1 1 1 0,-1-1 3 16,2 2 0-16,0-1 3 0,1 0 1 0,0 1-2 0,0-1 2 0,1 1 1 15,1 1 0-15,1 1 3 0,2-1-1 0,-1 2 0 0,0 0-3 0,1 2-1 16,-1 1-2-16,-1 1 0 0,-1 1 0 0,-1 2 0 0,-2 2-1 0,-1 0 2 15,1 1-2-15,-1 1 1 0,0 0-1 0,-1 1 0 0,0 1 0 16,1 0 1-16,0 1 1 0,1 1-2 0,0 1 0 0,1 0 0 0,1-1 1 16,0 2 0-16,1 2 0 0,-1 0-1 0,2 0-1 0,0 0-1 15,0-2 0-15,2-1-1 0,0 2 2 0,0-1-1 0,-1 0 0 0,0-1 0 16,-2 1-1-16,-1-1-2 0,-1 1 3 0,0 0-3 0,-1 0-2 0,-2 1 2 16,-2-1 0-16,0-1 1 0,-2 1 1 0,0 0 0 0,-1-2-6 15,-2-1 2-15,-1-1 2 0,-2 0 4 0,-1 1 8 0,-2-1 3 0,-1-1 5 16,-2 0 6-16,-3 0 0 0,-1 1 4 0,-4 1-4 0,-1 0-6 0,-4 2-2 15,-5 0-8-15,-2 0 0 0,-6-1-3 0,-1 0-2 0,-5 0-1 16,1-2-2-16,-2 0 1 0,-2-2-4 0,-1 0 4 0,-1-1-2 0,0-1-3 16,1-2 1-16,0-1-4 0,-1 0 1 0,2-2 5 0,2 0 0 15,1-3 1-15,3-1 4 0,2-2-3 0,2-2 3 0,3-1-2 0,5-1 1 16,1-1-1-16,4-1 1 0,3-1 0 0,3 1-5 0,1-2-1 0,3 0-2 16,1 0-1-16,3-1-3 0,3 0-5 0,2 0-9 0,3-2-12 15,3-1-17-15,4 0-24 0,1 0-21 0,6 0-5 0,3-1-11 0,4-1-12 16,3 2-162-16</inkml:trace>
 </inkml:ink>
 </file>
 
@@ -942,7 +791,7 @@
           <a:p>
             <a:fld id="{DC9D2368-47E6-4D58-90D3-A52F1C8525E0}" type="datetimeFigureOut">
               <a:rPr lang="en-US" smtClean="0"/>
-              <a:t>7/18/2025</a:t>
+              <a:t>1/9/2026</a:t>
             </a:fld>
             <a:endParaRPr lang="en-US"/>
           </a:p>
@@ -1140,7 +989,7 @@
           <a:p>
             <a:fld id="{DC9D2368-47E6-4D58-90D3-A52F1C8525E0}" type="datetimeFigureOut">
               <a:rPr lang="en-US" smtClean="0"/>
-              <a:t>7/18/2025</a:t>
+              <a:t>1/9/2026</a:t>
             </a:fld>
             <a:endParaRPr lang="en-US"/>
           </a:p>
@@ -1348,7 +1197,7 @@
           <a:p>
             <a:fld id="{DC9D2368-47E6-4D58-90D3-A52F1C8525E0}" type="datetimeFigureOut">
               <a:rPr lang="en-US" smtClean="0"/>
-              <a:t>7/18/2025</a:t>
+              <a:t>1/9/2026</a:t>
             </a:fld>
             <a:endParaRPr lang="en-US"/>
           </a:p>
@@ -1546,7 +1395,7 @@
           <a:p>
             <a:fld id="{DC9D2368-47E6-4D58-90D3-A52F1C8525E0}" type="datetimeFigureOut">
               <a:rPr lang="en-US" smtClean="0"/>
-              <a:t>7/18/2025</a:t>
+              <a:t>1/9/2026</a:t>
             </a:fld>
             <a:endParaRPr lang="en-US"/>
           </a:p>
@@ -1821,7 +1670,7 @@
           <a:p>
             <a:fld id="{DC9D2368-47E6-4D58-90D3-A52F1C8525E0}" type="datetimeFigureOut">
               <a:rPr lang="en-US" smtClean="0"/>
-              <a:t>7/18/2025</a:t>
+              <a:t>1/9/2026</a:t>
             </a:fld>
             <a:endParaRPr lang="en-US"/>
           </a:p>
@@ -2086,7 +1935,7 @@
           <a:p>
             <a:fld id="{DC9D2368-47E6-4D58-90D3-A52F1C8525E0}" type="datetimeFigureOut">
               <a:rPr lang="en-US" smtClean="0"/>
-              <a:t>7/18/2025</a:t>
+              <a:t>1/9/2026</a:t>
             </a:fld>
             <a:endParaRPr lang="en-US"/>
           </a:p>
@@ -2498,7 +2347,7 @@
           <a:p>
             <a:fld id="{DC9D2368-47E6-4D58-90D3-A52F1C8525E0}" type="datetimeFigureOut">
               <a:rPr lang="en-US" smtClean="0"/>
-              <a:t>7/18/2025</a:t>
+              <a:t>1/9/2026</a:t>
             </a:fld>
             <a:endParaRPr lang="en-US"/>
           </a:p>
@@ -2639,7 +2488,7 @@
           <a:p>
             <a:fld id="{DC9D2368-47E6-4D58-90D3-A52F1C8525E0}" type="datetimeFigureOut">
               <a:rPr lang="en-US" smtClean="0"/>
-              <a:t>7/18/2025</a:t>
+              <a:t>1/9/2026</a:t>
             </a:fld>
             <a:endParaRPr lang="en-US"/>
           </a:p>
@@ -2752,7 +2601,7 @@
           <a:p>
             <a:fld id="{DC9D2368-47E6-4D58-90D3-A52F1C8525E0}" type="datetimeFigureOut">
               <a:rPr lang="en-US" smtClean="0"/>
-              <a:t>7/18/2025</a:t>
+              <a:t>1/9/2026</a:t>
             </a:fld>
             <a:endParaRPr lang="en-US"/>
           </a:p>
@@ -3063,7 +2912,7 @@
           <a:p>
             <a:fld id="{DC9D2368-47E6-4D58-90D3-A52F1C8525E0}" type="datetimeFigureOut">
               <a:rPr lang="en-US" smtClean="0"/>
-              <a:t>7/18/2025</a:t>
+              <a:t>1/9/2026</a:t>
             </a:fld>
             <a:endParaRPr lang="en-US"/>
           </a:p>
@@ -3351,7 +3200,7 @@
           <a:p>
             <a:fld id="{DC9D2368-47E6-4D58-90D3-A52F1C8525E0}" type="datetimeFigureOut">
               <a:rPr lang="en-US" smtClean="0"/>
-              <a:t>7/18/2025</a:t>
+              <a:t>1/9/2026</a:t>
             </a:fld>
             <a:endParaRPr lang="en-US"/>
           </a:p>
@@ -3592,7 +3441,7 @@
           <a:p>
             <a:fld id="{DC9D2368-47E6-4D58-90D3-A52F1C8525E0}" type="datetimeFigureOut">
               <a:rPr lang="en-US" smtClean="0"/>
-              <a:t>7/18/2025</a:t>
+              <a:t>1/9/2026</a:t>
             </a:fld>
             <a:endParaRPr lang="en-US"/>
           </a:p>
@@ -4142,7 +3991,7 @@
         <p:cNvPr id="1" name="">
           <a:extLst>
             <a:ext uri="{FF2B5EF4-FFF2-40B4-BE49-F238E27FC236}">
-              <a16:creationId xmlns:a16="http://schemas.microsoft.com/office/drawing/2014/main" id="{95B507F3-9CE3-A71E-A9FC-1BDB0CC8054A}"/>
+              <a16:creationId xmlns:a16="http://schemas.microsoft.com/office/drawing/2014/main" id="{0FF439AE-6711-90D7-16E6-54C33C9FC02F}"/>
             </a:ext>
           </a:extLst>
         </p:cNvPr>
@@ -4162,7 +4011,7 @@
           <p:cNvPr id="2" name="Title 1">
             <a:extLst>
               <a:ext uri="{FF2B5EF4-FFF2-40B4-BE49-F238E27FC236}">
-                <a16:creationId xmlns:a16="http://schemas.microsoft.com/office/drawing/2014/main" id="{867F4CE6-ECC9-5A85-C39C-24F1603C11CF}"/>
+                <a16:creationId xmlns:a16="http://schemas.microsoft.com/office/drawing/2014/main" id="{FD1CF154-B9D2-812B-66CB-9448DC833F5B}"/>
               </a:ext>
             </a:extLst>
           </p:cNvPr>
@@ -4185,17 +4034,16 @@
           <a:p>
             <a:pPr algn="ctr"/>
             <a:r>
-              <a:rPr lang="en-US" b="1" dirty="0" err="1"/>
-              <a:t>Funksiya</a:t>
-            </a:r>
-            <a:endParaRPr lang="en-US" b="1" dirty="0"/>
+              <a:rPr lang="en-US" b="1" dirty="0"/>
+              <a:t>Model Evaluation</a:t>
+            </a:r>
           </a:p>
         </p:txBody>
       </p:sp>
     </p:spTree>
     <p:extLst>
       <p:ext uri="{BB962C8B-B14F-4D97-AF65-F5344CB8AC3E}">
-        <p14:creationId xmlns:p14="http://schemas.microsoft.com/office/powerpoint/2010/main" val="3007135185"/>
+        <p14:creationId xmlns:p14="http://schemas.microsoft.com/office/powerpoint/2010/main" val="2761454396"/>
       </p:ext>
     </p:extLst>
   </p:cSld>
@@ -4227,6 +4075,928 @@
           <p:cNvPr id="2" name="Title 1">
             <a:extLst>
               <a:ext uri="{FF2B5EF4-FFF2-40B4-BE49-F238E27FC236}">
+                <a16:creationId xmlns:a16="http://schemas.microsoft.com/office/drawing/2014/main" id="{3BBFA5F0-4ED6-4432-03AA-06E757A72F0E}"/>
+              </a:ext>
+            </a:extLst>
+          </p:cNvPr>
+          <p:cNvSpPr>
+            <a:spLocks noGrp="1"/>
+          </p:cNvSpPr>
+          <p:nvPr>
+            <p:ph type="title"/>
+          </p:nvPr>
+        </p:nvSpPr>
+        <p:spPr/>
+        <p:txBody>
+          <a:bodyPr/>
+          <a:lstStyle/>
+          <a:p>
+            <a:r>
+              <a:rPr lang="en-US" dirty="0"/>
+              <a:t>Model Evaluation</a:t>
+            </a:r>
+          </a:p>
+        </p:txBody>
+      </p:sp>
+      <p:sp>
+        <p:nvSpPr>
+          <p:cNvPr id="3" name="Text Placeholder 2">
+            <a:extLst>
+              <a:ext uri="{FF2B5EF4-FFF2-40B4-BE49-F238E27FC236}">
+                <a16:creationId xmlns:a16="http://schemas.microsoft.com/office/drawing/2014/main" id="{F5C8FE1D-DC77-2CB8-0413-ACA71140A015}"/>
+              </a:ext>
+            </a:extLst>
+          </p:cNvPr>
+          <p:cNvSpPr>
+            <a:spLocks noGrp="1"/>
+          </p:cNvSpPr>
+          <p:nvPr>
+            <p:ph type="body" idx="1"/>
+          </p:nvPr>
+        </p:nvSpPr>
+        <p:spPr/>
+        <p:txBody>
+          <a:bodyPr/>
+          <a:lstStyle/>
+          <a:p>
+            <a:r>
+              <a:rPr lang="en-US" dirty="0"/>
+              <a:t>Classification</a:t>
+            </a:r>
+          </a:p>
+        </p:txBody>
+      </p:sp>
+      <p:sp>
+        <p:nvSpPr>
+          <p:cNvPr id="4" name="Content Placeholder 3">
+            <a:extLst>
+              <a:ext uri="{FF2B5EF4-FFF2-40B4-BE49-F238E27FC236}">
+                <a16:creationId xmlns:a16="http://schemas.microsoft.com/office/drawing/2014/main" id="{2B45775B-916D-E2B8-DF16-94B0E9026A9F}"/>
+              </a:ext>
+            </a:extLst>
+          </p:cNvPr>
+          <p:cNvSpPr>
+            <a:spLocks noGrp="1"/>
+          </p:cNvSpPr>
+          <p:nvPr>
+            <p:ph sz="half" idx="2"/>
+          </p:nvPr>
+        </p:nvSpPr>
+        <p:spPr/>
+        <p:txBody>
+          <a:bodyPr/>
+          <a:lstStyle/>
+          <a:p>
+            <a:r>
+              <a:rPr lang="en-US" dirty="0" err="1"/>
+              <a:t>Accuracy_score</a:t>
+            </a:r>
+            <a:r>
+              <a:rPr lang="en-US" dirty="0"/>
+              <a:t>, Classification report</a:t>
+            </a:r>
+          </a:p>
+        </p:txBody>
+      </p:sp>
+      <p:sp>
+        <p:nvSpPr>
+          <p:cNvPr id="5" name="Text Placeholder 4">
+            <a:extLst>
+              <a:ext uri="{FF2B5EF4-FFF2-40B4-BE49-F238E27FC236}">
+                <a16:creationId xmlns:a16="http://schemas.microsoft.com/office/drawing/2014/main" id="{57350CC9-7A57-5D47-46E7-1D98D0A15B3C}"/>
+              </a:ext>
+            </a:extLst>
+          </p:cNvPr>
+          <p:cNvSpPr>
+            <a:spLocks noGrp="1"/>
+          </p:cNvSpPr>
+          <p:nvPr>
+            <p:ph type="body" sz="quarter" idx="3"/>
+          </p:nvPr>
+        </p:nvSpPr>
+        <p:spPr/>
+        <p:txBody>
+          <a:bodyPr/>
+          <a:lstStyle/>
+          <a:p>
+            <a:r>
+              <a:rPr lang="en-US" dirty="0"/>
+              <a:t>Regression</a:t>
+            </a:r>
+          </a:p>
+        </p:txBody>
+      </p:sp>
+      <p:sp>
+        <p:nvSpPr>
+          <p:cNvPr id="6" name="Content Placeholder 5">
+            <a:extLst>
+              <a:ext uri="{FF2B5EF4-FFF2-40B4-BE49-F238E27FC236}">
+                <a16:creationId xmlns:a16="http://schemas.microsoft.com/office/drawing/2014/main" id="{AD071B40-7CD3-2677-FB95-8631C3671C48}"/>
+              </a:ext>
+            </a:extLst>
+          </p:cNvPr>
+          <p:cNvSpPr>
+            <a:spLocks noGrp="1"/>
+          </p:cNvSpPr>
+          <p:nvPr>
+            <p:ph sz="quarter" idx="4"/>
+          </p:nvPr>
+        </p:nvSpPr>
+        <p:spPr/>
+        <p:txBody>
+          <a:bodyPr/>
+          <a:lstStyle/>
+          <a:p>
+            <a:r>
+              <a:rPr lang="en-US" dirty="0"/>
+              <a:t>R2, </a:t>
+            </a:r>
+            <a:r>
+              <a:rPr lang="en-US" dirty="0" err="1"/>
+              <a:t>mse</a:t>
+            </a:r>
+            <a:r>
+              <a:rPr lang="en-US" dirty="0"/>
+              <a:t>, </a:t>
+            </a:r>
+            <a:r>
+              <a:rPr lang="en-US" dirty="0" err="1"/>
+              <a:t>rmse</a:t>
+            </a:r>
+            <a:r>
+              <a:rPr lang="en-US" dirty="0"/>
+              <a:t>, </a:t>
+            </a:r>
+            <a:r>
+              <a:rPr lang="en-US" dirty="0" err="1"/>
+              <a:t>mae</a:t>
+            </a:r>
+            <a:endParaRPr lang="en-US" dirty="0"/>
+          </a:p>
+        </p:txBody>
+      </p:sp>
+    </p:spTree>
+    <p:extLst>
+      <p:ext uri="{BB962C8B-B14F-4D97-AF65-F5344CB8AC3E}">
+        <p14:creationId xmlns:p14="http://schemas.microsoft.com/office/powerpoint/2010/main" val="3713068402"/>
+      </p:ext>
+    </p:extLst>
+  </p:cSld>
+  <p:clrMapOvr>
+    <a:masterClrMapping/>
+  </p:clrMapOvr>
+</p:sld>
+</file>
+
+<file path=ppt/slides/slide12.xml><?xml version="1.0" encoding="utf-8"?>
+<p:sld xmlns:a="http://schemas.openxmlformats.org/drawingml/2006/main" xmlns:r="http://schemas.openxmlformats.org/officeDocument/2006/relationships" xmlns:p="http://schemas.openxmlformats.org/presentationml/2006/main">
+  <p:cSld>
+    <p:spTree>
+      <p:nvGrpSpPr>
+        <p:cNvPr id="1" name=""/>
+        <p:cNvGrpSpPr/>
+        <p:nvPr/>
+      </p:nvGrpSpPr>
+      <p:grpSpPr>
+        <a:xfrm>
+          <a:off x="0" y="0"/>
+          <a:ext cx="0" cy="0"/>
+          <a:chOff x="0" y="0"/>
+          <a:chExt cx="0" cy="0"/>
+        </a:xfrm>
+      </p:grpSpPr>
+      <p:sp>
+        <p:nvSpPr>
+          <p:cNvPr id="2" name="Title 1">
+            <a:extLst>
+              <a:ext uri="{FF2B5EF4-FFF2-40B4-BE49-F238E27FC236}">
+                <a16:creationId xmlns:a16="http://schemas.microsoft.com/office/drawing/2014/main" id="{FBC9C83A-C655-D4AE-38D6-63A40912AD35}"/>
+              </a:ext>
+            </a:extLst>
+          </p:cNvPr>
+          <p:cNvSpPr>
+            <a:spLocks noGrp="1"/>
+          </p:cNvSpPr>
+          <p:nvPr>
+            <p:ph type="title"/>
+          </p:nvPr>
+        </p:nvSpPr>
+        <p:spPr/>
+        <p:txBody>
+          <a:bodyPr/>
+          <a:lstStyle/>
+          <a:p>
+            <a:r>
+              <a:rPr lang="en-US" dirty="0"/>
+              <a:t>Model Evaluation: Classification(1)</a:t>
+            </a:r>
+          </a:p>
+        </p:txBody>
+      </p:sp>
+      <p:pic>
+        <p:nvPicPr>
+          <p:cNvPr id="6" name="Content Placeholder 5">
+            <a:extLst>
+              <a:ext uri="{FF2B5EF4-FFF2-40B4-BE49-F238E27FC236}">
+                <a16:creationId xmlns:a16="http://schemas.microsoft.com/office/drawing/2014/main" id="{51B506EE-1E7E-5E0A-7A0D-E571DD1FCCC8}"/>
+              </a:ext>
+            </a:extLst>
+          </p:cNvPr>
+          <p:cNvPicPr>
+            <a:picLocks noGrp="1" noChangeAspect="1"/>
+          </p:cNvPicPr>
+          <p:nvPr>
+            <p:ph idx="1"/>
+          </p:nvPr>
+        </p:nvPicPr>
+        <p:blipFill>
+          <a:blip r:embed="rId2"/>
+          <a:stretch>
+            <a:fillRect/>
+          </a:stretch>
+        </p:blipFill>
+        <p:spPr>
+          <a:xfrm>
+            <a:off x="1504950" y="2453481"/>
+            <a:ext cx="9182100" cy="3095625"/>
+          </a:xfrm>
+          <a:prstGeom prst="rect">
+            <a:avLst/>
+          </a:prstGeom>
+        </p:spPr>
+      </p:pic>
+    </p:spTree>
+    <p:extLst>
+      <p:ext uri="{BB962C8B-B14F-4D97-AF65-F5344CB8AC3E}">
+        <p14:creationId xmlns:p14="http://schemas.microsoft.com/office/powerpoint/2010/main" val="1778120041"/>
+      </p:ext>
+    </p:extLst>
+  </p:cSld>
+  <p:clrMapOvr>
+    <a:masterClrMapping/>
+  </p:clrMapOvr>
+</p:sld>
+</file>
+
+<file path=ppt/slides/slide13.xml><?xml version="1.0" encoding="utf-8"?>
+<p:sld xmlns:a="http://schemas.openxmlformats.org/drawingml/2006/main" xmlns:r="http://schemas.openxmlformats.org/officeDocument/2006/relationships" xmlns:p="http://schemas.openxmlformats.org/presentationml/2006/main">
+  <p:cSld>
+    <p:spTree>
+      <p:nvGrpSpPr>
+        <p:cNvPr id="1" name="">
+          <a:extLst>
+            <a:ext uri="{FF2B5EF4-FFF2-40B4-BE49-F238E27FC236}">
+              <a16:creationId xmlns:a16="http://schemas.microsoft.com/office/drawing/2014/main" id="{7E33E3AA-9809-121B-11A6-0BB92F35B951}"/>
+            </a:ext>
+          </a:extLst>
+        </p:cNvPr>
+        <p:cNvGrpSpPr/>
+        <p:nvPr/>
+      </p:nvGrpSpPr>
+      <p:grpSpPr>
+        <a:xfrm>
+          <a:off x="0" y="0"/>
+          <a:ext cx="0" cy="0"/>
+          <a:chOff x="0" y="0"/>
+          <a:chExt cx="0" cy="0"/>
+        </a:xfrm>
+      </p:grpSpPr>
+      <p:sp>
+        <p:nvSpPr>
+          <p:cNvPr id="2" name="Title 1">
+            <a:extLst>
+              <a:ext uri="{FF2B5EF4-FFF2-40B4-BE49-F238E27FC236}">
+                <a16:creationId xmlns:a16="http://schemas.microsoft.com/office/drawing/2014/main" id="{D885B844-61D4-A358-6E3D-3D4267888A5D}"/>
+              </a:ext>
+            </a:extLst>
+          </p:cNvPr>
+          <p:cNvSpPr>
+            <a:spLocks noGrp="1"/>
+          </p:cNvSpPr>
+          <p:nvPr>
+            <p:ph type="title"/>
+          </p:nvPr>
+        </p:nvSpPr>
+        <p:spPr/>
+        <p:txBody>
+          <a:bodyPr/>
+          <a:lstStyle/>
+          <a:p>
+            <a:r>
+              <a:rPr lang="en-US" dirty="0"/>
+              <a:t>Model Evaluation: Classification(2)</a:t>
+            </a:r>
+          </a:p>
+        </p:txBody>
+      </p:sp>
+      <p:sp>
+        <p:nvSpPr>
+          <p:cNvPr id="4" name="Content Placeholder 3">
+            <a:extLst>
+              <a:ext uri="{FF2B5EF4-FFF2-40B4-BE49-F238E27FC236}">
+                <a16:creationId xmlns:a16="http://schemas.microsoft.com/office/drawing/2014/main" id="{D65DD08F-5FC4-1B00-41D7-A5285018BC56}"/>
+              </a:ext>
+            </a:extLst>
+          </p:cNvPr>
+          <p:cNvSpPr>
+            <a:spLocks noGrp="1"/>
+          </p:cNvSpPr>
+          <p:nvPr>
+            <p:ph idx="1"/>
+          </p:nvPr>
+        </p:nvSpPr>
+        <p:spPr/>
+        <p:txBody>
+          <a:bodyPr/>
+          <a:lstStyle/>
+          <a:p>
+            <a:r>
+              <a:rPr lang="en-US" dirty="0"/>
+              <a:t>Confusion Matrix</a:t>
+            </a:r>
+          </a:p>
+        </p:txBody>
+      </p:sp>
+      <p:pic>
+        <p:nvPicPr>
+          <p:cNvPr id="7" name="Picture 6">
+            <a:extLst>
+              <a:ext uri="{FF2B5EF4-FFF2-40B4-BE49-F238E27FC236}">
+                <a16:creationId xmlns:a16="http://schemas.microsoft.com/office/drawing/2014/main" id="{8854D6D6-D266-28DE-25D9-FD840D330CDE}"/>
+              </a:ext>
+            </a:extLst>
+          </p:cNvPr>
+          <p:cNvPicPr>
+            <a:picLocks noChangeAspect="1"/>
+          </p:cNvPicPr>
+          <p:nvPr/>
+        </p:nvPicPr>
+        <p:blipFill>
+          <a:blip r:embed="rId2"/>
+          <a:stretch>
+            <a:fillRect/>
+          </a:stretch>
+        </p:blipFill>
+        <p:spPr>
+          <a:xfrm>
+            <a:off x="2419350" y="2719387"/>
+            <a:ext cx="7353300" cy="1419225"/>
+          </a:xfrm>
+          <a:prstGeom prst="rect">
+            <a:avLst/>
+          </a:prstGeom>
+        </p:spPr>
+      </p:pic>
+    </p:spTree>
+    <p:extLst>
+      <p:ext uri="{BB962C8B-B14F-4D97-AF65-F5344CB8AC3E}">
+        <p14:creationId xmlns:p14="http://schemas.microsoft.com/office/powerpoint/2010/main" val="2933833228"/>
+      </p:ext>
+    </p:extLst>
+  </p:cSld>
+  <p:clrMapOvr>
+    <a:masterClrMapping/>
+  </p:clrMapOvr>
+</p:sld>
+</file>
+
+<file path=ppt/slides/slide14.xml><?xml version="1.0" encoding="utf-8"?>
+<p:sld xmlns:a="http://schemas.openxmlformats.org/drawingml/2006/main" xmlns:r="http://schemas.openxmlformats.org/officeDocument/2006/relationships" xmlns:p="http://schemas.openxmlformats.org/presentationml/2006/main">
+  <p:cSld>
+    <p:spTree>
+      <p:nvGrpSpPr>
+        <p:cNvPr id="1" name="">
+          <a:extLst>
+            <a:ext uri="{FF2B5EF4-FFF2-40B4-BE49-F238E27FC236}">
+              <a16:creationId xmlns:a16="http://schemas.microsoft.com/office/drawing/2014/main" id="{61ADD110-9300-2F3F-1F3F-2E77B34742E1}"/>
+            </a:ext>
+          </a:extLst>
+        </p:cNvPr>
+        <p:cNvGrpSpPr/>
+        <p:nvPr/>
+      </p:nvGrpSpPr>
+      <p:grpSpPr>
+        <a:xfrm>
+          <a:off x="0" y="0"/>
+          <a:ext cx="0" cy="0"/>
+          <a:chOff x="0" y="0"/>
+          <a:chExt cx="0" cy="0"/>
+        </a:xfrm>
+      </p:grpSpPr>
+      <p:sp>
+        <p:nvSpPr>
+          <p:cNvPr id="2" name="Title 1">
+            <a:extLst>
+              <a:ext uri="{FF2B5EF4-FFF2-40B4-BE49-F238E27FC236}">
+                <a16:creationId xmlns:a16="http://schemas.microsoft.com/office/drawing/2014/main" id="{CDEED1DB-7582-A8E0-DE06-9988E137521E}"/>
+              </a:ext>
+            </a:extLst>
+          </p:cNvPr>
+          <p:cNvSpPr>
+            <a:spLocks noGrp="1"/>
+          </p:cNvSpPr>
+          <p:nvPr>
+            <p:ph type="title"/>
+          </p:nvPr>
+        </p:nvSpPr>
+        <p:spPr/>
+        <p:txBody>
+          <a:bodyPr/>
+          <a:lstStyle/>
+          <a:p>
+            <a:r>
+              <a:rPr lang="en-US" dirty="0"/>
+              <a:t>Model Evaluation: Classification</a:t>
+            </a:r>
+          </a:p>
+        </p:txBody>
+      </p:sp>
+      <p:sp>
+        <p:nvSpPr>
+          <p:cNvPr id="3" name="Content Placeholder 2">
+            <a:extLst>
+              <a:ext uri="{FF2B5EF4-FFF2-40B4-BE49-F238E27FC236}">
+                <a16:creationId xmlns:a16="http://schemas.microsoft.com/office/drawing/2014/main" id="{6D9481CF-CA25-FD6C-B5EB-F2C6A4CBE22F}"/>
+              </a:ext>
+            </a:extLst>
+          </p:cNvPr>
+          <p:cNvSpPr>
+            <a:spLocks noGrp="1"/>
+          </p:cNvSpPr>
+          <p:nvPr>
+            <p:ph idx="1"/>
+          </p:nvPr>
+        </p:nvSpPr>
+        <p:spPr/>
+        <p:txBody>
+          <a:bodyPr/>
+          <a:lstStyle/>
+          <a:p>
+            <a:endParaRPr lang="en-US" dirty="0"/>
+          </a:p>
+        </p:txBody>
+      </p:sp>
+      <mc:AlternateContent xmlns:mc="http://schemas.openxmlformats.org/markup-compatibility/2006" xmlns:p14="http://schemas.microsoft.com/office/powerpoint/2010/main">
+        <mc:Choice Requires="p14">
+          <p:contentPart p14:bwMode="auto" r:id="rId2">
+            <p14:nvContentPartPr>
+              <p14:cNvPr id="5" name="Ink 4">
+                <a:extLst>
+                  <a:ext uri="{FF2B5EF4-FFF2-40B4-BE49-F238E27FC236}">
+                    <a16:creationId xmlns:a16="http://schemas.microsoft.com/office/drawing/2014/main" id="{8C06B7FE-CB91-4E81-8836-5A16388E8F37}"/>
+                  </a:ext>
+                </a:extLst>
+              </p14:cNvPr>
+              <p14:cNvContentPartPr/>
+              <p14:nvPr/>
+            </p14:nvContentPartPr>
+            <p14:xfrm>
+              <a:off x="991800" y="809640"/>
+              <a:ext cx="11201400" cy="6009480"/>
+            </p14:xfrm>
+          </p:contentPart>
+        </mc:Choice>
+        <mc:Fallback xmlns="">
+          <p:pic>
+            <p:nvPicPr>
+              <p:cNvPr id="5" name="Ink 4">
+                <a:extLst>
+                  <a:ext uri="{FF2B5EF4-FFF2-40B4-BE49-F238E27FC236}">
+                    <a16:creationId xmlns:a16="http://schemas.microsoft.com/office/drawing/2014/main" id="{8C06B7FE-CB91-4E81-8836-5A16388E8F37}"/>
+                  </a:ext>
+                </a:extLst>
+              </p:cNvPr>
+              <p:cNvPicPr/>
+              <p:nvPr/>
+            </p:nvPicPr>
+            <p:blipFill>
+              <a:blip r:embed="rId3"/>
+              <a:stretch>
+                <a:fillRect/>
+              </a:stretch>
+            </p:blipFill>
+            <p:spPr>
+              <a:xfrm>
+                <a:off x="982440" y="800280"/>
+                <a:ext cx="11220120" cy="6028200"/>
+              </a:xfrm>
+              <a:prstGeom prst="rect">
+                <a:avLst/>
+              </a:prstGeom>
+            </p:spPr>
+          </p:pic>
+        </mc:Fallback>
+      </mc:AlternateContent>
+    </p:spTree>
+    <p:extLst>
+      <p:ext uri="{BB962C8B-B14F-4D97-AF65-F5344CB8AC3E}">
+        <p14:creationId xmlns:p14="http://schemas.microsoft.com/office/powerpoint/2010/main" val="2922419660"/>
+      </p:ext>
+    </p:extLst>
+  </p:cSld>
+  <p:clrMapOvr>
+    <a:masterClrMapping/>
+  </p:clrMapOvr>
+</p:sld>
+</file>
+
+<file path=ppt/slides/slide15.xml><?xml version="1.0" encoding="utf-8"?>
+<p:sld xmlns:a="http://schemas.openxmlformats.org/drawingml/2006/main" xmlns:r="http://schemas.openxmlformats.org/officeDocument/2006/relationships" xmlns:p="http://schemas.openxmlformats.org/presentationml/2006/main">
+  <p:cSld>
+    <p:spTree>
+      <p:nvGrpSpPr>
+        <p:cNvPr id="1" name="">
+          <a:extLst>
+            <a:ext uri="{FF2B5EF4-FFF2-40B4-BE49-F238E27FC236}">
+              <a16:creationId xmlns:a16="http://schemas.microsoft.com/office/drawing/2014/main" id="{B7A1170E-9527-0123-A220-9133BFFCA7C0}"/>
+            </a:ext>
+          </a:extLst>
+        </p:cNvPr>
+        <p:cNvGrpSpPr/>
+        <p:nvPr/>
+      </p:nvGrpSpPr>
+      <p:grpSpPr>
+        <a:xfrm>
+          <a:off x="0" y="0"/>
+          <a:ext cx="0" cy="0"/>
+          <a:chOff x="0" y="0"/>
+          <a:chExt cx="0" cy="0"/>
+        </a:xfrm>
+      </p:grpSpPr>
+      <p:sp>
+        <p:nvSpPr>
+          <p:cNvPr id="2" name="Title 1">
+            <a:extLst>
+              <a:ext uri="{FF2B5EF4-FFF2-40B4-BE49-F238E27FC236}">
+                <a16:creationId xmlns:a16="http://schemas.microsoft.com/office/drawing/2014/main" id="{6A6DF2EA-65E9-10ED-DD3C-83C3EB1200BB}"/>
+              </a:ext>
+            </a:extLst>
+          </p:cNvPr>
+          <p:cNvSpPr>
+            <a:spLocks noGrp="1"/>
+          </p:cNvSpPr>
+          <p:nvPr>
+            <p:ph type="title"/>
+          </p:nvPr>
+        </p:nvSpPr>
+        <p:spPr/>
+        <p:txBody>
+          <a:bodyPr/>
+          <a:lstStyle/>
+          <a:p>
+            <a:r>
+              <a:rPr lang="en-US" dirty="0"/>
+              <a:t>Model Evaluation: Classification</a:t>
+            </a:r>
+          </a:p>
+        </p:txBody>
+      </p:sp>
+      <p:sp>
+        <p:nvSpPr>
+          <p:cNvPr id="3" name="Content Placeholder 2">
+            <a:extLst>
+              <a:ext uri="{FF2B5EF4-FFF2-40B4-BE49-F238E27FC236}">
+                <a16:creationId xmlns:a16="http://schemas.microsoft.com/office/drawing/2014/main" id="{8C3E1A2D-D6CF-1BB6-6BA1-2EC252AD4810}"/>
+              </a:ext>
+            </a:extLst>
+          </p:cNvPr>
+          <p:cNvSpPr>
+            <a:spLocks noGrp="1"/>
+          </p:cNvSpPr>
+          <p:nvPr>
+            <p:ph idx="1"/>
+          </p:nvPr>
+        </p:nvSpPr>
+        <p:spPr/>
+        <p:txBody>
+          <a:bodyPr/>
+          <a:lstStyle/>
+          <a:p>
+            <a:endParaRPr lang="en-US"/>
+          </a:p>
+        </p:txBody>
+      </p:sp>
+      <mc:AlternateContent xmlns:mc="http://schemas.openxmlformats.org/markup-compatibility/2006" xmlns:p14="http://schemas.microsoft.com/office/powerpoint/2010/main">
+        <mc:Choice Requires="p14">
+          <p:contentPart p14:bwMode="auto" r:id="rId2">
+            <p14:nvContentPartPr>
+              <p14:cNvPr id="5" name="Ink 4">
+                <a:extLst>
+                  <a:ext uri="{FF2B5EF4-FFF2-40B4-BE49-F238E27FC236}">
+                    <a16:creationId xmlns:a16="http://schemas.microsoft.com/office/drawing/2014/main" id="{126F360C-0B41-F570-FCCB-895AA5DDDD18}"/>
+                  </a:ext>
+                </a:extLst>
+              </p14:cNvPr>
+              <p14:cNvContentPartPr/>
+              <p14:nvPr/>
+            </p14:nvContentPartPr>
+            <p14:xfrm>
+              <a:off x="1437840" y="1055520"/>
+              <a:ext cx="10755360" cy="4233240"/>
+            </p14:xfrm>
+          </p:contentPart>
+        </mc:Choice>
+        <mc:Fallback xmlns="">
+          <p:pic>
+            <p:nvPicPr>
+              <p:cNvPr id="5" name="Ink 4">
+                <a:extLst>
+                  <a:ext uri="{FF2B5EF4-FFF2-40B4-BE49-F238E27FC236}">
+                    <a16:creationId xmlns:a16="http://schemas.microsoft.com/office/drawing/2014/main" id="{126F360C-0B41-F570-FCCB-895AA5DDDD18}"/>
+                  </a:ext>
+                </a:extLst>
+              </p:cNvPr>
+              <p:cNvPicPr/>
+              <p:nvPr/>
+            </p:nvPicPr>
+            <p:blipFill>
+              <a:blip r:embed="rId3"/>
+              <a:stretch>
+                <a:fillRect/>
+              </a:stretch>
+            </p:blipFill>
+            <p:spPr>
+              <a:xfrm>
+                <a:off x="1428480" y="1046160"/>
+                <a:ext cx="10774080" cy="4251960"/>
+              </a:xfrm>
+              <a:prstGeom prst="rect">
+                <a:avLst/>
+              </a:prstGeom>
+            </p:spPr>
+          </p:pic>
+        </mc:Fallback>
+      </mc:AlternateContent>
+    </p:spTree>
+    <p:extLst>
+      <p:ext uri="{BB962C8B-B14F-4D97-AF65-F5344CB8AC3E}">
+        <p14:creationId xmlns:p14="http://schemas.microsoft.com/office/powerpoint/2010/main" val="1919218074"/>
+      </p:ext>
+    </p:extLst>
+  </p:cSld>
+  <p:clrMapOvr>
+    <a:masterClrMapping/>
+  </p:clrMapOvr>
+</p:sld>
+</file>
+
+<file path=ppt/slides/slide16.xml><?xml version="1.0" encoding="utf-8"?>
+<p:sld xmlns:a="http://schemas.openxmlformats.org/drawingml/2006/main" xmlns:r="http://schemas.openxmlformats.org/officeDocument/2006/relationships" xmlns:p="http://schemas.openxmlformats.org/presentationml/2006/main">
+  <p:cSld>
+    <p:spTree>
+      <p:nvGrpSpPr>
+        <p:cNvPr id="1" name="">
+          <a:extLst>
+            <a:ext uri="{FF2B5EF4-FFF2-40B4-BE49-F238E27FC236}">
+              <a16:creationId xmlns:a16="http://schemas.microsoft.com/office/drawing/2014/main" id="{43DA50ED-C4B4-5BFF-67C4-D576946D098D}"/>
+            </a:ext>
+          </a:extLst>
+        </p:cNvPr>
+        <p:cNvGrpSpPr/>
+        <p:nvPr/>
+      </p:nvGrpSpPr>
+      <p:grpSpPr>
+        <a:xfrm>
+          <a:off x="0" y="0"/>
+          <a:ext cx="0" cy="0"/>
+          <a:chOff x="0" y="0"/>
+          <a:chExt cx="0" cy="0"/>
+        </a:xfrm>
+      </p:grpSpPr>
+      <p:sp>
+        <p:nvSpPr>
+          <p:cNvPr id="2" name="Title 1">
+            <a:extLst>
+              <a:ext uri="{FF2B5EF4-FFF2-40B4-BE49-F238E27FC236}">
+                <a16:creationId xmlns:a16="http://schemas.microsoft.com/office/drawing/2014/main" id="{68948955-350C-C974-17A7-CB11BDCE23B7}"/>
+              </a:ext>
+            </a:extLst>
+          </p:cNvPr>
+          <p:cNvSpPr>
+            <a:spLocks noGrp="1"/>
+          </p:cNvSpPr>
+          <p:nvPr>
+            <p:ph type="title"/>
+          </p:nvPr>
+        </p:nvSpPr>
+        <p:spPr/>
+        <p:txBody>
+          <a:bodyPr/>
+          <a:lstStyle/>
+          <a:p>
+            <a:r>
+              <a:rPr lang="en-US" dirty="0"/>
+              <a:t>Model Evaluation: Classification</a:t>
+            </a:r>
+          </a:p>
+        </p:txBody>
+      </p:sp>
+      <p:sp>
+        <p:nvSpPr>
+          <p:cNvPr id="3" name="Content Placeholder 2">
+            <a:extLst>
+              <a:ext uri="{FF2B5EF4-FFF2-40B4-BE49-F238E27FC236}">
+                <a16:creationId xmlns:a16="http://schemas.microsoft.com/office/drawing/2014/main" id="{27CB5907-0259-C79D-9D64-9CD707CF7F6C}"/>
+              </a:ext>
+            </a:extLst>
+          </p:cNvPr>
+          <p:cNvSpPr>
+            <a:spLocks noGrp="1"/>
+          </p:cNvSpPr>
+          <p:nvPr>
+            <p:ph idx="1"/>
+          </p:nvPr>
+        </p:nvSpPr>
+        <p:spPr/>
+        <p:txBody>
+          <a:bodyPr/>
+          <a:lstStyle/>
+          <a:p>
+            <a:endParaRPr lang="en-US"/>
+          </a:p>
+        </p:txBody>
+      </p:sp>
+    </p:spTree>
+    <p:extLst>
+      <p:ext uri="{BB962C8B-B14F-4D97-AF65-F5344CB8AC3E}">
+        <p14:creationId xmlns:p14="http://schemas.microsoft.com/office/powerpoint/2010/main" val="1134996928"/>
+      </p:ext>
+    </p:extLst>
+  </p:cSld>
+  <p:clrMapOvr>
+    <a:masterClrMapping/>
+  </p:clrMapOvr>
+</p:sld>
+</file>
+
+<file path=ppt/slides/slide17.xml><?xml version="1.0" encoding="utf-8"?>
+<p:sld xmlns:a="http://schemas.openxmlformats.org/drawingml/2006/main" xmlns:r="http://schemas.openxmlformats.org/officeDocument/2006/relationships" xmlns:p="http://schemas.openxmlformats.org/presentationml/2006/main">
+  <p:cSld>
+    <p:spTree>
+      <p:nvGrpSpPr>
+        <p:cNvPr id="1" name="">
+          <a:extLst>
+            <a:ext uri="{FF2B5EF4-FFF2-40B4-BE49-F238E27FC236}">
+              <a16:creationId xmlns:a16="http://schemas.microsoft.com/office/drawing/2014/main" id="{D3F7F240-8A31-70E4-EF1B-37BCD7BD0A2A}"/>
+            </a:ext>
+          </a:extLst>
+        </p:cNvPr>
+        <p:cNvGrpSpPr/>
+        <p:nvPr/>
+      </p:nvGrpSpPr>
+      <p:grpSpPr>
+        <a:xfrm>
+          <a:off x="0" y="0"/>
+          <a:ext cx="0" cy="0"/>
+          <a:chOff x="0" y="0"/>
+          <a:chExt cx="0" cy="0"/>
+        </a:xfrm>
+      </p:grpSpPr>
+      <p:sp>
+        <p:nvSpPr>
+          <p:cNvPr id="2" name="Title 1">
+            <a:extLst>
+              <a:ext uri="{FF2B5EF4-FFF2-40B4-BE49-F238E27FC236}">
+                <a16:creationId xmlns:a16="http://schemas.microsoft.com/office/drawing/2014/main" id="{05AAFCD6-743E-0259-F036-04486CE2D4CF}"/>
+              </a:ext>
+            </a:extLst>
+          </p:cNvPr>
+          <p:cNvSpPr>
+            <a:spLocks noGrp="1"/>
+          </p:cNvSpPr>
+          <p:nvPr>
+            <p:ph type="title"/>
+          </p:nvPr>
+        </p:nvSpPr>
+        <p:spPr>
+          <a:xfrm>
+            <a:off x="838200" y="365125"/>
+            <a:ext cx="10515600" cy="6424781"/>
+          </a:xfrm>
+        </p:spPr>
+        <p:txBody>
+          <a:bodyPr/>
+          <a:lstStyle/>
+          <a:p>
+            <a:pPr algn="ctr"/>
+            <a:r>
+              <a:rPr lang="en-US" b="1" dirty="0"/>
+              <a:t>Model Evaluation </a:t>
+            </a:r>
+            <a:r>
+              <a:rPr lang="en-US" b="1" dirty="0" err="1"/>
+              <a:t>Amaliy</a:t>
+            </a:r>
+            <a:endParaRPr lang="en-US" b="1" dirty="0"/>
+          </a:p>
+        </p:txBody>
+      </p:sp>
+    </p:spTree>
+    <p:extLst>
+      <p:ext uri="{BB962C8B-B14F-4D97-AF65-F5344CB8AC3E}">
+        <p14:creationId xmlns:p14="http://schemas.microsoft.com/office/powerpoint/2010/main" val="3199512705"/>
+      </p:ext>
+    </p:extLst>
+  </p:cSld>
+  <p:clrMapOvr>
+    <a:masterClrMapping/>
+  </p:clrMapOvr>
+</p:sld>
+</file>
+
+<file path=ppt/slides/slide18.xml><?xml version="1.0" encoding="utf-8"?>
+<p:sld xmlns:a="http://schemas.openxmlformats.org/drawingml/2006/main" xmlns:r="http://schemas.openxmlformats.org/officeDocument/2006/relationships" xmlns:p="http://schemas.openxmlformats.org/presentationml/2006/main">
+  <p:cSld>
+    <p:spTree>
+      <p:nvGrpSpPr>
+        <p:cNvPr id="1" name="">
+          <a:extLst>
+            <a:ext uri="{FF2B5EF4-FFF2-40B4-BE49-F238E27FC236}">
+              <a16:creationId xmlns:a16="http://schemas.microsoft.com/office/drawing/2014/main" id="{95B507F3-9CE3-A71E-A9FC-1BDB0CC8054A}"/>
+            </a:ext>
+          </a:extLst>
+        </p:cNvPr>
+        <p:cNvGrpSpPr/>
+        <p:nvPr/>
+      </p:nvGrpSpPr>
+      <p:grpSpPr>
+        <a:xfrm>
+          <a:off x="0" y="0"/>
+          <a:ext cx="0" cy="0"/>
+          <a:chOff x="0" y="0"/>
+          <a:chExt cx="0" cy="0"/>
+        </a:xfrm>
+      </p:grpSpPr>
+      <p:sp>
+        <p:nvSpPr>
+          <p:cNvPr id="2" name="Title 1">
+            <a:extLst>
+              <a:ext uri="{FF2B5EF4-FFF2-40B4-BE49-F238E27FC236}">
+                <a16:creationId xmlns:a16="http://schemas.microsoft.com/office/drawing/2014/main" id="{867F4CE6-ECC9-5A85-C39C-24F1603C11CF}"/>
+              </a:ext>
+            </a:extLst>
+          </p:cNvPr>
+          <p:cNvSpPr>
+            <a:spLocks noGrp="1"/>
+          </p:cNvSpPr>
+          <p:nvPr>
+            <p:ph type="title"/>
+          </p:nvPr>
+        </p:nvSpPr>
+        <p:spPr>
+          <a:xfrm>
+            <a:off x="838200" y="365125"/>
+            <a:ext cx="10515600" cy="6424781"/>
+          </a:xfrm>
+        </p:spPr>
+        <p:txBody>
+          <a:bodyPr/>
+          <a:lstStyle/>
+          <a:p>
+            <a:pPr algn="ctr"/>
+            <a:r>
+              <a:rPr lang="en-US" b="1" dirty="0" err="1"/>
+              <a:t>Funksiya</a:t>
+            </a:r>
+            <a:endParaRPr lang="en-US" b="1" dirty="0"/>
+          </a:p>
+        </p:txBody>
+      </p:sp>
+    </p:spTree>
+    <p:extLst>
+      <p:ext uri="{BB962C8B-B14F-4D97-AF65-F5344CB8AC3E}">
+        <p14:creationId xmlns:p14="http://schemas.microsoft.com/office/powerpoint/2010/main" val="3007135185"/>
+      </p:ext>
+    </p:extLst>
+  </p:cSld>
+  <p:clrMapOvr>
+    <a:masterClrMapping/>
+  </p:clrMapOvr>
+</p:sld>
+</file>
+
+<file path=ppt/slides/slide19.xml><?xml version="1.0" encoding="utf-8"?>
+<p:sld xmlns:a="http://schemas.openxmlformats.org/drawingml/2006/main" xmlns:r="http://schemas.openxmlformats.org/officeDocument/2006/relationships" xmlns:p="http://schemas.openxmlformats.org/presentationml/2006/main">
+  <p:cSld>
+    <p:spTree>
+      <p:nvGrpSpPr>
+        <p:cNvPr id="1" name=""/>
+        <p:cNvGrpSpPr/>
+        <p:nvPr/>
+      </p:nvGrpSpPr>
+      <p:grpSpPr>
+        <a:xfrm>
+          <a:off x="0" y="0"/>
+          <a:ext cx="0" cy="0"/>
+          <a:chOff x="0" y="0"/>
+          <a:chExt cx="0" cy="0"/>
+        </a:xfrm>
+      </p:grpSpPr>
+      <p:sp>
+        <p:nvSpPr>
+          <p:cNvPr id="2" name="Title 1">
+            <a:extLst>
+              <a:ext uri="{FF2B5EF4-FFF2-40B4-BE49-F238E27FC236}">
                 <a16:creationId xmlns:a16="http://schemas.microsoft.com/office/drawing/2014/main" id="{83DE2135-8885-324F-BA93-CDE6B6F4F337}"/>
               </a:ext>
             </a:extLst>
@@ -4380,439 +5150,10 @@
           </a:prstGeom>
         </p:spPr>
       </p:pic>
-      <mc:AlternateContent xmlns:mc="http://schemas.openxmlformats.org/markup-compatibility/2006" xmlns:p14="http://schemas.microsoft.com/office/powerpoint/2010/main">
-        <mc:Choice Requires="p14">
-          <p:contentPart p14:bwMode="auto" r:id="rId3">
-            <p14:nvContentPartPr>
-              <p14:cNvPr id="6" name="Ink 5">
-                <a:extLst>
-                  <a:ext uri="{FF2B5EF4-FFF2-40B4-BE49-F238E27FC236}">
-                    <a16:creationId xmlns:a16="http://schemas.microsoft.com/office/drawing/2014/main" id="{2742769B-9AB3-A801-5808-114BD439232D}"/>
-                  </a:ext>
-                </a:extLst>
-              </p14:cNvPr>
-              <p14:cNvContentPartPr/>
-              <p14:nvPr/>
-            </p14:nvContentPartPr>
-            <p14:xfrm>
-              <a:off x="1140480" y="1462680"/>
-              <a:ext cx="10687320" cy="4890240"/>
-            </p14:xfrm>
-          </p:contentPart>
-        </mc:Choice>
-        <mc:Fallback xmlns="">
-          <p:pic>
-            <p:nvPicPr>
-              <p:cNvPr id="6" name="Ink 5">
-                <a:extLst>
-                  <a:ext uri="{FF2B5EF4-FFF2-40B4-BE49-F238E27FC236}">
-                    <a16:creationId xmlns:a16="http://schemas.microsoft.com/office/drawing/2014/main" id="{2742769B-9AB3-A801-5808-114BD439232D}"/>
-                  </a:ext>
-                </a:extLst>
-              </p:cNvPr>
-              <p:cNvPicPr/>
-              <p:nvPr/>
-            </p:nvPicPr>
-            <p:blipFill>
-              <a:blip r:embed="rId4"/>
-              <a:stretch>
-                <a:fillRect/>
-              </a:stretch>
-            </p:blipFill>
-            <p:spPr>
-              <a:xfrm>
-                <a:off x="1131120" y="1453320"/>
-                <a:ext cx="10706040" cy="4908960"/>
-              </a:xfrm>
-              <a:prstGeom prst="rect">
-                <a:avLst/>
-              </a:prstGeom>
-            </p:spPr>
-          </p:pic>
-        </mc:Fallback>
-      </mc:AlternateContent>
     </p:spTree>
     <p:extLst>
       <p:ext uri="{BB962C8B-B14F-4D97-AF65-F5344CB8AC3E}">
         <p14:creationId xmlns:p14="http://schemas.microsoft.com/office/powerpoint/2010/main" val="3167994946"/>
-      </p:ext>
-    </p:extLst>
-  </p:cSld>
-  <p:clrMapOvr>
-    <a:masterClrMapping/>
-  </p:clrMapOvr>
-</p:sld>
-</file>
-
-<file path=ppt/slides/slide12.xml><?xml version="1.0" encoding="utf-8"?>
-<p:sld xmlns:a="http://schemas.openxmlformats.org/drawingml/2006/main" xmlns:r="http://schemas.openxmlformats.org/officeDocument/2006/relationships" xmlns:p="http://schemas.openxmlformats.org/presentationml/2006/main">
-  <p:cSld>
-    <p:spTree>
-      <p:nvGrpSpPr>
-        <p:cNvPr id="1" name="">
-          <a:extLst>
-            <a:ext uri="{FF2B5EF4-FFF2-40B4-BE49-F238E27FC236}">
-              <a16:creationId xmlns:a16="http://schemas.microsoft.com/office/drawing/2014/main" id="{3A91C56D-9D48-24EE-5FB3-527C07274FBA}"/>
-            </a:ext>
-          </a:extLst>
-        </p:cNvPr>
-        <p:cNvGrpSpPr/>
-        <p:nvPr/>
-      </p:nvGrpSpPr>
-      <p:grpSpPr>
-        <a:xfrm>
-          <a:off x="0" y="0"/>
-          <a:ext cx="0" cy="0"/>
-          <a:chOff x="0" y="0"/>
-          <a:chExt cx="0" cy="0"/>
-        </a:xfrm>
-      </p:grpSpPr>
-      <p:sp>
-        <p:nvSpPr>
-          <p:cNvPr id="2" name="Title 1">
-            <a:extLst>
-              <a:ext uri="{FF2B5EF4-FFF2-40B4-BE49-F238E27FC236}">
-                <a16:creationId xmlns:a16="http://schemas.microsoft.com/office/drawing/2014/main" id="{6A034FC3-7E86-0CF4-A722-EC425CCDCF8D}"/>
-              </a:ext>
-            </a:extLst>
-          </p:cNvPr>
-          <p:cNvSpPr>
-            <a:spLocks noGrp="1"/>
-          </p:cNvSpPr>
-          <p:nvPr>
-            <p:ph type="title"/>
-          </p:nvPr>
-        </p:nvSpPr>
-        <p:spPr>
-          <a:xfrm>
-            <a:off x="838200" y="365125"/>
-            <a:ext cx="10515600" cy="6424781"/>
-          </a:xfrm>
-        </p:spPr>
-        <p:txBody>
-          <a:bodyPr/>
-          <a:lstStyle/>
-          <a:p>
-            <a:pPr algn="ctr"/>
-            <a:r>
-              <a:rPr lang="en-US" b="1" dirty="0" err="1"/>
-              <a:t>Funksiya</a:t>
-            </a:r>
-            <a:r>
-              <a:rPr lang="en-US" b="1" dirty="0"/>
-              <a:t> </a:t>
-            </a:r>
-            <a:r>
-              <a:rPr lang="en-US" b="1" dirty="0" err="1"/>
-              <a:t>va</a:t>
-            </a:r>
-            <a:r>
-              <a:rPr lang="en-US" b="1" dirty="0"/>
-              <a:t> ML</a:t>
-            </a:r>
-          </a:p>
-        </p:txBody>
-      </p:sp>
-    </p:spTree>
-    <p:extLst>
-      <p:ext uri="{BB962C8B-B14F-4D97-AF65-F5344CB8AC3E}">
-        <p14:creationId xmlns:p14="http://schemas.microsoft.com/office/powerpoint/2010/main" val="1142876382"/>
-      </p:ext>
-    </p:extLst>
-  </p:cSld>
-  <p:clrMapOvr>
-    <a:masterClrMapping/>
-  </p:clrMapOvr>
-</p:sld>
-</file>
-
-<file path=ppt/slides/slide13.xml><?xml version="1.0" encoding="utf-8"?>
-<p:sld xmlns:a="http://schemas.openxmlformats.org/drawingml/2006/main" xmlns:r="http://schemas.openxmlformats.org/officeDocument/2006/relationships" xmlns:p="http://schemas.openxmlformats.org/presentationml/2006/main">
-  <p:cSld>
-    <p:spTree>
-      <p:nvGrpSpPr>
-        <p:cNvPr id="1" name=""/>
-        <p:cNvGrpSpPr/>
-        <p:nvPr/>
-      </p:nvGrpSpPr>
-      <p:grpSpPr>
-        <a:xfrm>
-          <a:off x="0" y="0"/>
-          <a:ext cx="0" cy="0"/>
-          <a:chOff x="0" y="0"/>
-          <a:chExt cx="0" cy="0"/>
-        </a:xfrm>
-      </p:grpSpPr>
-      <p:sp>
-        <p:nvSpPr>
-          <p:cNvPr id="2" name="Title 1">
-            <a:extLst>
-              <a:ext uri="{FF2B5EF4-FFF2-40B4-BE49-F238E27FC236}">
-                <a16:creationId xmlns:a16="http://schemas.microsoft.com/office/drawing/2014/main" id="{8676670B-0D38-3B8A-74A3-279DB45F7B73}"/>
-              </a:ext>
-            </a:extLst>
-          </p:cNvPr>
-          <p:cNvSpPr>
-            <a:spLocks noGrp="1"/>
-          </p:cNvSpPr>
-          <p:nvPr>
-            <p:ph type="title"/>
-          </p:nvPr>
-        </p:nvSpPr>
-        <p:spPr/>
-        <p:txBody>
-          <a:bodyPr/>
-          <a:lstStyle/>
-          <a:p>
-            <a:r>
-              <a:rPr lang="en-US" dirty="0" err="1"/>
-              <a:t>Vazifa</a:t>
-            </a:r>
-            <a:endParaRPr lang="en-US" dirty="0"/>
-          </a:p>
-        </p:txBody>
-      </p:sp>
-      <p:sp>
-        <p:nvSpPr>
-          <p:cNvPr id="3" name="Content Placeholder 2">
-            <a:extLst>
-              <a:ext uri="{FF2B5EF4-FFF2-40B4-BE49-F238E27FC236}">
-                <a16:creationId xmlns:a16="http://schemas.microsoft.com/office/drawing/2014/main" id="{7830A18E-8D30-3A28-4C7B-DB1C23B0C749}"/>
-              </a:ext>
-            </a:extLst>
-          </p:cNvPr>
-          <p:cNvSpPr>
-            <a:spLocks noGrp="1"/>
-          </p:cNvSpPr>
-          <p:nvPr>
-            <p:ph idx="1"/>
-          </p:nvPr>
-        </p:nvSpPr>
-        <p:spPr/>
-        <p:txBody>
-          <a:bodyPr/>
-          <a:lstStyle/>
-          <a:p>
-            <a:r>
-              <a:rPr lang="en-US" dirty="0"/>
-              <a:t>Data </a:t>
-            </a:r>
-            <a:r>
-              <a:rPr lang="en-US" dirty="0" err="1"/>
-              <a:t>Preprocessingni</a:t>
-            </a:r>
-            <a:r>
-              <a:rPr lang="en-US" dirty="0"/>
-              <a:t> </a:t>
-            </a:r>
-            <a:r>
-              <a:rPr lang="en-US" dirty="0" err="1"/>
-              <a:t>funksiya</a:t>
-            </a:r>
-            <a:r>
-              <a:rPr lang="en-US" dirty="0"/>
-              <a:t> </a:t>
-            </a:r>
-            <a:r>
-              <a:rPr lang="en-US" dirty="0" err="1"/>
-              <a:t>orqali</a:t>
-            </a:r>
-            <a:r>
-              <a:rPr lang="en-US" dirty="0"/>
-              <a:t> </a:t>
-            </a:r>
-            <a:r>
-              <a:rPr lang="en-US" dirty="0" err="1"/>
-              <a:t>to’ldiring</a:t>
-            </a:r>
-            <a:endParaRPr lang="en-US" dirty="0"/>
-          </a:p>
-          <a:p>
-            <a:r>
-              <a:rPr lang="en-US" dirty="0" err="1"/>
-              <a:t>Classificationga</a:t>
-            </a:r>
-            <a:r>
-              <a:rPr lang="en-US" dirty="0"/>
-              <a:t> </a:t>
-            </a:r>
-            <a:r>
-              <a:rPr lang="en-US" dirty="0" err="1"/>
-              <a:t>bilgan</a:t>
-            </a:r>
-            <a:r>
-              <a:rPr lang="en-US" dirty="0"/>
-              <a:t> </a:t>
-            </a:r>
-            <a:r>
-              <a:rPr lang="en-US" dirty="0" err="1"/>
-              <a:t>algorithmiz</a:t>
-            </a:r>
-            <a:r>
-              <a:rPr lang="en-US" dirty="0"/>
-              <a:t> bn model </a:t>
-            </a:r>
-            <a:r>
-              <a:rPr lang="en-US" dirty="0" err="1"/>
-              <a:t>yasang</a:t>
-            </a:r>
-            <a:endParaRPr lang="en-US" dirty="0"/>
-          </a:p>
-          <a:p>
-            <a:r>
-              <a:rPr lang="en-US" dirty="0" err="1"/>
-              <a:t>Funksiyaga</a:t>
-            </a:r>
-            <a:r>
-              <a:rPr lang="en-US" dirty="0"/>
-              <a:t> </a:t>
-            </a:r>
-            <a:r>
-              <a:rPr lang="en-US" dirty="0" err="1"/>
-              <a:t>oid</a:t>
-            </a:r>
-            <a:r>
-              <a:rPr lang="en-US" dirty="0"/>
-              <a:t> </a:t>
-            </a:r>
-            <a:r>
-              <a:rPr lang="en-US" dirty="0" err="1"/>
-              <a:t>berilgan</a:t>
-            </a:r>
-            <a:r>
-              <a:rPr lang="en-US" dirty="0"/>
-              <a:t> </a:t>
-            </a:r>
-            <a:r>
-              <a:rPr lang="en-US" dirty="0" err="1"/>
-              <a:t>misollarni</a:t>
-            </a:r>
-            <a:r>
-              <a:rPr lang="en-US" dirty="0"/>
-              <a:t> </a:t>
-            </a:r>
-            <a:r>
-              <a:rPr lang="en-US" dirty="0" err="1"/>
-              <a:t>ishlang</a:t>
-            </a:r>
-            <a:endParaRPr lang="en-US" dirty="0"/>
-          </a:p>
-        </p:txBody>
-      </p:sp>
-      <mc:AlternateContent xmlns:mc="http://schemas.openxmlformats.org/markup-compatibility/2006" xmlns:p14="http://schemas.microsoft.com/office/powerpoint/2010/main">
-        <mc:Choice Requires="p14">
-          <p:contentPart p14:bwMode="auto" r:id="rId2">
-            <p14:nvContentPartPr>
-              <p14:cNvPr id="4" name="Ink 3">
-                <a:extLst>
-                  <a:ext uri="{FF2B5EF4-FFF2-40B4-BE49-F238E27FC236}">
-                    <a16:creationId xmlns:a16="http://schemas.microsoft.com/office/drawing/2014/main" id="{F5D28FF3-1207-0717-521B-185684264C3A}"/>
-                  </a:ext>
-                </a:extLst>
-              </p14:cNvPr>
-              <p14:cNvContentPartPr/>
-              <p14:nvPr/>
-            </p14:nvContentPartPr>
-            <p14:xfrm>
-              <a:off x="1431360" y="2274840"/>
-              <a:ext cx="7458480" cy="1606680"/>
-            </p14:xfrm>
-          </p:contentPart>
-        </mc:Choice>
-        <mc:Fallback xmlns="">
-          <p:pic>
-            <p:nvPicPr>
-              <p:cNvPr id="4" name="Ink 3">
-                <a:extLst>
-                  <a:ext uri="{FF2B5EF4-FFF2-40B4-BE49-F238E27FC236}">
-                    <a16:creationId xmlns:a16="http://schemas.microsoft.com/office/drawing/2014/main" id="{F5D28FF3-1207-0717-521B-185684264C3A}"/>
-                  </a:ext>
-                </a:extLst>
-              </p:cNvPr>
-              <p:cNvPicPr/>
-              <p:nvPr/>
-            </p:nvPicPr>
-            <p:blipFill>
-              <a:blip r:embed="rId3"/>
-              <a:stretch>
-                <a:fillRect/>
-              </a:stretch>
-            </p:blipFill>
-            <p:spPr>
-              <a:xfrm>
-                <a:off x="1422000" y="2265480"/>
-                <a:ext cx="7477200" cy="1625400"/>
-              </a:xfrm>
-              <a:prstGeom prst="rect">
-                <a:avLst/>
-              </a:prstGeom>
-            </p:spPr>
-          </p:pic>
-        </mc:Fallback>
-      </mc:AlternateContent>
-    </p:spTree>
-    <p:extLst>
-      <p:ext uri="{BB962C8B-B14F-4D97-AF65-F5344CB8AC3E}">
-        <p14:creationId xmlns:p14="http://schemas.microsoft.com/office/powerpoint/2010/main" val="3969444567"/>
-      </p:ext>
-    </p:extLst>
-  </p:cSld>
-  <p:clrMapOvr>
-    <a:masterClrMapping/>
-  </p:clrMapOvr>
-</p:sld>
-</file>
-
-<file path=ppt/slides/slide14.xml><?xml version="1.0" encoding="utf-8"?>
-<p:sld xmlns:a="http://schemas.openxmlformats.org/drawingml/2006/main" xmlns:r="http://schemas.openxmlformats.org/officeDocument/2006/relationships" xmlns:p="http://schemas.openxmlformats.org/presentationml/2006/main">
-  <p:cSld>
-    <p:spTree>
-      <p:nvGrpSpPr>
-        <p:cNvPr id="1" name=""/>
-        <p:cNvGrpSpPr/>
-        <p:nvPr/>
-      </p:nvGrpSpPr>
-      <p:grpSpPr>
-        <a:xfrm>
-          <a:off x="0" y="0"/>
-          <a:ext cx="0" cy="0"/>
-          <a:chOff x="0" y="0"/>
-          <a:chExt cx="0" cy="0"/>
-        </a:xfrm>
-      </p:grpSpPr>
-      <p:pic>
-        <p:nvPicPr>
-          <p:cNvPr id="5" name="Content Placeholder 4">
-            <a:extLst>
-              <a:ext uri="{FF2B5EF4-FFF2-40B4-BE49-F238E27FC236}">
-                <a16:creationId xmlns:a16="http://schemas.microsoft.com/office/drawing/2014/main" id="{929EAC02-F2CE-A23F-E254-59FFAE2638DB}"/>
-              </a:ext>
-            </a:extLst>
-          </p:cNvPr>
-          <p:cNvPicPr>
-            <a:picLocks noGrp="1" noChangeAspect="1"/>
-          </p:cNvPicPr>
-          <p:nvPr>
-            <p:ph idx="1"/>
-          </p:nvPr>
-        </p:nvPicPr>
-        <p:blipFill>
-          <a:blip r:embed="rId2"/>
-          <a:stretch>
-            <a:fillRect/>
-          </a:stretch>
-        </p:blipFill>
-        <p:spPr>
-          <a:xfrm>
-            <a:off x="93677" y="83889"/>
-            <a:ext cx="12004646" cy="3120705"/>
-          </a:xfrm>
-        </p:spPr>
-      </p:pic>
-    </p:spTree>
-    <p:extLst>
-      <p:ext uri="{BB962C8B-B14F-4D97-AF65-F5344CB8AC3E}">
-        <p14:creationId xmlns:p14="http://schemas.microsoft.com/office/powerpoint/2010/main" val="2803651769"/>
       </p:ext>
     </p:extLst>
   </p:cSld>
@@ -4886,8 +5227,39 @@
         </p:nvSpPr>
         <p:spPr/>
         <p:txBody>
-          <a:bodyPr/>
-          <a:lstStyle/>
+          <a:bodyPr>
+            <a:normAutofit/>
+          </a:bodyPr>
+          <a:lstStyle/>
+          <a:p>
+            <a:r>
+              <a:rPr lang="en-US" dirty="0" err="1"/>
+              <a:t>Qoidalar</a:t>
+            </a:r>
+            <a:endParaRPr lang="en-US" dirty="0"/>
+          </a:p>
+          <a:p>
+            <a:r>
+              <a:rPr lang="en-US" dirty="0"/>
+              <a:t>Yangi </a:t>
+            </a:r>
+            <a:r>
+              <a:rPr lang="en-US" dirty="0" err="1"/>
+              <a:t>oyimiz</a:t>
+            </a:r>
+            <a:r>
+              <a:rPr lang="en-US" dirty="0"/>
+              <a:t> </a:t>
+            </a:r>
+            <a:r>
+              <a:rPr lang="en-US" dirty="0" err="1"/>
+              <a:t>uchun</a:t>
+            </a:r>
+            <a:r>
+              <a:rPr lang="en-US" dirty="0"/>
+              <a:t> plan</a:t>
+            </a:r>
+          </a:p>
           <a:p>
             <a:r>
               <a:rPr lang="en-US" dirty="0"/>
@@ -4905,40 +5277,22 @@
           <a:p>
             <a:r>
               <a:rPr lang="en-US" dirty="0"/>
-              <a:t>Yangi </a:t>
-            </a:r>
-            <a:r>
-              <a:rPr lang="en-US" dirty="0" err="1"/>
-              <a:t>oyimiz</a:t>
-            </a:r>
-            <a:r>
-              <a:rPr lang="en-US" dirty="0"/>
-              <a:t> </a:t>
-            </a:r>
-            <a:r>
-              <a:rPr lang="en-US" dirty="0" err="1"/>
-              <a:t>uchun</a:t>
-            </a:r>
-            <a:r>
-              <a:rPr lang="en-US" dirty="0"/>
-              <a:t> plan</a:t>
-            </a:r>
-          </a:p>
-          <a:p>
-            <a:r>
-              <a:rPr lang="en-US" dirty="0" err="1"/>
-              <a:t>Qoidalar</a:t>
+              <a:t>Model Evaluation</a:t>
+            </a:r>
+          </a:p>
+          <a:p>
+            <a:r>
+              <a:rPr lang="en-US" dirty="0"/>
+              <a:t>Model Evaluation </a:t>
+            </a:r>
+            <a:r>
+              <a:rPr lang="en-US" dirty="0" err="1"/>
+              <a:t>Amaliy</a:t>
             </a:r>
             <a:endParaRPr lang="en-US" dirty="0"/>
           </a:p>
           <a:p>
             <a:r>
-              <a:rPr lang="en-US" dirty="0"/>
-              <a:t>Model Evaluation</a:t>
-            </a:r>
-          </a:p>
-          <a:p>
-            <a:r>
               <a:rPr lang="en-US" dirty="0" err="1"/>
               <a:t>Funksiya</a:t>
             </a:r>
@@ -4947,81 +5301,12 @@
           <a:p>
             <a:r>
               <a:rPr lang="en-US" dirty="0" err="1"/>
-              <a:t>Funksiya</a:t>
-            </a:r>
-            <a:r>
-              <a:rPr lang="en-US" dirty="0"/>
-              <a:t> </a:t>
-            </a:r>
-            <a:r>
-              <a:rPr lang="en-US" dirty="0" err="1"/>
-              <a:t>va</a:t>
-            </a:r>
-            <a:r>
-              <a:rPr lang="en-US" dirty="0"/>
-              <a:t> ML</a:t>
-            </a:r>
-          </a:p>
-          <a:p>
-            <a:r>
-              <a:rPr lang="en-US" dirty="0" err="1"/>
               <a:t>Vazifa</a:t>
             </a:r>
             <a:endParaRPr lang="en-US" dirty="0"/>
           </a:p>
         </p:txBody>
       </p:sp>
-      <mc:AlternateContent xmlns:mc="http://schemas.openxmlformats.org/markup-compatibility/2006" xmlns:p14="http://schemas.microsoft.com/office/powerpoint/2010/main">
-        <mc:Choice Requires="p14">
-          <p:contentPart p14:bwMode="auto" r:id="rId2">
-            <p14:nvContentPartPr>
-              <p14:cNvPr id="4" name="Ink 3">
-                <a:extLst>
-                  <a:ext uri="{FF2B5EF4-FFF2-40B4-BE49-F238E27FC236}">
-                    <a16:creationId xmlns:a16="http://schemas.microsoft.com/office/drawing/2014/main" id="{9D6DFA82-5F77-EC43-8CD9-7A496433C8F8}"/>
-                  </a:ext>
-                </a:extLst>
-              </p14:cNvPr>
-              <p14:cNvContentPartPr/>
-              <p14:nvPr/>
-            </p14:nvContentPartPr>
-            <p14:xfrm>
-              <a:off x="969840" y="1343160"/>
-              <a:ext cx="5649120" cy="4202640"/>
-            </p14:xfrm>
-          </p:contentPart>
-        </mc:Choice>
-        <mc:Fallback xmlns="">
-          <p:pic>
-            <p:nvPicPr>
-              <p:cNvPr id="4" name="Ink 3">
-                <a:extLst>
-                  <a:ext uri="{FF2B5EF4-FFF2-40B4-BE49-F238E27FC236}">
-                    <a16:creationId xmlns:a16="http://schemas.microsoft.com/office/drawing/2014/main" id="{9D6DFA82-5F77-EC43-8CD9-7A496433C8F8}"/>
-                  </a:ext>
-                </a:extLst>
-              </p:cNvPr>
-              <p:cNvPicPr/>
-              <p:nvPr/>
-            </p:nvPicPr>
-            <p:blipFill>
-              <a:blip r:embed="rId3"/>
-              <a:stretch>
-                <a:fillRect/>
-              </a:stretch>
-            </p:blipFill>
-            <p:spPr>
-              <a:xfrm>
-                <a:off x="960480" y="1333800"/>
-                <a:ext cx="5667840" cy="4221360"/>
-              </a:xfrm>
-              <a:prstGeom prst="rect">
-                <a:avLst/>
-              </a:prstGeom>
-            </p:spPr>
-          </p:pic>
-        </mc:Fallback>
-      </mc:AlternateContent>
     </p:spTree>
     <p:extLst>
       <p:ext uri="{BB962C8B-B14F-4D97-AF65-F5344CB8AC3E}">
@@ -5035,7 +5320,7 @@
 </p:sld>
 </file>
 
-<file path=ppt/slides/slide3.xml><?xml version="1.0" encoding="utf-8"?>
+<file path=ppt/slides/slide20.xml><?xml version="1.0" encoding="utf-8"?>
 <p:sld xmlns:a="http://schemas.openxmlformats.org/drawingml/2006/main" xmlns:r="http://schemas.openxmlformats.org/officeDocument/2006/relationships" xmlns:p="http://schemas.openxmlformats.org/presentationml/2006/main">
   <p:cSld>
     <p:spTree>
@@ -5057,7 +5342,7 @@
           <p:cNvPr id="2" name="Title 1">
             <a:extLst>
               <a:ext uri="{FF2B5EF4-FFF2-40B4-BE49-F238E27FC236}">
-                <a16:creationId xmlns:a16="http://schemas.microsoft.com/office/drawing/2014/main" id="{E8624A9D-7DC6-128C-B542-F633FED8164B}"/>
+                <a16:creationId xmlns:a16="http://schemas.microsoft.com/office/drawing/2014/main" id="{8676670B-0D38-3B8A-74A3-279DB45F7B73}"/>
               </a:ext>
             </a:extLst>
           </p:cNvPr>
@@ -5068,87 +5353,269 @@
             <p:ph type="title"/>
           </p:nvPr>
         </p:nvSpPr>
-        <p:spPr>
-          <a:xfrm>
-            <a:off x="838200" y="365125"/>
-            <a:ext cx="10515600" cy="6424781"/>
-          </a:xfrm>
-        </p:spPr>
-        <p:txBody>
-          <a:bodyPr/>
-          <a:lstStyle/>
-          <a:p>
-            <a:pPr algn="ctr"/>
+        <p:spPr/>
+        <p:txBody>
+          <a:bodyPr/>
+          <a:lstStyle/>
+          <a:p>
+            <a:r>
+              <a:rPr lang="en-US" dirty="0" err="1"/>
+              <a:t>Vazifa</a:t>
+            </a:r>
+            <a:endParaRPr lang="en-US" dirty="0"/>
+          </a:p>
+        </p:txBody>
+      </p:sp>
+      <p:sp>
+        <p:nvSpPr>
+          <p:cNvPr id="3" name="Content Placeholder 2">
+            <a:extLst>
+              <a:ext uri="{FF2B5EF4-FFF2-40B4-BE49-F238E27FC236}">
+                <a16:creationId xmlns:a16="http://schemas.microsoft.com/office/drawing/2014/main" id="{7830A18E-8D30-3A28-4C7B-DB1C23B0C749}"/>
+              </a:ext>
+            </a:extLst>
+          </p:cNvPr>
+          <p:cNvSpPr>
+            <a:spLocks noGrp="1"/>
+          </p:cNvSpPr>
+          <p:nvPr>
+            <p:ph idx="1"/>
+          </p:nvPr>
+        </p:nvSpPr>
+        <p:spPr/>
+        <p:txBody>
+          <a:bodyPr/>
+          <a:lstStyle/>
+          <a:p>
+            <a:r>
+              <a:rPr lang="en-US" dirty="0"/>
+              <a:t>1-dars </a:t>
+            </a:r>
+            <a:r>
+              <a:rPr lang="en-US" dirty="0" err="1"/>
+              <a:t>uchun</a:t>
+            </a:r>
+            <a:r>
+              <a:rPr lang="en-US" dirty="0"/>
+              <a:t> report </a:t>
+            </a:r>
+            <a:r>
+              <a:rPr lang="en-US" dirty="0" err="1"/>
+              <a:t>yozing</a:t>
+            </a:r>
+            <a:endParaRPr lang="en-US" dirty="0"/>
+          </a:p>
+          <a:p>
+            <a:r>
+              <a:rPr lang="en-US" dirty="0"/>
+              <a:t>Classification </a:t>
+            </a:r>
+            <a:r>
+              <a:rPr lang="en-US" dirty="0" err="1"/>
+              <a:t>reportni</a:t>
+            </a:r>
+            <a:r>
+              <a:rPr lang="en-US" dirty="0"/>
+              <a:t> </a:t>
+            </a:r>
+            <a:r>
+              <a:rPr lang="en-US" dirty="0" err="1"/>
+              <a:t>boshqa</a:t>
+            </a:r>
+            <a:r>
+              <a:rPr lang="en-US" dirty="0"/>
+              <a:t> </a:t>
+            </a:r>
+            <a:r>
+              <a:rPr lang="en-US" dirty="0" err="1"/>
+              <a:t>kichik</a:t>
+            </a:r>
+            <a:r>
+              <a:rPr lang="en-US" dirty="0"/>
+              <a:t> dataset </a:t>
+            </a:r>
+            <a:r>
+              <a:rPr lang="en-US" dirty="0" err="1"/>
+              <a:t>orqali</a:t>
+            </a:r>
+            <a:r>
+              <a:rPr lang="en-US" dirty="0"/>
+              <a:t> </a:t>
+            </a:r>
+            <a:r>
+              <a:rPr lang="en-US" dirty="0" err="1"/>
+              <a:t>xar</a:t>
+            </a:r>
+            <a:r>
+              <a:rPr lang="en-US" dirty="0"/>
+              <a:t> </a:t>
+            </a:r>
+            <a:r>
+              <a:rPr lang="en-US" dirty="0" err="1"/>
+              <a:t>bir</a:t>
+            </a:r>
+            <a:r>
+              <a:rPr lang="en-US" dirty="0"/>
+              <a:t> </a:t>
+            </a:r>
+            <a:r>
+              <a:rPr lang="en-US" dirty="0" err="1"/>
+              <a:t>qismini</a:t>
+            </a:r>
+            <a:r>
+              <a:rPr lang="en-US" dirty="0"/>
+              <a:t> </a:t>
+            </a:r>
+            <a:r>
+              <a:rPr lang="en-US" dirty="0" err="1"/>
+              <a:t>xisoblang</a:t>
+            </a:r>
+            <a:r>
+              <a:rPr lang="en-US" dirty="0"/>
+              <a:t> </a:t>
+            </a:r>
+            <a:r>
+              <a:rPr lang="en-US" dirty="0" err="1"/>
+              <a:t>va</a:t>
+            </a:r>
+            <a:r>
+              <a:rPr lang="en-US" dirty="0"/>
+              <a:t> </a:t>
+            </a:r>
+            <a:r>
+              <a:rPr lang="en-US" dirty="0" err="1"/>
+              <a:t>koding</a:t>
+            </a:r>
+            <a:r>
+              <a:rPr lang="en-US" dirty="0"/>
+              <a:t> bn </a:t>
+            </a:r>
+            <a:r>
+              <a:rPr lang="en-US" dirty="0" err="1"/>
+              <a:t>tekshiring</a:t>
+            </a:r>
+            <a:r>
+              <a:rPr lang="en-US" dirty="0"/>
+              <a:t>. </a:t>
+            </a:r>
+            <a:r>
+              <a:rPr lang="en-US" b="1" dirty="0" err="1"/>
+              <a:t>Xisoblashlar</a:t>
+            </a:r>
             <a:r>
               <a:rPr lang="en-US" b="1" dirty="0"/>
-              <a:t>Model Building </a:t>
+              <a:t> </a:t>
             </a:r>
             <a:r>
               <a:rPr lang="en-US" b="1" dirty="0" err="1"/>
-              <a:t>nima</a:t>
+              <a:t>ruchka</a:t>
             </a:r>
             <a:r>
               <a:rPr lang="en-US" b="1" dirty="0"/>
-              <a:t>?</a:t>
-            </a:r>
-          </a:p>
-        </p:txBody>
-      </p:sp>
-      <mc:AlternateContent xmlns:mc="http://schemas.openxmlformats.org/markup-compatibility/2006" xmlns:p14="http://schemas.microsoft.com/office/powerpoint/2010/main">
-        <mc:Choice Requires="p14">
-          <p:contentPart p14:bwMode="auto" r:id="rId2">
-            <p14:nvContentPartPr>
-              <p14:cNvPr id="3" name="Ink 2">
-                <a:extLst>
-                  <a:ext uri="{FF2B5EF4-FFF2-40B4-BE49-F238E27FC236}">
-                    <a16:creationId xmlns:a16="http://schemas.microsoft.com/office/drawing/2014/main" id="{0C0257F0-33E3-20F2-57E6-140A5D338114}"/>
-                  </a:ext>
-                </a:extLst>
-              </p14:cNvPr>
-              <p14:cNvContentPartPr/>
-              <p14:nvPr/>
-            </p14:nvContentPartPr>
-            <p14:xfrm>
-              <a:off x="3581640" y="3154320"/>
-              <a:ext cx="3537720" cy="777240"/>
-            </p14:xfrm>
-          </p:contentPart>
-        </mc:Choice>
-        <mc:Fallback xmlns="">
-          <p:pic>
-            <p:nvPicPr>
-              <p:cNvPr id="3" name="Ink 2">
-                <a:extLst>
-                  <a:ext uri="{FF2B5EF4-FFF2-40B4-BE49-F238E27FC236}">
-                    <a16:creationId xmlns:a16="http://schemas.microsoft.com/office/drawing/2014/main" id="{0C0257F0-33E3-20F2-57E6-140A5D338114}"/>
-                  </a:ext>
-                </a:extLst>
-              </p:cNvPr>
-              <p:cNvPicPr/>
-              <p:nvPr/>
-            </p:nvPicPr>
-            <p:blipFill>
-              <a:blip r:embed="rId3"/>
-              <a:stretch>
-                <a:fillRect/>
-              </a:stretch>
-            </p:blipFill>
-            <p:spPr>
-              <a:xfrm>
-                <a:off x="3572280" y="3144960"/>
-                <a:ext cx="3556440" cy="795960"/>
-              </a:xfrm>
-              <a:prstGeom prst="rect">
-                <a:avLst/>
-              </a:prstGeom>
-            </p:spPr>
-          </p:pic>
-        </mc:Fallback>
-      </mc:AlternateContent>
+              <a:t> </a:t>
+            </a:r>
+            <a:r>
+              <a:rPr lang="en-US" b="1" dirty="0" err="1"/>
+              <a:t>va</a:t>
+            </a:r>
+            <a:r>
+              <a:rPr lang="en-US" b="1" dirty="0"/>
+              <a:t> </a:t>
+            </a:r>
+            <a:r>
+              <a:rPr lang="en-US" b="1" dirty="0" err="1"/>
+              <a:t>varoqda</a:t>
+            </a:r>
+            <a:r>
+              <a:rPr lang="en-US" b="1" dirty="0"/>
+              <a:t> </a:t>
+            </a:r>
+            <a:r>
+              <a:rPr lang="en-US" b="1" dirty="0" err="1"/>
+              <a:t>bolsin</a:t>
+            </a:r>
+            <a:r>
+              <a:rPr lang="en-US" b="1" dirty="0"/>
+              <a:t>!</a:t>
+            </a:r>
+            <a:endParaRPr lang="en-US" dirty="0"/>
+          </a:p>
+          <a:p>
+            <a:r>
+              <a:rPr lang="en-US" dirty="0" err="1"/>
+              <a:t>Classificationga</a:t>
+            </a:r>
+            <a:r>
+              <a:rPr lang="en-US" dirty="0"/>
+              <a:t> </a:t>
+            </a:r>
+            <a:r>
+              <a:rPr lang="en-US" dirty="0" err="1"/>
+              <a:t>bilgan</a:t>
+            </a:r>
+            <a:r>
+              <a:rPr lang="en-US" dirty="0"/>
+              <a:t> </a:t>
+            </a:r>
+            <a:r>
+              <a:rPr lang="en-US" dirty="0" err="1"/>
+              <a:t>algorithmiz</a:t>
+            </a:r>
+            <a:r>
+              <a:rPr lang="en-US" dirty="0"/>
+              <a:t> bn model </a:t>
+            </a:r>
+            <a:r>
+              <a:rPr lang="en-US" dirty="0" err="1"/>
+              <a:t>yasang</a:t>
+            </a:r>
+            <a:endParaRPr lang="en-US" dirty="0"/>
+          </a:p>
+          <a:p>
+            <a:r>
+              <a:rPr lang="en-US" dirty="0" err="1"/>
+              <a:t>Funksiyaga</a:t>
+            </a:r>
+            <a:r>
+              <a:rPr lang="en-US" dirty="0"/>
+              <a:t> </a:t>
+            </a:r>
+            <a:r>
+              <a:rPr lang="en-US" dirty="0" err="1"/>
+              <a:t>oid</a:t>
+            </a:r>
+            <a:r>
+              <a:rPr lang="en-US" dirty="0"/>
+              <a:t> </a:t>
+            </a:r>
+            <a:r>
+              <a:rPr lang="en-US" dirty="0" err="1"/>
+              <a:t>berilgan</a:t>
+            </a:r>
+            <a:r>
+              <a:rPr lang="en-US" dirty="0"/>
+              <a:t> </a:t>
+            </a:r>
+            <a:r>
+              <a:rPr lang="en-US" dirty="0" err="1"/>
+              <a:t>misollarni</a:t>
+            </a:r>
+            <a:r>
+              <a:rPr lang="en-US" dirty="0"/>
+              <a:t> </a:t>
+            </a:r>
+            <a:r>
+              <a:rPr lang="en-US" dirty="0" err="1"/>
+              <a:t>ishlang</a:t>
+            </a:r>
+            <a:endParaRPr lang="en-US" dirty="0"/>
+          </a:p>
+        </p:txBody>
+      </p:sp>
     </p:spTree>
     <p:extLst>
       <p:ext uri="{BB962C8B-B14F-4D97-AF65-F5344CB8AC3E}">
-        <p14:creationId xmlns:p14="http://schemas.microsoft.com/office/powerpoint/2010/main" val="129114571"/>
+        <p14:creationId xmlns:p14="http://schemas.microsoft.com/office/powerpoint/2010/main" val="3969444567"/>
       </p:ext>
     </p:extLst>
   </p:cSld>
@@ -5158,249 +5625,7 @@
 </p:sld>
 </file>
 
-<file path=ppt/slides/slide4.xml><?xml version="1.0" encoding="utf-8"?>
-<p:sld xmlns:a="http://schemas.openxmlformats.org/drawingml/2006/main" xmlns:r="http://schemas.openxmlformats.org/officeDocument/2006/relationships" xmlns:p="http://schemas.openxmlformats.org/presentationml/2006/main">
-  <p:cSld>
-    <p:spTree>
-      <p:nvGrpSpPr>
-        <p:cNvPr id="1" name=""/>
-        <p:cNvGrpSpPr/>
-        <p:nvPr/>
-      </p:nvGrpSpPr>
-      <p:grpSpPr>
-        <a:xfrm>
-          <a:off x="0" y="0"/>
-          <a:ext cx="0" cy="0"/>
-          <a:chOff x="0" y="0"/>
-          <a:chExt cx="0" cy="0"/>
-        </a:xfrm>
-      </p:grpSpPr>
-      <p:sp>
-        <p:nvSpPr>
-          <p:cNvPr id="2" name="Title 1">
-            <a:extLst>
-              <a:ext uri="{FF2B5EF4-FFF2-40B4-BE49-F238E27FC236}">
-                <a16:creationId xmlns:a16="http://schemas.microsoft.com/office/drawing/2014/main" id="{C2D3BBDA-49FA-8F85-1DAF-667013230EDC}"/>
-              </a:ext>
-            </a:extLst>
-          </p:cNvPr>
-          <p:cNvSpPr>
-            <a:spLocks noGrp="1"/>
-          </p:cNvSpPr>
-          <p:nvPr>
-            <p:ph type="title"/>
-          </p:nvPr>
-        </p:nvSpPr>
-        <p:spPr/>
-        <p:txBody>
-          <a:bodyPr/>
-          <a:lstStyle/>
-          <a:p>
-            <a:r>
-              <a:rPr lang="en-US" dirty="0"/>
-              <a:t>Model Building </a:t>
-            </a:r>
-            <a:r>
-              <a:rPr lang="en-US" dirty="0" err="1"/>
-              <a:t>nima</a:t>
-            </a:r>
-            <a:r>
-              <a:rPr lang="en-US" dirty="0"/>
-              <a:t>?</a:t>
-            </a:r>
-          </a:p>
-        </p:txBody>
-      </p:sp>
-      <p:sp>
-        <p:nvSpPr>
-          <p:cNvPr id="3" name="Content Placeholder 2">
-            <a:extLst>
-              <a:ext uri="{FF2B5EF4-FFF2-40B4-BE49-F238E27FC236}">
-                <a16:creationId xmlns:a16="http://schemas.microsoft.com/office/drawing/2014/main" id="{16AF798B-F8C5-A137-D3ED-DC9EA8F78644}"/>
-              </a:ext>
-            </a:extLst>
-          </p:cNvPr>
-          <p:cNvSpPr>
-            <a:spLocks noGrp="1"/>
-          </p:cNvSpPr>
-          <p:nvPr>
-            <p:ph idx="1"/>
-          </p:nvPr>
-        </p:nvSpPr>
-        <p:spPr/>
-        <p:txBody>
-          <a:bodyPr/>
-          <a:lstStyle/>
-          <a:p>
-            <a:r>
-              <a:rPr lang="en-US" dirty="0"/>
-              <a:t>Linear Regression – </a:t>
-            </a:r>
-            <a:r>
-              <a:rPr lang="en-US" dirty="0" err="1"/>
-              <a:t>Retesept</a:t>
-            </a:r>
-            <a:endParaRPr lang="en-US" dirty="0"/>
-          </a:p>
-          <a:p>
-            <a:r>
-              <a:rPr lang="en-US" dirty="0"/>
-              <a:t>Model ------ House Prediction </a:t>
-            </a:r>
-          </a:p>
-        </p:txBody>
-      </p:sp>
-      <mc:AlternateContent xmlns:mc="http://schemas.openxmlformats.org/markup-compatibility/2006" xmlns:p14="http://schemas.microsoft.com/office/powerpoint/2010/main">
-        <mc:Choice Requires="p14">
-          <p:contentPart p14:bwMode="auto" r:id="rId2">
-            <p14:nvContentPartPr>
-              <p14:cNvPr id="4" name="Ink 3">
-                <a:extLst>
-                  <a:ext uri="{FF2B5EF4-FFF2-40B4-BE49-F238E27FC236}">
-                    <a16:creationId xmlns:a16="http://schemas.microsoft.com/office/drawing/2014/main" id="{EA23A361-787C-DADE-BA6A-CA3B05543707}"/>
-                  </a:ext>
-                </a:extLst>
-              </p14:cNvPr>
-              <p14:cNvContentPartPr/>
-              <p14:nvPr/>
-            </p14:nvContentPartPr>
-            <p14:xfrm>
-              <a:off x="394920" y="1513080"/>
-              <a:ext cx="9999360" cy="5300640"/>
-            </p14:xfrm>
-          </p:contentPart>
-        </mc:Choice>
-        <mc:Fallback xmlns="">
-          <p:pic>
-            <p:nvPicPr>
-              <p:cNvPr id="4" name="Ink 3">
-                <a:extLst>
-                  <a:ext uri="{FF2B5EF4-FFF2-40B4-BE49-F238E27FC236}">
-                    <a16:creationId xmlns:a16="http://schemas.microsoft.com/office/drawing/2014/main" id="{EA23A361-787C-DADE-BA6A-CA3B05543707}"/>
-                  </a:ext>
-                </a:extLst>
-              </p:cNvPr>
-              <p:cNvPicPr/>
-              <p:nvPr/>
-            </p:nvPicPr>
-            <p:blipFill>
-              <a:blip r:embed="rId3"/>
-              <a:stretch>
-                <a:fillRect/>
-              </a:stretch>
-            </p:blipFill>
-            <p:spPr>
-              <a:xfrm>
-                <a:off x="385560" y="1503720"/>
-                <a:ext cx="10018080" cy="5319360"/>
-              </a:xfrm>
-              <a:prstGeom prst="rect">
-                <a:avLst/>
-              </a:prstGeom>
-            </p:spPr>
-          </p:pic>
-        </mc:Fallback>
-      </mc:AlternateContent>
-    </p:spTree>
-    <p:extLst>
-      <p:ext uri="{BB962C8B-B14F-4D97-AF65-F5344CB8AC3E}">
-        <p14:creationId xmlns:p14="http://schemas.microsoft.com/office/powerpoint/2010/main" val="3741531487"/>
-      </p:ext>
-    </p:extLst>
-  </p:cSld>
-  <p:clrMapOvr>
-    <a:masterClrMapping/>
-  </p:clrMapOvr>
-</p:sld>
-</file>
-
-<file path=ppt/slides/slide5.xml><?xml version="1.0" encoding="utf-8"?>
-<p:sld xmlns:a="http://schemas.openxmlformats.org/drawingml/2006/main" xmlns:r="http://schemas.openxmlformats.org/officeDocument/2006/relationships" xmlns:p="http://schemas.openxmlformats.org/presentationml/2006/main">
-  <p:cSld>
-    <p:spTree>
-      <p:nvGrpSpPr>
-        <p:cNvPr id="1" name="">
-          <a:extLst>
-            <a:ext uri="{FF2B5EF4-FFF2-40B4-BE49-F238E27FC236}">
-              <a16:creationId xmlns:a16="http://schemas.microsoft.com/office/drawing/2014/main" id="{3A38F42E-31C8-C615-CCE7-CB504BBC41AA}"/>
-            </a:ext>
-          </a:extLst>
-        </p:cNvPr>
-        <p:cNvGrpSpPr/>
-        <p:nvPr/>
-      </p:nvGrpSpPr>
-      <p:grpSpPr>
-        <a:xfrm>
-          <a:off x="0" y="0"/>
-          <a:ext cx="0" cy="0"/>
-          <a:chOff x="0" y="0"/>
-          <a:chExt cx="0" cy="0"/>
-        </a:xfrm>
-      </p:grpSpPr>
-      <p:sp>
-        <p:nvSpPr>
-          <p:cNvPr id="2" name="Title 1">
-            <a:extLst>
-              <a:ext uri="{FF2B5EF4-FFF2-40B4-BE49-F238E27FC236}">
-                <a16:creationId xmlns:a16="http://schemas.microsoft.com/office/drawing/2014/main" id="{D56F1AEF-D709-F1CC-2114-A44457C657A6}"/>
-              </a:ext>
-            </a:extLst>
-          </p:cNvPr>
-          <p:cNvSpPr>
-            <a:spLocks noGrp="1"/>
-          </p:cNvSpPr>
-          <p:nvPr>
-            <p:ph type="title"/>
-          </p:nvPr>
-        </p:nvSpPr>
-        <p:spPr>
-          <a:xfrm>
-            <a:off x="838200" y="365125"/>
-            <a:ext cx="10515600" cy="6424781"/>
-          </a:xfrm>
-        </p:spPr>
-        <p:txBody>
-          <a:bodyPr/>
-          <a:lstStyle/>
-          <a:p>
-            <a:pPr algn="ctr"/>
-            <a:r>
-              <a:rPr lang="en-US" b="1" dirty="0"/>
-              <a:t>Yangi </a:t>
-            </a:r>
-            <a:r>
-              <a:rPr lang="en-US" b="1" dirty="0" err="1"/>
-              <a:t>oyimiz</a:t>
-            </a:r>
-            <a:r>
-              <a:rPr lang="en-US" b="1" dirty="0"/>
-              <a:t> </a:t>
-            </a:r>
-            <a:r>
-              <a:rPr lang="en-US" b="1" dirty="0" err="1"/>
-              <a:t>uchun</a:t>
-            </a:r>
-            <a:r>
-              <a:rPr lang="en-US" b="1" dirty="0"/>
-              <a:t> plan</a:t>
-            </a:r>
-          </a:p>
-        </p:txBody>
-      </p:sp>
-    </p:spTree>
-    <p:extLst>
-      <p:ext uri="{BB962C8B-B14F-4D97-AF65-F5344CB8AC3E}">
-        <p14:creationId xmlns:p14="http://schemas.microsoft.com/office/powerpoint/2010/main" val="1049721759"/>
-      </p:ext>
-    </p:extLst>
-  </p:cSld>
-  <p:clrMapOvr>
-    <a:masterClrMapping/>
-  </p:clrMapOvr>
-</p:sld>
-</file>
-
-<file path=ppt/slides/slide6.xml><?xml version="1.0" encoding="utf-8"?>
+<file path=ppt/slides/slide3.xml><?xml version="1.0" encoding="utf-8"?>
 <p:sld xmlns:a="http://schemas.openxmlformats.org/drawingml/2006/main" xmlns:r="http://schemas.openxmlformats.org/officeDocument/2006/relationships" xmlns:p="http://schemas.openxmlformats.org/presentationml/2006/main">
   <p:cSld>
     <p:spTree>
@@ -5461,13 +5686,1045 @@
     </p:spTree>
     <p:extLst>
       <p:ext uri="{BB962C8B-B14F-4D97-AF65-F5344CB8AC3E}">
-        <p14:creationId xmlns:p14="http://schemas.microsoft.com/office/powerpoint/2010/main" val="1836792227"/>
+        <p14:creationId xmlns:p14="http://schemas.microsoft.com/office/powerpoint/2010/main" val="1082171878"/>
       </p:ext>
     </p:extLst>
   </p:cSld>
   <p:clrMapOvr>
     <a:masterClrMapping/>
   </p:clrMapOvr>
+  <mc:AlternateContent xmlns:mc="http://schemas.openxmlformats.org/markup-compatibility/2006" xmlns:p14="http://schemas.microsoft.com/office/powerpoint/2010/main">
+    <mc:Choice Requires="p14">
+      <p:transition>
+        <p14:reveal/>
+      </p:transition>
+    </mc:Choice>
+    <mc:Fallback xmlns="">
+      <p:transition>
+        <p:fade/>
+      </p:transition>
+    </mc:Fallback>
+  </mc:AlternateContent>
+</p:sld>
+</file>
+
+<file path=ppt/slides/slide4.xml><?xml version="1.0" encoding="utf-8"?>
+<p:sld xmlns:a="http://schemas.openxmlformats.org/drawingml/2006/main" xmlns:r="http://schemas.openxmlformats.org/officeDocument/2006/relationships" xmlns:p="http://schemas.openxmlformats.org/presentationml/2006/main">
+  <p:cSld>
+    <p:spTree>
+      <p:nvGrpSpPr>
+        <p:cNvPr id="1" name=""/>
+        <p:cNvGrpSpPr/>
+        <p:nvPr/>
+      </p:nvGrpSpPr>
+      <p:grpSpPr>
+        <a:xfrm>
+          <a:off x="0" y="0"/>
+          <a:ext cx="0" cy="0"/>
+          <a:chOff x="0" y="0"/>
+          <a:chExt cx="0" cy="0"/>
+        </a:xfrm>
+      </p:grpSpPr>
+      <p:sp>
+        <p:nvSpPr>
+          <p:cNvPr id="2" name="Title 1">
+            <a:extLst>
+              <a:ext uri="{FF2B5EF4-FFF2-40B4-BE49-F238E27FC236}">
+                <a16:creationId xmlns:a16="http://schemas.microsoft.com/office/drawing/2014/main" id="{1D5E80A5-EDFD-E708-A84C-A65BA62CFFBB}"/>
+              </a:ext>
+            </a:extLst>
+          </p:cNvPr>
+          <p:cNvSpPr>
+            <a:spLocks noGrp="1"/>
+          </p:cNvSpPr>
+          <p:nvPr>
+            <p:ph type="title"/>
+          </p:nvPr>
+        </p:nvSpPr>
+        <p:spPr/>
+        <p:txBody>
+          <a:bodyPr/>
+          <a:lstStyle/>
+          <a:p>
+            <a:r>
+              <a:rPr lang="en-US" dirty="0" err="1"/>
+              <a:t>Darsimiz</a:t>
+            </a:r>
+            <a:r>
+              <a:rPr lang="en-US" dirty="0"/>
+              <a:t> </a:t>
+            </a:r>
+            <a:r>
+              <a:rPr lang="en-US" dirty="0" err="1"/>
+              <a:t>olib</a:t>
+            </a:r>
+            <a:r>
+              <a:rPr lang="en-US" dirty="0"/>
+              <a:t> </a:t>
+            </a:r>
+            <a:r>
+              <a:rPr lang="en-US" dirty="0" err="1"/>
+              <a:t>borish</a:t>
+            </a:r>
+            <a:r>
+              <a:rPr lang="en-US" dirty="0"/>
+              <a:t> </a:t>
+            </a:r>
+            <a:r>
+              <a:rPr lang="en-US" dirty="0" err="1"/>
+              <a:t>qoidalari</a:t>
+            </a:r>
+            <a:r>
+              <a:rPr lang="en-US" dirty="0"/>
+              <a:t> </a:t>
+            </a:r>
+          </a:p>
+        </p:txBody>
+      </p:sp>
+      <p:sp>
+        <p:nvSpPr>
+          <p:cNvPr id="3" name="Content Placeholder 2">
+            <a:extLst>
+              <a:ext uri="{FF2B5EF4-FFF2-40B4-BE49-F238E27FC236}">
+                <a16:creationId xmlns:a16="http://schemas.microsoft.com/office/drawing/2014/main" id="{650061CC-AC4B-78A1-2896-819E51847375}"/>
+              </a:ext>
+            </a:extLst>
+          </p:cNvPr>
+          <p:cNvSpPr>
+            <a:spLocks noGrp="1"/>
+          </p:cNvSpPr>
+          <p:nvPr>
+            <p:ph idx="1"/>
+          </p:nvPr>
+        </p:nvSpPr>
+        <p:spPr/>
+        <p:txBody>
+          <a:bodyPr/>
+          <a:lstStyle/>
+          <a:p>
+            <a:r>
+              <a:rPr lang="en-US" dirty="0" err="1"/>
+              <a:t>Tartib</a:t>
+            </a:r>
+            <a:endParaRPr lang="en-US" dirty="0"/>
+          </a:p>
+          <a:p>
+            <a:pPr lvl="1"/>
+            <a:r>
+              <a:rPr lang="en-US" dirty="0"/>
+              <a:t>2 ta </a:t>
+            </a:r>
+            <a:r>
+              <a:rPr lang="en-US" dirty="0" err="1"/>
+              <a:t>ketma</a:t>
+            </a:r>
+            <a:r>
+              <a:rPr lang="en-US" dirty="0"/>
+              <a:t> </a:t>
+            </a:r>
+            <a:r>
+              <a:rPr lang="en-US" dirty="0" err="1"/>
+              <a:t>ket</a:t>
+            </a:r>
+            <a:r>
+              <a:rPr lang="en-US" dirty="0"/>
+              <a:t> </a:t>
+            </a:r>
+            <a:r>
+              <a:rPr lang="en-US" dirty="0" err="1"/>
+              <a:t>vazifa</a:t>
+            </a:r>
+            <a:r>
+              <a:rPr lang="en-US" dirty="0"/>
+              <a:t> </a:t>
+            </a:r>
+            <a:r>
+              <a:rPr lang="en-US" dirty="0" err="1"/>
+              <a:t>bajarilmasa</a:t>
+            </a:r>
+            <a:r>
+              <a:rPr lang="en-US" dirty="0"/>
+              <a:t> </a:t>
+            </a:r>
+            <a:r>
+              <a:rPr lang="en-US" dirty="0" err="1"/>
+              <a:t>gruppadan</a:t>
+            </a:r>
+            <a:r>
+              <a:rPr lang="en-US" dirty="0"/>
+              <a:t> </a:t>
+            </a:r>
+            <a:r>
+              <a:rPr lang="en-US" dirty="0" err="1"/>
+              <a:t>chetlashtiriladi</a:t>
+            </a:r>
+            <a:endParaRPr lang="en-US" dirty="0"/>
+          </a:p>
+          <a:p>
+            <a:pPr lvl="1"/>
+            <a:r>
+              <a:rPr lang="en-US" dirty="0" err="1"/>
+              <a:t>Vazifalarni</a:t>
+            </a:r>
+            <a:r>
+              <a:rPr lang="en-US" dirty="0"/>
+              <a:t> </a:t>
+            </a:r>
+            <a:r>
+              <a:rPr lang="en-US" dirty="0" err="1"/>
+              <a:t>darsimiz</a:t>
+            </a:r>
+            <a:r>
+              <a:rPr lang="en-US" dirty="0"/>
+              <a:t> </a:t>
+            </a:r>
+            <a:r>
+              <a:rPr lang="en-US" dirty="0" err="1"/>
+              <a:t>kunlari</a:t>
+            </a:r>
+            <a:r>
+              <a:rPr lang="en-US" dirty="0"/>
+              <a:t> </a:t>
+            </a:r>
+            <a:r>
+              <a:rPr lang="en-US" dirty="0" err="1"/>
+              <a:t>soat</a:t>
+            </a:r>
+            <a:r>
+              <a:rPr lang="en-US" dirty="0"/>
+              <a:t> 17:00 </a:t>
+            </a:r>
+            <a:r>
+              <a:rPr lang="en-US" dirty="0" err="1"/>
+              <a:t>gacha</a:t>
+            </a:r>
+            <a:r>
+              <a:rPr lang="en-US" dirty="0"/>
+              <a:t> </a:t>
+            </a:r>
+            <a:r>
+              <a:rPr lang="en-US" dirty="0" err="1"/>
+              <a:t>topshiringlar</a:t>
+            </a:r>
+            <a:endParaRPr lang="en-US" dirty="0"/>
+          </a:p>
+          <a:p>
+            <a:pPr lvl="1"/>
+            <a:r>
+              <a:rPr lang="en-US" dirty="0"/>
+              <a:t> </a:t>
+            </a:r>
+            <a:r>
+              <a:rPr lang="en-US" dirty="0" err="1"/>
+              <a:t>Baxolash</a:t>
+            </a:r>
+            <a:endParaRPr lang="en-US" dirty="0"/>
+          </a:p>
+          <a:p>
+            <a:pPr lvl="2"/>
+            <a:r>
+              <a:rPr lang="en-US" dirty="0"/>
+              <a:t>Jami 11 ta </a:t>
+            </a:r>
+            <a:r>
+              <a:rPr lang="en-US" dirty="0" err="1"/>
+              <a:t>vazifa</a:t>
+            </a:r>
+            <a:r>
+              <a:rPr lang="en-US" dirty="0"/>
+              <a:t> </a:t>
+            </a:r>
+            <a:r>
+              <a:rPr lang="en-US" dirty="0" err="1"/>
+              <a:t>topshirish</a:t>
+            </a:r>
+            <a:r>
+              <a:rPr lang="en-US" dirty="0"/>
+              <a:t>(11*5=55)</a:t>
+            </a:r>
+          </a:p>
+          <a:p>
+            <a:pPr lvl="2"/>
+            <a:r>
+              <a:rPr lang="en-US" dirty="0" err="1"/>
+              <a:t>Oraliq</a:t>
+            </a:r>
+            <a:r>
+              <a:rPr lang="en-US" dirty="0"/>
+              <a:t> 50</a:t>
+            </a:r>
+          </a:p>
+          <a:p>
+            <a:pPr lvl="2"/>
+            <a:r>
+              <a:rPr lang="en-US" dirty="0" err="1"/>
+              <a:t>Yakuniy</a:t>
+            </a:r>
+            <a:r>
+              <a:rPr lang="en-US" dirty="0"/>
+              <a:t> 50</a:t>
+            </a:r>
+          </a:p>
+          <a:p>
+            <a:pPr lvl="2"/>
+            <a:r>
+              <a:rPr lang="en-US" dirty="0"/>
+              <a:t>2 ta </a:t>
+            </a:r>
+            <a:r>
+              <a:rPr lang="en-US" dirty="0" err="1"/>
+              <a:t>xaftalik</a:t>
+            </a:r>
+            <a:r>
+              <a:rPr lang="en-US" dirty="0"/>
+              <a:t> </a:t>
+            </a:r>
+            <a:r>
+              <a:rPr lang="en-US" dirty="0" err="1"/>
+              <a:t>tekshuruv</a:t>
+            </a:r>
+            <a:endParaRPr lang="en-US" dirty="0"/>
+          </a:p>
+          <a:p>
+            <a:pPr lvl="2"/>
+            <a:r>
+              <a:rPr lang="en-US" dirty="0" err="1"/>
+              <a:t>Imtixondan</a:t>
+            </a:r>
+            <a:r>
+              <a:rPr lang="en-US" dirty="0"/>
+              <a:t> </a:t>
+            </a:r>
+            <a:r>
+              <a:rPr lang="en-US" dirty="0" err="1"/>
+              <a:t>o’tish</a:t>
+            </a:r>
+            <a:r>
+              <a:rPr lang="en-US" dirty="0"/>
+              <a:t> </a:t>
+            </a:r>
+            <a:r>
+              <a:rPr lang="en-US" dirty="0" err="1"/>
+              <a:t>uchun</a:t>
+            </a:r>
+            <a:r>
+              <a:rPr lang="en-US" dirty="0"/>
+              <a:t> 70%</a:t>
+            </a:r>
+          </a:p>
+        </p:txBody>
+      </p:sp>
+    </p:spTree>
+    <p:extLst>
+      <p:ext uri="{BB962C8B-B14F-4D97-AF65-F5344CB8AC3E}">
+        <p14:creationId xmlns:p14="http://schemas.microsoft.com/office/powerpoint/2010/main" val="2840257015"/>
+      </p:ext>
+    </p:extLst>
+  </p:cSld>
+  <p:clrMapOvr>
+    <a:masterClrMapping/>
+  </p:clrMapOvr>
+  <p:timing>
+    <p:tnLst>
+      <p:par>
+        <p:cTn id="1" dur="indefinite" restart="never" nodeType="tmRoot">
+          <p:childTnLst>
+            <p:seq concurrent="1" nextAc="seek">
+              <p:cTn id="2" dur="indefinite" nodeType="mainSeq">
+                <p:childTnLst>
+                  <p:par>
+                    <p:cTn id="3" fill="hold">
+                      <p:stCondLst>
+                        <p:cond delay="indefinite"/>
+                      </p:stCondLst>
+                      <p:childTnLst>
+                        <p:par>
+                          <p:cTn id="4" fill="hold">
+                            <p:stCondLst>
+                              <p:cond delay="0"/>
+                            </p:stCondLst>
+                            <p:childTnLst>
+                              <p:par>
+                                <p:cTn id="5" presetID="1" presetClass="entr" presetSubtype="0" fill="hold" nodeType="clickEffect">
+                                  <p:stCondLst>
+                                    <p:cond delay="0"/>
+                                  </p:stCondLst>
+                                  <p:childTnLst>
+                                    <p:set>
+                                      <p:cBhvr>
+                                        <p:cTn id="6" dur="1" fill="hold">
+                                          <p:stCondLst>
+                                            <p:cond delay="0"/>
+                                          </p:stCondLst>
+                                        </p:cTn>
+                                        <p:tgtEl>
+                                          <p:spTgt spid="3">
+                                            <p:txEl>
+                                              <p:pRg st="0" end="0"/>
+                                            </p:txEl>
+                                          </p:spTgt>
+                                        </p:tgtEl>
+                                        <p:attrNameLst>
+                                          <p:attrName>style.visibility</p:attrName>
+                                        </p:attrNameLst>
+                                      </p:cBhvr>
+                                      <p:to>
+                                        <p:strVal val="visible"/>
+                                      </p:to>
+                                    </p:set>
+                                  </p:childTnLst>
+                                </p:cTn>
+                              </p:par>
+                              <p:par>
+                                <p:cTn id="7" presetID="1" presetClass="entr" presetSubtype="0" fill="hold" nodeType="withEffect">
+                                  <p:stCondLst>
+                                    <p:cond delay="0"/>
+                                  </p:stCondLst>
+                                  <p:childTnLst>
+                                    <p:set>
+                                      <p:cBhvr>
+                                        <p:cTn id="8" dur="1" fill="hold">
+                                          <p:stCondLst>
+                                            <p:cond delay="0"/>
+                                          </p:stCondLst>
+                                        </p:cTn>
+                                        <p:tgtEl>
+                                          <p:spTgt spid="3">
+                                            <p:txEl>
+                                              <p:pRg st="1" end="1"/>
+                                            </p:txEl>
+                                          </p:spTgt>
+                                        </p:tgtEl>
+                                        <p:attrNameLst>
+                                          <p:attrName>style.visibility</p:attrName>
+                                        </p:attrNameLst>
+                                      </p:cBhvr>
+                                      <p:to>
+                                        <p:strVal val="visible"/>
+                                      </p:to>
+                                    </p:set>
+                                  </p:childTnLst>
+                                </p:cTn>
+                              </p:par>
+                              <p:par>
+                                <p:cTn id="9" presetID="1" presetClass="entr" presetSubtype="0" fill="hold" nodeType="withEffect">
+                                  <p:stCondLst>
+                                    <p:cond delay="0"/>
+                                  </p:stCondLst>
+                                  <p:childTnLst>
+                                    <p:set>
+                                      <p:cBhvr>
+                                        <p:cTn id="10" dur="1" fill="hold">
+                                          <p:stCondLst>
+                                            <p:cond delay="0"/>
+                                          </p:stCondLst>
+                                        </p:cTn>
+                                        <p:tgtEl>
+                                          <p:spTgt spid="3">
+                                            <p:txEl>
+                                              <p:pRg st="2" end="2"/>
+                                            </p:txEl>
+                                          </p:spTgt>
+                                        </p:tgtEl>
+                                        <p:attrNameLst>
+                                          <p:attrName>style.visibility</p:attrName>
+                                        </p:attrNameLst>
+                                      </p:cBhvr>
+                                      <p:to>
+                                        <p:strVal val="visible"/>
+                                      </p:to>
+                                    </p:set>
+                                  </p:childTnLst>
+                                </p:cTn>
+                              </p:par>
+                              <p:par>
+                                <p:cTn id="11" presetID="1" presetClass="entr" presetSubtype="0" fill="hold" nodeType="withEffect">
+                                  <p:stCondLst>
+                                    <p:cond delay="0"/>
+                                  </p:stCondLst>
+                                  <p:childTnLst>
+                                    <p:set>
+                                      <p:cBhvr>
+                                        <p:cTn id="12" dur="1" fill="hold">
+                                          <p:stCondLst>
+                                            <p:cond delay="0"/>
+                                          </p:stCondLst>
+                                        </p:cTn>
+                                        <p:tgtEl>
+                                          <p:spTgt spid="3">
+                                            <p:txEl>
+                                              <p:pRg st="3" end="3"/>
+                                            </p:txEl>
+                                          </p:spTgt>
+                                        </p:tgtEl>
+                                        <p:attrNameLst>
+                                          <p:attrName>style.visibility</p:attrName>
+                                        </p:attrNameLst>
+                                      </p:cBhvr>
+                                      <p:to>
+                                        <p:strVal val="visible"/>
+                                      </p:to>
+                                    </p:set>
+                                  </p:childTnLst>
+                                </p:cTn>
+                              </p:par>
+                            </p:childTnLst>
+                          </p:cTn>
+                        </p:par>
+                      </p:childTnLst>
+                    </p:cTn>
+                  </p:par>
+                  <p:par>
+                    <p:cTn id="13" fill="hold">
+                      <p:stCondLst>
+                        <p:cond delay="indefinite"/>
+                      </p:stCondLst>
+                      <p:childTnLst>
+                        <p:par>
+                          <p:cTn id="14" fill="hold">
+                            <p:stCondLst>
+                              <p:cond delay="0"/>
+                            </p:stCondLst>
+                            <p:childTnLst>
+                              <p:par>
+                                <p:cTn id="15" presetID="1" presetClass="entr" presetSubtype="0" fill="hold" nodeType="clickEffect">
+                                  <p:stCondLst>
+                                    <p:cond delay="0"/>
+                                  </p:stCondLst>
+                                  <p:childTnLst>
+                                    <p:set>
+                                      <p:cBhvr>
+                                        <p:cTn id="16" dur="1" fill="hold">
+                                          <p:stCondLst>
+                                            <p:cond delay="0"/>
+                                          </p:stCondLst>
+                                        </p:cTn>
+                                        <p:tgtEl>
+                                          <p:spTgt spid="3">
+                                            <p:txEl>
+                                              <p:pRg st="4" end="4"/>
+                                            </p:txEl>
+                                          </p:spTgt>
+                                        </p:tgtEl>
+                                        <p:attrNameLst>
+                                          <p:attrName>style.visibility</p:attrName>
+                                        </p:attrNameLst>
+                                      </p:cBhvr>
+                                      <p:to>
+                                        <p:strVal val="visible"/>
+                                      </p:to>
+                                    </p:set>
+                                  </p:childTnLst>
+                                </p:cTn>
+                              </p:par>
+                            </p:childTnLst>
+                          </p:cTn>
+                        </p:par>
+                      </p:childTnLst>
+                    </p:cTn>
+                  </p:par>
+                  <p:par>
+                    <p:cTn id="17" fill="hold">
+                      <p:stCondLst>
+                        <p:cond delay="indefinite"/>
+                      </p:stCondLst>
+                      <p:childTnLst>
+                        <p:par>
+                          <p:cTn id="18" fill="hold">
+                            <p:stCondLst>
+                              <p:cond delay="0"/>
+                            </p:stCondLst>
+                            <p:childTnLst>
+                              <p:par>
+                                <p:cTn id="19" presetID="1" presetClass="entr" presetSubtype="0" fill="hold" nodeType="clickEffect">
+                                  <p:stCondLst>
+                                    <p:cond delay="0"/>
+                                  </p:stCondLst>
+                                  <p:childTnLst>
+                                    <p:set>
+                                      <p:cBhvr>
+                                        <p:cTn id="20" dur="1" fill="hold">
+                                          <p:stCondLst>
+                                            <p:cond delay="0"/>
+                                          </p:stCondLst>
+                                        </p:cTn>
+                                        <p:tgtEl>
+                                          <p:spTgt spid="3">
+                                            <p:txEl>
+                                              <p:pRg st="5" end="5"/>
+                                            </p:txEl>
+                                          </p:spTgt>
+                                        </p:tgtEl>
+                                        <p:attrNameLst>
+                                          <p:attrName>style.visibility</p:attrName>
+                                        </p:attrNameLst>
+                                      </p:cBhvr>
+                                      <p:to>
+                                        <p:strVal val="visible"/>
+                                      </p:to>
+                                    </p:set>
+                                  </p:childTnLst>
+                                </p:cTn>
+                              </p:par>
+                              <p:par>
+                                <p:cTn id="21" presetID="1" presetClass="entr" presetSubtype="0" fill="hold" nodeType="withEffect">
+                                  <p:stCondLst>
+                                    <p:cond delay="0"/>
+                                  </p:stCondLst>
+                                  <p:childTnLst>
+                                    <p:set>
+                                      <p:cBhvr>
+                                        <p:cTn id="22" dur="1" fill="hold">
+                                          <p:stCondLst>
+                                            <p:cond delay="0"/>
+                                          </p:stCondLst>
+                                        </p:cTn>
+                                        <p:tgtEl>
+                                          <p:spTgt spid="3">
+                                            <p:txEl>
+                                              <p:pRg st="6" end="6"/>
+                                            </p:txEl>
+                                          </p:spTgt>
+                                        </p:tgtEl>
+                                        <p:attrNameLst>
+                                          <p:attrName>style.visibility</p:attrName>
+                                        </p:attrNameLst>
+                                      </p:cBhvr>
+                                      <p:to>
+                                        <p:strVal val="visible"/>
+                                      </p:to>
+                                    </p:set>
+                                  </p:childTnLst>
+                                </p:cTn>
+                              </p:par>
+                              <p:par>
+                                <p:cTn id="23" presetID="1" presetClass="entr" presetSubtype="0" fill="hold" nodeType="withEffect">
+                                  <p:stCondLst>
+                                    <p:cond delay="0"/>
+                                  </p:stCondLst>
+                                  <p:childTnLst>
+                                    <p:set>
+                                      <p:cBhvr>
+                                        <p:cTn id="24" dur="1" fill="hold">
+                                          <p:stCondLst>
+                                            <p:cond delay="0"/>
+                                          </p:stCondLst>
+                                        </p:cTn>
+                                        <p:tgtEl>
+                                          <p:spTgt spid="3">
+                                            <p:txEl>
+                                              <p:pRg st="7" end="7"/>
+                                            </p:txEl>
+                                          </p:spTgt>
+                                        </p:tgtEl>
+                                        <p:attrNameLst>
+                                          <p:attrName>style.visibility</p:attrName>
+                                        </p:attrNameLst>
+                                      </p:cBhvr>
+                                      <p:to>
+                                        <p:strVal val="visible"/>
+                                      </p:to>
+                                    </p:set>
+                                  </p:childTnLst>
+                                </p:cTn>
+                              </p:par>
+                              <p:par>
+                                <p:cTn id="25" presetID="1" presetClass="entr" presetSubtype="0" fill="hold" nodeType="withEffect">
+                                  <p:stCondLst>
+                                    <p:cond delay="0"/>
+                                  </p:stCondLst>
+                                  <p:childTnLst>
+                                    <p:set>
+                                      <p:cBhvr>
+                                        <p:cTn id="26" dur="1" fill="hold">
+                                          <p:stCondLst>
+                                            <p:cond delay="0"/>
+                                          </p:stCondLst>
+                                        </p:cTn>
+                                        <p:tgtEl>
+                                          <p:spTgt spid="3">
+                                            <p:txEl>
+                                              <p:pRg st="8" end="8"/>
+                                            </p:txEl>
+                                          </p:spTgt>
+                                        </p:tgtEl>
+                                        <p:attrNameLst>
+                                          <p:attrName>style.visibility</p:attrName>
+                                        </p:attrNameLst>
+                                      </p:cBhvr>
+                                      <p:to>
+                                        <p:strVal val="visible"/>
+                                      </p:to>
+                                    </p:set>
+                                  </p:childTnLst>
+                                </p:cTn>
+                              </p:par>
+                            </p:childTnLst>
+                          </p:cTn>
+                        </p:par>
+                      </p:childTnLst>
+                    </p:cTn>
+                  </p:par>
+                </p:childTnLst>
+              </p:cTn>
+              <p:prevCondLst>
+                <p:cond evt="onPrev" delay="0">
+                  <p:tgtEl>
+                    <p:sldTgt/>
+                  </p:tgtEl>
+                </p:cond>
+              </p:prevCondLst>
+              <p:nextCondLst>
+                <p:cond evt="onNext" delay="0">
+                  <p:tgtEl>
+                    <p:sldTgt/>
+                  </p:tgtEl>
+                </p:cond>
+              </p:nextCondLst>
+            </p:seq>
+          </p:childTnLst>
+        </p:cTn>
+      </p:par>
+    </p:tnLst>
+  </p:timing>
+</p:sld>
+</file>
+
+<file path=ppt/slides/slide5.xml><?xml version="1.0" encoding="utf-8"?>
+<p:sld xmlns:a="http://schemas.openxmlformats.org/drawingml/2006/main" xmlns:r="http://schemas.openxmlformats.org/officeDocument/2006/relationships" xmlns:p="http://schemas.openxmlformats.org/presentationml/2006/main">
+  <p:cSld>
+    <p:spTree>
+      <p:nvGrpSpPr>
+        <p:cNvPr id="1" name="">
+          <a:extLst>
+            <a:ext uri="{FF2B5EF4-FFF2-40B4-BE49-F238E27FC236}">
+              <a16:creationId xmlns:a16="http://schemas.microsoft.com/office/drawing/2014/main" id="{D4641F0D-6D14-AE61-22DA-B6200E68EBB0}"/>
+            </a:ext>
+          </a:extLst>
+        </p:cNvPr>
+        <p:cNvGrpSpPr/>
+        <p:nvPr/>
+      </p:nvGrpSpPr>
+      <p:grpSpPr>
+        <a:xfrm>
+          <a:off x="0" y="0"/>
+          <a:ext cx="0" cy="0"/>
+          <a:chOff x="0" y="0"/>
+          <a:chExt cx="0" cy="0"/>
+        </a:xfrm>
+      </p:grpSpPr>
+      <p:sp>
+        <p:nvSpPr>
+          <p:cNvPr id="2" name="Title 1">
+            <a:extLst>
+              <a:ext uri="{FF2B5EF4-FFF2-40B4-BE49-F238E27FC236}">
+                <a16:creationId xmlns:a16="http://schemas.microsoft.com/office/drawing/2014/main" id="{F4E539E0-B479-AE37-D0DA-97427AC35359}"/>
+              </a:ext>
+            </a:extLst>
+          </p:cNvPr>
+          <p:cNvSpPr>
+            <a:spLocks noGrp="1"/>
+          </p:cNvSpPr>
+          <p:nvPr>
+            <p:ph type="title"/>
+          </p:nvPr>
+        </p:nvSpPr>
+        <p:spPr>
+          <a:xfrm>
+            <a:off x="831850" y="1709739"/>
+            <a:ext cx="10515600" cy="1831130"/>
+          </a:xfrm>
+        </p:spPr>
+        <p:txBody>
+          <a:bodyPr/>
+          <a:lstStyle/>
+          <a:p>
+            <a:r>
+              <a:rPr lang="en-US" dirty="0" err="1"/>
+              <a:t>Vazifa</a:t>
+            </a:r>
+            <a:r>
+              <a:rPr lang="en-US" dirty="0"/>
+              <a:t> </a:t>
+            </a:r>
+            <a:r>
+              <a:rPr lang="en-US" dirty="0" err="1"/>
+              <a:t>topshirish</a:t>
+            </a:r>
+            <a:endParaRPr lang="en-US" dirty="0"/>
+          </a:p>
+        </p:txBody>
+      </p:sp>
+      <p:sp>
+        <p:nvSpPr>
+          <p:cNvPr id="3" name="Text Placeholder 2">
+            <a:extLst>
+              <a:ext uri="{FF2B5EF4-FFF2-40B4-BE49-F238E27FC236}">
+                <a16:creationId xmlns:a16="http://schemas.microsoft.com/office/drawing/2014/main" id="{1E6CE751-A0C5-75E0-5E85-DC5845F508A9}"/>
+              </a:ext>
+            </a:extLst>
+          </p:cNvPr>
+          <p:cNvSpPr>
+            <a:spLocks noGrp="1"/>
+          </p:cNvSpPr>
+          <p:nvPr>
+            <p:ph type="body" idx="1"/>
+          </p:nvPr>
+        </p:nvSpPr>
+        <p:spPr/>
+        <p:txBody>
+          <a:bodyPr/>
+          <a:lstStyle/>
+          <a:p>
+            <a:r>
+              <a:rPr lang="en-US" b="1" dirty="0" err="1"/>
+              <a:t>Alohida</a:t>
+            </a:r>
+            <a:r>
+              <a:rPr lang="en-US" b="1" dirty="0"/>
+              <a:t> repository + </a:t>
+            </a:r>
+            <a:r>
+              <a:rPr lang="en-US" b="1" dirty="0" err="1"/>
+              <a:t>Xar</a:t>
+            </a:r>
+            <a:r>
+              <a:rPr lang="en-US" b="1" dirty="0"/>
+              <a:t> </a:t>
+            </a:r>
+            <a:r>
+              <a:rPr lang="en-US" b="1" dirty="0" err="1"/>
+              <a:t>bir</a:t>
+            </a:r>
+            <a:r>
+              <a:rPr lang="en-US" b="1" dirty="0"/>
+              <a:t> </a:t>
+            </a:r>
+            <a:r>
+              <a:rPr lang="en-US" b="1" dirty="0" err="1"/>
+              <a:t>vazifa</a:t>
+            </a:r>
+            <a:r>
+              <a:rPr lang="en-US" b="1" dirty="0"/>
+              <a:t> </a:t>
+            </a:r>
+            <a:r>
+              <a:rPr lang="en-US" b="1" dirty="0" err="1"/>
+              <a:t>uchun</a:t>
+            </a:r>
+            <a:r>
+              <a:rPr lang="en-US" b="1" dirty="0"/>
+              <a:t> </a:t>
+            </a:r>
+            <a:r>
+              <a:rPr lang="en-US" b="1" dirty="0" err="1"/>
+              <a:t>feedback+Xar</a:t>
+            </a:r>
+            <a:r>
+              <a:rPr lang="en-US" b="1" dirty="0"/>
+              <a:t> </a:t>
+            </a:r>
+            <a:r>
+              <a:rPr lang="en-US" b="1" dirty="0" err="1"/>
+              <a:t>darsdan</a:t>
+            </a:r>
+            <a:r>
+              <a:rPr lang="en-US" b="1" dirty="0"/>
+              <a:t> </a:t>
+            </a:r>
+            <a:r>
+              <a:rPr lang="en-US" b="1" dirty="0" err="1"/>
+              <a:t>oldin</a:t>
+            </a:r>
+            <a:r>
+              <a:rPr lang="en-US" b="1" dirty="0"/>
+              <a:t> </a:t>
+            </a:r>
+            <a:r>
+              <a:rPr lang="en-US" b="1" dirty="0" err="1"/>
+              <a:t>o’tgan</a:t>
+            </a:r>
+            <a:r>
+              <a:rPr lang="en-US" b="1" dirty="0"/>
+              <a:t> </a:t>
+            </a:r>
+            <a:r>
+              <a:rPr lang="en-US" b="1" dirty="0" err="1"/>
+              <a:t>darslar</a:t>
+            </a:r>
+            <a:r>
+              <a:rPr lang="en-US" b="1" dirty="0"/>
+              <a:t> </a:t>
+            </a:r>
+            <a:r>
+              <a:rPr lang="en-US" b="1" dirty="0" err="1"/>
+              <a:t>baxosini</a:t>
+            </a:r>
+            <a:r>
+              <a:rPr lang="en-US" b="1" dirty="0"/>
+              <a:t> </a:t>
+            </a:r>
+            <a:r>
+              <a:rPr lang="en-US" b="1" dirty="0" err="1"/>
+              <a:t>gruppada</a:t>
+            </a:r>
+            <a:r>
+              <a:rPr lang="en-US" b="1" dirty="0"/>
+              <a:t> </a:t>
+            </a:r>
+            <a:r>
+              <a:rPr lang="en-US" b="1" dirty="0" err="1"/>
+              <a:t>elon</a:t>
+            </a:r>
+            <a:r>
+              <a:rPr lang="en-US" b="1" dirty="0"/>
+              <a:t> </a:t>
+            </a:r>
+            <a:r>
+              <a:rPr lang="en-US" b="1" dirty="0" err="1"/>
+              <a:t>qilinishi</a:t>
+            </a:r>
+            <a:r>
+              <a:rPr lang="en-US" b="1" dirty="0"/>
+              <a:t> </a:t>
+            </a:r>
+          </a:p>
+          <a:p>
+            <a:endParaRPr lang="en-US" b="1" dirty="0"/>
+          </a:p>
+        </p:txBody>
+      </p:sp>
+    </p:spTree>
+    <p:extLst>
+      <p:ext uri="{BB962C8B-B14F-4D97-AF65-F5344CB8AC3E}">
+        <p14:creationId xmlns:p14="http://schemas.microsoft.com/office/powerpoint/2010/main" val="2954802397"/>
+      </p:ext>
+    </p:extLst>
+  </p:cSld>
+  <p:clrMapOvr>
+    <a:masterClrMapping/>
+  </p:clrMapOvr>
+  <mc:AlternateContent xmlns:mc="http://schemas.openxmlformats.org/markup-compatibility/2006" xmlns:p14="http://schemas.microsoft.com/office/powerpoint/2010/main">
+    <mc:Choice Requires="p14">
+      <p:transition spd="slow">
+        <p14:reveal/>
+      </p:transition>
+    </mc:Choice>
+    <mc:Fallback xmlns="">
+      <p:transition spd="slow">
+        <p:fade/>
+      </p:transition>
+    </mc:Fallback>
+  </mc:AlternateContent>
+</p:sld>
+</file>
+
+<file path=ppt/slides/slide6.xml><?xml version="1.0" encoding="utf-8"?>
+<p:sld xmlns:a="http://schemas.openxmlformats.org/drawingml/2006/main" xmlns:r="http://schemas.openxmlformats.org/officeDocument/2006/relationships" xmlns:p="http://schemas.openxmlformats.org/presentationml/2006/main">
+  <p:cSld>
+    <p:spTree>
+      <p:nvGrpSpPr>
+        <p:cNvPr id="1" name="">
+          <a:extLst>
+            <a:ext uri="{FF2B5EF4-FFF2-40B4-BE49-F238E27FC236}">
+              <a16:creationId xmlns:a16="http://schemas.microsoft.com/office/drawing/2014/main" id="{E16041B7-DB39-35E5-5170-BEF506541E5F}"/>
+            </a:ext>
+          </a:extLst>
+        </p:cNvPr>
+        <p:cNvGrpSpPr/>
+        <p:nvPr/>
+      </p:nvGrpSpPr>
+      <p:grpSpPr>
+        <a:xfrm>
+          <a:off x="0" y="0"/>
+          <a:ext cx="0" cy="0"/>
+          <a:chOff x="0" y="0"/>
+          <a:chExt cx="0" cy="0"/>
+        </a:xfrm>
+      </p:grpSpPr>
+      <p:sp>
+        <p:nvSpPr>
+          <p:cNvPr id="2" name="Title 1">
+            <a:extLst>
+              <a:ext uri="{FF2B5EF4-FFF2-40B4-BE49-F238E27FC236}">
+                <a16:creationId xmlns:a16="http://schemas.microsoft.com/office/drawing/2014/main" id="{B9BAF5F2-33A2-C207-A1DC-654B28508940}"/>
+              </a:ext>
+            </a:extLst>
+          </p:cNvPr>
+          <p:cNvSpPr>
+            <a:spLocks noGrp="1"/>
+          </p:cNvSpPr>
+          <p:nvPr>
+            <p:ph type="title"/>
+          </p:nvPr>
+        </p:nvSpPr>
+        <p:spPr>
+          <a:xfrm>
+            <a:off x="831850" y="1709739"/>
+            <a:ext cx="10515600" cy="1831130"/>
+          </a:xfrm>
+        </p:spPr>
+        <p:txBody>
+          <a:bodyPr/>
+          <a:lstStyle/>
+          <a:p>
+            <a:r>
+              <a:rPr lang="en-US" dirty="0"/>
+              <a:t>Model Building 1-oy</a:t>
+            </a:r>
+          </a:p>
+        </p:txBody>
+      </p:sp>
+      <p:sp>
+        <p:nvSpPr>
+          <p:cNvPr id="3" name="Text Placeholder 2">
+            <a:extLst>
+              <a:ext uri="{FF2B5EF4-FFF2-40B4-BE49-F238E27FC236}">
+                <a16:creationId xmlns:a16="http://schemas.microsoft.com/office/drawing/2014/main" id="{B1D9246F-7871-3636-FD12-4534CD9CDFBC}"/>
+              </a:ext>
+            </a:extLst>
+          </p:cNvPr>
+          <p:cNvSpPr>
+            <a:spLocks noGrp="1"/>
+          </p:cNvSpPr>
+          <p:nvPr>
+            <p:ph type="body" idx="1"/>
+          </p:nvPr>
+        </p:nvSpPr>
+        <p:spPr/>
+        <p:txBody>
+          <a:bodyPr/>
+          <a:lstStyle/>
+          <a:p>
+            <a:r>
+              <a:rPr lang="en-US" b="1" dirty="0"/>
+              <a:t>Plan</a:t>
+            </a:r>
+          </a:p>
+        </p:txBody>
+      </p:sp>
+    </p:spTree>
+    <p:extLst>
+      <p:ext uri="{BB962C8B-B14F-4D97-AF65-F5344CB8AC3E}">
+        <p14:creationId xmlns:p14="http://schemas.microsoft.com/office/powerpoint/2010/main" val="1645933814"/>
+      </p:ext>
+    </p:extLst>
+  </p:cSld>
+  <p:clrMapOvr>
+    <a:masterClrMapping/>
+  </p:clrMapOvr>
+  <mc:AlternateContent xmlns:mc="http://schemas.openxmlformats.org/markup-compatibility/2006" xmlns:p14="http://schemas.microsoft.com/office/powerpoint/2010/main">
+    <mc:Choice Requires="p14">
+      <p:transition spd="slow">
+        <p14:reveal/>
+      </p:transition>
+    </mc:Choice>
+    <mc:Fallback xmlns="">
+      <p:transition spd="slow">
+        <p:fade/>
+      </p:transition>
+    </mc:Fallback>
+  </mc:AlternateContent>
 </p:sld>
 </file>
 
@@ -5493,7 +6750,7 @@
           <p:cNvPr id="2" name="Title 1">
             <a:extLst>
               <a:ext uri="{FF2B5EF4-FFF2-40B4-BE49-F238E27FC236}">
-                <a16:creationId xmlns:a16="http://schemas.microsoft.com/office/drawing/2014/main" id="{DD196B8D-9135-5BA7-A7F2-3E626E9F9242}"/>
+                <a16:creationId xmlns:a16="http://schemas.microsoft.com/office/drawing/2014/main" id="{8490CAD7-6F21-521F-2D8D-817B8211506B}"/>
               </a:ext>
             </a:extLst>
           </p:cNvPr>
@@ -5510,27 +6767,200 @@
           <a:lstStyle/>
           <a:p>
             <a:r>
-              <a:rPr lang="en-US" dirty="0" err="1"/>
-              <a:t>Qoidalar</a:t>
+              <a:rPr lang="en-US" dirty="0"/>
+              <a:t>Model Building 1-oy</a:t>
+            </a:r>
+          </a:p>
+        </p:txBody>
+      </p:sp>
+      <p:sp>
+        <p:nvSpPr>
+          <p:cNvPr id="3" name="Text Placeholder 2">
+            <a:extLst>
+              <a:ext uri="{FF2B5EF4-FFF2-40B4-BE49-F238E27FC236}">
+                <a16:creationId xmlns:a16="http://schemas.microsoft.com/office/drawing/2014/main" id="{9348A3FB-CBD4-4E1F-5993-22313167B5EE}"/>
+              </a:ext>
+            </a:extLst>
+          </p:cNvPr>
+          <p:cNvSpPr>
+            <a:spLocks noGrp="1"/>
+          </p:cNvSpPr>
+          <p:nvPr>
+            <p:ph type="body" idx="1"/>
+          </p:nvPr>
+        </p:nvSpPr>
+        <p:spPr/>
+        <p:txBody>
+          <a:bodyPr/>
+          <a:lstStyle/>
+          <a:p>
+            <a:r>
+              <a:rPr lang="en-US" dirty="0"/>
+              <a:t>ML	</a:t>
+            </a:r>
+          </a:p>
+        </p:txBody>
+      </p:sp>
+      <p:sp>
+        <p:nvSpPr>
+          <p:cNvPr id="4" name="Content Placeholder 3">
+            <a:extLst>
+              <a:ext uri="{FF2B5EF4-FFF2-40B4-BE49-F238E27FC236}">
+                <a16:creationId xmlns:a16="http://schemas.microsoft.com/office/drawing/2014/main" id="{7F09E743-5DC2-BDDA-10D4-0A14C471728E}"/>
+              </a:ext>
+            </a:extLst>
+          </p:cNvPr>
+          <p:cNvSpPr>
+            <a:spLocks noGrp="1"/>
+          </p:cNvSpPr>
+          <p:nvPr>
+            <p:ph sz="half" idx="2"/>
+          </p:nvPr>
+        </p:nvSpPr>
+        <p:spPr/>
+        <p:txBody>
+          <a:bodyPr/>
+          <a:lstStyle/>
+          <a:p>
+            <a:r>
+              <a:rPr lang="en-US" dirty="0"/>
+              <a:t>Model </a:t>
+            </a:r>
+            <a:r>
+              <a:rPr lang="en-US" dirty="0" err="1"/>
+              <a:t>qurish</a:t>
+            </a:r>
+            <a:r>
+              <a:rPr lang="en-US" dirty="0"/>
+              <a:t>(</a:t>
+            </a:r>
+            <a:r>
+              <a:rPr lang="en-US" dirty="0" err="1"/>
+              <a:t>kodlar</a:t>
+            </a:r>
+            <a:r>
+              <a:rPr lang="en-US" dirty="0"/>
+              <a:t> </a:t>
+            </a:r>
+            <a:r>
+              <a:rPr lang="en-US" dirty="0" err="1"/>
+              <a:t>ketma</a:t>
+            </a:r>
+            <a:r>
+              <a:rPr lang="en-US" dirty="0"/>
+              <a:t> </a:t>
+            </a:r>
+            <a:r>
+              <a:rPr lang="en-US" dirty="0" err="1"/>
+              <a:t>ketligi</a:t>
+            </a:r>
+            <a:r>
+              <a:rPr lang="en-US" dirty="0"/>
+              <a:t> </a:t>
+            </a:r>
+            <a:r>
+              <a:rPr lang="en-US" dirty="0" err="1"/>
+              <a:t>emas</a:t>
+            </a:r>
+            <a:r>
+              <a:rPr lang="en-US" dirty="0"/>
+              <a:t>)</a:t>
+            </a:r>
+          </a:p>
+          <a:p>
+            <a:r>
+              <a:rPr lang="en-US" dirty="0"/>
+              <a:t>Turli </a:t>
+            </a:r>
+            <a:r>
+              <a:rPr lang="en-US" dirty="0" err="1"/>
+              <a:t>xil</a:t>
+            </a:r>
+            <a:r>
+              <a:rPr lang="en-US" dirty="0"/>
+              <a:t> </a:t>
+            </a:r>
+            <a:r>
+              <a:rPr lang="en-US" dirty="0" err="1"/>
+              <a:t>yangi</a:t>
+            </a:r>
+            <a:r>
+              <a:rPr lang="en-US" dirty="0"/>
+              <a:t> </a:t>
+            </a:r>
+            <a:r>
+              <a:rPr lang="en-US" dirty="0" err="1"/>
+              <a:t>algorithmlar</a:t>
             </a:r>
             <a:endParaRPr lang="en-US" dirty="0"/>
           </a:p>
-        </p:txBody>
-      </p:sp>
-      <p:sp>
-        <p:nvSpPr>
-          <p:cNvPr id="3" name="Content Placeholder 2">
-            <a:extLst>
-              <a:ext uri="{FF2B5EF4-FFF2-40B4-BE49-F238E27FC236}">
-                <a16:creationId xmlns:a16="http://schemas.microsoft.com/office/drawing/2014/main" id="{4110730E-46D6-0A87-85E3-FED1DF45B69E}"/>
-              </a:ext>
-            </a:extLst>
-          </p:cNvPr>
-          <p:cNvSpPr>
-            <a:spLocks noGrp="1"/>
-          </p:cNvSpPr>
-          <p:nvPr>
-            <p:ph idx="1"/>
+          <a:p>
+            <a:r>
+              <a:rPr lang="en-US" dirty="0" err="1"/>
+              <a:t>Ularni</a:t>
+            </a:r>
+            <a:r>
+              <a:rPr lang="en-US" dirty="0"/>
+              <a:t> </a:t>
+            </a:r>
+            <a:r>
+              <a:rPr lang="en-US" dirty="0" err="1"/>
+              <a:t>baxolash</a:t>
+            </a:r>
+            <a:r>
+              <a:rPr lang="en-US" dirty="0"/>
+              <a:t> </a:t>
+            </a:r>
+            <a:r>
+              <a:rPr lang="en-US" dirty="0" err="1"/>
+              <a:t>usullari</a:t>
+            </a:r>
+            <a:endParaRPr lang="en-US" dirty="0"/>
+          </a:p>
+          <a:p>
+            <a:r>
+              <a:rPr lang="en-US" dirty="0"/>
+              <a:t>Evaluation </a:t>
+            </a:r>
+            <a:r>
+              <a:rPr lang="en-US" dirty="0" err="1"/>
+              <a:t>qanday</a:t>
+            </a:r>
+            <a:r>
+              <a:rPr lang="en-US" dirty="0"/>
+              <a:t> </a:t>
+            </a:r>
+            <a:r>
+              <a:rPr lang="en-US" dirty="0" err="1"/>
+              <a:t>ishlaydi</a:t>
+            </a:r>
+            <a:r>
+              <a:rPr lang="en-US" dirty="0"/>
+              <a:t>?</a:t>
+            </a:r>
+          </a:p>
+          <a:p>
+            <a:r>
+              <a:rPr lang="en-US" dirty="0"/>
+              <a:t>…….</a:t>
+            </a:r>
+          </a:p>
+        </p:txBody>
+      </p:sp>
+      <p:sp>
+        <p:nvSpPr>
+          <p:cNvPr id="5" name="Text Placeholder 4">
+            <a:extLst>
+              <a:ext uri="{FF2B5EF4-FFF2-40B4-BE49-F238E27FC236}">
+                <a16:creationId xmlns:a16="http://schemas.microsoft.com/office/drawing/2014/main" id="{0D791A90-3226-651D-65BF-214AA18C376E}"/>
+              </a:ext>
+            </a:extLst>
+          </p:cNvPr>
+          <p:cNvSpPr>
+            <a:spLocks noGrp="1"/>
+          </p:cNvSpPr>
+          <p:nvPr>
+            <p:ph type="body" sz="quarter" idx="3"/>
           </p:nvPr>
         </p:nvSpPr>
         <p:spPr/>
@@ -5539,334 +6969,62 @@
           <a:lstStyle/>
           <a:p>
             <a:r>
-              <a:rPr lang="en-US" dirty="0" err="1"/>
-              <a:t>Darsga</a:t>
-            </a:r>
-            <a:r>
-              <a:rPr lang="en-US" dirty="0"/>
-              <a:t> </a:t>
-            </a:r>
-            <a:r>
-              <a:rPr lang="en-US" dirty="0" err="1"/>
-              <a:t>o’z</a:t>
-            </a:r>
-            <a:r>
-              <a:rPr lang="en-US" dirty="0"/>
-              <a:t>  </a:t>
-            </a:r>
-            <a:r>
-              <a:rPr lang="en-US" dirty="0" err="1"/>
-              <a:t>vaqtida</a:t>
-            </a:r>
-            <a:r>
-              <a:rPr lang="en-US" dirty="0"/>
-              <a:t> </a:t>
-            </a:r>
-            <a:r>
-              <a:rPr lang="en-US" dirty="0" err="1"/>
-              <a:t>kiring</a:t>
+              <a:rPr lang="en-US" dirty="0"/>
+              <a:t>Python</a:t>
+            </a:r>
+          </a:p>
+        </p:txBody>
+      </p:sp>
+      <p:sp>
+        <p:nvSpPr>
+          <p:cNvPr id="6" name="Content Placeholder 5">
+            <a:extLst>
+              <a:ext uri="{FF2B5EF4-FFF2-40B4-BE49-F238E27FC236}">
+                <a16:creationId xmlns:a16="http://schemas.microsoft.com/office/drawing/2014/main" id="{A20A7E82-2978-714B-A57F-6D77EC62F4C7}"/>
+              </a:ext>
+            </a:extLst>
+          </p:cNvPr>
+          <p:cNvSpPr>
+            <a:spLocks noGrp="1"/>
+          </p:cNvSpPr>
+          <p:nvPr>
+            <p:ph sz="quarter" idx="4"/>
+          </p:nvPr>
+        </p:nvSpPr>
+        <p:spPr/>
+        <p:txBody>
+          <a:bodyPr/>
+          <a:lstStyle/>
+          <a:p>
+            <a:r>
+              <a:rPr lang="en-US" dirty="0" err="1"/>
+              <a:t>Funksiyalar</a:t>
             </a:r>
             <a:endParaRPr lang="en-US" dirty="0"/>
           </a:p>
           <a:p>
             <a:r>
-              <a:rPr lang="en-US" dirty="0" err="1"/>
-              <a:t>Vazifalarni</a:t>
-            </a:r>
-            <a:r>
-              <a:rPr lang="en-US" dirty="0"/>
-              <a:t> </a:t>
-            </a:r>
-            <a:r>
-              <a:rPr lang="en-US" dirty="0" err="1"/>
-              <a:t>o’z</a:t>
-            </a:r>
-            <a:r>
-              <a:rPr lang="en-US" dirty="0"/>
-              <a:t> </a:t>
-            </a:r>
-            <a:r>
-              <a:rPr lang="en-US" dirty="0" err="1"/>
-              <a:t>vaqtida</a:t>
-            </a:r>
-            <a:r>
-              <a:rPr lang="en-US" dirty="0"/>
-              <a:t> </a:t>
-            </a:r>
-            <a:r>
-              <a:rPr lang="en-US" dirty="0" err="1"/>
-              <a:t>topshiring</a:t>
+              <a:rPr lang="en-US" dirty="0"/>
+              <a:t>Built in </a:t>
+            </a:r>
+            <a:r>
+              <a:rPr lang="en-US" dirty="0" err="1"/>
+              <a:t>funksiyalar</a:t>
             </a:r>
             <a:endParaRPr lang="en-US" dirty="0"/>
           </a:p>
           <a:p>
             <a:r>
-              <a:rPr lang="en-US" dirty="0" err="1"/>
-              <a:t>Ikkinchi</a:t>
-            </a:r>
-            <a:r>
-              <a:rPr lang="en-US" dirty="0"/>
-              <a:t> </a:t>
-            </a:r>
-            <a:r>
-              <a:rPr lang="en-US" dirty="0" err="1"/>
-              <a:t>darsga</a:t>
-            </a:r>
-            <a:r>
-              <a:rPr lang="en-US" dirty="0"/>
-              <a:t> </a:t>
-            </a:r>
-            <a:r>
-              <a:rPr lang="en-US" dirty="0" err="1"/>
-              <a:t>kirishdan</a:t>
-            </a:r>
-            <a:r>
-              <a:rPr lang="en-US" dirty="0"/>
-              <a:t> </a:t>
-            </a:r>
-            <a:r>
-              <a:rPr lang="en-US" dirty="0" err="1"/>
-              <a:t>oldin</a:t>
-            </a:r>
-            <a:r>
-              <a:rPr lang="en-US" dirty="0"/>
-              <a:t> </a:t>
-            </a:r>
-            <a:r>
-              <a:rPr lang="en-US" dirty="0" err="1"/>
-              <a:t>to’lov</a:t>
-            </a:r>
-            <a:endParaRPr lang="en-US" dirty="0"/>
-          </a:p>
-          <a:p>
-            <a:r>
-              <a:rPr lang="en-US" dirty="0" err="1"/>
-              <a:t>Darslar</a:t>
-            </a:r>
-            <a:r>
-              <a:rPr lang="en-US" dirty="0"/>
-              <a:t> </a:t>
-            </a:r>
-            <a:r>
-              <a:rPr lang="en-US" dirty="0" err="1"/>
-              <a:t>qanday</a:t>
-            </a:r>
-            <a:r>
-              <a:rPr lang="en-US" dirty="0"/>
-              <a:t> </a:t>
-            </a:r>
-            <a:r>
-              <a:rPr lang="en-US" dirty="0" err="1"/>
-              <a:t>olib</a:t>
-            </a:r>
-            <a:r>
-              <a:rPr lang="en-US" dirty="0"/>
-              <a:t> </a:t>
-            </a:r>
-            <a:r>
-              <a:rPr lang="en-US" dirty="0" err="1"/>
-              <a:t>boriladi</a:t>
-            </a:r>
-            <a:r>
-              <a:rPr lang="en-US" dirty="0"/>
-              <a:t>:</a:t>
-            </a:r>
-          </a:p>
-          <a:p>
-            <a:pPr lvl="1"/>
-            <a:r>
-              <a:rPr lang="en-US" dirty="0"/>
-              <a:t>2 ta 40 </a:t>
-            </a:r>
-            <a:r>
-              <a:rPr lang="en-US" dirty="0" err="1"/>
-              <a:t>minutlik</a:t>
-            </a:r>
-            <a:r>
-              <a:rPr lang="en-US" dirty="0"/>
-              <a:t> </a:t>
-            </a:r>
-            <a:r>
-              <a:rPr lang="en-US" dirty="0" err="1"/>
-              <a:t>dars</a:t>
-            </a:r>
-            <a:endParaRPr lang="en-US" dirty="0"/>
-          </a:p>
-          <a:p>
-            <a:pPr lvl="1"/>
-            <a:r>
-              <a:rPr lang="en-US" dirty="0" err="1"/>
-              <a:t>Darsdan</a:t>
-            </a:r>
-            <a:r>
-              <a:rPr lang="en-US" dirty="0"/>
-              <a:t> </a:t>
-            </a:r>
-            <a:r>
-              <a:rPr lang="en-US" dirty="0" err="1"/>
-              <a:t>keyingi</a:t>
-            </a:r>
-            <a:r>
-              <a:rPr lang="en-US" dirty="0"/>
-              <a:t> </a:t>
-            </a:r>
-            <a:r>
-              <a:rPr lang="en-US" dirty="0" err="1"/>
-              <a:t>vazifalar</a:t>
-            </a:r>
-            <a:r>
-              <a:rPr lang="en-US" dirty="0"/>
-              <a:t> </a:t>
-            </a:r>
-            <a:r>
-              <a:rPr lang="en-US" dirty="0" err="1"/>
-              <a:t>taxlili</a:t>
-            </a:r>
-            <a:r>
-              <a:rPr lang="en-US" dirty="0"/>
-              <a:t> </a:t>
-            </a:r>
-            <a:r>
-              <a:rPr lang="en-US" dirty="0" err="1"/>
-              <a:t>va</a:t>
-            </a:r>
-            <a:r>
-              <a:rPr lang="en-US" dirty="0"/>
-              <a:t> </a:t>
-            </a:r>
-            <a:r>
-              <a:rPr lang="en-US" dirty="0" err="1"/>
-              <a:t>yordam</a:t>
-            </a:r>
-            <a:endParaRPr lang="en-US" dirty="0"/>
-          </a:p>
-          <a:p>
-            <a:pPr lvl="1"/>
-            <a:r>
-              <a:rPr lang="en-US" dirty="0" err="1"/>
-              <a:t>Darsimiz</a:t>
-            </a:r>
-            <a:r>
-              <a:rPr lang="en-US" dirty="0"/>
-              <a:t> </a:t>
-            </a:r>
-            <a:r>
-              <a:rPr lang="en-US" dirty="0" err="1"/>
-              <a:t>yo’q</a:t>
-            </a:r>
-            <a:r>
-              <a:rPr lang="en-US" dirty="0"/>
-              <a:t> </a:t>
-            </a:r>
-            <a:r>
-              <a:rPr lang="en-US" dirty="0" err="1"/>
-              <a:t>kunlari</a:t>
-            </a:r>
-            <a:r>
-              <a:rPr lang="en-US" dirty="0"/>
-              <a:t> team leader </a:t>
-            </a:r>
-            <a:r>
-              <a:rPr lang="en-US" dirty="0" err="1"/>
-              <a:t>boshchiligida</a:t>
-            </a:r>
-            <a:r>
-              <a:rPr lang="en-US" dirty="0"/>
-              <a:t> coding  </a:t>
-            </a:r>
-            <a:r>
-              <a:rPr lang="en-US" dirty="0" err="1"/>
-              <a:t>rivojlantirish</a:t>
-            </a:r>
-            <a:r>
-              <a:rPr lang="en-US" dirty="0"/>
-              <a:t> </a:t>
-            </a:r>
-            <a:r>
-              <a:rPr lang="en-US" dirty="0" err="1"/>
-              <a:t>va</a:t>
-            </a:r>
-            <a:r>
-              <a:rPr lang="en-US" dirty="0"/>
-              <a:t> </a:t>
-            </a:r>
-            <a:r>
-              <a:rPr lang="en-US" dirty="0" err="1"/>
-              <a:t>savol</a:t>
-            </a:r>
-            <a:r>
-              <a:rPr lang="en-US" dirty="0"/>
-              <a:t> </a:t>
-            </a:r>
-            <a:r>
-              <a:rPr lang="en-US" dirty="0" err="1"/>
-              <a:t>javob</a:t>
-            </a:r>
-            <a:endParaRPr lang="en-US" dirty="0"/>
-          </a:p>
-          <a:p>
-            <a:endParaRPr lang="en-US" dirty="0"/>
-          </a:p>
-          <a:p>
-            <a:endParaRPr lang="en-US" dirty="0"/>
-          </a:p>
-        </p:txBody>
-      </p:sp>
-      <mc:AlternateContent xmlns:mc="http://schemas.openxmlformats.org/markup-compatibility/2006" xmlns:p14="http://schemas.microsoft.com/office/powerpoint/2010/main">
-        <mc:Choice Requires="p14">
-          <p:contentPart p14:bwMode="auto" r:id="rId2">
-            <p14:nvContentPartPr>
-              <p14:cNvPr id="4" name="Ink 3">
-                <a:extLst>
-                  <a:ext uri="{FF2B5EF4-FFF2-40B4-BE49-F238E27FC236}">
-                    <a16:creationId xmlns:a16="http://schemas.microsoft.com/office/drawing/2014/main" id="{C4ACBCBF-A1C3-F1CB-0B36-A777D31378A0}"/>
-                  </a:ext>
-                </a:extLst>
-              </p14:cNvPr>
-              <p14:cNvContentPartPr/>
-              <p14:nvPr/>
-            </p14:nvContentPartPr>
-            <p14:xfrm>
-              <a:off x="1799280" y="1842480"/>
-              <a:ext cx="8126640" cy="4316760"/>
-            </p14:xfrm>
-          </p:contentPart>
-        </mc:Choice>
-        <mc:Fallback xmlns="">
-          <p:pic>
-            <p:nvPicPr>
-              <p:cNvPr id="4" name="Ink 3">
-                <a:extLst>
-                  <a:ext uri="{FF2B5EF4-FFF2-40B4-BE49-F238E27FC236}">
-                    <a16:creationId xmlns:a16="http://schemas.microsoft.com/office/drawing/2014/main" id="{C4ACBCBF-A1C3-F1CB-0B36-A777D31378A0}"/>
-                  </a:ext>
-                </a:extLst>
-              </p:cNvPr>
-              <p:cNvPicPr/>
-              <p:nvPr/>
-            </p:nvPicPr>
-            <p:blipFill>
-              <a:blip r:embed="rId3"/>
-              <a:stretch>
-                <a:fillRect/>
-              </a:stretch>
-            </p:blipFill>
-            <p:spPr>
-              <a:xfrm>
-                <a:off x="1789920" y="1833120"/>
-                <a:ext cx="8145360" cy="4335480"/>
-              </a:xfrm>
-              <a:prstGeom prst="rect">
-                <a:avLst/>
-              </a:prstGeom>
-            </p:spPr>
-          </p:pic>
-        </mc:Fallback>
-      </mc:AlternateContent>
+              <a:rPr lang="en-US" dirty="0"/>
+              <a:t>……..</a:t>
+            </a:r>
+          </a:p>
+        </p:txBody>
+      </p:sp>
     </p:spTree>
     <p:extLst>
       <p:ext uri="{BB962C8B-B14F-4D97-AF65-F5344CB8AC3E}">
-        <p14:creationId xmlns:p14="http://schemas.microsoft.com/office/powerpoint/2010/main" val="3972767734"/>
+        <p14:creationId xmlns:p14="http://schemas.microsoft.com/office/powerpoint/2010/main" val="2348279637"/>
       </p:ext>
     </p:extLst>
   </p:cSld>
@@ -5881,13 +7039,7 @@
   <p:cSld>
     <p:spTree>
       <p:nvGrpSpPr>
-        <p:cNvPr id="1" name="">
-          <a:extLst>
-            <a:ext uri="{FF2B5EF4-FFF2-40B4-BE49-F238E27FC236}">
-              <a16:creationId xmlns:a16="http://schemas.microsoft.com/office/drawing/2014/main" id="{0FF439AE-6711-90D7-16E6-54C33C9FC02F}"/>
-            </a:ext>
-          </a:extLst>
-        </p:cNvPr>
+        <p:cNvPr id="1" name=""/>
         <p:cNvGrpSpPr/>
         <p:nvPr/>
       </p:nvGrpSpPr>
@@ -5904,7 +7056,7 @@
           <p:cNvPr id="2" name="Title 1">
             <a:extLst>
               <a:ext uri="{FF2B5EF4-FFF2-40B4-BE49-F238E27FC236}">
-                <a16:creationId xmlns:a16="http://schemas.microsoft.com/office/drawing/2014/main" id="{FD1CF154-B9D2-812B-66CB-9448DC833F5B}"/>
+                <a16:creationId xmlns:a16="http://schemas.microsoft.com/office/drawing/2014/main" id="{E8624A9D-7DC6-128C-B542-F633FED8164B}"/>
               </a:ext>
             </a:extLst>
           </p:cNvPr>
@@ -5928,7 +7080,15 @@
             <a:pPr algn="ctr"/>
             <a:r>
               <a:rPr lang="en-US" b="1" dirty="0"/>
-              <a:t>Model Evaluation</a:t>
+              <a:t>Model Building </a:t>
+            </a:r>
+            <a:r>
+              <a:rPr lang="en-US" b="1" dirty="0" err="1"/>
+              <a:t>nima</a:t>
+            </a:r>
+            <a:r>
+              <a:rPr lang="en-US" b="1" dirty="0"/>
+              <a:t>?</a:t>
             </a:r>
           </a:p>
         </p:txBody>
@@ -5936,7 +7096,7 @@
     </p:spTree>
     <p:extLst>
       <p:ext uri="{BB962C8B-B14F-4D97-AF65-F5344CB8AC3E}">
-        <p14:creationId xmlns:p14="http://schemas.microsoft.com/office/powerpoint/2010/main" val="2761454396"/>
+        <p14:creationId xmlns:p14="http://schemas.microsoft.com/office/powerpoint/2010/main" val="129114571"/>
       </p:ext>
     </p:extLst>
   </p:cSld>
@@ -5968,7 +7128,7 @@
           <p:cNvPr id="2" name="Title 1">
             <a:extLst>
               <a:ext uri="{FF2B5EF4-FFF2-40B4-BE49-F238E27FC236}">
-                <a16:creationId xmlns:a16="http://schemas.microsoft.com/office/drawing/2014/main" id="{3BBFA5F0-4ED6-4432-03AA-06E757A72F0E}"/>
+                <a16:creationId xmlns:a16="http://schemas.microsoft.com/office/drawing/2014/main" id="{C2D3BBDA-49FA-8F85-1DAF-667013230EDC}"/>
               </a:ext>
             </a:extLst>
           </p:cNvPr>
@@ -5986,25 +7146,33 @@
           <a:p>
             <a:r>
               <a:rPr lang="en-US" dirty="0"/>
-              <a:t>Model Evaluation</a:t>
-            </a:r>
-          </a:p>
-        </p:txBody>
-      </p:sp>
-      <p:sp>
-        <p:nvSpPr>
-          <p:cNvPr id="3" name="Text Placeholder 2">
-            <a:extLst>
-              <a:ext uri="{FF2B5EF4-FFF2-40B4-BE49-F238E27FC236}">
-                <a16:creationId xmlns:a16="http://schemas.microsoft.com/office/drawing/2014/main" id="{F5C8FE1D-DC77-2CB8-0413-ACA71140A015}"/>
-              </a:ext>
-            </a:extLst>
-          </p:cNvPr>
-          <p:cNvSpPr>
-            <a:spLocks noGrp="1"/>
-          </p:cNvSpPr>
-          <p:nvPr>
-            <p:ph type="body" idx="1"/>
+              <a:t>Model Building </a:t>
+            </a:r>
+            <a:r>
+              <a:rPr lang="en-US" dirty="0" err="1"/>
+              <a:t>nima</a:t>
+            </a:r>
+            <a:r>
+              <a:rPr lang="en-US" dirty="0"/>
+              <a:t>?</a:t>
+            </a:r>
+          </a:p>
+        </p:txBody>
+      </p:sp>
+      <p:sp>
+        <p:nvSpPr>
+          <p:cNvPr id="3" name="Content Placeholder 2">
+            <a:extLst>
+              <a:ext uri="{FF2B5EF4-FFF2-40B4-BE49-F238E27FC236}">
+                <a16:creationId xmlns:a16="http://schemas.microsoft.com/office/drawing/2014/main" id="{16AF798B-F8C5-A137-D3ED-DC9EA8F78644}"/>
+              </a:ext>
+            </a:extLst>
+          </p:cNvPr>
+          <p:cNvSpPr>
+            <a:spLocks noGrp="1"/>
+          </p:cNvSpPr>
+          <p:nvPr>
+            <p:ph idx="1"/>
           </p:nvPr>
         </p:nvSpPr>
         <p:spPr/>
@@ -6014,175 +7182,26 @@
           <a:p>
             <a:r>
               <a:rPr lang="en-US" dirty="0"/>
-              <a:t>Classification</a:t>
-            </a:r>
-          </a:p>
-        </p:txBody>
-      </p:sp>
-      <p:sp>
-        <p:nvSpPr>
-          <p:cNvPr id="4" name="Content Placeholder 3">
-            <a:extLst>
-              <a:ext uri="{FF2B5EF4-FFF2-40B4-BE49-F238E27FC236}">
-                <a16:creationId xmlns:a16="http://schemas.microsoft.com/office/drawing/2014/main" id="{2B45775B-916D-E2B8-DF16-94B0E9026A9F}"/>
-              </a:ext>
-            </a:extLst>
-          </p:cNvPr>
-          <p:cNvSpPr>
-            <a:spLocks noGrp="1"/>
-          </p:cNvSpPr>
-          <p:nvPr>
-            <p:ph sz="half" idx="2"/>
-          </p:nvPr>
-        </p:nvSpPr>
-        <p:spPr/>
-        <p:txBody>
-          <a:bodyPr/>
-          <a:lstStyle/>
-          <a:p>
-            <a:r>
-              <a:rPr lang="en-US" dirty="0" err="1"/>
-              <a:t>Accuracy_score</a:t>
-            </a:r>
-            <a:r>
-              <a:rPr lang="en-US" dirty="0"/>
-              <a:t>, Classification report</a:t>
-            </a:r>
-          </a:p>
-        </p:txBody>
-      </p:sp>
-      <p:sp>
-        <p:nvSpPr>
-          <p:cNvPr id="5" name="Text Placeholder 4">
-            <a:extLst>
-              <a:ext uri="{FF2B5EF4-FFF2-40B4-BE49-F238E27FC236}">
-                <a16:creationId xmlns:a16="http://schemas.microsoft.com/office/drawing/2014/main" id="{57350CC9-7A57-5D47-46E7-1D98D0A15B3C}"/>
-              </a:ext>
-            </a:extLst>
-          </p:cNvPr>
-          <p:cNvSpPr>
-            <a:spLocks noGrp="1"/>
-          </p:cNvSpPr>
-          <p:nvPr>
-            <p:ph type="body" sz="quarter" idx="3"/>
-          </p:nvPr>
-        </p:nvSpPr>
-        <p:spPr/>
-        <p:txBody>
-          <a:bodyPr/>
-          <a:lstStyle/>
-          <a:p>
-            <a:r>
-              <a:rPr lang="en-US" dirty="0"/>
-              <a:t>Regression</a:t>
-            </a:r>
-          </a:p>
-        </p:txBody>
-      </p:sp>
-      <p:sp>
-        <p:nvSpPr>
-          <p:cNvPr id="6" name="Content Placeholder 5">
-            <a:extLst>
-              <a:ext uri="{FF2B5EF4-FFF2-40B4-BE49-F238E27FC236}">
-                <a16:creationId xmlns:a16="http://schemas.microsoft.com/office/drawing/2014/main" id="{AD071B40-7CD3-2677-FB95-8631C3671C48}"/>
-              </a:ext>
-            </a:extLst>
-          </p:cNvPr>
-          <p:cNvSpPr>
-            <a:spLocks noGrp="1"/>
-          </p:cNvSpPr>
-          <p:nvPr>
-            <p:ph sz="quarter" idx="4"/>
-          </p:nvPr>
-        </p:nvSpPr>
-        <p:spPr/>
-        <p:txBody>
-          <a:bodyPr/>
-          <a:lstStyle/>
-          <a:p>
-            <a:r>
-              <a:rPr lang="en-US" dirty="0"/>
-              <a:t>R2, </a:t>
-            </a:r>
-            <a:r>
-              <a:rPr lang="en-US" dirty="0" err="1"/>
-              <a:t>mse</a:t>
-            </a:r>
-            <a:r>
-              <a:rPr lang="en-US" dirty="0"/>
-              <a:t>, </a:t>
-            </a:r>
-            <a:r>
-              <a:rPr lang="en-US" dirty="0" err="1"/>
-              <a:t>rmse</a:t>
-            </a:r>
-            <a:r>
-              <a:rPr lang="en-US" dirty="0"/>
-              <a:t>, </a:t>
-            </a:r>
-            <a:r>
-              <a:rPr lang="en-US" dirty="0" err="1"/>
-              <a:t>mae</a:t>
+              <a:t>Algorithm(Linear Regression) – </a:t>
+            </a:r>
+            <a:r>
+              <a:rPr lang="en-US" dirty="0" err="1"/>
+              <a:t>Retsept</a:t>
             </a:r>
             <a:endParaRPr lang="en-US" dirty="0"/>
           </a:p>
-        </p:txBody>
-      </p:sp>
-      <mc:AlternateContent xmlns:mc="http://schemas.openxmlformats.org/markup-compatibility/2006" xmlns:p14="http://schemas.microsoft.com/office/powerpoint/2010/main">
-        <mc:Choice Requires="p14">
-          <p:contentPart p14:bwMode="auto" r:id="rId2">
-            <p14:nvContentPartPr>
-              <p14:cNvPr id="7" name="Ink 6">
-                <a:extLst>
-                  <a:ext uri="{FF2B5EF4-FFF2-40B4-BE49-F238E27FC236}">
-                    <a16:creationId xmlns:a16="http://schemas.microsoft.com/office/drawing/2014/main" id="{D804D86D-F4D8-A438-E38F-FF77E41EF8FE}"/>
-                  </a:ext>
-                </a:extLst>
-              </p14:cNvPr>
-              <p14:cNvContentPartPr/>
-              <p14:nvPr/>
-            </p14:nvContentPartPr>
-            <p14:xfrm>
-              <a:off x="646920" y="471240"/>
-              <a:ext cx="11546280" cy="6387840"/>
-            </p14:xfrm>
-          </p:contentPart>
-        </mc:Choice>
-        <mc:Fallback xmlns="">
-          <p:pic>
-            <p:nvPicPr>
-              <p:cNvPr id="7" name="Ink 6">
-                <a:extLst>
-                  <a:ext uri="{FF2B5EF4-FFF2-40B4-BE49-F238E27FC236}">
-                    <a16:creationId xmlns:a16="http://schemas.microsoft.com/office/drawing/2014/main" id="{D804D86D-F4D8-A438-E38F-FF77E41EF8FE}"/>
-                  </a:ext>
-                </a:extLst>
-              </p:cNvPr>
-              <p:cNvPicPr/>
-              <p:nvPr/>
-            </p:nvPicPr>
-            <p:blipFill>
-              <a:blip r:embed="rId3"/>
-              <a:stretch>
-                <a:fillRect/>
-              </a:stretch>
-            </p:blipFill>
-            <p:spPr>
-              <a:xfrm>
-                <a:off x="637560" y="461880"/>
-                <a:ext cx="11565000" cy="6406560"/>
-              </a:xfrm>
-              <a:prstGeom prst="rect">
-                <a:avLst/>
-              </a:prstGeom>
-            </p:spPr>
-          </p:pic>
-        </mc:Fallback>
-      </mc:AlternateContent>
+          <a:p>
+            <a:r>
+              <a:rPr lang="en-US" dirty="0"/>
+              <a:t>Model ------ House Prediction </a:t>
+            </a:r>
+          </a:p>
+        </p:txBody>
+      </p:sp>
     </p:spTree>
     <p:extLst>
       <p:ext uri="{BB962C8B-B14F-4D97-AF65-F5344CB8AC3E}">
-        <p14:creationId xmlns:p14="http://schemas.microsoft.com/office/powerpoint/2010/main" val="3713068402"/>
+        <p14:creationId xmlns:p14="http://schemas.microsoft.com/office/powerpoint/2010/main" val="3741531487"/>
       </p:ext>
     </p:extLst>
   </p:cSld>
